--- a/docs/submission/BatteryVision_발표.pptx
+++ b/docs/submission/BatteryVision_발표.pptx
@@ -116,13 +116,13 @@
   <p:extLst>
     <p:ext uri="{521415D9-36F7-43E2-AB2F-B90AF26B5E84}">
       <p14:sectionLst xmlns:p14="http://schemas.microsoft.com/office/powerpoint/2010/main">
-        <p14:section name="도입" id="{fde2eb51-ee1a-0a59-9971-5fe9a83b519f}">
+        <p14:section name="도입" id="{bb454593-116b-a06a-9ff6-363bac965195}">
           <p14:sldIdLst>
             <p14:sldId id="256"/>
             <p14:sldId id="257"/>
           </p14:sldIdLst>
         </p14:section>
-        <p14:section name="실험" id="{b8de3005-0c15-3584-11a4-6e3697357e65}">
+        <p14:section name="실험" id="{c6f94ea2-1a58-32b7-37ea-201e44d4d77a}">
           <p14:sldIdLst>
             <p14:sldId id="258"/>
             <p14:sldId id="259"/>
@@ -130,17 +130,17 @@
             <p14:sldId id="261"/>
           </p14:sldIdLst>
         </p14:section>
-        <p14:section name="최적화" id="{126eb760-b783-7f4b-d3bf-fdc764f0ed74}">
+        <p14:section name="최적화" id="{102d892e-0fef-e090-1c18-a23803b32489}">
           <p14:sldIdLst>
             <p14:sldId id="262"/>
           </p14:sldIdLst>
         </p14:section>
-        <p14:section name="검증" id="{0919a729-0b52-4760-548c-32a4fbfd86ad}">
+        <p14:section name="검증" id="{41b6718e-cc93-73b0-8754-2ba65256846e}">
           <p14:sldIdLst>
             <p14:sldId id="263"/>
           </p14:sldIdLst>
         </p14:section>
-        <p14:section name="정리" id="{e13845a6-9f4e-b63b-1147-a6d6b0cb9c57}">
+        <p14:section name="정리" id="{1f389ea8-297a-f3fe-897f-76397c938f0c}">
           <p14:sldIdLst>
             <p14:sldId id="264"/>
             <p14:sldId id="265"/>
@@ -386,7 +386,7 @@
           <c:showBubbleSize val="0"/>
           <c:showLeaderLines val="0"/>
         </c:dLbls>
-        <c:gapWidth val="60"/>
+        <c:gapWidth val="50"/>
         <c:overlap val="0"/>
         <c:axId val="2094734554"/>
         <c:axId val="2094734552"/>
@@ -2909,8 +2909,8 @@
         </p:blipFill>
         <p:spPr>
           <a:xfrm>
-            <a:off x="548640" y="1645920"/>
-            <a:ext cx="7680960" cy="3816301"/>
+            <a:off x="548640" y="1600200"/>
+            <a:ext cx="8321040" cy="4134326"/>
           </a:xfrm>
           <a:prstGeom prst="rect">
             <a:avLst/>
@@ -2925,12 +2925,12 @@
         </p:nvSpPr>
         <p:spPr>
           <a:xfrm>
-            <a:off x="8458200" y="1645920"/>
-            <a:ext cx="3182112" cy="3816301"/>
+            <a:off x="9052560" y="1600200"/>
+            <a:ext cx="2587752" cy="4134326"/>
           </a:xfrm>
           <a:prstGeom prst="roundRect">
             <a:avLst>
-              <a:gd name="adj" fmla="val 2299"/>
+              <a:gd name="adj" fmla="val 2827"/>
             </a:avLst>
           </a:prstGeom>
           <a:solidFill>
@@ -2947,8 +2947,8 @@
         </p:nvSpPr>
         <p:spPr>
           <a:xfrm>
-            <a:off x="8686800" y="1874520"/>
-            <a:ext cx="2788920" cy="3383280"/>
+            <a:off x="9281160" y="1828800"/>
+            <a:ext cx="2240280" cy="3657600"/>
           </a:xfrm>
           <a:prstGeom prst="rect">
             <a:avLst/>
@@ -2973,7 +2973,7 @@
                   <a:schemeClr val="tx1"/>
                 </a:solidFill>
               </a:rPr>
-              <a:t>카메라 → 모델 → PASS · REVIEW · REJECT 분류</a:t>
+              <a:t>카메라 → 모델 → 판정</a:t>
             </a:r>
             <a:endParaRPr lang="en-US" sz="1400" dirty="0"/>
           </a:p>
@@ -2991,7 +2991,7 @@
                   <a:schemeClr val="tx1"/>
                 </a:solidFill>
               </a:rPr>
-              <a:t>결함 위치 heatmap과 모델 해시를 기록</a:t>
+              <a:t>heatmap · 해시 기록</a:t>
             </a:r>
             <a:endParaRPr lang="en-US" sz="1400" dirty="0"/>
           </a:p>
@@ -3009,7 +3009,7 @@
                   <a:schemeClr val="tx1"/>
                 </a:solidFill>
               </a:rPr>
-              <a:t>로트별 결함 추적 (Batches)</a:t>
+              <a:t>로트별 추적</a:t>
             </a:r>
             <a:endParaRPr lang="en-US" sz="1400" dirty="0"/>
           </a:p>
@@ -3027,7 +3027,7 @@
                   <a:schemeClr val="tx2"/>
                 </a:solidFill>
               </a:rPr>
-              <a:t>가상 라인이며 실제 장비와 연결되지 않음</a:t>
+              <a:t>실제 장비 미연결</a:t>
             </a:r>
             <a:endParaRPr lang="en-US" sz="1400" dirty="0"/>
           </a:p>
@@ -3255,8 +3255,8 @@
         </p:blipFill>
         <p:spPr>
           <a:xfrm>
-            <a:off x="548640" y="1691640"/>
-            <a:ext cx="2651760" cy="2651760"/>
+            <a:off x="548640" y="1645920"/>
+            <a:ext cx="3108960" cy="3108960"/>
           </a:xfrm>
           <a:prstGeom prst="rect">
             <a:avLst/>
@@ -3271,7 +3271,7 @@
         </p:nvSpPr>
         <p:spPr>
           <a:xfrm>
-            <a:off x="548640" y="4526280"/>
+            <a:off x="548640" y="4956048"/>
             <a:ext cx="146304" cy="146304"/>
           </a:xfrm>
           <a:prstGeom prst="ellipse">
@@ -3291,8 +3291,8 @@
         </p:nvSpPr>
         <p:spPr>
           <a:xfrm>
-            <a:off x="786384" y="4453128"/>
-            <a:ext cx="2377440" cy="292608"/>
+            <a:off x="786384" y="4882896"/>
+            <a:ext cx="2834640" cy="292608"/>
           </a:xfrm>
           <a:prstGeom prst="rect">
             <a:avLst/>
@@ -3346,8 +3346,8 @@
         </p:blipFill>
         <p:spPr>
           <a:xfrm>
-            <a:off x="3383280" y="1691640"/>
-            <a:ext cx="2651760" cy="2651760"/>
+            <a:off x="3794760" y="1645920"/>
+            <a:ext cx="3108960" cy="3108960"/>
           </a:xfrm>
           <a:prstGeom prst="rect">
             <a:avLst/>
@@ -3362,7 +3362,7 @@
         </p:nvSpPr>
         <p:spPr>
           <a:xfrm>
-            <a:off x="3383280" y="4526280"/>
+            <a:off x="3794760" y="4956048"/>
             <a:ext cx="146304" cy="146304"/>
           </a:xfrm>
           <a:prstGeom prst="ellipse">
@@ -3382,8 +3382,8 @@
         </p:nvSpPr>
         <p:spPr>
           <a:xfrm>
-            <a:off x="3621024" y="4453128"/>
-            <a:ext cx="2377440" cy="292608"/>
+            <a:off x="4032504" y="4882896"/>
+            <a:ext cx="2834640" cy="292608"/>
           </a:xfrm>
           <a:prstGeom prst="rect">
             <a:avLst/>
@@ -3429,8 +3429,8 @@
         </p:nvSpPr>
         <p:spPr>
           <a:xfrm>
-            <a:off x="548640" y="4983480"/>
-            <a:ext cx="5486400" cy="292608"/>
+            <a:off x="548640" y="5486400"/>
+            <a:ext cx="6309360" cy="365760"/>
           </a:xfrm>
           <a:prstGeom prst="rect">
             <a:avLst/>
@@ -3446,98 +3446,37 @@
               <a:buNone/>
             </a:pPr>
             <a:r>
-              <a:rPr lang="en-US" sz="1300" dirty="0">
+              <a:rPr lang="en-US" sz="1600" dirty="0">
                 <a:solidFill>
                   <a:schemeClr val="tx2"/>
                 </a:solidFill>
               </a:rPr>
-              <a:t>박스 크기 (중앙값): crack 0.39% · scratch 0.44%</a:t>
-            </a:r>
-            <a:endParaRPr lang="en-US" sz="1300" dirty="0"/>
-          </a:p>
-        </p:txBody>
-      </p:sp>
-      <p:sp>
-        <p:nvSpPr>
-          <p:cNvPr id="13" name="takeaway-card"/>
-          <p:cNvSpPr/>
-          <p:nvPr/>
-        </p:nvSpPr>
-        <p:spPr>
-          <a:xfrm>
-            <a:off x="548640" y="5440680"/>
-            <a:ext cx="5486400" cy="777240"/>
-          </a:xfrm>
-          <a:prstGeom prst="roundRect">
-            <a:avLst>
-              <a:gd name="adj" fmla="val 9412"/>
-            </a:avLst>
-          </a:prstGeom>
-          <a:solidFill>
-            <a:schemeClr val="bg2"/>
-          </a:solidFill>
-          <a:ln/>
-        </p:spPr>
-      </p:sp>
-      <p:sp>
-        <p:nvSpPr>
-          <p:cNvPr id="14" name="takeaway"/>
-          <p:cNvSpPr txBox="1"/>
-          <p:nvPr/>
-        </p:nvSpPr>
-        <p:spPr>
-          <a:xfrm>
-            <a:off x="822960" y="5504688"/>
-            <a:ext cx="5029200" cy="658368"/>
-          </a:xfrm>
-          <a:prstGeom prst="rect">
-            <a:avLst/>
-          </a:prstGeom>
-          <a:noFill/>
-          <a:ln/>
-        </p:spPr>
-        <p:txBody>
-          <a:bodyPr wrap="square" lIns="0" tIns="0" rIns="0" bIns="0" rtlCol="0" anchor="ctr"/>
-          <a:lstStyle/>
-          <a:p>
+              <a:t>박스 크기 중앙값  </a:t>
+            </a:r>
             <a:pPr indent="0" marL="0">
               <a:buNone/>
             </a:pPr>
             <a:r>
-              <a:rPr lang="en-US" sz="1400" b="1" dirty="0">
-                <a:solidFill>
-                  <a:schemeClr val="accent3"/>
+              <a:rPr lang="en-US" sz="1600" b="1" dirty="0">
+                <a:solidFill>
+                  <a:schemeClr val="tx1"/>
                 </a:solidFill>
               </a:rPr>
-              <a:t>crack AP 1.00 · scratch AP 0.66–0.86</a:t>
-            </a:r>
-            <a:endParaRPr lang="en-US" sz="1400" dirty="0"/>
-          </a:p>
-          <a:p>
-            <a:pPr indent="0" marL="0">
-              <a:buNone/>
-            </a:pPr>
-            <a:r>
-              <a:rPr lang="en-US" sz="1400" dirty="0">
-                <a:solidFill>
-                  <a:schemeClr val="tx2"/>
-                </a:solidFill>
-              </a:rPr>
-              <a:t>이후 오류는 대부분 scratch</a:t>
-            </a:r>
-            <a:endParaRPr lang="en-US" sz="1400" dirty="0"/>
+              <a:t>crack 0.39% · scratch 0.44%</a:t>
+            </a:r>
+            <a:endParaRPr lang="en-US" sz="1600" dirty="0"/>
           </a:p>
         </p:txBody>
       </p:sp>
       <p:graphicFrame>
         <p:nvGraphicFramePr>
-          <p:cNvPr id="15" name="ap-chart" descr=""/>
+          <p:cNvPr id="13" name="ap-chart" descr=""/>
           <p:cNvGraphicFramePr/>
           <p:nvPr/>
         </p:nvGraphicFramePr>
         <p:xfrm>
-          <a:off x="6355080" y="1691640"/>
-          <a:ext cx="5285232" cy="4526280"/>
+          <a:off x="7223760" y="1645920"/>
+          <a:ext cx="4416552" cy="4572000"/>
         </p:xfrm>
         <a:graphic xmlns:a="http://schemas.openxmlformats.org/drawingml/2006/main">
           <a:graphicData uri="http://schemas.openxmlformats.org/drawingml/2006/chart">
@@ -3655,45 +3594,7 @@
       </p:sp>
       <p:sp>
         <p:nvSpPr>
-          <p:cNvPr id="3" name="Text 0"/>
-          <p:cNvSpPr/>
-          <p:nvPr>
-            <p:ph idx="101" type="body" hasCustomPrompt="1"/>
-          </p:nvPr>
-        </p:nvSpPr>
-        <p:spPr>
-          <a:xfrm>
-            <a:off x="548640" y="1005840"/>
-            <a:ext cx="11094415" cy="411480"/>
-          </a:xfrm>
-          <a:prstGeom prst="rect">
-            <a:avLst/>
-          </a:prstGeom>
-          <a:noFill/>
-          <a:ln/>
-        </p:spPr>
-        <p:txBody>
-          <a:bodyPr wrap="square" lIns="0" tIns="0" rIns="0" bIns="0" rtlCol="0" anchor="ctr"/>
-          <a:lstStyle/>
-          <a:p>
-            <a:pPr algn="l" indent="0" marL="0">
-              <a:buNone/>
-            </a:pPr>
-            <a:r>
-              <a:rPr lang="en-US" sz="1500" dirty="0">
-                <a:solidFill>
-                  <a:schemeClr val="tx2"/>
-                </a:solidFill>
-              </a:rPr>
-              <a:t>데이터셋과 모델 구성</a:t>
-            </a:r>
-            <a:endParaRPr lang="en-US" sz="1500" dirty="0"/>
-          </a:p>
-        </p:txBody>
-      </p:sp>
-      <p:sp>
-        <p:nvSpPr>
-          <p:cNvPr id="4" name="dataset-card"/>
+          <p:cNvPr id="3" name="dataset-card"/>
           <p:cNvSpPr/>
           <p:nvPr/>
         </p:nvSpPr>
@@ -3715,7 +3616,7 @@
       </p:sp>
       <p:sp>
         <p:nvSpPr>
-          <p:cNvPr id="5" name="ds-h"/>
+          <p:cNvPr id="4" name="ds-h"/>
           <p:cNvSpPr txBox="1"/>
           <p:nvPr/>
         </p:nvSpPr>
@@ -3751,7 +3652,7 @@
       </p:sp>
       <p:sp>
         <p:nvSpPr>
-          <p:cNvPr id="6" name="ds-b"/>
+          <p:cNvPr id="5" name="ds-b"/>
           <p:cNvSpPr txBox="1"/>
           <p:nvPr/>
         </p:nvSpPr>
@@ -3819,7 +3720,7 @@
                   <a:schemeClr val="tx1"/>
                 </a:solidFill>
               </a:rPr>
-              <a:t>목적: 모델별 성능 차이와 INT8 경량화 효과 확인</a:t>
+              <a:t>목적: 모델별 성능 비교 · INT8 효과</a:t>
             </a:r>
             <a:endParaRPr lang="en-US" sz="1400" dirty="0"/>
           </a:p>
@@ -3827,7 +3728,7 @@
       </p:sp>
       <p:sp>
         <p:nvSpPr>
-          <p:cNvPr id="7" name="limit-h"/>
+          <p:cNvPr id="6" name="limit-h"/>
           <p:cNvSpPr txBox="1"/>
           <p:nvPr/>
         </p:nvSpPr>
@@ -3863,7 +3764,7 @@
       </p:sp>
       <p:pic>
         <p:nvPicPr>
-          <p:cNvPr id="8" name="bg-0" descr="C:\Users\user\_se4nchoi\batteryvision\docs\submission\build\img\bg_green.jpg">    </p:cNvPr>
+          <p:cNvPr id="7" name="bg-0" descr="C:\Users\user\_se4nchoi\batteryvision\docs\submission\build\img\bg_green.jpg">    </p:cNvPr>
           <p:cNvPicPr>
             <a:picLocks noChangeAspect="1"/>
           </p:cNvPicPr>
@@ -3887,7 +3788,7 @@
       </p:pic>
       <p:sp>
         <p:nvSpPr>
-          <p:cNvPr id="9" name="bg-l-0"/>
+          <p:cNvPr id="8" name="bg-l-0"/>
           <p:cNvSpPr txBox="1"/>
           <p:nvPr/>
         </p:nvSpPr>
@@ -3923,7 +3824,7 @@
       </p:sp>
       <p:pic>
         <p:nvPicPr>
-          <p:cNvPr id="10" name="bg-1" descr="C:\Users\user\_se4nchoi\batteryvision\docs\submission\build\img\bg_grey.jpg">    </p:cNvPr>
+          <p:cNvPr id="9" name="bg-1" descr="C:\Users\user\_se4nchoi\batteryvision\docs\submission\build\img\bg_grey.jpg">    </p:cNvPr>
           <p:cNvPicPr>
             <a:picLocks noChangeAspect="1"/>
           </p:cNvPicPr>
@@ -3947,7 +3848,7 @@
       </p:pic>
       <p:sp>
         <p:nvSpPr>
-          <p:cNvPr id="11" name="bg-l-1"/>
+          <p:cNvPr id="10" name="bg-l-1"/>
           <p:cNvSpPr txBox="1"/>
           <p:nvPr/>
         </p:nvSpPr>
@@ -3983,7 +3884,7 @@
       </p:sp>
       <p:pic>
         <p:nvPicPr>
-          <p:cNvPr id="12" name="bg-2" descr="C:\Users\user\_se4nchoi\batteryvision\docs\submission\build\img\bg_wood.jpg">    </p:cNvPr>
+          <p:cNvPr id="11" name="bg-2" descr="C:\Users\user\_se4nchoi\batteryvision\docs\submission\build\img\bg_wood.jpg">    </p:cNvPr>
           <p:cNvPicPr>
             <a:picLocks noChangeAspect="1"/>
           </p:cNvPicPr>
@@ -4007,7 +3908,7 @@
       </p:pic>
       <p:sp>
         <p:nvSpPr>
-          <p:cNvPr id="13" name="bg-l-2"/>
+          <p:cNvPr id="12" name="bg-l-2"/>
           <p:cNvSpPr txBox="1"/>
           <p:nvPr/>
         </p:nvSpPr>
@@ -4043,7 +3944,7 @@
       </p:sp>
       <p:sp>
         <p:nvSpPr>
-          <p:cNvPr id="14" name="limit-t"/>
+          <p:cNvPr id="13" name="limit-t"/>
           <p:cNvSpPr txBox="1"/>
           <p:nvPr/>
         </p:nvSpPr>
@@ -4079,7 +3980,7 @@
       </p:sp>
       <p:sp>
         <p:nvSpPr>
-          <p:cNvPr id="15" name="grid-h"/>
+          <p:cNvPr id="14" name="grid-h"/>
           <p:cNvSpPr txBox="1"/>
           <p:nvPr/>
         </p:nvSpPr>
@@ -5232,7 +5133,7 @@
       </p:graphicFrame>
       <p:sp>
         <p:nvSpPr>
-          <p:cNvPr id="17" name="legend-card"/>
+          <p:cNvPr id="16" name="legend-card"/>
           <p:cNvSpPr/>
           <p:nvPr/>
         </p:nvSpPr>
@@ -5254,7 +5155,7 @@
       </p:sp>
       <p:sp>
         <p:nvSpPr>
-          <p:cNvPr id="18" name="legend"/>
+          <p:cNvPr id="17" name="legend"/>
           <p:cNvSpPr txBox="1"/>
           <p:nvPr/>
         </p:nvSpPr>
@@ -5285,7 +5186,7 @@
                   <a:schemeClr val="tx1"/>
                 </a:solidFill>
               </a:rPr>
-              <a:t>FP16  </a:t>
+              <a:t>XAI  </a:t>
             </a:r>
             <a:pPr indent="0" marL="0">
               <a:spcAft>
@@ -5299,7 +5200,7 @@
                   <a:schemeClr val="tx2"/>
                 </a:solidFill>
               </a:rPr>
-              <a:t>기본 모델</a:t>
+              <a:t>결함 위치 heatmap 출력</a:t>
             </a:r>
             <a:endParaRPr lang="en-US" sz="1400" dirty="0"/>
           </a:p>
@@ -5316,7 +5217,7 @@
                   <a:schemeClr val="tx1"/>
                 </a:solidFill>
               </a:rPr>
-              <a:t>XAI  </a:t>
+              <a:t>INT8  </a:t>
             </a:r>
             <a:pPr indent="0" marL="0">
               <a:spcAft>
@@ -5330,46 +5231,15 @@
                   <a:schemeClr val="tx2"/>
                 </a:solidFill>
               </a:rPr>
-              <a:t>결함 위치 heatmap 출력 (설명 가능)</a:t>
+              <a:t>양자화 경량화</a:t>
             </a:r>
             <a:endParaRPr lang="en-US" sz="1400" dirty="0"/>
           </a:p>
-          <a:p>
-            <a:pPr indent="0" marL="0">
-              <a:spcAft>
-                <a:spcPts val="600"/>
-              </a:spcAft>
-              <a:buNone/>
-            </a:pPr>
-            <a:r>
-              <a:rPr lang="en-US" sz="1400" b="1" dirty="0">
-                <a:solidFill>
-                  <a:schemeClr val="tx1"/>
-                </a:solidFill>
-              </a:rPr>
-              <a:t>INT8  </a:t>
-            </a:r>
-            <a:pPr indent="0" marL="0">
-              <a:spcAft>
-                <a:spcPts val="600"/>
-              </a:spcAft>
-              <a:buNone/>
-            </a:pPr>
-            <a:r>
-              <a:rPr lang="en-US" sz="1400" dirty="0">
-                <a:solidFill>
-                  <a:schemeClr val="tx2"/>
-                </a:solidFill>
-              </a:rPr>
-              <a:t>양자화로 경량화</a:t>
-            </a:r>
-            <a:endParaRPr lang="en-US" sz="1400" dirty="0"/>
-          </a:p>
         </p:txBody>
       </p:sp>
       <p:sp>
         <p:nvSpPr>
-          <p:cNvPr id="19" name="credit"/>
+          <p:cNvPr id="18" name="credit"/>
           <p:cNvSpPr txBox="1"/>
           <p:nvPr/>
         </p:nvSpPr>
@@ -5400,6 +5270,36 @@
               <a:t>데이터: Battery Defect Inspection v8 (Roboflow Universe), CC BY 4.0</a:t>
             </a:r>
             <a:endParaRPr lang="en-US" sz="900" dirty="0"/>
+          </a:p>
+        </p:txBody>
+      </p:sp>
+      <p:sp>
+        <p:nvSpPr>
+          <p:cNvPr id="20" name="Text 0"/>
+          <p:cNvSpPr/>
+          <p:nvPr>
+            <p:ph idx="101" type="body" hasCustomPrompt="1"/>
+          </p:nvPr>
+        </p:nvSpPr>
+        <p:spPr>
+          <a:xfrm>
+            <a:off x="548640" y="1005840"/>
+            <a:ext cx="11094415" cy="411480"/>
+          </a:xfrm>
+          <a:prstGeom prst="rect">
+            <a:avLst/>
+          </a:prstGeom>
+          <a:noFill/>
+          <a:ln/>
+        </p:spPr>
+        <p:txBody>
+          <a:bodyPr wrap="square" lIns="0" tIns="0" rIns="0" bIns="0" rtlCol="0" anchor="ctr"/>
+          <a:lstStyle/>
+          <a:p>
+            <a:pPr algn="l" indent="0" marL="0">
+              <a:buNone/>
+            </a:pPr>
+            <a:endParaRPr lang="en-US" sz="1500" dirty="0"/>
           </a:p>
         </p:txBody>
       </p:sp>
@@ -5558,11 +5458,11 @@
         <p:spPr>
           <a:xfrm>
             <a:off x="548640" y="1645920"/>
-            <a:ext cx="5486400" cy="2468880"/>
+            <a:ext cx="4434840" cy="2651760"/>
           </a:xfrm>
           <a:prstGeom prst="roundRect">
             <a:avLst>
-              <a:gd name="adj" fmla="val 2963"/>
+              <a:gd name="adj" fmla="val 2759"/>
             </a:avLst>
           </a:prstGeom>
           <a:solidFill>
@@ -5580,7 +5480,7 @@
         <p:spPr>
           <a:xfrm>
             <a:off x="822960" y="1783080"/>
-            <a:ext cx="5029200" cy="320040"/>
+            <a:ext cx="3931920" cy="320040"/>
           </a:xfrm>
           <a:prstGeom prst="rect">
             <a:avLst/>
@@ -5616,7 +5516,7 @@
         <p:spPr>
           <a:xfrm>
             <a:off x="822960" y="2240280"/>
-            <a:ext cx="5029200" cy="731520"/>
+            <a:ext cx="3931920" cy="731520"/>
           </a:xfrm>
           <a:prstGeom prst="rect">
             <a:avLst/>
@@ -5652,7 +5552,7 @@
         <p:spPr>
           <a:xfrm>
             <a:off x="822960" y="3108960"/>
-            <a:ext cx="5029200" cy="868680"/>
+            <a:ext cx="3931920" cy="1005840"/>
           </a:xfrm>
           <a:prstGeom prst="rect">
             <a:avLst/>
@@ -5676,7 +5576,7 @@
                   <a:schemeClr val="tx1"/>
                 </a:solidFill>
               </a:rPr>
-              <a:t>= 학습 3,214 + 검증 306 + 테스트 153 (Roboflow v8 전체)</a:t>
+              <a:t>= 학습 3,214 + 검증 306 + 테스트 153</a:t>
             </a:r>
             <a:endParaRPr lang="en-US" sz="1400" dirty="0"/>
           </a:p>
@@ -5693,7 +5593,7 @@
                   <a:schemeClr val="tx2"/>
                 </a:solidFill>
               </a:rPr>
-              <a:t>Geti가 라벨 있는 약 2,800장을 70/20/10으로 다시 나눠 학습</a:t>
+              <a:t>Geti가 약 2,800장을 70/20/10으로 재분할</a:t>
             </a:r>
             <a:endParaRPr lang="en-US" sz="1400" dirty="0"/>
           </a:p>
@@ -5715,8 +5615,8 @@
         </p:blipFill>
         <p:spPr>
           <a:xfrm>
-            <a:off x="6263640" y="1645920"/>
-            <a:ext cx="1828800" cy="1828800"/>
+            <a:off x="5166360" y="1645920"/>
+            <a:ext cx="2377440" cy="2377440"/>
           </a:xfrm>
           <a:prstGeom prst="rect">
             <a:avLst/>
@@ -5731,8 +5631,8 @@
         </p:nvSpPr>
         <p:spPr>
           <a:xfrm>
-            <a:off x="6263640" y="3520440"/>
-            <a:ext cx="1828800" cy="274320"/>
+            <a:off x="5166360" y="4069080"/>
+            <a:ext cx="2377440" cy="274320"/>
           </a:xfrm>
           <a:prstGeom prst="rect">
             <a:avLst/>
@@ -5775,8 +5675,8 @@
         </p:blipFill>
         <p:spPr>
           <a:xfrm>
-            <a:off x="8229600" y="1645920"/>
-            <a:ext cx="1828800" cy="1828800"/>
+            <a:off x="7680960" y="1645920"/>
+            <a:ext cx="2377440" cy="2377440"/>
           </a:xfrm>
           <a:prstGeom prst="rect">
             <a:avLst/>
@@ -5791,8 +5691,8 @@
         </p:nvSpPr>
         <p:spPr>
           <a:xfrm>
-            <a:off x="8229600" y="3520440"/>
-            <a:ext cx="1828800" cy="274320"/>
+            <a:off x="7680960" y="4069080"/>
+            <a:ext cx="2377440" cy="274320"/>
           </a:xfrm>
           <a:prstGeom prst="rect">
             <a:avLst/>
@@ -5827,12 +5727,12 @@
         </p:nvSpPr>
         <p:spPr>
           <a:xfrm>
-            <a:off x="10195560" y="1645920"/>
-            <a:ext cx="1444752" cy="2148840"/>
+            <a:off x="10241280" y="1645920"/>
+            <a:ext cx="1399032" cy="2377440"/>
           </a:xfrm>
           <a:prstGeom prst="roundRect">
             <a:avLst>
-              <a:gd name="adj" fmla="val 5063"/>
+              <a:gd name="adj" fmla="val 5229"/>
             </a:avLst>
           </a:prstGeom>
           <a:solidFill>
@@ -5849,8 +5749,8 @@
         </p:nvSpPr>
         <p:spPr>
           <a:xfrm>
-            <a:off x="10287000" y="1874520"/>
-            <a:ext cx="1280160" cy="548640"/>
+            <a:off x="10287000" y="2103120"/>
+            <a:ext cx="1307592" cy="548640"/>
           </a:xfrm>
           <a:prstGeom prst="rect">
             <a:avLst/>
@@ -5885,8 +5785,8 @@
         </p:nvSpPr>
         <p:spPr>
           <a:xfrm>
-            <a:off x="10287000" y="2514600"/>
-            <a:ext cx="1280160" cy="1097280"/>
+            <a:off x="10287000" y="2743200"/>
+            <a:ext cx="1307592" cy="914400"/>
           </a:xfrm>
           <a:prstGeom prst="rect">
             <a:avLst/>
@@ -5907,7 +5807,7 @@
                   <a:schemeClr val="tx2"/>
                 </a:solidFill>
               </a:rPr>
-              <a:t>학습 사진과 거의 같은 테스트 사진</a:t>
+              <a:t>학습 사진의 복사본</a:t>
             </a:r>
             <a:endParaRPr lang="en-US" sz="1200" dirty="0"/>
           </a:p>
@@ -5921,8 +5821,8 @@
         </p:nvSpPr>
         <p:spPr>
           <a:xfrm>
-            <a:off x="6263640" y="3840480"/>
-            <a:ext cx="5394960" cy="274320"/>
+            <a:off x="7680960" y="4069080"/>
+            <a:ext cx="2377440" cy="274320"/>
           </a:xfrm>
           <a:prstGeom prst="rect">
             <a:avLst/>
@@ -5934,7 +5834,7 @@
           <a:bodyPr wrap="square" lIns="0" tIns="0" rIns="0" bIns="0" rtlCol="0" anchor="t"/>
           <a:lstStyle/>
           <a:p>
-            <a:pPr indent="0" marL="0">
+            <a:pPr algn="r" indent="0" marL="0">
               <a:buNone/>
             </a:pPr>
             <a:r>
@@ -5943,7 +5843,7 @@
                   <a:schemeClr val="tx2"/>
                 </a:solidFill>
               </a:rPr>
-              <a:t>dHash 거리 4 / 256비트: 사실상 같은 사진</a:t>
+              <a:t>dHash 거리 4 / 256</a:t>
             </a:r>
             <a:endParaRPr lang="en-US" sz="1200" dirty="0"/>
           </a:p>
@@ -6001,7 +5901,7 @@
                   <a:schemeClr val="tx1"/>
                 </a:solidFill>
               </a:rPr>
-              <a:t>그래서 1차 테스트 점수는</a:t>
+              <a:t>1차 테스트 점수는</a:t>
             </a:r>
             <a:endParaRPr lang="en-US" sz="1600" dirty="0"/>
           </a:p>
@@ -6041,7 +5941,7 @@
                   <a:schemeClr val="tx2"/>
                 </a:solidFill>
               </a:rPr>
-              <a:t>학습에 쓴 사진이 포함됐을 수 있음 (Geti 화면에서 분할 목록 확인 불가)</a:t>
+              <a:t>학습에 쓴 사진 포함 가능</a:t>
             </a:r>
             <a:endParaRPr lang="en-US" sz="1400" dirty="0"/>
           </a:p>
@@ -6059,7 +5959,7 @@
                   <a:schemeClr val="tx2"/>
                 </a:solidFill>
               </a:rPr>
-              <a:t>모델끼리 비교는 가능, 처음 보는 사진에서의 성능은 2차 세트로 확인</a:t>
+              <a:t>모델 간 비교용 · 실제 성능은 2차 세트로</a:t>
             </a:r>
             <a:endParaRPr lang="en-US" sz="1400" dirty="0"/>
           </a:p>
@@ -6256,11 +6156,11 @@
         <p:spPr>
           <a:xfrm>
             <a:off x="548640" y="1645920"/>
-            <a:ext cx="3566160" cy="2331720"/>
+            <a:ext cx="3566160" cy="2834640"/>
           </a:xfrm>
           <a:prstGeom prst="roundRect">
             <a:avLst>
-              <a:gd name="adj" fmla="val 3137"/>
+              <a:gd name="adj" fmla="val 2581"/>
             </a:avLst>
           </a:prstGeom>
           <a:solidFill>
@@ -6460,8 +6360,8 @@
         </p:nvSpPr>
         <p:spPr>
           <a:xfrm>
-            <a:off x="822960" y="2606040"/>
-            <a:ext cx="3108960" cy="731520"/>
+            <a:off x="822960" y="2697480"/>
+            <a:ext cx="3108960" cy="1005840"/>
           </a:xfrm>
           <a:prstGeom prst="rect">
             <a:avLst/>
@@ -6477,14 +6377,14 @@
               <a:buNone/>
             </a:pPr>
             <a:r>
-              <a:rPr lang="en-US" sz="4000" b="1" dirty="0">
+              <a:rPr lang="en-US" sz="5400" b="1" dirty="0">
                 <a:solidFill>
                   <a:schemeClr val="accent4"/>
                 </a:solidFill>
               </a:rPr>
               <a:t>92.9%</a:t>
             </a:r>
-            <a:endParaRPr lang="en-US" sz="4000" dirty="0"/>
+            <a:endParaRPr lang="en-US" sz="5400" dirty="0"/>
           </a:p>
         </p:txBody>
       </p:sp>
@@ -6496,7 +6396,7 @@
         </p:nvSpPr>
         <p:spPr>
           <a:xfrm>
-            <a:off x="822960" y="3429000"/>
+            <a:off x="822960" y="3886200"/>
             <a:ext cx="3108960" cy="274320"/>
           </a:xfrm>
           <a:prstGeom prst="rect">
@@ -6513,14 +6413,14 @@
               <a:buNone/>
             </a:pPr>
             <a:r>
-              <a:rPr lang="en-US" sz="1300" dirty="0">
+              <a:rPr lang="en-US" sz="1400" dirty="0">
                 <a:solidFill>
                   <a:schemeClr val="tx2"/>
                 </a:solidFill>
               </a:rPr>
               <a:t>mAP@50 · scratch AP 0.86</a:t>
             </a:r>
-            <a:endParaRPr lang="en-US" sz="1300" dirty="0"/>
+            <a:endParaRPr lang="en-US" sz="1400" dirty="0"/>
           </a:p>
         </p:txBody>
       </p:sp>
@@ -6533,11 +6433,11 @@
         <p:spPr>
           <a:xfrm>
             <a:off x="4297680" y="1645920"/>
-            <a:ext cx="3566160" cy="2331720"/>
+            <a:ext cx="3566160" cy="2834640"/>
           </a:xfrm>
           <a:prstGeom prst="roundRect">
             <a:avLst>
-              <a:gd name="adj" fmla="val 3137"/>
+              <a:gd name="adj" fmla="val 2581"/>
             </a:avLst>
           </a:prstGeom>
           <a:solidFill>
@@ -6679,8 +6579,8 @@
         </p:nvSpPr>
         <p:spPr>
           <a:xfrm>
-            <a:off x="4572000" y="2606040"/>
-            <a:ext cx="3108960" cy="731520"/>
+            <a:off x="4572000" y="2697480"/>
+            <a:ext cx="3108960" cy="1005840"/>
           </a:xfrm>
           <a:prstGeom prst="rect">
             <a:avLst/>
@@ -6696,14 +6596,14 @@
               <a:buNone/>
             </a:pPr>
             <a:r>
-              <a:rPr lang="en-US" sz="4000" b="1" dirty="0">
+              <a:rPr lang="en-US" sz="5400" b="1" dirty="0">
                 <a:solidFill>
                   <a:schemeClr val="accent5"/>
                 </a:solidFill>
               </a:rPr>
               <a:t>89.2%</a:t>
             </a:r>
-            <a:endParaRPr lang="en-US" sz="4000" dirty="0"/>
+            <a:endParaRPr lang="en-US" sz="5400" dirty="0"/>
           </a:p>
         </p:txBody>
       </p:sp>
@@ -6715,7 +6615,7 @@
         </p:nvSpPr>
         <p:spPr>
           <a:xfrm>
-            <a:off x="4572000" y="3429000"/>
+            <a:off x="4572000" y="3886200"/>
             <a:ext cx="3108960" cy="274320"/>
           </a:xfrm>
           <a:prstGeom prst="rect">
@@ -6732,14 +6632,14 @@
               <a:buNone/>
             </a:pPr>
             <a:r>
-              <a:rPr lang="en-US" sz="1300" dirty="0">
+              <a:rPr lang="en-US" sz="1400" dirty="0">
                 <a:solidFill>
                   <a:schemeClr val="tx2"/>
                 </a:solidFill>
               </a:rPr>
               <a:t>mAP@50 · scratch AP 0.78</a:t>
             </a:r>
-            <a:endParaRPr lang="en-US" sz="1300" dirty="0"/>
+            <a:endParaRPr lang="en-US" sz="1400" dirty="0"/>
           </a:p>
         </p:txBody>
       </p:sp>
@@ -6752,11 +6652,11 @@
         <p:spPr>
           <a:xfrm>
             <a:off x="8046720" y="1645920"/>
-            <a:ext cx="3566160" cy="2331720"/>
+            <a:ext cx="3566160" cy="2834640"/>
           </a:xfrm>
           <a:prstGeom prst="roundRect">
             <a:avLst>
-              <a:gd name="adj" fmla="val 3137"/>
+              <a:gd name="adj" fmla="val 2581"/>
             </a:avLst>
           </a:prstGeom>
           <a:solidFill>
@@ -6898,8 +6798,8 @@
         </p:nvSpPr>
         <p:spPr>
           <a:xfrm>
-            <a:off x="8321040" y="2606040"/>
-            <a:ext cx="3108960" cy="731520"/>
+            <a:off x="8321040" y="2697480"/>
+            <a:ext cx="3108960" cy="1005840"/>
           </a:xfrm>
           <a:prstGeom prst="rect">
             <a:avLst/>
@@ -6915,14 +6815,14 @@
               <a:buNone/>
             </a:pPr>
             <a:r>
-              <a:rPr lang="en-US" sz="4000" b="1" dirty="0">
+              <a:rPr lang="en-US" sz="5400" b="1" dirty="0">
                 <a:solidFill>
                   <a:schemeClr val="accent6"/>
                 </a:solidFill>
               </a:rPr>
               <a:t>83.2%</a:t>
             </a:r>
-            <a:endParaRPr lang="en-US" sz="4000" dirty="0"/>
+            <a:endParaRPr lang="en-US" sz="5400" dirty="0"/>
           </a:p>
         </p:txBody>
       </p:sp>
@@ -6934,7 +6834,7 @@
         </p:nvSpPr>
         <p:spPr>
           <a:xfrm>
-            <a:off x="8321040" y="3429000"/>
+            <a:off x="8321040" y="3886200"/>
             <a:ext cx="3108960" cy="274320"/>
           </a:xfrm>
           <a:prstGeom prst="rect">
@@ -6951,14 +6851,14 @@
               <a:buNone/>
             </a:pPr>
             <a:r>
-              <a:rPr lang="en-US" sz="1300" dirty="0">
+              <a:rPr lang="en-US" sz="1400" dirty="0">
                 <a:solidFill>
                   <a:schemeClr val="tx2"/>
                 </a:solidFill>
               </a:rPr>
               <a:t>mAP@50 · scratch AP 0.66</a:t>
             </a:r>
-            <a:endParaRPr lang="en-US" sz="1300" dirty="0"/>
+            <a:endParaRPr lang="en-US" sz="1400" dirty="0"/>
           </a:p>
         </p:txBody>
       </p:sp>
@@ -6970,12 +6870,12 @@
         </p:nvSpPr>
         <p:spPr>
           <a:xfrm>
-            <a:off x="548640" y="4206240"/>
-            <a:ext cx="5486400" cy="2011680"/>
+            <a:off x="548640" y="4709160"/>
+            <a:ext cx="5486400" cy="1508760"/>
           </a:xfrm>
           <a:prstGeom prst="roundRect">
             <a:avLst>
-              <a:gd name="adj" fmla="val 3636"/>
+              <a:gd name="adj" fmla="val 4848"/>
             </a:avLst>
           </a:prstGeom>
           <a:solidFill>
@@ -6992,7 +6892,7 @@
         </p:nvSpPr>
         <p:spPr>
           <a:xfrm>
-            <a:off x="822960" y="4343400"/>
+            <a:off x="822960" y="4828032"/>
             <a:ext cx="4572000" cy="320040"/>
           </a:xfrm>
           <a:prstGeom prst="rect">
@@ -7014,7 +6914,7 @@
                   <a:schemeClr val="accent1"/>
                 </a:solidFill>
               </a:rPr>
-              <a:t>결과</a:t>
+              <a:t>같은 순서</a:t>
             </a:r>
             <a:endParaRPr lang="en-US" sz="1600" dirty="0"/>
           </a:p>
@@ -7028,8 +6928,8 @@
         </p:nvSpPr>
         <p:spPr>
           <a:xfrm>
-            <a:off x="822960" y="4754880"/>
-            <a:ext cx="5029200" cy="1371600"/>
+            <a:off x="822960" y="5212080"/>
+            <a:ext cx="5029200" cy="868680"/>
           </a:xfrm>
           <a:prstGeom prst="rect">
             <a:avLst/>
@@ -7054,7 +6954,7 @@
                   <a:schemeClr val="tx1"/>
                 </a:solidFill>
               </a:rPr>
-              <a:t>파라미터가 가장 적은 ATSS가 가장 정확</a:t>
+              <a:t>Geti 점수: 86% · 81% · 81%</a:t>
             </a:r>
             <a:endParaRPr lang="en-US" sz="1400" dirty="0"/>
           </a:p>
@@ -7072,10 +6972,90 @@
                   <a:schemeClr val="tx1"/>
                 </a:solidFill>
               </a:rPr>
-              <a:t>Geti 점수도 ATSS 최고 (86% · 81% · 81%)</a:t>
+              <a:t>2차 세트 검출: ATSS 47% · YOLOX-S 3%</a:t>
             </a:r>
             <a:endParaRPr lang="en-US" sz="1400" dirty="0"/>
           </a:p>
+        </p:txBody>
+      </p:sp>
+      <p:sp>
+        <p:nvSpPr>
+          <p:cNvPr id="27" name="note-card"/>
+          <p:cNvSpPr/>
+          <p:nvPr/>
+        </p:nvSpPr>
+        <p:spPr>
+          <a:xfrm>
+            <a:off x="6263640" y="4709160"/>
+            <a:ext cx="5376672" cy="1508760"/>
+          </a:xfrm>
+          <a:prstGeom prst="roundRect">
+            <a:avLst>
+              <a:gd name="adj" fmla="val 4848"/>
+            </a:avLst>
+          </a:prstGeom>
+          <a:solidFill>
+            <a:schemeClr val="bg2"/>
+          </a:solidFill>
+          <a:ln/>
+        </p:spPr>
+      </p:sp>
+      <p:sp>
+        <p:nvSpPr>
+          <p:cNvPr id="28" name="note-h"/>
+          <p:cNvSpPr txBox="1"/>
+          <p:nvPr/>
+        </p:nvSpPr>
+        <p:spPr>
+          <a:xfrm>
+            <a:off x="6537960" y="4828032"/>
+            <a:ext cx="4572000" cy="320040"/>
+          </a:xfrm>
+          <a:prstGeom prst="rect">
+            <a:avLst/>
+          </a:prstGeom>
+          <a:noFill/>
+          <a:ln/>
+        </p:spPr>
+        <p:txBody>
+          <a:bodyPr wrap="square" lIns="0" tIns="0" rIns="0" bIns="0" rtlCol="0" anchor="t"/>
+          <a:lstStyle/>
+          <a:p>
+            <a:pPr indent="0" marL="0">
+              <a:buNone/>
+            </a:pPr>
+            <a:r>
+              <a:rPr lang="en-US" sz="1600" b="1" dirty="0">
+                <a:solidFill>
+                  <a:schemeClr val="accent3"/>
+                </a:solidFill>
+              </a:rPr>
+              <a:t>주의</a:t>
+            </a:r>
+            <a:endParaRPr lang="en-US" sz="1600" dirty="0"/>
+          </a:p>
+        </p:txBody>
+      </p:sp>
+      <p:sp>
+        <p:nvSpPr>
+          <p:cNvPr id="29" name="note-b"/>
+          <p:cNvSpPr txBox="1"/>
+          <p:nvPr/>
+        </p:nvSpPr>
+        <p:spPr>
+          <a:xfrm>
+            <a:off x="6537960" y="5212080"/>
+            <a:ext cx="4937760" cy="868680"/>
+          </a:xfrm>
+          <a:prstGeom prst="rect">
+            <a:avLst/>
+          </a:prstGeom>
+          <a:noFill/>
+          <a:ln/>
+        </p:spPr>
+        <p:txBody>
+          <a:bodyPr wrap="square" lIns="0" tIns="0" rIns="0" bIns="0" rtlCol="0" anchor="t"/>
+          <a:lstStyle/>
           <a:p>
             <a:pPr marL="342900" indent="-342900">
               <a:spcAft>
@@ -7090,90 +7070,10 @@
                   <a:schemeClr val="tx1"/>
                 </a:solidFill>
               </a:rPr>
-              <a:t>2차 세트도 ATSS 우위 (검출 47% vs 3%)</a:t>
+              <a:t>작은 = 파라미터 기준</a:t>
             </a:r>
             <a:endParaRPr lang="en-US" sz="1400" dirty="0"/>
           </a:p>
-        </p:txBody>
-      </p:sp>
-      <p:sp>
-        <p:nvSpPr>
-          <p:cNvPr id="27" name="note-card"/>
-          <p:cNvSpPr/>
-          <p:nvPr/>
-        </p:nvSpPr>
-        <p:spPr>
-          <a:xfrm>
-            <a:off x="6263640" y="4206240"/>
-            <a:ext cx="5376672" cy="2011680"/>
-          </a:xfrm>
-          <a:prstGeom prst="roundRect">
-            <a:avLst>
-              <a:gd name="adj" fmla="val 3636"/>
-            </a:avLst>
-          </a:prstGeom>
-          <a:solidFill>
-            <a:schemeClr val="bg2"/>
-          </a:solidFill>
-          <a:ln/>
-        </p:spPr>
-      </p:sp>
-      <p:sp>
-        <p:nvSpPr>
-          <p:cNvPr id="28" name="note-h"/>
-          <p:cNvSpPr txBox="1"/>
-          <p:nvPr/>
-        </p:nvSpPr>
-        <p:spPr>
-          <a:xfrm>
-            <a:off x="6537960" y="4343400"/>
-            <a:ext cx="4572000" cy="320040"/>
-          </a:xfrm>
-          <a:prstGeom prst="rect">
-            <a:avLst/>
-          </a:prstGeom>
-          <a:noFill/>
-          <a:ln/>
-        </p:spPr>
-        <p:txBody>
-          <a:bodyPr wrap="square" lIns="0" tIns="0" rIns="0" bIns="0" rtlCol="0" anchor="t"/>
-          <a:lstStyle/>
-          <a:p>
-            <a:pPr indent="0" marL="0">
-              <a:buNone/>
-            </a:pPr>
-            <a:r>
-              <a:rPr lang="en-US" sz="1600" b="1" dirty="0">
-                <a:solidFill>
-                  <a:schemeClr val="accent3"/>
-                </a:solidFill>
-              </a:rPr>
-              <a:t>주의</a:t>
-            </a:r>
-            <a:endParaRPr lang="en-US" sz="1600" dirty="0"/>
-          </a:p>
-        </p:txBody>
-      </p:sp>
-      <p:sp>
-        <p:nvSpPr>
-          <p:cNvPr id="29" name="note-b"/>
-          <p:cNvSpPr txBox="1"/>
-          <p:nvPr/>
-        </p:nvSpPr>
-        <p:spPr>
-          <a:xfrm>
-            <a:off x="6537960" y="4754880"/>
-            <a:ext cx="4937760" cy="1371600"/>
-          </a:xfrm>
-          <a:prstGeom prst="rect">
-            <a:avLst/>
-          </a:prstGeom>
-          <a:noFill/>
-          <a:ln/>
-        </p:spPr>
-        <p:txBody>
-          <a:bodyPr wrap="square" lIns="0" tIns="0" rIns="0" bIns="0" rtlCol="0" anchor="t"/>
-          <a:lstStyle/>
           <a:p>
             <a:pPr marL="342900" indent="-342900">
               <a:spcAft>
@@ -7188,43 +7088,7 @@
                   <a:schemeClr val="tx1"/>
                 </a:solidFill>
               </a:rPr>
-              <a:t>'작은 모델' = 파라미터 기준</a:t>
-            </a:r>
-            <a:endParaRPr lang="en-US" sz="1400" dirty="0"/>
-          </a:p>
-          <a:p>
-            <a:pPr marL="342900" indent="-342900">
-              <a:spcAft>
-                <a:spcPts val="600"/>
-              </a:spcAft>
-              <a:buSzPct val="100000"/>
-              <a:buChar char="•"/>
-            </a:pPr>
-            <a:r>
-              <a:rPr lang="en-US" sz="1400" dirty="0">
-                <a:solidFill>
-                  <a:schemeClr val="tx1"/>
-                </a:solidFill>
-              </a:rPr>
-              <a:t>연산량은 Tiny가 가장 적음 (6.45 GFLOPs)</a:t>
-            </a:r>
-            <a:endParaRPr lang="en-US" sz="1400" dirty="0"/>
-          </a:p>
-          <a:p>
-            <a:pPr marL="342900" indent="-342900">
-              <a:spcAft>
-                <a:spcPts val="600"/>
-              </a:spcAft>
-              <a:buSzPct val="100000"/>
-              <a:buChar char="•"/>
-            </a:pPr>
-            <a:r>
-              <a:rPr lang="en-US" sz="1400" dirty="0">
-                <a:solidFill>
-                  <a:schemeClr val="tx2"/>
-                </a:solidFill>
-              </a:rPr>
-              <a:t>1차 점수는 학습 사진 포함 가능 → 모델 간 비교용</a:t>
+              <a:t>연산량은 Tiny 최소 (6.45 GFLOPs)</a:t>
             </a:r>
             <a:endParaRPr lang="en-US" sz="1400" dirty="0"/>
           </a:p>
@@ -7484,7 +7348,7 @@
                 <a:gridCol w="1234440"/>
                 <a:gridCol w="1234440"/>
               </a:tblGrid>
-              <a:tr h="457200">
+              <a:tr h="411480">
                 <a:tc>
                   <a:txBody>
                     <a:bodyPr/>
@@ -7758,7 +7622,7 @@
                   </a:tcPr>
                 </a:tc>
               </a:tr>
-              <a:tr h="457200">
+              <a:tr h="411480">
                 <a:tc>
                   <a:txBody>
                     <a:bodyPr/>
@@ -8032,7 +7896,7 @@
                   </a:tcPr>
                 </a:tc>
               </a:tr>
-              <a:tr h="457200">
+              <a:tr h="411480">
                 <a:tc>
                   <a:txBody>
                     <a:bodyPr/>
@@ -8306,7 +8170,7 @@
                   </a:tcPr>
                 </a:tc>
               </a:tr>
-              <a:tr h="457200">
+              <a:tr h="411480">
                 <a:tc>
                   <a:txBody>
                     <a:bodyPr/>
@@ -8592,12 +8456,12 @@
         </p:nvSpPr>
         <p:spPr>
           <a:xfrm>
-            <a:off x="6263640" y="2651760"/>
-            <a:ext cx="5376672" cy="1828800"/>
+            <a:off x="548640" y="4572000"/>
+            <a:ext cx="5486400" cy="1645920"/>
           </a:xfrm>
           <a:prstGeom prst="roundRect">
             <a:avLst>
-              <a:gd name="adj" fmla="val 4000"/>
+              <a:gd name="adj" fmla="val 4444"/>
             </a:avLst>
           </a:prstGeom>
           <a:solidFill>
@@ -8614,8 +8478,8 @@
         </p:nvSpPr>
         <p:spPr>
           <a:xfrm>
-            <a:off x="6537960" y="2761488"/>
-            <a:ext cx="4846320" cy="292608"/>
+            <a:off x="822960" y="4663440"/>
+            <a:ext cx="4937760" cy="292608"/>
           </a:xfrm>
           <a:prstGeom prst="rect">
             <a:avLst/>
@@ -8650,7 +8514,7 @@
         </p:nvSpPr>
         <p:spPr>
           <a:xfrm>
-            <a:off x="6537960" y="3172968"/>
+            <a:off x="822960" y="5029200"/>
             <a:ext cx="1188720" cy="292608"/>
           </a:xfrm>
           <a:prstGeom prst="rect">
@@ -8686,7 +8550,7 @@
         </p:nvSpPr>
         <p:spPr>
           <a:xfrm>
-            <a:off x="7772400" y="3246120"/>
+            <a:off x="2103120" y="5102352"/>
             <a:ext cx="3017520" cy="164592"/>
           </a:xfrm>
           <a:prstGeom prst="rect">
@@ -8706,7 +8570,7 @@
         </p:nvSpPr>
         <p:spPr>
           <a:xfrm>
-            <a:off x="7772400" y="3246120"/>
+            <a:off x="2103120" y="5102352"/>
             <a:ext cx="2172614" cy="164592"/>
           </a:xfrm>
           <a:prstGeom prst="rect">
@@ -8726,7 +8590,7 @@
         </p:nvSpPr>
         <p:spPr>
           <a:xfrm>
-            <a:off x="10881360" y="3172968"/>
+            <a:off x="5212080" y="5029200"/>
             <a:ext cx="548640" cy="292608"/>
           </a:xfrm>
           <a:prstGeom prst="rect">
@@ -8762,7 +8626,7 @@
         </p:nvSpPr>
         <p:spPr>
           <a:xfrm>
-            <a:off x="6537960" y="3584448"/>
+            <a:off x="822960" y="5394960"/>
             <a:ext cx="1188720" cy="292608"/>
           </a:xfrm>
           <a:prstGeom prst="rect">
@@ -8798,7 +8662,7 @@
         </p:nvSpPr>
         <p:spPr>
           <a:xfrm>
-            <a:off x="7772400" y="3657600"/>
+            <a:off x="2103120" y="5468112"/>
             <a:ext cx="3017520" cy="164592"/>
           </a:xfrm>
           <a:prstGeom prst="rect">
@@ -8818,7 +8682,7 @@
         </p:nvSpPr>
         <p:spPr>
           <a:xfrm>
-            <a:off x="7772400" y="3657600"/>
+            <a:off x="2103120" y="5468112"/>
             <a:ext cx="2263140" cy="164592"/>
           </a:xfrm>
           <a:prstGeom prst="rect">
@@ -8838,7 +8702,7 @@
         </p:nvSpPr>
         <p:spPr>
           <a:xfrm>
-            <a:off x="10881360" y="3584448"/>
+            <a:off x="5212080" y="5394960"/>
             <a:ext cx="548640" cy="292608"/>
           </a:xfrm>
           <a:prstGeom prst="rect">
@@ -8874,7 +8738,7 @@
         </p:nvSpPr>
         <p:spPr>
           <a:xfrm>
-            <a:off x="6537960" y="3995928"/>
+            <a:off x="822960" y="5760720"/>
             <a:ext cx="1188720" cy="292608"/>
           </a:xfrm>
           <a:prstGeom prst="rect">
@@ -8910,7 +8774,7 @@
         </p:nvSpPr>
         <p:spPr>
           <a:xfrm>
-            <a:off x="7772400" y="4069080"/>
+            <a:off x="2103120" y="5833872"/>
             <a:ext cx="3017520" cy="164592"/>
           </a:xfrm>
           <a:prstGeom prst="rect">
@@ -8930,7 +8794,7 @@
         </p:nvSpPr>
         <p:spPr>
           <a:xfrm>
-            <a:off x="7772400" y="4069080"/>
+            <a:off x="2103120" y="5833872"/>
             <a:ext cx="995782" cy="164592"/>
           </a:xfrm>
           <a:prstGeom prst="rect">
@@ -8950,7 +8814,7 @@
         </p:nvSpPr>
         <p:spPr>
           <a:xfrm>
-            <a:off x="10881360" y="3995928"/>
+            <a:off x="5212080" y="5760720"/>
             <a:ext cx="548640" cy="292608"/>
           </a:xfrm>
           <a:prstGeom prst="rect">
@@ -8978,31 +8842,9 @@
           </a:p>
         </p:txBody>
       </p:sp>
-      <p:sp>
-        <p:nvSpPr>
-          <p:cNvPr id="21" name="heat-card"/>
-          <p:cNvSpPr/>
-          <p:nvPr/>
-        </p:nvSpPr>
-        <p:spPr>
-          <a:xfrm>
-            <a:off x="548640" y="4754880"/>
-            <a:ext cx="11094415" cy="1463040"/>
-          </a:xfrm>
-          <a:prstGeom prst="roundRect">
-            <a:avLst>
-              <a:gd name="adj" fmla="val 5000"/>
-            </a:avLst>
-          </a:prstGeom>
-          <a:solidFill>
-            <a:schemeClr val="bg2"/>
-          </a:solidFill>
-          <a:ln/>
-        </p:spPr>
-      </p:sp>
       <p:pic>
         <p:nvPicPr>
-          <p:cNvPr id="22" name="heat-0" descr="C:\Users\user\_se4nchoi\batteryvision\docs\submission\build\img\heat_atss.jpg">    </p:cNvPr>
+          <p:cNvPr id="21" name="heat-0" descr="C:\Users\user\_se4nchoi\batteryvision\docs\submission\build\img\heat_atss.jpg">    </p:cNvPr>
           <p:cNvPicPr>
             <a:picLocks noChangeAspect="1"/>
           </p:cNvPicPr>
@@ -9016,17 +8858,95 @@
         </p:blipFill>
         <p:spPr>
           <a:xfrm>
-            <a:off x="731520" y="4873752"/>
-            <a:ext cx="1225296" cy="1225296"/>
+            <a:off x="6263640" y="2606040"/>
+            <a:ext cx="2633472" cy="2633472"/>
           </a:xfrm>
           <a:prstGeom prst="rect">
             <a:avLst/>
           </a:prstGeom>
         </p:spPr>
       </p:pic>
+      <p:sp>
+        <p:nvSpPr>
+          <p:cNvPr id="22" name="heat-dot-0"/>
+          <p:cNvSpPr/>
+          <p:nvPr/>
+        </p:nvSpPr>
+        <p:spPr>
+          <a:xfrm>
+            <a:off x="6263640" y="5413248"/>
+            <a:ext cx="146304" cy="146304"/>
+          </a:xfrm>
+          <a:prstGeom prst="ellipse">
+            <a:avLst/>
+          </a:prstGeom>
+          <a:solidFill>
+            <a:schemeClr val="accent4"/>
+          </a:solidFill>
+          <a:ln/>
+        </p:spPr>
+      </p:sp>
+      <p:sp>
+        <p:nvSpPr>
+          <p:cNvPr id="23" name="heat-l-0"/>
+          <p:cNvSpPr txBox="1"/>
+          <p:nvPr/>
+        </p:nvSpPr>
+        <p:spPr>
+          <a:xfrm>
+            <a:off x="6501384" y="5340096"/>
+            <a:ext cx="2377440" cy="292608"/>
+          </a:xfrm>
+          <a:prstGeom prst="rect">
+            <a:avLst/>
+          </a:prstGeom>
+          <a:noFill/>
+          <a:ln/>
+        </p:spPr>
+        <p:txBody>
+          <a:bodyPr wrap="square" lIns="0" tIns="0" rIns="0" bIns="0" rtlCol="0" anchor="t"/>
+          <a:lstStyle/>
+          <a:p>
+            <a:pPr indent="0" marL="0">
+              <a:buNone/>
+            </a:pPr>
+            <a:r>
+              <a:rPr lang="en-US" sz="1400" b="1" dirty="0">
+                <a:solidFill>
+                  <a:schemeClr val="tx1"/>
+                </a:solidFill>
+              </a:rPr>
+              <a:t>ATSS  </a:t>
+            </a:r>
+            <a:pPr indent="0" marL="0">
+              <a:buNone/>
+            </a:pPr>
+            <a:r>
+              <a:rPr lang="en-US" sz="1400" dirty="0">
+                <a:solidFill>
+                  <a:schemeClr val="tx2"/>
+                </a:solidFill>
+              </a:rPr>
+              <a:t>결함 적중 </a:t>
+            </a:r>
+            <a:pPr indent="0" marL="0">
+              <a:buNone/>
+            </a:pPr>
+            <a:r>
+              <a:rPr lang="en-US" sz="1400" b="1" dirty="0">
+                <a:solidFill>
+                  <a:schemeClr val="accent4"/>
+                </a:solidFill>
+              </a:rPr>
+              <a:t>48%</a:t>
+            </a:r>
+            <a:endParaRPr lang="en-US" sz="1400" dirty="0"/>
+          </a:p>
+        </p:txBody>
+      </p:sp>
       <p:pic>
         <p:nvPicPr>
-          <p:cNvPr id="23" name="heat-1" descr="C:\Users\user\_se4nchoi\batteryvision\docs\submission\build\img\heat_yolox.jpg">    </p:cNvPr>
+          <p:cNvPr id="24" name="heat-1" descr="C:\Users\user\_se4nchoi\batteryvision\docs\submission\build\img\heat_yolox.jpg">    </p:cNvPr>
           <p:cNvPicPr>
             <a:picLocks noChangeAspect="1"/>
           </p:cNvPicPr>
@@ -9040,8 +8960,8 @@
         </p:blipFill>
         <p:spPr>
           <a:xfrm>
-            <a:off x="2057400" y="4873752"/>
-            <a:ext cx="1225296" cy="1225296"/>
+            <a:off x="9006840" y="2606040"/>
+            <a:ext cx="2633472" cy="2633472"/>
           </a:xfrm>
           <a:prstGeom prst="rect">
             <a:avLst/>
@@ -9050,14 +8970,34 @@
       </p:pic>
       <p:sp>
         <p:nvSpPr>
-          <p:cNvPr id="24" name="heat-cap"/>
+          <p:cNvPr id="25" name="heat-dot-1"/>
+          <p:cNvSpPr/>
+          <p:nvPr/>
+        </p:nvSpPr>
+        <p:spPr>
+          <a:xfrm>
+            <a:off x="9006840" y="5413248"/>
+            <a:ext cx="146304" cy="146304"/>
+          </a:xfrm>
+          <a:prstGeom prst="ellipse">
+            <a:avLst/>
+          </a:prstGeom>
+          <a:solidFill>
+            <a:schemeClr val="accent5"/>
+          </a:solidFill>
+          <a:ln/>
+        </p:spPr>
+      </p:sp>
+      <p:sp>
+        <p:nvSpPr>
+          <p:cNvPr id="26" name="heat-l-1"/>
           <p:cNvSpPr txBox="1"/>
           <p:nvPr/>
         </p:nvSpPr>
         <p:spPr>
           <a:xfrm>
-            <a:off x="3566160" y="4892040"/>
-            <a:ext cx="7772400" cy="1188720"/>
+            <a:off x="9244584" y="5340096"/>
+            <a:ext cx="2377440" cy="292608"/>
           </a:xfrm>
           <a:prstGeom prst="rect">
             <a:avLst/>
@@ -9066,68 +9006,79 @@
           <a:ln/>
         </p:spPr>
         <p:txBody>
-          <a:bodyPr wrap="square" lIns="0" tIns="0" rIns="0" bIns="0" rtlCol="0" anchor="ctr"/>
+          <a:bodyPr wrap="square" lIns="0" tIns="0" rIns="0" bIns="0" rtlCol="0" anchor="t"/>
           <a:lstStyle/>
           <a:p>
             <a:pPr indent="0" marL="0">
               <a:buNone/>
             </a:pPr>
             <a:r>
-              <a:rPr lang="en-US" sz="1500" dirty="0">
-                <a:solidFill>
-                  <a:schemeClr val="tx2"/>
+              <a:rPr lang="en-US" sz="1400" b="1" dirty="0">
+                <a:solidFill>
+                  <a:schemeClr val="tx1"/>
                 </a:solidFill>
               </a:rPr>
-              <a:t>heatmap이 결함을 짚은 비율: </a:t>
+              <a:t>YOLOX-S  </a:t>
             </a:r>
             <a:pPr indent="0" marL="0">
               <a:buNone/>
             </a:pPr>
             <a:r>
-              <a:rPr lang="en-US" sz="1500" b="1" dirty="0">
-                <a:solidFill>
-                  <a:schemeClr val="accent5"/>
+              <a:rPr lang="en-US" sz="1400" dirty="0">
+                <a:solidFill>
+                  <a:schemeClr val="tx2"/>
                 </a:solidFill>
               </a:rPr>
-              <a:t>YOLOX-S 98%</a:t>
+              <a:t>결함 적중 </a:t>
             </a:r>
             <a:pPr indent="0" marL="0">
               <a:buNone/>
             </a:pPr>
             <a:r>
-              <a:rPr lang="en-US" sz="1500" dirty="0">
-                <a:solidFill>
-                  <a:schemeClr val="tx2"/>
+              <a:rPr lang="en-US" sz="1400" b="1" dirty="0">
+                <a:solidFill>
+                  <a:schemeClr val="accent5"/>
                 </a:solidFill>
               </a:rPr>
-              <a:t> · </a:t>
-            </a:r>
+              <a:t>98%</a:t>
+            </a:r>
+            <a:endParaRPr lang="en-US" sz="1400" dirty="0"/>
+          </a:p>
+        </p:txBody>
+      </p:sp>
+      <p:sp>
+        <p:nvSpPr>
+          <p:cNvPr id="27" name="heat-cap"/>
+          <p:cNvSpPr txBox="1"/>
+          <p:nvPr/>
+        </p:nvSpPr>
+        <p:spPr>
+          <a:xfrm>
+            <a:off x="6263640" y="5760720"/>
+            <a:ext cx="5376672" cy="274320"/>
+          </a:xfrm>
+          <a:prstGeom prst="rect">
+            <a:avLst/>
+          </a:prstGeom>
+          <a:noFill/>
+          <a:ln/>
+        </p:spPr>
+        <p:txBody>
+          <a:bodyPr wrap="square" lIns="0" tIns="0" rIns="0" bIns="0" rtlCol="0" anchor="t"/>
+          <a:lstStyle/>
+          <a:p>
             <a:pPr indent="0" marL="0">
               <a:buNone/>
             </a:pPr>
             <a:r>
-              <a:rPr lang="en-US" sz="1500" b="1" dirty="0">
-                <a:solidFill>
-                  <a:schemeClr val="accent4"/>
+              <a:rPr lang="en-US" sz="1200" dirty="0">
+                <a:solidFill>
+                  <a:schemeClr val="tx2"/>
                 </a:solidFill>
               </a:rPr>
-              <a:t>ATSS 48%</a:t>
-            </a:r>
-            <a:endParaRPr lang="en-US" sz="1500" dirty="0"/>
-          </a:p>
-          <a:p>
-            <a:pPr indent="0" marL="0">
-              <a:buNone/>
-            </a:pPr>
-            <a:r>
-              <a:rPr lang="en-US" sz="1500" b="1" dirty="0">
-                <a:solidFill>
-                  <a:schemeClr val="tx1"/>
-                </a:solidFill>
-              </a:rPr>
-              <a:t>더 정확한 모델이 더 잘 설명하지는 않는다</a:t>
-            </a:r>
-            <a:endParaRPr lang="en-US" sz="1500" dirty="0"/>
+              <a:t>heatmap 최고점이 정답 박스 안 · 정확도 ≠ heatmap 품질</a:t>
+            </a:r>
+            <a:endParaRPr lang="en-US" sz="1200" dirty="0"/>
           </a:p>
         </p:txBody>
       </p:sp>
@@ -9271,7 +9222,7 @@
                   <a:schemeClr val="tx2"/>
                 </a:solidFill>
               </a:rPr>
-              <a:t>수업에서 다룬 양자화를 직접 적용 · 직접 설계한 벤치마크로 측정</a:t>
+              <a:t>수업에서 다룬 양자화 적용 · 직접 만든 벤치마크로 측정</a:t>
             </a:r>
             <a:endParaRPr lang="en-US" sz="1500" dirty="0"/>
           </a:p>
@@ -11228,7 +11179,7 @@
                   <a:schemeClr val="tx1"/>
                 </a:solidFill>
               </a:rPr>
-              <a:t>신뢰도가 낮아져 같은 기준에서 놓침 증가</a:t>
+              <a:t>신뢰도 하락 → 같은 기준에서 놓침 증가</a:t>
             </a:r>
             <a:endParaRPr lang="en-US" sz="1400" dirty="0"/>
           </a:p>
@@ -11246,7 +11197,7 @@
                   <a:schemeClr val="tx1"/>
                 </a:solidFill>
               </a:rPr>
-              <a:t>INT8용 판정 기준값을 다시 정해야 함</a:t>
+              <a:t>INT8용 기준값 재설정 필요</a:t>
             </a:r>
             <a:endParaRPr lang="en-US" sz="1400" dirty="0"/>
           </a:p>
@@ -11392,7 +11343,7 @@
                   <a:schemeClr val="tx2"/>
                 </a:solidFill>
               </a:rPr>
-              <a:t>같은 업로더의 다른 세트(v2) 45장 (결함 30 · 정상 15) · 학습에 전혀 안 쓴 사진 · 내 앱으로 테스트</a:t>
+              <a:t>학습 미사용 · 같은 업로더의 v2 세트 45장 (결함 30 · 정상 15)</a:t>
             </a:r>
             <a:endParaRPr lang="en-US" sz="1500" dirty="0"/>
           </a:p>
@@ -11968,7 +11919,7 @@
                   <a:schemeClr val="tx1"/>
                 </a:solidFill>
               </a:rPr>
-              <a:t>착각이 아니라 점수가 낮아 놓침 · 정상 불합격 0건</a:t>
+              <a:t>클래스 착각 0건 · 점수 미달로 놓침 · 정상 불합격 0건</a:t>
             </a:r>
             <a:endParaRPr lang="en-US" sz="1400" dirty="0"/>
           </a:p>
@@ -11986,7 +11937,7 @@
                   <a:schemeClr val="accent3"/>
                 </a:solidFill>
               </a:rPr>
-              <a:t>원인: 1차는 본 적 있는 사진 포함 + 같은 촬영 환경</a:t>
+              <a:t>1차: 학습 사진 포함 가능 + 같은 촬영 환경</a:t>
             </a:r>
             <a:endParaRPr lang="en-US" sz="1400" dirty="0"/>
           </a:p>
@@ -12891,8 +12842,8 @@
         </p:nvSpPr>
         <p:spPr>
           <a:xfrm>
-            <a:off x="6812280" y="4023360"/>
-            <a:ext cx="4828032" cy="685800"/>
+            <a:off x="6812280" y="3977640"/>
+            <a:ext cx="4828032" cy="365760"/>
           </a:xfrm>
           <a:prstGeom prst="rect">
             <a:avLst/>
@@ -12913,11 +12864,8 @@
                   <a:schemeClr val="tx1"/>
                 </a:solidFill>
               </a:rPr>
-              <a:t>놓침을 줄이면 정상 셀이 같이 걸림</a:t>
-            </a:r>
-            <a:endParaRPr lang="en-US" sz="1500" dirty="0"/>
-          </a:p>
-          <a:p>
+              <a:t>검출 ↑ = 정상 오검출 ↑  </a:t>
+            </a:r>
             <a:pPr indent="0" marL="0">
               <a:buNone/>
             </a:pPr>
@@ -12927,7 +12875,7 @@
                   <a:schemeClr val="accent1"/>
                 </a:solidFill>
               </a:rPr>
-              <a:t>→ 기준값이 아니라 재학습 문제</a:t>
+              <a:t>→ 재학습 필요</a:t>
             </a:r>
             <a:endParaRPr lang="en-US" sz="1500" dirty="0"/>
           </a:p>
@@ -12949,8 +12897,8 @@
         </p:blipFill>
         <p:spPr>
           <a:xfrm>
-            <a:off x="6812280" y="4846320"/>
-            <a:ext cx="1371600" cy="1371600"/>
+            <a:off x="6812280" y="4434840"/>
+            <a:ext cx="1828800" cy="1828800"/>
           </a:xfrm>
           <a:prstGeom prst="rect">
             <a:avLst/>
@@ -12965,8 +12913,8 @@
         </p:nvSpPr>
         <p:spPr>
           <a:xfrm>
-            <a:off x="8366760" y="5074920"/>
-            <a:ext cx="3200400" cy="822960"/>
+            <a:off x="8823960" y="4937760"/>
+            <a:ext cx="2743200" cy="822960"/>
           </a:xfrm>
           <a:prstGeom prst="rect">
             <a:avLst/>
@@ -12982,28 +12930,28 @@
               <a:buNone/>
             </a:pPr>
             <a:r>
-              <a:rPr lang="en-US" sz="1300" b="1" dirty="0">
+              <a:rPr lang="en-US" sz="1400" b="1" dirty="0">
                 <a:solidFill>
                   <a:schemeClr val="tx1"/>
                 </a:solidFill>
               </a:rPr>
               <a:t>놓친 예: scratch</a:t>
             </a:r>
-            <a:endParaRPr lang="en-US" sz="1300" dirty="0"/>
+            <a:endParaRPr lang="en-US" sz="1400" dirty="0"/>
           </a:p>
           <a:p>
             <a:pPr indent="0" marL="0">
               <a:buNone/>
             </a:pPr>
             <a:r>
-              <a:rPr lang="en-US" sz="1300" dirty="0">
+              <a:rPr lang="en-US" sz="1400" dirty="0">
                 <a:solidFill>
                   <a:schemeClr val="tx2"/>
                 </a:solidFill>
               </a:rPr>
               <a:t>ATSS 최고 점수 0.21</a:t>
             </a:r>
-            <a:endParaRPr lang="en-US" sz="1300" dirty="0"/>
+            <a:endParaRPr lang="en-US" sz="1400" dirty="0"/>
           </a:p>
         </p:txBody>
       </p:sp>
@@ -13639,7 +13587,7 @@
                           <a:ea typeface="Malgun Gothic" pitchFamily="34" charset="-122"/>
                           <a:cs typeface="Malgun Gothic" pitchFamily="34" charset="-120"/>
                         </a:rPr>
-                        <a:t>첫 숫자는 좋아 보인다</a:t>
+                        <a:t>–</a:t>
                       </a:r>
                       <a:endParaRPr lang="en-US" sz="1400" dirty="0">
                         <a:latin typeface="Malgun Gothic" charset="0"/>
@@ -13913,7 +13861,7 @@
                           <a:ea typeface="Malgun Gothic" pitchFamily="34" charset="-122"/>
                           <a:cs typeface="Malgun Gothic" pitchFamily="34" charset="-120"/>
                         </a:rPr>
-                        <a:t>점수 그대로, 평가는 정직</a:t>
+                        <a:t>중복 영향 0.4%p</a:t>
                       </a:r>
                       <a:endParaRPr lang="en-US" sz="1400" dirty="0">
                         <a:latin typeface="Malgun Gothic" charset="0"/>
@@ -14187,7 +14135,7 @@
                           <a:ea typeface="Malgun Gothic" pitchFamily="34" charset="-122"/>
                           <a:cs typeface="Malgun Gothic" pitchFamily="34" charset="-120"/>
                         </a:rPr>
-                        <a:t>1차 점수는 비교용으로만</a:t>
+                        <a:t>1차 = 비교용</a:t>
                       </a:r>
                       <a:endParaRPr lang="en-US" sz="1400" dirty="0">
                         <a:latin typeface="Malgun Gothic" charset="0"/>
@@ -14461,7 +14409,7 @@
                           <a:ea typeface="Malgun Gothic" pitchFamily="34" charset="-122"/>
                           <a:cs typeface="Malgun Gothic" pitchFamily="34" charset="-120"/>
                         </a:rPr>
-                        <a:t>큰 모델이 이기지 않는다</a:t>
+                        <a:t>ATSS 최고</a:t>
                       </a:r>
                       <a:endParaRPr lang="en-US" sz="1400" dirty="0">
                         <a:latin typeface="Malgun Gothic" charset="0"/>
@@ -14735,7 +14683,7 @@
                           <a:ea typeface="Malgun Gothic" pitchFamily="34" charset="-122"/>
                           <a:cs typeface="Malgun Gothic" pitchFamily="34" charset="-120"/>
                         </a:rPr>
-                        <a:t>빠르지만 기준값 재조정</a:t>
+                        <a:t>놓침 소폭 증가</a:t>
                       </a:r>
                       <a:endParaRPr lang="en-US" sz="1400" dirty="0">
                         <a:latin typeface="Malgun Gothic" charset="0"/>
@@ -15009,7 +14957,7 @@
                           <a:ea typeface="Malgun Gothic" pitchFamily="34" charset="-122"/>
                           <a:cs typeface="Malgun Gothic" pitchFamily="34" charset="-120"/>
                         </a:rPr>
-                        <a:t>처음 보는 사진의 실력</a:t>
+                        <a:t>환경 변화에 취약</a:t>
                       </a:r>
                       <a:endParaRPr lang="en-US" sz="1400" dirty="0">
                         <a:latin typeface="Malgun Gothic" charset="0"/>
@@ -15283,7 +15231,7 @@
                           <a:ea typeface="Malgun Gothic" pitchFamily="34" charset="-122"/>
                           <a:cs typeface="Malgun Gothic" pitchFamily="34" charset="-120"/>
                         </a:rPr>
-                        <a:t>기준값 X → 재학습 필요</a:t>
+                        <a:t>재학습 필요</a:t>
                       </a:r>
                       <a:endParaRPr lang="en-US" sz="1400" dirty="0">
                         <a:latin typeface="Malgun Gothic" charset="0"/>
@@ -15499,7 +15447,7 @@
                   <a:schemeClr val="tx2"/>
                 </a:solidFill>
               </a:rPr>
-              <a:t>업로드 전에 나누고, 중복·세션도 확인</a:t>
+              <a:t>업로드 전 분리 · 중복 확인</a:t>
             </a:r>
             <a:endParaRPr lang="en-US" sz="1200" dirty="0"/>
           </a:p>
@@ -15629,7 +15577,7 @@
                   <a:schemeClr val="tx2"/>
                 </a:solidFill>
               </a:rPr>
-              <a:t>데이터와 결함에 맞는 모델 선택</a:t>
+              <a:t>3.9M ATSS가 9M YOLOX-S보다 정확</a:t>
             </a:r>
             <a:endParaRPr lang="en-US" sz="1200" dirty="0"/>
           </a:p>
@@ -15759,7 +15707,7 @@
                   <a:schemeClr val="tx2"/>
                 </a:solidFill>
               </a:rPr>
-              <a:t>INT8은 빠르지만 판정 기준을 다시 맞춰야</a:t>
+              <a:t>INT8 = 속도 ↑, 신뢰도 ↓</a:t>
             </a:r>
             <a:endParaRPr lang="en-US" sz="1200" dirty="0"/>
           </a:p>
@@ -15889,7 +15837,7 @@
                   <a:schemeClr val="tx2"/>
                 </a:solidFill>
               </a:rPr>
-              <a:t>환경이 바뀌면 기준값이 아니라 재학습</a:t>
+              <a:t>92.9% → 새 환경 47%</a:t>
             </a:r>
             <a:endParaRPr lang="en-US" sz="1200" dirty="0"/>
           </a:p>

--- a/docs/submission/BatteryVision_발표.pptx
+++ b/docs/submission/BatteryVision_발표.pptx
@@ -116,13 +116,13 @@
   <p:extLst>
     <p:ext uri="{521415D9-36F7-43E2-AB2F-B90AF26B5E84}">
       <p14:sectionLst xmlns:p14="http://schemas.microsoft.com/office/powerpoint/2010/main">
-        <p14:section name="도입" id="{bb454593-116b-a06a-9ff6-363bac965195}">
+        <p14:section name="도입" id="{8e06e404-74bf-e672-ad4b-e408d23607d5}">
           <p14:sldIdLst>
             <p14:sldId id="256"/>
             <p14:sldId id="257"/>
           </p14:sldIdLst>
         </p14:section>
-        <p14:section name="실험" id="{c6f94ea2-1a58-32b7-37ea-201e44d4d77a}">
+        <p14:section name="실험" id="{a4425e8b-1365-fc80-ffe0-438ebf9b7772}">
           <p14:sldIdLst>
             <p14:sldId id="258"/>
             <p14:sldId id="259"/>
@@ -130,17 +130,17 @@
             <p14:sldId id="261"/>
           </p14:sldIdLst>
         </p14:section>
-        <p14:section name="최적화" id="{102d892e-0fef-e090-1c18-a23803b32489}">
+        <p14:section name="최적화" id="{4d0c4598-9562-f302-97d3-2ee62463dd91}">
           <p14:sldIdLst>
             <p14:sldId id="262"/>
           </p14:sldIdLst>
         </p14:section>
-        <p14:section name="검증" id="{41b6718e-cc93-73b0-8754-2ba65256846e}">
+        <p14:section name="검증" id="{9b56f984-495f-7db3-7f12-b6f342283212}">
           <p14:sldIdLst>
             <p14:sldId id="263"/>
           </p14:sldIdLst>
         </p14:section>
-        <p14:section name="정리" id="{1f389ea8-297a-f3fe-897f-76397c938f0c}">
+        <p14:section name="정리" id="{0ddf19f7-066e-78f8-bc03-a818d8656fde}">
           <p14:sldIdLst>
             <p14:sldId id="264"/>
             <p14:sldId id="265"/>
@@ -525,6 +525,375 @@
 </c:chartSpace>
 </file>
 
+<file path=ppt/charts/chart2.xml><?xml version="1.0" encoding="utf-8"?>
+<c:chartSpace xmlns:c="http://schemas.openxmlformats.org/drawingml/2006/chart" xmlns:a="http://schemas.openxmlformats.org/drawingml/2006/main" xmlns:r="http://schemas.openxmlformats.org/officeDocument/2006/relationships">
+  <c:date1904 val="0"/>
+  <c:roundedCorners val="1"/>
+  <c:chart>
+    <c:title>
+      <c:tx>
+        <c:rich>
+          <a:bodyPr/>
+          <a:lstStyle/>
+          <a:p>
+            <a:pPr>
+              <a:defRPr sz="1400" b="0" i="0" u="none" strike="noStrike">
+                <a:solidFill>
+                  <a:srgbClr val="EEF1F5"/>
+                </a:solidFill>
+                <a:latin typeface="+mn-lt"/>
+              </a:defRPr>
+            </a:pPr>
+            <a:r>
+              <a:rPr sz="1400" b="0" i="0" u="none" strike="noStrike">
+                <a:solidFill>
+                  <a:srgbClr val="EEF1F5"/>
+                </a:solidFill>
+                <a:latin typeface="+mn-lt"/>
+              </a:rPr>
+              <a:t>CPU ms / 사진 (낮을수록 빠름)</a:t>
+            </a:r>
+          </a:p>
+        </c:rich>
+      </c:tx>
+      <c:layout/>
+      <c:overlay val="0"/>
+    </c:title>
+    <c:autoTitleDeleted val="0"/>
+    <c:plotArea>
+      <c:layout/>
+      <c:barChart>
+        <c:barDir val="col"/>
+        <c:grouping val="clustered"/>
+        <c:varyColors val="0"/>
+        <c:ser>
+          <c:idx val="0"/>
+          <c:order val="0"/>
+          <c:tx>
+            <c:strRef>
+              <c:f>Sheet1!$B$1</c:f>
+              <c:strCache>
+                <c:ptCount val="1"/>
+                <c:pt idx="0">
+                  <c:v>FP16</c:v>
+                </c:pt>
+              </c:strCache>
+            </c:strRef>
+          </c:tx>
+          <c:spPr>
+            <a:solidFill>
+              <a:srgbClr val="6B7480"/>
+            </a:solidFill>
+            <a:effectLst/>
+          </c:spPr>
+          <c:invertIfNegative val="0"/>
+          <c:dLbls>
+            <c:numFmt formatCode="0.0" sourceLinked="0"/>
+            <c:txPr>
+              <a:bodyPr/>
+              <a:lstStyle/>
+              <a:p>
+                <a:pPr>
+                  <a:defRPr b="0" i="0" strike="noStrike" sz="1100" u="none">
+                    <a:solidFill>
+                      <a:srgbClr val="EEF1F5"/>
+                    </a:solidFill>
+                    <a:latin typeface="+mn-lt"/>
+                  </a:defRPr>
+                </a:pPr>
+              </a:p>
+            </c:txPr>
+            <c:showLegendKey val="0"/>
+            <c:showVal val="1"/>
+            <c:showCatName val="0"/>
+            <c:showSerName val="0"/>
+            <c:showPercent val="0"/>
+            <c:showBubbleSize val="0"/>
+            <c:showLeaderLines val="0"/>
+          </c:dLbls>
+          <c:cat>
+            <c:multiLvlStrRef>
+              <c:f>Sheet1!$A$2:$A$4</c:f>
+              <c:multiLvlStrCache>
+                <c:ptCount val="3"/>
+                <c:lvl>
+                  <c:pt idx="0">
+                    <c:v>ATSS</c:v>
+                  </c:pt>
+                  <c:pt idx="1">
+                    <c:v>YOLOX-S</c:v>
+                  </c:pt>
+                  <c:pt idx="2">
+                    <c:v>YOLOX-Tiny</c:v>
+                  </c:pt>
+                </c:lvl>
+              </c:multiLvlStrCache>
+            </c:multiLvlStrRef>
+          </c:cat>
+          <c:val>
+            <c:numRef>
+              <c:f>Sheet1!$B$2:$B$4</c:f>
+              <c:numCache>
+                <c:formatCode>General</c:formatCode>
+                <c:ptCount val="3"/>
+                <c:pt idx="0">
+                  <c:v>43.9</c:v>
+                </c:pt>
+                <c:pt idx="1">
+                  <c:v>48.9</c:v>
+                </c:pt>
+                <c:pt idx="2">
+                  <c:v>33.5</c:v>
+                </c:pt>
+              </c:numCache>
+            </c:numRef>
+          </c:val>
+        </c:ser>
+        <c:ser>
+          <c:idx val="1"/>
+          <c:order val="1"/>
+          <c:tx>
+            <c:strRef>
+              <c:f>Sheet1!$C$1</c:f>
+              <c:strCache>
+                <c:ptCount val="1"/>
+                <c:pt idx="0">
+                  <c:v>INT8</c:v>
+                </c:pt>
+              </c:strCache>
+            </c:strRef>
+          </c:tx>
+          <c:spPr>
+            <a:solidFill>
+              <a:srgbClr val="4FD1C5"/>
+            </a:solidFill>
+            <a:effectLst/>
+          </c:spPr>
+          <c:invertIfNegative val="0"/>
+          <c:dLbls>
+            <c:numFmt formatCode="0.0" sourceLinked="0"/>
+            <c:txPr>
+              <a:bodyPr/>
+              <a:lstStyle/>
+              <a:p>
+                <a:pPr>
+                  <a:defRPr b="0" i="0" strike="noStrike" sz="1100" u="none">
+                    <a:solidFill>
+                      <a:srgbClr val="EEF1F5"/>
+                    </a:solidFill>
+                    <a:latin typeface="+mn-lt"/>
+                  </a:defRPr>
+                </a:pPr>
+              </a:p>
+            </c:txPr>
+            <c:showLegendKey val="0"/>
+            <c:showVal val="1"/>
+            <c:showCatName val="0"/>
+            <c:showSerName val="0"/>
+            <c:showPercent val="0"/>
+            <c:showBubbleSize val="0"/>
+            <c:showLeaderLines val="0"/>
+          </c:dLbls>
+          <c:cat>
+            <c:multiLvlStrRef>
+              <c:f>Sheet1!$A$2:$A$4</c:f>
+              <c:multiLvlStrCache>
+                <c:ptCount val="3"/>
+                <c:lvl>
+                  <c:pt idx="0">
+                    <c:v>ATSS</c:v>
+                  </c:pt>
+                  <c:pt idx="1">
+                    <c:v>YOLOX-S</c:v>
+                  </c:pt>
+                  <c:pt idx="2">
+                    <c:v>YOLOX-Tiny</c:v>
+                  </c:pt>
+                </c:lvl>
+              </c:multiLvlStrCache>
+            </c:multiLvlStrRef>
+          </c:cat>
+          <c:val>
+            <c:numRef>
+              <c:f>Sheet1!$C$2:$C$4</c:f>
+              <c:numCache>
+                <c:formatCode>General</c:formatCode>
+                <c:ptCount val="3"/>
+                <c:pt idx="0">
+                  <c:v>20</c:v>
+                </c:pt>
+                <c:pt idx="1">
+                  <c:v>24.9</c:v>
+                </c:pt>
+                <c:pt idx="2">
+                  <c:v>8.3</c:v>
+                </c:pt>
+              </c:numCache>
+            </c:numRef>
+          </c:val>
+        </c:ser>
+        <c:dLbls>
+          <c:numFmt formatCode="0.0" sourceLinked="0"/>
+          <c:txPr>
+            <a:bodyPr/>
+            <a:lstStyle/>
+            <a:p>
+              <a:pPr>
+                <a:defRPr b="0" i="0" strike="noStrike" sz="1100" u="none">
+                  <a:solidFill>
+                    <a:srgbClr val="EEF1F5"/>
+                  </a:solidFill>
+                  <a:latin typeface="+mn-lt"/>
+                </a:defRPr>
+              </a:pPr>
+            </a:p>
+          </c:txPr>
+          <c:showLegendKey val="0"/>
+          <c:showVal val="1"/>
+          <c:showCatName val="0"/>
+          <c:showSerName val="0"/>
+          <c:showPercent val="0"/>
+          <c:showBubbleSize val="0"/>
+          <c:showLeaderLines val="0"/>
+        </c:dLbls>
+        <c:gapWidth val="55"/>
+        <c:overlap val="0"/>
+        <c:axId val="2094734554"/>
+        <c:axId val="2094734552"/>
+        <c:axId val="2094734556"/>
+      </c:barChart>
+      <c:catAx>
+        <c:axId val="2094734554"/>
+        <c:scaling>
+          <c:orientation val="minMax"/>
+        </c:scaling>
+        <c:delete val="0"/>
+        <c:axPos val="b"/>
+        <c:numFmt formatCode="General" sourceLinked="1"/>
+        <c:majorTickMark val="out"/>
+        <c:minorTickMark val="none"/>
+        <c:tickLblPos val="low"/>
+        <c:spPr>
+          <a:ln w="12700" cap="flat">
+            <a:noFill/>
+            <a:prstDash val="solid"/>
+            <a:round/>
+          </a:ln>
+        </c:spPr>
+        <c:txPr>
+          <a:bodyPr/>
+          <a:lstStyle/>
+          <a:p>
+            <a:pPr>
+              <a:defRPr sz="1200" b="0" i="0" u="none" strike="noStrike">
+                <a:solidFill>
+                  <a:srgbClr val="EEF1F5"/>
+                </a:solidFill>
+                <a:latin typeface="+mn-lt"/>
+              </a:defRPr>
+            </a:pPr>
+            <a:endParaRPr lang="en-US"/>
+          </a:p>
+        </c:txPr>
+        <c:crossAx val="2094734552"/>
+        <c:crosses val="autoZero"/>
+        <c:auto val="1"/>
+        <c:lblAlgn val="ctr"/>
+        <c:noMultiLvlLbl val="1"/>
+      </c:catAx>
+      <c:valAx>
+        <c:axId val="2094734552"/>
+        <c:scaling>
+          <c:orientation val="minMax"/>
+          <c:min val="0"/>
+        </c:scaling>
+        <c:delete val="0"/>
+        <c:axPos val="l"/>
+        <c:majorGridlines>
+          <c:spPr>
+            <a:ln w="6350" cap="flat">
+              <a:solidFill>
+                <a:srgbClr val="3A3F48"/>
+              </a:solidFill>
+              <a:prstDash val="solid"/>
+              <a:round/>
+            </a:ln>
+          </c:spPr>
+        </c:majorGridlines>
+        <c:numFmt formatCode="0" sourceLinked="0"/>
+        <c:majorTickMark val="out"/>
+        <c:minorTickMark val="none"/>
+        <c:tickLblPos val="nextTo"/>
+        <c:spPr>
+          <a:ln w="12700" cap="flat">
+            <a:noFill/>
+            <a:prstDash val="solid"/>
+            <a:round/>
+          </a:ln>
+        </c:spPr>
+        <c:txPr>
+          <a:bodyPr/>
+          <a:lstStyle/>
+          <a:p>
+            <a:pPr>
+              <a:defRPr sz="1100" b="0" i="0" u="none" strike="noStrike">
+                <a:solidFill>
+                  <a:srgbClr val="9AA4B2"/>
+                </a:solidFill>
+                <a:latin typeface="+mn-lt"/>
+              </a:defRPr>
+            </a:pPr>
+            <a:endParaRPr lang="en-US"/>
+          </a:p>
+        </c:txPr>
+        <c:crossAx val="2094734554"/>
+        <c:crosses val="autoZero"/>
+        <c:crossBetween val="between"/>
+      </c:valAx>
+      <c:spPr>
+        <a:noFill/>
+        <a:ln>
+          <a:noFill/>
+        </a:ln>
+        <a:effectLst/>
+      </c:spPr>
+    </c:plotArea>
+    <c:legend>
+      <c:legendPos val="t"/>
+      <c:overlay val="0"/>
+      <c:txPr>
+        <a:bodyPr/>
+        <a:lstStyle/>
+        <a:p>
+          <a:pPr>
+            <a:defRPr sz="1200">
+              <a:solidFill>
+                <a:srgbClr val="EEF1F5"/>
+              </a:solidFill>
+              <a:latin typeface="+mn-lt"/>
+              <a:cs typeface="+mn-lt"/>
+            </a:defRPr>
+          </a:pPr>
+          <a:endParaRPr lang="en-US"/>
+        </a:p>
+      </c:txPr>
+    </c:legend>
+    <c:plotVisOnly val="1"/>
+    <c:dispBlanksAs val="span"/>
+  </c:chart>
+  <c:spPr>
+    <a:noFill/>
+    <a:ln>
+      <a:noFill/>
+    </a:ln>
+    <a:effectLst/>
+  </c:spPr>
+  <c:externalData r:id="rId1">
+    <c:autoUpdate val="0"/>
+  </c:externalData>
+</c:chartSpace>
+</file>
+
 <file path=ppt/notesMasters/notesMaster1.xml><?xml version="1.0" encoding="utf-8"?>
 <p:notesMaster xmlns:a="http://schemas.openxmlformats.org/drawingml/2006/main" xmlns:r="http://schemas.openxmlformats.org/officeDocument/2006/relationships" xmlns:p="http://schemas.openxmlformats.org/presentationml/2006/main">
   <p:cSld>
@@ -1360,7 +1729,7 @@
           <a:p>
             <a:r>
               <a:rPr lang="en-US" dirty="0"/>
-              <a:t>세 모델을 기본 FP16으로 비교했습니다. 파라미터가 가장 적은 ATSS가 92.9%로 가장 정확했고, Geti 점수도 같은 순서입니다. 처음 보는 2차 세트에서도 ATSS가 YOLOX-S보다 훨씬 많이 잡았습니다. 다만 '작다'는 파라미터 기준이고, 연산량은 Tiny가 가장 적습니다. 그리고 1차 점수는 학습 사진이 섞였을 수 있어서, 모델끼리 비교하는 용도로만 봅니다.</a:t>
+              <a:t>왼쪽은 Geti 화면입니다. 세 모델 모두 같은 2,800장으로 학습했고, Geti 점수는 ATSS 86%, 나머지 81%입니다. 오른쪽은 직접 만든 벤치마크로 잰 값인데 순서가 같습니다. 파라미터가 가장 적은 ATSS가 가장 정확했고, 학습에 안 쓴 2차 세트에서도 ATSS가 YOLOX-S보다 훨씬 많이 잡았습니다. 다만 '작다'는 파라미터 기준이고, 연산량은 Tiny가 가장 적습니다.</a:t>
             </a:r>
             <a:endParaRPr lang="en-US" dirty="0"/>
           </a:p>
@@ -6141,64 +6510,46 @@
                   <a:schemeClr val="tx2"/>
                 </a:solidFill>
               </a:rPr>
-              <a:t>FP16 기준 · 1차 테스트 131장</a:t>
+              <a:t>FP16 기준 · Geti 화면 vs 직접 측정</a:t>
             </a:r>
             <a:endParaRPr lang="en-US" sz="1500" dirty="0"/>
           </a:p>
         </p:txBody>
       </p:sp>
-      <p:sp>
-        <p:nvSpPr>
-          <p:cNvPr id="4" name="model-0"/>
-          <p:cNvSpPr/>
+      <p:pic>
+        <p:nvPicPr>
+          <p:cNvPr id="4" name="geti-models" descr="C:\Users\user\_se4nchoi\batteryvision\docs\submission\build\img\geti_models.png">    </p:cNvPr>
+          <p:cNvPicPr>
+            <a:picLocks noChangeAspect="1"/>
+          </p:cNvPicPr>
           <p:nvPr/>
-        </p:nvSpPr>
-        <p:spPr>
-          <a:xfrm>
-            <a:off x="548640" y="1645920"/>
-            <a:ext cx="3566160" cy="2834640"/>
-          </a:xfrm>
-          <a:prstGeom prst="roundRect">
-            <a:avLst>
-              <a:gd name="adj" fmla="val 2581"/>
-            </a:avLst>
-          </a:prstGeom>
-          <a:solidFill>
-            <a:schemeClr val="bg2"/>
-          </a:solidFill>
-          <a:ln/>
-        </p:spPr>
-      </p:sp>
-      <p:sp>
-        <p:nvSpPr>
-          <p:cNvPr id="5" name="model-dot-0"/>
-          <p:cNvSpPr/>
-          <p:nvPr/>
-        </p:nvSpPr>
-        <p:spPr>
-          <a:xfrm>
-            <a:off x="822960" y="1865376"/>
-            <a:ext cx="146304" cy="146304"/>
-          </a:xfrm>
-          <a:prstGeom prst="ellipse">
-            <a:avLst/>
-          </a:prstGeom>
-          <a:solidFill>
-            <a:schemeClr val="accent4"/>
-          </a:solidFill>
-          <a:ln/>
-        </p:spPr>
-      </p:sp>
-      <p:sp>
-        <p:nvSpPr>
-          <p:cNvPr id="6" name="model-n-0"/>
+        </p:nvPicPr>
+        <p:blipFill>
+          <a:blip r:embed="rId1"/>
+          <a:stretch>
+            <a:fillRect/>
+          </a:stretch>
+        </p:blipFill>
+        <p:spPr>
+          <a:xfrm>
+            <a:off x="548640" y="1600200"/>
+            <a:ext cx="4282112" cy="4617720"/>
+          </a:xfrm>
+          <a:prstGeom prst="rect">
+            <a:avLst/>
+          </a:prstGeom>
+        </p:spPr>
+      </p:pic>
+      <p:sp>
+        <p:nvSpPr>
+          <p:cNvPr id="5" name="own-h"/>
           <p:cNvSpPr txBox="1"/>
           <p:nvPr/>
         </p:nvSpPr>
         <p:spPr>
           <a:xfrm>
-            <a:off x="1060704" y="1783080"/>
-            <a:ext cx="2194560" cy="320040"/>
+            <a:off x="5150792" y="1600200"/>
+            <a:ext cx="6492263" cy="320040"/>
           </a:xfrm>
           <a:prstGeom prst="rect">
             <a:avLst/>
@@ -6219,26 +6570,356 @@
                   <a:schemeClr val="tx1"/>
                 </a:solidFill>
               </a:rPr>
+              <a:t>직접 측정 · 1차 테스트 131장</a:t>
+            </a:r>
+            <a:endParaRPr lang="en-US" sz="1600" dirty="0"/>
+          </a:p>
+        </p:txBody>
+      </p:sp>
+      <p:sp>
+        <p:nvSpPr>
+          <p:cNvPr id="6" name="own-col-0"/>
+          <p:cNvSpPr txBox="1"/>
+          <p:nvPr/>
+        </p:nvSpPr>
+        <p:spPr>
+          <a:xfrm>
+            <a:off x="7665392" y="2011680"/>
+            <a:ext cx="1600200" cy="274320"/>
+          </a:xfrm>
+          <a:prstGeom prst="rect">
+            <a:avLst/>
+          </a:prstGeom>
+          <a:noFill/>
+          <a:ln/>
+        </p:spPr>
+        <p:txBody>
+          <a:bodyPr wrap="square" lIns="0" tIns="0" rIns="0" bIns="0" rtlCol="0" anchor="t"/>
+          <a:lstStyle/>
+          <a:p>
+            <a:pPr algn="r" indent="0" marL="0">
+              <a:buNone/>
+            </a:pPr>
+            <a:r>
+              <a:rPr lang="en-US" sz="1200" dirty="0">
+                <a:solidFill>
+                  <a:schemeClr val="tx2"/>
+                </a:solidFill>
+              </a:rPr>
+              <a:t>mAP@50</a:t>
+            </a:r>
+            <a:endParaRPr lang="en-US" sz="1200" dirty="0"/>
+          </a:p>
+        </p:txBody>
+      </p:sp>
+      <p:sp>
+        <p:nvSpPr>
+          <p:cNvPr id="7" name="own-col-1"/>
+          <p:cNvSpPr txBox="1"/>
+          <p:nvPr/>
+        </p:nvSpPr>
+        <p:spPr>
+          <a:xfrm>
+            <a:off x="9311312" y="2011680"/>
+            <a:ext cx="1097280" cy="274320"/>
+          </a:xfrm>
+          <a:prstGeom prst="rect">
+            <a:avLst/>
+          </a:prstGeom>
+          <a:noFill/>
+          <a:ln/>
+        </p:spPr>
+        <p:txBody>
+          <a:bodyPr wrap="square" lIns="0" tIns="0" rIns="0" bIns="0" rtlCol="0" anchor="t"/>
+          <a:lstStyle/>
+          <a:p>
+            <a:pPr algn="r" indent="0" marL="0">
+              <a:buNone/>
+            </a:pPr>
+            <a:r>
+              <a:rPr lang="en-US" sz="1200" dirty="0">
+                <a:solidFill>
+                  <a:schemeClr val="tx2"/>
+                </a:solidFill>
+              </a:rPr>
+              <a:t>scratch AP</a:t>
+            </a:r>
+            <a:endParaRPr lang="en-US" sz="1200" dirty="0"/>
+          </a:p>
+        </p:txBody>
+      </p:sp>
+      <p:sp>
+        <p:nvSpPr>
+          <p:cNvPr id="8" name="own-col-2"/>
+          <p:cNvSpPr txBox="1"/>
+          <p:nvPr/>
+        </p:nvSpPr>
+        <p:spPr>
+          <a:xfrm>
+            <a:off x="10179992" y="2011680"/>
+            <a:ext cx="1280160" cy="274320"/>
+          </a:xfrm>
+          <a:prstGeom prst="rect">
+            <a:avLst/>
+          </a:prstGeom>
+          <a:noFill/>
+          <a:ln/>
+        </p:spPr>
+        <p:txBody>
+          <a:bodyPr wrap="square" lIns="0" tIns="0" rIns="0" bIns="0" rtlCol="0" anchor="t"/>
+          <a:lstStyle/>
+          <a:p>
+            <a:pPr algn="r" indent="0" marL="0">
+              <a:buNone/>
+            </a:pPr>
+            <a:r>
+              <a:rPr lang="en-US" sz="1200" dirty="0">
+                <a:solidFill>
+                  <a:schemeClr val="tx2"/>
+                </a:solidFill>
+              </a:rPr>
+              <a:t>2차 세트 검출</a:t>
+            </a:r>
+            <a:endParaRPr lang="en-US" sz="1200" dirty="0"/>
+          </a:p>
+        </p:txBody>
+      </p:sp>
+      <p:sp>
+        <p:nvSpPr>
+          <p:cNvPr id="9" name="own-row-0"/>
+          <p:cNvSpPr/>
+          <p:nvPr/>
+        </p:nvSpPr>
+        <p:spPr>
+          <a:xfrm>
+            <a:off x="5150792" y="2377440"/>
+            <a:ext cx="6492263" cy="1051560"/>
+          </a:xfrm>
+          <a:prstGeom prst="roundRect">
+            <a:avLst>
+              <a:gd name="adj" fmla="val 6957"/>
+            </a:avLst>
+          </a:prstGeom>
+          <a:solidFill>
+            <a:schemeClr val="bg2"/>
+          </a:solidFill>
+          <a:ln/>
+        </p:spPr>
+      </p:sp>
+      <p:sp>
+        <p:nvSpPr>
+          <p:cNvPr id="10" name="own-dot-0"/>
+          <p:cNvSpPr/>
+          <p:nvPr/>
+        </p:nvSpPr>
+        <p:spPr>
+          <a:xfrm>
+            <a:off x="5379392" y="2606040"/>
+            <a:ext cx="146304" cy="146304"/>
+          </a:xfrm>
+          <a:prstGeom prst="ellipse">
+            <a:avLst/>
+          </a:prstGeom>
+          <a:solidFill>
+            <a:schemeClr val="accent4"/>
+          </a:solidFill>
+          <a:ln/>
+        </p:spPr>
+      </p:sp>
+      <p:sp>
+        <p:nvSpPr>
+          <p:cNvPr id="11" name="own-n-0"/>
+          <p:cNvSpPr txBox="1"/>
+          <p:nvPr/>
+        </p:nvSpPr>
+        <p:spPr>
+          <a:xfrm>
+            <a:off x="5607992" y="2514600"/>
+            <a:ext cx="2103120" cy="320040"/>
+          </a:xfrm>
+          <a:prstGeom prst="rect">
+            <a:avLst/>
+          </a:prstGeom>
+          <a:noFill/>
+          <a:ln/>
+        </p:spPr>
+        <p:txBody>
+          <a:bodyPr wrap="square" lIns="0" tIns="0" rIns="0" bIns="0" rtlCol="0" anchor="t"/>
+          <a:lstStyle/>
+          <a:p>
+            <a:pPr indent="0" marL="0">
+              <a:buNone/>
+            </a:pPr>
+            <a:r>
+              <a:rPr lang="en-US" sz="1500" b="1" dirty="0">
+                <a:solidFill>
+                  <a:schemeClr val="tx1"/>
+                </a:solidFill>
+              </a:rPr>
               <a:t>ATSS-MobileNetV2</a:t>
             </a:r>
-            <a:endParaRPr lang="en-US" sz="1600" dirty="0"/>
+            <a:endParaRPr lang="en-US" sz="1500" dirty="0"/>
           </a:p>
         </p:txBody>
       </p:sp>
       <p:sp>
         <p:nvSpPr>
-          <p:cNvPr id="7" name="best-badge"/>
+          <p:cNvPr id="12" name="own-s-0"/>
+          <p:cNvSpPr txBox="1"/>
+          <p:nvPr/>
+        </p:nvSpPr>
+        <p:spPr>
+          <a:xfrm>
+            <a:off x="5607992" y="2926080"/>
+            <a:ext cx="2103120" cy="274320"/>
+          </a:xfrm>
+          <a:prstGeom prst="rect">
+            <a:avLst/>
+          </a:prstGeom>
+          <a:noFill/>
+          <a:ln/>
+        </p:spPr>
+        <p:txBody>
+          <a:bodyPr wrap="square" lIns="0" tIns="0" rIns="0" bIns="0" rtlCol="0" anchor="t"/>
+          <a:lstStyle/>
+          <a:p>
+            <a:pPr indent="0" marL="0">
+              <a:buNone/>
+            </a:pPr>
+            <a:r>
+              <a:rPr lang="en-US" sz="1200" dirty="0">
+                <a:solidFill>
+                  <a:schemeClr val="tx2"/>
+                </a:solidFill>
+              </a:rPr>
+              <a:t>3.9M · 20.6 GFLOPs</a:t>
+            </a:r>
+            <a:endParaRPr lang="en-US" sz="1200" dirty="0"/>
+          </a:p>
+        </p:txBody>
+      </p:sp>
+      <p:sp>
+        <p:nvSpPr>
+          <p:cNvPr id="13" name="own-m-0"/>
+          <p:cNvSpPr txBox="1"/>
+          <p:nvPr/>
+        </p:nvSpPr>
+        <p:spPr>
+          <a:xfrm>
+            <a:off x="7665392" y="2487168"/>
+            <a:ext cx="1600200" cy="822960"/>
+          </a:xfrm>
+          <a:prstGeom prst="rect">
+            <a:avLst/>
+          </a:prstGeom>
+          <a:noFill/>
+          <a:ln/>
+        </p:spPr>
+        <p:txBody>
+          <a:bodyPr wrap="square" lIns="0" tIns="0" rIns="0" bIns="0" rtlCol="0" anchor="ctr"/>
+          <a:lstStyle/>
+          <a:p>
+            <a:pPr algn="r" indent="0" marL="0">
+              <a:buNone/>
+            </a:pPr>
+            <a:r>
+              <a:rPr lang="en-US" sz="3400" b="1" dirty="0">
+                <a:solidFill>
+                  <a:schemeClr val="accent4"/>
+                </a:solidFill>
+              </a:rPr>
+              <a:t>92.9%</a:t>
+            </a:r>
+            <a:endParaRPr lang="en-US" sz="3400" dirty="0"/>
+          </a:p>
+        </p:txBody>
+      </p:sp>
+      <p:sp>
+        <p:nvSpPr>
+          <p:cNvPr id="14" name="own-a-0"/>
+          <p:cNvSpPr txBox="1"/>
+          <p:nvPr/>
+        </p:nvSpPr>
+        <p:spPr>
+          <a:xfrm>
+            <a:off x="9311312" y="2487168"/>
+            <a:ext cx="1097280" cy="822960"/>
+          </a:xfrm>
+          <a:prstGeom prst="rect">
+            <a:avLst/>
+          </a:prstGeom>
+          <a:noFill/>
+          <a:ln/>
+        </p:spPr>
+        <p:txBody>
+          <a:bodyPr wrap="square" lIns="0" tIns="0" rIns="0" bIns="0" rtlCol="0" anchor="ctr"/>
+          <a:lstStyle/>
+          <a:p>
+            <a:pPr algn="r" indent="0" marL="0">
+              <a:buNone/>
+            </a:pPr>
+            <a:r>
+              <a:rPr lang="en-US" sz="1800" dirty="0">
+                <a:solidFill>
+                  <a:schemeClr val="tx1"/>
+                </a:solidFill>
+              </a:rPr>
+              <a:t>0.86</a:t>
+            </a:r>
+            <a:endParaRPr lang="en-US" sz="1800" dirty="0"/>
+          </a:p>
+        </p:txBody>
+      </p:sp>
+      <p:sp>
+        <p:nvSpPr>
+          <p:cNvPr id="15" name="own-h2-0"/>
+          <p:cNvSpPr txBox="1"/>
+          <p:nvPr/>
+        </p:nvSpPr>
+        <p:spPr>
+          <a:xfrm>
+            <a:off x="10454312" y="2487168"/>
+            <a:ext cx="1005840" cy="822960"/>
+          </a:xfrm>
+          <a:prstGeom prst="rect">
+            <a:avLst/>
+          </a:prstGeom>
+          <a:noFill/>
+          <a:ln/>
+        </p:spPr>
+        <p:txBody>
+          <a:bodyPr wrap="square" lIns="0" tIns="0" rIns="0" bIns="0" rtlCol="0" anchor="ctr"/>
+          <a:lstStyle/>
+          <a:p>
+            <a:pPr algn="r" indent="0" marL="0">
+              <a:buNone/>
+            </a:pPr>
+            <a:r>
+              <a:rPr lang="en-US" sz="1800" b="1" dirty="0">
+                <a:solidFill>
+                  <a:schemeClr val="accent2"/>
+                </a:solidFill>
+              </a:rPr>
+              <a:t>47%</a:t>
+            </a:r>
+            <a:endParaRPr lang="en-US" sz="1800" dirty="0"/>
+          </a:p>
+        </p:txBody>
+      </p:sp>
+      <p:sp>
+        <p:nvSpPr>
+          <p:cNvPr id="16" name="best-badge"/>
           <p:cNvSpPr/>
           <p:nvPr/>
         </p:nvSpPr>
         <p:spPr>
           <a:xfrm>
-            <a:off x="3246120" y="1801368"/>
-            <a:ext cx="640080" cy="274320"/>
+            <a:off x="7071032" y="2944368"/>
+            <a:ext cx="502920" cy="237744"/>
           </a:xfrm>
           <a:prstGeom prst="roundRect">
             <a:avLst>
-              <a:gd name="adj" fmla="val 16667"/>
+              <a:gd name="adj" fmla="val 15385"/>
             </a:avLst>
           </a:prstGeom>
           <a:solidFill>
@@ -6249,14 +6930,14 @@
       </p:sp>
       <p:sp>
         <p:nvSpPr>
-          <p:cNvPr id="8" name="best-t"/>
+          <p:cNvPr id="17" name="best-t"/>
           <p:cNvSpPr txBox="1"/>
           <p:nvPr/>
         </p:nvSpPr>
         <p:spPr>
           <a:xfrm>
-            <a:off x="3246120" y="1801368"/>
-            <a:ext cx="640080" cy="274320"/>
+            <a:off x="7071032" y="2944368"/>
+            <a:ext cx="502920" cy="237744"/>
           </a:xfrm>
           <a:prstGeom prst="rect">
             <a:avLst/>
@@ -6272,27 +6953,69 @@
               <a:buNone/>
             </a:pPr>
             <a:r>
-              <a:rPr lang="en-US" sz="1100" b="1" dirty="0">
+              <a:rPr lang="en-US" sz="1000" b="1" dirty="0">
                 <a:solidFill>
                   <a:schemeClr val="bg1"/>
                 </a:solidFill>
               </a:rPr>
               <a:t>최고</a:t>
             </a:r>
-            <a:endParaRPr lang="en-US" sz="1100" dirty="0"/>
+            <a:endParaRPr lang="en-US" sz="1000" dirty="0"/>
           </a:p>
         </p:txBody>
       </p:sp>
       <p:sp>
         <p:nvSpPr>
-          <p:cNvPr id="9" name="model-s-0"/>
+          <p:cNvPr id="18" name="own-row-1"/>
+          <p:cNvSpPr/>
+          <p:nvPr/>
+        </p:nvSpPr>
+        <p:spPr>
+          <a:xfrm>
+            <a:off x="5150792" y="3566160"/>
+            <a:ext cx="6492263" cy="1051560"/>
+          </a:xfrm>
+          <a:prstGeom prst="roundRect">
+            <a:avLst>
+              <a:gd name="adj" fmla="val 6957"/>
+            </a:avLst>
+          </a:prstGeom>
+          <a:solidFill>
+            <a:schemeClr val="bg2"/>
+          </a:solidFill>
+          <a:ln/>
+        </p:spPr>
+      </p:sp>
+      <p:sp>
+        <p:nvSpPr>
+          <p:cNvPr id="19" name="own-dot-1"/>
+          <p:cNvSpPr/>
+          <p:nvPr/>
+        </p:nvSpPr>
+        <p:spPr>
+          <a:xfrm>
+            <a:off x="5379392" y="3794760"/>
+            <a:ext cx="146304" cy="146304"/>
+          </a:xfrm>
+          <a:prstGeom prst="ellipse">
+            <a:avLst/>
+          </a:prstGeom>
+          <a:solidFill>
+            <a:schemeClr val="accent5"/>
+          </a:solidFill>
+          <a:ln/>
+        </p:spPr>
+      </p:sp>
+      <p:sp>
+        <p:nvSpPr>
+          <p:cNvPr id="20" name="own-n-1"/>
           <p:cNvSpPr txBox="1"/>
           <p:nvPr/>
         </p:nvSpPr>
         <p:spPr>
           <a:xfrm>
-            <a:off x="822960" y="2194560"/>
-            <a:ext cx="3154680" cy="274320"/>
+            <a:off x="5607992" y="3703320"/>
+            <a:ext cx="2103120" cy="320040"/>
           </a:xfrm>
           <a:prstGeom prst="rect">
             <a:avLst/>
@@ -6308,210 +7031,27 @@
               <a:buNone/>
             </a:pPr>
             <a:r>
-              <a:rPr lang="en-US" sz="1300" dirty="0">
-                <a:solidFill>
-                  <a:schemeClr val="tx2"/>
-                </a:solidFill>
-              </a:rPr>
-              <a:t>파라미터 </a:t>
-            </a:r>
-            <a:pPr indent="0" marL="0">
-              <a:buNone/>
-            </a:pPr>
-            <a:r>
-              <a:rPr lang="en-US" sz="1300" b="1" dirty="0">
-                <a:solidFill>
-                  <a:schemeClr val="tx1"/>
-                </a:solidFill>
-              </a:rPr>
-              <a:t>3.9M</a:t>
-            </a:r>
-            <a:pPr indent="0" marL="0">
-              <a:buNone/>
-            </a:pPr>
-            <a:r>
-              <a:rPr lang="en-US" sz="1300" dirty="0">
-                <a:solidFill>
-                  <a:schemeClr val="tx2"/>
-                </a:solidFill>
-              </a:rPr>
-              <a:t>   연산량 </a:t>
-            </a:r>
-            <a:pPr indent="0" marL="0">
-              <a:buNone/>
-            </a:pPr>
-            <a:r>
-              <a:rPr lang="en-US" sz="1300" b="1" dirty="0">
-                <a:solidFill>
-                  <a:schemeClr val="tx1"/>
-                </a:solidFill>
-              </a:rPr>
-              <a:t>20.6 GFLOPs</a:t>
-            </a:r>
-            <a:endParaRPr lang="en-US" sz="1300" dirty="0"/>
-          </a:p>
-        </p:txBody>
-      </p:sp>
-      <p:sp>
-        <p:nvSpPr>
-          <p:cNvPr id="10" name="model-m-0"/>
-          <p:cNvSpPr txBox="1"/>
-          <p:nvPr/>
-        </p:nvSpPr>
-        <p:spPr>
-          <a:xfrm>
-            <a:off x="822960" y="2697480"/>
-            <a:ext cx="3108960" cy="1005840"/>
-          </a:xfrm>
-          <a:prstGeom prst="rect">
-            <a:avLst/>
-          </a:prstGeom>
-          <a:noFill/>
-          <a:ln/>
-        </p:spPr>
-        <p:txBody>
-          <a:bodyPr wrap="square" lIns="0" tIns="0" rIns="0" bIns="0" rtlCol="0" anchor="t"/>
-          <a:lstStyle/>
-          <a:p>
-            <a:pPr indent="0" marL="0">
-              <a:buNone/>
-            </a:pPr>
-            <a:r>
-              <a:rPr lang="en-US" sz="5400" b="1" dirty="0">
-                <a:solidFill>
-                  <a:schemeClr val="accent4"/>
-                </a:solidFill>
-              </a:rPr>
-              <a:t>92.9%</a:t>
-            </a:r>
-            <a:endParaRPr lang="en-US" sz="5400" dirty="0"/>
-          </a:p>
-        </p:txBody>
-      </p:sp>
-      <p:sp>
-        <p:nvSpPr>
-          <p:cNvPr id="11" name="model-a-0"/>
-          <p:cNvSpPr txBox="1"/>
-          <p:nvPr/>
-        </p:nvSpPr>
-        <p:spPr>
-          <a:xfrm>
-            <a:off x="822960" y="3886200"/>
-            <a:ext cx="3108960" cy="274320"/>
-          </a:xfrm>
-          <a:prstGeom prst="rect">
-            <a:avLst/>
-          </a:prstGeom>
-          <a:noFill/>
-          <a:ln/>
-        </p:spPr>
-        <p:txBody>
-          <a:bodyPr wrap="square" lIns="0" tIns="0" rIns="0" bIns="0" rtlCol="0" anchor="t"/>
-          <a:lstStyle/>
-          <a:p>
-            <a:pPr indent="0" marL="0">
-              <a:buNone/>
-            </a:pPr>
-            <a:r>
-              <a:rPr lang="en-US" sz="1400" dirty="0">
-                <a:solidFill>
-                  <a:schemeClr val="tx2"/>
-                </a:solidFill>
-              </a:rPr>
-              <a:t>mAP@50 · scratch AP 0.86</a:t>
-            </a:r>
-            <a:endParaRPr lang="en-US" sz="1400" dirty="0"/>
-          </a:p>
-        </p:txBody>
-      </p:sp>
-      <p:sp>
-        <p:nvSpPr>
-          <p:cNvPr id="12" name="model-1"/>
-          <p:cNvSpPr/>
-          <p:nvPr/>
-        </p:nvSpPr>
-        <p:spPr>
-          <a:xfrm>
-            <a:off x="4297680" y="1645920"/>
-            <a:ext cx="3566160" cy="2834640"/>
-          </a:xfrm>
-          <a:prstGeom prst="roundRect">
-            <a:avLst>
-              <a:gd name="adj" fmla="val 2581"/>
-            </a:avLst>
-          </a:prstGeom>
-          <a:solidFill>
-            <a:schemeClr val="bg2"/>
-          </a:solidFill>
-          <a:ln/>
-        </p:spPr>
-      </p:sp>
-      <p:sp>
-        <p:nvSpPr>
-          <p:cNvPr id="13" name="model-dot-1"/>
-          <p:cNvSpPr/>
-          <p:nvPr/>
-        </p:nvSpPr>
-        <p:spPr>
-          <a:xfrm>
-            <a:off x="4572000" y="1865376"/>
-            <a:ext cx="146304" cy="146304"/>
-          </a:xfrm>
-          <a:prstGeom prst="ellipse">
-            <a:avLst/>
-          </a:prstGeom>
-          <a:solidFill>
-            <a:schemeClr val="accent5"/>
-          </a:solidFill>
-          <a:ln/>
-        </p:spPr>
-      </p:sp>
-      <p:sp>
-        <p:nvSpPr>
-          <p:cNvPr id="14" name="model-n-1"/>
-          <p:cNvSpPr txBox="1"/>
-          <p:nvPr/>
-        </p:nvSpPr>
-        <p:spPr>
-          <a:xfrm>
-            <a:off x="4809744" y="1783080"/>
-            <a:ext cx="2194560" cy="320040"/>
-          </a:xfrm>
-          <a:prstGeom prst="rect">
-            <a:avLst/>
-          </a:prstGeom>
-          <a:noFill/>
-          <a:ln/>
-        </p:spPr>
-        <p:txBody>
-          <a:bodyPr wrap="square" lIns="0" tIns="0" rIns="0" bIns="0" rtlCol="0" anchor="t"/>
-          <a:lstStyle/>
-          <a:p>
-            <a:pPr indent="0" marL="0">
-              <a:buNone/>
-            </a:pPr>
-            <a:r>
-              <a:rPr lang="en-US" sz="1600" b="1" dirty="0">
+              <a:rPr lang="en-US" sz="1500" b="1" dirty="0">
                 <a:solidFill>
                   <a:schemeClr val="tx1"/>
                 </a:solidFill>
               </a:rPr>
               <a:t>YOLOX-S</a:t>
             </a:r>
-            <a:endParaRPr lang="en-US" sz="1600" dirty="0"/>
+            <a:endParaRPr lang="en-US" sz="1500" dirty="0"/>
           </a:p>
         </p:txBody>
       </p:sp>
       <p:sp>
         <p:nvSpPr>
-          <p:cNvPr id="15" name="model-s-1"/>
+          <p:cNvPr id="21" name="own-s-1"/>
           <p:cNvSpPr txBox="1"/>
           <p:nvPr/>
         </p:nvSpPr>
         <p:spPr>
           <a:xfrm>
-            <a:off x="4572000" y="2194560"/>
-            <a:ext cx="3154680" cy="274320"/>
+            <a:off x="5607992" y="4114800"/>
+            <a:ext cx="2103120" cy="274320"/>
           </a:xfrm>
           <a:prstGeom prst="rect">
             <a:avLst/>
@@ -6527,96 +7067,177 @@
               <a:buNone/>
             </a:pPr>
             <a:r>
-              <a:rPr lang="en-US" sz="1300" dirty="0">
+              <a:rPr lang="en-US" sz="1200" dirty="0">
                 <a:solidFill>
                   <a:schemeClr val="tx2"/>
                 </a:solidFill>
               </a:rPr>
-              <a:t>파라미터 </a:t>
+              <a:t>9M · 26.8 GFLOPs</a:t>
             </a:r>
-            <a:pPr indent="0" marL="0">
+            <a:endParaRPr lang="en-US" sz="1200" dirty="0"/>
+          </a:p>
+        </p:txBody>
+      </p:sp>
+      <p:sp>
+        <p:nvSpPr>
+          <p:cNvPr id="22" name="own-m-1"/>
+          <p:cNvSpPr txBox="1"/>
+          <p:nvPr/>
+        </p:nvSpPr>
+        <p:spPr>
+          <a:xfrm>
+            <a:off x="7665392" y="3675888"/>
+            <a:ext cx="1600200" cy="822960"/>
+          </a:xfrm>
+          <a:prstGeom prst="rect">
+            <a:avLst/>
+          </a:prstGeom>
+          <a:noFill/>
+          <a:ln/>
+        </p:spPr>
+        <p:txBody>
+          <a:bodyPr wrap="square" lIns="0" tIns="0" rIns="0" bIns="0" rtlCol="0" anchor="ctr"/>
+          <a:lstStyle/>
+          <a:p>
+            <a:pPr algn="r" indent="0" marL="0">
               <a:buNone/>
             </a:pPr>
             <a:r>
-              <a:rPr lang="en-US" sz="1300" b="1" dirty="0">
-                <a:solidFill>
-                  <a:schemeClr val="tx1"/>
-                </a:solidFill>
-              </a:rPr>
-              <a:t>9M</a:t>
-            </a:r>
-            <a:pPr indent="0" marL="0">
-              <a:buNone/>
-            </a:pPr>
-            <a:r>
-              <a:rPr lang="en-US" sz="1300" dirty="0">
-                <a:solidFill>
-                  <a:schemeClr val="tx2"/>
-                </a:solidFill>
-              </a:rPr>
-              <a:t>   연산량 </a:t>
-            </a:r>
-            <a:pPr indent="0" marL="0">
-              <a:buNone/>
-            </a:pPr>
-            <a:r>
-              <a:rPr lang="en-US" sz="1300" b="1" dirty="0">
-                <a:solidFill>
-                  <a:schemeClr val="tx1"/>
-                </a:solidFill>
-              </a:rPr>
-              <a:t>26.8 GFLOPs</a:t>
-            </a:r>
-            <a:endParaRPr lang="en-US" sz="1300" dirty="0"/>
-          </a:p>
-        </p:txBody>
-      </p:sp>
-      <p:sp>
-        <p:nvSpPr>
-          <p:cNvPr id="16" name="model-m-1"/>
-          <p:cNvSpPr txBox="1"/>
-          <p:nvPr/>
-        </p:nvSpPr>
-        <p:spPr>
-          <a:xfrm>
-            <a:off x="4572000" y="2697480"/>
-            <a:ext cx="3108960" cy="1005840"/>
-          </a:xfrm>
-          <a:prstGeom prst="rect">
-            <a:avLst/>
-          </a:prstGeom>
-          <a:noFill/>
-          <a:ln/>
-        </p:spPr>
-        <p:txBody>
-          <a:bodyPr wrap="square" lIns="0" tIns="0" rIns="0" bIns="0" rtlCol="0" anchor="t"/>
-          <a:lstStyle/>
-          <a:p>
-            <a:pPr indent="0" marL="0">
-              <a:buNone/>
-            </a:pPr>
-            <a:r>
-              <a:rPr lang="en-US" sz="5400" b="1" dirty="0">
+              <a:rPr lang="en-US" sz="3400" b="1" dirty="0">
                 <a:solidFill>
                   <a:schemeClr val="accent5"/>
                 </a:solidFill>
               </a:rPr>
               <a:t>89.2%</a:t>
             </a:r>
-            <a:endParaRPr lang="en-US" sz="5400" dirty="0"/>
+            <a:endParaRPr lang="en-US" sz="3400" dirty="0"/>
           </a:p>
         </p:txBody>
       </p:sp>
       <p:sp>
         <p:nvSpPr>
-          <p:cNvPr id="17" name="model-a-1"/>
+          <p:cNvPr id="23" name="own-a-1"/>
           <p:cNvSpPr txBox="1"/>
           <p:nvPr/>
         </p:nvSpPr>
         <p:spPr>
           <a:xfrm>
-            <a:off x="4572000" y="3886200"/>
-            <a:ext cx="3108960" cy="274320"/>
+            <a:off x="9311312" y="3675888"/>
+            <a:ext cx="1097280" cy="822960"/>
+          </a:xfrm>
+          <a:prstGeom prst="rect">
+            <a:avLst/>
+          </a:prstGeom>
+          <a:noFill/>
+          <a:ln/>
+        </p:spPr>
+        <p:txBody>
+          <a:bodyPr wrap="square" lIns="0" tIns="0" rIns="0" bIns="0" rtlCol="0" anchor="ctr"/>
+          <a:lstStyle/>
+          <a:p>
+            <a:pPr algn="r" indent="0" marL="0">
+              <a:buNone/>
+            </a:pPr>
+            <a:r>
+              <a:rPr lang="en-US" sz="1800" dirty="0">
+                <a:solidFill>
+                  <a:schemeClr val="tx1"/>
+                </a:solidFill>
+              </a:rPr>
+              <a:t>0.78</a:t>
+            </a:r>
+            <a:endParaRPr lang="en-US" sz="1800" dirty="0"/>
+          </a:p>
+        </p:txBody>
+      </p:sp>
+      <p:sp>
+        <p:nvSpPr>
+          <p:cNvPr id="24" name="own-h2-1"/>
+          <p:cNvSpPr txBox="1"/>
+          <p:nvPr/>
+        </p:nvSpPr>
+        <p:spPr>
+          <a:xfrm>
+            <a:off x="10454312" y="3675888"/>
+            <a:ext cx="1005840" cy="822960"/>
+          </a:xfrm>
+          <a:prstGeom prst="rect">
+            <a:avLst/>
+          </a:prstGeom>
+          <a:noFill/>
+          <a:ln/>
+        </p:spPr>
+        <p:txBody>
+          <a:bodyPr wrap="square" lIns="0" tIns="0" rIns="0" bIns="0" rtlCol="0" anchor="ctr"/>
+          <a:lstStyle/>
+          <a:p>
+            <a:pPr algn="r" indent="0" marL="0">
+              <a:buNone/>
+            </a:pPr>
+            <a:r>
+              <a:rPr lang="en-US" sz="1800" b="1" dirty="0">
+                <a:solidFill>
+                  <a:schemeClr val="accent2"/>
+                </a:solidFill>
+              </a:rPr>
+              <a:t>3%</a:t>
+            </a:r>
+            <a:endParaRPr lang="en-US" sz="1800" dirty="0"/>
+          </a:p>
+        </p:txBody>
+      </p:sp>
+      <p:sp>
+        <p:nvSpPr>
+          <p:cNvPr id="25" name="own-row-2"/>
+          <p:cNvSpPr/>
+          <p:nvPr/>
+        </p:nvSpPr>
+        <p:spPr>
+          <a:xfrm>
+            <a:off x="5150792" y="4754880"/>
+            <a:ext cx="6492263" cy="1051560"/>
+          </a:xfrm>
+          <a:prstGeom prst="roundRect">
+            <a:avLst>
+              <a:gd name="adj" fmla="val 6957"/>
+            </a:avLst>
+          </a:prstGeom>
+          <a:solidFill>
+            <a:schemeClr val="bg2"/>
+          </a:solidFill>
+          <a:ln/>
+        </p:spPr>
+      </p:sp>
+      <p:sp>
+        <p:nvSpPr>
+          <p:cNvPr id="26" name="own-dot-2"/>
+          <p:cNvSpPr/>
+          <p:nvPr/>
+        </p:nvSpPr>
+        <p:spPr>
+          <a:xfrm>
+            <a:off x="5379392" y="4983480"/>
+            <a:ext cx="146304" cy="146304"/>
+          </a:xfrm>
+          <a:prstGeom prst="ellipse">
+            <a:avLst/>
+          </a:prstGeom>
+          <a:solidFill>
+            <a:schemeClr val="accent6"/>
+          </a:solidFill>
+          <a:ln/>
+        </p:spPr>
+      </p:sp>
+      <p:sp>
+        <p:nvSpPr>
+          <p:cNvPr id="27" name="own-n-2"/>
+          <p:cNvSpPr txBox="1"/>
+          <p:nvPr/>
+        </p:nvSpPr>
+        <p:spPr>
+          <a:xfrm>
+            <a:off x="5607992" y="4892040"/>
+            <a:ext cx="2103120" cy="320040"/>
           </a:xfrm>
           <a:prstGeom prst="rect">
             <a:avLst/>
@@ -6632,105 +7253,27 @@
               <a:buNone/>
             </a:pPr>
             <a:r>
-              <a:rPr lang="en-US" sz="1400" dirty="0">
-                <a:solidFill>
-                  <a:schemeClr val="tx2"/>
-                </a:solidFill>
-              </a:rPr>
-              <a:t>mAP@50 · scratch AP 0.78</a:t>
-            </a:r>
-            <a:endParaRPr lang="en-US" sz="1400" dirty="0"/>
-          </a:p>
-        </p:txBody>
-      </p:sp>
-      <p:sp>
-        <p:nvSpPr>
-          <p:cNvPr id="18" name="model-2"/>
-          <p:cNvSpPr/>
-          <p:nvPr/>
-        </p:nvSpPr>
-        <p:spPr>
-          <a:xfrm>
-            <a:off x="8046720" y="1645920"/>
-            <a:ext cx="3566160" cy="2834640"/>
-          </a:xfrm>
-          <a:prstGeom prst="roundRect">
-            <a:avLst>
-              <a:gd name="adj" fmla="val 2581"/>
-            </a:avLst>
-          </a:prstGeom>
-          <a:solidFill>
-            <a:schemeClr val="bg2"/>
-          </a:solidFill>
-          <a:ln/>
-        </p:spPr>
-      </p:sp>
-      <p:sp>
-        <p:nvSpPr>
-          <p:cNvPr id="19" name="model-dot-2"/>
-          <p:cNvSpPr/>
-          <p:nvPr/>
-        </p:nvSpPr>
-        <p:spPr>
-          <a:xfrm>
-            <a:off x="8321040" y="1865376"/>
-            <a:ext cx="146304" cy="146304"/>
-          </a:xfrm>
-          <a:prstGeom prst="ellipse">
-            <a:avLst/>
-          </a:prstGeom>
-          <a:solidFill>
-            <a:schemeClr val="accent6"/>
-          </a:solidFill>
-          <a:ln/>
-        </p:spPr>
-      </p:sp>
-      <p:sp>
-        <p:nvSpPr>
-          <p:cNvPr id="20" name="model-n-2"/>
-          <p:cNvSpPr txBox="1"/>
-          <p:nvPr/>
-        </p:nvSpPr>
-        <p:spPr>
-          <a:xfrm>
-            <a:off x="8558784" y="1783080"/>
-            <a:ext cx="2194560" cy="320040"/>
-          </a:xfrm>
-          <a:prstGeom prst="rect">
-            <a:avLst/>
-          </a:prstGeom>
-          <a:noFill/>
-          <a:ln/>
-        </p:spPr>
-        <p:txBody>
-          <a:bodyPr wrap="square" lIns="0" tIns="0" rIns="0" bIns="0" rtlCol="0" anchor="t"/>
-          <a:lstStyle/>
-          <a:p>
-            <a:pPr indent="0" marL="0">
-              <a:buNone/>
-            </a:pPr>
-            <a:r>
-              <a:rPr lang="en-US" sz="1600" b="1" dirty="0">
+              <a:rPr lang="en-US" sz="1500" b="1" dirty="0">
                 <a:solidFill>
                   <a:schemeClr val="tx1"/>
                 </a:solidFill>
               </a:rPr>
               <a:t>YOLOX-Tiny</a:t>
             </a:r>
-            <a:endParaRPr lang="en-US" sz="1600" dirty="0"/>
+            <a:endParaRPr lang="en-US" sz="1500" dirty="0"/>
           </a:p>
         </p:txBody>
       </p:sp>
       <p:sp>
         <p:nvSpPr>
-          <p:cNvPr id="21" name="model-s-2"/>
+          <p:cNvPr id="28" name="own-s-2"/>
           <p:cNvSpPr txBox="1"/>
           <p:nvPr/>
         </p:nvSpPr>
         <p:spPr>
           <a:xfrm>
-            <a:off x="8321040" y="2194560"/>
-            <a:ext cx="3154680" cy="274320"/>
+            <a:off x="5607992" y="5303520"/>
+            <a:ext cx="2103120" cy="274320"/>
           </a:xfrm>
           <a:prstGeom prst="rect">
             <a:avLst/>
@@ -6746,96 +7289,135 @@
               <a:buNone/>
             </a:pPr>
             <a:r>
-              <a:rPr lang="en-US" sz="1300" dirty="0">
+              <a:rPr lang="en-US" sz="1200" dirty="0">
                 <a:solidFill>
                   <a:schemeClr val="tx2"/>
                 </a:solidFill>
               </a:rPr>
-              <a:t>파라미터 </a:t>
+              <a:t>5.06M · 6.45 GFLOPs</a:t>
             </a:r>
-            <a:pPr indent="0" marL="0">
+            <a:endParaRPr lang="en-US" sz="1200" dirty="0"/>
+          </a:p>
+        </p:txBody>
+      </p:sp>
+      <p:sp>
+        <p:nvSpPr>
+          <p:cNvPr id="29" name="own-m-2"/>
+          <p:cNvSpPr txBox="1"/>
+          <p:nvPr/>
+        </p:nvSpPr>
+        <p:spPr>
+          <a:xfrm>
+            <a:off x="7665392" y="4864608"/>
+            <a:ext cx="1600200" cy="822960"/>
+          </a:xfrm>
+          <a:prstGeom prst="rect">
+            <a:avLst/>
+          </a:prstGeom>
+          <a:noFill/>
+          <a:ln/>
+        </p:spPr>
+        <p:txBody>
+          <a:bodyPr wrap="square" lIns="0" tIns="0" rIns="0" bIns="0" rtlCol="0" anchor="ctr"/>
+          <a:lstStyle/>
+          <a:p>
+            <a:pPr algn="r" indent="0" marL="0">
               <a:buNone/>
             </a:pPr>
             <a:r>
-              <a:rPr lang="en-US" sz="1300" b="1" dirty="0">
-                <a:solidFill>
-                  <a:schemeClr val="tx1"/>
-                </a:solidFill>
-              </a:rPr>
-              <a:t>5.06M</a:t>
-            </a:r>
-            <a:pPr indent="0" marL="0">
-              <a:buNone/>
-            </a:pPr>
-            <a:r>
-              <a:rPr lang="en-US" sz="1300" dirty="0">
-                <a:solidFill>
-                  <a:schemeClr val="tx2"/>
-                </a:solidFill>
-              </a:rPr>
-              <a:t>   연산량 </a:t>
-            </a:r>
-            <a:pPr indent="0" marL="0">
-              <a:buNone/>
-            </a:pPr>
-            <a:r>
-              <a:rPr lang="en-US" sz="1300" b="1" dirty="0">
-                <a:solidFill>
-                  <a:schemeClr val="tx1"/>
-                </a:solidFill>
-              </a:rPr>
-              <a:t>6.45 GFLOPs</a:t>
-            </a:r>
-            <a:endParaRPr lang="en-US" sz="1300" dirty="0"/>
-          </a:p>
-        </p:txBody>
-      </p:sp>
-      <p:sp>
-        <p:nvSpPr>
-          <p:cNvPr id="22" name="model-m-2"/>
-          <p:cNvSpPr txBox="1"/>
-          <p:nvPr/>
-        </p:nvSpPr>
-        <p:spPr>
-          <a:xfrm>
-            <a:off x="8321040" y="2697480"/>
-            <a:ext cx="3108960" cy="1005840"/>
-          </a:xfrm>
-          <a:prstGeom prst="rect">
-            <a:avLst/>
-          </a:prstGeom>
-          <a:noFill/>
-          <a:ln/>
-        </p:spPr>
-        <p:txBody>
-          <a:bodyPr wrap="square" lIns="0" tIns="0" rIns="0" bIns="0" rtlCol="0" anchor="t"/>
-          <a:lstStyle/>
-          <a:p>
-            <a:pPr indent="0" marL="0">
-              <a:buNone/>
-            </a:pPr>
-            <a:r>
-              <a:rPr lang="en-US" sz="5400" b="1" dirty="0">
+              <a:rPr lang="en-US" sz="3400" b="1" dirty="0">
                 <a:solidFill>
                   <a:schemeClr val="accent6"/>
                 </a:solidFill>
               </a:rPr>
               <a:t>83.2%</a:t>
             </a:r>
-            <a:endParaRPr lang="en-US" sz="5400" dirty="0"/>
+            <a:endParaRPr lang="en-US" sz="3400" dirty="0"/>
           </a:p>
         </p:txBody>
       </p:sp>
       <p:sp>
         <p:nvSpPr>
-          <p:cNvPr id="23" name="model-a-2"/>
+          <p:cNvPr id="30" name="own-a-2"/>
           <p:cNvSpPr txBox="1"/>
           <p:nvPr/>
         </p:nvSpPr>
         <p:spPr>
           <a:xfrm>
-            <a:off x="8321040" y="3886200"/>
-            <a:ext cx="3108960" cy="274320"/>
+            <a:off x="9311312" y="4864608"/>
+            <a:ext cx="1097280" cy="822960"/>
+          </a:xfrm>
+          <a:prstGeom prst="rect">
+            <a:avLst/>
+          </a:prstGeom>
+          <a:noFill/>
+          <a:ln/>
+        </p:spPr>
+        <p:txBody>
+          <a:bodyPr wrap="square" lIns="0" tIns="0" rIns="0" bIns="0" rtlCol="0" anchor="ctr"/>
+          <a:lstStyle/>
+          <a:p>
+            <a:pPr algn="r" indent="0" marL="0">
+              <a:buNone/>
+            </a:pPr>
+            <a:r>
+              <a:rPr lang="en-US" sz="1800" dirty="0">
+                <a:solidFill>
+                  <a:schemeClr val="tx1"/>
+                </a:solidFill>
+              </a:rPr>
+              <a:t>0.66</a:t>
+            </a:r>
+            <a:endParaRPr lang="en-US" sz="1800" dirty="0"/>
+          </a:p>
+        </p:txBody>
+      </p:sp>
+      <p:sp>
+        <p:nvSpPr>
+          <p:cNvPr id="31" name="own-h2-2"/>
+          <p:cNvSpPr txBox="1"/>
+          <p:nvPr/>
+        </p:nvSpPr>
+        <p:spPr>
+          <a:xfrm>
+            <a:off x="10454312" y="4864608"/>
+            <a:ext cx="1005840" cy="822960"/>
+          </a:xfrm>
+          <a:prstGeom prst="rect">
+            <a:avLst/>
+          </a:prstGeom>
+          <a:noFill/>
+          <a:ln/>
+        </p:spPr>
+        <p:txBody>
+          <a:bodyPr wrap="square" lIns="0" tIns="0" rIns="0" bIns="0" rtlCol="0" anchor="ctr"/>
+          <a:lstStyle/>
+          <a:p>
+            <a:pPr algn="r" indent="0" marL="0">
+              <a:buNone/>
+            </a:pPr>
+            <a:r>
+              <a:rPr lang="en-US" sz="1800" b="1" dirty="0">
+                <a:solidFill>
+                  <a:schemeClr val="accent2"/>
+                </a:solidFill>
+              </a:rPr>
+              <a:t>47%</a:t>
+            </a:r>
+            <a:endParaRPr lang="en-US" sz="1800" dirty="0"/>
+          </a:p>
+        </p:txBody>
+      </p:sp>
+      <p:sp>
+        <p:nvSpPr>
+          <p:cNvPr id="32" name="own-note"/>
+          <p:cNvSpPr txBox="1"/>
+          <p:nvPr/>
+        </p:nvSpPr>
+        <p:spPr>
+          <a:xfrm>
+            <a:off x="5150792" y="5943600"/>
+            <a:ext cx="6492263" cy="274320"/>
           </a:xfrm>
           <a:prstGeom prst="rect">
             <a:avLst/>
@@ -6851,246 +7433,14 @@
               <a:buNone/>
             </a:pPr>
             <a:r>
-              <a:rPr lang="en-US" sz="1400" dirty="0">
+              <a:rPr lang="en-US" sz="1200" dirty="0">
                 <a:solidFill>
                   <a:schemeClr val="tx2"/>
                 </a:solidFill>
               </a:rPr>
-              <a:t>mAP@50 · scratch AP 0.66</a:t>
+              <a:t>Geti 점수와 같은 순서 · 작은 = 파라미터 기준 (연산량은 Tiny 최소)</a:t>
             </a:r>
-            <a:endParaRPr lang="en-US" sz="1400" dirty="0"/>
-          </a:p>
-        </p:txBody>
-      </p:sp>
-      <p:sp>
-        <p:nvSpPr>
-          <p:cNvPr id="24" name="why-card"/>
-          <p:cNvSpPr/>
-          <p:nvPr/>
-        </p:nvSpPr>
-        <p:spPr>
-          <a:xfrm>
-            <a:off x="548640" y="4709160"/>
-            <a:ext cx="5486400" cy="1508760"/>
-          </a:xfrm>
-          <a:prstGeom prst="roundRect">
-            <a:avLst>
-              <a:gd name="adj" fmla="val 4848"/>
-            </a:avLst>
-          </a:prstGeom>
-          <a:solidFill>
-            <a:schemeClr val="bg2"/>
-          </a:solidFill>
-          <a:ln/>
-        </p:spPr>
-      </p:sp>
-      <p:sp>
-        <p:nvSpPr>
-          <p:cNvPr id="25" name="why-h"/>
-          <p:cNvSpPr txBox="1"/>
-          <p:nvPr/>
-        </p:nvSpPr>
-        <p:spPr>
-          <a:xfrm>
-            <a:off x="822960" y="4828032"/>
-            <a:ext cx="4572000" cy="320040"/>
-          </a:xfrm>
-          <a:prstGeom prst="rect">
-            <a:avLst/>
-          </a:prstGeom>
-          <a:noFill/>
-          <a:ln/>
-        </p:spPr>
-        <p:txBody>
-          <a:bodyPr wrap="square" lIns="0" tIns="0" rIns="0" bIns="0" rtlCol="0" anchor="t"/>
-          <a:lstStyle/>
-          <a:p>
-            <a:pPr indent="0" marL="0">
-              <a:buNone/>
-            </a:pPr>
-            <a:r>
-              <a:rPr lang="en-US" sz="1600" b="1" dirty="0">
-                <a:solidFill>
-                  <a:schemeClr val="accent1"/>
-                </a:solidFill>
-              </a:rPr>
-              <a:t>같은 순서</a:t>
-            </a:r>
-            <a:endParaRPr lang="en-US" sz="1600" dirty="0"/>
-          </a:p>
-        </p:txBody>
-      </p:sp>
-      <p:sp>
-        <p:nvSpPr>
-          <p:cNvPr id="26" name="why-b"/>
-          <p:cNvSpPr txBox="1"/>
-          <p:nvPr/>
-        </p:nvSpPr>
-        <p:spPr>
-          <a:xfrm>
-            <a:off x="822960" y="5212080"/>
-            <a:ext cx="5029200" cy="868680"/>
-          </a:xfrm>
-          <a:prstGeom prst="rect">
-            <a:avLst/>
-          </a:prstGeom>
-          <a:noFill/>
-          <a:ln/>
-        </p:spPr>
-        <p:txBody>
-          <a:bodyPr wrap="square" lIns="0" tIns="0" rIns="0" bIns="0" rtlCol="0" anchor="t"/>
-          <a:lstStyle/>
-          <a:p>
-            <a:pPr marL="342900" indent="-342900">
-              <a:spcAft>
-                <a:spcPts val="600"/>
-              </a:spcAft>
-              <a:buSzPct val="100000"/>
-              <a:buChar char="•"/>
-            </a:pPr>
-            <a:r>
-              <a:rPr lang="en-US" sz="1400" dirty="0">
-                <a:solidFill>
-                  <a:schemeClr val="tx1"/>
-                </a:solidFill>
-              </a:rPr>
-              <a:t>Geti 점수: 86% · 81% · 81%</a:t>
-            </a:r>
-            <a:endParaRPr lang="en-US" sz="1400" dirty="0"/>
-          </a:p>
-          <a:p>
-            <a:pPr marL="342900" indent="-342900">
-              <a:spcAft>
-                <a:spcPts val="600"/>
-              </a:spcAft>
-              <a:buSzPct val="100000"/>
-              <a:buChar char="•"/>
-            </a:pPr>
-            <a:r>
-              <a:rPr lang="en-US" sz="1400" dirty="0">
-                <a:solidFill>
-                  <a:schemeClr val="tx1"/>
-                </a:solidFill>
-              </a:rPr>
-              <a:t>2차 세트 검출: ATSS 47% · YOLOX-S 3%</a:t>
-            </a:r>
-            <a:endParaRPr lang="en-US" sz="1400" dirty="0"/>
-          </a:p>
-        </p:txBody>
-      </p:sp>
-      <p:sp>
-        <p:nvSpPr>
-          <p:cNvPr id="27" name="note-card"/>
-          <p:cNvSpPr/>
-          <p:nvPr/>
-        </p:nvSpPr>
-        <p:spPr>
-          <a:xfrm>
-            <a:off x="6263640" y="4709160"/>
-            <a:ext cx="5376672" cy="1508760"/>
-          </a:xfrm>
-          <a:prstGeom prst="roundRect">
-            <a:avLst>
-              <a:gd name="adj" fmla="val 4848"/>
-            </a:avLst>
-          </a:prstGeom>
-          <a:solidFill>
-            <a:schemeClr val="bg2"/>
-          </a:solidFill>
-          <a:ln/>
-        </p:spPr>
-      </p:sp>
-      <p:sp>
-        <p:nvSpPr>
-          <p:cNvPr id="28" name="note-h"/>
-          <p:cNvSpPr txBox="1"/>
-          <p:nvPr/>
-        </p:nvSpPr>
-        <p:spPr>
-          <a:xfrm>
-            <a:off x="6537960" y="4828032"/>
-            <a:ext cx="4572000" cy="320040"/>
-          </a:xfrm>
-          <a:prstGeom prst="rect">
-            <a:avLst/>
-          </a:prstGeom>
-          <a:noFill/>
-          <a:ln/>
-        </p:spPr>
-        <p:txBody>
-          <a:bodyPr wrap="square" lIns="0" tIns="0" rIns="0" bIns="0" rtlCol="0" anchor="t"/>
-          <a:lstStyle/>
-          <a:p>
-            <a:pPr indent="0" marL="0">
-              <a:buNone/>
-            </a:pPr>
-            <a:r>
-              <a:rPr lang="en-US" sz="1600" b="1" dirty="0">
-                <a:solidFill>
-                  <a:schemeClr val="accent3"/>
-                </a:solidFill>
-              </a:rPr>
-              <a:t>주의</a:t>
-            </a:r>
-            <a:endParaRPr lang="en-US" sz="1600" dirty="0"/>
-          </a:p>
-        </p:txBody>
-      </p:sp>
-      <p:sp>
-        <p:nvSpPr>
-          <p:cNvPr id="29" name="note-b"/>
-          <p:cNvSpPr txBox="1"/>
-          <p:nvPr/>
-        </p:nvSpPr>
-        <p:spPr>
-          <a:xfrm>
-            <a:off x="6537960" y="5212080"/>
-            <a:ext cx="4937760" cy="868680"/>
-          </a:xfrm>
-          <a:prstGeom prst="rect">
-            <a:avLst/>
-          </a:prstGeom>
-          <a:noFill/>
-          <a:ln/>
-        </p:spPr>
-        <p:txBody>
-          <a:bodyPr wrap="square" lIns="0" tIns="0" rIns="0" bIns="0" rtlCol="0" anchor="t"/>
-          <a:lstStyle/>
-          <a:p>
-            <a:pPr marL="342900" indent="-342900">
-              <a:spcAft>
-                <a:spcPts val="600"/>
-              </a:spcAft>
-              <a:buSzPct val="100000"/>
-              <a:buChar char="•"/>
-            </a:pPr>
-            <a:r>
-              <a:rPr lang="en-US" sz="1400" dirty="0">
-                <a:solidFill>
-                  <a:schemeClr val="tx1"/>
-                </a:solidFill>
-              </a:rPr>
-              <a:t>작은 = 파라미터 기준</a:t>
-            </a:r>
-            <a:endParaRPr lang="en-US" sz="1400" dirty="0"/>
-          </a:p>
-          <a:p>
-            <a:pPr marL="342900" indent="-342900">
-              <a:spcAft>
-                <a:spcPts val="600"/>
-              </a:spcAft>
-              <a:buSzPct val="100000"/>
-              <a:buChar char="•"/>
-            </a:pPr>
-            <a:r>
-              <a:rPr lang="en-US" sz="1400" dirty="0">
-                <a:solidFill>
-                  <a:schemeClr val="tx1"/>
-                </a:solidFill>
-              </a:rPr>
-              <a:t>연산량은 Tiny 최소 (6.45 GFLOPs)</a:t>
-            </a:r>
-            <a:endParaRPr lang="en-US" sz="1400" dirty="0"/>
+            <a:endParaRPr lang="en-US" sz="1200" dirty="0"/>
           </a:p>
         </p:txBody>
       </p:sp>
@@ -9230,6 +9580,22 @@
       </p:sp>
       <p:graphicFrame>
         <p:nvGraphicFramePr>
+          <p:cNvPr id="4" name="speed-chart" descr=""/>
+          <p:cNvGraphicFramePr/>
+          <p:nvPr/>
+        </p:nvGraphicFramePr>
+        <p:xfrm>
+          <a:off x="548640" y="1554480"/>
+          <a:ext cx="5760720" cy="3108960"/>
+        </p:xfrm>
+        <a:graphic xmlns:a="http://schemas.openxmlformats.org/drawingml/2006/main">
+          <a:graphicData uri="http://schemas.openxmlformats.org/drawingml/2006/chart">
+            <c:chart xmlns:c="http://schemas.openxmlformats.org/drawingml/2006/chart" r:id="rId1"/>
+          </a:graphicData>
+        </a:graphic>
+      </p:graphicFrame>
+      <p:graphicFrame>
+        <p:nvGraphicFramePr>
           <p:cNvPr id="8" name="int8-table"/>
           <p:cNvGraphicFramePr>
             <a:graphicFrameLocks noGrp="1"/>
@@ -9243,22 +9609,21 @@
           </p:nvPr>
         </p:nvGraphicFramePr>
         <p:xfrm>
-          <a:off x="548640" y="1645920"/>
-          <a:ext cx="11094415" cy="914400"/>
+          <a:off x="6537960" y="1828800"/>
+          <a:ext cx="5102352" cy="914400"/>
         </p:xfrm>
         <a:graphic>
           <a:graphicData uri="http://schemas.openxmlformats.org/drawingml/2006/table">
             <a:tbl>
               <a:tblPr/>
               <a:tblGrid>
-                <a:gridCol w="2194560"/>
-                <a:gridCol w="2103120"/>
-                <a:gridCol w="1005840"/>
-                <a:gridCol w="1645920"/>
-                <a:gridCol w="1920240"/>
-                <a:gridCol w="2221992"/>
+                <a:gridCol w="1188720"/>
+                <a:gridCol w="731520"/>
+                <a:gridCol w="1051560"/>
+                <a:gridCol w="1307592"/>
+                <a:gridCol w="822960"/>
               </a:tblGrid>
-              <a:tr h="530352">
+              <a:tr h="566928">
                 <a:tc>
                   <a:txBody>
                     <a:bodyPr/>
@@ -9268,7 +9633,7 @@
                         <a:buNone/>
                       </a:pPr>
                       <a:r>
-                        <a:rPr lang="en-US" sz="1500" b="1" dirty="0">
+                        <a:rPr lang="en-US" sz="1300" b="1" dirty="0">
                           <a:solidFill>
                             <a:schemeClr val="tx2"/>
                           </a:solidFill>
@@ -9278,7 +9643,7 @@
                         </a:rPr>
                         <a:t>모델</a:t>
                       </a:r>
-                      <a:endParaRPr lang="en-US" sz="1500" dirty="0">
+                      <a:endParaRPr lang="en-US" sz="1300" dirty="0">
                         <a:latin typeface="Malgun Gothic" charset="0"/>
                         <a:ea typeface="Malgun Gothic" charset="0"/>
                         <a:cs typeface="Malgun Gothic" charset="0"/>
@@ -9336,7 +9701,7 @@
                         <a:buNone/>
                       </a:pPr>
                       <a:r>
-                        <a:rPr lang="en-US" sz="1500" b="1" dirty="0">
+                        <a:rPr lang="en-US" sz="1300" b="1" dirty="0">
                           <a:solidFill>
                             <a:schemeClr val="tx2"/>
                           </a:solidFill>
@@ -9344,9 +9709,9 @@
                           <a:ea typeface="Malgun Gothic" pitchFamily="34" charset="-122"/>
                           <a:cs typeface="Malgun Gothic" pitchFamily="34" charset="-120"/>
                         </a:rPr>
-                        <a:t>CPU ms</a:t>
+                        <a:t>속도</a:t>
                       </a:r>
-                      <a:endParaRPr lang="en-US" sz="1500" dirty="0">
+                      <a:endParaRPr lang="en-US" sz="1300" dirty="0">
                         <a:latin typeface="Malgun Gothic" charset="0"/>
                         <a:ea typeface="Malgun Gothic" charset="0"/>
                         <a:cs typeface="Malgun Gothic" charset="0"/>
@@ -9404,7 +9769,7 @@
                         <a:buNone/>
                       </a:pPr>
                       <a:r>
-                        <a:rPr lang="en-US" sz="1500" b="1" dirty="0">
+                        <a:rPr lang="en-US" sz="1300" b="1" dirty="0">
                           <a:solidFill>
                             <a:schemeClr val="tx2"/>
                           </a:solidFill>
@@ -9412,9 +9777,9 @@
                           <a:ea typeface="Malgun Gothic" pitchFamily="34" charset="-122"/>
                           <a:cs typeface="Malgun Gothic" pitchFamily="34" charset="-120"/>
                         </a:rPr>
-                        <a:t>속도</a:t>
+                        <a:t>크기 MB</a:t>
                       </a:r>
-                      <a:endParaRPr lang="en-US" sz="1500" dirty="0">
+                      <a:endParaRPr lang="en-US" sz="1300" dirty="0">
                         <a:latin typeface="Malgun Gothic" charset="0"/>
                         <a:ea typeface="Malgun Gothic" charset="0"/>
                         <a:cs typeface="Malgun Gothic" charset="0"/>
@@ -9472,7 +9837,7 @@
                         <a:buNone/>
                       </a:pPr>
                       <a:r>
-                        <a:rPr lang="en-US" sz="1500" b="1" dirty="0">
+                        <a:rPr lang="en-US" sz="1300" b="1" dirty="0">
                           <a:solidFill>
                             <a:schemeClr val="tx2"/>
                           </a:solidFill>
@@ -9480,9 +9845,9 @@
                           <a:ea typeface="Malgun Gothic" pitchFamily="34" charset="-122"/>
                           <a:cs typeface="Malgun Gothic" pitchFamily="34" charset="-120"/>
                         </a:rPr>
-                        <a:t>크기 MB</a:t>
+                        <a:t>mAP@50</a:t>
                       </a:r>
-                      <a:endParaRPr lang="en-US" sz="1500" dirty="0">
+                      <a:endParaRPr lang="en-US" sz="1300" dirty="0">
                         <a:latin typeface="Malgun Gothic" charset="0"/>
                         <a:ea typeface="Malgun Gothic" charset="0"/>
                         <a:cs typeface="Malgun Gothic" charset="0"/>
@@ -9540,7 +9905,7 @@
                         <a:buNone/>
                       </a:pPr>
                       <a:r>
-                        <a:rPr lang="en-US" sz="1500" b="1" dirty="0">
+                        <a:rPr lang="en-US" sz="1300" b="1" dirty="0">
                           <a:solidFill>
                             <a:schemeClr val="tx2"/>
                           </a:solidFill>
@@ -9548,9 +9913,9 @@
                           <a:ea typeface="Malgun Gothic" pitchFamily="34" charset="-122"/>
                           <a:cs typeface="Malgun Gothic" pitchFamily="34" charset="-120"/>
                         </a:rPr>
-                        <a:t>mAP@50</a:t>
+                        <a:t>놓친 셀</a:t>
                       </a:r>
-                      <a:endParaRPr lang="en-US" sz="1500" dirty="0">
+                      <a:endParaRPr lang="en-US" sz="1300" dirty="0">
                         <a:latin typeface="Malgun Gothic" charset="0"/>
                         <a:ea typeface="Malgun Gothic" charset="0"/>
                         <a:cs typeface="Malgun Gothic" charset="0"/>
@@ -9599,76 +9964,8 @@
                     </a:solidFill>
                   </a:tcPr>
                 </a:tc>
-                <a:tc>
-                  <a:txBody>
-                    <a:bodyPr/>
-                    <a:lstStyle/>
-                    <a:p>
-                      <a:pPr algn="ctr" indent="0" marL="0">
-                        <a:buNone/>
-                      </a:pPr>
-                      <a:r>
-                        <a:rPr lang="en-US" sz="1500" b="1" dirty="0">
-                          <a:solidFill>
-                            <a:schemeClr val="tx2"/>
-                          </a:solidFill>
-                          <a:latin typeface="Malgun Gothic" pitchFamily="34" charset="0"/>
-                          <a:ea typeface="Malgun Gothic" pitchFamily="34" charset="-122"/>
-                          <a:cs typeface="Malgun Gothic" pitchFamily="34" charset="-120"/>
-                        </a:rPr>
-                        <a:t>놓친 결함 셀 (/98)</a:t>
-                      </a:r>
-                      <a:endParaRPr lang="en-US" sz="1500" dirty="0">
-                        <a:latin typeface="Malgun Gothic" charset="0"/>
-                        <a:ea typeface="Malgun Gothic" charset="0"/>
-                        <a:cs typeface="Malgun Gothic" charset="0"/>
-                      </a:endParaRPr>
-                    </a:p>
-                  </a:txBody>
-                  <a:tcPr marL="91440" marR="91440" marT="45720" marB="45720" anchor="ctr">
-                    <a:lnL w="9525" cap="flat" cmpd="sng" algn="ctr">
-                      <a:solidFill>
-                        <a:srgbClr val="3A3F48"/>
-                      </a:solidFill>
-                      <a:prstDash val="solid"/>
-                      <a:round/>
-                      <a:headEnd type="none" w="med" len="med"/>
-                      <a:tailEnd type="none" w="med" len="med"/>
-                    </a:lnL>
-                    <a:lnR w="9525" cap="flat" cmpd="sng" algn="ctr">
-                      <a:solidFill>
-                        <a:srgbClr val="3A3F48"/>
-                      </a:solidFill>
-                      <a:prstDash val="solid"/>
-                      <a:round/>
-                      <a:headEnd type="none" w="med" len="med"/>
-                      <a:tailEnd type="none" w="med" len="med"/>
-                    </a:lnR>
-                    <a:lnT w="9525" cap="flat" cmpd="sng" algn="ctr">
-                      <a:solidFill>
-                        <a:srgbClr val="3A3F48"/>
-                      </a:solidFill>
-                      <a:prstDash val="solid"/>
-                      <a:round/>
-                      <a:headEnd type="none" w="med" len="med"/>
-                      <a:tailEnd type="none" w="med" len="med"/>
-                    </a:lnT>
-                    <a:lnB w="9525" cap="flat" cmpd="sng" algn="ctr">
-                      <a:solidFill>
-                        <a:srgbClr val="3A3F48"/>
-                      </a:solidFill>
-                      <a:prstDash val="solid"/>
-                      <a:round/>
-                      <a:headEnd type="none" w="med" len="med"/>
-                      <a:tailEnd type="none" w="med" len="med"/>
-                    </a:lnB>
-                    <a:solidFill>
-                      <a:srgbClr val="16191E"/>
-                    </a:solidFill>
-                  </a:tcPr>
-                </a:tc>
               </a:tr>
-              <a:tr h="530352">
+              <a:tr h="566928">
                 <a:tc>
                   <a:txBody>
                     <a:bodyPr/>
@@ -9678,7 +9975,7 @@
                         <a:buNone/>
                       </a:pPr>
                       <a:r>
-                        <a:rPr lang="en-US" sz="1500" b="1" dirty="0">
+                        <a:rPr lang="en-US" sz="1300" b="1" dirty="0">
                           <a:solidFill>
                             <a:schemeClr val="accent4"/>
                           </a:solidFill>
@@ -9686,9 +9983,9 @@
                           <a:ea typeface="Malgun Gothic" pitchFamily="34" charset="-122"/>
                           <a:cs typeface="Malgun Gothic" pitchFamily="34" charset="-120"/>
                         </a:rPr>
-                        <a:t>ATSS-MobileNetV2</a:t>
+                        <a:t>ATSS</a:t>
                       </a:r>
-                      <a:endParaRPr lang="en-US" sz="1500" dirty="0">
+                      <a:endParaRPr lang="en-US" sz="1300" dirty="0">
                         <a:latin typeface="Malgun Gothic" charset="0"/>
                         <a:ea typeface="Malgun Gothic" charset="0"/>
                         <a:cs typeface="Malgun Gothic" charset="0"/>
@@ -9746,17 +10043,17 @@
                         <a:buNone/>
                       </a:pPr>
                       <a:r>
-                        <a:rPr lang="en-US" sz="1500" dirty="0">
+                        <a:rPr lang="en-US" sz="1300" b="1" dirty="0">
                           <a:solidFill>
-                            <a:schemeClr val="tx1"/>
+                            <a:schemeClr val="accent1"/>
                           </a:solidFill>
                           <a:latin typeface="Malgun Gothic" pitchFamily="34" charset="0"/>
                           <a:ea typeface="Malgun Gothic" pitchFamily="34" charset="-122"/>
                           <a:cs typeface="Malgun Gothic" pitchFamily="34" charset="-120"/>
                         </a:rPr>
-                        <a:t>43.9 → 20.0</a:t>
+                        <a:t>2.2×</a:t>
                       </a:r>
-                      <a:endParaRPr lang="en-US" sz="1500" dirty="0">
+                      <a:endParaRPr lang="en-US" sz="1300" dirty="0">
                         <a:latin typeface="Malgun Gothic" charset="0"/>
                         <a:ea typeface="Malgun Gothic" charset="0"/>
                         <a:cs typeface="Malgun Gothic" charset="0"/>
@@ -9814,17 +10111,17 @@
                         <a:buNone/>
                       </a:pPr>
                       <a:r>
-                        <a:rPr lang="en-US" sz="1500" b="1" dirty="0">
+                        <a:rPr lang="en-US" sz="1300" dirty="0">
                           <a:solidFill>
-                            <a:schemeClr val="accent1"/>
+                            <a:schemeClr val="tx1"/>
                           </a:solidFill>
                           <a:latin typeface="Malgun Gothic" pitchFamily="34" charset="0"/>
                           <a:ea typeface="Malgun Gothic" pitchFamily="34" charset="-122"/>
                           <a:cs typeface="Malgun Gothic" pitchFamily="34" charset="-120"/>
                         </a:rPr>
-                        <a:t>2.2×</a:t>
+                        <a:t>5.7 → 3.9</a:t>
                       </a:r>
-                      <a:endParaRPr lang="en-US" sz="1500" dirty="0">
+                      <a:endParaRPr lang="en-US" sz="1300" dirty="0">
                         <a:latin typeface="Malgun Gothic" charset="0"/>
                         <a:ea typeface="Malgun Gothic" charset="0"/>
                         <a:cs typeface="Malgun Gothic" charset="0"/>
@@ -9882,7 +10179,7 @@
                         <a:buNone/>
                       </a:pPr>
                       <a:r>
-                        <a:rPr lang="en-US" sz="1500" dirty="0">
+                        <a:rPr lang="en-US" sz="1300" dirty="0">
                           <a:solidFill>
                             <a:schemeClr val="tx1"/>
                           </a:solidFill>
@@ -9890,9 +10187,9 @@
                           <a:ea typeface="Malgun Gothic" pitchFamily="34" charset="-122"/>
                           <a:cs typeface="Malgun Gothic" pitchFamily="34" charset="-120"/>
                         </a:rPr>
-                        <a:t>5.7 → 3.9</a:t>
+                        <a:t>0.929 → 0.929</a:t>
                       </a:r>
-                      <a:endParaRPr lang="en-US" sz="1500" dirty="0">
+                      <a:endParaRPr lang="en-US" sz="1300" dirty="0">
                         <a:latin typeface="Malgun Gothic" charset="0"/>
                         <a:ea typeface="Malgun Gothic" charset="0"/>
                         <a:cs typeface="Malgun Gothic" charset="0"/>
@@ -9950,17 +10247,87 @@
                         <a:buNone/>
                       </a:pPr>
                       <a:r>
-                        <a:rPr lang="en-US" sz="1500" dirty="0">
+                        <a:rPr lang="en-US" sz="1300" dirty="0">
                           <a:solidFill>
-                            <a:schemeClr val="tx1"/>
+                            <a:schemeClr val="accent2"/>
                           </a:solidFill>
                           <a:latin typeface="Malgun Gothic" pitchFamily="34" charset="0"/>
                           <a:ea typeface="Malgun Gothic" pitchFamily="34" charset="-122"/>
                           <a:cs typeface="Malgun Gothic" pitchFamily="34" charset="-120"/>
                         </a:rPr>
-                        <a:t>0.929 → 0.929</a:t>
+                        <a:t>0 → 1</a:t>
                       </a:r>
-                      <a:endParaRPr lang="en-US" sz="1500" dirty="0">
+                      <a:endParaRPr lang="en-US" sz="1300" dirty="0">
+                        <a:latin typeface="Malgun Gothic" charset="0"/>
+                        <a:ea typeface="Malgun Gothic" charset="0"/>
+                        <a:cs typeface="Malgun Gothic" charset="0"/>
+                      </a:endParaRPr>
+                    </a:p>
+                  </a:txBody>
+                  <a:tcPr marL="91440" marR="91440" marT="45720" marB="45720" anchor="ctr">
+                    <a:lnL w="9525" cap="flat" cmpd="sng" algn="ctr">
+                      <a:solidFill>
+                        <a:srgbClr val="3A3F48"/>
+                      </a:solidFill>
+                      <a:prstDash val="solid"/>
+                      <a:round/>
+                      <a:headEnd type="none" w="med" len="med"/>
+                      <a:tailEnd type="none" w="med" len="med"/>
+                    </a:lnL>
+                    <a:lnR w="9525" cap="flat" cmpd="sng" algn="ctr">
+                      <a:solidFill>
+                        <a:srgbClr val="3A3F48"/>
+                      </a:solidFill>
+                      <a:prstDash val="solid"/>
+                      <a:round/>
+                      <a:headEnd type="none" w="med" len="med"/>
+                      <a:tailEnd type="none" w="med" len="med"/>
+                    </a:lnR>
+                    <a:lnT w="9525" cap="flat" cmpd="sng" algn="ctr">
+                      <a:solidFill>
+                        <a:srgbClr val="3A3F48"/>
+                      </a:solidFill>
+                      <a:prstDash val="solid"/>
+                      <a:round/>
+                      <a:headEnd type="none" w="med" len="med"/>
+                      <a:tailEnd type="none" w="med" len="med"/>
+                    </a:lnT>
+                    <a:lnB w="9525" cap="flat" cmpd="sng" algn="ctr">
+                      <a:solidFill>
+                        <a:srgbClr val="3A3F48"/>
+                      </a:solidFill>
+                      <a:prstDash val="solid"/>
+                      <a:round/>
+                      <a:headEnd type="none" w="med" len="med"/>
+                      <a:tailEnd type="none" w="med" len="med"/>
+                    </a:lnB>
+                    <a:solidFill>
+                      <a:srgbClr val="23272F"/>
+                    </a:solidFill>
+                  </a:tcPr>
+                </a:tc>
+              </a:tr>
+              <a:tr h="566928">
+                <a:tc>
+                  <a:txBody>
+                    <a:bodyPr/>
+                    <a:lstStyle/>
+                    <a:p>
+                      <a:pPr algn="l" indent="0" marL="0">
+                        <a:buNone/>
+                      </a:pPr>
+                      <a:r>
+                        <a:rPr lang="en-US" sz="1300" b="1" dirty="0">
+                          <a:solidFill>
+                            <a:schemeClr val="accent5"/>
+                          </a:solidFill>
+                          <a:latin typeface="Malgun Gothic" pitchFamily="34" charset="0"/>
+                          <a:ea typeface="Malgun Gothic" pitchFamily="34" charset="-122"/>
+                          <a:cs typeface="Malgun Gothic" pitchFamily="34" charset="-120"/>
+                        </a:rPr>
+                        <a:t>YOLOX-S</a:t>
+                      </a:r>
+                      <a:endParaRPr lang="en-US" sz="1300" dirty="0">
                         <a:latin typeface="Malgun Gothic" charset="0"/>
                         <a:ea typeface="Malgun Gothic" charset="0"/>
                         <a:cs typeface="Malgun Gothic" charset="0"/>
@@ -10018,87 +10385,17 @@
                         <a:buNone/>
                       </a:pPr>
                       <a:r>
-                        <a:rPr lang="en-US" sz="1500" dirty="0">
+                        <a:rPr lang="en-US" sz="1300" b="1" dirty="0">
                           <a:solidFill>
-                            <a:schemeClr val="accent2"/>
+                            <a:schemeClr val="accent1"/>
                           </a:solidFill>
                           <a:latin typeface="Malgun Gothic" pitchFamily="34" charset="0"/>
                           <a:ea typeface="Malgun Gothic" pitchFamily="34" charset="-122"/>
                           <a:cs typeface="Malgun Gothic" pitchFamily="34" charset="-120"/>
                         </a:rPr>
-                        <a:t>0 → 1</a:t>
+                        <a:t>2.0×</a:t>
                       </a:r>
-                      <a:endParaRPr lang="en-US" sz="1500" dirty="0">
-                        <a:latin typeface="Malgun Gothic" charset="0"/>
-                        <a:ea typeface="Malgun Gothic" charset="0"/>
-                        <a:cs typeface="Malgun Gothic" charset="0"/>
-                      </a:endParaRPr>
-                    </a:p>
-                  </a:txBody>
-                  <a:tcPr marL="91440" marR="91440" marT="45720" marB="45720" anchor="ctr">
-                    <a:lnL w="9525" cap="flat" cmpd="sng" algn="ctr">
-                      <a:solidFill>
-                        <a:srgbClr val="3A3F48"/>
-                      </a:solidFill>
-                      <a:prstDash val="solid"/>
-                      <a:round/>
-                      <a:headEnd type="none" w="med" len="med"/>
-                      <a:tailEnd type="none" w="med" len="med"/>
-                    </a:lnL>
-                    <a:lnR w="9525" cap="flat" cmpd="sng" algn="ctr">
-                      <a:solidFill>
-                        <a:srgbClr val="3A3F48"/>
-                      </a:solidFill>
-                      <a:prstDash val="solid"/>
-                      <a:round/>
-                      <a:headEnd type="none" w="med" len="med"/>
-                      <a:tailEnd type="none" w="med" len="med"/>
-                    </a:lnR>
-                    <a:lnT w="9525" cap="flat" cmpd="sng" algn="ctr">
-                      <a:solidFill>
-                        <a:srgbClr val="3A3F48"/>
-                      </a:solidFill>
-                      <a:prstDash val="solid"/>
-                      <a:round/>
-                      <a:headEnd type="none" w="med" len="med"/>
-                      <a:tailEnd type="none" w="med" len="med"/>
-                    </a:lnT>
-                    <a:lnB w="9525" cap="flat" cmpd="sng" algn="ctr">
-                      <a:solidFill>
-                        <a:srgbClr val="3A3F48"/>
-                      </a:solidFill>
-                      <a:prstDash val="solid"/>
-                      <a:round/>
-                      <a:headEnd type="none" w="med" len="med"/>
-                      <a:tailEnd type="none" w="med" len="med"/>
-                    </a:lnB>
-                    <a:solidFill>
-                      <a:srgbClr val="23272F"/>
-                    </a:solidFill>
-                  </a:tcPr>
-                </a:tc>
-              </a:tr>
-              <a:tr h="530352">
-                <a:tc>
-                  <a:txBody>
-                    <a:bodyPr/>
-                    <a:lstStyle/>
-                    <a:p>
-                      <a:pPr algn="l" indent="0" marL="0">
-                        <a:buNone/>
-                      </a:pPr>
-                      <a:r>
-                        <a:rPr lang="en-US" sz="1500" b="1" dirty="0">
-                          <a:solidFill>
-                            <a:schemeClr val="accent5"/>
-                          </a:solidFill>
-                          <a:latin typeface="Malgun Gothic" pitchFamily="34" charset="0"/>
-                          <a:ea typeface="Malgun Gothic" pitchFamily="34" charset="-122"/>
-                          <a:cs typeface="Malgun Gothic" pitchFamily="34" charset="-120"/>
-                        </a:rPr>
-                        <a:t>YOLOX-S</a:t>
-                      </a:r>
-                      <a:endParaRPr lang="en-US" sz="1500" dirty="0">
+                      <a:endParaRPr lang="en-US" sz="1300" dirty="0">
                         <a:latin typeface="Malgun Gothic" charset="0"/>
                         <a:ea typeface="Malgun Gothic" charset="0"/>
                         <a:cs typeface="Malgun Gothic" charset="0"/>
@@ -10156,7 +10453,7 @@
                         <a:buNone/>
                       </a:pPr>
                       <a:r>
-                        <a:rPr lang="en-US" sz="1500" dirty="0">
+                        <a:rPr lang="en-US" sz="1300" dirty="0">
                           <a:solidFill>
                             <a:schemeClr val="tx1"/>
                           </a:solidFill>
@@ -10164,9 +10461,9 @@
                           <a:ea typeface="Malgun Gothic" pitchFamily="34" charset="-122"/>
                           <a:cs typeface="Malgun Gothic" pitchFamily="34" charset="-120"/>
                         </a:rPr>
-                        <a:t>48.9 → 24.9</a:t>
+                        <a:t>18.4 → 9.8</a:t>
                       </a:r>
-                      <a:endParaRPr lang="en-US" sz="1500" dirty="0">
+                      <a:endParaRPr lang="en-US" sz="1300" dirty="0">
                         <a:latin typeface="Malgun Gothic" charset="0"/>
                         <a:ea typeface="Malgun Gothic" charset="0"/>
                         <a:cs typeface="Malgun Gothic" charset="0"/>
@@ -10224,17 +10521,17 @@
                         <a:buNone/>
                       </a:pPr>
                       <a:r>
-                        <a:rPr lang="en-US" sz="1500" b="1" dirty="0">
+                        <a:rPr lang="en-US" sz="1300" dirty="0">
                           <a:solidFill>
-                            <a:schemeClr val="accent1"/>
+                            <a:schemeClr val="tx1"/>
                           </a:solidFill>
                           <a:latin typeface="Malgun Gothic" pitchFamily="34" charset="0"/>
                           <a:ea typeface="Malgun Gothic" pitchFamily="34" charset="-122"/>
                           <a:cs typeface="Malgun Gothic" pitchFamily="34" charset="-120"/>
                         </a:rPr>
-                        <a:t>2.0×</a:t>
+                        <a:t>0.892 → 0.902</a:t>
                       </a:r>
-                      <a:endParaRPr lang="en-US" sz="1500" dirty="0">
+                      <a:endParaRPr lang="en-US" sz="1300" dirty="0">
                         <a:latin typeface="Malgun Gothic" charset="0"/>
                         <a:ea typeface="Malgun Gothic" charset="0"/>
                         <a:cs typeface="Malgun Gothic" charset="0"/>
@@ -10292,17 +10589,87 @@
                         <a:buNone/>
                       </a:pPr>
                       <a:r>
-                        <a:rPr lang="en-US" sz="1500" dirty="0">
+                        <a:rPr lang="en-US" sz="1300" dirty="0">
                           <a:solidFill>
-                            <a:schemeClr val="tx1"/>
+                            <a:schemeClr val="accent2"/>
                           </a:solidFill>
                           <a:latin typeface="Malgun Gothic" pitchFamily="34" charset="0"/>
                           <a:ea typeface="Malgun Gothic" pitchFamily="34" charset="-122"/>
                           <a:cs typeface="Malgun Gothic" pitchFamily="34" charset="-120"/>
                         </a:rPr>
-                        <a:t>18.4 → 9.8</a:t>
+                        <a:t>6 → 8</a:t>
                       </a:r>
-                      <a:endParaRPr lang="en-US" sz="1500" dirty="0">
+                      <a:endParaRPr lang="en-US" sz="1300" dirty="0">
+                        <a:latin typeface="Malgun Gothic" charset="0"/>
+                        <a:ea typeface="Malgun Gothic" charset="0"/>
+                        <a:cs typeface="Malgun Gothic" charset="0"/>
+                      </a:endParaRPr>
+                    </a:p>
+                  </a:txBody>
+                  <a:tcPr marL="91440" marR="91440" marT="45720" marB="45720" anchor="ctr">
+                    <a:lnL w="9525" cap="flat" cmpd="sng" algn="ctr">
+                      <a:solidFill>
+                        <a:srgbClr val="3A3F48"/>
+                      </a:solidFill>
+                      <a:prstDash val="solid"/>
+                      <a:round/>
+                      <a:headEnd type="none" w="med" len="med"/>
+                      <a:tailEnd type="none" w="med" len="med"/>
+                    </a:lnL>
+                    <a:lnR w="9525" cap="flat" cmpd="sng" algn="ctr">
+                      <a:solidFill>
+                        <a:srgbClr val="3A3F48"/>
+                      </a:solidFill>
+                      <a:prstDash val="solid"/>
+                      <a:round/>
+                      <a:headEnd type="none" w="med" len="med"/>
+                      <a:tailEnd type="none" w="med" len="med"/>
+                    </a:lnR>
+                    <a:lnT w="9525" cap="flat" cmpd="sng" algn="ctr">
+                      <a:solidFill>
+                        <a:srgbClr val="3A3F48"/>
+                      </a:solidFill>
+                      <a:prstDash val="solid"/>
+                      <a:round/>
+                      <a:headEnd type="none" w="med" len="med"/>
+                      <a:tailEnd type="none" w="med" len="med"/>
+                    </a:lnT>
+                    <a:lnB w="9525" cap="flat" cmpd="sng" algn="ctr">
+                      <a:solidFill>
+                        <a:srgbClr val="3A3F48"/>
+                      </a:solidFill>
+                      <a:prstDash val="solid"/>
+                      <a:round/>
+                      <a:headEnd type="none" w="med" len="med"/>
+                      <a:tailEnd type="none" w="med" len="med"/>
+                    </a:lnB>
+                    <a:solidFill>
+                      <a:srgbClr val="23272F"/>
+                    </a:solidFill>
+                  </a:tcPr>
+                </a:tc>
+              </a:tr>
+              <a:tr h="566928">
+                <a:tc>
+                  <a:txBody>
+                    <a:bodyPr/>
+                    <a:lstStyle/>
+                    <a:p>
+                      <a:pPr algn="l" indent="0" marL="0">
+                        <a:buNone/>
+                      </a:pPr>
+                      <a:r>
+                        <a:rPr lang="en-US" sz="1300" b="1" dirty="0">
+                          <a:solidFill>
+                            <a:schemeClr val="accent6"/>
+                          </a:solidFill>
+                          <a:latin typeface="Malgun Gothic" pitchFamily="34" charset="0"/>
+                          <a:ea typeface="Malgun Gothic" pitchFamily="34" charset="-122"/>
+                          <a:cs typeface="Malgun Gothic" pitchFamily="34" charset="-120"/>
+                        </a:rPr>
+                        <a:t>YOLOX-Tiny</a:t>
+                      </a:r>
+                      <a:endParaRPr lang="en-US" sz="1300" dirty="0">
                         <a:latin typeface="Malgun Gothic" charset="0"/>
                         <a:ea typeface="Malgun Gothic" charset="0"/>
                         <a:cs typeface="Malgun Gothic" charset="0"/>
@@ -10360,17 +10727,17 @@
                         <a:buNone/>
                       </a:pPr>
                       <a:r>
-                        <a:rPr lang="en-US" sz="1500" dirty="0">
+                        <a:rPr lang="en-US" sz="1300" b="1" dirty="0">
                           <a:solidFill>
-                            <a:schemeClr val="tx1"/>
+                            <a:schemeClr val="accent1"/>
                           </a:solidFill>
                           <a:latin typeface="Malgun Gothic" pitchFamily="34" charset="0"/>
                           <a:ea typeface="Malgun Gothic" pitchFamily="34" charset="-122"/>
                           <a:cs typeface="Malgun Gothic" pitchFamily="34" charset="-120"/>
                         </a:rPr>
-                        <a:t>0.892 → 0.902</a:t>
+                        <a:t>4.0×</a:t>
                       </a:r>
-                      <a:endParaRPr lang="en-US" sz="1500" dirty="0">
+                      <a:endParaRPr lang="en-US" sz="1300" dirty="0">
                         <a:latin typeface="Malgun Gothic" charset="0"/>
                         <a:ea typeface="Malgun Gothic" charset="0"/>
                         <a:cs typeface="Malgun Gothic" charset="0"/>
@@ -10428,87 +10795,17 @@
                         <a:buNone/>
                       </a:pPr>
                       <a:r>
-                        <a:rPr lang="en-US" sz="1500" dirty="0">
+                        <a:rPr lang="en-US" sz="1300" dirty="0">
                           <a:solidFill>
-                            <a:schemeClr val="accent2"/>
+                            <a:schemeClr val="tx1"/>
                           </a:solidFill>
                           <a:latin typeface="Malgun Gothic" pitchFamily="34" charset="0"/>
                           <a:ea typeface="Malgun Gothic" pitchFamily="34" charset="-122"/>
                           <a:cs typeface="Malgun Gothic" pitchFamily="34" charset="-120"/>
                         </a:rPr>
-                        <a:t>6 → 8</a:t>
+                        <a:t>10.6 → 5.8</a:t>
                       </a:r>
-                      <a:endParaRPr lang="en-US" sz="1500" dirty="0">
-                        <a:latin typeface="Malgun Gothic" charset="0"/>
-                        <a:ea typeface="Malgun Gothic" charset="0"/>
-                        <a:cs typeface="Malgun Gothic" charset="0"/>
-                      </a:endParaRPr>
-                    </a:p>
-                  </a:txBody>
-                  <a:tcPr marL="91440" marR="91440" marT="45720" marB="45720" anchor="ctr">
-                    <a:lnL w="9525" cap="flat" cmpd="sng" algn="ctr">
-                      <a:solidFill>
-                        <a:srgbClr val="3A3F48"/>
-                      </a:solidFill>
-                      <a:prstDash val="solid"/>
-                      <a:round/>
-                      <a:headEnd type="none" w="med" len="med"/>
-                      <a:tailEnd type="none" w="med" len="med"/>
-                    </a:lnL>
-                    <a:lnR w="9525" cap="flat" cmpd="sng" algn="ctr">
-                      <a:solidFill>
-                        <a:srgbClr val="3A3F48"/>
-                      </a:solidFill>
-                      <a:prstDash val="solid"/>
-                      <a:round/>
-                      <a:headEnd type="none" w="med" len="med"/>
-                      <a:tailEnd type="none" w="med" len="med"/>
-                    </a:lnR>
-                    <a:lnT w="9525" cap="flat" cmpd="sng" algn="ctr">
-                      <a:solidFill>
-                        <a:srgbClr val="3A3F48"/>
-                      </a:solidFill>
-                      <a:prstDash val="solid"/>
-                      <a:round/>
-                      <a:headEnd type="none" w="med" len="med"/>
-                      <a:tailEnd type="none" w="med" len="med"/>
-                    </a:lnT>
-                    <a:lnB w="9525" cap="flat" cmpd="sng" algn="ctr">
-                      <a:solidFill>
-                        <a:srgbClr val="3A3F48"/>
-                      </a:solidFill>
-                      <a:prstDash val="solid"/>
-                      <a:round/>
-                      <a:headEnd type="none" w="med" len="med"/>
-                      <a:tailEnd type="none" w="med" len="med"/>
-                    </a:lnB>
-                    <a:solidFill>
-                      <a:srgbClr val="23272F"/>
-                    </a:solidFill>
-                  </a:tcPr>
-                </a:tc>
-              </a:tr>
-              <a:tr h="530352">
-                <a:tc>
-                  <a:txBody>
-                    <a:bodyPr/>
-                    <a:lstStyle/>
-                    <a:p>
-                      <a:pPr algn="l" indent="0" marL="0">
-                        <a:buNone/>
-                      </a:pPr>
-                      <a:r>
-                        <a:rPr lang="en-US" sz="1500" b="1" dirty="0">
-                          <a:solidFill>
-                            <a:schemeClr val="accent6"/>
-                          </a:solidFill>
-                          <a:latin typeface="Malgun Gothic" pitchFamily="34" charset="0"/>
-                          <a:ea typeface="Malgun Gothic" pitchFamily="34" charset="-122"/>
-                          <a:cs typeface="Malgun Gothic" pitchFamily="34" charset="-120"/>
-                        </a:rPr>
-                        <a:t>YOLOX-Tiny</a:t>
-                      </a:r>
-                      <a:endParaRPr lang="en-US" sz="1500" dirty="0">
+                      <a:endParaRPr lang="en-US" sz="1300" dirty="0">
                         <a:latin typeface="Malgun Gothic" charset="0"/>
                         <a:ea typeface="Malgun Gothic" charset="0"/>
                         <a:cs typeface="Malgun Gothic" charset="0"/>
@@ -10566,7 +10863,7 @@
                         <a:buNone/>
                       </a:pPr>
                       <a:r>
-                        <a:rPr lang="en-US" sz="1500" dirty="0">
+                        <a:rPr lang="en-US" sz="1300" dirty="0">
                           <a:solidFill>
                             <a:schemeClr val="tx1"/>
                           </a:solidFill>
@@ -10574,9 +10871,9 @@
                           <a:ea typeface="Malgun Gothic" pitchFamily="34" charset="-122"/>
                           <a:cs typeface="Malgun Gothic" pitchFamily="34" charset="-120"/>
                         </a:rPr>
-                        <a:t>33.5 → 8.3</a:t>
+                        <a:t>0.832 → 0.829</a:t>
                       </a:r>
-                      <a:endParaRPr lang="en-US" sz="1500" dirty="0">
+                      <a:endParaRPr lang="en-US" sz="1300" dirty="0">
                         <a:latin typeface="Malgun Gothic" charset="0"/>
                         <a:ea typeface="Malgun Gothic" charset="0"/>
                         <a:cs typeface="Malgun Gothic" charset="0"/>
@@ -10634,211 +10931,7 @@
                         <a:buNone/>
                       </a:pPr>
                       <a:r>
-                        <a:rPr lang="en-US" sz="1500" b="1" dirty="0">
-                          <a:solidFill>
-                            <a:schemeClr val="accent1"/>
-                          </a:solidFill>
-                          <a:latin typeface="Malgun Gothic" pitchFamily="34" charset="0"/>
-                          <a:ea typeface="Malgun Gothic" pitchFamily="34" charset="-122"/>
-                          <a:cs typeface="Malgun Gothic" pitchFamily="34" charset="-120"/>
-                        </a:rPr>
-                        <a:t>4.0×</a:t>
-                      </a:r>
-                      <a:endParaRPr lang="en-US" sz="1500" dirty="0">
-                        <a:latin typeface="Malgun Gothic" charset="0"/>
-                        <a:ea typeface="Malgun Gothic" charset="0"/>
-                        <a:cs typeface="Malgun Gothic" charset="0"/>
-                      </a:endParaRPr>
-                    </a:p>
-                  </a:txBody>
-                  <a:tcPr marL="91440" marR="91440" marT="45720" marB="45720" anchor="ctr">
-                    <a:lnL w="9525" cap="flat" cmpd="sng" algn="ctr">
-                      <a:solidFill>
-                        <a:srgbClr val="3A3F48"/>
-                      </a:solidFill>
-                      <a:prstDash val="solid"/>
-                      <a:round/>
-                      <a:headEnd type="none" w="med" len="med"/>
-                      <a:tailEnd type="none" w="med" len="med"/>
-                    </a:lnL>
-                    <a:lnR w="9525" cap="flat" cmpd="sng" algn="ctr">
-                      <a:solidFill>
-                        <a:srgbClr val="3A3F48"/>
-                      </a:solidFill>
-                      <a:prstDash val="solid"/>
-                      <a:round/>
-                      <a:headEnd type="none" w="med" len="med"/>
-                      <a:tailEnd type="none" w="med" len="med"/>
-                    </a:lnR>
-                    <a:lnT w="9525" cap="flat" cmpd="sng" algn="ctr">
-                      <a:solidFill>
-                        <a:srgbClr val="3A3F48"/>
-                      </a:solidFill>
-                      <a:prstDash val="solid"/>
-                      <a:round/>
-                      <a:headEnd type="none" w="med" len="med"/>
-                      <a:tailEnd type="none" w="med" len="med"/>
-                    </a:lnT>
-                    <a:lnB w="9525" cap="flat" cmpd="sng" algn="ctr">
-                      <a:solidFill>
-                        <a:srgbClr val="3A3F48"/>
-                      </a:solidFill>
-                      <a:prstDash val="solid"/>
-                      <a:round/>
-                      <a:headEnd type="none" w="med" len="med"/>
-                      <a:tailEnd type="none" w="med" len="med"/>
-                    </a:lnB>
-                    <a:solidFill>
-                      <a:srgbClr val="23272F"/>
-                    </a:solidFill>
-                  </a:tcPr>
-                </a:tc>
-                <a:tc>
-                  <a:txBody>
-                    <a:bodyPr/>
-                    <a:lstStyle/>
-                    <a:p>
-                      <a:pPr algn="ctr" indent="0" marL="0">
-                        <a:buNone/>
-                      </a:pPr>
-                      <a:r>
-                        <a:rPr lang="en-US" sz="1500" dirty="0">
-                          <a:solidFill>
-                            <a:schemeClr val="tx1"/>
-                          </a:solidFill>
-                          <a:latin typeface="Malgun Gothic" pitchFamily="34" charset="0"/>
-                          <a:ea typeface="Malgun Gothic" pitchFamily="34" charset="-122"/>
-                          <a:cs typeface="Malgun Gothic" pitchFamily="34" charset="-120"/>
-                        </a:rPr>
-                        <a:t>10.6 → 5.8</a:t>
-                      </a:r>
-                      <a:endParaRPr lang="en-US" sz="1500" dirty="0">
-                        <a:latin typeface="Malgun Gothic" charset="0"/>
-                        <a:ea typeface="Malgun Gothic" charset="0"/>
-                        <a:cs typeface="Malgun Gothic" charset="0"/>
-                      </a:endParaRPr>
-                    </a:p>
-                  </a:txBody>
-                  <a:tcPr marL="91440" marR="91440" marT="45720" marB="45720" anchor="ctr">
-                    <a:lnL w="9525" cap="flat" cmpd="sng" algn="ctr">
-                      <a:solidFill>
-                        <a:srgbClr val="3A3F48"/>
-                      </a:solidFill>
-                      <a:prstDash val="solid"/>
-                      <a:round/>
-                      <a:headEnd type="none" w="med" len="med"/>
-                      <a:tailEnd type="none" w="med" len="med"/>
-                    </a:lnL>
-                    <a:lnR w="9525" cap="flat" cmpd="sng" algn="ctr">
-                      <a:solidFill>
-                        <a:srgbClr val="3A3F48"/>
-                      </a:solidFill>
-                      <a:prstDash val="solid"/>
-                      <a:round/>
-                      <a:headEnd type="none" w="med" len="med"/>
-                      <a:tailEnd type="none" w="med" len="med"/>
-                    </a:lnR>
-                    <a:lnT w="9525" cap="flat" cmpd="sng" algn="ctr">
-                      <a:solidFill>
-                        <a:srgbClr val="3A3F48"/>
-                      </a:solidFill>
-                      <a:prstDash val="solid"/>
-                      <a:round/>
-                      <a:headEnd type="none" w="med" len="med"/>
-                      <a:tailEnd type="none" w="med" len="med"/>
-                    </a:lnT>
-                    <a:lnB w="9525" cap="flat" cmpd="sng" algn="ctr">
-                      <a:solidFill>
-                        <a:srgbClr val="3A3F48"/>
-                      </a:solidFill>
-                      <a:prstDash val="solid"/>
-                      <a:round/>
-                      <a:headEnd type="none" w="med" len="med"/>
-                      <a:tailEnd type="none" w="med" len="med"/>
-                    </a:lnB>
-                    <a:solidFill>
-                      <a:srgbClr val="23272F"/>
-                    </a:solidFill>
-                  </a:tcPr>
-                </a:tc>
-                <a:tc>
-                  <a:txBody>
-                    <a:bodyPr/>
-                    <a:lstStyle/>
-                    <a:p>
-                      <a:pPr algn="ctr" indent="0" marL="0">
-                        <a:buNone/>
-                      </a:pPr>
-                      <a:r>
-                        <a:rPr lang="en-US" sz="1500" dirty="0">
-                          <a:solidFill>
-                            <a:schemeClr val="tx1"/>
-                          </a:solidFill>
-                          <a:latin typeface="Malgun Gothic" pitchFamily="34" charset="0"/>
-                          <a:ea typeface="Malgun Gothic" pitchFamily="34" charset="-122"/>
-                          <a:cs typeface="Malgun Gothic" pitchFamily="34" charset="-120"/>
-                        </a:rPr>
-                        <a:t>0.832 → 0.829</a:t>
-                      </a:r>
-                      <a:endParaRPr lang="en-US" sz="1500" dirty="0">
-                        <a:latin typeface="Malgun Gothic" charset="0"/>
-                        <a:ea typeface="Malgun Gothic" charset="0"/>
-                        <a:cs typeface="Malgun Gothic" charset="0"/>
-                      </a:endParaRPr>
-                    </a:p>
-                  </a:txBody>
-                  <a:tcPr marL="91440" marR="91440" marT="45720" marB="45720" anchor="ctr">
-                    <a:lnL w="9525" cap="flat" cmpd="sng" algn="ctr">
-                      <a:solidFill>
-                        <a:srgbClr val="3A3F48"/>
-                      </a:solidFill>
-                      <a:prstDash val="solid"/>
-                      <a:round/>
-                      <a:headEnd type="none" w="med" len="med"/>
-                      <a:tailEnd type="none" w="med" len="med"/>
-                    </a:lnL>
-                    <a:lnR w="9525" cap="flat" cmpd="sng" algn="ctr">
-                      <a:solidFill>
-                        <a:srgbClr val="3A3F48"/>
-                      </a:solidFill>
-                      <a:prstDash val="solid"/>
-                      <a:round/>
-                      <a:headEnd type="none" w="med" len="med"/>
-                      <a:tailEnd type="none" w="med" len="med"/>
-                    </a:lnR>
-                    <a:lnT w="9525" cap="flat" cmpd="sng" algn="ctr">
-                      <a:solidFill>
-                        <a:srgbClr val="3A3F48"/>
-                      </a:solidFill>
-                      <a:prstDash val="solid"/>
-                      <a:round/>
-                      <a:headEnd type="none" w="med" len="med"/>
-                      <a:tailEnd type="none" w="med" len="med"/>
-                    </a:lnT>
-                    <a:lnB w="9525" cap="flat" cmpd="sng" algn="ctr">
-                      <a:solidFill>
-                        <a:srgbClr val="3A3F48"/>
-                      </a:solidFill>
-                      <a:prstDash val="solid"/>
-                      <a:round/>
-                      <a:headEnd type="none" w="med" len="med"/>
-                      <a:tailEnd type="none" w="med" len="med"/>
-                    </a:lnB>
-                    <a:solidFill>
-                      <a:srgbClr val="23272F"/>
-                    </a:solidFill>
-                  </a:tcPr>
-                </a:tc>
-                <a:tc>
-                  <a:txBody>
-                    <a:bodyPr/>
-                    <a:lstStyle/>
-                    <a:p>
-                      <a:pPr algn="ctr" indent="0" marL="0">
-                        <a:buNone/>
-                      </a:pPr>
-                      <a:r>
-                        <a:rPr lang="en-US" sz="1500" dirty="0">
+                        <a:rPr lang="en-US" sz="1300" dirty="0">
                           <a:solidFill>
                             <a:schemeClr val="tx1"/>
                           </a:solidFill>
@@ -10848,7 +10941,7 @@
                         </a:rPr>
                         <a:t>1 → 0</a:t>
                       </a:r>
-                      <a:endParaRPr lang="en-US" sz="1500" dirty="0">
+                      <a:endParaRPr lang="en-US" sz="1300" dirty="0">
                         <a:latin typeface="Malgun Gothic" charset="0"/>
                         <a:ea typeface="Malgun Gothic" charset="0"/>
                         <a:cs typeface="Malgun Gothic" charset="0"/>
@@ -10904,18 +10997,54 @@
       </p:graphicFrame>
       <p:sp>
         <p:nvSpPr>
-          <p:cNvPr id="5" name="method-card"/>
+          <p:cNvPr id="6" name="int8-note"/>
+          <p:cNvSpPr txBox="1"/>
+          <p:nvPr/>
+        </p:nvSpPr>
+        <p:spPr>
+          <a:xfrm>
+            <a:off x="6537960" y="4160520"/>
+            <a:ext cx="5102352" cy="274320"/>
+          </a:xfrm>
+          <a:prstGeom prst="rect">
+            <a:avLst/>
+          </a:prstGeom>
+          <a:noFill/>
+          <a:ln/>
+        </p:spPr>
+        <p:txBody>
+          <a:bodyPr wrap="square" lIns="0" tIns="0" rIns="0" bIns="0" rtlCol="0" anchor="t"/>
+          <a:lstStyle/>
+          <a:p>
+            <a:pPr indent="0" marL="0">
+              <a:buNone/>
+            </a:pPr>
+            <a:r>
+              <a:rPr lang="en-US" sz="1100" dirty="0">
+                <a:solidFill>
+                  <a:schemeClr val="tx2"/>
+                </a:solidFill>
+              </a:rPr>
+              <a:t>값: FP16 → INT8 · 놓친 셀 = 결함 98장 중 검토 기준 0.30 미만</a:t>
+            </a:r>
+            <a:endParaRPr lang="en-US" sz="1100" dirty="0"/>
+          </a:p>
+        </p:txBody>
+      </p:sp>
+      <p:sp>
+        <p:nvSpPr>
+          <p:cNvPr id="7" name="method-card"/>
           <p:cNvSpPr/>
           <p:nvPr/>
         </p:nvSpPr>
         <p:spPr>
           <a:xfrm>
-            <a:off x="548640" y="3931920"/>
-            <a:ext cx="11094415" cy="566928"/>
+            <a:off x="548640" y="4800600"/>
+            <a:ext cx="11094415" cy="502920"/>
           </a:xfrm>
           <a:prstGeom prst="roundRect">
             <a:avLst>
-              <a:gd name="adj" fmla="val 12903"/>
+              <a:gd name="adj" fmla="val 14545"/>
             </a:avLst>
           </a:prstGeom>
           <a:solidFill>
@@ -10926,14 +11055,14 @@
       </p:sp>
       <p:sp>
         <p:nvSpPr>
-          <p:cNvPr id="6" name="method"/>
+          <p:cNvPr id="8" name="method"/>
           <p:cNvSpPr txBox="1"/>
           <p:nvPr/>
         </p:nvSpPr>
         <p:spPr>
           <a:xfrm>
-            <a:off x="822960" y="3959352"/>
-            <a:ext cx="10545775" cy="512064"/>
+            <a:off x="822960" y="4800600"/>
+            <a:ext cx="10545775" cy="502920"/>
           </a:xfrm>
           <a:prstGeom prst="rect">
             <a:avLst/>
@@ -10973,18 +11102,18 @@
       </p:sp>
       <p:sp>
         <p:nvSpPr>
-          <p:cNvPr id="7" name="pro-card"/>
+          <p:cNvPr id="9" name="pro-card"/>
           <p:cNvSpPr/>
           <p:nvPr/>
         </p:nvSpPr>
         <p:spPr>
           <a:xfrm>
-            <a:off x="548640" y="4709160"/>
-            <a:ext cx="5440680" cy="1508760"/>
+            <a:off x="548640" y="5486400"/>
+            <a:ext cx="5440680" cy="731520"/>
           </a:xfrm>
           <a:prstGeom prst="roundRect">
             <a:avLst>
-              <a:gd name="adj" fmla="val 4848"/>
+              <a:gd name="adj" fmla="val 10000"/>
             </a:avLst>
           </a:prstGeom>
           <a:solidFill>
@@ -10995,14 +11124,14 @@
       </p:sp>
       <p:sp>
         <p:nvSpPr>
-          <p:cNvPr id="8" name="pro-h"/>
+          <p:cNvPr id="10" name="pro"/>
           <p:cNvSpPr txBox="1"/>
           <p:nvPr/>
         </p:nvSpPr>
         <p:spPr>
           <a:xfrm>
-            <a:off x="822960" y="4828032"/>
-            <a:ext cx="2743200" cy="320040"/>
+            <a:off x="822960" y="5486400"/>
+            <a:ext cx="5029200" cy="731520"/>
           </a:xfrm>
           <a:prstGeom prst="rect">
             <a:avLst/>
@@ -11011,195 +11140,101 @@
           <a:ln/>
         </p:spPr>
         <p:txBody>
-          <a:bodyPr wrap="square" lIns="0" tIns="0" rIns="0" bIns="0" rtlCol="0" anchor="t"/>
+          <a:bodyPr wrap="square" lIns="0" tIns="0" rIns="0" bIns="0" rtlCol="0" anchor="ctr"/>
           <a:lstStyle/>
           <a:p>
             <a:pPr indent="0" marL="0">
               <a:buNone/>
             </a:pPr>
             <a:r>
-              <a:rPr lang="en-US" sz="1600" b="1" dirty="0">
+              <a:rPr lang="en-US" sz="1500" b="1" dirty="0">
                 <a:solidFill>
                   <a:schemeClr val="accent6"/>
                 </a:solidFill>
               </a:rPr>
-              <a:t>장점</a:t>
+              <a:t>장점  </a:t>
             </a:r>
-            <a:endParaRPr lang="en-US" sz="1600" dirty="0"/>
-          </a:p>
-        </p:txBody>
-      </p:sp>
-      <p:sp>
-        <p:nvSpPr>
-          <p:cNvPr id="9" name="pro-b"/>
-          <p:cNvSpPr txBox="1"/>
-          <p:nvPr/>
-        </p:nvSpPr>
-        <p:spPr>
-          <a:xfrm>
-            <a:off x="822960" y="5212080"/>
-            <a:ext cx="4937760" cy="868680"/>
-          </a:xfrm>
-          <a:prstGeom prst="rect">
-            <a:avLst/>
-          </a:prstGeom>
-          <a:noFill/>
-          <a:ln/>
-        </p:spPr>
-        <p:txBody>
-          <a:bodyPr wrap="square" lIns="0" tIns="0" rIns="0" bIns="0" rtlCol="0" anchor="t"/>
-          <a:lstStyle/>
-          <a:p>
-            <a:pPr marL="342900" indent="-342900">
-              <a:spcAft>
-                <a:spcPts val="600"/>
-              </a:spcAft>
-              <a:buSzPct val="100000"/>
-              <a:buChar char="•"/>
+            <a:pPr indent="0" marL="0">
+              <a:buNone/>
             </a:pPr>
             <a:r>
-              <a:rPr lang="en-US" sz="1400" dirty="0">
+              <a:rPr lang="en-US" sz="1500" dirty="0">
                 <a:solidFill>
                   <a:schemeClr val="tx1"/>
                 </a:solidFill>
               </a:rPr>
-              <a:t>CPU 2–4배 빠름 · 크기 약 절반</a:t>
+              <a:t>2–4배 빠름 · 크기 절반 · mAP 유지</a:t>
             </a:r>
-            <a:endParaRPr lang="en-US" sz="1400" dirty="0"/>
-          </a:p>
-          <a:p>
-            <a:pPr marL="342900" indent="-342900">
-              <a:spcAft>
-                <a:spcPts val="600"/>
-              </a:spcAft>
-              <a:buSzPct val="100000"/>
-              <a:buChar char="•"/>
+            <a:endParaRPr lang="en-US" sz="1500" dirty="0"/>
+          </a:p>
+        </p:txBody>
+      </p:sp>
+      <p:sp>
+        <p:nvSpPr>
+          <p:cNvPr id="11" name="con-card"/>
+          <p:cNvSpPr/>
+          <p:nvPr/>
+        </p:nvSpPr>
+        <p:spPr>
+          <a:xfrm>
+            <a:off x="6199632" y="5486400"/>
+            <a:ext cx="5440680" cy="731520"/>
+          </a:xfrm>
+          <a:prstGeom prst="roundRect">
+            <a:avLst>
+              <a:gd name="adj" fmla="val 10000"/>
+            </a:avLst>
+          </a:prstGeom>
+          <a:solidFill>
+            <a:schemeClr val="bg2"/>
+          </a:solidFill>
+          <a:ln/>
+        </p:spPr>
+      </p:sp>
+      <p:sp>
+        <p:nvSpPr>
+          <p:cNvPr id="12" name="con"/>
+          <p:cNvSpPr txBox="1"/>
+          <p:nvPr/>
+        </p:nvSpPr>
+        <p:spPr>
+          <a:xfrm>
+            <a:off x="6473952" y="5486400"/>
+            <a:ext cx="5029200" cy="731520"/>
+          </a:xfrm>
+          <a:prstGeom prst="rect">
+            <a:avLst/>
+          </a:prstGeom>
+          <a:noFill/>
+          <a:ln/>
+        </p:spPr>
+        <p:txBody>
+          <a:bodyPr wrap="square" lIns="0" tIns="0" rIns="0" bIns="0" rtlCol="0" anchor="ctr"/>
+          <a:lstStyle/>
+          <a:p>
+            <a:pPr indent="0" marL="0">
+              <a:buNone/>
             </a:pPr>
             <a:r>
-              <a:rPr lang="en-US" sz="1400" dirty="0">
+              <a:rPr lang="en-US" sz="1500" b="1" dirty="0">
+                <a:solidFill>
+                  <a:schemeClr val="accent2"/>
+                </a:solidFill>
+              </a:rPr>
+              <a:t>단점  </a:t>
+            </a:r>
+            <a:pPr indent="0" marL="0">
+              <a:buNone/>
+            </a:pPr>
+            <a:r>
+              <a:rPr lang="en-US" sz="1500" dirty="0">
                 <a:solidFill>
                   <a:schemeClr val="tx1"/>
                 </a:solidFill>
               </a:rPr>
-              <a:t>mAP@50은 거의 그대로</a:t>
+              <a:t>신뢰도 ↓ → 놓침 ↑ · 기준값 재설정 필요</a:t>
             </a:r>
-            <a:endParaRPr lang="en-US" sz="1400" dirty="0"/>
-          </a:p>
-        </p:txBody>
-      </p:sp>
-      <p:sp>
-        <p:nvSpPr>
-          <p:cNvPr id="10" name="con-card"/>
-          <p:cNvSpPr/>
-          <p:nvPr/>
-        </p:nvSpPr>
-        <p:spPr>
-          <a:xfrm>
-            <a:off x="6199632" y="4709160"/>
-            <a:ext cx="5440680" cy="1508760"/>
-          </a:xfrm>
-          <a:prstGeom prst="roundRect">
-            <a:avLst>
-              <a:gd name="adj" fmla="val 4848"/>
-            </a:avLst>
-          </a:prstGeom>
-          <a:solidFill>
-            <a:schemeClr val="bg2"/>
-          </a:solidFill>
-          <a:ln/>
-        </p:spPr>
-      </p:sp>
-      <p:sp>
-        <p:nvSpPr>
-          <p:cNvPr id="11" name="con-h"/>
-          <p:cNvSpPr txBox="1"/>
-          <p:nvPr/>
-        </p:nvSpPr>
-        <p:spPr>
-          <a:xfrm>
-            <a:off x="6473952" y="4828032"/>
-            <a:ext cx="2743200" cy="320040"/>
-          </a:xfrm>
-          <a:prstGeom prst="rect">
-            <a:avLst/>
-          </a:prstGeom>
-          <a:noFill/>
-          <a:ln/>
-        </p:spPr>
-        <p:txBody>
-          <a:bodyPr wrap="square" lIns="0" tIns="0" rIns="0" bIns="0" rtlCol="0" anchor="t"/>
-          <a:lstStyle/>
-          <a:p>
-            <a:pPr indent="0" marL="0">
-              <a:buNone/>
-            </a:pPr>
-            <a:r>
-              <a:rPr lang="en-US" sz="1600" b="1" dirty="0">
-                <a:solidFill>
-                  <a:schemeClr val="accent2"/>
-                </a:solidFill>
-              </a:rPr>
-              <a:t>단점</a:t>
-            </a:r>
-            <a:endParaRPr lang="en-US" sz="1600" dirty="0"/>
-          </a:p>
-        </p:txBody>
-      </p:sp>
-      <p:sp>
-        <p:nvSpPr>
-          <p:cNvPr id="12" name="con-b"/>
-          <p:cNvSpPr txBox="1"/>
-          <p:nvPr/>
-        </p:nvSpPr>
-        <p:spPr>
-          <a:xfrm>
-            <a:off x="6473952" y="5212080"/>
-            <a:ext cx="4937760" cy="868680"/>
-          </a:xfrm>
-          <a:prstGeom prst="rect">
-            <a:avLst/>
-          </a:prstGeom>
-          <a:noFill/>
-          <a:ln/>
-        </p:spPr>
-        <p:txBody>
-          <a:bodyPr wrap="square" lIns="0" tIns="0" rIns="0" bIns="0" rtlCol="0" anchor="t"/>
-          <a:lstStyle/>
-          <a:p>
-            <a:pPr marL="342900" indent="-342900">
-              <a:spcAft>
-                <a:spcPts val="600"/>
-              </a:spcAft>
-              <a:buSzPct val="100000"/>
-              <a:buChar char="•"/>
-            </a:pPr>
-            <a:r>
-              <a:rPr lang="en-US" sz="1400" dirty="0">
-                <a:solidFill>
-                  <a:schemeClr val="tx1"/>
-                </a:solidFill>
-              </a:rPr>
-              <a:t>신뢰도 하락 → 같은 기준에서 놓침 증가</a:t>
-            </a:r>
-            <a:endParaRPr lang="en-US" sz="1400" dirty="0"/>
-          </a:p>
-          <a:p>
-            <a:pPr marL="342900" indent="-342900">
-              <a:spcAft>
-                <a:spcPts val="600"/>
-              </a:spcAft>
-              <a:buSzPct val="100000"/>
-              <a:buChar char="•"/>
-            </a:pPr>
-            <a:r>
-              <a:rPr lang="en-US" sz="1400" b="1" dirty="0">
-                <a:solidFill>
-                  <a:schemeClr val="tx1"/>
-                </a:solidFill>
-              </a:rPr>
-              <a:t>INT8용 기준값 재설정 필요</a:t>
-            </a:r>
-            <a:endParaRPr lang="en-US" sz="1400" dirty="0"/>
+            <a:endParaRPr lang="en-US" sz="1500" dirty="0"/>
           </a:p>
         </p:txBody>
       </p:sp>

--- a/docs/submission/BatteryVision_발표.pptx
+++ b/docs/submission/BatteryVision_발표.pptx
@@ -116,13 +116,13 @@
   <p:extLst>
     <p:ext uri="{521415D9-36F7-43E2-AB2F-B90AF26B5E84}">
       <p14:sectionLst xmlns:p14="http://schemas.microsoft.com/office/powerpoint/2010/main">
-        <p14:section name="도입" id="{8e06e404-74bf-e672-ad4b-e408d23607d5}">
+        <p14:section name="도입" id="{dfc59b71-a3ae-029e-6699-5dd83144d8bf}">
           <p14:sldIdLst>
             <p14:sldId id="256"/>
             <p14:sldId id="257"/>
           </p14:sldIdLst>
         </p14:section>
-        <p14:section name="실험" id="{a4425e8b-1365-fc80-ffe0-438ebf9b7772}">
+        <p14:section name="실험" id="{bde8193f-717a-5375-ea80-5f49ac4d68fb}">
           <p14:sldIdLst>
             <p14:sldId id="258"/>
             <p14:sldId id="259"/>
@@ -130,17 +130,17 @@
             <p14:sldId id="261"/>
           </p14:sldIdLst>
         </p14:section>
-        <p14:section name="최적화" id="{4d0c4598-9562-f302-97d3-2ee62463dd91}">
+        <p14:section name="최적화" id="{47949f94-4b1c-365b-4ae1-541cdba602b2}">
           <p14:sldIdLst>
             <p14:sldId id="262"/>
           </p14:sldIdLst>
         </p14:section>
-        <p14:section name="검증" id="{9b56f984-495f-7db3-7f12-b6f342283212}">
+        <p14:section name="검증" id="{1b9ad431-83c8-c39e-f745-2f243faf8572}">
           <p14:sldIdLst>
             <p14:sldId id="263"/>
           </p14:sldIdLst>
         </p14:section>
-        <p14:section name="정리" id="{0ddf19f7-066e-78f8-bc03-a818d8656fde}">
+        <p14:section name="정리" id="{b9d06c33-3bf9-1a1c-f4c7-e4ab02b1a570}">
           <p14:sldIdLst>
             <p14:sldId id="264"/>
             <p14:sldId id="265"/>
@@ -1729,7 +1729,7 @@
           <a:p>
             <a:r>
               <a:rPr lang="en-US" dirty="0"/>
-              <a:t>왼쪽은 Geti 화면입니다. 세 모델 모두 같은 2,800장으로 학습했고, Geti 점수는 ATSS 86%, 나머지 81%입니다. 오른쪽은 직접 만든 벤치마크로 잰 값인데 순서가 같습니다. 파라미터가 가장 적은 ATSS가 가장 정확했고, 학습에 안 쓴 2차 세트에서도 ATSS가 YOLOX-S보다 훨씬 많이 잡았습니다. 다만 '작다'는 파라미터 기준이고, 연산량은 Tiny가 가장 적습니다.</a:t>
+              <a:t>왼쪽은 Geti 화면입니다. 세 모델 모두 같은 2,800장으로 학습했고, Geti 점수는 ATSS 86%, 나머지 81%입니다. 다만 Roboflow가 원본마다 증강 사본 3장을 만들어 두었고 Geti가 이를 무작위로 나눴기 때문에, 같은 원본의 사본이 Geti 학습과 테스트에 함께 들어갔을 가능성이 높아 Geti 점수도 낙관적입니다. 오른쪽은 직접 만든 벤치마크로 잰 값인데 순서가 같습니다. 파라미터가 가장 적은 ATSS가 가장 정확했고, 학습에 안 쓴 2차 세트에서도 ATSS가 YOLOX-S보다 훨씬 많이 잡았습니다. 다만 '작다'는 파라미터 기준이고, 연산량은 Tiny가 가장 적습니다.</a:t>
             </a:r>
             <a:endParaRPr lang="en-US" dirty="0"/>
           </a:p>
@@ -1993,7 +1993,7 @@
           <a:p>
             <a:r>
               <a:rPr lang="en-US" dirty="0"/>
-              <a:t>같은 업로더가 올린 다른 세트에서, 학습에 한 번도 쓰지 않은 45장으로 제 앱에서 다시 테스트했습니다. 1차 테스트에서 결함 셀을 거의 다 잡던 모델이 ATSS 47%, YOLOX-S 3%까지 떨어집니다. 결함을 착각한 게 아니라 점수가 낮아서 통과시킨 것이고, 정상 셀을 불합격시킨 경우는 없었습니다. 1차 테스트에는 학습 때 본 사진이 섞여 있었고 촬영 환경도 같았기 때문입니다. 그럼 기준값을 낮추면 될까요? 0.15까지 낮추면 결함은 97% 잡지만 정상 셀도 87%가 걸립니다. 두 점수 분포가 겹치기 때문에 기준값으로는 해결되지 않고, 새 환경의 사진으로 재학습해야 합니다.</a:t>
+              <a:t>같은 업로더가 올린 다른 세트에서, 학습에 한 번도 쓰지 않은 45장으로 제 앱에서 다시 테스트했습니다. 1차 테스트에서 결함 셀을 거의 다 잡던 모델이 ATSS 47%, YOLOX-S 3%까지 떨어집니다. 결함을 착각한 게 아니라 점수가 낮아서 통과시킨 것이고, 정상 셀을 불합격시킨 경우는 없었습니다. 기준값을 바꿔 보면, ATSS는 0.15까지 낮추면 결함 97%를 잡지만 정상 셀도 87%가 걸립니다. YOLOX-S는 다릅니다. 2차 세트 mAP@50이 0.93으로 결함을 정상보다 높게 순위 매기는 건 정확한데, 점수 자체가 낮습니다. 0.05로 낮추면 정상 오검출 없이 57%를 잡습니다. 즉 기준값은 모델마다 따로 정해야 하고, 그래도 부족하기 때문에 새 환경 사진으로 재학습이 필요합니다.</a:t>
             </a:r>
             <a:endParaRPr lang="en-US" dirty="0"/>
           </a:p>
@@ -6533,7 +6533,7 @@
         <p:spPr>
           <a:xfrm>
             <a:off x="548640" y="1600200"/>
-            <a:ext cx="4282112" cy="4617720"/>
+            <a:ext cx="3730949" cy="4023360"/>
           </a:xfrm>
           <a:prstGeom prst="rect">
             <a:avLst/>
@@ -6542,14 +6542,64 @@
       </p:pic>
       <p:sp>
         <p:nvSpPr>
-          <p:cNvPr id="5" name="own-h"/>
+          <p:cNvPr id="5" name="geti-caveat"/>
           <p:cNvSpPr txBox="1"/>
           <p:nvPr/>
         </p:nvSpPr>
         <p:spPr>
           <a:xfrm>
-            <a:off x="5150792" y="1600200"/>
-            <a:ext cx="6492263" cy="320040"/>
+            <a:off x="548640" y="5687568"/>
+            <a:ext cx="3730949" cy="548640"/>
+          </a:xfrm>
+          <a:prstGeom prst="rect">
+            <a:avLst/>
+          </a:prstGeom>
+          <a:noFill/>
+          <a:ln/>
+        </p:spPr>
+        <p:txBody>
+          <a:bodyPr wrap="square" lIns="0" tIns="0" rIns="0" bIns="0" rtlCol="0" anchor="t"/>
+          <a:lstStyle/>
+          <a:p>
+            <a:pPr indent="0" marL="0">
+              <a:buNone/>
+            </a:pPr>
+            <a:r>
+              <a:rPr lang="en-US" sz="1100" b="1" dirty="0">
+                <a:solidFill>
+                  <a:schemeClr val="accent3"/>
+                </a:solidFill>
+              </a:rPr>
+              <a:t>Geti 점수도 낙관적  </a:t>
+            </a:r>
+            <a:endParaRPr lang="en-US" sz="1100" dirty="0"/>
+          </a:p>
+          <a:p>
+            <a:pPr indent="0" marL="0">
+              <a:buNone/>
+            </a:pPr>
+            <a:r>
+              <a:rPr lang="en-US" sz="1100" dirty="0">
+                <a:solidFill>
+                  <a:schemeClr val="tx2"/>
+                </a:solidFill>
+              </a:rPr>
+              <a:t>같은 원본의 ×3 증강 사본이 Geti 학습·테스트에 함께 분할됐을 가능성</a:t>
+            </a:r>
+            <a:endParaRPr lang="en-US" sz="1100" dirty="0"/>
+          </a:p>
+        </p:txBody>
+      </p:sp>
+      <p:sp>
+        <p:nvSpPr>
+          <p:cNvPr id="6" name="own-h"/>
+          <p:cNvSpPr txBox="1"/>
+          <p:nvPr/>
+        </p:nvSpPr>
+        <p:spPr>
+          <a:xfrm>
+            <a:off x="4599629" y="1600200"/>
+            <a:ext cx="7043426" cy="320040"/>
           </a:xfrm>
           <a:prstGeom prst="rect">
             <a:avLst/>
@@ -6578,13 +6628,13 @@
       </p:sp>
       <p:sp>
         <p:nvSpPr>
-          <p:cNvPr id="6" name="own-col-0"/>
+          <p:cNvPr id="7" name="own-col-0"/>
           <p:cNvSpPr txBox="1"/>
           <p:nvPr/>
         </p:nvSpPr>
         <p:spPr>
           <a:xfrm>
-            <a:off x="7665392" y="2011680"/>
+            <a:off x="7114229" y="2011680"/>
             <a:ext cx="1600200" cy="274320"/>
           </a:xfrm>
           <a:prstGeom prst="rect">
@@ -6614,13 +6664,13 @@
       </p:sp>
       <p:sp>
         <p:nvSpPr>
-          <p:cNvPr id="7" name="own-col-1"/>
+          <p:cNvPr id="8" name="own-col-1"/>
           <p:cNvSpPr txBox="1"/>
           <p:nvPr/>
         </p:nvSpPr>
         <p:spPr>
           <a:xfrm>
-            <a:off x="9311312" y="2011680"/>
+            <a:off x="8760149" y="2011680"/>
             <a:ext cx="1097280" cy="274320"/>
           </a:xfrm>
           <a:prstGeom prst="rect">
@@ -6650,13 +6700,13 @@
       </p:sp>
       <p:sp>
         <p:nvSpPr>
-          <p:cNvPr id="8" name="own-col-2"/>
+          <p:cNvPr id="9" name="own-col-2"/>
           <p:cNvSpPr txBox="1"/>
           <p:nvPr/>
         </p:nvSpPr>
         <p:spPr>
           <a:xfrm>
-            <a:off x="10179992" y="2011680"/>
+            <a:off x="9628829" y="2011680"/>
             <a:ext cx="1280160" cy="274320"/>
           </a:xfrm>
           <a:prstGeom prst="rect">
@@ -6686,14 +6736,14 @@
       </p:sp>
       <p:sp>
         <p:nvSpPr>
-          <p:cNvPr id="9" name="own-row-0"/>
+          <p:cNvPr id="10" name="own-row-0"/>
           <p:cNvSpPr/>
           <p:nvPr/>
         </p:nvSpPr>
         <p:spPr>
           <a:xfrm>
-            <a:off x="5150792" y="2377440"/>
-            <a:ext cx="6492263" cy="1051560"/>
+            <a:off x="4599629" y="2377440"/>
+            <a:ext cx="7043426" cy="1051560"/>
           </a:xfrm>
           <a:prstGeom prst="roundRect">
             <a:avLst>
@@ -6708,13 +6758,13 @@
       </p:sp>
       <p:sp>
         <p:nvSpPr>
-          <p:cNvPr id="10" name="own-dot-0"/>
+          <p:cNvPr id="11" name="own-dot-0"/>
           <p:cNvSpPr/>
           <p:nvPr/>
         </p:nvSpPr>
         <p:spPr>
           <a:xfrm>
-            <a:off x="5379392" y="2606040"/>
+            <a:off x="4828229" y="2606040"/>
             <a:ext cx="146304" cy="146304"/>
           </a:xfrm>
           <a:prstGeom prst="ellipse">
@@ -6728,13 +6778,13 @@
       </p:sp>
       <p:sp>
         <p:nvSpPr>
-          <p:cNvPr id="11" name="own-n-0"/>
+          <p:cNvPr id="12" name="own-n-0"/>
           <p:cNvSpPr txBox="1"/>
           <p:nvPr/>
         </p:nvSpPr>
         <p:spPr>
           <a:xfrm>
-            <a:off x="5607992" y="2514600"/>
+            <a:off x="5056829" y="2514600"/>
             <a:ext cx="2103120" cy="320040"/>
           </a:xfrm>
           <a:prstGeom prst="rect">
@@ -6764,13 +6814,13 @@
       </p:sp>
       <p:sp>
         <p:nvSpPr>
-          <p:cNvPr id="12" name="own-s-0"/>
+          <p:cNvPr id="13" name="own-s-0"/>
           <p:cNvSpPr txBox="1"/>
           <p:nvPr/>
         </p:nvSpPr>
         <p:spPr>
           <a:xfrm>
-            <a:off x="5607992" y="2926080"/>
+            <a:off x="5056829" y="2926080"/>
             <a:ext cx="2103120" cy="274320"/>
           </a:xfrm>
           <a:prstGeom prst="rect">
@@ -6800,13 +6850,13 @@
       </p:sp>
       <p:sp>
         <p:nvSpPr>
-          <p:cNvPr id="13" name="own-m-0"/>
+          <p:cNvPr id="14" name="own-m-0"/>
           <p:cNvSpPr txBox="1"/>
           <p:nvPr/>
         </p:nvSpPr>
         <p:spPr>
           <a:xfrm>
-            <a:off x="7665392" y="2487168"/>
+            <a:off x="7114229" y="2487168"/>
             <a:ext cx="1600200" cy="822960"/>
           </a:xfrm>
           <a:prstGeom prst="rect">
@@ -6836,13 +6886,13 @@
       </p:sp>
       <p:sp>
         <p:nvSpPr>
-          <p:cNvPr id="14" name="own-a-0"/>
+          <p:cNvPr id="15" name="own-a-0"/>
           <p:cNvSpPr txBox="1"/>
           <p:nvPr/>
         </p:nvSpPr>
         <p:spPr>
           <a:xfrm>
-            <a:off x="9311312" y="2487168"/>
+            <a:off x="8760149" y="2487168"/>
             <a:ext cx="1097280" cy="822960"/>
           </a:xfrm>
           <a:prstGeom prst="rect">
@@ -6872,13 +6922,13 @@
       </p:sp>
       <p:sp>
         <p:nvSpPr>
-          <p:cNvPr id="15" name="own-h2-0"/>
+          <p:cNvPr id="16" name="own-h2-0"/>
           <p:cNvSpPr txBox="1"/>
           <p:nvPr/>
         </p:nvSpPr>
         <p:spPr>
           <a:xfrm>
-            <a:off x="10454312" y="2487168"/>
+            <a:off x="9903149" y="2487168"/>
             <a:ext cx="1005840" cy="822960"/>
           </a:xfrm>
           <a:prstGeom prst="rect">
@@ -6908,13 +6958,13 @@
       </p:sp>
       <p:sp>
         <p:nvSpPr>
-          <p:cNvPr id="16" name="best-badge"/>
+          <p:cNvPr id="17" name="best-badge"/>
           <p:cNvSpPr/>
           <p:nvPr/>
         </p:nvSpPr>
         <p:spPr>
           <a:xfrm>
-            <a:off x="7071032" y="2944368"/>
+            <a:off x="6519869" y="2944368"/>
             <a:ext cx="502920" cy="237744"/>
           </a:xfrm>
           <a:prstGeom prst="roundRect">
@@ -6930,13 +6980,13 @@
       </p:sp>
       <p:sp>
         <p:nvSpPr>
-          <p:cNvPr id="17" name="best-t"/>
+          <p:cNvPr id="18" name="best-t"/>
           <p:cNvSpPr txBox="1"/>
           <p:nvPr/>
         </p:nvSpPr>
         <p:spPr>
           <a:xfrm>
-            <a:off x="7071032" y="2944368"/>
+            <a:off x="6519869" y="2944368"/>
             <a:ext cx="502920" cy="237744"/>
           </a:xfrm>
           <a:prstGeom prst="rect">
@@ -6958,7 +7008,7 @@
                   <a:schemeClr val="bg1"/>
                 </a:solidFill>
               </a:rPr>
-              <a:t>최고</a:t>
+              <a:t>best</a:t>
             </a:r>
             <a:endParaRPr lang="en-US" sz="1000" dirty="0"/>
           </a:p>
@@ -6966,14 +7016,14 @@
       </p:sp>
       <p:sp>
         <p:nvSpPr>
-          <p:cNvPr id="18" name="own-row-1"/>
+          <p:cNvPr id="19" name="own-row-1"/>
           <p:cNvSpPr/>
           <p:nvPr/>
         </p:nvSpPr>
         <p:spPr>
           <a:xfrm>
-            <a:off x="5150792" y="3566160"/>
-            <a:ext cx="6492263" cy="1051560"/>
+            <a:off x="4599629" y="3566160"/>
+            <a:ext cx="7043426" cy="1051560"/>
           </a:xfrm>
           <a:prstGeom prst="roundRect">
             <a:avLst>
@@ -6988,13 +7038,13 @@
       </p:sp>
       <p:sp>
         <p:nvSpPr>
-          <p:cNvPr id="19" name="own-dot-1"/>
+          <p:cNvPr id="20" name="own-dot-1"/>
           <p:cNvSpPr/>
           <p:nvPr/>
         </p:nvSpPr>
         <p:spPr>
           <a:xfrm>
-            <a:off x="5379392" y="3794760"/>
+            <a:off x="4828229" y="3794760"/>
             <a:ext cx="146304" cy="146304"/>
           </a:xfrm>
           <a:prstGeom prst="ellipse">
@@ -7008,13 +7058,13 @@
       </p:sp>
       <p:sp>
         <p:nvSpPr>
-          <p:cNvPr id="20" name="own-n-1"/>
+          <p:cNvPr id="21" name="own-n-1"/>
           <p:cNvSpPr txBox="1"/>
           <p:nvPr/>
         </p:nvSpPr>
         <p:spPr>
           <a:xfrm>
-            <a:off x="5607992" y="3703320"/>
+            <a:off x="5056829" y="3703320"/>
             <a:ext cx="2103120" cy="320040"/>
           </a:xfrm>
           <a:prstGeom prst="rect">
@@ -7044,13 +7094,13 @@
       </p:sp>
       <p:sp>
         <p:nvSpPr>
-          <p:cNvPr id="21" name="own-s-1"/>
+          <p:cNvPr id="22" name="own-s-1"/>
           <p:cNvSpPr txBox="1"/>
           <p:nvPr/>
         </p:nvSpPr>
         <p:spPr>
           <a:xfrm>
-            <a:off x="5607992" y="4114800"/>
+            <a:off x="5056829" y="4114800"/>
             <a:ext cx="2103120" cy="274320"/>
           </a:xfrm>
           <a:prstGeom prst="rect">
@@ -7080,13 +7130,13 @@
       </p:sp>
       <p:sp>
         <p:nvSpPr>
-          <p:cNvPr id="22" name="own-m-1"/>
+          <p:cNvPr id="23" name="own-m-1"/>
           <p:cNvSpPr txBox="1"/>
           <p:nvPr/>
         </p:nvSpPr>
         <p:spPr>
           <a:xfrm>
-            <a:off x="7665392" y="3675888"/>
+            <a:off x="7114229" y="3675888"/>
             <a:ext cx="1600200" cy="822960"/>
           </a:xfrm>
           <a:prstGeom prst="rect">
@@ -7116,13 +7166,13 @@
       </p:sp>
       <p:sp>
         <p:nvSpPr>
-          <p:cNvPr id="23" name="own-a-1"/>
+          <p:cNvPr id="24" name="own-a-1"/>
           <p:cNvSpPr txBox="1"/>
           <p:nvPr/>
         </p:nvSpPr>
         <p:spPr>
           <a:xfrm>
-            <a:off x="9311312" y="3675888"/>
+            <a:off x="8760149" y="3675888"/>
             <a:ext cx="1097280" cy="822960"/>
           </a:xfrm>
           <a:prstGeom prst="rect">
@@ -7152,13 +7202,13 @@
       </p:sp>
       <p:sp>
         <p:nvSpPr>
-          <p:cNvPr id="24" name="own-h2-1"/>
+          <p:cNvPr id="25" name="own-h2-1"/>
           <p:cNvSpPr txBox="1"/>
           <p:nvPr/>
         </p:nvSpPr>
         <p:spPr>
           <a:xfrm>
-            <a:off x="10454312" y="3675888"/>
+            <a:off x="9903149" y="3675888"/>
             <a:ext cx="1005840" cy="822960"/>
           </a:xfrm>
           <a:prstGeom prst="rect">
@@ -7188,14 +7238,14 @@
       </p:sp>
       <p:sp>
         <p:nvSpPr>
-          <p:cNvPr id="25" name="own-row-2"/>
+          <p:cNvPr id="26" name="own-row-2"/>
           <p:cNvSpPr/>
           <p:nvPr/>
         </p:nvSpPr>
         <p:spPr>
           <a:xfrm>
-            <a:off x="5150792" y="4754880"/>
-            <a:ext cx="6492263" cy="1051560"/>
+            <a:off x="4599629" y="4754880"/>
+            <a:ext cx="7043426" cy="1051560"/>
           </a:xfrm>
           <a:prstGeom prst="roundRect">
             <a:avLst>
@@ -7210,13 +7260,13 @@
       </p:sp>
       <p:sp>
         <p:nvSpPr>
-          <p:cNvPr id="26" name="own-dot-2"/>
+          <p:cNvPr id="27" name="own-dot-2"/>
           <p:cNvSpPr/>
           <p:nvPr/>
         </p:nvSpPr>
         <p:spPr>
           <a:xfrm>
-            <a:off x="5379392" y="4983480"/>
+            <a:off x="4828229" y="4983480"/>
             <a:ext cx="146304" cy="146304"/>
           </a:xfrm>
           <a:prstGeom prst="ellipse">
@@ -7230,13 +7280,13 @@
       </p:sp>
       <p:sp>
         <p:nvSpPr>
-          <p:cNvPr id="27" name="own-n-2"/>
+          <p:cNvPr id="28" name="own-n-2"/>
           <p:cNvSpPr txBox="1"/>
           <p:nvPr/>
         </p:nvSpPr>
         <p:spPr>
           <a:xfrm>
-            <a:off x="5607992" y="4892040"/>
+            <a:off x="5056829" y="4892040"/>
             <a:ext cx="2103120" cy="320040"/>
           </a:xfrm>
           <a:prstGeom prst="rect">
@@ -7266,13 +7316,13 @@
       </p:sp>
       <p:sp>
         <p:nvSpPr>
-          <p:cNvPr id="28" name="own-s-2"/>
+          <p:cNvPr id="29" name="own-s-2"/>
           <p:cNvSpPr txBox="1"/>
           <p:nvPr/>
         </p:nvSpPr>
         <p:spPr>
           <a:xfrm>
-            <a:off x="5607992" y="5303520"/>
+            <a:off x="5056829" y="5303520"/>
             <a:ext cx="2103120" cy="274320"/>
           </a:xfrm>
           <a:prstGeom prst="rect">
@@ -7302,13 +7352,13 @@
       </p:sp>
       <p:sp>
         <p:nvSpPr>
-          <p:cNvPr id="29" name="own-m-2"/>
+          <p:cNvPr id="30" name="own-m-2"/>
           <p:cNvSpPr txBox="1"/>
           <p:nvPr/>
         </p:nvSpPr>
         <p:spPr>
           <a:xfrm>
-            <a:off x="7665392" y="4864608"/>
+            <a:off x="7114229" y="4864608"/>
             <a:ext cx="1600200" cy="822960"/>
           </a:xfrm>
           <a:prstGeom prst="rect">
@@ -7338,13 +7388,13 @@
       </p:sp>
       <p:sp>
         <p:nvSpPr>
-          <p:cNvPr id="30" name="own-a-2"/>
+          <p:cNvPr id="31" name="own-a-2"/>
           <p:cNvSpPr txBox="1"/>
           <p:nvPr/>
         </p:nvSpPr>
         <p:spPr>
           <a:xfrm>
-            <a:off x="9311312" y="4864608"/>
+            <a:off x="8760149" y="4864608"/>
             <a:ext cx="1097280" cy="822960"/>
           </a:xfrm>
           <a:prstGeom prst="rect">
@@ -7374,13 +7424,13 @@
       </p:sp>
       <p:sp>
         <p:nvSpPr>
-          <p:cNvPr id="31" name="own-h2-2"/>
+          <p:cNvPr id="32" name="own-h2-2"/>
           <p:cNvSpPr txBox="1"/>
           <p:nvPr/>
         </p:nvSpPr>
         <p:spPr>
           <a:xfrm>
-            <a:off x="10454312" y="4864608"/>
+            <a:off x="9903149" y="4864608"/>
             <a:ext cx="1005840" cy="822960"/>
           </a:xfrm>
           <a:prstGeom prst="rect">
@@ -7410,14 +7460,14 @@
       </p:sp>
       <p:sp>
         <p:nvSpPr>
-          <p:cNvPr id="32" name="own-note"/>
+          <p:cNvPr id="33" name="own-note"/>
           <p:cNvSpPr txBox="1"/>
           <p:nvPr/>
         </p:nvSpPr>
         <p:spPr>
           <a:xfrm>
-            <a:off x="5150792" y="5943600"/>
-            <a:ext cx="6492263" cy="274320"/>
+            <a:off x="4599629" y="5943600"/>
+            <a:ext cx="7043426" cy="274320"/>
           </a:xfrm>
           <a:prstGeom prst="rect">
             <a:avLst/>
@@ -11393,11 +11443,11 @@
         <p:spPr>
           <a:xfrm>
             <a:off x="548640" y="1645920"/>
-            <a:ext cx="6035040" cy="3017520"/>
+            <a:ext cx="6035040" cy="2514600"/>
           </a:xfrm>
           <a:prstGeom prst="roundRect">
             <a:avLst>
-              <a:gd name="adj" fmla="val 2424"/>
+              <a:gd name="adj" fmla="val 2909"/>
             </a:avLst>
           </a:prstGeom>
           <a:solidFill>
@@ -11414,7 +11464,7 @@
         </p:nvSpPr>
         <p:spPr>
           <a:xfrm>
-            <a:off x="822960" y="1783080"/>
+            <a:off x="822960" y="1755648"/>
             <a:ext cx="5486400" cy="320040"/>
           </a:xfrm>
           <a:prstGeom prst="rect">
@@ -11450,7 +11500,7 @@
         </p:nvSpPr>
         <p:spPr>
           <a:xfrm>
-            <a:off x="2926080" y="2194560"/>
+            <a:off x="2926080" y="2103120"/>
             <a:ext cx="1463040" cy="274320"/>
           </a:xfrm>
           <a:prstGeom prst="rect">
@@ -11486,7 +11536,7 @@
         </p:nvSpPr>
         <p:spPr>
           <a:xfrm>
-            <a:off x="4754880" y="2194560"/>
+            <a:off x="4754880" y="2103120"/>
             <a:ext cx="1463040" cy="274320"/>
           </a:xfrm>
           <a:prstGeom prst="rect">
@@ -11522,7 +11572,7 @@
         </p:nvSpPr>
         <p:spPr>
           <a:xfrm>
-            <a:off x="822960" y="2715768"/>
+            <a:off x="822960" y="2596896"/>
             <a:ext cx="146304" cy="146304"/>
           </a:xfrm>
           <a:prstGeom prst="ellipse">
@@ -11542,7 +11592,7 @@
         </p:nvSpPr>
         <p:spPr>
           <a:xfrm>
-            <a:off x="1060704" y="2542032"/>
+            <a:off x="1060704" y="2423160"/>
             <a:ext cx="1828800" cy="502920"/>
           </a:xfrm>
           <a:prstGeom prst="rect">
@@ -11578,7 +11628,7 @@
         </p:nvSpPr>
         <p:spPr>
           <a:xfrm>
-            <a:off x="2926080" y="2542032"/>
+            <a:off x="2926080" y="2423160"/>
             <a:ext cx="1463040" cy="502920"/>
           </a:xfrm>
           <a:prstGeom prst="rect">
@@ -11614,7 +11664,7 @@
         </p:nvSpPr>
         <p:spPr>
           <a:xfrm>
-            <a:off x="4754880" y="2542032"/>
+            <a:off x="4754880" y="2423160"/>
             <a:ext cx="1463040" cy="502920"/>
           </a:xfrm>
           <a:prstGeom prst="rect">
@@ -11650,7 +11700,7 @@
         </p:nvSpPr>
         <p:spPr>
           <a:xfrm>
-            <a:off x="822960" y="3374136"/>
+            <a:off x="822960" y="3145536"/>
             <a:ext cx="146304" cy="146304"/>
           </a:xfrm>
           <a:prstGeom prst="ellipse">
@@ -11670,7 +11720,7 @@
         </p:nvSpPr>
         <p:spPr>
           <a:xfrm>
-            <a:off x="1060704" y="3200400"/>
+            <a:off x="1060704" y="2971800"/>
             <a:ext cx="1828800" cy="502920"/>
           </a:xfrm>
           <a:prstGeom prst="rect">
@@ -11706,7 +11756,7 @@
         </p:nvSpPr>
         <p:spPr>
           <a:xfrm>
-            <a:off x="2926080" y="3200400"/>
+            <a:off x="2926080" y="2971800"/>
             <a:ext cx="1463040" cy="502920"/>
           </a:xfrm>
           <a:prstGeom prst="rect">
@@ -11742,7 +11792,7 @@
         </p:nvSpPr>
         <p:spPr>
           <a:xfrm>
-            <a:off x="4754880" y="3200400"/>
+            <a:off x="4754880" y="2971800"/>
             <a:ext cx="1463040" cy="502920"/>
           </a:xfrm>
           <a:prstGeom prst="rect">
@@ -11778,7 +11828,7 @@
         </p:nvSpPr>
         <p:spPr>
           <a:xfrm>
-            <a:off x="822960" y="4032504"/>
+            <a:off x="822960" y="3694176"/>
             <a:ext cx="146304" cy="146304"/>
           </a:xfrm>
           <a:prstGeom prst="ellipse">
@@ -11798,7 +11848,7 @@
         </p:nvSpPr>
         <p:spPr>
           <a:xfrm>
-            <a:off x="1060704" y="3858768"/>
+            <a:off x="1060704" y="3520440"/>
             <a:ext cx="1828800" cy="502920"/>
           </a:xfrm>
           <a:prstGeom prst="rect">
@@ -11834,7 +11884,7 @@
         </p:nvSpPr>
         <p:spPr>
           <a:xfrm>
-            <a:off x="2926080" y="3858768"/>
+            <a:off x="2926080" y="3520440"/>
             <a:ext cx="1463040" cy="502920"/>
           </a:xfrm>
           <a:prstGeom prst="rect">
@@ -11870,7 +11920,7 @@
         </p:nvSpPr>
         <p:spPr>
           <a:xfrm>
-            <a:off x="4754880" y="3858768"/>
+            <a:off x="4754880" y="3520440"/>
             <a:ext cx="1463040" cy="502920"/>
           </a:xfrm>
           <a:prstGeom prst="rect">
@@ -11898,38 +11948,40 @@
           </a:p>
         </p:txBody>
       </p:sp>
-      <p:sp>
-        <p:nvSpPr>
-          <p:cNvPr id="20" name="finding-card"/>
-          <p:cNvSpPr/>
+      <p:pic>
+        <p:nvPicPr>
+          <p:cNvPr id="20" name="miss-img" descr="C:\Users\user\_se4nchoi\batteryvision\docs\submission\build\img\holdout_miss.jpg">    </p:cNvPr>
+          <p:cNvPicPr>
+            <a:picLocks noChangeAspect="1"/>
+          </p:cNvPicPr>
           <p:nvPr/>
-        </p:nvSpPr>
-        <p:spPr>
-          <a:xfrm>
-            <a:off x="548640" y="4846320"/>
-            <a:ext cx="6035040" cy="1371600"/>
-          </a:xfrm>
-          <a:prstGeom prst="roundRect">
-            <a:avLst>
-              <a:gd name="adj" fmla="val 5333"/>
-            </a:avLst>
-          </a:prstGeom>
-          <a:solidFill>
-            <a:schemeClr val="bg2"/>
-          </a:solidFill>
-          <a:ln/>
-        </p:spPr>
-      </p:sp>
-      <p:sp>
-        <p:nvSpPr>
-          <p:cNvPr id="21" name="finding-b"/>
+        </p:nvPicPr>
+        <p:blipFill>
+          <a:blip r:embed="rId1"/>
+          <a:stretch>
+            <a:fillRect/>
+          </a:stretch>
+        </p:blipFill>
+        <p:spPr>
+          <a:xfrm>
+            <a:off x="548640" y="4343400"/>
+            <a:ext cx="1874520" cy="1874520"/>
+          </a:xfrm>
+          <a:prstGeom prst="rect">
+            <a:avLst/>
+          </a:prstGeom>
+        </p:spPr>
+      </p:pic>
+      <p:sp>
+        <p:nvSpPr>
+          <p:cNvPr id="21" name="miss-cap"/>
           <p:cNvSpPr txBox="1"/>
           <p:nvPr/>
         </p:nvSpPr>
         <p:spPr>
           <a:xfrm>
-            <a:off x="822960" y="4956048"/>
-            <a:ext cx="5577840" cy="1143000"/>
+            <a:off x="2651760" y="4389120"/>
+            <a:ext cx="3931920" cy="1783080"/>
           </a:xfrm>
           <a:prstGeom prst="rect">
             <a:avLst/>
@@ -11938,12 +11990,29 @@
           <a:ln/>
         </p:spPr>
         <p:txBody>
-          <a:bodyPr wrap="square" lIns="0" tIns="0" rIns="0" bIns="0" rtlCol="0" anchor="t"/>
+          <a:bodyPr wrap="square" lIns="0" tIns="0" rIns="0" bIns="0" rtlCol="0" anchor="ctr"/>
           <a:lstStyle/>
+          <a:p>
+            <a:pPr indent="0" marL="0">
+              <a:spcAft>
+                <a:spcPts val="600"/>
+              </a:spcAft>
+              <a:buNone/>
+            </a:pPr>
+            <a:r>
+              <a:rPr lang="en-US" sz="1400" b="1" dirty="0">
+                <a:solidFill>
+                  <a:schemeClr val="tx1"/>
+                </a:solidFill>
+              </a:rPr>
+              <a:t>놓친 예: scratch · ATSS 최고 점수 0.21</a:t>
+            </a:r>
+            <a:endParaRPr lang="en-US" sz="1400" dirty="0"/>
+          </a:p>
           <a:p>
             <a:pPr marL="342900" indent="-342900">
               <a:spcAft>
-                <a:spcPts val="400"/>
+                <a:spcPts val="600"/>
               </a:spcAft>
               <a:buSzPct val="100000"/>
               <a:buChar char="•"/>
@@ -11954,14 +12023,14 @@
                   <a:schemeClr val="tx1"/>
                 </a:solidFill>
               </a:rPr>
-              <a:t>클래스 착각 0건 · 점수 미달로 놓침 · 정상 불합격 0건</a:t>
+              <a:t>클래스 착각 0건 · 정상 불합격 0건</a:t>
             </a:r>
             <a:endParaRPr lang="en-US" sz="1400" dirty="0"/>
           </a:p>
           <a:p>
             <a:pPr marL="342900" indent="-342900">
               <a:spcAft>
-                <a:spcPts val="400"/>
+                <a:spcPts val="600"/>
               </a:spcAft>
               <a:buSzPct val="100000"/>
               <a:buChar char="•"/>
@@ -12008,7 +12077,7 @@
                   <a:schemeClr val="tx1"/>
                 </a:solidFill>
               </a:rPr>
-              <a:t>기준값을 낮추면? (ATSS · 2차 세트)</a:t>
+              <a:t>기준값을 바꾸면? (2차 세트)</a:t>
             </a:r>
             <a:endParaRPr lang="en-US" sz="1600" dirty="0"/>
           </a:p>
@@ -12029,7 +12098,7 @@
           </p:nvPr>
         </p:nvGraphicFramePr>
         <p:xfrm>
-          <a:off x="6812280" y="2103120"/>
+          <a:off x="6812280" y="2057400"/>
           <a:ext cx="4828032" cy="914400"/>
         </p:xfrm>
         <a:graphic>
@@ -12037,11 +12106,80 @@
             <a:tbl>
               <a:tblPr/>
               <a:tblGrid>
-                <a:gridCol w="1609344"/>
-                <a:gridCol w="1609344"/>
-                <a:gridCol w="1609344"/>
+                <a:gridCol w="1280160"/>
+                <a:gridCol w="1188720"/>
+                <a:gridCol w="1133856"/>
+                <a:gridCol w="1225296"/>
               </a:tblGrid>
-              <a:tr h="457200">
+              <a:tr h="402336">
+                <a:tc>
+                  <a:txBody>
+                    <a:bodyPr/>
+                    <a:lstStyle/>
+                    <a:p>
+                      <a:pPr algn="l" indent="0" marL="0">
+                        <a:buNone/>
+                      </a:pPr>
+                      <a:r>
+                        <a:rPr lang="en-US" sz="1400" b="1" dirty="0">
+                          <a:solidFill>
+                            <a:schemeClr val="tx2"/>
+                          </a:solidFill>
+                          <a:latin typeface="Malgun Gothic" pitchFamily="34" charset="0"/>
+                          <a:ea typeface="Malgun Gothic" pitchFamily="34" charset="-122"/>
+                          <a:cs typeface="Malgun Gothic" pitchFamily="34" charset="-120"/>
+                        </a:rPr>
+                        <a:t>모델</a:t>
+                      </a:r>
+                      <a:endParaRPr lang="en-US" sz="1400" dirty="0">
+                        <a:latin typeface="Malgun Gothic" charset="0"/>
+                        <a:ea typeface="Malgun Gothic" charset="0"/>
+                        <a:cs typeface="Malgun Gothic" charset="0"/>
+                      </a:endParaRPr>
+                    </a:p>
+                  </a:txBody>
+                  <a:tcPr marL="91440" marR="91440" marT="45720" marB="45720" anchor="ctr">
+                    <a:lnL w="9525" cap="flat" cmpd="sng" algn="ctr">
+                      <a:solidFill>
+                        <a:srgbClr val="3A3F48"/>
+                      </a:solidFill>
+                      <a:prstDash val="solid"/>
+                      <a:round/>
+                      <a:headEnd type="none" w="med" len="med"/>
+                      <a:tailEnd type="none" w="med" len="med"/>
+                    </a:lnL>
+                    <a:lnR w="9525" cap="flat" cmpd="sng" algn="ctr">
+                      <a:solidFill>
+                        <a:srgbClr val="3A3F48"/>
+                      </a:solidFill>
+                      <a:prstDash val="solid"/>
+                      <a:round/>
+                      <a:headEnd type="none" w="med" len="med"/>
+                      <a:tailEnd type="none" w="med" len="med"/>
+                    </a:lnR>
+                    <a:lnT w="9525" cap="flat" cmpd="sng" algn="ctr">
+                      <a:solidFill>
+                        <a:srgbClr val="3A3F48"/>
+                      </a:solidFill>
+                      <a:prstDash val="solid"/>
+                      <a:round/>
+                      <a:headEnd type="none" w="med" len="med"/>
+                      <a:tailEnd type="none" w="med" len="med"/>
+                    </a:lnT>
+                    <a:lnB w="9525" cap="flat" cmpd="sng" algn="ctr">
+                      <a:solidFill>
+                        <a:srgbClr val="3A3F48"/>
+                      </a:solidFill>
+                      <a:prstDash val="solid"/>
+                      <a:round/>
+                      <a:headEnd type="none" w="med" len="med"/>
+                      <a:tailEnd type="none" w="med" len="med"/>
+                    </a:lnB>
+                    <a:solidFill>
+                      <a:srgbClr val="16191E"/>
+                    </a:solidFill>
+                  </a:tcPr>
+                </a:tc>
                 <a:tc>
                   <a:txBody>
                     <a:bodyPr/>
@@ -12247,7 +12385,75 @@
                   </a:tcPr>
                 </a:tc>
               </a:tr>
-              <a:tr h="457200">
+              <a:tr h="402336">
+                <a:tc>
+                  <a:txBody>
+                    <a:bodyPr/>
+                    <a:lstStyle/>
+                    <a:p>
+                      <a:pPr algn="l" indent="0" marL="0">
+                        <a:buNone/>
+                      </a:pPr>
+                      <a:r>
+                        <a:rPr lang="en-US" sz="1400" b="1" dirty="0">
+                          <a:solidFill>
+                            <a:schemeClr val="accent4"/>
+                          </a:solidFill>
+                          <a:latin typeface="Malgun Gothic" pitchFamily="34" charset="0"/>
+                          <a:ea typeface="Malgun Gothic" pitchFamily="34" charset="-122"/>
+                          <a:cs typeface="Malgun Gothic" pitchFamily="34" charset="-120"/>
+                        </a:rPr>
+                        <a:t>ATSS</a:t>
+                      </a:r>
+                      <a:endParaRPr lang="en-US" sz="1400" dirty="0">
+                        <a:latin typeface="Malgun Gothic" charset="0"/>
+                        <a:ea typeface="Malgun Gothic" charset="0"/>
+                        <a:cs typeface="Malgun Gothic" charset="0"/>
+                      </a:endParaRPr>
+                    </a:p>
+                  </a:txBody>
+                  <a:tcPr marL="91440" marR="91440" marT="45720" marB="45720" anchor="ctr">
+                    <a:lnL w="9525" cap="flat" cmpd="sng" algn="ctr">
+                      <a:solidFill>
+                        <a:srgbClr val="3A3F48"/>
+                      </a:solidFill>
+                      <a:prstDash val="solid"/>
+                      <a:round/>
+                      <a:headEnd type="none" w="med" len="med"/>
+                      <a:tailEnd type="none" w="med" len="med"/>
+                    </a:lnL>
+                    <a:lnR w="9525" cap="flat" cmpd="sng" algn="ctr">
+                      <a:solidFill>
+                        <a:srgbClr val="3A3F48"/>
+                      </a:solidFill>
+                      <a:prstDash val="solid"/>
+                      <a:round/>
+                      <a:headEnd type="none" w="med" len="med"/>
+                      <a:tailEnd type="none" w="med" len="med"/>
+                    </a:lnR>
+                    <a:lnT w="9525" cap="flat" cmpd="sng" algn="ctr">
+                      <a:solidFill>
+                        <a:srgbClr val="3A3F48"/>
+                      </a:solidFill>
+                      <a:prstDash val="solid"/>
+                      <a:round/>
+                      <a:headEnd type="none" w="med" len="med"/>
+                      <a:tailEnd type="none" w="med" len="med"/>
+                    </a:lnT>
+                    <a:lnB w="9525" cap="flat" cmpd="sng" algn="ctr">
+                      <a:solidFill>
+                        <a:srgbClr val="3A3F48"/>
+                      </a:solidFill>
+                      <a:prstDash val="solid"/>
+                      <a:round/>
+                      <a:headEnd type="none" w="med" len="med"/>
+                      <a:tailEnd type="none" w="med" len="med"/>
+                    </a:lnB>
+                    <a:solidFill>
+                      <a:srgbClr val="23272F"/>
+                    </a:solidFill>
+                  </a:tcPr>
+                </a:tc>
                 <a:tc>
                   <a:txBody>
                     <a:bodyPr/>
@@ -12453,7 +12659,75 @@
                   </a:tcPr>
                 </a:tc>
               </a:tr>
-              <a:tr h="457200">
+              <a:tr h="402336">
+                <a:tc>
+                  <a:txBody>
+                    <a:bodyPr/>
+                    <a:lstStyle/>
+                    <a:p>
+                      <a:pPr algn="l" indent="0" marL="0">
+                        <a:buNone/>
+                      </a:pPr>
+                      <a:r>
+                        <a:rPr lang="en-US" sz="1400" b="1" dirty="0">
+                          <a:solidFill>
+                            <a:schemeClr val="accent4"/>
+                          </a:solidFill>
+                          <a:latin typeface="Malgun Gothic" pitchFamily="34" charset="0"/>
+                          <a:ea typeface="Malgun Gothic" pitchFamily="34" charset="-122"/>
+                          <a:cs typeface="Malgun Gothic" pitchFamily="34" charset="-120"/>
+                        </a:rPr>
+                        <a:t>ATSS</a:t>
+                      </a:r>
+                      <a:endParaRPr lang="en-US" sz="1400" dirty="0">
+                        <a:latin typeface="Malgun Gothic" charset="0"/>
+                        <a:ea typeface="Malgun Gothic" charset="0"/>
+                        <a:cs typeface="Malgun Gothic" charset="0"/>
+                      </a:endParaRPr>
+                    </a:p>
+                  </a:txBody>
+                  <a:tcPr marL="91440" marR="91440" marT="45720" marB="45720" anchor="ctr">
+                    <a:lnL w="9525" cap="flat" cmpd="sng" algn="ctr">
+                      <a:solidFill>
+                        <a:srgbClr val="3A3F48"/>
+                      </a:solidFill>
+                      <a:prstDash val="solid"/>
+                      <a:round/>
+                      <a:headEnd type="none" w="med" len="med"/>
+                      <a:tailEnd type="none" w="med" len="med"/>
+                    </a:lnL>
+                    <a:lnR w="9525" cap="flat" cmpd="sng" algn="ctr">
+                      <a:solidFill>
+                        <a:srgbClr val="3A3F48"/>
+                      </a:solidFill>
+                      <a:prstDash val="solid"/>
+                      <a:round/>
+                      <a:headEnd type="none" w="med" len="med"/>
+                      <a:tailEnd type="none" w="med" len="med"/>
+                    </a:lnR>
+                    <a:lnT w="9525" cap="flat" cmpd="sng" algn="ctr">
+                      <a:solidFill>
+                        <a:srgbClr val="3A3F48"/>
+                      </a:solidFill>
+                      <a:prstDash val="solid"/>
+                      <a:round/>
+                      <a:headEnd type="none" w="med" len="med"/>
+                      <a:tailEnd type="none" w="med" len="med"/>
+                    </a:lnT>
+                    <a:lnB w="9525" cap="flat" cmpd="sng" algn="ctr">
+                      <a:solidFill>
+                        <a:srgbClr val="3A3F48"/>
+                      </a:solidFill>
+                      <a:prstDash val="solid"/>
+                      <a:round/>
+                      <a:headEnd type="none" w="med" len="med"/>
+                      <a:tailEnd type="none" w="med" len="med"/>
+                    </a:lnB>
+                    <a:solidFill>
+                      <a:srgbClr val="23272F"/>
+                    </a:solidFill>
+                  </a:tcPr>
+                </a:tc>
                 <a:tc>
                   <a:txBody>
                     <a:bodyPr/>
@@ -12659,7 +12933,75 @@
                   </a:tcPr>
                 </a:tc>
               </a:tr>
-              <a:tr h="457200">
+              <a:tr h="402336">
+                <a:tc>
+                  <a:txBody>
+                    <a:bodyPr/>
+                    <a:lstStyle/>
+                    <a:p>
+                      <a:pPr algn="l" indent="0" marL="0">
+                        <a:buNone/>
+                      </a:pPr>
+                      <a:r>
+                        <a:rPr lang="en-US" sz="1400" b="1" dirty="0">
+                          <a:solidFill>
+                            <a:schemeClr val="accent4"/>
+                          </a:solidFill>
+                          <a:latin typeface="Malgun Gothic" pitchFamily="34" charset="0"/>
+                          <a:ea typeface="Malgun Gothic" pitchFamily="34" charset="-122"/>
+                          <a:cs typeface="Malgun Gothic" pitchFamily="34" charset="-120"/>
+                        </a:rPr>
+                        <a:t>ATSS</a:t>
+                      </a:r>
+                      <a:endParaRPr lang="en-US" sz="1400" dirty="0">
+                        <a:latin typeface="Malgun Gothic" charset="0"/>
+                        <a:ea typeface="Malgun Gothic" charset="0"/>
+                        <a:cs typeface="Malgun Gothic" charset="0"/>
+                      </a:endParaRPr>
+                    </a:p>
+                  </a:txBody>
+                  <a:tcPr marL="91440" marR="91440" marT="45720" marB="45720" anchor="ctr">
+                    <a:lnL w="9525" cap="flat" cmpd="sng" algn="ctr">
+                      <a:solidFill>
+                        <a:srgbClr val="3A3F48"/>
+                      </a:solidFill>
+                      <a:prstDash val="solid"/>
+                      <a:round/>
+                      <a:headEnd type="none" w="med" len="med"/>
+                      <a:tailEnd type="none" w="med" len="med"/>
+                    </a:lnL>
+                    <a:lnR w="9525" cap="flat" cmpd="sng" algn="ctr">
+                      <a:solidFill>
+                        <a:srgbClr val="3A3F48"/>
+                      </a:solidFill>
+                      <a:prstDash val="solid"/>
+                      <a:round/>
+                      <a:headEnd type="none" w="med" len="med"/>
+                      <a:tailEnd type="none" w="med" len="med"/>
+                    </a:lnR>
+                    <a:lnT w="9525" cap="flat" cmpd="sng" algn="ctr">
+                      <a:solidFill>
+                        <a:srgbClr val="3A3F48"/>
+                      </a:solidFill>
+                      <a:prstDash val="solid"/>
+                      <a:round/>
+                      <a:headEnd type="none" w="med" len="med"/>
+                      <a:tailEnd type="none" w="med" len="med"/>
+                    </a:lnT>
+                    <a:lnB w="9525" cap="flat" cmpd="sng" algn="ctr">
+                      <a:solidFill>
+                        <a:srgbClr val="3A3F48"/>
+                      </a:solidFill>
+                      <a:prstDash val="solid"/>
+                      <a:round/>
+                      <a:headEnd type="none" w="med" len="med"/>
+                      <a:tailEnd type="none" w="med" len="med"/>
+                    </a:lnB>
+                    <a:solidFill>
+                      <a:srgbClr val="23272F"/>
+                    </a:solidFill>
+                  </a:tcPr>
+                </a:tc>
                 <a:tc>
                   <a:txBody>
                     <a:bodyPr/>
@@ -12865,6 +13207,554 @@
                   </a:tcPr>
                 </a:tc>
               </a:tr>
+              <a:tr h="402336">
+                <a:tc>
+                  <a:txBody>
+                    <a:bodyPr/>
+                    <a:lstStyle/>
+                    <a:p>
+                      <a:pPr algn="l" indent="0" marL="0">
+                        <a:buNone/>
+                      </a:pPr>
+                      <a:r>
+                        <a:rPr lang="en-US" sz="1400" b="1" dirty="0">
+                          <a:solidFill>
+                            <a:schemeClr val="accent5"/>
+                          </a:solidFill>
+                          <a:latin typeface="Malgun Gothic" pitchFamily="34" charset="0"/>
+                          <a:ea typeface="Malgun Gothic" pitchFamily="34" charset="-122"/>
+                          <a:cs typeface="Malgun Gothic" pitchFamily="34" charset="-120"/>
+                        </a:rPr>
+                        <a:t>YOLOX-S</a:t>
+                      </a:r>
+                      <a:endParaRPr lang="en-US" sz="1400" dirty="0">
+                        <a:latin typeface="Malgun Gothic" charset="0"/>
+                        <a:ea typeface="Malgun Gothic" charset="0"/>
+                        <a:cs typeface="Malgun Gothic" charset="0"/>
+                      </a:endParaRPr>
+                    </a:p>
+                  </a:txBody>
+                  <a:tcPr marL="91440" marR="91440" marT="45720" marB="45720" anchor="ctr">
+                    <a:lnL w="9525" cap="flat" cmpd="sng" algn="ctr">
+                      <a:solidFill>
+                        <a:srgbClr val="3A3F48"/>
+                      </a:solidFill>
+                      <a:prstDash val="solid"/>
+                      <a:round/>
+                      <a:headEnd type="none" w="med" len="med"/>
+                      <a:tailEnd type="none" w="med" len="med"/>
+                    </a:lnL>
+                    <a:lnR w="9525" cap="flat" cmpd="sng" algn="ctr">
+                      <a:solidFill>
+                        <a:srgbClr val="3A3F48"/>
+                      </a:solidFill>
+                      <a:prstDash val="solid"/>
+                      <a:round/>
+                      <a:headEnd type="none" w="med" len="med"/>
+                      <a:tailEnd type="none" w="med" len="med"/>
+                    </a:lnR>
+                    <a:lnT w="9525" cap="flat" cmpd="sng" algn="ctr">
+                      <a:solidFill>
+                        <a:srgbClr val="3A3F48"/>
+                      </a:solidFill>
+                      <a:prstDash val="solid"/>
+                      <a:round/>
+                      <a:headEnd type="none" w="med" len="med"/>
+                      <a:tailEnd type="none" w="med" len="med"/>
+                    </a:lnT>
+                    <a:lnB w="9525" cap="flat" cmpd="sng" algn="ctr">
+                      <a:solidFill>
+                        <a:srgbClr val="3A3F48"/>
+                      </a:solidFill>
+                      <a:prstDash val="solid"/>
+                      <a:round/>
+                      <a:headEnd type="none" w="med" len="med"/>
+                      <a:tailEnd type="none" w="med" len="med"/>
+                    </a:lnB>
+                    <a:solidFill>
+                      <a:srgbClr val="23272F"/>
+                    </a:solidFill>
+                  </a:tcPr>
+                </a:tc>
+                <a:tc>
+                  <a:txBody>
+                    <a:bodyPr/>
+                    <a:lstStyle/>
+                    <a:p>
+                      <a:pPr algn="ctr" indent="0" marL="0">
+                        <a:buNone/>
+                      </a:pPr>
+                      <a:r>
+                        <a:rPr lang="en-US" sz="1400" dirty="0">
+                          <a:solidFill>
+                            <a:schemeClr val="tx1"/>
+                          </a:solidFill>
+                          <a:latin typeface="Malgun Gothic" pitchFamily="34" charset="0"/>
+                          <a:ea typeface="Malgun Gothic" pitchFamily="34" charset="-122"/>
+                          <a:cs typeface="Malgun Gothic" pitchFamily="34" charset="-120"/>
+                        </a:rPr>
+                        <a:t>0.30 (현재)</a:t>
+                      </a:r>
+                      <a:endParaRPr lang="en-US" sz="1400" dirty="0">
+                        <a:latin typeface="Malgun Gothic" charset="0"/>
+                        <a:ea typeface="Malgun Gothic" charset="0"/>
+                        <a:cs typeface="Malgun Gothic" charset="0"/>
+                      </a:endParaRPr>
+                    </a:p>
+                  </a:txBody>
+                  <a:tcPr marL="91440" marR="91440" marT="45720" marB="45720" anchor="ctr">
+                    <a:lnL w="9525" cap="flat" cmpd="sng" algn="ctr">
+                      <a:solidFill>
+                        <a:srgbClr val="3A3F48"/>
+                      </a:solidFill>
+                      <a:prstDash val="solid"/>
+                      <a:round/>
+                      <a:headEnd type="none" w="med" len="med"/>
+                      <a:tailEnd type="none" w="med" len="med"/>
+                    </a:lnL>
+                    <a:lnR w="9525" cap="flat" cmpd="sng" algn="ctr">
+                      <a:solidFill>
+                        <a:srgbClr val="3A3F48"/>
+                      </a:solidFill>
+                      <a:prstDash val="solid"/>
+                      <a:round/>
+                      <a:headEnd type="none" w="med" len="med"/>
+                      <a:tailEnd type="none" w="med" len="med"/>
+                    </a:lnR>
+                    <a:lnT w="9525" cap="flat" cmpd="sng" algn="ctr">
+                      <a:solidFill>
+                        <a:srgbClr val="3A3F48"/>
+                      </a:solidFill>
+                      <a:prstDash val="solid"/>
+                      <a:round/>
+                      <a:headEnd type="none" w="med" len="med"/>
+                      <a:tailEnd type="none" w="med" len="med"/>
+                    </a:lnT>
+                    <a:lnB w="9525" cap="flat" cmpd="sng" algn="ctr">
+                      <a:solidFill>
+                        <a:srgbClr val="3A3F48"/>
+                      </a:solidFill>
+                      <a:prstDash val="solid"/>
+                      <a:round/>
+                      <a:headEnd type="none" w="med" len="med"/>
+                      <a:tailEnd type="none" w="med" len="med"/>
+                    </a:lnB>
+                    <a:solidFill>
+                      <a:srgbClr val="23272F"/>
+                    </a:solidFill>
+                  </a:tcPr>
+                </a:tc>
+                <a:tc>
+                  <a:txBody>
+                    <a:bodyPr/>
+                    <a:lstStyle/>
+                    <a:p>
+                      <a:pPr algn="ctr" indent="0" marL="0">
+                        <a:buNone/>
+                      </a:pPr>
+                      <a:r>
+                        <a:rPr lang="en-US" sz="1400" b="1" dirty="0">
+                          <a:solidFill>
+                            <a:schemeClr val="accent2"/>
+                          </a:solidFill>
+                          <a:latin typeface="Malgun Gothic" pitchFamily="34" charset="0"/>
+                          <a:ea typeface="Malgun Gothic" pitchFamily="34" charset="-122"/>
+                          <a:cs typeface="Malgun Gothic" pitchFamily="34" charset="-120"/>
+                        </a:rPr>
+                        <a:t>3%</a:t>
+                      </a:r>
+                      <a:endParaRPr lang="en-US" sz="1400" dirty="0">
+                        <a:latin typeface="Malgun Gothic" charset="0"/>
+                        <a:ea typeface="Malgun Gothic" charset="0"/>
+                        <a:cs typeface="Malgun Gothic" charset="0"/>
+                      </a:endParaRPr>
+                    </a:p>
+                  </a:txBody>
+                  <a:tcPr marL="91440" marR="91440" marT="45720" marB="45720" anchor="ctr">
+                    <a:lnL w="9525" cap="flat" cmpd="sng" algn="ctr">
+                      <a:solidFill>
+                        <a:srgbClr val="3A3F48"/>
+                      </a:solidFill>
+                      <a:prstDash val="solid"/>
+                      <a:round/>
+                      <a:headEnd type="none" w="med" len="med"/>
+                      <a:tailEnd type="none" w="med" len="med"/>
+                    </a:lnL>
+                    <a:lnR w="9525" cap="flat" cmpd="sng" algn="ctr">
+                      <a:solidFill>
+                        <a:srgbClr val="3A3F48"/>
+                      </a:solidFill>
+                      <a:prstDash val="solid"/>
+                      <a:round/>
+                      <a:headEnd type="none" w="med" len="med"/>
+                      <a:tailEnd type="none" w="med" len="med"/>
+                    </a:lnR>
+                    <a:lnT w="9525" cap="flat" cmpd="sng" algn="ctr">
+                      <a:solidFill>
+                        <a:srgbClr val="3A3F48"/>
+                      </a:solidFill>
+                      <a:prstDash val="solid"/>
+                      <a:round/>
+                      <a:headEnd type="none" w="med" len="med"/>
+                      <a:tailEnd type="none" w="med" len="med"/>
+                    </a:lnT>
+                    <a:lnB w="9525" cap="flat" cmpd="sng" algn="ctr">
+                      <a:solidFill>
+                        <a:srgbClr val="3A3F48"/>
+                      </a:solidFill>
+                      <a:prstDash val="solid"/>
+                      <a:round/>
+                      <a:headEnd type="none" w="med" len="med"/>
+                      <a:tailEnd type="none" w="med" len="med"/>
+                    </a:lnB>
+                    <a:solidFill>
+                      <a:srgbClr val="23272F"/>
+                    </a:solidFill>
+                  </a:tcPr>
+                </a:tc>
+                <a:tc>
+                  <a:txBody>
+                    <a:bodyPr/>
+                    <a:lstStyle/>
+                    <a:p>
+                      <a:pPr algn="ctr" indent="0" marL="0">
+                        <a:buNone/>
+                      </a:pPr>
+                      <a:r>
+                        <a:rPr lang="en-US" sz="1400" dirty="0">
+                          <a:solidFill>
+                            <a:schemeClr val="tx1"/>
+                          </a:solidFill>
+                          <a:latin typeface="Malgun Gothic" pitchFamily="34" charset="0"/>
+                          <a:ea typeface="Malgun Gothic" pitchFamily="34" charset="-122"/>
+                          <a:cs typeface="Malgun Gothic" pitchFamily="34" charset="-120"/>
+                        </a:rPr>
+                        <a:t>0%</a:t>
+                      </a:r>
+                      <a:endParaRPr lang="en-US" sz="1400" dirty="0">
+                        <a:latin typeface="Malgun Gothic" charset="0"/>
+                        <a:ea typeface="Malgun Gothic" charset="0"/>
+                        <a:cs typeface="Malgun Gothic" charset="0"/>
+                      </a:endParaRPr>
+                    </a:p>
+                  </a:txBody>
+                  <a:tcPr marL="91440" marR="91440" marT="45720" marB="45720" anchor="ctr">
+                    <a:lnL w="9525" cap="flat" cmpd="sng" algn="ctr">
+                      <a:solidFill>
+                        <a:srgbClr val="3A3F48"/>
+                      </a:solidFill>
+                      <a:prstDash val="solid"/>
+                      <a:round/>
+                      <a:headEnd type="none" w="med" len="med"/>
+                      <a:tailEnd type="none" w="med" len="med"/>
+                    </a:lnL>
+                    <a:lnR w="9525" cap="flat" cmpd="sng" algn="ctr">
+                      <a:solidFill>
+                        <a:srgbClr val="3A3F48"/>
+                      </a:solidFill>
+                      <a:prstDash val="solid"/>
+                      <a:round/>
+                      <a:headEnd type="none" w="med" len="med"/>
+                      <a:tailEnd type="none" w="med" len="med"/>
+                    </a:lnR>
+                    <a:lnT w="9525" cap="flat" cmpd="sng" algn="ctr">
+                      <a:solidFill>
+                        <a:srgbClr val="3A3F48"/>
+                      </a:solidFill>
+                      <a:prstDash val="solid"/>
+                      <a:round/>
+                      <a:headEnd type="none" w="med" len="med"/>
+                      <a:tailEnd type="none" w="med" len="med"/>
+                    </a:lnT>
+                    <a:lnB w="9525" cap="flat" cmpd="sng" algn="ctr">
+                      <a:solidFill>
+                        <a:srgbClr val="3A3F48"/>
+                      </a:solidFill>
+                      <a:prstDash val="solid"/>
+                      <a:round/>
+                      <a:headEnd type="none" w="med" len="med"/>
+                      <a:tailEnd type="none" w="med" len="med"/>
+                    </a:lnB>
+                    <a:solidFill>
+                      <a:srgbClr val="23272F"/>
+                    </a:solidFill>
+                  </a:tcPr>
+                </a:tc>
+              </a:tr>
+              <a:tr h="402336">
+                <a:tc>
+                  <a:txBody>
+                    <a:bodyPr/>
+                    <a:lstStyle/>
+                    <a:p>
+                      <a:pPr algn="l" indent="0" marL="0">
+                        <a:buNone/>
+                      </a:pPr>
+                      <a:r>
+                        <a:rPr lang="en-US" sz="1400" b="1" dirty="0">
+                          <a:solidFill>
+                            <a:schemeClr val="accent5"/>
+                          </a:solidFill>
+                          <a:latin typeface="Malgun Gothic" pitchFamily="34" charset="0"/>
+                          <a:ea typeface="Malgun Gothic" pitchFamily="34" charset="-122"/>
+                          <a:cs typeface="Malgun Gothic" pitchFamily="34" charset="-120"/>
+                        </a:rPr>
+                        <a:t>YOLOX-S</a:t>
+                      </a:r>
+                      <a:endParaRPr lang="en-US" sz="1400" dirty="0">
+                        <a:latin typeface="Malgun Gothic" charset="0"/>
+                        <a:ea typeface="Malgun Gothic" charset="0"/>
+                        <a:cs typeface="Malgun Gothic" charset="0"/>
+                      </a:endParaRPr>
+                    </a:p>
+                  </a:txBody>
+                  <a:tcPr marL="91440" marR="91440" marT="45720" marB="45720" anchor="ctr">
+                    <a:lnL w="9525" cap="flat" cmpd="sng" algn="ctr">
+                      <a:solidFill>
+                        <a:srgbClr val="3A3F48"/>
+                      </a:solidFill>
+                      <a:prstDash val="solid"/>
+                      <a:round/>
+                      <a:headEnd type="none" w="med" len="med"/>
+                      <a:tailEnd type="none" w="med" len="med"/>
+                    </a:lnL>
+                    <a:lnR w="9525" cap="flat" cmpd="sng" algn="ctr">
+                      <a:solidFill>
+                        <a:srgbClr val="3A3F48"/>
+                      </a:solidFill>
+                      <a:prstDash val="solid"/>
+                      <a:round/>
+                      <a:headEnd type="none" w="med" len="med"/>
+                      <a:tailEnd type="none" w="med" len="med"/>
+                    </a:lnR>
+                    <a:lnT w="9525" cap="flat" cmpd="sng" algn="ctr">
+                      <a:solidFill>
+                        <a:srgbClr val="3A3F48"/>
+                      </a:solidFill>
+                      <a:prstDash val="solid"/>
+                      <a:round/>
+                      <a:headEnd type="none" w="med" len="med"/>
+                      <a:tailEnd type="none" w="med" len="med"/>
+                    </a:lnT>
+                    <a:lnB w="9525" cap="flat" cmpd="sng" algn="ctr">
+                      <a:solidFill>
+                        <a:srgbClr val="3A3F48"/>
+                      </a:solidFill>
+                      <a:prstDash val="solid"/>
+                      <a:round/>
+                      <a:headEnd type="none" w="med" len="med"/>
+                      <a:tailEnd type="none" w="med" len="med"/>
+                    </a:lnB>
+                    <a:solidFill>
+                      <a:srgbClr val="23272F"/>
+                    </a:solidFill>
+                  </a:tcPr>
+                </a:tc>
+                <a:tc>
+                  <a:txBody>
+                    <a:bodyPr/>
+                    <a:lstStyle/>
+                    <a:p>
+                      <a:pPr algn="ctr" indent="0" marL="0">
+                        <a:buNone/>
+                      </a:pPr>
+                      <a:r>
+                        <a:rPr lang="en-US" sz="1400" dirty="0">
+                          <a:solidFill>
+                            <a:schemeClr val="tx1"/>
+                          </a:solidFill>
+                          <a:latin typeface="Malgun Gothic" pitchFamily="34" charset="0"/>
+                          <a:ea typeface="Malgun Gothic" pitchFamily="34" charset="-122"/>
+                          <a:cs typeface="Malgun Gothic" pitchFamily="34" charset="-120"/>
+                        </a:rPr>
+                        <a:t>0.05</a:t>
+                      </a:r>
+                      <a:endParaRPr lang="en-US" sz="1400" dirty="0">
+                        <a:latin typeface="Malgun Gothic" charset="0"/>
+                        <a:ea typeface="Malgun Gothic" charset="0"/>
+                        <a:cs typeface="Malgun Gothic" charset="0"/>
+                      </a:endParaRPr>
+                    </a:p>
+                  </a:txBody>
+                  <a:tcPr marL="91440" marR="91440" marT="45720" marB="45720" anchor="ctr">
+                    <a:lnL w="9525" cap="flat" cmpd="sng" algn="ctr">
+                      <a:solidFill>
+                        <a:srgbClr val="3A3F48"/>
+                      </a:solidFill>
+                      <a:prstDash val="solid"/>
+                      <a:round/>
+                      <a:headEnd type="none" w="med" len="med"/>
+                      <a:tailEnd type="none" w="med" len="med"/>
+                    </a:lnL>
+                    <a:lnR w="9525" cap="flat" cmpd="sng" algn="ctr">
+                      <a:solidFill>
+                        <a:srgbClr val="3A3F48"/>
+                      </a:solidFill>
+                      <a:prstDash val="solid"/>
+                      <a:round/>
+                      <a:headEnd type="none" w="med" len="med"/>
+                      <a:tailEnd type="none" w="med" len="med"/>
+                    </a:lnR>
+                    <a:lnT w="9525" cap="flat" cmpd="sng" algn="ctr">
+                      <a:solidFill>
+                        <a:srgbClr val="3A3F48"/>
+                      </a:solidFill>
+                      <a:prstDash val="solid"/>
+                      <a:round/>
+                      <a:headEnd type="none" w="med" len="med"/>
+                      <a:tailEnd type="none" w="med" len="med"/>
+                    </a:lnT>
+                    <a:lnB w="9525" cap="flat" cmpd="sng" algn="ctr">
+                      <a:solidFill>
+                        <a:srgbClr val="3A3F48"/>
+                      </a:solidFill>
+                      <a:prstDash val="solid"/>
+                      <a:round/>
+                      <a:headEnd type="none" w="med" len="med"/>
+                      <a:tailEnd type="none" w="med" len="med"/>
+                    </a:lnB>
+                    <a:solidFill>
+                      <a:srgbClr val="23272F"/>
+                    </a:solidFill>
+                  </a:tcPr>
+                </a:tc>
+                <a:tc>
+                  <a:txBody>
+                    <a:bodyPr/>
+                    <a:lstStyle/>
+                    <a:p>
+                      <a:pPr algn="ctr" indent="0" marL="0">
+                        <a:buNone/>
+                      </a:pPr>
+                      <a:r>
+                        <a:rPr lang="en-US" sz="1400" b="1" dirty="0">
+                          <a:solidFill>
+                            <a:schemeClr val="tx1"/>
+                          </a:solidFill>
+                          <a:latin typeface="Malgun Gothic" pitchFamily="34" charset="0"/>
+                          <a:ea typeface="Malgun Gothic" pitchFamily="34" charset="-122"/>
+                          <a:cs typeface="Malgun Gothic" pitchFamily="34" charset="-120"/>
+                        </a:rPr>
+                        <a:t>57%</a:t>
+                      </a:r>
+                      <a:endParaRPr lang="en-US" sz="1400" dirty="0">
+                        <a:latin typeface="Malgun Gothic" charset="0"/>
+                        <a:ea typeface="Malgun Gothic" charset="0"/>
+                        <a:cs typeface="Malgun Gothic" charset="0"/>
+                      </a:endParaRPr>
+                    </a:p>
+                  </a:txBody>
+                  <a:tcPr marL="91440" marR="91440" marT="45720" marB="45720" anchor="ctr">
+                    <a:lnL w="9525" cap="flat" cmpd="sng" algn="ctr">
+                      <a:solidFill>
+                        <a:srgbClr val="3A3F48"/>
+                      </a:solidFill>
+                      <a:prstDash val="solid"/>
+                      <a:round/>
+                      <a:headEnd type="none" w="med" len="med"/>
+                      <a:tailEnd type="none" w="med" len="med"/>
+                    </a:lnL>
+                    <a:lnR w="9525" cap="flat" cmpd="sng" algn="ctr">
+                      <a:solidFill>
+                        <a:srgbClr val="3A3F48"/>
+                      </a:solidFill>
+                      <a:prstDash val="solid"/>
+                      <a:round/>
+                      <a:headEnd type="none" w="med" len="med"/>
+                      <a:tailEnd type="none" w="med" len="med"/>
+                    </a:lnR>
+                    <a:lnT w="9525" cap="flat" cmpd="sng" algn="ctr">
+                      <a:solidFill>
+                        <a:srgbClr val="3A3F48"/>
+                      </a:solidFill>
+                      <a:prstDash val="solid"/>
+                      <a:round/>
+                      <a:headEnd type="none" w="med" len="med"/>
+                      <a:tailEnd type="none" w="med" len="med"/>
+                    </a:lnT>
+                    <a:lnB w="9525" cap="flat" cmpd="sng" algn="ctr">
+                      <a:solidFill>
+                        <a:srgbClr val="3A3F48"/>
+                      </a:solidFill>
+                      <a:prstDash val="solid"/>
+                      <a:round/>
+                      <a:headEnd type="none" w="med" len="med"/>
+                      <a:tailEnd type="none" w="med" len="med"/>
+                    </a:lnB>
+                    <a:solidFill>
+                      <a:srgbClr val="23272F"/>
+                    </a:solidFill>
+                  </a:tcPr>
+                </a:tc>
+                <a:tc>
+                  <a:txBody>
+                    <a:bodyPr/>
+                    <a:lstStyle/>
+                    <a:p>
+                      <a:pPr algn="ctr" indent="0" marL="0">
+                        <a:buNone/>
+                      </a:pPr>
+                      <a:r>
+                        <a:rPr lang="en-US" sz="1400" b="1" dirty="0">
+                          <a:solidFill>
+                            <a:schemeClr val="accent1"/>
+                          </a:solidFill>
+                          <a:latin typeface="Malgun Gothic" pitchFamily="34" charset="0"/>
+                          <a:ea typeface="Malgun Gothic" pitchFamily="34" charset="-122"/>
+                          <a:cs typeface="Malgun Gothic" pitchFamily="34" charset="-120"/>
+                        </a:rPr>
+                        <a:t>0%</a:t>
+                      </a:r>
+                      <a:endParaRPr lang="en-US" sz="1400" dirty="0">
+                        <a:latin typeface="Malgun Gothic" charset="0"/>
+                        <a:ea typeface="Malgun Gothic" charset="0"/>
+                        <a:cs typeface="Malgun Gothic" charset="0"/>
+                      </a:endParaRPr>
+                    </a:p>
+                  </a:txBody>
+                  <a:tcPr marL="91440" marR="91440" marT="45720" marB="45720" anchor="ctr">
+                    <a:lnL w="9525" cap="flat" cmpd="sng" algn="ctr">
+                      <a:solidFill>
+                        <a:srgbClr val="3A3F48"/>
+                      </a:solidFill>
+                      <a:prstDash val="solid"/>
+                      <a:round/>
+                      <a:headEnd type="none" w="med" len="med"/>
+                      <a:tailEnd type="none" w="med" len="med"/>
+                    </a:lnL>
+                    <a:lnR w="9525" cap="flat" cmpd="sng" algn="ctr">
+                      <a:solidFill>
+                        <a:srgbClr val="3A3F48"/>
+                      </a:solidFill>
+                      <a:prstDash val="solid"/>
+                      <a:round/>
+                      <a:headEnd type="none" w="med" len="med"/>
+                      <a:tailEnd type="none" w="med" len="med"/>
+                    </a:lnR>
+                    <a:lnT w="9525" cap="flat" cmpd="sng" algn="ctr">
+                      <a:solidFill>
+                        <a:srgbClr val="3A3F48"/>
+                      </a:solidFill>
+                      <a:prstDash val="solid"/>
+                      <a:round/>
+                      <a:headEnd type="none" w="med" len="med"/>
+                      <a:tailEnd type="none" w="med" len="med"/>
+                    </a:lnT>
+                    <a:lnB w="9525" cap="flat" cmpd="sng" algn="ctr">
+                      <a:solidFill>
+                        <a:srgbClr val="3A3F48"/>
+                      </a:solidFill>
+                      <a:prstDash val="solid"/>
+                      <a:round/>
+                      <a:headEnd type="none" w="med" len="med"/>
+                      <a:tailEnd type="none" w="med" len="med"/>
+                    </a:lnB>
+                    <a:solidFill>
+                      <a:srgbClr val="23272F"/>
+                    </a:solidFill>
+                  </a:tcPr>
+                </a:tc>
+              </a:tr>
             </a:tbl>
           </a:graphicData>
         </a:graphic>
@@ -12877,8 +13767,8 @@
         </p:nvSpPr>
         <p:spPr>
           <a:xfrm>
-            <a:off x="6812280" y="3977640"/>
-            <a:ext cx="4828032" cy="365760"/>
+            <a:off x="6812280" y="4663440"/>
+            <a:ext cx="4828032" cy="1463040"/>
           </a:xfrm>
           <a:prstGeom prst="rect">
             <a:avLst/>
@@ -12891,100 +13781,80 @@
           <a:lstStyle/>
           <a:p>
             <a:pPr indent="0" marL="0">
-              <a:buNone/>
-            </a:pPr>
-            <a:r>
-              <a:rPr lang="en-US" sz="1500" b="1" dirty="0">
-                <a:solidFill>
-                  <a:schemeClr val="tx1"/>
-                </a:solidFill>
-              </a:rPr>
-              <a:t>검출 ↑ = 정상 오검출 ↑  </a:t>
-            </a:r>
-            <a:pPr indent="0" marL="0">
-              <a:buNone/>
-            </a:pPr>
-            <a:r>
-              <a:rPr lang="en-US" sz="1500" b="1" dirty="0">
-                <a:solidFill>
-                  <a:schemeClr val="accent1"/>
-                </a:solidFill>
-              </a:rPr>
-              <a:t>→ 재학습 필요</a:t>
-            </a:r>
-            <a:endParaRPr lang="en-US" sz="1500" dirty="0"/>
-          </a:p>
-        </p:txBody>
-      </p:sp>
-      <p:pic>
-        <p:nvPicPr>
-          <p:cNvPr id="25" name="miss-img" descr="C:\Users\user\_se4nchoi\batteryvision\docs\submission\build\img\holdout_miss.jpg">    </p:cNvPr>
-          <p:cNvPicPr>
-            <a:picLocks noChangeAspect="1"/>
-          </p:cNvPicPr>
-          <p:nvPr/>
-        </p:nvPicPr>
-        <p:blipFill>
-          <a:blip r:embed="rId1"/>
-          <a:stretch>
-            <a:fillRect/>
-          </a:stretch>
-        </p:blipFill>
-        <p:spPr>
-          <a:xfrm>
-            <a:off x="6812280" y="4434840"/>
-            <a:ext cx="1828800" cy="1828800"/>
-          </a:xfrm>
-          <a:prstGeom prst="rect">
-            <a:avLst/>
-          </a:prstGeom>
-        </p:spPr>
-      </p:pic>
-      <p:sp>
-        <p:nvSpPr>
-          <p:cNvPr id="26" name="miss-cap"/>
-          <p:cNvSpPr txBox="1"/>
-          <p:nvPr/>
-        </p:nvSpPr>
-        <p:spPr>
-          <a:xfrm>
-            <a:off x="8823960" y="4937760"/>
-            <a:ext cx="2743200" cy="822960"/>
-          </a:xfrm>
-          <a:prstGeom prst="rect">
-            <a:avLst/>
-          </a:prstGeom>
-          <a:noFill/>
-          <a:ln/>
-        </p:spPr>
-        <p:txBody>
-          <a:bodyPr wrap="square" lIns="0" tIns="0" rIns="0" bIns="0" rtlCol="0" anchor="ctr"/>
-          <a:lstStyle/>
-          <a:p>
-            <a:pPr indent="0" marL="0">
+              <a:spcAft>
+                <a:spcPts val="600"/>
+              </a:spcAft>
               <a:buNone/>
             </a:pPr>
             <a:r>
               <a:rPr lang="en-US" sz="1400" b="1" dirty="0">
                 <a:solidFill>
-                  <a:schemeClr val="tx1"/>
+                  <a:schemeClr val="accent4"/>
                 </a:solidFill>
               </a:rPr>
-              <a:t>놓친 예: scratch</a:t>
+              <a:t>ATSS  </a:t>
             </a:r>
-            <a:endParaRPr lang="en-US" sz="1400" dirty="0"/>
-          </a:p>
-          <a:p>
             <a:pPr indent="0" marL="0">
+              <a:spcAft>
+                <a:spcPts val="600"/>
+              </a:spcAft>
               <a:buNone/>
             </a:pPr>
             <a:r>
               <a:rPr lang="en-US" sz="1400" dirty="0">
                 <a:solidFill>
-                  <a:schemeClr val="tx2"/>
+                  <a:schemeClr val="tx1"/>
                 </a:solidFill>
               </a:rPr>
-              <a:t>ATSS 최고 점수 0.21</a:t>
+              <a:t>검출 ↑ = 정상 오검출 ↑</a:t>
+            </a:r>
+            <a:endParaRPr lang="en-US" sz="1400" dirty="0"/>
+          </a:p>
+          <a:p>
+            <a:pPr indent="0" marL="0">
+              <a:spcAft>
+                <a:spcPts val="600"/>
+              </a:spcAft>
+              <a:buNone/>
+            </a:pPr>
+            <a:r>
+              <a:rPr lang="en-US" sz="1400" b="1" dirty="0">
+                <a:solidFill>
+                  <a:schemeClr val="accent5"/>
+                </a:solidFill>
+              </a:rPr>
+              <a:t>YOLOX-S  </a:t>
+            </a:r>
+            <a:pPr indent="0" marL="0">
+              <a:spcAft>
+                <a:spcPts val="600"/>
+              </a:spcAft>
+              <a:buNone/>
+            </a:pPr>
+            <a:r>
+              <a:rPr lang="en-US" sz="1400" dirty="0">
+                <a:solidFill>
+                  <a:schemeClr val="tx1"/>
+                </a:solidFill>
+              </a:rPr>
+              <a:t>순위는 정확 (mAP@50 0.93), 점수만 낮음</a:t>
+            </a:r>
+            <a:endParaRPr lang="en-US" sz="1400" dirty="0"/>
+          </a:p>
+          <a:p>
+            <a:pPr indent="0" marL="0">
+              <a:spcAft>
+                <a:spcPts val="600"/>
+              </a:spcAft>
+              <a:buNone/>
+            </a:pPr>
+            <a:r>
+              <a:rPr lang="en-US" sz="1400" b="1" dirty="0">
+                <a:solidFill>
+                  <a:schemeClr val="accent1"/>
+                </a:solidFill>
+              </a:rPr>
+              <a:t>→ 기준값은 모델별로 · 그래도 부족 → 재학습</a:t>
             </a:r>
             <a:endParaRPr lang="en-US" sz="1400" dirty="0"/>
           </a:p>

--- a/docs/submission/BatteryVision_발표.pptx
+++ b/docs/submission/BatteryVision_발표.pptx
@@ -116,13 +116,13 @@
   <p:extLst>
     <p:ext uri="{521415D9-36F7-43E2-AB2F-B90AF26B5E84}">
       <p14:sectionLst xmlns:p14="http://schemas.microsoft.com/office/powerpoint/2010/main">
-        <p14:section name="도입" id="{dfc59b71-a3ae-029e-6699-5dd83144d8bf}">
+        <p14:section name="도입" id="{df899e8e-f73a-1535-f14f-ba43cb566f3d}">
           <p14:sldIdLst>
             <p14:sldId id="256"/>
             <p14:sldId id="257"/>
           </p14:sldIdLst>
         </p14:section>
-        <p14:section name="실험" id="{bde8193f-717a-5375-ea80-5f49ac4d68fb}">
+        <p14:section name="실험" id="{7ac2d25a-7667-554b-9494-1f93ff41f383}">
           <p14:sldIdLst>
             <p14:sldId id="258"/>
             <p14:sldId id="259"/>
@@ -130,17 +130,17 @@
             <p14:sldId id="261"/>
           </p14:sldIdLst>
         </p14:section>
-        <p14:section name="최적화" id="{47949f94-4b1c-365b-4ae1-541cdba602b2}">
+        <p14:section name="최적화" id="{b18c5141-5c3c-cc91-bf53-4902d7da81f7}">
           <p14:sldIdLst>
             <p14:sldId id="262"/>
           </p14:sldIdLst>
         </p14:section>
-        <p14:section name="검증" id="{1b9ad431-83c8-c39e-f745-2f243faf8572}">
+        <p14:section name="검증" id="{b8148790-546b-f277-bf02-966a7e0de876}">
           <p14:sldIdLst>
             <p14:sldId id="263"/>
           </p14:sldIdLst>
         </p14:section>
-        <p14:section name="정리" id="{b9d06c33-3bf9-1a1c-f4c7-e4ab02b1a570}">
+        <p14:section name="정리" id="{ef2245b8-c325-61bf-ddb8-b6b90c7f71c7}">
           <p14:sldIdLst>
             <p14:sldId id="264"/>
             <p14:sldId id="265"/>
@@ -1465,7 +1465,7 @@
           <a:p>
             <a:r>
               <a:rPr lang="en-US" dirty="0"/>
-              <a:t>crack은 세 모델 모두 AP 1.0이지만, scratch는 0.66에서 0.86입니다. 박스 크기는 둘 다 이미지의 0.4% 안팎으로 비슷합니다. 차이는 대비입니다. crack은 어둡고 뚜렷하고, scratch는 반사나 나무결과 비슷한 흐릿한 선입니다. 이후 나오는 오류도 대부분 scratch입니다.</a:t>
+              <a:t>crack은 세 모델 모두 AP 1.0이지만, scratch는 0.66에서 0.86입니다. 박스 크기는 640픽셀 사진에서 둘 다 약 44×38픽셀로 같습니다. 차이는 대비입니다. crack은 어둡고 뚜렷하고, scratch는 반사나 나무결과 비슷한 흐릿한 선입니다. 이후 나오는 오류도 대부분 scratch입니다. 실제로 배경을 결함으로 잘못 본 16건 중 13건이 scratch였습니다. 모델이 배경의 결이나 반사를 scratch로 착각한다는 뜻입니다.</a:t>
             </a:r>
             <a:endParaRPr lang="en-US" dirty="0"/>
           </a:p>
@@ -1729,7 +1729,7 @@
           <a:p>
             <a:r>
               <a:rPr lang="en-US" dirty="0"/>
-              <a:t>왼쪽은 Geti 화면입니다. 세 모델 모두 같은 2,800장으로 학습했고, Geti 점수는 ATSS 86%, 나머지 81%입니다. 다만 Roboflow가 원본마다 증강 사본 3장을 만들어 두었고 Geti가 이를 무작위로 나눴기 때문에, 같은 원본의 사본이 Geti 학습과 테스트에 함께 들어갔을 가능성이 높아 Geti 점수도 낙관적입니다. 오른쪽은 직접 만든 벤치마크로 잰 값인데 순서가 같습니다. 파라미터가 가장 적은 ATSS가 가장 정확했고, 학습에 안 쓴 2차 세트에서도 ATSS가 YOLOX-S보다 훨씬 많이 잡았습니다. 다만 '작다'는 파라미터 기준이고, 연산량은 Tiny가 가장 적습니다.</a:t>
+              <a:t>왼쪽은 Geti 화면입니다. 세 모델 모두 같은 2,800장으로 학습했고, Geti 점수는 ATSS 86%, 나머지 81%입니다. 다만 Roboflow가 원본마다 증강 사본 3장을 만들어 두었고 Geti가 이를 무작위로 나눴기 때문에, 같은 원본의 사본이 Geti 학습과 테스트에 함께 들어갔을 가능성이 높아 Geti 점수도 낙관적입니다. 오른쪽은 직접 만든 벤치마크로 잰 값인데 순서가 같습니다. 파라미터가 가장 적은 ATSS가 가장 정확했고, 학습에 안 쓴 2차 세트에서도 ATSS가 YOLOX-S보다 훨씬 많이 잡았습니다. 다만 '작다'는 파라미터 기준이고, 연산량은 Tiny가 가장 적습니다. 왜 ATSS가 이겼는지는 가설 단계입니다. ATSS는 992×800으로 학습해 결함을 1.5배 크게 보고, 데이터가 2,800장으로 적어 작은 모델이 덜 과적합했을 수 있습니다. 모델마다 한 번씩만 학습해서 확정할 수는 없습니다.</a:t>
             </a:r>
             <a:endParaRPr lang="en-US" dirty="0"/>
           </a:p>
@@ -1817,7 +1817,7 @@
           <a:p>
             <a:r>
               <a:rPr lang="en-US" dirty="0"/>
-              <a:t>결론부터 말하면, crack과 scratch를 서로 헷갈린 경우는 한 번도 없고, 오류는 전부 놓친 scratch나 배경 오검출입니다. 특히 나무 탁상 배경에서 재현율이 33%로 가장 약합니다. heatmap은 YOLOX-S가 98%의 사진에서 결함을 짚지만 ATSS는 48%로, 정확도와 설명력은 별개였습니다.</a:t>
+              <a:t>결론부터 말하면, crack과 scratch를 서로 헷갈린 경우는 한 번도 없고, 오류는 전부 놓친 scratch나 배경 오검출입니다. 특히 나무 탁상 배경에서 재현율이 33%로 가장 약합니다. 나무결이 scratch처럼 가는 선 모양이라 놓치기도 하고 잘못 보기도 합니다. heatmap은 YOLOX-S가 98%의 사진에서 결함을 짚지만 ATSS는 48%로, 정확도와 설명력은 별개였습니다.</a:t>
             </a:r>
             <a:endParaRPr lang="en-US" dirty="0"/>
           </a:p>
@@ -1905,7 +1905,7 @@
           <a:p>
             <a:r>
               <a:rPr lang="en-US" dirty="0"/>
-              <a:t>수업에서 다룬 모델 최적화를 직접 써보고 싶어서, Geti에서 INT8 모델을 받아 직접 만든 벤치마크로 측정했습니다. 같은 131장을 한 장씩, 같은 CPU에서, 전처리와 후처리를 포함해 잰 값입니다. INT8은 2배에서 4배 빠르고 크기는 절반 정도이며, mAP는 그대로입니다. 대신 신뢰도 점수가 조금 낮아져 같은 기준에서는 놓치는 결함이 늘어납니다. INT8을 쓰려면 기준값을 다시 정해야 합니다.</a:t>
+              <a:t>수업에서 다룬 모델 최적화를 직접 써보고 싶어서, Geti에서 INT8 모델을 받아 직접 만든 벤치마크로 측정했습니다. 같은 131장을 한 장씩, 같은 CPU에서, 전처리와 후처리를 포함해 잰 값입니다. INT8은 2배에서 4배 빠르고 크기는 절반 정도이며, mAP는 그대로입니다. 대신 신뢰도 점수가 조금 낮아져 같은 기준에서는 놓치는 결함이 늘어납니다. INT8을 쓰려면 기준값을 다시 정해야 합니다. 빨라지는 이유는 CPU의 8비트 연산 명령을 쓰고 옮길 데이터가 절반이기 때문이고, 놓침이 느는 이유는 양자화로 점수가 조금 내려가 0.30 근처 결함이 기준 아래로 떨어지기 때문입니다.</a:t>
             </a:r>
             <a:endParaRPr lang="en-US" dirty="0"/>
           </a:p>
@@ -1993,7 +1993,7 @@
           <a:p>
             <a:r>
               <a:rPr lang="en-US" dirty="0"/>
-              <a:t>같은 업로더가 올린 다른 세트에서, 학습에 한 번도 쓰지 않은 45장으로 제 앱에서 다시 테스트했습니다. 1차 테스트에서 결함 셀을 거의 다 잡던 모델이 ATSS 47%, YOLOX-S 3%까지 떨어집니다. 결함을 착각한 게 아니라 점수가 낮아서 통과시킨 것이고, 정상 셀을 불합격시킨 경우는 없었습니다. 기준값을 바꿔 보면, ATSS는 0.15까지 낮추면 결함 97%를 잡지만 정상 셀도 87%가 걸립니다. YOLOX-S는 다릅니다. 2차 세트 mAP@50이 0.93으로 결함을 정상보다 높게 순위 매기는 건 정확한데, 점수 자체가 낮습니다. 0.05로 낮추면 정상 오검출 없이 57%를 잡습니다. 즉 기준값은 모델마다 따로 정해야 하고, 그래도 부족하기 때문에 새 환경 사진으로 재학습이 필요합니다.</a:t>
+              <a:t>같은 업로더가 올린 다른 세트에서, 학습에 한 번도 쓰지 않은 45장으로 제 앱에서 다시 테스트했습니다. 1차 테스트에서 결함 셀을 거의 다 잡던 모델이 ATSS 47%, YOLOX-S 3%까지 떨어집니다. 결함을 착각한 게 아니라 점수가 낮아서 통과시킨 것이고, 정상 셀을 불합격시킨 경우는 없었습니다. 가장 큰 원인은 crack입니다. 2차 세트의 crack은 약 30×26픽셀로 1차의 절반 면적이고, ATSS는 15개 중 1개만 잡았습니다. 학습 때 본 크기의 crack만 쉬웠던 겁니다. 기준값을 바꿔 보면, ATSS는 0.15까지 낮추면 결함 97%를 잡지만 정상 셀도 87%가 걸립니다. YOLOX-S는 다릅니다. 2차 세트 mAP@50이 0.93으로 결함을 정상보다 높게 순위 매기는 건 정확한데, 점수 자체가 낮습니다. YOLOX 점수는 물체일 확률과 클래스 확률을 곱한 값이라 원래 낮게 나오고, 처음 보는 사진에서는 더 낮아집니다. 0.05로 낮추면 정상 오검출 없이 57%를 잡습니다. 즉 기준값은 모델마다 따로 정해야 하고, 그래도 부족하기 때문에 새 환경 사진으로 재학습이 필요합니다.</a:t>
             </a:r>
             <a:endParaRPr lang="en-US" dirty="0"/>
           </a:p>
@@ -3798,7 +3798,7 @@
         </p:nvSpPr>
         <p:spPr>
           <a:xfrm>
-            <a:off x="548640" y="5486400"/>
+            <a:off x="548640" y="5349240"/>
             <a:ext cx="6309360" cy="365760"/>
           </a:xfrm>
           <a:prstGeom prst="rect">
@@ -3820,7 +3820,7 @@
                   <a:schemeClr val="tx2"/>
                 </a:solidFill>
               </a:rPr>
-              <a:t>박스 크기 중앙값  </a:t>
+              <a:t>박스 크기 (640px 사진, 중앙값)  </a:t>
             </a:r>
             <a:pPr indent="0" marL="0">
               <a:buNone/>
@@ -3831,15 +3831,62 @@
                   <a:schemeClr val="tx1"/>
                 </a:solidFill>
               </a:rPr>
-              <a:t>crack 0.39% · scratch 0.44%</a:t>
+              <a:t>crack 44×38px · scratch 43×38px</a:t>
             </a:r>
             <a:endParaRPr lang="en-US" sz="1600" dirty="0"/>
           </a:p>
         </p:txBody>
       </p:sp>
+      <p:sp>
+        <p:nvSpPr>
+          <p:cNvPr id="13" name="why-2"/>
+          <p:cNvSpPr txBox="1"/>
+          <p:nvPr/>
+        </p:nvSpPr>
+        <p:spPr>
+          <a:xfrm>
+            <a:off x="548640" y="5760720"/>
+            <a:ext cx="6309360" cy="365760"/>
+          </a:xfrm>
+          <a:prstGeom prst="rect">
+            <a:avLst/>
+          </a:prstGeom>
+          <a:noFill/>
+          <a:ln/>
+        </p:spPr>
+        <p:txBody>
+          <a:bodyPr wrap="square" lIns="0" tIns="0" rIns="0" bIns="0" rtlCol="0" anchor="t"/>
+          <a:lstStyle/>
+          <a:p>
+            <a:pPr indent="0" marL="0">
+              <a:buNone/>
+            </a:pPr>
+            <a:r>
+              <a:rPr lang="en-US" sz="1400" b="1" dirty="0">
+                <a:solidFill>
+                  <a:schemeClr val="accent1"/>
+                </a:solidFill>
+              </a:rPr>
+              <a:t>왜?  </a:t>
+            </a:r>
+            <a:pPr indent="0" marL="0">
+              <a:buNone/>
+            </a:pPr>
+            <a:r>
+              <a:rPr lang="en-US" sz="1400" dirty="0">
+                <a:solidFill>
+                  <a:schemeClr val="tx1"/>
+                </a:solidFill>
+              </a:rPr>
+              <a:t>scratch = 반사·나무결 같은 가는 선 → 오검출 16건 중 13건</a:t>
+            </a:r>
+            <a:endParaRPr lang="en-US" sz="1400" dirty="0"/>
+          </a:p>
+        </p:txBody>
+      </p:sp>
       <p:graphicFrame>
         <p:nvGraphicFramePr>
-          <p:cNvPr id="13" name="ap-chart" descr=""/>
+          <p:cNvPr id="14" name="ap-chart" descr=""/>
           <p:cNvGraphicFramePr/>
           <p:nvPr/>
         </p:nvGraphicFramePr>
@@ -6310,7 +6357,7 @@
                   <a:schemeClr val="tx2"/>
                 </a:solidFill>
               </a:rPr>
-              <a:t>학습에 쓴 사진 포함 가능</a:t>
+              <a:t>학습에 쓴 사진 포함 가능 → 일반화가 아니라 암기를 측정</a:t>
             </a:r>
             <a:endParaRPr lang="en-US" sz="1400" dirty="0"/>
           </a:p>
@@ -7466,8 +7513,8 @@
         </p:nvSpPr>
         <p:spPr>
           <a:xfrm>
-            <a:off x="4599629" y="5943600"/>
-            <a:ext cx="7043426" cy="274320"/>
+            <a:off x="4599629" y="5669280"/>
+            <a:ext cx="7043426" cy="566928"/>
           </a:xfrm>
           <a:prstGeom prst="rect">
             <a:avLst/>
@@ -7489,6 +7536,31 @@
                 </a:solidFill>
               </a:rPr>
               <a:t>Geti 점수와 같은 순서 · 작은 = 파라미터 기준 (연산량은 Tiny 최소)</a:t>
+            </a:r>
+            <a:endParaRPr lang="en-US" sz="1200" dirty="0"/>
+          </a:p>
+          <a:p>
+            <a:pPr indent="0" marL="0">
+              <a:buNone/>
+            </a:pPr>
+            <a:r>
+              <a:rPr lang="en-US" sz="1200" b="1" dirty="0">
+                <a:solidFill>
+                  <a:schemeClr val="accent1"/>
+                </a:solidFill>
+              </a:rPr>
+              <a:t>왜?  </a:t>
+            </a:r>
+            <a:pPr indent="0" marL="0">
+              <a:buNone/>
+            </a:pPr>
+            <a:r>
+              <a:rPr lang="en-US" sz="1200" dirty="0">
+                <a:solidFill>
+                  <a:schemeClr val="tx2"/>
+                </a:solidFill>
+              </a:rPr>
+              <a:t>가설: ATSS 입력 992×800 (YOLOX 640×640) · 적은 데이터엔 작은 모델 · 학습 1회라 미검증</a:t>
             </a:r>
             <a:endParaRPr lang="en-US" sz="1200" dirty="0"/>
           </a:p>
@@ -9454,7 +9526,7 @@
         </p:nvSpPr>
         <p:spPr>
           <a:xfrm>
-            <a:off x="6263640" y="5760720"/>
+            <a:off x="6263640" y="5715000"/>
             <a:ext cx="5376672" cy="274320"/>
           </a:xfrm>
           <a:prstGeom prst="rect">
@@ -9479,6 +9551,53 @@
               <a:t>heatmap 최고점이 정답 박스 안 · 정확도 ≠ heatmap 품질</a:t>
             </a:r>
             <a:endParaRPr lang="en-US" sz="1200" dirty="0"/>
+          </a:p>
+        </p:txBody>
+      </p:sp>
+      <p:sp>
+        <p:nvSpPr>
+          <p:cNvPr id="28" name="why-6"/>
+          <p:cNvSpPr txBox="1"/>
+          <p:nvPr/>
+        </p:nvSpPr>
+        <p:spPr>
+          <a:xfrm>
+            <a:off x="6263640" y="5961888"/>
+            <a:ext cx="5376672" cy="292608"/>
+          </a:xfrm>
+          <a:prstGeom prst="rect">
+            <a:avLst/>
+          </a:prstGeom>
+          <a:noFill/>
+          <a:ln/>
+        </p:spPr>
+        <p:txBody>
+          <a:bodyPr wrap="square" lIns="0" tIns="0" rIns="0" bIns="0" rtlCol="0" anchor="t"/>
+          <a:lstStyle/>
+          <a:p>
+            <a:pPr indent="0" marL="0">
+              <a:buNone/>
+            </a:pPr>
+            <a:r>
+              <a:rPr lang="en-US" sz="1400" b="1" dirty="0">
+                <a:solidFill>
+                  <a:schemeClr val="accent1"/>
+                </a:solidFill>
+              </a:rPr>
+              <a:t>왜?  </a:t>
+            </a:r>
+            <a:pPr indent="0" marL="0">
+              <a:buNone/>
+            </a:pPr>
+            <a:r>
+              <a:rPr lang="en-US" sz="1400" dirty="0">
+                <a:solidFill>
+                  <a:schemeClr val="tx1"/>
+                </a:solidFill>
+              </a:rPr>
+              <a:t>나무결 = scratch와 같은 가는 선 패턴</a:t>
+            </a:r>
+            <a:endParaRPr lang="en-US" sz="1400" dirty="0"/>
           </a:p>
         </p:txBody>
       </p:sp>
@@ -11083,7 +11202,54 @@
       </p:sp>
       <p:sp>
         <p:nvSpPr>
-          <p:cNvPr id="7" name="method-card"/>
+          <p:cNvPr id="7" name="why-7"/>
+          <p:cNvSpPr txBox="1"/>
+          <p:nvPr/>
+        </p:nvSpPr>
+        <p:spPr>
+          <a:xfrm>
+            <a:off x="6537960" y="4407408"/>
+            <a:ext cx="5102352" cy="292608"/>
+          </a:xfrm>
+          <a:prstGeom prst="rect">
+            <a:avLst/>
+          </a:prstGeom>
+          <a:noFill/>
+          <a:ln/>
+        </p:spPr>
+        <p:txBody>
+          <a:bodyPr wrap="square" lIns="0" tIns="0" rIns="0" bIns="0" rtlCol="0" anchor="t"/>
+          <a:lstStyle/>
+          <a:p>
+            <a:pPr indent="0" marL="0">
+              <a:buNone/>
+            </a:pPr>
+            <a:r>
+              <a:rPr lang="en-US" sz="1300" b="1" dirty="0">
+                <a:solidFill>
+                  <a:schemeClr val="accent1"/>
+                </a:solidFill>
+              </a:rPr>
+              <a:t>왜?  </a:t>
+            </a:r>
+            <a:pPr indent="0" marL="0">
+              <a:buNone/>
+            </a:pPr>
+            <a:r>
+              <a:rPr lang="en-US" sz="1300" dirty="0">
+                <a:solidFill>
+                  <a:schemeClr val="tx1"/>
+                </a:solidFill>
+              </a:rPr>
+              <a:t>int8 연산·데이터 절반 → 빠름 · 점수 소폭 ↓ → 놓침</a:t>
+            </a:r>
+            <a:endParaRPr lang="en-US" sz="1300" dirty="0"/>
+          </a:p>
+        </p:txBody>
+      </p:sp>
+      <p:sp>
+        <p:nvSpPr>
+          <p:cNvPr id="8" name="method-card"/>
           <p:cNvSpPr/>
           <p:nvPr/>
         </p:nvSpPr>
@@ -11105,7 +11271,7 @@
       </p:sp>
       <p:sp>
         <p:nvSpPr>
-          <p:cNvPr id="8" name="method"/>
+          <p:cNvPr id="9" name="method"/>
           <p:cNvSpPr txBox="1"/>
           <p:nvPr/>
         </p:nvSpPr>
@@ -11152,7 +11318,7 @@
       </p:sp>
       <p:sp>
         <p:nvSpPr>
-          <p:cNvPr id="9" name="pro-card"/>
+          <p:cNvPr id="10" name="pro-card"/>
           <p:cNvSpPr/>
           <p:nvPr/>
         </p:nvSpPr>
@@ -11174,7 +11340,7 @@
       </p:sp>
       <p:sp>
         <p:nvSpPr>
-          <p:cNvPr id="10" name="pro"/>
+          <p:cNvPr id="11" name="pro"/>
           <p:cNvSpPr txBox="1"/>
           <p:nvPr/>
         </p:nvSpPr>
@@ -11221,7 +11387,7 @@
       </p:sp>
       <p:sp>
         <p:nvSpPr>
-          <p:cNvPr id="11" name="con-card"/>
+          <p:cNvPr id="12" name="con-card"/>
           <p:cNvSpPr/>
           <p:nvPr/>
         </p:nvSpPr>
@@ -11243,7 +11409,7 @@
       </p:sp>
       <p:sp>
         <p:nvSpPr>
-          <p:cNvPr id="12" name="con"/>
+          <p:cNvPr id="13" name="con"/>
           <p:cNvSpPr txBox="1"/>
           <p:nvPr/>
         </p:nvSpPr>
@@ -12018,12 +12184,12 @@
               <a:buChar char="•"/>
             </a:pPr>
             <a:r>
-              <a:rPr lang="en-US" sz="1400" dirty="0">
-                <a:solidFill>
-                  <a:schemeClr val="tx1"/>
+              <a:rPr lang="en-US" sz="1400" b="1" dirty="0">
+                <a:solidFill>
+                  <a:schemeClr val="accent2"/>
                 </a:solidFill>
               </a:rPr>
-              <a:t>클래스 착각 0건 · 정상 불합격 0건</a:t>
+              <a:t>2차 crack 30×26px로 작아짐 → 검출 1/15</a:t>
             </a:r>
             <a:endParaRPr lang="en-US" sz="1400" dirty="0"/>
           </a:p>
@@ -12036,7 +12202,25 @@
               <a:buChar char="•"/>
             </a:pPr>
             <a:r>
-              <a:rPr lang="en-US" sz="1400" b="1" dirty="0">
+              <a:rPr lang="en-US" sz="1400" dirty="0">
+                <a:solidFill>
+                  <a:schemeClr val="tx1"/>
+                </a:solidFill>
+              </a:rPr>
+              <a:t>클래스 착각 0건 · 정상 불합격 0건</a:t>
+            </a:r>
+            <a:endParaRPr lang="en-US" sz="1400" dirty="0"/>
+          </a:p>
+          <a:p>
+            <a:pPr marL="342900" indent="-342900">
+              <a:spcAft>
+                <a:spcPts val="600"/>
+              </a:spcAft>
+              <a:buSzPct val="100000"/>
+              <a:buChar char="•"/>
+            </a:pPr>
+            <a:r>
+              <a:rPr lang="en-US" sz="1400" dirty="0">
                 <a:solidFill>
                   <a:schemeClr val="accent3"/>
                 </a:solidFill>
@@ -12111,7 +12295,7 @@
                 <a:gridCol w="1133856"/>
                 <a:gridCol w="1225296"/>
               </a:tblGrid>
-              <a:tr h="402336">
+              <a:tr h="374904">
                 <a:tc>
                   <a:txBody>
                     <a:bodyPr/>
@@ -12385,7 +12569,7 @@
                   </a:tcPr>
                 </a:tc>
               </a:tr>
-              <a:tr h="402336">
+              <a:tr h="374904">
                 <a:tc>
                   <a:txBody>
                     <a:bodyPr/>
@@ -12659,7 +12843,7 @@
                   </a:tcPr>
                 </a:tc>
               </a:tr>
-              <a:tr h="402336">
+              <a:tr h="374904">
                 <a:tc>
                   <a:txBody>
                     <a:bodyPr/>
@@ -12933,7 +13117,7 @@
                   </a:tcPr>
                 </a:tc>
               </a:tr>
-              <a:tr h="402336">
+              <a:tr h="374904">
                 <a:tc>
                   <a:txBody>
                     <a:bodyPr/>
@@ -13207,7 +13391,7 @@
                   </a:tcPr>
                 </a:tc>
               </a:tr>
-              <a:tr h="402336">
+              <a:tr h="374904">
                 <a:tc>
                   <a:txBody>
                     <a:bodyPr/>
@@ -13481,7 +13665,7 @@
                   </a:tcPr>
                 </a:tc>
               </a:tr>
-              <a:tr h="402336">
+              <a:tr h="374904">
                 <a:tc>
                   <a:txBody>
                     <a:bodyPr/>
@@ -13767,8 +13951,8 @@
         </p:nvSpPr>
         <p:spPr>
           <a:xfrm>
-            <a:off x="6812280" y="4663440"/>
-            <a:ext cx="4828032" cy="1463040"/>
+            <a:off x="6812280" y="4434840"/>
+            <a:ext cx="4828032" cy="1783080"/>
           </a:xfrm>
           <a:prstGeom prst="rect">
             <a:avLst/>
@@ -13806,7 +13990,7 @@
                   <a:schemeClr val="tx1"/>
                 </a:solidFill>
               </a:rPr>
-              <a:t>검출 ↑ = 정상 오검출 ↑</a:t>
+              <a:t>검출 ↑ = 정상 오검출 ↑ (점수 분포 겹침)</a:t>
             </a:r>
             <a:endParaRPr lang="en-US" sz="1400" dirty="0"/>
           </a:p>
@@ -13838,6 +14022,37 @@
                 </a:solidFill>
               </a:rPr>
               <a:t>순위는 정확 (mAP@50 0.93), 점수만 낮음</a:t>
+            </a:r>
+            <a:endParaRPr lang="en-US" sz="1400" dirty="0"/>
+          </a:p>
+          <a:p>
+            <a:pPr indent="0" marL="0">
+              <a:spcAft>
+                <a:spcPts val="600"/>
+              </a:spcAft>
+              <a:buNone/>
+            </a:pPr>
+            <a:r>
+              <a:rPr lang="en-US" sz="1400" b="1" dirty="0">
+                <a:solidFill>
+                  <a:schemeClr val="accent1"/>
+                </a:solidFill>
+              </a:rPr>
+              <a:t>왜?  </a:t>
+            </a:r>
+            <a:pPr indent="0" marL="0">
+              <a:spcAft>
+                <a:spcPts val="600"/>
+              </a:spcAft>
+              <a:buNone/>
+            </a:pPr>
+            <a:r>
+              <a:rPr lang="en-US" sz="1400" dirty="0">
+                <a:solidFill>
+                  <a:schemeClr val="tx2"/>
+                </a:solidFill>
+              </a:rPr>
+              <a:t>YOLOX 점수 = 두 확률의 곱 (objectness × class)</a:t>
             </a:r>
             <a:endParaRPr lang="en-US" sz="1400" dirty="0"/>
           </a:p>

--- a/docs/submission/BatteryVision_발표.pptx
+++ b/docs/submission/BatteryVision_발표.pptx
@@ -15,9 +15,10 @@
     <p:sldId id="263" r:id="rId9"/>
     <p:sldId id="264" r:id="rId10"/>
     <p:sldId id="265" r:id="rId11"/>
+    <p:sldId id="266" r:id="rId12"/>
   </p:sldIdLst>
   <p:notesMasterIdLst>
-    <p:notesMasterId r:id="rId12"/>
+    <p:notesMasterId r:id="rId13"/>
   </p:notesMasterIdLst>
   <p:sldSz cx="12192000" cy="6858000"/>
   <p:notesSz cx="6858000" cy="12192000"/>
@@ -116,13 +117,13 @@
   <p:extLst>
     <p:ext uri="{521415D9-36F7-43E2-AB2F-B90AF26B5E84}">
       <p14:sectionLst xmlns:p14="http://schemas.microsoft.com/office/powerpoint/2010/main">
-        <p14:section name="도입" id="{df899e8e-f73a-1535-f14f-ba43cb566f3d}">
+        <p14:section name="도입" id="{98717ff3-c11c-ab26-22eb-50142ed9e67d}">
           <p14:sldIdLst>
             <p14:sldId id="256"/>
             <p14:sldId id="257"/>
           </p14:sldIdLst>
         </p14:section>
-        <p14:section name="실험" id="{7ac2d25a-7667-554b-9494-1f93ff41f383}">
+        <p14:section name="실험" id="{637e45b7-6636-1466-480d-48dd11d05963}">
           <p14:sldIdLst>
             <p14:sldId id="258"/>
             <p14:sldId id="259"/>
@@ -130,20 +131,21 @@
             <p14:sldId id="261"/>
           </p14:sldIdLst>
         </p14:section>
-        <p14:section name="최적화" id="{b18c5141-5c3c-cc91-bf53-4902d7da81f7}">
+        <p14:section name="최적화" id="{11f94f5a-a960-ee64-8b60-98aac936bc4e}">
           <p14:sldIdLst>
             <p14:sldId id="262"/>
           </p14:sldIdLst>
         </p14:section>
-        <p14:section name="검증" id="{b8148790-546b-f277-bf02-966a7e0de876}">
+        <p14:section name="검증" id="{69d40958-8096-e577-2cf8-e044e2c3ae9e}">
           <p14:sldIdLst>
             <p14:sldId id="263"/>
           </p14:sldIdLst>
         </p14:section>
-        <p14:section name="정리" id="{ef2245b8-c325-61bf-ddb8-b6b90c7f71c7}">
+        <p14:section name="정리" id="{7a16fc6c-fbe3-84f9-31d6-18cb52fa2046}">
           <p14:sldIdLst>
             <p14:sldId id="264"/>
             <p14:sldId id="265"/>
+            <p14:sldId id="266"/>
           </p14:sldIdLst>
         </p14:section>
       </p14:sectionLst>
@@ -1377,7 +1379,7 @@
           <a:p>
             <a:r>
               <a:rPr lang="en-US" dirty="0"/>
-              <a:t>마지막으로 대시보드에서 실제 모델이 가상 검사 라인을 돌리는 모습을 보여드리겠습니다. (라이브 데모로 전환)</a:t>
+              <a:t>실험 순서대로 정리했습니다. 점수가 가장 높았던 단계보다, 테스트셋이 학습 데이터에 섞인 걸 발견하고 2차 세트에서 점수가 떨어진 단계에서 더 많이 배웠습니다. 마지막으로 기준값을 낮춰 봤지만 정상 셀이 87% 걸려서, 새 환경에서는 기준값이 아니라 재학습이 필요하다는 결론입니다.</a:t>
             </a:r>
             <a:endParaRPr lang="en-US" dirty="0"/>
           </a:p>
@@ -1401,6 +1403,94 @@
             <a:fld id="{F7021451-1387-4CA6-816F-3879F97B5CBC}" type="slidenum">
               <a:rPr lang="en-US"/>
               <a:t>10</a:t>
+            </a:fld>
+            <a:endParaRPr lang="en-US"/>
+          </a:p>
+        </p:txBody>
+      </p:sp>
+    </p:spTree>
+    <p:extLst>
+      <p:ext uri="{BB962C8B-B14F-4D97-AF65-F5344CB8AC3E}">
+        <p14:creationId xmlns:p14="http://schemas.microsoft.com/office/powerpoint/2010/main" val="1024086991"/>
+      </p:ext>
+    </p:extLst>
+  </p:cSld>
+  <p:clrMapOvr>
+    <a:masterClrMapping/>
+  </p:clrMapOvr>
+</p:notes>
+</file>
+
+<file path=ppt/notesSlides/notesSlide11.xml><?xml version="1.0" encoding="utf-8"?>
+<p:notes xmlns:a="http://schemas.openxmlformats.org/drawingml/2006/main" xmlns:r="http://schemas.openxmlformats.org/officeDocument/2006/relationships" xmlns:p="http://schemas.openxmlformats.org/presentationml/2006/main">
+  <p:cSld>
+    <p:spTree>
+      <p:nvGrpSpPr>
+        <p:cNvPr id="1" name=""/>
+        <p:cNvGrpSpPr/>
+        <p:nvPr/>
+      </p:nvGrpSpPr>
+      <p:grpSpPr>
+        <a:xfrm>
+          <a:off x="0" y="0"/>
+          <a:ext cx="0" cy="0"/>
+          <a:chOff x="0" y="0"/>
+          <a:chExt cx="0" cy="0"/>
+        </a:xfrm>
+      </p:grpSpPr>
+      <p:sp>
+        <p:nvSpPr>
+          <p:cNvPr id="2" name="Slide Image Placeholder 1"/>
+          <p:cNvSpPr>
+            <a:spLocks noGrp="1" noRot="1" noChangeAspect="1"/>
+          </p:cNvSpPr>
+          <p:nvPr>
+            <p:ph type="sldImg"/>
+          </p:nvPr>
+        </p:nvSpPr>
+        <p:spPr/>
+      </p:sp>
+      <p:sp>
+        <p:nvSpPr>
+          <p:cNvPr id="3" name="Notes Placeholder 2"/>
+          <p:cNvSpPr>
+            <a:spLocks noGrp="1"/>
+          </p:cNvSpPr>
+          <p:nvPr>
+            <p:ph type="body" idx="1"/>
+          </p:nvPr>
+        </p:nvSpPr>
+        <p:spPr/>
+        <p:txBody>
+          <a:bodyPr/>
+          <a:lstStyle/>
+          <a:p>
+            <a:r>
+              <a:rPr lang="en-US" dirty="0"/>
+              <a:t>마지막으로 대시보드에서 실제 모델이 가상 검사 라인을 돌리는 모습을 보여드리겠습니다. (라이브 데모로 전환)</a:t>
+            </a:r>
+            <a:endParaRPr lang="en-US" dirty="0"/>
+          </a:p>
+        </p:txBody>
+      </p:sp>
+      <p:sp>
+        <p:nvSpPr>
+          <p:cNvPr id="4" name="Slide Number Placeholder 3"/>
+          <p:cNvSpPr>
+            <a:spLocks noGrp="1"/>
+          </p:cNvSpPr>
+          <p:nvPr>
+            <p:ph type="sldNum" sz="quarter" idx="10"/>
+          </p:nvPr>
+        </p:nvSpPr>
+        <p:spPr/>
+        <p:txBody>
+          <a:bodyPr/>
+          <a:lstStyle/>
+          <a:p>
+            <a:fld id="{F7021451-1387-4CA6-816F-3879F97B5CBC}" type="slidenum">
+              <a:rPr lang="en-US"/>
+              <a:t>11</a:t>
             </a:fld>
             <a:endParaRPr lang="en-US"/>
           </a:p>
@@ -2081,7 +2171,7 @@
           <a:p>
             <a:r>
               <a:rPr lang="en-US" dirty="0"/>
-              <a:t>실험 순서대로 정리했습니다. 점수가 가장 높았던 단계보다, 테스트셋이 학습 데이터에 섞인 걸 발견하고 2차 세트에서 점수가 떨어진 단계에서 더 많이 배웠습니다. 마지막으로 기준값을 낮춰 봤지만 정상 셀이 87% 걸려서, 새 환경에서는 기준값이 아니라 재학습이 필요하다는 결론입니다.</a:t>
+              <a:t>앞에서 본 결과들의 원인을 한 장에 모았습니다. 오른쪽 근거 칸은 얼마나 확실한지입니다. 측정은 데이터로 직접 확인한 것, 추정은 데이터와 맞지만 따로 검증하지 않은 것, 가설은 아직 검증하지 않은 것입니다. 가장 확실한 원인은 세 가지입니다. scratch는 반사나 나무결과 비슷한 가는 선이라 어렵고, 1차 93%는 테스트 사진까지 학습 데이터에 섞여 과대평가됐고, 2차 세트에서 떨어진 건 crack이 절반 크기로 작아졌기 때문입니다. ATSS가 왜 가장 좋은지는 아직 가설입니다.</a:t>
             </a:r>
             <a:endParaRPr lang="en-US" dirty="0"/>
           </a:p>
@@ -3218,6 +3308,2924 @@
                   <a:schemeClr val="tx1"/>
                 </a:solidFill>
               </a:rPr>
+              <a:t>Logs and Lesson Learned</a:t>
+            </a:r>
+            <a:endParaRPr lang="en-US" sz="3200" dirty="0"/>
+          </a:p>
+        </p:txBody>
+      </p:sp>
+      <p:graphicFrame>
+        <p:nvGraphicFramePr>
+          <p:cNvPr id="11" name="log-table"/>
+          <p:cNvGraphicFramePr>
+            <a:graphicFrameLocks noGrp="1"/>
+          </p:cNvGraphicFramePr>
+          <p:nvPr>
+            <p:extLst>
+              <p:ext uri="{D42A27DB-BD31-4B8C-83A1-F6EECF244321}">
+                <p14:modId xmlns:p14="http://schemas.microsoft.com/office/powerpoint/2010/main" val="1579011935"/>
+              </p:ext>
+            </p:extLst>
+          </p:nvPr>
+        </p:nvGraphicFramePr>
+        <p:xfrm>
+          <a:off x="548640" y="1234440"/>
+          <a:ext cx="6903720" cy="914400"/>
+        </p:xfrm>
+        <a:graphic>
+          <a:graphicData uri="http://schemas.openxmlformats.org/drawingml/2006/table">
+            <a:tbl>
+              <a:tblPr/>
+              <a:tblGrid>
+                <a:gridCol w="548640"/>
+                <a:gridCol w="2240280"/>
+                <a:gridCol w="1691640"/>
+                <a:gridCol w="2423160"/>
+              </a:tblGrid>
+              <a:tr h="566928">
+                <a:tc>
+                  <a:txBody>
+                    <a:bodyPr/>
+                    <a:lstStyle/>
+                    <a:p>
+                      <a:pPr algn="l" indent="0" marL="0">
+                        <a:buNone/>
+                      </a:pPr>
+                      <a:r>
+                        <a:rPr lang="en-US" sz="1400" b="1" dirty="0">
+                          <a:solidFill>
+                            <a:schemeClr val="tx2"/>
+                          </a:solidFill>
+                          <a:latin typeface="Malgun Gothic" pitchFamily="34" charset="0"/>
+                          <a:ea typeface="Malgun Gothic" pitchFamily="34" charset="-122"/>
+                          <a:cs typeface="Malgun Gothic" pitchFamily="34" charset="-120"/>
+                        </a:rPr>
+                        <a:t>단계</a:t>
+                      </a:r>
+                      <a:endParaRPr lang="en-US" sz="1400" dirty="0">
+                        <a:latin typeface="Malgun Gothic" charset="0"/>
+                        <a:ea typeface="Malgun Gothic" charset="0"/>
+                        <a:cs typeface="Malgun Gothic" charset="0"/>
+                      </a:endParaRPr>
+                    </a:p>
+                  </a:txBody>
+                  <a:tcPr marL="91440" marR="91440" marT="45720" marB="45720" anchor="ctr">
+                    <a:lnL w="9525" cap="flat" cmpd="sng" algn="ctr">
+                      <a:solidFill>
+                        <a:srgbClr val="3A3F48"/>
+                      </a:solidFill>
+                      <a:prstDash val="solid"/>
+                      <a:round/>
+                      <a:headEnd type="none" w="med" len="med"/>
+                      <a:tailEnd type="none" w="med" len="med"/>
+                    </a:lnL>
+                    <a:lnR w="9525" cap="flat" cmpd="sng" algn="ctr">
+                      <a:solidFill>
+                        <a:srgbClr val="3A3F48"/>
+                      </a:solidFill>
+                      <a:prstDash val="solid"/>
+                      <a:round/>
+                      <a:headEnd type="none" w="med" len="med"/>
+                      <a:tailEnd type="none" w="med" len="med"/>
+                    </a:lnR>
+                    <a:lnT w="9525" cap="flat" cmpd="sng" algn="ctr">
+                      <a:solidFill>
+                        <a:srgbClr val="3A3F48"/>
+                      </a:solidFill>
+                      <a:prstDash val="solid"/>
+                      <a:round/>
+                      <a:headEnd type="none" w="med" len="med"/>
+                      <a:tailEnd type="none" w="med" len="med"/>
+                    </a:lnT>
+                    <a:lnB w="9525" cap="flat" cmpd="sng" algn="ctr">
+                      <a:solidFill>
+                        <a:srgbClr val="3A3F48"/>
+                      </a:solidFill>
+                      <a:prstDash val="solid"/>
+                      <a:round/>
+                      <a:headEnd type="none" w="med" len="med"/>
+                      <a:tailEnd type="none" w="med" len="med"/>
+                    </a:lnB>
+                    <a:solidFill>
+                      <a:srgbClr val="16191E"/>
+                    </a:solidFill>
+                  </a:tcPr>
+                </a:tc>
+                <a:tc>
+                  <a:txBody>
+                    <a:bodyPr/>
+                    <a:lstStyle/>
+                    <a:p>
+                      <a:pPr algn="l" indent="0" marL="0">
+                        <a:buNone/>
+                      </a:pPr>
+                      <a:r>
+                        <a:rPr lang="en-US" sz="1400" b="1" dirty="0">
+                          <a:solidFill>
+                            <a:schemeClr val="tx2"/>
+                          </a:solidFill>
+                          <a:latin typeface="Malgun Gothic" pitchFamily="34" charset="0"/>
+                          <a:ea typeface="Malgun Gothic" pitchFamily="34" charset="-122"/>
+                          <a:cs typeface="Malgun Gothic" pitchFamily="34" charset="-120"/>
+                        </a:rPr>
+                        <a:t>조건</a:t>
+                      </a:r>
+                      <a:endParaRPr lang="en-US" sz="1400" dirty="0">
+                        <a:latin typeface="Malgun Gothic" charset="0"/>
+                        <a:ea typeface="Malgun Gothic" charset="0"/>
+                        <a:cs typeface="Malgun Gothic" charset="0"/>
+                      </a:endParaRPr>
+                    </a:p>
+                  </a:txBody>
+                  <a:tcPr marL="91440" marR="91440" marT="45720" marB="45720" anchor="ctr">
+                    <a:lnL w="9525" cap="flat" cmpd="sng" algn="ctr">
+                      <a:solidFill>
+                        <a:srgbClr val="3A3F48"/>
+                      </a:solidFill>
+                      <a:prstDash val="solid"/>
+                      <a:round/>
+                      <a:headEnd type="none" w="med" len="med"/>
+                      <a:tailEnd type="none" w="med" len="med"/>
+                    </a:lnL>
+                    <a:lnR w="9525" cap="flat" cmpd="sng" algn="ctr">
+                      <a:solidFill>
+                        <a:srgbClr val="3A3F48"/>
+                      </a:solidFill>
+                      <a:prstDash val="solid"/>
+                      <a:round/>
+                      <a:headEnd type="none" w="med" len="med"/>
+                      <a:tailEnd type="none" w="med" len="med"/>
+                    </a:lnR>
+                    <a:lnT w="9525" cap="flat" cmpd="sng" algn="ctr">
+                      <a:solidFill>
+                        <a:srgbClr val="3A3F48"/>
+                      </a:solidFill>
+                      <a:prstDash val="solid"/>
+                      <a:round/>
+                      <a:headEnd type="none" w="med" len="med"/>
+                      <a:tailEnd type="none" w="med" len="med"/>
+                    </a:lnT>
+                    <a:lnB w="9525" cap="flat" cmpd="sng" algn="ctr">
+                      <a:solidFill>
+                        <a:srgbClr val="3A3F48"/>
+                      </a:solidFill>
+                      <a:prstDash val="solid"/>
+                      <a:round/>
+                      <a:headEnd type="none" w="med" len="med"/>
+                      <a:tailEnd type="none" w="med" len="med"/>
+                    </a:lnB>
+                    <a:solidFill>
+                      <a:srgbClr val="16191E"/>
+                    </a:solidFill>
+                  </a:tcPr>
+                </a:tc>
+                <a:tc>
+                  <a:txBody>
+                    <a:bodyPr/>
+                    <a:lstStyle/>
+                    <a:p>
+                      <a:pPr algn="l" indent="0" marL="0">
+                        <a:buNone/>
+                      </a:pPr>
+                      <a:r>
+                        <a:rPr lang="en-US" sz="1400" b="1" dirty="0">
+                          <a:solidFill>
+                            <a:schemeClr val="tx2"/>
+                          </a:solidFill>
+                          <a:latin typeface="Malgun Gothic" pitchFamily="34" charset="0"/>
+                          <a:ea typeface="Malgun Gothic" pitchFamily="34" charset="-122"/>
+                          <a:cs typeface="Malgun Gothic" pitchFamily="34" charset="-120"/>
+                        </a:rPr>
+                        <a:t>결과</a:t>
+                      </a:r>
+                      <a:endParaRPr lang="en-US" sz="1400" dirty="0">
+                        <a:latin typeface="Malgun Gothic" charset="0"/>
+                        <a:ea typeface="Malgun Gothic" charset="0"/>
+                        <a:cs typeface="Malgun Gothic" charset="0"/>
+                      </a:endParaRPr>
+                    </a:p>
+                  </a:txBody>
+                  <a:tcPr marL="91440" marR="91440" marT="45720" marB="45720" anchor="ctr">
+                    <a:lnL w="9525" cap="flat" cmpd="sng" algn="ctr">
+                      <a:solidFill>
+                        <a:srgbClr val="3A3F48"/>
+                      </a:solidFill>
+                      <a:prstDash val="solid"/>
+                      <a:round/>
+                      <a:headEnd type="none" w="med" len="med"/>
+                      <a:tailEnd type="none" w="med" len="med"/>
+                    </a:lnL>
+                    <a:lnR w="9525" cap="flat" cmpd="sng" algn="ctr">
+                      <a:solidFill>
+                        <a:srgbClr val="3A3F48"/>
+                      </a:solidFill>
+                      <a:prstDash val="solid"/>
+                      <a:round/>
+                      <a:headEnd type="none" w="med" len="med"/>
+                      <a:tailEnd type="none" w="med" len="med"/>
+                    </a:lnR>
+                    <a:lnT w="9525" cap="flat" cmpd="sng" algn="ctr">
+                      <a:solidFill>
+                        <a:srgbClr val="3A3F48"/>
+                      </a:solidFill>
+                      <a:prstDash val="solid"/>
+                      <a:round/>
+                      <a:headEnd type="none" w="med" len="med"/>
+                      <a:tailEnd type="none" w="med" len="med"/>
+                    </a:lnT>
+                    <a:lnB w="9525" cap="flat" cmpd="sng" algn="ctr">
+                      <a:solidFill>
+                        <a:srgbClr val="3A3F48"/>
+                      </a:solidFill>
+                      <a:prstDash val="solid"/>
+                      <a:round/>
+                      <a:headEnd type="none" w="med" len="med"/>
+                      <a:tailEnd type="none" w="med" len="med"/>
+                    </a:lnB>
+                    <a:solidFill>
+                      <a:srgbClr val="16191E"/>
+                    </a:solidFill>
+                  </a:tcPr>
+                </a:tc>
+                <a:tc>
+                  <a:txBody>
+                    <a:bodyPr/>
+                    <a:lstStyle/>
+                    <a:p>
+                      <a:pPr algn="l" indent="0" marL="0">
+                        <a:buNone/>
+                      </a:pPr>
+                      <a:r>
+                        <a:rPr lang="en-US" sz="1400" b="1" dirty="0">
+                          <a:solidFill>
+                            <a:schemeClr val="tx2"/>
+                          </a:solidFill>
+                          <a:latin typeface="Malgun Gothic" pitchFamily="34" charset="0"/>
+                          <a:ea typeface="Malgun Gothic" pitchFamily="34" charset="-122"/>
+                          <a:cs typeface="Malgun Gothic" pitchFamily="34" charset="-120"/>
+                        </a:rPr>
+                        <a:t>배운 것</a:t>
+                      </a:r>
+                      <a:endParaRPr lang="en-US" sz="1400" dirty="0">
+                        <a:latin typeface="Malgun Gothic" charset="0"/>
+                        <a:ea typeface="Malgun Gothic" charset="0"/>
+                        <a:cs typeface="Malgun Gothic" charset="0"/>
+                      </a:endParaRPr>
+                    </a:p>
+                  </a:txBody>
+                  <a:tcPr marL="91440" marR="91440" marT="45720" marB="45720" anchor="ctr">
+                    <a:lnL w="9525" cap="flat" cmpd="sng" algn="ctr">
+                      <a:solidFill>
+                        <a:srgbClr val="3A3F48"/>
+                      </a:solidFill>
+                      <a:prstDash val="solid"/>
+                      <a:round/>
+                      <a:headEnd type="none" w="med" len="med"/>
+                      <a:tailEnd type="none" w="med" len="med"/>
+                    </a:lnL>
+                    <a:lnR w="9525" cap="flat" cmpd="sng" algn="ctr">
+                      <a:solidFill>
+                        <a:srgbClr val="3A3F48"/>
+                      </a:solidFill>
+                      <a:prstDash val="solid"/>
+                      <a:round/>
+                      <a:headEnd type="none" w="med" len="med"/>
+                      <a:tailEnd type="none" w="med" len="med"/>
+                    </a:lnR>
+                    <a:lnT w="9525" cap="flat" cmpd="sng" algn="ctr">
+                      <a:solidFill>
+                        <a:srgbClr val="3A3F48"/>
+                      </a:solidFill>
+                      <a:prstDash val="solid"/>
+                      <a:round/>
+                      <a:headEnd type="none" w="med" len="med"/>
+                      <a:tailEnd type="none" w="med" len="med"/>
+                    </a:lnT>
+                    <a:lnB w="9525" cap="flat" cmpd="sng" algn="ctr">
+                      <a:solidFill>
+                        <a:srgbClr val="3A3F48"/>
+                      </a:solidFill>
+                      <a:prstDash val="solid"/>
+                      <a:round/>
+                      <a:headEnd type="none" w="med" len="med"/>
+                      <a:tailEnd type="none" w="med" len="med"/>
+                    </a:lnB>
+                    <a:solidFill>
+                      <a:srgbClr val="16191E"/>
+                    </a:solidFill>
+                  </a:tcPr>
+                </a:tc>
+              </a:tr>
+              <a:tr h="566928">
+                <a:tc>
+                  <a:txBody>
+                    <a:bodyPr/>
+                    <a:lstStyle/>
+                    <a:p>
+                      <a:pPr algn="ctr" indent="0" marL="0">
+                        <a:buNone/>
+                      </a:pPr>
+                      <a:r>
+                        <a:rPr lang="en-US" sz="1400" dirty="0">
+                          <a:solidFill>
+                            <a:schemeClr val="tx1"/>
+                          </a:solidFill>
+                          <a:latin typeface="Malgun Gothic" pitchFamily="34" charset="0"/>
+                          <a:ea typeface="Malgun Gothic" pitchFamily="34" charset="-122"/>
+                          <a:cs typeface="Malgun Gothic" pitchFamily="34" charset="-120"/>
+                        </a:rPr>
+                        <a:t>1</a:t>
+                      </a:r>
+                      <a:endParaRPr lang="en-US" sz="1400" dirty="0">
+                        <a:latin typeface="Malgun Gothic" charset="0"/>
+                        <a:ea typeface="Malgun Gothic" charset="0"/>
+                        <a:cs typeface="Malgun Gothic" charset="0"/>
+                      </a:endParaRPr>
+                    </a:p>
+                  </a:txBody>
+                  <a:tcPr marL="91440" marR="91440" marT="45720" marB="45720" anchor="ctr">
+                    <a:lnL w="9525" cap="flat" cmpd="sng" algn="ctr">
+                      <a:solidFill>
+                        <a:srgbClr val="3A3F48"/>
+                      </a:solidFill>
+                      <a:prstDash val="solid"/>
+                      <a:round/>
+                      <a:headEnd type="none" w="med" len="med"/>
+                      <a:tailEnd type="none" w="med" len="med"/>
+                    </a:lnL>
+                    <a:lnR w="9525" cap="flat" cmpd="sng" algn="ctr">
+                      <a:solidFill>
+                        <a:srgbClr val="3A3F48"/>
+                      </a:solidFill>
+                      <a:prstDash val="solid"/>
+                      <a:round/>
+                      <a:headEnd type="none" w="med" len="med"/>
+                      <a:tailEnd type="none" w="med" len="med"/>
+                    </a:lnR>
+                    <a:lnT w="9525" cap="flat" cmpd="sng" algn="ctr">
+                      <a:solidFill>
+                        <a:srgbClr val="3A3F48"/>
+                      </a:solidFill>
+                      <a:prstDash val="solid"/>
+                      <a:round/>
+                      <a:headEnd type="none" w="med" len="med"/>
+                      <a:tailEnd type="none" w="med" len="med"/>
+                    </a:lnT>
+                    <a:lnB w="9525" cap="flat" cmpd="sng" algn="ctr">
+                      <a:solidFill>
+                        <a:srgbClr val="3A3F48"/>
+                      </a:solidFill>
+                      <a:prstDash val="solid"/>
+                      <a:round/>
+                      <a:headEnd type="none" w="med" len="med"/>
+                      <a:tailEnd type="none" w="med" len="med"/>
+                    </a:lnB>
+                    <a:solidFill>
+                      <a:srgbClr val="23272F"/>
+                    </a:solidFill>
+                  </a:tcPr>
+                </a:tc>
+                <a:tc>
+                  <a:txBody>
+                    <a:bodyPr/>
+                    <a:lstStyle/>
+                    <a:p>
+                      <a:pPr algn="l" indent="0" marL="0">
+                        <a:buNone/>
+                      </a:pPr>
+                      <a:r>
+                        <a:rPr lang="en-US" sz="1400" dirty="0">
+                          <a:solidFill>
+                            <a:schemeClr val="tx1"/>
+                          </a:solidFill>
+                          <a:latin typeface="Malgun Gothic" pitchFamily="34" charset="0"/>
+                          <a:ea typeface="Malgun Gothic" pitchFamily="34" charset="-122"/>
+                          <a:cs typeface="Malgun Gothic" pitchFamily="34" charset="-120"/>
+                        </a:rPr>
+                        <a:t>ATSS · 1차 테스트 153장</a:t>
+                      </a:r>
+                      <a:endParaRPr lang="en-US" sz="1400" dirty="0">
+                        <a:latin typeface="Malgun Gothic" charset="0"/>
+                        <a:ea typeface="Malgun Gothic" charset="0"/>
+                        <a:cs typeface="Malgun Gothic" charset="0"/>
+                      </a:endParaRPr>
+                    </a:p>
+                  </a:txBody>
+                  <a:tcPr marL="91440" marR="91440" marT="45720" marB="45720" anchor="ctr">
+                    <a:lnL w="9525" cap="flat" cmpd="sng" algn="ctr">
+                      <a:solidFill>
+                        <a:srgbClr val="3A3F48"/>
+                      </a:solidFill>
+                      <a:prstDash val="solid"/>
+                      <a:round/>
+                      <a:headEnd type="none" w="med" len="med"/>
+                      <a:tailEnd type="none" w="med" len="med"/>
+                    </a:lnL>
+                    <a:lnR w="9525" cap="flat" cmpd="sng" algn="ctr">
+                      <a:solidFill>
+                        <a:srgbClr val="3A3F48"/>
+                      </a:solidFill>
+                      <a:prstDash val="solid"/>
+                      <a:round/>
+                      <a:headEnd type="none" w="med" len="med"/>
+                      <a:tailEnd type="none" w="med" len="med"/>
+                    </a:lnR>
+                    <a:lnT w="9525" cap="flat" cmpd="sng" algn="ctr">
+                      <a:solidFill>
+                        <a:srgbClr val="3A3F48"/>
+                      </a:solidFill>
+                      <a:prstDash val="solid"/>
+                      <a:round/>
+                      <a:headEnd type="none" w="med" len="med"/>
+                      <a:tailEnd type="none" w="med" len="med"/>
+                    </a:lnT>
+                    <a:lnB w="9525" cap="flat" cmpd="sng" algn="ctr">
+                      <a:solidFill>
+                        <a:srgbClr val="3A3F48"/>
+                      </a:solidFill>
+                      <a:prstDash val="solid"/>
+                      <a:round/>
+                      <a:headEnd type="none" w="med" len="med"/>
+                      <a:tailEnd type="none" w="med" len="med"/>
+                    </a:lnB>
+                    <a:solidFill>
+                      <a:srgbClr val="23272F"/>
+                    </a:solidFill>
+                  </a:tcPr>
+                </a:tc>
+                <a:tc>
+                  <a:txBody>
+                    <a:bodyPr/>
+                    <a:lstStyle/>
+                    <a:p>
+                      <a:pPr algn="ctr" indent="0" marL="0">
+                        <a:buNone/>
+                      </a:pPr>
+                      <a:r>
+                        <a:rPr lang="en-US" sz="1400" b="1" dirty="0">
+                          <a:solidFill>
+                            <a:schemeClr val="accent1"/>
+                          </a:solidFill>
+                          <a:latin typeface="Malgun Gothic" pitchFamily="34" charset="0"/>
+                          <a:ea typeface="Malgun Gothic" pitchFamily="34" charset="-122"/>
+                          <a:cs typeface="Malgun Gothic" pitchFamily="34" charset="-120"/>
+                        </a:rPr>
+                        <a:t>93.3%</a:t>
+                      </a:r>
+                      <a:endParaRPr lang="en-US" sz="1400" dirty="0">
+                        <a:latin typeface="Malgun Gothic" charset="0"/>
+                        <a:ea typeface="Malgun Gothic" charset="0"/>
+                        <a:cs typeface="Malgun Gothic" charset="0"/>
+                      </a:endParaRPr>
+                    </a:p>
+                  </a:txBody>
+                  <a:tcPr marL="91440" marR="91440" marT="45720" marB="45720" anchor="ctr">
+                    <a:lnL w="9525" cap="flat" cmpd="sng" algn="ctr">
+                      <a:solidFill>
+                        <a:srgbClr val="3A3F48"/>
+                      </a:solidFill>
+                      <a:prstDash val="solid"/>
+                      <a:round/>
+                      <a:headEnd type="none" w="med" len="med"/>
+                      <a:tailEnd type="none" w="med" len="med"/>
+                    </a:lnL>
+                    <a:lnR w="9525" cap="flat" cmpd="sng" algn="ctr">
+                      <a:solidFill>
+                        <a:srgbClr val="3A3F48"/>
+                      </a:solidFill>
+                      <a:prstDash val="solid"/>
+                      <a:round/>
+                      <a:headEnd type="none" w="med" len="med"/>
+                      <a:tailEnd type="none" w="med" len="med"/>
+                    </a:lnR>
+                    <a:lnT w="9525" cap="flat" cmpd="sng" algn="ctr">
+                      <a:solidFill>
+                        <a:srgbClr val="3A3F48"/>
+                      </a:solidFill>
+                      <a:prstDash val="solid"/>
+                      <a:round/>
+                      <a:headEnd type="none" w="med" len="med"/>
+                      <a:tailEnd type="none" w="med" len="med"/>
+                    </a:lnT>
+                    <a:lnB w="9525" cap="flat" cmpd="sng" algn="ctr">
+                      <a:solidFill>
+                        <a:srgbClr val="3A3F48"/>
+                      </a:solidFill>
+                      <a:prstDash val="solid"/>
+                      <a:round/>
+                      <a:headEnd type="none" w="med" len="med"/>
+                      <a:tailEnd type="none" w="med" len="med"/>
+                    </a:lnB>
+                    <a:solidFill>
+                      <a:srgbClr val="23272F"/>
+                    </a:solidFill>
+                  </a:tcPr>
+                </a:tc>
+                <a:tc>
+                  <a:txBody>
+                    <a:bodyPr/>
+                    <a:lstStyle/>
+                    <a:p>
+                      <a:pPr algn="l" indent="0" marL="0">
+                        <a:buNone/>
+                      </a:pPr>
+                      <a:r>
+                        <a:rPr lang="en-US" sz="1400" dirty="0">
+                          <a:solidFill>
+                            <a:schemeClr val="tx2"/>
+                          </a:solidFill>
+                          <a:latin typeface="Malgun Gothic" pitchFamily="34" charset="0"/>
+                          <a:ea typeface="Malgun Gothic" pitchFamily="34" charset="-122"/>
+                          <a:cs typeface="Malgun Gothic" pitchFamily="34" charset="-120"/>
+                        </a:rPr>
+                        <a:t>–</a:t>
+                      </a:r>
+                      <a:endParaRPr lang="en-US" sz="1400" dirty="0">
+                        <a:latin typeface="Malgun Gothic" charset="0"/>
+                        <a:ea typeface="Malgun Gothic" charset="0"/>
+                        <a:cs typeface="Malgun Gothic" charset="0"/>
+                      </a:endParaRPr>
+                    </a:p>
+                  </a:txBody>
+                  <a:tcPr marL="91440" marR="91440" marT="45720" marB="45720" anchor="ctr">
+                    <a:lnL w="9525" cap="flat" cmpd="sng" algn="ctr">
+                      <a:solidFill>
+                        <a:srgbClr val="3A3F48"/>
+                      </a:solidFill>
+                      <a:prstDash val="solid"/>
+                      <a:round/>
+                      <a:headEnd type="none" w="med" len="med"/>
+                      <a:tailEnd type="none" w="med" len="med"/>
+                    </a:lnL>
+                    <a:lnR w="9525" cap="flat" cmpd="sng" algn="ctr">
+                      <a:solidFill>
+                        <a:srgbClr val="3A3F48"/>
+                      </a:solidFill>
+                      <a:prstDash val="solid"/>
+                      <a:round/>
+                      <a:headEnd type="none" w="med" len="med"/>
+                      <a:tailEnd type="none" w="med" len="med"/>
+                    </a:lnR>
+                    <a:lnT w="9525" cap="flat" cmpd="sng" algn="ctr">
+                      <a:solidFill>
+                        <a:srgbClr val="3A3F48"/>
+                      </a:solidFill>
+                      <a:prstDash val="solid"/>
+                      <a:round/>
+                      <a:headEnd type="none" w="med" len="med"/>
+                      <a:tailEnd type="none" w="med" len="med"/>
+                    </a:lnT>
+                    <a:lnB w="9525" cap="flat" cmpd="sng" algn="ctr">
+                      <a:solidFill>
+                        <a:srgbClr val="3A3F48"/>
+                      </a:solidFill>
+                      <a:prstDash val="solid"/>
+                      <a:round/>
+                      <a:headEnd type="none" w="med" len="med"/>
+                      <a:tailEnd type="none" w="med" len="med"/>
+                    </a:lnB>
+                    <a:solidFill>
+                      <a:srgbClr val="23272F"/>
+                    </a:solidFill>
+                  </a:tcPr>
+                </a:tc>
+              </a:tr>
+              <a:tr h="566928">
+                <a:tc>
+                  <a:txBody>
+                    <a:bodyPr/>
+                    <a:lstStyle/>
+                    <a:p>
+                      <a:pPr algn="ctr" indent="0" marL="0">
+                        <a:buNone/>
+                      </a:pPr>
+                      <a:r>
+                        <a:rPr lang="en-US" sz="1400" dirty="0">
+                          <a:solidFill>
+                            <a:schemeClr val="tx1"/>
+                          </a:solidFill>
+                          <a:latin typeface="Malgun Gothic" pitchFamily="34" charset="0"/>
+                          <a:ea typeface="Malgun Gothic" pitchFamily="34" charset="-122"/>
+                          <a:cs typeface="Malgun Gothic" pitchFamily="34" charset="-120"/>
+                        </a:rPr>
+                        <a:t>2</a:t>
+                      </a:r>
+                      <a:endParaRPr lang="en-US" sz="1400" dirty="0">
+                        <a:latin typeface="Malgun Gothic" charset="0"/>
+                        <a:ea typeface="Malgun Gothic" charset="0"/>
+                        <a:cs typeface="Malgun Gothic" charset="0"/>
+                      </a:endParaRPr>
+                    </a:p>
+                  </a:txBody>
+                  <a:tcPr marL="91440" marR="91440" marT="45720" marB="45720" anchor="ctr">
+                    <a:lnL w="9525" cap="flat" cmpd="sng" algn="ctr">
+                      <a:solidFill>
+                        <a:srgbClr val="3A3F48"/>
+                      </a:solidFill>
+                      <a:prstDash val="solid"/>
+                      <a:round/>
+                      <a:headEnd type="none" w="med" len="med"/>
+                      <a:tailEnd type="none" w="med" len="med"/>
+                    </a:lnL>
+                    <a:lnR w="9525" cap="flat" cmpd="sng" algn="ctr">
+                      <a:solidFill>
+                        <a:srgbClr val="3A3F48"/>
+                      </a:solidFill>
+                      <a:prstDash val="solid"/>
+                      <a:round/>
+                      <a:headEnd type="none" w="med" len="med"/>
+                      <a:tailEnd type="none" w="med" len="med"/>
+                    </a:lnR>
+                    <a:lnT w="9525" cap="flat" cmpd="sng" algn="ctr">
+                      <a:solidFill>
+                        <a:srgbClr val="3A3F48"/>
+                      </a:solidFill>
+                      <a:prstDash val="solid"/>
+                      <a:round/>
+                      <a:headEnd type="none" w="med" len="med"/>
+                      <a:tailEnd type="none" w="med" len="med"/>
+                    </a:lnT>
+                    <a:lnB w="9525" cap="flat" cmpd="sng" algn="ctr">
+                      <a:solidFill>
+                        <a:srgbClr val="3A3F48"/>
+                      </a:solidFill>
+                      <a:prstDash val="solid"/>
+                      <a:round/>
+                      <a:headEnd type="none" w="med" len="med"/>
+                      <a:tailEnd type="none" w="med" len="med"/>
+                    </a:lnB>
+                    <a:solidFill>
+                      <a:srgbClr val="23272F"/>
+                    </a:solidFill>
+                  </a:tcPr>
+                </a:tc>
+                <a:tc>
+                  <a:txBody>
+                    <a:bodyPr/>
+                    <a:lstStyle/>
+                    <a:p>
+                      <a:pPr algn="l" indent="0" marL="0">
+                        <a:buNone/>
+                      </a:pPr>
+                      <a:r>
+                        <a:rPr lang="en-US" sz="1400" dirty="0">
+                          <a:solidFill>
+                            <a:schemeClr val="tx1"/>
+                          </a:solidFill>
+                          <a:latin typeface="Malgun Gothic" pitchFamily="34" charset="0"/>
+                          <a:ea typeface="Malgun Gothic" pitchFamily="34" charset="-122"/>
+                          <a:cs typeface="Malgun Gothic" pitchFamily="34" charset="-120"/>
+                        </a:rPr>
+                        <a:t>복사본 22장 제거 · 131장</a:t>
+                      </a:r>
+                      <a:endParaRPr lang="en-US" sz="1400" dirty="0">
+                        <a:latin typeface="Malgun Gothic" charset="0"/>
+                        <a:ea typeface="Malgun Gothic" charset="0"/>
+                        <a:cs typeface="Malgun Gothic" charset="0"/>
+                      </a:endParaRPr>
+                    </a:p>
+                  </a:txBody>
+                  <a:tcPr marL="91440" marR="91440" marT="45720" marB="45720" anchor="ctr">
+                    <a:lnL w="9525" cap="flat" cmpd="sng" algn="ctr">
+                      <a:solidFill>
+                        <a:srgbClr val="3A3F48"/>
+                      </a:solidFill>
+                      <a:prstDash val="solid"/>
+                      <a:round/>
+                      <a:headEnd type="none" w="med" len="med"/>
+                      <a:tailEnd type="none" w="med" len="med"/>
+                    </a:lnL>
+                    <a:lnR w="9525" cap="flat" cmpd="sng" algn="ctr">
+                      <a:solidFill>
+                        <a:srgbClr val="3A3F48"/>
+                      </a:solidFill>
+                      <a:prstDash val="solid"/>
+                      <a:round/>
+                      <a:headEnd type="none" w="med" len="med"/>
+                      <a:tailEnd type="none" w="med" len="med"/>
+                    </a:lnR>
+                    <a:lnT w="9525" cap="flat" cmpd="sng" algn="ctr">
+                      <a:solidFill>
+                        <a:srgbClr val="3A3F48"/>
+                      </a:solidFill>
+                      <a:prstDash val="solid"/>
+                      <a:round/>
+                      <a:headEnd type="none" w="med" len="med"/>
+                      <a:tailEnd type="none" w="med" len="med"/>
+                    </a:lnT>
+                    <a:lnB w="9525" cap="flat" cmpd="sng" algn="ctr">
+                      <a:solidFill>
+                        <a:srgbClr val="3A3F48"/>
+                      </a:solidFill>
+                      <a:prstDash val="solid"/>
+                      <a:round/>
+                      <a:headEnd type="none" w="med" len="med"/>
+                      <a:tailEnd type="none" w="med" len="med"/>
+                    </a:lnB>
+                    <a:solidFill>
+                      <a:srgbClr val="23272F"/>
+                    </a:solidFill>
+                  </a:tcPr>
+                </a:tc>
+                <a:tc>
+                  <a:txBody>
+                    <a:bodyPr/>
+                    <a:lstStyle/>
+                    <a:p>
+                      <a:pPr algn="ctr" indent="0" marL="0">
+                        <a:buNone/>
+                      </a:pPr>
+                      <a:r>
+                        <a:rPr lang="en-US" sz="1400" b="1" dirty="0">
+                          <a:solidFill>
+                            <a:schemeClr val="accent1"/>
+                          </a:solidFill>
+                          <a:latin typeface="Malgun Gothic" pitchFamily="34" charset="0"/>
+                          <a:ea typeface="Malgun Gothic" pitchFamily="34" charset="-122"/>
+                          <a:cs typeface="Malgun Gothic" pitchFamily="34" charset="-120"/>
+                        </a:rPr>
+                        <a:t>92.9%</a:t>
+                      </a:r>
+                      <a:endParaRPr lang="en-US" sz="1400" dirty="0">
+                        <a:latin typeface="Malgun Gothic" charset="0"/>
+                        <a:ea typeface="Malgun Gothic" charset="0"/>
+                        <a:cs typeface="Malgun Gothic" charset="0"/>
+                      </a:endParaRPr>
+                    </a:p>
+                  </a:txBody>
+                  <a:tcPr marL="91440" marR="91440" marT="45720" marB="45720" anchor="ctr">
+                    <a:lnL w="9525" cap="flat" cmpd="sng" algn="ctr">
+                      <a:solidFill>
+                        <a:srgbClr val="3A3F48"/>
+                      </a:solidFill>
+                      <a:prstDash val="solid"/>
+                      <a:round/>
+                      <a:headEnd type="none" w="med" len="med"/>
+                      <a:tailEnd type="none" w="med" len="med"/>
+                    </a:lnL>
+                    <a:lnR w="9525" cap="flat" cmpd="sng" algn="ctr">
+                      <a:solidFill>
+                        <a:srgbClr val="3A3F48"/>
+                      </a:solidFill>
+                      <a:prstDash val="solid"/>
+                      <a:round/>
+                      <a:headEnd type="none" w="med" len="med"/>
+                      <a:tailEnd type="none" w="med" len="med"/>
+                    </a:lnR>
+                    <a:lnT w="9525" cap="flat" cmpd="sng" algn="ctr">
+                      <a:solidFill>
+                        <a:srgbClr val="3A3F48"/>
+                      </a:solidFill>
+                      <a:prstDash val="solid"/>
+                      <a:round/>
+                      <a:headEnd type="none" w="med" len="med"/>
+                      <a:tailEnd type="none" w="med" len="med"/>
+                    </a:lnT>
+                    <a:lnB w="9525" cap="flat" cmpd="sng" algn="ctr">
+                      <a:solidFill>
+                        <a:srgbClr val="3A3F48"/>
+                      </a:solidFill>
+                      <a:prstDash val="solid"/>
+                      <a:round/>
+                      <a:headEnd type="none" w="med" len="med"/>
+                      <a:tailEnd type="none" w="med" len="med"/>
+                    </a:lnB>
+                    <a:solidFill>
+                      <a:srgbClr val="23272F"/>
+                    </a:solidFill>
+                  </a:tcPr>
+                </a:tc>
+                <a:tc>
+                  <a:txBody>
+                    <a:bodyPr/>
+                    <a:lstStyle/>
+                    <a:p>
+                      <a:pPr algn="l" indent="0" marL="0">
+                        <a:buNone/>
+                      </a:pPr>
+                      <a:r>
+                        <a:rPr lang="en-US" sz="1400" dirty="0">
+                          <a:solidFill>
+                            <a:schemeClr val="tx2"/>
+                          </a:solidFill>
+                          <a:latin typeface="Malgun Gothic" pitchFamily="34" charset="0"/>
+                          <a:ea typeface="Malgun Gothic" pitchFamily="34" charset="-122"/>
+                          <a:cs typeface="Malgun Gothic" pitchFamily="34" charset="-120"/>
+                        </a:rPr>
+                        <a:t>중복 영향 0.4%p</a:t>
+                      </a:r>
+                      <a:endParaRPr lang="en-US" sz="1400" dirty="0">
+                        <a:latin typeface="Malgun Gothic" charset="0"/>
+                        <a:ea typeface="Malgun Gothic" charset="0"/>
+                        <a:cs typeface="Malgun Gothic" charset="0"/>
+                      </a:endParaRPr>
+                    </a:p>
+                  </a:txBody>
+                  <a:tcPr marL="91440" marR="91440" marT="45720" marB="45720" anchor="ctr">
+                    <a:lnL w="9525" cap="flat" cmpd="sng" algn="ctr">
+                      <a:solidFill>
+                        <a:srgbClr val="3A3F48"/>
+                      </a:solidFill>
+                      <a:prstDash val="solid"/>
+                      <a:round/>
+                      <a:headEnd type="none" w="med" len="med"/>
+                      <a:tailEnd type="none" w="med" len="med"/>
+                    </a:lnL>
+                    <a:lnR w="9525" cap="flat" cmpd="sng" algn="ctr">
+                      <a:solidFill>
+                        <a:srgbClr val="3A3F48"/>
+                      </a:solidFill>
+                      <a:prstDash val="solid"/>
+                      <a:round/>
+                      <a:headEnd type="none" w="med" len="med"/>
+                      <a:tailEnd type="none" w="med" len="med"/>
+                    </a:lnR>
+                    <a:lnT w="9525" cap="flat" cmpd="sng" algn="ctr">
+                      <a:solidFill>
+                        <a:srgbClr val="3A3F48"/>
+                      </a:solidFill>
+                      <a:prstDash val="solid"/>
+                      <a:round/>
+                      <a:headEnd type="none" w="med" len="med"/>
+                      <a:tailEnd type="none" w="med" len="med"/>
+                    </a:lnT>
+                    <a:lnB w="9525" cap="flat" cmpd="sng" algn="ctr">
+                      <a:solidFill>
+                        <a:srgbClr val="3A3F48"/>
+                      </a:solidFill>
+                      <a:prstDash val="solid"/>
+                      <a:round/>
+                      <a:headEnd type="none" w="med" len="med"/>
+                      <a:tailEnd type="none" w="med" len="med"/>
+                    </a:lnB>
+                    <a:solidFill>
+                      <a:srgbClr val="23272F"/>
+                    </a:solidFill>
+                  </a:tcPr>
+                </a:tc>
+              </a:tr>
+              <a:tr h="566928">
+                <a:tc>
+                  <a:txBody>
+                    <a:bodyPr/>
+                    <a:lstStyle/>
+                    <a:p>
+                      <a:pPr algn="ctr" indent="0" marL="0">
+                        <a:buNone/>
+                      </a:pPr>
+                      <a:r>
+                        <a:rPr lang="en-US" sz="1400" dirty="0">
+                          <a:solidFill>
+                            <a:schemeClr val="tx1"/>
+                          </a:solidFill>
+                          <a:latin typeface="Malgun Gothic" pitchFamily="34" charset="0"/>
+                          <a:ea typeface="Malgun Gothic" pitchFamily="34" charset="-122"/>
+                          <a:cs typeface="Malgun Gothic" pitchFamily="34" charset="-120"/>
+                        </a:rPr>
+                        <a:t>3</a:t>
+                      </a:r>
+                      <a:endParaRPr lang="en-US" sz="1400" dirty="0">
+                        <a:latin typeface="Malgun Gothic" charset="0"/>
+                        <a:ea typeface="Malgun Gothic" charset="0"/>
+                        <a:cs typeface="Malgun Gothic" charset="0"/>
+                      </a:endParaRPr>
+                    </a:p>
+                  </a:txBody>
+                  <a:tcPr marL="91440" marR="91440" marT="45720" marB="45720" anchor="ctr">
+                    <a:lnL w="9525" cap="flat" cmpd="sng" algn="ctr">
+                      <a:solidFill>
+                        <a:srgbClr val="3A3F48"/>
+                      </a:solidFill>
+                      <a:prstDash val="solid"/>
+                      <a:round/>
+                      <a:headEnd type="none" w="med" len="med"/>
+                      <a:tailEnd type="none" w="med" len="med"/>
+                    </a:lnL>
+                    <a:lnR w="9525" cap="flat" cmpd="sng" algn="ctr">
+                      <a:solidFill>
+                        <a:srgbClr val="3A3F48"/>
+                      </a:solidFill>
+                      <a:prstDash val="solid"/>
+                      <a:round/>
+                      <a:headEnd type="none" w="med" len="med"/>
+                      <a:tailEnd type="none" w="med" len="med"/>
+                    </a:lnR>
+                    <a:lnT w="9525" cap="flat" cmpd="sng" algn="ctr">
+                      <a:solidFill>
+                        <a:srgbClr val="3A3F48"/>
+                      </a:solidFill>
+                      <a:prstDash val="solid"/>
+                      <a:round/>
+                      <a:headEnd type="none" w="med" len="med"/>
+                      <a:tailEnd type="none" w="med" len="med"/>
+                    </a:lnT>
+                    <a:lnB w="9525" cap="flat" cmpd="sng" algn="ctr">
+                      <a:solidFill>
+                        <a:srgbClr val="3A3F48"/>
+                      </a:solidFill>
+                      <a:prstDash val="solid"/>
+                      <a:round/>
+                      <a:headEnd type="none" w="med" len="med"/>
+                      <a:tailEnd type="none" w="med" len="med"/>
+                    </a:lnB>
+                    <a:solidFill>
+                      <a:srgbClr val="23272F"/>
+                    </a:solidFill>
+                  </a:tcPr>
+                </a:tc>
+                <a:tc>
+                  <a:txBody>
+                    <a:bodyPr/>
+                    <a:lstStyle/>
+                    <a:p>
+                      <a:pPr algn="l" indent="0" marL="0">
+                        <a:buNone/>
+                      </a:pPr>
+                      <a:r>
+                        <a:rPr lang="en-US" sz="1400" dirty="0">
+                          <a:solidFill>
+                            <a:schemeClr val="tx1"/>
+                          </a:solidFill>
+                          <a:latin typeface="Malgun Gothic" pitchFamily="34" charset="0"/>
+                          <a:ea typeface="Malgun Gothic" pitchFamily="34" charset="-122"/>
+                          <a:cs typeface="Malgun Gothic" pitchFamily="34" charset="-120"/>
+                        </a:rPr>
+                        <a:t>업로드 내역 확인</a:t>
+                      </a:r>
+                      <a:endParaRPr lang="en-US" sz="1400" dirty="0">
+                        <a:latin typeface="Malgun Gothic" charset="0"/>
+                        <a:ea typeface="Malgun Gothic" charset="0"/>
+                        <a:cs typeface="Malgun Gothic" charset="0"/>
+                      </a:endParaRPr>
+                    </a:p>
+                  </a:txBody>
+                  <a:tcPr marL="91440" marR="91440" marT="45720" marB="45720" anchor="ctr">
+                    <a:lnL w="9525" cap="flat" cmpd="sng" algn="ctr">
+                      <a:solidFill>
+                        <a:srgbClr val="3A3F48"/>
+                      </a:solidFill>
+                      <a:prstDash val="solid"/>
+                      <a:round/>
+                      <a:headEnd type="none" w="med" len="med"/>
+                      <a:tailEnd type="none" w="med" len="med"/>
+                    </a:lnL>
+                    <a:lnR w="9525" cap="flat" cmpd="sng" algn="ctr">
+                      <a:solidFill>
+                        <a:srgbClr val="3A3F48"/>
+                      </a:solidFill>
+                      <a:prstDash val="solid"/>
+                      <a:round/>
+                      <a:headEnd type="none" w="med" len="med"/>
+                      <a:tailEnd type="none" w="med" len="med"/>
+                    </a:lnR>
+                    <a:lnT w="9525" cap="flat" cmpd="sng" algn="ctr">
+                      <a:solidFill>
+                        <a:srgbClr val="3A3F48"/>
+                      </a:solidFill>
+                      <a:prstDash val="solid"/>
+                      <a:round/>
+                      <a:headEnd type="none" w="med" len="med"/>
+                      <a:tailEnd type="none" w="med" len="med"/>
+                    </a:lnT>
+                    <a:lnB w="9525" cap="flat" cmpd="sng" algn="ctr">
+                      <a:solidFill>
+                        <a:srgbClr val="3A3F48"/>
+                      </a:solidFill>
+                      <a:prstDash val="solid"/>
+                      <a:round/>
+                      <a:headEnd type="none" w="med" len="med"/>
+                      <a:tailEnd type="none" w="med" len="med"/>
+                    </a:lnB>
+                    <a:solidFill>
+                      <a:srgbClr val="23272F"/>
+                    </a:solidFill>
+                  </a:tcPr>
+                </a:tc>
+                <a:tc>
+                  <a:txBody>
+                    <a:bodyPr/>
+                    <a:lstStyle/>
+                    <a:p>
+                      <a:pPr algn="ctr" indent="0" marL="0">
+                        <a:buNone/>
+                      </a:pPr>
+                      <a:r>
+                        <a:rPr lang="en-US" sz="1400" b="1" dirty="0">
+                          <a:solidFill>
+                            <a:schemeClr val="accent3"/>
+                          </a:solidFill>
+                          <a:latin typeface="Malgun Gothic" pitchFamily="34" charset="0"/>
+                          <a:ea typeface="Malgun Gothic" pitchFamily="34" charset="-122"/>
+                          <a:cs typeface="Malgun Gothic" pitchFamily="34" charset="-120"/>
+                        </a:rPr>
+                        <a:t>테스트 포함</a:t>
+                      </a:r>
+                      <a:endParaRPr lang="en-US" sz="1400" dirty="0">
+                        <a:latin typeface="Malgun Gothic" charset="0"/>
+                        <a:ea typeface="Malgun Gothic" charset="0"/>
+                        <a:cs typeface="Malgun Gothic" charset="0"/>
+                      </a:endParaRPr>
+                    </a:p>
+                  </a:txBody>
+                  <a:tcPr marL="91440" marR="91440" marT="45720" marB="45720" anchor="ctr">
+                    <a:lnL w="9525" cap="flat" cmpd="sng" algn="ctr">
+                      <a:solidFill>
+                        <a:srgbClr val="3A3F48"/>
+                      </a:solidFill>
+                      <a:prstDash val="solid"/>
+                      <a:round/>
+                      <a:headEnd type="none" w="med" len="med"/>
+                      <a:tailEnd type="none" w="med" len="med"/>
+                    </a:lnL>
+                    <a:lnR w="9525" cap="flat" cmpd="sng" algn="ctr">
+                      <a:solidFill>
+                        <a:srgbClr val="3A3F48"/>
+                      </a:solidFill>
+                      <a:prstDash val="solid"/>
+                      <a:round/>
+                      <a:headEnd type="none" w="med" len="med"/>
+                      <a:tailEnd type="none" w="med" len="med"/>
+                    </a:lnR>
+                    <a:lnT w="9525" cap="flat" cmpd="sng" algn="ctr">
+                      <a:solidFill>
+                        <a:srgbClr val="3A3F48"/>
+                      </a:solidFill>
+                      <a:prstDash val="solid"/>
+                      <a:round/>
+                      <a:headEnd type="none" w="med" len="med"/>
+                      <a:tailEnd type="none" w="med" len="med"/>
+                    </a:lnT>
+                    <a:lnB w="9525" cap="flat" cmpd="sng" algn="ctr">
+                      <a:solidFill>
+                        <a:srgbClr val="3A3F48"/>
+                      </a:solidFill>
+                      <a:prstDash val="solid"/>
+                      <a:round/>
+                      <a:headEnd type="none" w="med" len="med"/>
+                      <a:tailEnd type="none" w="med" len="med"/>
+                    </a:lnB>
+                    <a:solidFill>
+                      <a:srgbClr val="23272F"/>
+                    </a:solidFill>
+                  </a:tcPr>
+                </a:tc>
+                <a:tc>
+                  <a:txBody>
+                    <a:bodyPr/>
+                    <a:lstStyle/>
+                    <a:p>
+                      <a:pPr algn="l" indent="0" marL="0">
+                        <a:buNone/>
+                      </a:pPr>
+                      <a:r>
+                        <a:rPr lang="en-US" sz="1400" dirty="0">
+                          <a:solidFill>
+                            <a:schemeClr val="tx2"/>
+                          </a:solidFill>
+                          <a:latin typeface="Malgun Gothic" pitchFamily="34" charset="0"/>
+                          <a:ea typeface="Malgun Gothic" pitchFamily="34" charset="-122"/>
+                          <a:cs typeface="Malgun Gothic" pitchFamily="34" charset="-120"/>
+                        </a:rPr>
+                        <a:t>1차 = 비교용</a:t>
+                      </a:r>
+                      <a:endParaRPr lang="en-US" sz="1400" dirty="0">
+                        <a:latin typeface="Malgun Gothic" charset="0"/>
+                        <a:ea typeface="Malgun Gothic" charset="0"/>
+                        <a:cs typeface="Malgun Gothic" charset="0"/>
+                      </a:endParaRPr>
+                    </a:p>
+                  </a:txBody>
+                  <a:tcPr marL="91440" marR="91440" marT="45720" marB="45720" anchor="ctr">
+                    <a:lnL w="9525" cap="flat" cmpd="sng" algn="ctr">
+                      <a:solidFill>
+                        <a:srgbClr val="3A3F48"/>
+                      </a:solidFill>
+                      <a:prstDash val="solid"/>
+                      <a:round/>
+                      <a:headEnd type="none" w="med" len="med"/>
+                      <a:tailEnd type="none" w="med" len="med"/>
+                    </a:lnL>
+                    <a:lnR w="9525" cap="flat" cmpd="sng" algn="ctr">
+                      <a:solidFill>
+                        <a:srgbClr val="3A3F48"/>
+                      </a:solidFill>
+                      <a:prstDash val="solid"/>
+                      <a:round/>
+                      <a:headEnd type="none" w="med" len="med"/>
+                      <a:tailEnd type="none" w="med" len="med"/>
+                    </a:lnR>
+                    <a:lnT w="9525" cap="flat" cmpd="sng" algn="ctr">
+                      <a:solidFill>
+                        <a:srgbClr val="3A3F48"/>
+                      </a:solidFill>
+                      <a:prstDash val="solid"/>
+                      <a:round/>
+                      <a:headEnd type="none" w="med" len="med"/>
+                      <a:tailEnd type="none" w="med" len="med"/>
+                    </a:lnT>
+                    <a:lnB w="9525" cap="flat" cmpd="sng" algn="ctr">
+                      <a:solidFill>
+                        <a:srgbClr val="3A3F48"/>
+                      </a:solidFill>
+                      <a:prstDash val="solid"/>
+                      <a:round/>
+                      <a:headEnd type="none" w="med" len="med"/>
+                      <a:tailEnd type="none" w="med" len="med"/>
+                    </a:lnB>
+                    <a:solidFill>
+                      <a:srgbClr val="23272F"/>
+                    </a:solidFill>
+                  </a:tcPr>
+                </a:tc>
+              </a:tr>
+              <a:tr h="566928">
+                <a:tc>
+                  <a:txBody>
+                    <a:bodyPr/>
+                    <a:lstStyle/>
+                    <a:p>
+                      <a:pPr algn="ctr" indent="0" marL="0">
+                        <a:buNone/>
+                      </a:pPr>
+                      <a:r>
+                        <a:rPr lang="en-US" sz="1400" dirty="0">
+                          <a:solidFill>
+                            <a:schemeClr val="tx1"/>
+                          </a:solidFill>
+                          <a:latin typeface="Malgun Gothic" pitchFamily="34" charset="0"/>
+                          <a:ea typeface="Malgun Gothic" pitchFamily="34" charset="-122"/>
+                          <a:cs typeface="Malgun Gothic" pitchFamily="34" charset="-120"/>
+                        </a:rPr>
+                        <a:t>4</a:t>
+                      </a:r>
+                      <a:endParaRPr lang="en-US" sz="1400" dirty="0">
+                        <a:latin typeface="Malgun Gothic" charset="0"/>
+                        <a:ea typeface="Malgun Gothic" charset="0"/>
+                        <a:cs typeface="Malgun Gothic" charset="0"/>
+                      </a:endParaRPr>
+                    </a:p>
+                  </a:txBody>
+                  <a:tcPr marL="91440" marR="91440" marT="45720" marB="45720" anchor="ctr">
+                    <a:lnL w="9525" cap="flat" cmpd="sng" algn="ctr">
+                      <a:solidFill>
+                        <a:srgbClr val="3A3F48"/>
+                      </a:solidFill>
+                      <a:prstDash val="solid"/>
+                      <a:round/>
+                      <a:headEnd type="none" w="med" len="med"/>
+                      <a:tailEnd type="none" w="med" len="med"/>
+                    </a:lnL>
+                    <a:lnR w="9525" cap="flat" cmpd="sng" algn="ctr">
+                      <a:solidFill>
+                        <a:srgbClr val="3A3F48"/>
+                      </a:solidFill>
+                      <a:prstDash val="solid"/>
+                      <a:round/>
+                      <a:headEnd type="none" w="med" len="med"/>
+                      <a:tailEnd type="none" w="med" len="med"/>
+                    </a:lnR>
+                    <a:lnT w="9525" cap="flat" cmpd="sng" algn="ctr">
+                      <a:solidFill>
+                        <a:srgbClr val="3A3F48"/>
+                      </a:solidFill>
+                      <a:prstDash val="solid"/>
+                      <a:round/>
+                      <a:headEnd type="none" w="med" len="med"/>
+                      <a:tailEnd type="none" w="med" len="med"/>
+                    </a:lnT>
+                    <a:lnB w="9525" cap="flat" cmpd="sng" algn="ctr">
+                      <a:solidFill>
+                        <a:srgbClr val="3A3F48"/>
+                      </a:solidFill>
+                      <a:prstDash val="solid"/>
+                      <a:round/>
+                      <a:headEnd type="none" w="med" len="med"/>
+                      <a:tailEnd type="none" w="med" len="med"/>
+                    </a:lnB>
+                    <a:solidFill>
+                      <a:srgbClr val="23272F"/>
+                    </a:solidFill>
+                  </a:tcPr>
+                </a:tc>
+                <a:tc>
+                  <a:txBody>
+                    <a:bodyPr/>
+                    <a:lstStyle/>
+                    <a:p>
+                      <a:pPr algn="l" indent="0" marL="0">
+                        <a:buNone/>
+                      </a:pPr>
+                      <a:r>
+                        <a:rPr lang="en-US" sz="1400" dirty="0">
+                          <a:solidFill>
+                            <a:schemeClr val="tx1"/>
+                          </a:solidFill>
+                          <a:latin typeface="Malgun Gothic" pitchFamily="34" charset="0"/>
+                          <a:ea typeface="Malgun Gothic" pitchFamily="34" charset="-122"/>
+                          <a:cs typeface="Malgun Gothic" pitchFamily="34" charset="-120"/>
+                        </a:rPr>
+                        <a:t>YOLOX-S · Tiny 비교</a:t>
+                      </a:r>
+                      <a:endParaRPr lang="en-US" sz="1400" dirty="0">
+                        <a:latin typeface="Malgun Gothic" charset="0"/>
+                        <a:ea typeface="Malgun Gothic" charset="0"/>
+                        <a:cs typeface="Malgun Gothic" charset="0"/>
+                      </a:endParaRPr>
+                    </a:p>
+                  </a:txBody>
+                  <a:tcPr marL="91440" marR="91440" marT="45720" marB="45720" anchor="ctr">
+                    <a:lnL w="9525" cap="flat" cmpd="sng" algn="ctr">
+                      <a:solidFill>
+                        <a:srgbClr val="3A3F48"/>
+                      </a:solidFill>
+                      <a:prstDash val="solid"/>
+                      <a:round/>
+                      <a:headEnd type="none" w="med" len="med"/>
+                      <a:tailEnd type="none" w="med" len="med"/>
+                    </a:lnL>
+                    <a:lnR w="9525" cap="flat" cmpd="sng" algn="ctr">
+                      <a:solidFill>
+                        <a:srgbClr val="3A3F48"/>
+                      </a:solidFill>
+                      <a:prstDash val="solid"/>
+                      <a:round/>
+                      <a:headEnd type="none" w="med" len="med"/>
+                      <a:tailEnd type="none" w="med" len="med"/>
+                    </a:lnR>
+                    <a:lnT w="9525" cap="flat" cmpd="sng" algn="ctr">
+                      <a:solidFill>
+                        <a:srgbClr val="3A3F48"/>
+                      </a:solidFill>
+                      <a:prstDash val="solid"/>
+                      <a:round/>
+                      <a:headEnd type="none" w="med" len="med"/>
+                      <a:tailEnd type="none" w="med" len="med"/>
+                    </a:lnT>
+                    <a:lnB w="9525" cap="flat" cmpd="sng" algn="ctr">
+                      <a:solidFill>
+                        <a:srgbClr val="3A3F48"/>
+                      </a:solidFill>
+                      <a:prstDash val="solid"/>
+                      <a:round/>
+                      <a:headEnd type="none" w="med" len="med"/>
+                      <a:tailEnd type="none" w="med" len="med"/>
+                    </a:lnB>
+                    <a:solidFill>
+                      <a:srgbClr val="23272F"/>
+                    </a:solidFill>
+                  </a:tcPr>
+                </a:tc>
+                <a:tc>
+                  <a:txBody>
+                    <a:bodyPr/>
+                    <a:lstStyle/>
+                    <a:p>
+                      <a:pPr algn="ctr" indent="0" marL="0">
+                        <a:buNone/>
+                      </a:pPr>
+                      <a:r>
+                        <a:rPr lang="en-US" sz="1400" b="1" dirty="0">
+                          <a:solidFill>
+                            <a:schemeClr val="accent1"/>
+                          </a:solidFill>
+                          <a:latin typeface="Malgun Gothic" pitchFamily="34" charset="0"/>
+                          <a:ea typeface="Malgun Gothic" pitchFamily="34" charset="-122"/>
+                          <a:cs typeface="Malgun Gothic" pitchFamily="34" charset="-120"/>
+                        </a:rPr>
+                        <a:t>89.2 · 83.2%</a:t>
+                      </a:r>
+                      <a:endParaRPr lang="en-US" sz="1400" dirty="0">
+                        <a:latin typeface="Malgun Gothic" charset="0"/>
+                        <a:ea typeface="Malgun Gothic" charset="0"/>
+                        <a:cs typeface="Malgun Gothic" charset="0"/>
+                      </a:endParaRPr>
+                    </a:p>
+                  </a:txBody>
+                  <a:tcPr marL="91440" marR="91440" marT="45720" marB="45720" anchor="ctr">
+                    <a:lnL w="9525" cap="flat" cmpd="sng" algn="ctr">
+                      <a:solidFill>
+                        <a:srgbClr val="3A3F48"/>
+                      </a:solidFill>
+                      <a:prstDash val="solid"/>
+                      <a:round/>
+                      <a:headEnd type="none" w="med" len="med"/>
+                      <a:tailEnd type="none" w="med" len="med"/>
+                    </a:lnL>
+                    <a:lnR w="9525" cap="flat" cmpd="sng" algn="ctr">
+                      <a:solidFill>
+                        <a:srgbClr val="3A3F48"/>
+                      </a:solidFill>
+                      <a:prstDash val="solid"/>
+                      <a:round/>
+                      <a:headEnd type="none" w="med" len="med"/>
+                      <a:tailEnd type="none" w="med" len="med"/>
+                    </a:lnR>
+                    <a:lnT w="9525" cap="flat" cmpd="sng" algn="ctr">
+                      <a:solidFill>
+                        <a:srgbClr val="3A3F48"/>
+                      </a:solidFill>
+                      <a:prstDash val="solid"/>
+                      <a:round/>
+                      <a:headEnd type="none" w="med" len="med"/>
+                      <a:tailEnd type="none" w="med" len="med"/>
+                    </a:lnT>
+                    <a:lnB w="9525" cap="flat" cmpd="sng" algn="ctr">
+                      <a:solidFill>
+                        <a:srgbClr val="3A3F48"/>
+                      </a:solidFill>
+                      <a:prstDash val="solid"/>
+                      <a:round/>
+                      <a:headEnd type="none" w="med" len="med"/>
+                      <a:tailEnd type="none" w="med" len="med"/>
+                    </a:lnB>
+                    <a:solidFill>
+                      <a:srgbClr val="23272F"/>
+                    </a:solidFill>
+                  </a:tcPr>
+                </a:tc>
+                <a:tc>
+                  <a:txBody>
+                    <a:bodyPr/>
+                    <a:lstStyle/>
+                    <a:p>
+                      <a:pPr algn="l" indent="0" marL="0">
+                        <a:buNone/>
+                      </a:pPr>
+                      <a:r>
+                        <a:rPr lang="en-US" sz="1400" dirty="0">
+                          <a:solidFill>
+                            <a:schemeClr val="tx2"/>
+                          </a:solidFill>
+                          <a:latin typeface="Malgun Gothic" pitchFamily="34" charset="0"/>
+                          <a:ea typeface="Malgun Gothic" pitchFamily="34" charset="-122"/>
+                          <a:cs typeface="Malgun Gothic" pitchFamily="34" charset="-120"/>
+                        </a:rPr>
+                        <a:t>ATSS 최고</a:t>
+                      </a:r>
+                      <a:endParaRPr lang="en-US" sz="1400" dirty="0">
+                        <a:latin typeface="Malgun Gothic" charset="0"/>
+                        <a:ea typeface="Malgun Gothic" charset="0"/>
+                        <a:cs typeface="Malgun Gothic" charset="0"/>
+                      </a:endParaRPr>
+                    </a:p>
+                  </a:txBody>
+                  <a:tcPr marL="91440" marR="91440" marT="45720" marB="45720" anchor="ctr">
+                    <a:lnL w="9525" cap="flat" cmpd="sng" algn="ctr">
+                      <a:solidFill>
+                        <a:srgbClr val="3A3F48"/>
+                      </a:solidFill>
+                      <a:prstDash val="solid"/>
+                      <a:round/>
+                      <a:headEnd type="none" w="med" len="med"/>
+                      <a:tailEnd type="none" w="med" len="med"/>
+                    </a:lnL>
+                    <a:lnR w="9525" cap="flat" cmpd="sng" algn="ctr">
+                      <a:solidFill>
+                        <a:srgbClr val="3A3F48"/>
+                      </a:solidFill>
+                      <a:prstDash val="solid"/>
+                      <a:round/>
+                      <a:headEnd type="none" w="med" len="med"/>
+                      <a:tailEnd type="none" w="med" len="med"/>
+                    </a:lnR>
+                    <a:lnT w="9525" cap="flat" cmpd="sng" algn="ctr">
+                      <a:solidFill>
+                        <a:srgbClr val="3A3F48"/>
+                      </a:solidFill>
+                      <a:prstDash val="solid"/>
+                      <a:round/>
+                      <a:headEnd type="none" w="med" len="med"/>
+                      <a:tailEnd type="none" w="med" len="med"/>
+                    </a:lnT>
+                    <a:lnB w="9525" cap="flat" cmpd="sng" algn="ctr">
+                      <a:solidFill>
+                        <a:srgbClr val="3A3F48"/>
+                      </a:solidFill>
+                      <a:prstDash val="solid"/>
+                      <a:round/>
+                      <a:headEnd type="none" w="med" len="med"/>
+                      <a:tailEnd type="none" w="med" len="med"/>
+                    </a:lnB>
+                    <a:solidFill>
+                      <a:srgbClr val="23272F"/>
+                    </a:solidFill>
+                  </a:tcPr>
+                </a:tc>
+              </a:tr>
+              <a:tr h="566928">
+                <a:tc>
+                  <a:txBody>
+                    <a:bodyPr/>
+                    <a:lstStyle/>
+                    <a:p>
+                      <a:pPr algn="ctr" indent="0" marL="0">
+                        <a:buNone/>
+                      </a:pPr>
+                      <a:r>
+                        <a:rPr lang="en-US" sz="1400" dirty="0">
+                          <a:solidFill>
+                            <a:schemeClr val="tx1"/>
+                          </a:solidFill>
+                          <a:latin typeface="Malgun Gothic" pitchFamily="34" charset="0"/>
+                          <a:ea typeface="Malgun Gothic" pitchFamily="34" charset="-122"/>
+                          <a:cs typeface="Malgun Gothic" pitchFamily="34" charset="-120"/>
+                        </a:rPr>
+                        <a:t>5</a:t>
+                      </a:r>
+                      <a:endParaRPr lang="en-US" sz="1400" dirty="0">
+                        <a:latin typeface="Malgun Gothic" charset="0"/>
+                        <a:ea typeface="Malgun Gothic" charset="0"/>
+                        <a:cs typeface="Malgun Gothic" charset="0"/>
+                      </a:endParaRPr>
+                    </a:p>
+                  </a:txBody>
+                  <a:tcPr marL="91440" marR="91440" marT="45720" marB="45720" anchor="ctr">
+                    <a:lnL w="9525" cap="flat" cmpd="sng" algn="ctr">
+                      <a:solidFill>
+                        <a:srgbClr val="3A3F48"/>
+                      </a:solidFill>
+                      <a:prstDash val="solid"/>
+                      <a:round/>
+                      <a:headEnd type="none" w="med" len="med"/>
+                      <a:tailEnd type="none" w="med" len="med"/>
+                    </a:lnL>
+                    <a:lnR w="9525" cap="flat" cmpd="sng" algn="ctr">
+                      <a:solidFill>
+                        <a:srgbClr val="3A3F48"/>
+                      </a:solidFill>
+                      <a:prstDash val="solid"/>
+                      <a:round/>
+                      <a:headEnd type="none" w="med" len="med"/>
+                      <a:tailEnd type="none" w="med" len="med"/>
+                    </a:lnR>
+                    <a:lnT w="9525" cap="flat" cmpd="sng" algn="ctr">
+                      <a:solidFill>
+                        <a:srgbClr val="3A3F48"/>
+                      </a:solidFill>
+                      <a:prstDash val="solid"/>
+                      <a:round/>
+                      <a:headEnd type="none" w="med" len="med"/>
+                      <a:tailEnd type="none" w="med" len="med"/>
+                    </a:lnT>
+                    <a:lnB w="9525" cap="flat" cmpd="sng" algn="ctr">
+                      <a:solidFill>
+                        <a:srgbClr val="3A3F48"/>
+                      </a:solidFill>
+                      <a:prstDash val="solid"/>
+                      <a:round/>
+                      <a:headEnd type="none" w="med" len="med"/>
+                      <a:tailEnd type="none" w="med" len="med"/>
+                    </a:lnB>
+                    <a:solidFill>
+                      <a:srgbClr val="23272F"/>
+                    </a:solidFill>
+                  </a:tcPr>
+                </a:tc>
+                <a:tc>
+                  <a:txBody>
+                    <a:bodyPr/>
+                    <a:lstStyle/>
+                    <a:p>
+                      <a:pPr algn="l" indent="0" marL="0">
+                        <a:buNone/>
+                      </a:pPr>
+                      <a:r>
+                        <a:rPr lang="en-US" sz="1400" dirty="0">
+                          <a:solidFill>
+                            <a:schemeClr val="tx1"/>
+                          </a:solidFill>
+                          <a:latin typeface="Malgun Gothic" pitchFamily="34" charset="0"/>
+                          <a:ea typeface="Malgun Gothic" pitchFamily="34" charset="-122"/>
+                          <a:cs typeface="Malgun Gothic" pitchFamily="34" charset="-120"/>
+                        </a:rPr>
+                        <a:t>INT8 양자화</a:t>
+                      </a:r>
+                      <a:endParaRPr lang="en-US" sz="1400" dirty="0">
+                        <a:latin typeface="Malgun Gothic" charset="0"/>
+                        <a:ea typeface="Malgun Gothic" charset="0"/>
+                        <a:cs typeface="Malgun Gothic" charset="0"/>
+                      </a:endParaRPr>
+                    </a:p>
+                  </a:txBody>
+                  <a:tcPr marL="91440" marR="91440" marT="45720" marB="45720" anchor="ctr">
+                    <a:lnL w="9525" cap="flat" cmpd="sng" algn="ctr">
+                      <a:solidFill>
+                        <a:srgbClr val="3A3F48"/>
+                      </a:solidFill>
+                      <a:prstDash val="solid"/>
+                      <a:round/>
+                      <a:headEnd type="none" w="med" len="med"/>
+                      <a:tailEnd type="none" w="med" len="med"/>
+                    </a:lnL>
+                    <a:lnR w="9525" cap="flat" cmpd="sng" algn="ctr">
+                      <a:solidFill>
+                        <a:srgbClr val="3A3F48"/>
+                      </a:solidFill>
+                      <a:prstDash val="solid"/>
+                      <a:round/>
+                      <a:headEnd type="none" w="med" len="med"/>
+                      <a:tailEnd type="none" w="med" len="med"/>
+                    </a:lnR>
+                    <a:lnT w="9525" cap="flat" cmpd="sng" algn="ctr">
+                      <a:solidFill>
+                        <a:srgbClr val="3A3F48"/>
+                      </a:solidFill>
+                      <a:prstDash val="solid"/>
+                      <a:round/>
+                      <a:headEnd type="none" w="med" len="med"/>
+                      <a:tailEnd type="none" w="med" len="med"/>
+                    </a:lnT>
+                    <a:lnB w="9525" cap="flat" cmpd="sng" algn="ctr">
+                      <a:solidFill>
+                        <a:srgbClr val="3A3F48"/>
+                      </a:solidFill>
+                      <a:prstDash val="solid"/>
+                      <a:round/>
+                      <a:headEnd type="none" w="med" len="med"/>
+                      <a:tailEnd type="none" w="med" len="med"/>
+                    </a:lnB>
+                    <a:solidFill>
+                      <a:srgbClr val="23272F"/>
+                    </a:solidFill>
+                  </a:tcPr>
+                </a:tc>
+                <a:tc>
+                  <a:txBody>
+                    <a:bodyPr/>
+                    <a:lstStyle/>
+                    <a:p>
+                      <a:pPr algn="ctr" indent="0" marL="0">
+                        <a:buNone/>
+                      </a:pPr>
+                      <a:r>
+                        <a:rPr lang="en-US" sz="1400" b="1" dirty="0">
+                          <a:solidFill>
+                            <a:schemeClr val="accent3"/>
+                          </a:solidFill>
+                          <a:latin typeface="Malgun Gothic" pitchFamily="34" charset="0"/>
+                          <a:ea typeface="Malgun Gothic" pitchFamily="34" charset="-122"/>
+                          <a:cs typeface="Malgun Gothic" pitchFamily="34" charset="-120"/>
+                        </a:rPr>
+                        <a:t>2–4배 빠름</a:t>
+                      </a:r>
+                      <a:endParaRPr lang="en-US" sz="1400" dirty="0">
+                        <a:latin typeface="Malgun Gothic" charset="0"/>
+                        <a:ea typeface="Malgun Gothic" charset="0"/>
+                        <a:cs typeface="Malgun Gothic" charset="0"/>
+                      </a:endParaRPr>
+                    </a:p>
+                  </a:txBody>
+                  <a:tcPr marL="91440" marR="91440" marT="45720" marB="45720" anchor="ctr">
+                    <a:lnL w="9525" cap="flat" cmpd="sng" algn="ctr">
+                      <a:solidFill>
+                        <a:srgbClr val="3A3F48"/>
+                      </a:solidFill>
+                      <a:prstDash val="solid"/>
+                      <a:round/>
+                      <a:headEnd type="none" w="med" len="med"/>
+                      <a:tailEnd type="none" w="med" len="med"/>
+                    </a:lnL>
+                    <a:lnR w="9525" cap="flat" cmpd="sng" algn="ctr">
+                      <a:solidFill>
+                        <a:srgbClr val="3A3F48"/>
+                      </a:solidFill>
+                      <a:prstDash val="solid"/>
+                      <a:round/>
+                      <a:headEnd type="none" w="med" len="med"/>
+                      <a:tailEnd type="none" w="med" len="med"/>
+                    </a:lnR>
+                    <a:lnT w="9525" cap="flat" cmpd="sng" algn="ctr">
+                      <a:solidFill>
+                        <a:srgbClr val="3A3F48"/>
+                      </a:solidFill>
+                      <a:prstDash val="solid"/>
+                      <a:round/>
+                      <a:headEnd type="none" w="med" len="med"/>
+                      <a:tailEnd type="none" w="med" len="med"/>
+                    </a:lnT>
+                    <a:lnB w="9525" cap="flat" cmpd="sng" algn="ctr">
+                      <a:solidFill>
+                        <a:srgbClr val="3A3F48"/>
+                      </a:solidFill>
+                      <a:prstDash val="solid"/>
+                      <a:round/>
+                      <a:headEnd type="none" w="med" len="med"/>
+                      <a:tailEnd type="none" w="med" len="med"/>
+                    </a:lnB>
+                    <a:solidFill>
+                      <a:srgbClr val="23272F"/>
+                    </a:solidFill>
+                  </a:tcPr>
+                </a:tc>
+                <a:tc>
+                  <a:txBody>
+                    <a:bodyPr/>
+                    <a:lstStyle/>
+                    <a:p>
+                      <a:pPr algn="l" indent="0" marL="0">
+                        <a:buNone/>
+                      </a:pPr>
+                      <a:r>
+                        <a:rPr lang="en-US" sz="1400" dirty="0">
+                          <a:solidFill>
+                            <a:schemeClr val="tx2"/>
+                          </a:solidFill>
+                          <a:latin typeface="Malgun Gothic" pitchFamily="34" charset="0"/>
+                          <a:ea typeface="Malgun Gothic" pitchFamily="34" charset="-122"/>
+                          <a:cs typeface="Malgun Gothic" pitchFamily="34" charset="-120"/>
+                        </a:rPr>
+                        <a:t>놓침 소폭 증가</a:t>
+                      </a:r>
+                      <a:endParaRPr lang="en-US" sz="1400" dirty="0">
+                        <a:latin typeface="Malgun Gothic" charset="0"/>
+                        <a:ea typeface="Malgun Gothic" charset="0"/>
+                        <a:cs typeface="Malgun Gothic" charset="0"/>
+                      </a:endParaRPr>
+                    </a:p>
+                  </a:txBody>
+                  <a:tcPr marL="91440" marR="91440" marT="45720" marB="45720" anchor="ctr">
+                    <a:lnL w="9525" cap="flat" cmpd="sng" algn="ctr">
+                      <a:solidFill>
+                        <a:srgbClr val="3A3F48"/>
+                      </a:solidFill>
+                      <a:prstDash val="solid"/>
+                      <a:round/>
+                      <a:headEnd type="none" w="med" len="med"/>
+                      <a:tailEnd type="none" w="med" len="med"/>
+                    </a:lnL>
+                    <a:lnR w="9525" cap="flat" cmpd="sng" algn="ctr">
+                      <a:solidFill>
+                        <a:srgbClr val="3A3F48"/>
+                      </a:solidFill>
+                      <a:prstDash val="solid"/>
+                      <a:round/>
+                      <a:headEnd type="none" w="med" len="med"/>
+                      <a:tailEnd type="none" w="med" len="med"/>
+                    </a:lnR>
+                    <a:lnT w="9525" cap="flat" cmpd="sng" algn="ctr">
+                      <a:solidFill>
+                        <a:srgbClr val="3A3F48"/>
+                      </a:solidFill>
+                      <a:prstDash val="solid"/>
+                      <a:round/>
+                      <a:headEnd type="none" w="med" len="med"/>
+                      <a:tailEnd type="none" w="med" len="med"/>
+                    </a:lnT>
+                    <a:lnB w="9525" cap="flat" cmpd="sng" algn="ctr">
+                      <a:solidFill>
+                        <a:srgbClr val="3A3F48"/>
+                      </a:solidFill>
+                      <a:prstDash val="solid"/>
+                      <a:round/>
+                      <a:headEnd type="none" w="med" len="med"/>
+                      <a:tailEnd type="none" w="med" len="med"/>
+                    </a:lnB>
+                    <a:solidFill>
+                      <a:srgbClr val="23272F"/>
+                    </a:solidFill>
+                  </a:tcPr>
+                </a:tc>
+              </a:tr>
+              <a:tr h="566928">
+                <a:tc>
+                  <a:txBody>
+                    <a:bodyPr/>
+                    <a:lstStyle/>
+                    <a:p>
+                      <a:pPr algn="ctr" indent="0" marL="0">
+                        <a:buNone/>
+                      </a:pPr>
+                      <a:r>
+                        <a:rPr lang="en-US" sz="1400" dirty="0">
+                          <a:solidFill>
+                            <a:schemeClr val="tx1"/>
+                          </a:solidFill>
+                          <a:latin typeface="Malgun Gothic" pitchFamily="34" charset="0"/>
+                          <a:ea typeface="Malgun Gothic" pitchFamily="34" charset="-122"/>
+                          <a:cs typeface="Malgun Gothic" pitchFamily="34" charset="-120"/>
+                        </a:rPr>
+                        <a:t>6</a:t>
+                      </a:r>
+                      <a:endParaRPr lang="en-US" sz="1400" dirty="0">
+                        <a:latin typeface="Malgun Gothic" charset="0"/>
+                        <a:ea typeface="Malgun Gothic" charset="0"/>
+                        <a:cs typeface="Malgun Gothic" charset="0"/>
+                      </a:endParaRPr>
+                    </a:p>
+                  </a:txBody>
+                  <a:tcPr marL="91440" marR="91440" marT="45720" marB="45720" anchor="ctr">
+                    <a:lnL w="9525" cap="flat" cmpd="sng" algn="ctr">
+                      <a:solidFill>
+                        <a:srgbClr val="3A3F48"/>
+                      </a:solidFill>
+                      <a:prstDash val="solid"/>
+                      <a:round/>
+                      <a:headEnd type="none" w="med" len="med"/>
+                      <a:tailEnd type="none" w="med" len="med"/>
+                    </a:lnL>
+                    <a:lnR w="9525" cap="flat" cmpd="sng" algn="ctr">
+                      <a:solidFill>
+                        <a:srgbClr val="3A3F48"/>
+                      </a:solidFill>
+                      <a:prstDash val="solid"/>
+                      <a:round/>
+                      <a:headEnd type="none" w="med" len="med"/>
+                      <a:tailEnd type="none" w="med" len="med"/>
+                    </a:lnR>
+                    <a:lnT w="9525" cap="flat" cmpd="sng" algn="ctr">
+                      <a:solidFill>
+                        <a:srgbClr val="3A3F48"/>
+                      </a:solidFill>
+                      <a:prstDash val="solid"/>
+                      <a:round/>
+                      <a:headEnd type="none" w="med" len="med"/>
+                      <a:tailEnd type="none" w="med" len="med"/>
+                    </a:lnT>
+                    <a:lnB w="9525" cap="flat" cmpd="sng" algn="ctr">
+                      <a:solidFill>
+                        <a:srgbClr val="3A3F48"/>
+                      </a:solidFill>
+                      <a:prstDash val="solid"/>
+                      <a:round/>
+                      <a:headEnd type="none" w="med" len="med"/>
+                      <a:tailEnd type="none" w="med" len="med"/>
+                    </a:lnB>
+                    <a:solidFill>
+                      <a:srgbClr val="23272F"/>
+                    </a:solidFill>
+                  </a:tcPr>
+                </a:tc>
+                <a:tc>
+                  <a:txBody>
+                    <a:bodyPr/>
+                    <a:lstStyle/>
+                    <a:p>
+                      <a:pPr algn="l" indent="0" marL="0">
+                        <a:buNone/>
+                      </a:pPr>
+                      <a:r>
+                        <a:rPr lang="en-US" sz="1400" dirty="0">
+                          <a:solidFill>
+                            <a:schemeClr val="tx1"/>
+                          </a:solidFill>
+                          <a:latin typeface="Malgun Gothic" pitchFamily="34" charset="0"/>
+                          <a:ea typeface="Malgun Gothic" pitchFamily="34" charset="-122"/>
+                          <a:cs typeface="Malgun Gothic" pitchFamily="34" charset="-120"/>
+                        </a:rPr>
+                        <a:t>2차 세트 45장</a:t>
+                      </a:r>
+                      <a:endParaRPr lang="en-US" sz="1400" dirty="0">
+                        <a:latin typeface="Malgun Gothic" charset="0"/>
+                        <a:ea typeface="Malgun Gothic" charset="0"/>
+                        <a:cs typeface="Malgun Gothic" charset="0"/>
+                      </a:endParaRPr>
+                    </a:p>
+                  </a:txBody>
+                  <a:tcPr marL="91440" marR="91440" marT="45720" marB="45720" anchor="ctr">
+                    <a:lnL w="9525" cap="flat" cmpd="sng" algn="ctr">
+                      <a:solidFill>
+                        <a:srgbClr val="3A3F48"/>
+                      </a:solidFill>
+                      <a:prstDash val="solid"/>
+                      <a:round/>
+                      <a:headEnd type="none" w="med" len="med"/>
+                      <a:tailEnd type="none" w="med" len="med"/>
+                    </a:lnL>
+                    <a:lnR w="9525" cap="flat" cmpd="sng" algn="ctr">
+                      <a:solidFill>
+                        <a:srgbClr val="3A3F48"/>
+                      </a:solidFill>
+                      <a:prstDash val="solid"/>
+                      <a:round/>
+                      <a:headEnd type="none" w="med" len="med"/>
+                      <a:tailEnd type="none" w="med" len="med"/>
+                    </a:lnR>
+                    <a:lnT w="9525" cap="flat" cmpd="sng" algn="ctr">
+                      <a:solidFill>
+                        <a:srgbClr val="3A3F48"/>
+                      </a:solidFill>
+                      <a:prstDash val="solid"/>
+                      <a:round/>
+                      <a:headEnd type="none" w="med" len="med"/>
+                      <a:tailEnd type="none" w="med" len="med"/>
+                    </a:lnT>
+                    <a:lnB w="9525" cap="flat" cmpd="sng" algn="ctr">
+                      <a:solidFill>
+                        <a:srgbClr val="3A3F48"/>
+                      </a:solidFill>
+                      <a:prstDash val="solid"/>
+                      <a:round/>
+                      <a:headEnd type="none" w="med" len="med"/>
+                      <a:tailEnd type="none" w="med" len="med"/>
+                    </a:lnB>
+                    <a:solidFill>
+                      <a:srgbClr val="23272F"/>
+                    </a:solidFill>
+                  </a:tcPr>
+                </a:tc>
+                <a:tc>
+                  <a:txBody>
+                    <a:bodyPr/>
+                    <a:lstStyle/>
+                    <a:p>
+                      <a:pPr algn="ctr" indent="0" marL="0">
+                        <a:buNone/>
+                      </a:pPr>
+                      <a:r>
+                        <a:rPr lang="en-US" sz="1400" b="1" dirty="0">
+                          <a:solidFill>
+                            <a:schemeClr val="accent2"/>
+                          </a:solidFill>
+                          <a:latin typeface="Malgun Gothic" pitchFamily="34" charset="0"/>
+                          <a:ea typeface="Malgun Gothic" pitchFamily="34" charset="-122"/>
+                          <a:cs typeface="Malgun Gothic" pitchFamily="34" charset="-120"/>
+                        </a:rPr>
+                        <a:t>검출 47%</a:t>
+                      </a:r>
+                      <a:endParaRPr lang="en-US" sz="1400" dirty="0">
+                        <a:latin typeface="Malgun Gothic" charset="0"/>
+                        <a:ea typeface="Malgun Gothic" charset="0"/>
+                        <a:cs typeface="Malgun Gothic" charset="0"/>
+                      </a:endParaRPr>
+                    </a:p>
+                  </a:txBody>
+                  <a:tcPr marL="91440" marR="91440" marT="45720" marB="45720" anchor="ctr">
+                    <a:lnL w="9525" cap="flat" cmpd="sng" algn="ctr">
+                      <a:solidFill>
+                        <a:srgbClr val="3A3F48"/>
+                      </a:solidFill>
+                      <a:prstDash val="solid"/>
+                      <a:round/>
+                      <a:headEnd type="none" w="med" len="med"/>
+                      <a:tailEnd type="none" w="med" len="med"/>
+                    </a:lnL>
+                    <a:lnR w="9525" cap="flat" cmpd="sng" algn="ctr">
+                      <a:solidFill>
+                        <a:srgbClr val="3A3F48"/>
+                      </a:solidFill>
+                      <a:prstDash val="solid"/>
+                      <a:round/>
+                      <a:headEnd type="none" w="med" len="med"/>
+                      <a:tailEnd type="none" w="med" len="med"/>
+                    </a:lnR>
+                    <a:lnT w="9525" cap="flat" cmpd="sng" algn="ctr">
+                      <a:solidFill>
+                        <a:srgbClr val="3A3F48"/>
+                      </a:solidFill>
+                      <a:prstDash val="solid"/>
+                      <a:round/>
+                      <a:headEnd type="none" w="med" len="med"/>
+                      <a:tailEnd type="none" w="med" len="med"/>
+                    </a:lnT>
+                    <a:lnB w="9525" cap="flat" cmpd="sng" algn="ctr">
+                      <a:solidFill>
+                        <a:srgbClr val="3A3F48"/>
+                      </a:solidFill>
+                      <a:prstDash val="solid"/>
+                      <a:round/>
+                      <a:headEnd type="none" w="med" len="med"/>
+                      <a:tailEnd type="none" w="med" len="med"/>
+                    </a:lnB>
+                    <a:solidFill>
+                      <a:srgbClr val="23272F"/>
+                    </a:solidFill>
+                  </a:tcPr>
+                </a:tc>
+                <a:tc>
+                  <a:txBody>
+                    <a:bodyPr/>
+                    <a:lstStyle/>
+                    <a:p>
+                      <a:pPr algn="l" indent="0" marL="0">
+                        <a:buNone/>
+                      </a:pPr>
+                      <a:r>
+                        <a:rPr lang="en-US" sz="1400" dirty="0">
+                          <a:solidFill>
+                            <a:schemeClr val="tx2"/>
+                          </a:solidFill>
+                          <a:latin typeface="Malgun Gothic" pitchFamily="34" charset="0"/>
+                          <a:ea typeface="Malgun Gothic" pitchFamily="34" charset="-122"/>
+                          <a:cs typeface="Malgun Gothic" pitchFamily="34" charset="-120"/>
+                        </a:rPr>
+                        <a:t>환경 변화에 취약</a:t>
+                      </a:r>
+                      <a:endParaRPr lang="en-US" sz="1400" dirty="0">
+                        <a:latin typeface="Malgun Gothic" charset="0"/>
+                        <a:ea typeface="Malgun Gothic" charset="0"/>
+                        <a:cs typeface="Malgun Gothic" charset="0"/>
+                      </a:endParaRPr>
+                    </a:p>
+                  </a:txBody>
+                  <a:tcPr marL="91440" marR="91440" marT="45720" marB="45720" anchor="ctr">
+                    <a:lnL w="9525" cap="flat" cmpd="sng" algn="ctr">
+                      <a:solidFill>
+                        <a:srgbClr val="3A3F48"/>
+                      </a:solidFill>
+                      <a:prstDash val="solid"/>
+                      <a:round/>
+                      <a:headEnd type="none" w="med" len="med"/>
+                      <a:tailEnd type="none" w="med" len="med"/>
+                    </a:lnL>
+                    <a:lnR w="9525" cap="flat" cmpd="sng" algn="ctr">
+                      <a:solidFill>
+                        <a:srgbClr val="3A3F48"/>
+                      </a:solidFill>
+                      <a:prstDash val="solid"/>
+                      <a:round/>
+                      <a:headEnd type="none" w="med" len="med"/>
+                      <a:tailEnd type="none" w="med" len="med"/>
+                    </a:lnR>
+                    <a:lnT w="9525" cap="flat" cmpd="sng" algn="ctr">
+                      <a:solidFill>
+                        <a:srgbClr val="3A3F48"/>
+                      </a:solidFill>
+                      <a:prstDash val="solid"/>
+                      <a:round/>
+                      <a:headEnd type="none" w="med" len="med"/>
+                      <a:tailEnd type="none" w="med" len="med"/>
+                    </a:lnT>
+                    <a:lnB w="9525" cap="flat" cmpd="sng" algn="ctr">
+                      <a:solidFill>
+                        <a:srgbClr val="3A3F48"/>
+                      </a:solidFill>
+                      <a:prstDash val="solid"/>
+                      <a:round/>
+                      <a:headEnd type="none" w="med" len="med"/>
+                      <a:tailEnd type="none" w="med" len="med"/>
+                    </a:lnB>
+                    <a:solidFill>
+                      <a:srgbClr val="23272F"/>
+                    </a:solidFill>
+                  </a:tcPr>
+                </a:tc>
+              </a:tr>
+              <a:tr h="566928">
+                <a:tc>
+                  <a:txBody>
+                    <a:bodyPr/>
+                    <a:lstStyle/>
+                    <a:p>
+                      <a:pPr algn="ctr" indent="0" marL="0">
+                        <a:buNone/>
+                      </a:pPr>
+                      <a:r>
+                        <a:rPr lang="en-US" sz="1400" dirty="0">
+                          <a:solidFill>
+                            <a:schemeClr val="tx1"/>
+                          </a:solidFill>
+                          <a:latin typeface="Malgun Gothic" pitchFamily="34" charset="0"/>
+                          <a:ea typeface="Malgun Gothic" pitchFamily="34" charset="-122"/>
+                          <a:cs typeface="Malgun Gothic" pitchFamily="34" charset="-120"/>
+                        </a:rPr>
+                        <a:t>7</a:t>
+                      </a:r>
+                      <a:endParaRPr lang="en-US" sz="1400" dirty="0">
+                        <a:latin typeface="Malgun Gothic" charset="0"/>
+                        <a:ea typeface="Malgun Gothic" charset="0"/>
+                        <a:cs typeface="Malgun Gothic" charset="0"/>
+                      </a:endParaRPr>
+                    </a:p>
+                  </a:txBody>
+                  <a:tcPr marL="91440" marR="91440" marT="45720" marB="45720" anchor="ctr">
+                    <a:lnL w="9525" cap="flat" cmpd="sng" algn="ctr">
+                      <a:solidFill>
+                        <a:srgbClr val="3A3F48"/>
+                      </a:solidFill>
+                      <a:prstDash val="solid"/>
+                      <a:round/>
+                      <a:headEnd type="none" w="med" len="med"/>
+                      <a:tailEnd type="none" w="med" len="med"/>
+                    </a:lnL>
+                    <a:lnR w="9525" cap="flat" cmpd="sng" algn="ctr">
+                      <a:solidFill>
+                        <a:srgbClr val="3A3F48"/>
+                      </a:solidFill>
+                      <a:prstDash val="solid"/>
+                      <a:round/>
+                      <a:headEnd type="none" w="med" len="med"/>
+                      <a:tailEnd type="none" w="med" len="med"/>
+                    </a:lnR>
+                    <a:lnT w="9525" cap="flat" cmpd="sng" algn="ctr">
+                      <a:solidFill>
+                        <a:srgbClr val="3A3F48"/>
+                      </a:solidFill>
+                      <a:prstDash val="solid"/>
+                      <a:round/>
+                      <a:headEnd type="none" w="med" len="med"/>
+                      <a:tailEnd type="none" w="med" len="med"/>
+                    </a:lnT>
+                    <a:lnB w="9525" cap="flat" cmpd="sng" algn="ctr">
+                      <a:solidFill>
+                        <a:srgbClr val="3A3F48"/>
+                      </a:solidFill>
+                      <a:prstDash val="solid"/>
+                      <a:round/>
+                      <a:headEnd type="none" w="med" len="med"/>
+                      <a:tailEnd type="none" w="med" len="med"/>
+                    </a:lnB>
+                    <a:solidFill>
+                      <a:srgbClr val="23272F"/>
+                    </a:solidFill>
+                  </a:tcPr>
+                </a:tc>
+                <a:tc>
+                  <a:txBody>
+                    <a:bodyPr/>
+                    <a:lstStyle/>
+                    <a:p>
+                      <a:pPr algn="l" indent="0" marL="0">
+                        <a:buNone/>
+                      </a:pPr>
+                      <a:r>
+                        <a:rPr lang="en-US" sz="1400" dirty="0">
+                          <a:solidFill>
+                            <a:schemeClr val="tx1"/>
+                          </a:solidFill>
+                          <a:latin typeface="Malgun Gothic" pitchFamily="34" charset="0"/>
+                          <a:ea typeface="Malgun Gothic" pitchFamily="34" charset="-122"/>
+                          <a:cs typeface="Malgun Gothic" pitchFamily="34" charset="-120"/>
+                        </a:rPr>
+                        <a:t>2차 · 기준값 0.15로 낮춤</a:t>
+                      </a:r>
+                      <a:endParaRPr lang="en-US" sz="1400" dirty="0">
+                        <a:latin typeface="Malgun Gothic" charset="0"/>
+                        <a:ea typeface="Malgun Gothic" charset="0"/>
+                        <a:cs typeface="Malgun Gothic" charset="0"/>
+                      </a:endParaRPr>
+                    </a:p>
+                  </a:txBody>
+                  <a:tcPr marL="91440" marR="91440" marT="45720" marB="45720" anchor="ctr">
+                    <a:lnL w="9525" cap="flat" cmpd="sng" algn="ctr">
+                      <a:solidFill>
+                        <a:srgbClr val="3A3F48"/>
+                      </a:solidFill>
+                      <a:prstDash val="solid"/>
+                      <a:round/>
+                      <a:headEnd type="none" w="med" len="med"/>
+                      <a:tailEnd type="none" w="med" len="med"/>
+                    </a:lnL>
+                    <a:lnR w="9525" cap="flat" cmpd="sng" algn="ctr">
+                      <a:solidFill>
+                        <a:srgbClr val="3A3F48"/>
+                      </a:solidFill>
+                      <a:prstDash val="solid"/>
+                      <a:round/>
+                      <a:headEnd type="none" w="med" len="med"/>
+                      <a:tailEnd type="none" w="med" len="med"/>
+                    </a:lnR>
+                    <a:lnT w="9525" cap="flat" cmpd="sng" algn="ctr">
+                      <a:solidFill>
+                        <a:srgbClr val="3A3F48"/>
+                      </a:solidFill>
+                      <a:prstDash val="solid"/>
+                      <a:round/>
+                      <a:headEnd type="none" w="med" len="med"/>
+                      <a:tailEnd type="none" w="med" len="med"/>
+                    </a:lnT>
+                    <a:lnB w="9525" cap="flat" cmpd="sng" algn="ctr">
+                      <a:solidFill>
+                        <a:srgbClr val="3A3F48"/>
+                      </a:solidFill>
+                      <a:prstDash val="solid"/>
+                      <a:round/>
+                      <a:headEnd type="none" w="med" len="med"/>
+                      <a:tailEnd type="none" w="med" len="med"/>
+                    </a:lnB>
+                    <a:solidFill>
+                      <a:srgbClr val="23272F"/>
+                    </a:solidFill>
+                  </a:tcPr>
+                </a:tc>
+                <a:tc>
+                  <a:txBody>
+                    <a:bodyPr/>
+                    <a:lstStyle/>
+                    <a:p>
+                      <a:pPr algn="ctr" indent="0" marL="0">
+                        <a:buNone/>
+                      </a:pPr>
+                      <a:r>
+                        <a:rPr lang="en-US" sz="1400" b="1" dirty="0">
+                          <a:solidFill>
+                            <a:schemeClr val="accent2"/>
+                          </a:solidFill>
+                          <a:latin typeface="Malgun Gothic" pitchFamily="34" charset="0"/>
+                          <a:ea typeface="Malgun Gothic" pitchFamily="34" charset="-122"/>
+                          <a:cs typeface="Malgun Gothic" pitchFamily="34" charset="-120"/>
+                        </a:rPr>
+                        <a:t>정상 87% 오검출</a:t>
+                      </a:r>
+                      <a:endParaRPr lang="en-US" sz="1400" dirty="0">
+                        <a:latin typeface="Malgun Gothic" charset="0"/>
+                        <a:ea typeface="Malgun Gothic" charset="0"/>
+                        <a:cs typeface="Malgun Gothic" charset="0"/>
+                      </a:endParaRPr>
+                    </a:p>
+                  </a:txBody>
+                  <a:tcPr marL="91440" marR="91440" marT="45720" marB="45720" anchor="ctr">
+                    <a:lnL w="9525" cap="flat" cmpd="sng" algn="ctr">
+                      <a:solidFill>
+                        <a:srgbClr val="3A3F48"/>
+                      </a:solidFill>
+                      <a:prstDash val="solid"/>
+                      <a:round/>
+                      <a:headEnd type="none" w="med" len="med"/>
+                      <a:tailEnd type="none" w="med" len="med"/>
+                    </a:lnL>
+                    <a:lnR w="9525" cap="flat" cmpd="sng" algn="ctr">
+                      <a:solidFill>
+                        <a:srgbClr val="3A3F48"/>
+                      </a:solidFill>
+                      <a:prstDash val="solid"/>
+                      <a:round/>
+                      <a:headEnd type="none" w="med" len="med"/>
+                      <a:tailEnd type="none" w="med" len="med"/>
+                    </a:lnR>
+                    <a:lnT w="9525" cap="flat" cmpd="sng" algn="ctr">
+                      <a:solidFill>
+                        <a:srgbClr val="3A3F48"/>
+                      </a:solidFill>
+                      <a:prstDash val="solid"/>
+                      <a:round/>
+                      <a:headEnd type="none" w="med" len="med"/>
+                      <a:tailEnd type="none" w="med" len="med"/>
+                    </a:lnT>
+                    <a:lnB w="9525" cap="flat" cmpd="sng" algn="ctr">
+                      <a:solidFill>
+                        <a:srgbClr val="3A3F48"/>
+                      </a:solidFill>
+                      <a:prstDash val="solid"/>
+                      <a:round/>
+                      <a:headEnd type="none" w="med" len="med"/>
+                      <a:tailEnd type="none" w="med" len="med"/>
+                    </a:lnB>
+                    <a:solidFill>
+                      <a:srgbClr val="23272F"/>
+                    </a:solidFill>
+                  </a:tcPr>
+                </a:tc>
+                <a:tc>
+                  <a:txBody>
+                    <a:bodyPr/>
+                    <a:lstStyle/>
+                    <a:p>
+                      <a:pPr algn="l" indent="0" marL="0">
+                        <a:buNone/>
+                      </a:pPr>
+                      <a:r>
+                        <a:rPr lang="en-US" sz="1400" dirty="0">
+                          <a:solidFill>
+                            <a:schemeClr val="tx2"/>
+                          </a:solidFill>
+                          <a:latin typeface="Malgun Gothic" pitchFamily="34" charset="0"/>
+                          <a:ea typeface="Malgun Gothic" pitchFamily="34" charset="-122"/>
+                          <a:cs typeface="Malgun Gothic" pitchFamily="34" charset="-120"/>
+                        </a:rPr>
+                        <a:t>재학습 필요</a:t>
+                      </a:r>
+                      <a:endParaRPr lang="en-US" sz="1400" dirty="0">
+                        <a:latin typeface="Malgun Gothic" charset="0"/>
+                        <a:ea typeface="Malgun Gothic" charset="0"/>
+                        <a:cs typeface="Malgun Gothic" charset="0"/>
+                      </a:endParaRPr>
+                    </a:p>
+                  </a:txBody>
+                  <a:tcPr marL="91440" marR="91440" marT="45720" marB="45720" anchor="ctr">
+                    <a:lnL w="9525" cap="flat" cmpd="sng" algn="ctr">
+                      <a:solidFill>
+                        <a:srgbClr val="3A3F48"/>
+                      </a:solidFill>
+                      <a:prstDash val="solid"/>
+                      <a:round/>
+                      <a:headEnd type="none" w="med" len="med"/>
+                      <a:tailEnd type="none" w="med" len="med"/>
+                    </a:lnL>
+                    <a:lnR w="9525" cap="flat" cmpd="sng" algn="ctr">
+                      <a:solidFill>
+                        <a:srgbClr val="3A3F48"/>
+                      </a:solidFill>
+                      <a:prstDash val="solid"/>
+                      <a:round/>
+                      <a:headEnd type="none" w="med" len="med"/>
+                      <a:tailEnd type="none" w="med" len="med"/>
+                    </a:lnR>
+                    <a:lnT w="9525" cap="flat" cmpd="sng" algn="ctr">
+                      <a:solidFill>
+                        <a:srgbClr val="3A3F48"/>
+                      </a:solidFill>
+                      <a:prstDash val="solid"/>
+                      <a:round/>
+                      <a:headEnd type="none" w="med" len="med"/>
+                      <a:tailEnd type="none" w="med" len="med"/>
+                    </a:lnT>
+                    <a:lnB w="9525" cap="flat" cmpd="sng" algn="ctr">
+                      <a:solidFill>
+                        <a:srgbClr val="3A3F48"/>
+                      </a:solidFill>
+                      <a:prstDash val="solid"/>
+                      <a:round/>
+                      <a:headEnd type="none" w="med" len="med"/>
+                      <a:tailEnd type="none" w="med" len="med"/>
+                    </a:lnB>
+                    <a:solidFill>
+                      <a:srgbClr val="23272F"/>
+                    </a:solidFill>
+                  </a:tcPr>
+                </a:tc>
+              </a:tr>
+            </a:tbl>
+          </a:graphicData>
+        </a:graphic>
+      </p:graphicFrame>
+      <p:sp>
+        <p:nvSpPr>
+          <p:cNvPr id="4" name="log-note"/>
+          <p:cNvSpPr txBox="1"/>
+          <p:nvPr/>
+        </p:nvSpPr>
+        <p:spPr>
+          <a:xfrm>
+            <a:off x="548640" y="5897880"/>
+            <a:ext cx="6903720" cy="274320"/>
+          </a:xfrm>
+          <a:prstGeom prst="rect">
+            <a:avLst/>
+          </a:prstGeom>
+          <a:noFill/>
+          <a:ln/>
+        </p:spPr>
+        <p:txBody>
+          <a:bodyPr wrap="square" lIns="0" tIns="0" rIns="0" bIns="0" rtlCol="0" anchor="t"/>
+          <a:lstStyle/>
+          <a:p>
+            <a:pPr indent="0" marL="0">
+              <a:buNone/>
+            </a:pPr>
+            <a:r>
+              <a:rPr lang="en-US" sz="1000" dirty="0">
+                <a:solidFill>
+                  <a:schemeClr val="tx2"/>
+                </a:solidFill>
+              </a:rPr>
+              <a:t>결과: mAP@50 (1–2, 4) · CPU 속도 (5) · 결함 셀 검출률, ATSS (6–7)</a:t>
+            </a:r>
+            <a:endParaRPr lang="en-US" sz="1000" dirty="0"/>
+          </a:p>
+        </p:txBody>
+      </p:sp>
+      <p:sp>
+        <p:nvSpPr>
+          <p:cNvPr id="5" name="lesson-0"/>
+          <p:cNvSpPr/>
+          <p:nvPr/>
+        </p:nvSpPr>
+        <p:spPr>
+          <a:xfrm>
+            <a:off x="7726680" y="1234440"/>
+            <a:ext cx="3913632" cy="1051560"/>
+          </a:xfrm>
+          <a:prstGeom prst="roundRect">
+            <a:avLst>
+              <a:gd name="adj" fmla="val 6957"/>
+            </a:avLst>
+          </a:prstGeom>
+          <a:solidFill>
+            <a:schemeClr val="bg2"/>
+          </a:solidFill>
+          <a:ln/>
+        </p:spPr>
+      </p:sp>
+      <p:sp>
+        <p:nvSpPr>
+          <p:cNvPr id="6" name="lesson-n-0"/>
+          <p:cNvSpPr txBox="1"/>
+          <p:nvPr/>
+        </p:nvSpPr>
+        <p:spPr>
+          <a:xfrm>
+            <a:off x="7955280" y="1389888"/>
+            <a:ext cx="548640" cy="365760"/>
+          </a:xfrm>
+          <a:prstGeom prst="rect">
+            <a:avLst/>
+          </a:prstGeom>
+          <a:noFill/>
+          <a:ln/>
+        </p:spPr>
+        <p:txBody>
+          <a:bodyPr wrap="square" lIns="0" tIns="0" rIns="0" bIns="0" rtlCol="0" anchor="t"/>
+          <a:lstStyle/>
+          <a:p>
+            <a:pPr indent="0" marL="0">
+              <a:buNone/>
+            </a:pPr>
+            <a:r>
+              <a:rPr lang="en-US" sz="1800" b="1" dirty="0">
+                <a:solidFill>
+                  <a:schemeClr val="accent1"/>
+                </a:solidFill>
+              </a:rPr>
+              <a:t>01</a:t>
+            </a:r>
+            <a:endParaRPr lang="en-US" sz="1800" dirty="0"/>
+          </a:p>
+        </p:txBody>
+      </p:sp>
+      <p:sp>
+        <p:nvSpPr>
+          <p:cNvPr id="7" name="lesson-h-0"/>
+          <p:cNvSpPr txBox="1"/>
+          <p:nvPr/>
+        </p:nvSpPr>
+        <p:spPr>
+          <a:xfrm>
+            <a:off x="8503920" y="1362456"/>
+            <a:ext cx="3017520" cy="347472"/>
+          </a:xfrm>
+          <a:prstGeom prst="rect">
+            <a:avLst/>
+          </a:prstGeom>
+          <a:noFill/>
+          <a:ln/>
+        </p:spPr>
+        <p:txBody>
+          <a:bodyPr wrap="square" lIns="0" tIns="0" rIns="0" bIns="0" rtlCol="0" anchor="t"/>
+          <a:lstStyle/>
+          <a:p>
+            <a:pPr indent="0" marL="0">
+              <a:buNone/>
+            </a:pPr>
+            <a:r>
+              <a:rPr lang="en-US" sz="1500" b="1" dirty="0">
+                <a:solidFill>
+                  <a:schemeClr val="tx1"/>
+                </a:solidFill>
+              </a:rPr>
+              <a:t>테스트셋은 먼저 분리</a:t>
+            </a:r>
+            <a:endParaRPr lang="en-US" sz="1500" dirty="0"/>
+          </a:p>
+        </p:txBody>
+      </p:sp>
+      <p:sp>
+        <p:nvSpPr>
+          <p:cNvPr id="8" name="lesson-d-0"/>
+          <p:cNvSpPr txBox="1"/>
+          <p:nvPr/>
+        </p:nvSpPr>
+        <p:spPr>
+          <a:xfrm>
+            <a:off x="8503920" y="1755648"/>
+            <a:ext cx="3017520" cy="365760"/>
+          </a:xfrm>
+          <a:prstGeom prst="rect">
+            <a:avLst/>
+          </a:prstGeom>
+          <a:noFill/>
+          <a:ln/>
+        </p:spPr>
+        <p:txBody>
+          <a:bodyPr wrap="square" lIns="0" tIns="0" rIns="0" bIns="0" rtlCol="0" anchor="t"/>
+          <a:lstStyle/>
+          <a:p>
+            <a:pPr indent="0" marL="0">
+              <a:buNone/>
+            </a:pPr>
+            <a:r>
+              <a:rPr lang="en-US" sz="1200" dirty="0">
+                <a:solidFill>
+                  <a:schemeClr val="tx2"/>
+                </a:solidFill>
+              </a:rPr>
+              <a:t>업로드 전 분리 · 중복 확인</a:t>
+            </a:r>
+            <a:endParaRPr lang="en-US" sz="1200" dirty="0"/>
+          </a:p>
+        </p:txBody>
+      </p:sp>
+      <p:sp>
+        <p:nvSpPr>
+          <p:cNvPr id="9" name="lesson-1"/>
+          <p:cNvSpPr/>
+          <p:nvPr/>
+        </p:nvSpPr>
+        <p:spPr>
+          <a:xfrm>
+            <a:off x="7726680" y="2423160"/>
+            <a:ext cx="3913632" cy="1051560"/>
+          </a:xfrm>
+          <a:prstGeom prst="roundRect">
+            <a:avLst>
+              <a:gd name="adj" fmla="val 6957"/>
+            </a:avLst>
+          </a:prstGeom>
+          <a:solidFill>
+            <a:schemeClr val="bg2"/>
+          </a:solidFill>
+          <a:ln/>
+        </p:spPr>
+      </p:sp>
+      <p:sp>
+        <p:nvSpPr>
+          <p:cNvPr id="10" name="lesson-n-1"/>
+          <p:cNvSpPr txBox="1"/>
+          <p:nvPr/>
+        </p:nvSpPr>
+        <p:spPr>
+          <a:xfrm>
+            <a:off x="7955280" y="2578608"/>
+            <a:ext cx="548640" cy="365760"/>
+          </a:xfrm>
+          <a:prstGeom prst="rect">
+            <a:avLst/>
+          </a:prstGeom>
+          <a:noFill/>
+          <a:ln/>
+        </p:spPr>
+        <p:txBody>
+          <a:bodyPr wrap="square" lIns="0" tIns="0" rIns="0" bIns="0" rtlCol="0" anchor="t"/>
+          <a:lstStyle/>
+          <a:p>
+            <a:pPr indent="0" marL="0">
+              <a:buNone/>
+            </a:pPr>
+            <a:r>
+              <a:rPr lang="en-US" sz="1800" b="1" dirty="0">
+                <a:solidFill>
+                  <a:schemeClr val="accent1"/>
+                </a:solidFill>
+              </a:rPr>
+              <a:t>02</a:t>
+            </a:r>
+            <a:endParaRPr lang="en-US" sz="1800" dirty="0"/>
+          </a:p>
+        </p:txBody>
+      </p:sp>
+      <p:sp>
+        <p:nvSpPr>
+          <p:cNvPr id="11" name="lesson-h-1"/>
+          <p:cNvSpPr txBox="1"/>
+          <p:nvPr/>
+        </p:nvSpPr>
+        <p:spPr>
+          <a:xfrm>
+            <a:off x="8503920" y="2551176"/>
+            <a:ext cx="3017520" cy="347472"/>
+          </a:xfrm>
+          <a:prstGeom prst="rect">
+            <a:avLst/>
+          </a:prstGeom>
+          <a:noFill/>
+          <a:ln/>
+        </p:spPr>
+        <p:txBody>
+          <a:bodyPr wrap="square" lIns="0" tIns="0" rIns="0" bIns="0" rtlCol="0" anchor="t"/>
+          <a:lstStyle/>
+          <a:p>
+            <a:pPr indent="0" marL="0">
+              <a:buNone/>
+            </a:pPr>
+            <a:r>
+              <a:rPr lang="en-US" sz="1500" b="1" dirty="0">
+                <a:solidFill>
+                  <a:schemeClr val="tx1"/>
+                </a:solidFill>
+              </a:rPr>
+              <a:t>큰 모델 ≠ 좋은 모델</a:t>
+            </a:r>
+            <a:endParaRPr lang="en-US" sz="1500" dirty="0"/>
+          </a:p>
+        </p:txBody>
+      </p:sp>
+      <p:sp>
+        <p:nvSpPr>
+          <p:cNvPr id="12" name="lesson-d-1"/>
+          <p:cNvSpPr txBox="1"/>
+          <p:nvPr/>
+        </p:nvSpPr>
+        <p:spPr>
+          <a:xfrm>
+            <a:off x="8503920" y="2944368"/>
+            <a:ext cx="3017520" cy="365760"/>
+          </a:xfrm>
+          <a:prstGeom prst="rect">
+            <a:avLst/>
+          </a:prstGeom>
+          <a:noFill/>
+          <a:ln/>
+        </p:spPr>
+        <p:txBody>
+          <a:bodyPr wrap="square" lIns="0" tIns="0" rIns="0" bIns="0" rtlCol="0" anchor="t"/>
+          <a:lstStyle/>
+          <a:p>
+            <a:pPr indent="0" marL="0">
+              <a:buNone/>
+            </a:pPr>
+            <a:r>
+              <a:rPr lang="en-US" sz="1200" dirty="0">
+                <a:solidFill>
+                  <a:schemeClr val="tx2"/>
+                </a:solidFill>
+              </a:rPr>
+              <a:t>3.9M ATSS가 9M YOLOX-S보다 정확</a:t>
+            </a:r>
+            <a:endParaRPr lang="en-US" sz="1200" dirty="0"/>
+          </a:p>
+        </p:txBody>
+      </p:sp>
+      <p:sp>
+        <p:nvSpPr>
+          <p:cNvPr id="13" name="lesson-2"/>
+          <p:cNvSpPr/>
+          <p:nvPr/>
+        </p:nvSpPr>
+        <p:spPr>
+          <a:xfrm>
+            <a:off x="7726680" y="3611880"/>
+            <a:ext cx="3913632" cy="1051560"/>
+          </a:xfrm>
+          <a:prstGeom prst="roundRect">
+            <a:avLst>
+              <a:gd name="adj" fmla="val 6957"/>
+            </a:avLst>
+          </a:prstGeom>
+          <a:solidFill>
+            <a:schemeClr val="bg2"/>
+          </a:solidFill>
+          <a:ln/>
+        </p:spPr>
+      </p:sp>
+      <p:sp>
+        <p:nvSpPr>
+          <p:cNvPr id="14" name="lesson-n-2"/>
+          <p:cNvSpPr txBox="1"/>
+          <p:nvPr/>
+        </p:nvSpPr>
+        <p:spPr>
+          <a:xfrm>
+            <a:off x="7955280" y="3767328"/>
+            <a:ext cx="548640" cy="365760"/>
+          </a:xfrm>
+          <a:prstGeom prst="rect">
+            <a:avLst/>
+          </a:prstGeom>
+          <a:noFill/>
+          <a:ln/>
+        </p:spPr>
+        <p:txBody>
+          <a:bodyPr wrap="square" lIns="0" tIns="0" rIns="0" bIns="0" rtlCol="0" anchor="t"/>
+          <a:lstStyle/>
+          <a:p>
+            <a:pPr indent="0" marL="0">
+              <a:buNone/>
+            </a:pPr>
+            <a:r>
+              <a:rPr lang="en-US" sz="1800" b="1" dirty="0">
+                <a:solidFill>
+                  <a:schemeClr val="accent1"/>
+                </a:solidFill>
+              </a:rPr>
+              <a:t>03</a:t>
+            </a:r>
+            <a:endParaRPr lang="en-US" sz="1800" dirty="0"/>
+          </a:p>
+        </p:txBody>
+      </p:sp>
+      <p:sp>
+        <p:nvSpPr>
+          <p:cNvPr id="15" name="lesson-h-2"/>
+          <p:cNvSpPr txBox="1"/>
+          <p:nvPr/>
+        </p:nvSpPr>
+        <p:spPr>
+          <a:xfrm>
+            <a:off x="8503920" y="3739896"/>
+            <a:ext cx="3017520" cy="347472"/>
+          </a:xfrm>
+          <a:prstGeom prst="rect">
+            <a:avLst/>
+          </a:prstGeom>
+          <a:noFill/>
+          <a:ln/>
+        </p:spPr>
+        <p:txBody>
+          <a:bodyPr wrap="square" lIns="0" tIns="0" rIns="0" bIns="0" rtlCol="0" anchor="t"/>
+          <a:lstStyle/>
+          <a:p>
+            <a:pPr indent="0" marL="0">
+              <a:buNone/>
+            </a:pPr>
+            <a:r>
+              <a:rPr lang="en-US" sz="1500" b="1" dirty="0">
+                <a:solidFill>
+                  <a:schemeClr val="tx1"/>
+                </a:solidFill>
+              </a:rPr>
+              <a:t>최적화는 기준값과 함께</a:t>
+            </a:r>
+            <a:endParaRPr lang="en-US" sz="1500" dirty="0"/>
+          </a:p>
+        </p:txBody>
+      </p:sp>
+      <p:sp>
+        <p:nvSpPr>
+          <p:cNvPr id="16" name="lesson-d-2"/>
+          <p:cNvSpPr txBox="1"/>
+          <p:nvPr/>
+        </p:nvSpPr>
+        <p:spPr>
+          <a:xfrm>
+            <a:off x="8503920" y="4133088"/>
+            <a:ext cx="3017520" cy="365760"/>
+          </a:xfrm>
+          <a:prstGeom prst="rect">
+            <a:avLst/>
+          </a:prstGeom>
+          <a:noFill/>
+          <a:ln/>
+        </p:spPr>
+        <p:txBody>
+          <a:bodyPr wrap="square" lIns="0" tIns="0" rIns="0" bIns="0" rtlCol="0" anchor="t"/>
+          <a:lstStyle/>
+          <a:p>
+            <a:pPr indent="0" marL="0">
+              <a:buNone/>
+            </a:pPr>
+            <a:r>
+              <a:rPr lang="en-US" sz="1200" dirty="0">
+                <a:solidFill>
+                  <a:schemeClr val="tx2"/>
+                </a:solidFill>
+              </a:rPr>
+              <a:t>INT8 = 속도 ↑, 신뢰도 ↓</a:t>
+            </a:r>
+            <a:endParaRPr lang="en-US" sz="1200" dirty="0"/>
+          </a:p>
+        </p:txBody>
+      </p:sp>
+      <p:sp>
+        <p:nvSpPr>
+          <p:cNvPr id="17" name="lesson-3"/>
+          <p:cNvSpPr/>
+          <p:nvPr/>
+        </p:nvSpPr>
+        <p:spPr>
+          <a:xfrm>
+            <a:off x="7726680" y="4800600"/>
+            <a:ext cx="3913632" cy="1051560"/>
+          </a:xfrm>
+          <a:prstGeom prst="roundRect">
+            <a:avLst>
+              <a:gd name="adj" fmla="val 6957"/>
+            </a:avLst>
+          </a:prstGeom>
+          <a:solidFill>
+            <a:schemeClr val="bg2"/>
+          </a:solidFill>
+          <a:ln/>
+        </p:spPr>
+      </p:sp>
+      <p:sp>
+        <p:nvSpPr>
+          <p:cNvPr id="18" name="lesson-n-3"/>
+          <p:cNvSpPr txBox="1"/>
+          <p:nvPr/>
+        </p:nvSpPr>
+        <p:spPr>
+          <a:xfrm>
+            <a:off x="7955280" y="4956048"/>
+            <a:ext cx="548640" cy="365760"/>
+          </a:xfrm>
+          <a:prstGeom prst="rect">
+            <a:avLst/>
+          </a:prstGeom>
+          <a:noFill/>
+          <a:ln/>
+        </p:spPr>
+        <p:txBody>
+          <a:bodyPr wrap="square" lIns="0" tIns="0" rIns="0" bIns="0" rtlCol="0" anchor="t"/>
+          <a:lstStyle/>
+          <a:p>
+            <a:pPr indent="0" marL="0">
+              <a:buNone/>
+            </a:pPr>
+            <a:r>
+              <a:rPr lang="en-US" sz="1800" b="1" dirty="0">
+                <a:solidFill>
+                  <a:schemeClr val="accent1"/>
+                </a:solidFill>
+              </a:rPr>
+              <a:t>04</a:t>
+            </a:r>
+            <a:endParaRPr lang="en-US" sz="1800" dirty="0"/>
+          </a:p>
+        </p:txBody>
+      </p:sp>
+      <p:sp>
+        <p:nvSpPr>
+          <p:cNvPr id="19" name="lesson-h-3"/>
+          <p:cNvSpPr txBox="1"/>
+          <p:nvPr/>
+        </p:nvSpPr>
+        <p:spPr>
+          <a:xfrm>
+            <a:off x="8503920" y="4928616"/>
+            <a:ext cx="3017520" cy="347472"/>
+          </a:xfrm>
+          <a:prstGeom prst="rect">
+            <a:avLst/>
+          </a:prstGeom>
+          <a:noFill/>
+          <a:ln/>
+        </p:spPr>
+        <p:txBody>
+          <a:bodyPr wrap="square" lIns="0" tIns="0" rIns="0" bIns="0" rtlCol="0" anchor="t"/>
+          <a:lstStyle/>
+          <a:p>
+            <a:pPr indent="0" marL="0">
+              <a:buNone/>
+            </a:pPr>
+            <a:r>
+              <a:rPr lang="en-US" sz="1500" b="1" dirty="0">
+                <a:solidFill>
+                  <a:schemeClr val="tx1"/>
+                </a:solidFill>
+              </a:rPr>
+              <a:t>점수 ≠ 현장 성능</a:t>
+            </a:r>
+            <a:endParaRPr lang="en-US" sz="1500" dirty="0"/>
+          </a:p>
+        </p:txBody>
+      </p:sp>
+      <p:sp>
+        <p:nvSpPr>
+          <p:cNvPr id="20" name="lesson-d-3"/>
+          <p:cNvSpPr txBox="1"/>
+          <p:nvPr/>
+        </p:nvSpPr>
+        <p:spPr>
+          <a:xfrm>
+            <a:off x="8503920" y="5321808"/>
+            <a:ext cx="3017520" cy="365760"/>
+          </a:xfrm>
+          <a:prstGeom prst="rect">
+            <a:avLst/>
+          </a:prstGeom>
+          <a:noFill/>
+          <a:ln/>
+        </p:spPr>
+        <p:txBody>
+          <a:bodyPr wrap="square" lIns="0" tIns="0" rIns="0" bIns="0" rtlCol="0" anchor="t"/>
+          <a:lstStyle/>
+          <a:p>
+            <a:pPr indent="0" marL="0">
+              <a:buNone/>
+            </a:pPr>
+            <a:r>
+              <a:rPr lang="en-US" sz="1200" dirty="0">
+                <a:solidFill>
+                  <a:schemeClr val="tx2"/>
+                </a:solidFill>
+              </a:rPr>
+              <a:t>92.9% → 새 환경 47%</a:t>
+            </a:r>
+            <a:endParaRPr lang="en-US" sz="1200" dirty="0"/>
+          </a:p>
+        </p:txBody>
+      </p:sp>
+      <p:sp>
+        <p:nvSpPr>
+          <p:cNvPr id="22" name="Text 0"/>
+          <p:cNvSpPr/>
+          <p:nvPr>
+            <p:ph idx="101" type="body" hasCustomPrompt="1"/>
+          </p:nvPr>
+        </p:nvSpPr>
+        <p:spPr>
+          <a:xfrm>
+            <a:off x="548640" y="1005840"/>
+            <a:ext cx="11094415" cy="411480"/>
+          </a:xfrm>
+          <a:prstGeom prst="rect">
+            <a:avLst/>
+          </a:prstGeom>
+          <a:noFill/>
+          <a:ln/>
+        </p:spPr>
+        <p:txBody>
+          <a:bodyPr wrap="square" lIns="0" tIns="0" rIns="0" bIns="0" rtlCol="0" anchor="ctr"/>
+          <a:lstStyle/>
+          <a:p>
+            <a:pPr algn="l" indent="0" marL="0">
+              <a:buNone/>
+            </a:pPr>
+            <a:endParaRPr lang="en-US" sz="1500" dirty="0"/>
+          </a:p>
+        </p:txBody>
+      </p:sp>
+      <p:sp>
+        <p:nvSpPr>
+          <p:cNvPr id="25" name="Slide Number Placeholder 0"/>
+          <p:cNvSpPr>
+            <a:spLocks noGrp="1"/>
+          </p:cNvSpPr>
+          <p:nvPr>
+            <p:ph type="sldNum" sz="quarter" idx="4294967295"/>
+          </p:nvPr>
+        </p:nvSpPr>
+        <p:spPr>
+          <a:xfrm>
+            <a:off x="11094415" y="6419088"/>
+            <a:ext cx="548640" cy="274320"/>
+          </a:xfrm>
+          <a:prstGeom prst="rect">
+            <a:avLst/>
+          </a:prstGeom>
+          <a:extLst>
+            <a:ext uri="{C572A759-6A51-4108-AA02-DFA0A04FC94B}">
+              <ma14:wrappingTextBoxFlag xmlns:ma14="http://schemas.microsoft.com/office/mac/drawingml/2011/main" val="0"/>
+            </a:ext>
+          </a:extLst>
+        </p:spPr>
+        <p:txBody>
+          <a:bodyPr/>
+          <a:lstStyle>
+            <a:lvl1pPr>
+              <a:defRPr sz="1000">
+                <a:solidFill>
+                  <a:schemeClr val="tx2"/>
+                </a:solidFill>
+              </a:defRPr>
+            </a:lvl1pPr>
+          </a:lstStyle>
+          <a:p>
+            <a:pPr algn="r"/>
+            <a:fld id="{F7021451-1387-4CA6-816F-3879F97B5CBC}" type="slidenum">
+              <a:rPr b="0" lang="en-US"/>
+              <a:t>10</a:t>
+            </a:fld>
+            <a:endParaRPr lang="en-US"/>
+          </a:p>
+        </p:txBody>
+      </p:sp>
+    </p:spTree>
+  </p:cSld>
+  <p:clrMapOvr>
+    <a:masterClrMapping/>
+  </p:clrMapOvr>
+</p:sld>
+</file>
+
+<file path=ppt/slides/slide11.xml><?xml version="1.0" encoding="utf-8"?>
+<p:sld xmlns:a="http://schemas.openxmlformats.org/drawingml/2006/main" xmlns:r="http://schemas.openxmlformats.org/officeDocument/2006/relationships" xmlns:p="http://schemas.openxmlformats.org/presentationml/2006/main">
+  <p:cSld name="Slide 11">
+    <p:spTree>
+      <p:nvGrpSpPr>
+        <p:cNvPr id="1" name=""/>
+        <p:cNvGrpSpPr/>
+        <p:nvPr/>
+      </p:nvGrpSpPr>
+      <p:grpSpPr>
+        <a:xfrm>
+          <a:off x="0" y="0"/>
+          <a:ext cx="0" cy="0"/>
+          <a:chOff x="0" y="0"/>
+          <a:chExt cx="0" cy="0"/>
+        </a:xfrm>
+      </p:grpSpPr>
+      <p:sp>
+        <p:nvSpPr>
+          <p:cNvPr id="2" name="Text 0"/>
+          <p:cNvSpPr/>
+          <p:nvPr>
+            <p:ph idx="100" type="title" hasCustomPrompt="1"/>
+          </p:nvPr>
+        </p:nvSpPr>
+        <p:spPr>
+          <a:xfrm>
+            <a:off x="548640" y="347472"/>
+            <a:ext cx="11094415" cy="685800"/>
+          </a:xfrm>
+          <a:prstGeom prst="rect">
+            <a:avLst/>
+          </a:prstGeom>
+          <a:noFill/>
+          <a:ln/>
+        </p:spPr>
+        <p:txBody>
+          <a:bodyPr wrap="square" lIns="0" tIns="0" rIns="0" bIns="0" rtlCol="0" anchor="ctr"/>
+          <a:lstStyle/>
+          <a:p>
+            <a:pPr algn="l" indent="0" marL="0">
+              <a:buNone/>
+            </a:pPr>
+            <a:r>
+              <a:rPr lang="en-US" sz="3200" b="1" dirty="0">
+                <a:solidFill>
+                  <a:schemeClr val="tx1"/>
+                </a:solidFill>
+              </a:rPr>
               <a:t>데모</a:t>
             </a:r>
             <a:endParaRPr lang="en-US" sz="3200" dirty="0"/>
@@ -3441,7 +6449,7 @@
             <a:pPr algn="r"/>
             <a:fld id="{F7021451-1387-4CA6-816F-3879F97B5CBC}" type="slidenum">
               <a:rPr b="0" lang="en-US"/>
-              <a:t>10</a:t>
+              <a:t>11</a:t>
             </a:fld>
             <a:endParaRPr lang="en-US"/>
           </a:p>
@@ -3798,7 +6806,7 @@
         </p:nvSpPr>
         <p:spPr>
           <a:xfrm>
-            <a:off x="548640" y="5349240"/>
+            <a:off x="548640" y="5486400"/>
             <a:ext cx="6309360" cy="365760"/>
           </a:xfrm>
           <a:prstGeom prst="rect">
@@ -3837,56 +6845,9 @@
           </a:p>
         </p:txBody>
       </p:sp>
-      <p:sp>
-        <p:nvSpPr>
-          <p:cNvPr id="13" name="why-2"/>
-          <p:cNvSpPr txBox="1"/>
-          <p:nvPr/>
-        </p:nvSpPr>
-        <p:spPr>
-          <a:xfrm>
-            <a:off x="548640" y="5760720"/>
-            <a:ext cx="6309360" cy="365760"/>
-          </a:xfrm>
-          <a:prstGeom prst="rect">
-            <a:avLst/>
-          </a:prstGeom>
-          <a:noFill/>
-          <a:ln/>
-        </p:spPr>
-        <p:txBody>
-          <a:bodyPr wrap="square" lIns="0" tIns="0" rIns="0" bIns="0" rtlCol="0" anchor="t"/>
-          <a:lstStyle/>
-          <a:p>
-            <a:pPr indent="0" marL="0">
-              <a:buNone/>
-            </a:pPr>
-            <a:r>
-              <a:rPr lang="en-US" sz="1400" b="1" dirty="0">
-                <a:solidFill>
-                  <a:schemeClr val="accent1"/>
-                </a:solidFill>
-              </a:rPr>
-              <a:t>왜?  </a:t>
-            </a:r>
-            <a:pPr indent="0" marL="0">
-              <a:buNone/>
-            </a:pPr>
-            <a:r>
-              <a:rPr lang="en-US" sz="1400" dirty="0">
-                <a:solidFill>
-                  <a:schemeClr val="tx1"/>
-                </a:solidFill>
-              </a:rPr>
-              <a:t>scratch = 반사·나무결 같은 가는 선 → 오검출 16건 중 13건</a:t>
-            </a:r>
-            <a:endParaRPr lang="en-US" sz="1400" dirty="0"/>
-          </a:p>
-        </p:txBody>
-      </p:sp>
       <p:graphicFrame>
         <p:nvGraphicFramePr>
-          <p:cNvPr id="14" name="ap-chart" descr=""/>
+          <p:cNvPr id="13" name="ap-chart" descr=""/>
           <p:cNvGraphicFramePr/>
           <p:nvPr/>
         </p:nvGraphicFramePr>
@@ -6357,7 +9318,7 @@
                   <a:schemeClr val="tx2"/>
                 </a:solidFill>
               </a:rPr>
-              <a:t>학습에 쓴 사진 포함 가능 → 일반화가 아니라 암기를 측정</a:t>
+              <a:t>학습에 쓴 사진 포함 가능</a:t>
             </a:r>
             <a:endParaRPr lang="en-US" sz="1400" dirty="0"/>
           </a:p>
@@ -7513,8 +10474,8 @@
         </p:nvSpPr>
         <p:spPr>
           <a:xfrm>
-            <a:off x="4599629" y="5669280"/>
-            <a:ext cx="7043426" cy="566928"/>
+            <a:off x="4599629" y="5852160"/>
+            <a:ext cx="7043426" cy="274320"/>
           </a:xfrm>
           <a:prstGeom prst="rect">
             <a:avLst/>
@@ -7536,31 +10497,6 @@
                 </a:solidFill>
               </a:rPr>
               <a:t>Geti 점수와 같은 순서 · 작은 = 파라미터 기준 (연산량은 Tiny 최소)</a:t>
-            </a:r>
-            <a:endParaRPr lang="en-US" sz="1200" dirty="0"/>
-          </a:p>
-          <a:p>
-            <a:pPr indent="0" marL="0">
-              <a:buNone/>
-            </a:pPr>
-            <a:r>
-              <a:rPr lang="en-US" sz="1200" b="1" dirty="0">
-                <a:solidFill>
-                  <a:schemeClr val="accent1"/>
-                </a:solidFill>
-              </a:rPr>
-              <a:t>왜?  </a:t>
-            </a:r>
-            <a:pPr indent="0" marL="0">
-              <a:buNone/>
-            </a:pPr>
-            <a:r>
-              <a:rPr lang="en-US" sz="1200" dirty="0">
-                <a:solidFill>
-                  <a:schemeClr val="tx2"/>
-                </a:solidFill>
-              </a:rPr>
-              <a:t>가설: ATSS 입력 992×800 (YOLOX 640×640) · 적은 데이터엔 작은 모델 · 학습 1회라 미검증</a:t>
             </a:r>
             <a:endParaRPr lang="en-US" sz="1200" dirty="0"/>
           </a:p>
@@ -9551,53 +12487,6 @@
               <a:t>heatmap 최고점이 정답 박스 안 · 정확도 ≠ heatmap 품질</a:t>
             </a:r>
             <a:endParaRPr lang="en-US" sz="1200" dirty="0"/>
-          </a:p>
-        </p:txBody>
-      </p:sp>
-      <p:sp>
-        <p:nvSpPr>
-          <p:cNvPr id="28" name="why-6"/>
-          <p:cNvSpPr txBox="1"/>
-          <p:nvPr/>
-        </p:nvSpPr>
-        <p:spPr>
-          <a:xfrm>
-            <a:off x="6263640" y="5961888"/>
-            <a:ext cx="5376672" cy="292608"/>
-          </a:xfrm>
-          <a:prstGeom prst="rect">
-            <a:avLst/>
-          </a:prstGeom>
-          <a:noFill/>
-          <a:ln/>
-        </p:spPr>
-        <p:txBody>
-          <a:bodyPr wrap="square" lIns="0" tIns="0" rIns="0" bIns="0" rtlCol="0" anchor="t"/>
-          <a:lstStyle/>
-          <a:p>
-            <a:pPr indent="0" marL="0">
-              <a:buNone/>
-            </a:pPr>
-            <a:r>
-              <a:rPr lang="en-US" sz="1400" b="1" dirty="0">
-                <a:solidFill>
-                  <a:schemeClr val="accent1"/>
-                </a:solidFill>
-              </a:rPr>
-              <a:t>왜?  </a:t>
-            </a:r>
-            <a:pPr indent="0" marL="0">
-              <a:buNone/>
-            </a:pPr>
-            <a:r>
-              <a:rPr lang="en-US" sz="1400" dirty="0">
-                <a:solidFill>
-                  <a:schemeClr val="tx1"/>
-                </a:solidFill>
-              </a:rPr>
-              <a:t>나무결 = scratch와 같은 가는 선 패턴</a:t>
-            </a:r>
-            <a:endParaRPr lang="en-US" sz="1400" dirty="0"/>
           </a:p>
         </p:txBody>
       </p:sp>
@@ -11202,54 +14091,7 @@
       </p:sp>
       <p:sp>
         <p:nvSpPr>
-          <p:cNvPr id="7" name="why-7"/>
-          <p:cNvSpPr txBox="1"/>
-          <p:nvPr/>
-        </p:nvSpPr>
-        <p:spPr>
-          <a:xfrm>
-            <a:off x="6537960" y="4407408"/>
-            <a:ext cx="5102352" cy="292608"/>
-          </a:xfrm>
-          <a:prstGeom prst="rect">
-            <a:avLst/>
-          </a:prstGeom>
-          <a:noFill/>
-          <a:ln/>
-        </p:spPr>
-        <p:txBody>
-          <a:bodyPr wrap="square" lIns="0" tIns="0" rIns="0" bIns="0" rtlCol="0" anchor="t"/>
-          <a:lstStyle/>
-          <a:p>
-            <a:pPr indent="0" marL="0">
-              <a:buNone/>
-            </a:pPr>
-            <a:r>
-              <a:rPr lang="en-US" sz="1300" b="1" dirty="0">
-                <a:solidFill>
-                  <a:schemeClr val="accent1"/>
-                </a:solidFill>
-              </a:rPr>
-              <a:t>왜?  </a:t>
-            </a:r>
-            <a:pPr indent="0" marL="0">
-              <a:buNone/>
-            </a:pPr>
-            <a:r>
-              <a:rPr lang="en-US" sz="1300" dirty="0">
-                <a:solidFill>
-                  <a:schemeClr val="tx1"/>
-                </a:solidFill>
-              </a:rPr>
-              <a:t>int8 연산·데이터 절반 → 빠름 · 점수 소폭 ↓ → 놓침</a:t>
-            </a:r>
-            <a:endParaRPr lang="en-US" sz="1300" dirty="0"/>
-          </a:p>
-        </p:txBody>
-      </p:sp>
-      <p:sp>
-        <p:nvSpPr>
-          <p:cNvPr id="8" name="method-card"/>
+          <p:cNvPr id="7" name="method-card"/>
           <p:cNvSpPr/>
           <p:nvPr/>
         </p:nvSpPr>
@@ -11271,7 +14113,7 @@
       </p:sp>
       <p:sp>
         <p:nvSpPr>
-          <p:cNvPr id="9" name="method"/>
+          <p:cNvPr id="8" name="method"/>
           <p:cNvSpPr txBox="1"/>
           <p:nvPr/>
         </p:nvSpPr>
@@ -11318,7 +14160,7 @@
       </p:sp>
       <p:sp>
         <p:nvSpPr>
-          <p:cNvPr id="10" name="pro-card"/>
+          <p:cNvPr id="9" name="pro-card"/>
           <p:cNvSpPr/>
           <p:nvPr/>
         </p:nvSpPr>
@@ -11340,7 +14182,7 @@
       </p:sp>
       <p:sp>
         <p:nvSpPr>
-          <p:cNvPr id="11" name="pro"/>
+          <p:cNvPr id="10" name="pro"/>
           <p:cNvSpPr txBox="1"/>
           <p:nvPr/>
         </p:nvSpPr>
@@ -11387,7 +14229,7 @@
       </p:sp>
       <p:sp>
         <p:nvSpPr>
-          <p:cNvPr id="12" name="con-card"/>
+          <p:cNvPr id="11" name="con-card"/>
           <p:cNvSpPr/>
           <p:nvPr/>
         </p:nvSpPr>
@@ -11409,7 +14251,7 @@
       </p:sp>
       <p:sp>
         <p:nvSpPr>
-          <p:cNvPr id="13" name="con"/>
+          <p:cNvPr id="12" name="con"/>
           <p:cNvSpPr txBox="1"/>
           <p:nvPr/>
         </p:nvSpPr>
@@ -13990,7 +16832,7 @@
                   <a:schemeClr val="tx1"/>
                 </a:solidFill>
               </a:rPr>
-              <a:t>검출 ↑ = 정상 오검출 ↑ (점수 분포 겹침)</a:t>
+              <a:t>검출 ↑ = 정상 오검출 ↑</a:t>
             </a:r>
             <a:endParaRPr lang="en-US" sz="1400" dirty="0"/>
           </a:p>
@@ -14038,37 +16880,6 @@
                   <a:schemeClr val="accent1"/>
                 </a:solidFill>
               </a:rPr>
-              <a:t>왜?  </a:t>
-            </a:r>
-            <a:pPr indent="0" marL="0">
-              <a:spcAft>
-                <a:spcPts val="600"/>
-              </a:spcAft>
-              <a:buNone/>
-            </a:pPr>
-            <a:r>
-              <a:rPr lang="en-US" sz="1400" dirty="0">
-                <a:solidFill>
-                  <a:schemeClr val="tx2"/>
-                </a:solidFill>
-              </a:rPr>
-              <a:t>YOLOX 점수 = 두 확률의 곱 (objectness × class)</a:t>
-            </a:r>
-            <a:endParaRPr lang="en-US" sz="1400" dirty="0"/>
-          </a:p>
-          <a:p>
-            <a:pPr indent="0" marL="0">
-              <a:spcAft>
-                <a:spcPts val="600"/>
-              </a:spcAft>
-              <a:buNone/>
-            </a:pPr>
-            <a:r>
-              <a:rPr lang="en-US" sz="1400" b="1" dirty="0">
-                <a:solidFill>
-                  <a:schemeClr val="accent1"/>
-                </a:solidFill>
-              </a:rPr>
               <a:t>→ 기준값은 모델별로 · 그래도 부족 → 재학습</a:t>
             </a:r>
             <a:endParaRPr lang="en-US" sz="1400" dirty="0"/>
@@ -14177,15 +16988,53 @@
                   <a:schemeClr val="tx1"/>
                 </a:solidFill>
               </a:rPr>
-              <a:t>Logs and Lesson Learned</a:t>
+              <a:t>원인</a:t>
             </a:r>
             <a:endParaRPr lang="en-US" sz="3200" dirty="0"/>
           </a:p>
         </p:txBody>
       </p:sp>
+      <p:sp>
+        <p:nvSpPr>
+          <p:cNvPr id="3" name="Text 0"/>
+          <p:cNvSpPr/>
+          <p:nvPr>
+            <p:ph idx="101" type="body" hasCustomPrompt="1"/>
+          </p:nvPr>
+        </p:nvSpPr>
+        <p:spPr>
+          <a:xfrm>
+            <a:off x="548640" y="1005840"/>
+            <a:ext cx="11094415" cy="411480"/>
+          </a:xfrm>
+          <a:prstGeom prst="rect">
+            <a:avLst/>
+          </a:prstGeom>
+          <a:noFill/>
+          <a:ln/>
+        </p:spPr>
+        <p:txBody>
+          <a:bodyPr wrap="square" lIns="0" tIns="0" rIns="0" bIns="0" rtlCol="0" anchor="ctr"/>
+          <a:lstStyle/>
+          <a:p>
+            <a:pPr algn="l" indent="0" marL="0">
+              <a:buNone/>
+            </a:pPr>
+            <a:r>
+              <a:rPr lang="en-US" sz="1500" dirty="0">
+                <a:solidFill>
+                  <a:schemeClr val="tx2"/>
+                </a:solidFill>
+              </a:rPr>
+              <a:t>슬라이드 2–8의 결과는 왜 나왔나</a:t>
+            </a:r>
+            <a:endParaRPr lang="en-US" sz="1500" dirty="0"/>
+          </a:p>
+        </p:txBody>
+      </p:sp>
       <p:graphicFrame>
         <p:nvGraphicFramePr>
-          <p:cNvPr id="10" name="log-table"/>
+          <p:cNvPr id="10" name="causes-table"/>
           <p:cNvGraphicFramePr>
             <a:graphicFrameLocks noGrp="1"/>
           </p:cNvGraphicFramePr>
@@ -14198,39 +17047,28 @@
           </p:nvPr>
         </p:nvGraphicFramePr>
         <p:xfrm>
-          <a:off x="548640" y="1234440"/>
-          <a:ext cx="6903720" cy="914400"/>
+          <a:off x="548640" y="1600200"/>
+          <a:ext cx="11094415" cy="914400"/>
         </p:xfrm>
         <a:graphic>
           <a:graphicData uri="http://schemas.openxmlformats.org/drawingml/2006/table">
             <a:tbl>
               <a:tblPr/>
               <a:tblGrid>
-                <a:gridCol w="548640"/>
-                <a:gridCol w="2240280"/>
-                <a:gridCol w="1691640"/>
-                <a:gridCol w="2423160"/>
+                <a:gridCol w="502920"/>
+                <a:gridCol w="2514600"/>
+                <a:gridCol w="7205472"/>
+                <a:gridCol w="868680"/>
               </a:tblGrid>
-              <a:tr h="566928">
+              <a:tr h="429768">
                 <a:tc>
                   <a:txBody>
                     <a:bodyPr/>
                     <a:lstStyle/>
                     <a:p>
-                      <a:pPr algn="l" indent="0" marL="0">
+                      <a:pPr indent="0" marL="0">
                         <a:buNone/>
                       </a:pPr>
-                      <a:r>
-                        <a:rPr lang="en-US" sz="1400" b="1" dirty="0">
-                          <a:solidFill>
-                            <a:schemeClr val="tx2"/>
-                          </a:solidFill>
-                          <a:latin typeface="Malgun Gothic" pitchFamily="34" charset="0"/>
-                          <a:ea typeface="Malgun Gothic" pitchFamily="34" charset="-122"/>
-                          <a:cs typeface="Malgun Gothic" pitchFamily="34" charset="-120"/>
-                        </a:rPr>
-                        <a:t>단계</a:t>
-                      </a:r>
                       <a:endParaRPr lang="en-US" sz="1400" dirty="0">
                         <a:latin typeface="Malgun Gothic" charset="0"/>
                         <a:ea typeface="Malgun Gothic" charset="0"/>
@@ -14285,75 +17123,7 @@
                     <a:bodyPr/>
                     <a:lstStyle/>
                     <a:p>
-                      <a:pPr algn="l" indent="0" marL="0">
-                        <a:buNone/>
-                      </a:pPr>
-                      <a:r>
-                        <a:rPr lang="en-US" sz="1400" b="1" dirty="0">
-                          <a:solidFill>
-                            <a:schemeClr val="tx2"/>
-                          </a:solidFill>
-                          <a:latin typeface="Malgun Gothic" pitchFamily="34" charset="0"/>
-                          <a:ea typeface="Malgun Gothic" pitchFamily="34" charset="-122"/>
-                          <a:cs typeface="Malgun Gothic" pitchFamily="34" charset="-120"/>
-                        </a:rPr>
-                        <a:t>조건</a:t>
-                      </a:r>
-                      <a:endParaRPr lang="en-US" sz="1400" dirty="0">
-                        <a:latin typeface="Malgun Gothic" charset="0"/>
-                        <a:ea typeface="Malgun Gothic" charset="0"/>
-                        <a:cs typeface="Malgun Gothic" charset="0"/>
-                      </a:endParaRPr>
-                    </a:p>
-                  </a:txBody>
-                  <a:tcPr marL="91440" marR="91440" marT="45720" marB="45720" anchor="ctr">
-                    <a:lnL w="9525" cap="flat" cmpd="sng" algn="ctr">
-                      <a:solidFill>
-                        <a:srgbClr val="3A3F48"/>
-                      </a:solidFill>
-                      <a:prstDash val="solid"/>
-                      <a:round/>
-                      <a:headEnd type="none" w="med" len="med"/>
-                      <a:tailEnd type="none" w="med" len="med"/>
-                    </a:lnL>
-                    <a:lnR w="9525" cap="flat" cmpd="sng" algn="ctr">
-                      <a:solidFill>
-                        <a:srgbClr val="3A3F48"/>
-                      </a:solidFill>
-                      <a:prstDash val="solid"/>
-                      <a:round/>
-                      <a:headEnd type="none" w="med" len="med"/>
-                      <a:tailEnd type="none" w="med" len="med"/>
-                    </a:lnR>
-                    <a:lnT w="9525" cap="flat" cmpd="sng" algn="ctr">
-                      <a:solidFill>
-                        <a:srgbClr val="3A3F48"/>
-                      </a:solidFill>
-                      <a:prstDash val="solid"/>
-                      <a:round/>
-                      <a:headEnd type="none" w="med" len="med"/>
-                      <a:tailEnd type="none" w="med" len="med"/>
-                    </a:lnT>
-                    <a:lnB w="9525" cap="flat" cmpd="sng" algn="ctr">
-                      <a:solidFill>
-                        <a:srgbClr val="3A3F48"/>
-                      </a:solidFill>
-                      <a:prstDash val="solid"/>
-                      <a:round/>
-                      <a:headEnd type="none" w="med" len="med"/>
-                      <a:tailEnd type="none" w="med" len="med"/>
-                    </a:lnB>
-                    <a:solidFill>
-                      <a:srgbClr val="16191E"/>
-                    </a:solidFill>
-                  </a:tcPr>
-                </a:tc>
-                <a:tc>
-                  <a:txBody>
-                    <a:bodyPr/>
-                    <a:lstStyle/>
-                    <a:p>
-                      <a:pPr algn="l" indent="0" marL="0">
+                      <a:pPr indent="0" marL="0">
                         <a:buNone/>
                       </a:pPr>
                       <a:r>
@@ -14421,7 +17191,7 @@
                     <a:bodyPr/>
                     <a:lstStyle/>
                     <a:p>
-                      <a:pPr algn="l" indent="0" marL="0">
+                      <a:pPr indent="0" marL="0">
                         <a:buNone/>
                       </a:pPr>
                       <a:r>
@@ -14433,7 +17203,7 @@
                           <a:ea typeface="Malgun Gothic" pitchFamily="34" charset="-122"/>
                           <a:cs typeface="Malgun Gothic" pitchFamily="34" charset="-120"/>
                         </a:rPr>
-                        <a:t>배운 것</a:t>
+                        <a:t>원인</a:t>
                       </a:r>
                       <a:endParaRPr lang="en-US" sz="1400" dirty="0">
                         <a:latin typeface="Malgun Gothic" charset="0"/>
@@ -14484,8 +17254,76 @@
                     </a:solidFill>
                   </a:tcPr>
                 </a:tc>
+                <a:tc>
+                  <a:txBody>
+                    <a:bodyPr/>
+                    <a:lstStyle/>
+                    <a:p>
+                      <a:pPr algn="ctr" indent="0" marL="0">
+                        <a:buNone/>
+                      </a:pPr>
+                      <a:r>
+                        <a:rPr lang="en-US" sz="1400" b="1" dirty="0">
+                          <a:solidFill>
+                            <a:schemeClr val="tx2"/>
+                          </a:solidFill>
+                          <a:latin typeface="Malgun Gothic" pitchFamily="34" charset="0"/>
+                          <a:ea typeface="Malgun Gothic" pitchFamily="34" charset="-122"/>
+                          <a:cs typeface="Malgun Gothic" pitchFamily="34" charset="-120"/>
+                        </a:rPr>
+                        <a:t>근거</a:t>
+                      </a:r>
+                      <a:endParaRPr lang="en-US" sz="1400" dirty="0">
+                        <a:latin typeface="Malgun Gothic" charset="0"/>
+                        <a:ea typeface="Malgun Gothic" charset="0"/>
+                        <a:cs typeface="Malgun Gothic" charset="0"/>
+                      </a:endParaRPr>
+                    </a:p>
+                  </a:txBody>
+                  <a:tcPr marL="91440" marR="91440" marT="45720" marB="45720" anchor="ctr">
+                    <a:lnL w="9525" cap="flat" cmpd="sng" algn="ctr">
+                      <a:solidFill>
+                        <a:srgbClr val="3A3F48"/>
+                      </a:solidFill>
+                      <a:prstDash val="solid"/>
+                      <a:round/>
+                      <a:headEnd type="none" w="med" len="med"/>
+                      <a:tailEnd type="none" w="med" len="med"/>
+                    </a:lnL>
+                    <a:lnR w="9525" cap="flat" cmpd="sng" algn="ctr">
+                      <a:solidFill>
+                        <a:srgbClr val="3A3F48"/>
+                      </a:solidFill>
+                      <a:prstDash val="solid"/>
+                      <a:round/>
+                      <a:headEnd type="none" w="med" len="med"/>
+                      <a:tailEnd type="none" w="med" len="med"/>
+                    </a:lnR>
+                    <a:lnT w="9525" cap="flat" cmpd="sng" algn="ctr">
+                      <a:solidFill>
+                        <a:srgbClr val="3A3F48"/>
+                      </a:solidFill>
+                      <a:prstDash val="solid"/>
+                      <a:round/>
+                      <a:headEnd type="none" w="med" len="med"/>
+                      <a:tailEnd type="none" w="med" len="med"/>
+                    </a:lnT>
+                    <a:lnB w="9525" cap="flat" cmpd="sng" algn="ctr">
+                      <a:solidFill>
+                        <a:srgbClr val="3A3F48"/>
+                      </a:solidFill>
+                      <a:prstDash val="solid"/>
+                      <a:round/>
+                      <a:headEnd type="none" w="med" len="med"/>
+                      <a:tailEnd type="none" w="med" len="med"/>
+                    </a:lnB>
+                    <a:solidFill>
+                      <a:srgbClr val="16191E"/>
+                    </a:solidFill>
+                  </a:tcPr>
+                </a:tc>
               </a:tr>
-              <a:tr h="566928">
+              <a:tr h="429768">
                 <a:tc>
                   <a:txBody>
                     <a:bodyPr/>
@@ -14497,13 +17335,13 @@
                       <a:r>
                         <a:rPr lang="en-US" sz="1400" dirty="0">
                           <a:solidFill>
-                            <a:schemeClr val="tx1"/>
+                            <a:schemeClr val="tx2"/>
                           </a:solidFill>
                           <a:latin typeface="Malgun Gothic" pitchFamily="34" charset="0"/>
                           <a:ea typeface="Malgun Gothic" pitchFamily="34" charset="-122"/>
                           <a:cs typeface="Malgun Gothic" pitchFamily="34" charset="-120"/>
                         </a:rPr>
-                        <a:t>1</a:t>
+                        <a:t>2</a:t>
                       </a:r>
                       <a:endParaRPr lang="en-US" sz="1400" dirty="0">
                         <a:latin typeface="Malgun Gothic" charset="0"/>
@@ -14559,7 +17397,75 @@
                     <a:bodyPr/>
                     <a:lstStyle/>
                     <a:p>
-                      <a:pPr algn="l" indent="0" marL="0">
+                      <a:pPr indent="0" marL="0">
+                        <a:buNone/>
+                      </a:pPr>
+                      <a:r>
+                        <a:rPr lang="en-US" sz="1400" b="1" dirty="0">
+                          <a:solidFill>
+                            <a:schemeClr val="tx1"/>
+                          </a:solidFill>
+                          <a:latin typeface="Malgun Gothic" pitchFamily="34" charset="0"/>
+                          <a:ea typeface="Malgun Gothic" pitchFamily="34" charset="-122"/>
+                          <a:cs typeface="Malgun Gothic" pitchFamily="34" charset="-120"/>
+                        </a:rPr>
+                        <a:t>scratch가 어렵다</a:t>
+                      </a:r>
+                      <a:endParaRPr lang="en-US" sz="1400" dirty="0">
+                        <a:latin typeface="Malgun Gothic" charset="0"/>
+                        <a:ea typeface="Malgun Gothic" charset="0"/>
+                        <a:cs typeface="Malgun Gothic" charset="0"/>
+                      </a:endParaRPr>
+                    </a:p>
+                  </a:txBody>
+                  <a:tcPr marL="91440" marR="91440" marT="45720" marB="45720" anchor="ctr">
+                    <a:lnL w="9525" cap="flat" cmpd="sng" algn="ctr">
+                      <a:solidFill>
+                        <a:srgbClr val="3A3F48"/>
+                      </a:solidFill>
+                      <a:prstDash val="solid"/>
+                      <a:round/>
+                      <a:headEnd type="none" w="med" len="med"/>
+                      <a:tailEnd type="none" w="med" len="med"/>
+                    </a:lnL>
+                    <a:lnR w="9525" cap="flat" cmpd="sng" algn="ctr">
+                      <a:solidFill>
+                        <a:srgbClr val="3A3F48"/>
+                      </a:solidFill>
+                      <a:prstDash val="solid"/>
+                      <a:round/>
+                      <a:headEnd type="none" w="med" len="med"/>
+                      <a:tailEnd type="none" w="med" len="med"/>
+                    </a:lnR>
+                    <a:lnT w="9525" cap="flat" cmpd="sng" algn="ctr">
+                      <a:solidFill>
+                        <a:srgbClr val="3A3F48"/>
+                      </a:solidFill>
+                      <a:prstDash val="solid"/>
+                      <a:round/>
+                      <a:headEnd type="none" w="med" len="med"/>
+                      <a:tailEnd type="none" w="med" len="med"/>
+                    </a:lnT>
+                    <a:lnB w="9525" cap="flat" cmpd="sng" algn="ctr">
+                      <a:solidFill>
+                        <a:srgbClr val="3A3F48"/>
+                      </a:solidFill>
+                      <a:prstDash val="solid"/>
+                      <a:round/>
+                      <a:headEnd type="none" w="med" len="med"/>
+                      <a:tailEnd type="none" w="med" len="med"/>
+                    </a:lnB>
+                    <a:solidFill>
+                      <a:srgbClr val="23272F"/>
+                    </a:solidFill>
+                  </a:tcPr>
+                </a:tc>
+                <a:tc>
+                  <a:txBody>
+                    <a:bodyPr/>
+                    <a:lstStyle/>
+                    <a:p>
+                      <a:pPr indent="0" marL="0">
                         <a:buNone/>
                       </a:pPr>
                       <a:r>
@@ -14571,7 +17477,7 @@
                           <a:ea typeface="Malgun Gothic" pitchFamily="34" charset="-122"/>
                           <a:cs typeface="Malgun Gothic" pitchFamily="34" charset="-120"/>
                         </a:rPr>
-                        <a:t>ATSS · 1차 테스트 153장</a:t>
+                        <a:t>반사·나무결 같은 가는 선 (배경 오검출 16건 중 13건이 scratch)</a:t>
                       </a:r>
                       <a:endParaRPr lang="en-US" sz="1400" dirty="0">
                         <a:latin typeface="Malgun Gothic" charset="0"/>
@@ -14633,13 +17539,83 @@
                       <a:r>
                         <a:rPr lang="en-US" sz="1400" b="1" dirty="0">
                           <a:solidFill>
-                            <a:schemeClr val="accent1"/>
+                            <a:schemeClr val="accent6"/>
                           </a:solidFill>
                           <a:latin typeface="Malgun Gothic" pitchFamily="34" charset="0"/>
                           <a:ea typeface="Malgun Gothic" pitchFamily="34" charset="-122"/>
                           <a:cs typeface="Malgun Gothic" pitchFamily="34" charset="-120"/>
                         </a:rPr>
-                        <a:t>93.3%</a:t>
+                        <a:t>측정</a:t>
+                      </a:r>
+                      <a:endParaRPr lang="en-US" sz="1400" dirty="0">
+                        <a:latin typeface="Malgun Gothic" charset="0"/>
+                        <a:ea typeface="Malgun Gothic" charset="0"/>
+                        <a:cs typeface="Malgun Gothic" charset="0"/>
+                      </a:endParaRPr>
+                    </a:p>
+                  </a:txBody>
+                  <a:tcPr marL="91440" marR="91440" marT="45720" marB="45720" anchor="ctr">
+                    <a:lnL w="9525" cap="flat" cmpd="sng" algn="ctr">
+                      <a:solidFill>
+                        <a:srgbClr val="3A3F48"/>
+                      </a:solidFill>
+                      <a:prstDash val="solid"/>
+                      <a:round/>
+                      <a:headEnd type="none" w="med" len="med"/>
+                      <a:tailEnd type="none" w="med" len="med"/>
+                    </a:lnL>
+                    <a:lnR w="9525" cap="flat" cmpd="sng" algn="ctr">
+                      <a:solidFill>
+                        <a:srgbClr val="3A3F48"/>
+                      </a:solidFill>
+                      <a:prstDash val="solid"/>
+                      <a:round/>
+                      <a:headEnd type="none" w="med" len="med"/>
+                      <a:tailEnd type="none" w="med" len="med"/>
+                    </a:lnR>
+                    <a:lnT w="9525" cap="flat" cmpd="sng" algn="ctr">
+                      <a:solidFill>
+                        <a:srgbClr val="3A3F48"/>
+                      </a:solidFill>
+                      <a:prstDash val="solid"/>
+                      <a:round/>
+                      <a:headEnd type="none" w="med" len="med"/>
+                      <a:tailEnd type="none" w="med" len="med"/>
+                    </a:lnT>
+                    <a:lnB w="9525" cap="flat" cmpd="sng" algn="ctr">
+                      <a:solidFill>
+                        <a:srgbClr val="3A3F48"/>
+                      </a:solidFill>
+                      <a:prstDash val="solid"/>
+                      <a:round/>
+                      <a:headEnd type="none" w="med" len="med"/>
+                      <a:tailEnd type="none" w="med" len="med"/>
+                    </a:lnB>
+                    <a:solidFill>
+                      <a:srgbClr val="23272F"/>
+                    </a:solidFill>
+                  </a:tcPr>
+                </a:tc>
+              </a:tr>
+              <a:tr h="429768">
+                <a:tc>
+                  <a:txBody>
+                    <a:bodyPr/>
+                    <a:lstStyle/>
+                    <a:p>
+                      <a:pPr algn="ctr" indent="0" marL="0">
+                        <a:buNone/>
+                      </a:pPr>
+                      <a:r>
+                        <a:rPr lang="en-US" sz="1400" dirty="0">
+                          <a:solidFill>
+                            <a:schemeClr val="tx2"/>
+                          </a:solidFill>
+                          <a:latin typeface="Malgun Gothic" pitchFamily="34" charset="0"/>
+                          <a:ea typeface="Malgun Gothic" pitchFamily="34" charset="-122"/>
+                          <a:cs typeface="Malgun Gothic" pitchFamily="34" charset="-120"/>
+                        </a:rPr>
+                        <a:t>4</a:t>
                       </a:r>
                       <a:endParaRPr lang="en-US" sz="1400" dirty="0">
                         <a:latin typeface="Malgun Gothic" charset="0"/>
@@ -14695,19 +17671,19 @@
                     <a:bodyPr/>
                     <a:lstStyle/>
                     <a:p>
-                      <a:pPr algn="l" indent="0" marL="0">
+                      <a:pPr indent="0" marL="0">
                         <a:buNone/>
                       </a:pPr>
                       <a:r>
-                        <a:rPr lang="en-US" sz="1400" dirty="0">
+                        <a:rPr lang="en-US" sz="1400" b="1" dirty="0">
                           <a:solidFill>
-                            <a:schemeClr val="tx2"/>
+                            <a:schemeClr val="tx1"/>
                           </a:solidFill>
                           <a:latin typeface="Malgun Gothic" pitchFamily="34" charset="0"/>
                           <a:ea typeface="Malgun Gothic" pitchFamily="34" charset="-122"/>
                           <a:cs typeface="Malgun Gothic" pitchFamily="34" charset="-120"/>
                         </a:rPr>
-                        <a:t>–</a:t>
+                        <a:t>1차 93%는 과대평가</a:t>
                       </a:r>
                       <a:endParaRPr lang="en-US" sz="1400" dirty="0">
                         <a:latin typeface="Malgun Gothic" charset="0"/>
@@ -14758,14 +17734,12 @@
                     </a:solidFill>
                   </a:tcPr>
                 </a:tc>
-              </a:tr>
-              <a:tr h="566928">
                 <a:tc>
                   <a:txBody>
                     <a:bodyPr/>
                     <a:lstStyle/>
                     <a:p>
-                      <a:pPr algn="ctr" indent="0" marL="0">
+                      <a:pPr indent="0" marL="0">
                         <a:buNone/>
                       </a:pPr>
                       <a:r>
@@ -14777,75 +17751,7 @@
                           <a:ea typeface="Malgun Gothic" pitchFamily="34" charset="-122"/>
                           <a:cs typeface="Malgun Gothic" pitchFamily="34" charset="-120"/>
                         </a:rPr>
-                        <a:t>2</a:t>
-                      </a:r>
-                      <a:endParaRPr lang="en-US" sz="1400" dirty="0">
-                        <a:latin typeface="Malgun Gothic" charset="0"/>
-                        <a:ea typeface="Malgun Gothic" charset="0"/>
-                        <a:cs typeface="Malgun Gothic" charset="0"/>
-                      </a:endParaRPr>
-                    </a:p>
-                  </a:txBody>
-                  <a:tcPr marL="91440" marR="91440" marT="45720" marB="45720" anchor="ctr">
-                    <a:lnL w="9525" cap="flat" cmpd="sng" algn="ctr">
-                      <a:solidFill>
-                        <a:srgbClr val="3A3F48"/>
-                      </a:solidFill>
-                      <a:prstDash val="solid"/>
-                      <a:round/>
-                      <a:headEnd type="none" w="med" len="med"/>
-                      <a:tailEnd type="none" w="med" len="med"/>
-                    </a:lnL>
-                    <a:lnR w="9525" cap="flat" cmpd="sng" algn="ctr">
-                      <a:solidFill>
-                        <a:srgbClr val="3A3F48"/>
-                      </a:solidFill>
-                      <a:prstDash val="solid"/>
-                      <a:round/>
-                      <a:headEnd type="none" w="med" len="med"/>
-                      <a:tailEnd type="none" w="med" len="med"/>
-                    </a:lnR>
-                    <a:lnT w="9525" cap="flat" cmpd="sng" algn="ctr">
-                      <a:solidFill>
-                        <a:srgbClr val="3A3F48"/>
-                      </a:solidFill>
-                      <a:prstDash val="solid"/>
-                      <a:round/>
-                      <a:headEnd type="none" w="med" len="med"/>
-                      <a:tailEnd type="none" w="med" len="med"/>
-                    </a:lnT>
-                    <a:lnB w="9525" cap="flat" cmpd="sng" algn="ctr">
-                      <a:solidFill>
-                        <a:srgbClr val="3A3F48"/>
-                      </a:solidFill>
-                      <a:prstDash val="solid"/>
-                      <a:round/>
-                      <a:headEnd type="none" w="med" len="med"/>
-                      <a:tailEnd type="none" w="med" len="med"/>
-                    </a:lnB>
-                    <a:solidFill>
-                      <a:srgbClr val="23272F"/>
-                    </a:solidFill>
-                  </a:tcPr>
-                </a:tc>
-                <a:tc>
-                  <a:txBody>
-                    <a:bodyPr/>
-                    <a:lstStyle/>
-                    <a:p>
-                      <a:pPr algn="l" indent="0" marL="0">
-                        <a:buNone/>
-                      </a:pPr>
-                      <a:r>
-                        <a:rPr lang="en-US" sz="1400" dirty="0">
-                          <a:solidFill>
-                            <a:schemeClr val="tx1"/>
-                          </a:solidFill>
-                          <a:latin typeface="Malgun Gothic" pitchFamily="34" charset="0"/>
-                          <a:ea typeface="Malgun Gothic" pitchFamily="34" charset="-122"/>
-                          <a:cs typeface="Malgun Gothic" pitchFamily="34" charset="-120"/>
-                        </a:rPr>
-                        <a:t>복사본 22장 제거 · 131장</a:t>
+                        <a:t>테스트까지 업로드 · 복사본 22장 · 같은 촬영 세션 → 암기를 측정</a:t>
                       </a:r>
                       <a:endParaRPr lang="en-US" sz="1400" dirty="0">
                         <a:latin typeface="Malgun Gothic" charset="0"/>
@@ -14907,13 +17813,83 @@
                       <a:r>
                         <a:rPr lang="en-US" sz="1400" b="1" dirty="0">
                           <a:solidFill>
-                            <a:schemeClr val="accent1"/>
+                            <a:schemeClr val="accent6"/>
                           </a:solidFill>
                           <a:latin typeface="Malgun Gothic" pitchFamily="34" charset="0"/>
                           <a:ea typeface="Malgun Gothic" pitchFamily="34" charset="-122"/>
                           <a:cs typeface="Malgun Gothic" pitchFamily="34" charset="-120"/>
                         </a:rPr>
-                        <a:t>92.9%</a:t>
+                        <a:t>측정</a:t>
+                      </a:r>
+                      <a:endParaRPr lang="en-US" sz="1400" dirty="0">
+                        <a:latin typeface="Malgun Gothic" charset="0"/>
+                        <a:ea typeface="Malgun Gothic" charset="0"/>
+                        <a:cs typeface="Malgun Gothic" charset="0"/>
+                      </a:endParaRPr>
+                    </a:p>
+                  </a:txBody>
+                  <a:tcPr marL="91440" marR="91440" marT="45720" marB="45720" anchor="ctr">
+                    <a:lnL w="9525" cap="flat" cmpd="sng" algn="ctr">
+                      <a:solidFill>
+                        <a:srgbClr val="3A3F48"/>
+                      </a:solidFill>
+                      <a:prstDash val="solid"/>
+                      <a:round/>
+                      <a:headEnd type="none" w="med" len="med"/>
+                      <a:tailEnd type="none" w="med" len="med"/>
+                    </a:lnL>
+                    <a:lnR w="9525" cap="flat" cmpd="sng" algn="ctr">
+                      <a:solidFill>
+                        <a:srgbClr val="3A3F48"/>
+                      </a:solidFill>
+                      <a:prstDash val="solid"/>
+                      <a:round/>
+                      <a:headEnd type="none" w="med" len="med"/>
+                      <a:tailEnd type="none" w="med" len="med"/>
+                    </a:lnR>
+                    <a:lnT w="9525" cap="flat" cmpd="sng" algn="ctr">
+                      <a:solidFill>
+                        <a:srgbClr val="3A3F48"/>
+                      </a:solidFill>
+                      <a:prstDash val="solid"/>
+                      <a:round/>
+                      <a:headEnd type="none" w="med" len="med"/>
+                      <a:tailEnd type="none" w="med" len="med"/>
+                    </a:lnT>
+                    <a:lnB w="9525" cap="flat" cmpd="sng" algn="ctr">
+                      <a:solidFill>
+                        <a:srgbClr val="3A3F48"/>
+                      </a:solidFill>
+                      <a:prstDash val="solid"/>
+                      <a:round/>
+                      <a:headEnd type="none" w="med" len="med"/>
+                      <a:tailEnd type="none" w="med" len="med"/>
+                    </a:lnB>
+                    <a:solidFill>
+                      <a:srgbClr val="23272F"/>
+                    </a:solidFill>
+                  </a:tcPr>
+                </a:tc>
+              </a:tr>
+              <a:tr h="429768">
+                <a:tc>
+                  <a:txBody>
+                    <a:bodyPr/>
+                    <a:lstStyle/>
+                    <a:p>
+                      <a:pPr algn="ctr" indent="0" marL="0">
+                        <a:buNone/>
+                      </a:pPr>
+                      <a:r>
+                        <a:rPr lang="en-US" sz="1400" dirty="0">
+                          <a:solidFill>
+                            <a:schemeClr val="tx2"/>
+                          </a:solidFill>
+                          <a:latin typeface="Malgun Gothic" pitchFamily="34" charset="0"/>
+                          <a:ea typeface="Malgun Gothic" pitchFamily="34" charset="-122"/>
+                          <a:cs typeface="Malgun Gothic" pitchFamily="34" charset="-120"/>
+                        </a:rPr>
+                        <a:t>5</a:t>
                       </a:r>
                       <a:endParaRPr lang="en-US" sz="1400" dirty="0">
                         <a:latin typeface="Malgun Gothic" charset="0"/>
@@ -14969,19 +17945,19 @@
                     <a:bodyPr/>
                     <a:lstStyle/>
                     <a:p>
-                      <a:pPr algn="l" indent="0" marL="0">
+                      <a:pPr indent="0" marL="0">
                         <a:buNone/>
                       </a:pPr>
                       <a:r>
-                        <a:rPr lang="en-US" sz="1400" dirty="0">
+                        <a:rPr lang="en-US" sz="1400" b="1" dirty="0">
                           <a:solidFill>
-                            <a:schemeClr val="tx2"/>
+                            <a:schemeClr val="tx1"/>
                           </a:solidFill>
                           <a:latin typeface="Malgun Gothic" pitchFamily="34" charset="0"/>
                           <a:ea typeface="Malgun Gothic" pitchFamily="34" charset="-122"/>
                           <a:cs typeface="Malgun Gothic" pitchFamily="34" charset="-120"/>
                         </a:rPr>
-                        <a:t>중복 영향 0.4%p</a:t>
+                        <a:t>Geti 점수도 낙관적</a:t>
                       </a:r>
                       <a:endParaRPr lang="en-US" sz="1400" dirty="0">
                         <a:latin typeface="Malgun Gothic" charset="0"/>
@@ -15032,14 +18008,12 @@
                     </a:solidFill>
                   </a:tcPr>
                 </a:tc>
-              </a:tr>
-              <a:tr h="566928">
                 <a:tc>
                   <a:txBody>
                     <a:bodyPr/>
                     <a:lstStyle/>
                     <a:p>
-                      <a:pPr algn="ctr" indent="0" marL="0">
+                      <a:pPr indent="0" marL="0">
                         <a:buNone/>
                       </a:pPr>
                       <a:r>
@@ -15051,75 +18025,7 @@
                           <a:ea typeface="Malgun Gothic" pitchFamily="34" charset="-122"/>
                           <a:cs typeface="Malgun Gothic" pitchFamily="34" charset="-120"/>
                         </a:rPr>
-                        <a:t>3</a:t>
-                      </a:r>
-                      <a:endParaRPr lang="en-US" sz="1400" dirty="0">
-                        <a:latin typeface="Malgun Gothic" charset="0"/>
-                        <a:ea typeface="Malgun Gothic" charset="0"/>
-                        <a:cs typeface="Malgun Gothic" charset="0"/>
-                      </a:endParaRPr>
-                    </a:p>
-                  </a:txBody>
-                  <a:tcPr marL="91440" marR="91440" marT="45720" marB="45720" anchor="ctr">
-                    <a:lnL w="9525" cap="flat" cmpd="sng" algn="ctr">
-                      <a:solidFill>
-                        <a:srgbClr val="3A3F48"/>
-                      </a:solidFill>
-                      <a:prstDash val="solid"/>
-                      <a:round/>
-                      <a:headEnd type="none" w="med" len="med"/>
-                      <a:tailEnd type="none" w="med" len="med"/>
-                    </a:lnL>
-                    <a:lnR w="9525" cap="flat" cmpd="sng" algn="ctr">
-                      <a:solidFill>
-                        <a:srgbClr val="3A3F48"/>
-                      </a:solidFill>
-                      <a:prstDash val="solid"/>
-                      <a:round/>
-                      <a:headEnd type="none" w="med" len="med"/>
-                      <a:tailEnd type="none" w="med" len="med"/>
-                    </a:lnR>
-                    <a:lnT w="9525" cap="flat" cmpd="sng" algn="ctr">
-                      <a:solidFill>
-                        <a:srgbClr val="3A3F48"/>
-                      </a:solidFill>
-                      <a:prstDash val="solid"/>
-                      <a:round/>
-                      <a:headEnd type="none" w="med" len="med"/>
-                      <a:tailEnd type="none" w="med" len="med"/>
-                    </a:lnT>
-                    <a:lnB w="9525" cap="flat" cmpd="sng" algn="ctr">
-                      <a:solidFill>
-                        <a:srgbClr val="3A3F48"/>
-                      </a:solidFill>
-                      <a:prstDash val="solid"/>
-                      <a:round/>
-                      <a:headEnd type="none" w="med" len="med"/>
-                      <a:tailEnd type="none" w="med" len="med"/>
-                    </a:lnB>
-                    <a:solidFill>
-                      <a:srgbClr val="23272F"/>
-                    </a:solidFill>
-                  </a:tcPr>
-                </a:tc>
-                <a:tc>
-                  <a:txBody>
-                    <a:bodyPr/>
-                    <a:lstStyle/>
-                    <a:p>
-                      <a:pPr algn="l" indent="0" marL="0">
-                        <a:buNone/>
-                      </a:pPr>
-                      <a:r>
-                        <a:rPr lang="en-US" sz="1400" dirty="0">
-                          <a:solidFill>
-                            <a:schemeClr val="tx1"/>
-                          </a:solidFill>
-                          <a:latin typeface="Malgun Gothic" pitchFamily="34" charset="0"/>
-                          <a:ea typeface="Malgun Gothic" pitchFamily="34" charset="-122"/>
-                          <a:cs typeface="Malgun Gothic" pitchFamily="34" charset="-120"/>
-                        </a:rPr>
-                        <a:t>업로드 내역 확인</a:t>
+                        <a:t>같은 원본의 ×3 증강 사본이 Geti 학습·테스트에 함께 분할</a:t>
                       </a:r>
                       <a:endParaRPr lang="en-US" sz="1400" dirty="0">
                         <a:latin typeface="Malgun Gothic" charset="0"/>
@@ -15187,7 +18093,77 @@
                           <a:ea typeface="Malgun Gothic" pitchFamily="34" charset="-122"/>
                           <a:cs typeface="Malgun Gothic" pitchFamily="34" charset="-120"/>
                         </a:rPr>
-                        <a:t>테스트 포함</a:t>
+                        <a:t>추정</a:t>
+                      </a:r>
+                      <a:endParaRPr lang="en-US" sz="1400" dirty="0">
+                        <a:latin typeface="Malgun Gothic" charset="0"/>
+                        <a:ea typeface="Malgun Gothic" charset="0"/>
+                        <a:cs typeface="Malgun Gothic" charset="0"/>
+                      </a:endParaRPr>
+                    </a:p>
+                  </a:txBody>
+                  <a:tcPr marL="91440" marR="91440" marT="45720" marB="45720" anchor="ctr">
+                    <a:lnL w="9525" cap="flat" cmpd="sng" algn="ctr">
+                      <a:solidFill>
+                        <a:srgbClr val="3A3F48"/>
+                      </a:solidFill>
+                      <a:prstDash val="solid"/>
+                      <a:round/>
+                      <a:headEnd type="none" w="med" len="med"/>
+                      <a:tailEnd type="none" w="med" len="med"/>
+                    </a:lnL>
+                    <a:lnR w="9525" cap="flat" cmpd="sng" algn="ctr">
+                      <a:solidFill>
+                        <a:srgbClr val="3A3F48"/>
+                      </a:solidFill>
+                      <a:prstDash val="solid"/>
+                      <a:round/>
+                      <a:headEnd type="none" w="med" len="med"/>
+                      <a:tailEnd type="none" w="med" len="med"/>
+                    </a:lnR>
+                    <a:lnT w="9525" cap="flat" cmpd="sng" algn="ctr">
+                      <a:solidFill>
+                        <a:srgbClr val="3A3F48"/>
+                      </a:solidFill>
+                      <a:prstDash val="solid"/>
+                      <a:round/>
+                      <a:headEnd type="none" w="med" len="med"/>
+                      <a:tailEnd type="none" w="med" len="med"/>
+                    </a:lnT>
+                    <a:lnB w="9525" cap="flat" cmpd="sng" algn="ctr">
+                      <a:solidFill>
+                        <a:srgbClr val="3A3F48"/>
+                      </a:solidFill>
+                      <a:prstDash val="solid"/>
+                      <a:round/>
+                      <a:headEnd type="none" w="med" len="med"/>
+                      <a:tailEnd type="none" w="med" len="med"/>
+                    </a:lnB>
+                    <a:solidFill>
+                      <a:srgbClr val="23272F"/>
+                    </a:solidFill>
+                  </a:tcPr>
+                </a:tc>
+              </a:tr>
+              <a:tr h="429768">
+                <a:tc>
+                  <a:txBody>
+                    <a:bodyPr/>
+                    <a:lstStyle/>
+                    <a:p>
+                      <a:pPr algn="ctr" indent="0" marL="0">
+                        <a:buNone/>
+                      </a:pPr>
+                      <a:r>
+                        <a:rPr lang="en-US" sz="1400" dirty="0">
+                          <a:solidFill>
+                            <a:schemeClr val="tx2"/>
+                          </a:solidFill>
+                          <a:latin typeface="Malgun Gothic" pitchFamily="34" charset="0"/>
+                          <a:ea typeface="Malgun Gothic" pitchFamily="34" charset="-122"/>
+                          <a:cs typeface="Malgun Gothic" pitchFamily="34" charset="-120"/>
+                        </a:rPr>
+                        <a:t>5</a:t>
                       </a:r>
                       <a:endParaRPr lang="en-US" sz="1400" dirty="0">
                         <a:latin typeface="Malgun Gothic" charset="0"/>
@@ -15243,19 +18219,19 @@
                     <a:bodyPr/>
                     <a:lstStyle/>
                     <a:p>
-                      <a:pPr algn="l" indent="0" marL="0">
+                      <a:pPr indent="0" marL="0">
                         <a:buNone/>
                       </a:pPr>
                       <a:r>
-                        <a:rPr lang="en-US" sz="1400" dirty="0">
+                        <a:rPr lang="en-US" sz="1400" b="1" dirty="0">
                           <a:solidFill>
-                            <a:schemeClr val="tx2"/>
+                            <a:schemeClr val="tx1"/>
                           </a:solidFill>
                           <a:latin typeface="Malgun Gothic" pitchFamily="34" charset="0"/>
                           <a:ea typeface="Malgun Gothic" pitchFamily="34" charset="-122"/>
                           <a:cs typeface="Malgun Gothic" pitchFamily="34" charset="-120"/>
                         </a:rPr>
-                        <a:t>1차 = 비교용</a:t>
+                        <a:t>작은 ATSS가 최고</a:t>
                       </a:r>
                       <a:endParaRPr lang="en-US" sz="1400" dirty="0">
                         <a:latin typeface="Malgun Gothic" charset="0"/>
@@ -15306,14 +18282,12 @@
                     </a:solidFill>
                   </a:tcPr>
                 </a:tc>
-              </a:tr>
-              <a:tr h="566928">
                 <a:tc>
                   <a:txBody>
                     <a:bodyPr/>
                     <a:lstStyle/>
                     <a:p>
-                      <a:pPr algn="ctr" indent="0" marL="0">
+                      <a:pPr indent="0" marL="0">
                         <a:buNone/>
                       </a:pPr>
                       <a:r>
@@ -15325,75 +18299,7 @@
                           <a:ea typeface="Malgun Gothic" pitchFamily="34" charset="-122"/>
                           <a:cs typeface="Malgun Gothic" pitchFamily="34" charset="-120"/>
                         </a:rPr>
-                        <a:t>4</a:t>
-                      </a:r>
-                      <a:endParaRPr lang="en-US" sz="1400" dirty="0">
-                        <a:latin typeface="Malgun Gothic" charset="0"/>
-                        <a:ea typeface="Malgun Gothic" charset="0"/>
-                        <a:cs typeface="Malgun Gothic" charset="0"/>
-                      </a:endParaRPr>
-                    </a:p>
-                  </a:txBody>
-                  <a:tcPr marL="91440" marR="91440" marT="45720" marB="45720" anchor="ctr">
-                    <a:lnL w="9525" cap="flat" cmpd="sng" algn="ctr">
-                      <a:solidFill>
-                        <a:srgbClr val="3A3F48"/>
-                      </a:solidFill>
-                      <a:prstDash val="solid"/>
-                      <a:round/>
-                      <a:headEnd type="none" w="med" len="med"/>
-                      <a:tailEnd type="none" w="med" len="med"/>
-                    </a:lnL>
-                    <a:lnR w="9525" cap="flat" cmpd="sng" algn="ctr">
-                      <a:solidFill>
-                        <a:srgbClr val="3A3F48"/>
-                      </a:solidFill>
-                      <a:prstDash val="solid"/>
-                      <a:round/>
-                      <a:headEnd type="none" w="med" len="med"/>
-                      <a:tailEnd type="none" w="med" len="med"/>
-                    </a:lnR>
-                    <a:lnT w="9525" cap="flat" cmpd="sng" algn="ctr">
-                      <a:solidFill>
-                        <a:srgbClr val="3A3F48"/>
-                      </a:solidFill>
-                      <a:prstDash val="solid"/>
-                      <a:round/>
-                      <a:headEnd type="none" w="med" len="med"/>
-                      <a:tailEnd type="none" w="med" len="med"/>
-                    </a:lnT>
-                    <a:lnB w="9525" cap="flat" cmpd="sng" algn="ctr">
-                      <a:solidFill>
-                        <a:srgbClr val="3A3F48"/>
-                      </a:solidFill>
-                      <a:prstDash val="solid"/>
-                      <a:round/>
-                      <a:headEnd type="none" w="med" len="med"/>
-                      <a:tailEnd type="none" w="med" len="med"/>
-                    </a:lnB>
-                    <a:solidFill>
-                      <a:srgbClr val="23272F"/>
-                    </a:solidFill>
-                  </a:tcPr>
-                </a:tc>
-                <a:tc>
-                  <a:txBody>
-                    <a:bodyPr/>
-                    <a:lstStyle/>
-                    <a:p>
-                      <a:pPr algn="l" indent="0" marL="0">
-                        <a:buNone/>
-                      </a:pPr>
-                      <a:r>
-                        <a:rPr lang="en-US" sz="1400" dirty="0">
-                          <a:solidFill>
-                            <a:schemeClr val="tx1"/>
-                          </a:solidFill>
-                          <a:latin typeface="Malgun Gothic" pitchFamily="34" charset="0"/>
-                          <a:ea typeface="Malgun Gothic" pitchFamily="34" charset="-122"/>
-                          <a:cs typeface="Malgun Gothic" pitchFamily="34" charset="-120"/>
-                        </a:rPr>
-                        <a:t>YOLOX-S · Tiny 비교</a:t>
+                        <a:t>입력 992×800 vs 640×640 · 적은 데이터엔 작은 모델 (학습 1회)</a:t>
                       </a:r>
                       <a:endParaRPr lang="en-US" sz="1400" dirty="0">
                         <a:latin typeface="Malgun Gothic" charset="0"/>
@@ -15455,13 +18361,83 @@
                       <a:r>
                         <a:rPr lang="en-US" sz="1400" b="1" dirty="0">
                           <a:solidFill>
-                            <a:schemeClr val="accent1"/>
+                            <a:schemeClr val="tx2"/>
                           </a:solidFill>
                           <a:latin typeface="Malgun Gothic" pitchFamily="34" charset="0"/>
                           <a:ea typeface="Malgun Gothic" pitchFamily="34" charset="-122"/>
                           <a:cs typeface="Malgun Gothic" pitchFamily="34" charset="-120"/>
                         </a:rPr>
-                        <a:t>89.2 · 83.2%</a:t>
+                        <a:t>가설</a:t>
+                      </a:r>
+                      <a:endParaRPr lang="en-US" sz="1400" dirty="0">
+                        <a:latin typeface="Malgun Gothic" charset="0"/>
+                        <a:ea typeface="Malgun Gothic" charset="0"/>
+                        <a:cs typeface="Malgun Gothic" charset="0"/>
+                      </a:endParaRPr>
+                    </a:p>
+                  </a:txBody>
+                  <a:tcPr marL="91440" marR="91440" marT="45720" marB="45720" anchor="ctr">
+                    <a:lnL w="9525" cap="flat" cmpd="sng" algn="ctr">
+                      <a:solidFill>
+                        <a:srgbClr val="3A3F48"/>
+                      </a:solidFill>
+                      <a:prstDash val="solid"/>
+                      <a:round/>
+                      <a:headEnd type="none" w="med" len="med"/>
+                      <a:tailEnd type="none" w="med" len="med"/>
+                    </a:lnL>
+                    <a:lnR w="9525" cap="flat" cmpd="sng" algn="ctr">
+                      <a:solidFill>
+                        <a:srgbClr val="3A3F48"/>
+                      </a:solidFill>
+                      <a:prstDash val="solid"/>
+                      <a:round/>
+                      <a:headEnd type="none" w="med" len="med"/>
+                      <a:tailEnd type="none" w="med" len="med"/>
+                    </a:lnR>
+                    <a:lnT w="9525" cap="flat" cmpd="sng" algn="ctr">
+                      <a:solidFill>
+                        <a:srgbClr val="3A3F48"/>
+                      </a:solidFill>
+                      <a:prstDash val="solid"/>
+                      <a:round/>
+                      <a:headEnd type="none" w="med" len="med"/>
+                      <a:tailEnd type="none" w="med" len="med"/>
+                    </a:lnT>
+                    <a:lnB w="9525" cap="flat" cmpd="sng" algn="ctr">
+                      <a:solidFill>
+                        <a:srgbClr val="3A3F48"/>
+                      </a:solidFill>
+                      <a:prstDash val="solid"/>
+                      <a:round/>
+                      <a:headEnd type="none" w="med" len="med"/>
+                      <a:tailEnd type="none" w="med" len="med"/>
+                    </a:lnB>
+                    <a:solidFill>
+                      <a:srgbClr val="23272F"/>
+                    </a:solidFill>
+                  </a:tcPr>
+                </a:tc>
+              </a:tr>
+              <a:tr h="429768">
+                <a:tc>
+                  <a:txBody>
+                    <a:bodyPr/>
+                    <a:lstStyle/>
+                    <a:p>
+                      <a:pPr algn="ctr" indent="0" marL="0">
+                        <a:buNone/>
+                      </a:pPr>
+                      <a:r>
+                        <a:rPr lang="en-US" sz="1400" dirty="0">
+                          <a:solidFill>
+                            <a:schemeClr val="tx2"/>
+                          </a:solidFill>
+                          <a:latin typeface="Malgun Gothic" pitchFamily="34" charset="0"/>
+                          <a:ea typeface="Malgun Gothic" pitchFamily="34" charset="-122"/>
+                          <a:cs typeface="Malgun Gothic" pitchFamily="34" charset="-120"/>
+                        </a:rPr>
+                        <a:t>6</a:t>
                       </a:r>
                       <a:endParaRPr lang="en-US" sz="1400" dirty="0">
                         <a:latin typeface="Malgun Gothic" charset="0"/>
@@ -15517,19 +18493,19 @@
                     <a:bodyPr/>
                     <a:lstStyle/>
                     <a:p>
-                      <a:pPr algn="l" indent="0" marL="0">
+                      <a:pPr indent="0" marL="0">
                         <a:buNone/>
                       </a:pPr>
                       <a:r>
-                        <a:rPr lang="en-US" sz="1400" dirty="0">
+                        <a:rPr lang="en-US" sz="1400" b="1" dirty="0">
                           <a:solidFill>
-                            <a:schemeClr val="tx2"/>
+                            <a:schemeClr val="tx1"/>
                           </a:solidFill>
                           <a:latin typeface="Malgun Gothic" pitchFamily="34" charset="0"/>
                           <a:ea typeface="Malgun Gothic" pitchFamily="34" charset="-122"/>
                           <a:cs typeface="Malgun Gothic" pitchFamily="34" charset="-120"/>
                         </a:rPr>
-                        <a:t>ATSS 최고</a:t>
+                        <a:t>나무 배경 33%</a:t>
                       </a:r>
                       <a:endParaRPr lang="en-US" sz="1400" dirty="0">
                         <a:latin typeface="Malgun Gothic" charset="0"/>
@@ -15580,14 +18556,12 @@
                     </a:solidFill>
                   </a:tcPr>
                 </a:tc>
-              </a:tr>
-              <a:tr h="566928">
                 <a:tc>
                   <a:txBody>
                     <a:bodyPr/>
                     <a:lstStyle/>
                     <a:p>
-                      <a:pPr algn="ctr" indent="0" marL="0">
+                      <a:pPr indent="0" marL="0">
                         <a:buNone/>
                       </a:pPr>
                       <a:r>
@@ -15599,75 +18573,7 @@
                           <a:ea typeface="Malgun Gothic" pitchFamily="34" charset="-122"/>
                           <a:cs typeface="Malgun Gothic" pitchFamily="34" charset="-120"/>
                         </a:rPr>
-                        <a:t>5</a:t>
-                      </a:r>
-                      <a:endParaRPr lang="en-US" sz="1400" dirty="0">
-                        <a:latin typeface="Malgun Gothic" charset="0"/>
-                        <a:ea typeface="Malgun Gothic" charset="0"/>
-                        <a:cs typeface="Malgun Gothic" charset="0"/>
-                      </a:endParaRPr>
-                    </a:p>
-                  </a:txBody>
-                  <a:tcPr marL="91440" marR="91440" marT="45720" marB="45720" anchor="ctr">
-                    <a:lnL w="9525" cap="flat" cmpd="sng" algn="ctr">
-                      <a:solidFill>
-                        <a:srgbClr val="3A3F48"/>
-                      </a:solidFill>
-                      <a:prstDash val="solid"/>
-                      <a:round/>
-                      <a:headEnd type="none" w="med" len="med"/>
-                      <a:tailEnd type="none" w="med" len="med"/>
-                    </a:lnL>
-                    <a:lnR w="9525" cap="flat" cmpd="sng" algn="ctr">
-                      <a:solidFill>
-                        <a:srgbClr val="3A3F48"/>
-                      </a:solidFill>
-                      <a:prstDash val="solid"/>
-                      <a:round/>
-                      <a:headEnd type="none" w="med" len="med"/>
-                      <a:tailEnd type="none" w="med" len="med"/>
-                    </a:lnR>
-                    <a:lnT w="9525" cap="flat" cmpd="sng" algn="ctr">
-                      <a:solidFill>
-                        <a:srgbClr val="3A3F48"/>
-                      </a:solidFill>
-                      <a:prstDash val="solid"/>
-                      <a:round/>
-                      <a:headEnd type="none" w="med" len="med"/>
-                      <a:tailEnd type="none" w="med" len="med"/>
-                    </a:lnT>
-                    <a:lnB w="9525" cap="flat" cmpd="sng" algn="ctr">
-                      <a:solidFill>
-                        <a:srgbClr val="3A3F48"/>
-                      </a:solidFill>
-                      <a:prstDash val="solid"/>
-                      <a:round/>
-                      <a:headEnd type="none" w="med" len="med"/>
-                      <a:tailEnd type="none" w="med" len="med"/>
-                    </a:lnB>
-                    <a:solidFill>
-                      <a:srgbClr val="23272F"/>
-                    </a:solidFill>
-                  </a:tcPr>
-                </a:tc>
-                <a:tc>
-                  <a:txBody>
-                    <a:bodyPr/>
-                    <a:lstStyle/>
-                    <a:p>
-                      <a:pPr algn="l" indent="0" marL="0">
-                        <a:buNone/>
-                      </a:pPr>
-                      <a:r>
-                        <a:rPr lang="en-US" sz="1400" dirty="0">
-                          <a:solidFill>
-                            <a:schemeClr val="tx1"/>
-                          </a:solidFill>
-                          <a:latin typeface="Malgun Gothic" pitchFamily="34" charset="0"/>
-                          <a:ea typeface="Malgun Gothic" pitchFamily="34" charset="-122"/>
-                          <a:cs typeface="Malgun Gothic" pitchFamily="34" charset="-120"/>
-                        </a:rPr>
-                        <a:t>INT8 양자화</a:t>
+                        <a:t>나무결 = scratch와 같은 가는 선 패턴</a:t>
                       </a:r>
                       <a:endParaRPr lang="en-US" sz="1400" dirty="0">
                         <a:latin typeface="Malgun Gothic" charset="0"/>
@@ -15735,7 +18641,77 @@
                           <a:ea typeface="Malgun Gothic" pitchFamily="34" charset="-122"/>
                           <a:cs typeface="Malgun Gothic" pitchFamily="34" charset="-120"/>
                         </a:rPr>
-                        <a:t>2–4배 빠름</a:t>
+                        <a:t>추정</a:t>
+                      </a:r>
+                      <a:endParaRPr lang="en-US" sz="1400" dirty="0">
+                        <a:latin typeface="Malgun Gothic" charset="0"/>
+                        <a:ea typeface="Malgun Gothic" charset="0"/>
+                        <a:cs typeface="Malgun Gothic" charset="0"/>
+                      </a:endParaRPr>
+                    </a:p>
+                  </a:txBody>
+                  <a:tcPr marL="91440" marR="91440" marT="45720" marB="45720" anchor="ctr">
+                    <a:lnL w="9525" cap="flat" cmpd="sng" algn="ctr">
+                      <a:solidFill>
+                        <a:srgbClr val="3A3F48"/>
+                      </a:solidFill>
+                      <a:prstDash val="solid"/>
+                      <a:round/>
+                      <a:headEnd type="none" w="med" len="med"/>
+                      <a:tailEnd type="none" w="med" len="med"/>
+                    </a:lnL>
+                    <a:lnR w="9525" cap="flat" cmpd="sng" algn="ctr">
+                      <a:solidFill>
+                        <a:srgbClr val="3A3F48"/>
+                      </a:solidFill>
+                      <a:prstDash val="solid"/>
+                      <a:round/>
+                      <a:headEnd type="none" w="med" len="med"/>
+                      <a:tailEnd type="none" w="med" len="med"/>
+                    </a:lnR>
+                    <a:lnT w="9525" cap="flat" cmpd="sng" algn="ctr">
+                      <a:solidFill>
+                        <a:srgbClr val="3A3F48"/>
+                      </a:solidFill>
+                      <a:prstDash val="solid"/>
+                      <a:round/>
+                      <a:headEnd type="none" w="med" len="med"/>
+                      <a:tailEnd type="none" w="med" len="med"/>
+                    </a:lnT>
+                    <a:lnB w="9525" cap="flat" cmpd="sng" algn="ctr">
+                      <a:solidFill>
+                        <a:srgbClr val="3A3F48"/>
+                      </a:solidFill>
+                      <a:prstDash val="solid"/>
+                      <a:round/>
+                      <a:headEnd type="none" w="med" len="med"/>
+                      <a:tailEnd type="none" w="med" len="med"/>
+                    </a:lnB>
+                    <a:solidFill>
+                      <a:srgbClr val="23272F"/>
+                    </a:solidFill>
+                  </a:tcPr>
+                </a:tc>
+              </a:tr>
+              <a:tr h="429768">
+                <a:tc>
+                  <a:txBody>
+                    <a:bodyPr/>
+                    <a:lstStyle/>
+                    <a:p>
+                      <a:pPr algn="ctr" indent="0" marL="0">
+                        <a:buNone/>
+                      </a:pPr>
+                      <a:r>
+                        <a:rPr lang="en-US" sz="1400" dirty="0">
+                          <a:solidFill>
+                            <a:schemeClr val="tx2"/>
+                          </a:solidFill>
+                          <a:latin typeface="Malgun Gothic" pitchFamily="34" charset="0"/>
+                          <a:ea typeface="Malgun Gothic" pitchFamily="34" charset="-122"/>
+                          <a:cs typeface="Malgun Gothic" pitchFamily="34" charset="-120"/>
+                        </a:rPr>
+                        <a:t>7</a:t>
                       </a:r>
                       <a:endParaRPr lang="en-US" sz="1400" dirty="0">
                         <a:latin typeface="Malgun Gothic" charset="0"/>
@@ -15791,19 +18767,19 @@
                     <a:bodyPr/>
                     <a:lstStyle/>
                     <a:p>
-                      <a:pPr algn="l" indent="0" marL="0">
+                      <a:pPr indent="0" marL="0">
                         <a:buNone/>
                       </a:pPr>
                       <a:r>
-                        <a:rPr lang="en-US" sz="1400" dirty="0">
+                        <a:rPr lang="en-US" sz="1400" b="1" dirty="0">
                           <a:solidFill>
-                            <a:schemeClr val="tx2"/>
+                            <a:schemeClr val="tx1"/>
                           </a:solidFill>
                           <a:latin typeface="Malgun Gothic" pitchFamily="34" charset="0"/>
                           <a:ea typeface="Malgun Gothic" pitchFamily="34" charset="-122"/>
                           <a:cs typeface="Malgun Gothic" pitchFamily="34" charset="-120"/>
                         </a:rPr>
-                        <a:t>놓침 소폭 증가</a:t>
+                        <a:t>INT8 놓침 증가</a:t>
                       </a:r>
                       <a:endParaRPr lang="en-US" sz="1400" dirty="0">
                         <a:latin typeface="Malgun Gothic" charset="0"/>
@@ -15854,14 +18830,12 @@
                     </a:solidFill>
                   </a:tcPr>
                 </a:tc>
-              </a:tr>
-              <a:tr h="566928">
                 <a:tc>
                   <a:txBody>
                     <a:bodyPr/>
                     <a:lstStyle/>
                     <a:p>
-                      <a:pPr algn="ctr" indent="0" marL="0">
+                      <a:pPr indent="0" marL="0">
                         <a:buNone/>
                       </a:pPr>
                       <a:r>
@@ -15873,75 +18847,7 @@
                           <a:ea typeface="Malgun Gothic" pitchFamily="34" charset="-122"/>
                           <a:cs typeface="Malgun Gothic" pitchFamily="34" charset="-120"/>
                         </a:rPr>
-                        <a:t>6</a:t>
-                      </a:r>
-                      <a:endParaRPr lang="en-US" sz="1400" dirty="0">
-                        <a:latin typeface="Malgun Gothic" charset="0"/>
-                        <a:ea typeface="Malgun Gothic" charset="0"/>
-                        <a:cs typeface="Malgun Gothic" charset="0"/>
-                      </a:endParaRPr>
-                    </a:p>
-                  </a:txBody>
-                  <a:tcPr marL="91440" marR="91440" marT="45720" marB="45720" anchor="ctr">
-                    <a:lnL w="9525" cap="flat" cmpd="sng" algn="ctr">
-                      <a:solidFill>
-                        <a:srgbClr val="3A3F48"/>
-                      </a:solidFill>
-                      <a:prstDash val="solid"/>
-                      <a:round/>
-                      <a:headEnd type="none" w="med" len="med"/>
-                      <a:tailEnd type="none" w="med" len="med"/>
-                    </a:lnL>
-                    <a:lnR w="9525" cap="flat" cmpd="sng" algn="ctr">
-                      <a:solidFill>
-                        <a:srgbClr val="3A3F48"/>
-                      </a:solidFill>
-                      <a:prstDash val="solid"/>
-                      <a:round/>
-                      <a:headEnd type="none" w="med" len="med"/>
-                      <a:tailEnd type="none" w="med" len="med"/>
-                    </a:lnR>
-                    <a:lnT w="9525" cap="flat" cmpd="sng" algn="ctr">
-                      <a:solidFill>
-                        <a:srgbClr val="3A3F48"/>
-                      </a:solidFill>
-                      <a:prstDash val="solid"/>
-                      <a:round/>
-                      <a:headEnd type="none" w="med" len="med"/>
-                      <a:tailEnd type="none" w="med" len="med"/>
-                    </a:lnT>
-                    <a:lnB w="9525" cap="flat" cmpd="sng" algn="ctr">
-                      <a:solidFill>
-                        <a:srgbClr val="3A3F48"/>
-                      </a:solidFill>
-                      <a:prstDash val="solid"/>
-                      <a:round/>
-                      <a:headEnd type="none" w="med" len="med"/>
-                      <a:tailEnd type="none" w="med" len="med"/>
-                    </a:lnB>
-                    <a:solidFill>
-                      <a:srgbClr val="23272F"/>
-                    </a:solidFill>
-                  </a:tcPr>
-                </a:tc>
-                <a:tc>
-                  <a:txBody>
-                    <a:bodyPr/>
-                    <a:lstStyle/>
-                    <a:p>
-                      <a:pPr algn="l" indent="0" marL="0">
-                        <a:buNone/>
-                      </a:pPr>
-                      <a:r>
-                        <a:rPr lang="en-US" sz="1400" dirty="0">
-                          <a:solidFill>
-                            <a:schemeClr val="tx1"/>
-                          </a:solidFill>
-                          <a:latin typeface="Malgun Gothic" pitchFamily="34" charset="0"/>
-                          <a:ea typeface="Malgun Gothic" pitchFamily="34" charset="-122"/>
-                          <a:cs typeface="Malgun Gothic" pitchFamily="34" charset="-120"/>
-                        </a:rPr>
-                        <a:t>2차 세트 45장</a:t>
+                        <a:t>양자화로 점수 소폭 하락 → 0.30 근처 결함이 기준 아래로</a:t>
                       </a:r>
                       <a:endParaRPr lang="en-US" sz="1400" dirty="0">
                         <a:latin typeface="Malgun Gothic" charset="0"/>
@@ -16003,13 +18909,83 @@
                       <a:r>
                         <a:rPr lang="en-US" sz="1400" b="1" dirty="0">
                           <a:solidFill>
-                            <a:schemeClr val="accent2"/>
+                            <a:schemeClr val="accent3"/>
                           </a:solidFill>
                           <a:latin typeface="Malgun Gothic" pitchFamily="34" charset="0"/>
                           <a:ea typeface="Malgun Gothic" pitchFamily="34" charset="-122"/>
                           <a:cs typeface="Malgun Gothic" pitchFamily="34" charset="-120"/>
                         </a:rPr>
-                        <a:t>검출 47%</a:t>
+                        <a:t>추정</a:t>
+                      </a:r>
+                      <a:endParaRPr lang="en-US" sz="1400" dirty="0">
+                        <a:latin typeface="Malgun Gothic" charset="0"/>
+                        <a:ea typeface="Malgun Gothic" charset="0"/>
+                        <a:cs typeface="Malgun Gothic" charset="0"/>
+                      </a:endParaRPr>
+                    </a:p>
+                  </a:txBody>
+                  <a:tcPr marL="91440" marR="91440" marT="45720" marB="45720" anchor="ctr">
+                    <a:lnL w="9525" cap="flat" cmpd="sng" algn="ctr">
+                      <a:solidFill>
+                        <a:srgbClr val="3A3F48"/>
+                      </a:solidFill>
+                      <a:prstDash val="solid"/>
+                      <a:round/>
+                      <a:headEnd type="none" w="med" len="med"/>
+                      <a:tailEnd type="none" w="med" len="med"/>
+                    </a:lnL>
+                    <a:lnR w="9525" cap="flat" cmpd="sng" algn="ctr">
+                      <a:solidFill>
+                        <a:srgbClr val="3A3F48"/>
+                      </a:solidFill>
+                      <a:prstDash val="solid"/>
+                      <a:round/>
+                      <a:headEnd type="none" w="med" len="med"/>
+                      <a:tailEnd type="none" w="med" len="med"/>
+                    </a:lnR>
+                    <a:lnT w="9525" cap="flat" cmpd="sng" algn="ctr">
+                      <a:solidFill>
+                        <a:srgbClr val="3A3F48"/>
+                      </a:solidFill>
+                      <a:prstDash val="solid"/>
+                      <a:round/>
+                      <a:headEnd type="none" w="med" len="med"/>
+                      <a:tailEnd type="none" w="med" len="med"/>
+                    </a:lnT>
+                    <a:lnB w="9525" cap="flat" cmpd="sng" algn="ctr">
+                      <a:solidFill>
+                        <a:srgbClr val="3A3F48"/>
+                      </a:solidFill>
+                      <a:prstDash val="solid"/>
+                      <a:round/>
+                      <a:headEnd type="none" w="med" len="med"/>
+                      <a:tailEnd type="none" w="med" len="med"/>
+                    </a:lnB>
+                    <a:solidFill>
+                      <a:srgbClr val="23272F"/>
+                    </a:solidFill>
+                  </a:tcPr>
+                </a:tc>
+              </a:tr>
+              <a:tr h="429768">
+                <a:tc>
+                  <a:txBody>
+                    <a:bodyPr/>
+                    <a:lstStyle/>
+                    <a:p>
+                      <a:pPr algn="ctr" indent="0" marL="0">
+                        <a:buNone/>
+                      </a:pPr>
+                      <a:r>
+                        <a:rPr lang="en-US" sz="1400" dirty="0">
+                          <a:solidFill>
+                            <a:schemeClr val="tx2"/>
+                          </a:solidFill>
+                          <a:latin typeface="Malgun Gothic" pitchFamily="34" charset="0"/>
+                          <a:ea typeface="Malgun Gothic" pitchFamily="34" charset="-122"/>
+                          <a:cs typeface="Malgun Gothic" pitchFamily="34" charset="-120"/>
+                        </a:rPr>
+                        <a:t>8</a:t>
                       </a:r>
                       <a:endParaRPr lang="en-US" sz="1400" dirty="0">
                         <a:latin typeface="Malgun Gothic" charset="0"/>
@@ -16065,19 +19041,19 @@
                     <a:bodyPr/>
                     <a:lstStyle/>
                     <a:p>
-                      <a:pPr algn="l" indent="0" marL="0">
+                      <a:pPr indent="0" marL="0">
                         <a:buNone/>
                       </a:pPr>
                       <a:r>
-                        <a:rPr lang="en-US" sz="1400" dirty="0">
+                        <a:rPr lang="en-US" sz="1400" b="1" dirty="0">
                           <a:solidFill>
-                            <a:schemeClr val="tx2"/>
+                            <a:schemeClr val="tx1"/>
                           </a:solidFill>
                           <a:latin typeface="Malgun Gothic" pitchFamily="34" charset="0"/>
                           <a:ea typeface="Malgun Gothic" pitchFamily="34" charset="-122"/>
                           <a:cs typeface="Malgun Gothic" pitchFamily="34" charset="-120"/>
                         </a:rPr>
-                        <a:t>환경 변화에 취약</a:t>
+                        <a:t>2차 세트 47%</a:t>
                       </a:r>
                       <a:endParaRPr lang="en-US" sz="1400" dirty="0">
                         <a:latin typeface="Malgun Gothic" charset="0"/>
@@ -16128,14 +19104,12 @@
                     </a:solidFill>
                   </a:tcPr>
                 </a:tc>
-              </a:tr>
-              <a:tr h="566928">
                 <a:tc>
                   <a:txBody>
                     <a:bodyPr/>
                     <a:lstStyle/>
                     <a:p>
-                      <a:pPr algn="ctr" indent="0" marL="0">
+                      <a:pPr indent="0" marL="0">
                         <a:buNone/>
                       </a:pPr>
                       <a:r>
@@ -16147,75 +19121,7 @@
                           <a:ea typeface="Malgun Gothic" pitchFamily="34" charset="-122"/>
                           <a:cs typeface="Malgun Gothic" pitchFamily="34" charset="-120"/>
                         </a:rPr>
-                        <a:t>7</a:t>
-                      </a:r>
-                      <a:endParaRPr lang="en-US" sz="1400" dirty="0">
-                        <a:latin typeface="Malgun Gothic" charset="0"/>
-                        <a:ea typeface="Malgun Gothic" charset="0"/>
-                        <a:cs typeface="Malgun Gothic" charset="0"/>
-                      </a:endParaRPr>
-                    </a:p>
-                  </a:txBody>
-                  <a:tcPr marL="91440" marR="91440" marT="45720" marB="45720" anchor="ctr">
-                    <a:lnL w="9525" cap="flat" cmpd="sng" algn="ctr">
-                      <a:solidFill>
-                        <a:srgbClr val="3A3F48"/>
-                      </a:solidFill>
-                      <a:prstDash val="solid"/>
-                      <a:round/>
-                      <a:headEnd type="none" w="med" len="med"/>
-                      <a:tailEnd type="none" w="med" len="med"/>
-                    </a:lnL>
-                    <a:lnR w="9525" cap="flat" cmpd="sng" algn="ctr">
-                      <a:solidFill>
-                        <a:srgbClr val="3A3F48"/>
-                      </a:solidFill>
-                      <a:prstDash val="solid"/>
-                      <a:round/>
-                      <a:headEnd type="none" w="med" len="med"/>
-                      <a:tailEnd type="none" w="med" len="med"/>
-                    </a:lnR>
-                    <a:lnT w="9525" cap="flat" cmpd="sng" algn="ctr">
-                      <a:solidFill>
-                        <a:srgbClr val="3A3F48"/>
-                      </a:solidFill>
-                      <a:prstDash val="solid"/>
-                      <a:round/>
-                      <a:headEnd type="none" w="med" len="med"/>
-                      <a:tailEnd type="none" w="med" len="med"/>
-                    </a:lnT>
-                    <a:lnB w="9525" cap="flat" cmpd="sng" algn="ctr">
-                      <a:solidFill>
-                        <a:srgbClr val="3A3F48"/>
-                      </a:solidFill>
-                      <a:prstDash val="solid"/>
-                      <a:round/>
-                      <a:headEnd type="none" w="med" len="med"/>
-                      <a:tailEnd type="none" w="med" len="med"/>
-                    </a:lnB>
-                    <a:solidFill>
-                      <a:srgbClr val="23272F"/>
-                    </a:solidFill>
-                  </a:tcPr>
-                </a:tc>
-                <a:tc>
-                  <a:txBody>
-                    <a:bodyPr/>
-                    <a:lstStyle/>
-                    <a:p>
-                      <a:pPr algn="l" indent="0" marL="0">
-                        <a:buNone/>
-                      </a:pPr>
-                      <a:r>
-                        <a:rPr lang="en-US" sz="1400" dirty="0">
-                          <a:solidFill>
-                            <a:schemeClr val="tx1"/>
-                          </a:solidFill>
-                          <a:latin typeface="Malgun Gothic" pitchFamily="34" charset="0"/>
-                          <a:ea typeface="Malgun Gothic" pitchFamily="34" charset="-122"/>
-                          <a:cs typeface="Malgun Gothic" pitchFamily="34" charset="-120"/>
-                        </a:rPr>
-                        <a:t>2차 · 기준값 0.15로 낮춤</a:t>
+                        <a:t>crack이 30×26px로 작아짐 (검출 1/15) + 새 촬영 환경</a:t>
                       </a:r>
                       <a:endParaRPr lang="en-US" sz="1400" dirty="0">
                         <a:latin typeface="Malgun Gothic" charset="0"/>
@@ -16277,13 +19183,83 @@
                       <a:r>
                         <a:rPr lang="en-US" sz="1400" b="1" dirty="0">
                           <a:solidFill>
-                            <a:schemeClr val="accent2"/>
+                            <a:schemeClr val="accent6"/>
                           </a:solidFill>
                           <a:latin typeface="Malgun Gothic" pitchFamily="34" charset="0"/>
                           <a:ea typeface="Malgun Gothic" pitchFamily="34" charset="-122"/>
                           <a:cs typeface="Malgun Gothic" pitchFamily="34" charset="-120"/>
                         </a:rPr>
-                        <a:t>정상 87% 오검출</a:t>
+                        <a:t>측정</a:t>
+                      </a:r>
+                      <a:endParaRPr lang="en-US" sz="1400" dirty="0">
+                        <a:latin typeface="Malgun Gothic" charset="0"/>
+                        <a:ea typeface="Malgun Gothic" charset="0"/>
+                        <a:cs typeface="Malgun Gothic" charset="0"/>
+                      </a:endParaRPr>
+                    </a:p>
+                  </a:txBody>
+                  <a:tcPr marL="91440" marR="91440" marT="45720" marB="45720" anchor="ctr">
+                    <a:lnL w="9525" cap="flat" cmpd="sng" algn="ctr">
+                      <a:solidFill>
+                        <a:srgbClr val="3A3F48"/>
+                      </a:solidFill>
+                      <a:prstDash val="solid"/>
+                      <a:round/>
+                      <a:headEnd type="none" w="med" len="med"/>
+                      <a:tailEnd type="none" w="med" len="med"/>
+                    </a:lnL>
+                    <a:lnR w="9525" cap="flat" cmpd="sng" algn="ctr">
+                      <a:solidFill>
+                        <a:srgbClr val="3A3F48"/>
+                      </a:solidFill>
+                      <a:prstDash val="solid"/>
+                      <a:round/>
+                      <a:headEnd type="none" w="med" len="med"/>
+                      <a:tailEnd type="none" w="med" len="med"/>
+                    </a:lnR>
+                    <a:lnT w="9525" cap="flat" cmpd="sng" algn="ctr">
+                      <a:solidFill>
+                        <a:srgbClr val="3A3F48"/>
+                      </a:solidFill>
+                      <a:prstDash val="solid"/>
+                      <a:round/>
+                      <a:headEnd type="none" w="med" len="med"/>
+                      <a:tailEnd type="none" w="med" len="med"/>
+                    </a:lnT>
+                    <a:lnB w="9525" cap="flat" cmpd="sng" algn="ctr">
+                      <a:solidFill>
+                        <a:srgbClr val="3A3F48"/>
+                      </a:solidFill>
+                      <a:prstDash val="solid"/>
+                      <a:round/>
+                      <a:headEnd type="none" w="med" len="med"/>
+                      <a:tailEnd type="none" w="med" len="med"/>
+                    </a:lnB>
+                    <a:solidFill>
+                      <a:srgbClr val="23272F"/>
+                    </a:solidFill>
+                  </a:tcPr>
+                </a:tc>
+              </a:tr>
+              <a:tr h="429768">
+                <a:tc>
+                  <a:txBody>
+                    <a:bodyPr/>
+                    <a:lstStyle/>
+                    <a:p>
+                      <a:pPr algn="ctr" indent="0" marL="0">
+                        <a:buNone/>
+                      </a:pPr>
+                      <a:r>
+                        <a:rPr lang="en-US" sz="1400" dirty="0">
+                          <a:solidFill>
+                            <a:schemeClr val="tx2"/>
+                          </a:solidFill>
+                          <a:latin typeface="Malgun Gothic" pitchFamily="34" charset="0"/>
+                          <a:ea typeface="Malgun Gothic" pitchFamily="34" charset="-122"/>
+                          <a:cs typeface="Malgun Gothic" pitchFamily="34" charset="-120"/>
+                        </a:rPr>
+                        <a:t>8</a:t>
                       </a:r>
                       <a:endParaRPr lang="en-US" sz="1400" dirty="0">
                         <a:latin typeface="Malgun Gothic" charset="0"/>
@@ -16339,7 +19315,213 @@
                     <a:bodyPr/>
                     <a:lstStyle/>
                     <a:p>
-                      <a:pPr algn="l" indent="0" marL="0">
+                      <a:pPr indent="0" marL="0">
+                        <a:buNone/>
+                      </a:pPr>
+                      <a:r>
+                        <a:rPr lang="en-US" sz="1400" b="1" dirty="0">
+                          <a:solidFill>
+                            <a:schemeClr val="tx1"/>
+                          </a:solidFill>
+                          <a:latin typeface="Malgun Gothic" pitchFamily="34" charset="0"/>
+                          <a:ea typeface="Malgun Gothic" pitchFamily="34" charset="-122"/>
+                          <a:cs typeface="Malgun Gothic" pitchFamily="34" charset="-120"/>
+                        </a:rPr>
+                        <a:t>YOLOX-S 점수가 낮음</a:t>
+                      </a:r>
+                      <a:endParaRPr lang="en-US" sz="1400" dirty="0">
+                        <a:latin typeface="Malgun Gothic" charset="0"/>
+                        <a:ea typeface="Malgun Gothic" charset="0"/>
+                        <a:cs typeface="Malgun Gothic" charset="0"/>
+                      </a:endParaRPr>
+                    </a:p>
+                  </a:txBody>
+                  <a:tcPr marL="91440" marR="91440" marT="45720" marB="45720" anchor="ctr">
+                    <a:lnL w="9525" cap="flat" cmpd="sng" algn="ctr">
+                      <a:solidFill>
+                        <a:srgbClr val="3A3F48"/>
+                      </a:solidFill>
+                      <a:prstDash val="solid"/>
+                      <a:round/>
+                      <a:headEnd type="none" w="med" len="med"/>
+                      <a:tailEnd type="none" w="med" len="med"/>
+                    </a:lnL>
+                    <a:lnR w="9525" cap="flat" cmpd="sng" algn="ctr">
+                      <a:solidFill>
+                        <a:srgbClr val="3A3F48"/>
+                      </a:solidFill>
+                      <a:prstDash val="solid"/>
+                      <a:round/>
+                      <a:headEnd type="none" w="med" len="med"/>
+                      <a:tailEnd type="none" w="med" len="med"/>
+                    </a:lnR>
+                    <a:lnT w="9525" cap="flat" cmpd="sng" algn="ctr">
+                      <a:solidFill>
+                        <a:srgbClr val="3A3F48"/>
+                      </a:solidFill>
+                      <a:prstDash val="solid"/>
+                      <a:round/>
+                      <a:headEnd type="none" w="med" len="med"/>
+                      <a:tailEnd type="none" w="med" len="med"/>
+                    </a:lnT>
+                    <a:lnB w="9525" cap="flat" cmpd="sng" algn="ctr">
+                      <a:solidFill>
+                        <a:srgbClr val="3A3F48"/>
+                      </a:solidFill>
+                      <a:prstDash val="solid"/>
+                      <a:round/>
+                      <a:headEnd type="none" w="med" len="med"/>
+                      <a:tailEnd type="none" w="med" len="med"/>
+                    </a:lnB>
+                    <a:solidFill>
+                      <a:srgbClr val="23272F"/>
+                    </a:solidFill>
+                  </a:tcPr>
+                </a:tc>
+                <a:tc>
+                  <a:txBody>
+                    <a:bodyPr/>
+                    <a:lstStyle/>
+                    <a:p>
+                      <a:pPr indent="0" marL="0">
+                        <a:buNone/>
+                      </a:pPr>
+                      <a:r>
+                        <a:rPr lang="en-US" sz="1400" dirty="0">
+                          <a:solidFill>
+                            <a:schemeClr val="tx1"/>
+                          </a:solidFill>
+                          <a:latin typeface="Malgun Gothic" pitchFamily="34" charset="0"/>
+                          <a:ea typeface="Malgun Gothic" pitchFamily="34" charset="-122"/>
+                          <a:cs typeface="Malgun Gothic" pitchFamily="34" charset="-120"/>
+                        </a:rPr>
+                        <a:t>점수 = objectness × class 확률의 곱</a:t>
+                      </a:r>
+                      <a:endParaRPr lang="en-US" sz="1400" dirty="0">
+                        <a:latin typeface="Malgun Gothic" charset="0"/>
+                        <a:ea typeface="Malgun Gothic" charset="0"/>
+                        <a:cs typeface="Malgun Gothic" charset="0"/>
+                      </a:endParaRPr>
+                    </a:p>
+                  </a:txBody>
+                  <a:tcPr marL="91440" marR="91440" marT="45720" marB="45720" anchor="ctr">
+                    <a:lnL w="9525" cap="flat" cmpd="sng" algn="ctr">
+                      <a:solidFill>
+                        <a:srgbClr val="3A3F48"/>
+                      </a:solidFill>
+                      <a:prstDash val="solid"/>
+                      <a:round/>
+                      <a:headEnd type="none" w="med" len="med"/>
+                      <a:tailEnd type="none" w="med" len="med"/>
+                    </a:lnL>
+                    <a:lnR w="9525" cap="flat" cmpd="sng" algn="ctr">
+                      <a:solidFill>
+                        <a:srgbClr val="3A3F48"/>
+                      </a:solidFill>
+                      <a:prstDash val="solid"/>
+                      <a:round/>
+                      <a:headEnd type="none" w="med" len="med"/>
+                      <a:tailEnd type="none" w="med" len="med"/>
+                    </a:lnR>
+                    <a:lnT w="9525" cap="flat" cmpd="sng" algn="ctr">
+                      <a:solidFill>
+                        <a:srgbClr val="3A3F48"/>
+                      </a:solidFill>
+                      <a:prstDash val="solid"/>
+                      <a:round/>
+                      <a:headEnd type="none" w="med" len="med"/>
+                      <a:tailEnd type="none" w="med" len="med"/>
+                    </a:lnT>
+                    <a:lnB w="9525" cap="flat" cmpd="sng" algn="ctr">
+                      <a:solidFill>
+                        <a:srgbClr val="3A3F48"/>
+                      </a:solidFill>
+                      <a:prstDash val="solid"/>
+                      <a:round/>
+                      <a:headEnd type="none" w="med" len="med"/>
+                      <a:tailEnd type="none" w="med" len="med"/>
+                    </a:lnB>
+                    <a:solidFill>
+                      <a:srgbClr val="23272F"/>
+                    </a:solidFill>
+                  </a:tcPr>
+                </a:tc>
+                <a:tc>
+                  <a:txBody>
+                    <a:bodyPr/>
+                    <a:lstStyle/>
+                    <a:p>
+                      <a:pPr algn="ctr" indent="0" marL="0">
+                        <a:buNone/>
+                      </a:pPr>
+                      <a:r>
+                        <a:rPr lang="en-US" sz="1400" b="1" dirty="0">
+                          <a:solidFill>
+                            <a:schemeClr val="accent3"/>
+                          </a:solidFill>
+                          <a:latin typeface="Malgun Gothic" pitchFamily="34" charset="0"/>
+                          <a:ea typeface="Malgun Gothic" pitchFamily="34" charset="-122"/>
+                          <a:cs typeface="Malgun Gothic" pitchFamily="34" charset="-120"/>
+                        </a:rPr>
+                        <a:t>추정</a:t>
+                      </a:r>
+                      <a:endParaRPr lang="en-US" sz="1400" dirty="0">
+                        <a:latin typeface="Malgun Gothic" charset="0"/>
+                        <a:ea typeface="Malgun Gothic" charset="0"/>
+                        <a:cs typeface="Malgun Gothic" charset="0"/>
+                      </a:endParaRPr>
+                    </a:p>
+                  </a:txBody>
+                  <a:tcPr marL="91440" marR="91440" marT="45720" marB="45720" anchor="ctr">
+                    <a:lnL w="9525" cap="flat" cmpd="sng" algn="ctr">
+                      <a:solidFill>
+                        <a:srgbClr val="3A3F48"/>
+                      </a:solidFill>
+                      <a:prstDash val="solid"/>
+                      <a:round/>
+                      <a:headEnd type="none" w="med" len="med"/>
+                      <a:tailEnd type="none" w="med" len="med"/>
+                    </a:lnL>
+                    <a:lnR w="9525" cap="flat" cmpd="sng" algn="ctr">
+                      <a:solidFill>
+                        <a:srgbClr val="3A3F48"/>
+                      </a:solidFill>
+                      <a:prstDash val="solid"/>
+                      <a:round/>
+                      <a:headEnd type="none" w="med" len="med"/>
+                      <a:tailEnd type="none" w="med" len="med"/>
+                    </a:lnR>
+                    <a:lnT w="9525" cap="flat" cmpd="sng" algn="ctr">
+                      <a:solidFill>
+                        <a:srgbClr val="3A3F48"/>
+                      </a:solidFill>
+                      <a:prstDash val="solid"/>
+                      <a:round/>
+                      <a:headEnd type="none" w="med" len="med"/>
+                      <a:tailEnd type="none" w="med" len="med"/>
+                    </a:lnT>
+                    <a:lnB w="9525" cap="flat" cmpd="sng" algn="ctr">
+                      <a:solidFill>
+                        <a:srgbClr val="3A3F48"/>
+                      </a:solidFill>
+                      <a:prstDash val="solid"/>
+                      <a:round/>
+                      <a:headEnd type="none" w="med" len="med"/>
+                      <a:tailEnd type="none" w="med" len="med"/>
+                    </a:lnB>
+                    <a:solidFill>
+                      <a:srgbClr val="23272F"/>
+                    </a:solidFill>
+                  </a:tcPr>
+                </a:tc>
+              </a:tr>
+              <a:tr h="429768">
+                <a:tc>
+                  <a:txBody>
+                    <a:bodyPr/>
+                    <a:lstStyle/>
+                    <a:p>
+                      <a:pPr algn="ctr" indent="0" marL="0">
                         <a:buNone/>
                       </a:pPr>
                       <a:r>
@@ -16351,7 +19533,211 @@
                           <a:ea typeface="Malgun Gothic" pitchFamily="34" charset="-122"/>
                           <a:cs typeface="Malgun Gothic" pitchFamily="34" charset="-120"/>
                         </a:rPr>
-                        <a:t>재학습 필요</a:t>
+                        <a:t>8</a:t>
+                      </a:r>
+                      <a:endParaRPr lang="en-US" sz="1400" dirty="0">
+                        <a:latin typeface="Malgun Gothic" charset="0"/>
+                        <a:ea typeface="Malgun Gothic" charset="0"/>
+                        <a:cs typeface="Malgun Gothic" charset="0"/>
+                      </a:endParaRPr>
+                    </a:p>
+                  </a:txBody>
+                  <a:tcPr marL="91440" marR="91440" marT="45720" marB="45720" anchor="ctr">
+                    <a:lnL w="9525" cap="flat" cmpd="sng" algn="ctr">
+                      <a:solidFill>
+                        <a:srgbClr val="3A3F48"/>
+                      </a:solidFill>
+                      <a:prstDash val="solid"/>
+                      <a:round/>
+                      <a:headEnd type="none" w="med" len="med"/>
+                      <a:tailEnd type="none" w="med" len="med"/>
+                    </a:lnL>
+                    <a:lnR w="9525" cap="flat" cmpd="sng" algn="ctr">
+                      <a:solidFill>
+                        <a:srgbClr val="3A3F48"/>
+                      </a:solidFill>
+                      <a:prstDash val="solid"/>
+                      <a:round/>
+                      <a:headEnd type="none" w="med" len="med"/>
+                      <a:tailEnd type="none" w="med" len="med"/>
+                    </a:lnR>
+                    <a:lnT w="9525" cap="flat" cmpd="sng" algn="ctr">
+                      <a:solidFill>
+                        <a:srgbClr val="3A3F48"/>
+                      </a:solidFill>
+                      <a:prstDash val="solid"/>
+                      <a:round/>
+                      <a:headEnd type="none" w="med" len="med"/>
+                      <a:tailEnd type="none" w="med" len="med"/>
+                    </a:lnT>
+                    <a:lnB w="9525" cap="flat" cmpd="sng" algn="ctr">
+                      <a:solidFill>
+                        <a:srgbClr val="3A3F48"/>
+                      </a:solidFill>
+                      <a:prstDash val="solid"/>
+                      <a:round/>
+                      <a:headEnd type="none" w="med" len="med"/>
+                      <a:tailEnd type="none" w="med" len="med"/>
+                    </a:lnB>
+                    <a:solidFill>
+                      <a:srgbClr val="23272F"/>
+                    </a:solidFill>
+                  </a:tcPr>
+                </a:tc>
+                <a:tc>
+                  <a:txBody>
+                    <a:bodyPr/>
+                    <a:lstStyle/>
+                    <a:p>
+                      <a:pPr indent="0" marL="0">
+                        <a:buNone/>
+                      </a:pPr>
+                      <a:r>
+                        <a:rPr lang="en-US" sz="1400" b="1" dirty="0">
+                          <a:solidFill>
+                            <a:schemeClr val="tx1"/>
+                          </a:solidFill>
+                          <a:latin typeface="Malgun Gothic" pitchFamily="34" charset="0"/>
+                          <a:ea typeface="Malgun Gothic" pitchFamily="34" charset="-122"/>
+                          <a:cs typeface="Malgun Gothic" pitchFamily="34" charset="-120"/>
+                        </a:rPr>
+                        <a:t>기준값으로 해결 안 됨</a:t>
+                      </a:r>
+                      <a:endParaRPr lang="en-US" sz="1400" dirty="0">
+                        <a:latin typeface="Malgun Gothic" charset="0"/>
+                        <a:ea typeface="Malgun Gothic" charset="0"/>
+                        <a:cs typeface="Malgun Gothic" charset="0"/>
+                      </a:endParaRPr>
+                    </a:p>
+                  </a:txBody>
+                  <a:tcPr marL="91440" marR="91440" marT="45720" marB="45720" anchor="ctr">
+                    <a:lnL w="9525" cap="flat" cmpd="sng" algn="ctr">
+                      <a:solidFill>
+                        <a:srgbClr val="3A3F48"/>
+                      </a:solidFill>
+                      <a:prstDash val="solid"/>
+                      <a:round/>
+                      <a:headEnd type="none" w="med" len="med"/>
+                      <a:tailEnd type="none" w="med" len="med"/>
+                    </a:lnL>
+                    <a:lnR w="9525" cap="flat" cmpd="sng" algn="ctr">
+                      <a:solidFill>
+                        <a:srgbClr val="3A3F48"/>
+                      </a:solidFill>
+                      <a:prstDash val="solid"/>
+                      <a:round/>
+                      <a:headEnd type="none" w="med" len="med"/>
+                      <a:tailEnd type="none" w="med" len="med"/>
+                    </a:lnR>
+                    <a:lnT w="9525" cap="flat" cmpd="sng" algn="ctr">
+                      <a:solidFill>
+                        <a:srgbClr val="3A3F48"/>
+                      </a:solidFill>
+                      <a:prstDash val="solid"/>
+                      <a:round/>
+                      <a:headEnd type="none" w="med" len="med"/>
+                      <a:tailEnd type="none" w="med" len="med"/>
+                    </a:lnT>
+                    <a:lnB w="9525" cap="flat" cmpd="sng" algn="ctr">
+                      <a:solidFill>
+                        <a:srgbClr val="3A3F48"/>
+                      </a:solidFill>
+                      <a:prstDash val="solid"/>
+                      <a:round/>
+                      <a:headEnd type="none" w="med" len="med"/>
+                      <a:tailEnd type="none" w="med" len="med"/>
+                    </a:lnB>
+                    <a:solidFill>
+                      <a:srgbClr val="23272F"/>
+                    </a:solidFill>
+                  </a:tcPr>
+                </a:tc>
+                <a:tc>
+                  <a:txBody>
+                    <a:bodyPr/>
+                    <a:lstStyle/>
+                    <a:p>
+                      <a:pPr indent="0" marL="0">
+                        <a:buNone/>
+                      </a:pPr>
+                      <a:r>
+                        <a:rPr lang="en-US" sz="1400" dirty="0">
+                          <a:solidFill>
+                            <a:schemeClr val="tx1"/>
+                          </a:solidFill>
+                          <a:latin typeface="Malgun Gothic" pitchFamily="34" charset="0"/>
+                          <a:ea typeface="Malgun Gothic" pitchFamily="34" charset="-122"/>
+                          <a:cs typeface="Malgun Gothic" pitchFamily="34" charset="-120"/>
+                        </a:rPr>
+                        <a:t>새 환경에서 결함·정상 점수 분포가 겹침</a:t>
+                      </a:r>
+                      <a:endParaRPr lang="en-US" sz="1400" dirty="0">
+                        <a:latin typeface="Malgun Gothic" charset="0"/>
+                        <a:ea typeface="Malgun Gothic" charset="0"/>
+                        <a:cs typeface="Malgun Gothic" charset="0"/>
+                      </a:endParaRPr>
+                    </a:p>
+                  </a:txBody>
+                  <a:tcPr marL="91440" marR="91440" marT="45720" marB="45720" anchor="ctr">
+                    <a:lnL w="9525" cap="flat" cmpd="sng" algn="ctr">
+                      <a:solidFill>
+                        <a:srgbClr val="3A3F48"/>
+                      </a:solidFill>
+                      <a:prstDash val="solid"/>
+                      <a:round/>
+                      <a:headEnd type="none" w="med" len="med"/>
+                      <a:tailEnd type="none" w="med" len="med"/>
+                    </a:lnL>
+                    <a:lnR w="9525" cap="flat" cmpd="sng" algn="ctr">
+                      <a:solidFill>
+                        <a:srgbClr val="3A3F48"/>
+                      </a:solidFill>
+                      <a:prstDash val="solid"/>
+                      <a:round/>
+                      <a:headEnd type="none" w="med" len="med"/>
+                      <a:tailEnd type="none" w="med" len="med"/>
+                    </a:lnR>
+                    <a:lnT w="9525" cap="flat" cmpd="sng" algn="ctr">
+                      <a:solidFill>
+                        <a:srgbClr val="3A3F48"/>
+                      </a:solidFill>
+                      <a:prstDash val="solid"/>
+                      <a:round/>
+                      <a:headEnd type="none" w="med" len="med"/>
+                      <a:tailEnd type="none" w="med" len="med"/>
+                    </a:lnT>
+                    <a:lnB w="9525" cap="flat" cmpd="sng" algn="ctr">
+                      <a:solidFill>
+                        <a:srgbClr val="3A3F48"/>
+                      </a:solidFill>
+                      <a:prstDash val="solid"/>
+                      <a:round/>
+                      <a:headEnd type="none" w="med" len="med"/>
+                      <a:tailEnd type="none" w="med" len="med"/>
+                    </a:lnB>
+                    <a:solidFill>
+                      <a:srgbClr val="23272F"/>
+                    </a:solidFill>
+                  </a:tcPr>
+                </a:tc>
+                <a:tc>
+                  <a:txBody>
+                    <a:bodyPr/>
+                    <a:lstStyle/>
+                    <a:p>
+                      <a:pPr algn="ctr" indent="0" marL="0">
+                        <a:buNone/>
+                      </a:pPr>
+                      <a:r>
+                        <a:rPr lang="en-US" sz="1400" b="1" dirty="0">
+                          <a:solidFill>
+                            <a:schemeClr val="accent6"/>
+                          </a:solidFill>
+                          <a:latin typeface="Malgun Gothic" pitchFamily="34" charset="0"/>
+                          <a:ea typeface="Malgun Gothic" pitchFamily="34" charset="-122"/>
+                          <a:cs typeface="Malgun Gothic" pitchFamily="34" charset="-120"/>
+                        </a:rPr>
+                        <a:t>측정</a:t>
                       </a:r>
                       <a:endParaRPr lang="en-US" sz="1400" dirty="0">
                         <a:latin typeface="Malgun Gothic" charset="0"/>
@@ -16409,14 +19795,14 @@
       </p:graphicFrame>
       <p:sp>
         <p:nvSpPr>
-          <p:cNvPr id="4" name="log-note"/>
+          <p:cNvPr id="5" name="causes-legend"/>
           <p:cNvSpPr txBox="1"/>
           <p:nvPr/>
         </p:nvSpPr>
         <p:spPr>
           <a:xfrm>
-            <a:off x="548640" y="5897880"/>
-            <a:ext cx="6903720" cy="274320"/>
+            <a:off x="548640" y="5989320"/>
+            <a:ext cx="11094415" cy="274320"/>
           </a:xfrm>
           <a:prstGeom prst="rect">
             <a:avLst/>
@@ -16432,132 +19818,13 @@
               <a:buNone/>
             </a:pPr>
             <a:r>
-              <a:rPr lang="en-US" sz="1000" dirty="0">
+              <a:rPr lang="en-US" sz="1200" b="1" dirty="0">
                 <a:solidFill>
-                  <a:schemeClr val="tx2"/>
+                  <a:schemeClr val="accent6"/>
                 </a:solidFill>
               </a:rPr>
-              <a:t>결과: mAP@50 (1–2, 4) · CPU 속도 (5) · 결함 셀 검출률, ATSS (6–7)</a:t>
+              <a:t>측정 </a:t>
             </a:r>
-            <a:endParaRPr lang="en-US" sz="1000" dirty="0"/>
-          </a:p>
-        </p:txBody>
-      </p:sp>
-      <p:sp>
-        <p:nvSpPr>
-          <p:cNvPr id="5" name="lesson-0"/>
-          <p:cNvSpPr/>
-          <p:nvPr/>
-        </p:nvSpPr>
-        <p:spPr>
-          <a:xfrm>
-            <a:off x="7726680" y="1234440"/>
-            <a:ext cx="3913632" cy="1051560"/>
-          </a:xfrm>
-          <a:prstGeom prst="roundRect">
-            <a:avLst>
-              <a:gd name="adj" fmla="val 6957"/>
-            </a:avLst>
-          </a:prstGeom>
-          <a:solidFill>
-            <a:schemeClr val="bg2"/>
-          </a:solidFill>
-          <a:ln/>
-        </p:spPr>
-      </p:sp>
-      <p:sp>
-        <p:nvSpPr>
-          <p:cNvPr id="6" name="lesson-n-0"/>
-          <p:cNvSpPr txBox="1"/>
-          <p:nvPr/>
-        </p:nvSpPr>
-        <p:spPr>
-          <a:xfrm>
-            <a:off x="7955280" y="1389888"/>
-            <a:ext cx="548640" cy="365760"/>
-          </a:xfrm>
-          <a:prstGeom prst="rect">
-            <a:avLst/>
-          </a:prstGeom>
-          <a:noFill/>
-          <a:ln/>
-        </p:spPr>
-        <p:txBody>
-          <a:bodyPr wrap="square" lIns="0" tIns="0" rIns="0" bIns="0" rtlCol="0" anchor="t"/>
-          <a:lstStyle/>
-          <a:p>
-            <a:pPr indent="0" marL="0">
-              <a:buNone/>
-            </a:pPr>
-            <a:r>
-              <a:rPr lang="en-US" sz="1800" b="1" dirty="0">
-                <a:solidFill>
-                  <a:schemeClr val="accent1"/>
-                </a:solidFill>
-              </a:rPr>
-              <a:t>01</a:t>
-            </a:r>
-            <a:endParaRPr lang="en-US" sz="1800" dirty="0"/>
-          </a:p>
-        </p:txBody>
-      </p:sp>
-      <p:sp>
-        <p:nvSpPr>
-          <p:cNvPr id="7" name="lesson-h-0"/>
-          <p:cNvSpPr txBox="1"/>
-          <p:nvPr/>
-        </p:nvSpPr>
-        <p:spPr>
-          <a:xfrm>
-            <a:off x="8503920" y="1362456"/>
-            <a:ext cx="3017520" cy="347472"/>
-          </a:xfrm>
-          <a:prstGeom prst="rect">
-            <a:avLst/>
-          </a:prstGeom>
-          <a:noFill/>
-          <a:ln/>
-        </p:spPr>
-        <p:txBody>
-          <a:bodyPr wrap="square" lIns="0" tIns="0" rIns="0" bIns="0" rtlCol="0" anchor="t"/>
-          <a:lstStyle/>
-          <a:p>
-            <a:pPr indent="0" marL="0">
-              <a:buNone/>
-            </a:pPr>
-            <a:r>
-              <a:rPr lang="en-US" sz="1500" b="1" dirty="0">
-                <a:solidFill>
-                  <a:schemeClr val="tx1"/>
-                </a:solidFill>
-              </a:rPr>
-              <a:t>테스트셋은 먼저 분리</a:t>
-            </a:r>
-            <a:endParaRPr lang="en-US" sz="1500" dirty="0"/>
-          </a:p>
-        </p:txBody>
-      </p:sp>
-      <p:sp>
-        <p:nvSpPr>
-          <p:cNvPr id="8" name="lesson-d-0"/>
-          <p:cNvSpPr txBox="1"/>
-          <p:nvPr/>
-        </p:nvSpPr>
-        <p:spPr>
-          <a:xfrm>
-            <a:off x="8503920" y="1755648"/>
-            <a:ext cx="3017520" cy="365760"/>
-          </a:xfrm>
-          <a:prstGeom prst="rect">
-            <a:avLst/>
-          </a:prstGeom>
-          <a:noFill/>
-          <a:ln/>
-        </p:spPr>
-        <p:txBody>
-          <a:bodyPr wrap="square" lIns="0" tIns="0" rIns="0" bIns="0" rtlCol="0" anchor="t"/>
-          <a:lstStyle/>
-          <a:p>
             <a:pPr indent="0" marL="0">
               <a:buNone/>
             </a:pPr>
@@ -16567,127 +19834,19 @@
                   <a:schemeClr val="tx2"/>
                 </a:solidFill>
               </a:rPr>
-              <a:t>업로드 전 분리 · 중복 확인</a:t>
+              <a:t>데이터로 확인   </a:t>
             </a:r>
-            <a:endParaRPr lang="en-US" sz="1200" dirty="0"/>
-          </a:p>
-        </p:txBody>
-      </p:sp>
-      <p:sp>
-        <p:nvSpPr>
-          <p:cNvPr id="9" name="lesson-1"/>
-          <p:cNvSpPr/>
-          <p:nvPr/>
-        </p:nvSpPr>
-        <p:spPr>
-          <a:xfrm>
-            <a:off x="7726680" y="2423160"/>
-            <a:ext cx="3913632" cy="1051560"/>
-          </a:xfrm>
-          <a:prstGeom prst="roundRect">
-            <a:avLst>
-              <a:gd name="adj" fmla="val 6957"/>
-            </a:avLst>
-          </a:prstGeom>
-          <a:solidFill>
-            <a:schemeClr val="bg2"/>
-          </a:solidFill>
-          <a:ln/>
-        </p:spPr>
-      </p:sp>
-      <p:sp>
-        <p:nvSpPr>
-          <p:cNvPr id="10" name="lesson-n-1"/>
-          <p:cNvSpPr txBox="1"/>
-          <p:nvPr/>
-        </p:nvSpPr>
-        <p:spPr>
-          <a:xfrm>
-            <a:off x="7955280" y="2578608"/>
-            <a:ext cx="548640" cy="365760"/>
-          </a:xfrm>
-          <a:prstGeom prst="rect">
-            <a:avLst/>
-          </a:prstGeom>
-          <a:noFill/>
-          <a:ln/>
-        </p:spPr>
-        <p:txBody>
-          <a:bodyPr wrap="square" lIns="0" tIns="0" rIns="0" bIns="0" rtlCol="0" anchor="t"/>
-          <a:lstStyle/>
-          <a:p>
             <a:pPr indent="0" marL="0">
               <a:buNone/>
             </a:pPr>
             <a:r>
-              <a:rPr lang="en-US" sz="1800" b="1" dirty="0">
+              <a:rPr lang="en-US" sz="1200" b="1" dirty="0">
                 <a:solidFill>
-                  <a:schemeClr val="accent1"/>
+                  <a:schemeClr val="accent3"/>
                 </a:solidFill>
               </a:rPr>
-              <a:t>02</a:t>
+              <a:t>추정 </a:t>
             </a:r>
-            <a:endParaRPr lang="en-US" sz="1800" dirty="0"/>
-          </a:p>
-        </p:txBody>
-      </p:sp>
-      <p:sp>
-        <p:nvSpPr>
-          <p:cNvPr id="11" name="lesson-h-1"/>
-          <p:cNvSpPr txBox="1"/>
-          <p:nvPr/>
-        </p:nvSpPr>
-        <p:spPr>
-          <a:xfrm>
-            <a:off x="8503920" y="2551176"/>
-            <a:ext cx="3017520" cy="347472"/>
-          </a:xfrm>
-          <a:prstGeom prst="rect">
-            <a:avLst/>
-          </a:prstGeom>
-          <a:noFill/>
-          <a:ln/>
-        </p:spPr>
-        <p:txBody>
-          <a:bodyPr wrap="square" lIns="0" tIns="0" rIns="0" bIns="0" rtlCol="0" anchor="t"/>
-          <a:lstStyle/>
-          <a:p>
-            <a:pPr indent="0" marL="0">
-              <a:buNone/>
-            </a:pPr>
-            <a:r>
-              <a:rPr lang="en-US" sz="1500" b="1" dirty="0">
-                <a:solidFill>
-                  <a:schemeClr val="tx1"/>
-                </a:solidFill>
-              </a:rPr>
-              <a:t>큰 모델 ≠ 좋은 모델</a:t>
-            </a:r>
-            <a:endParaRPr lang="en-US" sz="1500" dirty="0"/>
-          </a:p>
-        </p:txBody>
-      </p:sp>
-      <p:sp>
-        <p:nvSpPr>
-          <p:cNvPr id="12" name="lesson-d-1"/>
-          <p:cNvSpPr txBox="1"/>
-          <p:nvPr/>
-        </p:nvSpPr>
-        <p:spPr>
-          <a:xfrm>
-            <a:off x="8503920" y="2944368"/>
-            <a:ext cx="3017520" cy="365760"/>
-          </a:xfrm>
-          <a:prstGeom prst="rect">
-            <a:avLst/>
-          </a:prstGeom>
-          <a:noFill/>
-          <a:ln/>
-        </p:spPr>
-        <p:txBody>
-          <a:bodyPr wrap="square" lIns="0" tIns="0" rIns="0" bIns="0" rtlCol="0" anchor="t"/>
-          <a:lstStyle/>
-          <a:p>
             <a:pPr indent="0" marL="0">
               <a:buNone/>
             </a:pPr>
@@ -16697,127 +19856,19 @@
                   <a:schemeClr val="tx2"/>
                 </a:solidFill>
               </a:rPr>
-              <a:t>3.9M ATSS가 9M YOLOX-S보다 정확</a:t>
+              <a:t>데이터와 일치, 따로 검증 안 함   </a:t>
             </a:r>
-            <a:endParaRPr lang="en-US" sz="1200" dirty="0"/>
-          </a:p>
-        </p:txBody>
-      </p:sp>
-      <p:sp>
-        <p:nvSpPr>
-          <p:cNvPr id="13" name="lesson-2"/>
-          <p:cNvSpPr/>
-          <p:nvPr/>
-        </p:nvSpPr>
-        <p:spPr>
-          <a:xfrm>
-            <a:off x="7726680" y="3611880"/>
-            <a:ext cx="3913632" cy="1051560"/>
-          </a:xfrm>
-          <a:prstGeom prst="roundRect">
-            <a:avLst>
-              <a:gd name="adj" fmla="val 6957"/>
-            </a:avLst>
-          </a:prstGeom>
-          <a:solidFill>
-            <a:schemeClr val="bg2"/>
-          </a:solidFill>
-          <a:ln/>
-        </p:spPr>
-      </p:sp>
-      <p:sp>
-        <p:nvSpPr>
-          <p:cNvPr id="14" name="lesson-n-2"/>
-          <p:cNvSpPr txBox="1"/>
-          <p:nvPr/>
-        </p:nvSpPr>
-        <p:spPr>
-          <a:xfrm>
-            <a:off x="7955280" y="3767328"/>
-            <a:ext cx="548640" cy="365760"/>
-          </a:xfrm>
-          <a:prstGeom prst="rect">
-            <a:avLst/>
-          </a:prstGeom>
-          <a:noFill/>
-          <a:ln/>
-        </p:spPr>
-        <p:txBody>
-          <a:bodyPr wrap="square" lIns="0" tIns="0" rIns="0" bIns="0" rtlCol="0" anchor="t"/>
-          <a:lstStyle/>
-          <a:p>
             <a:pPr indent="0" marL="0">
               <a:buNone/>
             </a:pPr>
             <a:r>
-              <a:rPr lang="en-US" sz="1800" b="1" dirty="0">
+              <a:rPr lang="en-US" sz="1200" b="1" dirty="0">
                 <a:solidFill>
-                  <a:schemeClr val="accent1"/>
+                  <a:schemeClr val="tx2"/>
                 </a:solidFill>
               </a:rPr>
-              <a:t>03</a:t>
+              <a:t>가설 </a:t>
             </a:r>
-            <a:endParaRPr lang="en-US" sz="1800" dirty="0"/>
-          </a:p>
-        </p:txBody>
-      </p:sp>
-      <p:sp>
-        <p:nvSpPr>
-          <p:cNvPr id="15" name="lesson-h-2"/>
-          <p:cNvSpPr txBox="1"/>
-          <p:nvPr/>
-        </p:nvSpPr>
-        <p:spPr>
-          <a:xfrm>
-            <a:off x="8503920" y="3739896"/>
-            <a:ext cx="3017520" cy="347472"/>
-          </a:xfrm>
-          <a:prstGeom prst="rect">
-            <a:avLst/>
-          </a:prstGeom>
-          <a:noFill/>
-          <a:ln/>
-        </p:spPr>
-        <p:txBody>
-          <a:bodyPr wrap="square" lIns="0" tIns="0" rIns="0" bIns="0" rtlCol="0" anchor="t"/>
-          <a:lstStyle/>
-          <a:p>
-            <a:pPr indent="0" marL="0">
-              <a:buNone/>
-            </a:pPr>
-            <a:r>
-              <a:rPr lang="en-US" sz="1500" b="1" dirty="0">
-                <a:solidFill>
-                  <a:schemeClr val="tx1"/>
-                </a:solidFill>
-              </a:rPr>
-              <a:t>최적화는 기준값과 함께</a:t>
-            </a:r>
-            <a:endParaRPr lang="en-US" sz="1500" dirty="0"/>
-          </a:p>
-        </p:txBody>
-      </p:sp>
-      <p:sp>
-        <p:nvSpPr>
-          <p:cNvPr id="16" name="lesson-d-2"/>
-          <p:cNvSpPr txBox="1"/>
-          <p:nvPr/>
-        </p:nvSpPr>
-        <p:spPr>
-          <a:xfrm>
-            <a:off x="8503920" y="4133088"/>
-            <a:ext cx="3017520" cy="365760"/>
-          </a:xfrm>
-          <a:prstGeom prst="rect">
-            <a:avLst/>
-          </a:prstGeom>
-          <a:noFill/>
-          <a:ln/>
-        </p:spPr>
-        <p:txBody>
-          <a:bodyPr wrap="square" lIns="0" tIns="0" rIns="0" bIns="0" rtlCol="0" anchor="t"/>
-          <a:lstStyle/>
-          <a:p>
             <a:pPr indent="0" marL="0">
               <a:buNone/>
             </a:pPr>
@@ -16827,169 +19878,9 @@
                   <a:schemeClr val="tx2"/>
                 </a:solidFill>
               </a:rPr>
-              <a:t>INT8 = 속도 ↑, 신뢰도 ↓</a:t>
+              <a:t>미검증</a:t>
             </a:r>
             <a:endParaRPr lang="en-US" sz="1200" dirty="0"/>
-          </a:p>
-        </p:txBody>
-      </p:sp>
-      <p:sp>
-        <p:nvSpPr>
-          <p:cNvPr id="17" name="lesson-3"/>
-          <p:cNvSpPr/>
-          <p:nvPr/>
-        </p:nvSpPr>
-        <p:spPr>
-          <a:xfrm>
-            <a:off x="7726680" y="4800600"/>
-            <a:ext cx="3913632" cy="1051560"/>
-          </a:xfrm>
-          <a:prstGeom prst="roundRect">
-            <a:avLst>
-              <a:gd name="adj" fmla="val 6957"/>
-            </a:avLst>
-          </a:prstGeom>
-          <a:solidFill>
-            <a:schemeClr val="bg2"/>
-          </a:solidFill>
-          <a:ln/>
-        </p:spPr>
-      </p:sp>
-      <p:sp>
-        <p:nvSpPr>
-          <p:cNvPr id="18" name="lesson-n-3"/>
-          <p:cNvSpPr txBox="1"/>
-          <p:nvPr/>
-        </p:nvSpPr>
-        <p:spPr>
-          <a:xfrm>
-            <a:off x="7955280" y="4956048"/>
-            <a:ext cx="548640" cy="365760"/>
-          </a:xfrm>
-          <a:prstGeom prst="rect">
-            <a:avLst/>
-          </a:prstGeom>
-          <a:noFill/>
-          <a:ln/>
-        </p:spPr>
-        <p:txBody>
-          <a:bodyPr wrap="square" lIns="0" tIns="0" rIns="0" bIns="0" rtlCol="0" anchor="t"/>
-          <a:lstStyle/>
-          <a:p>
-            <a:pPr indent="0" marL="0">
-              <a:buNone/>
-            </a:pPr>
-            <a:r>
-              <a:rPr lang="en-US" sz="1800" b="1" dirty="0">
-                <a:solidFill>
-                  <a:schemeClr val="accent1"/>
-                </a:solidFill>
-              </a:rPr>
-              <a:t>04</a:t>
-            </a:r>
-            <a:endParaRPr lang="en-US" sz="1800" dirty="0"/>
-          </a:p>
-        </p:txBody>
-      </p:sp>
-      <p:sp>
-        <p:nvSpPr>
-          <p:cNvPr id="19" name="lesson-h-3"/>
-          <p:cNvSpPr txBox="1"/>
-          <p:nvPr/>
-        </p:nvSpPr>
-        <p:spPr>
-          <a:xfrm>
-            <a:off x="8503920" y="4928616"/>
-            <a:ext cx="3017520" cy="347472"/>
-          </a:xfrm>
-          <a:prstGeom prst="rect">
-            <a:avLst/>
-          </a:prstGeom>
-          <a:noFill/>
-          <a:ln/>
-        </p:spPr>
-        <p:txBody>
-          <a:bodyPr wrap="square" lIns="0" tIns="0" rIns="0" bIns="0" rtlCol="0" anchor="t"/>
-          <a:lstStyle/>
-          <a:p>
-            <a:pPr indent="0" marL="0">
-              <a:buNone/>
-            </a:pPr>
-            <a:r>
-              <a:rPr lang="en-US" sz="1500" b="1" dirty="0">
-                <a:solidFill>
-                  <a:schemeClr val="tx1"/>
-                </a:solidFill>
-              </a:rPr>
-              <a:t>점수 ≠ 현장 성능</a:t>
-            </a:r>
-            <a:endParaRPr lang="en-US" sz="1500" dirty="0"/>
-          </a:p>
-        </p:txBody>
-      </p:sp>
-      <p:sp>
-        <p:nvSpPr>
-          <p:cNvPr id="20" name="lesson-d-3"/>
-          <p:cNvSpPr txBox="1"/>
-          <p:nvPr/>
-        </p:nvSpPr>
-        <p:spPr>
-          <a:xfrm>
-            <a:off x="8503920" y="5321808"/>
-            <a:ext cx="3017520" cy="365760"/>
-          </a:xfrm>
-          <a:prstGeom prst="rect">
-            <a:avLst/>
-          </a:prstGeom>
-          <a:noFill/>
-          <a:ln/>
-        </p:spPr>
-        <p:txBody>
-          <a:bodyPr wrap="square" lIns="0" tIns="0" rIns="0" bIns="0" rtlCol="0" anchor="t"/>
-          <a:lstStyle/>
-          <a:p>
-            <a:pPr indent="0" marL="0">
-              <a:buNone/>
-            </a:pPr>
-            <a:r>
-              <a:rPr lang="en-US" sz="1200" dirty="0">
-                <a:solidFill>
-                  <a:schemeClr val="tx2"/>
-                </a:solidFill>
-              </a:rPr>
-              <a:t>92.9% → 새 환경 47%</a:t>
-            </a:r>
-            <a:endParaRPr lang="en-US" sz="1200" dirty="0"/>
-          </a:p>
-        </p:txBody>
-      </p:sp>
-      <p:sp>
-        <p:nvSpPr>
-          <p:cNvPr id="22" name="Text 0"/>
-          <p:cNvSpPr/>
-          <p:nvPr>
-            <p:ph idx="101" type="body" hasCustomPrompt="1"/>
-          </p:nvPr>
-        </p:nvSpPr>
-        <p:spPr>
-          <a:xfrm>
-            <a:off x="548640" y="1005840"/>
-            <a:ext cx="11094415" cy="411480"/>
-          </a:xfrm>
-          <a:prstGeom prst="rect">
-            <a:avLst/>
-          </a:prstGeom>
-          <a:noFill/>
-          <a:ln/>
-        </p:spPr>
-        <p:txBody>
-          <a:bodyPr wrap="square" lIns="0" tIns="0" rIns="0" bIns="0" rtlCol="0" anchor="ctr"/>
-          <a:lstStyle/>
-          <a:p>
-            <a:pPr algn="l" indent="0" marL="0">
-              <a:buNone/>
-            </a:pPr>
-            <a:endParaRPr lang="en-US" sz="1500" dirty="0"/>
           </a:p>
         </p:txBody>
       </p:sp>

--- a/docs/submission/BatteryVision_발표.pptx
+++ b/docs/submission/BatteryVision_발표.pptx
@@ -16,9 +16,10 @@
     <p:sldId id="264" r:id="rId10"/>
     <p:sldId id="265" r:id="rId11"/>
     <p:sldId id="266" r:id="rId12"/>
+    <p:sldId id="267" r:id="rId13"/>
   </p:sldIdLst>
   <p:notesMasterIdLst>
-    <p:notesMasterId r:id="rId13"/>
+    <p:notesMasterId r:id="rId14"/>
   </p:notesMasterIdLst>
   <p:sldSz cx="12192000" cy="6858000"/>
   <p:notesSz cx="6858000" cy="12192000"/>
@@ -117,13 +118,13 @@
   <p:extLst>
     <p:ext uri="{521415D9-36F7-43E2-AB2F-B90AF26B5E84}">
       <p14:sectionLst xmlns:p14="http://schemas.microsoft.com/office/powerpoint/2010/main">
-        <p14:section name="도입" id="{98717ff3-c11c-ab26-22eb-50142ed9e67d}">
+        <p14:section name="도입" id="{076eb02f-5afc-1a65-3561-743820df2dff}">
           <p14:sldIdLst>
             <p14:sldId id="256"/>
             <p14:sldId id="257"/>
           </p14:sldIdLst>
         </p14:section>
-        <p14:section name="실험" id="{637e45b7-6636-1466-480d-48dd11d05963}">
+        <p14:section name="실험" id="{e3e54d36-3792-4920-e93d-52064877aaaf}">
           <p14:sldIdLst>
             <p14:sldId id="258"/>
             <p14:sldId id="259"/>
@@ -131,21 +132,22 @@
             <p14:sldId id="261"/>
           </p14:sldIdLst>
         </p14:section>
-        <p14:section name="최적화" id="{11f94f5a-a960-ee64-8b60-98aac936bc4e}">
+        <p14:section name="최적화" id="{f45113e3-66e8-e4ff-842e-17102335b750}">
           <p14:sldIdLst>
             <p14:sldId id="262"/>
           </p14:sldIdLst>
         </p14:section>
-        <p14:section name="검증" id="{69d40958-8096-e577-2cf8-e044e2c3ae9e}">
+        <p14:section name="검증" id="{2753db95-4b25-223f-3db5-9e2a1731c483}">
           <p14:sldIdLst>
             <p14:sldId id="263"/>
           </p14:sldIdLst>
         </p14:section>
-        <p14:section name="정리" id="{7a16fc6c-fbe3-84f9-31d6-18cb52fa2046}">
+        <p14:section name="정리" id="{33f28c43-0a38-24a8-d40a-ae94db6bd67e}">
           <p14:sldIdLst>
             <p14:sldId id="264"/>
             <p14:sldId id="265"/>
             <p14:sldId id="266"/>
+            <p14:sldId id="267"/>
           </p14:sldIdLst>
         </p14:section>
       </p14:sectionLst>
@@ -1509,6 +1511,94 @@
 </p:notes>
 </file>
 
+<file path=ppt/notesSlides/notesSlide12.xml><?xml version="1.0" encoding="utf-8"?>
+<p:notes xmlns:a="http://schemas.openxmlformats.org/drawingml/2006/main" xmlns:r="http://schemas.openxmlformats.org/officeDocument/2006/relationships" xmlns:p="http://schemas.openxmlformats.org/presentationml/2006/main">
+  <p:cSld>
+    <p:spTree>
+      <p:nvGrpSpPr>
+        <p:cNvPr id="1" name=""/>
+        <p:cNvGrpSpPr/>
+        <p:nvPr/>
+      </p:nvGrpSpPr>
+      <p:grpSpPr>
+        <a:xfrm>
+          <a:off x="0" y="0"/>
+          <a:ext cx="0" cy="0"/>
+          <a:chOff x="0" y="0"/>
+          <a:chExt cx="0" cy="0"/>
+        </a:xfrm>
+      </p:grpSpPr>
+      <p:sp>
+        <p:nvSpPr>
+          <p:cNvPr id="2" name="Slide Image Placeholder 1"/>
+          <p:cNvSpPr>
+            <a:spLocks noGrp="1" noRot="1" noChangeAspect="1"/>
+          </p:cNvSpPr>
+          <p:nvPr>
+            <p:ph type="sldImg"/>
+          </p:nvPr>
+        </p:nvSpPr>
+        <p:spPr/>
+      </p:sp>
+      <p:sp>
+        <p:nvSpPr>
+          <p:cNvPr id="3" name="Notes Placeholder 2"/>
+          <p:cNvSpPr>
+            <a:spLocks noGrp="1"/>
+          </p:cNvSpPr>
+          <p:nvPr>
+            <p:ph type="body" idx="1"/>
+          </p:nvPr>
+        </p:nvSpPr>
+        <p:spPr/>
+        <p:txBody>
+          <a:bodyPr/>
+          <a:lstStyle/>
+          <a:p>
+            <a:r>
+              <a:rPr lang="en-US" dirty="0"/>
+              <a:t>들어주셔서 감사합니다. 질문 받겠습니다.</a:t>
+            </a:r>
+            <a:endParaRPr lang="en-US" dirty="0"/>
+          </a:p>
+        </p:txBody>
+      </p:sp>
+      <p:sp>
+        <p:nvSpPr>
+          <p:cNvPr id="4" name="Slide Number Placeholder 3"/>
+          <p:cNvSpPr>
+            <a:spLocks noGrp="1"/>
+          </p:cNvSpPr>
+          <p:nvPr>
+            <p:ph type="sldNum" sz="quarter" idx="10"/>
+          </p:nvPr>
+        </p:nvSpPr>
+        <p:spPr/>
+        <p:txBody>
+          <a:bodyPr/>
+          <a:lstStyle/>
+          <a:p>
+            <a:fld id="{F7021451-1387-4CA6-816F-3879F97B5CBC}" type="slidenum">
+              <a:rPr lang="en-US"/>
+              <a:t>12</a:t>
+            </a:fld>
+            <a:endParaRPr lang="en-US"/>
+          </a:p>
+        </p:txBody>
+      </p:sp>
+    </p:spTree>
+    <p:extLst>
+      <p:ext uri="{BB962C8B-B14F-4D97-AF65-F5344CB8AC3E}">
+        <p14:creationId xmlns:p14="http://schemas.microsoft.com/office/powerpoint/2010/main" val="1024086991"/>
+      </p:ext>
+    </p:extLst>
+  </p:cSld>
+  <p:clrMapOvr>
+    <a:masterClrMapping/>
+  </p:clrMapOvr>
+</p:notes>
+</file>
+
 <file path=ppt/notesSlides/notesSlide2.xml><?xml version="1.0" encoding="utf-8"?>
 <p:notes xmlns:a="http://schemas.openxmlformats.org/drawingml/2006/main" xmlns:r="http://schemas.openxmlformats.org/officeDocument/2006/relationships" xmlns:p="http://schemas.openxmlformats.org/presentationml/2006/main">
   <p:cSld>
@@ -2171,7 +2261,7 @@
           <a:p>
             <a:r>
               <a:rPr lang="en-US" dirty="0"/>
-              <a:t>앞에서 본 결과들의 원인을 한 장에 모았습니다. 오른쪽 근거 칸은 얼마나 확실한지입니다. 측정은 데이터로 직접 확인한 것, 추정은 데이터와 맞지만 따로 검증하지 않은 것, 가설은 아직 검증하지 않은 것입니다. 가장 확실한 원인은 세 가지입니다. scratch는 반사나 나무결과 비슷한 가는 선이라 어렵고, 1차 93%는 테스트 사진까지 학습 데이터에 섞여 과대평가됐고, 2차 세트에서 떨어진 건 crack이 절반 크기로 작아졌기 때문입니다. ATSS가 왜 가장 좋은지는 아직 가설입니다.</a:t>
+              <a:t>앞에서 본 결과들의 원인을 한 장에 모았습니다. 오른쪽 근거 칸은 얼마나 확실한지입니다. 확인은 데이터로 직접 확인한 것, 추정은 데이터와 맞지만 따로 검증하지 않은 것, 가설은 아직 검증하지 못한 것입니다. 가장 확실한 원인은 세 가지입니다. scratch는 반사나 나무결과 비슷한 가는 선이라 어렵고, 93%는 테스트 사진까지 학습에 들어가 부풀려진 수치이고, 2차 세트에서 떨어진 건 crack이 절반 크기로 작아졌기 때문입니다. ATSS가 왜 가장 좋은지는 아직 가설입니다.</a:t>
             </a:r>
             <a:endParaRPr lang="en-US" dirty="0"/>
           </a:p>
@@ -3011,9 +3101,45 @@
           </a:p>
         </p:txBody>
       </p:sp>
+      <p:sp>
+        <p:nvSpPr>
+          <p:cNvPr id="5" name="presenter"/>
+          <p:cNvSpPr txBox="1"/>
+          <p:nvPr/>
+        </p:nvSpPr>
+        <p:spPr>
+          <a:xfrm>
+            <a:off x="548640" y="5349240"/>
+            <a:ext cx="4206240" cy="365760"/>
+          </a:xfrm>
+          <a:prstGeom prst="rect">
+            <a:avLst/>
+          </a:prstGeom>
+          <a:noFill/>
+          <a:ln/>
+        </p:spPr>
+        <p:txBody>
+          <a:bodyPr wrap="square" lIns="0" tIns="0" rIns="0" bIns="0" rtlCol="0" anchor="t"/>
+          <a:lstStyle/>
+          <a:p>
+            <a:pPr indent="0" marL="0">
+              <a:buNone/>
+            </a:pPr>
+            <a:r>
+              <a:rPr lang="en-US" sz="1600" b="1" dirty="0">
+                <a:solidFill>
+                  <a:schemeClr val="tx1"/>
+                </a:solidFill>
+              </a:rPr>
+              <a:t>최예현</a:t>
+            </a:r>
+            <a:endParaRPr lang="en-US" sz="1600" dirty="0"/>
+          </a:p>
+        </p:txBody>
+      </p:sp>
       <p:pic>
         <p:nvPicPr>
-          <p:cNvPr id="5" name="cover-crack" descr="C:\Users\user\_se4nchoi\batteryvision\docs\submission\build\img\cover_crack.jpg">    </p:cNvPr>
+          <p:cNvPr id="6" name="cover-crack" descr="C:\Users\user\_se4nchoi\batteryvision\docs\submission\build\img\cover_crack.jpg">    </p:cNvPr>
           <p:cNvPicPr>
             <a:picLocks noChangeAspect="1"/>
           </p:cNvPicPr>
@@ -3037,7 +3163,7 @@
       </p:pic>
       <p:sp>
         <p:nvSpPr>
-          <p:cNvPr id="6" name="cover-dot-crack"/>
+          <p:cNvPr id="7" name="cover-dot-crack"/>
           <p:cNvSpPr/>
           <p:nvPr/>
         </p:nvSpPr>
@@ -3057,7 +3183,7 @@
       </p:sp>
       <p:sp>
         <p:nvSpPr>
-          <p:cNvPr id="7" name="cover-label-crack"/>
+          <p:cNvPr id="8" name="cover-label-crack"/>
           <p:cNvSpPr txBox="1"/>
           <p:nvPr/>
         </p:nvSpPr>
@@ -3093,7 +3219,7 @@
       </p:sp>
       <p:pic>
         <p:nvPicPr>
-          <p:cNvPr id="8" name="cover-scratch" descr="C:\Users\user\_se4nchoi\batteryvision\docs\submission\build\img\cover_scratch.jpg">    </p:cNvPr>
+          <p:cNvPr id="9" name="cover-scratch" descr="C:\Users\user\_se4nchoi\batteryvision\docs\submission\build\img\cover_scratch.jpg">    </p:cNvPr>
           <p:cNvPicPr>
             <a:picLocks noChangeAspect="1"/>
           </p:cNvPicPr>
@@ -3117,7 +3243,7 @@
       </p:pic>
       <p:sp>
         <p:nvSpPr>
-          <p:cNvPr id="9" name="cover-dot-scratch"/>
+          <p:cNvPr id="10" name="cover-dot-scratch"/>
           <p:cNvSpPr/>
           <p:nvPr/>
         </p:nvSpPr>
@@ -3137,7 +3263,7 @@
       </p:sp>
       <p:sp>
         <p:nvSpPr>
-          <p:cNvPr id="10" name="cover-label-scratch"/>
+          <p:cNvPr id="11" name="cover-label-scratch"/>
           <p:cNvSpPr txBox="1"/>
           <p:nvPr/>
         </p:nvSpPr>
@@ -3173,7 +3299,7 @@
       </p:sp>
       <p:pic>
         <p:nvPicPr>
-          <p:cNvPr id="11" name="cover-정상" descr="C:\Users\user\_se4nchoi\batteryvision\docs\submission\build\img\cover_good.jpg">    </p:cNvPr>
+          <p:cNvPr id="12" name="cover-정상" descr="C:\Users\user\_se4nchoi\batteryvision\docs\submission\build\img\cover_good.jpg">    </p:cNvPr>
           <p:cNvPicPr>
             <a:picLocks noChangeAspect="1"/>
           </p:cNvPicPr>
@@ -3197,7 +3323,7 @@
       </p:pic>
       <p:sp>
         <p:nvSpPr>
-          <p:cNvPr id="12" name="cover-dot-정상"/>
+          <p:cNvPr id="13" name="cover-dot-정상"/>
           <p:cNvSpPr/>
           <p:nvPr/>
         </p:nvSpPr>
@@ -3217,7 +3343,7 @@
       </p:sp>
       <p:sp>
         <p:nvSpPr>
-          <p:cNvPr id="13" name="cover-label-정상"/>
+          <p:cNvPr id="14" name="cover-label-정상"/>
           <p:cNvSpPr txBox="1"/>
           <p:nvPr/>
         </p:nvSpPr>
@@ -6337,6 +6463,23 @@
           <a:bodyPr wrap="square" lIns="0" tIns="0" rIns="0" bIns="0" rtlCol="0" anchor="t"/>
           <a:lstStyle/>
           <a:p>
+            <a:pPr indent="0" marL="0">
+              <a:spcAft>
+                <a:spcPts val="1000"/>
+              </a:spcAft>
+              <a:buNone/>
+            </a:pPr>
+            <a:r>
+              <a:rPr lang="en-US" sz="2000" b="1" dirty="0">
+                <a:solidFill>
+                  <a:schemeClr val="tx1"/>
+                </a:solidFill>
+              </a:rPr>
+              <a:t>SIMULATED</a:t>
+            </a:r>
+            <a:endParaRPr lang="en-US" sz="1400" dirty="0"/>
+          </a:p>
+          <a:p>
             <a:pPr marL="342900" indent="-342900">
               <a:spcAft>
                 <a:spcPts val="1000"/>
@@ -6386,25 +6529,7 @@
                   <a:schemeClr val="tx1"/>
                 </a:solidFill>
               </a:rPr>
-              <a:t>로트별 추적</a:t>
-            </a:r>
-            <a:endParaRPr lang="en-US" sz="1400" dirty="0"/>
-          </a:p>
-          <a:p>
-            <a:pPr marL="342900" indent="-342900">
-              <a:spcAft>
-                <a:spcPts val="1000"/>
-              </a:spcAft>
-              <a:buSzPct val="100000"/>
-              <a:buChar char="•"/>
-            </a:pPr>
-            <a:r>
-              <a:rPr lang="en-US" sz="1400" dirty="0">
-                <a:solidFill>
-                  <a:schemeClr val="tx2"/>
-                </a:solidFill>
-              </a:rPr>
-              <a:t>실제 장비 미연결</a:t>
+              <a:t>LOT별 추적</a:t>
             </a:r>
             <a:endParaRPr lang="en-US" sz="1400" dirty="0"/>
           </a:p>
@@ -6452,6 +6577,411 @@
               <a:t>11</a:t>
             </a:fld>
             <a:endParaRPr lang="en-US"/>
+          </a:p>
+        </p:txBody>
+      </p:sp>
+    </p:spTree>
+  </p:cSld>
+  <p:clrMapOvr>
+    <a:masterClrMapping/>
+  </p:clrMapOvr>
+</p:sld>
+</file>
+
+<file path=ppt/slides/slide12.xml><?xml version="1.0" encoding="utf-8"?>
+<p:sld xmlns:a="http://schemas.openxmlformats.org/drawingml/2006/main" xmlns:r="http://schemas.openxmlformats.org/officeDocument/2006/relationships" xmlns:p="http://schemas.openxmlformats.org/presentationml/2006/main">
+  <p:cSld name="Slide 12">
+    <p:spTree>
+      <p:nvGrpSpPr>
+        <p:cNvPr id="1" name=""/>
+        <p:cNvGrpSpPr/>
+        <p:nvPr/>
+      </p:nvGrpSpPr>
+      <p:grpSpPr>
+        <a:xfrm>
+          <a:off x="0" y="0"/>
+          <a:ext cx="0" cy="0"/>
+          <a:chOff x="0" y="0"/>
+          <a:chExt cx="0" cy="0"/>
+        </a:xfrm>
+      </p:grpSpPr>
+      <p:sp>
+        <p:nvSpPr>
+          <p:cNvPr id="2" name="Text 0"/>
+          <p:cNvSpPr/>
+          <p:nvPr>
+            <p:ph idx="100" type="title" hasCustomPrompt="1"/>
+          </p:nvPr>
+        </p:nvSpPr>
+        <p:spPr>
+          <a:xfrm>
+            <a:off x="548640" y="2606040"/>
+            <a:ext cx="4389120" cy="1645920"/>
+          </a:xfrm>
+          <a:prstGeom prst="rect">
+            <a:avLst/>
+          </a:prstGeom>
+          <a:noFill/>
+          <a:ln/>
+        </p:spPr>
+        <p:txBody>
+          <a:bodyPr wrap="square" lIns="0" tIns="0" rIns="0" bIns="0" rtlCol="0" anchor="t"/>
+          <a:lstStyle/>
+          <a:p>
+            <a:pPr algn="l" indent="0" marL="0">
+              <a:buNone/>
+            </a:pPr>
+            <a:r>
+              <a:rPr lang="en-US" sz="4000" b="1" dirty="0">
+                <a:solidFill>
+                  <a:schemeClr val="tx1"/>
+                </a:solidFill>
+              </a:rPr>
+              <a:t>감사합니다</a:t>
+            </a:r>
+            <a:endParaRPr lang="en-US" sz="4000" dirty="0"/>
+          </a:p>
+        </p:txBody>
+      </p:sp>
+      <p:sp>
+        <p:nvSpPr>
+          <p:cNvPr id="3" name="qa"/>
+          <p:cNvSpPr txBox="1"/>
+          <p:nvPr/>
+        </p:nvSpPr>
+        <p:spPr>
+          <a:xfrm>
+            <a:off x="548640" y="3429000"/>
+            <a:ext cx="4206240" cy="640080"/>
+          </a:xfrm>
+          <a:prstGeom prst="rect">
+            <a:avLst/>
+          </a:prstGeom>
+          <a:noFill/>
+          <a:ln/>
+        </p:spPr>
+        <p:txBody>
+          <a:bodyPr wrap="square" lIns="0" tIns="0" rIns="0" bIns="0" rtlCol="0" anchor="t"/>
+          <a:lstStyle/>
+          <a:p>
+            <a:pPr indent="0" marL="0">
+              <a:buNone/>
+            </a:pPr>
+            <a:r>
+              <a:rPr lang="en-US" sz="3200" b="1" dirty="0">
+                <a:solidFill>
+                  <a:schemeClr val="accent1"/>
+                </a:solidFill>
+              </a:rPr>
+              <a:t>Q&amp;A</a:t>
+            </a:r>
+            <a:endParaRPr lang="en-US" sz="3200" dirty="0"/>
+          </a:p>
+        </p:txBody>
+      </p:sp>
+      <p:sp>
+        <p:nvSpPr>
+          <p:cNvPr id="4" name="presenter"/>
+          <p:cNvSpPr txBox="1"/>
+          <p:nvPr/>
+        </p:nvSpPr>
+        <p:spPr>
+          <a:xfrm>
+            <a:off x="548640" y="4343400"/>
+            <a:ext cx="4206240" cy="365760"/>
+          </a:xfrm>
+          <a:prstGeom prst="rect">
+            <a:avLst/>
+          </a:prstGeom>
+          <a:noFill/>
+          <a:ln/>
+        </p:spPr>
+        <p:txBody>
+          <a:bodyPr wrap="square" lIns="0" tIns="0" rIns="0" bIns="0" rtlCol="0" anchor="t"/>
+          <a:lstStyle/>
+          <a:p>
+            <a:pPr indent="0" marL="0">
+              <a:buNone/>
+            </a:pPr>
+            <a:r>
+              <a:rPr lang="en-US" sz="1600" b="1" dirty="0">
+                <a:solidFill>
+                  <a:schemeClr val="tx1"/>
+                </a:solidFill>
+              </a:rPr>
+              <a:t>최예현</a:t>
+            </a:r>
+            <a:endParaRPr lang="en-US" sz="1600" dirty="0"/>
+          </a:p>
+        </p:txBody>
+      </p:sp>
+      <p:pic>
+        <p:nvPicPr>
+          <p:cNvPr id="5" name="end-crack" descr="C:\Users\user\_se4nchoi\batteryvision\docs\submission\build\img\cover_crack.jpg">    </p:cNvPr>
+          <p:cNvPicPr>
+            <a:picLocks noChangeAspect="1"/>
+          </p:cNvPicPr>
+          <p:nvPr/>
+        </p:nvPicPr>
+        <p:blipFill>
+          <a:blip r:embed="rId1"/>
+          <a:stretch>
+            <a:fillRect/>
+          </a:stretch>
+        </p:blipFill>
+        <p:spPr>
+          <a:xfrm>
+            <a:off x="5074920" y="2377440"/>
+            <a:ext cx="2103120" cy="2103120"/>
+          </a:xfrm>
+          <a:prstGeom prst="rect">
+            <a:avLst/>
+          </a:prstGeom>
+        </p:spPr>
+      </p:pic>
+      <p:sp>
+        <p:nvSpPr>
+          <p:cNvPr id="6" name="end-dot-crack"/>
+          <p:cNvSpPr/>
+          <p:nvPr/>
+        </p:nvSpPr>
+        <p:spPr>
+          <a:xfrm>
+            <a:off x="5074920" y="4663440"/>
+            <a:ext cx="146304" cy="146304"/>
+          </a:xfrm>
+          <a:prstGeom prst="ellipse">
+            <a:avLst/>
+          </a:prstGeom>
+          <a:solidFill>
+            <a:schemeClr val="accent2"/>
+          </a:solidFill>
+          <a:ln/>
+        </p:spPr>
+      </p:sp>
+      <p:sp>
+        <p:nvSpPr>
+          <p:cNvPr id="7" name="end-label-crack"/>
+          <p:cNvSpPr txBox="1"/>
+          <p:nvPr/>
+        </p:nvSpPr>
+        <p:spPr>
+          <a:xfrm>
+            <a:off x="5312664" y="4590288"/>
+            <a:ext cx="1828800" cy="292608"/>
+          </a:xfrm>
+          <a:prstGeom prst="rect">
+            <a:avLst/>
+          </a:prstGeom>
+          <a:noFill/>
+          <a:ln/>
+        </p:spPr>
+        <p:txBody>
+          <a:bodyPr wrap="square" lIns="0" tIns="0" rIns="0" bIns="0" rtlCol="0" anchor="t"/>
+          <a:lstStyle/>
+          <a:p>
+            <a:pPr indent="0" marL="0">
+              <a:buNone/>
+            </a:pPr>
+            <a:r>
+              <a:rPr lang="en-US" sz="1400" b="1" dirty="0">
+                <a:solidFill>
+                  <a:schemeClr val="tx1"/>
+                </a:solidFill>
+              </a:rPr>
+              <a:t>crack</a:t>
+            </a:r>
+            <a:endParaRPr lang="en-US" sz="1400" dirty="0"/>
+          </a:p>
+        </p:txBody>
+      </p:sp>
+      <p:pic>
+        <p:nvPicPr>
+          <p:cNvPr id="8" name="end-scratch" descr="C:\Users\user\_se4nchoi\batteryvision\docs\submission\build\img\cover_scratch.jpg">    </p:cNvPr>
+          <p:cNvPicPr>
+            <a:picLocks noChangeAspect="1"/>
+          </p:cNvPicPr>
+          <p:nvPr/>
+        </p:nvPicPr>
+        <p:blipFill>
+          <a:blip r:embed="rId2"/>
+          <a:stretch>
+            <a:fillRect/>
+          </a:stretch>
+        </p:blipFill>
+        <p:spPr>
+          <a:xfrm>
+            <a:off x="7360920" y="2377440"/>
+            <a:ext cx="2103120" cy="2103120"/>
+          </a:xfrm>
+          <a:prstGeom prst="rect">
+            <a:avLst/>
+          </a:prstGeom>
+        </p:spPr>
+      </p:pic>
+      <p:sp>
+        <p:nvSpPr>
+          <p:cNvPr id="9" name="end-dot-scratch"/>
+          <p:cNvSpPr/>
+          <p:nvPr/>
+        </p:nvSpPr>
+        <p:spPr>
+          <a:xfrm>
+            <a:off x="7360920" y="4663440"/>
+            <a:ext cx="146304" cy="146304"/>
+          </a:xfrm>
+          <a:prstGeom prst="ellipse">
+            <a:avLst/>
+          </a:prstGeom>
+          <a:solidFill>
+            <a:schemeClr val="accent3"/>
+          </a:solidFill>
+          <a:ln/>
+        </p:spPr>
+      </p:sp>
+      <p:sp>
+        <p:nvSpPr>
+          <p:cNvPr id="10" name="end-label-scratch"/>
+          <p:cNvSpPr txBox="1"/>
+          <p:nvPr/>
+        </p:nvSpPr>
+        <p:spPr>
+          <a:xfrm>
+            <a:off x="7598664" y="4590288"/>
+            <a:ext cx="1828800" cy="292608"/>
+          </a:xfrm>
+          <a:prstGeom prst="rect">
+            <a:avLst/>
+          </a:prstGeom>
+          <a:noFill/>
+          <a:ln/>
+        </p:spPr>
+        <p:txBody>
+          <a:bodyPr wrap="square" lIns="0" tIns="0" rIns="0" bIns="0" rtlCol="0" anchor="t"/>
+          <a:lstStyle/>
+          <a:p>
+            <a:pPr indent="0" marL="0">
+              <a:buNone/>
+            </a:pPr>
+            <a:r>
+              <a:rPr lang="en-US" sz="1400" b="1" dirty="0">
+                <a:solidFill>
+                  <a:schemeClr val="tx1"/>
+                </a:solidFill>
+              </a:rPr>
+              <a:t>scratch</a:t>
+            </a:r>
+            <a:endParaRPr lang="en-US" sz="1400" dirty="0"/>
+          </a:p>
+        </p:txBody>
+      </p:sp>
+      <p:pic>
+        <p:nvPicPr>
+          <p:cNvPr id="11" name="end-정상" descr="C:\Users\user\_se4nchoi\batteryvision\docs\submission\build\img\cover_good.jpg">    </p:cNvPr>
+          <p:cNvPicPr>
+            <a:picLocks noChangeAspect="1"/>
+          </p:cNvPicPr>
+          <p:nvPr/>
+        </p:nvPicPr>
+        <p:blipFill>
+          <a:blip r:embed="rId3"/>
+          <a:stretch>
+            <a:fillRect/>
+          </a:stretch>
+        </p:blipFill>
+        <p:spPr>
+          <a:xfrm>
+            <a:off x="9646920" y="2377440"/>
+            <a:ext cx="2103120" cy="2103120"/>
+          </a:xfrm>
+          <a:prstGeom prst="rect">
+            <a:avLst/>
+          </a:prstGeom>
+        </p:spPr>
+      </p:pic>
+      <p:sp>
+        <p:nvSpPr>
+          <p:cNvPr id="12" name="end-dot-정상"/>
+          <p:cNvSpPr/>
+          <p:nvPr/>
+        </p:nvSpPr>
+        <p:spPr>
+          <a:xfrm>
+            <a:off x="9646920" y="4663440"/>
+            <a:ext cx="146304" cy="146304"/>
+          </a:xfrm>
+          <a:prstGeom prst="ellipse">
+            <a:avLst/>
+          </a:prstGeom>
+          <a:solidFill>
+            <a:schemeClr val="accent6"/>
+          </a:solidFill>
+          <a:ln/>
+        </p:spPr>
+      </p:sp>
+      <p:sp>
+        <p:nvSpPr>
+          <p:cNvPr id="13" name="end-label-정상"/>
+          <p:cNvSpPr txBox="1"/>
+          <p:nvPr/>
+        </p:nvSpPr>
+        <p:spPr>
+          <a:xfrm>
+            <a:off x="9884664" y="4590288"/>
+            <a:ext cx="1828800" cy="292608"/>
+          </a:xfrm>
+          <a:prstGeom prst="rect">
+            <a:avLst/>
+          </a:prstGeom>
+          <a:noFill/>
+          <a:ln/>
+        </p:spPr>
+        <p:txBody>
+          <a:bodyPr wrap="square" lIns="0" tIns="0" rIns="0" bIns="0" rtlCol="0" anchor="t"/>
+          <a:lstStyle/>
+          <a:p>
+            <a:pPr indent="0" marL="0">
+              <a:buNone/>
+            </a:pPr>
+            <a:r>
+              <a:rPr lang="en-US" sz="1400" b="1" dirty="0">
+                <a:solidFill>
+                  <a:schemeClr val="tx1"/>
+                </a:solidFill>
+              </a:rPr>
+              <a:t>정상</a:t>
+            </a:r>
+            <a:endParaRPr lang="en-US" sz="1400" dirty="0"/>
+          </a:p>
+        </p:txBody>
+      </p:sp>
+      <p:sp>
+        <p:nvSpPr>
+          <p:cNvPr id="15" name="Text 0"/>
+          <p:cNvSpPr/>
+          <p:nvPr>
+            <p:ph idx="101" type="body" hasCustomPrompt="1"/>
+          </p:nvPr>
+        </p:nvSpPr>
+        <p:spPr>
+          <a:xfrm>
+            <a:off x="548640" y="4343400"/>
+            <a:ext cx="4297680" cy="822960"/>
+          </a:xfrm>
+          <a:prstGeom prst="rect">
+            <a:avLst/>
+          </a:prstGeom>
+          <a:noFill/>
+          <a:ln/>
+        </p:spPr>
+        <p:txBody>
+          <a:bodyPr wrap="square" lIns="0" tIns="0" rIns="0" bIns="0" rtlCol="0" anchor="t"/>
+          <a:lstStyle/>
+          <a:p>
+            <a:pPr algn="l" indent="0" marL="0">
+              <a:buNone/>
+            </a:pPr>
+            <a:endParaRPr lang="en-US" sz="1600" dirty="0"/>
           </a:p>
         </p:txBody>
       </p:sp>
@@ -8782,7 +9312,7 @@
                   <a:schemeClr val="tx1"/>
                 </a:solidFill>
               </a:rPr>
-              <a:t>높은 결과에 숨은 함정</a:t>
+              <a:t>높은 수치, 숨은 함정</a:t>
             </a:r>
             <a:endParaRPr lang="en-US" sz="3200" dirty="0"/>
           </a:p>
@@ -8820,7 +9350,7 @@
                   <a:schemeClr val="tx2"/>
                 </a:solidFill>
               </a:rPr>
-              <a:t>1차 테스트 93%, 그런데 테스트 사진이 학습 데이터에 섞여 있었다</a:t>
+              <a:t>1차 테스트 93%, but 테스트 사진이 학습 데이터에 섞여 있었다</a:t>
             </a:r>
             <a:endParaRPr lang="en-US" sz="1500" dirty="0"/>
           </a:p>
@@ -16880,7 +17410,41 @@
                   <a:schemeClr val="accent1"/>
                 </a:solidFill>
               </a:rPr>
-              <a:t>→ 기준값은 모델별로 · 그래도 부족 → 재학습</a:t>
+              <a:t>→ 모델별로 다른 기준값 적용</a:t>
+            </a:r>
+            <a:endParaRPr lang="en-US" sz="1400" dirty="0"/>
+          </a:p>
+          <a:p>
+            <a:pPr indent="0" marL="0">
+              <a:spcAft>
+                <a:spcPts val="600"/>
+              </a:spcAft>
+              <a:buNone/>
+            </a:pPr>
+            <a:r>
+              <a:rPr lang="en-US" sz="1400" b="1" dirty="0">
+                <a:solidFill>
+                  <a:schemeClr val="accent1"/>
+                </a:solidFill>
+              </a:rPr>
+              <a:t>→ 결과치 불충분</a:t>
+            </a:r>
+            <a:endParaRPr lang="en-US" sz="1400" dirty="0"/>
+          </a:p>
+          <a:p>
+            <a:pPr indent="0" marL="0">
+              <a:spcAft>
+                <a:spcPts val="600"/>
+              </a:spcAft>
+              <a:buNone/>
+            </a:pPr>
+            <a:r>
+              <a:rPr lang="en-US" sz="1400" b="1" dirty="0">
+                <a:solidFill>
+                  <a:schemeClr val="accent1"/>
+                </a:solidFill>
+              </a:rPr>
+              <a:t>→ 재학습</a:t>
             </a:r>
             <a:endParaRPr lang="en-US" sz="1400" dirty="0"/>
           </a:p>
@@ -16988,47 +17552,9 @@
                   <a:schemeClr val="tx1"/>
                 </a:solidFill>
               </a:rPr>
-              <a:t>원인</a:t>
+              <a:t>WHY ?</a:t>
             </a:r>
             <a:endParaRPr lang="en-US" sz="3200" dirty="0"/>
-          </a:p>
-        </p:txBody>
-      </p:sp>
-      <p:sp>
-        <p:nvSpPr>
-          <p:cNvPr id="3" name="Text 0"/>
-          <p:cNvSpPr/>
-          <p:nvPr>
-            <p:ph idx="101" type="body" hasCustomPrompt="1"/>
-          </p:nvPr>
-        </p:nvSpPr>
-        <p:spPr>
-          <a:xfrm>
-            <a:off x="548640" y="1005840"/>
-            <a:ext cx="11094415" cy="411480"/>
-          </a:xfrm>
-          <a:prstGeom prst="rect">
-            <a:avLst/>
-          </a:prstGeom>
-          <a:noFill/>
-          <a:ln/>
-        </p:spPr>
-        <p:txBody>
-          <a:bodyPr wrap="square" lIns="0" tIns="0" rIns="0" bIns="0" rtlCol="0" anchor="ctr"/>
-          <a:lstStyle/>
-          <a:p>
-            <a:pPr algn="l" indent="0" marL="0">
-              <a:buNone/>
-            </a:pPr>
-            <a:r>
-              <a:rPr lang="en-US" sz="1500" dirty="0">
-                <a:solidFill>
-                  <a:schemeClr val="tx2"/>
-                </a:solidFill>
-              </a:rPr>
-              <a:t>슬라이드 2–8의 결과는 왜 나왔나</a:t>
-            </a:r>
-            <a:endParaRPr lang="en-US" sz="1500" dirty="0"/>
           </a:p>
         </p:txBody>
       </p:sp>
@@ -17047,7 +17573,7 @@
           </p:nvPr>
         </p:nvGraphicFramePr>
         <p:xfrm>
-          <a:off x="548640" y="1600200"/>
+          <a:off x="548640" y="1325880"/>
           <a:ext cx="11094415" cy="914400"/>
         </p:xfrm>
         <a:graphic>
@@ -17056,19 +17582,30 @@
               <a:tblPr/>
               <a:tblGrid>
                 <a:gridCol w="502920"/>
-                <a:gridCol w="2514600"/>
-                <a:gridCol w="7205472"/>
+                <a:gridCol w="2606040"/>
+                <a:gridCol w="7114032"/>
                 <a:gridCol w="868680"/>
               </a:tblGrid>
-              <a:tr h="429768">
+              <a:tr h="457200">
                 <a:tc>
                   <a:txBody>
                     <a:bodyPr/>
                     <a:lstStyle/>
                     <a:p>
-                      <a:pPr indent="0" marL="0">
+                      <a:pPr algn="ctr" indent="0" marL="0">
                         <a:buNone/>
                       </a:pPr>
+                      <a:r>
+                        <a:rPr lang="en-US" sz="1400" b="1" dirty="0">
+                          <a:solidFill>
+                            <a:schemeClr val="tx2"/>
+                          </a:solidFill>
+                          <a:latin typeface="Malgun Gothic" pitchFamily="34" charset="0"/>
+                          <a:ea typeface="Malgun Gothic" pitchFamily="34" charset="-122"/>
+                          <a:cs typeface="Malgun Gothic" pitchFamily="34" charset="-120"/>
+                        </a:rPr>
+                        <a:t>장</a:t>
+                      </a:r>
                       <a:endParaRPr lang="en-US" sz="1400" dirty="0">
                         <a:latin typeface="Malgun Gothic" charset="0"/>
                         <a:ea typeface="Malgun Gothic" charset="0"/>
@@ -17323,7 +17860,7 @@
                   </a:tcPr>
                 </a:tc>
               </a:tr>
-              <a:tr h="429768">
+              <a:tr h="457200">
                 <a:tc>
                   <a:txBody>
                     <a:bodyPr/>
@@ -17409,7 +17946,7 @@
                           <a:ea typeface="Malgun Gothic" pitchFamily="34" charset="-122"/>
                           <a:cs typeface="Malgun Gothic" pitchFamily="34" charset="-120"/>
                         </a:rPr>
-                        <a:t>scratch가 어렵다</a:t>
+                        <a:t>Scratch 식별 어려움</a:t>
                       </a:r>
                       <a:endParaRPr lang="en-US" sz="1400" dirty="0">
                         <a:latin typeface="Malgun Gothic" charset="0"/>
@@ -17477,7 +18014,7 @@
                           <a:ea typeface="Malgun Gothic" pitchFamily="34" charset="-122"/>
                           <a:cs typeface="Malgun Gothic" pitchFamily="34" charset="-120"/>
                         </a:rPr>
-                        <a:t>반사·나무결 같은 가는 선 (배경 오검출 16건 중 13건이 scratch)</a:t>
+                        <a:t>반사·나무결과 비슷한 가는 선. 배경 오검출 16건 중 13건이 scratch</a:t>
                       </a:r>
                       <a:endParaRPr lang="en-US" sz="1400" dirty="0">
                         <a:latin typeface="Malgun Gothic" charset="0"/>
@@ -17545,7 +18082,7 @@
                           <a:ea typeface="Malgun Gothic" pitchFamily="34" charset="-122"/>
                           <a:cs typeface="Malgun Gothic" pitchFamily="34" charset="-120"/>
                         </a:rPr>
-                        <a:t>측정</a:t>
+                        <a:t>확인</a:t>
                       </a:r>
                       <a:endParaRPr lang="en-US" sz="1400" dirty="0">
                         <a:latin typeface="Malgun Gothic" charset="0"/>
@@ -17597,7 +18134,7 @@
                   </a:tcPr>
                 </a:tc>
               </a:tr>
-              <a:tr h="429768">
+              <a:tr h="457200">
                 <a:tc>
                   <a:txBody>
                     <a:bodyPr/>
@@ -17683,7 +18220,7 @@
                           <a:ea typeface="Malgun Gothic" pitchFamily="34" charset="-122"/>
                           <a:cs typeface="Malgun Gothic" pitchFamily="34" charset="-120"/>
                         </a:rPr>
-                        <a:t>1차 93%는 과대평가</a:t>
+                        <a:t>과대평가 수치 (93%)</a:t>
                       </a:r>
                       <a:endParaRPr lang="en-US" sz="1400" dirty="0">
                         <a:latin typeface="Malgun Gothic" charset="0"/>
@@ -17751,7 +18288,7 @@
                           <a:ea typeface="Malgun Gothic" pitchFamily="34" charset="-122"/>
                           <a:cs typeface="Malgun Gothic" pitchFamily="34" charset="-120"/>
                         </a:rPr>
-                        <a:t>테스트까지 업로드 · 복사본 22장 · 같은 촬영 세션 → 암기를 측정</a:t>
+                        <a:t>테스트 사진도 학습에 포함. 복사본 22장, 같은 촬영 세션</a:t>
                       </a:r>
                       <a:endParaRPr lang="en-US" sz="1400" dirty="0">
                         <a:latin typeface="Malgun Gothic" charset="0"/>
@@ -17819,7 +18356,7 @@
                           <a:ea typeface="Malgun Gothic" pitchFamily="34" charset="-122"/>
                           <a:cs typeface="Malgun Gothic" pitchFamily="34" charset="-120"/>
                         </a:rPr>
-                        <a:t>측정</a:t>
+                        <a:t>확인</a:t>
                       </a:r>
                       <a:endParaRPr lang="en-US" sz="1400" dirty="0">
                         <a:latin typeface="Malgun Gothic" charset="0"/>
@@ -17871,7 +18408,7 @@
                   </a:tcPr>
                 </a:tc>
               </a:tr>
-              <a:tr h="429768">
+              <a:tr h="457200">
                 <a:tc>
                   <a:txBody>
                     <a:bodyPr/>
@@ -17957,7 +18494,7 @@
                           <a:ea typeface="Malgun Gothic" pitchFamily="34" charset="-122"/>
                           <a:cs typeface="Malgun Gothic" pitchFamily="34" charset="-120"/>
                         </a:rPr>
-                        <a:t>Geti 점수도 낙관적</a:t>
+                        <a:t>낙관적인 Geti score</a:t>
                       </a:r>
                       <a:endParaRPr lang="en-US" sz="1400" dirty="0">
                         <a:latin typeface="Malgun Gothic" charset="0"/>
@@ -18025,7 +18562,7 @@
                           <a:ea typeface="Malgun Gothic" pitchFamily="34" charset="-122"/>
                           <a:cs typeface="Malgun Gothic" pitchFamily="34" charset="-120"/>
                         </a:rPr>
-                        <a:t>같은 원본의 ×3 증강 사본이 Geti 학습·테스트에 함께 분할</a:t>
+                        <a:t>원본 1장당 증강본 3장이 Geti 학습·테스트에 나뉘어 들어갔을 가능성</a:t>
                       </a:r>
                       <a:endParaRPr lang="en-US" sz="1400" dirty="0">
                         <a:latin typeface="Malgun Gothic" charset="0"/>
@@ -18145,7 +18682,7 @@
                   </a:tcPr>
                 </a:tc>
               </a:tr>
-              <a:tr h="429768">
+              <a:tr h="457200">
                 <a:tc>
                   <a:txBody>
                     <a:bodyPr/>
@@ -18231,7 +18768,7 @@
                           <a:ea typeface="Malgun Gothic" pitchFamily="34" charset="-122"/>
                           <a:cs typeface="Malgun Gothic" pitchFamily="34" charset="-120"/>
                         </a:rPr>
-                        <a:t>작은 ATSS가 최고</a:t>
+                        <a:t>ATSS 최고평가</a:t>
                       </a:r>
                       <a:endParaRPr lang="en-US" sz="1400" dirty="0">
                         <a:latin typeface="Malgun Gothic" charset="0"/>
@@ -18299,7 +18836,7 @@
                           <a:ea typeface="Malgun Gothic" pitchFamily="34" charset="-122"/>
                           <a:cs typeface="Malgun Gothic" pitchFamily="34" charset="-120"/>
                         </a:rPr>
-                        <a:t>입력 992×800 vs 640×640 · 적은 데이터엔 작은 모델 (학습 1회)</a:t>
+                        <a:t>입력 해상도 차이 (992×800 vs 640×640), 적은 데이터엔 작은 모델. 학습 1회라 미확인</a:t>
                       </a:r>
                       <a:endParaRPr lang="en-US" sz="1400" dirty="0">
                         <a:latin typeface="Malgun Gothic" charset="0"/>
@@ -18419,7 +18956,7 @@
                   </a:tcPr>
                 </a:tc>
               </a:tr>
-              <a:tr h="429768">
+              <a:tr h="457200">
                 <a:tc>
                   <a:txBody>
                     <a:bodyPr/>
@@ -18505,7 +19042,7 @@
                           <a:ea typeface="Malgun Gothic" pitchFamily="34" charset="-122"/>
                           <a:cs typeface="Malgun Gothic" pitchFamily="34" charset="-120"/>
                         </a:rPr>
-                        <a:t>나무 배경 33%</a:t>
+                        <a:t>나무 배경 취약 (33%)</a:t>
                       </a:r>
                       <a:endParaRPr lang="en-US" sz="1400" dirty="0">
                         <a:latin typeface="Malgun Gothic" charset="0"/>
@@ -18573,7 +19110,7 @@
                           <a:ea typeface="Malgun Gothic" pitchFamily="34" charset="-122"/>
                           <a:cs typeface="Malgun Gothic" pitchFamily="34" charset="-120"/>
                         </a:rPr>
-                        <a:t>나무결 = scratch와 같은 가는 선 패턴</a:t>
+                        <a:t>나무결도 scratch처럼 가는 선</a:t>
                       </a:r>
                       <a:endParaRPr lang="en-US" sz="1400" dirty="0">
                         <a:latin typeface="Malgun Gothic" charset="0"/>
@@ -18693,7 +19230,7 @@
                   </a:tcPr>
                 </a:tc>
               </a:tr>
-              <a:tr h="429768">
+              <a:tr h="457200">
                 <a:tc>
                   <a:txBody>
                     <a:bodyPr/>
@@ -18847,7 +19384,7 @@
                           <a:ea typeface="Malgun Gothic" pitchFamily="34" charset="-122"/>
                           <a:cs typeface="Malgun Gothic" pitchFamily="34" charset="-120"/>
                         </a:rPr>
-                        <a:t>양자화로 점수 소폭 하락 → 0.30 근처 결함이 기준 아래로</a:t>
+                        <a:t>양자화 후 점수 소폭 하락, 0.30 근처 결함이 기준 미달</a:t>
                       </a:r>
                       <a:endParaRPr lang="en-US" sz="1400" dirty="0">
                         <a:latin typeface="Malgun Gothic" charset="0"/>
@@ -18967,7 +19504,7 @@
                   </a:tcPr>
                 </a:tc>
               </a:tr>
-              <a:tr h="429768">
+              <a:tr h="457200">
                 <a:tc>
                   <a:txBody>
                     <a:bodyPr/>
@@ -19053,7 +19590,7 @@
                           <a:ea typeface="Malgun Gothic" pitchFamily="34" charset="-122"/>
                           <a:cs typeface="Malgun Gothic" pitchFamily="34" charset="-120"/>
                         </a:rPr>
-                        <a:t>2차 세트 47%</a:t>
+                        <a:t>2차 세트 검출 47%</a:t>
                       </a:r>
                       <a:endParaRPr lang="en-US" sz="1400" dirty="0">
                         <a:latin typeface="Malgun Gothic" charset="0"/>
@@ -19121,7 +19658,7 @@
                           <a:ea typeface="Malgun Gothic" pitchFamily="34" charset="-122"/>
                           <a:cs typeface="Malgun Gothic" pitchFamily="34" charset="-120"/>
                         </a:rPr>
-                        <a:t>crack이 30×26px로 작아짐 (검출 1/15) + 새 촬영 환경</a:t>
+                        <a:t>crack이 30×26px로 작아짐 (15개 중 1개 검출), 촬영 환경도 바뀜</a:t>
                       </a:r>
                       <a:endParaRPr lang="en-US" sz="1400" dirty="0">
                         <a:latin typeface="Malgun Gothic" charset="0"/>
@@ -19189,7 +19726,7 @@
                           <a:ea typeface="Malgun Gothic" pitchFamily="34" charset="-122"/>
                           <a:cs typeface="Malgun Gothic" pitchFamily="34" charset="-120"/>
                         </a:rPr>
-                        <a:t>측정</a:t>
+                        <a:t>확인</a:t>
                       </a:r>
                       <a:endParaRPr lang="en-US" sz="1400" dirty="0">
                         <a:latin typeface="Malgun Gothic" charset="0"/>
@@ -19241,7 +19778,7 @@
                   </a:tcPr>
                 </a:tc>
               </a:tr>
-              <a:tr h="429768">
+              <a:tr h="457200">
                 <a:tc>
                   <a:txBody>
                     <a:bodyPr/>
@@ -19327,7 +19864,7 @@
                           <a:ea typeface="Malgun Gothic" pitchFamily="34" charset="-122"/>
                           <a:cs typeface="Malgun Gothic" pitchFamily="34" charset="-120"/>
                         </a:rPr>
-                        <a:t>YOLOX-S 점수가 낮음</a:t>
+                        <a:t>YOLOX-S 낮은 점수</a:t>
                       </a:r>
                       <a:endParaRPr lang="en-US" sz="1400" dirty="0">
                         <a:latin typeface="Malgun Gothic" charset="0"/>
@@ -19395,7 +19932,7 @@
                           <a:ea typeface="Malgun Gothic" pitchFamily="34" charset="-122"/>
                           <a:cs typeface="Malgun Gothic" pitchFamily="34" charset="-120"/>
                         </a:rPr>
-                        <a:t>점수 = objectness × class 확률의 곱</a:t>
+                        <a:t>점수 = 물체일 확률 × 클래스 확률. 두 확률의 곱이라 낮게 나옴</a:t>
                       </a:r>
                       <a:endParaRPr lang="en-US" sz="1400" dirty="0">
                         <a:latin typeface="Malgun Gothic" charset="0"/>
@@ -19515,7 +20052,7 @@
                   </a:tcPr>
                 </a:tc>
               </a:tr>
-              <a:tr h="429768">
+              <a:tr h="457200">
                 <a:tc>
                   <a:txBody>
                     <a:bodyPr/>
@@ -19601,7 +20138,7 @@
                           <a:ea typeface="Malgun Gothic" pitchFamily="34" charset="-122"/>
                           <a:cs typeface="Malgun Gothic" pitchFamily="34" charset="-120"/>
                         </a:rPr>
-                        <a:t>기준값으로 해결 안 됨</a:t>
+                        <a:t>기준값 조정으로 해결 불가</a:t>
                       </a:r>
                       <a:endParaRPr lang="en-US" sz="1400" dirty="0">
                         <a:latin typeface="Malgun Gothic" charset="0"/>
@@ -19669,7 +20206,7 @@
                           <a:ea typeface="Malgun Gothic" pitchFamily="34" charset="-122"/>
                           <a:cs typeface="Malgun Gothic" pitchFamily="34" charset="-120"/>
                         </a:rPr>
-                        <a:t>새 환경에서 결함·정상 점수 분포가 겹침</a:t>
+                        <a:t>새 환경에서 결함과 정상의 점수 구간이 겹침</a:t>
                       </a:r>
                       <a:endParaRPr lang="en-US" sz="1400" dirty="0">
                         <a:latin typeface="Malgun Gothic" charset="0"/>
@@ -19737,7 +20274,7 @@
                           <a:ea typeface="Malgun Gothic" pitchFamily="34" charset="-122"/>
                           <a:cs typeface="Malgun Gothic" pitchFamily="34" charset="-120"/>
                         </a:rPr>
-                        <a:t>측정</a:t>
+                        <a:t>확인</a:t>
                       </a:r>
                       <a:endParaRPr lang="en-US" sz="1400" dirty="0">
                         <a:latin typeface="Malgun Gothic" charset="0"/>
@@ -19795,13 +20332,13 @@
       </p:graphicFrame>
       <p:sp>
         <p:nvSpPr>
-          <p:cNvPr id="5" name="causes-legend"/>
+          <p:cNvPr id="4" name="causes-legend"/>
           <p:cNvSpPr txBox="1"/>
           <p:nvPr/>
         </p:nvSpPr>
         <p:spPr>
           <a:xfrm>
-            <a:off x="548640" y="5989320"/>
+            <a:off x="548640" y="6053328"/>
             <a:ext cx="11094415" cy="274320"/>
           </a:xfrm>
           <a:prstGeom prst="rect">
@@ -19823,7 +20360,7 @@
                   <a:schemeClr val="accent6"/>
                 </a:solidFill>
               </a:rPr>
-              <a:t>측정 </a:t>
+              <a:t>확인 </a:t>
             </a:r>
             <a:pPr indent="0" marL="0">
               <a:buNone/>
@@ -19834,7 +20371,7 @@
                   <a:schemeClr val="tx2"/>
                 </a:solidFill>
               </a:rPr>
-              <a:t>데이터로 확인   </a:t>
+              <a:t>데이터로 직접 확인   </a:t>
             </a:r>
             <a:pPr indent="0" marL="0">
               <a:buNone/>
@@ -19856,7 +20393,7 @@
                   <a:schemeClr val="tx2"/>
                 </a:solidFill>
               </a:rPr>
-              <a:t>데이터와 일치, 따로 검증 안 함   </a:t>
+              <a:t>데이터와 맞지만 별도 검증 없음   </a:t>
             </a:r>
             <a:pPr indent="0" marL="0">
               <a:buNone/>
@@ -19878,9 +20415,39 @@
                   <a:schemeClr val="tx2"/>
                 </a:solidFill>
               </a:rPr>
-              <a:t>미검증</a:t>
+              <a:t>아직 검증 못 함</a:t>
             </a:r>
             <a:endParaRPr lang="en-US" sz="1200" dirty="0"/>
+          </a:p>
+        </p:txBody>
+      </p:sp>
+      <p:sp>
+        <p:nvSpPr>
+          <p:cNvPr id="6" name="Text 0"/>
+          <p:cNvSpPr/>
+          <p:nvPr>
+            <p:ph idx="101" type="body" hasCustomPrompt="1"/>
+          </p:nvPr>
+        </p:nvSpPr>
+        <p:spPr>
+          <a:xfrm>
+            <a:off x="548640" y="1005840"/>
+            <a:ext cx="11094415" cy="411480"/>
+          </a:xfrm>
+          <a:prstGeom prst="rect">
+            <a:avLst/>
+          </a:prstGeom>
+          <a:noFill/>
+          <a:ln/>
+        </p:spPr>
+        <p:txBody>
+          <a:bodyPr wrap="square" lIns="0" tIns="0" rIns="0" bIns="0" rtlCol="0" anchor="ctr"/>
+          <a:lstStyle/>
+          <a:p>
+            <a:pPr algn="l" indent="0" marL="0">
+              <a:buNone/>
+            </a:pPr>
+            <a:endParaRPr lang="en-US" sz="1500" dirty="0"/>
           </a:p>
         </p:txBody>
       </p:sp>

--- a/docs/submission/BatteryVision_발표.pptx
+++ b/docs/submission/BatteryVision_발표.pptx
@@ -17,9 +17,10 @@
     <p:sldId id="265" r:id="rId11"/>
     <p:sldId id="266" r:id="rId12"/>
     <p:sldId id="267" r:id="rId13"/>
+    <p:sldId id="268" r:id="rId14"/>
   </p:sldIdLst>
   <p:notesMasterIdLst>
-    <p:notesMasterId r:id="rId14"/>
+    <p:notesMasterId r:id="rId15"/>
   </p:notesMasterIdLst>
   <p:sldSz cx="12192000" cy="6858000"/>
   <p:notesSz cx="6858000" cy="12192000"/>
@@ -118,13 +119,13 @@
   <p:extLst>
     <p:ext uri="{521415D9-36F7-43E2-AB2F-B90AF26B5E84}">
       <p14:sectionLst xmlns:p14="http://schemas.microsoft.com/office/powerpoint/2010/main">
-        <p14:section name="도입" id="{076eb02f-5afc-1a65-3561-743820df2dff}">
+        <p14:section name="도입" id="{ea74ea0f-f449-7e35-c3dc-f73f6ff0372a}">
           <p14:sldIdLst>
             <p14:sldId id="256"/>
             <p14:sldId id="257"/>
           </p14:sldIdLst>
         </p14:section>
-        <p14:section name="실험" id="{e3e54d36-3792-4920-e93d-52064877aaaf}">
+        <p14:section name="실험" id="{b086b4b4-1337-c1e3-3f43-50eb28ce2ba0}">
           <p14:sldIdLst>
             <p14:sldId id="258"/>
             <p14:sldId id="259"/>
@@ -132,22 +133,23 @@
             <p14:sldId id="261"/>
           </p14:sldIdLst>
         </p14:section>
-        <p14:section name="최적화" id="{f45113e3-66e8-e4ff-842e-17102335b750}">
+        <p14:section name="최적화" id="{bc3883a6-c347-7cf7-794b-2ca58f0ede9a}">
           <p14:sldIdLst>
             <p14:sldId id="262"/>
           </p14:sldIdLst>
         </p14:section>
-        <p14:section name="검증" id="{2753db95-4b25-223f-3db5-9e2a1731c483}">
+        <p14:section name="검증" id="{9c4bad10-b721-c4b6-5373-2a8ea8929e5a}">
           <p14:sldIdLst>
             <p14:sldId id="263"/>
+            <p14:sldId id="264"/>
           </p14:sldIdLst>
         </p14:section>
-        <p14:section name="정리" id="{33f28c43-0a38-24a8-d40a-ae94db6bd67e}">
+        <p14:section name="정리" id="{6411d161-5d15-4921-938c-0273821b6067}">
           <p14:sldIdLst>
-            <p14:sldId id="264"/>
             <p14:sldId id="265"/>
             <p14:sldId id="266"/>
             <p14:sldId id="267"/>
+            <p14:sldId id="268"/>
           </p14:sldIdLst>
         </p14:section>
       </p14:sectionLst>
@@ -1381,7 +1383,7 @@
           <a:p>
             <a:r>
               <a:rPr lang="en-US" dirty="0"/>
-              <a:t>실험 순서대로 정리했습니다. 점수가 가장 높았던 단계보다, 테스트셋이 학습 데이터에 섞인 걸 발견하고 2차 세트에서 점수가 떨어진 단계에서 더 많이 배웠습니다. 마지막으로 기준값을 낮춰 봤지만 정상 셀이 87% 걸려서, 새 환경에서는 기준값이 아니라 재학습이 필요하다는 결론입니다.</a:t>
+              <a:t>앞에서 본 결과들의 원인을 한 장에 모았습니다. 오른쪽 근거 칸은 얼마나 확실한지입니다. 확인은 데이터로 직접 확인한 것, 추정은 데이터와 맞지만 따로 검증하지 않은 것, 가설은 아직 검증하지 못한 것입니다. 가장 확실한 원인은 세 가지입니다. scratch는 반사나 나무결과 비슷한 가는 선이라 어렵고, 93%는 테스트 사진까지 학습에 들어가 부풀려진 수치이고, 2차 세트에서 떨어진 건 crack이 절반 크기로 작아졌기 때문입니다. ATSS가 왜 가장 좋은지는 추정 단계입니다. 32픽셀 미만의 작은 결함에서 격차가 가장 커서 입력 해상도 차이와 맞지만, 다시 학습해서 확인하지는 않았습니다.</a:t>
             </a:r>
             <a:endParaRPr lang="en-US" dirty="0"/>
           </a:p>
@@ -1469,7 +1471,7 @@
           <a:p>
             <a:r>
               <a:rPr lang="en-US" dirty="0"/>
-              <a:t>마지막으로 대시보드에서 실제 모델이 가상 검사 라인을 돌리는 모습을 보여드리겠습니다. (라이브 데모로 전환)</a:t>
+              <a:t>다음에 다르게 할 것 네 가지입니다. 테스트셋은 업로드 전에 따로 빼고, 새 환경에서는 그 환경 사진으로 다시 검증하고, 판정 기준값은 모델과 정밀도마다 검증셋에서 정하고, 모델은 크기보다 데이터와 결함에 맞는 걸 고르겠습니다.</a:t>
             </a:r>
             <a:endParaRPr lang="en-US" dirty="0"/>
           </a:p>
@@ -1557,7 +1559,7 @@
           <a:p>
             <a:r>
               <a:rPr lang="en-US" dirty="0"/>
-              <a:t>들어주셔서 감사합니다. 질문 받겠습니다.</a:t>
+              <a:t>마지막으로 대시보드에서 실제 모델이 가상 검사 라인을 돌리는 모습을 보여드리겠습니다. (라이브 데모로 전환)</a:t>
             </a:r>
             <a:endParaRPr lang="en-US" dirty="0"/>
           </a:p>
@@ -1581,6 +1583,94 @@
             <a:fld id="{F7021451-1387-4CA6-816F-3879F97B5CBC}" type="slidenum">
               <a:rPr lang="en-US"/>
               <a:t>12</a:t>
+            </a:fld>
+            <a:endParaRPr lang="en-US"/>
+          </a:p>
+        </p:txBody>
+      </p:sp>
+    </p:spTree>
+    <p:extLst>
+      <p:ext uri="{BB962C8B-B14F-4D97-AF65-F5344CB8AC3E}">
+        <p14:creationId xmlns:p14="http://schemas.microsoft.com/office/powerpoint/2010/main" val="1024086991"/>
+      </p:ext>
+    </p:extLst>
+  </p:cSld>
+  <p:clrMapOvr>
+    <a:masterClrMapping/>
+  </p:clrMapOvr>
+</p:notes>
+</file>
+
+<file path=ppt/notesSlides/notesSlide13.xml><?xml version="1.0" encoding="utf-8"?>
+<p:notes xmlns:a="http://schemas.openxmlformats.org/drawingml/2006/main" xmlns:r="http://schemas.openxmlformats.org/officeDocument/2006/relationships" xmlns:p="http://schemas.openxmlformats.org/presentationml/2006/main">
+  <p:cSld>
+    <p:spTree>
+      <p:nvGrpSpPr>
+        <p:cNvPr id="1" name=""/>
+        <p:cNvGrpSpPr/>
+        <p:nvPr/>
+      </p:nvGrpSpPr>
+      <p:grpSpPr>
+        <a:xfrm>
+          <a:off x="0" y="0"/>
+          <a:ext cx="0" cy="0"/>
+          <a:chOff x="0" y="0"/>
+          <a:chExt cx="0" cy="0"/>
+        </a:xfrm>
+      </p:grpSpPr>
+      <p:sp>
+        <p:nvSpPr>
+          <p:cNvPr id="2" name="Slide Image Placeholder 1"/>
+          <p:cNvSpPr>
+            <a:spLocks noGrp="1" noRot="1" noChangeAspect="1"/>
+          </p:cNvSpPr>
+          <p:nvPr>
+            <p:ph type="sldImg"/>
+          </p:nvPr>
+        </p:nvSpPr>
+        <p:spPr/>
+      </p:sp>
+      <p:sp>
+        <p:nvSpPr>
+          <p:cNvPr id="3" name="Notes Placeholder 2"/>
+          <p:cNvSpPr>
+            <a:spLocks noGrp="1"/>
+          </p:cNvSpPr>
+          <p:nvPr>
+            <p:ph type="body" idx="1"/>
+          </p:nvPr>
+        </p:nvSpPr>
+        <p:spPr/>
+        <p:txBody>
+          <a:bodyPr/>
+          <a:lstStyle/>
+          <a:p>
+            <a:r>
+              <a:rPr lang="en-US" dirty="0"/>
+              <a:t>들어주셔서 감사합니다. 질문 받겠습니다.</a:t>
+            </a:r>
+            <a:endParaRPr lang="en-US" dirty="0"/>
+          </a:p>
+        </p:txBody>
+      </p:sp>
+      <p:sp>
+        <p:nvSpPr>
+          <p:cNvPr id="4" name="Slide Number Placeholder 3"/>
+          <p:cNvSpPr>
+            <a:spLocks noGrp="1"/>
+          </p:cNvSpPr>
+          <p:nvPr>
+            <p:ph type="sldNum" sz="quarter" idx="10"/>
+          </p:nvPr>
+        </p:nvSpPr>
+        <p:spPr/>
+        <p:txBody>
+          <a:bodyPr/>
+          <a:lstStyle/>
+          <a:p>
+            <a:fld id="{F7021451-1387-4CA6-816F-3879F97B5CBC}" type="slidenum">
+              <a:rPr lang="en-US"/>
+              <a:t>13</a:t>
             </a:fld>
             <a:endParaRPr lang="en-US"/>
           </a:p>
@@ -2173,7 +2263,7 @@
           <a:p>
             <a:r>
               <a:rPr lang="en-US" dirty="0"/>
-              <a:t>같은 업로더가 올린 다른 세트에서, 학습에 한 번도 쓰지 않은 45장으로 제 앱에서 다시 테스트했습니다. 1차 테스트에서 결함 셀을 거의 다 잡던 모델이 ATSS 47%, YOLOX-S 3%까지 떨어집니다. 결함을 착각한 게 아니라 점수가 낮아서 통과시킨 것이고, 정상 셀을 불합격시킨 경우는 없었습니다. 가장 큰 원인은 crack입니다. 2차 세트의 crack은 약 30×26픽셀로 1차의 절반 면적이고, ATSS는 15개 중 1개만 잡았습니다. 학습 때 본 크기의 crack만 쉬웠던 겁니다. 기준값을 바꿔 보면, ATSS는 0.15까지 낮추면 결함 97%를 잡지만 정상 셀도 87%가 걸립니다. YOLOX-S는 다릅니다. 2차 세트 mAP@50이 0.93으로 결함을 정상보다 높게 순위 매기는 건 정확한데, 점수 자체가 낮습니다. YOLOX 점수는 물체일 확률과 클래스 확률을 곱한 값이라 원래 낮게 나오고, 처음 보는 사진에서는 더 낮아집니다. 0.05로 낮추면 정상 오검출 없이 57%를 잡습니다. 즉 기준값은 모델마다 따로 정해야 하고, 그래도 부족하기 때문에 새 환경 사진으로 재학습이 필요합니다.</a:t>
+              <a:t>2차 세트는 같은 업로더가 나중에 따로 올린 데이터셋입니다. 결함 종류와 촬영 방식은 비슷하지만 다른 촬영 세션입니다. 1차 데이터셋과 파일명이 같거나 픽셀이 사실상 같은 사진 140장을 먼저 뺐고, 증강되지 않은 45장만 테스트에 썼습니다. 그래서 모델 입장에서는 한 번도 본 적 없는 사진입니다.</a:t>
             </a:r>
             <a:endParaRPr lang="en-US" dirty="0"/>
           </a:p>
@@ -2261,7 +2351,7 @@
           <a:p>
             <a:r>
               <a:rPr lang="en-US" dirty="0"/>
-              <a:t>앞에서 본 결과들의 원인을 한 장에 모았습니다. 오른쪽 근거 칸은 얼마나 확실한지입니다. 확인은 데이터로 직접 확인한 것, 추정은 데이터와 맞지만 따로 검증하지 않은 것, 가설은 아직 검증하지 못한 것입니다. 가장 확실한 원인은 세 가지입니다. scratch는 반사나 나무결과 비슷한 가는 선이라 어렵고, 93%는 테스트 사진까지 학습에 들어가 부풀려진 수치이고, 2차 세트에서 떨어진 건 crack이 절반 크기로 작아졌기 때문입니다. ATSS가 왜 가장 좋은지는 아직 가설입니다.</a:t>
+              <a:t>같은 업로더가 올린 다른 세트에서, 학습에 한 번도 쓰지 않은 45장으로 제 앱에서 다시 테스트했습니다. 1차 테스트에서 결함 셀을 거의 다 잡던 모델이 ATSS 47%, YOLOX-S 3%까지 떨어집니다. 결함을 착각한 게 아니라 점수가 낮아서 통과시킨 것이고, 정상 셀을 불합격시킨 경우는 없었습니다. 가장 큰 원인은 crack입니다. 2차 세트의 crack은 약 30×26픽셀로 1차의 절반 면적이고, ATSS는 15개 중 1개만 잡았습니다. 학습 때 본 크기의 crack만 쉬웠던 겁니다. 기준값을 바꿔 보면, ATSS는 0.15까지 낮추면 결함 97%를 잡지만 정상 셀도 87%가 걸립니다. YOLOX-S는 다릅니다. 2차 세트 mAP@50이 0.93으로 결함을 정상보다 높게 순위 매기는 건 정확한데, 점수 자체가 낮습니다. YOLOX 점수는 물체일 확률과 클래스 확률을 곱한 값이라 원래 낮게 나오고, 처음 보는 사진에서는 더 낮아집니다. 0.05로 낮추면 정상 오검출 없이 57%를 잡습니다. 즉 기준값은 모델마다 따로 정해야 하고, 그래도 부족하기 때문에 새 환경 사진으로 재학습이 필요합니다.</a:t>
             </a:r>
             <a:endParaRPr lang="en-US" dirty="0"/>
           </a:p>
@@ -3434,7 +3524,7 @@
                   <a:schemeClr val="tx1"/>
                 </a:solidFill>
               </a:rPr>
-              <a:t>Logs and Lesson Learned</a:t>
+              <a:t>WHY ?</a:t>
             </a:r>
             <a:endParaRPr lang="en-US" sz="3200" dirty="0"/>
           </a:p>
@@ -3442,7 +3532,7 @@
       </p:sp>
       <p:graphicFrame>
         <p:nvGraphicFramePr>
-          <p:cNvPr id="11" name="log-table"/>
+          <p:cNvPr id="11" name="causes-table"/>
           <p:cNvGraphicFramePr>
             <a:graphicFrameLocks noGrp="1"/>
           </p:cNvGraphicFramePr>
@@ -3455,26 +3545,26 @@
           </p:nvPr>
         </p:nvGraphicFramePr>
         <p:xfrm>
-          <a:off x="548640" y="1234440"/>
-          <a:ext cx="6903720" cy="914400"/>
+          <a:off x="548640" y="1325880"/>
+          <a:ext cx="11094415" cy="914400"/>
         </p:xfrm>
         <a:graphic>
           <a:graphicData uri="http://schemas.openxmlformats.org/drawingml/2006/table">
             <a:tbl>
               <a:tblPr/>
               <a:tblGrid>
-                <a:gridCol w="548640"/>
-                <a:gridCol w="2240280"/>
-                <a:gridCol w="1691640"/>
-                <a:gridCol w="2423160"/>
+                <a:gridCol w="502920"/>
+                <a:gridCol w="2606040"/>
+                <a:gridCol w="7114032"/>
+                <a:gridCol w="868680"/>
               </a:tblGrid>
-              <a:tr h="566928">
+              <a:tr h="457200">
                 <a:tc>
                   <a:txBody>
                     <a:bodyPr/>
                     <a:lstStyle/>
                     <a:p>
-                      <a:pPr algn="l" indent="0" marL="0">
+                      <a:pPr algn="ctr" indent="0" marL="0">
                         <a:buNone/>
                       </a:pPr>
                       <a:r>
@@ -3486,7 +3576,7 @@
                           <a:ea typeface="Malgun Gothic" pitchFamily="34" charset="-122"/>
                           <a:cs typeface="Malgun Gothic" pitchFamily="34" charset="-120"/>
                         </a:rPr>
-                        <a:t>단계</a:t>
+                        <a:t>장</a:t>
                       </a:r>
                       <a:endParaRPr lang="en-US" sz="1400" dirty="0">
                         <a:latin typeface="Malgun Gothic" charset="0"/>
@@ -3542,75 +3632,7 @@
                     <a:bodyPr/>
                     <a:lstStyle/>
                     <a:p>
-                      <a:pPr algn="l" indent="0" marL="0">
-                        <a:buNone/>
-                      </a:pPr>
-                      <a:r>
-                        <a:rPr lang="en-US" sz="1400" b="1" dirty="0">
-                          <a:solidFill>
-                            <a:schemeClr val="tx2"/>
-                          </a:solidFill>
-                          <a:latin typeface="Malgun Gothic" pitchFamily="34" charset="0"/>
-                          <a:ea typeface="Malgun Gothic" pitchFamily="34" charset="-122"/>
-                          <a:cs typeface="Malgun Gothic" pitchFamily="34" charset="-120"/>
-                        </a:rPr>
-                        <a:t>조건</a:t>
-                      </a:r>
-                      <a:endParaRPr lang="en-US" sz="1400" dirty="0">
-                        <a:latin typeface="Malgun Gothic" charset="0"/>
-                        <a:ea typeface="Malgun Gothic" charset="0"/>
-                        <a:cs typeface="Malgun Gothic" charset="0"/>
-                      </a:endParaRPr>
-                    </a:p>
-                  </a:txBody>
-                  <a:tcPr marL="91440" marR="91440" marT="45720" marB="45720" anchor="ctr">
-                    <a:lnL w="9525" cap="flat" cmpd="sng" algn="ctr">
-                      <a:solidFill>
-                        <a:srgbClr val="3A3F48"/>
-                      </a:solidFill>
-                      <a:prstDash val="solid"/>
-                      <a:round/>
-                      <a:headEnd type="none" w="med" len="med"/>
-                      <a:tailEnd type="none" w="med" len="med"/>
-                    </a:lnL>
-                    <a:lnR w="9525" cap="flat" cmpd="sng" algn="ctr">
-                      <a:solidFill>
-                        <a:srgbClr val="3A3F48"/>
-                      </a:solidFill>
-                      <a:prstDash val="solid"/>
-                      <a:round/>
-                      <a:headEnd type="none" w="med" len="med"/>
-                      <a:tailEnd type="none" w="med" len="med"/>
-                    </a:lnR>
-                    <a:lnT w="9525" cap="flat" cmpd="sng" algn="ctr">
-                      <a:solidFill>
-                        <a:srgbClr val="3A3F48"/>
-                      </a:solidFill>
-                      <a:prstDash val="solid"/>
-                      <a:round/>
-                      <a:headEnd type="none" w="med" len="med"/>
-                      <a:tailEnd type="none" w="med" len="med"/>
-                    </a:lnT>
-                    <a:lnB w="9525" cap="flat" cmpd="sng" algn="ctr">
-                      <a:solidFill>
-                        <a:srgbClr val="3A3F48"/>
-                      </a:solidFill>
-                      <a:prstDash val="solid"/>
-                      <a:round/>
-                      <a:headEnd type="none" w="med" len="med"/>
-                      <a:tailEnd type="none" w="med" len="med"/>
-                    </a:lnB>
-                    <a:solidFill>
-                      <a:srgbClr val="16191E"/>
-                    </a:solidFill>
-                  </a:tcPr>
-                </a:tc>
-                <a:tc>
-                  <a:txBody>
-                    <a:bodyPr/>
-                    <a:lstStyle/>
-                    <a:p>
-                      <a:pPr algn="l" indent="0" marL="0">
+                      <a:pPr indent="0" marL="0">
                         <a:buNone/>
                       </a:pPr>
                       <a:r>
@@ -3678,7 +3700,7 @@
                     <a:bodyPr/>
                     <a:lstStyle/>
                     <a:p>
-                      <a:pPr algn="l" indent="0" marL="0">
+                      <a:pPr indent="0" marL="0">
                         <a:buNone/>
                       </a:pPr>
                       <a:r>
@@ -3690,7 +3712,7 @@
                           <a:ea typeface="Malgun Gothic" pitchFamily="34" charset="-122"/>
                           <a:cs typeface="Malgun Gothic" pitchFamily="34" charset="-120"/>
                         </a:rPr>
-                        <a:t>배운 것</a:t>
+                        <a:t>원인</a:t>
                       </a:r>
                       <a:endParaRPr lang="en-US" sz="1400" dirty="0">
                         <a:latin typeface="Malgun Gothic" charset="0"/>
@@ -3741,8 +3763,76 @@
                     </a:solidFill>
                   </a:tcPr>
                 </a:tc>
+                <a:tc>
+                  <a:txBody>
+                    <a:bodyPr/>
+                    <a:lstStyle/>
+                    <a:p>
+                      <a:pPr algn="ctr" indent="0" marL="0">
+                        <a:buNone/>
+                      </a:pPr>
+                      <a:r>
+                        <a:rPr lang="en-US" sz="1400" b="1" dirty="0">
+                          <a:solidFill>
+                            <a:schemeClr val="tx2"/>
+                          </a:solidFill>
+                          <a:latin typeface="Malgun Gothic" pitchFamily="34" charset="0"/>
+                          <a:ea typeface="Malgun Gothic" pitchFamily="34" charset="-122"/>
+                          <a:cs typeface="Malgun Gothic" pitchFamily="34" charset="-120"/>
+                        </a:rPr>
+                        <a:t>근거</a:t>
+                      </a:r>
+                      <a:endParaRPr lang="en-US" sz="1400" dirty="0">
+                        <a:latin typeface="Malgun Gothic" charset="0"/>
+                        <a:ea typeface="Malgun Gothic" charset="0"/>
+                        <a:cs typeface="Malgun Gothic" charset="0"/>
+                      </a:endParaRPr>
+                    </a:p>
+                  </a:txBody>
+                  <a:tcPr marL="91440" marR="91440" marT="45720" marB="45720" anchor="ctr">
+                    <a:lnL w="9525" cap="flat" cmpd="sng" algn="ctr">
+                      <a:solidFill>
+                        <a:srgbClr val="3A3F48"/>
+                      </a:solidFill>
+                      <a:prstDash val="solid"/>
+                      <a:round/>
+                      <a:headEnd type="none" w="med" len="med"/>
+                      <a:tailEnd type="none" w="med" len="med"/>
+                    </a:lnL>
+                    <a:lnR w="9525" cap="flat" cmpd="sng" algn="ctr">
+                      <a:solidFill>
+                        <a:srgbClr val="3A3F48"/>
+                      </a:solidFill>
+                      <a:prstDash val="solid"/>
+                      <a:round/>
+                      <a:headEnd type="none" w="med" len="med"/>
+                      <a:tailEnd type="none" w="med" len="med"/>
+                    </a:lnR>
+                    <a:lnT w="9525" cap="flat" cmpd="sng" algn="ctr">
+                      <a:solidFill>
+                        <a:srgbClr val="3A3F48"/>
+                      </a:solidFill>
+                      <a:prstDash val="solid"/>
+                      <a:round/>
+                      <a:headEnd type="none" w="med" len="med"/>
+                      <a:tailEnd type="none" w="med" len="med"/>
+                    </a:lnT>
+                    <a:lnB w="9525" cap="flat" cmpd="sng" algn="ctr">
+                      <a:solidFill>
+                        <a:srgbClr val="3A3F48"/>
+                      </a:solidFill>
+                      <a:prstDash val="solid"/>
+                      <a:round/>
+                      <a:headEnd type="none" w="med" len="med"/>
+                      <a:tailEnd type="none" w="med" len="med"/>
+                    </a:lnB>
+                    <a:solidFill>
+                      <a:srgbClr val="16191E"/>
+                    </a:solidFill>
+                  </a:tcPr>
+                </a:tc>
               </a:tr>
-              <a:tr h="566928">
+              <a:tr h="457200">
                 <a:tc>
                   <a:txBody>
                     <a:bodyPr/>
@@ -3754,13 +3844,13 @@
                       <a:r>
                         <a:rPr lang="en-US" sz="1400" dirty="0">
                           <a:solidFill>
-                            <a:schemeClr val="tx1"/>
+                            <a:schemeClr val="tx2"/>
                           </a:solidFill>
                           <a:latin typeface="Malgun Gothic" pitchFamily="34" charset="0"/>
                           <a:ea typeface="Malgun Gothic" pitchFamily="34" charset="-122"/>
                           <a:cs typeface="Malgun Gothic" pitchFamily="34" charset="-120"/>
                         </a:rPr>
-                        <a:t>1</a:t>
+                        <a:t>2</a:t>
                       </a:r>
                       <a:endParaRPr lang="en-US" sz="1400" dirty="0">
                         <a:latin typeface="Malgun Gothic" charset="0"/>
@@ -3816,7 +3906,75 @@
                     <a:bodyPr/>
                     <a:lstStyle/>
                     <a:p>
-                      <a:pPr algn="l" indent="0" marL="0">
+                      <a:pPr indent="0" marL="0">
+                        <a:buNone/>
+                      </a:pPr>
+                      <a:r>
+                        <a:rPr lang="en-US" sz="1400" b="1" dirty="0">
+                          <a:solidFill>
+                            <a:schemeClr val="tx1"/>
+                          </a:solidFill>
+                          <a:latin typeface="Malgun Gothic" pitchFamily="34" charset="0"/>
+                          <a:ea typeface="Malgun Gothic" pitchFamily="34" charset="-122"/>
+                          <a:cs typeface="Malgun Gothic" pitchFamily="34" charset="-120"/>
+                        </a:rPr>
+                        <a:t>Scratch 식별 어려움</a:t>
+                      </a:r>
+                      <a:endParaRPr lang="en-US" sz="1400" dirty="0">
+                        <a:latin typeface="Malgun Gothic" charset="0"/>
+                        <a:ea typeface="Malgun Gothic" charset="0"/>
+                        <a:cs typeface="Malgun Gothic" charset="0"/>
+                      </a:endParaRPr>
+                    </a:p>
+                  </a:txBody>
+                  <a:tcPr marL="91440" marR="91440" marT="45720" marB="45720" anchor="ctr">
+                    <a:lnL w="9525" cap="flat" cmpd="sng" algn="ctr">
+                      <a:solidFill>
+                        <a:srgbClr val="3A3F48"/>
+                      </a:solidFill>
+                      <a:prstDash val="solid"/>
+                      <a:round/>
+                      <a:headEnd type="none" w="med" len="med"/>
+                      <a:tailEnd type="none" w="med" len="med"/>
+                    </a:lnL>
+                    <a:lnR w="9525" cap="flat" cmpd="sng" algn="ctr">
+                      <a:solidFill>
+                        <a:srgbClr val="3A3F48"/>
+                      </a:solidFill>
+                      <a:prstDash val="solid"/>
+                      <a:round/>
+                      <a:headEnd type="none" w="med" len="med"/>
+                      <a:tailEnd type="none" w="med" len="med"/>
+                    </a:lnR>
+                    <a:lnT w="9525" cap="flat" cmpd="sng" algn="ctr">
+                      <a:solidFill>
+                        <a:srgbClr val="3A3F48"/>
+                      </a:solidFill>
+                      <a:prstDash val="solid"/>
+                      <a:round/>
+                      <a:headEnd type="none" w="med" len="med"/>
+                      <a:tailEnd type="none" w="med" len="med"/>
+                    </a:lnT>
+                    <a:lnB w="9525" cap="flat" cmpd="sng" algn="ctr">
+                      <a:solidFill>
+                        <a:srgbClr val="3A3F48"/>
+                      </a:solidFill>
+                      <a:prstDash val="solid"/>
+                      <a:round/>
+                      <a:headEnd type="none" w="med" len="med"/>
+                      <a:tailEnd type="none" w="med" len="med"/>
+                    </a:lnB>
+                    <a:solidFill>
+                      <a:srgbClr val="23272F"/>
+                    </a:solidFill>
+                  </a:tcPr>
+                </a:tc>
+                <a:tc>
+                  <a:txBody>
+                    <a:bodyPr/>
+                    <a:lstStyle/>
+                    <a:p>
+                      <a:pPr indent="0" marL="0">
                         <a:buNone/>
                       </a:pPr>
                       <a:r>
@@ -3828,7 +3986,7 @@
                           <a:ea typeface="Malgun Gothic" pitchFamily="34" charset="-122"/>
                           <a:cs typeface="Malgun Gothic" pitchFamily="34" charset="-120"/>
                         </a:rPr>
-                        <a:t>ATSS · 1차 테스트 153장</a:t>
+                        <a:t>반사·나무결과 비슷한 가는 선. 배경 오검출 16건 중 13건이 scratch</a:t>
                       </a:r>
                       <a:endParaRPr lang="en-US" sz="1400" dirty="0">
                         <a:latin typeface="Malgun Gothic" charset="0"/>
@@ -3890,13 +4048,83 @@
                       <a:r>
                         <a:rPr lang="en-US" sz="1400" b="1" dirty="0">
                           <a:solidFill>
-                            <a:schemeClr val="accent1"/>
+                            <a:schemeClr val="accent6"/>
                           </a:solidFill>
                           <a:latin typeface="Malgun Gothic" pitchFamily="34" charset="0"/>
                           <a:ea typeface="Malgun Gothic" pitchFamily="34" charset="-122"/>
                           <a:cs typeface="Malgun Gothic" pitchFamily="34" charset="-120"/>
                         </a:rPr>
-                        <a:t>93.3%</a:t>
+                        <a:t>확인</a:t>
+                      </a:r>
+                      <a:endParaRPr lang="en-US" sz="1400" dirty="0">
+                        <a:latin typeface="Malgun Gothic" charset="0"/>
+                        <a:ea typeface="Malgun Gothic" charset="0"/>
+                        <a:cs typeface="Malgun Gothic" charset="0"/>
+                      </a:endParaRPr>
+                    </a:p>
+                  </a:txBody>
+                  <a:tcPr marL="91440" marR="91440" marT="45720" marB="45720" anchor="ctr">
+                    <a:lnL w="9525" cap="flat" cmpd="sng" algn="ctr">
+                      <a:solidFill>
+                        <a:srgbClr val="3A3F48"/>
+                      </a:solidFill>
+                      <a:prstDash val="solid"/>
+                      <a:round/>
+                      <a:headEnd type="none" w="med" len="med"/>
+                      <a:tailEnd type="none" w="med" len="med"/>
+                    </a:lnL>
+                    <a:lnR w="9525" cap="flat" cmpd="sng" algn="ctr">
+                      <a:solidFill>
+                        <a:srgbClr val="3A3F48"/>
+                      </a:solidFill>
+                      <a:prstDash val="solid"/>
+                      <a:round/>
+                      <a:headEnd type="none" w="med" len="med"/>
+                      <a:tailEnd type="none" w="med" len="med"/>
+                    </a:lnR>
+                    <a:lnT w="9525" cap="flat" cmpd="sng" algn="ctr">
+                      <a:solidFill>
+                        <a:srgbClr val="3A3F48"/>
+                      </a:solidFill>
+                      <a:prstDash val="solid"/>
+                      <a:round/>
+                      <a:headEnd type="none" w="med" len="med"/>
+                      <a:tailEnd type="none" w="med" len="med"/>
+                    </a:lnT>
+                    <a:lnB w="9525" cap="flat" cmpd="sng" algn="ctr">
+                      <a:solidFill>
+                        <a:srgbClr val="3A3F48"/>
+                      </a:solidFill>
+                      <a:prstDash val="solid"/>
+                      <a:round/>
+                      <a:headEnd type="none" w="med" len="med"/>
+                      <a:tailEnd type="none" w="med" len="med"/>
+                    </a:lnB>
+                    <a:solidFill>
+                      <a:srgbClr val="23272F"/>
+                    </a:solidFill>
+                  </a:tcPr>
+                </a:tc>
+              </a:tr>
+              <a:tr h="457200">
+                <a:tc>
+                  <a:txBody>
+                    <a:bodyPr/>
+                    <a:lstStyle/>
+                    <a:p>
+                      <a:pPr algn="ctr" indent="0" marL="0">
+                        <a:buNone/>
+                      </a:pPr>
+                      <a:r>
+                        <a:rPr lang="en-US" sz="1400" dirty="0">
+                          <a:solidFill>
+                            <a:schemeClr val="tx2"/>
+                          </a:solidFill>
+                          <a:latin typeface="Malgun Gothic" pitchFamily="34" charset="0"/>
+                          <a:ea typeface="Malgun Gothic" pitchFamily="34" charset="-122"/>
+                          <a:cs typeface="Malgun Gothic" pitchFamily="34" charset="-120"/>
+                        </a:rPr>
+                        <a:t>4</a:t>
                       </a:r>
                       <a:endParaRPr lang="en-US" sz="1400" dirty="0">
                         <a:latin typeface="Malgun Gothic" charset="0"/>
@@ -3952,19 +4180,19 @@
                     <a:bodyPr/>
                     <a:lstStyle/>
                     <a:p>
-                      <a:pPr algn="l" indent="0" marL="0">
+                      <a:pPr indent="0" marL="0">
                         <a:buNone/>
                       </a:pPr>
                       <a:r>
-                        <a:rPr lang="en-US" sz="1400" dirty="0">
+                        <a:rPr lang="en-US" sz="1400" b="1" dirty="0">
                           <a:solidFill>
-                            <a:schemeClr val="tx2"/>
+                            <a:schemeClr val="tx1"/>
                           </a:solidFill>
                           <a:latin typeface="Malgun Gothic" pitchFamily="34" charset="0"/>
                           <a:ea typeface="Malgun Gothic" pitchFamily="34" charset="-122"/>
                           <a:cs typeface="Malgun Gothic" pitchFamily="34" charset="-120"/>
                         </a:rPr>
-                        <a:t>–</a:t>
+                        <a:t>과대평가 수치 (93%)</a:t>
                       </a:r>
                       <a:endParaRPr lang="en-US" sz="1400" dirty="0">
                         <a:latin typeface="Malgun Gothic" charset="0"/>
@@ -4015,14 +4243,12 @@
                     </a:solidFill>
                   </a:tcPr>
                 </a:tc>
-              </a:tr>
-              <a:tr h="566928">
                 <a:tc>
                   <a:txBody>
                     <a:bodyPr/>
                     <a:lstStyle/>
                     <a:p>
-                      <a:pPr algn="ctr" indent="0" marL="0">
+                      <a:pPr indent="0" marL="0">
                         <a:buNone/>
                       </a:pPr>
                       <a:r>
@@ -4034,75 +4260,7 @@
                           <a:ea typeface="Malgun Gothic" pitchFamily="34" charset="-122"/>
                           <a:cs typeface="Malgun Gothic" pitchFamily="34" charset="-120"/>
                         </a:rPr>
-                        <a:t>2</a:t>
-                      </a:r>
-                      <a:endParaRPr lang="en-US" sz="1400" dirty="0">
-                        <a:latin typeface="Malgun Gothic" charset="0"/>
-                        <a:ea typeface="Malgun Gothic" charset="0"/>
-                        <a:cs typeface="Malgun Gothic" charset="0"/>
-                      </a:endParaRPr>
-                    </a:p>
-                  </a:txBody>
-                  <a:tcPr marL="91440" marR="91440" marT="45720" marB="45720" anchor="ctr">
-                    <a:lnL w="9525" cap="flat" cmpd="sng" algn="ctr">
-                      <a:solidFill>
-                        <a:srgbClr val="3A3F48"/>
-                      </a:solidFill>
-                      <a:prstDash val="solid"/>
-                      <a:round/>
-                      <a:headEnd type="none" w="med" len="med"/>
-                      <a:tailEnd type="none" w="med" len="med"/>
-                    </a:lnL>
-                    <a:lnR w="9525" cap="flat" cmpd="sng" algn="ctr">
-                      <a:solidFill>
-                        <a:srgbClr val="3A3F48"/>
-                      </a:solidFill>
-                      <a:prstDash val="solid"/>
-                      <a:round/>
-                      <a:headEnd type="none" w="med" len="med"/>
-                      <a:tailEnd type="none" w="med" len="med"/>
-                    </a:lnR>
-                    <a:lnT w="9525" cap="flat" cmpd="sng" algn="ctr">
-                      <a:solidFill>
-                        <a:srgbClr val="3A3F48"/>
-                      </a:solidFill>
-                      <a:prstDash val="solid"/>
-                      <a:round/>
-                      <a:headEnd type="none" w="med" len="med"/>
-                      <a:tailEnd type="none" w="med" len="med"/>
-                    </a:lnT>
-                    <a:lnB w="9525" cap="flat" cmpd="sng" algn="ctr">
-                      <a:solidFill>
-                        <a:srgbClr val="3A3F48"/>
-                      </a:solidFill>
-                      <a:prstDash val="solid"/>
-                      <a:round/>
-                      <a:headEnd type="none" w="med" len="med"/>
-                      <a:tailEnd type="none" w="med" len="med"/>
-                    </a:lnB>
-                    <a:solidFill>
-                      <a:srgbClr val="23272F"/>
-                    </a:solidFill>
-                  </a:tcPr>
-                </a:tc>
-                <a:tc>
-                  <a:txBody>
-                    <a:bodyPr/>
-                    <a:lstStyle/>
-                    <a:p>
-                      <a:pPr algn="l" indent="0" marL="0">
-                        <a:buNone/>
-                      </a:pPr>
-                      <a:r>
-                        <a:rPr lang="en-US" sz="1400" dirty="0">
-                          <a:solidFill>
-                            <a:schemeClr val="tx1"/>
-                          </a:solidFill>
-                          <a:latin typeface="Malgun Gothic" pitchFamily="34" charset="0"/>
-                          <a:ea typeface="Malgun Gothic" pitchFamily="34" charset="-122"/>
-                          <a:cs typeface="Malgun Gothic" pitchFamily="34" charset="-120"/>
-                        </a:rPr>
-                        <a:t>복사본 22장 제거 · 131장</a:t>
+                        <a:t>테스트 사진도 학습에 포함. 복사본 22장, 같은 촬영 세션</a:t>
                       </a:r>
                       <a:endParaRPr lang="en-US" sz="1400" dirty="0">
                         <a:latin typeface="Malgun Gothic" charset="0"/>
@@ -4164,13 +4322,83 @@
                       <a:r>
                         <a:rPr lang="en-US" sz="1400" b="1" dirty="0">
                           <a:solidFill>
-                            <a:schemeClr val="accent1"/>
+                            <a:schemeClr val="accent6"/>
                           </a:solidFill>
                           <a:latin typeface="Malgun Gothic" pitchFamily="34" charset="0"/>
                           <a:ea typeface="Malgun Gothic" pitchFamily="34" charset="-122"/>
                           <a:cs typeface="Malgun Gothic" pitchFamily="34" charset="-120"/>
                         </a:rPr>
-                        <a:t>92.9%</a:t>
+                        <a:t>확인</a:t>
+                      </a:r>
+                      <a:endParaRPr lang="en-US" sz="1400" dirty="0">
+                        <a:latin typeface="Malgun Gothic" charset="0"/>
+                        <a:ea typeface="Malgun Gothic" charset="0"/>
+                        <a:cs typeface="Malgun Gothic" charset="0"/>
+                      </a:endParaRPr>
+                    </a:p>
+                  </a:txBody>
+                  <a:tcPr marL="91440" marR="91440" marT="45720" marB="45720" anchor="ctr">
+                    <a:lnL w="9525" cap="flat" cmpd="sng" algn="ctr">
+                      <a:solidFill>
+                        <a:srgbClr val="3A3F48"/>
+                      </a:solidFill>
+                      <a:prstDash val="solid"/>
+                      <a:round/>
+                      <a:headEnd type="none" w="med" len="med"/>
+                      <a:tailEnd type="none" w="med" len="med"/>
+                    </a:lnL>
+                    <a:lnR w="9525" cap="flat" cmpd="sng" algn="ctr">
+                      <a:solidFill>
+                        <a:srgbClr val="3A3F48"/>
+                      </a:solidFill>
+                      <a:prstDash val="solid"/>
+                      <a:round/>
+                      <a:headEnd type="none" w="med" len="med"/>
+                      <a:tailEnd type="none" w="med" len="med"/>
+                    </a:lnR>
+                    <a:lnT w="9525" cap="flat" cmpd="sng" algn="ctr">
+                      <a:solidFill>
+                        <a:srgbClr val="3A3F48"/>
+                      </a:solidFill>
+                      <a:prstDash val="solid"/>
+                      <a:round/>
+                      <a:headEnd type="none" w="med" len="med"/>
+                      <a:tailEnd type="none" w="med" len="med"/>
+                    </a:lnT>
+                    <a:lnB w="9525" cap="flat" cmpd="sng" algn="ctr">
+                      <a:solidFill>
+                        <a:srgbClr val="3A3F48"/>
+                      </a:solidFill>
+                      <a:prstDash val="solid"/>
+                      <a:round/>
+                      <a:headEnd type="none" w="med" len="med"/>
+                      <a:tailEnd type="none" w="med" len="med"/>
+                    </a:lnB>
+                    <a:solidFill>
+                      <a:srgbClr val="23272F"/>
+                    </a:solidFill>
+                  </a:tcPr>
+                </a:tc>
+              </a:tr>
+              <a:tr h="457200">
+                <a:tc>
+                  <a:txBody>
+                    <a:bodyPr/>
+                    <a:lstStyle/>
+                    <a:p>
+                      <a:pPr algn="ctr" indent="0" marL="0">
+                        <a:buNone/>
+                      </a:pPr>
+                      <a:r>
+                        <a:rPr lang="en-US" sz="1400" dirty="0">
+                          <a:solidFill>
+                            <a:schemeClr val="tx2"/>
+                          </a:solidFill>
+                          <a:latin typeface="Malgun Gothic" pitchFamily="34" charset="0"/>
+                          <a:ea typeface="Malgun Gothic" pitchFamily="34" charset="-122"/>
+                          <a:cs typeface="Malgun Gothic" pitchFamily="34" charset="-120"/>
+                        </a:rPr>
+                        <a:t>5</a:t>
                       </a:r>
                       <a:endParaRPr lang="en-US" sz="1400" dirty="0">
                         <a:latin typeface="Malgun Gothic" charset="0"/>
@@ -4226,19 +4454,19 @@
                     <a:bodyPr/>
                     <a:lstStyle/>
                     <a:p>
-                      <a:pPr algn="l" indent="0" marL="0">
+                      <a:pPr indent="0" marL="0">
                         <a:buNone/>
                       </a:pPr>
                       <a:r>
-                        <a:rPr lang="en-US" sz="1400" dirty="0">
+                        <a:rPr lang="en-US" sz="1400" b="1" dirty="0">
                           <a:solidFill>
-                            <a:schemeClr val="tx2"/>
+                            <a:schemeClr val="tx1"/>
                           </a:solidFill>
                           <a:latin typeface="Malgun Gothic" pitchFamily="34" charset="0"/>
                           <a:ea typeface="Malgun Gothic" pitchFamily="34" charset="-122"/>
                           <a:cs typeface="Malgun Gothic" pitchFamily="34" charset="-120"/>
                         </a:rPr>
-                        <a:t>중복 영향 0.4%p</a:t>
+                        <a:t>낙관적인 Geti score</a:t>
                       </a:r>
                       <a:endParaRPr lang="en-US" sz="1400" dirty="0">
                         <a:latin typeface="Malgun Gothic" charset="0"/>
@@ -4289,14 +4517,12 @@
                     </a:solidFill>
                   </a:tcPr>
                 </a:tc>
-              </a:tr>
-              <a:tr h="566928">
                 <a:tc>
                   <a:txBody>
                     <a:bodyPr/>
                     <a:lstStyle/>
                     <a:p>
-                      <a:pPr algn="ctr" indent="0" marL="0">
+                      <a:pPr indent="0" marL="0">
                         <a:buNone/>
                       </a:pPr>
                       <a:r>
@@ -4308,75 +4534,7 @@
                           <a:ea typeface="Malgun Gothic" pitchFamily="34" charset="-122"/>
                           <a:cs typeface="Malgun Gothic" pitchFamily="34" charset="-120"/>
                         </a:rPr>
-                        <a:t>3</a:t>
-                      </a:r>
-                      <a:endParaRPr lang="en-US" sz="1400" dirty="0">
-                        <a:latin typeface="Malgun Gothic" charset="0"/>
-                        <a:ea typeface="Malgun Gothic" charset="0"/>
-                        <a:cs typeface="Malgun Gothic" charset="0"/>
-                      </a:endParaRPr>
-                    </a:p>
-                  </a:txBody>
-                  <a:tcPr marL="91440" marR="91440" marT="45720" marB="45720" anchor="ctr">
-                    <a:lnL w="9525" cap="flat" cmpd="sng" algn="ctr">
-                      <a:solidFill>
-                        <a:srgbClr val="3A3F48"/>
-                      </a:solidFill>
-                      <a:prstDash val="solid"/>
-                      <a:round/>
-                      <a:headEnd type="none" w="med" len="med"/>
-                      <a:tailEnd type="none" w="med" len="med"/>
-                    </a:lnL>
-                    <a:lnR w="9525" cap="flat" cmpd="sng" algn="ctr">
-                      <a:solidFill>
-                        <a:srgbClr val="3A3F48"/>
-                      </a:solidFill>
-                      <a:prstDash val="solid"/>
-                      <a:round/>
-                      <a:headEnd type="none" w="med" len="med"/>
-                      <a:tailEnd type="none" w="med" len="med"/>
-                    </a:lnR>
-                    <a:lnT w="9525" cap="flat" cmpd="sng" algn="ctr">
-                      <a:solidFill>
-                        <a:srgbClr val="3A3F48"/>
-                      </a:solidFill>
-                      <a:prstDash val="solid"/>
-                      <a:round/>
-                      <a:headEnd type="none" w="med" len="med"/>
-                      <a:tailEnd type="none" w="med" len="med"/>
-                    </a:lnT>
-                    <a:lnB w="9525" cap="flat" cmpd="sng" algn="ctr">
-                      <a:solidFill>
-                        <a:srgbClr val="3A3F48"/>
-                      </a:solidFill>
-                      <a:prstDash val="solid"/>
-                      <a:round/>
-                      <a:headEnd type="none" w="med" len="med"/>
-                      <a:tailEnd type="none" w="med" len="med"/>
-                    </a:lnB>
-                    <a:solidFill>
-                      <a:srgbClr val="23272F"/>
-                    </a:solidFill>
-                  </a:tcPr>
-                </a:tc>
-                <a:tc>
-                  <a:txBody>
-                    <a:bodyPr/>
-                    <a:lstStyle/>
-                    <a:p>
-                      <a:pPr algn="l" indent="0" marL="0">
-                        <a:buNone/>
-                      </a:pPr>
-                      <a:r>
-                        <a:rPr lang="en-US" sz="1400" dirty="0">
-                          <a:solidFill>
-                            <a:schemeClr val="tx1"/>
-                          </a:solidFill>
-                          <a:latin typeface="Malgun Gothic" pitchFamily="34" charset="0"/>
-                          <a:ea typeface="Malgun Gothic" pitchFamily="34" charset="-122"/>
-                          <a:cs typeface="Malgun Gothic" pitchFamily="34" charset="-120"/>
-                        </a:rPr>
-                        <a:t>업로드 내역 확인</a:t>
+                        <a:t>원본 1장당 증강본 3장이 Geti 학습·테스트에 나뉘어 들어갔을 가능성</a:t>
                       </a:r>
                       <a:endParaRPr lang="en-US" sz="1400" dirty="0">
                         <a:latin typeface="Malgun Gothic" charset="0"/>
@@ -4444,7 +4602,7 @@
                           <a:ea typeface="Malgun Gothic" pitchFamily="34" charset="-122"/>
                           <a:cs typeface="Malgun Gothic" pitchFamily="34" charset="-120"/>
                         </a:rPr>
-                        <a:t>테스트 포함</a:t>
+                        <a:t>추정</a:t>
                       </a:r>
                       <a:endParaRPr lang="en-US" sz="1400" dirty="0">
                         <a:latin typeface="Malgun Gothic" charset="0"/>
@@ -4495,76 +4653,8 @@
                     </a:solidFill>
                   </a:tcPr>
                 </a:tc>
-                <a:tc>
-                  <a:txBody>
-                    <a:bodyPr/>
-                    <a:lstStyle/>
-                    <a:p>
-                      <a:pPr algn="l" indent="0" marL="0">
-                        <a:buNone/>
-                      </a:pPr>
-                      <a:r>
-                        <a:rPr lang="en-US" sz="1400" dirty="0">
-                          <a:solidFill>
-                            <a:schemeClr val="tx2"/>
-                          </a:solidFill>
-                          <a:latin typeface="Malgun Gothic" pitchFamily="34" charset="0"/>
-                          <a:ea typeface="Malgun Gothic" pitchFamily="34" charset="-122"/>
-                          <a:cs typeface="Malgun Gothic" pitchFamily="34" charset="-120"/>
-                        </a:rPr>
-                        <a:t>1차 = 비교용</a:t>
-                      </a:r>
-                      <a:endParaRPr lang="en-US" sz="1400" dirty="0">
-                        <a:latin typeface="Malgun Gothic" charset="0"/>
-                        <a:ea typeface="Malgun Gothic" charset="0"/>
-                        <a:cs typeface="Malgun Gothic" charset="0"/>
-                      </a:endParaRPr>
-                    </a:p>
-                  </a:txBody>
-                  <a:tcPr marL="91440" marR="91440" marT="45720" marB="45720" anchor="ctr">
-                    <a:lnL w="9525" cap="flat" cmpd="sng" algn="ctr">
-                      <a:solidFill>
-                        <a:srgbClr val="3A3F48"/>
-                      </a:solidFill>
-                      <a:prstDash val="solid"/>
-                      <a:round/>
-                      <a:headEnd type="none" w="med" len="med"/>
-                      <a:tailEnd type="none" w="med" len="med"/>
-                    </a:lnL>
-                    <a:lnR w="9525" cap="flat" cmpd="sng" algn="ctr">
-                      <a:solidFill>
-                        <a:srgbClr val="3A3F48"/>
-                      </a:solidFill>
-                      <a:prstDash val="solid"/>
-                      <a:round/>
-                      <a:headEnd type="none" w="med" len="med"/>
-                      <a:tailEnd type="none" w="med" len="med"/>
-                    </a:lnR>
-                    <a:lnT w="9525" cap="flat" cmpd="sng" algn="ctr">
-                      <a:solidFill>
-                        <a:srgbClr val="3A3F48"/>
-                      </a:solidFill>
-                      <a:prstDash val="solid"/>
-                      <a:round/>
-                      <a:headEnd type="none" w="med" len="med"/>
-                      <a:tailEnd type="none" w="med" len="med"/>
-                    </a:lnT>
-                    <a:lnB w="9525" cap="flat" cmpd="sng" algn="ctr">
-                      <a:solidFill>
-                        <a:srgbClr val="3A3F48"/>
-                      </a:solidFill>
-                      <a:prstDash val="solid"/>
-                      <a:round/>
-                      <a:headEnd type="none" w="med" len="med"/>
-                      <a:tailEnd type="none" w="med" len="med"/>
-                    </a:lnB>
-                    <a:solidFill>
-                      <a:srgbClr val="23272F"/>
-                    </a:solidFill>
-                  </a:tcPr>
-                </a:tc>
               </a:tr>
-              <a:tr h="566928">
+              <a:tr h="457200">
                 <a:tc>
                   <a:txBody>
                     <a:bodyPr/>
@@ -4576,281 +4666,7 @@
                       <a:r>
                         <a:rPr lang="en-US" sz="1400" dirty="0">
                           <a:solidFill>
-                            <a:schemeClr val="tx1"/>
-                          </a:solidFill>
-                          <a:latin typeface="Malgun Gothic" pitchFamily="34" charset="0"/>
-                          <a:ea typeface="Malgun Gothic" pitchFamily="34" charset="-122"/>
-                          <a:cs typeface="Malgun Gothic" pitchFamily="34" charset="-120"/>
-                        </a:rPr>
-                        <a:t>4</a:t>
-                      </a:r>
-                      <a:endParaRPr lang="en-US" sz="1400" dirty="0">
-                        <a:latin typeface="Malgun Gothic" charset="0"/>
-                        <a:ea typeface="Malgun Gothic" charset="0"/>
-                        <a:cs typeface="Malgun Gothic" charset="0"/>
-                      </a:endParaRPr>
-                    </a:p>
-                  </a:txBody>
-                  <a:tcPr marL="91440" marR="91440" marT="45720" marB="45720" anchor="ctr">
-                    <a:lnL w="9525" cap="flat" cmpd="sng" algn="ctr">
-                      <a:solidFill>
-                        <a:srgbClr val="3A3F48"/>
-                      </a:solidFill>
-                      <a:prstDash val="solid"/>
-                      <a:round/>
-                      <a:headEnd type="none" w="med" len="med"/>
-                      <a:tailEnd type="none" w="med" len="med"/>
-                    </a:lnL>
-                    <a:lnR w="9525" cap="flat" cmpd="sng" algn="ctr">
-                      <a:solidFill>
-                        <a:srgbClr val="3A3F48"/>
-                      </a:solidFill>
-                      <a:prstDash val="solid"/>
-                      <a:round/>
-                      <a:headEnd type="none" w="med" len="med"/>
-                      <a:tailEnd type="none" w="med" len="med"/>
-                    </a:lnR>
-                    <a:lnT w="9525" cap="flat" cmpd="sng" algn="ctr">
-                      <a:solidFill>
-                        <a:srgbClr val="3A3F48"/>
-                      </a:solidFill>
-                      <a:prstDash val="solid"/>
-                      <a:round/>
-                      <a:headEnd type="none" w="med" len="med"/>
-                      <a:tailEnd type="none" w="med" len="med"/>
-                    </a:lnT>
-                    <a:lnB w="9525" cap="flat" cmpd="sng" algn="ctr">
-                      <a:solidFill>
-                        <a:srgbClr val="3A3F48"/>
-                      </a:solidFill>
-                      <a:prstDash val="solid"/>
-                      <a:round/>
-                      <a:headEnd type="none" w="med" len="med"/>
-                      <a:tailEnd type="none" w="med" len="med"/>
-                    </a:lnB>
-                    <a:solidFill>
-                      <a:srgbClr val="23272F"/>
-                    </a:solidFill>
-                  </a:tcPr>
-                </a:tc>
-                <a:tc>
-                  <a:txBody>
-                    <a:bodyPr/>
-                    <a:lstStyle/>
-                    <a:p>
-                      <a:pPr algn="l" indent="0" marL="0">
-                        <a:buNone/>
-                      </a:pPr>
-                      <a:r>
-                        <a:rPr lang="en-US" sz="1400" dirty="0">
-                          <a:solidFill>
-                            <a:schemeClr val="tx1"/>
-                          </a:solidFill>
-                          <a:latin typeface="Malgun Gothic" pitchFamily="34" charset="0"/>
-                          <a:ea typeface="Malgun Gothic" pitchFamily="34" charset="-122"/>
-                          <a:cs typeface="Malgun Gothic" pitchFamily="34" charset="-120"/>
-                        </a:rPr>
-                        <a:t>YOLOX-S · Tiny 비교</a:t>
-                      </a:r>
-                      <a:endParaRPr lang="en-US" sz="1400" dirty="0">
-                        <a:latin typeface="Malgun Gothic" charset="0"/>
-                        <a:ea typeface="Malgun Gothic" charset="0"/>
-                        <a:cs typeface="Malgun Gothic" charset="0"/>
-                      </a:endParaRPr>
-                    </a:p>
-                  </a:txBody>
-                  <a:tcPr marL="91440" marR="91440" marT="45720" marB="45720" anchor="ctr">
-                    <a:lnL w="9525" cap="flat" cmpd="sng" algn="ctr">
-                      <a:solidFill>
-                        <a:srgbClr val="3A3F48"/>
-                      </a:solidFill>
-                      <a:prstDash val="solid"/>
-                      <a:round/>
-                      <a:headEnd type="none" w="med" len="med"/>
-                      <a:tailEnd type="none" w="med" len="med"/>
-                    </a:lnL>
-                    <a:lnR w="9525" cap="flat" cmpd="sng" algn="ctr">
-                      <a:solidFill>
-                        <a:srgbClr val="3A3F48"/>
-                      </a:solidFill>
-                      <a:prstDash val="solid"/>
-                      <a:round/>
-                      <a:headEnd type="none" w="med" len="med"/>
-                      <a:tailEnd type="none" w="med" len="med"/>
-                    </a:lnR>
-                    <a:lnT w="9525" cap="flat" cmpd="sng" algn="ctr">
-                      <a:solidFill>
-                        <a:srgbClr val="3A3F48"/>
-                      </a:solidFill>
-                      <a:prstDash val="solid"/>
-                      <a:round/>
-                      <a:headEnd type="none" w="med" len="med"/>
-                      <a:tailEnd type="none" w="med" len="med"/>
-                    </a:lnT>
-                    <a:lnB w="9525" cap="flat" cmpd="sng" algn="ctr">
-                      <a:solidFill>
-                        <a:srgbClr val="3A3F48"/>
-                      </a:solidFill>
-                      <a:prstDash val="solid"/>
-                      <a:round/>
-                      <a:headEnd type="none" w="med" len="med"/>
-                      <a:tailEnd type="none" w="med" len="med"/>
-                    </a:lnB>
-                    <a:solidFill>
-                      <a:srgbClr val="23272F"/>
-                    </a:solidFill>
-                  </a:tcPr>
-                </a:tc>
-                <a:tc>
-                  <a:txBody>
-                    <a:bodyPr/>
-                    <a:lstStyle/>
-                    <a:p>
-                      <a:pPr algn="ctr" indent="0" marL="0">
-                        <a:buNone/>
-                      </a:pPr>
-                      <a:r>
-                        <a:rPr lang="en-US" sz="1400" b="1" dirty="0">
-                          <a:solidFill>
-                            <a:schemeClr val="accent1"/>
-                          </a:solidFill>
-                          <a:latin typeface="Malgun Gothic" pitchFamily="34" charset="0"/>
-                          <a:ea typeface="Malgun Gothic" pitchFamily="34" charset="-122"/>
-                          <a:cs typeface="Malgun Gothic" pitchFamily="34" charset="-120"/>
-                        </a:rPr>
-                        <a:t>89.2 · 83.2%</a:t>
-                      </a:r>
-                      <a:endParaRPr lang="en-US" sz="1400" dirty="0">
-                        <a:latin typeface="Malgun Gothic" charset="0"/>
-                        <a:ea typeface="Malgun Gothic" charset="0"/>
-                        <a:cs typeface="Malgun Gothic" charset="0"/>
-                      </a:endParaRPr>
-                    </a:p>
-                  </a:txBody>
-                  <a:tcPr marL="91440" marR="91440" marT="45720" marB="45720" anchor="ctr">
-                    <a:lnL w="9525" cap="flat" cmpd="sng" algn="ctr">
-                      <a:solidFill>
-                        <a:srgbClr val="3A3F48"/>
-                      </a:solidFill>
-                      <a:prstDash val="solid"/>
-                      <a:round/>
-                      <a:headEnd type="none" w="med" len="med"/>
-                      <a:tailEnd type="none" w="med" len="med"/>
-                    </a:lnL>
-                    <a:lnR w="9525" cap="flat" cmpd="sng" algn="ctr">
-                      <a:solidFill>
-                        <a:srgbClr val="3A3F48"/>
-                      </a:solidFill>
-                      <a:prstDash val="solid"/>
-                      <a:round/>
-                      <a:headEnd type="none" w="med" len="med"/>
-                      <a:tailEnd type="none" w="med" len="med"/>
-                    </a:lnR>
-                    <a:lnT w="9525" cap="flat" cmpd="sng" algn="ctr">
-                      <a:solidFill>
-                        <a:srgbClr val="3A3F48"/>
-                      </a:solidFill>
-                      <a:prstDash val="solid"/>
-                      <a:round/>
-                      <a:headEnd type="none" w="med" len="med"/>
-                      <a:tailEnd type="none" w="med" len="med"/>
-                    </a:lnT>
-                    <a:lnB w="9525" cap="flat" cmpd="sng" algn="ctr">
-                      <a:solidFill>
-                        <a:srgbClr val="3A3F48"/>
-                      </a:solidFill>
-                      <a:prstDash val="solid"/>
-                      <a:round/>
-                      <a:headEnd type="none" w="med" len="med"/>
-                      <a:tailEnd type="none" w="med" len="med"/>
-                    </a:lnB>
-                    <a:solidFill>
-                      <a:srgbClr val="23272F"/>
-                    </a:solidFill>
-                  </a:tcPr>
-                </a:tc>
-                <a:tc>
-                  <a:txBody>
-                    <a:bodyPr/>
-                    <a:lstStyle/>
-                    <a:p>
-                      <a:pPr algn="l" indent="0" marL="0">
-                        <a:buNone/>
-                      </a:pPr>
-                      <a:r>
-                        <a:rPr lang="en-US" sz="1400" dirty="0">
-                          <a:solidFill>
                             <a:schemeClr val="tx2"/>
-                          </a:solidFill>
-                          <a:latin typeface="Malgun Gothic" pitchFamily="34" charset="0"/>
-                          <a:ea typeface="Malgun Gothic" pitchFamily="34" charset="-122"/>
-                          <a:cs typeface="Malgun Gothic" pitchFamily="34" charset="-120"/>
-                        </a:rPr>
-                        <a:t>ATSS 최고</a:t>
-                      </a:r>
-                      <a:endParaRPr lang="en-US" sz="1400" dirty="0">
-                        <a:latin typeface="Malgun Gothic" charset="0"/>
-                        <a:ea typeface="Malgun Gothic" charset="0"/>
-                        <a:cs typeface="Malgun Gothic" charset="0"/>
-                      </a:endParaRPr>
-                    </a:p>
-                  </a:txBody>
-                  <a:tcPr marL="91440" marR="91440" marT="45720" marB="45720" anchor="ctr">
-                    <a:lnL w="9525" cap="flat" cmpd="sng" algn="ctr">
-                      <a:solidFill>
-                        <a:srgbClr val="3A3F48"/>
-                      </a:solidFill>
-                      <a:prstDash val="solid"/>
-                      <a:round/>
-                      <a:headEnd type="none" w="med" len="med"/>
-                      <a:tailEnd type="none" w="med" len="med"/>
-                    </a:lnL>
-                    <a:lnR w="9525" cap="flat" cmpd="sng" algn="ctr">
-                      <a:solidFill>
-                        <a:srgbClr val="3A3F48"/>
-                      </a:solidFill>
-                      <a:prstDash val="solid"/>
-                      <a:round/>
-                      <a:headEnd type="none" w="med" len="med"/>
-                      <a:tailEnd type="none" w="med" len="med"/>
-                    </a:lnR>
-                    <a:lnT w="9525" cap="flat" cmpd="sng" algn="ctr">
-                      <a:solidFill>
-                        <a:srgbClr val="3A3F48"/>
-                      </a:solidFill>
-                      <a:prstDash val="solid"/>
-                      <a:round/>
-                      <a:headEnd type="none" w="med" len="med"/>
-                      <a:tailEnd type="none" w="med" len="med"/>
-                    </a:lnT>
-                    <a:lnB w="9525" cap="flat" cmpd="sng" algn="ctr">
-                      <a:solidFill>
-                        <a:srgbClr val="3A3F48"/>
-                      </a:solidFill>
-                      <a:prstDash val="solid"/>
-                      <a:round/>
-                      <a:headEnd type="none" w="med" len="med"/>
-                      <a:tailEnd type="none" w="med" len="med"/>
-                    </a:lnB>
-                    <a:solidFill>
-                      <a:srgbClr val="23272F"/>
-                    </a:solidFill>
-                  </a:tcPr>
-                </a:tc>
-              </a:tr>
-              <a:tr h="566928">
-                <a:tc>
-                  <a:txBody>
-                    <a:bodyPr/>
-                    <a:lstStyle/>
-                    <a:p>
-                      <a:pPr algn="ctr" indent="0" marL="0">
-                        <a:buNone/>
-                      </a:pPr>
-                      <a:r>
-                        <a:rPr lang="en-US" sz="1400" dirty="0">
-                          <a:solidFill>
-                            <a:schemeClr val="tx1"/>
                           </a:solidFill>
                           <a:latin typeface="Malgun Gothic" pitchFamily="34" charset="0"/>
                           <a:ea typeface="Malgun Gothic" pitchFamily="34" charset="-122"/>
@@ -4912,7 +4728,75 @@
                     <a:bodyPr/>
                     <a:lstStyle/>
                     <a:p>
-                      <a:pPr algn="l" indent="0" marL="0">
+                      <a:pPr indent="0" marL="0">
+                        <a:buNone/>
+                      </a:pPr>
+                      <a:r>
+                        <a:rPr lang="en-US" sz="1400" b="1" dirty="0">
+                          <a:solidFill>
+                            <a:schemeClr val="tx1"/>
+                          </a:solidFill>
+                          <a:latin typeface="Malgun Gothic" pitchFamily="34" charset="0"/>
+                          <a:ea typeface="Malgun Gothic" pitchFamily="34" charset="-122"/>
+                          <a:cs typeface="Malgun Gothic" pitchFamily="34" charset="-120"/>
+                        </a:rPr>
+                        <a:t>ATSS 최고평가</a:t>
+                      </a:r>
+                      <a:endParaRPr lang="en-US" sz="1400" dirty="0">
+                        <a:latin typeface="Malgun Gothic" charset="0"/>
+                        <a:ea typeface="Malgun Gothic" charset="0"/>
+                        <a:cs typeface="Malgun Gothic" charset="0"/>
+                      </a:endParaRPr>
+                    </a:p>
+                  </a:txBody>
+                  <a:tcPr marL="91440" marR="91440" marT="45720" marB="45720" anchor="ctr">
+                    <a:lnL w="9525" cap="flat" cmpd="sng" algn="ctr">
+                      <a:solidFill>
+                        <a:srgbClr val="3A3F48"/>
+                      </a:solidFill>
+                      <a:prstDash val="solid"/>
+                      <a:round/>
+                      <a:headEnd type="none" w="med" len="med"/>
+                      <a:tailEnd type="none" w="med" len="med"/>
+                    </a:lnL>
+                    <a:lnR w="9525" cap="flat" cmpd="sng" algn="ctr">
+                      <a:solidFill>
+                        <a:srgbClr val="3A3F48"/>
+                      </a:solidFill>
+                      <a:prstDash val="solid"/>
+                      <a:round/>
+                      <a:headEnd type="none" w="med" len="med"/>
+                      <a:tailEnd type="none" w="med" len="med"/>
+                    </a:lnR>
+                    <a:lnT w="9525" cap="flat" cmpd="sng" algn="ctr">
+                      <a:solidFill>
+                        <a:srgbClr val="3A3F48"/>
+                      </a:solidFill>
+                      <a:prstDash val="solid"/>
+                      <a:round/>
+                      <a:headEnd type="none" w="med" len="med"/>
+                      <a:tailEnd type="none" w="med" len="med"/>
+                    </a:lnT>
+                    <a:lnB w="9525" cap="flat" cmpd="sng" algn="ctr">
+                      <a:solidFill>
+                        <a:srgbClr val="3A3F48"/>
+                      </a:solidFill>
+                      <a:prstDash val="solid"/>
+                      <a:round/>
+                      <a:headEnd type="none" w="med" len="med"/>
+                      <a:tailEnd type="none" w="med" len="med"/>
+                    </a:lnB>
+                    <a:solidFill>
+                      <a:srgbClr val="23272F"/>
+                    </a:solidFill>
+                  </a:tcPr>
+                </a:tc>
+                <a:tc>
+                  <a:txBody>
+                    <a:bodyPr/>
+                    <a:lstStyle/>
+                    <a:p>
+                      <a:pPr indent="0" marL="0">
                         <a:buNone/>
                       </a:pPr>
                       <a:r>
@@ -4924,7 +4808,7 @@
                           <a:ea typeface="Malgun Gothic" pitchFamily="34" charset="-122"/>
                           <a:cs typeface="Malgun Gothic" pitchFamily="34" charset="-120"/>
                         </a:rPr>
-                        <a:t>INT8 양자화</a:t>
+                        <a:t>입력 해상도 차이 (992×800 vs 640×640). 32px 미만 박스에서 격차 최대 (0.86 vs 0.80)</a:t>
                       </a:r>
                       <a:endParaRPr lang="en-US" sz="1400" dirty="0">
                         <a:latin typeface="Malgun Gothic" charset="0"/>
@@ -4992,7 +4876,7 @@
                           <a:ea typeface="Malgun Gothic" pitchFamily="34" charset="-122"/>
                           <a:cs typeface="Malgun Gothic" pitchFamily="34" charset="-120"/>
                         </a:rPr>
-                        <a:t>2–4배 빠름</a:t>
+                        <a:t>추정</a:t>
                       </a:r>
                       <a:endParaRPr lang="en-US" sz="1400" dirty="0">
                         <a:latin typeface="Malgun Gothic" charset="0"/>
@@ -5043,76 +4927,8 @@
                     </a:solidFill>
                   </a:tcPr>
                 </a:tc>
-                <a:tc>
-                  <a:txBody>
-                    <a:bodyPr/>
-                    <a:lstStyle/>
-                    <a:p>
-                      <a:pPr algn="l" indent="0" marL="0">
-                        <a:buNone/>
-                      </a:pPr>
-                      <a:r>
-                        <a:rPr lang="en-US" sz="1400" dirty="0">
-                          <a:solidFill>
-                            <a:schemeClr val="tx2"/>
-                          </a:solidFill>
-                          <a:latin typeface="Malgun Gothic" pitchFamily="34" charset="0"/>
-                          <a:ea typeface="Malgun Gothic" pitchFamily="34" charset="-122"/>
-                          <a:cs typeface="Malgun Gothic" pitchFamily="34" charset="-120"/>
-                        </a:rPr>
-                        <a:t>놓침 소폭 증가</a:t>
-                      </a:r>
-                      <a:endParaRPr lang="en-US" sz="1400" dirty="0">
-                        <a:latin typeface="Malgun Gothic" charset="0"/>
-                        <a:ea typeface="Malgun Gothic" charset="0"/>
-                        <a:cs typeface="Malgun Gothic" charset="0"/>
-                      </a:endParaRPr>
-                    </a:p>
-                  </a:txBody>
-                  <a:tcPr marL="91440" marR="91440" marT="45720" marB="45720" anchor="ctr">
-                    <a:lnL w="9525" cap="flat" cmpd="sng" algn="ctr">
-                      <a:solidFill>
-                        <a:srgbClr val="3A3F48"/>
-                      </a:solidFill>
-                      <a:prstDash val="solid"/>
-                      <a:round/>
-                      <a:headEnd type="none" w="med" len="med"/>
-                      <a:tailEnd type="none" w="med" len="med"/>
-                    </a:lnL>
-                    <a:lnR w="9525" cap="flat" cmpd="sng" algn="ctr">
-                      <a:solidFill>
-                        <a:srgbClr val="3A3F48"/>
-                      </a:solidFill>
-                      <a:prstDash val="solid"/>
-                      <a:round/>
-                      <a:headEnd type="none" w="med" len="med"/>
-                      <a:tailEnd type="none" w="med" len="med"/>
-                    </a:lnR>
-                    <a:lnT w="9525" cap="flat" cmpd="sng" algn="ctr">
-                      <a:solidFill>
-                        <a:srgbClr val="3A3F48"/>
-                      </a:solidFill>
-                      <a:prstDash val="solid"/>
-                      <a:round/>
-                      <a:headEnd type="none" w="med" len="med"/>
-                      <a:tailEnd type="none" w="med" len="med"/>
-                    </a:lnT>
-                    <a:lnB w="9525" cap="flat" cmpd="sng" algn="ctr">
-                      <a:solidFill>
-                        <a:srgbClr val="3A3F48"/>
-                      </a:solidFill>
-                      <a:prstDash val="solid"/>
-                      <a:round/>
-                      <a:headEnd type="none" w="med" len="med"/>
-                      <a:tailEnd type="none" w="med" len="med"/>
-                    </a:lnB>
-                    <a:solidFill>
-                      <a:srgbClr val="23272F"/>
-                    </a:solidFill>
-                  </a:tcPr>
-                </a:tc>
               </a:tr>
-              <a:tr h="566928">
+              <a:tr h="457200">
                 <a:tc>
                   <a:txBody>
                     <a:bodyPr/>
@@ -5124,7 +4940,7 @@
                       <a:r>
                         <a:rPr lang="en-US" sz="1400" dirty="0">
                           <a:solidFill>
-                            <a:schemeClr val="tx1"/>
+                            <a:schemeClr val="tx2"/>
                           </a:solidFill>
                           <a:latin typeface="Malgun Gothic" pitchFamily="34" charset="0"/>
                           <a:ea typeface="Malgun Gothic" pitchFamily="34" charset="-122"/>
@@ -5186,7 +5002,75 @@
                     <a:bodyPr/>
                     <a:lstStyle/>
                     <a:p>
-                      <a:pPr algn="l" indent="0" marL="0">
+                      <a:pPr indent="0" marL="0">
+                        <a:buNone/>
+                      </a:pPr>
+                      <a:r>
+                        <a:rPr lang="en-US" sz="1400" b="1" dirty="0">
+                          <a:solidFill>
+                            <a:schemeClr val="tx1"/>
+                          </a:solidFill>
+                          <a:latin typeface="Malgun Gothic" pitchFamily="34" charset="0"/>
+                          <a:ea typeface="Malgun Gothic" pitchFamily="34" charset="-122"/>
+                          <a:cs typeface="Malgun Gothic" pitchFamily="34" charset="-120"/>
+                        </a:rPr>
+                        <a:t>나무 배경 취약 (33%)</a:t>
+                      </a:r>
+                      <a:endParaRPr lang="en-US" sz="1400" dirty="0">
+                        <a:latin typeface="Malgun Gothic" charset="0"/>
+                        <a:ea typeface="Malgun Gothic" charset="0"/>
+                        <a:cs typeface="Malgun Gothic" charset="0"/>
+                      </a:endParaRPr>
+                    </a:p>
+                  </a:txBody>
+                  <a:tcPr marL="91440" marR="91440" marT="45720" marB="45720" anchor="ctr">
+                    <a:lnL w="9525" cap="flat" cmpd="sng" algn="ctr">
+                      <a:solidFill>
+                        <a:srgbClr val="3A3F48"/>
+                      </a:solidFill>
+                      <a:prstDash val="solid"/>
+                      <a:round/>
+                      <a:headEnd type="none" w="med" len="med"/>
+                      <a:tailEnd type="none" w="med" len="med"/>
+                    </a:lnL>
+                    <a:lnR w="9525" cap="flat" cmpd="sng" algn="ctr">
+                      <a:solidFill>
+                        <a:srgbClr val="3A3F48"/>
+                      </a:solidFill>
+                      <a:prstDash val="solid"/>
+                      <a:round/>
+                      <a:headEnd type="none" w="med" len="med"/>
+                      <a:tailEnd type="none" w="med" len="med"/>
+                    </a:lnR>
+                    <a:lnT w="9525" cap="flat" cmpd="sng" algn="ctr">
+                      <a:solidFill>
+                        <a:srgbClr val="3A3F48"/>
+                      </a:solidFill>
+                      <a:prstDash val="solid"/>
+                      <a:round/>
+                      <a:headEnd type="none" w="med" len="med"/>
+                      <a:tailEnd type="none" w="med" len="med"/>
+                    </a:lnT>
+                    <a:lnB w="9525" cap="flat" cmpd="sng" algn="ctr">
+                      <a:solidFill>
+                        <a:srgbClr val="3A3F48"/>
+                      </a:solidFill>
+                      <a:prstDash val="solid"/>
+                      <a:round/>
+                      <a:headEnd type="none" w="med" len="med"/>
+                      <a:tailEnd type="none" w="med" len="med"/>
+                    </a:lnB>
+                    <a:solidFill>
+                      <a:srgbClr val="23272F"/>
+                    </a:solidFill>
+                  </a:tcPr>
+                </a:tc>
+                <a:tc>
+                  <a:txBody>
+                    <a:bodyPr/>
+                    <a:lstStyle/>
+                    <a:p>
+                      <a:pPr indent="0" marL="0">
                         <a:buNone/>
                       </a:pPr>
                       <a:r>
@@ -5198,7 +5082,7 @@
                           <a:ea typeface="Malgun Gothic" pitchFamily="34" charset="-122"/>
                           <a:cs typeface="Malgun Gothic" pitchFamily="34" charset="-120"/>
                         </a:rPr>
-                        <a:t>2차 세트 45장</a:t>
+                        <a:t>나무결도 scratch처럼 가는 선</a:t>
                       </a:r>
                       <a:endParaRPr lang="en-US" sz="1400" dirty="0">
                         <a:latin typeface="Malgun Gothic" charset="0"/>
@@ -5260,13 +5144,13 @@
                       <a:r>
                         <a:rPr lang="en-US" sz="1400" b="1" dirty="0">
                           <a:solidFill>
-                            <a:schemeClr val="accent2"/>
+                            <a:schemeClr val="accent3"/>
                           </a:solidFill>
                           <a:latin typeface="Malgun Gothic" pitchFamily="34" charset="0"/>
                           <a:ea typeface="Malgun Gothic" pitchFamily="34" charset="-122"/>
                           <a:cs typeface="Malgun Gothic" pitchFamily="34" charset="-120"/>
                         </a:rPr>
-                        <a:t>검출 47%</a:t>
+                        <a:t>추정</a:t>
                       </a:r>
                       <a:endParaRPr lang="en-US" sz="1400" dirty="0">
                         <a:latin typeface="Malgun Gothic" charset="0"/>
@@ -5317,76 +5201,8 @@
                     </a:solidFill>
                   </a:tcPr>
                 </a:tc>
-                <a:tc>
-                  <a:txBody>
-                    <a:bodyPr/>
-                    <a:lstStyle/>
-                    <a:p>
-                      <a:pPr algn="l" indent="0" marL="0">
-                        <a:buNone/>
-                      </a:pPr>
-                      <a:r>
-                        <a:rPr lang="en-US" sz="1400" dirty="0">
-                          <a:solidFill>
-                            <a:schemeClr val="tx2"/>
-                          </a:solidFill>
-                          <a:latin typeface="Malgun Gothic" pitchFamily="34" charset="0"/>
-                          <a:ea typeface="Malgun Gothic" pitchFamily="34" charset="-122"/>
-                          <a:cs typeface="Malgun Gothic" pitchFamily="34" charset="-120"/>
-                        </a:rPr>
-                        <a:t>환경 변화에 취약</a:t>
-                      </a:r>
-                      <a:endParaRPr lang="en-US" sz="1400" dirty="0">
-                        <a:latin typeface="Malgun Gothic" charset="0"/>
-                        <a:ea typeface="Malgun Gothic" charset="0"/>
-                        <a:cs typeface="Malgun Gothic" charset="0"/>
-                      </a:endParaRPr>
-                    </a:p>
-                  </a:txBody>
-                  <a:tcPr marL="91440" marR="91440" marT="45720" marB="45720" anchor="ctr">
-                    <a:lnL w="9525" cap="flat" cmpd="sng" algn="ctr">
-                      <a:solidFill>
-                        <a:srgbClr val="3A3F48"/>
-                      </a:solidFill>
-                      <a:prstDash val="solid"/>
-                      <a:round/>
-                      <a:headEnd type="none" w="med" len="med"/>
-                      <a:tailEnd type="none" w="med" len="med"/>
-                    </a:lnL>
-                    <a:lnR w="9525" cap="flat" cmpd="sng" algn="ctr">
-                      <a:solidFill>
-                        <a:srgbClr val="3A3F48"/>
-                      </a:solidFill>
-                      <a:prstDash val="solid"/>
-                      <a:round/>
-                      <a:headEnd type="none" w="med" len="med"/>
-                      <a:tailEnd type="none" w="med" len="med"/>
-                    </a:lnR>
-                    <a:lnT w="9525" cap="flat" cmpd="sng" algn="ctr">
-                      <a:solidFill>
-                        <a:srgbClr val="3A3F48"/>
-                      </a:solidFill>
-                      <a:prstDash val="solid"/>
-                      <a:round/>
-                      <a:headEnd type="none" w="med" len="med"/>
-                      <a:tailEnd type="none" w="med" len="med"/>
-                    </a:lnT>
-                    <a:lnB w="9525" cap="flat" cmpd="sng" algn="ctr">
-                      <a:solidFill>
-                        <a:srgbClr val="3A3F48"/>
-                      </a:solidFill>
-                      <a:prstDash val="solid"/>
-                      <a:round/>
-                      <a:headEnd type="none" w="med" len="med"/>
-                      <a:tailEnd type="none" w="med" len="med"/>
-                    </a:lnB>
-                    <a:solidFill>
-                      <a:srgbClr val="23272F"/>
-                    </a:solidFill>
-                  </a:tcPr>
-                </a:tc>
               </a:tr>
-              <a:tr h="566928">
+              <a:tr h="457200">
                 <a:tc>
                   <a:txBody>
                     <a:bodyPr/>
@@ -5398,7 +5214,7 @@
                       <a:r>
                         <a:rPr lang="en-US" sz="1400" dirty="0">
                           <a:solidFill>
-                            <a:schemeClr val="tx1"/>
+                            <a:schemeClr val="tx2"/>
                           </a:solidFill>
                           <a:latin typeface="Malgun Gothic" pitchFamily="34" charset="0"/>
                           <a:ea typeface="Malgun Gothic" pitchFamily="34" charset="-122"/>
@@ -5460,7 +5276,75 @@
                     <a:bodyPr/>
                     <a:lstStyle/>
                     <a:p>
-                      <a:pPr algn="l" indent="0" marL="0">
+                      <a:pPr indent="0" marL="0">
+                        <a:buNone/>
+                      </a:pPr>
+                      <a:r>
+                        <a:rPr lang="en-US" sz="1400" b="1" dirty="0">
+                          <a:solidFill>
+                            <a:schemeClr val="tx1"/>
+                          </a:solidFill>
+                          <a:latin typeface="Malgun Gothic" pitchFamily="34" charset="0"/>
+                          <a:ea typeface="Malgun Gothic" pitchFamily="34" charset="-122"/>
+                          <a:cs typeface="Malgun Gothic" pitchFamily="34" charset="-120"/>
+                        </a:rPr>
+                        <a:t>INT8 놓침 증가</a:t>
+                      </a:r>
+                      <a:endParaRPr lang="en-US" sz="1400" dirty="0">
+                        <a:latin typeface="Malgun Gothic" charset="0"/>
+                        <a:ea typeface="Malgun Gothic" charset="0"/>
+                        <a:cs typeface="Malgun Gothic" charset="0"/>
+                      </a:endParaRPr>
+                    </a:p>
+                  </a:txBody>
+                  <a:tcPr marL="91440" marR="91440" marT="45720" marB="45720" anchor="ctr">
+                    <a:lnL w="9525" cap="flat" cmpd="sng" algn="ctr">
+                      <a:solidFill>
+                        <a:srgbClr val="3A3F48"/>
+                      </a:solidFill>
+                      <a:prstDash val="solid"/>
+                      <a:round/>
+                      <a:headEnd type="none" w="med" len="med"/>
+                      <a:tailEnd type="none" w="med" len="med"/>
+                    </a:lnL>
+                    <a:lnR w="9525" cap="flat" cmpd="sng" algn="ctr">
+                      <a:solidFill>
+                        <a:srgbClr val="3A3F48"/>
+                      </a:solidFill>
+                      <a:prstDash val="solid"/>
+                      <a:round/>
+                      <a:headEnd type="none" w="med" len="med"/>
+                      <a:tailEnd type="none" w="med" len="med"/>
+                    </a:lnR>
+                    <a:lnT w="9525" cap="flat" cmpd="sng" algn="ctr">
+                      <a:solidFill>
+                        <a:srgbClr val="3A3F48"/>
+                      </a:solidFill>
+                      <a:prstDash val="solid"/>
+                      <a:round/>
+                      <a:headEnd type="none" w="med" len="med"/>
+                      <a:tailEnd type="none" w="med" len="med"/>
+                    </a:lnT>
+                    <a:lnB w="9525" cap="flat" cmpd="sng" algn="ctr">
+                      <a:solidFill>
+                        <a:srgbClr val="3A3F48"/>
+                      </a:solidFill>
+                      <a:prstDash val="solid"/>
+                      <a:round/>
+                      <a:headEnd type="none" w="med" len="med"/>
+                      <a:tailEnd type="none" w="med" len="med"/>
+                    </a:lnB>
+                    <a:solidFill>
+                      <a:srgbClr val="23272F"/>
+                    </a:solidFill>
+                  </a:tcPr>
+                </a:tc>
+                <a:tc>
+                  <a:txBody>
+                    <a:bodyPr/>
+                    <a:lstStyle/>
+                    <a:p>
+                      <a:pPr indent="0" marL="0">
                         <a:buNone/>
                       </a:pPr>
                       <a:r>
@@ -5472,7 +5356,7 @@
                           <a:ea typeface="Malgun Gothic" pitchFamily="34" charset="-122"/>
                           <a:cs typeface="Malgun Gothic" pitchFamily="34" charset="-120"/>
                         </a:rPr>
-                        <a:t>2차 · 기준값 0.15로 낮춤</a:t>
+                        <a:t>양자화 후 점수 소폭 하락, 0.30 근처 결함이 기준 미달</a:t>
                       </a:r>
                       <a:endParaRPr lang="en-US" sz="1400" dirty="0">
                         <a:latin typeface="Malgun Gothic" charset="0"/>
@@ -5534,13 +5418,83 @@
                       <a:r>
                         <a:rPr lang="en-US" sz="1400" b="1" dirty="0">
                           <a:solidFill>
-                            <a:schemeClr val="accent2"/>
+                            <a:schemeClr val="accent3"/>
                           </a:solidFill>
                           <a:latin typeface="Malgun Gothic" pitchFamily="34" charset="0"/>
                           <a:ea typeface="Malgun Gothic" pitchFamily="34" charset="-122"/>
                           <a:cs typeface="Malgun Gothic" pitchFamily="34" charset="-120"/>
                         </a:rPr>
-                        <a:t>정상 87% 오검출</a:t>
+                        <a:t>추정</a:t>
+                      </a:r>
+                      <a:endParaRPr lang="en-US" sz="1400" dirty="0">
+                        <a:latin typeface="Malgun Gothic" charset="0"/>
+                        <a:ea typeface="Malgun Gothic" charset="0"/>
+                        <a:cs typeface="Malgun Gothic" charset="0"/>
+                      </a:endParaRPr>
+                    </a:p>
+                  </a:txBody>
+                  <a:tcPr marL="91440" marR="91440" marT="45720" marB="45720" anchor="ctr">
+                    <a:lnL w="9525" cap="flat" cmpd="sng" algn="ctr">
+                      <a:solidFill>
+                        <a:srgbClr val="3A3F48"/>
+                      </a:solidFill>
+                      <a:prstDash val="solid"/>
+                      <a:round/>
+                      <a:headEnd type="none" w="med" len="med"/>
+                      <a:tailEnd type="none" w="med" len="med"/>
+                    </a:lnL>
+                    <a:lnR w="9525" cap="flat" cmpd="sng" algn="ctr">
+                      <a:solidFill>
+                        <a:srgbClr val="3A3F48"/>
+                      </a:solidFill>
+                      <a:prstDash val="solid"/>
+                      <a:round/>
+                      <a:headEnd type="none" w="med" len="med"/>
+                      <a:tailEnd type="none" w="med" len="med"/>
+                    </a:lnR>
+                    <a:lnT w="9525" cap="flat" cmpd="sng" algn="ctr">
+                      <a:solidFill>
+                        <a:srgbClr val="3A3F48"/>
+                      </a:solidFill>
+                      <a:prstDash val="solid"/>
+                      <a:round/>
+                      <a:headEnd type="none" w="med" len="med"/>
+                      <a:tailEnd type="none" w="med" len="med"/>
+                    </a:lnT>
+                    <a:lnB w="9525" cap="flat" cmpd="sng" algn="ctr">
+                      <a:solidFill>
+                        <a:srgbClr val="3A3F48"/>
+                      </a:solidFill>
+                      <a:prstDash val="solid"/>
+                      <a:round/>
+                      <a:headEnd type="none" w="med" len="med"/>
+                      <a:tailEnd type="none" w="med" len="med"/>
+                    </a:lnB>
+                    <a:solidFill>
+                      <a:srgbClr val="23272F"/>
+                    </a:solidFill>
+                  </a:tcPr>
+                </a:tc>
+              </a:tr>
+              <a:tr h="457200">
+                <a:tc>
+                  <a:txBody>
+                    <a:bodyPr/>
+                    <a:lstStyle/>
+                    <a:p>
+                      <a:pPr algn="ctr" indent="0" marL="0">
+                        <a:buNone/>
+                      </a:pPr>
+                      <a:r>
+                        <a:rPr lang="en-US" sz="1400" dirty="0">
+                          <a:solidFill>
+                            <a:schemeClr val="tx2"/>
+                          </a:solidFill>
+                          <a:latin typeface="Malgun Gothic" pitchFamily="34" charset="0"/>
+                          <a:ea typeface="Malgun Gothic" pitchFamily="34" charset="-122"/>
+                          <a:cs typeface="Malgun Gothic" pitchFamily="34" charset="-120"/>
+                        </a:rPr>
+                        <a:t>9</a:t>
                       </a:r>
                       <a:endParaRPr lang="en-US" sz="1400" dirty="0">
                         <a:latin typeface="Malgun Gothic" charset="0"/>
@@ -5596,7 +5550,213 @@
                     <a:bodyPr/>
                     <a:lstStyle/>
                     <a:p>
-                      <a:pPr algn="l" indent="0" marL="0">
+                      <a:pPr indent="0" marL="0">
+                        <a:buNone/>
+                      </a:pPr>
+                      <a:r>
+                        <a:rPr lang="en-US" sz="1400" b="1" dirty="0">
+                          <a:solidFill>
+                            <a:schemeClr val="tx1"/>
+                          </a:solidFill>
+                          <a:latin typeface="Malgun Gothic" pitchFamily="34" charset="0"/>
+                          <a:ea typeface="Malgun Gothic" pitchFamily="34" charset="-122"/>
+                          <a:cs typeface="Malgun Gothic" pitchFamily="34" charset="-120"/>
+                        </a:rPr>
+                        <a:t>2차 세트 검출 47%</a:t>
+                      </a:r>
+                      <a:endParaRPr lang="en-US" sz="1400" dirty="0">
+                        <a:latin typeface="Malgun Gothic" charset="0"/>
+                        <a:ea typeface="Malgun Gothic" charset="0"/>
+                        <a:cs typeface="Malgun Gothic" charset="0"/>
+                      </a:endParaRPr>
+                    </a:p>
+                  </a:txBody>
+                  <a:tcPr marL="91440" marR="91440" marT="45720" marB="45720" anchor="ctr">
+                    <a:lnL w="9525" cap="flat" cmpd="sng" algn="ctr">
+                      <a:solidFill>
+                        <a:srgbClr val="3A3F48"/>
+                      </a:solidFill>
+                      <a:prstDash val="solid"/>
+                      <a:round/>
+                      <a:headEnd type="none" w="med" len="med"/>
+                      <a:tailEnd type="none" w="med" len="med"/>
+                    </a:lnL>
+                    <a:lnR w="9525" cap="flat" cmpd="sng" algn="ctr">
+                      <a:solidFill>
+                        <a:srgbClr val="3A3F48"/>
+                      </a:solidFill>
+                      <a:prstDash val="solid"/>
+                      <a:round/>
+                      <a:headEnd type="none" w="med" len="med"/>
+                      <a:tailEnd type="none" w="med" len="med"/>
+                    </a:lnR>
+                    <a:lnT w="9525" cap="flat" cmpd="sng" algn="ctr">
+                      <a:solidFill>
+                        <a:srgbClr val="3A3F48"/>
+                      </a:solidFill>
+                      <a:prstDash val="solid"/>
+                      <a:round/>
+                      <a:headEnd type="none" w="med" len="med"/>
+                      <a:tailEnd type="none" w="med" len="med"/>
+                    </a:lnT>
+                    <a:lnB w="9525" cap="flat" cmpd="sng" algn="ctr">
+                      <a:solidFill>
+                        <a:srgbClr val="3A3F48"/>
+                      </a:solidFill>
+                      <a:prstDash val="solid"/>
+                      <a:round/>
+                      <a:headEnd type="none" w="med" len="med"/>
+                      <a:tailEnd type="none" w="med" len="med"/>
+                    </a:lnB>
+                    <a:solidFill>
+                      <a:srgbClr val="23272F"/>
+                    </a:solidFill>
+                  </a:tcPr>
+                </a:tc>
+                <a:tc>
+                  <a:txBody>
+                    <a:bodyPr/>
+                    <a:lstStyle/>
+                    <a:p>
+                      <a:pPr indent="0" marL="0">
+                        <a:buNone/>
+                      </a:pPr>
+                      <a:r>
+                        <a:rPr lang="en-US" sz="1400" dirty="0">
+                          <a:solidFill>
+                            <a:schemeClr val="tx1"/>
+                          </a:solidFill>
+                          <a:latin typeface="Malgun Gothic" pitchFamily="34" charset="0"/>
+                          <a:ea typeface="Malgun Gothic" pitchFamily="34" charset="-122"/>
+                          <a:cs typeface="Malgun Gothic" pitchFamily="34" charset="-120"/>
+                        </a:rPr>
+                        <a:t>crack이 30×26px로 작아짐 (15개 중 1개 검출), 촬영 환경도 바뀜</a:t>
+                      </a:r>
+                      <a:endParaRPr lang="en-US" sz="1400" dirty="0">
+                        <a:latin typeface="Malgun Gothic" charset="0"/>
+                        <a:ea typeface="Malgun Gothic" charset="0"/>
+                        <a:cs typeface="Malgun Gothic" charset="0"/>
+                      </a:endParaRPr>
+                    </a:p>
+                  </a:txBody>
+                  <a:tcPr marL="91440" marR="91440" marT="45720" marB="45720" anchor="ctr">
+                    <a:lnL w="9525" cap="flat" cmpd="sng" algn="ctr">
+                      <a:solidFill>
+                        <a:srgbClr val="3A3F48"/>
+                      </a:solidFill>
+                      <a:prstDash val="solid"/>
+                      <a:round/>
+                      <a:headEnd type="none" w="med" len="med"/>
+                      <a:tailEnd type="none" w="med" len="med"/>
+                    </a:lnL>
+                    <a:lnR w="9525" cap="flat" cmpd="sng" algn="ctr">
+                      <a:solidFill>
+                        <a:srgbClr val="3A3F48"/>
+                      </a:solidFill>
+                      <a:prstDash val="solid"/>
+                      <a:round/>
+                      <a:headEnd type="none" w="med" len="med"/>
+                      <a:tailEnd type="none" w="med" len="med"/>
+                    </a:lnR>
+                    <a:lnT w="9525" cap="flat" cmpd="sng" algn="ctr">
+                      <a:solidFill>
+                        <a:srgbClr val="3A3F48"/>
+                      </a:solidFill>
+                      <a:prstDash val="solid"/>
+                      <a:round/>
+                      <a:headEnd type="none" w="med" len="med"/>
+                      <a:tailEnd type="none" w="med" len="med"/>
+                    </a:lnT>
+                    <a:lnB w="9525" cap="flat" cmpd="sng" algn="ctr">
+                      <a:solidFill>
+                        <a:srgbClr val="3A3F48"/>
+                      </a:solidFill>
+                      <a:prstDash val="solid"/>
+                      <a:round/>
+                      <a:headEnd type="none" w="med" len="med"/>
+                      <a:tailEnd type="none" w="med" len="med"/>
+                    </a:lnB>
+                    <a:solidFill>
+                      <a:srgbClr val="23272F"/>
+                    </a:solidFill>
+                  </a:tcPr>
+                </a:tc>
+                <a:tc>
+                  <a:txBody>
+                    <a:bodyPr/>
+                    <a:lstStyle/>
+                    <a:p>
+                      <a:pPr algn="ctr" indent="0" marL="0">
+                        <a:buNone/>
+                      </a:pPr>
+                      <a:r>
+                        <a:rPr lang="en-US" sz="1400" b="1" dirty="0">
+                          <a:solidFill>
+                            <a:schemeClr val="accent6"/>
+                          </a:solidFill>
+                          <a:latin typeface="Malgun Gothic" pitchFamily="34" charset="0"/>
+                          <a:ea typeface="Malgun Gothic" pitchFamily="34" charset="-122"/>
+                          <a:cs typeface="Malgun Gothic" pitchFamily="34" charset="-120"/>
+                        </a:rPr>
+                        <a:t>확인</a:t>
+                      </a:r>
+                      <a:endParaRPr lang="en-US" sz="1400" dirty="0">
+                        <a:latin typeface="Malgun Gothic" charset="0"/>
+                        <a:ea typeface="Malgun Gothic" charset="0"/>
+                        <a:cs typeface="Malgun Gothic" charset="0"/>
+                      </a:endParaRPr>
+                    </a:p>
+                  </a:txBody>
+                  <a:tcPr marL="91440" marR="91440" marT="45720" marB="45720" anchor="ctr">
+                    <a:lnL w="9525" cap="flat" cmpd="sng" algn="ctr">
+                      <a:solidFill>
+                        <a:srgbClr val="3A3F48"/>
+                      </a:solidFill>
+                      <a:prstDash val="solid"/>
+                      <a:round/>
+                      <a:headEnd type="none" w="med" len="med"/>
+                      <a:tailEnd type="none" w="med" len="med"/>
+                    </a:lnL>
+                    <a:lnR w="9525" cap="flat" cmpd="sng" algn="ctr">
+                      <a:solidFill>
+                        <a:srgbClr val="3A3F48"/>
+                      </a:solidFill>
+                      <a:prstDash val="solid"/>
+                      <a:round/>
+                      <a:headEnd type="none" w="med" len="med"/>
+                      <a:tailEnd type="none" w="med" len="med"/>
+                    </a:lnR>
+                    <a:lnT w="9525" cap="flat" cmpd="sng" algn="ctr">
+                      <a:solidFill>
+                        <a:srgbClr val="3A3F48"/>
+                      </a:solidFill>
+                      <a:prstDash val="solid"/>
+                      <a:round/>
+                      <a:headEnd type="none" w="med" len="med"/>
+                      <a:tailEnd type="none" w="med" len="med"/>
+                    </a:lnT>
+                    <a:lnB w="9525" cap="flat" cmpd="sng" algn="ctr">
+                      <a:solidFill>
+                        <a:srgbClr val="3A3F48"/>
+                      </a:solidFill>
+                      <a:prstDash val="solid"/>
+                      <a:round/>
+                      <a:headEnd type="none" w="med" len="med"/>
+                      <a:tailEnd type="none" w="med" len="med"/>
+                    </a:lnB>
+                    <a:solidFill>
+                      <a:srgbClr val="23272F"/>
+                    </a:solidFill>
+                  </a:tcPr>
+                </a:tc>
+              </a:tr>
+              <a:tr h="457200">
+                <a:tc>
+                  <a:txBody>
+                    <a:bodyPr/>
+                    <a:lstStyle/>
+                    <a:p>
+                      <a:pPr algn="ctr" indent="0" marL="0">
                         <a:buNone/>
                       </a:pPr>
                       <a:r>
@@ -5608,7 +5768,485 @@
                           <a:ea typeface="Malgun Gothic" pitchFamily="34" charset="-122"/>
                           <a:cs typeface="Malgun Gothic" pitchFamily="34" charset="-120"/>
                         </a:rPr>
-                        <a:t>재학습 필요</a:t>
+                        <a:t>9</a:t>
+                      </a:r>
+                      <a:endParaRPr lang="en-US" sz="1400" dirty="0">
+                        <a:latin typeface="Malgun Gothic" charset="0"/>
+                        <a:ea typeface="Malgun Gothic" charset="0"/>
+                        <a:cs typeface="Malgun Gothic" charset="0"/>
+                      </a:endParaRPr>
+                    </a:p>
+                  </a:txBody>
+                  <a:tcPr marL="91440" marR="91440" marT="45720" marB="45720" anchor="ctr">
+                    <a:lnL w="9525" cap="flat" cmpd="sng" algn="ctr">
+                      <a:solidFill>
+                        <a:srgbClr val="3A3F48"/>
+                      </a:solidFill>
+                      <a:prstDash val="solid"/>
+                      <a:round/>
+                      <a:headEnd type="none" w="med" len="med"/>
+                      <a:tailEnd type="none" w="med" len="med"/>
+                    </a:lnL>
+                    <a:lnR w="9525" cap="flat" cmpd="sng" algn="ctr">
+                      <a:solidFill>
+                        <a:srgbClr val="3A3F48"/>
+                      </a:solidFill>
+                      <a:prstDash val="solid"/>
+                      <a:round/>
+                      <a:headEnd type="none" w="med" len="med"/>
+                      <a:tailEnd type="none" w="med" len="med"/>
+                    </a:lnR>
+                    <a:lnT w="9525" cap="flat" cmpd="sng" algn="ctr">
+                      <a:solidFill>
+                        <a:srgbClr val="3A3F48"/>
+                      </a:solidFill>
+                      <a:prstDash val="solid"/>
+                      <a:round/>
+                      <a:headEnd type="none" w="med" len="med"/>
+                      <a:tailEnd type="none" w="med" len="med"/>
+                    </a:lnT>
+                    <a:lnB w="9525" cap="flat" cmpd="sng" algn="ctr">
+                      <a:solidFill>
+                        <a:srgbClr val="3A3F48"/>
+                      </a:solidFill>
+                      <a:prstDash val="solid"/>
+                      <a:round/>
+                      <a:headEnd type="none" w="med" len="med"/>
+                      <a:tailEnd type="none" w="med" len="med"/>
+                    </a:lnB>
+                    <a:solidFill>
+                      <a:srgbClr val="23272F"/>
+                    </a:solidFill>
+                  </a:tcPr>
+                </a:tc>
+                <a:tc>
+                  <a:txBody>
+                    <a:bodyPr/>
+                    <a:lstStyle/>
+                    <a:p>
+                      <a:pPr indent="0" marL="0">
+                        <a:buNone/>
+                      </a:pPr>
+                      <a:r>
+                        <a:rPr lang="en-US" sz="1400" b="1" dirty="0">
+                          <a:solidFill>
+                            <a:schemeClr val="tx1"/>
+                          </a:solidFill>
+                          <a:latin typeface="Malgun Gothic" pitchFamily="34" charset="0"/>
+                          <a:ea typeface="Malgun Gothic" pitchFamily="34" charset="-122"/>
+                          <a:cs typeface="Malgun Gothic" pitchFamily="34" charset="-120"/>
+                        </a:rPr>
+                        <a:t>YOLOX-S 낮은 점수</a:t>
+                      </a:r>
+                      <a:endParaRPr lang="en-US" sz="1400" dirty="0">
+                        <a:latin typeface="Malgun Gothic" charset="0"/>
+                        <a:ea typeface="Malgun Gothic" charset="0"/>
+                        <a:cs typeface="Malgun Gothic" charset="0"/>
+                      </a:endParaRPr>
+                    </a:p>
+                  </a:txBody>
+                  <a:tcPr marL="91440" marR="91440" marT="45720" marB="45720" anchor="ctr">
+                    <a:lnL w="9525" cap="flat" cmpd="sng" algn="ctr">
+                      <a:solidFill>
+                        <a:srgbClr val="3A3F48"/>
+                      </a:solidFill>
+                      <a:prstDash val="solid"/>
+                      <a:round/>
+                      <a:headEnd type="none" w="med" len="med"/>
+                      <a:tailEnd type="none" w="med" len="med"/>
+                    </a:lnL>
+                    <a:lnR w="9525" cap="flat" cmpd="sng" algn="ctr">
+                      <a:solidFill>
+                        <a:srgbClr val="3A3F48"/>
+                      </a:solidFill>
+                      <a:prstDash val="solid"/>
+                      <a:round/>
+                      <a:headEnd type="none" w="med" len="med"/>
+                      <a:tailEnd type="none" w="med" len="med"/>
+                    </a:lnR>
+                    <a:lnT w="9525" cap="flat" cmpd="sng" algn="ctr">
+                      <a:solidFill>
+                        <a:srgbClr val="3A3F48"/>
+                      </a:solidFill>
+                      <a:prstDash val="solid"/>
+                      <a:round/>
+                      <a:headEnd type="none" w="med" len="med"/>
+                      <a:tailEnd type="none" w="med" len="med"/>
+                    </a:lnT>
+                    <a:lnB w="9525" cap="flat" cmpd="sng" algn="ctr">
+                      <a:solidFill>
+                        <a:srgbClr val="3A3F48"/>
+                      </a:solidFill>
+                      <a:prstDash val="solid"/>
+                      <a:round/>
+                      <a:headEnd type="none" w="med" len="med"/>
+                      <a:tailEnd type="none" w="med" len="med"/>
+                    </a:lnB>
+                    <a:solidFill>
+                      <a:srgbClr val="23272F"/>
+                    </a:solidFill>
+                  </a:tcPr>
+                </a:tc>
+                <a:tc>
+                  <a:txBody>
+                    <a:bodyPr/>
+                    <a:lstStyle/>
+                    <a:p>
+                      <a:pPr indent="0" marL="0">
+                        <a:buNone/>
+                      </a:pPr>
+                      <a:r>
+                        <a:rPr lang="en-US" sz="1400" dirty="0">
+                          <a:solidFill>
+                            <a:schemeClr val="tx1"/>
+                          </a:solidFill>
+                          <a:latin typeface="Malgun Gothic" pitchFamily="34" charset="0"/>
+                          <a:ea typeface="Malgun Gothic" pitchFamily="34" charset="-122"/>
+                          <a:cs typeface="Malgun Gothic" pitchFamily="34" charset="-120"/>
+                        </a:rPr>
+                        <a:t>점수 = 물체일 확률 × 클래스 확률. 두 확률의 곱이라 낮게 나옴</a:t>
+                      </a:r>
+                      <a:endParaRPr lang="en-US" sz="1400" dirty="0">
+                        <a:latin typeface="Malgun Gothic" charset="0"/>
+                        <a:ea typeface="Malgun Gothic" charset="0"/>
+                        <a:cs typeface="Malgun Gothic" charset="0"/>
+                      </a:endParaRPr>
+                    </a:p>
+                  </a:txBody>
+                  <a:tcPr marL="91440" marR="91440" marT="45720" marB="45720" anchor="ctr">
+                    <a:lnL w="9525" cap="flat" cmpd="sng" algn="ctr">
+                      <a:solidFill>
+                        <a:srgbClr val="3A3F48"/>
+                      </a:solidFill>
+                      <a:prstDash val="solid"/>
+                      <a:round/>
+                      <a:headEnd type="none" w="med" len="med"/>
+                      <a:tailEnd type="none" w="med" len="med"/>
+                    </a:lnL>
+                    <a:lnR w="9525" cap="flat" cmpd="sng" algn="ctr">
+                      <a:solidFill>
+                        <a:srgbClr val="3A3F48"/>
+                      </a:solidFill>
+                      <a:prstDash val="solid"/>
+                      <a:round/>
+                      <a:headEnd type="none" w="med" len="med"/>
+                      <a:tailEnd type="none" w="med" len="med"/>
+                    </a:lnR>
+                    <a:lnT w="9525" cap="flat" cmpd="sng" algn="ctr">
+                      <a:solidFill>
+                        <a:srgbClr val="3A3F48"/>
+                      </a:solidFill>
+                      <a:prstDash val="solid"/>
+                      <a:round/>
+                      <a:headEnd type="none" w="med" len="med"/>
+                      <a:tailEnd type="none" w="med" len="med"/>
+                    </a:lnT>
+                    <a:lnB w="9525" cap="flat" cmpd="sng" algn="ctr">
+                      <a:solidFill>
+                        <a:srgbClr val="3A3F48"/>
+                      </a:solidFill>
+                      <a:prstDash val="solid"/>
+                      <a:round/>
+                      <a:headEnd type="none" w="med" len="med"/>
+                      <a:tailEnd type="none" w="med" len="med"/>
+                    </a:lnB>
+                    <a:solidFill>
+                      <a:srgbClr val="23272F"/>
+                    </a:solidFill>
+                  </a:tcPr>
+                </a:tc>
+                <a:tc>
+                  <a:txBody>
+                    <a:bodyPr/>
+                    <a:lstStyle/>
+                    <a:p>
+                      <a:pPr algn="ctr" indent="0" marL="0">
+                        <a:buNone/>
+                      </a:pPr>
+                      <a:r>
+                        <a:rPr lang="en-US" sz="1400" b="1" dirty="0">
+                          <a:solidFill>
+                            <a:schemeClr val="accent3"/>
+                          </a:solidFill>
+                          <a:latin typeface="Malgun Gothic" pitchFamily="34" charset="0"/>
+                          <a:ea typeface="Malgun Gothic" pitchFamily="34" charset="-122"/>
+                          <a:cs typeface="Malgun Gothic" pitchFamily="34" charset="-120"/>
+                        </a:rPr>
+                        <a:t>추정</a:t>
+                      </a:r>
+                      <a:endParaRPr lang="en-US" sz="1400" dirty="0">
+                        <a:latin typeface="Malgun Gothic" charset="0"/>
+                        <a:ea typeface="Malgun Gothic" charset="0"/>
+                        <a:cs typeface="Malgun Gothic" charset="0"/>
+                      </a:endParaRPr>
+                    </a:p>
+                  </a:txBody>
+                  <a:tcPr marL="91440" marR="91440" marT="45720" marB="45720" anchor="ctr">
+                    <a:lnL w="9525" cap="flat" cmpd="sng" algn="ctr">
+                      <a:solidFill>
+                        <a:srgbClr val="3A3F48"/>
+                      </a:solidFill>
+                      <a:prstDash val="solid"/>
+                      <a:round/>
+                      <a:headEnd type="none" w="med" len="med"/>
+                      <a:tailEnd type="none" w="med" len="med"/>
+                    </a:lnL>
+                    <a:lnR w="9525" cap="flat" cmpd="sng" algn="ctr">
+                      <a:solidFill>
+                        <a:srgbClr val="3A3F48"/>
+                      </a:solidFill>
+                      <a:prstDash val="solid"/>
+                      <a:round/>
+                      <a:headEnd type="none" w="med" len="med"/>
+                      <a:tailEnd type="none" w="med" len="med"/>
+                    </a:lnR>
+                    <a:lnT w="9525" cap="flat" cmpd="sng" algn="ctr">
+                      <a:solidFill>
+                        <a:srgbClr val="3A3F48"/>
+                      </a:solidFill>
+                      <a:prstDash val="solid"/>
+                      <a:round/>
+                      <a:headEnd type="none" w="med" len="med"/>
+                      <a:tailEnd type="none" w="med" len="med"/>
+                    </a:lnT>
+                    <a:lnB w="9525" cap="flat" cmpd="sng" algn="ctr">
+                      <a:solidFill>
+                        <a:srgbClr val="3A3F48"/>
+                      </a:solidFill>
+                      <a:prstDash val="solid"/>
+                      <a:round/>
+                      <a:headEnd type="none" w="med" len="med"/>
+                      <a:tailEnd type="none" w="med" len="med"/>
+                    </a:lnB>
+                    <a:solidFill>
+                      <a:srgbClr val="23272F"/>
+                    </a:solidFill>
+                  </a:tcPr>
+                </a:tc>
+              </a:tr>
+              <a:tr h="457200">
+                <a:tc>
+                  <a:txBody>
+                    <a:bodyPr/>
+                    <a:lstStyle/>
+                    <a:p>
+                      <a:pPr algn="ctr" indent="0" marL="0">
+                        <a:buNone/>
+                      </a:pPr>
+                      <a:r>
+                        <a:rPr lang="en-US" sz="1400" dirty="0">
+                          <a:solidFill>
+                            <a:schemeClr val="tx2"/>
+                          </a:solidFill>
+                          <a:latin typeface="Malgun Gothic" pitchFamily="34" charset="0"/>
+                          <a:ea typeface="Malgun Gothic" pitchFamily="34" charset="-122"/>
+                          <a:cs typeface="Malgun Gothic" pitchFamily="34" charset="-120"/>
+                        </a:rPr>
+                        <a:t>9</a:t>
+                      </a:r>
+                      <a:endParaRPr lang="en-US" sz="1400" dirty="0">
+                        <a:latin typeface="Malgun Gothic" charset="0"/>
+                        <a:ea typeface="Malgun Gothic" charset="0"/>
+                        <a:cs typeface="Malgun Gothic" charset="0"/>
+                      </a:endParaRPr>
+                    </a:p>
+                  </a:txBody>
+                  <a:tcPr marL="91440" marR="91440" marT="45720" marB="45720" anchor="ctr">
+                    <a:lnL w="9525" cap="flat" cmpd="sng" algn="ctr">
+                      <a:solidFill>
+                        <a:srgbClr val="3A3F48"/>
+                      </a:solidFill>
+                      <a:prstDash val="solid"/>
+                      <a:round/>
+                      <a:headEnd type="none" w="med" len="med"/>
+                      <a:tailEnd type="none" w="med" len="med"/>
+                    </a:lnL>
+                    <a:lnR w="9525" cap="flat" cmpd="sng" algn="ctr">
+                      <a:solidFill>
+                        <a:srgbClr val="3A3F48"/>
+                      </a:solidFill>
+                      <a:prstDash val="solid"/>
+                      <a:round/>
+                      <a:headEnd type="none" w="med" len="med"/>
+                      <a:tailEnd type="none" w="med" len="med"/>
+                    </a:lnR>
+                    <a:lnT w="9525" cap="flat" cmpd="sng" algn="ctr">
+                      <a:solidFill>
+                        <a:srgbClr val="3A3F48"/>
+                      </a:solidFill>
+                      <a:prstDash val="solid"/>
+                      <a:round/>
+                      <a:headEnd type="none" w="med" len="med"/>
+                      <a:tailEnd type="none" w="med" len="med"/>
+                    </a:lnT>
+                    <a:lnB w="9525" cap="flat" cmpd="sng" algn="ctr">
+                      <a:solidFill>
+                        <a:srgbClr val="3A3F48"/>
+                      </a:solidFill>
+                      <a:prstDash val="solid"/>
+                      <a:round/>
+                      <a:headEnd type="none" w="med" len="med"/>
+                      <a:tailEnd type="none" w="med" len="med"/>
+                    </a:lnB>
+                    <a:solidFill>
+                      <a:srgbClr val="23272F"/>
+                    </a:solidFill>
+                  </a:tcPr>
+                </a:tc>
+                <a:tc>
+                  <a:txBody>
+                    <a:bodyPr/>
+                    <a:lstStyle/>
+                    <a:p>
+                      <a:pPr indent="0" marL="0">
+                        <a:buNone/>
+                      </a:pPr>
+                      <a:r>
+                        <a:rPr lang="en-US" sz="1400" b="1" dirty="0">
+                          <a:solidFill>
+                            <a:schemeClr val="tx1"/>
+                          </a:solidFill>
+                          <a:latin typeface="Malgun Gothic" pitchFamily="34" charset="0"/>
+                          <a:ea typeface="Malgun Gothic" pitchFamily="34" charset="-122"/>
+                          <a:cs typeface="Malgun Gothic" pitchFamily="34" charset="-120"/>
+                        </a:rPr>
+                        <a:t>기준값 조정으로 해결 불가</a:t>
+                      </a:r>
+                      <a:endParaRPr lang="en-US" sz="1400" dirty="0">
+                        <a:latin typeface="Malgun Gothic" charset="0"/>
+                        <a:ea typeface="Malgun Gothic" charset="0"/>
+                        <a:cs typeface="Malgun Gothic" charset="0"/>
+                      </a:endParaRPr>
+                    </a:p>
+                  </a:txBody>
+                  <a:tcPr marL="91440" marR="91440" marT="45720" marB="45720" anchor="ctr">
+                    <a:lnL w="9525" cap="flat" cmpd="sng" algn="ctr">
+                      <a:solidFill>
+                        <a:srgbClr val="3A3F48"/>
+                      </a:solidFill>
+                      <a:prstDash val="solid"/>
+                      <a:round/>
+                      <a:headEnd type="none" w="med" len="med"/>
+                      <a:tailEnd type="none" w="med" len="med"/>
+                    </a:lnL>
+                    <a:lnR w="9525" cap="flat" cmpd="sng" algn="ctr">
+                      <a:solidFill>
+                        <a:srgbClr val="3A3F48"/>
+                      </a:solidFill>
+                      <a:prstDash val="solid"/>
+                      <a:round/>
+                      <a:headEnd type="none" w="med" len="med"/>
+                      <a:tailEnd type="none" w="med" len="med"/>
+                    </a:lnR>
+                    <a:lnT w="9525" cap="flat" cmpd="sng" algn="ctr">
+                      <a:solidFill>
+                        <a:srgbClr val="3A3F48"/>
+                      </a:solidFill>
+                      <a:prstDash val="solid"/>
+                      <a:round/>
+                      <a:headEnd type="none" w="med" len="med"/>
+                      <a:tailEnd type="none" w="med" len="med"/>
+                    </a:lnT>
+                    <a:lnB w="9525" cap="flat" cmpd="sng" algn="ctr">
+                      <a:solidFill>
+                        <a:srgbClr val="3A3F48"/>
+                      </a:solidFill>
+                      <a:prstDash val="solid"/>
+                      <a:round/>
+                      <a:headEnd type="none" w="med" len="med"/>
+                      <a:tailEnd type="none" w="med" len="med"/>
+                    </a:lnB>
+                    <a:solidFill>
+                      <a:srgbClr val="23272F"/>
+                    </a:solidFill>
+                  </a:tcPr>
+                </a:tc>
+                <a:tc>
+                  <a:txBody>
+                    <a:bodyPr/>
+                    <a:lstStyle/>
+                    <a:p>
+                      <a:pPr indent="0" marL="0">
+                        <a:buNone/>
+                      </a:pPr>
+                      <a:r>
+                        <a:rPr lang="en-US" sz="1400" dirty="0">
+                          <a:solidFill>
+                            <a:schemeClr val="tx1"/>
+                          </a:solidFill>
+                          <a:latin typeface="Malgun Gothic" pitchFamily="34" charset="0"/>
+                          <a:ea typeface="Malgun Gothic" pitchFamily="34" charset="-122"/>
+                          <a:cs typeface="Malgun Gothic" pitchFamily="34" charset="-120"/>
+                        </a:rPr>
+                        <a:t>새 환경에서 결함과 정상의 점수 구간이 겹침</a:t>
+                      </a:r>
+                      <a:endParaRPr lang="en-US" sz="1400" dirty="0">
+                        <a:latin typeface="Malgun Gothic" charset="0"/>
+                        <a:ea typeface="Malgun Gothic" charset="0"/>
+                        <a:cs typeface="Malgun Gothic" charset="0"/>
+                      </a:endParaRPr>
+                    </a:p>
+                  </a:txBody>
+                  <a:tcPr marL="91440" marR="91440" marT="45720" marB="45720" anchor="ctr">
+                    <a:lnL w="9525" cap="flat" cmpd="sng" algn="ctr">
+                      <a:solidFill>
+                        <a:srgbClr val="3A3F48"/>
+                      </a:solidFill>
+                      <a:prstDash val="solid"/>
+                      <a:round/>
+                      <a:headEnd type="none" w="med" len="med"/>
+                      <a:tailEnd type="none" w="med" len="med"/>
+                    </a:lnL>
+                    <a:lnR w="9525" cap="flat" cmpd="sng" algn="ctr">
+                      <a:solidFill>
+                        <a:srgbClr val="3A3F48"/>
+                      </a:solidFill>
+                      <a:prstDash val="solid"/>
+                      <a:round/>
+                      <a:headEnd type="none" w="med" len="med"/>
+                      <a:tailEnd type="none" w="med" len="med"/>
+                    </a:lnR>
+                    <a:lnT w="9525" cap="flat" cmpd="sng" algn="ctr">
+                      <a:solidFill>
+                        <a:srgbClr val="3A3F48"/>
+                      </a:solidFill>
+                      <a:prstDash val="solid"/>
+                      <a:round/>
+                      <a:headEnd type="none" w="med" len="med"/>
+                      <a:tailEnd type="none" w="med" len="med"/>
+                    </a:lnT>
+                    <a:lnB w="9525" cap="flat" cmpd="sng" algn="ctr">
+                      <a:solidFill>
+                        <a:srgbClr val="3A3F48"/>
+                      </a:solidFill>
+                      <a:prstDash val="solid"/>
+                      <a:round/>
+                      <a:headEnd type="none" w="med" len="med"/>
+                      <a:tailEnd type="none" w="med" len="med"/>
+                    </a:lnB>
+                    <a:solidFill>
+                      <a:srgbClr val="23272F"/>
+                    </a:solidFill>
+                  </a:tcPr>
+                </a:tc>
+                <a:tc>
+                  <a:txBody>
+                    <a:bodyPr/>
+                    <a:lstStyle/>
+                    <a:p>
+                      <a:pPr algn="ctr" indent="0" marL="0">
+                        <a:buNone/>
+                      </a:pPr>
+                      <a:r>
+                        <a:rPr lang="en-US" sz="1400" b="1" dirty="0">
+                          <a:solidFill>
+                            <a:schemeClr val="accent6"/>
+                          </a:solidFill>
+                          <a:latin typeface="Malgun Gothic" pitchFamily="34" charset="0"/>
+                          <a:ea typeface="Malgun Gothic" pitchFamily="34" charset="-122"/>
+                          <a:cs typeface="Malgun Gothic" pitchFamily="34" charset="-120"/>
+                        </a:rPr>
+                        <a:t>확인</a:t>
                       </a:r>
                       <a:endParaRPr lang="en-US" sz="1400" dirty="0">
                         <a:latin typeface="Malgun Gothic" charset="0"/>
@@ -5666,14 +6304,14 @@
       </p:graphicFrame>
       <p:sp>
         <p:nvSpPr>
-          <p:cNvPr id="4" name="log-note"/>
+          <p:cNvPr id="4" name="causes-legend"/>
           <p:cNvSpPr txBox="1"/>
           <p:nvPr/>
         </p:nvSpPr>
         <p:spPr>
           <a:xfrm>
-            <a:off x="548640" y="5897880"/>
-            <a:ext cx="6903720" cy="274320"/>
+            <a:off x="548640" y="6053328"/>
+            <a:ext cx="11094415" cy="274320"/>
           </a:xfrm>
           <a:prstGeom prst="rect">
             <a:avLst/>
@@ -5689,132 +6327,13 @@
               <a:buNone/>
             </a:pPr>
             <a:r>
-              <a:rPr lang="en-US" sz="1000" dirty="0">
-                <a:solidFill>
-                  <a:schemeClr val="tx2"/>
+              <a:rPr lang="en-US" sz="1200" b="1" dirty="0">
+                <a:solidFill>
+                  <a:schemeClr val="accent6"/>
                 </a:solidFill>
               </a:rPr>
-              <a:t>결과: mAP@50 (1–2, 4) · CPU 속도 (5) · 결함 셀 검출률, ATSS (6–7)</a:t>
+              <a:t>확인 </a:t>
             </a:r>
-            <a:endParaRPr lang="en-US" sz="1000" dirty="0"/>
-          </a:p>
-        </p:txBody>
-      </p:sp>
-      <p:sp>
-        <p:nvSpPr>
-          <p:cNvPr id="5" name="lesson-0"/>
-          <p:cNvSpPr/>
-          <p:nvPr/>
-        </p:nvSpPr>
-        <p:spPr>
-          <a:xfrm>
-            <a:off x="7726680" y="1234440"/>
-            <a:ext cx="3913632" cy="1051560"/>
-          </a:xfrm>
-          <a:prstGeom prst="roundRect">
-            <a:avLst>
-              <a:gd name="adj" fmla="val 6957"/>
-            </a:avLst>
-          </a:prstGeom>
-          <a:solidFill>
-            <a:schemeClr val="bg2"/>
-          </a:solidFill>
-          <a:ln/>
-        </p:spPr>
-      </p:sp>
-      <p:sp>
-        <p:nvSpPr>
-          <p:cNvPr id="6" name="lesson-n-0"/>
-          <p:cNvSpPr txBox="1"/>
-          <p:nvPr/>
-        </p:nvSpPr>
-        <p:spPr>
-          <a:xfrm>
-            <a:off x="7955280" y="1389888"/>
-            <a:ext cx="548640" cy="365760"/>
-          </a:xfrm>
-          <a:prstGeom prst="rect">
-            <a:avLst/>
-          </a:prstGeom>
-          <a:noFill/>
-          <a:ln/>
-        </p:spPr>
-        <p:txBody>
-          <a:bodyPr wrap="square" lIns="0" tIns="0" rIns="0" bIns="0" rtlCol="0" anchor="t"/>
-          <a:lstStyle/>
-          <a:p>
-            <a:pPr indent="0" marL="0">
-              <a:buNone/>
-            </a:pPr>
-            <a:r>
-              <a:rPr lang="en-US" sz="1800" b="1" dirty="0">
-                <a:solidFill>
-                  <a:schemeClr val="accent1"/>
-                </a:solidFill>
-              </a:rPr>
-              <a:t>01</a:t>
-            </a:r>
-            <a:endParaRPr lang="en-US" sz="1800" dirty="0"/>
-          </a:p>
-        </p:txBody>
-      </p:sp>
-      <p:sp>
-        <p:nvSpPr>
-          <p:cNvPr id="7" name="lesson-h-0"/>
-          <p:cNvSpPr txBox="1"/>
-          <p:nvPr/>
-        </p:nvSpPr>
-        <p:spPr>
-          <a:xfrm>
-            <a:off x="8503920" y="1362456"/>
-            <a:ext cx="3017520" cy="347472"/>
-          </a:xfrm>
-          <a:prstGeom prst="rect">
-            <a:avLst/>
-          </a:prstGeom>
-          <a:noFill/>
-          <a:ln/>
-        </p:spPr>
-        <p:txBody>
-          <a:bodyPr wrap="square" lIns="0" tIns="0" rIns="0" bIns="0" rtlCol="0" anchor="t"/>
-          <a:lstStyle/>
-          <a:p>
-            <a:pPr indent="0" marL="0">
-              <a:buNone/>
-            </a:pPr>
-            <a:r>
-              <a:rPr lang="en-US" sz="1500" b="1" dirty="0">
-                <a:solidFill>
-                  <a:schemeClr val="tx1"/>
-                </a:solidFill>
-              </a:rPr>
-              <a:t>테스트셋은 먼저 분리</a:t>
-            </a:r>
-            <a:endParaRPr lang="en-US" sz="1500" dirty="0"/>
-          </a:p>
-        </p:txBody>
-      </p:sp>
-      <p:sp>
-        <p:nvSpPr>
-          <p:cNvPr id="8" name="lesson-d-0"/>
-          <p:cNvSpPr txBox="1"/>
-          <p:nvPr/>
-        </p:nvSpPr>
-        <p:spPr>
-          <a:xfrm>
-            <a:off x="8503920" y="1755648"/>
-            <a:ext cx="3017520" cy="365760"/>
-          </a:xfrm>
-          <a:prstGeom prst="rect">
-            <a:avLst/>
-          </a:prstGeom>
-          <a:noFill/>
-          <a:ln/>
-        </p:spPr>
-        <p:txBody>
-          <a:bodyPr wrap="square" lIns="0" tIns="0" rIns="0" bIns="0" rtlCol="0" anchor="t"/>
-          <a:lstStyle/>
-          <a:p>
             <a:pPr indent="0" marL="0">
               <a:buNone/>
             </a:pPr>
@@ -5824,127 +6343,19 @@
                   <a:schemeClr val="tx2"/>
                 </a:solidFill>
               </a:rPr>
-              <a:t>업로드 전 분리 · 중복 확인</a:t>
+              <a:t>데이터로 직접 확인   </a:t>
             </a:r>
-            <a:endParaRPr lang="en-US" sz="1200" dirty="0"/>
-          </a:p>
-        </p:txBody>
-      </p:sp>
-      <p:sp>
-        <p:nvSpPr>
-          <p:cNvPr id="9" name="lesson-1"/>
-          <p:cNvSpPr/>
-          <p:nvPr/>
-        </p:nvSpPr>
-        <p:spPr>
-          <a:xfrm>
-            <a:off x="7726680" y="2423160"/>
-            <a:ext cx="3913632" cy="1051560"/>
-          </a:xfrm>
-          <a:prstGeom prst="roundRect">
-            <a:avLst>
-              <a:gd name="adj" fmla="val 6957"/>
-            </a:avLst>
-          </a:prstGeom>
-          <a:solidFill>
-            <a:schemeClr val="bg2"/>
-          </a:solidFill>
-          <a:ln/>
-        </p:spPr>
-      </p:sp>
-      <p:sp>
-        <p:nvSpPr>
-          <p:cNvPr id="10" name="lesson-n-1"/>
-          <p:cNvSpPr txBox="1"/>
-          <p:nvPr/>
-        </p:nvSpPr>
-        <p:spPr>
-          <a:xfrm>
-            <a:off x="7955280" y="2578608"/>
-            <a:ext cx="548640" cy="365760"/>
-          </a:xfrm>
-          <a:prstGeom prst="rect">
-            <a:avLst/>
-          </a:prstGeom>
-          <a:noFill/>
-          <a:ln/>
-        </p:spPr>
-        <p:txBody>
-          <a:bodyPr wrap="square" lIns="0" tIns="0" rIns="0" bIns="0" rtlCol="0" anchor="t"/>
-          <a:lstStyle/>
-          <a:p>
             <a:pPr indent="0" marL="0">
               <a:buNone/>
             </a:pPr>
             <a:r>
-              <a:rPr lang="en-US" sz="1800" b="1" dirty="0">
-                <a:solidFill>
-                  <a:schemeClr val="accent1"/>
+              <a:rPr lang="en-US" sz="1200" b="1" dirty="0">
+                <a:solidFill>
+                  <a:schemeClr val="accent3"/>
                 </a:solidFill>
               </a:rPr>
-              <a:t>02</a:t>
+              <a:t>추정 </a:t>
             </a:r>
-            <a:endParaRPr lang="en-US" sz="1800" dirty="0"/>
-          </a:p>
-        </p:txBody>
-      </p:sp>
-      <p:sp>
-        <p:nvSpPr>
-          <p:cNvPr id="11" name="lesson-h-1"/>
-          <p:cNvSpPr txBox="1"/>
-          <p:nvPr/>
-        </p:nvSpPr>
-        <p:spPr>
-          <a:xfrm>
-            <a:off x="8503920" y="2551176"/>
-            <a:ext cx="3017520" cy="347472"/>
-          </a:xfrm>
-          <a:prstGeom prst="rect">
-            <a:avLst/>
-          </a:prstGeom>
-          <a:noFill/>
-          <a:ln/>
-        </p:spPr>
-        <p:txBody>
-          <a:bodyPr wrap="square" lIns="0" tIns="0" rIns="0" bIns="0" rtlCol="0" anchor="t"/>
-          <a:lstStyle/>
-          <a:p>
-            <a:pPr indent="0" marL="0">
-              <a:buNone/>
-            </a:pPr>
-            <a:r>
-              <a:rPr lang="en-US" sz="1500" b="1" dirty="0">
-                <a:solidFill>
-                  <a:schemeClr val="tx1"/>
-                </a:solidFill>
-              </a:rPr>
-              <a:t>큰 모델 ≠ 좋은 모델</a:t>
-            </a:r>
-            <a:endParaRPr lang="en-US" sz="1500" dirty="0"/>
-          </a:p>
-        </p:txBody>
-      </p:sp>
-      <p:sp>
-        <p:nvSpPr>
-          <p:cNvPr id="12" name="lesson-d-1"/>
-          <p:cNvSpPr txBox="1"/>
-          <p:nvPr/>
-        </p:nvSpPr>
-        <p:spPr>
-          <a:xfrm>
-            <a:off x="8503920" y="2944368"/>
-            <a:ext cx="3017520" cy="365760"/>
-          </a:xfrm>
-          <a:prstGeom prst="rect">
-            <a:avLst/>
-          </a:prstGeom>
-          <a:noFill/>
-          <a:ln/>
-        </p:spPr>
-        <p:txBody>
-          <a:bodyPr wrap="square" lIns="0" tIns="0" rIns="0" bIns="0" rtlCol="0" anchor="t"/>
-          <a:lstStyle/>
-          <a:p>
             <a:pPr indent="0" marL="0">
               <a:buNone/>
             </a:pPr>
@@ -5954,127 +6365,19 @@
                   <a:schemeClr val="tx2"/>
                 </a:solidFill>
               </a:rPr>
-              <a:t>3.9M ATSS가 9M YOLOX-S보다 정확</a:t>
+              <a:t>데이터와 맞지만 별도 검증 없음   </a:t>
             </a:r>
-            <a:endParaRPr lang="en-US" sz="1200" dirty="0"/>
-          </a:p>
-        </p:txBody>
-      </p:sp>
-      <p:sp>
-        <p:nvSpPr>
-          <p:cNvPr id="13" name="lesson-2"/>
-          <p:cNvSpPr/>
-          <p:nvPr/>
-        </p:nvSpPr>
-        <p:spPr>
-          <a:xfrm>
-            <a:off x="7726680" y="3611880"/>
-            <a:ext cx="3913632" cy="1051560"/>
-          </a:xfrm>
-          <a:prstGeom prst="roundRect">
-            <a:avLst>
-              <a:gd name="adj" fmla="val 6957"/>
-            </a:avLst>
-          </a:prstGeom>
-          <a:solidFill>
-            <a:schemeClr val="bg2"/>
-          </a:solidFill>
-          <a:ln/>
-        </p:spPr>
-      </p:sp>
-      <p:sp>
-        <p:nvSpPr>
-          <p:cNvPr id="14" name="lesson-n-2"/>
-          <p:cNvSpPr txBox="1"/>
-          <p:nvPr/>
-        </p:nvSpPr>
-        <p:spPr>
-          <a:xfrm>
-            <a:off x="7955280" y="3767328"/>
-            <a:ext cx="548640" cy="365760"/>
-          </a:xfrm>
-          <a:prstGeom prst="rect">
-            <a:avLst/>
-          </a:prstGeom>
-          <a:noFill/>
-          <a:ln/>
-        </p:spPr>
-        <p:txBody>
-          <a:bodyPr wrap="square" lIns="0" tIns="0" rIns="0" bIns="0" rtlCol="0" anchor="t"/>
-          <a:lstStyle/>
-          <a:p>
             <a:pPr indent="0" marL="0">
               <a:buNone/>
             </a:pPr>
             <a:r>
-              <a:rPr lang="en-US" sz="1800" b="1" dirty="0">
-                <a:solidFill>
-                  <a:schemeClr val="accent1"/>
+              <a:rPr lang="en-US" sz="1200" b="1" dirty="0">
+                <a:solidFill>
+                  <a:schemeClr val="tx2"/>
                 </a:solidFill>
               </a:rPr>
-              <a:t>03</a:t>
+              <a:t>가설 </a:t>
             </a:r>
-            <a:endParaRPr lang="en-US" sz="1800" dirty="0"/>
-          </a:p>
-        </p:txBody>
-      </p:sp>
-      <p:sp>
-        <p:nvSpPr>
-          <p:cNvPr id="15" name="lesson-h-2"/>
-          <p:cNvSpPr txBox="1"/>
-          <p:nvPr/>
-        </p:nvSpPr>
-        <p:spPr>
-          <a:xfrm>
-            <a:off x="8503920" y="3739896"/>
-            <a:ext cx="3017520" cy="347472"/>
-          </a:xfrm>
-          <a:prstGeom prst="rect">
-            <a:avLst/>
-          </a:prstGeom>
-          <a:noFill/>
-          <a:ln/>
-        </p:spPr>
-        <p:txBody>
-          <a:bodyPr wrap="square" lIns="0" tIns="0" rIns="0" bIns="0" rtlCol="0" anchor="t"/>
-          <a:lstStyle/>
-          <a:p>
-            <a:pPr indent="0" marL="0">
-              <a:buNone/>
-            </a:pPr>
-            <a:r>
-              <a:rPr lang="en-US" sz="1500" b="1" dirty="0">
-                <a:solidFill>
-                  <a:schemeClr val="tx1"/>
-                </a:solidFill>
-              </a:rPr>
-              <a:t>최적화는 기준값과 함께</a:t>
-            </a:r>
-            <a:endParaRPr lang="en-US" sz="1500" dirty="0"/>
-          </a:p>
-        </p:txBody>
-      </p:sp>
-      <p:sp>
-        <p:nvSpPr>
-          <p:cNvPr id="16" name="lesson-d-2"/>
-          <p:cNvSpPr txBox="1"/>
-          <p:nvPr/>
-        </p:nvSpPr>
-        <p:spPr>
-          <a:xfrm>
-            <a:off x="8503920" y="4133088"/>
-            <a:ext cx="3017520" cy="365760"/>
-          </a:xfrm>
-          <a:prstGeom prst="rect">
-            <a:avLst/>
-          </a:prstGeom>
-          <a:noFill/>
-          <a:ln/>
-        </p:spPr>
-        <p:txBody>
-          <a:bodyPr wrap="square" lIns="0" tIns="0" rIns="0" bIns="0" rtlCol="0" anchor="t"/>
-          <a:lstStyle/>
-          <a:p>
             <a:pPr indent="0" marL="0">
               <a:buNone/>
             </a:pPr>
@@ -6084,7 +6387,7 @@
                   <a:schemeClr val="tx2"/>
                 </a:solidFill>
               </a:rPr>
-              <a:t>INT8 = 속도 ↑, 신뢰도 ↓</a:t>
+              <a:t>아직 검증 못 함</a:t>
             </a:r>
             <a:endParaRPr lang="en-US" sz="1200" dirty="0"/>
           </a:p>
@@ -6092,137 +6395,7 @@
       </p:sp>
       <p:sp>
         <p:nvSpPr>
-          <p:cNvPr id="17" name="lesson-3"/>
-          <p:cNvSpPr/>
-          <p:nvPr/>
-        </p:nvSpPr>
-        <p:spPr>
-          <a:xfrm>
-            <a:off x="7726680" y="4800600"/>
-            <a:ext cx="3913632" cy="1051560"/>
-          </a:xfrm>
-          <a:prstGeom prst="roundRect">
-            <a:avLst>
-              <a:gd name="adj" fmla="val 6957"/>
-            </a:avLst>
-          </a:prstGeom>
-          <a:solidFill>
-            <a:schemeClr val="bg2"/>
-          </a:solidFill>
-          <a:ln/>
-        </p:spPr>
-      </p:sp>
-      <p:sp>
-        <p:nvSpPr>
-          <p:cNvPr id="18" name="lesson-n-3"/>
-          <p:cNvSpPr txBox="1"/>
-          <p:nvPr/>
-        </p:nvSpPr>
-        <p:spPr>
-          <a:xfrm>
-            <a:off x="7955280" y="4956048"/>
-            <a:ext cx="548640" cy="365760"/>
-          </a:xfrm>
-          <a:prstGeom prst="rect">
-            <a:avLst/>
-          </a:prstGeom>
-          <a:noFill/>
-          <a:ln/>
-        </p:spPr>
-        <p:txBody>
-          <a:bodyPr wrap="square" lIns="0" tIns="0" rIns="0" bIns="0" rtlCol="0" anchor="t"/>
-          <a:lstStyle/>
-          <a:p>
-            <a:pPr indent="0" marL="0">
-              <a:buNone/>
-            </a:pPr>
-            <a:r>
-              <a:rPr lang="en-US" sz="1800" b="1" dirty="0">
-                <a:solidFill>
-                  <a:schemeClr val="accent1"/>
-                </a:solidFill>
-              </a:rPr>
-              <a:t>04</a:t>
-            </a:r>
-            <a:endParaRPr lang="en-US" sz="1800" dirty="0"/>
-          </a:p>
-        </p:txBody>
-      </p:sp>
-      <p:sp>
-        <p:nvSpPr>
-          <p:cNvPr id="19" name="lesson-h-3"/>
-          <p:cNvSpPr txBox="1"/>
-          <p:nvPr/>
-        </p:nvSpPr>
-        <p:spPr>
-          <a:xfrm>
-            <a:off x="8503920" y="4928616"/>
-            <a:ext cx="3017520" cy="347472"/>
-          </a:xfrm>
-          <a:prstGeom prst="rect">
-            <a:avLst/>
-          </a:prstGeom>
-          <a:noFill/>
-          <a:ln/>
-        </p:spPr>
-        <p:txBody>
-          <a:bodyPr wrap="square" lIns="0" tIns="0" rIns="0" bIns="0" rtlCol="0" anchor="t"/>
-          <a:lstStyle/>
-          <a:p>
-            <a:pPr indent="0" marL="0">
-              <a:buNone/>
-            </a:pPr>
-            <a:r>
-              <a:rPr lang="en-US" sz="1500" b="1" dirty="0">
-                <a:solidFill>
-                  <a:schemeClr val="tx1"/>
-                </a:solidFill>
-              </a:rPr>
-              <a:t>점수 ≠ 현장 성능</a:t>
-            </a:r>
-            <a:endParaRPr lang="en-US" sz="1500" dirty="0"/>
-          </a:p>
-        </p:txBody>
-      </p:sp>
-      <p:sp>
-        <p:nvSpPr>
-          <p:cNvPr id="20" name="lesson-d-3"/>
-          <p:cNvSpPr txBox="1"/>
-          <p:nvPr/>
-        </p:nvSpPr>
-        <p:spPr>
-          <a:xfrm>
-            <a:off x="8503920" y="5321808"/>
-            <a:ext cx="3017520" cy="365760"/>
-          </a:xfrm>
-          <a:prstGeom prst="rect">
-            <a:avLst/>
-          </a:prstGeom>
-          <a:noFill/>
-          <a:ln/>
-        </p:spPr>
-        <p:txBody>
-          <a:bodyPr wrap="square" lIns="0" tIns="0" rIns="0" bIns="0" rtlCol="0" anchor="t"/>
-          <a:lstStyle/>
-          <a:p>
-            <a:pPr indent="0" marL="0">
-              <a:buNone/>
-            </a:pPr>
-            <a:r>
-              <a:rPr lang="en-US" sz="1200" dirty="0">
-                <a:solidFill>
-                  <a:schemeClr val="tx2"/>
-                </a:solidFill>
-              </a:rPr>
-              <a:t>92.9% → 새 환경 47%</a:t>
-            </a:r>
-            <a:endParaRPr lang="en-US" sz="1200" dirty="0"/>
-          </a:p>
-        </p:txBody>
-      </p:sp>
-      <p:sp>
-        <p:nvSpPr>
-          <p:cNvPr id="22" name="Text 0"/>
+          <p:cNvPr id="6" name="Text 0"/>
           <p:cNvSpPr/>
           <p:nvPr>
             <p:ph idx="101" type="body" hasCustomPrompt="1"/>
@@ -6352,7 +6525,7 @@
                   <a:schemeClr val="tx1"/>
                 </a:solidFill>
               </a:rPr>
-              <a:t>데모</a:t>
+              <a:t>Lesson Learned</a:t>
             </a:r>
             <a:endParaRPr lang="en-US" sz="3200" dirty="0"/>
           </a:p>
@@ -6390,50 +6563,26 @@
                   <a:schemeClr val="tx2"/>
                 </a:solidFill>
               </a:rPr>
-              <a:t>가상 검사 라인 · 실제 모델(ATSS)로 판정</a:t>
+              <a:t>다음에 다르게 할 것</a:t>
             </a:r>
             <a:endParaRPr lang="en-US" sz="1500" dirty="0"/>
           </a:p>
         </p:txBody>
       </p:sp>
-      <p:pic>
-        <p:nvPicPr>
-          <p:cNvPr id="4" name="dashboard" descr="C:\Users\user\_se4nchoi\batteryvision\docs\submission\build\img\dashboard.jpg">    </p:cNvPr>
-          <p:cNvPicPr>
-            <a:picLocks noChangeAspect="1"/>
-          </p:cNvPicPr>
-          <p:nvPr/>
-        </p:nvPicPr>
-        <p:blipFill>
-          <a:blip r:embed="rId1"/>
-          <a:stretch>
-            <a:fillRect/>
-          </a:stretch>
-        </p:blipFill>
-        <p:spPr>
-          <a:xfrm>
-            <a:off x="548640" y="1600200"/>
-            <a:ext cx="8321040" cy="4134326"/>
-          </a:xfrm>
-          <a:prstGeom prst="rect">
-            <a:avLst/>
-          </a:prstGeom>
-        </p:spPr>
-      </p:pic>
-      <p:sp>
-        <p:nvSpPr>
-          <p:cNvPr id="5" name="demo-card"/>
+      <p:sp>
+        <p:nvSpPr>
+          <p:cNvPr id="4" name="lesson-0"/>
           <p:cNvSpPr/>
           <p:nvPr/>
         </p:nvSpPr>
         <p:spPr>
           <a:xfrm>
-            <a:off x="9052560" y="1600200"/>
-            <a:ext cx="2587752" cy="4134326"/>
+            <a:off x="548640" y="1600200"/>
+            <a:ext cx="5440680" cy="2148840"/>
           </a:xfrm>
           <a:prstGeom prst="roundRect">
             <a:avLst>
-              <a:gd name="adj" fmla="val 2827"/>
+              <a:gd name="adj" fmla="val 3404"/>
             </a:avLst>
           </a:prstGeom>
           <a:solidFill>
@@ -6444,14 +6593,14 @@
       </p:sp>
       <p:sp>
         <p:nvSpPr>
-          <p:cNvPr id="6" name="demo-b"/>
+          <p:cNvPr id="5" name="lesson-n-0"/>
           <p:cNvSpPr txBox="1"/>
           <p:nvPr/>
         </p:nvSpPr>
         <p:spPr>
           <a:xfrm>
-            <a:off x="9281160" y="1828800"/>
-            <a:ext cx="2240280" cy="3657600"/>
+            <a:off x="868680" y="1874520"/>
+            <a:ext cx="914400" cy="640080"/>
           </a:xfrm>
           <a:prstGeom prst="rect">
             <a:avLst/>
@@ -6464,9 +6613,42 @@
           <a:lstStyle/>
           <a:p>
             <a:pPr indent="0" marL="0">
-              <a:spcAft>
-                <a:spcPts val="1000"/>
-              </a:spcAft>
+              <a:buNone/>
+            </a:pPr>
+            <a:r>
+              <a:rPr lang="en-US" sz="3200" b="1" dirty="0">
+                <a:solidFill>
+                  <a:schemeClr val="accent1"/>
+                </a:solidFill>
+              </a:rPr>
+              <a:t>01</a:t>
+            </a:r>
+            <a:endParaRPr lang="en-US" sz="3200" dirty="0"/>
+          </a:p>
+        </p:txBody>
+      </p:sp>
+      <p:sp>
+        <p:nvSpPr>
+          <p:cNvPr id="6" name="lesson-h-0"/>
+          <p:cNvSpPr txBox="1"/>
+          <p:nvPr/>
+        </p:nvSpPr>
+        <p:spPr>
+          <a:xfrm>
+            <a:off x="1783080" y="1920240"/>
+            <a:ext cx="4023360" cy="548640"/>
+          </a:xfrm>
+          <a:prstGeom prst="rect">
+            <a:avLst/>
+          </a:prstGeom>
+          <a:noFill/>
+          <a:ln/>
+        </p:spPr>
+        <p:txBody>
+          <a:bodyPr wrap="square" lIns="0" tIns="0" rIns="0" bIns="0" rtlCol="0" anchor="t"/>
+          <a:lstStyle/>
+          <a:p>
+            <a:pPr indent="0" marL="0">
               <a:buNone/>
             </a:pPr>
             <a:r>
@@ -6475,61 +6657,433 @@
                   <a:schemeClr val="tx1"/>
                 </a:solidFill>
               </a:rPr>
-              <a:t>SIMULATED</a:t>
+              <a:t>테스트셋은 업로드 전에 분리</a:t>
             </a:r>
-            <a:endParaRPr lang="en-US" sz="1400" dirty="0"/>
-          </a:p>
-          <a:p>
-            <a:pPr marL="342900" indent="-342900">
-              <a:spcAft>
-                <a:spcPts val="1000"/>
-              </a:spcAft>
-              <a:buSzPct val="100000"/>
-              <a:buChar char="•"/>
+            <a:endParaRPr lang="en-US" sz="2000" dirty="0"/>
+          </a:p>
+        </p:txBody>
+      </p:sp>
+      <p:sp>
+        <p:nvSpPr>
+          <p:cNvPr id="7" name="lesson-d-0"/>
+          <p:cNvSpPr txBox="1"/>
+          <p:nvPr/>
+        </p:nvSpPr>
+        <p:spPr>
+          <a:xfrm>
+            <a:off x="1783080" y="2606040"/>
+            <a:ext cx="4023360" cy="822960"/>
+          </a:xfrm>
+          <a:prstGeom prst="rect">
+            <a:avLst/>
+          </a:prstGeom>
+          <a:noFill/>
+          <a:ln/>
+        </p:spPr>
+        <p:txBody>
+          <a:bodyPr wrap="square" lIns="0" tIns="0" rIns="0" bIns="0" rtlCol="0" anchor="t"/>
+          <a:lstStyle/>
+          <a:p>
+            <a:pPr indent="0" marL="0">
+              <a:buNone/>
             </a:pPr>
             <a:r>
               <a:rPr lang="en-US" sz="1400" dirty="0">
                 <a:solidFill>
-                  <a:schemeClr val="tx1"/>
+                  <a:schemeClr val="tx2"/>
                 </a:solidFill>
               </a:rPr>
-              <a:t>카메라 → 모델 → 판정</a:t>
+              <a:t>v8 전체(테스트 포함)를 올려 1차 점수가 부풀려짐</a:t>
             </a:r>
             <a:endParaRPr lang="en-US" sz="1400" dirty="0"/>
           </a:p>
-          <a:p>
-            <a:pPr marL="342900" indent="-342900">
-              <a:spcAft>
-                <a:spcPts val="1000"/>
-              </a:spcAft>
-              <a:buSzPct val="100000"/>
-              <a:buChar char="•"/>
+        </p:txBody>
+      </p:sp>
+      <p:sp>
+        <p:nvSpPr>
+          <p:cNvPr id="8" name="lesson-1"/>
+          <p:cNvSpPr/>
+          <p:nvPr/>
+        </p:nvSpPr>
+        <p:spPr>
+          <a:xfrm>
+            <a:off x="6190488" y="1600200"/>
+            <a:ext cx="5440680" cy="2148840"/>
+          </a:xfrm>
+          <a:prstGeom prst="roundRect">
+            <a:avLst>
+              <a:gd name="adj" fmla="val 3404"/>
+            </a:avLst>
+          </a:prstGeom>
+          <a:solidFill>
+            <a:schemeClr val="bg2"/>
+          </a:solidFill>
+          <a:ln/>
+        </p:spPr>
+      </p:sp>
+      <p:sp>
+        <p:nvSpPr>
+          <p:cNvPr id="9" name="lesson-n-1"/>
+          <p:cNvSpPr txBox="1"/>
+          <p:nvPr/>
+        </p:nvSpPr>
+        <p:spPr>
+          <a:xfrm>
+            <a:off x="6510528" y="1874520"/>
+            <a:ext cx="914400" cy="640080"/>
+          </a:xfrm>
+          <a:prstGeom prst="rect">
+            <a:avLst/>
+          </a:prstGeom>
+          <a:noFill/>
+          <a:ln/>
+        </p:spPr>
+        <p:txBody>
+          <a:bodyPr wrap="square" lIns="0" tIns="0" rIns="0" bIns="0" rtlCol="0" anchor="t"/>
+          <a:lstStyle/>
+          <a:p>
+            <a:pPr indent="0" marL="0">
+              <a:buNone/>
+            </a:pPr>
+            <a:r>
+              <a:rPr lang="en-US" sz="3200" b="1" dirty="0">
+                <a:solidFill>
+                  <a:schemeClr val="accent2"/>
+                </a:solidFill>
+              </a:rPr>
+              <a:t>02</a:t>
+            </a:r>
+            <a:endParaRPr lang="en-US" sz="3200" dirty="0"/>
+          </a:p>
+        </p:txBody>
+      </p:sp>
+      <p:sp>
+        <p:nvSpPr>
+          <p:cNvPr id="10" name="lesson-h-1"/>
+          <p:cNvSpPr txBox="1"/>
+          <p:nvPr/>
+        </p:nvSpPr>
+        <p:spPr>
+          <a:xfrm>
+            <a:off x="7424928" y="1920240"/>
+            <a:ext cx="4023360" cy="548640"/>
+          </a:xfrm>
+          <a:prstGeom prst="rect">
+            <a:avLst/>
+          </a:prstGeom>
+          <a:noFill/>
+          <a:ln/>
+        </p:spPr>
+        <p:txBody>
+          <a:bodyPr wrap="square" lIns="0" tIns="0" rIns="0" bIns="0" rtlCol="0" anchor="t"/>
+          <a:lstStyle/>
+          <a:p>
+            <a:pPr indent="0" marL="0">
+              <a:buNone/>
+            </a:pPr>
+            <a:r>
+              <a:rPr lang="en-US" sz="2000" b="1" dirty="0">
+                <a:solidFill>
+                  <a:schemeClr val="tx1"/>
+                </a:solidFill>
+              </a:rPr>
+              <a:t>새 환경 사진으로 다시 검증</a:t>
+            </a:r>
+            <a:endParaRPr lang="en-US" sz="2000" dirty="0"/>
+          </a:p>
+        </p:txBody>
+      </p:sp>
+      <p:sp>
+        <p:nvSpPr>
+          <p:cNvPr id="11" name="lesson-d-1"/>
+          <p:cNvSpPr txBox="1"/>
+          <p:nvPr/>
+        </p:nvSpPr>
+        <p:spPr>
+          <a:xfrm>
+            <a:off x="7424928" y="2606040"/>
+            <a:ext cx="4023360" cy="822960"/>
+          </a:xfrm>
+          <a:prstGeom prst="rect">
+            <a:avLst/>
+          </a:prstGeom>
+          <a:noFill/>
+          <a:ln/>
+        </p:spPr>
+        <p:txBody>
+          <a:bodyPr wrap="square" lIns="0" tIns="0" rIns="0" bIns="0" rtlCol="0" anchor="t"/>
+          <a:lstStyle/>
+          <a:p>
+            <a:pPr indent="0" marL="0">
+              <a:buNone/>
             </a:pPr>
             <a:r>
               <a:rPr lang="en-US" sz="1400" dirty="0">
                 <a:solidFill>
-                  <a:schemeClr val="tx1"/>
+                  <a:schemeClr val="tx2"/>
                 </a:solidFill>
               </a:rPr>
-              <a:t>heatmap · 해시 기록</a:t>
+              <a:t>1차 92.9% → 처음 보는 사진에선 결함 셀 47%</a:t>
             </a:r>
             <a:endParaRPr lang="en-US" sz="1400" dirty="0"/>
           </a:p>
-          <a:p>
-            <a:pPr marL="342900" indent="-342900">
-              <a:spcAft>
-                <a:spcPts val="1000"/>
-              </a:spcAft>
-              <a:buSzPct val="100000"/>
-              <a:buChar char="•"/>
+        </p:txBody>
+      </p:sp>
+      <p:sp>
+        <p:nvSpPr>
+          <p:cNvPr id="12" name="lesson-2"/>
+          <p:cNvSpPr/>
+          <p:nvPr/>
+        </p:nvSpPr>
+        <p:spPr>
+          <a:xfrm>
+            <a:off x="548640" y="3931920"/>
+            <a:ext cx="5440680" cy="2148840"/>
+          </a:xfrm>
+          <a:prstGeom prst="roundRect">
+            <a:avLst>
+              <a:gd name="adj" fmla="val 3404"/>
+            </a:avLst>
+          </a:prstGeom>
+          <a:solidFill>
+            <a:schemeClr val="bg2"/>
+          </a:solidFill>
+          <a:ln/>
+        </p:spPr>
+      </p:sp>
+      <p:sp>
+        <p:nvSpPr>
+          <p:cNvPr id="13" name="lesson-n-2"/>
+          <p:cNvSpPr txBox="1"/>
+          <p:nvPr/>
+        </p:nvSpPr>
+        <p:spPr>
+          <a:xfrm>
+            <a:off x="868680" y="4206240"/>
+            <a:ext cx="914400" cy="640080"/>
+          </a:xfrm>
+          <a:prstGeom prst="rect">
+            <a:avLst/>
+          </a:prstGeom>
+          <a:noFill/>
+          <a:ln/>
+        </p:spPr>
+        <p:txBody>
+          <a:bodyPr wrap="square" lIns="0" tIns="0" rIns="0" bIns="0" rtlCol="0" anchor="t"/>
+          <a:lstStyle/>
+          <a:p>
+            <a:pPr indent="0" marL="0">
+              <a:buNone/>
+            </a:pPr>
+            <a:r>
+              <a:rPr lang="en-US" sz="3200" b="1" dirty="0">
+                <a:solidFill>
+                  <a:schemeClr val="accent3"/>
+                </a:solidFill>
+              </a:rPr>
+              <a:t>03</a:t>
+            </a:r>
+            <a:endParaRPr lang="en-US" sz="3200" dirty="0"/>
+          </a:p>
+        </p:txBody>
+      </p:sp>
+      <p:sp>
+        <p:nvSpPr>
+          <p:cNvPr id="14" name="lesson-h-2"/>
+          <p:cNvSpPr txBox="1"/>
+          <p:nvPr/>
+        </p:nvSpPr>
+        <p:spPr>
+          <a:xfrm>
+            <a:off x="1783080" y="4251960"/>
+            <a:ext cx="4023360" cy="548640"/>
+          </a:xfrm>
+          <a:prstGeom prst="rect">
+            <a:avLst/>
+          </a:prstGeom>
+          <a:noFill/>
+          <a:ln/>
+        </p:spPr>
+        <p:txBody>
+          <a:bodyPr wrap="square" lIns="0" tIns="0" rIns="0" bIns="0" rtlCol="0" anchor="t"/>
+          <a:lstStyle/>
+          <a:p>
+            <a:pPr indent="0" marL="0">
+              <a:buNone/>
+            </a:pPr>
+            <a:r>
+              <a:rPr lang="en-US" sz="2000" b="1" dirty="0">
+                <a:solidFill>
+                  <a:schemeClr val="tx1"/>
+                </a:solidFill>
+              </a:rPr>
+              <a:t>기준값은 모델별로, 검증셋에서</a:t>
+            </a:r>
+            <a:endParaRPr lang="en-US" sz="2000" dirty="0"/>
+          </a:p>
+        </p:txBody>
+      </p:sp>
+      <p:sp>
+        <p:nvSpPr>
+          <p:cNvPr id="15" name="lesson-d-2"/>
+          <p:cNvSpPr txBox="1"/>
+          <p:nvPr/>
+        </p:nvSpPr>
+        <p:spPr>
+          <a:xfrm>
+            <a:off x="1783080" y="4937760"/>
+            <a:ext cx="4023360" cy="822960"/>
+          </a:xfrm>
+          <a:prstGeom prst="rect">
+            <a:avLst/>
+          </a:prstGeom>
+          <a:noFill/>
+          <a:ln/>
+        </p:spPr>
+        <p:txBody>
+          <a:bodyPr wrap="square" lIns="0" tIns="0" rIns="0" bIns="0" rtlCol="0" anchor="t"/>
+          <a:lstStyle/>
+          <a:p>
+            <a:pPr indent="0" marL="0">
+              <a:buNone/>
             </a:pPr>
             <a:r>
               <a:rPr lang="en-US" sz="1400" dirty="0">
                 <a:solidFill>
+                  <a:schemeClr val="tx2"/>
+                </a:solidFill>
+              </a:rPr>
+              <a:t>YOLOX-S 0.30 → 3%, 0.05 → 57% · INT8도 점수가 바뀜</a:t>
+            </a:r>
+            <a:endParaRPr lang="en-US" sz="1400" dirty="0"/>
+          </a:p>
+        </p:txBody>
+      </p:sp>
+      <p:sp>
+        <p:nvSpPr>
+          <p:cNvPr id="16" name="lesson-3"/>
+          <p:cNvSpPr/>
+          <p:nvPr/>
+        </p:nvSpPr>
+        <p:spPr>
+          <a:xfrm>
+            <a:off x="6190488" y="3931920"/>
+            <a:ext cx="5440680" cy="2148840"/>
+          </a:xfrm>
+          <a:prstGeom prst="roundRect">
+            <a:avLst>
+              <a:gd name="adj" fmla="val 3404"/>
+            </a:avLst>
+          </a:prstGeom>
+          <a:solidFill>
+            <a:schemeClr val="bg2"/>
+          </a:solidFill>
+          <a:ln/>
+        </p:spPr>
+      </p:sp>
+      <p:sp>
+        <p:nvSpPr>
+          <p:cNvPr id="17" name="lesson-n-3"/>
+          <p:cNvSpPr txBox="1"/>
+          <p:nvPr/>
+        </p:nvSpPr>
+        <p:spPr>
+          <a:xfrm>
+            <a:off x="6510528" y="4206240"/>
+            <a:ext cx="914400" cy="640080"/>
+          </a:xfrm>
+          <a:prstGeom prst="rect">
+            <a:avLst/>
+          </a:prstGeom>
+          <a:noFill/>
+          <a:ln/>
+        </p:spPr>
+        <p:txBody>
+          <a:bodyPr wrap="square" lIns="0" tIns="0" rIns="0" bIns="0" rtlCol="0" anchor="t"/>
+          <a:lstStyle/>
+          <a:p>
+            <a:pPr indent="0" marL="0">
+              <a:buNone/>
+            </a:pPr>
+            <a:r>
+              <a:rPr lang="en-US" sz="3200" b="1" dirty="0">
+                <a:solidFill>
+                  <a:schemeClr val="accent4"/>
+                </a:solidFill>
+              </a:rPr>
+              <a:t>04</a:t>
+            </a:r>
+            <a:endParaRPr lang="en-US" sz="3200" dirty="0"/>
+          </a:p>
+        </p:txBody>
+      </p:sp>
+      <p:sp>
+        <p:nvSpPr>
+          <p:cNvPr id="18" name="lesson-h-3"/>
+          <p:cNvSpPr txBox="1"/>
+          <p:nvPr/>
+        </p:nvSpPr>
+        <p:spPr>
+          <a:xfrm>
+            <a:off x="7424928" y="4251960"/>
+            <a:ext cx="4023360" cy="548640"/>
+          </a:xfrm>
+          <a:prstGeom prst="rect">
+            <a:avLst/>
+          </a:prstGeom>
+          <a:noFill/>
+          <a:ln/>
+        </p:spPr>
+        <p:txBody>
+          <a:bodyPr wrap="square" lIns="0" tIns="0" rIns="0" bIns="0" rtlCol="0" anchor="t"/>
+          <a:lstStyle/>
+          <a:p>
+            <a:pPr indent="0" marL="0">
+              <a:buNone/>
+            </a:pPr>
+            <a:r>
+              <a:rPr lang="en-US" sz="2000" b="1" dirty="0">
+                <a:solidFill>
                   <a:schemeClr val="tx1"/>
                 </a:solidFill>
               </a:rPr>
-              <a:t>LOT별 추적</a:t>
+              <a:t>크기보다 데이터에 맞는 모델</a:t>
+            </a:r>
+            <a:endParaRPr lang="en-US" sz="2000" dirty="0"/>
+          </a:p>
+        </p:txBody>
+      </p:sp>
+      <p:sp>
+        <p:nvSpPr>
+          <p:cNvPr id="19" name="lesson-d-3"/>
+          <p:cNvSpPr txBox="1"/>
+          <p:nvPr/>
+        </p:nvSpPr>
+        <p:spPr>
+          <a:xfrm>
+            <a:off x="7424928" y="4937760"/>
+            <a:ext cx="4023360" cy="822960"/>
+          </a:xfrm>
+          <a:prstGeom prst="rect">
+            <a:avLst/>
+          </a:prstGeom>
+          <a:noFill/>
+          <a:ln/>
+        </p:spPr>
+        <p:txBody>
+          <a:bodyPr wrap="square" lIns="0" tIns="0" rIns="0" bIns="0" rtlCol="0" anchor="t"/>
+          <a:lstStyle/>
+          <a:p>
+            <a:pPr indent="0" marL="0">
+              <a:buNone/>
+            </a:pPr>
+            <a:r>
+              <a:rPr lang="en-US" sz="1400" dirty="0">
+                <a:solidFill>
+                  <a:schemeClr val="tx2"/>
+                </a:solidFill>
+              </a:rPr>
+              <a:t>3.9M ATSS가 9M YOLOX-S보다 정확</a:t>
             </a:r>
             <a:endParaRPr lang="en-US" sz="1400" dirty="0"/>
           </a:p>
@@ -6615,8 +7169,8 @@
         </p:nvSpPr>
         <p:spPr>
           <a:xfrm>
-            <a:off x="548640" y="2606040"/>
-            <a:ext cx="4389120" cy="1645920"/>
+            <a:off x="548640" y="347472"/>
+            <a:ext cx="11094415" cy="685800"/>
           </a:xfrm>
           <a:prstGeom prst="rect">
             <a:avLst/>
@@ -6625,34 +7179,36 @@
           <a:ln/>
         </p:spPr>
         <p:txBody>
-          <a:bodyPr wrap="square" lIns="0" tIns="0" rIns="0" bIns="0" rtlCol="0" anchor="t"/>
+          <a:bodyPr wrap="square" lIns="0" tIns="0" rIns="0" bIns="0" rtlCol="0" anchor="ctr"/>
           <a:lstStyle/>
           <a:p>
             <a:pPr algn="l" indent="0" marL="0">
               <a:buNone/>
             </a:pPr>
             <a:r>
-              <a:rPr lang="en-US" sz="4000" b="1" dirty="0">
+              <a:rPr lang="en-US" sz="3200" b="1" dirty="0">
                 <a:solidFill>
                   <a:schemeClr val="tx1"/>
                 </a:solidFill>
               </a:rPr>
-              <a:t>감사합니다</a:t>
+              <a:t>데모</a:t>
             </a:r>
-            <a:endParaRPr lang="en-US" sz="4000" dirty="0"/>
+            <a:endParaRPr lang="en-US" sz="3200" dirty="0"/>
           </a:p>
         </p:txBody>
       </p:sp>
       <p:sp>
         <p:nvSpPr>
-          <p:cNvPr id="3" name="qa"/>
-          <p:cNvSpPr txBox="1"/>
-          <p:nvPr/>
-        </p:nvSpPr>
-        <p:spPr>
-          <a:xfrm>
-            <a:off x="548640" y="3429000"/>
-            <a:ext cx="4206240" cy="640080"/>
+          <p:cNvPr id="3" name="Text 0"/>
+          <p:cNvSpPr/>
+          <p:nvPr>
+            <p:ph idx="101" type="body" hasCustomPrompt="1"/>
+          </p:nvPr>
+        </p:nvSpPr>
+        <p:spPr>
+          <a:xfrm>
+            <a:off x="548640" y="1005840"/>
+            <a:ext cx="11094415" cy="411480"/>
           </a:xfrm>
           <a:prstGeom prst="rect">
             <a:avLst/>
@@ -6661,63 +7217,27 @@
           <a:ln/>
         </p:spPr>
         <p:txBody>
-          <a:bodyPr wrap="square" lIns="0" tIns="0" rIns="0" bIns="0" rtlCol="0" anchor="t"/>
+          <a:bodyPr wrap="square" lIns="0" tIns="0" rIns="0" bIns="0" rtlCol="0" anchor="ctr"/>
           <a:lstStyle/>
           <a:p>
-            <a:pPr indent="0" marL="0">
+            <a:pPr algn="l" indent="0" marL="0">
               <a:buNone/>
             </a:pPr>
             <a:r>
-              <a:rPr lang="en-US" sz="3200" b="1" dirty="0">
-                <a:solidFill>
-                  <a:schemeClr val="accent1"/>
+              <a:rPr lang="en-US" sz="1500" dirty="0">
+                <a:solidFill>
+                  <a:schemeClr val="tx2"/>
                 </a:solidFill>
               </a:rPr>
-              <a:t>Q&amp;A</a:t>
+              <a:t>가상 검사 라인 · 실제 모델(ATSS)로 판정</a:t>
             </a:r>
-            <a:endParaRPr lang="en-US" sz="3200" dirty="0"/>
-          </a:p>
-        </p:txBody>
-      </p:sp>
-      <p:sp>
-        <p:nvSpPr>
-          <p:cNvPr id="4" name="presenter"/>
-          <p:cNvSpPr txBox="1"/>
-          <p:nvPr/>
-        </p:nvSpPr>
-        <p:spPr>
-          <a:xfrm>
-            <a:off x="548640" y="4343400"/>
-            <a:ext cx="4206240" cy="365760"/>
-          </a:xfrm>
-          <a:prstGeom prst="rect">
-            <a:avLst/>
-          </a:prstGeom>
-          <a:noFill/>
-          <a:ln/>
-        </p:spPr>
-        <p:txBody>
-          <a:bodyPr wrap="square" lIns="0" tIns="0" rIns="0" bIns="0" rtlCol="0" anchor="t"/>
-          <a:lstStyle/>
-          <a:p>
-            <a:pPr indent="0" marL="0">
-              <a:buNone/>
-            </a:pPr>
-            <a:r>
-              <a:rPr lang="en-US" sz="1600" b="1" dirty="0">
-                <a:solidFill>
-                  <a:schemeClr val="tx1"/>
-                </a:solidFill>
-              </a:rPr>
-              <a:t>최예현</a:t>
-            </a:r>
-            <a:endParaRPr lang="en-US" sz="1600" dirty="0"/>
+            <a:endParaRPr lang="en-US" sz="1500" dirty="0"/>
           </a:p>
         </p:txBody>
       </p:sp>
       <p:pic>
         <p:nvPicPr>
-          <p:cNvPr id="5" name="end-crack" descr="C:\Users\user\_se4nchoi\batteryvision\docs\submission\build\img\cover_crack.jpg">    </p:cNvPr>
+          <p:cNvPr id="4" name="dashboard" descr="C:\Users\user\_se4nchoi\batteryvision\docs\submission\build\img\dashboard.jpg">    </p:cNvPr>
           <p:cNvPicPr>
             <a:picLocks noChangeAspect="1"/>
           </p:cNvPicPr>
@@ -6731,8 +7251,8 @@
         </p:blipFill>
         <p:spPr>
           <a:xfrm>
-            <a:off x="5074920" y="2377440"/>
-            <a:ext cx="2103120" cy="2103120"/>
+            <a:off x="548640" y="1600200"/>
+            <a:ext cx="8321040" cy="4134326"/>
           </a:xfrm>
           <a:prstGeom prst="rect">
             <a:avLst/>
@@ -6741,34 +7261,237 @@
       </p:pic>
       <p:sp>
         <p:nvSpPr>
-          <p:cNvPr id="6" name="end-dot-crack"/>
+          <p:cNvPr id="5" name="demo-card"/>
           <p:cNvSpPr/>
           <p:nvPr/>
         </p:nvSpPr>
         <p:spPr>
           <a:xfrm>
-            <a:off x="5074920" y="4663440"/>
-            <a:ext cx="146304" cy="146304"/>
-          </a:xfrm>
-          <a:prstGeom prst="ellipse">
-            <a:avLst/>
+            <a:off x="9052560" y="1600200"/>
+            <a:ext cx="2587752" cy="4134326"/>
+          </a:xfrm>
+          <a:prstGeom prst="roundRect">
+            <a:avLst>
+              <a:gd name="adj" fmla="val 2827"/>
+            </a:avLst>
           </a:prstGeom>
           <a:solidFill>
-            <a:schemeClr val="accent2"/>
+            <a:schemeClr val="bg2"/>
           </a:solidFill>
           <a:ln/>
         </p:spPr>
       </p:sp>
       <p:sp>
         <p:nvSpPr>
-          <p:cNvPr id="7" name="end-label-crack"/>
+          <p:cNvPr id="6" name="demo-b"/>
           <p:cNvSpPr txBox="1"/>
           <p:nvPr/>
         </p:nvSpPr>
         <p:spPr>
           <a:xfrm>
-            <a:off x="5312664" y="4590288"/>
-            <a:ext cx="1828800" cy="292608"/>
+            <a:off x="9281160" y="1828800"/>
+            <a:ext cx="2240280" cy="3657600"/>
+          </a:xfrm>
+          <a:prstGeom prst="rect">
+            <a:avLst/>
+          </a:prstGeom>
+          <a:noFill/>
+          <a:ln/>
+        </p:spPr>
+        <p:txBody>
+          <a:bodyPr wrap="square" lIns="0" tIns="0" rIns="0" bIns="0" rtlCol="0" anchor="t"/>
+          <a:lstStyle/>
+          <a:p>
+            <a:pPr indent="0" marL="0">
+              <a:spcAft>
+                <a:spcPts val="1000"/>
+              </a:spcAft>
+              <a:buNone/>
+            </a:pPr>
+            <a:r>
+              <a:rPr lang="en-US" sz="2000" b="1" dirty="0">
+                <a:solidFill>
+                  <a:schemeClr val="tx1"/>
+                </a:solidFill>
+              </a:rPr>
+              <a:t>SIMULATED</a:t>
+            </a:r>
+            <a:endParaRPr lang="en-US" sz="1400" dirty="0"/>
+          </a:p>
+          <a:p>
+            <a:pPr marL="342900" indent="-342900">
+              <a:spcAft>
+                <a:spcPts val="1000"/>
+              </a:spcAft>
+              <a:buSzPct val="100000"/>
+              <a:buChar char="•"/>
+            </a:pPr>
+            <a:r>
+              <a:rPr lang="en-US" sz="1400" dirty="0">
+                <a:solidFill>
+                  <a:schemeClr val="tx1"/>
+                </a:solidFill>
+              </a:rPr>
+              <a:t>카메라 → 모델 → 판정</a:t>
+            </a:r>
+            <a:endParaRPr lang="en-US" sz="1400" dirty="0"/>
+          </a:p>
+          <a:p>
+            <a:pPr marL="342900" indent="-342900">
+              <a:spcAft>
+                <a:spcPts val="1000"/>
+              </a:spcAft>
+              <a:buSzPct val="100000"/>
+              <a:buChar char="•"/>
+            </a:pPr>
+            <a:r>
+              <a:rPr lang="en-US" sz="1400" dirty="0">
+                <a:solidFill>
+                  <a:schemeClr val="tx1"/>
+                </a:solidFill>
+              </a:rPr>
+              <a:t>heatmap · 해시 기록</a:t>
+            </a:r>
+            <a:endParaRPr lang="en-US" sz="1400" dirty="0"/>
+          </a:p>
+          <a:p>
+            <a:pPr marL="342900" indent="-342900">
+              <a:spcAft>
+                <a:spcPts val="1000"/>
+              </a:spcAft>
+              <a:buSzPct val="100000"/>
+              <a:buChar char="•"/>
+            </a:pPr>
+            <a:r>
+              <a:rPr lang="en-US" sz="1400" dirty="0">
+                <a:solidFill>
+                  <a:schemeClr val="tx1"/>
+                </a:solidFill>
+              </a:rPr>
+              <a:t>LOT별 추적</a:t>
+            </a:r>
+            <a:endParaRPr lang="en-US" sz="1400" dirty="0"/>
+          </a:p>
+        </p:txBody>
+      </p:sp>
+      <p:sp>
+        <p:nvSpPr>
+          <p:cNvPr id="25" name="Slide Number Placeholder 0"/>
+          <p:cNvSpPr>
+            <a:spLocks noGrp="1"/>
+          </p:cNvSpPr>
+          <p:nvPr>
+            <p:ph type="sldNum" sz="quarter" idx="4294967295"/>
+          </p:nvPr>
+        </p:nvSpPr>
+        <p:spPr>
+          <a:xfrm>
+            <a:off x="11094415" y="6419088"/>
+            <a:ext cx="548640" cy="274320"/>
+          </a:xfrm>
+          <a:prstGeom prst="rect">
+            <a:avLst/>
+          </a:prstGeom>
+          <a:extLst>
+            <a:ext uri="{C572A759-6A51-4108-AA02-DFA0A04FC94B}">
+              <ma14:wrappingTextBoxFlag xmlns:ma14="http://schemas.microsoft.com/office/mac/drawingml/2011/main" val="0"/>
+            </a:ext>
+          </a:extLst>
+        </p:spPr>
+        <p:txBody>
+          <a:bodyPr/>
+          <a:lstStyle>
+            <a:lvl1pPr>
+              <a:defRPr sz="1000">
+                <a:solidFill>
+                  <a:schemeClr val="tx2"/>
+                </a:solidFill>
+              </a:defRPr>
+            </a:lvl1pPr>
+          </a:lstStyle>
+          <a:p>
+            <a:pPr algn="r"/>
+            <a:fld id="{F7021451-1387-4CA6-816F-3879F97B5CBC}" type="slidenum">
+              <a:rPr b="0" lang="en-US"/>
+              <a:t>12</a:t>
+            </a:fld>
+            <a:endParaRPr lang="en-US"/>
+          </a:p>
+        </p:txBody>
+      </p:sp>
+    </p:spTree>
+  </p:cSld>
+  <p:clrMapOvr>
+    <a:masterClrMapping/>
+  </p:clrMapOvr>
+</p:sld>
+</file>
+
+<file path=ppt/slides/slide13.xml><?xml version="1.0" encoding="utf-8"?>
+<p:sld xmlns:a="http://schemas.openxmlformats.org/drawingml/2006/main" xmlns:r="http://schemas.openxmlformats.org/officeDocument/2006/relationships" xmlns:p="http://schemas.openxmlformats.org/presentationml/2006/main">
+  <p:cSld name="Slide 13">
+    <p:spTree>
+      <p:nvGrpSpPr>
+        <p:cNvPr id="1" name=""/>
+        <p:cNvGrpSpPr/>
+        <p:nvPr/>
+      </p:nvGrpSpPr>
+      <p:grpSpPr>
+        <a:xfrm>
+          <a:off x="0" y="0"/>
+          <a:ext cx="0" cy="0"/>
+          <a:chOff x="0" y="0"/>
+          <a:chExt cx="0" cy="0"/>
+        </a:xfrm>
+      </p:grpSpPr>
+      <p:sp>
+        <p:nvSpPr>
+          <p:cNvPr id="2" name="Text 0"/>
+          <p:cNvSpPr/>
+          <p:nvPr>
+            <p:ph idx="100" type="title" hasCustomPrompt="1"/>
+          </p:nvPr>
+        </p:nvSpPr>
+        <p:spPr>
+          <a:xfrm>
+            <a:off x="548640" y="2606040"/>
+            <a:ext cx="4389120" cy="1645920"/>
+          </a:xfrm>
+          <a:prstGeom prst="rect">
+            <a:avLst/>
+          </a:prstGeom>
+          <a:noFill/>
+          <a:ln/>
+        </p:spPr>
+        <p:txBody>
+          <a:bodyPr wrap="square" lIns="0" tIns="0" rIns="0" bIns="0" rtlCol="0" anchor="t"/>
+          <a:lstStyle/>
+          <a:p>
+            <a:pPr algn="l" indent="0" marL="0">
+              <a:buNone/>
+            </a:pPr>
+            <a:r>
+              <a:rPr lang="en-US" sz="4000" b="1" dirty="0">
+                <a:solidFill>
+                  <a:schemeClr val="tx1"/>
+                </a:solidFill>
+              </a:rPr>
+              <a:t>감사합니다</a:t>
+            </a:r>
+            <a:endParaRPr lang="en-US" sz="4000" dirty="0"/>
+          </a:p>
+        </p:txBody>
+      </p:sp>
+      <p:sp>
+        <p:nvSpPr>
+          <p:cNvPr id="3" name="qa"/>
+          <p:cNvSpPr txBox="1"/>
+          <p:nvPr/>
+        </p:nvSpPr>
+        <p:spPr>
+          <a:xfrm>
+            <a:off x="548640" y="3429000"/>
+            <a:ext cx="4206240" cy="640080"/>
           </a:xfrm>
           <a:prstGeom prst="rect">
             <a:avLst/>
@@ -6784,71 +7507,27 @@
               <a:buNone/>
             </a:pPr>
             <a:r>
-              <a:rPr lang="en-US" sz="1400" b="1" dirty="0">
-                <a:solidFill>
-                  <a:schemeClr val="tx1"/>
+              <a:rPr lang="en-US" sz="3200" b="1" dirty="0">
+                <a:solidFill>
+                  <a:schemeClr val="accent1"/>
                 </a:solidFill>
               </a:rPr>
-              <a:t>crack</a:t>
+              <a:t>Q&amp;A</a:t>
             </a:r>
-            <a:endParaRPr lang="en-US" sz="1400" dirty="0"/>
+            <a:endParaRPr lang="en-US" sz="3200" dirty="0"/>
           </a:p>
         </p:txBody>
       </p:sp>
-      <p:pic>
-        <p:nvPicPr>
-          <p:cNvPr id="8" name="end-scratch" descr="C:\Users\user\_se4nchoi\batteryvision\docs\submission\build\img\cover_scratch.jpg">    </p:cNvPr>
-          <p:cNvPicPr>
-            <a:picLocks noChangeAspect="1"/>
-          </p:cNvPicPr>
-          <p:nvPr/>
-        </p:nvPicPr>
-        <p:blipFill>
-          <a:blip r:embed="rId2"/>
-          <a:stretch>
-            <a:fillRect/>
-          </a:stretch>
-        </p:blipFill>
-        <p:spPr>
-          <a:xfrm>
-            <a:off x="7360920" y="2377440"/>
-            <a:ext cx="2103120" cy="2103120"/>
-          </a:xfrm>
-          <a:prstGeom prst="rect">
-            <a:avLst/>
-          </a:prstGeom>
-        </p:spPr>
-      </p:pic>
-      <p:sp>
-        <p:nvSpPr>
-          <p:cNvPr id="9" name="end-dot-scratch"/>
-          <p:cNvSpPr/>
-          <p:nvPr/>
-        </p:nvSpPr>
-        <p:spPr>
-          <a:xfrm>
-            <a:off x="7360920" y="4663440"/>
-            <a:ext cx="146304" cy="146304"/>
-          </a:xfrm>
-          <a:prstGeom prst="ellipse">
-            <a:avLst/>
-          </a:prstGeom>
-          <a:solidFill>
-            <a:schemeClr val="accent3"/>
-          </a:solidFill>
-          <a:ln/>
-        </p:spPr>
-      </p:sp>
-      <p:sp>
-        <p:nvSpPr>
-          <p:cNvPr id="10" name="end-label-scratch"/>
+      <p:sp>
+        <p:nvSpPr>
+          <p:cNvPr id="4" name="presenter"/>
           <p:cNvSpPr txBox="1"/>
           <p:nvPr/>
         </p:nvSpPr>
         <p:spPr>
           <a:xfrm>
-            <a:off x="7598664" y="4590288"/>
-            <a:ext cx="1828800" cy="292608"/>
+            <a:off x="548640" y="4343400"/>
+            <a:ext cx="4206240" cy="365760"/>
           </a:xfrm>
           <a:prstGeom prst="rect">
             <a:avLst/>
@@ -6864,100 +7543,20 @@
               <a:buNone/>
             </a:pPr>
             <a:r>
-              <a:rPr lang="en-US" sz="1400" b="1" dirty="0">
+              <a:rPr lang="en-US" sz="1600" b="1" dirty="0">
                 <a:solidFill>
                   <a:schemeClr val="tx1"/>
                 </a:solidFill>
               </a:rPr>
-              <a:t>scratch</a:t>
+              <a:t>최예현</a:t>
             </a:r>
-            <a:endParaRPr lang="en-US" sz="1400" dirty="0"/>
+            <a:endParaRPr lang="en-US" sz="1600" dirty="0"/>
           </a:p>
         </p:txBody>
       </p:sp>
-      <p:pic>
-        <p:nvPicPr>
-          <p:cNvPr id="11" name="end-정상" descr="C:\Users\user\_se4nchoi\batteryvision\docs\submission\build\img\cover_good.jpg">    </p:cNvPr>
-          <p:cNvPicPr>
-            <a:picLocks noChangeAspect="1"/>
-          </p:cNvPicPr>
-          <p:nvPr/>
-        </p:nvPicPr>
-        <p:blipFill>
-          <a:blip r:embed="rId3"/>
-          <a:stretch>
-            <a:fillRect/>
-          </a:stretch>
-        </p:blipFill>
-        <p:spPr>
-          <a:xfrm>
-            <a:off x="9646920" y="2377440"/>
-            <a:ext cx="2103120" cy="2103120"/>
-          </a:xfrm>
-          <a:prstGeom prst="rect">
-            <a:avLst/>
-          </a:prstGeom>
-        </p:spPr>
-      </p:pic>
-      <p:sp>
-        <p:nvSpPr>
-          <p:cNvPr id="12" name="end-dot-정상"/>
-          <p:cNvSpPr/>
-          <p:nvPr/>
-        </p:nvSpPr>
-        <p:spPr>
-          <a:xfrm>
-            <a:off x="9646920" y="4663440"/>
-            <a:ext cx="146304" cy="146304"/>
-          </a:xfrm>
-          <a:prstGeom prst="ellipse">
-            <a:avLst/>
-          </a:prstGeom>
-          <a:solidFill>
-            <a:schemeClr val="accent6"/>
-          </a:solidFill>
-          <a:ln/>
-        </p:spPr>
-      </p:sp>
-      <p:sp>
-        <p:nvSpPr>
-          <p:cNvPr id="13" name="end-label-정상"/>
-          <p:cNvSpPr txBox="1"/>
-          <p:nvPr/>
-        </p:nvSpPr>
-        <p:spPr>
-          <a:xfrm>
-            <a:off x="9884664" y="4590288"/>
-            <a:ext cx="1828800" cy="292608"/>
-          </a:xfrm>
-          <a:prstGeom prst="rect">
-            <a:avLst/>
-          </a:prstGeom>
-          <a:noFill/>
-          <a:ln/>
-        </p:spPr>
-        <p:txBody>
-          <a:bodyPr wrap="square" lIns="0" tIns="0" rIns="0" bIns="0" rtlCol="0" anchor="t"/>
-          <a:lstStyle/>
-          <a:p>
-            <a:pPr indent="0" marL="0">
-              <a:buNone/>
-            </a:pPr>
-            <a:r>
-              <a:rPr lang="en-US" sz="1400" b="1" dirty="0">
-                <a:solidFill>
-                  <a:schemeClr val="tx1"/>
-                </a:solidFill>
-              </a:rPr>
-              <a:t>정상</a:t>
-            </a:r>
-            <a:endParaRPr lang="en-US" sz="1400" dirty="0"/>
-          </a:p>
-        </p:txBody>
-      </p:sp>
-      <p:sp>
-        <p:nvSpPr>
-          <p:cNvPr id="15" name="Text 0"/>
+      <p:sp>
+        <p:nvSpPr>
+          <p:cNvPr id="6" name="Text 0"/>
           <p:cNvSpPr/>
           <p:nvPr>
             <p:ph idx="101" type="body" hasCustomPrompt="1"/>
@@ -7104,7 +7703,7 @@
                   <a:schemeClr val="tx2"/>
                 </a:solidFill>
               </a:rPr>
-              <a:t>비슷한 크기, 다른 대비</a:t>
+              <a:t>crack AP 1.00, scratch 0.66–0.86 · 크기는 같고 대비가 다름</a:t>
             </a:r>
             <a:endParaRPr lang="en-US" sz="1500" dirty="0"/>
           </a:p>
@@ -7336,8 +7935,8 @@
         </p:nvSpPr>
         <p:spPr>
           <a:xfrm>
-            <a:off x="548640" y="5486400"/>
-            <a:ext cx="6309360" cy="365760"/>
+            <a:off x="548640" y="5449824"/>
+            <a:ext cx="6309360" cy="667512"/>
           </a:xfrm>
           <a:prstGeom prst="rect">
             <a:avLst/>
@@ -7358,8 +7957,11 @@
                   <a:schemeClr val="tx2"/>
                 </a:solidFill>
               </a:rPr>
-              <a:t>박스 크기 (640px 사진, 중앙값)  </a:t>
+              <a:t>박스 크기 (640px 사진, 중앙값)</a:t>
             </a:r>
+            <a:endParaRPr lang="en-US" sz="1600" dirty="0"/>
+          </a:p>
+          <a:p>
             <a:pPr indent="0" marL="0">
               <a:buNone/>
             </a:pPr>
@@ -7915,7 +8517,7 @@
                   <a:schemeClr val="tx1"/>
                 </a:solidFill>
               </a:rPr>
-              <a:t>모델 9종 = 아키텍처 3 × 내보내기 3</a:t>
+              <a:t>모델별 EXPORT</a:t>
             </a:r>
             <a:endParaRPr lang="en-US" sz="1600" dirty="0"/>
           </a:p>
@@ -10010,7 +10612,7 @@
                   <a:schemeClr val="tx1"/>
                 </a:solidFill>
               </a:rPr>
-              <a:t>작은 모델이 더 맵다</a:t>
+              <a:t>작은 모델이 더 맵다 ?</a:t>
             </a:r>
             <a:endParaRPr lang="en-US" sz="3200" dirty="0"/>
           </a:p>
@@ -10048,7 +10650,7 @@
                   <a:schemeClr val="tx2"/>
                 </a:solidFill>
               </a:rPr>
-              <a:t>FP16 기준 · Geti 화면 vs 직접 측정</a:t>
+              <a:t>파라미터가 가장 적은 ATSS가 가장 정확 · Geti 점수도 같은 순서</a:t>
             </a:r>
             <a:endParaRPr lang="en-US" sz="1500" dirty="0"/>
           </a:p>
@@ -10108,7 +10710,7 @@
                   <a:schemeClr val="accent3"/>
                 </a:solidFill>
               </a:rPr>
-              <a:t>Geti 점수도 낙관적  </a:t>
+              <a:t>낙관적인 Geti 점수</a:t>
             </a:r>
             <a:endParaRPr lang="en-US" sz="1100" dirty="0"/>
           </a:p>
@@ -11026,7 +11628,7 @@
                   <a:schemeClr val="tx2"/>
                 </a:solidFill>
               </a:rPr>
-              <a:t>Geti 점수와 같은 순서 · 작은 = 파라미터 기준 (연산량은 Tiny 최소)</a:t>
+              <a:t>작은 = 파라미터 기준 (연산량은 Tiny 최소) · 32px 미만 박스에서 격차 최대 (AP 0.86 vs 0.80)</a:t>
             </a:r>
             <a:endParaRPr lang="en-US" sz="1200" dirty="0"/>
           </a:p>
@@ -13160,7 +13762,7 @@
                   <a:schemeClr val="tx2"/>
                 </a:solidFill>
               </a:rPr>
-              <a:t>수업에서 다룬 양자화 적용 · 직접 만든 벤치마크로 측정</a:t>
+              <a:t>Self benchmark</a:t>
             </a:r>
             <a:endParaRPr lang="en-US" sz="1500" dirty="0"/>
           </a:p>
@@ -14966,7 +15568,364 @@
                   <a:schemeClr val="tx2"/>
                 </a:solidFill>
               </a:rPr>
-              <a:t>학습 미사용 · 같은 업로더의 v2 세트 45장 (결함 30 · 정상 15)</a:t>
+              <a:t>같은 업로더 · 같은 결함 종류 · 다른 촬영 세션, 학습에 한 번도 안 쓴 사진</a:t>
+            </a:r>
+            <a:endParaRPr lang="en-US" sz="1500" dirty="0"/>
+          </a:p>
+        </p:txBody>
+      </p:sp>
+      <p:pic>
+        <p:nvPicPr>
+          <p:cNvPr id="4" name="rf-0" descr="C:\Users\user\_se4nchoi\batteryvision\docs\submission\build\img\roboflow_v8.png">    </p:cNvPr>
+          <p:cNvPicPr>
+            <a:picLocks noChangeAspect="1"/>
+          </p:cNvPicPr>
+          <p:nvPr/>
+        </p:nvPicPr>
+        <p:blipFill>
+          <a:blip r:embed="rId1"/>
+          <a:stretch>
+            <a:fillRect/>
+          </a:stretch>
+        </p:blipFill>
+        <p:spPr>
+          <a:xfrm>
+            <a:off x="548640" y="1600200"/>
+            <a:ext cx="5440680" cy="3459761"/>
+          </a:xfrm>
+          <a:prstGeom prst="rect">
+            <a:avLst/>
+          </a:prstGeom>
+        </p:spPr>
+      </p:pic>
+      <p:sp>
+        <p:nvSpPr>
+          <p:cNvPr id="5" name="rf-cap-0"/>
+          <p:cNvSpPr txBox="1"/>
+          <p:nvPr/>
+        </p:nvSpPr>
+        <p:spPr>
+          <a:xfrm>
+            <a:off x="548640" y="5151401"/>
+            <a:ext cx="5440680" cy="320040"/>
+          </a:xfrm>
+          <a:prstGeom prst="rect">
+            <a:avLst/>
+          </a:prstGeom>
+          <a:noFill/>
+          <a:ln/>
+        </p:spPr>
+        <p:txBody>
+          <a:bodyPr wrap="square" lIns="0" tIns="0" rIns="0" bIns="0" rtlCol="0" anchor="t"/>
+          <a:lstStyle/>
+          <a:p>
+            <a:pPr indent="0" marL="0">
+              <a:buNone/>
+            </a:pPr>
+            <a:r>
+              <a:rPr lang="en-US" sz="1400" b="1" dirty="0">
+                <a:solidFill>
+                  <a:schemeClr val="accent1"/>
+                </a:solidFill>
+              </a:rPr>
+              <a:t>1차  </a:t>
+            </a:r>
+            <a:pPr indent="0" marL="0">
+              <a:buNone/>
+            </a:pPr>
+            <a:r>
+              <a:rPr lang="en-US" sz="1400" dirty="0">
+                <a:solidFill>
+                  <a:schemeClr val="tx1"/>
+                </a:solidFill>
+              </a:rPr>
+              <a:t>Battery Defect Inspection v8 · 3,673장 → Geti 학습</a:t>
+            </a:r>
+            <a:endParaRPr lang="en-US" sz="1400" dirty="0"/>
+          </a:p>
+        </p:txBody>
+      </p:sp>
+      <p:pic>
+        <p:nvPicPr>
+          <p:cNvPr id="6" name="rf-1" descr="C:\Users\user\_se4nchoi\batteryvision\docs\submission\build\img\roboflow_v2.png">    </p:cNvPr>
+          <p:cNvPicPr>
+            <a:picLocks noChangeAspect="1"/>
+          </p:cNvPicPr>
+          <p:nvPr/>
+        </p:nvPicPr>
+        <p:blipFill>
+          <a:blip r:embed="rId2"/>
+          <a:stretch>
+            <a:fillRect/>
+          </a:stretch>
+        </p:blipFill>
+        <p:spPr>
+          <a:xfrm>
+            <a:off x="6190488" y="1600200"/>
+            <a:ext cx="5440680" cy="3320210"/>
+          </a:xfrm>
+          <a:prstGeom prst="rect">
+            <a:avLst/>
+          </a:prstGeom>
+        </p:spPr>
+      </p:pic>
+      <p:sp>
+        <p:nvSpPr>
+          <p:cNvPr id="7" name="rf-cap-1"/>
+          <p:cNvSpPr txBox="1"/>
+          <p:nvPr/>
+        </p:nvSpPr>
+        <p:spPr>
+          <a:xfrm>
+            <a:off x="6190488" y="5011850"/>
+            <a:ext cx="5440680" cy="320040"/>
+          </a:xfrm>
+          <a:prstGeom prst="rect">
+            <a:avLst/>
+          </a:prstGeom>
+          <a:noFill/>
+          <a:ln/>
+        </p:spPr>
+        <p:txBody>
+          <a:bodyPr wrap="square" lIns="0" tIns="0" rIns="0" bIns="0" rtlCol="0" anchor="t"/>
+          <a:lstStyle/>
+          <a:p>
+            <a:pPr indent="0" marL="0">
+              <a:buNone/>
+            </a:pPr>
+            <a:r>
+              <a:rPr lang="en-US" sz="1400" b="1" dirty="0">
+                <a:solidFill>
+                  <a:schemeClr val="accent3"/>
+                </a:solidFill>
+              </a:rPr>
+              <a:t>2차  </a:t>
+            </a:r>
+            <a:pPr indent="0" marL="0">
+              <a:buNone/>
+            </a:pPr>
+            <a:r>
+              <a:rPr lang="en-US" sz="1400" dirty="0">
+                <a:solidFill>
+                  <a:schemeClr val="tx1"/>
+                </a:solidFill>
+              </a:rPr>
+              <a:t>Battery Defect Detection v2 · 720장 → 테스트만</a:t>
+            </a:r>
+            <a:endParaRPr lang="en-US" sz="1400" dirty="0"/>
+          </a:p>
+        </p:txBody>
+      </p:sp>
+      <p:sp>
+        <p:nvSpPr>
+          <p:cNvPr id="8" name="overlap-card"/>
+          <p:cNvSpPr/>
+          <p:nvPr/>
+        </p:nvSpPr>
+        <p:spPr>
+          <a:xfrm>
+            <a:off x="548640" y="5532120"/>
+            <a:ext cx="11094415" cy="685800"/>
+          </a:xfrm>
+          <a:prstGeom prst="roundRect">
+            <a:avLst>
+              <a:gd name="adj" fmla="val 10667"/>
+            </a:avLst>
+          </a:prstGeom>
+          <a:solidFill>
+            <a:schemeClr val="bg2"/>
+          </a:solidFill>
+          <a:ln/>
+        </p:spPr>
+      </p:sp>
+      <p:sp>
+        <p:nvSpPr>
+          <p:cNvPr id="9" name="overlap"/>
+          <p:cNvSpPr txBox="1"/>
+          <p:nvPr/>
+        </p:nvSpPr>
+        <p:spPr>
+          <a:xfrm>
+            <a:off x="822960" y="5532120"/>
+            <a:ext cx="10545775" cy="685800"/>
+          </a:xfrm>
+          <a:prstGeom prst="rect">
+            <a:avLst/>
+          </a:prstGeom>
+          <a:noFill/>
+          <a:ln/>
+        </p:spPr>
+        <p:txBody>
+          <a:bodyPr wrap="square" lIns="0" tIns="0" rIns="0" bIns="0" rtlCol="0" anchor="ctr"/>
+          <a:lstStyle/>
+          <a:p>
+            <a:pPr indent="0" marL="0">
+              <a:buNone/>
+            </a:pPr>
+            <a:r>
+              <a:rPr lang="en-US" sz="1400" b="1" dirty="0">
+                <a:solidFill>
+                  <a:schemeClr val="accent3"/>
+                </a:solidFill>
+              </a:rPr>
+              <a:t>1차와 겹치는 140장 제거  </a:t>
+            </a:r>
+            <a:pPr indent="0" marL="0">
+              <a:buNone/>
+            </a:pPr>
+            <a:r>
+              <a:rPr lang="en-US" sz="1400" dirty="0">
+                <a:solidFill>
+                  <a:schemeClr val="tx1"/>
+                </a:solidFill>
+              </a:rPr>
+              <a:t>(같은 파일명 123 + 같은 픽셀 17) → 증강 안 된 45장 사용 (결함 30 · 정상 15)</a:t>
+            </a:r>
+            <a:endParaRPr lang="en-US" sz="1400" dirty="0"/>
+          </a:p>
+        </p:txBody>
+      </p:sp>
+      <p:sp>
+        <p:nvSpPr>
+          <p:cNvPr id="25" name="Slide Number Placeholder 0"/>
+          <p:cNvSpPr>
+            <a:spLocks noGrp="1"/>
+          </p:cNvSpPr>
+          <p:nvPr>
+            <p:ph type="sldNum" sz="quarter" idx="4294967295"/>
+          </p:nvPr>
+        </p:nvSpPr>
+        <p:spPr>
+          <a:xfrm>
+            <a:off x="11094415" y="6419088"/>
+            <a:ext cx="548640" cy="274320"/>
+          </a:xfrm>
+          <a:prstGeom prst="rect">
+            <a:avLst/>
+          </a:prstGeom>
+          <a:extLst>
+            <a:ext uri="{C572A759-6A51-4108-AA02-DFA0A04FC94B}">
+              <ma14:wrappingTextBoxFlag xmlns:ma14="http://schemas.microsoft.com/office/mac/drawingml/2011/main" val="0"/>
+            </a:ext>
+          </a:extLst>
+        </p:spPr>
+        <p:txBody>
+          <a:bodyPr/>
+          <a:lstStyle>
+            <a:lvl1pPr>
+              <a:defRPr sz="1000">
+                <a:solidFill>
+                  <a:schemeClr val="tx2"/>
+                </a:solidFill>
+              </a:defRPr>
+            </a:lvl1pPr>
+          </a:lstStyle>
+          <a:p>
+            <a:pPr algn="r"/>
+            <a:fld id="{F7021451-1387-4CA6-816F-3879F97B5CBC}" type="slidenum">
+              <a:rPr b="0" lang="en-US"/>
+              <a:t>8</a:t>
+            </a:fld>
+            <a:endParaRPr lang="en-US"/>
+          </a:p>
+        </p:txBody>
+      </p:sp>
+    </p:spTree>
+  </p:cSld>
+  <p:clrMapOvr>
+    <a:masterClrMapping/>
+  </p:clrMapOvr>
+</p:sld>
+</file>
+
+<file path=ppt/slides/slide9.xml><?xml version="1.0" encoding="utf-8"?>
+<p:sld xmlns:a="http://schemas.openxmlformats.org/drawingml/2006/main" xmlns:r="http://schemas.openxmlformats.org/officeDocument/2006/relationships" xmlns:p="http://schemas.openxmlformats.org/presentationml/2006/main">
+  <p:cSld name="Slide 9">
+    <p:spTree>
+      <p:nvGrpSpPr>
+        <p:cNvPr id="1" name=""/>
+        <p:cNvGrpSpPr/>
+        <p:nvPr/>
+      </p:nvGrpSpPr>
+      <p:grpSpPr>
+        <a:xfrm>
+          <a:off x="0" y="0"/>
+          <a:ext cx="0" cy="0"/>
+          <a:chOff x="0" y="0"/>
+          <a:chExt cx="0" cy="0"/>
+        </a:xfrm>
+      </p:grpSpPr>
+      <p:sp>
+        <p:nvSpPr>
+          <p:cNvPr id="2" name="Text 0"/>
+          <p:cNvSpPr/>
+          <p:nvPr>
+            <p:ph idx="100" type="title" hasCustomPrompt="1"/>
+          </p:nvPr>
+        </p:nvSpPr>
+        <p:spPr>
+          <a:xfrm>
+            <a:off x="548640" y="347472"/>
+            <a:ext cx="11094415" cy="685800"/>
+          </a:xfrm>
+          <a:prstGeom prst="rect">
+            <a:avLst/>
+          </a:prstGeom>
+          <a:noFill/>
+          <a:ln/>
+        </p:spPr>
+        <p:txBody>
+          <a:bodyPr wrap="square" lIns="0" tIns="0" rIns="0" bIns="0" rtlCol="0" anchor="ctr"/>
+          <a:lstStyle/>
+          <a:p>
+            <a:pPr algn="l" indent="0" marL="0">
+              <a:buNone/>
+            </a:pPr>
+            <a:r>
+              <a:rPr lang="en-US" sz="3200" b="1" dirty="0">
+                <a:solidFill>
+                  <a:schemeClr val="tx1"/>
+                </a:solidFill>
+              </a:rPr>
+              <a:t>2차 세트 결과</a:t>
+            </a:r>
+            <a:endParaRPr lang="en-US" sz="3200" dirty="0"/>
+          </a:p>
+        </p:txBody>
+      </p:sp>
+      <p:sp>
+        <p:nvSpPr>
+          <p:cNvPr id="3" name="Text 0"/>
+          <p:cNvSpPr/>
+          <p:nvPr>
+            <p:ph idx="101" type="body" hasCustomPrompt="1"/>
+          </p:nvPr>
+        </p:nvSpPr>
+        <p:spPr>
+          <a:xfrm>
+            <a:off x="548640" y="1005840"/>
+            <a:ext cx="11094415" cy="411480"/>
+          </a:xfrm>
+          <a:prstGeom prst="rect">
+            <a:avLst/>
+          </a:prstGeom>
+          <a:noFill/>
+          <a:ln/>
+        </p:spPr>
+        <p:txBody>
+          <a:bodyPr wrap="square" lIns="0" tIns="0" rIns="0" bIns="0" rtlCol="0" anchor="ctr"/>
+          <a:lstStyle/>
+          <a:p>
+            <a:pPr algn="l" indent="0" marL="0">
+              <a:buNone/>
+            </a:pPr>
+            <a:r>
+              <a:rPr lang="en-US" sz="1500" dirty="0">
+                <a:solidFill>
+                  <a:schemeClr val="tx2"/>
+                </a:solidFill>
+              </a:rPr>
+              <a:t>처음 보는 사진에선 결함 셀 절반 이상 놓침 · 기준값 조정으로도 해결 안 됨</a:t>
             </a:r>
             <a:endParaRPr lang="en-US" sz="1500" dirty="0"/>
           </a:p>
@@ -15641,7 +16600,7 @@
       </p:sp>
       <p:graphicFrame>
         <p:nvGraphicFramePr>
-          <p:cNvPr id="9" name="th-table"/>
+          <p:cNvPr id="10" name="th-table"/>
           <p:cNvGraphicFramePr>
             <a:graphicFrameLocks noGrp="1"/>
           </p:cNvGraphicFramePr>
@@ -17447,3007 +18406,6 @@
               <a:t>→ 재학습</a:t>
             </a:r>
             <a:endParaRPr lang="en-US" sz="1400" dirty="0"/>
-          </a:p>
-        </p:txBody>
-      </p:sp>
-      <p:sp>
-        <p:nvSpPr>
-          <p:cNvPr id="25" name="Slide Number Placeholder 0"/>
-          <p:cNvSpPr>
-            <a:spLocks noGrp="1"/>
-          </p:cNvSpPr>
-          <p:nvPr>
-            <p:ph type="sldNum" sz="quarter" idx="4294967295"/>
-          </p:nvPr>
-        </p:nvSpPr>
-        <p:spPr>
-          <a:xfrm>
-            <a:off x="11094415" y="6419088"/>
-            <a:ext cx="548640" cy="274320"/>
-          </a:xfrm>
-          <a:prstGeom prst="rect">
-            <a:avLst/>
-          </a:prstGeom>
-          <a:extLst>
-            <a:ext uri="{C572A759-6A51-4108-AA02-DFA0A04FC94B}">
-              <ma14:wrappingTextBoxFlag xmlns:ma14="http://schemas.microsoft.com/office/mac/drawingml/2011/main" val="0"/>
-            </a:ext>
-          </a:extLst>
-        </p:spPr>
-        <p:txBody>
-          <a:bodyPr/>
-          <a:lstStyle>
-            <a:lvl1pPr>
-              <a:defRPr sz="1000">
-                <a:solidFill>
-                  <a:schemeClr val="tx2"/>
-                </a:solidFill>
-              </a:defRPr>
-            </a:lvl1pPr>
-          </a:lstStyle>
-          <a:p>
-            <a:pPr algn="r"/>
-            <a:fld id="{F7021451-1387-4CA6-816F-3879F97B5CBC}" type="slidenum">
-              <a:rPr b="0" lang="en-US"/>
-              <a:t>8</a:t>
-            </a:fld>
-            <a:endParaRPr lang="en-US"/>
-          </a:p>
-        </p:txBody>
-      </p:sp>
-    </p:spTree>
-  </p:cSld>
-  <p:clrMapOvr>
-    <a:masterClrMapping/>
-  </p:clrMapOvr>
-</p:sld>
-</file>
-
-<file path=ppt/slides/slide9.xml><?xml version="1.0" encoding="utf-8"?>
-<p:sld xmlns:a="http://schemas.openxmlformats.org/drawingml/2006/main" xmlns:r="http://schemas.openxmlformats.org/officeDocument/2006/relationships" xmlns:p="http://schemas.openxmlformats.org/presentationml/2006/main">
-  <p:cSld name="Slide 9">
-    <p:spTree>
-      <p:nvGrpSpPr>
-        <p:cNvPr id="1" name=""/>
-        <p:cNvGrpSpPr/>
-        <p:nvPr/>
-      </p:nvGrpSpPr>
-      <p:grpSpPr>
-        <a:xfrm>
-          <a:off x="0" y="0"/>
-          <a:ext cx="0" cy="0"/>
-          <a:chOff x="0" y="0"/>
-          <a:chExt cx="0" cy="0"/>
-        </a:xfrm>
-      </p:grpSpPr>
-      <p:sp>
-        <p:nvSpPr>
-          <p:cNvPr id="2" name="Text 0"/>
-          <p:cNvSpPr/>
-          <p:nvPr>
-            <p:ph idx="100" type="title" hasCustomPrompt="1"/>
-          </p:nvPr>
-        </p:nvSpPr>
-        <p:spPr>
-          <a:xfrm>
-            <a:off x="548640" y="347472"/>
-            <a:ext cx="11094415" cy="685800"/>
-          </a:xfrm>
-          <a:prstGeom prst="rect">
-            <a:avLst/>
-          </a:prstGeom>
-          <a:noFill/>
-          <a:ln/>
-        </p:spPr>
-        <p:txBody>
-          <a:bodyPr wrap="square" lIns="0" tIns="0" rIns="0" bIns="0" rtlCol="0" anchor="ctr"/>
-          <a:lstStyle/>
-          <a:p>
-            <a:pPr algn="l" indent="0" marL="0">
-              <a:buNone/>
-            </a:pPr>
-            <a:r>
-              <a:rPr lang="en-US" sz="3200" b="1" dirty="0">
-                <a:solidFill>
-                  <a:schemeClr val="tx1"/>
-                </a:solidFill>
-              </a:rPr>
-              <a:t>WHY ?</a:t>
-            </a:r>
-            <a:endParaRPr lang="en-US" sz="3200" dirty="0"/>
-          </a:p>
-        </p:txBody>
-      </p:sp>
-      <p:graphicFrame>
-        <p:nvGraphicFramePr>
-          <p:cNvPr id="10" name="causes-table"/>
-          <p:cNvGraphicFramePr>
-            <a:graphicFrameLocks noGrp="1"/>
-          </p:cNvGraphicFramePr>
-          <p:nvPr>
-            <p:extLst>
-              <p:ext uri="{D42A27DB-BD31-4B8C-83A1-F6EECF244321}">
-                <p14:modId xmlns:p14="http://schemas.microsoft.com/office/powerpoint/2010/main" val="1579011935"/>
-              </p:ext>
-            </p:extLst>
-          </p:nvPr>
-        </p:nvGraphicFramePr>
-        <p:xfrm>
-          <a:off x="548640" y="1325880"/>
-          <a:ext cx="11094415" cy="914400"/>
-        </p:xfrm>
-        <a:graphic>
-          <a:graphicData uri="http://schemas.openxmlformats.org/drawingml/2006/table">
-            <a:tbl>
-              <a:tblPr/>
-              <a:tblGrid>
-                <a:gridCol w="502920"/>
-                <a:gridCol w="2606040"/>
-                <a:gridCol w="7114032"/>
-                <a:gridCol w="868680"/>
-              </a:tblGrid>
-              <a:tr h="457200">
-                <a:tc>
-                  <a:txBody>
-                    <a:bodyPr/>
-                    <a:lstStyle/>
-                    <a:p>
-                      <a:pPr algn="ctr" indent="0" marL="0">
-                        <a:buNone/>
-                      </a:pPr>
-                      <a:r>
-                        <a:rPr lang="en-US" sz="1400" b="1" dirty="0">
-                          <a:solidFill>
-                            <a:schemeClr val="tx2"/>
-                          </a:solidFill>
-                          <a:latin typeface="Malgun Gothic" pitchFamily="34" charset="0"/>
-                          <a:ea typeface="Malgun Gothic" pitchFamily="34" charset="-122"/>
-                          <a:cs typeface="Malgun Gothic" pitchFamily="34" charset="-120"/>
-                        </a:rPr>
-                        <a:t>장</a:t>
-                      </a:r>
-                      <a:endParaRPr lang="en-US" sz="1400" dirty="0">
-                        <a:latin typeface="Malgun Gothic" charset="0"/>
-                        <a:ea typeface="Malgun Gothic" charset="0"/>
-                        <a:cs typeface="Malgun Gothic" charset="0"/>
-                      </a:endParaRPr>
-                    </a:p>
-                  </a:txBody>
-                  <a:tcPr marL="91440" marR="91440" marT="45720" marB="45720" anchor="ctr">
-                    <a:lnL w="9525" cap="flat" cmpd="sng" algn="ctr">
-                      <a:solidFill>
-                        <a:srgbClr val="3A3F48"/>
-                      </a:solidFill>
-                      <a:prstDash val="solid"/>
-                      <a:round/>
-                      <a:headEnd type="none" w="med" len="med"/>
-                      <a:tailEnd type="none" w="med" len="med"/>
-                    </a:lnL>
-                    <a:lnR w="9525" cap="flat" cmpd="sng" algn="ctr">
-                      <a:solidFill>
-                        <a:srgbClr val="3A3F48"/>
-                      </a:solidFill>
-                      <a:prstDash val="solid"/>
-                      <a:round/>
-                      <a:headEnd type="none" w="med" len="med"/>
-                      <a:tailEnd type="none" w="med" len="med"/>
-                    </a:lnR>
-                    <a:lnT w="9525" cap="flat" cmpd="sng" algn="ctr">
-                      <a:solidFill>
-                        <a:srgbClr val="3A3F48"/>
-                      </a:solidFill>
-                      <a:prstDash val="solid"/>
-                      <a:round/>
-                      <a:headEnd type="none" w="med" len="med"/>
-                      <a:tailEnd type="none" w="med" len="med"/>
-                    </a:lnT>
-                    <a:lnB w="9525" cap="flat" cmpd="sng" algn="ctr">
-                      <a:solidFill>
-                        <a:srgbClr val="3A3F48"/>
-                      </a:solidFill>
-                      <a:prstDash val="solid"/>
-                      <a:round/>
-                      <a:headEnd type="none" w="med" len="med"/>
-                      <a:tailEnd type="none" w="med" len="med"/>
-                    </a:lnB>
-                    <a:solidFill>
-                      <a:srgbClr val="16191E"/>
-                    </a:solidFill>
-                  </a:tcPr>
-                </a:tc>
-                <a:tc>
-                  <a:txBody>
-                    <a:bodyPr/>
-                    <a:lstStyle/>
-                    <a:p>
-                      <a:pPr indent="0" marL="0">
-                        <a:buNone/>
-                      </a:pPr>
-                      <a:r>
-                        <a:rPr lang="en-US" sz="1400" b="1" dirty="0">
-                          <a:solidFill>
-                            <a:schemeClr val="tx2"/>
-                          </a:solidFill>
-                          <a:latin typeface="Malgun Gothic" pitchFamily="34" charset="0"/>
-                          <a:ea typeface="Malgun Gothic" pitchFamily="34" charset="-122"/>
-                          <a:cs typeface="Malgun Gothic" pitchFamily="34" charset="-120"/>
-                        </a:rPr>
-                        <a:t>결과</a:t>
-                      </a:r>
-                      <a:endParaRPr lang="en-US" sz="1400" dirty="0">
-                        <a:latin typeface="Malgun Gothic" charset="0"/>
-                        <a:ea typeface="Malgun Gothic" charset="0"/>
-                        <a:cs typeface="Malgun Gothic" charset="0"/>
-                      </a:endParaRPr>
-                    </a:p>
-                  </a:txBody>
-                  <a:tcPr marL="91440" marR="91440" marT="45720" marB="45720" anchor="ctr">
-                    <a:lnL w="9525" cap="flat" cmpd="sng" algn="ctr">
-                      <a:solidFill>
-                        <a:srgbClr val="3A3F48"/>
-                      </a:solidFill>
-                      <a:prstDash val="solid"/>
-                      <a:round/>
-                      <a:headEnd type="none" w="med" len="med"/>
-                      <a:tailEnd type="none" w="med" len="med"/>
-                    </a:lnL>
-                    <a:lnR w="9525" cap="flat" cmpd="sng" algn="ctr">
-                      <a:solidFill>
-                        <a:srgbClr val="3A3F48"/>
-                      </a:solidFill>
-                      <a:prstDash val="solid"/>
-                      <a:round/>
-                      <a:headEnd type="none" w="med" len="med"/>
-                      <a:tailEnd type="none" w="med" len="med"/>
-                    </a:lnR>
-                    <a:lnT w="9525" cap="flat" cmpd="sng" algn="ctr">
-                      <a:solidFill>
-                        <a:srgbClr val="3A3F48"/>
-                      </a:solidFill>
-                      <a:prstDash val="solid"/>
-                      <a:round/>
-                      <a:headEnd type="none" w="med" len="med"/>
-                      <a:tailEnd type="none" w="med" len="med"/>
-                    </a:lnT>
-                    <a:lnB w="9525" cap="flat" cmpd="sng" algn="ctr">
-                      <a:solidFill>
-                        <a:srgbClr val="3A3F48"/>
-                      </a:solidFill>
-                      <a:prstDash val="solid"/>
-                      <a:round/>
-                      <a:headEnd type="none" w="med" len="med"/>
-                      <a:tailEnd type="none" w="med" len="med"/>
-                    </a:lnB>
-                    <a:solidFill>
-                      <a:srgbClr val="16191E"/>
-                    </a:solidFill>
-                  </a:tcPr>
-                </a:tc>
-                <a:tc>
-                  <a:txBody>
-                    <a:bodyPr/>
-                    <a:lstStyle/>
-                    <a:p>
-                      <a:pPr indent="0" marL="0">
-                        <a:buNone/>
-                      </a:pPr>
-                      <a:r>
-                        <a:rPr lang="en-US" sz="1400" b="1" dirty="0">
-                          <a:solidFill>
-                            <a:schemeClr val="tx2"/>
-                          </a:solidFill>
-                          <a:latin typeface="Malgun Gothic" pitchFamily="34" charset="0"/>
-                          <a:ea typeface="Malgun Gothic" pitchFamily="34" charset="-122"/>
-                          <a:cs typeface="Malgun Gothic" pitchFamily="34" charset="-120"/>
-                        </a:rPr>
-                        <a:t>원인</a:t>
-                      </a:r>
-                      <a:endParaRPr lang="en-US" sz="1400" dirty="0">
-                        <a:latin typeface="Malgun Gothic" charset="0"/>
-                        <a:ea typeface="Malgun Gothic" charset="0"/>
-                        <a:cs typeface="Malgun Gothic" charset="0"/>
-                      </a:endParaRPr>
-                    </a:p>
-                  </a:txBody>
-                  <a:tcPr marL="91440" marR="91440" marT="45720" marB="45720" anchor="ctr">
-                    <a:lnL w="9525" cap="flat" cmpd="sng" algn="ctr">
-                      <a:solidFill>
-                        <a:srgbClr val="3A3F48"/>
-                      </a:solidFill>
-                      <a:prstDash val="solid"/>
-                      <a:round/>
-                      <a:headEnd type="none" w="med" len="med"/>
-                      <a:tailEnd type="none" w="med" len="med"/>
-                    </a:lnL>
-                    <a:lnR w="9525" cap="flat" cmpd="sng" algn="ctr">
-                      <a:solidFill>
-                        <a:srgbClr val="3A3F48"/>
-                      </a:solidFill>
-                      <a:prstDash val="solid"/>
-                      <a:round/>
-                      <a:headEnd type="none" w="med" len="med"/>
-                      <a:tailEnd type="none" w="med" len="med"/>
-                    </a:lnR>
-                    <a:lnT w="9525" cap="flat" cmpd="sng" algn="ctr">
-                      <a:solidFill>
-                        <a:srgbClr val="3A3F48"/>
-                      </a:solidFill>
-                      <a:prstDash val="solid"/>
-                      <a:round/>
-                      <a:headEnd type="none" w="med" len="med"/>
-                      <a:tailEnd type="none" w="med" len="med"/>
-                    </a:lnT>
-                    <a:lnB w="9525" cap="flat" cmpd="sng" algn="ctr">
-                      <a:solidFill>
-                        <a:srgbClr val="3A3F48"/>
-                      </a:solidFill>
-                      <a:prstDash val="solid"/>
-                      <a:round/>
-                      <a:headEnd type="none" w="med" len="med"/>
-                      <a:tailEnd type="none" w="med" len="med"/>
-                    </a:lnB>
-                    <a:solidFill>
-                      <a:srgbClr val="16191E"/>
-                    </a:solidFill>
-                  </a:tcPr>
-                </a:tc>
-                <a:tc>
-                  <a:txBody>
-                    <a:bodyPr/>
-                    <a:lstStyle/>
-                    <a:p>
-                      <a:pPr algn="ctr" indent="0" marL="0">
-                        <a:buNone/>
-                      </a:pPr>
-                      <a:r>
-                        <a:rPr lang="en-US" sz="1400" b="1" dirty="0">
-                          <a:solidFill>
-                            <a:schemeClr val="tx2"/>
-                          </a:solidFill>
-                          <a:latin typeface="Malgun Gothic" pitchFamily="34" charset="0"/>
-                          <a:ea typeface="Malgun Gothic" pitchFamily="34" charset="-122"/>
-                          <a:cs typeface="Malgun Gothic" pitchFamily="34" charset="-120"/>
-                        </a:rPr>
-                        <a:t>근거</a:t>
-                      </a:r>
-                      <a:endParaRPr lang="en-US" sz="1400" dirty="0">
-                        <a:latin typeface="Malgun Gothic" charset="0"/>
-                        <a:ea typeface="Malgun Gothic" charset="0"/>
-                        <a:cs typeface="Malgun Gothic" charset="0"/>
-                      </a:endParaRPr>
-                    </a:p>
-                  </a:txBody>
-                  <a:tcPr marL="91440" marR="91440" marT="45720" marB="45720" anchor="ctr">
-                    <a:lnL w="9525" cap="flat" cmpd="sng" algn="ctr">
-                      <a:solidFill>
-                        <a:srgbClr val="3A3F48"/>
-                      </a:solidFill>
-                      <a:prstDash val="solid"/>
-                      <a:round/>
-                      <a:headEnd type="none" w="med" len="med"/>
-                      <a:tailEnd type="none" w="med" len="med"/>
-                    </a:lnL>
-                    <a:lnR w="9525" cap="flat" cmpd="sng" algn="ctr">
-                      <a:solidFill>
-                        <a:srgbClr val="3A3F48"/>
-                      </a:solidFill>
-                      <a:prstDash val="solid"/>
-                      <a:round/>
-                      <a:headEnd type="none" w="med" len="med"/>
-                      <a:tailEnd type="none" w="med" len="med"/>
-                    </a:lnR>
-                    <a:lnT w="9525" cap="flat" cmpd="sng" algn="ctr">
-                      <a:solidFill>
-                        <a:srgbClr val="3A3F48"/>
-                      </a:solidFill>
-                      <a:prstDash val="solid"/>
-                      <a:round/>
-                      <a:headEnd type="none" w="med" len="med"/>
-                      <a:tailEnd type="none" w="med" len="med"/>
-                    </a:lnT>
-                    <a:lnB w="9525" cap="flat" cmpd="sng" algn="ctr">
-                      <a:solidFill>
-                        <a:srgbClr val="3A3F48"/>
-                      </a:solidFill>
-                      <a:prstDash val="solid"/>
-                      <a:round/>
-                      <a:headEnd type="none" w="med" len="med"/>
-                      <a:tailEnd type="none" w="med" len="med"/>
-                    </a:lnB>
-                    <a:solidFill>
-                      <a:srgbClr val="16191E"/>
-                    </a:solidFill>
-                  </a:tcPr>
-                </a:tc>
-              </a:tr>
-              <a:tr h="457200">
-                <a:tc>
-                  <a:txBody>
-                    <a:bodyPr/>
-                    <a:lstStyle/>
-                    <a:p>
-                      <a:pPr algn="ctr" indent="0" marL="0">
-                        <a:buNone/>
-                      </a:pPr>
-                      <a:r>
-                        <a:rPr lang="en-US" sz="1400" dirty="0">
-                          <a:solidFill>
-                            <a:schemeClr val="tx2"/>
-                          </a:solidFill>
-                          <a:latin typeface="Malgun Gothic" pitchFamily="34" charset="0"/>
-                          <a:ea typeface="Malgun Gothic" pitchFamily="34" charset="-122"/>
-                          <a:cs typeface="Malgun Gothic" pitchFamily="34" charset="-120"/>
-                        </a:rPr>
-                        <a:t>2</a:t>
-                      </a:r>
-                      <a:endParaRPr lang="en-US" sz="1400" dirty="0">
-                        <a:latin typeface="Malgun Gothic" charset="0"/>
-                        <a:ea typeface="Malgun Gothic" charset="0"/>
-                        <a:cs typeface="Malgun Gothic" charset="0"/>
-                      </a:endParaRPr>
-                    </a:p>
-                  </a:txBody>
-                  <a:tcPr marL="91440" marR="91440" marT="45720" marB="45720" anchor="ctr">
-                    <a:lnL w="9525" cap="flat" cmpd="sng" algn="ctr">
-                      <a:solidFill>
-                        <a:srgbClr val="3A3F48"/>
-                      </a:solidFill>
-                      <a:prstDash val="solid"/>
-                      <a:round/>
-                      <a:headEnd type="none" w="med" len="med"/>
-                      <a:tailEnd type="none" w="med" len="med"/>
-                    </a:lnL>
-                    <a:lnR w="9525" cap="flat" cmpd="sng" algn="ctr">
-                      <a:solidFill>
-                        <a:srgbClr val="3A3F48"/>
-                      </a:solidFill>
-                      <a:prstDash val="solid"/>
-                      <a:round/>
-                      <a:headEnd type="none" w="med" len="med"/>
-                      <a:tailEnd type="none" w="med" len="med"/>
-                    </a:lnR>
-                    <a:lnT w="9525" cap="flat" cmpd="sng" algn="ctr">
-                      <a:solidFill>
-                        <a:srgbClr val="3A3F48"/>
-                      </a:solidFill>
-                      <a:prstDash val="solid"/>
-                      <a:round/>
-                      <a:headEnd type="none" w="med" len="med"/>
-                      <a:tailEnd type="none" w="med" len="med"/>
-                    </a:lnT>
-                    <a:lnB w="9525" cap="flat" cmpd="sng" algn="ctr">
-                      <a:solidFill>
-                        <a:srgbClr val="3A3F48"/>
-                      </a:solidFill>
-                      <a:prstDash val="solid"/>
-                      <a:round/>
-                      <a:headEnd type="none" w="med" len="med"/>
-                      <a:tailEnd type="none" w="med" len="med"/>
-                    </a:lnB>
-                    <a:solidFill>
-                      <a:srgbClr val="23272F"/>
-                    </a:solidFill>
-                  </a:tcPr>
-                </a:tc>
-                <a:tc>
-                  <a:txBody>
-                    <a:bodyPr/>
-                    <a:lstStyle/>
-                    <a:p>
-                      <a:pPr indent="0" marL="0">
-                        <a:buNone/>
-                      </a:pPr>
-                      <a:r>
-                        <a:rPr lang="en-US" sz="1400" b="1" dirty="0">
-                          <a:solidFill>
-                            <a:schemeClr val="tx1"/>
-                          </a:solidFill>
-                          <a:latin typeface="Malgun Gothic" pitchFamily="34" charset="0"/>
-                          <a:ea typeface="Malgun Gothic" pitchFamily="34" charset="-122"/>
-                          <a:cs typeface="Malgun Gothic" pitchFamily="34" charset="-120"/>
-                        </a:rPr>
-                        <a:t>Scratch 식별 어려움</a:t>
-                      </a:r>
-                      <a:endParaRPr lang="en-US" sz="1400" dirty="0">
-                        <a:latin typeface="Malgun Gothic" charset="0"/>
-                        <a:ea typeface="Malgun Gothic" charset="0"/>
-                        <a:cs typeface="Malgun Gothic" charset="0"/>
-                      </a:endParaRPr>
-                    </a:p>
-                  </a:txBody>
-                  <a:tcPr marL="91440" marR="91440" marT="45720" marB="45720" anchor="ctr">
-                    <a:lnL w="9525" cap="flat" cmpd="sng" algn="ctr">
-                      <a:solidFill>
-                        <a:srgbClr val="3A3F48"/>
-                      </a:solidFill>
-                      <a:prstDash val="solid"/>
-                      <a:round/>
-                      <a:headEnd type="none" w="med" len="med"/>
-                      <a:tailEnd type="none" w="med" len="med"/>
-                    </a:lnL>
-                    <a:lnR w="9525" cap="flat" cmpd="sng" algn="ctr">
-                      <a:solidFill>
-                        <a:srgbClr val="3A3F48"/>
-                      </a:solidFill>
-                      <a:prstDash val="solid"/>
-                      <a:round/>
-                      <a:headEnd type="none" w="med" len="med"/>
-                      <a:tailEnd type="none" w="med" len="med"/>
-                    </a:lnR>
-                    <a:lnT w="9525" cap="flat" cmpd="sng" algn="ctr">
-                      <a:solidFill>
-                        <a:srgbClr val="3A3F48"/>
-                      </a:solidFill>
-                      <a:prstDash val="solid"/>
-                      <a:round/>
-                      <a:headEnd type="none" w="med" len="med"/>
-                      <a:tailEnd type="none" w="med" len="med"/>
-                    </a:lnT>
-                    <a:lnB w="9525" cap="flat" cmpd="sng" algn="ctr">
-                      <a:solidFill>
-                        <a:srgbClr val="3A3F48"/>
-                      </a:solidFill>
-                      <a:prstDash val="solid"/>
-                      <a:round/>
-                      <a:headEnd type="none" w="med" len="med"/>
-                      <a:tailEnd type="none" w="med" len="med"/>
-                    </a:lnB>
-                    <a:solidFill>
-                      <a:srgbClr val="23272F"/>
-                    </a:solidFill>
-                  </a:tcPr>
-                </a:tc>
-                <a:tc>
-                  <a:txBody>
-                    <a:bodyPr/>
-                    <a:lstStyle/>
-                    <a:p>
-                      <a:pPr indent="0" marL="0">
-                        <a:buNone/>
-                      </a:pPr>
-                      <a:r>
-                        <a:rPr lang="en-US" sz="1400" dirty="0">
-                          <a:solidFill>
-                            <a:schemeClr val="tx1"/>
-                          </a:solidFill>
-                          <a:latin typeface="Malgun Gothic" pitchFamily="34" charset="0"/>
-                          <a:ea typeface="Malgun Gothic" pitchFamily="34" charset="-122"/>
-                          <a:cs typeface="Malgun Gothic" pitchFamily="34" charset="-120"/>
-                        </a:rPr>
-                        <a:t>반사·나무결과 비슷한 가는 선. 배경 오검출 16건 중 13건이 scratch</a:t>
-                      </a:r>
-                      <a:endParaRPr lang="en-US" sz="1400" dirty="0">
-                        <a:latin typeface="Malgun Gothic" charset="0"/>
-                        <a:ea typeface="Malgun Gothic" charset="0"/>
-                        <a:cs typeface="Malgun Gothic" charset="0"/>
-                      </a:endParaRPr>
-                    </a:p>
-                  </a:txBody>
-                  <a:tcPr marL="91440" marR="91440" marT="45720" marB="45720" anchor="ctr">
-                    <a:lnL w="9525" cap="flat" cmpd="sng" algn="ctr">
-                      <a:solidFill>
-                        <a:srgbClr val="3A3F48"/>
-                      </a:solidFill>
-                      <a:prstDash val="solid"/>
-                      <a:round/>
-                      <a:headEnd type="none" w="med" len="med"/>
-                      <a:tailEnd type="none" w="med" len="med"/>
-                    </a:lnL>
-                    <a:lnR w="9525" cap="flat" cmpd="sng" algn="ctr">
-                      <a:solidFill>
-                        <a:srgbClr val="3A3F48"/>
-                      </a:solidFill>
-                      <a:prstDash val="solid"/>
-                      <a:round/>
-                      <a:headEnd type="none" w="med" len="med"/>
-                      <a:tailEnd type="none" w="med" len="med"/>
-                    </a:lnR>
-                    <a:lnT w="9525" cap="flat" cmpd="sng" algn="ctr">
-                      <a:solidFill>
-                        <a:srgbClr val="3A3F48"/>
-                      </a:solidFill>
-                      <a:prstDash val="solid"/>
-                      <a:round/>
-                      <a:headEnd type="none" w="med" len="med"/>
-                      <a:tailEnd type="none" w="med" len="med"/>
-                    </a:lnT>
-                    <a:lnB w="9525" cap="flat" cmpd="sng" algn="ctr">
-                      <a:solidFill>
-                        <a:srgbClr val="3A3F48"/>
-                      </a:solidFill>
-                      <a:prstDash val="solid"/>
-                      <a:round/>
-                      <a:headEnd type="none" w="med" len="med"/>
-                      <a:tailEnd type="none" w="med" len="med"/>
-                    </a:lnB>
-                    <a:solidFill>
-                      <a:srgbClr val="23272F"/>
-                    </a:solidFill>
-                  </a:tcPr>
-                </a:tc>
-                <a:tc>
-                  <a:txBody>
-                    <a:bodyPr/>
-                    <a:lstStyle/>
-                    <a:p>
-                      <a:pPr algn="ctr" indent="0" marL="0">
-                        <a:buNone/>
-                      </a:pPr>
-                      <a:r>
-                        <a:rPr lang="en-US" sz="1400" b="1" dirty="0">
-                          <a:solidFill>
-                            <a:schemeClr val="accent6"/>
-                          </a:solidFill>
-                          <a:latin typeface="Malgun Gothic" pitchFamily="34" charset="0"/>
-                          <a:ea typeface="Malgun Gothic" pitchFamily="34" charset="-122"/>
-                          <a:cs typeface="Malgun Gothic" pitchFamily="34" charset="-120"/>
-                        </a:rPr>
-                        <a:t>확인</a:t>
-                      </a:r>
-                      <a:endParaRPr lang="en-US" sz="1400" dirty="0">
-                        <a:latin typeface="Malgun Gothic" charset="0"/>
-                        <a:ea typeface="Malgun Gothic" charset="0"/>
-                        <a:cs typeface="Malgun Gothic" charset="0"/>
-                      </a:endParaRPr>
-                    </a:p>
-                  </a:txBody>
-                  <a:tcPr marL="91440" marR="91440" marT="45720" marB="45720" anchor="ctr">
-                    <a:lnL w="9525" cap="flat" cmpd="sng" algn="ctr">
-                      <a:solidFill>
-                        <a:srgbClr val="3A3F48"/>
-                      </a:solidFill>
-                      <a:prstDash val="solid"/>
-                      <a:round/>
-                      <a:headEnd type="none" w="med" len="med"/>
-                      <a:tailEnd type="none" w="med" len="med"/>
-                    </a:lnL>
-                    <a:lnR w="9525" cap="flat" cmpd="sng" algn="ctr">
-                      <a:solidFill>
-                        <a:srgbClr val="3A3F48"/>
-                      </a:solidFill>
-                      <a:prstDash val="solid"/>
-                      <a:round/>
-                      <a:headEnd type="none" w="med" len="med"/>
-                      <a:tailEnd type="none" w="med" len="med"/>
-                    </a:lnR>
-                    <a:lnT w="9525" cap="flat" cmpd="sng" algn="ctr">
-                      <a:solidFill>
-                        <a:srgbClr val="3A3F48"/>
-                      </a:solidFill>
-                      <a:prstDash val="solid"/>
-                      <a:round/>
-                      <a:headEnd type="none" w="med" len="med"/>
-                      <a:tailEnd type="none" w="med" len="med"/>
-                    </a:lnT>
-                    <a:lnB w="9525" cap="flat" cmpd="sng" algn="ctr">
-                      <a:solidFill>
-                        <a:srgbClr val="3A3F48"/>
-                      </a:solidFill>
-                      <a:prstDash val="solid"/>
-                      <a:round/>
-                      <a:headEnd type="none" w="med" len="med"/>
-                      <a:tailEnd type="none" w="med" len="med"/>
-                    </a:lnB>
-                    <a:solidFill>
-                      <a:srgbClr val="23272F"/>
-                    </a:solidFill>
-                  </a:tcPr>
-                </a:tc>
-              </a:tr>
-              <a:tr h="457200">
-                <a:tc>
-                  <a:txBody>
-                    <a:bodyPr/>
-                    <a:lstStyle/>
-                    <a:p>
-                      <a:pPr algn="ctr" indent="0" marL="0">
-                        <a:buNone/>
-                      </a:pPr>
-                      <a:r>
-                        <a:rPr lang="en-US" sz="1400" dirty="0">
-                          <a:solidFill>
-                            <a:schemeClr val="tx2"/>
-                          </a:solidFill>
-                          <a:latin typeface="Malgun Gothic" pitchFamily="34" charset="0"/>
-                          <a:ea typeface="Malgun Gothic" pitchFamily="34" charset="-122"/>
-                          <a:cs typeface="Malgun Gothic" pitchFamily="34" charset="-120"/>
-                        </a:rPr>
-                        <a:t>4</a:t>
-                      </a:r>
-                      <a:endParaRPr lang="en-US" sz="1400" dirty="0">
-                        <a:latin typeface="Malgun Gothic" charset="0"/>
-                        <a:ea typeface="Malgun Gothic" charset="0"/>
-                        <a:cs typeface="Malgun Gothic" charset="0"/>
-                      </a:endParaRPr>
-                    </a:p>
-                  </a:txBody>
-                  <a:tcPr marL="91440" marR="91440" marT="45720" marB="45720" anchor="ctr">
-                    <a:lnL w="9525" cap="flat" cmpd="sng" algn="ctr">
-                      <a:solidFill>
-                        <a:srgbClr val="3A3F48"/>
-                      </a:solidFill>
-                      <a:prstDash val="solid"/>
-                      <a:round/>
-                      <a:headEnd type="none" w="med" len="med"/>
-                      <a:tailEnd type="none" w="med" len="med"/>
-                    </a:lnL>
-                    <a:lnR w="9525" cap="flat" cmpd="sng" algn="ctr">
-                      <a:solidFill>
-                        <a:srgbClr val="3A3F48"/>
-                      </a:solidFill>
-                      <a:prstDash val="solid"/>
-                      <a:round/>
-                      <a:headEnd type="none" w="med" len="med"/>
-                      <a:tailEnd type="none" w="med" len="med"/>
-                    </a:lnR>
-                    <a:lnT w="9525" cap="flat" cmpd="sng" algn="ctr">
-                      <a:solidFill>
-                        <a:srgbClr val="3A3F48"/>
-                      </a:solidFill>
-                      <a:prstDash val="solid"/>
-                      <a:round/>
-                      <a:headEnd type="none" w="med" len="med"/>
-                      <a:tailEnd type="none" w="med" len="med"/>
-                    </a:lnT>
-                    <a:lnB w="9525" cap="flat" cmpd="sng" algn="ctr">
-                      <a:solidFill>
-                        <a:srgbClr val="3A3F48"/>
-                      </a:solidFill>
-                      <a:prstDash val="solid"/>
-                      <a:round/>
-                      <a:headEnd type="none" w="med" len="med"/>
-                      <a:tailEnd type="none" w="med" len="med"/>
-                    </a:lnB>
-                    <a:solidFill>
-                      <a:srgbClr val="23272F"/>
-                    </a:solidFill>
-                  </a:tcPr>
-                </a:tc>
-                <a:tc>
-                  <a:txBody>
-                    <a:bodyPr/>
-                    <a:lstStyle/>
-                    <a:p>
-                      <a:pPr indent="0" marL="0">
-                        <a:buNone/>
-                      </a:pPr>
-                      <a:r>
-                        <a:rPr lang="en-US" sz="1400" b="1" dirty="0">
-                          <a:solidFill>
-                            <a:schemeClr val="tx1"/>
-                          </a:solidFill>
-                          <a:latin typeface="Malgun Gothic" pitchFamily="34" charset="0"/>
-                          <a:ea typeface="Malgun Gothic" pitchFamily="34" charset="-122"/>
-                          <a:cs typeface="Malgun Gothic" pitchFamily="34" charset="-120"/>
-                        </a:rPr>
-                        <a:t>과대평가 수치 (93%)</a:t>
-                      </a:r>
-                      <a:endParaRPr lang="en-US" sz="1400" dirty="0">
-                        <a:latin typeface="Malgun Gothic" charset="0"/>
-                        <a:ea typeface="Malgun Gothic" charset="0"/>
-                        <a:cs typeface="Malgun Gothic" charset="0"/>
-                      </a:endParaRPr>
-                    </a:p>
-                  </a:txBody>
-                  <a:tcPr marL="91440" marR="91440" marT="45720" marB="45720" anchor="ctr">
-                    <a:lnL w="9525" cap="flat" cmpd="sng" algn="ctr">
-                      <a:solidFill>
-                        <a:srgbClr val="3A3F48"/>
-                      </a:solidFill>
-                      <a:prstDash val="solid"/>
-                      <a:round/>
-                      <a:headEnd type="none" w="med" len="med"/>
-                      <a:tailEnd type="none" w="med" len="med"/>
-                    </a:lnL>
-                    <a:lnR w="9525" cap="flat" cmpd="sng" algn="ctr">
-                      <a:solidFill>
-                        <a:srgbClr val="3A3F48"/>
-                      </a:solidFill>
-                      <a:prstDash val="solid"/>
-                      <a:round/>
-                      <a:headEnd type="none" w="med" len="med"/>
-                      <a:tailEnd type="none" w="med" len="med"/>
-                    </a:lnR>
-                    <a:lnT w="9525" cap="flat" cmpd="sng" algn="ctr">
-                      <a:solidFill>
-                        <a:srgbClr val="3A3F48"/>
-                      </a:solidFill>
-                      <a:prstDash val="solid"/>
-                      <a:round/>
-                      <a:headEnd type="none" w="med" len="med"/>
-                      <a:tailEnd type="none" w="med" len="med"/>
-                    </a:lnT>
-                    <a:lnB w="9525" cap="flat" cmpd="sng" algn="ctr">
-                      <a:solidFill>
-                        <a:srgbClr val="3A3F48"/>
-                      </a:solidFill>
-                      <a:prstDash val="solid"/>
-                      <a:round/>
-                      <a:headEnd type="none" w="med" len="med"/>
-                      <a:tailEnd type="none" w="med" len="med"/>
-                    </a:lnB>
-                    <a:solidFill>
-                      <a:srgbClr val="23272F"/>
-                    </a:solidFill>
-                  </a:tcPr>
-                </a:tc>
-                <a:tc>
-                  <a:txBody>
-                    <a:bodyPr/>
-                    <a:lstStyle/>
-                    <a:p>
-                      <a:pPr indent="0" marL="0">
-                        <a:buNone/>
-                      </a:pPr>
-                      <a:r>
-                        <a:rPr lang="en-US" sz="1400" dirty="0">
-                          <a:solidFill>
-                            <a:schemeClr val="tx1"/>
-                          </a:solidFill>
-                          <a:latin typeface="Malgun Gothic" pitchFamily="34" charset="0"/>
-                          <a:ea typeface="Malgun Gothic" pitchFamily="34" charset="-122"/>
-                          <a:cs typeface="Malgun Gothic" pitchFamily="34" charset="-120"/>
-                        </a:rPr>
-                        <a:t>테스트 사진도 학습에 포함. 복사본 22장, 같은 촬영 세션</a:t>
-                      </a:r>
-                      <a:endParaRPr lang="en-US" sz="1400" dirty="0">
-                        <a:latin typeface="Malgun Gothic" charset="0"/>
-                        <a:ea typeface="Malgun Gothic" charset="0"/>
-                        <a:cs typeface="Malgun Gothic" charset="0"/>
-                      </a:endParaRPr>
-                    </a:p>
-                  </a:txBody>
-                  <a:tcPr marL="91440" marR="91440" marT="45720" marB="45720" anchor="ctr">
-                    <a:lnL w="9525" cap="flat" cmpd="sng" algn="ctr">
-                      <a:solidFill>
-                        <a:srgbClr val="3A3F48"/>
-                      </a:solidFill>
-                      <a:prstDash val="solid"/>
-                      <a:round/>
-                      <a:headEnd type="none" w="med" len="med"/>
-                      <a:tailEnd type="none" w="med" len="med"/>
-                    </a:lnL>
-                    <a:lnR w="9525" cap="flat" cmpd="sng" algn="ctr">
-                      <a:solidFill>
-                        <a:srgbClr val="3A3F48"/>
-                      </a:solidFill>
-                      <a:prstDash val="solid"/>
-                      <a:round/>
-                      <a:headEnd type="none" w="med" len="med"/>
-                      <a:tailEnd type="none" w="med" len="med"/>
-                    </a:lnR>
-                    <a:lnT w="9525" cap="flat" cmpd="sng" algn="ctr">
-                      <a:solidFill>
-                        <a:srgbClr val="3A3F48"/>
-                      </a:solidFill>
-                      <a:prstDash val="solid"/>
-                      <a:round/>
-                      <a:headEnd type="none" w="med" len="med"/>
-                      <a:tailEnd type="none" w="med" len="med"/>
-                    </a:lnT>
-                    <a:lnB w="9525" cap="flat" cmpd="sng" algn="ctr">
-                      <a:solidFill>
-                        <a:srgbClr val="3A3F48"/>
-                      </a:solidFill>
-                      <a:prstDash val="solid"/>
-                      <a:round/>
-                      <a:headEnd type="none" w="med" len="med"/>
-                      <a:tailEnd type="none" w="med" len="med"/>
-                    </a:lnB>
-                    <a:solidFill>
-                      <a:srgbClr val="23272F"/>
-                    </a:solidFill>
-                  </a:tcPr>
-                </a:tc>
-                <a:tc>
-                  <a:txBody>
-                    <a:bodyPr/>
-                    <a:lstStyle/>
-                    <a:p>
-                      <a:pPr algn="ctr" indent="0" marL="0">
-                        <a:buNone/>
-                      </a:pPr>
-                      <a:r>
-                        <a:rPr lang="en-US" sz="1400" b="1" dirty="0">
-                          <a:solidFill>
-                            <a:schemeClr val="accent6"/>
-                          </a:solidFill>
-                          <a:latin typeface="Malgun Gothic" pitchFamily="34" charset="0"/>
-                          <a:ea typeface="Malgun Gothic" pitchFamily="34" charset="-122"/>
-                          <a:cs typeface="Malgun Gothic" pitchFamily="34" charset="-120"/>
-                        </a:rPr>
-                        <a:t>확인</a:t>
-                      </a:r>
-                      <a:endParaRPr lang="en-US" sz="1400" dirty="0">
-                        <a:latin typeface="Malgun Gothic" charset="0"/>
-                        <a:ea typeface="Malgun Gothic" charset="0"/>
-                        <a:cs typeface="Malgun Gothic" charset="0"/>
-                      </a:endParaRPr>
-                    </a:p>
-                  </a:txBody>
-                  <a:tcPr marL="91440" marR="91440" marT="45720" marB="45720" anchor="ctr">
-                    <a:lnL w="9525" cap="flat" cmpd="sng" algn="ctr">
-                      <a:solidFill>
-                        <a:srgbClr val="3A3F48"/>
-                      </a:solidFill>
-                      <a:prstDash val="solid"/>
-                      <a:round/>
-                      <a:headEnd type="none" w="med" len="med"/>
-                      <a:tailEnd type="none" w="med" len="med"/>
-                    </a:lnL>
-                    <a:lnR w="9525" cap="flat" cmpd="sng" algn="ctr">
-                      <a:solidFill>
-                        <a:srgbClr val="3A3F48"/>
-                      </a:solidFill>
-                      <a:prstDash val="solid"/>
-                      <a:round/>
-                      <a:headEnd type="none" w="med" len="med"/>
-                      <a:tailEnd type="none" w="med" len="med"/>
-                    </a:lnR>
-                    <a:lnT w="9525" cap="flat" cmpd="sng" algn="ctr">
-                      <a:solidFill>
-                        <a:srgbClr val="3A3F48"/>
-                      </a:solidFill>
-                      <a:prstDash val="solid"/>
-                      <a:round/>
-                      <a:headEnd type="none" w="med" len="med"/>
-                      <a:tailEnd type="none" w="med" len="med"/>
-                    </a:lnT>
-                    <a:lnB w="9525" cap="flat" cmpd="sng" algn="ctr">
-                      <a:solidFill>
-                        <a:srgbClr val="3A3F48"/>
-                      </a:solidFill>
-                      <a:prstDash val="solid"/>
-                      <a:round/>
-                      <a:headEnd type="none" w="med" len="med"/>
-                      <a:tailEnd type="none" w="med" len="med"/>
-                    </a:lnB>
-                    <a:solidFill>
-                      <a:srgbClr val="23272F"/>
-                    </a:solidFill>
-                  </a:tcPr>
-                </a:tc>
-              </a:tr>
-              <a:tr h="457200">
-                <a:tc>
-                  <a:txBody>
-                    <a:bodyPr/>
-                    <a:lstStyle/>
-                    <a:p>
-                      <a:pPr algn="ctr" indent="0" marL="0">
-                        <a:buNone/>
-                      </a:pPr>
-                      <a:r>
-                        <a:rPr lang="en-US" sz="1400" dirty="0">
-                          <a:solidFill>
-                            <a:schemeClr val="tx2"/>
-                          </a:solidFill>
-                          <a:latin typeface="Malgun Gothic" pitchFamily="34" charset="0"/>
-                          <a:ea typeface="Malgun Gothic" pitchFamily="34" charset="-122"/>
-                          <a:cs typeface="Malgun Gothic" pitchFamily="34" charset="-120"/>
-                        </a:rPr>
-                        <a:t>5</a:t>
-                      </a:r>
-                      <a:endParaRPr lang="en-US" sz="1400" dirty="0">
-                        <a:latin typeface="Malgun Gothic" charset="0"/>
-                        <a:ea typeface="Malgun Gothic" charset="0"/>
-                        <a:cs typeface="Malgun Gothic" charset="0"/>
-                      </a:endParaRPr>
-                    </a:p>
-                  </a:txBody>
-                  <a:tcPr marL="91440" marR="91440" marT="45720" marB="45720" anchor="ctr">
-                    <a:lnL w="9525" cap="flat" cmpd="sng" algn="ctr">
-                      <a:solidFill>
-                        <a:srgbClr val="3A3F48"/>
-                      </a:solidFill>
-                      <a:prstDash val="solid"/>
-                      <a:round/>
-                      <a:headEnd type="none" w="med" len="med"/>
-                      <a:tailEnd type="none" w="med" len="med"/>
-                    </a:lnL>
-                    <a:lnR w="9525" cap="flat" cmpd="sng" algn="ctr">
-                      <a:solidFill>
-                        <a:srgbClr val="3A3F48"/>
-                      </a:solidFill>
-                      <a:prstDash val="solid"/>
-                      <a:round/>
-                      <a:headEnd type="none" w="med" len="med"/>
-                      <a:tailEnd type="none" w="med" len="med"/>
-                    </a:lnR>
-                    <a:lnT w="9525" cap="flat" cmpd="sng" algn="ctr">
-                      <a:solidFill>
-                        <a:srgbClr val="3A3F48"/>
-                      </a:solidFill>
-                      <a:prstDash val="solid"/>
-                      <a:round/>
-                      <a:headEnd type="none" w="med" len="med"/>
-                      <a:tailEnd type="none" w="med" len="med"/>
-                    </a:lnT>
-                    <a:lnB w="9525" cap="flat" cmpd="sng" algn="ctr">
-                      <a:solidFill>
-                        <a:srgbClr val="3A3F48"/>
-                      </a:solidFill>
-                      <a:prstDash val="solid"/>
-                      <a:round/>
-                      <a:headEnd type="none" w="med" len="med"/>
-                      <a:tailEnd type="none" w="med" len="med"/>
-                    </a:lnB>
-                    <a:solidFill>
-                      <a:srgbClr val="23272F"/>
-                    </a:solidFill>
-                  </a:tcPr>
-                </a:tc>
-                <a:tc>
-                  <a:txBody>
-                    <a:bodyPr/>
-                    <a:lstStyle/>
-                    <a:p>
-                      <a:pPr indent="0" marL="0">
-                        <a:buNone/>
-                      </a:pPr>
-                      <a:r>
-                        <a:rPr lang="en-US" sz="1400" b="1" dirty="0">
-                          <a:solidFill>
-                            <a:schemeClr val="tx1"/>
-                          </a:solidFill>
-                          <a:latin typeface="Malgun Gothic" pitchFamily="34" charset="0"/>
-                          <a:ea typeface="Malgun Gothic" pitchFamily="34" charset="-122"/>
-                          <a:cs typeface="Malgun Gothic" pitchFamily="34" charset="-120"/>
-                        </a:rPr>
-                        <a:t>낙관적인 Geti score</a:t>
-                      </a:r>
-                      <a:endParaRPr lang="en-US" sz="1400" dirty="0">
-                        <a:latin typeface="Malgun Gothic" charset="0"/>
-                        <a:ea typeface="Malgun Gothic" charset="0"/>
-                        <a:cs typeface="Malgun Gothic" charset="0"/>
-                      </a:endParaRPr>
-                    </a:p>
-                  </a:txBody>
-                  <a:tcPr marL="91440" marR="91440" marT="45720" marB="45720" anchor="ctr">
-                    <a:lnL w="9525" cap="flat" cmpd="sng" algn="ctr">
-                      <a:solidFill>
-                        <a:srgbClr val="3A3F48"/>
-                      </a:solidFill>
-                      <a:prstDash val="solid"/>
-                      <a:round/>
-                      <a:headEnd type="none" w="med" len="med"/>
-                      <a:tailEnd type="none" w="med" len="med"/>
-                    </a:lnL>
-                    <a:lnR w="9525" cap="flat" cmpd="sng" algn="ctr">
-                      <a:solidFill>
-                        <a:srgbClr val="3A3F48"/>
-                      </a:solidFill>
-                      <a:prstDash val="solid"/>
-                      <a:round/>
-                      <a:headEnd type="none" w="med" len="med"/>
-                      <a:tailEnd type="none" w="med" len="med"/>
-                    </a:lnR>
-                    <a:lnT w="9525" cap="flat" cmpd="sng" algn="ctr">
-                      <a:solidFill>
-                        <a:srgbClr val="3A3F48"/>
-                      </a:solidFill>
-                      <a:prstDash val="solid"/>
-                      <a:round/>
-                      <a:headEnd type="none" w="med" len="med"/>
-                      <a:tailEnd type="none" w="med" len="med"/>
-                    </a:lnT>
-                    <a:lnB w="9525" cap="flat" cmpd="sng" algn="ctr">
-                      <a:solidFill>
-                        <a:srgbClr val="3A3F48"/>
-                      </a:solidFill>
-                      <a:prstDash val="solid"/>
-                      <a:round/>
-                      <a:headEnd type="none" w="med" len="med"/>
-                      <a:tailEnd type="none" w="med" len="med"/>
-                    </a:lnB>
-                    <a:solidFill>
-                      <a:srgbClr val="23272F"/>
-                    </a:solidFill>
-                  </a:tcPr>
-                </a:tc>
-                <a:tc>
-                  <a:txBody>
-                    <a:bodyPr/>
-                    <a:lstStyle/>
-                    <a:p>
-                      <a:pPr indent="0" marL="0">
-                        <a:buNone/>
-                      </a:pPr>
-                      <a:r>
-                        <a:rPr lang="en-US" sz="1400" dirty="0">
-                          <a:solidFill>
-                            <a:schemeClr val="tx1"/>
-                          </a:solidFill>
-                          <a:latin typeface="Malgun Gothic" pitchFamily="34" charset="0"/>
-                          <a:ea typeface="Malgun Gothic" pitchFamily="34" charset="-122"/>
-                          <a:cs typeface="Malgun Gothic" pitchFamily="34" charset="-120"/>
-                        </a:rPr>
-                        <a:t>원본 1장당 증강본 3장이 Geti 학습·테스트에 나뉘어 들어갔을 가능성</a:t>
-                      </a:r>
-                      <a:endParaRPr lang="en-US" sz="1400" dirty="0">
-                        <a:latin typeface="Malgun Gothic" charset="0"/>
-                        <a:ea typeface="Malgun Gothic" charset="0"/>
-                        <a:cs typeface="Malgun Gothic" charset="0"/>
-                      </a:endParaRPr>
-                    </a:p>
-                  </a:txBody>
-                  <a:tcPr marL="91440" marR="91440" marT="45720" marB="45720" anchor="ctr">
-                    <a:lnL w="9525" cap="flat" cmpd="sng" algn="ctr">
-                      <a:solidFill>
-                        <a:srgbClr val="3A3F48"/>
-                      </a:solidFill>
-                      <a:prstDash val="solid"/>
-                      <a:round/>
-                      <a:headEnd type="none" w="med" len="med"/>
-                      <a:tailEnd type="none" w="med" len="med"/>
-                    </a:lnL>
-                    <a:lnR w="9525" cap="flat" cmpd="sng" algn="ctr">
-                      <a:solidFill>
-                        <a:srgbClr val="3A3F48"/>
-                      </a:solidFill>
-                      <a:prstDash val="solid"/>
-                      <a:round/>
-                      <a:headEnd type="none" w="med" len="med"/>
-                      <a:tailEnd type="none" w="med" len="med"/>
-                    </a:lnR>
-                    <a:lnT w="9525" cap="flat" cmpd="sng" algn="ctr">
-                      <a:solidFill>
-                        <a:srgbClr val="3A3F48"/>
-                      </a:solidFill>
-                      <a:prstDash val="solid"/>
-                      <a:round/>
-                      <a:headEnd type="none" w="med" len="med"/>
-                      <a:tailEnd type="none" w="med" len="med"/>
-                    </a:lnT>
-                    <a:lnB w="9525" cap="flat" cmpd="sng" algn="ctr">
-                      <a:solidFill>
-                        <a:srgbClr val="3A3F48"/>
-                      </a:solidFill>
-                      <a:prstDash val="solid"/>
-                      <a:round/>
-                      <a:headEnd type="none" w="med" len="med"/>
-                      <a:tailEnd type="none" w="med" len="med"/>
-                    </a:lnB>
-                    <a:solidFill>
-                      <a:srgbClr val="23272F"/>
-                    </a:solidFill>
-                  </a:tcPr>
-                </a:tc>
-                <a:tc>
-                  <a:txBody>
-                    <a:bodyPr/>
-                    <a:lstStyle/>
-                    <a:p>
-                      <a:pPr algn="ctr" indent="0" marL="0">
-                        <a:buNone/>
-                      </a:pPr>
-                      <a:r>
-                        <a:rPr lang="en-US" sz="1400" b="1" dirty="0">
-                          <a:solidFill>
-                            <a:schemeClr val="accent3"/>
-                          </a:solidFill>
-                          <a:latin typeface="Malgun Gothic" pitchFamily="34" charset="0"/>
-                          <a:ea typeface="Malgun Gothic" pitchFamily="34" charset="-122"/>
-                          <a:cs typeface="Malgun Gothic" pitchFamily="34" charset="-120"/>
-                        </a:rPr>
-                        <a:t>추정</a:t>
-                      </a:r>
-                      <a:endParaRPr lang="en-US" sz="1400" dirty="0">
-                        <a:latin typeface="Malgun Gothic" charset="0"/>
-                        <a:ea typeface="Malgun Gothic" charset="0"/>
-                        <a:cs typeface="Malgun Gothic" charset="0"/>
-                      </a:endParaRPr>
-                    </a:p>
-                  </a:txBody>
-                  <a:tcPr marL="91440" marR="91440" marT="45720" marB="45720" anchor="ctr">
-                    <a:lnL w="9525" cap="flat" cmpd="sng" algn="ctr">
-                      <a:solidFill>
-                        <a:srgbClr val="3A3F48"/>
-                      </a:solidFill>
-                      <a:prstDash val="solid"/>
-                      <a:round/>
-                      <a:headEnd type="none" w="med" len="med"/>
-                      <a:tailEnd type="none" w="med" len="med"/>
-                    </a:lnL>
-                    <a:lnR w="9525" cap="flat" cmpd="sng" algn="ctr">
-                      <a:solidFill>
-                        <a:srgbClr val="3A3F48"/>
-                      </a:solidFill>
-                      <a:prstDash val="solid"/>
-                      <a:round/>
-                      <a:headEnd type="none" w="med" len="med"/>
-                      <a:tailEnd type="none" w="med" len="med"/>
-                    </a:lnR>
-                    <a:lnT w="9525" cap="flat" cmpd="sng" algn="ctr">
-                      <a:solidFill>
-                        <a:srgbClr val="3A3F48"/>
-                      </a:solidFill>
-                      <a:prstDash val="solid"/>
-                      <a:round/>
-                      <a:headEnd type="none" w="med" len="med"/>
-                      <a:tailEnd type="none" w="med" len="med"/>
-                    </a:lnT>
-                    <a:lnB w="9525" cap="flat" cmpd="sng" algn="ctr">
-                      <a:solidFill>
-                        <a:srgbClr val="3A3F48"/>
-                      </a:solidFill>
-                      <a:prstDash val="solid"/>
-                      <a:round/>
-                      <a:headEnd type="none" w="med" len="med"/>
-                      <a:tailEnd type="none" w="med" len="med"/>
-                    </a:lnB>
-                    <a:solidFill>
-                      <a:srgbClr val="23272F"/>
-                    </a:solidFill>
-                  </a:tcPr>
-                </a:tc>
-              </a:tr>
-              <a:tr h="457200">
-                <a:tc>
-                  <a:txBody>
-                    <a:bodyPr/>
-                    <a:lstStyle/>
-                    <a:p>
-                      <a:pPr algn="ctr" indent="0" marL="0">
-                        <a:buNone/>
-                      </a:pPr>
-                      <a:r>
-                        <a:rPr lang="en-US" sz="1400" dirty="0">
-                          <a:solidFill>
-                            <a:schemeClr val="tx2"/>
-                          </a:solidFill>
-                          <a:latin typeface="Malgun Gothic" pitchFamily="34" charset="0"/>
-                          <a:ea typeface="Malgun Gothic" pitchFamily="34" charset="-122"/>
-                          <a:cs typeface="Malgun Gothic" pitchFamily="34" charset="-120"/>
-                        </a:rPr>
-                        <a:t>5</a:t>
-                      </a:r>
-                      <a:endParaRPr lang="en-US" sz="1400" dirty="0">
-                        <a:latin typeface="Malgun Gothic" charset="0"/>
-                        <a:ea typeface="Malgun Gothic" charset="0"/>
-                        <a:cs typeface="Malgun Gothic" charset="0"/>
-                      </a:endParaRPr>
-                    </a:p>
-                  </a:txBody>
-                  <a:tcPr marL="91440" marR="91440" marT="45720" marB="45720" anchor="ctr">
-                    <a:lnL w="9525" cap="flat" cmpd="sng" algn="ctr">
-                      <a:solidFill>
-                        <a:srgbClr val="3A3F48"/>
-                      </a:solidFill>
-                      <a:prstDash val="solid"/>
-                      <a:round/>
-                      <a:headEnd type="none" w="med" len="med"/>
-                      <a:tailEnd type="none" w="med" len="med"/>
-                    </a:lnL>
-                    <a:lnR w="9525" cap="flat" cmpd="sng" algn="ctr">
-                      <a:solidFill>
-                        <a:srgbClr val="3A3F48"/>
-                      </a:solidFill>
-                      <a:prstDash val="solid"/>
-                      <a:round/>
-                      <a:headEnd type="none" w="med" len="med"/>
-                      <a:tailEnd type="none" w="med" len="med"/>
-                    </a:lnR>
-                    <a:lnT w="9525" cap="flat" cmpd="sng" algn="ctr">
-                      <a:solidFill>
-                        <a:srgbClr val="3A3F48"/>
-                      </a:solidFill>
-                      <a:prstDash val="solid"/>
-                      <a:round/>
-                      <a:headEnd type="none" w="med" len="med"/>
-                      <a:tailEnd type="none" w="med" len="med"/>
-                    </a:lnT>
-                    <a:lnB w="9525" cap="flat" cmpd="sng" algn="ctr">
-                      <a:solidFill>
-                        <a:srgbClr val="3A3F48"/>
-                      </a:solidFill>
-                      <a:prstDash val="solid"/>
-                      <a:round/>
-                      <a:headEnd type="none" w="med" len="med"/>
-                      <a:tailEnd type="none" w="med" len="med"/>
-                    </a:lnB>
-                    <a:solidFill>
-                      <a:srgbClr val="23272F"/>
-                    </a:solidFill>
-                  </a:tcPr>
-                </a:tc>
-                <a:tc>
-                  <a:txBody>
-                    <a:bodyPr/>
-                    <a:lstStyle/>
-                    <a:p>
-                      <a:pPr indent="0" marL="0">
-                        <a:buNone/>
-                      </a:pPr>
-                      <a:r>
-                        <a:rPr lang="en-US" sz="1400" b="1" dirty="0">
-                          <a:solidFill>
-                            <a:schemeClr val="tx1"/>
-                          </a:solidFill>
-                          <a:latin typeface="Malgun Gothic" pitchFamily="34" charset="0"/>
-                          <a:ea typeface="Malgun Gothic" pitchFamily="34" charset="-122"/>
-                          <a:cs typeface="Malgun Gothic" pitchFamily="34" charset="-120"/>
-                        </a:rPr>
-                        <a:t>ATSS 최고평가</a:t>
-                      </a:r>
-                      <a:endParaRPr lang="en-US" sz="1400" dirty="0">
-                        <a:latin typeface="Malgun Gothic" charset="0"/>
-                        <a:ea typeface="Malgun Gothic" charset="0"/>
-                        <a:cs typeface="Malgun Gothic" charset="0"/>
-                      </a:endParaRPr>
-                    </a:p>
-                  </a:txBody>
-                  <a:tcPr marL="91440" marR="91440" marT="45720" marB="45720" anchor="ctr">
-                    <a:lnL w="9525" cap="flat" cmpd="sng" algn="ctr">
-                      <a:solidFill>
-                        <a:srgbClr val="3A3F48"/>
-                      </a:solidFill>
-                      <a:prstDash val="solid"/>
-                      <a:round/>
-                      <a:headEnd type="none" w="med" len="med"/>
-                      <a:tailEnd type="none" w="med" len="med"/>
-                    </a:lnL>
-                    <a:lnR w="9525" cap="flat" cmpd="sng" algn="ctr">
-                      <a:solidFill>
-                        <a:srgbClr val="3A3F48"/>
-                      </a:solidFill>
-                      <a:prstDash val="solid"/>
-                      <a:round/>
-                      <a:headEnd type="none" w="med" len="med"/>
-                      <a:tailEnd type="none" w="med" len="med"/>
-                    </a:lnR>
-                    <a:lnT w="9525" cap="flat" cmpd="sng" algn="ctr">
-                      <a:solidFill>
-                        <a:srgbClr val="3A3F48"/>
-                      </a:solidFill>
-                      <a:prstDash val="solid"/>
-                      <a:round/>
-                      <a:headEnd type="none" w="med" len="med"/>
-                      <a:tailEnd type="none" w="med" len="med"/>
-                    </a:lnT>
-                    <a:lnB w="9525" cap="flat" cmpd="sng" algn="ctr">
-                      <a:solidFill>
-                        <a:srgbClr val="3A3F48"/>
-                      </a:solidFill>
-                      <a:prstDash val="solid"/>
-                      <a:round/>
-                      <a:headEnd type="none" w="med" len="med"/>
-                      <a:tailEnd type="none" w="med" len="med"/>
-                    </a:lnB>
-                    <a:solidFill>
-                      <a:srgbClr val="23272F"/>
-                    </a:solidFill>
-                  </a:tcPr>
-                </a:tc>
-                <a:tc>
-                  <a:txBody>
-                    <a:bodyPr/>
-                    <a:lstStyle/>
-                    <a:p>
-                      <a:pPr indent="0" marL="0">
-                        <a:buNone/>
-                      </a:pPr>
-                      <a:r>
-                        <a:rPr lang="en-US" sz="1400" dirty="0">
-                          <a:solidFill>
-                            <a:schemeClr val="tx1"/>
-                          </a:solidFill>
-                          <a:latin typeface="Malgun Gothic" pitchFamily="34" charset="0"/>
-                          <a:ea typeface="Malgun Gothic" pitchFamily="34" charset="-122"/>
-                          <a:cs typeface="Malgun Gothic" pitchFamily="34" charset="-120"/>
-                        </a:rPr>
-                        <a:t>입력 해상도 차이 (992×800 vs 640×640), 적은 데이터엔 작은 모델. 학습 1회라 미확인</a:t>
-                      </a:r>
-                      <a:endParaRPr lang="en-US" sz="1400" dirty="0">
-                        <a:latin typeface="Malgun Gothic" charset="0"/>
-                        <a:ea typeface="Malgun Gothic" charset="0"/>
-                        <a:cs typeface="Malgun Gothic" charset="0"/>
-                      </a:endParaRPr>
-                    </a:p>
-                  </a:txBody>
-                  <a:tcPr marL="91440" marR="91440" marT="45720" marB="45720" anchor="ctr">
-                    <a:lnL w="9525" cap="flat" cmpd="sng" algn="ctr">
-                      <a:solidFill>
-                        <a:srgbClr val="3A3F48"/>
-                      </a:solidFill>
-                      <a:prstDash val="solid"/>
-                      <a:round/>
-                      <a:headEnd type="none" w="med" len="med"/>
-                      <a:tailEnd type="none" w="med" len="med"/>
-                    </a:lnL>
-                    <a:lnR w="9525" cap="flat" cmpd="sng" algn="ctr">
-                      <a:solidFill>
-                        <a:srgbClr val="3A3F48"/>
-                      </a:solidFill>
-                      <a:prstDash val="solid"/>
-                      <a:round/>
-                      <a:headEnd type="none" w="med" len="med"/>
-                      <a:tailEnd type="none" w="med" len="med"/>
-                    </a:lnR>
-                    <a:lnT w="9525" cap="flat" cmpd="sng" algn="ctr">
-                      <a:solidFill>
-                        <a:srgbClr val="3A3F48"/>
-                      </a:solidFill>
-                      <a:prstDash val="solid"/>
-                      <a:round/>
-                      <a:headEnd type="none" w="med" len="med"/>
-                      <a:tailEnd type="none" w="med" len="med"/>
-                    </a:lnT>
-                    <a:lnB w="9525" cap="flat" cmpd="sng" algn="ctr">
-                      <a:solidFill>
-                        <a:srgbClr val="3A3F48"/>
-                      </a:solidFill>
-                      <a:prstDash val="solid"/>
-                      <a:round/>
-                      <a:headEnd type="none" w="med" len="med"/>
-                      <a:tailEnd type="none" w="med" len="med"/>
-                    </a:lnB>
-                    <a:solidFill>
-                      <a:srgbClr val="23272F"/>
-                    </a:solidFill>
-                  </a:tcPr>
-                </a:tc>
-                <a:tc>
-                  <a:txBody>
-                    <a:bodyPr/>
-                    <a:lstStyle/>
-                    <a:p>
-                      <a:pPr algn="ctr" indent="0" marL="0">
-                        <a:buNone/>
-                      </a:pPr>
-                      <a:r>
-                        <a:rPr lang="en-US" sz="1400" b="1" dirty="0">
-                          <a:solidFill>
-                            <a:schemeClr val="tx2"/>
-                          </a:solidFill>
-                          <a:latin typeface="Malgun Gothic" pitchFamily="34" charset="0"/>
-                          <a:ea typeface="Malgun Gothic" pitchFamily="34" charset="-122"/>
-                          <a:cs typeface="Malgun Gothic" pitchFamily="34" charset="-120"/>
-                        </a:rPr>
-                        <a:t>가설</a:t>
-                      </a:r>
-                      <a:endParaRPr lang="en-US" sz="1400" dirty="0">
-                        <a:latin typeface="Malgun Gothic" charset="0"/>
-                        <a:ea typeface="Malgun Gothic" charset="0"/>
-                        <a:cs typeface="Malgun Gothic" charset="0"/>
-                      </a:endParaRPr>
-                    </a:p>
-                  </a:txBody>
-                  <a:tcPr marL="91440" marR="91440" marT="45720" marB="45720" anchor="ctr">
-                    <a:lnL w="9525" cap="flat" cmpd="sng" algn="ctr">
-                      <a:solidFill>
-                        <a:srgbClr val="3A3F48"/>
-                      </a:solidFill>
-                      <a:prstDash val="solid"/>
-                      <a:round/>
-                      <a:headEnd type="none" w="med" len="med"/>
-                      <a:tailEnd type="none" w="med" len="med"/>
-                    </a:lnL>
-                    <a:lnR w="9525" cap="flat" cmpd="sng" algn="ctr">
-                      <a:solidFill>
-                        <a:srgbClr val="3A3F48"/>
-                      </a:solidFill>
-                      <a:prstDash val="solid"/>
-                      <a:round/>
-                      <a:headEnd type="none" w="med" len="med"/>
-                      <a:tailEnd type="none" w="med" len="med"/>
-                    </a:lnR>
-                    <a:lnT w="9525" cap="flat" cmpd="sng" algn="ctr">
-                      <a:solidFill>
-                        <a:srgbClr val="3A3F48"/>
-                      </a:solidFill>
-                      <a:prstDash val="solid"/>
-                      <a:round/>
-                      <a:headEnd type="none" w="med" len="med"/>
-                      <a:tailEnd type="none" w="med" len="med"/>
-                    </a:lnT>
-                    <a:lnB w="9525" cap="flat" cmpd="sng" algn="ctr">
-                      <a:solidFill>
-                        <a:srgbClr val="3A3F48"/>
-                      </a:solidFill>
-                      <a:prstDash val="solid"/>
-                      <a:round/>
-                      <a:headEnd type="none" w="med" len="med"/>
-                      <a:tailEnd type="none" w="med" len="med"/>
-                    </a:lnB>
-                    <a:solidFill>
-                      <a:srgbClr val="23272F"/>
-                    </a:solidFill>
-                  </a:tcPr>
-                </a:tc>
-              </a:tr>
-              <a:tr h="457200">
-                <a:tc>
-                  <a:txBody>
-                    <a:bodyPr/>
-                    <a:lstStyle/>
-                    <a:p>
-                      <a:pPr algn="ctr" indent="0" marL="0">
-                        <a:buNone/>
-                      </a:pPr>
-                      <a:r>
-                        <a:rPr lang="en-US" sz="1400" dirty="0">
-                          <a:solidFill>
-                            <a:schemeClr val="tx2"/>
-                          </a:solidFill>
-                          <a:latin typeface="Malgun Gothic" pitchFamily="34" charset="0"/>
-                          <a:ea typeface="Malgun Gothic" pitchFamily="34" charset="-122"/>
-                          <a:cs typeface="Malgun Gothic" pitchFamily="34" charset="-120"/>
-                        </a:rPr>
-                        <a:t>6</a:t>
-                      </a:r>
-                      <a:endParaRPr lang="en-US" sz="1400" dirty="0">
-                        <a:latin typeface="Malgun Gothic" charset="0"/>
-                        <a:ea typeface="Malgun Gothic" charset="0"/>
-                        <a:cs typeface="Malgun Gothic" charset="0"/>
-                      </a:endParaRPr>
-                    </a:p>
-                  </a:txBody>
-                  <a:tcPr marL="91440" marR="91440" marT="45720" marB="45720" anchor="ctr">
-                    <a:lnL w="9525" cap="flat" cmpd="sng" algn="ctr">
-                      <a:solidFill>
-                        <a:srgbClr val="3A3F48"/>
-                      </a:solidFill>
-                      <a:prstDash val="solid"/>
-                      <a:round/>
-                      <a:headEnd type="none" w="med" len="med"/>
-                      <a:tailEnd type="none" w="med" len="med"/>
-                    </a:lnL>
-                    <a:lnR w="9525" cap="flat" cmpd="sng" algn="ctr">
-                      <a:solidFill>
-                        <a:srgbClr val="3A3F48"/>
-                      </a:solidFill>
-                      <a:prstDash val="solid"/>
-                      <a:round/>
-                      <a:headEnd type="none" w="med" len="med"/>
-                      <a:tailEnd type="none" w="med" len="med"/>
-                    </a:lnR>
-                    <a:lnT w="9525" cap="flat" cmpd="sng" algn="ctr">
-                      <a:solidFill>
-                        <a:srgbClr val="3A3F48"/>
-                      </a:solidFill>
-                      <a:prstDash val="solid"/>
-                      <a:round/>
-                      <a:headEnd type="none" w="med" len="med"/>
-                      <a:tailEnd type="none" w="med" len="med"/>
-                    </a:lnT>
-                    <a:lnB w="9525" cap="flat" cmpd="sng" algn="ctr">
-                      <a:solidFill>
-                        <a:srgbClr val="3A3F48"/>
-                      </a:solidFill>
-                      <a:prstDash val="solid"/>
-                      <a:round/>
-                      <a:headEnd type="none" w="med" len="med"/>
-                      <a:tailEnd type="none" w="med" len="med"/>
-                    </a:lnB>
-                    <a:solidFill>
-                      <a:srgbClr val="23272F"/>
-                    </a:solidFill>
-                  </a:tcPr>
-                </a:tc>
-                <a:tc>
-                  <a:txBody>
-                    <a:bodyPr/>
-                    <a:lstStyle/>
-                    <a:p>
-                      <a:pPr indent="0" marL="0">
-                        <a:buNone/>
-                      </a:pPr>
-                      <a:r>
-                        <a:rPr lang="en-US" sz="1400" b="1" dirty="0">
-                          <a:solidFill>
-                            <a:schemeClr val="tx1"/>
-                          </a:solidFill>
-                          <a:latin typeface="Malgun Gothic" pitchFamily="34" charset="0"/>
-                          <a:ea typeface="Malgun Gothic" pitchFamily="34" charset="-122"/>
-                          <a:cs typeface="Malgun Gothic" pitchFamily="34" charset="-120"/>
-                        </a:rPr>
-                        <a:t>나무 배경 취약 (33%)</a:t>
-                      </a:r>
-                      <a:endParaRPr lang="en-US" sz="1400" dirty="0">
-                        <a:latin typeface="Malgun Gothic" charset="0"/>
-                        <a:ea typeface="Malgun Gothic" charset="0"/>
-                        <a:cs typeface="Malgun Gothic" charset="0"/>
-                      </a:endParaRPr>
-                    </a:p>
-                  </a:txBody>
-                  <a:tcPr marL="91440" marR="91440" marT="45720" marB="45720" anchor="ctr">
-                    <a:lnL w="9525" cap="flat" cmpd="sng" algn="ctr">
-                      <a:solidFill>
-                        <a:srgbClr val="3A3F48"/>
-                      </a:solidFill>
-                      <a:prstDash val="solid"/>
-                      <a:round/>
-                      <a:headEnd type="none" w="med" len="med"/>
-                      <a:tailEnd type="none" w="med" len="med"/>
-                    </a:lnL>
-                    <a:lnR w="9525" cap="flat" cmpd="sng" algn="ctr">
-                      <a:solidFill>
-                        <a:srgbClr val="3A3F48"/>
-                      </a:solidFill>
-                      <a:prstDash val="solid"/>
-                      <a:round/>
-                      <a:headEnd type="none" w="med" len="med"/>
-                      <a:tailEnd type="none" w="med" len="med"/>
-                    </a:lnR>
-                    <a:lnT w="9525" cap="flat" cmpd="sng" algn="ctr">
-                      <a:solidFill>
-                        <a:srgbClr val="3A3F48"/>
-                      </a:solidFill>
-                      <a:prstDash val="solid"/>
-                      <a:round/>
-                      <a:headEnd type="none" w="med" len="med"/>
-                      <a:tailEnd type="none" w="med" len="med"/>
-                    </a:lnT>
-                    <a:lnB w="9525" cap="flat" cmpd="sng" algn="ctr">
-                      <a:solidFill>
-                        <a:srgbClr val="3A3F48"/>
-                      </a:solidFill>
-                      <a:prstDash val="solid"/>
-                      <a:round/>
-                      <a:headEnd type="none" w="med" len="med"/>
-                      <a:tailEnd type="none" w="med" len="med"/>
-                    </a:lnB>
-                    <a:solidFill>
-                      <a:srgbClr val="23272F"/>
-                    </a:solidFill>
-                  </a:tcPr>
-                </a:tc>
-                <a:tc>
-                  <a:txBody>
-                    <a:bodyPr/>
-                    <a:lstStyle/>
-                    <a:p>
-                      <a:pPr indent="0" marL="0">
-                        <a:buNone/>
-                      </a:pPr>
-                      <a:r>
-                        <a:rPr lang="en-US" sz="1400" dirty="0">
-                          <a:solidFill>
-                            <a:schemeClr val="tx1"/>
-                          </a:solidFill>
-                          <a:latin typeface="Malgun Gothic" pitchFamily="34" charset="0"/>
-                          <a:ea typeface="Malgun Gothic" pitchFamily="34" charset="-122"/>
-                          <a:cs typeface="Malgun Gothic" pitchFamily="34" charset="-120"/>
-                        </a:rPr>
-                        <a:t>나무결도 scratch처럼 가는 선</a:t>
-                      </a:r>
-                      <a:endParaRPr lang="en-US" sz="1400" dirty="0">
-                        <a:latin typeface="Malgun Gothic" charset="0"/>
-                        <a:ea typeface="Malgun Gothic" charset="0"/>
-                        <a:cs typeface="Malgun Gothic" charset="0"/>
-                      </a:endParaRPr>
-                    </a:p>
-                  </a:txBody>
-                  <a:tcPr marL="91440" marR="91440" marT="45720" marB="45720" anchor="ctr">
-                    <a:lnL w="9525" cap="flat" cmpd="sng" algn="ctr">
-                      <a:solidFill>
-                        <a:srgbClr val="3A3F48"/>
-                      </a:solidFill>
-                      <a:prstDash val="solid"/>
-                      <a:round/>
-                      <a:headEnd type="none" w="med" len="med"/>
-                      <a:tailEnd type="none" w="med" len="med"/>
-                    </a:lnL>
-                    <a:lnR w="9525" cap="flat" cmpd="sng" algn="ctr">
-                      <a:solidFill>
-                        <a:srgbClr val="3A3F48"/>
-                      </a:solidFill>
-                      <a:prstDash val="solid"/>
-                      <a:round/>
-                      <a:headEnd type="none" w="med" len="med"/>
-                      <a:tailEnd type="none" w="med" len="med"/>
-                    </a:lnR>
-                    <a:lnT w="9525" cap="flat" cmpd="sng" algn="ctr">
-                      <a:solidFill>
-                        <a:srgbClr val="3A3F48"/>
-                      </a:solidFill>
-                      <a:prstDash val="solid"/>
-                      <a:round/>
-                      <a:headEnd type="none" w="med" len="med"/>
-                      <a:tailEnd type="none" w="med" len="med"/>
-                    </a:lnT>
-                    <a:lnB w="9525" cap="flat" cmpd="sng" algn="ctr">
-                      <a:solidFill>
-                        <a:srgbClr val="3A3F48"/>
-                      </a:solidFill>
-                      <a:prstDash val="solid"/>
-                      <a:round/>
-                      <a:headEnd type="none" w="med" len="med"/>
-                      <a:tailEnd type="none" w="med" len="med"/>
-                    </a:lnB>
-                    <a:solidFill>
-                      <a:srgbClr val="23272F"/>
-                    </a:solidFill>
-                  </a:tcPr>
-                </a:tc>
-                <a:tc>
-                  <a:txBody>
-                    <a:bodyPr/>
-                    <a:lstStyle/>
-                    <a:p>
-                      <a:pPr algn="ctr" indent="0" marL="0">
-                        <a:buNone/>
-                      </a:pPr>
-                      <a:r>
-                        <a:rPr lang="en-US" sz="1400" b="1" dirty="0">
-                          <a:solidFill>
-                            <a:schemeClr val="accent3"/>
-                          </a:solidFill>
-                          <a:latin typeface="Malgun Gothic" pitchFamily="34" charset="0"/>
-                          <a:ea typeface="Malgun Gothic" pitchFamily="34" charset="-122"/>
-                          <a:cs typeface="Malgun Gothic" pitchFamily="34" charset="-120"/>
-                        </a:rPr>
-                        <a:t>추정</a:t>
-                      </a:r>
-                      <a:endParaRPr lang="en-US" sz="1400" dirty="0">
-                        <a:latin typeface="Malgun Gothic" charset="0"/>
-                        <a:ea typeface="Malgun Gothic" charset="0"/>
-                        <a:cs typeface="Malgun Gothic" charset="0"/>
-                      </a:endParaRPr>
-                    </a:p>
-                  </a:txBody>
-                  <a:tcPr marL="91440" marR="91440" marT="45720" marB="45720" anchor="ctr">
-                    <a:lnL w="9525" cap="flat" cmpd="sng" algn="ctr">
-                      <a:solidFill>
-                        <a:srgbClr val="3A3F48"/>
-                      </a:solidFill>
-                      <a:prstDash val="solid"/>
-                      <a:round/>
-                      <a:headEnd type="none" w="med" len="med"/>
-                      <a:tailEnd type="none" w="med" len="med"/>
-                    </a:lnL>
-                    <a:lnR w="9525" cap="flat" cmpd="sng" algn="ctr">
-                      <a:solidFill>
-                        <a:srgbClr val="3A3F48"/>
-                      </a:solidFill>
-                      <a:prstDash val="solid"/>
-                      <a:round/>
-                      <a:headEnd type="none" w="med" len="med"/>
-                      <a:tailEnd type="none" w="med" len="med"/>
-                    </a:lnR>
-                    <a:lnT w="9525" cap="flat" cmpd="sng" algn="ctr">
-                      <a:solidFill>
-                        <a:srgbClr val="3A3F48"/>
-                      </a:solidFill>
-                      <a:prstDash val="solid"/>
-                      <a:round/>
-                      <a:headEnd type="none" w="med" len="med"/>
-                      <a:tailEnd type="none" w="med" len="med"/>
-                    </a:lnT>
-                    <a:lnB w="9525" cap="flat" cmpd="sng" algn="ctr">
-                      <a:solidFill>
-                        <a:srgbClr val="3A3F48"/>
-                      </a:solidFill>
-                      <a:prstDash val="solid"/>
-                      <a:round/>
-                      <a:headEnd type="none" w="med" len="med"/>
-                      <a:tailEnd type="none" w="med" len="med"/>
-                    </a:lnB>
-                    <a:solidFill>
-                      <a:srgbClr val="23272F"/>
-                    </a:solidFill>
-                  </a:tcPr>
-                </a:tc>
-              </a:tr>
-              <a:tr h="457200">
-                <a:tc>
-                  <a:txBody>
-                    <a:bodyPr/>
-                    <a:lstStyle/>
-                    <a:p>
-                      <a:pPr algn="ctr" indent="0" marL="0">
-                        <a:buNone/>
-                      </a:pPr>
-                      <a:r>
-                        <a:rPr lang="en-US" sz="1400" dirty="0">
-                          <a:solidFill>
-                            <a:schemeClr val="tx2"/>
-                          </a:solidFill>
-                          <a:latin typeface="Malgun Gothic" pitchFamily="34" charset="0"/>
-                          <a:ea typeface="Malgun Gothic" pitchFamily="34" charset="-122"/>
-                          <a:cs typeface="Malgun Gothic" pitchFamily="34" charset="-120"/>
-                        </a:rPr>
-                        <a:t>7</a:t>
-                      </a:r>
-                      <a:endParaRPr lang="en-US" sz="1400" dirty="0">
-                        <a:latin typeface="Malgun Gothic" charset="0"/>
-                        <a:ea typeface="Malgun Gothic" charset="0"/>
-                        <a:cs typeface="Malgun Gothic" charset="0"/>
-                      </a:endParaRPr>
-                    </a:p>
-                  </a:txBody>
-                  <a:tcPr marL="91440" marR="91440" marT="45720" marB="45720" anchor="ctr">
-                    <a:lnL w="9525" cap="flat" cmpd="sng" algn="ctr">
-                      <a:solidFill>
-                        <a:srgbClr val="3A3F48"/>
-                      </a:solidFill>
-                      <a:prstDash val="solid"/>
-                      <a:round/>
-                      <a:headEnd type="none" w="med" len="med"/>
-                      <a:tailEnd type="none" w="med" len="med"/>
-                    </a:lnL>
-                    <a:lnR w="9525" cap="flat" cmpd="sng" algn="ctr">
-                      <a:solidFill>
-                        <a:srgbClr val="3A3F48"/>
-                      </a:solidFill>
-                      <a:prstDash val="solid"/>
-                      <a:round/>
-                      <a:headEnd type="none" w="med" len="med"/>
-                      <a:tailEnd type="none" w="med" len="med"/>
-                    </a:lnR>
-                    <a:lnT w="9525" cap="flat" cmpd="sng" algn="ctr">
-                      <a:solidFill>
-                        <a:srgbClr val="3A3F48"/>
-                      </a:solidFill>
-                      <a:prstDash val="solid"/>
-                      <a:round/>
-                      <a:headEnd type="none" w="med" len="med"/>
-                      <a:tailEnd type="none" w="med" len="med"/>
-                    </a:lnT>
-                    <a:lnB w="9525" cap="flat" cmpd="sng" algn="ctr">
-                      <a:solidFill>
-                        <a:srgbClr val="3A3F48"/>
-                      </a:solidFill>
-                      <a:prstDash val="solid"/>
-                      <a:round/>
-                      <a:headEnd type="none" w="med" len="med"/>
-                      <a:tailEnd type="none" w="med" len="med"/>
-                    </a:lnB>
-                    <a:solidFill>
-                      <a:srgbClr val="23272F"/>
-                    </a:solidFill>
-                  </a:tcPr>
-                </a:tc>
-                <a:tc>
-                  <a:txBody>
-                    <a:bodyPr/>
-                    <a:lstStyle/>
-                    <a:p>
-                      <a:pPr indent="0" marL="0">
-                        <a:buNone/>
-                      </a:pPr>
-                      <a:r>
-                        <a:rPr lang="en-US" sz="1400" b="1" dirty="0">
-                          <a:solidFill>
-                            <a:schemeClr val="tx1"/>
-                          </a:solidFill>
-                          <a:latin typeface="Malgun Gothic" pitchFamily="34" charset="0"/>
-                          <a:ea typeface="Malgun Gothic" pitchFamily="34" charset="-122"/>
-                          <a:cs typeface="Malgun Gothic" pitchFamily="34" charset="-120"/>
-                        </a:rPr>
-                        <a:t>INT8 놓침 증가</a:t>
-                      </a:r>
-                      <a:endParaRPr lang="en-US" sz="1400" dirty="0">
-                        <a:latin typeface="Malgun Gothic" charset="0"/>
-                        <a:ea typeface="Malgun Gothic" charset="0"/>
-                        <a:cs typeface="Malgun Gothic" charset="0"/>
-                      </a:endParaRPr>
-                    </a:p>
-                  </a:txBody>
-                  <a:tcPr marL="91440" marR="91440" marT="45720" marB="45720" anchor="ctr">
-                    <a:lnL w="9525" cap="flat" cmpd="sng" algn="ctr">
-                      <a:solidFill>
-                        <a:srgbClr val="3A3F48"/>
-                      </a:solidFill>
-                      <a:prstDash val="solid"/>
-                      <a:round/>
-                      <a:headEnd type="none" w="med" len="med"/>
-                      <a:tailEnd type="none" w="med" len="med"/>
-                    </a:lnL>
-                    <a:lnR w="9525" cap="flat" cmpd="sng" algn="ctr">
-                      <a:solidFill>
-                        <a:srgbClr val="3A3F48"/>
-                      </a:solidFill>
-                      <a:prstDash val="solid"/>
-                      <a:round/>
-                      <a:headEnd type="none" w="med" len="med"/>
-                      <a:tailEnd type="none" w="med" len="med"/>
-                    </a:lnR>
-                    <a:lnT w="9525" cap="flat" cmpd="sng" algn="ctr">
-                      <a:solidFill>
-                        <a:srgbClr val="3A3F48"/>
-                      </a:solidFill>
-                      <a:prstDash val="solid"/>
-                      <a:round/>
-                      <a:headEnd type="none" w="med" len="med"/>
-                      <a:tailEnd type="none" w="med" len="med"/>
-                    </a:lnT>
-                    <a:lnB w="9525" cap="flat" cmpd="sng" algn="ctr">
-                      <a:solidFill>
-                        <a:srgbClr val="3A3F48"/>
-                      </a:solidFill>
-                      <a:prstDash val="solid"/>
-                      <a:round/>
-                      <a:headEnd type="none" w="med" len="med"/>
-                      <a:tailEnd type="none" w="med" len="med"/>
-                    </a:lnB>
-                    <a:solidFill>
-                      <a:srgbClr val="23272F"/>
-                    </a:solidFill>
-                  </a:tcPr>
-                </a:tc>
-                <a:tc>
-                  <a:txBody>
-                    <a:bodyPr/>
-                    <a:lstStyle/>
-                    <a:p>
-                      <a:pPr indent="0" marL="0">
-                        <a:buNone/>
-                      </a:pPr>
-                      <a:r>
-                        <a:rPr lang="en-US" sz="1400" dirty="0">
-                          <a:solidFill>
-                            <a:schemeClr val="tx1"/>
-                          </a:solidFill>
-                          <a:latin typeface="Malgun Gothic" pitchFamily="34" charset="0"/>
-                          <a:ea typeface="Malgun Gothic" pitchFamily="34" charset="-122"/>
-                          <a:cs typeface="Malgun Gothic" pitchFamily="34" charset="-120"/>
-                        </a:rPr>
-                        <a:t>양자화 후 점수 소폭 하락, 0.30 근처 결함이 기준 미달</a:t>
-                      </a:r>
-                      <a:endParaRPr lang="en-US" sz="1400" dirty="0">
-                        <a:latin typeface="Malgun Gothic" charset="0"/>
-                        <a:ea typeface="Malgun Gothic" charset="0"/>
-                        <a:cs typeface="Malgun Gothic" charset="0"/>
-                      </a:endParaRPr>
-                    </a:p>
-                  </a:txBody>
-                  <a:tcPr marL="91440" marR="91440" marT="45720" marB="45720" anchor="ctr">
-                    <a:lnL w="9525" cap="flat" cmpd="sng" algn="ctr">
-                      <a:solidFill>
-                        <a:srgbClr val="3A3F48"/>
-                      </a:solidFill>
-                      <a:prstDash val="solid"/>
-                      <a:round/>
-                      <a:headEnd type="none" w="med" len="med"/>
-                      <a:tailEnd type="none" w="med" len="med"/>
-                    </a:lnL>
-                    <a:lnR w="9525" cap="flat" cmpd="sng" algn="ctr">
-                      <a:solidFill>
-                        <a:srgbClr val="3A3F48"/>
-                      </a:solidFill>
-                      <a:prstDash val="solid"/>
-                      <a:round/>
-                      <a:headEnd type="none" w="med" len="med"/>
-                      <a:tailEnd type="none" w="med" len="med"/>
-                    </a:lnR>
-                    <a:lnT w="9525" cap="flat" cmpd="sng" algn="ctr">
-                      <a:solidFill>
-                        <a:srgbClr val="3A3F48"/>
-                      </a:solidFill>
-                      <a:prstDash val="solid"/>
-                      <a:round/>
-                      <a:headEnd type="none" w="med" len="med"/>
-                      <a:tailEnd type="none" w="med" len="med"/>
-                    </a:lnT>
-                    <a:lnB w="9525" cap="flat" cmpd="sng" algn="ctr">
-                      <a:solidFill>
-                        <a:srgbClr val="3A3F48"/>
-                      </a:solidFill>
-                      <a:prstDash val="solid"/>
-                      <a:round/>
-                      <a:headEnd type="none" w="med" len="med"/>
-                      <a:tailEnd type="none" w="med" len="med"/>
-                    </a:lnB>
-                    <a:solidFill>
-                      <a:srgbClr val="23272F"/>
-                    </a:solidFill>
-                  </a:tcPr>
-                </a:tc>
-                <a:tc>
-                  <a:txBody>
-                    <a:bodyPr/>
-                    <a:lstStyle/>
-                    <a:p>
-                      <a:pPr algn="ctr" indent="0" marL="0">
-                        <a:buNone/>
-                      </a:pPr>
-                      <a:r>
-                        <a:rPr lang="en-US" sz="1400" b="1" dirty="0">
-                          <a:solidFill>
-                            <a:schemeClr val="accent3"/>
-                          </a:solidFill>
-                          <a:latin typeface="Malgun Gothic" pitchFamily="34" charset="0"/>
-                          <a:ea typeface="Malgun Gothic" pitchFamily="34" charset="-122"/>
-                          <a:cs typeface="Malgun Gothic" pitchFamily="34" charset="-120"/>
-                        </a:rPr>
-                        <a:t>추정</a:t>
-                      </a:r>
-                      <a:endParaRPr lang="en-US" sz="1400" dirty="0">
-                        <a:latin typeface="Malgun Gothic" charset="0"/>
-                        <a:ea typeface="Malgun Gothic" charset="0"/>
-                        <a:cs typeface="Malgun Gothic" charset="0"/>
-                      </a:endParaRPr>
-                    </a:p>
-                  </a:txBody>
-                  <a:tcPr marL="91440" marR="91440" marT="45720" marB="45720" anchor="ctr">
-                    <a:lnL w="9525" cap="flat" cmpd="sng" algn="ctr">
-                      <a:solidFill>
-                        <a:srgbClr val="3A3F48"/>
-                      </a:solidFill>
-                      <a:prstDash val="solid"/>
-                      <a:round/>
-                      <a:headEnd type="none" w="med" len="med"/>
-                      <a:tailEnd type="none" w="med" len="med"/>
-                    </a:lnL>
-                    <a:lnR w="9525" cap="flat" cmpd="sng" algn="ctr">
-                      <a:solidFill>
-                        <a:srgbClr val="3A3F48"/>
-                      </a:solidFill>
-                      <a:prstDash val="solid"/>
-                      <a:round/>
-                      <a:headEnd type="none" w="med" len="med"/>
-                      <a:tailEnd type="none" w="med" len="med"/>
-                    </a:lnR>
-                    <a:lnT w="9525" cap="flat" cmpd="sng" algn="ctr">
-                      <a:solidFill>
-                        <a:srgbClr val="3A3F48"/>
-                      </a:solidFill>
-                      <a:prstDash val="solid"/>
-                      <a:round/>
-                      <a:headEnd type="none" w="med" len="med"/>
-                      <a:tailEnd type="none" w="med" len="med"/>
-                    </a:lnT>
-                    <a:lnB w="9525" cap="flat" cmpd="sng" algn="ctr">
-                      <a:solidFill>
-                        <a:srgbClr val="3A3F48"/>
-                      </a:solidFill>
-                      <a:prstDash val="solid"/>
-                      <a:round/>
-                      <a:headEnd type="none" w="med" len="med"/>
-                      <a:tailEnd type="none" w="med" len="med"/>
-                    </a:lnB>
-                    <a:solidFill>
-                      <a:srgbClr val="23272F"/>
-                    </a:solidFill>
-                  </a:tcPr>
-                </a:tc>
-              </a:tr>
-              <a:tr h="457200">
-                <a:tc>
-                  <a:txBody>
-                    <a:bodyPr/>
-                    <a:lstStyle/>
-                    <a:p>
-                      <a:pPr algn="ctr" indent="0" marL="0">
-                        <a:buNone/>
-                      </a:pPr>
-                      <a:r>
-                        <a:rPr lang="en-US" sz="1400" dirty="0">
-                          <a:solidFill>
-                            <a:schemeClr val="tx2"/>
-                          </a:solidFill>
-                          <a:latin typeface="Malgun Gothic" pitchFamily="34" charset="0"/>
-                          <a:ea typeface="Malgun Gothic" pitchFamily="34" charset="-122"/>
-                          <a:cs typeface="Malgun Gothic" pitchFamily="34" charset="-120"/>
-                        </a:rPr>
-                        <a:t>8</a:t>
-                      </a:r>
-                      <a:endParaRPr lang="en-US" sz="1400" dirty="0">
-                        <a:latin typeface="Malgun Gothic" charset="0"/>
-                        <a:ea typeface="Malgun Gothic" charset="0"/>
-                        <a:cs typeface="Malgun Gothic" charset="0"/>
-                      </a:endParaRPr>
-                    </a:p>
-                  </a:txBody>
-                  <a:tcPr marL="91440" marR="91440" marT="45720" marB="45720" anchor="ctr">
-                    <a:lnL w="9525" cap="flat" cmpd="sng" algn="ctr">
-                      <a:solidFill>
-                        <a:srgbClr val="3A3F48"/>
-                      </a:solidFill>
-                      <a:prstDash val="solid"/>
-                      <a:round/>
-                      <a:headEnd type="none" w="med" len="med"/>
-                      <a:tailEnd type="none" w="med" len="med"/>
-                    </a:lnL>
-                    <a:lnR w="9525" cap="flat" cmpd="sng" algn="ctr">
-                      <a:solidFill>
-                        <a:srgbClr val="3A3F48"/>
-                      </a:solidFill>
-                      <a:prstDash val="solid"/>
-                      <a:round/>
-                      <a:headEnd type="none" w="med" len="med"/>
-                      <a:tailEnd type="none" w="med" len="med"/>
-                    </a:lnR>
-                    <a:lnT w="9525" cap="flat" cmpd="sng" algn="ctr">
-                      <a:solidFill>
-                        <a:srgbClr val="3A3F48"/>
-                      </a:solidFill>
-                      <a:prstDash val="solid"/>
-                      <a:round/>
-                      <a:headEnd type="none" w="med" len="med"/>
-                      <a:tailEnd type="none" w="med" len="med"/>
-                    </a:lnT>
-                    <a:lnB w="9525" cap="flat" cmpd="sng" algn="ctr">
-                      <a:solidFill>
-                        <a:srgbClr val="3A3F48"/>
-                      </a:solidFill>
-                      <a:prstDash val="solid"/>
-                      <a:round/>
-                      <a:headEnd type="none" w="med" len="med"/>
-                      <a:tailEnd type="none" w="med" len="med"/>
-                    </a:lnB>
-                    <a:solidFill>
-                      <a:srgbClr val="23272F"/>
-                    </a:solidFill>
-                  </a:tcPr>
-                </a:tc>
-                <a:tc>
-                  <a:txBody>
-                    <a:bodyPr/>
-                    <a:lstStyle/>
-                    <a:p>
-                      <a:pPr indent="0" marL="0">
-                        <a:buNone/>
-                      </a:pPr>
-                      <a:r>
-                        <a:rPr lang="en-US" sz="1400" b="1" dirty="0">
-                          <a:solidFill>
-                            <a:schemeClr val="tx1"/>
-                          </a:solidFill>
-                          <a:latin typeface="Malgun Gothic" pitchFamily="34" charset="0"/>
-                          <a:ea typeface="Malgun Gothic" pitchFamily="34" charset="-122"/>
-                          <a:cs typeface="Malgun Gothic" pitchFamily="34" charset="-120"/>
-                        </a:rPr>
-                        <a:t>2차 세트 검출 47%</a:t>
-                      </a:r>
-                      <a:endParaRPr lang="en-US" sz="1400" dirty="0">
-                        <a:latin typeface="Malgun Gothic" charset="0"/>
-                        <a:ea typeface="Malgun Gothic" charset="0"/>
-                        <a:cs typeface="Malgun Gothic" charset="0"/>
-                      </a:endParaRPr>
-                    </a:p>
-                  </a:txBody>
-                  <a:tcPr marL="91440" marR="91440" marT="45720" marB="45720" anchor="ctr">
-                    <a:lnL w="9525" cap="flat" cmpd="sng" algn="ctr">
-                      <a:solidFill>
-                        <a:srgbClr val="3A3F48"/>
-                      </a:solidFill>
-                      <a:prstDash val="solid"/>
-                      <a:round/>
-                      <a:headEnd type="none" w="med" len="med"/>
-                      <a:tailEnd type="none" w="med" len="med"/>
-                    </a:lnL>
-                    <a:lnR w="9525" cap="flat" cmpd="sng" algn="ctr">
-                      <a:solidFill>
-                        <a:srgbClr val="3A3F48"/>
-                      </a:solidFill>
-                      <a:prstDash val="solid"/>
-                      <a:round/>
-                      <a:headEnd type="none" w="med" len="med"/>
-                      <a:tailEnd type="none" w="med" len="med"/>
-                    </a:lnR>
-                    <a:lnT w="9525" cap="flat" cmpd="sng" algn="ctr">
-                      <a:solidFill>
-                        <a:srgbClr val="3A3F48"/>
-                      </a:solidFill>
-                      <a:prstDash val="solid"/>
-                      <a:round/>
-                      <a:headEnd type="none" w="med" len="med"/>
-                      <a:tailEnd type="none" w="med" len="med"/>
-                    </a:lnT>
-                    <a:lnB w="9525" cap="flat" cmpd="sng" algn="ctr">
-                      <a:solidFill>
-                        <a:srgbClr val="3A3F48"/>
-                      </a:solidFill>
-                      <a:prstDash val="solid"/>
-                      <a:round/>
-                      <a:headEnd type="none" w="med" len="med"/>
-                      <a:tailEnd type="none" w="med" len="med"/>
-                    </a:lnB>
-                    <a:solidFill>
-                      <a:srgbClr val="23272F"/>
-                    </a:solidFill>
-                  </a:tcPr>
-                </a:tc>
-                <a:tc>
-                  <a:txBody>
-                    <a:bodyPr/>
-                    <a:lstStyle/>
-                    <a:p>
-                      <a:pPr indent="0" marL="0">
-                        <a:buNone/>
-                      </a:pPr>
-                      <a:r>
-                        <a:rPr lang="en-US" sz="1400" dirty="0">
-                          <a:solidFill>
-                            <a:schemeClr val="tx1"/>
-                          </a:solidFill>
-                          <a:latin typeface="Malgun Gothic" pitchFamily="34" charset="0"/>
-                          <a:ea typeface="Malgun Gothic" pitchFamily="34" charset="-122"/>
-                          <a:cs typeface="Malgun Gothic" pitchFamily="34" charset="-120"/>
-                        </a:rPr>
-                        <a:t>crack이 30×26px로 작아짐 (15개 중 1개 검출), 촬영 환경도 바뀜</a:t>
-                      </a:r>
-                      <a:endParaRPr lang="en-US" sz="1400" dirty="0">
-                        <a:latin typeface="Malgun Gothic" charset="0"/>
-                        <a:ea typeface="Malgun Gothic" charset="0"/>
-                        <a:cs typeface="Malgun Gothic" charset="0"/>
-                      </a:endParaRPr>
-                    </a:p>
-                  </a:txBody>
-                  <a:tcPr marL="91440" marR="91440" marT="45720" marB="45720" anchor="ctr">
-                    <a:lnL w="9525" cap="flat" cmpd="sng" algn="ctr">
-                      <a:solidFill>
-                        <a:srgbClr val="3A3F48"/>
-                      </a:solidFill>
-                      <a:prstDash val="solid"/>
-                      <a:round/>
-                      <a:headEnd type="none" w="med" len="med"/>
-                      <a:tailEnd type="none" w="med" len="med"/>
-                    </a:lnL>
-                    <a:lnR w="9525" cap="flat" cmpd="sng" algn="ctr">
-                      <a:solidFill>
-                        <a:srgbClr val="3A3F48"/>
-                      </a:solidFill>
-                      <a:prstDash val="solid"/>
-                      <a:round/>
-                      <a:headEnd type="none" w="med" len="med"/>
-                      <a:tailEnd type="none" w="med" len="med"/>
-                    </a:lnR>
-                    <a:lnT w="9525" cap="flat" cmpd="sng" algn="ctr">
-                      <a:solidFill>
-                        <a:srgbClr val="3A3F48"/>
-                      </a:solidFill>
-                      <a:prstDash val="solid"/>
-                      <a:round/>
-                      <a:headEnd type="none" w="med" len="med"/>
-                      <a:tailEnd type="none" w="med" len="med"/>
-                    </a:lnT>
-                    <a:lnB w="9525" cap="flat" cmpd="sng" algn="ctr">
-                      <a:solidFill>
-                        <a:srgbClr val="3A3F48"/>
-                      </a:solidFill>
-                      <a:prstDash val="solid"/>
-                      <a:round/>
-                      <a:headEnd type="none" w="med" len="med"/>
-                      <a:tailEnd type="none" w="med" len="med"/>
-                    </a:lnB>
-                    <a:solidFill>
-                      <a:srgbClr val="23272F"/>
-                    </a:solidFill>
-                  </a:tcPr>
-                </a:tc>
-                <a:tc>
-                  <a:txBody>
-                    <a:bodyPr/>
-                    <a:lstStyle/>
-                    <a:p>
-                      <a:pPr algn="ctr" indent="0" marL="0">
-                        <a:buNone/>
-                      </a:pPr>
-                      <a:r>
-                        <a:rPr lang="en-US" sz="1400" b="1" dirty="0">
-                          <a:solidFill>
-                            <a:schemeClr val="accent6"/>
-                          </a:solidFill>
-                          <a:latin typeface="Malgun Gothic" pitchFamily="34" charset="0"/>
-                          <a:ea typeface="Malgun Gothic" pitchFamily="34" charset="-122"/>
-                          <a:cs typeface="Malgun Gothic" pitchFamily="34" charset="-120"/>
-                        </a:rPr>
-                        <a:t>확인</a:t>
-                      </a:r>
-                      <a:endParaRPr lang="en-US" sz="1400" dirty="0">
-                        <a:latin typeface="Malgun Gothic" charset="0"/>
-                        <a:ea typeface="Malgun Gothic" charset="0"/>
-                        <a:cs typeface="Malgun Gothic" charset="0"/>
-                      </a:endParaRPr>
-                    </a:p>
-                  </a:txBody>
-                  <a:tcPr marL="91440" marR="91440" marT="45720" marB="45720" anchor="ctr">
-                    <a:lnL w="9525" cap="flat" cmpd="sng" algn="ctr">
-                      <a:solidFill>
-                        <a:srgbClr val="3A3F48"/>
-                      </a:solidFill>
-                      <a:prstDash val="solid"/>
-                      <a:round/>
-                      <a:headEnd type="none" w="med" len="med"/>
-                      <a:tailEnd type="none" w="med" len="med"/>
-                    </a:lnL>
-                    <a:lnR w="9525" cap="flat" cmpd="sng" algn="ctr">
-                      <a:solidFill>
-                        <a:srgbClr val="3A3F48"/>
-                      </a:solidFill>
-                      <a:prstDash val="solid"/>
-                      <a:round/>
-                      <a:headEnd type="none" w="med" len="med"/>
-                      <a:tailEnd type="none" w="med" len="med"/>
-                    </a:lnR>
-                    <a:lnT w="9525" cap="flat" cmpd="sng" algn="ctr">
-                      <a:solidFill>
-                        <a:srgbClr val="3A3F48"/>
-                      </a:solidFill>
-                      <a:prstDash val="solid"/>
-                      <a:round/>
-                      <a:headEnd type="none" w="med" len="med"/>
-                      <a:tailEnd type="none" w="med" len="med"/>
-                    </a:lnT>
-                    <a:lnB w="9525" cap="flat" cmpd="sng" algn="ctr">
-                      <a:solidFill>
-                        <a:srgbClr val="3A3F48"/>
-                      </a:solidFill>
-                      <a:prstDash val="solid"/>
-                      <a:round/>
-                      <a:headEnd type="none" w="med" len="med"/>
-                      <a:tailEnd type="none" w="med" len="med"/>
-                    </a:lnB>
-                    <a:solidFill>
-                      <a:srgbClr val="23272F"/>
-                    </a:solidFill>
-                  </a:tcPr>
-                </a:tc>
-              </a:tr>
-              <a:tr h="457200">
-                <a:tc>
-                  <a:txBody>
-                    <a:bodyPr/>
-                    <a:lstStyle/>
-                    <a:p>
-                      <a:pPr algn="ctr" indent="0" marL="0">
-                        <a:buNone/>
-                      </a:pPr>
-                      <a:r>
-                        <a:rPr lang="en-US" sz="1400" dirty="0">
-                          <a:solidFill>
-                            <a:schemeClr val="tx2"/>
-                          </a:solidFill>
-                          <a:latin typeface="Malgun Gothic" pitchFamily="34" charset="0"/>
-                          <a:ea typeface="Malgun Gothic" pitchFamily="34" charset="-122"/>
-                          <a:cs typeface="Malgun Gothic" pitchFamily="34" charset="-120"/>
-                        </a:rPr>
-                        <a:t>8</a:t>
-                      </a:r>
-                      <a:endParaRPr lang="en-US" sz="1400" dirty="0">
-                        <a:latin typeface="Malgun Gothic" charset="0"/>
-                        <a:ea typeface="Malgun Gothic" charset="0"/>
-                        <a:cs typeface="Malgun Gothic" charset="0"/>
-                      </a:endParaRPr>
-                    </a:p>
-                  </a:txBody>
-                  <a:tcPr marL="91440" marR="91440" marT="45720" marB="45720" anchor="ctr">
-                    <a:lnL w="9525" cap="flat" cmpd="sng" algn="ctr">
-                      <a:solidFill>
-                        <a:srgbClr val="3A3F48"/>
-                      </a:solidFill>
-                      <a:prstDash val="solid"/>
-                      <a:round/>
-                      <a:headEnd type="none" w="med" len="med"/>
-                      <a:tailEnd type="none" w="med" len="med"/>
-                    </a:lnL>
-                    <a:lnR w="9525" cap="flat" cmpd="sng" algn="ctr">
-                      <a:solidFill>
-                        <a:srgbClr val="3A3F48"/>
-                      </a:solidFill>
-                      <a:prstDash val="solid"/>
-                      <a:round/>
-                      <a:headEnd type="none" w="med" len="med"/>
-                      <a:tailEnd type="none" w="med" len="med"/>
-                    </a:lnR>
-                    <a:lnT w="9525" cap="flat" cmpd="sng" algn="ctr">
-                      <a:solidFill>
-                        <a:srgbClr val="3A3F48"/>
-                      </a:solidFill>
-                      <a:prstDash val="solid"/>
-                      <a:round/>
-                      <a:headEnd type="none" w="med" len="med"/>
-                      <a:tailEnd type="none" w="med" len="med"/>
-                    </a:lnT>
-                    <a:lnB w="9525" cap="flat" cmpd="sng" algn="ctr">
-                      <a:solidFill>
-                        <a:srgbClr val="3A3F48"/>
-                      </a:solidFill>
-                      <a:prstDash val="solid"/>
-                      <a:round/>
-                      <a:headEnd type="none" w="med" len="med"/>
-                      <a:tailEnd type="none" w="med" len="med"/>
-                    </a:lnB>
-                    <a:solidFill>
-                      <a:srgbClr val="23272F"/>
-                    </a:solidFill>
-                  </a:tcPr>
-                </a:tc>
-                <a:tc>
-                  <a:txBody>
-                    <a:bodyPr/>
-                    <a:lstStyle/>
-                    <a:p>
-                      <a:pPr indent="0" marL="0">
-                        <a:buNone/>
-                      </a:pPr>
-                      <a:r>
-                        <a:rPr lang="en-US" sz="1400" b="1" dirty="0">
-                          <a:solidFill>
-                            <a:schemeClr val="tx1"/>
-                          </a:solidFill>
-                          <a:latin typeface="Malgun Gothic" pitchFamily="34" charset="0"/>
-                          <a:ea typeface="Malgun Gothic" pitchFamily="34" charset="-122"/>
-                          <a:cs typeface="Malgun Gothic" pitchFamily="34" charset="-120"/>
-                        </a:rPr>
-                        <a:t>YOLOX-S 낮은 점수</a:t>
-                      </a:r>
-                      <a:endParaRPr lang="en-US" sz="1400" dirty="0">
-                        <a:latin typeface="Malgun Gothic" charset="0"/>
-                        <a:ea typeface="Malgun Gothic" charset="0"/>
-                        <a:cs typeface="Malgun Gothic" charset="0"/>
-                      </a:endParaRPr>
-                    </a:p>
-                  </a:txBody>
-                  <a:tcPr marL="91440" marR="91440" marT="45720" marB="45720" anchor="ctr">
-                    <a:lnL w="9525" cap="flat" cmpd="sng" algn="ctr">
-                      <a:solidFill>
-                        <a:srgbClr val="3A3F48"/>
-                      </a:solidFill>
-                      <a:prstDash val="solid"/>
-                      <a:round/>
-                      <a:headEnd type="none" w="med" len="med"/>
-                      <a:tailEnd type="none" w="med" len="med"/>
-                    </a:lnL>
-                    <a:lnR w="9525" cap="flat" cmpd="sng" algn="ctr">
-                      <a:solidFill>
-                        <a:srgbClr val="3A3F48"/>
-                      </a:solidFill>
-                      <a:prstDash val="solid"/>
-                      <a:round/>
-                      <a:headEnd type="none" w="med" len="med"/>
-                      <a:tailEnd type="none" w="med" len="med"/>
-                    </a:lnR>
-                    <a:lnT w="9525" cap="flat" cmpd="sng" algn="ctr">
-                      <a:solidFill>
-                        <a:srgbClr val="3A3F48"/>
-                      </a:solidFill>
-                      <a:prstDash val="solid"/>
-                      <a:round/>
-                      <a:headEnd type="none" w="med" len="med"/>
-                      <a:tailEnd type="none" w="med" len="med"/>
-                    </a:lnT>
-                    <a:lnB w="9525" cap="flat" cmpd="sng" algn="ctr">
-                      <a:solidFill>
-                        <a:srgbClr val="3A3F48"/>
-                      </a:solidFill>
-                      <a:prstDash val="solid"/>
-                      <a:round/>
-                      <a:headEnd type="none" w="med" len="med"/>
-                      <a:tailEnd type="none" w="med" len="med"/>
-                    </a:lnB>
-                    <a:solidFill>
-                      <a:srgbClr val="23272F"/>
-                    </a:solidFill>
-                  </a:tcPr>
-                </a:tc>
-                <a:tc>
-                  <a:txBody>
-                    <a:bodyPr/>
-                    <a:lstStyle/>
-                    <a:p>
-                      <a:pPr indent="0" marL="0">
-                        <a:buNone/>
-                      </a:pPr>
-                      <a:r>
-                        <a:rPr lang="en-US" sz="1400" dirty="0">
-                          <a:solidFill>
-                            <a:schemeClr val="tx1"/>
-                          </a:solidFill>
-                          <a:latin typeface="Malgun Gothic" pitchFamily="34" charset="0"/>
-                          <a:ea typeface="Malgun Gothic" pitchFamily="34" charset="-122"/>
-                          <a:cs typeface="Malgun Gothic" pitchFamily="34" charset="-120"/>
-                        </a:rPr>
-                        <a:t>점수 = 물체일 확률 × 클래스 확률. 두 확률의 곱이라 낮게 나옴</a:t>
-                      </a:r>
-                      <a:endParaRPr lang="en-US" sz="1400" dirty="0">
-                        <a:latin typeface="Malgun Gothic" charset="0"/>
-                        <a:ea typeface="Malgun Gothic" charset="0"/>
-                        <a:cs typeface="Malgun Gothic" charset="0"/>
-                      </a:endParaRPr>
-                    </a:p>
-                  </a:txBody>
-                  <a:tcPr marL="91440" marR="91440" marT="45720" marB="45720" anchor="ctr">
-                    <a:lnL w="9525" cap="flat" cmpd="sng" algn="ctr">
-                      <a:solidFill>
-                        <a:srgbClr val="3A3F48"/>
-                      </a:solidFill>
-                      <a:prstDash val="solid"/>
-                      <a:round/>
-                      <a:headEnd type="none" w="med" len="med"/>
-                      <a:tailEnd type="none" w="med" len="med"/>
-                    </a:lnL>
-                    <a:lnR w="9525" cap="flat" cmpd="sng" algn="ctr">
-                      <a:solidFill>
-                        <a:srgbClr val="3A3F48"/>
-                      </a:solidFill>
-                      <a:prstDash val="solid"/>
-                      <a:round/>
-                      <a:headEnd type="none" w="med" len="med"/>
-                      <a:tailEnd type="none" w="med" len="med"/>
-                    </a:lnR>
-                    <a:lnT w="9525" cap="flat" cmpd="sng" algn="ctr">
-                      <a:solidFill>
-                        <a:srgbClr val="3A3F48"/>
-                      </a:solidFill>
-                      <a:prstDash val="solid"/>
-                      <a:round/>
-                      <a:headEnd type="none" w="med" len="med"/>
-                      <a:tailEnd type="none" w="med" len="med"/>
-                    </a:lnT>
-                    <a:lnB w="9525" cap="flat" cmpd="sng" algn="ctr">
-                      <a:solidFill>
-                        <a:srgbClr val="3A3F48"/>
-                      </a:solidFill>
-                      <a:prstDash val="solid"/>
-                      <a:round/>
-                      <a:headEnd type="none" w="med" len="med"/>
-                      <a:tailEnd type="none" w="med" len="med"/>
-                    </a:lnB>
-                    <a:solidFill>
-                      <a:srgbClr val="23272F"/>
-                    </a:solidFill>
-                  </a:tcPr>
-                </a:tc>
-                <a:tc>
-                  <a:txBody>
-                    <a:bodyPr/>
-                    <a:lstStyle/>
-                    <a:p>
-                      <a:pPr algn="ctr" indent="0" marL="0">
-                        <a:buNone/>
-                      </a:pPr>
-                      <a:r>
-                        <a:rPr lang="en-US" sz="1400" b="1" dirty="0">
-                          <a:solidFill>
-                            <a:schemeClr val="accent3"/>
-                          </a:solidFill>
-                          <a:latin typeface="Malgun Gothic" pitchFamily="34" charset="0"/>
-                          <a:ea typeface="Malgun Gothic" pitchFamily="34" charset="-122"/>
-                          <a:cs typeface="Malgun Gothic" pitchFamily="34" charset="-120"/>
-                        </a:rPr>
-                        <a:t>추정</a:t>
-                      </a:r>
-                      <a:endParaRPr lang="en-US" sz="1400" dirty="0">
-                        <a:latin typeface="Malgun Gothic" charset="0"/>
-                        <a:ea typeface="Malgun Gothic" charset="0"/>
-                        <a:cs typeface="Malgun Gothic" charset="0"/>
-                      </a:endParaRPr>
-                    </a:p>
-                  </a:txBody>
-                  <a:tcPr marL="91440" marR="91440" marT="45720" marB="45720" anchor="ctr">
-                    <a:lnL w="9525" cap="flat" cmpd="sng" algn="ctr">
-                      <a:solidFill>
-                        <a:srgbClr val="3A3F48"/>
-                      </a:solidFill>
-                      <a:prstDash val="solid"/>
-                      <a:round/>
-                      <a:headEnd type="none" w="med" len="med"/>
-                      <a:tailEnd type="none" w="med" len="med"/>
-                    </a:lnL>
-                    <a:lnR w="9525" cap="flat" cmpd="sng" algn="ctr">
-                      <a:solidFill>
-                        <a:srgbClr val="3A3F48"/>
-                      </a:solidFill>
-                      <a:prstDash val="solid"/>
-                      <a:round/>
-                      <a:headEnd type="none" w="med" len="med"/>
-                      <a:tailEnd type="none" w="med" len="med"/>
-                    </a:lnR>
-                    <a:lnT w="9525" cap="flat" cmpd="sng" algn="ctr">
-                      <a:solidFill>
-                        <a:srgbClr val="3A3F48"/>
-                      </a:solidFill>
-                      <a:prstDash val="solid"/>
-                      <a:round/>
-                      <a:headEnd type="none" w="med" len="med"/>
-                      <a:tailEnd type="none" w="med" len="med"/>
-                    </a:lnT>
-                    <a:lnB w="9525" cap="flat" cmpd="sng" algn="ctr">
-                      <a:solidFill>
-                        <a:srgbClr val="3A3F48"/>
-                      </a:solidFill>
-                      <a:prstDash val="solid"/>
-                      <a:round/>
-                      <a:headEnd type="none" w="med" len="med"/>
-                      <a:tailEnd type="none" w="med" len="med"/>
-                    </a:lnB>
-                    <a:solidFill>
-                      <a:srgbClr val="23272F"/>
-                    </a:solidFill>
-                  </a:tcPr>
-                </a:tc>
-              </a:tr>
-              <a:tr h="457200">
-                <a:tc>
-                  <a:txBody>
-                    <a:bodyPr/>
-                    <a:lstStyle/>
-                    <a:p>
-                      <a:pPr algn="ctr" indent="0" marL="0">
-                        <a:buNone/>
-                      </a:pPr>
-                      <a:r>
-                        <a:rPr lang="en-US" sz="1400" dirty="0">
-                          <a:solidFill>
-                            <a:schemeClr val="tx2"/>
-                          </a:solidFill>
-                          <a:latin typeface="Malgun Gothic" pitchFamily="34" charset="0"/>
-                          <a:ea typeface="Malgun Gothic" pitchFamily="34" charset="-122"/>
-                          <a:cs typeface="Malgun Gothic" pitchFamily="34" charset="-120"/>
-                        </a:rPr>
-                        <a:t>8</a:t>
-                      </a:r>
-                      <a:endParaRPr lang="en-US" sz="1400" dirty="0">
-                        <a:latin typeface="Malgun Gothic" charset="0"/>
-                        <a:ea typeface="Malgun Gothic" charset="0"/>
-                        <a:cs typeface="Malgun Gothic" charset="0"/>
-                      </a:endParaRPr>
-                    </a:p>
-                  </a:txBody>
-                  <a:tcPr marL="91440" marR="91440" marT="45720" marB="45720" anchor="ctr">
-                    <a:lnL w="9525" cap="flat" cmpd="sng" algn="ctr">
-                      <a:solidFill>
-                        <a:srgbClr val="3A3F48"/>
-                      </a:solidFill>
-                      <a:prstDash val="solid"/>
-                      <a:round/>
-                      <a:headEnd type="none" w="med" len="med"/>
-                      <a:tailEnd type="none" w="med" len="med"/>
-                    </a:lnL>
-                    <a:lnR w="9525" cap="flat" cmpd="sng" algn="ctr">
-                      <a:solidFill>
-                        <a:srgbClr val="3A3F48"/>
-                      </a:solidFill>
-                      <a:prstDash val="solid"/>
-                      <a:round/>
-                      <a:headEnd type="none" w="med" len="med"/>
-                      <a:tailEnd type="none" w="med" len="med"/>
-                    </a:lnR>
-                    <a:lnT w="9525" cap="flat" cmpd="sng" algn="ctr">
-                      <a:solidFill>
-                        <a:srgbClr val="3A3F48"/>
-                      </a:solidFill>
-                      <a:prstDash val="solid"/>
-                      <a:round/>
-                      <a:headEnd type="none" w="med" len="med"/>
-                      <a:tailEnd type="none" w="med" len="med"/>
-                    </a:lnT>
-                    <a:lnB w="9525" cap="flat" cmpd="sng" algn="ctr">
-                      <a:solidFill>
-                        <a:srgbClr val="3A3F48"/>
-                      </a:solidFill>
-                      <a:prstDash val="solid"/>
-                      <a:round/>
-                      <a:headEnd type="none" w="med" len="med"/>
-                      <a:tailEnd type="none" w="med" len="med"/>
-                    </a:lnB>
-                    <a:solidFill>
-                      <a:srgbClr val="23272F"/>
-                    </a:solidFill>
-                  </a:tcPr>
-                </a:tc>
-                <a:tc>
-                  <a:txBody>
-                    <a:bodyPr/>
-                    <a:lstStyle/>
-                    <a:p>
-                      <a:pPr indent="0" marL="0">
-                        <a:buNone/>
-                      </a:pPr>
-                      <a:r>
-                        <a:rPr lang="en-US" sz="1400" b="1" dirty="0">
-                          <a:solidFill>
-                            <a:schemeClr val="tx1"/>
-                          </a:solidFill>
-                          <a:latin typeface="Malgun Gothic" pitchFamily="34" charset="0"/>
-                          <a:ea typeface="Malgun Gothic" pitchFamily="34" charset="-122"/>
-                          <a:cs typeface="Malgun Gothic" pitchFamily="34" charset="-120"/>
-                        </a:rPr>
-                        <a:t>기준값 조정으로 해결 불가</a:t>
-                      </a:r>
-                      <a:endParaRPr lang="en-US" sz="1400" dirty="0">
-                        <a:latin typeface="Malgun Gothic" charset="0"/>
-                        <a:ea typeface="Malgun Gothic" charset="0"/>
-                        <a:cs typeface="Malgun Gothic" charset="0"/>
-                      </a:endParaRPr>
-                    </a:p>
-                  </a:txBody>
-                  <a:tcPr marL="91440" marR="91440" marT="45720" marB="45720" anchor="ctr">
-                    <a:lnL w="9525" cap="flat" cmpd="sng" algn="ctr">
-                      <a:solidFill>
-                        <a:srgbClr val="3A3F48"/>
-                      </a:solidFill>
-                      <a:prstDash val="solid"/>
-                      <a:round/>
-                      <a:headEnd type="none" w="med" len="med"/>
-                      <a:tailEnd type="none" w="med" len="med"/>
-                    </a:lnL>
-                    <a:lnR w="9525" cap="flat" cmpd="sng" algn="ctr">
-                      <a:solidFill>
-                        <a:srgbClr val="3A3F48"/>
-                      </a:solidFill>
-                      <a:prstDash val="solid"/>
-                      <a:round/>
-                      <a:headEnd type="none" w="med" len="med"/>
-                      <a:tailEnd type="none" w="med" len="med"/>
-                    </a:lnR>
-                    <a:lnT w="9525" cap="flat" cmpd="sng" algn="ctr">
-                      <a:solidFill>
-                        <a:srgbClr val="3A3F48"/>
-                      </a:solidFill>
-                      <a:prstDash val="solid"/>
-                      <a:round/>
-                      <a:headEnd type="none" w="med" len="med"/>
-                      <a:tailEnd type="none" w="med" len="med"/>
-                    </a:lnT>
-                    <a:lnB w="9525" cap="flat" cmpd="sng" algn="ctr">
-                      <a:solidFill>
-                        <a:srgbClr val="3A3F48"/>
-                      </a:solidFill>
-                      <a:prstDash val="solid"/>
-                      <a:round/>
-                      <a:headEnd type="none" w="med" len="med"/>
-                      <a:tailEnd type="none" w="med" len="med"/>
-                    </a:lnB>
-                    <a:solidFill>
-                      <a:srgbClr val="23272F"/>
-                    </a:solidFill>
-                  </a:tcPr>
-                </a:tc>
-                <a:tc>
-                  <a:txBody>
-                    <a:bodyPr/>
-                    <a:lstStyle/>
-                    <a:p>
-                      <a:pPr indent="0" marL="0">
-                        <a:buNone/>
-                      </a:pPr>
-                      <a:r>
-                        <a:rPr lang="en-US" sz="1400" dirty="0">
-                          <a:solidFill>
-                            <a:schemeClr val="tx1"/>
-                          </a:solidFill>
-                          <a:latin typeface="Malgun Gothic" pitchFamily="34" charset="0"/>
-                          <a:ea typeface="Malgun Gothic" pitchFamily="34" charset="-122"/>
-                          <a:cs typeface="Malgun Gothic" pitchFamily="34" charset="-120"/>
-                        </a:rPr>
-                        <a:t>새 환경에서 결함과 정상의 점수 구간이 겹침</a:t>
-                      </a:r>
-                      <a:endParaRPr lang="en-US" sz="1400" dirty="0">
-                        <a:latin typeface="Malgun Gothic" charset="0"/>
-                        <a:ea typeface="Malgun Gothic" charset="0"/>
-                        <a:cs typeface="Malgun Gothic" charset="0"/>
-                      </a:endParaRPr>
-                    </a:p>
-                  </a:txBody>
-                  <a:tcPr marL="91440" marR="91440" marT="45720" marB="45720" anchor="ctr">
-                    <a:lnL w="9525" cap="flat" cmpd="sng" algn="ctr">
-                      <a:solidFill>
-                        <a:srgbClr val="3A3F48"/>
-                      </a:solidFill>
-                      <a:prstDash val="solid"/>
-                      <a:round/>
-                      <a:headEnd type="none" w="med" len="med"/>
-                      <a:tailEnd type="none" w="med" len="med"/>
-                    </a:lnL>
-                    <a:lnR w="9525" cap="flat" cmpd="sng" algn="ctr">
-                      <a:solidFill>
-                        <a:srgbClr val="3A3F48"/>
-                      </a:solidFill>
-                      <a:prstDash val="solid"/>
-                      <a:round/>
-                      <a:headEnd type="none" w="med" len="med"/>
-                      <a:tailEnd type="none" w="med" len="med"/>
-                    </a:lnR>
-                    <a:lnT w="9525" cap="flat" cmpd="sng" algn="ctr">
-                      <a:solidFill>
-                        <a:srgbClr val="3A3F48"/>
-                      </a:solidFill>
-                      <a:prstDash val="solid"/>
-                      <a:round/>
-                      <a:headEnd type="none" w="med" len="med"/>
-                      <a:tailEnd type="none" w="med" len="med"/>
-                    </a:lnT>
-                    <a:lnB w="9525" cap="flat" cmpd="sng" algn="ctr">
-                      <a:solidFill>
-                        <a:srgbClr val="3A3F48"/>
-                      </a:solidFill>
-                      <a:prstDash val="solid"/>
-                      <a:round/>
-                      <a:headEnd type="none" w="med" len="med"/>
-                      <a:tailEnd type="none" w="med" len="med"/>
-                    </a:lnB>
-                    <a:solidFill>
-                      <a:srgbClr val="23272F"/>
-                    </a:solidFill>
-                  </a:tcPr>
-                </a:tc>
-                <a:tc>
-                  <a:txBody>
-                    <a:bodyPr/>
-                    <a:lstStyle/>
-                    <a:p>
-                      <a:pPr algn="ctr" indent="0" marL="0">
-                        <a:buNone/>
-                      </a:pPr>
-                      <a:r>
-                        <a:rPr lang="en-US" sz="1400" b="1" dirty="0">
-                          <a:solidFill>
-                            <a:schemeClr val="accent6"/>
-                          </a:solidFill>
-                          <a:latin typeface="Malgun Gothic" pitchFamily="34" charset="0"/>
-                          <a:ea typeface="Malgun Gothic" pitchFamily="34" charset="-122"/>
-                          <a:cs typeface="Malgun Gothic" pitchFamily="34" charset="-120"/>
-                        </a:rPr>
-                        <a:t>확인</a:t>
-                      </a:r>
-                      <a:endParaRPr lang="en-US" sz="1400" dirty="0">
-                        <a:latin typeface="Malgun Gothic" charset="0"/>
-                        <a:ea typeface="Malgun Gothic" charset="0"/>
-                        <a:cs typeface="Malgun Gothic" charset="0"/>
-                      </a:endParaRPr>
-                    </a:p>
-                  </a:txBody>
-                  <a:tcPr marL="91440" marR="91440" marT="45720" marB="45720" anchor="ctr">
-                    <a:lnL w="9525" cap="flat" cmpd="sng" algn="ctr">
-                      <a:solidFill>
-                        <a:srgbClr val="3A3F48"/>
-                      </a:solidFill>
-                      <a:prstDash val="solid"/>
-                      <a:round/>
-                      <a:headEnd type="none" w="med" len="med"/>
-                      <a:tailEnd type="none" w="med" len="med"/>
-                    </a:lnL>
-                    <a:lnR w="9525" cap="flat" cmpd="sng" algn="ctr">
-                      <a:solidFill>
-                        <a:srgbClr val="3A3F48"/>
-                      </a:solidFill>
-                      <a:prstDash val="solid"/>
-                      <a:round/>
-                      <a:headEnd type="none" w="med" len="med"/>
-                      <a:tailEnd type="none" w="med" len="med"/>
-                    </a:lnR>
-                    <a:lnT w="9525" cap="flat" cmpd="sng" algn="ctr">
-                      <a:solidFill>
-                        <a:srgbClr val="3A3F48"/>
-                      </a:solidFill>
-                      <a:prstDash val="solid"/>
-                      <a:round/>
-                      <a:headEnd type="none" w="med" len="med"/>
-                      <a:tailEnd type="none" w="med" len="med"/>
-                    </a:lnT>
-                    <a:lnB w="9525" cap="flat" cmpd="sng" algn="ctr">
-                      <a:solidFill>
-                        <a:srgbClr val="3A3F48"/>
-                      </a:solidFill>
-                      <a:prstDash val="solid"/>
-                      <a:round/>
-                      <a:headEnd type="none" w="med" len="med"/>
-                      <a:tailEnd type="none" w="med" len="med"/>
-                    </a:lnB>
-                    <a:solidFill>
-                      <a:srgbClr val="23272F"/>
-                    </a:solidFill>
-                  </a:tcPr>
-                </a:tc>
-              </a:tr>
-            </a:tbl>
-          </a:graphicData>
-        </a:graphic>
-      </p:graphicFrame>
-      <p:sp>
-        <p:nvSpPr>
-          <p:cNvPr id="4" name="causes-legend"/>
-          <p:cNvSpPr txBox="1"/>
-          <p:nvPr/>
-        </p:nvSpPr>
-        <p:spPr>
-          <a:xfrm>
-            <a:off x="548640" y="6053328"/>
-            <a:ext cx="11094415" cy="274320"/>
-          </a:xfrm>
-          <a:prstGeom prst="rect">
-            <a:avLst/>
-          </a:prstGeom>
-          <a:noFill/>
-          <a:ln/>
-        </p:spPr>
-        <p:txBody>
-          <a:bodyPr wrap="square" lIns="0" tIns="0" rIns="0" bIns="0" rtlCol="0" anchor="t"/>
-          <a:lstStyle/>
-          <a:p>
-            <a:pPr indent="0" marL="0">
-              <a:buNone/>
-            </a:pPr>
-            <a:r>
-              <a:rPr lang="en-US" sz="1200" b="1" dirty="0">
-                <a:solidFill>
-                  <a:schemeClr val="accent6"/>
-                </a:solidFill>
-              </a:rPr>
-              <a:t>확인 </a:t>
-            </a:r>
-            <a:pPr indent="0" marL="0">
-              <a:buNone/>
-            </a:pPr>
-            <a:r>
-              <a:rPr lang="en-US" sz="1200" dirty="0">
-                <a:solidFill>
-                  <a:schemeClr val="tx2"/>
-                </a:solidFill>
-              </a:rPr>
-              <a:t>데이터로 직접 확인   </a:t>
-            </a:r>
-            <a:pPr indent="0" marL="0">
-              <a:buNone/>
-            </a:pPr>
-            <a:r>
-              <a:rPr lang="en-US" sz="1200" b="1" dirty="0">
-                <a:solidFill>
-                  <a:schemeClr val="accent3"/>
-                </a:solidFill>
-              </a:rPr>
-              <a:t>추정 </a:t>
-            </a:r>
-            <a:pPr indent="0" marL="0">
-              <a:buNone/>
-            </a:pPr>
-            <a:r>
-              <a:rPr lang="en-US" sz="1200" dirty="0">
-                <a:solidFill>
-                  <a:schemeClr val="tx2"/>
-                </a:solidFill>
-              </a:rPr>
-              <a:t>데이터와 맞지만 별도 검증 없음   </a:t>
-            </a:r>
-            <a:pPr indent="0" marL="0">
-              <a:buNone/>
-            </a:pPr>
-            <a:r>
-              <a:rPr lang="en-US" sz="1200" b="1" dirty="0">
-                <a:solidFill>
-                  <a:schemeClr val="tx2"/>
-                </a:solidFill>
-              </a:rPr>
-              <a:t>가설 </a:t>
-            </a:r>
-            <a:pPr indent="0" marL="0">
-              <a:buNone/>
-            </a:pPr>
-            <a:r>
-              <a:rPr lang="en-US" sz="1200" dirty="0">
-                <a:solidFill>
-                  <a:schemeClr val="tx2"/>
-                </a:solidFill>
-              </a:rPr>
-              <a:t>아직 검증 못 함</a:t>
-            </a:r>
-            <a:endParaRPr lang="en-US" sz="1200" dirty="0"/>
-          </a:p>
-        </p:txBody>
-      </p:sp>
-      <p:sp>
-        <p:nvSpPr>
-          <p:cNvPr id="6" name="Text 0"/>
-          <p:cNvSpPr/>
-          <p:nvPr>
-            <p:ph idx="101" type="body" hasCustomPrompt="1"/>
-          </p:nvPr>
-        </p:nvSpPr>
-        <p:spPr>
-          <a:xfrm>
-            <a:off x="548640" y="1005840"/>
-            <a:ext cx="11094415" cy="411480"/>
-          </a:xfrm>
-          <a:prstGeom prst="rect">
-            <a:avLst/>
-          </a:prstGeom>
-          <a:noFill/>
-          <a:ln/>
-        </p:spPr>
-        <p:txBody>
-          <a:bodyPr wrap="square" lIns="0" tIns="0" rIns="0" bIns="0" rtlCol="0" anchor="ctr"/>
-          <a:lstStyle/>
-          <a:p>
-            <a:pPr algn="l" indent="0" marL="0">
-              <a:buNone/>
-            </a:pPr>
-            <a:endParaRPr lang="en-US" sz="1500" dirty="0"/>
           </a:p>
         </p:txBody>
       </p:sp>

--- a/docs/submission/BatteryVision_발표.pptx
+++ b/docs/submission/BatteryVision_발표.pptx
@@ -119,13 +119,13 @@
   <p:extLst>
     <p:ext uri="{521415D9-36F7-43E2-AB2F-B90AF26B5E84}">
       <p14:sectionLst xmlns:p14="http://schemas.microsoft.com/office/powerpoint/2010/main">
-        <p14:section name="도입" id="{ea74ea0f-f449-7e35-c3dc-f73f6ff0372a}">
+        <p14:section name="도입" id="{25ebfbdf-5b03-d097-9371-40695ae54486}">
           <p14:sldIdLst>
             <p14:sldId id="256"/>
             <p14:sldId id="257"/>
           </p14:sldIdLst>
         </p14:section>
-        <p14:section name="실험" id="{b086b4b4-1337-c1e3-3f43-50eb28ce2ba0}">
+        <p14:section name="실험" id="{3be77ada-f206-8265-e6ef-c93bff4d1fd0}">
           <p14:sldIdLst>
             <p14:sldId id="258"/>
             <p14:sldId id="259"/>
@@ -133,18 +133,18 @@
             <p14:sldId id="261"/>
           </p14:sldIdLst>
         </p14:section>
-        <p14:section name="최적화" id="{bc3883a6-c347-7cf7-794b-2ca58f0ede9a}">
+        <p14:section name="최적화" id="{5d95946b-7547-21e0-b5dc-68b79882177f}">
           <p14:sldIdLst>
             <p14:sldId id="262"/>
           </p14:sldIdLst>
         </p14:section>
-        <p14:section name="검증" id="{9c4bad10-b721-c4b6-5373-2a8ea8929e5a}">
+        <p14:section name="검증" id="{ddce3dda-44d9-622a-ae8d-a3c5161eecfa}">
           <p14:sldIdLst>
             <p14:sldId id="263"/>
             <p14:sldId id="264"/>
           </p14:sldIdLst>
         </p14:section>
-        <p14:section name="정리" id="{6411d161-5d15-4921-938c-0273821b6067}">
+        <p14:section name="정리" id="{2bcfceac-4fc0-dcb4-ca3b-51138667b3ca}">
           <p14:sldIdLst>
             <p14:sldId id="265"/>
             <p14:sldId id="266"/>
@@ -2535,6 +2535,158 @@
 
 <file path=ppt/slideLayouts/slideLayout3.xml><?xml version="1.0" encoding="utf-8"?>
 <p:sldLayout xmlns:a="http://schemas.openxmlformats.org/drawingml/2006/main" xmlns:r="http://schemas.openxmlformats.org/officeDocument/2006/relationships" xmlns:p="http://schemas.openxmlformats.org/presentationml/2006/main" preserve="1">
+  <p:cSld name="CONTENT_T">
+    <p:bg>
+      <p:bgPr>
+        <a:solidFill>
+          <a:schemeClr val="bg1"/>
+        </a:solidFill>
+      </p:bgPr>
+    </p:bg>
+    <p:spTree>
+      <p:nvGrpSpPr>
+        <p:cNvPr id="1" name=""/>
+        <p:cNvGrpSpPr/>
+        <p:nvPr/>
+      </p:nvGrpSpPr>
+      <p:grpSpPr>
+        <a:xfrm>
+          <a:off x="0" y="0"/>
+          <a:ext cx="0" cy="0"/>
+          <a:chOff x="0" y="0"/>
+          <a:chExt cx="0" cy="0"/>
+        </a:xfrm>
+      </p:grpSpPr>
+      <p:sp>
+        <p:nvSpPr>
+          <p:cNvPr id="2" name="Text 0"/>
+          <p:cNvSpPr/>
+          <p:nvPr>
+            <p:ph idx="100" type="title" hasCustomPrompt="1"/>
+          </p:nvPr>
+        </p:nvSpPr>
+        <p:spPr>
+          <a:xfrm>
+            <a:off x="548640" y="347472"/>
+            <a:ext cx="11094415" cy="685800"/>
+          </a:xfrm>
+          <a:prstGeom prst="rect">
+            <a:avLst/>
+          </a:prstGeom>
+          <a:noFill/>
+          <a:ln/>
+        </p:spPr>
+        <p:txBody>
+          <a:bodyPr wrap="square" rtlCol="0"/>
+          <a:lstStyle>
+            <a:lvl1pPr algn="l" indent="0" marL="0">
+              <a:buNone/>
+              <a:defRPr lang="en-US" sz="3200" b="1" dirty="0">
+                <a:solidFill>
+                  <a:schemeClr val="tx1"/>
+                </a:solidFill>
+              </a:defRPr>
+            </a:lvl1pPr>
+          </a:lstStyle>
+          <a:p>
+            <a:pPr algn="l" indent="0" marL="0">
+              <a:buNone/>
+            </a:pPr>
+            <a:endParaRPr lang="en-US" sz="3200" dirty="0"/>
+          </a:p>
+        </p:txBody>
+      </p:sp>
+      <p:sp>
+        <p:nvSpPr>
+          <p:cNvPr id="3" name="Text 0"/>
+          <p:cNvSpPr/>
+          <p:nvPr/>
+        </p:nvSpPr>
+        <p:spPr>
+          <a:xfrm>
+            <a:off x="548640" y="6419088"/>
+            <a:ext cx="5486400" cy="274320"/>
+          </a:xfrm>
+          <a:prstGeom prst="rect">
+            <a:avLst/>
+          </a:prstGeom>
+          <a:noFill/>
+          <a:ln/>
+        </p:spPr>
+        <p:txBody>
+          <a:bodyPr wrap="square" lIns="0" tIns="0" rIns="0" bIns="0" rtlCol="0" anchor="ctr"/>
+          <a:lstStyle/>
+          <a:p>
+            <a:pPr indent="0" marL="0">
+              <a:buNone/>
+            </a:pPr>
+            <a:r>
+              <a:rPr lang="en-US" sz="1000" dirty="0">
+                <a:solidFill>
+                  <a:schemeClr val="tx2"/>
+                </a:solidFill>
+              </a:rPr>
+              <a:t>BatteryVision · Intel Geti 실습</a:t>
+            </a:r>
+            <a:endParaRPr lang="en-US" sz="1000" dirty="0"/>
+          </a:p>
+        </p:txBody>
+      </p:sp>
+      <p:sp>
+        <p:nvSpPr>
+          <p:cNvPr id="25" name="Slide Number Placeholder 0"/>
+          <p:cNvSpPr>
+            <a:spLocks noGrp="1"/>
+          </p:cNvSpPr>
+          <p:nvPr>
+            <p:ph type="sldNum" sz="quarter" idx="4294967295"/>
+          </p:nvPr>
+        </p:nvSpPr>
+        <p:spPr>
+          <a:xfrm>
+            <a:off x="11094415" y="6419088"/>
+            <a:ext cx="548640" cy="274320"/>
+          </a:xfrm>
+          <a:prstGeom prst="rect">
+            <a:avLst/>
+          </a:prstGeom>
+          <a:extLst>
+            <a:ext uri="{C572A759-6A51-4108-AA02-DFA0A04FC94B}">
+              <ma14:wrappingTextBoxFlag xmlns:ma14="http://schemas.microsoft.com/office/mac/drawingml/2011/main" val="0"/>
+            </a:ext>
+          </a:extLst>
+        </p:spPr>
+        <p:txBody>
+          <a:bodyPr/>
+          <a:lstStyle>
+            <a:lvl1pPr>
+              <a:defRPr sz="1000">
+                <a:solidFill>
+                  <a:schemeClr val="tx2"/>
+                </a:solidFill>
+              </a:defRPr>
+            </a:lvl1pPr>
+          </a:lstStyle>
+          <a:p>
+            <a:pPr algn="r"/>
+            <a:fld id="{F7021451-1387-4CA6-816F-3879F97B5CBC}" type="slidenum">
+              <a:rPr b="0" lang="en-US"/>
+              <a:t>1003</a:t>
+            </a:fld>
+            <a:endParaRPr lang="en-US"/>
+          </a:p>
+        </p:txBody>
+      </p:sp>
+    </p:spTree>
+  </p:cSld>
+  <p:clrMapOvr>
+    <a:masterClrMapping/>
+  </p:clrMapOvr>
+</p:sldLayout>
+</file>
+
+<file path=ppt/slideLayouts/slideLayout4.xml><?xml version="1.0" encoding="utf-8"?>
+<p:sldLayout xmlns:a="http://schemas.openxmlformats.org/drawingml/2006/main" xmlns:r="http://schemas.openxmlformats.org/officeDocument/2006/relationships" xmlns:p="http://schemas.openxmlformats.org/presentationml/2006/main" preserve="1">
   <p:cSld name="CONTENT">
     <p:bg>
       <p:bgPr>
@@ -2710,7 +2862,7 @@
             <a:pPr algn="r"/>
             <a:fld id="{F7021451-1387-4CA6-816F-3879F97B5CBC}" type="slidenum">
               <a:rPr b="0" lang="en-US"/>
-              <a:t>1003</a:t>
+              <a:t>1004</a:t>
             </a:fld>
             <a:endParaRPr lang="en-US"/>
           </a:p>
@@ -2793,6 +2945,7 @@
     <p:sldLayoutId id="2147483649" r:id="rId1"/>
     <p:sldLayoutId id="2147483650" r:id="rId2"/>
     <p:sldLayoutId id="2147483651" r:id="rId3"/>
+    <p:sldLayoutId id="2147483652" r:id="rId4"/>
   </p:sldLayoutIdLst>
   <p:hf sldNum="0" hdr="0" ftr="0" dt="0"/>
   <p:txStyles>
@@ -6395,36 +6548,6 @@
       </p:sp>
       <p:sp>
         <p:nvSpPr>
-          <p:cNvPr id="6" name="Text 0"/>
-          <p:cNvSpPr/>
-          <p:nvPr>
-            <p:ph idx="101" type="body" hasCustomPrompt="1"/>
-          </p:nvPr>
-        </p:nvSpPr>
-        <p:spPr>
-          <a:xfrm>
-            <a:off x="548640" y="1005840"/>
-            <a:ext cx="11094415" cy="411480"/>
-          </a:xfrm>
-          <a:prstGeom prst="rect">
-            <a:avLst/>
-          </a:prstGeom>
-          <a:noFill/>
-          <a:ln/>
-        </p:spPr>
-        <p:txBody>
-          <a:bodyPr wrap="square" lIns="0" tIns="0" rIns="0" bIns="0" rtlCol="0" anchor="ctr"/>
-          <a:lstStyle/>
-          <a:p>
-            <a:pPr algn="l" indent="0" marL="0">
-              <a:buNone/>
-            </a:pPr>
-            <a:endParaRPr lang="en-US" sz="1500" dirty="0"/>
-          </a:p>
-        </p:txBody>
-      </p:sp>
-      <p:sp>
-        <p:nvSpPr>
           <p:cNvPr id="25" name="Slide Number Placeholder 0"/>
           <p:cNvSpPr>
             <a:spLocks noGrp="1"/>
@@ -8110,11 +8233,11 @@
         <p:spPr>
           <a:xfrm>
             <a:off x="548640" y="1645920"/>
-            <a:ext cx="5394960" cy="4572000"/>
+            <a:ext cx="5394960" cy="1965960"/>
           </a:xfrm>
           <a:prstGeom prst="roundRect">
             <a:avLst>
-              <a:gd name="adj" fmla="val 1600"/>
+              <a:gd name="adj" fmla="val 3721"/>
             </a:avLst>
           </a:prstGeom>
           <a:solidFill>
@@ -8131,7 +8254,7 @@
         </p:nvSpPr>
         <p:spPr>
           <a:xfrm>
-            <a:off x="822960" y="1783080"/>
+            <a:off x="822960" y="1755648"/>
             <a:ext cx="4572000" cy="320040"/>
           </a:xfrm>
           <a:prstGeom prst="rect">
@@ -8161,14 +8284,43 @@
       </p:sp>
       <p:sp>
         <p:nvSpPr>
-          <p:cNvPr id="5" name="ds-b"/>
+          <p:cNvPr id="5" name="ds-k-bg-0"/>
+          <p:cNvSpPr/>
+          <p:nvPr/>
+        </p:nvSpPr>
+        <p:spPr>
+          <a:xfrm>
+            <a:off x="822960" y="2212848"/>
+            <a:ext cx="658368" cy="329184"/>
+          </a:xfrm>
+          <a:prstGeom prst="roundRect">
+            <a:avLst>
+              <a:gd name="adj" fmla="val 13889"/>
+            </a:avLst>
+          </a:prstGeom>
+          <a:solidFill>
+            <a:schemeClr val="accent1">
+              <a:alpha val="22000"/>
+            </a:schemeClr>
+          </a:solidFill>
+          <a:ln w="12700">
+            <a:solidFill>
+              <a:schemeClr val="accent1"/>
+            </a:solidFill>
+            <a:prstDash val="solid"/>
+          </a:ln>
+        </p:spPr>
+      </p:sp>
+      <p:sp>
+        <p:nvSpPr>
+          <p:cNvPr id="6" name="ds-k-0"/>
           <p:cNvSpPr txBox="1"/>
           <p:nvPr/>
         </p:nvSpPr>
         <p:spPr>
           <a:xfrm>
-            <a:off x="822960" y="2194560"/>
-            <a:ext cx="4892040" cy="1325880"/>
+            <a:off x="822960" y="2212848"/>
+            <a:ext cx="658368" cy="329184"/>
           </a:xfrm>
           <a:prstGeom prst="rect">
             <a:avLst/>
@@ -8177,15 +8329,47 @@
           <a:ln/>
         </p:spPr>
         <p:txBody>
-          <a:bodyPr wrap="square" lIns="0" tIns="0" rIns="0" bIns="0" rtlCol="0" anchor="t"/>
+          <a:bodyPr wrap="square" lIns="0" tIns="0" rIns="0" bIns="0" rtlCol="0" anchor="ctr"/>
           <a:lstStyle/>
           <a:p>
-            <a:pPr marL="342900" indent="-342900">
-              <a:spcAft>
-                <a:spcPts val="600"/>
-              </a:spcAft>
-              <a:buSzPct val="100000"/>
-              <a:buChar char="•"/>
+            <a:pPr algn="ctr" indent="0" marL="0">
+              <a:buNone/>
+            </a:pPr>
+            <a:r>
+              <a:rPr lang="en-US" sz="1300" b="1" dirty="0">
+                <a:solidFill>
+                  <a:schemeClr val="accent1"/>
+                </a:solidFill>
+              </a:rPr>
+              <a:t>출처</a:t>
+            </a:r>
+            <a:endParaRPr lang="en-US" sz="1300" dirty="0"/>
+          </a:p>
+        </p:txBody>
+      </p:sp>
+      <p:sp>
+        <p:nvSpPr>
+          <p:cNvPr id="7" name="ds-v-0"/>
+          <p:cNvSpPr txBox="1"/>
+          <p:nvPr/>
+        </p:nvSpPr>
+        <p:spPr>
+          <a:xfrm>
+            <a:off x="1627632" y="2212848"/>
+            <a:ext cx="4206240" cy="329184"/>
+          </a:xfrm>
+          <a:prstGeom prst="rect">
+            <a:avLst/>
+          </a:prstGeom>
+          <a:noFill/>
+          <a:ln/>
+        </p:spPr>
+        <p:txBody>
+          <a:bodyPr wrap="square" lIns="0" tIns="0" rIns="0" bIns="0" rtlCol="0" anchor="ctr"/>
+          <a:lstStyle/>
+          <a:p>
+            <a:pPr indent="0" marL="0">
+              <a:buNone/>
             </a:pPr>
             <a:r>
               <a:rPr lang="en-US" sz="1400" dirty="0">
@@ -8197,13 +8381,96 @@
             </a:r>
             <a:endParaRPr lang="en-US" sz="1400" dirty="0"/>
           </a:p>
-          <a:p>
-            <a:pPr marL="342900" indent="-342900">
-              <a:spcAft>
-                <a:spcPts val="600"/>
-              </a:spcAft>
-              <a:buSzPct val="100000"/>
-              <a:buChar char="•"/>
+        </p:txBody>
+      </p:sp>
+      <p:sp>
+        <p:nvSpPr>
+          <p:cNvPr id="8" name="ds-k-bg-1"/>
+          <p:cNvSpPr/>
+          <p:nvPr/>
+        </p:nvSpPr>
+        <p:spPr>
+          <a:xfrm>
+            <a:off x="822960" y="2651760"/>
+            <a:ext cx="658368" cy="329184"/>
+          </a:xfrm>
+          <a:prstGeom prst="roundRect">
+            <a:avLst>
+              <a:gd name="adj" fmla="val 13889"/>
+            </a:avLst>
+          </a:prstGeom>
+          <a:solidFill>
+            <a:schemeClr val="accent3">
+              <a:alpha val="22000"/>
+            </a:schemeClr>
+          </a:solidFill>
+          <a:ln w="12700">
+            <a:solidFill>
+              <a:schemeClr val="accent3"/>
+            </a:solidFill>
+            <a:prstDash val="solid"/>
+          </a:ln>
+        </p:spPr>
+      </p:sp>
+      <p:sp>
+        <p:nvSpPr>
+          <p:cNvPr id="9" name="ds-k-1"/>
+          <p:cNvSpPr txBox="1"/>
+          <p:nvPr/>
+        </p:nvSpPr>
+        <p:spPr>
+          <a:xfrm>
+            <a:off x="822960" y="2651760"/>
+            <a:ext cx="658368" cy="329184"/>
+          </a:xfrm>
+          <a:prstGeom prst="rect">
+            <a:avLst/>
+          </a:prstGeom>
+          <a:noFill/>
+          <a:ln/>
+        </p:spPr>
+        <p:txBody>
+          <a:bodyPr wrap="square" lIns="0" tIns="0" rIns="0" bIns="0" rtlCol="0" anchor="ctr"/>
+          <a:lstStyle/>
+          <a:p>
+            <a:pPr algn="ctr" indent="0" marL="0">
+              <a:buNone/>
+            </a:pPr>
+            <a:r>
+              <a:rPr lang="en-US" sz="1300" b="1" dirty="0">
+                <a:solidFill>
+                  <a:schemeClr val="accent3"/>
+                </a:solidFill>
+              </a:rPr>
+              <a:t>구성</a:t>
+            </a:r>
+            <a:endParaRPr lang="en-US" sz="1300" dirty="0"/>
+          </a:p>
+        </p:txBody>
+      </p:sp>
+      <p:sp>
+        <p:nvSpPr>
+          <p:cNvPr id="10" name="ds-v-1"/>
+          <p:cNvSpPr txBox="1"/>
+          <p:nvPr/>
+        </p:nvSpPr>
+        <p:spPr>
+          <a:xfrm>
+            <a:off x="1627632" y="2651760"/>
+            <a:ext cx="4206240" cy="329184"/>
+          </a:xfrm>
+          <a:prstGeom prst="rect">
+            <a:avLst/>
+          </a:prstGeom>
+          <a:noFill/>
+          <a:ln/>
+        </p:spPr>
+        <p:txBody>
+          <a:bodyPr wrap="square" lIns="0" tIns="0" rIns="0" bIns="0" rtlCol="0" anchor="ctr"/>
+          <a:lstStyle/>
+          <a:p>
+            <a:pPr indent="0" marL="0">
+              <a:buNone/>
             </a:pPr>
             <a:r>
               <a:rPr lang="en-US" sz="1400" dirty="0">
@@ -8215,13 +8482,96 @@
             </a:r>
             <a:endParaRPr lang="en-US" sz="1400" dirty="0"/>
           </a:p>
-          <a:p>
-            <a:pPr marL="342900" indent="-342900">
-              <a:spcAft>
-                <a:spcPts val="600"/>
-              </a:spcAft>
-              <a:buSzPct val="100000"/>
-              <a:buChar char="•"/>
+        </p:txBody>
+      </p:sp>
+      <p:sp>
+        <p:nvSpPr>
+          <p:cNvPr id="11" name="ds-k-bg-2"/>
+          <p:cNvSpPr/>
+          <p:nvPr/>
+        </p:nvSpPr>
+        <p:spPr>
+          <a:xfrm>
+            <a:off x="822960" y="3090672"/>
+            <a:ext cx="658368" cy="329184"/>
+          </a:xfrm>
+          <a:prstGeom prst="roundRect">
+            <a:avLst>
+              <a:gd name="adj" fmla="val 13889"/>
+            </a:avLst>
+          </a:prstGeom>
+          <a:solidFill>
+            <a:schemeClr val="accent6">
+              <a:alpha val="22000"/>
+            </a:schemeClr>
+          </a:solidFill>
+          <a:ln w="12700">
+            <a:solidFill>
+              <a:schemeClr val="accent6"/>
+            </a:solidFill>
+            <a:prstDash val="solid"/>
+          </a:ln>
+        </p:spPr>
+      </p:sp>
+      <p:sp>
+        <p:nvSpPr>
+          <p:cNvPr id="12" name="ds-k-2"/>
+          <p:cNvSpPr txBox="1"/>
+          <p:nvPr/>
+        </p:nvSpPr>
+        <p:spPr>
+          <a:xfrm>
+            <a:off x="822960" y="3090672"/>
+            <a:ext cx="658368" cy="329184"/>
+          </a:xfrm>
+          <a:prstGeom prst="rect">
+            <a:avLst/>
+          </a:prstGeom>
+          <a:noFill/>
+          <a:ln/>
+        </p:spPr>
+        <p:txBody>
+          <a:bodyPr wrap="square" lIns="0" tIns="0" rIns="0" bIns="0" rtlCol="0" anchor="ctr"/>
+          <a:lstStyle/>
+          <a:p>
+            <a:pPr algn="ctr" indent="0" marL="0">
+              <a:buNone/>
+            </a:pPr>
+            <a:r>
+              <a:rPr lang="en-US" sz="1300" b="1" dirty="0">
+                <a:solidFill>
+                  <a:schemeClr val="accent6"/>
+                </a:solidFill>
+              </a:rPr>
+              <a:t>목적</a:t>
+            </a:r>
+            <a:endParaRPr lang="en-US" sz="1300" dirty="0"/>
+          </a:p>
+        </p:txBody>
+      </p:sp>
+      <p:sp>
+        <p:nvSpPr>
+          <p:cNvPr id="13" name="ds-v-2"/>
+          <p:cNvSpPr txBox="1"/>
+          <p:nvPr/>
+        </p:nvSpPr>
+        <p:spPr>
+          <a:xfrm>
+            <a:off x="1627632" y="3090672"/>
+            <a:ext cx="4206240" cy="329184"/>
+          </a:xfrm>
+          <a:prstGeom prst="rect">
+            <a:avLst/>
+          </a:prstGeom>
+          <a:noFill/>
+          <a:ln/>
+        </p:spPr>
+        <p:txBody>
+          <a:bodyPr wrap="square" lIns="0" tIns="0" rIns="0" bIns="0" rtlCol="0" anchor="ctr"/>
+          <a:lstStyle/>
+          <a:p>
+            <a:pPr indent="0" marL="0">
+              <a:buNone/>
             </a:pPr>
             <a:r>
               <a:rPr lang="en-US" sz="1400" dirty="0">
@@ -8229,7 +8579,7 @@
                   <a:schemeClr val="tx1"/>
                 </a:solidFill>
               </a:rPr>
-              <a:t>목적: 모델별 성능 비교 · INT8 효과</a:t>
+              <a:t>모델별 성능 비교 · INT8 효과</a:t>
             </a:r>
             <a:endParaRPr lang="en-US" sz="1400" dirty="0"/>
           </a:p>
@@ -8237,13 +8587,35 @@
       </p:sp>
       <p:sp>
         <p:nvSpPr>
-          <p:cNvPr id="6" name="limit-h"/>
+          <p:cNvPr id="14" name="limit-card"/>
+          <p:cNvSpPr/>
+          <p:nvPr/>
+        </p:nvSpPr>
+        <p:spPr>
+          <a:xfrm>
+            <a:off x="548640" y="3794760"/>
+            <a:ext cx="5394960" cy="2423160"/>
+          </a:xfrm>
+          <a:prstGeom prst="roundRect">
+            <a:avLst>
+              <a:gd name="adj" fmla="val 3019"/>
+            </a:avLst>
+          </a:prstGeom>
+          <a:solidFill>
+            <a:schemeClr val="bg2"/>
+          </a:solidFill>
+          <a:ln/>
+        </p:spPr>
+      </p:sp>
+      <p:sp>
+        <p:nvSpPr>
+          <p:cNvPr id="15" name="limit-h"/>
           <p:cNvSpPr txBox="1"/>
           <p:nvPr/>
         </p:nvSpPr>
         <p:spPr>
           <a:xfrm>
-            <a:off x="822960" y="3611880"/>
+            <a:off x="822960" y="3904488"/>
             <a:ext cx="4572000" cy="320040"/>
           </a:xfrm>
           <a:prstGeom prst="rect">
@@ -8273,7 +8645,7 @@
       </p:sp>
       <p:pic>
         <p:nvPicPr>
-          <p:cNvPr id="7" name="bg-0" descr="C:\Users\user\_se4nchoi\batteryvision\docs\submission\build\img\bg_green.jpg">    </p:cNvPr>
+          <p:cNvPr id="16" name="bg-0" descr="C:\Users\user\_se4nchoi\batteryvision\docs\submission\build\img\bg_green.jpg">    </p:cNvPr>
           <p:cNvPicPr>
             <a:picLocks noChangeAspect="1"/>
           </p:cNvPicPr>
@@ -8287,8 +8659,8 @@
         </p:blipFill>
         <p:spPr>
           <a:xfrm>
-            <a:off x="822960" y="4023360"/>
-            <a:ext cx="1508760" cy="1508760"/>
+            <a:off x="822960" y="4297680"/>
+            <a:ext cx="1325880" cy="1325880"/>
           </a:xfrm>
           <a:prstGeom prst="rect">
             <a:avLst/>
@@ -8297,14 +8669,14 @@
       </p:pic>
       <p:sp>
         <p:nvSpPr>
-          <p:cNvPr id="8" name="bg-l-0"/>
+          <p:cNvPr id="17" name="bg-l-0"/>
           <p:cNvSpPr txBox="1"/>
           <p:nvPr/>
         </p:nvSpPr>
         <p:spPr>
           <a:xfrm>
-            <a:off x="822960" y="5577840"/>
-            <a:ext cx="1508760" cy="274320"/>
+            <a:off x="822960" y="5641848"/>
+            <a:ext cx="1325880" cy="237744"/>
           </a:xfrm>
           <a:prstGeom prst="rect">
             <a:avLst/>
@@ -8333,7 +8705,7 @@
       </p:sp>
       <p:pic>
         <p:nvPicPr>
-          <p:cNvPr id="9" name="bg-1" descr="C:\Users\user\_se4nchoi\batteryvision\docs\submission\build\img\bg_grey.jpg">    </p:cNvPr>
+          <p:cNvPr id="18" name="bg-1" descr="C:\Users\user\_se4nchoi\batteryvision\docs\submission\build\img\bg_grey.jpg">    </p:cNvPr>
           <p:cNvPicPr>
             <a:picLocks noChangeAspect="1"/>
           </p:cNvPicPr>
@@ -8347,8 +8719,8 @@
         </p:blipFill>
         <p:spPr>
           <a:xfrm>
-            <a:off x="2468880" y="4023360"/>
-            <a:ext cx="1508760" cy="1508760"/>
+            <a:off x="2514600" y="4297680"/>
+            <a:ext cx="1325880" cy="1325880"/>
           </a:xfrm>
           <a:prstGeom prst="rect">
             <a:avLst/>
@@ -8357,14 +8729,14 @@
       </p:pic>
       <p:sp>
         <p:nvSpPr>
-          <p:cNvPr id="10" name="bg-l-1"/>
+          <p:cNvPr id="19" name="bg-l-1"/>
           <p:cNvSpPr txBox="1"/>
           <p:nvPr/>
         </p:nvSpPr>
         <p:spPr>
           <a:xfrm>
-            <a:off x="2468880" y="5577840"/>
-            <a:ext cx="1508760" cy="274320"/>
+            <a:off x="2514600" y="5641848"/>
+            <a:ext cx="1325880" cy="237744"/>
           </a:xfrm>
           <a:prstGeom prst="rect">
             <a:avLst/>
@@ -8393,7 +8765,7 @@
       </p:sp>
       <p:pic>
         <p:nvPicPr>
-          <p:cNvPr id="11" name="bg-2" descr="C:\Users\user\_se4nchoi\batteryvision\docs\submission\build\img\bg_wood.jpg">    </p:cNvPr>
+          <p:cNvPr id="20" name="bg-2" descr="C:\Users\user\_se4nchoi\batteryvision\docs\submission\build\img\bg_wood.jpg">    </p:cNvPr>
           <p:cNvPicPr>
             <a:picLocks noChangeAspect="1"/>
           </p:cNvPicPr>
@@ -8407,8 +8779,8 @@
         </p:blipFill>
         <p:spPr>
           <a:xfrm>
-            <a:off x="4114800" y="4023360"/>
-            <a:ext cx="1508760" cy="1508760"/>
+            <a:off x="4206240" y="4297680"/>
+            <a:ext cx="1325880" cy="1325880"/>
           </a:xfrm>
           <a:prstGeom prst="rect">
             <a:avLst/>
@@ -8417,14 +8789,14 @@
       </p:pic>
       <p:sp>
         <p:nvSpPr>
-          <p:cNvPr id="12" name="bg-l-2"/>
+          <p:cNvPr id="21" name="bg-l-2"/>
           <p:cNvSpPr txBox="1"/>
           <p:nvPr/>
         </p:nvSpPr>
         <p:spPr>
           <a:xfrm>
-            <a:off x="4114800" y="5577840"/>
-            <a:ext cx="1508760" cy="274320"/>
+            <a:off x="4206240" y="5641848"/>
+            <a:ext cx="1325880" cy="237744"/>
           </a:xfrm>
           <a:prstGeom prst="rect">
             <a:avLst/>
@@ -8453,13 +8825,13 @@
       </p:sp>
       <p:sp>
         <p:nvSpPr>
-          <p:cNvPr id="13" name="limit-t"/>
+          <p:cNvPr id="22" name="limit-t"/>
           <p:cNvSpPr txBox="1"/>
           <p:nvPr/>
         </p:nvSpPr>
         <p:spPr>
           <a:xfrm>
-            <a:off x="822960" y="5852160"/>
+            <a:off x="822960" y="5897880"/>
             <a:ext cx="4937760" cy="274320"/>
           </a:xfrm>
           <a:prstGeom prst="rect">
@@ -8489,7 +8861,7 @@
       </p:sp>
       <p:sp>
         <p:nvSpPr>
-          <p:cNvPr id="14" name="grid-h"/>
+          <p:cNvPr id="23" name="grid-h"/>
           <p:cNvSpPr txBox="1"/>
           <p:nvPr/>
         </p:nvSpPr>
@@ -9642,7 +10014,7 @@
       </p:graphicFrame>
       <p:sp>
         <p:nvSpPr>
-          <p:cNvPr id="16" name="legend-card"/>
+          <p:cNvPr id="25" name="legend-card"/>
           <p:cNvSpPr/>
           <p:nvPr/>
         </p:nvSpPr>
@@ -9664,7 +10036,7 @@
       </p:sp>
       <p:sp>
         <p:nvSpPr>
-          <p:cNvPr id="17" name="legend"/>
+          <p:cNvPr id="26" name="legend"/>
           <p:cNvSpPr txBox="1"/>
           <p:nvPr/>
         </p:nvSpPr>
@@ -9748,7 +10120,7 @@
       </p:sp>
       <p:sp>
         <p:nvSpPr>
-          <p:cNvPr id="18" name="credit"/>
+          <p:cNvPr id="27" name="credit"/>
           <p:cNvSpPr txBox="1"/>
           <p:nvPr/>
         </p:nvSpPr>
@@ -9779,36 +10151,6 @@
               <a:t>데이터: Battery Defect Inspection v8 (Roboflow Universe), CC BY 4.0</a:t>
             </a:r>
             <a:endParaRPr lang="en-US" sz="900" dirty="0"/>
-          </a:p>
-        </p:txBody>
-      </p:sp>
-      <p:sp>
-        <p:nvSpPr>
-          <p:cNvPr id="20" name="Text 0"/>
-          <p:cNvSpPr/>
-          <p:nvPr>
-            <p:ph idx="101" type="body" hasCustomPrompt="1"/>
-          </p:nvPr>
-        </p:nvSpPr>
-        <p:spPr>
-          <a:xfrm>
-            <a:off x="548640" y="1005840"/>
-            <a:ext cx="11094415" cy="411480"/>
-          </a:xfrm>
-          <a:prstGeom prst="rect">
-            <a:avLst/>
-          </a:prstGeom>
-          <a:noFill/>
-          <a:ln/>
-        </p:spPr>
-        <p:txBody>
-          <a:bodyPr wrap="square" lIns="0" tIns="0" rIns="0" bIns="0" rtlCol="0" anchor="ctr"/>
-          <a:lstStyle/>
-          <a:p>
-            <a:pPr algn="l" indent="0" marL="0">
-              <a:buNone/>
-            </a:pPr>
-            <a:endParaRPr lang="en-US" sz="1500" dirty="0"/>
           </a:p>
         </p:txBody>
       </p:sp>

--- a/docs/submission/BatteryVision_발표.pptx
+++ b/docs/submission/BatteryVision_발표.pptx
@@ -119,13 +119,13 @@
   <p:extLst>
     <p:ext uri="{521415D9-36F7-43E2-AB2F-B90AF26B5E84}">
       <p14:sectionLst xmlns:p14="http://schemas.microsoft.com/office/powerpoint/2010/main">
-        <p14:section name="도입" id="{25ebfbdf-5b03-d097-9371-40695ae54486}">
+        <p14:section name="도입" id="{bfb26d72-edf6-947c-6c58-789fe32f95b6}">
           <p14:sldIdLst>
             <p14:sldId id="256"/>
             <p14:sldId id="257"/>
           </p14:sldIdLst>
         </p14:section>
-        <p14:section name="실험" id="{3be77ada-f206-8265-e6ef-c93bff4d1fd0}">
+        <p14:section name="실험" id="{1e411061-2a11-2c68-c5d2-4b799c9d8f57}">
           <p14:sldIdLst>
             <p14:sldId id="258"/>
             <p14:sldId id="259"/>
@@ -133,18 +133,18 @@
             <p14:sldId id="261"/>
           </p14:sldIdLst>
         </p14:section>
-        <p14:section name="최적화" id="{5d95946b-7547-21e0-b5dc-68b79882177f}">
+        <p14:section name="최적화" id="{ae30c18d-8311-8433-293e-46153f38f812}">
           <p14:sldIdLst>
             <p14:sldId id="262"/>
           </p14:sldIdLst>
         </p14:section>
-        <p14:section name="검증" id="{ddce3dda-44d9-622a-ae8d-a3c5161eecfa}">
+        <p14:section name="검증" id="{d9e4372e-c0c1-8c1b-d1b6-045d2d7e3241}">
           <p14:sldIdLst>
             <p14:sldId id="263"/>
             <p14:sldId id="264"/>
           </p14:sldIdLst>
         </p14:section>
-        <p14:section name="정리" id="{2bcfceac-4fc0-dcb4-ca3b-51138667b3ca}">
+        <p14:section name="정리" id="{5eb1d6ce-cb88-6259-2cee-8ac918b9ad14}">
           <p14:sldIdLst>
             <p14:sldId id="265"/>
             <p14:sldId id="266"/>
@@ -187,7 +187,7 @@
                 </a:solidFill>
                 <a:latin typeface="+mn-lt"/>
               </a:rPr>
-              <a:t>클래스별 AP@50 (1차 테스트 131장)</a:t>
+              <a:t>AP@50 (1차 테스트)</a:t>
             </a:r>
           </a:p>
         </c:rich>
@@ -557,7 +557,7 @@
                 </a:solidFill>
                 <a:latin typeface="+mn-lt"/>
               </a:rPr>
-              <a:t>CPU ms / 사진 (낮을수록 빠름)</a:t>
+              <a:t>CPU ms / 사진</a:t>
             </a:r>
           </a:p>
         </c:rich>
@@ -2535,6 +2535,77 @@
 
 <file path=ppt/slideLayouts/slideLayout3.xml><?xml version="1.0" encoding="utf-8"?>
 <p:sldLayout xmlns:a="http://schemas.openxmlformats.org/drawingml/2006/main" xmlns:r="http://schemas.openxmlformats.org/officeDocument/2006/relationships" xmlns:p="http://schemas.openxmlformats.org/presentationml/2006/main" preserve="1">
+  <p:cSld name="COVER_T">
+    <p:bg>
+      <p:bgPr>
+        <a:solidFill>
+          <a:schemeClr val="bg1"/>
+        </a:solidFill>
+      </p:bgPr>
+    </p:bg>
+    <p:spTree>
+      <p:nvGrpSpPr>
+        <p:cNvPr id="1" name=""/>
+        <p:cNvGrpSpPr/>
+        <p:nvPr/>
+      </p:nvGrpSpPr>
+      <p:grpSpPr>
+        <a:xfrm>
+          <a:off x="0" y="0"/>
+          <a:ext cx="0" cy="0"/>
+          <a:chOff x="0" y="0"/>
+          <a:chExt cx="0" cy="0"/>
+        </a:xfrm>
+      </p:grpSpPr>
+      <p:sp>
+        <p:nvSpPr>
+          <p:cNvPr id="2" name="Text 0"/>
+          <p:cNvSpPr/>
+          <p:nvPr>
+            <p:ph idx="100" type="title" hasCustomPrompt="1"/>
+          </p:nvPr>
+        </p:nvSpPr>
+        <p:spPr>
+          <a:xfrm>
+            <a:off x="548640" y="2606040"/>
+            <a:ext cx="4389120" cy="1645920"/>
+          </a:xfrm>
+          <a:prstGeom prst="rect">
+            <a:avLst/>
+          </a:prstGeom>
+          <a:noFill/>
+          <a:ln/>
+        </p:spPr>
+        <p:txBody>
+          <a:bodyPr wrap="square" rtlCol="0"/>
+          <a:lstStyle>
+            <a:lvl1pPr algn="l" indent="0" marL="0">
+              <a:buNone/>
+              <a:defRPr lang="en-US" sz="4000" b="1" dirty="0">
+                <a:solidFill>
+                  <a:schemeClr val="tx1"/>
+                </a:solidFill>
+              </a:defRPr>
+            </a:lvl1pPr>
+          </a:lstStyle>
+          <a:p>
+            <a:pPr algn="l" indent="0" marL="0">
+              <a:buNone/>
+            </a:pPr>
+            <a:endParaRPr lang="en-US" sz="4000" dirty="0"/>
+          </a:p>
+        </p:txBody>
+      </p:sp>
+    </p:spTree>
+  </p:cSld>
+  <p:clrMapOvr>
+    <a:masterClrMapping/>
+  </p:clrMapOvr>
+</p:sldLayout>
+</file>
+
+<file path=ppt/slideLayouts/slideLayout4.xml><?xml version="1.0" encoding="utf-8"?>
+<p:sldLayout xmlns:a="http://schemas.openxmlformats.org/drawingml/2006/main" xmlns:r="http://schemas.openxmlformats.org/officeDocument/2006/relationships" xmlns:p="http://schemas.openxmlformats.org/presentationml/2006/main" preserve="1">
   <p:cSld name="CONTENT_T">
     <p:bg>
       <p:bgPr>
@@ -2671,7 +2742,7 @@
             <a:pPr algn="r"/>
             <a:fld id="{F7021451-1387-4CA6-816F-3879F97B5CBC}" type="slidenum">
               <a:rPr b="0" lang="en-US"/>
-              <a:t>1003</a:t>
+              <a:t>1004</a:t>
             </a:fld>
             <a:endParaRPr lang="en-US"/>
           </a:p>
@@ -2685,7 +2756,7 @@
 </p:sldLayout>
 </file>
 
-<file path=ppt/slideLayouts/slideLayout4.xml><?xml version="1.0" encoding="utf-8"?>
+<file path=ppt/slideLayouts/slideLayout5.xml><?xml version="1.0" encoding="utf-8"?>
 <p:sldLayout xmlns:a="http://schemas.openxmlformats.org/drawingml/2006/main" xmlns:r="http://schemas.openxmlformats.org/officeDocument/2006/relationships" xmlns:p="http://schemas.openxmlformats.org/presentationml/2006/main" preserve="1">
   <p:cSld name="CONTENT">
     <p:bg>
@@ -2862,7 +2933,7 @@
             <a:pPr algn="r"/>
             <a:fld id="{F7021451-1387-4CA6-816F-3879F97B5CBC}" type="slidenum">
               <a:rPr b="0" lang="en-US"/>
-              <a:t>1004</a:t>
+              <a:t>1005</a:t>
             </a:fld>
             <a:endParaRPr lang="en-US"/>
           </a:p>
@@ -2946,6 +3017,7 @@
     <p:sldLayoutId id="2147483650" r:id="rId2"/>
     <p:sldLayoutId id="2147483651" r:id="rId3"/>
     <p:sldLayoutId id="2147483652" r:id="rId4"/>
+    <p:sldLayoutId id="2147483653" r:id="rId5"/>
   </p:sldLayoutIdLst>
   <p:hf sldNum="0" hdr="0" ftr="0" dt="0"/>
   <p:txStyles>
@@ -3677,7 +3749,7 @@
                   <a:schemeClr val="tx1"/>
                 </a:solidFill>
               </a:rPr>
-              <a:t>WHY ?</a:t>
+              <a:t>결과 분석</a:t>
             </a:r>
             <a:endParaRPr lang="en-US" sz="3200" dirty="0"/>
           </a:p>
@@ -3698,7 +3770,7 @@
           </p:nvPr>
         </p:nvGraphicFramePr>
         <p:xfrm>
-          <a:off x="548640" y="1325880"/>
+          <a:off x="548640" y="1554480"/>
           <a:ext cx="11094415" cy="914400"/>
         </p:xfrm>
         <a:graphic>
@@ -3707,11 +3779,11 @@
               <a:tblPr/>
               <a:tblGrid>
                 <a:gridCol w="502920"/>
-                <a:gridCol w="2606040"/>
-                <a:gridCol w="7114032"/>
+                <a:gridCol w="3108960"/>
+                <a:gridCol w="6611112"/>
                 <a:gridCol w="868680"/>
               </a:tblGrid>
-              <a:tr h="457200">
+              <a:tr h="420624">
                 <a:tc>
                   <a:txBody>
                     <a:bodyPr/>
@@ -3721,7 +3793,7 @@
                         <a:buNone/>
                       </a:pPr>
                       <a:r>
-                        <a:rPr lang="en-US" sz="1400" b="1" dirty="0">
+                        <a:rPr lang="en-US" sz="1500" b="1" dirty="0">
                           <a:solidFill>
                             <a:schemeClr val="tx2"/>
                           </a:solidFill>
@@ -3731,7 +3803,7 @@
                         </a:rPr>
                         <a:t>장</a:t>
                       </a:r>
-                      <a:endParaRPr lang="en-US" sz="1400" dirty="0">
+                      <a:endParaRPr lang="en-US" sz="1500" dirty="0">
                         <a:latin typeface="Malgun Gothic" charset="0"/>
                         <a:ea typeface="Malgun Gothic" charset="0"/>
                         <a:cs typeface="Malgun Gothic" charset="0"/>
@@ -3789,7 +3861,7 @@
                         <a:buNone/>
                       </a:pPr>
                       <a:r>
-                        <a:rPr lang="en-US" sz="1400" b="1" dirty="0">
+                        <a:rPr lang="en-US" sz="1500" b="1" dirty="0">
                           <a:solidFill>
                             <a:schemeClr val="tx2"/>
                           </a:solidFill>
@@ -3799,7 +3871,7 @@
                         </a:rPr>
                         <a:t>결과</a:t>
                       </a:r>
-                      <a:endParaRPr lang="en-US" sz="1400" dirty="0">
+                      <a:endParaRPr lang="en-US" sz="1500" dirty="0">
                         <a:latin typeface="Malgun Gothic" charset="0"/>
                         <a:ea typeface="Malgun Gothic" charset="0"/>
                         <a:cs typeface="Malgun Gothic" charset="0"/>
@@ -3857,7 +3929,7 @@
                         <a:buNone/>
                       </a:pPr>
                       <a:r>
-                        <a:rPr lang="en-US" sz="1400" b="1" dirty="0">
+                        <a:rPr lang="en-US" sz="1500" b="1" dirty="0">
                           <a:solidFill>
                             <a:schemeClr val="tx2"/>
                           </a:solidFill>
@@ -3867,7 +3939,7 @@
                         </a:rPr>
                         <a:t>원인</a:t>
                       </a:r>
-                      <a:endParaRPr lang="en-US" sz="1400" dirty="0">
+                      <a:endParaRPr lang="en-US" sz="1500" dirty="0">
                         <a:latin typeface="Malgun Gothic" charset="0"/>
                         <a:ea typeface="Malgun Gothic" charset="0"/>
                         <a:cs typeface="Malgun Gothic" charset="0"/>
@@ -3925,7 +3997,7 @@
                         <a:buNone/>
                       </a:pPr>
                       <a:r>
-                        <a:rPr lang="en-US" sz="1400" b="1" dirty="0">
+                        <a:rPr lang="en-US" sz="1500" b="1" dirty="0">
                           <a:solidFill>
                             <a:schemeClr val="tx2"/>
                           </a:solidFill>
@@ -3935,7 +4007,7 @@
                         </a:rPr>
                         <a:t>근거</a:t>
                       </a:r>
-                      <a:endParaRPr lang="en-US" sz="1400" dirty="0">
+                      <a:endParaRPr lang="en-US" sz="1500" dirty="0">
                         <a:latin typeface="Malgun Gothic" charset="0"/>
                         <a:ea typeface="Malgun Gothic" charset="0"/>
                         <a:cs typeface="Malgun Gothic" charset="0"/>
@@ -3985,7 +4057,7 @@
                   </a:tcPr>
                 </a:tc>
               </a:tr>
-              <a:tr h="457200">
+              <a:tr h="420624">
                 <a:tc>
                   <a:txBody>
                     <a:bodyPr/>
@@ -3995,7 +4067,7 @@
                         <a:buNone/>
                       </a:pPr>
                       <a:r>
-                        <a:rPr lang="en-US" sz="1400" dirty="0">
+                        <a:rPr lang="en-US" sz="1500" dirty="0">
                           <a:solidFill>
                             <a:schemeClr val="tx2"/>
                           </a:solidFill>
@@ -4005,7 +4077,7 @@
                         </a:rPr>
                         <a:t>2</a:t>
                       </a:r>
-                      <a:endParaRPr lang="en-US" sz="1400" dirty="0">
+                      <a:endParaRPr lang="en-US" sz="1500" dirty="0">
                         <a:latin typeface="Malgun Gothic" charset="0"/>
                         <a:ea typeface="Malgun Gothic" charset="0"/>
                         <a:cs typeface="Malgun Gothic" charset="0"/>
@@ -4063,7 +4135,7 @@
                         <a:buNone/>
                       </a:pPr>
                       <a:r>
-                        <a:rPr lang="en-US" sz="1400" b="1" dirty="0">
+                        <a:rPr lang="en-US" sz="1500" b="1" dirty="0">
                           <a:solidFill>
                             <a:schemeClr val="tx1"/>
                           </a:solidFill>
@@ -4073,7 +4145,7 @@
                         </a:rPr>
                         <a:t>Scratch 식별 어려움</a:t>
                       </a:r>
-                      <a:endParaRPr lang="en-US" sz="1400" dirty="0">
+                      <a:endParaRPr lang="en-US" sz="1500" dirty="0">
                         <a:latin typeface="Malgun Gothic" charset="0"/>
                         <a:ea typeface="Malgun Gothic" charset="0"/>
                         <a:cs typeface="Malgun Gothic" charset="0"/>
@@ -4131,7 +4203,7 @@
                         <a:buNone/>
                       </a:pPr>
                       <a:r>
-                        <a:rPr lang="en-US" sz="1400" dirty="0">
+                        <a:rPr lang="en-US" sz="1500" dirty="0">
                           <a:solidFill>
                             <a:schemeClr val="tx1"/>
                           </a:solidFill>
@@ -4139,9 +4211,9 @@
                           <a:ea typeface="Malgun Gothic" pitchFamily="34" charset="-122"/>
                           <a:cs typeface="Malgun Gothic" pitchFamily="34" charset="-120"/>
                         </a:rPr>
-                        <a:t>반사·나무결과 비슷한 가는 선. 배경 오검출 16건 중 13건이 scratch</a:t>
+                        <a:t>반사·나무결 같은 가는 선</a:t>
                       </a:r>
-                      <a:endParaRPr lang="en-US" sz="1400" dirty="0">
+                      <a:endParaRPr lang="en-US" sz="1500" dirty="0">
                         <a:latin typeface="Malgun Gothic" charset="0"/>
                         <a:ea typeface="Malgun Gothic" charset="0"/>
                         <a:cs typeface="Malgun Gothic" charset="0"/>
@@ -4199,7 +4271,7 @@
                         <a:buNone/>
                       </a:pPr>
                       <a:r>
-                        <a:rPr lang="en-US" sz="1400" b="1" dirty="0">
+                        <a:rPr lang="en-US" sz="1500" b="1" dirty="0">
                           <a:solidFill>
                             <a:schemeClr val="accent6"/>
                           </a:solidFill>
@@ -4209,7 +4281,7 @@
                         </a:rPr>
                         <a:t>확인</a:t>
                       </a:r>
-                      <a:endParaRPr lang="en-US" sz="1400" dirty="0">
+                      <a:endParaRPr lang="en-US" sz="1500" dirty="0">
                         <a:latin typeface="Malgun Gothic" charset="0"/>
                         <a:ea typeface="Malgun Gothic" charset="0"/>
                         <a:cs typeface="Malgun Gothic" charset="0"/>
@@ -4259,7 +4331,7 @@
                   </a:tcPr>
                 </a:tc>
               </a:tr>
-              <a:tr h="457200">
+              <a:tr h="420624">
                 <a:tc>
                   <a:txBody>
                     <a:bodyPr/>
@@ -4269,7 +4341,7 @@
                         <a:buNone/>
                       </a:pPr>
                       <a:r>
-                        <a:rPr lang="en-US" sz="1400" dirty="0">
+                        <a:rPr lang="en-US" sz="1500" dirty="0">
                           <a:solidFill>
                             <a:schemeClr val="tx2"/>
                           </a:solidFill>
@@ -4279,7 +4351,7 @@
                         </a:rPr>
                         <a:t>4</a:t>
                       </a:r>
-                      <a:endParaRPr lang="en-US" sz="1400" dirty="0">
+                      <a:endParaRPr lang="en-US" sz="1500" dirty="0">
                         <a:latin typeface="Malgun Gothic" charset="0"/>
                         <a:ea typeface="Malgun Gothic" charset="0"/>
                         <a:cs typeface="Malgun Gothic" charset="0"/>
@@ -4337,7 +4409,7 @@
                         <a:buNone/>
                       </a:pPr>
                       <a:r>
-                        <a:rPr lang="en-US" sz="1400" b="1" dirty="0">
+                        <a:rPr lang="en-US" sz="1500" b="1" dirty="0">
                           <a:solidFill>
                             <a:schemeClr val="tx1"/>
                           </a:solidFill>
@@ -4347,7 +4419,7 @@
                         </a:rPr>
                         <a:t>과대평가 수치 (93%)</a:t>
                       </a:r>
-                      <a:endParaRPr lang="en-US" sz="1400" dirty="0">
+                      <a:endParaRPr lang="en-US" sz="1500" dirty="0">
                         <a:latin typeface="Malgun Gothic" charset="0"/>
                         <a:ea typeface="Malgun Gothic" charset="0"/>
                         <a:cs typeface="Malgun Gothic" charset="0"/>
@@ -4405,7 +4477,7 @@
                         <a:buNone/>
                       </a:pPr>
                       <a:r>
-                        <a:rPr lang="en-US" sz="1400" dirty="0">
+                        <a:rPr lang="en-US" sz="1500" dirty="0">
                           <a:solidFill>
                             <a:schemeClr val="tx1"/>
                           </a:solidFill>
@@ -4413,9 +4485,9 @@
                           <a:ea typeface="Malgun Gothic" pitchFamily="34" charset="-122"/>
                           <a:cs typeface="Malgun Gothic" pitchFamily="34" charset="-120"/>
                         </a:rPr>
-                        <a:t>테스트 사진도 학습에 포함. 복사본 22장, 같은 촬영 세션</a:t>
+                        <a:t>테스트 사진 학습 포함 · 복사본 22장</a:t>
                       </a:r>
-                      <a:endParaRPr lang="en-US" sz="1400" dirty="0">
+                      <a:endParaRPr lang="en-US" sz="1500" dirty="0">
                         <a:latin typeface="Malgun Gothic" charset="0"/>
                         <a:ea typeface="Malgun Gothic" charset="0"/>
                         <a:cs typeface="Malgun Gothic" charset="0"/>
@@ -4473,7 +4545,7 @@
                         <a:buNone/>
                       </a:pPr>
                       <a:r>
-                        <a:rPr lang="en-US" sz="1400" b="1" dirty="0">
+                        <a:rPr lang="en-US" sz="1500" b="1" dirty="0">
                           <a:solidFill>
                             <a:schemeClr val="accent6"/>
                           </a:solidFill>
@@ -4483,7 +4555,7 @@
                         </a:rPr>
                         <a:t>확인</a:t>
                       </a:r>
-                      <a:endParaRPr lang="en-US" sz="1400" dirty="0">
+                      <a:endParaRPr lang="en-US" sz="1500" dirty="0">
                         <a:latin typeface="Malgun Gothic" charset="0"/>
                         <a:ea typeface="Malgun Gothic" charset="0"/>
                         <a:cs typeface="Malgun Gothic" charset="0"/>
@@ -4533,7 +4605,7 @@
                   </a:tcPr>
                 </a:tc>
               </a:tr>
-              <a:tr h="457200">
+              <a:tr h="420624">
                 <a:tc>
                   <a:txBody>
                     <a:bodyPr/>
@@ -4543,7 +4615,7 @@
                         <a:buNone/>
                       </a:pPr>
                       <a:r>
-                        <a:rPr lang="en-US" sz="1400" dirty="0">
+                        <a:rPr lang="en-US" sz="1500" dirty="0">
                           <a:solidFill>
                             <a:schemeClr val="tx2"/>
                           </a:solidFill>
@@ -4553,7 +4625,7 @@
                         </a:rPr>
                         <a:t>5</a:t>
                       </a:r>
-                      <a:endParaRPr lang="en-US" sz="1400" dirty="0">
+                      <a:endParaRPr lang="en-US" sz="1500" dirty="0">
                         <a:latin typeface="Malgun Gothic" charset="0"/>
                         <a:ea typeface="Malgun Gothic" charset="0"/>
                         <a:cs typeface="Malgun Gothic" charset="0"/>
@@ -4611,7 +4683,7 @@
                         <a:buNone/>
                       </a:pPr>
                       <a:r>
-                        <a:rPr lang="en-US" sz="1400" b="1" dirty="0">
+                        <a:rPr lang="en-US" sz="1500" b="1" dirty="0">
                           <a:solidFill>
                             <a:schemeClr val="tx1"/>
                           </a:solidFill>
@@ -4621,7 +4693,7 @@
                         </a:rPr>
                         <a:t>낙관적인 Geti score</a:t>
                       </a:r>
-                      <a:endParaRPr lang="en-US" sz="1400" dirty="0">
+                      <a:endParaRPr lang="en-US" sz="1500" dirty="0">
                         <a:latin typeface="Malgun Gothic" charset="0"/>
                         <a:ea typeface="Malgun Gothic" charset="0"/>
                         <a:cs typeface="Malgun Gothic" charset="0"/>
@@ -4679,7 +4751,7 @@
                         <a:buNone/>
                       </a:pPr>
                       <a:r>
-                        <a:rPr lang="en-US" sz="1400" dirty="0">
+                        <a:rPr lang="en-US" sz="1500" dirty="0">
                           <a:solidFill>
                             <a:schemeClr val="tx1"/>
                           </a:solidFill>
@@ -4687,9 +4759,9 @@
                           <a:ea typeface="Malgun Gothic" pitchFamily="34" charset="-122"/>
                           <a:cs typeface="Malgun Gothic" pitchFamily="34" charset="-120"/>
                         </a:rPr>
-                        <a:t>원본 1장당 증강본 3장이 Geti 학습·테스트에 나뉘어 들어갔을 가능성</a:t>
+                        <a:t>증강본이 학습·테스트에 섞임</a:t>
                       </a:r>
-                      <a:endParaRPr lang="en-US" sz="1400" dirty="0">
+                      <a:endParaRPr lang="en-US" sz="1500" dirty="0">
                         <a:latin typeface="Malgun Gothic" charset="0"/>
                         <a:ea typeface="Malgun Gothic" charset="0"/>
                         <a:cs typeface="Malgun Gothic" charset="0"/>
@@ -4747,7 +4819,7 @@
                         <a:buNone/>
                       </a:pPr>
                       <a:r>
-                        <a:rPr lang="en-US" sz="1400" b="1" dirty="0">
+                        <a:rPr lang="en-US" sz="1500" b="1" dirty="0">
                           <a:solidFill>
                             <a:schemeClr val="accent3"/>
                           </a:solidFill>
@@ -4757,7 +4829,7 @@
                         </a:rPr>
                         <a:t>추정</a:t>
                       </a:r>
-                      <a:endParaRPr lang="en-US" sz="1400" dirty="0">
+                      <a:endParaRPr lang="en-US" sz="1500" dirty="0">
                         <a:latin typeface="Malgun Gothic" charset="0"/>
                         <a:ea typeface="Malgun Gothic" charset="0"/>
                         <a:cs typeface="Malgun Gothic" charset="0"/>
@@ -4807,7 +4879,7 @@
                   </a:tcPr>
                 </a:tc>
               </a:tr>
-              <a:tr h="457200">
+              <a:tr h="420624">
                 <a:tc>
                   <a:txBody>
                     <a:bodyPr/>
@@ -4817,7 +4889,7 @@
                         <a:buNone/>
                       </a:pPr>
                       <a:r>
-                        <a:rPr lang="en-US" sz="1400" dirty="0">
+                        <a:rPr lang="en-US" sz="1500" dirty="0">
                           <a:solidFill>
                             <a:schemeClr val="tx2"/>
                           </a:solidFill>
@@ -4827,7 +4899,7 @@
                         </a:rPr>
                         <a:t>5</a:t>
                       </a:r>
-                      <a:endParaRPr lang="en-US" sz="1400" dirty="0">
+                      <a:endParaRPr lang="en-US" sz="1500" dirty="0">
                         <a:latin typeface="Malgun Gothic" charset="0"/>
                         <a:ea typeface="Malgun Gothic" charset="0"/>
                         <a:cs typeface="Malgun Gothic" charset="0"/>
@@ -4885,7 +4957,7 @@
                         <a:buNone/>
                       </a:pPr>
                       <a:r>
-                        <a:rPr lang="en-US" sz="1400" b="1" dirty="0">
+                        <a:rPr lang="en-US" sz="1500" b="1" dirty="0">
                           <a:solidFill>
                             <a:schemeClr val="tx1"/>
                           </a:solidFill>
@@ -4895,7 +4967,7 @@
                         </a:rPr>
                         <a:t>ATSS 최고평가</a:t>
                       </a:r>
-                      <a:endParaRPr lang="en-US" sz="1400" dirty="0">
+                      <a:endParaRPr lang="en-US" sz="1500" dirty="0">
                         <a:latin typeface="Malgun Gothic" charset="0"/>
                         <a:ea typeface="Malgun Gothic" charset="0"/>
                         <a:cs typeface="Malgun Gothic" charset="0"/>
@@ -4953,7 +5025,7 @@
                         <a:buNone/>
                       </a:pPr>
                       <a:r>
-                        <a:rPr lang="en-US" sz="1400" dirty="0">
+                        <a:rPr lang="en-US" sz="1500" dirty="0">
                           <a:solidFill>
                             <a:schemeClr val="tx1"/>
                           </a:solidFill>
@@ -4961,9 +5033,9 @@
                           <a:ea typeface="Malgun Gothic" pitchFamily="34" charset="-122"/>
                           <a:cs typeface="Malgun Gothic" pitchFamily="34" charset="-120"/>
                         </a:rPr>
-                        <a:t>입력 해상도 차이 (992×800 vs 640×640). 32px 미만 박스에서 격차 최대 (0.86 vs 0.80)</a:t>
+                        <a:t>입력 해상도 992×800 vs 640×640</a:t>
                       </a:r>
-                      <a:endParaRPr lang="en-US" sz="1400" dirty="0">
+                      <a:endParaRPr lang="en-US" sz="1500" dirty="0">
                         <a:latin typeface="Malgun Gothic" charset="0"/>
                         <a:ea typeface="Malgun Gothic" charset="0"/>
                         <a:cs typeface="Malgun Gothic" charset="0"/>
@@ -5021,7 +5093,7 @@
                         <a:buNone/>
                       </a:pPr>
                       <a:r>
-                        <a:rPr lang="en-US" sz="1400" b="1" dirty="0">
+                        <a:rPr lang="en-US" sz="1500" b="1" dirty="0">
                           <a:solidFill>
                             <a:schemeClr val="accent3"/>
                           </a:solidFill>
@@ -5031,7 +5103,7 @@
                         </a:rPr>
                         <a:t>추정</a:t>
                       </a:r>
-                      <a:endParaRPr lang="en-US" sz="1400" dirty="0">
+                      <a:endParaRPr lang="en-US" sz="1500" dirty="0">
                         <a:latin typeface="Malgun Gothic" charset="0"/>
                         <a:ea typeface="Malgun Gothic" charset="0"/>
                         <a:cs typeface="Malgun Gothic" charset="0"/>
@@ -5081,7 +5153,7 @@
                   </a:tcPr>
                 </a:tc>
               </a:tr>
-              <a:tr h="457200">
+              <a:tr h="420624">
                 <a:tc>
                   <a:txBody>
                     <a:bodyPr/>
@@ -5091,7 +5163,7 @@
                         <a:buNone/>
                       </a:pPr>
                       <a:r>
-                        <a:rPr lang="en-US" sz="1400" dirty="0">
+                        <a:rPr lang="en-US" sz="1500" dirty="0">
                           <a:solidFill>
                             <a:schemeClr val="tx2"/>
                           </a:solidFill>
@@ -5101,7 +5173,7 @@
                         </a:rPr>
                         <a:t>6</a:t>
                       </a:r>
-                      <a:endParaRPr lang="en-US" sz="1400" dirty="0">
+                      <a:endParaRPr lang="en-US" sz="1500" dirty="0">
                         <a:latin typeface="Malgun Gothic" charset="0"/>
                         <a:ea typeface="Malgun Gothic" charset="0"/>
                         <a:cs typeface="Malgun Gothic" charset="0"/>
@@ -5159,7 +5231,7 @@
                         <a:buNone/>
                       </a:pPr>
                       <a:r>
-                        <a:rPr lang="en-US" sz="1400" b="1" dirty="0">
+                        <a:rPr lang="en-US" sz="1500" b="1" dirty="0">
                           <a:solidFill>
                             <a:schemeClr val="tx1"/>
                           </a:solidFill>
@@ -5169,7 +5241,7 @@
                         </a:rPr>
                         <a:t>나무 배경 취약 (33%)</a:t>
                       </a:r>
-                      <a:endParaRPr lang="en-US" sz="1400" dirty="0">
+                      <a:endParaRPr lang="en-US" sz="1500" dirty="0">
                         <a:latin typeface="Malgun Gothic" charset="0"/>
                         <a:ea typeface="Malgun Gothic" charset="0"/>
                         <a:cs typeface="Malgun Gothic" charset="0"/>
@@ -5227,7 +5299,7 @@
                         <a:buNone/>
                       </a:pPr>
                       <a:r>
-                        <a:rPr lang="en-US" sz="1400" dirty="0">
+                        <a:rPr lang="en-US" sz="1500" dirty="0">
                           <a:solidFill>
                             <a:schemeClr val="tx1"/>
                           </a:solidFill>
@@ -5235,9 +5307,9 @@
                           <a:ea typeface="Malgun Gothic" pitchFamily="34" charset="-122"/>
                           <a:cs typeface="Malgun Gothic" pitchFamily="34" charset="-120"/>
                         </a:rPr>
-                        <a:t>나무결도 scratch처럼 가는 선</a:t>
+                        <a:t>나무결 = 가는 선</a:t>
                       </a:r>
-                      <a:endParaRPr lang="en-US" sz="1400" dirty="0">
+                      <a:endParaRPr lang="en-US" sz="1500" dirty="0">
                         <a:latin typeface="Malgun Gothic" charset="0"/>
                         <a:ea typeface="Malgun Gothic" charset="0"/>
                         <a:cs typeface="Malgun Gothic" charset="0"/>
@@ -5295,7 +5367,7 @@
                         <a:buNone/>
                       </a:pPr>
                       <a:r>
-                        <a:rPr lang="en-US" sz="1400" b="1" dirty="0">
+                        <a:rPr lang="en-US" sz="1500" b="1" dirty="0">
                           <a:solidFill>
                             <a:schemeClr val="accent3"/>
                           </a:solidFill>
@@ -5305,7 +5377,7 @@
                         </a:rPr>
                         <a:t>추정</a:t>
                       </a:r>
-                      <a:endParaRPr lang="en-US" sz="1400" dirty="0">
+                      <a:endParaRPr lang="en-US" sz="1500" dirty="0">
                         <a:latin typeface="Malgun Gothic" charset="0"/>
                         <a:ea typeface="Malgun Gothic" charset="0"/>
                         <a:cs typeface="Malgun Gothic" charset="0"/>
@@ -5355,7 +5427,7 @@
                   </a:tcPr>
                 </a:tc>
               </a:tr>
-              <a:tr h="457200">
+              <a:tr h="420624">
                 <a:tc>
                   <a:txBody>
                     <a:bodyPr/>
@@ -5365,7 +5437,7 @@
                         <a:buNone/>
                       </a:pPr>
                       <a:r>
-                        <a:rPr lang="en-US" sz="1400" dirty="0">
+                        <a:rPr lang="en-US" sz="1500" dirty="0">
                           <a:solidFill>
                             <a:schemeClr val="tx2"/>
                           </a:solidFill>
@@ -5375,7 +5447,7 @@
                         </a:rPr>
                         <a:t>7</a:t>
                       </a:r>
-                      <a:endParaRPr lang="en-US" sz="1400" dirty="0">
+                      <a:endParaRPr lang="en-US" sz="1500" dirty="0">
                         <a:latin typeface="Malgun Gothic" charset="0"/>
                         <a:ea typeface="Malgun Gothic" charset="0"/>
                         <a:cs typeface="Malgun Gothic" charset="0"/>
@@ -5433,7 +5505,7 @@
                         <a:buNone/>
                       </a:pPr>
                       <a:r>
-                        <a:rPr lang="en-US" sz="1400" b="1" dirty="0">
+                        <a:rPr lang="en-US" sz="1500" b="1" dirty="0">
                           <a:solidFill>
                             <a:schemeClr val="tx1"/>
                           </a:solidFill>
@@ -5443,7 +5515,7 @@
                         </a:rPr>
                         <a:t>INT8 놓침 증가</a:t>
                       </a:r>
-                      <a:endParaRPr lang="en-US" sz="1400" dirty="0">
+                      <a:endParaRPr lang="en-US" sz="1500" dirty="0">
                         <a:latin typeface="Malgun Gothic" charset="0"/>
                         <a:ea typeface="Malgun Gothic" charset="0"/>
                         <a:cs typeface="Malgun Gothic" charset="0"/>
@@ -5501,7 +5573,7 @@
                         <a:buNone/>
                       </a:pPr>
                       <a:r>
-                        <a:rPr lang="en-US" sz="1400" dirty="0">
+                        <a:rPr lang="en-US" sz="1500" dirty="0">
                           <a:solidFill>
                             <a:schemeClr val="tx1"/>
                           </a:solidFill>
@@ -5509,9 +5581,9 @@
                           <a:ea typeface="Malgun Gothic" pitchFamily="34" charset="-122"/>
                           <a:cs typeface="Malgun Gothic" pitchFamily="34" charset="-120"/>
                         </a:rPr>
-                        <a:t>양자화 후 점수 소폭 하락, 0.30 근처 결함이 기준 미달</a:t>
+                        <a:t>양자화로 점수 소폭 하락</a:t>
                       </a:r>
-                      <a:endParaRPr lang="en-US" sz="1400" dirty="0">
+                      <a:endParaRPr lang="en-US" sz="1500" dirty="0">
                         <a:latin typeface="Malgun Gothic" charset="0"/>
                         <a:ea typeface="Malgun Gothic" charset="0"/>
                         <a:cs typeface="Malgun Gothic" charset="0"/>
@@ -5569,7 +5641,7 @@
                         <a:buNone/>
                       </a:pPr>
                       <a:r>
-                        <a:rPr lang="en-US" sz="1400" b="1" dirty="0">
+                        <a:rPr lang="en-US" sz="1500" b="1" dirty="0">
                           <a:solidFill>
                             <a:schemeClr val="accent3"/>
                           </a:solidFill>
@@ -5579,7 +5651,7 @@
                         </a:rPr>
                         <a:t>추정</a:t>
                       </a:r>
-                      <a:endParaRPr lang="en-US" sz="1400" dirty="0">
+                      <a:endParaRPr lang="en-US" sz="1500" dirty="0">
                         <a:latin typeface="Malgun Gothic" charset="0"/>
                         <a:ea typeface="Malgun Gothic" charset="0"/>
                         <a:cs typeface="Malgun Gothic" charset="0"/>
@@ -5629,7 +5701,7 @@
                   </a:tcPr>
                 </a:tc>
               </a:tr>
-              <a:tr h="457200">
+              <a:tr h="420624">
                 <a:tc>
                   <a:txBody>
                     <a:bodyPr/>
@@ -5639,7 +5711,7 @@
                         <a:buNone/>
                       </a:pPr>
                       <a:r>
-                        <a:rPr lang="en-US" sz="1400" dirty="0">
+                        <a:rPr lang="en-US" sz="1500" dirty="0">
                           <a:solidFill>
                             <a:schemeClr val="tx2"/>
                           </a:solidFill>
@@ -5649,7 +5721,7 @@
                         </a:rPr>
                         <a:t>9</a:t>
                       </a:r>
-                      <a:endParaRPr lang="en-US" sz="1400" dirty="0">
+                      <a:endParaRPr lang="en-US" sz="1500" dirty="0">
                         <a:latin typeface="Malgun Gothic" charset="0"/>
                         <a:ea typeface="Malgun Gothic" charset="0"/>
                         <a:cs typeface="Malgun Gothic" charset="0"/>
@@ -5707,7 +5779,7 @@
                         <a:buNone/>
                       </a:pPr>
                       <a:r>
-                        <a:rPr lang="en-US" sz="1400" b="1" dirty="0">
+                        <a:rPr lang="en-US" sz="1500" b="1" dirty="0">
                           <a:solidFill>
                             <a:schemeClr val="tx1"/>
                           </a:solidFill>
@@ -5717,7 +5789,7 @@
                         </a:rPr>
                         <a:t>2차 세트 검출 47%</a:t>
                       </a:r>
-                      <a:endParaRPr lang="en-US" sz="1400" dirty="0">
+                      <a:endParaRPr lang="en-US" sz="1500" dirty="0">
                         <a:latin typeface="Malgun Gothic" charset="0"/>
                         <a:ea typeface="Malgun Gothic" charset="0"/>
                         <a:cs typeface="Malgun Gothic" charset="0"/>
@@ -5775,7 +5847,7 @@
                         <a:buNone/>
                       </a:pPr>
                       <a:r>
-                        <a:rPr lang="en-US" sz="1400" dirty="0">
+                        <a:rPr lang="en-US" sz="1500" dirty="0">
                           <a:solidFill>
                             <a:schemeClr val="tx1"/>
                           </a:solidFill>
@@ -5783,9 +5855,9 @@
                           <a:ea typeface="Malgun Gothic" pitchFamily="34" charset="-122"/>
                           <a:cs typeface="Malgun Gothic" pitchFamily="34" charset="-120"/>
                         </a:rPr>
-                        <a:t>crack이 30×26px로 작아짐 (15개 중 1개 검출), 촬영 환경도 바뀜</a:t>
+                        <a:t>작아진 crack (30×26px) · 새 환경</a:t>
                       </a:r>
-                      <a:endParaRPr lang="en-US" sz="1400" dirty="0">
+                      <a:endParaRPr lang="en-US" sz="1500" dirty="0">
                         <a:latin typeface="Malgun Gothic" charset="0"/>
                         <a:ea typeface="Malgun Gothic" charset="0"/>
                         <a:cs typeface="Malgun Gothic" charset="0"/>
@@ -5843,7 +5915,7 @@
                         <a:buNone/>
                       </a:pPr>
                       <a:r>
-                        <a:rPr lang="en-US" sz="1400" b="1" dirty="0">
+                        <a:rPr lang="en-US" sz="1500" b="1" dirty="0">
                           <a:solidFill>
                             <a:schemeClr val="accent6"/>
                           </a:solidFill>
@@ -5853,7 +5925,7 @@
                         </a:rPr>
                         <a:t>확인</a:t>
                       </a:r>
-                      <a:endParaRPr lang="en-US" sz="1400" dirty="0">
+                      <a:endParaRPr lang="en-US" sz="1500" dirty="0">
                         <a:latin typeface="Malgun Gothic" charset="0"/>
                         <a:ea typeface="Malgun Gothic" charset="0"/>
                         <a:cs typeface="Malgun Gothic" charset="0"/>
@@ -5903,7 +5975,7 @@
                   </a:tcPr>
                 </a:tc>
               </a:tr>
-              <a:tr h="457200">
+              <a:tr h="420624">
                 <a:tc>
                   <a:txBody>
                     <a:bodyPr/>
@@ -5913,7 +5985,7 @@
                         <a:buNone/>
                       </a:pPr>
                       <a:r>
-                        <a:rPr lang="en-US" sz="1400" dirty="0">
+                        <a:rPr lang="en-US" sz="1500" dirty="0">
                           <a:solidFill>
                             <a:schemeClr val="tx2"/>
                           </a:solidFill>
@@ -5923,7 +5995,7 @@
                         </a:rPr>
                         <a:t>9</a:t>
                       </a:r>
-                      <a:endParaRPr lang="en-US" sz="1400" dirty="0">
+                      <a:endParaRPr lang="en-US" sz="1500" dirty="0">
                         <a:latin typeface="Malgun Gothic" charset="0"/>
                         <a:ea typeface="Malgun Gothic" charset="0"/>
                         <a:cs typeface="Malgun Gothic" charset="0"/>
@@ -5981,7 +6053,7 @@
                         <a:buNone/>
                       </a:pPr>
                       <a:r>
-                        <a:rPr lang="en-US" sz="1400" b="1" dirty="0">
+                        <a:rPr lang="en-US" sz="1500" b="1" dirty="0">
                           <a:solidFill>
                             <a:schemeClr val="tx1"/>
                           </a:solidFill>
@@ -5991,7 +6063,7 @@
                         </a:rPr>
                         <a:t>YOLOX-S 낮은 점수</a:t>
                       </a:r>
-                      <a:endParaRPr lang="en-US" sz="1400" dirty="0">
+                      <a:endParaRPr lang="en-US" sz="1500" dirty="0">
                         <a:latin typeface="Malgun Gothic" charset="0"/>
                         <a:ea typeface="Malgun Gothic" charset="0"/>
                         <a:cs typeface="Malgun Gothic" charset="0"/>
@@ -6049,7 +6121,7 @@
                         <a:buNone/>
                       </a:pPr>
                       <a:r>
-                        <a:rPr lang="en-US" sz="1400" dirty="0">
+                        <a:rPr lang="en-US" sz="1500" dirty="0">
                           <a:solidFill>
                             <a:schemeClr val="tx1"/>
                           </a:solidFill>
@@ -6057,9 +6129,9 @@
                           <a:ea typeface="Malgun Gothic" pitchFamily="34" charset="-122"/>
                           <a:cs typeface="Malgun Gothic" pitchFamily="34" charset="-120"/>
                         </a:rPr>
-                        <a:t>점수 = 물체일 확률 × 클래스 확률. 두 확률의 곱이라 낮게 나옴</a:t>
+                        <a:t>점수 = 두 확률의 곱</a:t>
                       </a:r>
-                      <a:endParaRPr lang="en-US" sz="1400" dirty="0">
+                      <a:endParaRPr lang="en-US" sz="1500" dirty="0">
                         <a:latin typeface="Malgun Gothic" charset="0"/>
                         <a:ea typeface="Malgun Gothic" charset="0"/>
                         <a:cs typeface="Malgun Gothic" charset="0"/>
@@ -6117,7 +6189,7 @@
                         <a:buNone/>
                       </a:pPr>
                       <a:r>
-                        <a:rPr lang="en-US" sz="1400" b="1" dirty="0">
+                        <a:rPr lang="en-US" sz="1500" b="1" dirty="0">
                           <a:solidFill>
                             <a:schemeClr val="accent3"/>
                           </a:solidFill>
@@ -6127,7 +6199,7 @@
                         </a:rPr>
                         <a:t>추정</a:t>
                       </a:r>
-                      <a:endParaRPr lang="en-US" sz="1400" dirty="0">
+                      <a:endParaRPr lang="en-US" sz="1500" dirty="0">
                         <a:latin typeface="Malgun Gothic" charset="0"/>
                         <a:ea typeface="Malgun Gothic" charset="0"/>
                         <a:cs typeface="Malgun Gothic" charset="0"/>
@@ -6177,7 +6249,7 @@
                   </a:tcPr>
                 </a:tc>
               </a:tr>
-              <a:tr h="457200">
+              <a:tr h="420624">
                 <a:tc>
                   <a:txBody>
                     <a:bodyPr/>
@@ -6187,7 +6259,7 @@
                         <a:buNone/>
                       </a:pPr>
                       <a:r>
-                        <a:rPr lang="en-US" sz="1400" dirty="0">
+                        <a:rPr lang="en-US" sz="1500" dirty="0">
                           <a:solidFill>
                             <a:schemeClr val="tx2"/>
                           </a:solidFill>
@@ -6197,7 +6269,7 @@
                         </a:rPr>
                         <a:t>9</a:t>
                       </a:r>
-                      <a:endParaRPr lang="en-US" sz="1400" dirty="0">
+                      <a:endParaRPr lang="en-US" sz="1500" dirty="0">
                         <a:latin typeface="Malgun Gothic" charset="0"/>
                         <a:ea typeface="Malgun Gothic" charset="0"/>
                         <a:cs typeface="Malgun Gothic" charset="0"/>
@@ -6255,7 +6327,7 @@
                         <a:buNone/>
                       </a:pPr>
                       <a:r>
-                        <a:rPr lang="en-US" sz="1400" b="1" dirty="0">
+                        <a:rPr lang="en-US" sz="1500" b="1" dirty="0">
                           <a:solidFill>
                             <a:schemeClr val="tx1"/>
                           </a:solidFill>
@@ -6265,7 +6337,7 @@
                         </a:rPr>
                         <a:t>기준값 조정으로 해결 불가</a:t>
                       </a:r>
-                      <a:endParaRPr lang="en-US" sz="1400" dirty="0">
+                      <a:endParaRPr lang="en-US" sz="1500" dirty="0">
                         <a:latin typeface="Malgun Gothic" charset="0"/>
                         <a:ea typeface="Malgun Gothic" charset="0"/>
                         <a:cs typeface="Malgun Gothic" charset="0"/>
@@ -6323,7 +6395,7 @@
                         <a:buNone/>
                       </a:pPr>
                       <a:r>
-                        <a:rPr lang="en-US" sz="1400" dirty="0">
+                        <a:rPr lang="en-US" sz="1500" dirty="0">
                           <a:solidFill>
                             <a:schemeClr val="tx1"/>
                           </a:solidFill>
@@ -6331,9 +6403,9 @@
                           <a:ea typeface="Malgun Gothic" pitchFamily="34" charset="-122"/>
                           <a:cs typeface="Malgun Gothic" pitchFamily="34" charset="-120"/>
                         </a:rPr>
-                        <a:t>새 환경에서 결함과 정상의 점수 구간이 겹침</a:t>
+                        <a:t>결함·정상 점수 겹침</a:t>
                       </a:r>
-                      <a:endParaRPr lang="en-US" sz="1400" dirty="0">
+                      <a:endParaRPr lang="en-US" sz="1500" dirty="0">
                         <a:latin typeface="Malgun Gothic" charset="0"/>
                         <a:ea typeface="Malgun Gothic" charset="0"/>
                         <a:cs typeface="Malgun Gothic" charset="0"/>
@@ -6391,7 +6463,7 @@
                         <a:buNone/>
                       </a:pPr>
                       <a:r>
-                        <a:rPr lang="en-US" sz="1400" b="1" dirty="0">
+                        <a:rPr lang="en-US" sz="1500" b="1" dirty="0">
                           <a:solidFill>
                             <a:schemeClr val="accent6"/>
                           </a:solidFill>
@@ -6401,7 +6473,7 @@
                         </a:rPr>
                         <a:t>확인</a:t>
                       </a:r>
-                      <a:endParaRPr lang="en-US" sz="1400" dirty="0">
+                      <a:endParaRPr lang="en-US" sz="1500" dirty="0">
                         <a:latin typeface="Malgun Gothic" charset="0"/>
                         <a:ea typeface="Malgun Gothic" charset="0"/>
                         <a:cs typeface="Malgun Gothic" charset="0"/>
@@ -6457,14 +6529,43 @@
       </p:graphicFrame>
       <p:sp>
         <p:nvSpPr>
-          <p:cNvPr id="4" name="causes-legend"/>
+          <p:cNvPr id="4" name="lg-1-bg"/>
+          <p:cNvSpPr/>
+          <p:nvPr/>
+        </p:nvSpPr>
+        <p:spPr>
+          <a:xfrm>
+            <a:off x="548640" y="5943600"/>
+            <a:ext cx="1463040" cy="310896"/>
+          </a:xfrm>
+          <a:prstGeom prst="roundRect">
+            <a:avLst>
+              <a:gd name="adj" fmla="val 14706"/>
+            </a:avLst>
+          </a:prstGeom>
+          <a:solidFill>
+            <a:schemeClr val="accent6">
+              <a:alpha val="20000"/>
+            </a:schemeClr>
+          </a:solidFill>
+          <a:ln w="12700">
+            <a:solidFill>
+              <a:schemeClr val="accent6"/>
+            </a:solidFill>
+            <a:prstDash val="solid"/>
+          </a:ln>
+        </p:spPr>
+      </p:sp>
+      <p:sp>
+        <p:nvSpPr>
+          <p:cNvPr id="5" name="lg-1"/>
           <p:cNvSpPr txBox="1"/>
           <p:nvPr/>
         </p:nvSpPr>
         <p:spPr>
           <a:xfrm>
-            <a:off x="548640" y="6053328"/>
-            <a:ext cx="11094415" cy="274320"/>
+            <a:off x="548640" y="5943600"/>
+            <a:ext cx="1463040" cy="310896"/>
           </a:xfrm>
           <a:prstGeom prst="rect">
             <a:avLst/>
@@ -6473,76 +6574,86 @@
           <a:ln/>
         </p:spPr>
         <p:txBody>
-          <a:bodyPr wrap="square" lIns="0" tIns="0" rIns="0" bIns="0" rtlCol="0" anchor="t"/>
+          <a:bodyPr wrap="square" lIns="0" tIns="0" rIns="0" bIns="0" rtlCol="0" anchor="ctr"/>
           <a:lstStyle/>
           <a:p>
-            <a:pPr indent="0" marL="0">
+            <a:pPr algn="ctr" indent="0" marL="0">
               <a:buNone/>
             </a:pPr>
             <a:r>
-              <a:rPr lang="en-US" sz="1200" b="1" dirty="0">
+              <a:rPr lang="en-US" sz="1300" b="1" dirty="0">
                 <a:solidFill>
                   <a:schemeClr val="accent6"/>
                 </a:solidFill>
               </a:rPr>
-              <a:t>확인 </a:t>
+              <a:t>확인 = 데이터</a:t>
             </a:r>
-            <a:pPr indent="0" marL="0">
+            <a:endParaRPr lang="en-US" sz="1300" dirty="0"/>
+          </a:p>
+        </p:txBody>
+      </p:sp>
+      <p:sp>
+        <p:nvSpPr>
+          <p:cNvPr id="6" name="lg-2-bg"/>
+          <p:cNvSpPr/>
+          <p:nvPr/>
+        </p:nvSpPr>
+        <p:spPr>
+          <a:xfrm>
+            <a:off x="2148840" y="5943600"/>
+            <a:ext cx="1463040" cy="310896"/>
+          </a:xfrm>
+          <a:prstGeom prst="roundRect">
+            <a:avLst>
+              <a:gd name="adj" fmla="val 14706"/>
+            </a:avLst>
+          </a:prstGeom>
+          <a:solidFill>
+            <a:schemeClr val="accent3">
+              <a:alpha val="20000"/>
+            </a:schemeClr>
+          </a:solidFill>
+          <a:ln w="12700">
+            <a:solidFill>
+              <a:schemeClr val="accent3"/>
+            </a:solidFill>
+            <a:prstDash val="solid"/>
+          </a:ln>
+        </p:spPr>
+      </p:sp>
+      <p:sp>
+        <p:nvSpPr>
+          <p:cNvPr id="7" name="lg-2"/>
+          <p:cNvSpPr txBox="1"/>
+          <p:nvPr/>
+        </p:nvSpPr>
+        <p:spPr>
+          <a:xfrm>
+            <a:off x="2148840" y="5943600"/>
+            <a:ext cx="1463040" cy="310896"/>
+          </a:xfrm>
+          <a:prstGeom prst="rect">
+            <a:avLst/>
+          </a:prstGeom>
+          <a:noFill/>
+          <a:ln/>
+        </p:spPr>
+        <p:txBody>
+          <a:bodyPr wrap="square" lIns="0" tIns="0" rIns="0" bIns="0" rtlCol="0" anchor="ctr"/>
+          <a:lstStyle/>
+          <a:p>
+            <a:pPr algn="ctr" indent="0" marL="0">
               <a:buNone/>
             </a:pPr>
             <a:r>
-              <a:rPr lang="en-US" sz="1200" dirty="0">
-                <a:solidFill>
-                  <a:schemeClr val="tx2"/>
-                </a:solidFill>
-              </a:rPr>
-              <a:t>데이터로 직접 확인   </a:t>
-            </a:r>
-            <a:pPr indent="0" marL="0">
-              <a:buNone/>
-            </a:pPr>
-            <a:r>
-              <a:rPr lang="en-US" sz="1200" b="1" dirty="0">
+              <a:rPr lang="en-US" sz="1300" b="1" dirty="0">
                 <a:solidFill>
                   <a:schemeClr val="accent3"/>
                 </a:solidFill>
               </a:rPr>
-              <a:t>추정 </a:t>
+              <a:t>추정 = 정황</a:t>
             </a:r>
-            <a:pPr indent="0" marL="0">
-              <a:buNone/>
-            </a:pPr>
-            <a:r>
-              <a:rPr lang="en-US" sz="1200" dirty="0">
-                <a:solidFill>
-                  <a:schemeClr val="tx2"/>
-                </a:solidFill>
-              </a:rPr>
-              <a:t>데이터와 맞지만 별도 검증 없음   </a:t>
-            </a:r>
-            <a:pPr indent="0" marL="0">
-              <a:buNone/>
-            </a:pPr>
-            <a:r>
-              <a:rPr lang="en-US" sz="1200" b="1" dirty="0">
-                <a:solidFill>
-                  <a:schemeClr val="tx2"/>
-                </a:solidFill>
-              </a:rPr>
-              <a:t>가설 </a:t>
-            </a:r>
-            <a:pPr indent="0" marL="0">
-              <a:buNone/>
-            </a:pPr>
-            <a:r>
-              <a:rPr lang="en-US" sz="1200" dirty="0">
-                <a:solidFill>
-                  <a:schemeClr val="tx2"/>
-                </a:solidFill>
-              </a:rPr>
-              <a:t>아직 검증 못 함</a:t>
-            </a:r>
-            <a:endParaRPr lang="en-US" sz="1200" dirty="0"/>
+            <a:endParaRPr lang="en-US" sz="1300" dirty="0"/>
           </a:p>
         </p:txBody>
       </p:sp>
@@ -6656,56 +6767,18 @@
       </p:sp>
       <p:sp>
         <p:nvSpPr>
-          <p:cNvPr id="3" name="Text 0"/>
+          <p:cNvPr id="3" name="lesson-0"/>
           <p:cNvSpPr/>
-          <p:nvPr>
-            <p:ph idx="101" type="body" hasCustomPrompt="1"/>
-          </p:nvPr>
-        </p:nvSpPr>
-        <p:spPr>
-          <a:xfrm>
-            <a:off x="548640" y="1005840"/>
-            <a:ext cx="11094415" cy="411480"/>
-          </a:xfrm>
-          <a:prstGeom prst="rect">
-            <a:avLst/>
-          </a:prstGeom>
-          <a:noFill/>
-          <a:ln/>
-        </p:spPr>
-        <p:txBody>
-          <a:bodyPr wrap="square" lIns="0" tIns="0" rIns="0" bIns="0" rtlCol="0" anchor="ctr"/>
-          <a:lstStyle/>
-          <a:p>
-            <a:pPr algn="l" indent="0" marL="0">
-              <a:buNone/>
-            </a:pPr>
-            <a:r>
-              <a:rPr lang="en-US" sz="1500" dirty="0">
-                <a:solidFill>
-                  <a:schemeClr val="tx2"/>
-                </a:solidFill>
-              </a:rPr>
-              <a:t>다음에 다르게 할 것</a:t>
-            </a:r>
-            <a:endParaRPr lang="en-US" sz="1500" dirty="0"/>
-          </a:p>
-        </p:txBody>
-      </p:sp>
-      <p:sp>
-        <p:nvSpPr>
-          <p:cNvPr id="4" name="lesson-0"/>
-          <p:cNvSpPr/>
           <p:nvPr/>
         </p:nvSpPr>
         <p:spPr>
           <a:xfrm>
             <a:off x="548640" y="1600200"/>
-            <a:ext cx="5440680" cy="2148840"/>
+            <a:ext cx="5440680" cy="2194560"/>
           </a:xfrm>
           <a:prstGeom prst="roundRect">
             <a:avLst>
-              <a:gd name="adj" fmla="val 3404"/>
+              <a:gd name="adj" fmla="val 3333"/>
             </a:avLst>
           </a:prstGeom>
           <a:solidFill>
@@ -6716,14 +6789,14 @@
       </p:sp>
       <p:sp>
         <p:nvSpPr>
-          <p:cNvPr id="5" name="lesson-n-0"/>
+          <p:cNvPr id="4" name="lesson-n-0"/>
           <p:cNvSpPr txBox="1"/>
           <p:nvPr/>
         </p:nvSpPr>
         <p:spPr>
           <a:xfrm>
-            <a:off x="868680" y="1874520"/>
-            <a:ext cx="914400" cy="640080"/>
+            <a:off x="914400" y="1600200"/>
+            <a:ext cx="1188720" cy="2194560"/>
           </a:xfrm>
           <a:prstGeom prst="rect">
             <a:avLst/>
@@ -6732,34 +6805,34 @@
           <a:ln/>
         </p:spPr>
         <p:txBody>
-          <a:bodyPr wrap="square" lIns="0" tIns="0" rIns="0" bIns="0" rtlCol="0" anchor="t"/>
+          <a:bodyPr wrap="square" lIns="0" tIns="0" rIns="0" bIns="0" rtlCol="0" anchor="ctr"/>
           <a:lstStyle/>
           <a:p>
             <a:pPr indent="0" marL="0">
               <a:buNone/>
             </a:pPr>
             <a:r>
-              <a:rPr lang="en-US" sz="3200" b="1" dirty="0">
+              <a:rPr lang="en-US" sz="4400" b="1" dirty="0">
                 <a:solidFill>
                   <a:schemeClr val="accent1"/>
                 </a:solidFill>
               </a:rPr>
               <a:t>01</a:t>
             </a:r>
-            <a:endParaRPr lang="en-US" sz="3200" dirty="0"/>
+            <a:endParaRPr lang="en-US" sz="4400" dirty="0"/>
           </a:p>
         </p:txBody>
       </p:sp>
       <p:sp>
         <p:nvSpPr>
-          <p:cNvPr id="6" name="lesson-h-0"/>
+          <p:cNvPr id="5" name="lesson-h-0"/>
           <p:cNvSpPr txBox="1"/>
           <p:nvPr/>
         </p:nvSpPr>
         <p:spPr>
           <a:xfrm>
-            <a:off x="1783080" y="1920240"/>
-            <a:ext cx="4023360" cy="548640"/>
+            <a:off x="2194560" y="1600200"/>
+            <a:ext cx="3657600" cy="2194560"/>
           </a:xfrm>
           <a:prstGeom prst="rect">
             <a:avLst/>
@@ -6768,34 +6841,56 @@
           <a:ln/>
         </p:spPr>
         <p:txBody>
-          <a:bodyPr wrap="square" lIns="0" tIns="0" rIns="0" bIns="0" rtlCol="0" anchor="t"/>
+          <a:bodyPr wrap="square" lIns="0" tIns="0" rIns="0" bIns="0" rtlCol="0" anchor="ctr"/>
           <a:lstStyle/>
           <a:p>
             <a:pPr indent="0" marL="0">
               <a:buNone/>
             </a:pPr>
             <a:r>
-              <a:rPr lang="en-US" sz="2000" b="1" dirty="0">
+              <a:rPr lang="en-US" sz="2600" b="1" dirty="0">
                 <a:solidFill>
                   <a:schemeClr val="tx1"/>
                 </a:solidFill>
               </a:rPr>
-              <a:t>테스트셋은 업로드 전에 분리</a:t>
+              <a:t>테스트셋 먼저 분리</a:t>
             </a:r>
-            <a:endParaRPr lang="en-US" sz="2000" dirty="0"/>
+            <a:endParaRPr lang="en-US" sz="2600" dirty="0"/>
           </a:p>
         </p:txBody>
       </p:sp>
       <p:sp>
         <p:nvSpPr>
-          <p:cNvPr id="7" name="lesson-d-0"/>
+          <p:cNvPr id="6" name="lesson-1"/>
+          <p:cNvSpPr/>
+          <p:nvPr/>
+        </p:nvSpPr>
+        <p:spPr>
+          <a:xfrm>
+            <a:off x="6190488" y="1600200"/>
+            <a:ext cx="5440680" cy="2194560"/>
+          </a:xfrm>
+          <a:prstGeom prst="roundRect">
+            <a:avLst>
+              <a:gd name="adj" fmla="val 3333"/>
+            </a:avLst>
+          </a:prstGeom>
+          <a:solidFill>
+            <a:schemeClr val="bg2"/>
+          </a:solidFill>
+          <a:ln/>
+        </p:spPr>
+      </p:sp>
+      <p:sp>
+        <p:nvSpPr>
+          <p:cNvPr id="7" name="lesson-n-1"/>
           <p:cNvSpPr txBox="1"/>
           <p:nvPr/>
         </p:nvSpPr>
         <p:spPr>
           <a:xfrm>
-            <a:off x="1783080" y="2606040"/>
-            <a:ext cx="4023360" cy="822960"/>
+            <a:off x="6556248" y="1600200"/>
+            <a:ext cx="1188720" cy="2194560"/>
           </a:xfrm>
           <a:prstGeom prst="rect">
             <a:avLst/>
@@ -6804,92 +6899,34 @@
           <a:ln/>
         </p:spPr>
         <p:txBody>
-          <a:bodyPr wrap="square" lIns="0" tIns="0" rIns="0" bIns="0" rtlCol="0" anchor="t"/>
+          <a:bodyPr wrap="square" lIns="0" tIns="0" rIns="0" bIns="0" rtlCol="0" anchor="ctr"/>
           <a:lstStyle/>
           <a:p>
             <a:pPr indent="0" marL="0">
               <a:buNone/>
             </a:pPr>
             <a:r>
-              <a:rPr lang="en-US" sz="1400" dirty="0">
-                <a:solidFill>
-                  <a:schemeClr val="tx2"/>
-                </a:solidFill>
-              </a:rPr>
-              <a:t>v8 전체(테스트 포함)를 올려 1차 점수가 부풀려짐</a:t>
-            </a:r>
-            <a:endParaRPr lang="en-US" sz="1400" dirty="0"/>
-          </a:p>
-        </p:txBody>
-      </p:sp>
-      <p:sp>
-        <p:nvSpPr>
-          <p:cNvPr id="8" name="lesson-1"/>
-          <p:cNvSpPr/>
-          <p:nvPr/>
-        </p:nvSpPr>
-        <p:spPr>
-          <a:xfrm>
-            <a:off x="6190488" y="1600200"/>
-            <a:ext cx="5440680" cy="2148840"/>
-          </a:xfrm>
-          <a:prstGeom prst="roundRect">
-            <a:avLst>
-              <a:gd name="adj" fmla="val 3404"/>
-            </a:avLst>
-          </a:prstGeom>
-          <a:solidFill>
-            <a:schemeClr val="bg2"/>
-          </a:solidFill>
-          <a:ln/>
-        </p:spPr>
-      </p:sp>
-      <p:sp>
-        <p:nvSpPr>
-          <p:cNvPr id="9" name="lesson-n-1"/>
-          <p:cNvSpPr txBox="1"/>
-          <p:nvPr/>
-        </p:nvSpPr>
-        <p:spPr>
-          <a:xfrm>
-            <a:off x="6510528" y="1874520"/>
-            <a:ext cx="914400" cy="640080"/>
-          </a:xfrm>
-          <a:prstGeom prst="rect">
-            <a:avLst/>
-          </a:prstGeom>
-          <a:noFill/>
-          <a:ln/>
-        </p:spPr>
-        <p:txBody>
-          <a:bodyPr wrap="square" lIns="0" tIns="0" rIns="0" bIns="0" rtlCol="0" anchor="t"/>
-          <a:lstStyle/>
-          <a:p>
-            <a:pPr indent="0" marL="0">
-              <a:buNone/>
-            </a:pPr>
-            <a:r>
-              <a:rPr lang="en-US" sz="3200" b="1" dirty="0">
+              <a:rPr lang="en-US" sz="4400" b="1" dirty="0">
                 <a:solidFill>
                   <a:schemeClr val="accent2"/>
                 </a:solidFill>
               </a:rPr>
               <a:t>02</a:t>
             </a:r>
-            <a:endParaRPr lang="en-US" sz="3200" dirty="0"/>
+            <a:endParaRPr lang="en-US" sz="4400" dirty="0"/>
           </a:p>
         </p:txBody>
       </p:sp>
       <p:sp>
         <p:nvSpPr>
-          <p:cNvPr id="10" name="lesson-h-1"/>
+          <p:cNvPr id="8" name="lesson-h-1"/>
           <p:cNvSpPr txBox="1"/>
           <p:nvPr/>
         </p:nvSpPr>
         <p:spPr>
           <a:xfrm>
-            <a:off x="7424928" y="1920240"/>
-            <a:ext cx="4023360" cy="548640"/>
+            <a:off x="7836408" y="1600200"/>
+            <a:ext cx="3657600" cy="2194560"/>
           </a:xfrm>
           <a:prstGeom prst="rect">
             <a:avLst/>
@@ -6898,34 +6935,56 @@
           <a:ln/>
         </p:spPr>
         <p:txBody>
-          <a:bodyPr wrap="square" lIns="0" tIns="0" rIns="0" bIns="0" rtlCol="0" anchor="t"/>
+          <a:bodyPr wrap="square" lIns="0" tIns="0" rIns="0" bIns="0" rtlCol="0" anchor="ctr"/>
           <a:lstStyle/>
           <a:p>
             <a:pPr indent="0" marL="0">
               <a:buNone/>
             </a:pPr>
             <a:r>
-              <a:rPr lang="en-US" sz="2000" b="1" dirty="0">
+              <a:rPr lang="en-US" sz="2600" b="1" dirty="0">
                 <a:solidFill>
                   <a:schemeClr val="tx1"/>
                 </a:solidFill>
               </a:rPr>
-              <a:t>새 환경 사진으로 다시 검증</a:t>
+              <a:t>새 환경은 새로 검증</a:t>
             </a:r>
-            <a:endParaRPr lang="en-US" sz="2000" dirty="0"/>
+            <a:endParaRPr lang="en-US" sz="2600" dirty="0"/>
           </a:p>
         </p:txBody>
       </p:sp>
       <p:sp>
         <p:nvSpPr>
-          <p:cNvPr id="11" name="lesson-d-1"/>
+          <p:cNvPr id="9" name="lesson-2"/>
+          <p:cNvSpPr/>
+          <p:nvPr/>
+        </p:nvSpPr>
+        <p:spPr>
+          <a:xfrm>
+            <a:off x="548640" y="3977640"/>
+            <a:ext cx="5440680" cy="2194560"/>
+          </a:xfrm>
+          <a:prstGeom prst="roundRect">
+            <a:avLst>
+              <a:gd name="adj" fmla="val 3333"/>
+            </a:avLst>
+          </a:prstGeom>
+          <a:solidFill>
+            <a:schemeClr val="bg2"/>
+          </a:solidFill>
+          <a:ln/>
+        </p:spPr>
+      </p:sp>
+      <p:sp>
+        <p:nvSpPr>
+          <p:cNvPr id="10" name="lesson-n-2"/>
           <p:cNvSpPr txBox="1"/>
           <p:nvPr/>
         </p:nvSpPr>
         <p:spPr>
           <a:xfrm>
-            <a:off x="7424928" y="2606040"/>
-            <a:ext cx="4023360" cy="822960"/>
+            <a:off x="914400" y="3977640"/>
+            <a:ext cx="1188720" cy="2194560"/>
           </a:xfrm>
           <a:prstGeom prst="rect">
             <a:avLst/>
@@ -6934,92 +6993,34 @@
           <a:ln/>
         </p:spPr>
         <p:txBody>
-          <a:bodyPr wrap="square" lIns="0" tIns="0" rIns="0" bIns="0" rtlCol="0" anchor="t"/>
+          <a:bodyPr wrap="square" lIns="0" tIns="0" rIns="0" bIns="0" rtlCol="0" anchor="ctr"/>
           <a:lstStyle/>
           <a:p>
             <a:pPr indent="0" marL="0">
               <a:buNone/>
             </a:pPr>
             <a:r>
-              <a:rPr lang="en-US" sz="1400" dirty="0">
-                <a:solidFill>
-                  <a:schemeClr val="tx2"/>
-                </a:solidFill>
-              </a:rPr>
-              <a:t>1차 92.9% → 처음 보는 사진에선 결함 셀 47%</a:t>
-            </a:r>
-            <a:endParaRPr lang="en-US" sz="1400" dirty="0"/>
-          </a:p>
-        </p:txBody>
-      </p:sp>
-      <p:sp>
-        <p:nvSpPr>
-          <p:cNvPr id="12" name="lesson-2"/>
-          <p:cNvSpPr/>
-          <p:nvPr/>
-        </p:nvSpPr>
-        <p:spPr>
-          <a:xfrm>
-            <a:off x="548640" y="3931920"/>
-            <a:ext cx="5440680" cy="2148840"/>
-          </a:xfrm>
-          <a:prstGeom prst="roundRect">
-            <a:avLst>
-              <a:gd name="adj" fmla="val 3404"/>
-            </a:avLst>
-          </a:prstGeom>
-          <a:solidFill>
-            <a:schemeClr val="bg2"/>
-          </a:solidFill>
-          <a:ln/>
-        </p:spPr>
-      </p:sp>
-      <p:sp>
-        <p:nvSpPr>
-          <p:cNvPr id="13" name="lesson-n-2"/>
-          <p:cNvSpPr txBox="1"/>
-          <p:nvPr/>
-        </p:nvSpPr>
-        <p:spPr>
-          <a:xfrm>
-            <a:off x="868680" y="4206240"/>
-            <a:ext cx="914400" cy="640080"/>
-          </a:xfrm>
-          <a:prstGeom prst="rect">
-            <a:avLst/>
-          </a:prstGeom>
-          <a:noFill/>
-          <a:ln/>
-        </p:spPr>
-        <p:txBody>
-          <a:bodyPr wrap="square" lIns="0" tIns="0" rIns="0" bIns="0" rtlCol="0" anchor="t"/>
-          <a:lstStyle/>
-          <a:p>
-            <a:pPr indent="0" marL="0">
-              <a:buNone/>
-            </a:pPr>
-            <a:r>
-              <a:rPr lang="en-US" sz="3200" b="1" dirty="0">
+              <a:rPr lang="en-US" sz="4400" b="1" dirty="0">
                 <a:solidFill>
                   <a:schemeClr val="accent3"/>
                 </a:solidFill>
               </a:rPr>
               <a:t>03</a:t>
             </a:r>
-            <a:endParaRPr lang="en-US" sz="3200" dirty="0"/>
+            <a:endParaRPr lang="en-US" sz="4400" dirty="0"/>
           </a:p>
         </p:txBody>
       </p:sp>
       <p:sp>
         <p:nvSpPr>
-          <p:cNvPr id="14" name="lesson-h-2"/>
+          <p:cNvPr id="11" name="lesson-h-2"/>
           <p:cNvSpPr txBox="1"/>
           <p:nvPr/>
         </p:nvSpPr>
         <p:spPr>
           <a:xfrm>
-            <a:off x="1783080" y="4251960"/>
-            <a:ext cx="4023360" cy="548640"/>
+            <a:off x="2194560" y="3977640"/>
+            <a:ext cx="3657600" cy="2194560"/>
           </a:xfrm>
           <a:prstGeom prst="rect">
             <a:avLst/>
@@ -7028,34 +7029,56 @@
           <a:ln/>
         </p:spPr>
         <p:txBody>
-          <a:bodyPr wrap="square" lIns="0" tIns="0" rIns="0" bIns="0" rtlCol="0" anchor="t"/>
+          <a:bodyPr wrap="square" lIns="0" tIns="0" rIns="0" bIns="0" rtlCol="0" anchor="ctr"/>
           <a:lstStyle/>
           <a:p>
             <a:pPr indent="0" marL="0">
               <a:buNone/>
             </a:pPr>
             <a:r>
-              <a:rPr lang="en-US" sz="2000" b="1" dirty="0">
+              <a:rPr lang="en-US" sz="2600" b="1" dirty="0">
                 <a:solidFill>
                   <a:schemeClr val="tx1"/>
                 </a:solidFill>
               </a:rPr>
-              <a:t>기준값은 모델별로, 검증셋에서</a:t>
+              <a:t>기준값은 모델별로</a:t>
             </a:r>
-            <a:endParaRPr lang="en-US" sz="2000" dirty="0"/>
+            <a:endParaRPr lang="en-US" sz="2600" dirty="0"/>
           </a:p>
         </p:txBody>
       </p:sp>
       <p:sp>
         <p:nvSpPr>
-          <p:cNvPr id="15" name="lesson-d-2"/>
+          <p:cNvPr id="12" name="lesson-3"/>
+          <p:cNvSpPr/>
+          <p:nvPr/>
+        </p:nvSpPr>
+        <p:spPr>
+          <a:xfrm>
+            <a:off x="6190488" y="3977640"/>
+            <a:ext cx="5440680" cy="2194560"/>
+          </a:xfrm>
+          <a:prstGeom prst="roundRect">
+            <a:avLst>
+              <a:gd name="adj" fmla="val 3333"/>
+            </a:avLst>
+          </a:prstGeom>
+          <a:solidFill>
+            <a:schemeClr val="bg2"/>
+          </a:solidFill>
+          <a:ln/>
+        </p:spPr>
+      </p:sp>
+      <p:sp>
+        <p:nvSpPr>
+          <p:cNvPr id="13" name="lesson-n-3"/>
           <p:cNvSpPr txBox="1"/>
           <p:nvPr/>
         </p:nvSpPr>
         <p:spPr>
           <a:xfrm>
-            <a:off x="1783080" y="4937760"/>
-            <a:ext cx="4023360" cy="822960"/>
+            <a:off x="6556248" y="3977640"/>
+            <a:ext cx="1188720" cy="2194560"/>
           </a:xfrm>
           <a:prstGeom prst="rect">
             <a:avLst/>
@@ -7064,92 +7087,34 @@
           <a:ln/>
         </p:spPr>
         <p:txBody>
-          <a:bodyPr wrap="square" lIns="0" tIns="0" rIns="0" bIns="0" rtlCol="0" anchor="t"/>
+          <a:bodyPr wrap="square" lIns="0" tIns="0" rIns="0" bIns="0" rtlCol="0" anchor="ctr"/>
           <a:lstStyle/>
           <a:p>
             <a:pPr indent="0" marL="0">
               <a:buNone/>
             </a:pPr>
             <a:r>
-              <a:rPr lang="en-US" sz="1400" dirty="0">
-                <a:solidFill>
-                  <a:schemeClr val="tx2"/>
-                </a:solidFill>
-              </a:rPr>
-              <a:t>YOLOX-S 0.30 → 3%, 0.05 → 57% · INT8도 점수가 바뀜</a:t>
-            </a:r>
-            <a:endParaRPr lang="en-US" sz="1400" dirty="0"/>
-          </a:p>
-        </p:txBody>
-      </p:sp>
-      <p:sp>
-        <p:nvSpPr>
-          <p:cNvPr id="16" name="lesson-3"/>
-          <p:cNvSpPr/>
-          <p:nvPr/>
-        </p:nvSpPr>
-        <p:spPr>
-          <a:xfrm>
-            <a:off x="6190488" y="3931920"/>
-            <a:ext cx="5440680" cy="2148840"/>
-          </a:xfrm>
-          <a:prstGeom prst="roundRect">
-            <a:avLst>
-              <a:gd name="adj" fmla="val 3404"/>
-            </a:avLst>
-          </a:prstGeom>
-          <a:solidFill>
-            <a:schemeClr val="bg2"/>
-          </a:solidFill>
-          <a:ln/>
-        </p:spPr>
-      </p:sp>
-      <p:sp>
-        <p:nvSpPr>
-          <p:cNvPr id="17" name="lesson-n-3"/>
-          <p:cNvSpPr txBox="1"/>
-          <p:nvPr/>
-        </p:nvSpPr>
-        <p:spPr>
-          <a:xfrm>
-            <a:off x="6510528" y="4206240"/>
-            <a:ext cx="914400" cy="640080"/>
-          </a:xfrm>
-          <a:prstGeom prst="rect">
-            <a:avLst/>
-          </a:prstGeom>
-          <a:noFill/>
-          <a:ln/>
-        </p:spPr>
-        <p:txBody>
-          <a:bodyPr wrap="square" lIns="0" tIns="0" rIns="0" bIns="0" rtlCol="0" anchor="t"/>
-          <a:lstStyle/>
-          <a:p>
-            <a:pPr indent="0" marL="0">
-              <a:buNone/>
-            </a:pPr>
-            <a:r>
-              <a:rPr lang="en-US" sz="3200" b="1" dirty="0">
+              <a:rPr lang="en-US" sz="4400" b="1" dirty="0">
                 <a:solidFill>
                   <a:schemeClr val="accent4"/>
                 </a:solidFill>
               </a:rPr>
               <a:t>04</a:t>
             </a:r>
-            <a:endParaRPr lang="en-US" sz="3200" dirty="0"/>
+            <a:endParaRPr lang="en-US" sz="4400" dirty="0"/>
           </a:p>
         </p:txBody>
       </p:sp>
       <p:sp>
         <p:nvSpPr>
-          <p:cNvPr id="18" name="lesson-h-3"/>
+          <p:cNvPr id="14" name="lesson-h-3"/>
           <p:cNvSpPr txBox="1"/>
           <p:nvPr/>
         </p:nvSpPr>
         <p:spPr>
           <a:xfrm>
-            <a:off x="7424928" y="4251960"/>
-            <a:ext cx="4023360" cy="548640"/>
+            <a:off x="7836408" y="3977640"/>
+            <a:ext cx="3657600" cy="2194560"/>
           </a:xfrm>
           <a:prstGeom prst="rect">
             <a:avLst/>
@@ -7158,57 +7123,21 @@
           <a:ln/>
         </p:spPr>
         <p:txBody>
-          <a:bodyPr wrap="square" lIns="0" tIns="0" rIns="0" bIns="0" rtlCol="0" anchor="t"/>
+          <a:bodyPr wrap="square" lIns="0" tIns="0" rIns="0" bIns="0" rtlCol="0" anchor="ctr"/>
           <a:lstStyle/>
           <a:p>
             <a:pPr indent="0" marL="0">
               <a:buNone/>
             </a:pPr>
             <a:r>
-              <a:rPr lang="en-US" sz="2000" b="1" dirty="0">
+              <a:rPr lang="en-US" sz="2600" b="1" dirty="0">
                 <a:solidFill>
                   <a:schemeClr val="tx1"/>
                 </a:solidFill>
               </a:rPr>
-              <a:t>크기보다 데이터에 맞는 모델</a:t>
+              <a:t>크기보다 맞는 모델</a:t>
             </a:r>
-            <a:endParaRPr lang="en-US" sz="2000" dirty="0"/>
-          </a:p>
-        </p:txBody>
-      </p:sp>
-      <p:sp>
-        <p:nvSpPr>
-          <p:cNvPr id="19" name="lesson-d-3"/>
-          <p:cNvSpPr txBox="1"/>
-          <p:nvPr/>
-        </p:nvSpPr>
-        <p:spPr>
-          <a:xfrm>
-            <a:off x="7424928" y="4937760"/>
-            <a:ext cx="4023360" cy="822960"/>
-          </a:xfrm>
-          <a:prstGeom prst="rect">
-            <a:avLst/>
-          </a:prstGeom>
-          <a:noFill/>
-          <a:ln/>
-        </p:spPr>
-        <p:txBody>
-          <a:bodyPr wrap="square" lIns="0" tIns="0" rIns="0" bIns="0" rtlCol="0" anchor="t"/>
-          <a:lstStyle/>
-          <a:p>
-            <a:pPr indent="0" marL="0">
-              <a:buNone/>
-            </a:pPr>
-            <a:r>
-              <a:rPr lang="en-US" sz="1400" dirty="0">
-                <a:solidFill>
-                  <a:schemeClr val="tx2"/>
-                </a:solidFill>
-              </a:rPr>
-              <a:t>3.9M ATSS가 9M YOLOX-S보다 정확</a:t>
-            </a:r>
-            <a:endParaRPr lang="en-US" sz="1400" dirty="0"/>
+            <a:endParaRPr lang="en-US" sz="2600" dirty="0"/>
           </a:p>
         </p:txBody>
       </p:sp>
@@ -7320,47 +7249,9 @@
           </a:p>
         </p:txBody>
       </p:sp>
-      <p:sp>
-        <p:nvSpPr>
-          <p:cNvPr id="3" name="Text 0"/>
-          <p:cNvSpPr/>
-          <p:nvPr>
-            <p:ph idx="101" type="body" hasCustomPrompt="1"/>
-          </p:nvPr>
-        </p:nvSpPr>
-        <p:spPr>
-          <a:xfrm>
-            <a:off x="548640" y="1005840"/>
-            <a:ext cx="11094415" cy="411480"/>
-          </a:xfrm>
-          <a:prstGeom prst="rect">
-            <a:avLst/>
-          </a:prstGeom>
-          <a:noFill/>
-          <a:ln/>
-        </p:spPr>
-        <p:txBody>
-          <a:bodyPr wrap="square" lIns="0" tIns="0" rIns="0" bIns="0" rtlCol="0" anchor="ctr"/>
-          <a:lstStyle/>
-          <a:p>
-            <a:pPr algn="l" indent="0" marL="0">
-              <a:buNone/>
-            </a:pPr>
-            <a:r>
-              <a:rPr lang="en-US" sz="1500" dirty="0">
-                <a:solidFill>
-                  <a:schemeClr val="tx2"/>
-                </a:solidFill>
-              </a:rPr>
-              <a:t>가상 검사 라인 · 실제 모델(ATSS)로 판정</a:t>
-            </a:r>
-            <a:endParaRPr lang="en-US" sz="1500" dirty="0"/>
-          </a:p>
-        </p:txBody>
-      </p:sp>
       <p:pic>
         <p:nvPicPr>
-          <p:cNvPr id="4" name="dashboard" descr="C:\Users\user\_se4nchoi\batteryvision\docs\submission\build\img\dashboard.jpg">    </p:cNvPr>
+          <p:cNvPr id="3" name="dashboard" descr="C:\Users\user\_se4nchoi\batteryvision\docs\submission\build\img\dashboard.jpg">    </p:cNvPr>
           <p:cNvPicPr>
             <a:picLocks noChangeAspect="1"/>
           </p:cNvPicPr>
@@ -7384,7 +7275,7 @@
       </p:pic>
       <p:sp>
         <p:nvSpPr>
-          <p:cNvPr id="5" name="demo-card"/>
+          <p:cNvPr id="4" name="demo-card"/>
           <p:cNvSpPr/>
           <p:nvPr/>
         </p:nvSpPr>
@@ -7406,7 +7297,7 @@
       </p:sp>
       <p:sp>
         <p:nvSpPr>
-          <p:cNvPr id="6" name="demo-b"/>
+          <p:cNvPr id="5" name="demo-b"/>
           <p:cNvSpPr txBox="1"/>
           <p:nvPr/>
         </p:nvSpPr>
@@ -7673,36 +7564,6 @@
               </a:rPr>
               <a:t>최예현</a:t>
             </a:r>
-            <a:endParaRPr lang="en-US" sz="1600" dirty="0"/>
-          </a:p>
-        </p:txBody>
-      </p:sp>
-      <p:sp>
-        <p:nvSpPr>
-          <p:cNvPr id="6" name="Text 0"/>
-          <p:cNvSpPr/>
-          <p:nvPr>
-            <p:ph idx="101" type="body" hasCustomPrompt="1"/>
-          </p:nvPr>
-        </p:nvSpPr>
-        <p:spPr>
-          <a:xfrm>
-            <a:off x="548640" y="4343400"/>
-            <a:ext cx="4297680" cy="822960"/>
-          </a:xfrm>
-          <a:prstGeom prst="rect">
-            <a:avLst/>
-          </a:prstGeom>
-          <a:noFill/>
-          <a:ln/>
-        </p:spPr>
-        <p:txBody>
-          <a:bodyPr wrap="square" lIns="0" tIns="0" rIns="0" bIns="0" rtlCol="0" anchor="t"/>
-          <a:lstStyle/>
-          <a:p>
-            <a:pPr algn="l" indent="0" marL="0">
-              <a:buNone/>
-            </a:pPr>
             <a:endParaRPr lang="en-US" sz="1600" dirty="0"/>
           </a:p>
         </p:txBody>
@@ -7796,45 +7657,7 @@
       </p:sp>
       <p:sp>
         <p:nvSpPr>
-          <p:cNvPr id="4" name="Text 0"/>
-          <p:cNvSpPr/>
-          <p:nvPr>
-            <p:ph idx="101" type="body" hasCustomPrompt="1"/>
-          </p:nvPr>
-        </p:nvSpPr>
-        <p:spPr>
-          <a:xfrm>
-            <a:off x="548640" y="1005840"/>
-            <a:ext cx="11094415" cy="411480"/>
-          </a:xfrm>
-          <a:prstGeom prst="rect">
-            <a:avLst/>
-          </a:prstGeom>
-          <a:noFill/>
-          <a:ln/>
-        </p:spPr>
-        <p:txBody>
-          <a:bodyPr wrap="square" lIns="0" tIns="0" rIns="0" bIns="0" rtlCol="0" anchor="ctr"/>
-          <a:lstStyle/>
-          <a:p>
-            <a:pPr algn="l" indent="0" marL="0">
-              <a:buNone/>
-            </a:pPr>
-            <a:r>
-              <a:rPr lang="en-US" sz="1500" dirty="0">
-                <a:solidFill>
-                  <a:schemeClr val="tx2"/>
-                </a:solidFill>
-              </a:rPr>
-              <a:t>crack AP 1.00, scratch 0.66–0.86 · 크기는 같고 대비가 다름</a:t>
-            </a:r>
-            <a:endParaRPr lang="en-US" sz="1500" dirty="0"/>
-          </a:p>
-        </p:txBody>
-      </p:sp>
-      <p:sp>
-        <p:nvSpPr>
-          <p:cNvPr id="5" name="meme-credit"/>
+          <p:cNvPr id="4" name="meme-credit"/>
           <p:cNvSpPr txBox="1"/>
           <p:nvPr/>
         </p:nvSpPr>
@@ -7870,7 +7693,7 @@
       </p:sp>
       <p:pic>
         <p:nvPicPr>
-          <p:cNvPr id="6" name="zoom-crack" descr="C:\Users\user\_se4nchoi\batteryvision\docs\submission\build\img\zoom_crack.jpg">    </p:cNvPr>
+          <p:cNvPr id="5" name="zoom-crack" descr="C:\Users\user\_se4nchoi\batteryvision\docs\submission\build\img\zoom_crack.jpg">    </p:cNvPr>
           <p:cNvPicPr>
             <a:picLocks noChangeAspect="1"/>
           </p:cNvPicPr>
@@ -7884,7 +7707,7 @@
         </p:blipFill>
         <p:spPr>
           <a:xfrm>
-            <a:off x="548640" y="1645920"/>
+            <a:off x="548640" y="1554480"/>
             <a:ext cx="3108960" cy="3108960"/>
           </a:xfrm>
           <a:prstGeom prst="rect">
@@ -7894,34 +7717,43 @@
       </p:pic>
       <p:sp>
         <p:nvSpPr>
-          <p:cNvPr id="7" name="zoom-dot-crack"/>
+          <p:cNvPr id="6" name="zoom-chip-crack-bg"/>
           <p:cNvSpPr/>
           <p:nvPr/>
         </p:nvSpPr>
         <p:spPr>
           <a:xfrm>
-            <a:off x="548640" y="4956048"/>
-            <a:ext cx="146304" cy="146304"/>
-          </a:xfrm>
-          <a:prstGeom prst="ellipse">
-            <a:avLst/>
+            <a:off x="548640" y="4800600"/>
+            <a:ext cx="1005840" cy="347472"/>
+          </a:xfrm>
+          <a:prstGeom prst="roundRect">
+            <a:avLst>
+              <a:gd name="adj" fmla="val 13158"/>
+            </a:avLst>
           </a:prstGeom>
           <a:solidFill>
-            <a:schemeClr val="accent2"/>
+            <a:schemeClr val="accent2">
+              <a:alpha val="20000"/>
+            </a:schemeClr>
           </a:solidFill>
-          <a:ln/>
-        </p:spPr>
-      </p:sp>
-      <p:sp>
-        <p:nvSpPr>
-          <p:cNvPr id="8" name="zoom-cap-crack"/>
+          <a:ln w="12700">
+            <a:solidFill>
+              <a:schemeClr val="accent2"/>
+            </a:solidFill>
+            <a:prstDash val="solid"/>
+          </a:ln>
+        </p:spPr>
+      </p:sp>
+      <p:sp>
+        <p:nvSpPr>
+          <p:cNvPr id="7" name="zoom-chip-crack"/>
           <p:cNvSpPr txBox="1"/>
           <p:nvPr/>
         </p:nvSpPr>
         <p:spPr>
           <a:xfrm>
-            <a:off x="786384" y="4882896"/>
-            <a:ext cx="2834640" cy="292608"/>
+            <a:off x="548640" y="4800600"/>
+            <a:ext cx="1005840" cy="347472"/>
           </a:xfrm>
           <a:prstGeom prst="rect">
             <a:avLst/>
@@ -7930,20 +7762,45 @@
           <a:ln/>
         </p:spPr>
         <p:txBody>
-          <a:bodyPr wrap="square" lIns="0" tIns="0" rIns="0" bIns="0" rtlCol="0" anchor="t"/>
+          <a:bodyPr wrap="square" lIns="0" tIns="0" rIns="0" bIns="0" rtlCol="0" anchor="ctr"/>
           <a:lstStyle/>
           <a:p>
-            <a:pPr indent="0" marL="0">
+            <a:pPr algn="ctr" indent="0" marL="0">
               <a:buNone/>
             </a:pPr>
             <a:r>
-              <a:rPr lang="en-US" sz="1400" b="1" dirty="0">
+              <a:rPr lang="en-US" sz="1300" b="1" dirty="0">
                 <a:solidFill>
-                  <a:schemeClr val="tx1"/>
+                  <a:schemeClr val="accent2"/>
                 </a:solidFill>
               </a:rPr>
-              <a:t>crack  </a:t>
+              <a:t>crack</a:t>
             </a:r>
+            <a:endParaRPr lang="en-US" sz="1300" dirty="0"/>
+          </a:p>
+        </p:txBody>
+      </p:sp>
+      <p:sp>
+        <p:nvSpPr>
+          <p:cNvPr id="8" name="zoom-cap-crack"/>
+          <p:cNvSpPr txBox="1"/>
+          <p:nvPr/>
+        </p:nvSpPr>
+        <p:spPr>
+          <a:xfrm>
+            <a:off x="1691640" y="4800600"/>
+            <a:ext cx="1828800" cy="347472"/>
+          </a:xfrm>
+          <a:prstGeom prst="rect">
+            <a:avLst/>
+          </a:prstGeom>
+          <a:noFill/>
+          <a:ln/>
+        </p:spPr>
+        <p:txBody>
+          <a:bodyPr wrap="square" lIns="0" tIns="0" rIns="0" bIns="0" rtlCol="0" anchor="ctr"/>
+          <a:lstStyle/>
+          <a:p>
             <a:pPr indent="0" marL="0">
               <a:buNone/>
             </a:pPr>
@@ -7953,7 +7810,7 @@
                   <a:schemeClr val="tx2"/>
                 </a:solidFill>
               </a:rPr>
-              <a:t>어둡고 뚜렷함</a:t>
+              <a:t>뚜렷함</a:t>
             </a:r>
             <a:endParaRPr lang="en-US" sz="1400" dirty="0"/>
           </a:p>
@@ -7975,7 +7832,7 @@
         </p:blipFill>
         <p:spPr>
           <a:xfrm>
-            <a:off x="3794760" y="1645920"/>
+            <a:off x="3794760" y="1554480"/>
             <a:ext cx="3108960" cy="3108960"/>
           </a:xfrm>
           <a:prstGeom prst="rect">
@@ -7985,34 +7842,43 @@
       </p:pic>
       <p:sp>
         <p:nvSpPr>
-          <p:cNvPr id="10" name="zoom-dot-scratch"/>
+          <p:cNvPr id="10" name="zoom-chip-scratch-bg"/>
           <p:cNvSpPr/>
           <p:nvPr/>
         </p:nvSpPr>
         <p:spPr>
           <a:xfrm>
-            <a:off x="3794760" y="4956048"/>
-            <a:ext cx="146304" cy="146304"/>
-          </a:xfrm>
-          <a:prstGeom prst="ellipse">
-            <a:avLst/>
+            <a:off x="3794760" y="4800600"/>
+            <a:ext cx="1005840" cy="347472"/>
+          </a:xfrm>
+          <a:prstGeom prst="roundRect">
+            <a:avLst>
+              <a:gd name="adj" fmla="val 13158"/>
+            </a:avLst>
           </a:prstGeom>
           <a:solidFill>
-            <a:schemeClr val="accent3"/>
+            <a:schemeClr val="accent3">
+              <a:alpha val="20000"/>
+            </a:schemeClr>
           </a:solidFill>
-          <a:ln/>
-        </p:spPr>
-      </p:sp>
-      <p:sp>
-        <p:nvSpPr>
-          <p:cNvPr id="11" name="zoom-cap-scratch"/>
+          <a:ln w="12700">
+            <a:solidFill>
+              <a:schemeClr val="accent3"/>
+            </a:solidFill>
+            <a:prstDash val="solid"/>
+          </a:ln>
+        </p:spPr>
+      </p:sp>
+      <p:sp>
+        <p:nvSpPr>
+          <p:cNvPr id="11" name="zoom-chip-scratch"/>
           <p:cNvSpPr txBox="1"/>
           <p:nvPr/>
         </p:nvSpPr>
         <p:spPr>
           <a:xfrm>
-            <a:off x="4032504" y="4882896"/>
-            <a:ext cx="2834640" cy="292608"/>
+            <a:off x="3794760" y="4800600"/>
+            <a:ext cx="1005840" cy="347472"/>
           </a:xfrm>
           <a:prstGeom prst="rect">
             <a:avLst/>
@@ -8021,20 +7887,45 @@
           <a:ln/>
         </p:spPr>
         <p:txBody>
-          <a:bodyPr wrap="square" lIns="0" tIns="0" rIns="0" bIns="0" rtlCol="0" anchor="t"/>
+          <a:bodyPr wrap="square" lIns="0" tIns="0" rIns="0" bIns="0" rtlCol="0" anchor="ctr"/>
           <a:lstStyle/>
           <a:p>
-            <a:pPr indent="0" marL="0">
+            <a:pPr algn="ctr" indent="0" marL="0">
               <a:buNone/>
             </a:pPr>
             <a:r>
-              <a:rPr lang="en-US" sz="1400" b="1" dirty="0">
+              <a:rPr lang="en-US" sz="1300" b="1" dirty="0">
                 <a:solidFill>
-                  <a:schemeClr val="tx1"/>
+                  <a:schemeClr val="accent3"/>
                 </a:solidFill>
               </a:rPr>
-              <a:t>scratch  </a:t>
+              <a:t>scratch</a:t>
             </a:r>
+            <a:endParaRPr lang="en-US" sz="1300" dirty="0"/>
+          </a:p>
+        </p:txBody>
+      </p:sp>
+      <p:sp>
+        <p:nvSpPr>
+          <p:cNvPr id="12" name="zoom-cap-scratch"/>
+          <p:cNvSpPr txBox="1"/>
+          <p:nvPr/>
+        </p:nvSpPr>
+        <p:spPr>
+          <a:xfrm>
+            <a:off x="4937760" y="4800600"/>
+            <a:ext cx="1828800" cy="347472"/>
+          </a:xfrm>
+          <a:prstGeom prst="rect">
+            <a:avLst/>
+          </a:prstGeom>
+          <a:noFill/>
+          <a:ln/>
+        </p:spPr>
+        <p:txBody>
+          <a:bodyPr wrap="square" lIns="0" tIns="0" rIns="0" bIns="0" rtlCol="0" anchor="ctr"/>
+          <a:lstStyle/>
+          <a:p>
             <a:pPr indent="0" marL="0">
               <a:buNone/>
             </a:pPr>
@@ -8044,7 +7935,7 @@
                   <a:schemeClr val="tx2"/>
                 </a:solidFill>
               </a:rPr>
-              <a:t>가늘고 흐릿함</a:t>
+              <a:t>흐릿함</a:t>
             </a:r>
             <a:endParaRPr lang="en-US" sz="1400" dirty="0"/>
           </a:p>
@@ -8052,14 +7943,36 @@
       </p:sp>
       <p:sp>
         <p:nvSpPr>
-          <p:cNvPr id="12" name="size-line"/>
+          <p:cNvPr id="13" name="size-card"/>
+          <p:cNvSpPr/>
+          <p:nvPr/>
+        </p:nvSpPr>
+        <p:spPr>
+          <a:xfrm>
+            <a:off x="548640" y="5486400"/>
+            <a:ext cx="6355080" cy="731520"/>
+          </a:xfrm>
+          <a:prstGeom prst="roundRect">
+            <a:avLst>
+              <a:gd name="adj" fmla="val 10000"/>
+            </a:avLst>
+          </a:prstGeom>
+          <a:solidFill>
+            <a:schemeClr val="bg2"/>
+          </a:solidFill>
+          <a:ln/>
+        </p:spPr>
+      </p:sp>
+      <p:sp>
+        <p:nvSpPr>
+          <p:cNvPr id="14" name="size-line"/>
           <p:cNvSpPr txBox="1"/>
           <p:nvPr/>
         </p:nvSpPr>
         <p:spPr>
           <a:xfrm>
-            <a:off x="548640" y="5449824"/>
-            <a:ext cx="6309360" cy="667512"/>
+            <a:off x="822960" y="5486400"/>
+            <a:ext cx="5943600" cy="731520"/>
           </a:xfrm>
           <a:prstGeom prst="rect">
             <a:avLst/>
@@ -8068,7 +7981,7 @@
           <a:ln/>
         </p:spPr>
         <p:txBody>
-          <a:bodyPr wrap="square" lIns="0" tIns="0" rIns="0" bIns="0" rtlCol="0" anchor="t"/>
+          <a:bodyPr wrap="square" lIns="0" tIns="0" rIns="0" bIns="0" rtlCol="0" anchor="ctr"/>
           <a:lstStyle/>
           <a:p>
             <a:pPr indent="0" marL="0">
@@ -8080,11 +7993,8 @@
                   <a:schemeClr val="tx2"/>
                 </a:solidFill>
               </a:rPr>
-              <a:t>박스 크기 (640px 사진, 중앙값)</a:t>
+              <a:t>박스 크기  </a:t>
             </a:r>
-            <a:endParaRPr lang="en-US" sz="1600" dirty="0"/>
-          </a:p>
-          <a:p>
             <a:pPr indent="0" marL="0">
               <a:buNone/>
             </a:pPr>
@@ -8102,13 +8012,13 @@
       </p:sp>
       <p:graphicFrame>
         <p:nvGraphicFramePr>
-          <p:cNvPr id="13" name="ap-chart" descr=""/>
+          <p:cNvPr id="15" name="ap-chart" descr=""/>
           <p:cNvGraphicFramePr/>
           <p:nvPr/>
         </p:nvGraphicFramePr>
         <p:xfrm>
-          <a:off x="7223760" y="1645920"/>
-          <a:ext cx="4416552" cy="4572000"/>
+          <a:off x="7223760" y="1508760"/>
+          <a:ext cx="4416552" cy="4709160"/>
         </p:xfrm>
         <a:graphic xmlns:a="http://schemas.openxmlformats.org/drawingml/2006/main">
           <a:graphicData uri="http://schemas.openxmlformats.org/drawingml/2006/chart">
@@ -8232,12 +8142,12 @@
         </p:nvSpPr>
         <p:spPr>
           <a:xfrm>
-            <a:off x="548640" y="1645920"/>
-            <a:ext cx="5394960" cy="1965960"/>
+            <a:off x="548640" y="1600200"/>
+            <a:ext cx="5394960" cy="1828800"/>
           </a:xfrm>
           <a:prstGeom prst="roundRect">
             <a:avLst>
-              <a:gd name="adj" fmla="val 3721"/>
+              <a:gd name="adj" fmla="val 4000"/>
             </a:avLst>
           </a:prstGeom>
           <a:solidFill>
@@ -8254,7 +8164,7 @@
         </p:nvSpPr>
         <p:spPr>
           <a:xfrm>
-            <a:off x="822960" y="1755648"/>
+            <a:off x="822960" y="1709928"/>
             <a:ext cx="4572000" cy="320040"/>
           </a:xfrm>
           <a:prstGeom prst="rect">
@@ -8284,13 +8194,13 @@
       </p:sp>
       <p:sp>
         <p:nvSpPr>
-          <p:cNvPr id="5" name="ds-k-bg-0"/>
+          <p:cNvPr id="5" name="ds-k-0-bg"/>
           <p:cNvSpPr/>
           <p:nvPr/>
         </p:nvSpPr>
         <p:spPr>
           <a:xfrm>
-            <a:off x="822960" y="2212848"/>
+            <a:off x="822960" y="2148840"/>
             <a:ext cx="658368" cy="329184"/>
           </a:xfrm>
           <a:prstGeom prst="roundRect">
@@ -8300,7 +8210,7 @@
           </a:prstGeom>
           <a:solidFill>
             <a:schemeClr val="accent1">
-              <a:alpha val="22000"/>
+              <a:alpha val="20000"/>
             </a:schemeClr>
           </a:solidFill>
           <a:ln w="12700">
@@ -8319,7 +8229,7 @@
         </p:nvSpPr>
         <p:spPr>
           <a:xfrm>
-            <a:off x="822960" y="2212848"/>
+            <a:off x="822960" y="2148840"/>
             <a:ext cx="658368" cy="329184"/>
           </a:xfrm>
           <a:prstGeom prst="rect">
@@ -8355,7 +8265,7 @@
         </p:nvSpPr>
         <p:spPr>
           <a:xfrm>
-            <a:off x="1627632" y="2212848"/>
+            <a:off x="1627632" y="2148840"/>
             <a:ext cx="4206240" cy="329184"/>
           </a:xfrm>
           <a:prstGeom prst="rect">
@@ -8377,7 +8287,7 @@
                   <a:schemeClr val="tx1"/>
                 </a:solidFill>
               </a:rPr>
-              <a:t>Roboflow 공개 데이터셋 · 라벨 포함 그대로 import</a:t>
+              <a:t>Roboflow · 라벨 포함</a:t>
             </a:r>
             <a:endParaRPr lang="en-US" sz="1400" dirty="0"/>
           </a:p>
@@ -8385,13 +8295,13 @@
       </p:sp>
       <p:sp>
         <p:nvSpPr>
-          <p:cNvPr id="8" name="ds-k-bg-1"/>
+          <p:cNvPr id="8" name="ds-k-1-bg"/>
           <p:cNvSpPr/>
           <p:nvPr/>
         </p:nvSpPr>
         <p:spPr>
           <a:xfrm>
-            <a:off x="822960" y="2651760"/>
+            <a:off x="822960" y="2560320"/>
             <a:ext cx="658368" cy="329184"/>
           </a:xfrm>
           <a:prstGeom prst="roundRect">
@@ -8401,7 +8311,7 @@
           </a:prstGeom>
           <a:solidFill>
             <a:schemeClr val="accent3">
-              <a:alpha val="22000"/>
+              <a:alpha val="20000"/>
             </a:schemeClr>
           </a:solidFill>
           <a:ln w="12700">
@@ -8420,7 +8330,7 @@
         </p:nvSpPr>
         <p:spPr>
           <a:xfrm>
-            <a:off x="822960" y="2651760"/>
+            <a:off x="822960" y="2560320"/>
             <a:ext cx="658368" cy="329184"/>
           </a:xfrm>
           <a:prstGeom prst="rect">
@@ -8456,7 +8366,7 @@
         </p:nvSpPr>
         <p:spPr>
           <a:xfrm>
-            <a:off x="1627632" y="2651760"/>
+            <a:off x="1627632" y="2560320"/>
             <a:ext cx="4206240" cy="329184"/>
           </a:xfrm>
           <a:prstGeom prst="rect">
@@ -8478,7 +8388,7 @@
                   <a:schemeClr val="tx1"/>
                 </a:solidFill>
               </a:rPr>
-              <a:t>crack · scratch · 원본 1,531장</a:t>
+              <a:t>crack · scratch · 1,531장</a:t>
             </a:r>
             <a:endParaRPr lang="en-US" sz="1400" dirty="0"/>
           </a:p>
@@ -8486,13 +8396,13 @@
       </p:sp>
       <p:sp>
         <p:nvSpPr>
-          <p:cNvPr id="11" name="ds-k-bg-2"/>
+          <p:cNvPr id="11" name="ds-k-2-bg"/>
           <p:cNvSpPr/>
           <p:nvPr/>
         </p:nvSpPr>
         <p:spPr>
           <a:xfrm>
-            <a:off x="822960" y="3090672"/>
+            <a:off x="822960" y="2971800"/>
             <a:ext cx="658368" cy="329184"/>
           </a:xfrm>
           <a:prstGeom prst="roundRect">
@@ -8502,7 +8412,7 @@
           </a:prstGeom>
           <a:solidFill>
             <a:schemeClr val="accent6">
-              <a:alpha val="22000"/>
+              <a:alpha val="20000"/>
             </a:schemeClr>
           </a:solidFill>
           <a:ln w="12700">
@@ -8521,7 +8431,7 @@
         </p:nvSpPr>
         <p:spPr>
           <a:xfrm>
-            <a:off x="822960" y="3090672"/>
+            <a:off x="822960" y="2971800"/>
             <a:ext cx="658368" cy="329184"/>
           </a:xfrm>
           <a:prstGeom prst="rect">
@@ -8557,7 +8467,7 @@
         </p:nvSpPr>
         <p:spPr>
           <a:xfrm>
-            <a:off x="1627632" y="3090672"/>
+            <a:off x="1627632" y="2971800"/>
             <a:ext cx="4206240" cy="329184"/>
           </a:xfrm>
           <a:prstGeom prst="rect">
@@ -8579,7 +8489,7 @@
                   <a:schemeClr val="tx1"/>
                 </a:solidFill>
               </a:rPr>
-              <a:t>모델별 성능 비교 · INT8 효과</a:t>
+              <a:t>모델 비교 · INT8</a:t>
             </a:r>
             <a:endParaRPr lang="en-US" sz="1400" dirty="0"/>
           </a:p>
@@ -8593,12 +8503,12 @@
         </p:nvSpPr>
         <p:spPr>
           <a:xfrm>
-            <a:off x="548640" y="3794760"/>
-            <a:ext cx="5394960" cy="2423160"/>
+            <a:off x="548640" y="3611880"/>
+            <a:ext cx="5394960" cy="2606040"/>
           </a:xfrm>
           <a:prstGeom prst="roundRect">
             <a:avLst>
-              <a:gd name="adj" fmla="val 3019"/>
+              <a:gd name="adj" fmla="val 2807"/>
             </a:avLst>
           </a:prstGeom>
           <a:solidFill>
@@ -8615,7 +8525,7 @@
         </p:nvSpPr>
         <p:spPr>
           <a:xfrm>
-            <a:off x="822960" y="3904488"/>
+            <a:off x="822960" y="3721608"/>
             <a:ext cx="4572000" cy="320040"/>
           </a:xfrm>
           <a:prstGeom prst="rect">
@@ -8659,7 +8569,7 @@
         </p:blipFill>
         <p:spPr>
           <a:xfrm>
-            <a:off x="822960" y="4297680"/>
+            <a:off x="822960" y="4114800"/>
             <a:ext cx="1325880" cy="1325880"/>
           </a:xfrm>
           <a:prstGeom prst="rect">
@@ -8675,7 +8585,7 @@
         </p:nvSpPr>
         <p:spPr>
           <a:xfrm>
-            <a:off x="822960" y="5641848"/>
+            <a:off x="822960" y="5458968"/>
             <a:ext cx="1325880" cy="237744"/>
           </a:xfrm>
           <a:prstGeom prst="rect">
@@ -8719,7 +8629,7 @@
         </p:blipFill>
         <p:spPr>
           <a:xfrm>
-            <a:off x="2514600" y="4297680"/>
+            <a:off x="2514600" y="4114800"/>
             <a:ext cx="1325880" cy="1325880"/>
           </a:xfrm>
           <a:prstGeom prst="rect">
@@ -8735,7 +8645,7 @@
         </p:nvSpPr>
         <p:spPr>
           <a:xfrm>
-            <a:off x="2514600" y="5641848"/>
+            <a:off x="2514600" y="5458968"/>
             <a:ext cx="1325880" cy="237744"/>
           </a:xfrm>
           <a:prstGeom prst="rect">
@@ -8779,7 +8689,7 @@
         </p:blipFill>
         <p:spPr>
           <a:xfrm>
-            <a:off x="4206240" y="4297680"/>
+            <a:off x="4206240" y="4114800"/>
             <a:ext cx="1325880" cy="1325880"/>
           </a:xfrm>
           <a:prstGeom prst="rect">
@@ -8795,7 +8705,7 @@
         </p:nvSpPr>
         <p:spPr>
           <a:xfrm>
-            <a:off x="4206240" y="5641848"/>
+            <a:off x="4206240" y="5458968"/>
             <a:ext cx="1325880" cy="237744"/>
           </a:xfrm>
           <a:prstGeom prst="rect">
@@ -8825,14 +8735,43 @@
       </p:sp>
       <p:sp>
         <p:nvSpPr>
-          <p:cNvPr id="22" name="limit-t"/>
+          <p:cNvPr id="22" name="limit-tag-0-bg"/>
+          <p:cNvSpPr/>
+          <p:nvPr/>
+        </p:nvSpPr>
+        <p:spPr>
+          <a:xfrm>
+            <a:off x="822960" y="5760720"/>
+            <a:ext cx="1325880" cy="310896"/>
+          </a:xfrm>
+          <a:prstGeom prst="roundRect">
+            <a:avLst>
+              <a:gd name="adj" fmla="val 14706"/>
+            </a:avLst>
+          </a:prstGeom>
+          <a:solidFill>
+            <a:schemeClr val="accent3">
+              <a:alpha val="20000"/>
+            </a:schemeClr>
+          </a:solidFill>
+          <a:ln w="12700">
+            <a:solidFill>
+              <a:schemeClr val="accent3"/>
+            </a:solidFill>
+            <a:prstDash val="solid"/>
+          </a:ln>
+        </p:spPr>
+      </p:sp>
+      <p:sp>
+        <p:nvSpPr>
+          <p:cNvPr id="23" name="limit-tag-0"/>
           <p:cNvSpPr txBox="1"/>
           <p:nvPr/>
         </p:nvSpPr>
         <p:spPr>
           <a:xfrm>
-            <a:off x="822960" y="5897880"/>
-            <a:ext cx="4937760" cy="274320"/>
+            <a:off x="822960" y="5760720"/>
+            <a:ext cx="1325880" cy="310896"/>
           </a:xfrm>
           <a:prstGeom prst="rect">
             <a:avLst/>
@@ -8841,19 +8780,19 @@
           <a:ln/>
         </p:spPr>
         <p:txBody>
-          <a:bodyPr wrap="square" lIns="0" tIns="0" rIns="0" bIns="0" rtlCol="0" anchor="t"/>
+          <a:bodyPr wrap="square" lIns="0" tIns="0" rIns="0" bIns="0" rtlCol="0" anchor="ctr"/>
           <a:lstStyle/>
           <a:p>
-            <a:pPr indent="0" marL="0">
+            <a:pPr algn="ctr" indent="0" marL="0">
               <a:buNone/>
             </a:pPr>
             <a:r>
               <a:rPr lang="en-US" sz="1300" b="1" dirty="0">
                 <a:solidFill>
-                  <a:schemeClr val="tx1"/>
+                  <a:schemeClr val="accent3"/>
                 </a:solidFill>
               </a:rPr>
-              <a:t>탁상 촬영 · 셀당 사진 1장 · 같은 촬영 세션 반복</a:t>
+              <a:t>탁상 촬영</a:t>
             </a:r>
             <a:endParaRPr lang="en-US" sz="1300" dirty="0"/>
           </a:p>
@@ -8861,13 +8800,143 @@
       </p:sp>
       <p:sp>
         <p:nvSpPr>
-          <p:cNvPr id="23" name="grid-h"/>
+          <p:cNvPr id="24" name="limit-tag-1-bg"/>
+          <p:cNvSpPr/>
+          <p:nvPr/>
+        </p:nvSpPr>
+        <p:spPr>
+          <a:xfrm>
+            <a:off x="2514600" y="5760720"/>
+            <a:ext cx="1325880" cy="310896"/>
+          </a:xfrm>
+          <a:prstGeom prst="roundRect">
+            <a:avLst>
+              <a:gd name="adj" fmla="val 14706"/>
+            </a:avLst>
+          </a:prstGeom>
+          <a:solidFill>
+            <a:schemeClr val="accent3">
+              <a:alpha val="20000"/>
+            </a:schemeClr>
+          </a:solidFill>
+          <a:ln w="12700">
+            <a:solidFill>
+              <a:schemeClr val="accent3"/>
+            </a:solidFill>
+            <a:prstDash val="solid"/>
+          </a:ln>
+        </p:spPr>
+      </p:sp>
+      <p:sp>
+        <p:nvSpPr>
+          <p:cNvPr id="25" name="limit-tag-1"/>
           <p:cNvSpPr txBox="1"/>
           <p:nvPr/>
         </p:nvSpPr>
         <p:spPr>
           <a:xfrm>
-            <a:off x="6172200" y="1645920"/>
+            <a:off x="2514600" y="5760720"/>
+            <a:ext cx="1325880" cy="310896"/>
+          </a:xfrm>
+          <a:prstGeom prst="rect">
+            <a:avLst/>
+          </a:prstGeom>
+          <a:noFill/>
+          <a:ln/>
+        </p:spPr>
+        <p:txBody>
+          <a:bodyPr wrap="square" lIns="0" tIns="0" rIns="0" bIns="0" rtlCol="0" anchor="ctr"/>
+          <a:lstStyle/>
+          <a:p>
+            <a:pPr algn="ctr" indent="0" marL="0">
+              <a:buNone/>
+            </a:pPr>
+            <a:r>
+              <a:rPr lang="en-US" sz="1300" b="1" dirty="0">
+                <a:solidFill>
+                  <a:schemeClr val="accent3"/>
+                </a:solidFill>
+              </a:rPr>
+              <a:t>셀당 1장</a:t>
+            </a:r>
+            <a:endParaRPr lang="en-US" sz="1300" dirty="0"/>
+          </a:p>
+        </p:txBody>
+      </p:sp>
+      <p:sp>
+        <p:nvSpPr>
+          <p:cNvPr id="26" name="limit-tag-2-bg"/>
+          <p:cNvSpPr/>
+          <p:nvPr/>
+        </p:nvSpPr>
+        <p:spPr>
+          <a:xfrm>
+            <a:off x="4206240" y="5760720"/>
+            <a:ext cx="1325880" cy="310896"/>
+          </a:xfrm>
+          <a:prstGeom prst="roundRect">
+            <a:avLst>
+              <a:gd name="adj" fmla="val 14706"/>
+            </a:avLst>
+          </a:prstGeom>
+          <a:solidFill>
+            <a:schemeClr val="accent3">
+              <a:alpha val="20000"/>
+            </a:schemeClr>
+          </a:solidFill>
+          <a:ln w="12700">
+            <a:solidFill>
+              <a:schemeClr val="accent3"/>
+            </a:solidFill>
+            <a:prstDash val="solid"/>
+          </a:ln>
+        </p:spPr>
+      </p:sp>
+      <p:sp>
+        <p:nvSpPr>
+          <p:cNvPr id="27" name="limit-tag-2"/>
+          <p:cNvSpPr txBox="1"/>
+          <p:nvPr/>
+        </p:nvSpPr>
+        <p:spPr>
+          <a:xfrm>
+            <a:off x="4206240" y="5760720"/>
+            <a:ext cx="1325880" cy="310896"/>
+          </a:xfrm>
+          <a:prstGeom prst="rect">
+            <a:avLst/>
+          </a:prstGeom>
+          <a:noFill/>
+          <a:ln/>
+        </p:spPr>
+        <p:txBody>
+          <a:bodyPr wrap="square" lIns="0" tIns="0" rIns="0" bIns="0" rtlCol="0" anchor="ctr"/>
+          <a:lstStyle/>
+          <a:p>
+            <a:pPr algn="ctr" indent="0" marL="0">
+              <a:buNone/>
+            </a:pPr>
+            <a:r>
+              <a:rPr lang="en-US" sz="1300" b="1" dirty="0">
+                <a:solidFill>
+                  <a:schemeClr val="accent3"/>
+                </a:solidFill>
+              </a:rPr>
+              <a:t>세션 반복</a:t>
+            </a:r>
+            <a:endParaRPr lang="en-US" sz="1300" dirty="0"/>
+          </a:p>
+        </p:txBody>
+      </p:sp>
+      <p:sp>
+        <p:nvSpPr>
+          <p:cNvPr id="28" name="grid-h"/>
+          <p:cNvSpPr txBox="1"/>
+          <p:nvPr/>
+        </p:nvSpPr>
+        <p:spPr>
+          <a:xfrm>
+            <a:off x="6172200" y="1600200"/>
             <a:ext cx="5486400" cy="320040"/>
           </a:xfrm>
           <a:prstGeom prst="rect">
@@ -8910,7 +8979,7 @@
           </p:nvPr>
         </p:nvGraphicFramePr>
         <p:xfrm>
-          <a:off x="6172200" y="2103120"/>
+          <a:off x="6172200" y="2057400"/>
           <a:ext cx="5468112" cy="914400"/>
         </p:xfrm>
         <a:graphic>
@@ -8923,7 +8992,7 @@
                 <a:gridCol w="1280160"/>
                 <a:gridCol w="1097280"/>
               </a:tblGrid>
-              <a:tr h="566928">
+              <a:tr h="548640">
                 <a:tc>
                   <a:txBody>
                     <a:bodyPr/>
@@ -8932,7 +9001,7 @@
                       <a:pPr algn="ctr" indent="0" marL="0">
                         <a:buNone/>
                       </a:pPr>
-                      <a:endParaRPr lang="en-US" sz="1400" dirty="0">
+                      <a:endParaRPr lang="en-US" sz="1500" dirty="0">
                         <a:latin typeface="Malgun Gothic" charset="0"/>
                         <a:ea typeface="Malgun Gothic" charset="0"/>
                         <a:cs typeface="Malgun Gothic" charset="0"/>
@@ -8990,7 +9059,7 @@
                         <a:buNone/>
                       </a:pPr>
                       <a:r>
-                        <a:rPr lang="en-US" sz="1400" b="1" dirty="0">
+                        <a:rPr lang="en-US" sz="1500" b="1" dirty="0">
                           <a:solidFill>
                             <a:schemeClr val="tx2"/>
                           </a:solidFill>
@@ -9000,7 +9069,7 @@
                         </a:rPr>
                         <a:t>FP16</a:t>
                       </a:r>
-                      <a:endParaRPr lang="en-US" sz="1400" dirty="0">
+                      <a:endParaRPr lang="en-US" sz="1500" dirty="0">
                         <a:latin typeface="Malgun Gothic" charset="0"/>
                         <a:ea typeface="Malgun Gothic" charset="0"/>
                         <a:cs typeface="Malgun Gothic" charset="0"/>
@@ -9058,7 +9127,7 @@
                         <a:buNone/>
                       </a:pPr>
                       <a:r>
-                        <a:rPr lang="en-US" sz="1400" b="1" dirty="0">
+                        <a:rPr lang="en-US" sz="1500" b="1" dirty="0">
                           <a:solidFill>
                             <a:schemeClr val="tx2"/>
                           </a:solidFill>
@@ -9068,7 +9137,7 @@
                         </a:rPr>
                         <a:t>FP16 + XAI</a:t>
                       </a:r>
-                      <a:endParaRPr lang="en-US" sz="1400" dirty="0">
+                      <a:endParaRPr lang="en-US" sz="1500" dirty="0">
                         <a:latin typeface="Malgun Gothic" charset="0"/>
                         <a:ea typeface="Malgun Gothic" charset="0"/>
                         <a:cs typeface="Malgun Gothic" charset="0"/>
@@ -9126,7 +9195,7 @@
                         <a:buNone/>
                       </a:pPr>
                       <a:r>
-                        <a:rPr lang="en-US" sz="1400" b="1" dirty="0">
+                        <a:rPr lang="en-US" sz="1500" b="1" dirty="0">
                           <a:solidFill>
                             <a:schemeClr val="tx2"/>
                           </a:solidFill>
@@ -9136,7 +9205,7 @@
                         </a:rPr>
                         <a:t>INT8</a:t>
                       </a:r>
-                      <a:endParaRPr lang="en-US" sz="1400" dirty="0">
+                      <a:endParaRPr lang="en-US" sz="1500" dirty="0">
                         <a:latin typeface="Malgun Gothic" charset="0"/>
                         <a:ea typeface="Malgun Gothic" charset="0"/>
                         <a:cs typeface="Malgun Gothic" charset="0"/>
@@ -9186,7 +9255,7 @@
                   </a:tcPr>
                 </a:tc>
               </a:tr>
-              <a:tr h="566928">
+              <a:tr h="960120">
                 <a:tc>
                   <a:txBody>
                     <a:bodyPr/>
@@ -9196,7 +9265,7 @@
                         <a:buNone/>
                       </a:pPr>
                       <a:r>
-                        <a:rPr lang="en-US" sz="1400" b="1" dirty="0">
+                        <a:rPr lang="en-US" sz="1500" b="1" dirty="0">
                           <a:solidFill>
                             <a:schemeClr val="accent4"/>
                           </a:solidFill>
@@ -9206,7 +9275,7 @@
                         </a:rPr>
                         <a:t>ATSS-MobileNetV2</a:t>
                       </a:r>
-                      <a:endParaRPr lang="en-US" sz="1400" dirty="0">
+                      <a:endParaRPr lang="en-US" sz="1500" dirty="0">
                         <a:latin typeface="Malgun Gothic" charset="0"/>
                         <a:ea typeface="Malgun Gothic" charset="0"/>
                         <a:cs typeface="Malgun Gothic" charset="0"/>
@@ -9264,7 +9333,7 @@
                         <a:buNone/>
                       </a:pPr>
                       <a:r>
-                        <a:rPr lang="en-US" sz="1400" dirty="0">
+                        <a:rPr lang="en-US" sz="1500" dirty="0">
                           <a:solidFill>
                             <a:schemeClr val="tx1"/>
                           </a:solidFill>
@@ -9274,7 +9343,7 @@
                         </a:rPr>
                         <a:t>5.7 MB</a:t>
                       </a:r>
-                      <a:endParaRPr lang="en-US" sz="1400" dirty="0">
+                      <a:endParaRPr lang="en-US" sz="1500" dirty="0">
                         <a:latin typeface="Malgun Gothic" charset="0"/>
                         <a:ea typeface="Malgun Gothic" charset="0"/>
                         <a:cs typeface="Malgun Gothic" charset="0"/>
@@ -9332,7 +9401,7 @@
                         <a:buNone/>
                       </a:pPr>
                       <a:r>
-                        <a:rPr lang="en-US" sz="1400" dirty="0">
+                        <a:rPr lang="en-US" sz="1500" dirty="0">
                           <a:solidFill>
                             <a:schemeClr val="tx1"/>
                           </a:solidFill>
@@ -9342,7 +9411,7 @@
                         </a:rPr>
                         <a:t>5.8 MB</a:t>
                       </a:r>
-                      <a:endParaRPr lang="en-US" sz="1400" dirty="0">
+                      <a:endParaRPr lang="en-US" sz="1500" dirty="0">
                         <a:latin typeface="Malgun Gothic" charset="0"/>
                         <a:ea typeface="Malgun Gothic" charset="0"/>
                         <a:cs typeface="Malgun Gothic" charset="0"/>
@@ -9400,7 +9469,7 @@
                         <a:buNone/>
                       </a:pPr>
                       <a:r>
-                        <a:rPr lang="en-US" sz="1400" dirty="0">
+                        <a:rPr lang="en-US" sz="1500" dirty="0">
                           <a:solidFill>
                             <a:schemeClr val="tx1"/>
                           </a:solidFill>
@@ -9410,7 +9479,7 @@
                         </a:rPr>
                         <a:t>3.9 MB</a:t>
                       </a:r>
-                      <a:endParaRPr lang="en-US" sz="1400" dirty="0">
+                      <a:endParaRPr lang="en-US" sz="1500" dirty="0">
                         <a:latin typeface="Malgun Gothic" charset="0"/>
                         <a:ea typeface="Malgun Gothic" charset="0"/>
                         <a:cs typeface="Malgun Gothic" charset="0"/>
@@ -9460,7 +9529,7 @@
                   </a:tcPr>
                 </a:tc>
               </a:tr>
-              <a:tr h="566928">
+              <a:tr h="960120">
                 <a:tc>
                   <a:txBody>
                     <a:bodyPr/>
@@ -9470,7 +9539,7 @@
                         <a:buNone/>
                       </a:pPr>
                       <a:r>
-                        <a:rPr lang="en-US" sz="1400" b="1" dirty="0">
+                        <a:rPr lang="en-US" sz="1500" b="1" dirty="0">
                           <a:solidFill>
                             <a:schemeClr val="accent5"/>
                           </a:solidFill>
@@ -9480,7 +9549,7 @@
                         </a:rPr>
                         <a:t>YOLOX-S</a:t>
                       </a:r>
-                      <a:endParaRPr lang="en-US" sz="1400" dirty="0">
+                      <a:endParaRPr lang="en-US" sz="1500" dirty="0">
                         <a:latin typeface="Malgun Gothic" charset="0"/>
                         <a:ea typeface="Malgun Gothic" charset="0"/>
                         <a:cs typeface="Malgun Gothic" charset="0"/>
@@ -9538,7 +9607,7 @@
                         <a:buNone/>
                       </a:pPr>
                       <a:r>
-                        <a:rPr lang="en-US" sz="1400" dirty="0">
+                        <a:rPr lang="en-US" sz="1500" dirty="0">
                           <a:solidFill>
                             <a:schemeClr val="tx1"/>
                           </a:solidFill>
@@ -9548,7 +9617,7 @@
                         </a:rPr>
                         <a:t>18.4 MB</a:t>
                       </a:r>
-                      <a:endParaRPr lang="en-US" sz="1400" dirty="0">
+                      <a:endParaRPr lang="en-US" sz="1500" dirty="0">
                         <a:latin typeface="Malgun Gothic" charset="0"/>
                         <a:ea typeface="Malgun Gothic" charset="0"/>
                         <a:cs typeface="Malgun Gothic" charset="0"/>
@@ -9606,7 +9675,7 @@
                         <a:buNone/>
                       </a:pPr>
                       <a:r>
-                        <a:rPr lang="en-US" sz="1400" dirty="0">
+                        <a:rPr lang="en-US" sz="1500" dirty="0">
                           <a:solidFill>
                             <a:schemeClr val="tx1"/>
                           </a:solidFill>
@@ -9616,7 +9685,7 @@
                         </a:rPr>
                         <a:t>18.4 MB</a:t>
                       </a:r>
-                      <a:endParaRPr lang="en-US" sz="1400" dirty="0">
+                      <a:endParaRPr lang="en-US" sz="1500" dirty="0">
                         <a:latin typeface="Malgun Gothic" charset="0"/>
                         <a:ea typeface="Malgun Gothic" charset="0"/>
                         <a:cs typeface="Malgun Gothic" charset="0"/>
@@ -9674,7 +9743,7 @@
                         <a:buNone/>
                       </a:pPr>
                       <a:r>
-                        <a:rPr lang="en-US" sz="1400" dirty="0">
+                        <a:rPr lang="en-US" sz="1500" dirty="0">
                           <a:solidFill>
                             <a:schemeClr val="tx1"/>
                           </a:solidFill>
@@ -9684,7 +9753,7 @@
                         </a:rPr>
                         <a:t>9.8 MB</a:t>
                       </a:r>
-                      <a:endParaRPr lang="en-US" sz="1400" dirty="0">
+                      <a:endParaRPr lang="en-US" sz="1500" dirty="0">
                         <a:latin typeface="Malgun Gothic" charset="0"/>
                         <a:ea typeface="Malgun Gothic" charset="0"/>
                         <a:cs typeface="Malgun Gothic" charset="0"/>
@@ -9734,7 +9803,7 @@
                   </a:tcPr>
                 </a:tc>
               </a:tr>
-              <a:tr h="566928">
+              <a:tr h="960120">
                 <a:tc>
                   <a:txBody>
                     <a:bodyPr/>
@@ -9744,7 +9813,7 @@
                         <a:buNone/>
                       </a:pPr>
                       <a:r>
-                        <a:rPr lang="en-US" sz="1400" b="1" dirty="0">
+                        <a:rPr lang="en-US" sz="1500" b="1" dirty="0">
                           <a:solidFill>
                             <a:schemeClr val="accent6"/>
                           </a:solidFill>
@@ -9754,7 +9823,7 @@
                         </a:rPr>
                         <a:t>YOLOX-Tiny</a:t>
                       </a:r>
-                      <a:endParaRPr lang="en-US" sz="1400" dirty="0">
+                      <a:endParaRPr lang="en-US" sz="1500" dirty="0">
                         <a:latin typeface="Malgun Gothic" charset="0"/>
                         <a:ea typeface="Malgun Gothic" charset="0"/>
                         <a:cs typeface="Malgun Gothic" charset="0"/>
@@ -9812,7 +9881,7 @@
                         <a:buNone/>
                       </a:pPr>
                       <a:r>
-                        <a:rPr lang="en-US" sz="1400" dirty="0">
+                        <a:rPr lang="en-US" sz="1500" dirty="0">
                           <a:solidFill>
                             <a:schemeClr val="tx1"/>
                           </a:solidFill>
@@ -9822,7 +9891,7 @@
                         </a:rPr>
                         <a:t>10.6 MB</a:t>
                       </a:r>
-                      <a:endParaRPr lang="en-US" sz="1400" dirty="0">
+                      <a:endParaRPr lang="en-US" sz="1500" dirty="0">
                         <a:latin typeface="Malgun Gothic" charset="0"/>
                         <a:ea typeface="Malgun Gothic" charset="0"/>
                         <a:cs typeface="Malgun Gothic" charset="0"/>
@@ -9880,7 +9949,7 @@
                         <a:buNone/>
                       </a:pPr>
                       <a:r>
-                        <a:rPr lang="en-US" sz="1400" dirty="0">
+                        <a:rPr lang="en-US" sz="1500" dirty="0">
                           <a:solidFill>
                             <a:schemeClr val="tx1"/>
                           </a:solidFill>
@@ -9890,7 +9959,7 @@
                         </a:rPr>
                         <a:t>10.6 MB</a:t>
                       </a:r>
-                      <a:endParaRPr lang="en-US" sz="1400" dirty="0">
+                      <a:endParaRPr lang="en-US" sz="1500" dirty="0">
                         <a:latin typeface="Malgun Gothic" charset="0"/>
                         <a:ea typeface="Malgun Gothic" charset="0"/>
                         <a:cs typeface="Malgun Gothic" charset="0"/>
@@ -9948,7 +10017,7 @@
                         <a:buNone/>
                       </a:pPr>
                       <a:r>
-                        <a:rPr lang="en-US" sz="1400" dirty="0">
+                        <a:rPr lang="en-US" sz="1500" dirty="0">
                           <a:solidFill>
                             <a:schemeClr val="tx1"/>
                           </a:solidFill>
@@ -9958,7 +10027,7 @@
                         </a:rPr>
                         <a:t>5.8 MB</a:t>
                       </a:r>
-                      <a:endParaRPr lang="en-US" sz="1400" dirty="0">
+                      <a:endParaRPr lang="en-US" sz="1500" dirty="0">
                         <a:latin typeface="Malgun Gothic" charset="0"/>
                         <a:ea typeface="Malgun Gothic" charset="0"/>
                         <a:cs typeface="Malgun Gothic" charset="0"/>
@@ -10014,120 +10083,14 @@
       </p:graphicFrame>
       <p:sp>
         <p:nvSpPr>
-          <p:cNvPr id="25" name="legend-card"/>
-          <p:cNvSpPr/>
-          <p:nvPr/>
-        </p:nvSpPr>
-        <p:spPr>
-          <a:xfrm>
-            <a:off x="6172200" y="4572000"/>
-            <a:ext cx="5468112" cy="1645920"/>
-          </a:xfrm>
-          <a:prstGeom prst="roundRect">
-            <a:avLst>
-              <a:gd name="adj" fmla="val 4444"/>
-            </a:avLst>
-          </a:prstGeom>
-          <a:solidFill>
-            <a:schemeClr val="bg2"/>
-          </a:solidFill>
-          <a:ln/>
-        </p:spPr>
-      </p:sp>
-      <p:sp>
-        <p:nvSpPr>
-          <p:cNvPr id="26" name="legend"/>
+          <p:cNvPr id="30" name="credit"/>
           <p:cNvSpPr txBox="1"/>
           <p:nvPr/>
         </p:nvSpPr>
         <p:spPr>
           <a:xfrm>
-            <a:off x="6446520" y="4709160"/>
-            <a:ext cx="5029200" cy="1371600"/>
-          </a:xfrm>
-          <a:prstGeom prst="rect">
-            <a:avLst/>
-          </a:prstGeom>
-          <a:noFill/>
-          <a:ln/>
-        </p:spPr>
-        <p:txBody>
-          <a:bodyPr wrap="square" lIns="0" tIns="0" rIns="0" bIns="0" rtlCol="0" anchor="ctr"/>
-          <a:lstStyle/>
-          <a:p>
-            <a:pPr indent="0" marL="0">
-              <a:spcAft>
-                <a:spcPts val="600"/>
-              </a:spcAft>
-              <a:buNone/>
-            </a:pPr>
-            <a:r>
-              <a:rPr lang="en-US" sz="1400" b="1" dirty="0">
-                <a:solidFill>
-                  <a:schemeClr val="tx1"/>
-                </a:solidFill>
-              </a:rPr>
-              <a:t>XAI  </a:t>
-            </a:r>
-            <a:pPr indent="0" marL="0">
-              <a:spcAft>
-                <a:spcPts val="600"/>
-              </a:spcAft>
-              <a:buNone/>
-            </a:pPr>
-            <a:r>
-              <a:rPr lang="en-US" sz="1400" dirty="0">
-                <a:solidFill>
-                  <a:schemeClr val="tx2"/>
-                </a:solidFill>
-              </a:rPr>
-              <a:t>결함 위치 heatmap 출력</a:t>
-            </a:r>
-            <a:endParaRPr lang="en-US" sz="1400" dirty="0"/>
-          </a:p>
-          <a:p>
-            <a:pPr indent="0" marL="0">
-              <a:spcAft>
-                <a:spcPts val="600"/>
-              </a:spcAft>
-              <a:buNone/>
-            </a:pPr>
-            <a:r>
-              <a:rPr lang="en-US" sz="1400" b="1" dirty="0">
-                <a:solidFill>
-                  <a:schemeClr val="tx1"/>
-                </a:solidFill>
-              </a:rPr>
-              <a:t>INT8  </a:t>
-            </a:r>
-            <a:pPr indent="0" marL="0">
-              <a:spcAft>
-                <a:spcPts val="600"/>
-              </a:spcAft>
-              <a:buNone/>
-            </a:pPr>
-            <a:r>
-              <a:rPr lang="en-US" sz="1400" dirty="0">
-                <a:solidFill>
-                  <a:schemeClr val="tx2"/>
-                </a:solidFill>
-              </a:rPr>
-              <a:t>양자화 경량화</a:t>
-            </a:r>
-            <a:endParaRPr lang="en-US" sz="1400" dirty="0"/>
-          </a:p>
-        </p:txBody>
-      </p:sp>
-      <p:sp>
-        <p:nvSpPr>
-          <p:cNvPr id="27" name="credit"/>
-          <p:cNvSpPr txBox="1"/>
-          <p:nvPr/>
-        </p:nvSpPr>
-        <p:spPr>
-          <a:xfrm>
-            <a:off x="548640" y="6236208"/>
-            <a:ext cx="8229600" cy="182880"/>
+            <a:off x="548640" y="6263640"/>
+            <a:ext cx="8229600" cy="164592"/>
           </a:xfrm>
           <a:prstGeom prst="rect">
             <a:avLst/>
@@ -10294,7 +10257,7 @@
                   <a:schemeClr val="tx2"/>
                 </a:solidFill>
               </a:rPr>
-              <a:t>1차 테스트 93%, but 테스트 사진이 학습 데이터에 섞여 있었다</a:t>
+              <a:t>1차 테스트 93%, but 학습 데이터</a:t>
             </a:r>
             <a:endParaRPr lang="en-US" sz="1500" dirty="0"/>
           </a:p>
@@ -10302,18 +10265,18 @@
       </p:sp>
       <p:sp>
         <p:nvSpPr>
-          <p:cNvPr id="4" name="upload-card"/>
+          <p:cNvPr id="4" name="stat-0"/>
           <p:cNvSpPr/>
           <p:nvPr/>
         </p:nvSpPr>
         <p:spPr>
           <a:xfrm>
-            <a:off x="548640" y="1645920"/>
-            <a:ext cx="4434840" cy="2651760"/>
+            <a:off x="548640" y="1600200"/>
+            <a:ext cx="3840480" cy="1371600"/>
           </a:xfrm>
           <a:prstGeom prst="roundRect">
             <a:avLst>
-              <a:gd name="adj" fmla="val 2759"/>
+              <a:gd name="adj" fmla="val 5333"/>
             </a:avLst>
           </a:prstGeom>
           <a:solidFill>
@@ -10324,14 +10287,14 @@
       </p:sp>
       <p:sp>
         <p:nvSpPr>
-          <p:cNvPr id="5" name="up-h"/>
+          <p:cNvPr id="5" name="stat-n-0"/>
           <p:cNvSpPr txBox="1"/>
           <p:nvPr/>
         </p:nvSpPr>
         <p:spPr>
           <a:xfrm>
-            <a:off x="822960" y="1783080"/>
-            <a:ext cx="3931920" cy="320040"/>
+            <a:off x="822960" y="1737360"/>
+            <a:ext cx="3383280" cy="685800"/>
           </a:xfrm>
           <a:prstGeom prst="rect">
             <a:avLst/>
@@ -10347,27 +10310,27 @@
               <a:buNone/>
             </a:pPr>
             <a:r>
-              <a:rPr lang="en-US" sz="1600" b="1" dirty="0">
+              <a:rPr lang="en-US" sz="3200" b="1" dirty="0">
                 <a:solidFill>
                   <a:schemeClr val="accent3"/>
                 </a:solidFill>
               </a:rPr>
-              <a:t>테스트셋까지 Geti에 업로드</a:t>
+              <a:t>3,673장</a:t>
             </a:r>
-            <a:endParaRPr lang="en-US" sz="1600" dirty="0"/>
+            <a:endParaRPr lang="en-US" sz="3200" dirty="0"/>
           </a:p>
         </p:txBody>
       </p:sp>
       <p:sp>
         <p:nvSpPr>
-          <p:cNvPr id="6" name="up-n"/>
+          <p:cNvPr id="6" name="stat-l-0"/>
           <p:cNvSpPr txBox="1"/>
           <p:nvPr/>
         </p:nvSpPr>
         <p:spPr>
           <a:xfrm>
-            <a:off x="822960" y="2240280"/>
-            <a:ext cx="3931920" cy="731520"/>
+            <a:off x="822960" y="2423160"/>
+            <a:ext cx="3383280" cy="365760"/>
           </a:xfrm>
           <a:prstGeom prst="rect">
             <a:avLst/>
@@ -10380,62 +10343,6 @@
           <a:lstStyle/>
           <a:p>
             <a:pPr indent="0" marL="0">
-              <a:buNone/>
-            </a:pPr>
-            <a:r>
-              <a:rPr lang="en-US" sz="4400" b="1" dirty="0">
-                <a:solidFill>
-                  <a:schemeClr val="tx1"/>
-                </a:solidFill>
-              </a:rPr>
-              <a:t>3,673장</a:t>
-            </a:r>
-            <a:endParaRPr lang="en-US" sz="4400" dirty="0"/>
-          </a:p>
-        </p:txBody>
-      </p:sp>
-      <p:sp>
-        <p:nvSpPr>
-          <p:cNvPr id="7" name="up-b"/>
-          <p:cNvSpPr txBox="1"/>
-          <p:nvPr/>
-        </p:nvSpPr>
-        <p:spPr>
-          <a:xfrm>
-            <a:off x="822960" y="3108960"/>
-            <a:ext cx="3931920" cy="1005840"/>
-          </a:xfrm>
-          <a:prstGeom prst="rect">
-            <a:avLst/>
-          </a:prstGeom>
-          <a:noFill/>
-          <a:ln/>
-        </p:spPr>
-        <p:txBody>
-          <a:bodyPr wrap="square" lIns="0" tIns="0" rIns="0" bIns="0" rtlCol="0" anchor="t"/>
-          <a:lstStyle/>
-          <a:p>
-            <a:pPr indent="0" marL="0">
-              <a:spcAft>
-                <a:spcPts val="400"/>
-              </a:spcAft>
-              <a:buNone/>
-            </a:pPr>
-            <a:r>
-              <a:rPr lang="en-US" sz="1400" dirty="0">
-                <a:solidFill>
-                  <a:schemeClr val="tx1"/>
-                </a:solidFill>
-              </a:rPr>
-              <a:t>= 학습 3,214 + 검증 306 + 테스트 153</a:t>
-            </a:r>
-            <a:endParaRPr lang="en-US" sz="1400" dirty="0"/>
-          </a:p>
-          <a:p>
-            <a:pPr indent="0" marL="0">
-              <a:spcAft>
-                <a:spcPts val="400"/>
-              </a:spcAft>
               <a:buNone/>
             </a:pPr>
             <a:r>
@@ -10444,15 +10351,203 @@
                   <a:schemeClr val="tx2"/>
                 </a:solidFill>
               </a:rPr>
-              <a:t>Geti가 약 2,800장을 70/20/10으로 재분할</a:t>
+              <a:t>테스트 153장 포함 업로드</a:t>
             </a:r>
             <a:endParaRPr lang="en-US" sz="1400" dirty="0"/>
           </a:p>
         </p:txBody>
       </p:sp>
+      <p:sp>
+        <p:nvSpPr>
+          <p:cNvPr id="7" name="stat-1"/>
+          <p:cNvSpPr/>
+          <p:nvPr/>
+        </p:nvSpPr>
+        <p:spPr>
+          <a:xfrm>
+            <a:off x="548640" y="3108960"/>
+            <a:ext cx="3840480" cy="1371600"/>
+          </a:xfrm>
+          <a:prstGeom prst="roundRect">
+            <a:avLst>
+              <a:gd name="adj" fmla="val 5333"/>
+            </a:avLst>
+          </a:prstGeom>
+          <a:solidFill>
+            <a:schemeClr val="bg2"/>
+          </a:solidFill>
+          <a:ln/>
+        </p:spPr>
+      </p:sp>
+      <p:sp>
+        <p:nvSpPr>
+          <p:cNvPr id="8" name="stat-n-1"/>
+          <p:cNvSpPr txBox="1"/>
+          <p:nvPr/>
+        </p:nvSpPr>
+        <p:spPr>
+          <a:xfrm>
+            <a:off x="822960" y="3246120"/>
+            <a:ext cx="3383280" cy="685800"/>
+          </a:xfrm>
+          <a:prstGeom prst="rect">
+            <a:avLst/>
+          </a:prstGeom>
+          <a:noFill/>
+          <a:ln/>
+        </p:spPr>
+        <p:txBody>
+          <a:bodyPr wrap="square" lIns="0" tIns="0" rIns="0" bIns="0" rtlCol="0" anchor="t"/>
+          <a:lstStyle/>
+          <a:p>
+            <a:pPr indent="0" marL="0">
+              <a:buNone/>
+            </a:pPr>
+            <a:r>
+              <a:rPr lang="en-US" sz="3200" b="1" dirty="0">
+                <a:solidFill>
+                  <a:schemeClr val="accent3"/>
+                </a:solidFill>
+              </a:rPr>
+              <a:t>22장</a:t>
+            </a:r>
+            <a:endParaRPr lang="en-US" sz="3200" dirty="0"/>
+          </a:p>
+        </p:txBody>
+      </p:sp>
+      <p:sp>
+        <p:nvSpPr>
+          <p:cNvPr id="9" name="stat-l-1"/>
+          <p:cNvSpPr txBox="1"/>
+          <p:nvPr/>
+        </p:nvSpPr>
+        <p:spPr>
+          <a:xfrm>
+            <a:off x="822960" y="3931920"/>
+            <a:ext cx="3383280" cy="365760"/>
+          </a:xfrm>
+          <a:prstGeom prst="rect">
+            <a:avLst/>
+          </a:prstGeom>
+          <a:noFill/>
+          <a:ln/>
+        </p:spPr>
+        <p:txBody>
+          <a:bodyPr wrap="square" lIns="0" tIns="0" rIns="0" bIns="0" rtlCol="0" anchor="t"/>
+          <a:lstStyle/>
+          <a:p>
+            <a:pPr indent="0" marL="0">
+              <a:buNone/>
+            </a:pPr>
+            <a:r>
+              <a:rPr lang="en-US" sz="1400" dirty="0">
+                <a:solidFill>
+                  <a:schemeClr val="tx2"/>
+                </a:solidFill>
+              </a:rPr>
+              <a:t>학습 사진의 복사본</a:t>
+            </a:r>
+            <a:endParaRPr lang="en-US" sz="1400" dirty="0"/>
+          </a:p>
+        </p:txBody>
+      </p:sp>
+      <p:sp>
+        <p:nvSpPr>
+          <p:cNvPr id="10" name="stat-2"/>
+          <p:cNvSpPr/>
+          <p:nvPr/>
+        </p:nvSpPr>
+        <p:spPr>
+          <a:xfrm>
+            <a:off x="548640" y="4617720"/>
+            <a:ext cx="3840480" cy="1371600"/>
+          </a:xfrm>
+          <a:prstGeom prst="roundRect">
+            <a:avLst>
+              <a:gd name="adj" fmla="val 5333"/>
+            </a:avLst>
+          </a:prstGeom>
+          <a:solidFill>
+            <a:schemeClr val="bg2"/>
+          </a:solidFill>
+          <a:ln/>
+        </p:spPr>
+      </p:sp>
+      <p:sp>
+        <p:nvSpPr>
+          <p:cNvPr id="11" name="stat-n-2"/>
+          <p:cNvSpPr txBox="1"/>
+          <p:nvPr/>
+        </p:nvSpPr>
+        <p:spPr>
+          <a:xfrm>
+            <a:off x="822960" y="4754880"/>
+            <a:ext cx="3383280" cy="685800"/>
+          </a:xfrm>
+          <a:prstGeom prst="rect">
+            <a:avLst/>
+          </a:prstGeom>
+          <a:noFill/>
+          <a:ln/>
+        </p:spPr>
+        <p:txBody>
+          <a:bodyPr wrap="square" lIns="0" tIns="0" rIns="0" bIns="0" rtlCol="0" anchor="t"/>
+          <a:lstStyle/>
+          <a:p>
+            <a:pPr indent="0" marL="0">
+              <a:buNone/>
+            </a:pPr>
+            <a:r>
+              <a:rPr lang="en-US" sz="3200" b="1" dirty="0">
+                <a:solidFill>
+                  <a:schemeClr val="accent1"/>
+                </a:solidFill>
+              </a:rPr>
+              <a:t>93.3 → 92.9%</a:t>
+            </a:r>
+            <a:endParaRPr lang="en-US" sz="3200" dirty="0"/>
+          </a:p>
+        </p:txBody>
+      </p:sp>
+      <p:sp>
+        <p:nvSpPr>
+          <p:cNvPr id="12" name="stat-l-2"/>
+          <p:cNvSpPr txBox="1"/>
+          <p:nvPr/>
+        </p:nvSpPr>
+        <p:spPr>
+          <a:xfrm>
+            <a:off x="822960" y="5440680"/>
+            <a:ext cx="3383280" cy="365760"/>
+          </a:xfrm>
+          <a:prstGeom prst="rect">
+            <a:avLst/>
+          </a:prstGeom>
+          <a:noFill/>
+          <a:ln/>
+        </p:spPr>
+        <p:txBody>
+          <a:bodyPr wrap="square" lIns="0" tIns="0" rIns="0" bIns="0" rtlCol="0" anchor="t"/>
+          <a:lstStyle/>
+          <a:p>
+            <a:pPr indent="0" marL="0">
+              <a:buNone/>
+            </a:pPr>
+            <a:r>
+              <a:rPr lang="en-US" sz="1400" dirty="0">
+                <a:solidFill>
+                  <a:schemeClr val="tx2"/>
+                </a:solidFill>
+              </a:rPr>
+              <a:t>복사본 제거 후 mAP@50</a:t>
+            </a:r>
+            <a:endParaRPr lang="en-US" sz="1400" dirty="0"/>
+          </a:p>
+        </p:txBody>
+      </p:sp>
       <p:pic>
         <p:nvPicPr>
-          <p:cNvPr id="8" name="dup-0" descr="C:\Users\user\_se4nchoi\batteryvision\docs\submission\build\img\dup_test.jpg">    </p:cNvPr>
+          <p:cNvPr id="13" name="dup-0" descr="C:\Users\user\_se4nchoi\batteryvision\docs\submission\build\img\dup_test.jpg">    </p:cNvPr>
           <p:cNvPicPr>
             <a:picLocks noChangeAspect="1"/>
           </p:cNvPicPr>
@@ -10466,8 +10561,8 @@
         </p:blipFill>
         <p:spPr>
           <a:xfrm>
-            <a:off x="5166360" y="1645920"/>
-            <a:ext cx="2377440" cy="2377440"/>
+            <a:off x="4617720" y="1600200"/>
+            <a:ext cx="3429000" cy="3429000"/>
           </a:xfrm>
           <a:prstGeom prst="rect">
             <a:avLst/>
@@ -10476,14 +10571,43 @@
       </p:pic>
       <p:sp>
         <p:nvSpPr>
-          <p:cNvPr id="9" name="dup-l-0"/>
+          <p:cNvPr id="14" name="dup-l-0-bg"/>
+          <p:cNvSpPr/>
+          <p:nvPr/>
+        </p:nvSpPr>
+        <p:spPr>
+          <a:xfrm>
+            <a:off x="4617720" y="5166360"/>
+            <a:ext cx="914400" cy="347472"/>
+          </a:xfrm>
+          <a:prstGeom prst="roundRect">
+            <a:avLst>
+              <a:gd name="adj" fmla="val 13158"/>
+            </a:avLst>
+          </a:prstGeom>
+          <a:solidFill>
+            <a:schemeClr val="accent3">
+              <a:alpha val="20000"/>
+            </a:schemeClr>
+          </a:solidFill>
+          <a:ln w="12700">
+            <a:solidFill>
+              <a:schemeClr val="accent3"/>
+            </a:solidFill>
+            <a:prstDash val="solid"/>
+          </a:ln>
+        </p:spPr>
+      </p:sp>
+      <p:sp>
+        <p:nvSpPr>
+          <p:cNvPr id="15" name="dup-l-0"/>
           <p:cNvSpPr txBox="1"/>
           <p:nvPr/>
         </p:nvSpPr>
         <p:spPr>
           <a:xfrm>
-            <a:off x="5166360" y="4069080"/>
-            <a:ext cx="2377440" cy="274320"/>
+            <a:off x="4617720" y="5166360"/>
+            <a:ext cx="914400" cy="347472"/>
           </a:xfrm>
           <a:prstGeom prst="rect">
             <a:avLst/>
@@ -10492,19 +10616,19 @@
           <a:ln/>
         </p:spPr>
         <p:txBody>
-          <a:bodyPr wrap="square" lIns="0" tIns="0" rIns="0" bIns="0" rtlCol="0" anchor="t"/>
+          <a:bodyPr wrap="square" lIns="0" tIns="0" rIns="0" bIns="0" rtlCol="0" anchor="ctr"/>
           <a:lstStyle/>
           <a:p>
-            <a:pPr indent="0" marL="0">
+            <a:pPr algn="ctr" indent="0" marL="0">
               <a:buNone/>
             </a:pPr>
             <a:r>
               <a:rPr lang="en-US" sz="1300" b="1" dirty="0">
                 <a:solidFill>
-                  <a:schemeClr val="tx1"/>
+                  <a:schemeClr val="accent3"/>
                 </a:solidFill>
               </a:rPr>
-              <a:t>테스트 사진</a:t>
+              <a:t>테스트</a:t>
             </a:r>
             <a:endParaRPr lang="en-US" sz="1300" dirty="0"/>
           </a:p>
@@ -10512,7 +10636,7 @@
       </p:sp>
       <p:pic>
         <p:nvPicPr>
-          <p:cNvPr id="10" name="dup-1" descr="C:\Users\user\_se4nchoi\batteryvision\docs\submission\build\img\dup_train.jpg">    </p:cNvPr>
+          <p:cNvPr id="16" name="dup-1" descr="C:\Users\user\_se4nchoi\batteryvision\docs\submission\build\img\dup_train.jpg">    </p:cNvPr>
           <p:cNvPicPr>
             <a:picLocks noChangeAspect="1"/>
           </p:cNvPicPr>
@@ -10526,8 +10650,8 @@
         </p:blipFill>
         <p:spPr>
           <a:xfrm>
-            <a:off x="7680960" y="1645920"/>
-            <a:ext cx="2377440" cy="2377440"/>
+            <a:off x="8183880" y="1600200"/>
+            <a:ext cx="3429000" cy="3429000"/>
           </a:xfrm>
           <a:prstGeom prst="rect">
             <a:avLst/>
@@ -10536,14 +10660,43 @@
       </p:pic>
       <p:sp>
         <p:nvSpPr>
-          <p:cNvPr id="11" name="dup-l-1"/>
+          <p:cNvPr id="17" name="dup-l-1-bg"/>
+          <p:cNvSpPr/>
+          <p:nvPr/>
+        </p:nvSpPr>
+        <p:spPr>
+          <a:xfrm>
+            <a:off x="8183880" y="5166360"/>
+            <a:ext cx="914400" cy="347472"/>
+          </a:xfrm>
+          <a:prstGeom prst="roundRect">
+            <a:avLst>
+              <a:gd name="adj" fmla="val 13158"/>
+            </a:avLst>
+          </a:prstGeom>
+          <a:solidFill>
+            <a:schemeClr val="accent1">
+              <a:alpha val="20000"/>
+            </a:schemeClr>
+          </a:solidFill>
+          <a:ln w="12700">
+            <a:solidFill>
+              <a:schemeClr val="accent1"/>
+            </a:solidFill>
+            <a:prstDash val="solid"/>
+          </a:ln>
+        </p:spPr>
+      </p:sp>
+      <p:sp>
+        <p:nvSpPr>
+          <p:cNvPr id="18" name="dup-l-1"/>
           <p:cNvSpPr txBox="1"/>
           <p:nvPr/>
         </p:nvSpPr>
         <p:spPr>
           <a:xfrm>
-            <a:off x="7680960" y="4069080"/>
-            <a:ext cx="2377440" cy="274320"/>
+            <a:off x="8183880" y="5166360"/>
+            <a:ext cx="914400" cy="347472"/>
           </a:xfrm>
           <a:prstGeom prst="rect">
             <a:avLst/>
@@ -10552,19 +10705,19 @@
           <a:ln/>
         </p:spPr>
         <p:txBody>
-          <a:bodyPr wrap="square" lIns="0" tIns="0" rIns="0" bIns="0" rtlCol="0" anchor="t"/>
+          <a:bodyPr wrap="square" lIns="0" tIns="0" rIns="0" bIns="0" rtlCol="0" anchor="ctr"/>
           <a:lstStyle/>
           <a:p>
-            <a:pPr indent="0" marL="0">
+            <a:pPr algn="ctr" indent="0" marL="0">
               <a:buNone/>
             </a:pPr>
             <a:r>
               <a:rPr lang="en-US" sz="1300" b="1" dirty="0">
                 <a:solidFill>
-                  <a:schemeClr val="tx1"/>
+                  <a:schemeClr val="accent1"/>
                 </a:solidFill>
               </a:rPr>
-              <a:t>학습 사진</a:t>
+              <a:t>학습</a:t>
             </a:r>
             <a:endParaRPr lang="en-US" sz="1300" dirty="0"/>
           </a:p>
@@ -10572,36 +10725,14 @@
       </p:sp>
       <p:sp>
         <p:nvSpPr>
-          <p:cNvPr id="12" name="nd-card"/>
-          <p:cNvSpPr/>
-          <p:nvPr/>
-        </p:nvSpPr>
-        <p:spPr>
-          <a:xfrm>
-            <a:off x="10241280" y="1645920"/>
-            <a:ext cx="1399032" cy="2377440"/>
-          </a:xfrm>
-          <a:prstGeom prst="roundRect">
-            <a:avLst>
-              <a:gd name="adj" fmla="val 5229"/>
-            </a:avLst>
-          </a:prstGeom>
-          <a:solidFill>
-            <a:schemeClr val="bg2"/>
-          </a:solidFill>
-          <a:ln/>
-        </p:spPr>
-      </p:sp>
-      <p:sp>
-        <p:nvSpPr>
-          <p:cNvPr id="13" name="nd-n"/>
+          <p:cNvPr id="19" name="dup-cap"/>
           <p:cNvSpPr txBox="1"/>
           <p:nvPr/>
         </p:nvSpPr>
         <p:spPr>
           <a:xfrm>
-            <a:off x="10287000" y="2103120"/>
-            <a:ext cx="1307592" cy="548640"/>
+            <a:off x="9144000" y="5166360"/>
+            <a:ext cx="2468880" cy="347472"/>
           </a:xfrm>
           <a:prstGeom prst="rect">
             <a:avLst/>
@@ -10610,79 +10741,7 @@
           <a:ln/>
         </p:spPr>
         <p:txBody>
-          <a:bodyPr wrap="square" lIns="0" tIns="0" rIns="0" bIns="0" rtlCol="0" anchor="t"/>
-          <a:lstStyle/>
-          <a:p>
-            <a:pPr algn="ctr" indent="0" marL="0">
-              <a:buNone/>
-            </a:pPr>
-            <a:r>
-              <a:rPr lang="en-US" sz="2800" b="1" dirty="0">
-                <a:solidFill>
-                  <a:schemeClr val="accent3"/>
-                </a:solidFill>
-              </a:rPr>
-              <a:t>22장</a:t>
-            </a:r>
-            <a:endParaRPr lang="en-US" sz="2800" dirty="0"/>
-          </a:p>
-        </p:txBody>
-      </p:sp>
-      <p:sp>
-        <p:nvSpPr>
-          <p:cNvPr id="14" name="nd-l"/>
-          <p:cNvSpPr txBox="1"/>
-          <p:nvPr/>
-        </p:nvSpPr>
-        <p:spPr>
-          <a:xfrm>
-            <a:off x="10287000" y="2743200"/>
-            <a:ext cx="1307592" cy="914400"/>
-          </a:xfrm>
-          <a:prstGeom prst="rect">
-            <a:avLst/>
-          </a:prstGeom>
-          <a:noFill/>
-          <a:ln/>
-        </p:spPr>
-        <p:txBody>
-          <a:bodyPr wrap="square" lIns="0" tIns="0" rIns="0" bIns="0" rtlCol="0" anchor="t"/>
-          <a:lstStyle/>
-          <a:p>
-            <a:pPr algn="ctr" indent="0" marL="0">
-              <a:buNone/>
-            </a:pPr>
-            <a:r>
-              <a:rPr lang="en-US" sz="1200" dirty="0">
-                <a:solidFill>
-                  <a:schemeClr val="tx2"/>
-                </a:solidFill>
-              </a:rPr>
-              <a:t>학습 사진의 복사본</a:t>
-            </a:r>
-            <a:endParaRPr lang="en-US" sz="1200" dirty="0"/>
-          </a:p>
-        </p:txBody>
-      </p:sp>
-      <p:sp>
-        <p:nvSpPr>
-          <p:cNvPr id="15" name="dup-cap"/>
-          <p:cNvSpPr txBox="1"/>
-          <p:nvPr/>
-        </p:nvSpPr>
-        <p:spPr>
-          <a:xfrm>
-            <a:off x="7680960" y="4069080"/>
-            <a:ext cx="2377440" cy="274320"/>
-          </a:xfrm>
-          <a:prstGeom prst="rect">
-            <a:avLst/>
-          </a:prstGeom>
-          <a:noFill/>
-          <a:ln/>
-        </p:spPr>
-        <p:txBody>
-          <a:bodyPr wrap="square" lIns="0" tIns="0" rIns="0" bIns="0" rtlCol="0" anchor="t"/>
+          <a:bodyPr wrap="square" lIns="0" tIns="0" rIns="0" bIns="0" rtlCol="0" anchor="ctr"/>
           <a:lstStyle/>
           <a:p>
             <a:pPr algn="r" indent="0" marL="0">
@@ -10697,158 +10756,6 @@
               <a:t>dHash 거리 4 / 256</a:t>
             </a:r>
             <a:endParaRPr lang="en-US" sz="1200" dirty="0"/>
-          </a:p>
-        </p:txBody>
-      </p:sp>
-      <p:sp>
-        <p:nvSpPr>
-          <p:cNvPr id="16" name="lesson-card"/>
-          <p:cNvSpPr/>
-          <p:nvPr/>
-        </p:nvSpPr>
-        <p:spPr>
-          <a:xfrm>
-            <a:off x="548640" y="4617720"/>
-            <a:ext cx="11094415" cy="1600200"/>
-          </a:xfrm>
-          <a:prstGeom prst="roundRect">
-            <a:avLst>
-              <a:gd name="adj" fmla="val 4571"/>
-            </a:avLst>
-          </a:prstGeom>
-          <a:solidFill>
-            <a:schemeClr val="bg2"/>
-          </a:solidFill>
-          <a:ln/>
-        </p:spPr>
-      </p:sp>
-      <p:sp>
-        <p:nvSpPr>
-          <p:cNvPr id="17" name="lesson-h"/>
-          <p:cNvSpPr txBox="1"/>
-          <p:nvPr/>
-        </p:nvSpPr>
-        <p:spPr>
-          <a:xfrm>
-            <a:off x="822960" y="4754880"/>
-            <a:ext cx="5486400" cy="320040"/>
-          </a:xfrm>
-          <a:prstGeom prst="rect">
-            <a:avLst/>
-          </a:prstGeom>
-          <a:noFill/>
-          <a:ln/>
-        </p:spPr>
-        <p:txBody>
-          <a:bodyPr wrap="square" lIns="0" tIns="0" rIns="0" bIns="0" rtlCol="0" anchor="t"/>
-          <a:lstStyle/>
-          <a:p>
-            <a:pPr indent="0" marL="0">
-              <a:buNone/>
-            </a:pPr>
-            <a:r>
-              <a:rPr lang="en-US" sz="1600" b="1" dirty="0">
-                <a:solidFill>
-                  <a:schemeClr val="tx1"/>
-                </a:solidFill>
-              </a:rPr>
-              <a:t>1차 테스트 점수는</a:t>
-            </a:r>
-            <a:endParaRPr lang="en-US" sz="1600" dirty="0"/>
-          </a:p>
-        </p:txBody>
-      </p:sp>
-      <p:sp>
-        <p:nvSpPr>
-          <p:cNvPr id="18" name="lesson-b"/>
-          <p:cNvSpPr txBox="1"/>
-          <p:nvPr/>
-        </p:nvSpPr>
-        <p:spPr>
-          <a:xfrm>
-            <a:off x="822960" y="5138928"/>
-            <a:ext cx="6949440" cy="868680"/>
-          </a:xfrm>
-          <a:prstGeom prst="rect">
-            <a:avLst/>
-          </a:prstGeom>
-          <a:noFill/>
-          <a:ln/>
-        </p:spPr>
-        <p:txBody>
-          <a:bodyPr wrap="square" lIns="0" tIns="0" rIns="0" bIns="0" rtlCol="0" anchor="t"/>
-          <a:lstStyle/>
-          <a:p>
-            <a:pPr marL="342900" indent="-342900">
-              <a:spcAft>
-                <a:spcPts val="400"/>
-              </a:spcAft>
-              <a:buSzPct val="100000"/>
-              <a:buChar char="•"/>
-            </a:pPr>
-            <a:r>
-              <a:rPr lang="en-US" sz="1400" dirty="0">
-                <a:solidFill>
-                  <a:schemeClr val="tx2"/>
-                </a:solidFill>
-              </a:rPr>
-              <a:t>학습에 쓴 사진 포함 가능</a:t>
-            </a:r>
-            <a:endParaRPr lang="en-US" sz="1400" dirty="0"/>
-          </a:p>
-          <a:p>
-            <a:pPr marL="342900" indent="-342900">
-              <a:spcAft>
-                <a:spcPts val="400"/>
-              </a:spcAft>
-              <a:buSzPct val="100000"/>
-              <a:buChar char="•"/>
-            </a:pPr>
-            <a:r>
-              <a:rPr lang="en-US" sz="1400" dirty="0">
-                <a:solidFill>
-                  <a:schemeClr val="tx2"/>
-                </a:solidFill>
-              </a:rPr>
-              <a:t>모델 간 비교용 · 실제 성능은 2차 세트로</a:t>
-            </a:r>
-            <a:endParaRPr lang="en-US" sz="1400" dirty="0"/>
-          </a:p>
-        </p:txBody>
-      </p:sp>
-      <p:sp>
-        <p:nvSpPr>
-          <p:cNvPr id="19" name="lesson-t"/>
-          <p:cNvSpPr txBox="1"/>
-          <p:nvPr/>
-        </p:nvSpPr>
-        <p:spPr>
-          <a:xfrm>
-            <a:off x="7726680" y="5138928"/>
-            <a:ext cx="3703320" cy="868680"/>
-          </a:xfrm>
-          <a:prstGeom prst="rect">
-            <a:avLst/>
-          </a:prstGeom>
-          <a:noFill/>
-          <a:ln/>
-        </p:spPr>
-        <p:txBody>
-          <a:bodyPr wrap="square" lIns="0" tIns="0" rIns="0" bIns="0" rtlCol="0" anchor="ctr"/>
-          <a:lstStyle/>
-          <a:p>
-            <a:pPr indent="0" marL="0">
-              <a:buNone/>
-            </a:pPr>
-            <a:r>
-              <a:rPr lang="en-US" sz="1600" b="1" dirty="0">
-                <a:solidFill>
-                  <a:schemeClr val="accent1"/>
-                </a:solidFill>
-              </a:rPr>
-              <a:t>교훈: 테스트셋은 업로드 전에 분리</a:t>
-            </a:r>
-            <a:endParaRPr lang="en-US" sz="1600" dirty="0"/>
           </a:p>
         </p:txBody>
       </p:sp>
@@ -10960,47 +10867,9 @@
           </a:p>
         </p:txBody>
       </p:sp>
-      <p:sp>
-        <p:nvSpPr>
-          <p:cNvPr id="3" name="Text 0"/>
-          <p:cNvSpPr/>
-          <p:nvPr>
-            <p:ph idx="101" type="body" hasCustomPrompt="1"/>
-          </p:nvPr>
-        </p:nvSpPr>
-        <p:spPr>
-          <a:xfrm>
-            <a:off x="548640" y="1005840"/>
-            <a:ext cx="11094415" cy="411480"/>
-          </a:xfrm>
-          <a:prstGeom prst="rect">
-            <a:avLst/>
-          </a:prstGeom>
-          <a:noFill/>
-          <a:ln/>
-        </p:spPr>
-        <p:txBody>
-          <a:bodyPr wrap="square" lIns="0" tIns="0" rIns="0" bIns="0" rtlCol="0" anchor="ctr"/>
-          <a:lstStyle/>
-          <a:p>
-            <a:pPr algn="l" indent="0" marL="0">
-              <a:buNone/>
-            </a:pPr>
-            <a:r>
-              <a:rPr lang="en-US" sz="1500" dirty="0">
-                <a:solidFill>
-                  <a:schemeClr val="tx2"/>
-                </a:solidFill>
-              </a:rPr>
-              <a:t>파라미터가 가장 적은 ATSS가 가장 정확 · Geti 점수도 같은 순서</a:t>
-            </a:r>
-            <a:endParaRPr lang="en-US" sz="1500" dirty="0"/>
-          </a:p>
-        </p:txBody>
-      </p:sp>
       <p:pic>
         <p:nvPicPr>
-          <p:cNvPr id="4" name="geti-models" descr="C:\Users\user\_se4nchoi\batteryvision\docs\submission\build\img\geti_models.png">    </p:cNvPr>
+          <p:cNvPr id="3" name="geti-models" descr="C:\Users\user\_se4nchoi\batteryvision\docs\submission\build\img\geti_models.png">    </p:cNvPr>
           <p:cNvPicPr>
             <a:picLocks noChangeAspect="1"/>
           </p:cNvPicPr>
@@ -11015,7 +10884,7 @@
         <p:spPr>
           <a:xfrm>
             <a:off x="548640" y="1600200"/>
-            <a:ext cx="3730949" cy="4023360"/>
+            <a:ext cx="4027729" cy="4343400"/>
           </a:xfrm>
           <a:prstGeom prst="rect">
             <a:avLst/>
@@ -11024,14 +10893,43 @@
       </p:pic>
       <p:sp>
         <p:nvSpPr>
+          <p:cNvPr id="4" name="geti-caveat-bg"/>
+          <p:cNvSpPr/>
+          <p:nvPr/>
+        </p:nvSpPr>
+        <p:spPr>
+          <a:xfrm>
+            <a:off x="548640" y="6080760"/>
+            <a:ext cx="4027729" cy="384048"/>
+          </a:xfrm>
+          <a:prstGeom prst="roundRect">
+            <a:avLst>
+              <a:gd name="adj" fmla="val 11905"/>
+            </a:avLst>
+          </a:prstGeom>
+          <a:solidFill>
+            <a:schemeClr val="accent3">
+              <a:alpha val="20000"/>
+            </a:schemeClr>
+          </a:solidFill>
+          <a:ln w="12700">
+            <a:solidFill>
+              <a:schemeClr val="accent3"/>
+            </a:solidFill>
+            <a:prstDash val="solid"/>
+          </a:ln>
+        </p:spPr>
+      </p:sp>
+      <p:sp>
+        <p:nvSpPr>
           <p:cNvPr id="5" name="geti-caveat"/>
           <p:cNvSpPr txBox="1"/>
           <p:nvPr/>
         </p:nvSpPr>
         <p:spPr>
           <a:xfrm>
-            <a:off x="548640" y="5687568"/>
-            <a:ext cx="3730949" cy="548640"/>
+            <a:off x="548640" y="6080760"/>
+            <a:ext cx="4027729" cy="384048"/>
           </a:xfrm>
           <a:prstGeom prst="rect">
             <a:avLst/>
@@ -11040,35 +10938,21 @@
           <a:ln/>
         </p:spPr>
         <p:txBody>
-          <a:bodyPr wrap="square" lIns="0" tIns="0" rIns="0" bIns="0" rtlCol="0" anchor="t"/>
+          <a:bodyPr wrap="square" lIns="0" tIns="0" rIns="0" bIns="0" rtlCol="0" anchor="ctr"/>
           <a:lstStyle/>
           <a:p>
-            <a:pPr indent="0" marL="0">
+            <a:pPr algn="ctr" indent="0" marL="0">
               <a:buNone/>
             </a:pPr>
             <a:r>
-              <a:rPr lang="en-US" sz="1100" b="1" dirty="0">
+              <a:rPr lang="en-US" sz="1300" b="1" dirty="0">
                 <a:solidFill>
                   <a:schemeClr val="accent3"/>
                 </a:solidFill>
               </a:rPr>
-              <a:t>낙관적인 Geti 점수</a:t>
+              <a:t>낙관적인 Geti 점수 (증강본이 학습·테스트에 섞임)</a:t>
             </a:r>
-            <a:endParaRPr lang="en-US" sz="1100" dirty="0"/>
-          </a:p>
-          <a:p>
-            <a:pPr indent="0" marL="0">
-              <a:buNone/>
-            </a:pPr>
-            <a:r>
-              <a:rPr lang="en-US" sz="1100" dirty="0">
-                <a:solidFill>
-                  <a:schemeClr val="tx2"/>
-                </a:solidFill>
-              </a:rPr>
-              <a:t>같은 원본의 ×3 증강 사본이 Geti 학습·테스트에 함께 분할됐을 가능성</a:t>
-            </a:r>
-            <a:endParaRPr lang="en-US" sz="1100" dirty="0"/>
+            <a:endParaRPr lang="en-US" sz="1300" dirty="0"/>
           </a:p>
         </p:txBody>
       </p:sp>
@@ -11080,8 +10964,8 @@
         </p:nvSpPr>
         <p:spPr>
           <a:xfrm>
-            <a:off x="4599629" y="1600200"/>
-            <a:ext cx="7043426" cy="320040"/>
+            <a:off x="4896409" y="1600200"/>
+            <a:ext cx="6746646" cy="320040"/>
           </a:xfrm>
           <a:prstGeom prst="rect">
             <a:avLst/>
@@ -11102,7 +10986,7 @@
                   <a:schemeClr val="tx1"/>
                 </a:solidFill>
               </a:rPr>
-              <a:t>직접 측정 · 1차 테스트 131장</a:t>
+              <a:t>직접 측정 · 1차 테스트</a:t>
             </a:r>
             <a:endParaRPr lang="en-US" sz="1600" dirty="0"/>
           </a:p>
@@ -11116,7 +11000,7 @@
         </p:nvSpPr>
         <p:spPr>
           <a:xfrm>
-            <a:off x="7114229" y="2011680"/>
+            <a:off x="7411009" y="2011680"/>
             <a:ext cx="1600200" cy="274320"/>
           </a:xfrm>
           <a:prstGeom prst="rect">
@@ -11152,7 +11036,7 @@
         </p:nvSpPr>
         <p:spPr>
           <a:xfrm>
-            <a:off x="8760149" y="2011680"/>
+            <a:off x="9056929" y="2011680"/>
             <a:ext cx="1097280" cy="274320"/>
           </a:xfrm>
           <a:prstGeom prst="rect">
@@ -11188,8 +11072,8 @@
         </p:nvSpPr>
         <p:spPr>
           <a:xfrm>
-            <a:off x="9628829" y="2011680"/>
-            <a:ext cx="1280160" cy="274320"/>
+            <a:off x="10154209" y="2011680"/>
+            <a:ext cx="1051560" cy="274320"/>
           </a:xfrm>
           <a:prstGeom prst="rect">
             <a:avLst/>
@@ -11210,7 +11094,7 @@
                   <a:schemeClr val="tx2"/>
                 </a:solidFill>
               </a:rPr>
-              <a:t>2차 세트 검출</a:t>
+              <a:t>2차 세트</a:t>
             </a:r>
             <a:endParaRPr lang="en-US" sz="1200" dirty="0"/>
           </a:p>
@@ -11224,8 +11108,8 @@
         </p:nvSpPr>
         <p:spPr>
           <a:xfrm>
-            <a:off x="4599629" y="2377440"/>
-            <a:ext cx="7043426" cy="1051560"/>
+            <a:off x="4896409" y="2377440"/>
+            <a:ext cx="6746646" cy="1051560"/>
           </a:xfrm>
           <a:prstGeom prst="roundRect">
             <a:avLst>
@@ -11246,7 +11130,7 @@
         </p:nvSpPr>
         <p:spPr>
           <a:xfrm>
-            <a:off x="4828229" y="2606040"/>
+            <a:off x="5125009" y="2606040"/>
             <a:ext cx="146304" cy="146304"/>
           </a:xfrm>
           <a:prstGeom prst="ellipse">
@@ -11266,7 +11150,7 @@
         </p:nvSpPr>
         <p:spPr>
           <a:xfrm>
-            <a:off x="5056829" y="2514600"/>
+            <a:off x="5353609" y="2514600"/>
             <a:ext cx="2103120" cy="320040"/>
           </a:xfrm>
           <a:prstGeom prst="rect">
@@ -11302,7 +11186,7 @@
         </p:nvSpPr>
         <p:spPr>
           <a:xfrm>
-            <a:off x="5056829" y="2926080"/>
+            <a:off x="5353609" y="2926080"/>
             <a:ext cx="2103120" cy="274320"/>
           </a:xfrm>
           <a:prstGeom prst="rect">
@@ -11338,7 +11222,7 @@
         </p:nvSpPr>
         <p:spPr>
           <a:xfrm>
-            <a:off x="7114229" y="2487168"/>
+            <a:off x="7411009" y="2487168"/>
             <a:ext cx="1600200" cy="822960"/>
           </a:xfrm>
           <a:prstGeom prst="rect">
@@ -11374,7 +11258,7 @@
         </p:nvSpPr>
         <p:spPr>
           <a:xfrm>
-            <a:off x="8760149" y="2487168"/>
+            <a:off x="9056929" y="2487168"/>
             <a:ext cx="1097280" cy="822960"/>
           </a:xfrm>
           <a:prstGeom prst="rect">
@@ -11410,8 +11294,8 @@
         </p:nvSpPr>
         <p:spPr>
           <a:xfrm>
-            <a:off x="9903149" y="2487168"/>
-            <a:ext cx="1005840" cy="822960"/>
+            <a:off x="10154209" y="2487168"/>
+            <a:ext cx="1051560" cy="822960"/>
           </a:xfrm>
           <a:prstGeom prst="rect">
             <a:avLst/>
@@ -11440,35 +11324,42 @@
       </p:sp>
       <p:sp>
         <p:nvSpPr>
-          <p:cNvPr id="17" name="best-badge"/>
+          <p:cNvPr id="17" name="best-badge-bg"/>
           <p:cNvSpPr/>
           <p:nvPr/>
         </p:nvSpPr>
         <p:spPr>
           <a:xfrm>
-            <a:off x="6519869" y="2944368"/>
+            <a:off x="6816649" y="2944368"/>
             <a:ext cx="502920" cy="237744"/>
           </a:xfrm>
           <a:prstGeom prst="roundRect">
             <a:avLst>
-              <a:gd name="adj" fmla="val 15385"/>
+              <a:gd name="adj" fmla="val 19231"/>
             </a:avLst>
           </a:prstGeom>
           <a:solidFill>
-            <a:schemeClr val="accent1"/>
+            <a:schemeClr val="accent1">
+              <a:alpha val="20000"/>
+            </a:schemeClr>
           </a:solidFill>
-          <a:ln/>
-        </p:spPr>
-      </p:sp>
-      <p:sp>
-        <p:nvSpPr>
-          <p:cNvPr id="18" name="best-t"/>
+          <a:ln w="12700">
+            <a:solidFill>
+              <a:schemeClr val="accent1"/>
+            </a:solidFill>
+            <a:prstDash val="solid"/>
+          </a:ln>
+        </p:spPr>
+      </p:sp>
+      <p:sp>
+        <p:nvSpPr>
+          <p:cNvPr id="18" name="best-badge"/>
           <p:cNvSpPr txBox="1"/>
           <p:nvPr/>
         </p:nvSpPr>
         <p:spPr>
           <a:xfrm>
-            <a:off x="6519869" y="2944368"/>
+            <a:off x="6816649" y="2944368"/>
             <a:ext cx="502920" cy="237744"/>
           </a:xfrm>
           <a:prstGeom prst="rect">
@@ -11485,14 +11376,14 @@
               <a:buNone/>
             </a:pPr>
             <a:r>
-              <a:rPr lang="en-US" sz="1000" b="1" dirty="0">
+              <a:rPr lang="en-US" sz="1300" b="1" dirty="0">
                 <a:solidFill>
-                  <a:schemeClr val="bg1"/>
+                  <a:schemeClr val="accent1"/>
                 </a:solidFill>
               </a:rPr>
               <a:t>best</a:t>
             </a:r>
-            <a:endParaRPr lang="en-US" sz="1000" dirty="0"/>
+            <a:endParaRPr lang="en-US" sz="1300" dirty="0"/>
           </a:p>
         </p:txBody>
       </p:sp>
@@ -11504,8 +11395,8 @@
         </p:nvSpPr>
         <p:spPr>
           <a:xfrm>
-            <a:off x="4599629" y="3566160"/>
-            <a:ext cx="7043426" cy="1051560"/>
+            <a:off x="4896409" y="3566160"/>
+            <a:ext cx="6746646" cy="1051560"/>
           </a:xfrm>
           <a:prstGeom prst="roundRect">
             <a:avLst>
@@ -11526,7 +11417,7 @@
         </p:nvSpPr>
         <p:spPr>
           <a:xfrm>
-            <a:off x="4828229" y="3794760"/>
+            <a:off x="5125009" y="3794760"/>
             <a:ext cx="146304" cy="146304"/>
           </a:xfrm>
           <a:prstGeom prst="ellipse">
@@ -11546,7 +11437,7 @@
         </p:nvSpPr>
         <p:spPr>
           <a:xfrm>
-            <a:off x="5056829" y="3703320"/>
+            <a:off x="5353609" y="3703320"/>
             <a:ext cx="2103120" cy="320040"/>
           </a:xfrm>
           <a:prstGeom prst="rect">
@@ -11582,7 +11473,7 @@
         </p:nvSpPr>
         <p:spPr>
           <a:xfrm>
-            <a:off x="5056829" y="4114800"/>
+            <a:off x="5353609" y="4114800"/>
             <a:ext cx="2103120" cy="274320"/>
           </a:xfrm>
           <a:prstGeom prst="rect">
@@ -11618,7 +11509,7 @@
         </p:nvSpPr>
         <p:spPr>
           <a:xfrm>
-            <a:off x="7114229" y="3675888"/>
+            <a:off x="7411009" y="3675888"/>
             <a:ext cx="1600200" cy="822960"/>
           </a:xfrm>
           <a:prstGeom prst="rect">
@@ -11654,7 +11545,7 @@
         </p:nvSpPr>
         <p:spPr>
           <a:xfrm>
-            <a:off x="8760149" y="3675888"/>
+            <a:off x="9056929" y="3675888"/>
             <a:ext cx="1097280" cy="822960"/>
           </a:xfrm>
           <a:prstGeom prst="rect">
@@ -11690,8 +11581,8 @@
         </p:nvSpPr>
         <p:spPr>
           <a:xfrm>
-            <a:off x="9903149" y="3675888"/>
-            <a:ext cx="1005840" cy="822960"/>
+            <a:off x="10154209" y="3675888"/>
+            <a:ext cx="1051560" cy="822960"/>
           </a:xfrm>
           <a:prstGeom prst="rect">
             <a:avLst/>
@@ -11726,8 +11617,8 @@
         </p:nvSpPr>
         <p:spPr>
           <a:xfrm>
-            <a:off x="4599629" y="4754880"/>
-            <a:ext cx="7043426" cy="1051560"/>
+            <a:off x="4896409" y="4754880"/>
+            <a:ext cx="6746646" cy="1051560"/>
           </a:xfrm>
           <a:prstGeom prst="roundRect">
             <a:avLst>
@@ -11748,7 +11639,7 @@
         </p:nvSpPr>
         <p:spPr>
           <a:xfrm>
-            <a:off x="4828229" y="4983480"/>
+            <a:off x="5125009" y="4983480"/>
             <a:ext cx="146304" cy="146304"/>
           </a:xfrm>
           <a:prstGeom prst="ellipse">
@@ -11768,7 +11659,7 @@
         </p:nvSpPr>
         <p:spPr>
           <a:xfrm>
-            <a:off x="5056829" y="4892040"/>
+            <a:off x="5353609" y="4892040"/>
             <a:ext cx="2103120" cy="320040"/>
           </a:xfrm>
           <a:prstGeom prst="rect">
@@ -11804,7 +11695,7 @@
         </p:nvSpPr>
         <p:spPr>
           <a:xfrm>
-            <a:off x="5056829" y="5303520"/>
+            <a:off x="5353609" y="5303520"/>
             <a:ext cx="2103120" cy="274320"/>
           </a:xfrm>
           <a:prstGeom prst="rect">
@@ -11840,7 +11731,7 @@
         </p:nvSpPr>
         <p:spPr>
           <a:xfrm>
-            <a:off x="7114229" y="4864608"/>
+            <a:off x="7411009" y="4864608"/>
             <a:ext cx="1600200" cy="822960"/>
           </a:xfrm>
           <a:prstGeom prst="rect">
@@ -11876,7 +11767,7 @@
         </p:nvSpPr>
         <p:spPr>
           <a:xfrm>
-            <a:off x="8760149" y="4864608"/>
+            <a:off x="9056929" y="4864608"/>
             <a:ext cx="1097280" cy="822960"/>
           </a:xfrm>
           <a:prstGeom prst="rect">
@@ -11912,8 +11803,8 @@
         </p:nvSpPr>
         <p:spPr>
           <a:xfrm>
-            <a:off x="9903149" y="4864608"/>
-            <a:ext cx="1005840" cy="822960"/>
+            <a:off x="10154209" y="4864608"/>
+            <a:ext cx="1051560" cy="822960"/>
           </a:xfrm>
           <a:prstGeom prst="rect">
             <a:avLst/>
@@ -11942,14 +11833,43 @@
       </p:sp>
       <p:sp>
         <p:nvSpPr>
-          <p:cNvPr id="33" name="own-note"/>
+          <p:cNvPr id="33" name="own-note-bg"/>
+          <p:cNvSpPr/>
+          <p:nvPr/>
+        </p:nvSpPr>
+        <p:spPr>
+          <a:xfrm>
+            <a:off x="4896409" y="5943600"/>
+            <a:ext cx="6746646" cy="384048"/>
+          </a:xfrm>
+          <a:prstGeom prst="roundRect">
+            <a:avLst>
+              <a:gd name="adj" fmla="val 11905"/>
+            </a:avLst>
+          </a:prstGeom>
+          <a:solidFill>
+            <a:schemeClr val="accent1">
+              <a:alpha val="20000"/>
+            </a:schemeClr>
+          </a:solidFill>
+          <a:ln w="12700">
+            <a:solidFill>
+              <a:schemeClr val="accent1"/>
+            </a:solidFill>
+            <a:prstDash val="solid"/>
+          </a:ln>
+        </p:spPr>
+      </p:sp>
+      <p:sp>
+        <p:nvSpPr>
+          <p:cNvPr id="34" name="own-note"/>
           <p:cNvSpPr txBox="1"/>
           <p:nvPr/>
         </p:nvSpPr>
         <p:spPr>
           <a:xfrm>
-            <a:off x="4599629" y="5852160"/>
-            <a:ext cx="7043426" cy="274320"/>
+            <a:off x="4896409" y="5943600"/>
+            <a:ext cx="6746646" cy="384048"/>
           </a:xfrm>
           <a:prstGeom prst="rect">
             <a:avLst/>
@@ -11958,21 +11878,21 @@
           <a:ln/>
         </p:spPr>
         <p:txBody>
-          <a:bodyPr wrap="square" lIns="0" tIns="0" rIns="0" bIns="0" rtlCol="0" anchor="t"/>
+          <a:bodyPr wrap="square" lIns="0" tIns="0" rIns="0" bIns="0" rtlCol="0" anchor="ctr"/>
           <a:lstStyle/>
           <a:p>
-            <a:pPr indent="0" marL="0">
+            <a:pPr algn="ctr" indent="0" marL="0">
               <a:buNone/>
             </a:pPr>
             <a:r>
-              <a:rPr lang="en-US" sz="1200" dirty="0">
+              <a:rPr lang="en-US" sz="1300" b="1" dirty="0">
                 <a:solidFill>
-                  <a:schemeClr val="tx2"/>
+                  <a:schemeClr val="accent1"/>
                 </a:solidFill>
               </a:rPr>
-              <a:t>작은 = 파라미터 기준 (연산량은 Tiny 최소) · 32px 미만 박스에서 격차 최대 (AP 0.86 vs 0.80)</a:t>
+              <a:t>32px 미만 박스 AP: ATSS 0.86 · YOLOX-S 0.80</a:t>
             </a:r>
-            <a:endParaRPr lang="en-US" sz="1200" dirty="0"/>
+            <a:endParaRPr lang="en-US" sz="1300" dirty="0"/>
           </a:p>
         </p:txBody>
       </p:sp>
@@ -12086,16 +12006,43 @@
       </p:sp>
       <p:sp>
         <p:nvSpPr>
-          <p:cNvPr id="3" name="Text 0"/>
+          <p:cNvPr id="3" name="concl-0-bg"/>
           <p:cNvSpPr/>
-          <p:nvPr>
-            <p:ph idx="101" type="body" hasCustomPrompt="1"/>
-          </p:nvPr>
-        </p:nvSpPr>
-        <p:spPr>
-          <a:xfrm>
-            <a:off x="548640" y="1005840"/>
-            <a:ext cx="11094415" cy="411480"/>
+          <p:nvPr/>
+        </p:nvSpPr>
+        <p:spPr>
+          <a:xfrm>
+            <a:off x="548640" y="1600200"/>
+            <a:ext cx="2240280" cy="502920"/>
+          </a:xfrm>
+          <a:prstGeom prst="roundRect">
+            <a:avLst>
+              <a:gd name="adj" fmla="val 9091"/>
+            </a:avLst>
+          </a:prstGeom>
+          <a:solidFill>
+            <a:schemeClr val="accent1">
+              <a:alpha val="20000"/>
+            </a:schemeClr>
+          </a:solidFill>
+          <a:ln w="12700">
+            <a:solidFill>
+              <a:schemeClr val="accent1"/>
+            </a:solidFill>
+            <a:prstDash val="solid"/>
+          </a:ln>
+        </p:spPr>
+      </p:sp>
+      <p:sp>
+        <p:nvSpPr>
+          <p:cNvPr id="4" name="concl-0"/>
+          <p:cNvSpPr txBox="1"/>
+          <p:nvPr/>
+        </p:nvSpPr>
+        <p:spPr>
+          <a:xfrm>
+            <a:off x="548640" y="1600200"/>
+            <a:ext cx="2240280" cy="502920"/>
           </a:xfrm>
           <a:prstGeom prst="rect">
             <a:avLst/>
@@ -12107,98 +12054,184 @@
           <a:bodyPr wrap="square" lIns="0" tIns="0" rIns="0" bIns="0" rtlCol="0" anchor="ctr"/>
           <a:lstStyle/>
           <a:p>
-            <a:pPr algn="l" indent="0" marL="0">
+            <a:pPr algn="ctr" indent="0" marL="0">
               <a:buNone/>
             </a:pPr>
             <a:r>
-              <a:rPr lang="en-US" sz="1500" dirty="0">
-                <a:solidFill>
-                  <a:schemeClr val="tx2"/>
-                </a:solidFill>
-              </a:rPr>
-              <a:t>ATSS · 검토 기준 0.30 · 1차 테스트</a:t>
-            </a:r>
-            <a:endParaRPr lang="en-US" sz="1500" dirty="0"/>
-          </a:p>
-        </p:txBody>
-      </p:sp>
-      <p:sp>
-        <p:nvSpPr>
-          <p:cNvPr id="4" name="conclusion-band"/>
-          <p:cNvSpPr/>
-          <p:nvPr/>
-        </p:nvSpPr>
-        <p:spPr>
-          <a:xfrm>
-            <a:off x="548640" y="1600200"/>
-            <a:ext cx="11094415" cy="777240"/>
-          </a:xfrm>
-          <a:prstGeom prst="roundRect">
-            <a:avLst>
-              <a:gd name="adj" fmla="val 9412"/>
-            </a:avLst>
-          </a:prstGeom>
-          <a:solidFill>
-            <a:srgbClr val="23272F"/>
-          </a:solidFill>
-          <a:ln/>
-        </p:spPr>
-      </p:sp>
-      <p:sp>
-        <p:nvSpPr>
-          <p:cNvPr id="5" name="conclusion"/>
-          <p:cNvSpPr txBox="1"/>
-          <p:nvPr/>
-        </p:nvSpPr>
-        <p:spPr>
-          <a:xfrm>
-            <a:off x="822960" y="1645920"/>
-            <a:ext cx="10545775" cy="685800"/>
-          </a:xfrm>
-          <a:prstGeom prst="rect">
-            <a:avLst/>
-          </a:prstGeom>
-          <a:noFill/>
-          <a:ln/>
-        </p:spPr>
-        <p:txBody>
-          <a:bodyPr wrap="square" lIns="0" tIns="0" rIns="0" bIns="0" rtlCol="0" anchor="ctr"/>
-          <a:lstStyle/>
-          <a:p>
-            <a:pPr indent="0" marL="0">
-              <a:buNone/>
-            </a:pPr>
-            <a:r>
-              <a:rPr lang="en-US" sz="2200" b="1" dirty="0">
+              <a:rPr lang="en-US" sz="1300" b="1" dirty="0">
                 <a:solidFill>
                   <a:schemeClr val="accent1"/>
                 </a:solidFill>
               </a:rPr>
               <a:t>혼동 0건</a:t>
             </a:r>
-            <a:pPr indent="0" marL="0">
+            <a:endParaRPr lang="en-US" sz="1300" dirty="0"/>
+          </a:p>
+        </p:txBody>
+      </p:sp>
+      <p:sp>
+        <p:nvSpPr>
+          <p:cNvPr id="5" name="concl-1-bg"/>
+          <p:cNvSpPr/>
+          <p:nvPr/>
+        </p:nvSpPr>
+        <p:spPr>
+          <a:xfrm>
+            <a:off x="2926080" y="1600200"/>
+            <a:ext cx="2240280" cy="502920"/>
+          </a:xfrm>
+          <a:prstGeom prst="roundRect">
+            <a:avLst>
+              <a:gd name="adj" fmla="val 9091"/>
+            </a:avLst>
+          </a:prstGeom>
+          <a:solidFill>
+            <a:schemeClr val="accent2">
+              <a:alpha val="20000"/>
+            </a:schemeClr>
+          </a:solidFill>
+          <a:ln w="12700">
+            <a:solidFill>
+              <a:schemeClr val="accent2"/>
+            </a:solidFill>
+            <a:prstDash val="solid"/>
+          </a:ln>
+        </p:spPr>
+      </p:sp>
+      <p:sp>
+        <p:nvSpPr>
+          <p:cNvPr id="6" name="concl-1"/>
+          <p:cNvSpPr txBox="1"/>
+          <p:nvPr/>
+        </p:nvSpPr>
+        <p:spPr>
+          <a:xfrm>
+            <a:off x="2926080" y="1600200"/>
+            <a:ext cx="2240280" cy="502920"/>
+          </a:xfrm>
+          <a:prstGeom prst="rect">
+            <a:avLst/>
+          </a:prstGeom>
+          <a:noFill/>
+          <a:ln/>
+        </p:spPr>
+        <p:txBody>
+          <a:bodyPr wrap="square" lIns="0" tIns="0" rIns="0" bIns="0" rtlCol="0" anchor="ctr"/>
+          <a:lstStyle/>
+          <a:p>
+            <a:pPr algn="ctr" indent="0" marL="0">
               <a:buNone/>
             </a:pPr>
             <a:r>
-              <a:rPr lang="en-US" sz="2200" b="1" dirty="0">
-                <a:solidFill>
-                  <a:schemeClr val="tx1"/>
-                </a:solidFill>
-              </a:rPr>
-              <a:t>  ·  오류는 전부 놓친 scratch  ·  </a:t>
-            </a:r>
-            <a:pPr indent="0" marL="0">
-              <a:buNone/>
-            </a:pPr>
-            <a:r>
-              <a:rPr lang="en-US" sz="2200" b="1" dirty="0">
+              <a:rPr lang="en-US" sz="1300" b="1" dirty="0">
                 <a:solidFill>
                   <a:schemeClr val="accent2"/>
                 </a:solidFill>
               </a:rPr>
-              <a:t>나무 배경에서 가장 약함</a:t>
+              <a:t>놓친 scratch 19</a:t>
             </a:r>
-            <a:endParaRPr lang="en-US" sz="2200" dirty="0"/>
+            <a:endParaRPr lang="en-US" sz="1300" dirty="0"/>
+          </a:p>
+        </p:txBody>
+      </p:sp>
+      <p:sp>
+        <p:nvSpPr>
+          <p:cNvPr id="7" name="concl-2-bg"/>
+          <p:cNvSpPr/>
+          <p:nvPr/>
+        </p:nvSpPr>
+        <p:spPr>
+          <a:xfrm>
+            <a:off x="5303520" y="1600200"/>
+            <a:ext cx="2240280" cy="502920"/>
+          </a:xfrm>
+          <a:prstGeom prst="roundRect">
+            <a:avLst>
+              <a:gd name="adj" fmla="val 9091"/>
+            </a:avLst>
+          </a:prstGeom>
+          <a:solidFill>
+            <a:schemeClr val="accent2">
+              <a:alpha val="20000"/>
+            </a:schemeClr>
+          </a:solidFill>
+          <a:ln w="12700">
+            <a:solidFill>
+              <a:schemeClr val="accent2"/>
+            </a:solidFill>
+            <a:prstDash val="solid"/>
+          </a:ln>
+        </p:spPr>
+      </p:sp>
+      <p:sp>
+        <p:nvSpPr>
+          <p:cNvPr id="8" name="concl-2"/>
+          <p:cNvSpPr txBox="1"/>
+          <p:nvPr/>
+        </p:nvSpPr>
+        <p:spPr>
+          <a:xfrm>
+            <a:off x="5303520" y="1600200"/>
+            <a:ext cx="2240280" cy="502920"/>
+          </a:xfrm>
+          <a:prstGeom prst="rect">
+            <a:avLst/>
+          </a:prstGeom>
+          <a:noFill/>
+          <a:ln/>
+        </p:spPr>
+        <p:txBody>
+          <a:bodyPr wrap="square" lIns="0" tIns="0" rIns="0" bIns="0" rtlCol="0" anchor="ctr"/>
+          <a:lstStyle/>
+          <a:p>
+            <a:pPr algn="ctr" indent="0" marL="0">
+              <a:buNone/>
+            </a:pPr>
+            <a:r>
+              <a:rPr lang="en-US" sz="1300" b="1" dirty="0">
+                <a:solidFill>
+                  <a:schemeClr val="accent2"/>
+                </a:solidFill>
+              </a:rPr>
+              <a:t>나무 배경 33%</a:t>
+            </a:r>
+            <a:endParaRPr lang="en-US" sz="1300" dirty="0"/>
+          </a:p>
+        </p:txBody>
+      </p:sp>
+      <p:sp>
+        <p:nvSpPr>
+          <p:cNvPr id="9" name="ctx"/>
+          <p:cNvSpPr txBox="1"/>
+          <p:nvPr/>
+        </p:nvSpPr>
+        <p:spPr>
+          <a:xfrm>
+            <a:off x="7772400" y="1600200"/>
+            <a:ext cx="3867912" cy="502920"/>
+          </a:xfrm>
+          <a:prstGeom prst="rect">
+            <a:avLst/>
+          </a:prstGeom>
+          <a:noFill/>
+          <a:ln/>
+        </p:spPr>
+        <p:txBody>
+          <a:bodyPr wrap="square" lIns="0" tIns="0" rIns="0" bIns="0" rtlCol="0" anchor="ctr"/>
+          <a:lstStyle/>
+          <a:p>
+            <a:pPr algn="r" indent="0" marL="0">
+              <a:buNone/>
+            </a:pPr>
+            <a:r>
+              <a:rPr lang="en-US" sz="1200" dirty="0">
+                <a:solidFill>
+                  <a:schemeClr val="tx2"/>
+                </a:solidFill>
+              </a:rPr>
+              <a:t>ATSS · 기준 0.30</a:t>
+            </a:r>
+            <a:endParaRPr lang="en-US" sz="1200" dirty="0"/>
           </a:p>
         </p:txBody>
       </p:sp>
@@ -12217,7 +12250,7 @@
           </p:nvPr>
         </p:nvGraphicFramePr>
         <p:xfrm>
-          <a:off x="548640" y="2651760"/>
+          <a:off x="548640" y="2377440"/>
           <a:ext cx="5486400" cy="914400"/>
         </p:xfrm>
         <a:graphic>
@@ -12230,7 +12263,7 @@
                 <a:gridCol w="1234440"/>
                 <a:gridCol w="1234440"/>
               </a:tblGrid>
-              <a:tr h="411480">
+              <a:tr h="457200">
                 <a:tc>
                   <a:txBody>
                     <a:bodyPr/>
@@ -12504,7 +12537,7 @@
                   </a:tcPr>
                 </a:tc>
               </a:tr>
-              <a:tr h="411480">
+              <a:tr h="457200">
                 <a:tc>
                   <a:txBody>
                     <a:bodyPr/>
@@ -12778,7 +12811,7 @@
                   </a:tcPr>
                 </a:tc>
               </a:tr>
-              <a:tr h="411480">
+              <a:tr h="457200">
                 <a:tc>
                   <a:txBody>
                     <a:bodyPr/>
@@ -13052,7 +13085,7 @@
                   </a:tcPr>
                 </a:tc>
               </a:tr>
-              <a:tr h="411480">
+              <a:tr h="457200">
                 <a:tc>
                   <a:txBody>
                     <a:bodyPr/>
@@ -13332,18 +13365,18 @@
       </p:graphicFrame>
       <p:sp>
         <p:nvSpPr>
-          <p:cNvPr id="7" name="bg-recall-card"/>
+          <p:cNvPr id="11" name="bg-recall-card"/>
           <p:cNvSpPr/>
           <p:nvPr/>
         </p:nvSpPr>
         <p:spPr>
           <a:xfrm>
-            <a:off x="548640" y="4572000"/>
-            <a:ext cx="5486400" cy="1645920"/>
+            <a:off x="548640" y="4434840"/>
+            <a:ext cx="5486400" cy="1783080"/>
           </a:xfrm>
           <a:prstGeom prst="roundRect">
             <a:avLst>
-              <a:gd name="adj" fmla="val 4444"/>
+              <a:gd name="adj" fmla="val 4103"/>
             </a:avLst>
           </a:prstGeom>
           <a:solidFill>
@@ -13354,13 +13387,13 @@
       </p:sp>
       <p:sp>
         <p:nvSpPr>
-          <p:cNvPr id="8" name="bgr-h"/>
+          <p:cNvPr id="12" name="bgr-h"/>
           <p:cNvSpPr txBox="1"/>
           <p:nvPr/>
         </p:nvSpPr>
         <p:spPr>
           <a:xfrm>
-            <a:off x="822960" y="4663440"/>
+            <a:off x="822960" y="4544568"/>
             <a:ext cx="4937760" cy="292608"/>
           </a:xfrm>
           <a:prstGeom prst="rect">
@@ -13382,7 +13415,7 @@
                   <a:schemeClr val="tx1"/>
                 </a:solidFill>
               </a:rPr>
-              <a:t>배경별 박스 재현율 (불합격 기준 0.60)</a:t>
+              <a:t>배경별 재현율</a:t>
             </a:r>
             <a:endParaRPr lang="en-US" sz="1400" dirty="0"/>
           </a:p>
@@ -13390,13 +13423,13 @@
       </p:sp>
       <p:sp>
         <p:nvSpPr>
-          <p:cNvPr id="9" name="bgr-l-0"/>
+          <p:cNvPr id="13" name="bgr-l-0"/>
           <p:cNvSpPr txBox="1"/>
           <p:nvPr/>
         </p:nvSpPr>
         <p:spPr>
           <a:xfrm>
-            <a:off x="822960" y="5029200"/>
+            <a:off x="822960" y="4937760"/>
             <a:ext cx="1188720" cy="292608"/>
           </a:xfrm>
           <a:prstGeom prst="rect">
@@ -13426,13 +13459,13 @@
       </p:sp>
       <p:sp>
         <p:nvSpPr>
-          <p:cNvPr id="10" name="bgr-track-0"/>
+          <p:cNvPr id="14" name="bgr-track-0"/>
           <p:cNvSpPr/>
           <p:nvPr/>
         </p:nvSpPr>
         <p:spPr>
           <a:xfrm>
-            <a:off x="2103120" y="5102352"/>
+            <a:off x="2103120" y="5010912"/>
             <a:ext cx="3017520" cy="164592"/>
           </a:xfrm>
           <a:prstGeom prst="rect">
@@ -13446,13 +13479,13 @@
       </p:sp>
       <p:sp>
         <p:nvSpPr>
-          <p:cNvPr id="11" name="bgr-fill-0"/>
+          <p:cNvPr id="15" name="bgr-fill-0"/>
           <p:cNvSpPr/>
           <p:nvPr/>
         </p:nvSpPr>
         <p:spPr>
           <a:xfrm>
-            <a:off x="2103120" y="5102352"/>
+            <a:off x="2103120" y="5010912"/>
             <a:ext cx="2172614" cy="164592"/>
           </a:xfrm>
           <a:prstGeom prst="rect">
@@ -13466,13 +13499,13 @@
       </p:sp>
       <p:sp>
         <p:nvSpPr>
-          <p:cNvPr id="12" name="bgr-v-0"/>
+          <p:cNvPr id="16" name="bgr-v-0"/>
           <p:cNvSpPr txBox="1"/>
           <p:nvPr/>
         </p:nvSpPr>
         <p:spPr>
           <a:xfrm>
-            <a:off x="5212080" y="5029200"/>
+            <a:off x="5212080" y="4937760"/>
             <a:ext cx="548640" cy="292608"/>
           </a:xfrm>
           <a:prstGeom prst="rect">
@@ -13502,13 +13535,13 @@
       </p:sp>
       <p:sp>
         <p:nvSpPr>
-          <p:cNvPr id="13" name="bgr-l-1"/>
+          <p:cNvPr id="17" name="bgr-l-1"/>
           <p:cNvSpPr txBox="1"/>
           <p:nvPr/>
         </p:nvSpPr>
         <p:spPr>
           <a:xfrm>
-            <a:off x="822960" y="5394960"/>
+            <a:off x="822960" y="5321808"/>
             <a:ext cx="1188720" cy="292608"/>
           </a:xfrm>
           <a:prstGeom prst="rect">
@@ -13538,13 +13571,13 @@
       </p:sp>
       <p:sp>
         <p:nvSpPr>
-          <p:cNvPr id="14" name="bgr-track-1"/>
+          <p:cNvPr id="18" name="bgr-track-1"/>
           <p:cNvSpPr/>
           <p:nvPr/>
         </p:nvSpPr>
         <p:spPr>
           <a:xfrm>
-            <a:off x="2103120" y="5468112"/>
+            <a:off x="2103120" y="5394960"/>
             <a:ext cx="3017520" cy="164592"/>
           </a:xfrm>
           <a:prstGeom prst="rect">
@@ -13558,13 +13591,13 @@
       </p:sp>
       <p:sp>
         <p:nvSpPr>
-          <p:cNvPr id="15" name="bgr-fill-1"/>
+          <p:cNvPr id="19" name="bgr-fill-1"/>
           <p:cNvSpPr/>
           <p:nvPr/>
         </p:nvSpPr>
         <p:spPr>
           <a:xfrm>
-            <a:off x="2103120" y="5468112"/>
+            <a:off x="2103120" y="5394960"/>
             <a:ext cx="2263140" cy="164592"/>
           </a:xfrm>
           <a:prstGeom prst="rect">
@@ -13578,13 +13611,13 @@
       </p:sp>
       <p:sp>
         <p:nvSpPr>
-          <p:cNvPr id="16" name="bgr-v-1"/>
+          <p:cNvPr id="20" name="bgr-v-1"/>
           <p:cNvSpPr txBox="1"/>
           <p:nvPr/>
         </p:nvSpPr>
         <p:spPr>
           <a:xfrm>
-            <a:off x="5212080" y="5394960"/>
+            <a:off x="5212080" y="5321808"/>
             <a:ext cx="548640" cy="292608"/>
           </a:xfrm>
           <a:prstGeom prst="rect">
@@ -13614,13 +13647,13 @@
       </p:sp>
       <p:sp>
         <p:nvSpPr>
-          <p:cNvPr id="17" name="bgr-l-2"/>
+          <p:cNvPr id="21" name="bgr-l-2"/>
           <p:cNvSpPr txBox="1"/>
           <p:nvPr/>
         </p:nvSpPr>
         <p:spPr>
           <a:xfrm>
-            <a:off x="822960" y="5760720"/>
+            <a:off x="822960" y="5705856"/>
             <a:ext cx="1188720" cy="292608"/>
           </a:xfrm>
           <a:prstGeom prst="rect">
@@ -13650,13 +13683,13 @@
       </p:sp>
       <p:sp>
         <p:nvSpPr>
-          <p:cNvPr id="18" name="bgr-track-2"/>
+          <p:cNvPr id="22" name="bgr-track-2"/>
           <p:cNvSpPr/>
           <p:nvPr/>
         </p:nvSpPr>
         <p:spPr>
           <a:xfrm>
-            <a:off x="2103120" y="5833872"/>
+            <a:off x="2103120" y="5779008"/>
             <a:ext cx="3017520" cy="164592"/>
           </a:xfrm>
           <a:prstGeom prst="rect">
@@ -13670,13 +13703,13 @@
       </p:sp>
       <p:sp>
         <p:nvSpPr>
-          <p:cNvPr id="19" name="bgr-fill-2"/>
+          <p:cNvPr id="23" name="bgr-fill-2"/>
           <p:cNvSpPr/>
           <p:nvPr/>
         </p:nvSpPr>
         <p:spPr>
           <a:xfrm>
-            <a:off x="2103120" y="5833872"/>
+            <a:off x="2103120" y="5779008"/>
             <a:ext cx="995782" cy="164592"/>
           </a:xfrm>
           <a:prstGeom prst="rect">
@@ -13690,13 +13723,13 @@
       </p:sp>
       <p:sp>
         <p:nvSpPr>
-          <p:cNvPr id="20" name="bgr-v-2"/>
+          <p:cNvPr id="24" name="bgr-v-2"/>
           <p:cNvSpPr txBox="1"/>
           <p:nvPr/>
         </p:nvSpPr>
         <p:spPr>
           <a:xfrm>
-            <a:off x="5212080" y="5760720"/>
+            <a:off x="5212080" y="5705856"/>
             <a:ext cx="548640" cy="292608"/>
           </a:xfrm>
           <a:prstGeom prst="rect">
@@ -13726,7 +13759,7 @@
       </p:sp>
       <p:pic>
         <p:nvPicPr>
-          <p:cNvPr id="21" name="heat-0" descr="C:\Users\user\_se4nchoi\batteryvision\docs\submission\build\img\heat_atss.jpg">    </p:cNvPr>
+          <p:cNvPr id="25" name="heat-0" descr="C:\Users\user\_se4nchoi\batteryvision\docs\submission\build\img\heat_atss.jpg">    </p:cNvPr>
           <p:cNvPicPr>
             <a:picLocks noChangeAspect="1"/>
           </p:cNvPicPr>
@@ -13740,7 +13773,7 @@
         </p:blipFill>
         <p:spPr>
           <a:xfrm>
-            <a:off x="6263640" y="2606040"/>
+            <a:off x="6263640" y="2377440"/>
             <a:ext cx="2633472" cy="2633472"/>
           </a:xfrm>
           <a:prstGeom prst="rect">
@@ -13750,13 +13783,13 @@
       </p:pic>
       <p:sp>
         <p:nvSpPr>
-          <p:cNvPr id="22" name="heat-dot-0"/>
+          <p:cNvPr id="26" name="heat-dot-0"/>
           <p:cNvSpPr/>
           <p:nvPr/>
         </p:nvSpPr>
         <p:spPr>
           <a:xfrm>
-            <a:off x="6263640" y="5413248"/>
+            <a:off x="6263640" y="5184648"/>
             <a:ext cx="146304" cy="146304"/>
           </a:xfrm>
           <a:prstGeom prst="ellipse">
@@ -13770,13 +13803,13 @@
       </p:sp>
       <p:sp>
         <p:nvSpPr>
-          <p:cNvPr id="23" name="heat-l-0"/>
+          <p:cNvPr id="27" name="heat-l-0"/>
           <p:cNvSpPr txBox="1"/>
           <p:nvPr/>
         </p:nvSpPr>
         <p:spPr>
           <a:xfrm>
-            <a:off x="6501384" y="5340096"/>
+            <a:off x="6501384" y="5111496"/>
             <a:ext cx="2377440" cy="292608"/>
           </a:xfrm>
           <a:prstGeom prst="rect">
@@ -13809,7 +13842,7 @@
                   <a:schemeClr val="tx2"/>
                 </a:solidFill>
               </a:rPr>
-              <a:t>결함 적중 </a:t>
+              <a:t>적중 </a:t>
             </a:r>
             <a:pPr indent="0" marL="0">
               <a:buNone/>
@@ -13828,7 +13861,7 @@
       </p:sp>
       <p:pic>
         <p:nvPicPr>
-          <p:cNvPr id="24" name="heat-1" descr="C:\Users\user\_se4nchoi\batteryvision\docs\submission\build\img\heat_yolox.jpg">    </p:cNvPr>
+          <p:cNvPr id="28" name="heat-1" descr="C:\Users\user\_se4nchoi\batteryvision\docs\submission\build\img\heat_yolox.jpg">    </p:cNvPr>
           <p:cNvPicPr>
             <a:picLocks noChangeAspect="1"/>
           </p:cNvPicPr>
@@ -13842,7 +13875,7 @@
         </p:blipFill>
         <p:spPr>
           <a:xfrm>
-            <a:off x="9006840" y="2606040"/>
+            <a:off x="9006840" y="2377440"/>
             <a:ext cx="2633472" cy="2633472"/>
           </a:xfrm>
           <a:prstGeom prst="rect">
@@ -13852,13 +13885,13 @@
       </p:pic>
       <p:sp>
         <p:nvSpPr>
-          <p:cNvPr id="25" name="heat-dot-1"/>
+          <p:cNvPr id="29" name="heat-dot-1"/>
           <p:cNvSpPr/>
           <p:nvPr/>
         </p:nvSpPr>
         <p:spPr>
           <a:xfrm>
-            <a:off x="9006840" y="5413248"/>
+            <a:off x="9006840" y="5184648"/>
             <a:ext cx="146304" cy="146304"/>
           </a:xfrm>
           <a:prstGeom prst="ellipse">
@@ -13872,13 +13905,13 @@
       </p:sp>
       <p:sp>
         <p:nvSpPr>
-          <p:cNvPr id="26" name="heat-l-1"/>
+          <p:cNvPr id="30" name="heat-l-1"/>
           <p:cNvSpPr txBox="1"/>
           <p:nvPr/>
         </p:nvSpPr>
         <p:spPr>
           <a:xfrm>
-            <a:off x="9244584" y="5340096"/>
+            <a:off x="9244584" y="5111496"/>
             <a:ext cx="2377440" cy="292608"/>
           </a:xfrm>
           <a:prstGeom prst="rect">
@@ -13911,7 +13944,7 @@
                   <a:schemeClr val="tx2"/>
                 </a:solidFill>
               </a:rPr>
-              <a:t>결함 적중 </a:t>
+              <a:t>적중 </a:t>
             </a:r>
             <a:pPr indent="0" marL="0">
               <a:buNone/>
@@ -13925,42 +13958,6 @@
               <a:t>98%</a:t>
             </a:r>
             <a:endParaRPr lang="en-US" sz="1400" dirty="0"/>
-          </a:p>
-        </p:txBody>
-      </p:sp>
-      <p:sp>
-        <p:nvSpPr>
-          <p:cNvPr id="27" name="heat-cap"/>
-          <p:cNvSpPr txBox="1"/>
-          <p:nvPr/>
-        </p:nvSpPr>
-        <p:spPr>
-          <a:xfrm>
-            <a:off x="6263640" y="5715000"/>
-            <a:ext cx="5376672" cy="274320"/>
-          </a:xfrm>
-          <a:prstGeom prst="rect">
-            <a:avLst/>
-          </a:prstGeom>
-          <a:noFill/>
-          <a:ln/>
-        </p:spPr>
-        <p:txBody>
-          <a:bodyPr wrap="square" lIns="0" tIns="0" rIns="0" bIns="0" rtlCol="0" anchor="t"/>
-          <a:lstStyle/>
-          <a:p>
-            <a:pPr indent="0" marL="0">
-              <a:buNone/>
-            </a:pPr>
-            <a:r>
-              <a:rPr lang="en-US" sz="1200" dirty="0">
-                <a:solidFill>
-                  <a:schemeClr val="tx2"/>
-                </a:solidFill>
-              </a:rPr>
-              <a:t>heatmap 최고점이 정답 박스 안 · 정확도 ≠ heatmap 품질</a:t>
-            </a:r>
-            <a:endParaRPr lang="en-US" sz="1200" dirty="0"/>
           </a:p>
         </p:txBody>
       </p:sp>
@@ -15529,72 +15526,43 @@
       </p:graphicFrame>
       <p:sp>
         <p:nvSpPr>
-          <p:cNvPr id="6" name="int8-note"/>
-          <p:cNvSpPr txBox="1"/>
-          <p:nvPr/>
-        </p:nvSpPr>
-        <p:spPr>
-          <a:xfrm>
-            <a:off x="6537960" y="4160520"/>
-            <a:ext cx="5102352" cy="274320"/>
-          </a:xfrm>
-          <a:prstGeom prst="rect">
-            <a:avLst/>
-          </a:prstGeom>
-          <a:noFill/>
-          <a:ln/>
-        </p:spPr>
-        <p:txBody>
-          <a:bodyPr wrap="square" lIns="0" tIns="0" rIns="0" bIns="0" rtlCol="0" anchor="t"/>
-          <a:lstStyle/>
-          <a:p>
-            <a:pPr indent="0" marL="0">
-              <a:buNone/>
-            </a:pPr>
-            <a:r>
-              <a:rPr lang="en-US" sz="1100" dirty="0">
-                <a:solidFill>
-                  <a:schemeClr val="tx2"/>
-                </a:solidFill>
-              </a:rPr>
-              <a:t>값: FP16 → INT8 · 놓친 셀 = 결함 98장 중 검토 기준 0.30 미만</a:t>
-            </a:r>
-            <a:endParaRPr lang="en-US" sz="1100" dirty="0"/>
-          </a:p>
-        </p:txBody>
-      </p:sp>
-      <p:sp>
-        <p:nvSpPr>
-          <p:cNvPr id="7" name="method-card"/>
+          <p:cNvPr id="6" name="method-0-bg"/>
           <p:cNvSpPr/>
           <p:nvPr/>
         </p:nvSpPr>
         <p:spPr>
           <a:xfrm>
-            <a:off x="548640" y="4800600"/>
-            <a:ext cx="11094415" cy="502920"/>
+            <a:off x="548640" y="4846320"/>
+            <a:ext cx="2651760" cy="384048"/>
           </a:xfrm>
           <a:prstGeom prst="roundRect">
             <a:avLst>
-              <a:gd name="adj" fmla="val 14545"/>
+              <a:gd name="adj" fmla="val 11905"/>
             </a:avLst>
           </a:prstGeom>
           <a:solidFill>
-            <a:srgbClr val="23272F"/>
+            <a:schemeClr val="tx2">
+              <a:alpha val="20000"/>
+            </a:schemeClr>
           </a:solidFill>
-          <a:ln/>
-        </p:spPr>
-      </p:sp>
-      <p:sp>
-        <p:nvSpPr>
-          <p:cNvPr id="8" name="method"/>
+          <a:ln w="12700">
+            <a:solidFill>
+              <a:schemeClr val="tx2"/>
+            </a:solidFill>
+            <a:prstDash val="solid"/>
+          </a:ln>
+        </p:spPr>
+      </p:sp>
+      <p:sp>
+        <p:nvSpPr>
+          <p:cNvPr id="7" name="method-0"/>
           <p:cNvSpPr txBox="1"/>
           <p:nvPr/>
         </p:nvSpPr>
         <p:spPr>
           <a:xfrm>
-            <a:off x="822960" y="4800600"/>
-            <a:ext cx="10545775" cy="502920"/>
+            <a:off x="548640" y="4846320"/>
+            <a:ext cx="2651760" cy="384048"/>
           </a:xfrm>
           <a:prstGeom prst="rect">
             <a:avLst/>
@@ -15606,27 +15574,81 @@
           <a:bodyPr wrap="square" lIns="0" tIns="0" rIns="0" bIns="0" rtlCol="0" anchor="ctr"/>
           <a:lstStyle/>
           <a:p>
-            <a:pPr indent="0" marL="0">
+            <a:pPr algn="ctr" indent="0" marL="0">
               <a:buNone/>
             </a:pPr>
             <a:r>
               <a:rPr lang="en-US" sz="1300" b="1" dirty="0">
                 <a:solidFill>
-                  <a:schemeClr val="accent1"/>
+                  <a:schemeClr val="tx2"/>
                 </a:solidFill>
               </a:rPr>
-              <a:t>측정 방법  </a:t>
+              <a:t>1차 테스트 131장</a:t>
             </a:r>
-            <a:pPr indent="0" marL="0">
+            <a:endParaRPr lang="en-US" sz="1300" dirty="0"/>
+          </a:p>
+        </p:txBody>
+      </p:sp>
+      <p:sp>
+        <p:nvSpPr>
+          <p:cNvPr id="8" name="method-1-bg"/>
+          <p:cNvSpPr/>
+          <p:nvPr/>
+        </p:nvSpPr>
+        <p:spPr>
+          <a:xfrm>
+            <a:off x="3355848" y="4846320"/>
+            <a:ext cx="2651760" cy="384048"/>
+          </a:xfrm>
+          <a:prstGeom prst="roundRect">
+            <a:avLst>
+              <a:gd name="adj" fmla="val 11905"/>
+            </a:avLst>
+          </a:prstGeom>
+          <a:solidFill>
+            <a:schemeClr val="tx2">
+              <a:alpha val="20000"/>
+            </a:schemeClr>
+          </a:solidFill>
+          <a:ln w="12700">
+            <a:solidFill>
+              <a:schemeClr val="tx2"/>
+            </a:solidFill>
+            <a:prstDash val="solid"/>
+          </a:ln>
+        </p:spPr>
+      </p:sp>
+      <p:sp>
+        <p:nvSpPr>
+          <p:cNvPr id="9" name="method-1"/>
+          <p:cNvSpPr txBox="1"/>
+          <p:nvPr/>
+        </p:nvSpPr>
+        <p:spPr>
+          <a:xfrm>
+            <a:off x="3355848" y="4846320"/>
+            <a:ext cx="2651760" cy="384048"/>
+          </a:xfrm>
+          <a:prstGeom prst="rect">
+            <a:avLst/>
+          </a:prstGeom>
+          <a:noFill/>
+          <a:ln/>
+        </p:spPr>
+        <p:txBody>
+          <a:bodyPr wrap="square" lIns="0" tIns="0" rIns="0" bIns="0" rtlCol="0" anchor="ctr"/>
+          <a:lstStyle/>
+          <a:p>
+            <a:pPr algn="ctr" indent="0" marL="0">
               <a:buNone/>
             </a:pPr>
             <a:r>
-              <a:rPr lang="en-US" sz="1300" dirty="0">
+              <a:rPr lang="en-US" sz="1300" b="1" dirty="0">
                 <a:solidFill>
-                  <a:schemeClr val="tx1"/>
+                  <a:schemeClr val="tx2"/>
                 </a:solidFill>
               </a:rPr>
-              <a:t>1차 테스트 131장 · 사진 1장씩 · Intel Core Ultra 7 265K CPU · 전처리·후처리 포함 · 워밍업 10회 제외</a:t>
+              <a:t>사진 1장씩</a:t>
             </a:r>
             <a:endParaRPr lang="en-US" sz="1300" dirty="0"/>
           </a:p>
@@ -15634,18 +15656,148 @@
       </p:sp>
       <p:sp>
         <p:nvSpPr>
-          <p:cNvPr id="9" name="pro-card"/>
+          <p:cNvPr id="10" name="method-2-bg"/>
           <p:cNvSpPr/>
           <p:nvPr/>
         </p:nvSpPr>
         <p:spPr>
           <a:xfrm>
-            <a:off x="548640" y="5486400"/>
-            <a:ext cx="5440680" cy="731520"/>
+            <a:off x="6163056" y="4846320"/>
+            <a:ext cx="2651760" cy="384048"/>
           </a:xfrm>
           <a:prstGeom prst="roundRect">
             <a:avLst>
-              <a:gd name="adj" fmla="val 10000"/>
+              <a:gd name="adj" fmla="val 11905"/>
+            </a:avLst>
+          </a:prstGeom>
+          <a:solidFill>
+            <a:schemeClr val="tx2">
+              <a:alpha val="20000"/>
+            </a:schemeClr>
+          </a:solidFill>
+          <a:ln w="12700">
+            <a:solidFill>
+              <a:schemeClr val="tx2"/>
+            </a:solidFill>
+            <a:prstDash val="solid"/>
+          </a:ln>
+        </p:spPr>
+      </p:sp>
+      <p:sp>
+        <p:nvSpPr>
+          <p:cNvPr id="11" name="method-2"/>
+          <p:cNvSpPr txBox="1"/>
+          <p:nvPr/>
+        </p:nvSpPr>
+        <p:spPr>
+          <a:xfrm>
+            <a:off x="6163056" y="4846320"/>
+            <a:ext cx="2651760" cy="384048"/>
+          </a:xfrm>
+          <a:prstGeom prst="rect">
+            <a:avLst/>
+          </a:prstGeom>
+          <a:noFill/>
+          <a:ln/>
+        </p:spPr>
+        <p:txBody>
+          <a:bodyPr wrap="square" lIns="0" tIns="0" rIns="0" bIns="0" rtlCol="0" anchor="ctr"/>
+          <a:lstStyle/>
+          <a:p>
+            <a:pPr algn="ctr" indent="0" marL="0">
+              <a:buNone/>
+            </a:pPr>
+            <a:r>
+              <a:rPr lang="en-US" sz="1300" b="1" dirty="0">
+                <a:solidFill>
+                  <a:schemeClr val="tx2"/>
+                </a:solidFill>
+              </a:rPr>
+              <a:t>Core Ultra 7 CPU</a:t>
+            </a:r>
+            <a:endParaRPr lang="en-US" sz="1300" dirty="0"/>
+          </a:p>
+        </p:txBody>
+      </p:sp>
+      <p:sp>
+        <p:nvSpPr>
+          <p:cNvPr id="12" name="method-3-bg"/>
+          <p:cNvSpPr/>
+          <p:nvPr/>
+        </p:nvSpPr>
+        <p:spPr>
+          <a:xfrm>
+            <a:off x="8970264" y="4846320"/>
+            <a:ext cx="2651760" cy="384048"/>
+          </a:xfrm>
+          <a:prstGeom prst="roundRect">
+            <a:avLst>
+              <a:gd name="adj" fmla="val 11905"/>
+            </a:avLst>
+          </a:prstGeom>
+          <a:solidFill>
+            <a:schemeClr val="tx2">
+              <a:alpha val="20000"/>
+            </a:schemeClr>
+          </a:solidFill>
+          <a:ln w="12700">
+            <a:solidFill>
+              <a:schemeClr val="tx2"/>
+            </a:solidFill>
+            <a:prstDash val="solid"/>
+          </a:ln>
+        </p:spPr>
+      </p:sp>
+      <p:sp>
+        <p:nvSpPr>
+          <p:cNvPr id="13" name="method-3"/>
+          <p:cNvSpPr txBox="1"/>
+          <p:nvPr/>
+        </p:nvSpPr>
+        <p:spPr>
+          <a:xfrm>
+            <a:off x="8970264" y="4846320"/>
+            <a:ext cx="2651760" cy="384048"/>
+          </a:xfrm>
+          <a:prstGeom prst="rect">
+            <a:avLst/>
+          </a:prstGeom>
+          <a:noFill/>
+          <a:ln/>
+        </p:spPr>
+        <p:txBody>
+          <a:bodyPr wrap="square" lIns="0" tIns="0" rIns="0" bIns="0" rtlCol="0" anchor="ctr"/>
+          <a:lstStyle/>
+          <a:p>
+            <a:pPr algn="ctr" indent="0" marL="0">
+              <a:buNone/>
+            </a:pPr>
+            <a:r>
+              <a:rPr lang="en-US" sz="1300" b="1" dirty="0">
+                <a:solidFill>
+                  <a:schemeClr val="tx2"/>
+                </a:solidFill>
+              </a:rPr>
+              <a:t>전·후처리 포함</a:t>
+            </a:r>
+            <a:endParaRPr lang="en-US" sz="1300" dirty="0"/>
+          </a:p>
+        </p:txBody>
+      </p:sp>
+      <p:sp>
+        <p:nvSpPr>
+          <p:cNvPr id="14" name="pro-card"/>
+          <p:cNvSpPr/>
+          <p:nvPr/>
+        </p:nvSpPr>
+        <p:spPr>
+          <a:xfrm>
+            <a:off x="548640" y="5440680"/>
+            <a:ext cx="5440680" cy="777240"/>
+          </a:xfrm>
+          <a:prstGeom prst="roundRect">
+            <a:avLst>
+              <a:gd name="adj" fmla="val 9412"/>
             </a:avLst>
           </a:prstGeom>
           <a:solidFill>
@@ -15656,14 +15808,14 @@
       </p:sp>
       <p:sp>
         <p:nvSpPr>
-          <p:cNvPr id="10" name="pro"/>
+          <p:cNvPr id="15" name="pro"/>
           <p:cNvSpPr txBox="1"/>
           <p:nvPr/>
         </p:nvSpPr>
         <p:spPr>
           <a:xfrm>
-            <a:off x="822960" y="5486400"/>
-            <a:ext cx="5029200" cy="731520"/>
+            <a:off x="822960" y="5440680"/>
+            <a:ext cx="5029200" cy="777240"/>
           </a:xfrm>
           <a:prstGeom prst="rect">
             <a:avLst/>
@@ -15695,7 +15847,7 @@
                   <a:schemeClr val="tx1"/>
                 </a:solidFill>
               </a:rPr>
-              <a:t>2–4배 빠름 · 크기 절반 · mAP 유지</a:t>
+              <a:t>2–4배 빠름 · 크기 ½ · mAP 유지</a:t>
             </a:r>
             <a:endParaRPr lang="en-US" sz="1500" dirty="0"/>
           </a:p>
@@ -15703,18 +15855,18 @@
       </p:sp>
       <p:sp>
         <p:nvSpPr>
-          <p:cNvPr id="11" name="con-card"/>
+          <p:cNvPr id="16" name="con-card"/>
           <p:cNvSpPr/>
           <p:nvPr/>
         </p:nvSpPr>
         <p:spPr>
           <a:xfrm>
-            <a:off x="6199632" y="5486400"/>
-            <a:ext cx="5440680" cy="731520"/>
+            <a:off x="6199632" y="5440680"/>
+            <a:ext cx="5440680" cy="777240"/>
           </a:xfrm>
           <a:prstGeom prst="roundRect">
             <a:avLst>
-              <a:gd name="adj" fmla="val 10000"/>
+              <a:gd name="adj" fmla="val 9412"/>
             </a:avLst>
           </a:prstGeom>
           <a:solidFill>
@@ -15725,14 +15877,14 @@
       </p:sp>
       <p:sp>
         <p:nvSpPr>
-          <p:cNvPr id="12" name="con"/>
+          <p:cNvPr id="17" name="con"/>
           <p:cNvSpPr txBox="1"/>
           <p:nvPr/>
         </p:nvSpPr>
         <p:spPr>
           <a:xfrm>
-            <a:off x="6473952" y="5486400"/>
-            <a:ext cx="5029200" cy="731520"/>
+            <a:off x="6473952" y="5440680"/>
+            <a:ext cx="5029200" cy="777240"/>
           </a:xfrm>
           <a:prstGeom prst="rect">
             <a:avLst/>
@@ -15764,7 +15916,7 @@
                   <a:schemeClr val="tx1"/>
                 </a:solidFill>
               </a:rPr>
-              <a:t>신뢰도 ↓ → 놓침 ↑ · 기준값 재설정 필요</a:t>
+              <a:t>놓침 증가 · 기준값 재설정</a:t>
             </a:r>
             <a:endParaRPr lang="en-US" sz="1500" dirty="0"/>
           </a:p>
@@ -15878,47 +16030,9 @@
           </a:p>
         </p:txBody>
       </p:sp>
-      <p:sp>
-        <p:nvSpPr>
-          <p:cNvPr id="3" name="Text 0"/>
-          <p:cNvSpPr/>
-          <p:nvPr>
-            <p:ph idx="101" type="body" hasCustomPrompt="1"/>
-          </p:nvPr>
-        </p:nvSpPr>
-        <p:spPr>
-          <a:xfrm>
-            <a:off x="548640" y="1005840"/>
-            <a:ext cx="11094415" cy="411480"/>
-          </a:xfrm>
-          <a:prstGeom prst="rect">
-            <a:avLst/>
-          </a:prstGeom>
-          <a:noFill/>
-          <a:ln/>
-        </p:spPr>
-        <p:txBody>
-          <a:bodyPr wrap="square" lIns="0" tIns="0" rIns="0" bIns="0" rtlCol="0" anchor="ctr"/>
-          <a:lstStyle/>
-          <a:p>
-            <a:pPr algn="l" indent="0" marL="0">
-              <a:buNone/>
-            </a:pPr>
-            <a:r>
-              <a:rPr lang="en-US" sz="1500" dirty="0">
-                <a:solidFill>
-                  <a:schemeClr val="tx2"/>
-                </a:solidFill>
-              </a:rPr>
-              <a:t>같은 업로더 · 같은 결함 종류 · 다른 촬영 세션, 학습에 한 번도 안 쓴 사진</a:t>
-            </a:r>
-            <a:endParaRPr lang="en-US" sz="1500" dirty="0"/>
-          </a:p>
-        </p:txBody>
-      </p:sp>
       <p:pic>
         <p:nvPicPr>
-          <p:cNvPr id="4" name="rf-0" descr="C:\Users\user\_se4nchoi\batteryvision\docs\submission\build\img\roboflow_v8.png">    </p:cNvPr>
+          <p:cNvPr id="3" name="rf-0" descr="C:\Users\user\_se4nchoi\batteryvision\docs\submission\build\img\roboflow_v8.png">    </p:cNvPr>
           <p:cNvPicPr>
             <a:picLocks noChangeAspect="1"/>
           </p:cNvPicPr>
@@ -15942,14 +16056,43 @@
       </p:pic>
       <p:sp>
         <p:nvSpPr>
-          <p:cNvPr id="5" name="rf-cap-0"/>
+          <p:cNvPr id="4" name="rf-tag-0-bg"/>
+          <p:cNvSpPr/>
+          <p:nvPr/>
+        </p:nvSpPr>
+        <p:spPr>
+          <a:xfrm>
+            <a:off x="548640" y="5197121"/>
+            <a:ext cx="731520" cy="347472"/>
+          </a:xfrm>
+          <a:prstGeom prst="roundRect">
+            <a:avLst>
+              <a:gd name="adj" fmla="val 13158"/>
+            </a:avLst>
+          </a:prstGeom>
+          <a:solidFill>
+            <a:schemeClr val="accent1">
+              <a:alpha val="20000"/>
+            </a:schemeClr>
+          </a:solidFill>
+          <a:ln w="12700">
+            <a:solidFill>
+              <a:schemeClr val="accent1"/>
+            </a:solidFill>
+            <a:prstDash val="solid"/>
+          </a:ln>
+        </p:spPr>
+      </p:sp>
+      <p:sp>
+        <p:nvSpPr>
+          <p:cNvPr id="5" name="rf-tag-0"/>
           <p:cNvSpPr txBox="1"/>
           <p:nvPr/>
         </p:nvSpPr>
         <p:spPr>
           <a:xfrm>
-            <a:off x="548640" y="5151401"/>
-            <a:ext cx="5440680" cy="320040"/>
+            <a:off x="548640" y="5197121"/>
+            <a:ext cx="731520" cy="347472"/>
           </a:xfrm>
           <a:prstGeom prst="rect">
             <a:avLst/>
@@ -15958,38 +16101,63 @@
           <a:ln/>
         </p:spPr>
         <p:txBody>
-          <a:bodyPr wrap="square" lIns="0" tIns="0" rIns="0" bIns="0" rtlCol="0" anchor="t"/>
+          <a:bodyPr wrap="square" lIns="0" tIns="0" rIns="0" bIns="0" rtlCol="0" anchor="ctr"/>
+          <a:lstStyle/>
+          <a:p>
+            <a:pPr algn="ctr" indent="0" marL="0">
+              <a:buNone/>
+            </a:pPr>
+            <a:r>
+              <a:rPr lang="en-US" sz="1300" b="1" dirty="0">
+                <a:solidFill>
+                  <a:schemeClr val="accent1"/>
+                </a:solidFill>
+              </a:rPr>
+              <a:t>1차</a:t>
+            </a:r>
+            <a:endParaRPr lang="en-US" sz="1300" dirty="0"/>
+          </a:p>
+        </p:txBody>
+      </p:sp>
+      <p:sp>
+        <p:nvSpPr>
+          <p:cNvPr id="6" name="rf-cap-0"/>
+          <p:cNvSpPr txBox="1"/>
+          <p:nvPr/>
+        </p:nvSpPr>
+        <p:spPr>
+          <a:xfrm>
+            <a:off x="1417320" y="5197121"/>
+            <a:ext cx="4526280" cy="347472"/>
+          </a:xfrm>
+          <a:prstGeom prst="rect">
+            <a:avLst/>
+          </a:prstGeom>
+          <a:noFill/>
+          <a:ln/>
+        </p:spPr>
+        <p:txBody>
+          <a:bodyPr wrap="square" lIns="0" tIns="0" rIns="0" bIns="0" rtlCol="0" anchor="ctr"/>
           <a:lstStyle/>
           <a:p>
             <a:pPr indent="0" marL="0">
               <a:buNone/>
             </a:pPr>
             <a:r>
-              <a:rPr lang="en-US" sz="1400" b="1" dirty="0">
-                <a:solidFill>
-                  <a:schemeClr val="accent1"/>
-                </a:solidFill>
-              </a:rPr>
-              <a:t>1차  </a:t>
-            </a:r>
-            <a:pPr indent="0" marL="0">
-              <a:buNone/>
-            </a:pPr>
-            <a:r>
-              <a:rPr lang="en-US" sz="1400" dirty="0">
+              <a:rPr lang="en-US" sz="1500" dirty="0">
                 <a:solidFill>
                   <a:schemeClr val="tx1"/>
                 </a:solidFill>
               </a:rPr>
-              <a:t>Battery Defect Inspection v8 · 3,673장 → Geti 학습</a:t>
+              <a:t>v8 · 3,673장 · 학습</a:t>
             </a:r>
-            <a:endParaRPr lang="en-US" sz="1400" dirty="0"/>
+            <a:endParaRPr lang="en-US" sz="1500" dirty="0"/>
           </a:p>
         </p:txBody>
       </p:sp>
       <p:pic>
         <p:nvPicPr>
-          <p:cNvPr id="6" name="rf-1" descr="C:\Users\user\_se4nchoi\batteryvision\docs\submission\build\img\roboflow_v2.png">    </p:cNvPr>
+          <p:cNvPr id="7" name="rf-1" descr="C:\Users\user\_se4nchoi\batteryvision\docs\submission\build\img\roboflow_v2.png">    </p:cNvPr>
           <p:cNvPicPr>
             <a:picLocks noChangeAspect="1"/>
           </p:cNvPicPr>
@@ -16013,14 +16181,43 @@
       </p:pic>
       <p:sp>
         <p:nvSpPr>
-          <p:cNvPr id="7" name="rf-cap-1"/>
+          <p:cNvPr id="8" name="rf-tag-1-bg"/>
+          <p:cNvSpPr/>
+          <p:nvPr/>
+        </p:nvSpPr>
+        <p:spPr>
+          <a:xfrm>
+            <a:off x="6190488" y="5057570"/>
+            <a:ext cx="731520" cy="347472"/>
+          </a:xfrm>
+          <a:prstGeom prst="roundRect">
+            <a:avLst>
+              <a:gd name="adj" fmla="val 13158"/>
+            </a:avLst>
+          </a:prstGeom>
+          <a:solidFill>
+            <a:schemeClr val="accent3">
+              <a:alpha val="20000"/>
+            </a:schemeClr>
+          </a:solidFill>
+          <a:ln w="12700">
+            <a:solidFill>
+              <a:schemeClr val="accent3"/>
+            </a:solidFill>
+            <a:prstDash val="solid"/>
+          </a:ln>
+        </p:spPr>
+      </p:sp>
+      <p:sp>
+        <p:nvSpPr>
+          <p:cNvPr id="9" name="rf-tag-1"/>
           <p:cNvSpPr txBox="1"/>
           <p:nvPr/>
         </p:nvSpPr>
         <p:spPr>
           <a:xfrm>
-            <a:off x="6190488" y="5011850"/>
-            <a:ext cx="5440680" cy="320040"/>
+            <a:off x="6190488" y="5057570"/>
+            <a:ext cx="731520" cy="347472"/>
           </a:xfrm>
           <a:prstGeom prst="rect">
             <a:avLst/>
@@ -16029,67 +16226,200 @@
           <a:ln/>
         </p:spPr>
         <p:txBody>
-          <a:bodyPr wrap="square" lIns="0" tIns="0" rIns="0" bIns="0" rtlCol="0" anchor="t"/>
+          <a:bodyPr wrap="square" lIns="0" tIns="0" rIns="0" bIns="0" rtlCol="0" anchor="ctr"/>
+          <a:lstStyle/>
+          <a:p>
+            <a:pPr algn="ctr" indent="0" marL="0">
+              <a:buNone/>
+            </a:pPr>
+            <a:r>
+              <a:rPr lang="en-US" sz="1300" b="1" dirty="0">
+                <a:solidFill>
+                  <a:schemeClr val="accent3"/>
+                </a:solidFill>
+              </a:rPr>
+              <a:t>2차</a:t>
+            </a:r>
+            <a:endParaRPr lang="en-US" sz="1300" dirty="0"/>
+          </a:p>
+        </p:txBody>
+      </p:sp>
+      <p:sp>
+        <p:nvSpPr>
+          <p:cNvPr id="10" name="rf-cap-1"/>
+          <p:cNvSpPr txBox="1"/>
+          <p:nvPr/>
+        </p:nvSpPr>
+        <p:spPr>
+          <a:xfrm>
+            <a:off x="7059168" y="5057570"/>
+            <a:ext cx="4526280" cy="347472"/>
+          </a:xfrm>
+          <a:prstGeom prst="rect">
+            <a:avLst/>
+          </a:prstGeom>
+          <a:noFill/>
+          <a:ln/>
+        </p:spPr>
+        <p:txBody>
+          <a:bodyPr wrap="square" lIns="0" tIns="0" rIns="0" bIns="0" rtlCol="0" anchor="ctr"/>
           <a:lstStyle/>
           <a:p>
             <a:pPr indent="0" marL="0">
               <a:buNone/>
             </a:pPr>
             <a:r>
-              <a:rPr lang="en-US" sz="1400" b="1" dirty="0">
+              <a:rPr lang="en-US" sz="1500" dirty="0">
+                <a:solidFill>
+                  <a:schemeClr val="tx1"/>
+                </a:solidFill>
+              </a:rPr>
+              <a:t>v2 · 720장 · 테스트만</a:t>
+            </a:r>
+            <a:endParaRPr lang="en-US" sz="1500" dirty="0"/>
+          </a:p>
+        </p:txBody>
+      </p:sp>
+      <p:sp>
+        <p:nvSpPr>
+          <p:cNvPr id="11" name="dedup-bg"/>
+          <p:cNvSpPr/>
+          <p:nvPr/>
+        </p:nvSpPr>
+        <p:spPr>
+          <a:xfrm>
+            <a:off x="548640" y="5715000"/>
+            <a:ext cx="2743200" cy="457200"/>
+          </a:xfrm>
+          <a:prstGeom prst="roundRect">
+            <a:avLst>
+              <a:gd name="adj" fmla="val 10000"/>
+            </a:avLst>
+          </a:prstGeom>
+          <a:solidFill>
+            <a:schemeClr val="accent3">
+              <a:alpha val="20000"/>
+            </a:schemeClr>
+          </a:solidFill>
+          <a:ln w="12700">
+            <a:solidFill>
+              <a:schemeClr val="accent3"/>
+            </a:solidFill>
+            <a:prstDash val="solid"/>
+          </a:ln>
+        </p:spPr>
+      </p:sp>
+      <p:sp>
+        <p:nvSpPr>
+          <p:cNvPr id="12" name="dedup"/>
+          <p:cNvSpPr txBox="1"/>
+          <p:nvPr/>
+        </p:nvSpPr>
+        <p:spPr>
+          <a:xfrm>
+            <a:off x="548640" y="5715000"/>
+            <a:ext cx="2743200" cy="457200"/>
+          </a:xfrm>
+          <a:prstGeom prst="rect">
+            <a:avLst/>
+          </a:prstGeom>
+          <a:noFill/>
+          <a:ln/>
+        </p:spPr>
+        <p:txBody>
+          <a:bodyPr wrap="square" lIns="0" tIns="0" rIns="0" bIns="0" rtlCol="0" anchor="ctr"/>
+          <a:lstStyle/>
+          <a:p>
+            <a:pPr algn="ctr" indent="0" marL="0">
+              <a:buNone/>
+            </a:pPr>
+            <a:r>
+              <a:rPr lang="en-US" sz="1300" b="1" dirty="0">
                 <a:solidFill>
                   <a:schemeClr val="accent3"/>
                 </a:solidFill>
               </a:rPr>
-              <a:t>2차  </a:t>
+              <a:t>중복 140장 제거</a:t>
             </a:r>
-            <a:pPr indent="0" marL="0">
+            <a:endParaRPr lang="en-US" sz="1300" dirty="0"/>
+          </a:p>
+        </p:txBody>
+      </p:sp>
+      <p:sp>
+        <p:nvSpPr>
+          <p:cNvPr id="13" name="dedup-arrow"/>
+          <p:cNvSpPr txBox="1"/>
+          <p:nvPr/>
+        </p:nvSpPr>
+        <p:spPr>
+          <a:xfrm>
+            <a:off x="3337560" y="5715000"/>
+            <a:ext cx="457200" cy="457200"/>
+          </a:xfrm>
+          <a:prstGeom prst="rect">
+            <a:avLst/>
+          </a:prstGeom>
+          <a:noFill/>
+          <a:ln/>
+        </p:spPr>
+        <p:txBody>
+          <a:bodyPr wrap="square" lIns="0" tIns="0" rIns="0" bIns="0" rtlCol="0" anchor="ctr"/>
+          <a:lstStyle/>
+          <a:p>
+            <a:pPr algn="ctr" indent="0" marL="0">
               <a:buNone/>
             </a:pPr>
             <a:r>
-              <a:rPr lang="en-US" sz="1400" dirty="0">
+              <a:rPr lang="en-US" sz="2000" b="1" dirty="0">
                 <a:solidFill>
-                  <a:schemeClr val="tx1"/>
+                  <a:schemeClr val="tx2"/>
                 </a:solidFill>
               </a:rPr>
-              <a:t>Battery Defect Detection v2 · 720장 → 테스트만</a:t>
+              <a:t>→</a:t>
             </a:r>
-            <a:endParaRPr lang="en-US" sz="1400" dirty="0"/>
+            <a:endParaRPr lang="en-US" sz="2000" dirty="0"/>
           </a:p>
         </p:txBody>
       </p:sp>
       <p:sp>
         <p:nvSpPr>
-          <p:cNvPr id="8" name="overlap-card"/>
+          <p:cNvPr id="14" name="clean45-bg"/>
           <p:cNvSpPr/>
           <p:nvPr/>
         </p:nvSpPr>
         <p:spPr>
           <a:xfrm>
-            <a:off x="548640" y="5532120"/>
-            <a:ext cx="11094415" cy="685800"/>
+            <a:off x="3840480" y="5715000"/>
+            <a:ext cx="3840480" cy="457200"/>
           </a:xfrm>
           <a:prstGeom prst="roundRect">
             <a:avLst>
-              <a:gd name="adj" fmla="val 10667"/>
+              <a:gd name="adj" fmla="val 10000"/>
             </a:avLst>
           </a:prstGeom>
           <a:solidFill>
-            <a:schemeClr val="bg2"/>
+            <a:schemeClr val="accent1">
+              <a:alpha val="20000"/>
+            </a:schemeClr>
           </a:solidFill>
-          <a:ln/>
-        </p:spPr>
-      </p:sp>
-      <p:sp>
-        <p:nvSpPr>
-          <p:cNvPr id="9" name="overlap"/>
+          <a:ln w="12700">
+            <a:solidFill>
+              <a:schemeClr val="accent1"/>
+            </a:solidFill>
+            <a:prstDash val="solid"/>
+          </a:ln>
+        </p:spPr>
+      </p:sp>
+      <p:sp>
+        <p:nvSpPr>
+          <p:cNvPr id="15" name="clean45"/>
           <p:cNvSpPr txBox="1"/>
           <p:nvPr/>
         </p:nvSpPr>
         <p:spPr>
           <a:xfrm>
-            <a:off x="822960" y="5532120"/>
-            <a:ext cx="10545775" cy="685800"/>
+            <a:off x="3840480" y="5715000"/>
+            <a:ext cx="3840480" cy="457200"/>
           </a:xfrm>
           <a:prstGeom prst="rect">
             <a:avLst/>
@@ -16101,29 +16431,18 @@
           <a:bodyPr wrap="square" lIns="0" tIns="0" rIns="0" bIns="0" rtlCol="0" anchor="ctr"/>
           <a:lstStyle/>
           <a:p>
-            <a:pPr indent="0" marL="0">
+            <a:pPr algn="ctr" indent="0" marL="0">
               <a:buNone/>
             </a:pPr>
             <a:r>
-              <a:rPr lang="en-US" sz="1400" b="1" dirty="0">
+              <a:rPr lang="en-US" sz="1300" b="1" dirty="0">
                 <a:solidFill>
-                  <a:schemeClr val="accent3"/>
+                  <a:schemeClr val="accent1"/>
                 </a:solidFill>
               </a:rPr>
-              <a:t>1차와 겹치는 140장 제거  </a:t>
+              <a:t>45장 (결함 30 · 정상 15)</a:t>
             </a:r>
-            <a:pPr indent="0" marL="0">
-              <a:buNone/>
-            </a:pPr>
-            <a:r>
-              <a:rPr lang="en-US" sz="1400" dirty="0">
-                <a:solidFill>
-                  <a:schemeClr val="tx1"/>
-                </a:solidFill>
-              </a:rPr>
-              <a:t>(같은 파일명 123 + 같은 픽셀 17) → 증강 안 된 45장 사용 (결함 30 · 정상 15)</a:t>
-            </a:r>
-            <a:endParaRPr lang="en-US" sz="1400" dirty="0"/>
+            <a:endParaRPr lang="en-US" sz="1300" dirty="0"/>
           </a:p>
         </p:txBody>
       </p:sp>
@@ -16237,51 +16556,13 @@
       </p:sp>
       <p:sp>
         <p:nvSpPr>
-          <p:cNvPr id="3" name="Text 0"/>
+          <p:cNvPr id="3" name="holdout-card"/>
           <p:cNvSpPr/>
-          <p:nvPr>
-            <p:ph idx="101" type="body" hasCustomPrompt="1"/>
-          </p:nvPr>
-        </p:nvSpPr>
-        <p:spPr>
-          <a:xfrm>
-            <a:off x="548640" y="1005840"/>
-            <a:ext cx="11094415" cy="411480"/>
-          </a:xfrm>
-          <a:prstGeom prst="rect">
-            <a:avLst/>
-          </a:prstGeom>
-          <a:noFill/>
-          <a:ln/>
-        </p:spPr>
-        <p:txBody>
-          <a:bodyPr wrap="square" lIns="0" tIns="0" rIns="0" bIns="0" rtlCol="0" anchor="ctr"/>
-          <a:lstStyle/>
-          <a:p>
-            <a:pPr algn="l" indent="0" marL="0">
-              <a:buNone/>
-            </a:pPr>
-            <a:r>
-              <a:rPr lang="en-US" sz="1500" dirty="0">
-                <a:solidFill>
-                  <a:schemeClr val="tx2"/>
-                </a:solidFill>
-              </a:rPr>
-              <a:t>처음 보는 사진에선 결함 셀 절반 이상 놓침 · 기준값 조정으로도 해결 안 됨</a:t>
-            </a:r>
-            <a:endParaRPr lang="en-US" sz="1500" dirty="0"/>
-          </a:p>
-        </p:txBody>
-      </p:sp>
-      <p:sp>
-        <p:nvSpPr>
-          <p:cNvPr id="4" name="holdout-card"/>
-          <p:cNvSpPr/>
-          <p:nvPr/>
-        </p:nvSpPr>
-        <p:spPr>
-          <a:xfrm>
-            <a:off x="548640" y="1645920"/>
+          <p:nvPr/>
+        </p:nvSpPr>
+        <p:spPr>
+          <a:xfrm>
+            <a:off x="548640" y="1600200"/>
             <a:ext cx="6035040" cy="2514600"/>
           </a:xfrm>
           <a:prstGeom prst="roundRect">
@@ -16297,13 +16578,13 @@
       </p:sp>
       <p:sp>
         <p:nvSpPr>
-          <p:cNvPr id="5" name="ho-h"/>
+          <p:cNvPr id="4" name="ho-h"/>
           <p:cNvSpPr txBox="1"/>
           <p:nvPr/>
         </p:nvSpPr>
         <p:spPr>
           <a:xfrm>
-            <a:off x="822960" y="1755648"/>
+            <a:off x="822960" y="1709928"/>
             <a:ext cx="5486400" cy="320040"/>
           </a:xfrm>
           <a:prstGeom prst="rect">
@@ -16325,7 +16606,7 @@
                   <a:schemeClr val="tx1"/>
                 </a:solidFill>
               </a:rPr>
-              <a:t>결함 셀 검출률 (검토 또는 불합격)</a:t>
+              <a:t>결함 셀 검출률</a:t>
             </a:r>
             <a:endParaRPr lang="en-US" sz="1600" dirty="0"/>
           </a:p>
@@ -16333,13 +16614,13 @@
       </p:sp>
       <p:sp>
         <p:nvSpPr>
-          <p:cNvPr id="6" name="ho-c1"/>
+          <p:cNvPr id="5" name="ho-c1"/>
           <p:cNvSpPr txBox="1"/>
           <p:nvPr/>
         </p:nvSpPr>
         <p:spPr>
           <a:xfrm>
-            <a:off x="2926080" y="2103120"/>
+            <a:off x="2926080" y="2057400"/>
             <a:ext cx="1463040" cy="274320"/>
           </a:xfrm>
           <a:prstGeom prst="rect">
@@ -16361,7 +16642,7 @@
                   <a:schemeClr val="tx2"/>
                 </a:solidFill>
               </a:rPr>
-              <a:t>1차 테스트</a:t>
+              <a:t>1차</a:t>
             </a:r>
             <a:endParaRPr lang="en-US" sz="1200" dirty="0"/>
           </a:p>
@@ -16369,13 +16650,13 @@
       </p:sp>
       <p:sp>
         <p:nvSpPr>
-          <p:cNvPr id="7" name="ho-c2"/>
+          <p:cNvPr id="6" name="ho-c2"/>
           <p:cNvSpPr txBox="1"/>
           <p:nvPr/>
         </p:nvSpPr>
         <p:spPr>
           <a:xfrm>
-            <a:off x="4754880" y="2103120"/>
+            <a:off x="4754880" y="2057400"/>
             <a:ext cx="1463040" cy="274320"/>
           </a:xfrm>
           <a:prstGeom prst="rect">
@@ -16397,7 +16678,7 @@
                   <a:schemeClr val="tx2"/>
                 </a:solidFill>
               </a:rPr>
-              <a:t>2차 세트</a:t>
+              <a:t>2차</a:t>
             </a:r>
             <a:endParaRPr lang="en-US" sz="1200" dirty="0"/>
           </a:p>
@@ -16405,13 +16686,13 @@
       </p:sp>
       <p:sp>
         <p:nvSpPr>
-          <p:cNvPr id="8" name="ho-dot-0"/>
+          <p:cNvPr id="7" name="ho-dot-0"/>
           <p:cNvSpPr/>
           <p:nvPr/>
         </p:nvSpPr>
         <p:spPr>
           <a:xfrm>
-            <a:off x="822960" y="2596896"/>
+            <a:off x="822960" y="2551176"/>
             <a:ext cx="146304" cy="146304"/>
           </a:xfrm>
           <a:prstGeom prst="ellipse">
@@ -16425,13 +16706,13 @@
       </p:sp>
       <p:sp>
         <p:nvSpPr>
-          <p:cNvPr id="9" name="ho-n-0"/>
+          <p:cNvPr id="8" name="ho-n-0"/>
           <p:cNvSpPr txBox="1"/>
           <p:nvPr/>
         </p:nvSpPr>
         <p:spPr>
           <a:xfrm>
-            <a:off x="1060704" y="2423160"/>
+            <a:off x="1060704" y="2377440"/>
             <a:ext cx="1828800" cy="502920"/>
           </a:xfrm>
           <a:prstGeom prst="rect">
@@ -16461,13 +16742,13 @@
       </p:sp>
       <p:sp>
         <p:nvSpPr>
-          <p:cNvPr id="10" name="ho-a-0"/>
+          <p:cNvPr id="9" name="ho-a-0"/>
           <p:cNvSpPr txBox="1"/>
           <p:nvPr/>
         </p:nvSpPr>
         <p:spPr>
           <a:xfrm>
-            <a:off x="2926080" y="2423160"/>
+            <a:off x="2926080" y="2377440"/>
             <a:ext cx="1463040" cy="502920"/>
           </a:xfrm>
           <a:prstGeom prst="rect">
@@ -16497,13 +16778,13 @@
       </p:sp>
       <p:sp>
         <p:nvSpPr>
-          <p:cNvPr id="11" name="ho-b-0"/>
+          <p:cNvPr id="10" name="ho-b-0"/>
           <p:cNvSpPr txBox="1"/>
           <p:nvPr/>
         </p:nvSpPr>
         <p:spPr>
           <a:xfrm>
-            <a:off x="4754880" y="2423160"/>
+            <a:off x="4754880" y="2377440"/>
             <a:ext cx="1463040" cy="502920"/>
           </a:xfrm>
           <a:prstGeom prst="rect">
@@ -16533,13 +16814,13 @@
       </p:sp>
       <p:sp>
         <p:nvSpPr>
-          <p:cNvPr id="12" name="ho-dot-1"/>
+          <p:cNvPr id="11" name="ho-dot-1"/>
           <p:cNvSpPr/>
           <p:nvPr/>
         </p:nvSpPr>
         <p:spPr>
           <a:xfrm>
-            <a:off x="822960" y="3145536"/>
+            <a:off x="822960" y="3099816"/>
             <a:ext cx="146304" cy="146304"/>
           </a:xfrm>
           <a:prstGeom prst="ellipse">
@@ -16553,13 +16834,13 @@
       </p:sp>
       <p:sp>
         <p:nvSpPr>
-          <p:cNvPr id="13" name="ho-n-1"/>
+          <p:cNvPr id="12" name="ho-n-1"/>
           <p:cNvSpPr txBox="1"/>
           <p:nvPr/>
         </p:nvSpPr>
         <p:spPr>
           <a:xfrm>
-            <a:off x="1060704" y="2971800"/>
+            <a:off x="1060704" y="2926080"/>
             <a:ext cx="1828800" cy="502920"/>
           </a:xfrm>
           <a:prstGeom prst="rect">
@@ -16589,13 +16870,13 @@
       </p:sp>
       <p:sp>
         <p:nvSpPr>
-          <p:cNvPr id="14" name="ho-a-1"/>
+          <p:cNvPr id="13" name="ho-a-1"/>
           <p:cNvSpPr txBox="1"/>
           <p:nvPr/>
         </p:nvSpPr>
         <p:spPr>
           <a:xfrm>
-            <a:off x="2926080" y="2971800"/>
+            <a:off x="2926080" y="2926080"/>
             <a:ext cx="1463040" cy="502920"/>
           </a:xfrm>
           <a:prstGeom prst="rect">
@@ -16625,13 +16906,13 @@
       </p:sp>
       <p:sp>
         <p:nvSpPr>
-          <p:cNvPr id="15" name="ho-b-1"/>
+          <p:cNvPr id="14" name="ho-b-1"/>
           <p:cNvSpPr txBox="1"/>
           <p:nvPr/>
         </p:nvSpPr>
         <p:spPr>
           <a:xfrm>
-            <a:off x="4754880" y="2971800"/>
+            <a:off x="4754880" y="2926080"/>
             <a:ext cx="1463040" cy="502920"/>
           </a:xfrm>
           <a:prstGeom prst="rect">
@@ -16661,13 +16942,13 @@
       </p:sp>
       <p:sp>
         <p:nvSpPr>
-          <p:cNvPr id="16" name="ho-dot-2"/>
+          <p:cNvPr id="15" name="ho-dot-2"/>
           <p:cNvSpPr/>
           <p:nvPr/>
         </p:nvSpPr>
         <p:spPr>
           <a:xfrm>
-            <a:off x="822960" y="3694176"/>
+            <a:off x="822960" y="3648456"/>
             <a:ext cx="146304" cy="146304"/>
           </a:xfrm>
           <a:prstGeom prst="ellipse">
@@ -16681,13 +16962,13 @@
       </p:sp>
       <p:sp>
         <p:nvSpPr>
-          <p:cNvPr id="17" name="ho-n-2"/>
+          <p:cNvPr id="16" name="ho-n-2"/>
           <p:cNvSpPr txBox="1"/>
           <p:nvPr/>
         </p:nvSpPr>
         <p:spPr>
           <a:xfrm>
-            <a:off x="1060704" y="3520440"/>
+            <a:off x="1060704" y="3474720"/>
             <a:ext cx="1828800" cy="502920"/>
           </a:xfrm>
           <a:prstGeom prst="rect">
@@ -16717,13 +16998,13 @@
       </p:sp>
       <p:sp>
         <p:nvSpPr>
-          <p:cNvPr id="18" name="ho-a-2"/>
+          <p:cNvPr id="17" name="ho-a-2"/>
           <p:cNvSpPr txBox="1"/>
           <p:nvPr/>
         </p:nvSpPr>
         <p:spPr>
           <a:xfrm>
-            <a:off x="2926080" y="3520440"/>
+            <a:off x="2926080" y="3474720"/>
             <a:ext cx="1463040" cy="502920"/>
           </a:xfrm>
           <a:prstGeom prst="rect">
@@ -16753,13 +17034,13 @@
       </p:sp>
       <p:sp>
         <p:nvSpPr>
-          <p:cNvPr id="19" name="ho-b-2"/>
+          <p:cNvPr id="18" name="ho-b-2"/>
           <p:cNvSpPr txBox="1"/>
           <p:nvPr/>
         </p:nvSpPr>
         <p:spPr>
           <a:xfrm>
-            <a:off x="4754880" y="3520440"/>
+            <a:off x="4754880" y="3474720"/>
             <a:ext cx="1463040" cy="502920"/>
           </a:xfrm>
           <a:prstGeom prst="rect">
@@ -16789,7 +17070,7 @@
       </p:sp>
       <p:pic>
         <p:nvPicPr>
-          <p:cNvPr id="20" name="miss-img" descr="C:\Users\user\_se4nchoi\batteryvision\docs\submission\build\img\holdout_miss.jpg">    </p:cNvPr>
+          <p:cNvPr id="19" name="miss-img" descr="C:\Users\user\_se4nchoi\batteryvision\docs\submission\build\img\holdout_miss.jpg">    </p:cNvPr>
           <p:cNvPicPr>
             <a:picLocks noChangeAspect="1"/>
           </p:cNvPicPr>
@@ -16803,8 +17084,8 @@
         </p:blipFill>
         <p:spPr>
           <a:xfrm>
-            <a:off x="548640" y="4343400"/>
-            <a:ext cx="1874520" cy="1874520"/>
+            <a:off x="548640" y="4297680"/>
+            <a:ext cx="1920240" cy="1920240"/>
           </a:xfrm>
           <a:prstGeom prst="rect">
             <a:avLst/>
@@ -16813,14 +17094,14 @@
       </p:pic>
       <p:sp>
         <p:nvSpPr>
-          <p:cNvPr id="21" name="miss-cap"/>
+          <p:cNvPr id="20" name="miss-cap"/>
           <p:cNvSpPr txBox="1"/>
           <p:nvPr/>
         </p:nvSpPr>
         <p:spPr>
           <a:xfrm>
-            <a:off x="2651760" y="4389120"/>
-            <a:ext cx="3931920" cy="1783080"/>
+            <a:off x="2697480" y="4297680"/>
+            <a:ext cx="3886200" cy="1920240"/>
           </a:xfrm>
           <a:prstGeom prst="rect">
             <a:avLst/>
@@ -16831,23 +17112,6 @@
         <p:txBody>
           <a:bodyPr wrap="square" lIns="0" tIns="0" rIns="0" bIns="0" rtlCol="0" anchor="ctr"/>
           <a:lstStyle/>
-          <a:p>
-            <a:pPr indent="0" marL="0">
-              <a:spcAft>
-                <a:spcPts val="600"/>
-              </a:spcAft>
-              <a:buNone/>
-            </a:pPr>
-            <a:r>
-              <a:rPr lang="en-US" sz="1400" b="1" dirty="0">
-                <a:solidFill>
-                  <a:schemeClr val="tx1"/>
-                </a:solidFill>
-              </a:rPr>
-              <a:t>놓친 예: scratch · ATSS 최고 점수 0.21</a:t>
-            </a:r>
-            <a:endParaRPr lang="en-US" sz="1400" dirty="0"/>
-          </a:p>
           <a:p>
             <a:pPr marL="342900" indent="-342900">
               <a:spcAft>
@@ -16857,14 +17121,14 @@
               <a:buChar char="•"/>
             </a:pPr>
             <a:r>
-              <a:rPr lang="en-US" sz="1400" b="1" dirty="0">
+              <a:rPr lang="en-US" sz="1500" dirty="0">
                 <a:solidFill>
-                  <a:schemeClr val="accent2"/>
+                  <a:schemeClr val="tx1"/>
                 </a:solidFill>
               </a:rPr>
-              <a:t>2차 crack 30×26px로 작아짐 → 검출 1/15</a:t>
+              <a:t>놓친 scratch (0.21)</a:t>
             </a:r>
-            <a:endParaRPr lang="en-US" sz="1400" dirty="0"/>
+            <a:endParaRPr lang="en-US" sz="1500" dirty="0"/>
           </a:p>
           <a:p>
             <a:pPr marL="342900" indent="-342900">
@@ -16875,14 +17139,14 @@
               <a:buChar char="•"/>
             </a:pPr>
             <a:r>
-              <a:rPr lang="en-US" sz="1400" dirty="0">
+              <a:rPr lang="en-US" sz="1500" b="1" dirty="0">
                 <a:solidFill>
-                  <a:schemeClr val="tx1"/>
+                  <a:schemeClr val="accent2"/>
                 </a:solidFill>
               </a:rPr>
-              <a:t>클래스 착각 0건 · 정상 불합격 0건</a:t>
+              <a:t>crack 30×26px → 1/15</a:t>
             </a:r>
-            <a:endParaRPr lang="en-US" sz="1400" dirty="0"/>
+            <a:endParaRPr lang="en-US" sz="1500" dirty="0"/>
           </a:p>
           <a:p>
             <a:pPr marL="342900" indent="-342900">
@@ -16893,26 +17157,44 @@
               <a:buChar char="•"/>
             </a:pPr>
             <a:r>
-              <a:rPr lang="en-US" sz="1400" dirty="0">
+              <a:rPr lang="en-US" sz="1500" dirty="0">
                 <a:solidFill>
-                  <a:schemeClr val="accent3"/>
+                  <a:schemeClr val="tx1"/>
                 </a:solidFill>
               </a:rPr>
-              <a:t>1차: 학습 사진 포함 가능 + 같은 촬영 환경</a:t>
+              <a:t>클래스 착각 0</a:t>
             </a:r>
-            <a:endParaRPr lang="en-US" sz="1400" dirty="0"/>
+            <a:endParaRPr lang="en-US" sz="1500" dirty="0"/>
+          </a:p>
+          <a:p>
+            <a:pPr marL="342900" indent="-342900">
+              <a:spcAft>
+                <a:spcPts val="600"/>
+              </a:spcAft>
+              <a:buSzPct val="100000"/>
+              <a:buChar char="•"/>
+            </a:pPr>
+            <a:r>
+              <a:rPr lang="en-US" sz="1500" dirty="0">
+                <a:solidFill>
+                  <a:schemeClr val="tx1"/>
+                </a:solidFill>
+              </a:rPr>
+              <a:t>정상 불합격 0</a:t>
+            </a:r>
+            <a:endParaRPr lang="en-US" sz="1500" dirty="0"/>
           </a:p>
         </p:txBody>
       </p:sp>
       <p:sp>
         <p:nvSpPr>
-          <p:cNvPr id="22" name="th-h"/>
+          <p:cNvPr id="21" name="th-h"/>
           <p:cNvSpPr txBox="1"/>
           <p:nvPr/>
         </p:nvSpPr>
         <p:spPr>
           <a:xfrm>
-            <a:off x="6812280" y="1645920"/>
+            <a:off x="6812280" y="1600200"/>
             <a:ext cx="4846320" cy="320040"/>
           </a:xfrm>
           <a:prstGeom prst="rect">
@@ -16934,7 +17216,7 @@
                   <a:schemeClr val="tx1"/>
                 </a:solidFill>
               </a:rPr>
-              <a:t>기준값을 바꾸면? (2차 세트)</a:t>
+              <a:t>기준값을 바꾸면?</a:t>
             </a:r>
             <a:endParaRPr lang="en-US" sz="1600" dirty="0"/>
           </a:p>
@@ -16955,7 +17237,7 @@
           </p:nvPr>
         </p:nvGraphicFramePr>
         <p:xfrm>
-          <a:off x="6812280" y="2057400"/>
+          <a:off x="6812280" y="2011680"/>
           <a:ext cx="4828032" cy="914400"/>
         </p:xfrm>
         <a:graphic>
@@ -16968,7 +17250,7 @@
                 <a:gridCol w="1133856"/>
                 <a:gridCol w="1225296"/>
               </a:tblGrid>
-              <a:tr h="374904">
+              <a:tr h="384048">
                 <a:tc>
                   <a:txBody>
                     <a:bodyPr/>
@@ -17242,7 +17524,7 @@
                   </a:tcPr>
                 </a:tc>
               </a:tr>
-              <a:tr h="374904">
+              <a:tr h="384048">
                 <a:tc>
                   <a:txBody>
                     <a:bodyPr/>
@@ -17516,7 +17798,7 @@
                   </a:tcPr>
                 </a:tc>
               </a:tr>
-              <a:tr h="374904">
+              <a:tr h="384048">
                 <a:tc>
                   <a:txBody>
                     <a:bodyPr/>
@@ -17790,7 +18072,7 @@
                   </a:tcPr>
                 </a:tc>
               </a:tr>
-              <a:tr h="374904">
+              <a:tr h="384048">
                 <a:tc>
                   <a:txBody>
                     <a:bodyPr/>
@@ -18064,7 +18346,7 @@
                   </a:tcPr>
                 </a:tc>
               </a:tr>
-              <a:tr h="374904">
+              <a:tr h="384048">
                 <a:tc>
                   <a:txBody>
                     <a:bodyPr/>
@@ -18338,7 +18620,7 @@
                   </a:tcPr>
                 </a:tc>
               </a:tr>
-              <a:tr h="374904">
+              <a:tr h="384048">
                 <a:tc>
                   <a:txBody>
                     <a:bodyPr/>
@@ -18618,14 +18900,14 @@
       </p:graphicFrame>
       <p:sp>
         <p:nvSpPr>
-          <p:cNvPr id="24" name="th-cap"/>
+          <p:cNvPr id="23" name="th-cap"/>
           <p:cNvSpPr txBox="1"/>
           <p:nvPr/>
         </p:nvSpPr>
         <p:spPr>
           <a:xfrm>
-            <a:off x="6812280" y="4434840"/>
-            <a:ext cx="4828032" cy="1783080"/>
+            <a:off x="6812280" y="4526280"/>
+            <a:ext cx="4828032" cy="1463040"/>
           </a:xfrm>
           <a:prstGeom prst="rect">
             <a:avLst/>
@@ -18644,13 +18926,16 @@
               <a:buNone/>
             </a:pPr>
             <a:r>
-              <a:rPr lang="en-US" sz="1400" b="1" dirty="0">
+              <a:rPr lang="en-US" sz="1600" b="1" dirty="0">
                 <a:solidFill>
-                  <a:schemeClr val="accent4"/>
+                  <a:schemeClr val="accent1"/>
                 </a:solidFill>
               </a:rPr>
-              <a:t>ATSS  </a:t>
+              <a:t>→ 모델별로 다른 기준값 적용</a:t>
             </a:r>
+            <a:endParaRPr lang="en-US" sz="1600" dirty="0"/>
+          </a:p>
+          <a:p>
             <a:pPr indent="0" marL="0">
               <a:spcAft>
                 <a:spcPts val="600"/>
@@ -18658,14 +18943,14 @@
               <a:buNone/>
             </a:pPr>
             <a:r>
-              <a:rPr lang="en-US" sz="1400" dirty="0">
+              <a:rPr lang="en-US" sz="1600" b="1" dirty="0">
                 <a:solidFill>
-                  <a:schemeClr val="tx1"/>
+                  <a:schemeClr val="accent1"/>
                 </a:solidFill>
               </a:rPr>
-              <a:t>검출 ↑ = 정상 오검출 ↑</a:t>
+              <a:t>→ 결과치 불충분</a:t>
             </a:r>
-            <a:endParaRPr lang="en-US" sz="1400" dirty="0"/>
+            <a:endParaRPr lang="en-US" sz="1600" dirty="0"/>
           </a:p>
           <a:p>
             <a:pPr indent="0" marL="0">
@@ -18675,79 +18960,14 @@
               <a:buNone/>
             </a:pPr>
             <a:r>
-              <a:rPr lang="en-US" sz="1400" b="1" dirty="0">
-                <a:solidFill>
-                  <a:schemeClr val="accent5"/>
-                </a:solidFill>
-              </a:rPr>
-              <a:t>YOLOX-S  </a:t>
-            </a:r>
-            <a:pPr indent="0" marL="0">
-              <a:spcAft>
-                <a:spcPts val="600"/>
-              </a:spcAft>
-              <a:buNone/>
-            </a:pPr>
-            <a:r>
-              <a:rPr lang="en-US" sz="1400" dirty="0">
-                <a:solidFill>
-                  <a:schemeClr val="tx1"/>
-                </a:solidFill>
-              </a:rPr>
-              <a:t>순위는 정확 (mAP@50 0.93), 점수만 낮음</a:t>
-            </a:r>
-            <a:endParaRPr lang="en-US" sz="1400" dirty="0"/>
-          </a:p>
-          <a:p>
-            <a:pPr indent="0" marL="0">
-              <a:spcAft>
-                <a:spcPts val="600"/>
-              </a:spcAft>
-              <a:buNone/>
-            </a:pPr>
-            <a:r>
-              <a:rPr lang="en-US" sz="1400" b="1" dirty="0">
-                <a:solidFill>
-                  <a:schemeClr val="accent1"/>
-                </a:solidFill>
-              </a:rPr>
-              <a:t>→ 모델별로 다른 기준값 적용</a:t>
-            </a:r>
-            <a:endParaRPr lang="en-US" sz="1400" dirty="0"/>
-          </a:p>
-          <a:p>
-            <a:pPr indent="0" marL="0">
-              <a:spcAft>
-                <a:spcPts val="600"/>
-              </a:spcAft>
-              <a:buNone/>
-            </a:pPr>
-            <a:r>
-              <a:rPr lang="en-US" sz="1400" b="1" dirty="0">
-                <a:solidFill>
-                  <a:schemeClr val="accent1"/>
-                </a:solidFill>
-              </a:rPr>
-              <a:t>→ 결과치 불충분</a:t>
-            </a:r>
-            <a:endParaRPr lang="en-US" sz="1400" dirty="0"/>
-          </a:p>
-          <a:p>
-            <a:pPr indent="0" marL="0">
-              <a:spcAft>
-                <a:spcPts val="600"/>
-              </a:spcAft>
-              <a:buNone/>
-            </a:pPr>
-            <a:r>
-              <a:rPr lang="en-US" sz="1400" b="1" dirty="0">
+              <a:rPr lang="en-US" sz="1600" b="1" dirty="0">
                 <a:solidFill>
                   <a:schemeClr val="accent1"/>
                 </a:solidFill>
               </a:rPr>
               <a:t>→ 재학습</a:t>
             </a:r>
-            <a:endParaRPr lang="en-US" sz="1400" dirty="0"/>
+            <a:endParaRPr lang="en-US" sz="1600" dirty="0"/>
           </a:p>
         </p:txBody>
       </p:sp>

--- a/docs/submission/BatteryVision_발표.pptx
+++ b/docs/submission/BatteryVision_발표.pptx
@@ -18,9 +18,10 @@
     <p:sldId id="266" r:id="rId12"/>
     <p:sldId id="267" r:id="rId13"/>
     <p:sldId id="268" r:id="rId14"/>
+    <p:sldId id="269" r:id="rId15"/>
   </p:sldIdLst>
   <p:notesMasterIdLst>
-    <p:notesMasterId r:id="rId15"/>
+    <p:notesMasterId r:id="rId16"/>
   </p:notesMasterIdLst>
   <p:sldSz cx="12192000" cy="6858000"/>
   <p:notesSz cx="6858000" cy="12192000"/>
@@ -119,37 +120,38 @@
   <p:extLst>
     <p:ext uri="{521415D9-36F7-43E2-AB2F-B90AF26B5E84}">
       <p14:sectionLst xmlns:p14="http://schemas.microsoft.com/office/powerpoint/2010/main">
-        <p14:section name="도입" id="{bfb26d72-edf6-947c-6c58-789fe32f95b6}">
+        <p14:section name="도입" id="{d8ecb952-8220-10e2-81eb-6ca0ff3302ea}">
           <p14:sldIdLst>
             <p14:sldId id="256"/>
             <p14:sldId id="257"/>
           </p14:sldIdLst>
         </p14:section>
-        <p14:section name="실험" id="{1e411061-2a11-2c68-c5d2-4b799c9d8f57}">
+        <p14:section name="실험" id="{96646225-e54a-169f-7a6e-9d3c33045200}">
           <p14:sldIdLst>
             <p14:sldId id="258"/>
             <p14:sldId id="259"/>
             <p14:sldId id="260"/>
             <p14:sldId id="261"/>
-          </p14:sldIdLst>
-        </p14:section>
-        <p14:section name="최적화" id="{ae30c18d-8311-8433-293e-46153f38f812}">
-          <p14:sldIdLst>
             <p14:sldId id="262"/>
           </p14:sldIdLst>
         </p14:section>
-        <p14:section name="검증" id="{d9e4372e-c0c1-8c1b-d1b6-045d2d7e3241}">
+        <p14:section name="최적화" id="{d01d88a4-34b5-a800-7546-4f220ae25a27}">
           <p14:sldIdLst>
             <p14:sldId id="263"/>
-            <p14:sldId id="264"/>
           </p14:sldIdLst>
         </p14:section>
-        <p14:section name="정리" id="{5eb1d6ce-cb88-6259-2cee-8ac918b9ad14}">
+        <p14:section name="검증" id="{3b817888-2a80-ba55-8f07-7c1e88477df0}">
           <p14:sldIdLst>
+            <p14:sldId id="264"/>
             <p14:sldId id="265"/>
+          </p14:sldIdLst>
+        </p14:section>
+        <p14:section name="정리" id="{3d4edc32-4a98-6a16-1a89-c5f554980eba}">
+          <p14:sldIdLst>
             <p14:sldId id="266"/>
             <p14:sldId id="267"/>
             <p14:sldId id="268"/>
+            <p14:sldId id="269"/>
           </p14:sldIdLst>
         </p14:section>
       </p14:sectionLst>
@@ -1383,7 +1385,7 @@
           <a:p>
             <a:r>
               <a:rPr lang="en-US" dirty="0"/>
-              <a:t>앞에서 본 결과들의 원인을 한 장에 모았습니다. 오른쪽 근거 칸은 얼마나 확실한지입니다. 확인은 데이터로 직접 확인한 것, 추정은 데이터와 맞지만 따로 검증하지 않은 것, 가설은 아직 검증하지 못한 것입니다. 가장 확실한 원인은 세 가지입니다. scratch는 반사나 나무결과 비슷한 가는 선이라 어렵고, 93%는 테스트 사진까지 학습에 들어가 부풀려진 수치이고, 2차 세트에서 떨어진 건 crack이 절반 크기로 작아졌기 때문입니다. ATSS가 왜 가장 좋은지는 추정 단계입니다. 32픽셀 미만의 작은 결함에서 격차가 가장 커서 입력 해상도 차이와 맞지만, 다시 학습해서 확인하지는 않았습니다.</a:t>
+              <a:t>같은 업로더가 올린 다른 세트에서, 학습에 한 번도 쓰지 않은 45장으로 제 앱에서 다시 테스트했습니다. 1차 테스트에서 결함 셀을 거의 다 잡던 모델이 ATSS 47%, YOLOX-S 3%까지 떨어집니다. 결함을 착각한 게 아니라 점수가 낮아서 통과시킨 것이고, 정상 셀을 불합격시킨 경우는 없었습니다. 가장 큰 원인은 crack입니다. 2차 세트의 crack은 약 30×26픽셀로 1차의 절반 면적이고, ATSS는 15개 중 1개만 잡았습니다. 학습 때 본 크기의 crack만 쉬웠던 겁니다. 기준값을 바꿔 보면, ATSS는 0.15까지 낮추면 결함 97%를 잡지만 정상 셀도 87%가 걸립니다. YOLOX-S는 다릅니다. 2차 세트 mAP@50이 0.93으로 결함을 정상보다 높게 순위 매기는 건 정확한데, 점수 자체가 낮습니다. YOLOX 점수는 물체일 확률과 클래스 확률을 곱한 값이라 원래 낮게 나오고, 처음 보는 사진에서는 더 낮아집니다. 0.05로 낮추면 정상 오검출 없이 57%를 잡습니다. 즉 기준값은 모델마다 따로 정해야 하고, 그래도 부족하기 때문에 새 환경 사진으로 재학습이 필요합니다.</a:t>
             </a:r>
             <a:endParaRPr lang="en-US" dirty="0"/>
           </a:p>
@@ -1471,7 +1473,7 @@
           <a:p>
             <a:r>
               <a:rPr lang="en-US" dirty="0"/>
-              <a:t>다음에 다르게 할 것 네 가지입니다. 테스트셋은 업로드 전에 따로 빼고, 새 환경에서는 그 환경 사진으로 다시 검증하고, 판정 기준값은 모델과 정밀도마다 검증셋에서 정하고, 모델은 크기보다 데이터와 결함에 맞는 걸 고르겠습니다.</a:t>
+              <a:t>앞에서 본 결과들의 원인을 한 장에 모았습니다. 오른쪽 근거 칸은 얼마나 확실한지입니다. 확인은 데이터로 직접 확인한 것, 추정은 데이터와 맞지만 따로 검증하지 않은 것, 가설은 아직 검증하지 못한 것입니다. 가장 확실한 원인은 세 가지입니다. scratch는 반사나 나무결과 비슷한 가는 선이라 어렵고, 93%는 테스트 사진까지 학습에 들어가 부풀려진 수치이고, 2차 세트에서 떨어진 건 crack이 절반 크기로 작아졌기 때문입니다. ATSS가 왜 가장 좋은지는 추정 단계입니다. 32픽셀 미만의 작은 결함에서 격차가 가장 커서 입력 해상도 차이와 맞지만, 다시 학습해서 확인하지는 않았습니다.</a:t>
             </a:r>
             <a:endParaRPr lang="en-US" dirty="0"/>
           </a:p>
@@ -1559,7 +1561,7 @@
           <a:p>
             <a:r>
               <a:rPr lang="en-US" dirty="0"/>
-              <a:t>마지막으로 대시보드에서 실제 모델이 가상 검사 라인을 돌리는 모습을 보여드리겠습니다. (라이브 데모로 전환)</a:t>
+              <a:t>다음에 다르게 할 것 네 가지입니다. 테스트셋은 업로드 전에 따로 빼고, 새 환경에서는 그 환경 사진으로 다시 검증하고, 판정 기준값은 모델과 정밀도마다 검증셋에서 정하고, 모델은 크기보다 데이터와 결함에 맞는 걸 고르겠습니다.</a:t>
             </a:r>
             <a:endParaRPr lang="en-US" dirty="0"/>
           </a:p>
@@ -1647,7 +1649,7 @@
           <a:p>
             <a:r>
               <a:rPr lang="en-US" dirty="0"/>
-              <a:t>들어주셔서 감사합니다. 질문 받겠습니다.</a:t>
+              <a:t>마지막으로 대시보드에서 실제 모델이 가상 검사 라인을 돌리는 모습을 보여드리겠습니다. (라이브 데모로 전환)</a:t>
             </a:r>
             <a:endParaRPr lang="en-US" dirty="0"/>
           </a:p>
@@ -1671,6 +1673,94 @@
             <a:fld id="{F7021451-1387-4CA6-816F-3879F97B5CBC}" type="slidenum">
               <a:rPr lang="en-US"/>
               <a:t>13</a:t>
+            </a:fld>
+            <a:endParaRPr lang="en-US"/>
+          </a:p>
+        </p:txBody>
+      </p:sp>
+    </p:spTree>
+    <p:extLst>
+      <p:ext uri="{BB962C8B-B14F-4D97-AF65-F5344CB8AC3E}">
+        <p14:creationId xmlns:p14="http://schemas.microsoft.com/office/powerpoint/2010/main" val="1024086991"/>
+      </p:ext>
+    </p:extLst>
+  </p:cSld>
+  <p:clrMapOvr>
+    <a:masterClrMapping/>
+  </p:clrMapOvr>
+</p:notes>
+</file>
+
+<file path=ppt/notesSlides/notesSlide14.xml><?xml version="1.0" encoding="utf-8"?>
+<p:notes xmlns:a="http://schemas.openxmlformats.org/drawingml/2006/main" xmlns:r="http://schemas.openxmlformats.org/officeDocument/2006/relationships" xmlns:p="http://schemas.openxmlformats.org/presentationml/2006/main">
+  <p:cSld>
+    <p:spTree>
+      <p:nvGrpSpPr>
+        <p:cNvPr id="1" name=""/>
+        <p:cNvGrpSpPr/>
+        <p:nvPr/>
+      </p:nvGrpSpPr>
+      <p:grpSpPr>
+        <a:xfrm>
+          <a:off x="0" y="0"/>
+          <a:ext cx="0" cy="0"/>
+          <a:chOff x="0" y="0"/>
+          <a:chExt cx="0" cy="0"/>
+        </a:xfrm>
+      </p:grpSpPr>
+      <p:sp>
+        <p:nvSpPr>
+          <p:cNvPr id="2" name="Slide Image Placeholder 1"/>
+          <p:cNvSpPr>
+            <a:spLocks noGrp="1" noRot="1" noChangeAspect="1"/>
+          </p:cNvSpPr>
+          <p:nvPr>
+            <p:ph type="sldImg"/>
+          </p:nvPr>
+        </p:nvSpPr>
+        <p:spPr/>
+      </p:sp>
+      <p:sp>
+        <p:nvSpPr>
+          <p:cNvPr id="3" name="Notes Placeholder 2"/>
+          <p:cNvSpPr>
+            <a:spLocks noGrp="1"/>
+          </p:cNvSpPr>
+          <p:nvPr>
+            <p:ph type="body" idx="1"/>
+          </p:nvPr>
+        </p:nvSpPr>
+        <p:spPr/>
+        <p:txBody>
+          <a:bodyPr/>
+          <a:lstStyle/>
+          <a:p>
+            <a:r>
+              <a:rPr lang="en-US" dirty="0"/>
+              <a:t>들어주셔서 감사합니다. 질문 받겠습니다.</a:t>
+            </a:r>
+            <a:endParaRPr lang="en-US" dirty="0"/>
+          </a:p>
+        </p:txBody>
+      </p:sp>
+      <p:sp>
+        <p:nvSpPr>
+          <p:cNvPr id="4" name="Slide Number Placeholder 3"/>
+          <p:cNvSpPr>
+            <a:spLocks noGrp="1"/>
+          </p:cNvSpPr>
+          <p:nvPr>
+            <p:ph type="sldNum" sz="quarter" idx="10"/>
+          </p:nvPr>
+        </p:nvSpPr>
+        <p:spPr/>
+        <p:txBody>
+          <a:bodyPr/>
+          <a:lstStyle/>
+          <a:p>
+            <a:fld id="{F7021451-1387-4CA6-816F-3879F97B5CBC}" type="slidenum">
+              <a:rPr lang="en-US"/>
+              <a:t>14</a:t>
             </a:fld>
             <a:endParaRPr lang="en-US"/>
           </a:p>
@@ -2175,7 +2265,7 @@
           <a:p>
             <a:r>
               <a:rPr lang="en-US" dirty="0"/>
-              <a:t>수업에서 다룬 모델 최적화를 직접 써보고 싶어서, Geti에서 INT8 모델을 받아 직접 만든 벤치마크로 측정했습니다. 같은 131장을 한 장씩, 같은 CPU에서, 전처리와 후처리를 포함해 잰 값입니다. INT8은 2배에서 4배 빠르고 크기는 절반 정도이며, mAP는 그대로입니다. 대신 신뢰도 점수가 조금 낮아져 같은 기준에서는 놓치는 결함이 늘어납니다. INT8을 쓰려면 기준값을 다시 정해야 합니다. 빨라지는 이유는 CPU의 8비트 연산 명령을 쓰고 옮길 데이터가 절반이기 때문이고, 놓침이 느는 이유는 양자화로 점수가 조금 내려가 0.30 근처 결함이 기준 아래로 떨어지기 때문입니다.</a:t>
+              <a:t>Geti 점수는 Geti가 직접 나눈 사진으로 매긴 점수라, 모델끼리 같은 조건으로 비교하거나 새 사진으로 다시 재볼 수 없었습니다. 그래서 benchmark.py를 직접 만들었습니다. Geti에서 내보낸 9개 모델을 똑같은 사진, 똑같은 판정 기준으로 돌리고, 정확도, 판정 결과, 기준값별 변화, 사진을 흐리게 하거나 어둡게 했을 때의 견고성, 학습 사진과의 중복, 그리고 CPU와 iGPU에서의 속도까지 한 번에 잽니다. 22장 복사본도 이 중복 검사에서 찾았습니다. 결과는 JSON으로 저장되고 대시보드의 Models 페이지에서 바로 볼 수 있습니다.</a:t>
             </a:r>
             <a:endParaRPr lang="en-US" dirty="0"/>
           </a:p>
@@ -2263,7 +2353,7 @@
           <a:p>
             <a:r>
               <a:rPr lang="en-US" dirty="0"/>
-              <a:t>2차 세트는 같은 업로더가 나중에 따로 올린 데이터셋입니다. 결함 종류와 촬영 방식은 비슷하지만 다른 촬영 세션입니다. 1차 데이터셋과 파일명이 같거나 픽셀이 사실상 같은 사진 140장을 먼저 뺐고, 증강되지 않은 45장만 테스트에 썼습니다. 그래서 모델 입장에서는 한 번도 본 적 없는 사진입니다.</a:t>
+              <a:t>수업에서 다룬 모델 최적화를 직접 써보고 싶어서, Geti에서 INT8 모델을 받아 직접 만든 벤치마크로 측정했습니다. 같은 131장을 한 장씩, 같은 CPU에서, 전처리와 후처리를 포함해 잰 값입니다. INT8은 2배에서 4배 빠르고 크기는 절반 정도이며, mAP는 그대로입니다. 대신 신뢰도 점수가 조금 낮아져 같은 기준에서는 놓치는 결함이 늘어납니다. INT8을 쓰려면 기준값을 다시 정해야 합니다. 빨라지는 이유는 CPU의 8비트 연산 명령을 쓰고 옮길 데이터가 절반이기 때문이고, 놓침이 느는 이유는 양자화로 점수가 조금 내려가 0.30 근처 결함이 기준 아래로 떨어지기 때문입니다.</a:t>
             </a:r>
             <a:endParaRPr lang="en-US" dirty="0"/>
           </a:p>
@@ -2351,7 +2441,7 @@
           <a:p>
             <a:r>
               <a:rPr lang="en-US" dirty="0"/>
-              <a:t>같은 업로더가 올린 다른 세트에서, 학습에 한 번도 쓰지 않은 45장으로 제 앱에서 다시 테스트했습니다. 1차 테스트에서 결함 셀을 거의 다 잡던 모델이 ATSS 47%, YOLOX-S 3%까지 떨어집니다. 결함을 착각한 게 아니라 점수가 낮아서 통과시킨 것이고, 정상 셀을 불합격시킨 경우는 없었습니다. 가장 큰 원인은 crack입니다. 2차 세트의 crack은 약 30×26픽셀로 1차의 절반 면적이고, ATSS는 15개 중 1개만 잡았습니다. 학습 때 본 크기의 crack만 쉬웠던 겁니다. 기준값을 바꿔 보면, ATSS는 0.15까지 낮추면 결함 97%를 잡지만 정상 셀도 87%가 걸립니다. YOLOX-S는 다릅니다. 2차 세트 mAP@50이 0.93으로 결함을 정상보다 높게 순위 매기는 건 정확한데, 점수 자체가 낮습니다. YOLOX 점수는 물체일 확률과 클래스 확률을 곱한 값이라 원래 낮게 나오고, 처음 보는 사진에서는 더 낮아집니다. 0.05로 낮추면 정상 오검출 없이 57%를 잡습니다. 즉 기준값은 모델마다 따로 정해야 하고, 그래도 부족하기 때문에 새 환경 사진으로 재학습이 필요합니다.</a:t>
+              <a:t>2차 세트는 같은 업로더가 나중에 따로 올린 데이터셋입니다. 결함 종류와 촬영 방식은 비슷하지만 다른 촬영 세션입니다. 1차 데이터셋과 파일명이 같거나 픽셀이 사실상 같은 사진 140장을 먼저 뺐고, 증강되지 않은 45장만 테스트에 썼습니다. 그래서 모델 입장에서는 한 번도 본 적 없는 사진입니다.</a:t>
             </a:r>
             <a:endParaRPr lang="en-US" dirty="0"/>
           </a:p>
@@ -3749,6 +3839,2531 @@
                   <a:schemeClr val="tx1"/>
                 </a:solidFill>
               </a:rPr>
+              <a:t>2차 세트 결과</a:t>
+            </a:r>
+            <a:endParaRPr lang="en-US" sz="3200" dirty="0"/>
+          </a:p>
+        </p:txBody>
+      </p:sp>
+      <p:sp>
+        <p:nvSpPr>
+          <p:cNvPr id="3" name="holdout-card"/>
+          <p:cNvSpPr/>
+          <p:nvPr/>
+        </p:nvSpPr>
+        <p:spPr>
+          <a:xfrm>
+            <a:off x="548640" y="1600200"/>
+            <a:ext cx="6035040" cy="2514600"/>
+          </a:xfrm>
+          <a:prstGeom prst="roundRect">
+            <a:avLst>
+              <a:gd name="adj" fmla="val 2909"/>
+            </a:avLst>
+          </a:prstGeom>
+          <a:solidFill>
+            <a:schemeClr val="bg2"/>
+          </a:solidFill>
+          <a:ln/>
+        </p:spPr>
+      </p:sp>
+      <p:sp>
+        <p:nvSpPr>
+          <p:cNvPr id="4" name="ho-h"/>
+          <p:cNvSpPr txBox="1"/>
+          <p:nvPr/>
+        </p:nvSpPr>
+        <p:spPr>
+          <a:xfrm>
+            <a:off x="822960" y="1709928"/>
+            <a:ext cx="5486400" cy="320040"/>
+          </a:xfrm>
+          <a:prstGeom prst="rect">
+            <a:avLst/>
+          </a:prstGeom>
+          <a:noFill/>
+          <a:ln/>
+        </p:spPr>
+        <p:txBody>
+          <a:bodyPr wrap="square" lIns="0" tIns="0" rIns="0" bIns="0" rtlCol="0" anchor="t"/>
+          <a:lstStyle/>
+          <a:p>
+            <a:pPr indent="0" marL="0">
+              <a:buNone/>
+            </a:pPr>
+            <a:r>
+              <a:rPr lang="en-US" sz="1600" b="1" dirty="0">
+                <a:solidFill>
+                  <a:schemeClr val="tx1"/>
+                </a:solidFill>
+              </a:rPr>
+              <a:t>결함 셀 검출률</a:t>
+            </a:r>
+            <a:endParaRPr lang="en-US" sz="1600" dirty="0"/>
+          </a:p>
+        </p:txBody>
+      </p:sp>
+      <p:sp>
+        <p:nvSpPr>
+          <p:cNvPr id="5" name="ho-c1"/>
+          <p:cNvSpPr txBox="1"/>
+          <p:nvPr/>
+        </p:nvSpPr>
+        <p:spPr>
+          <a:xfrm>
+            <a:off x="2926080" y="2057400"/>
+            <a:ext cx="1463040" cy="274320"/>
+          </a:xfrm>
+          <a:prstGeom prst="rect">
+            <a:avLst/>
+          </a:prstGeom>
+          <a:noFill/>
+          <a:ln/>
+        </p:spPr>
+        <p:txBody>
+          <a:bodyPr wrap="square" lIns="0" tIns="0" rIns="0" bIns="0" rtlCol="0" anchor="t"/>
+          <a:lstStyle/>
+          <a:p>
+            <a:pPr algn="r" indent="0" marL="0">
+              <a:buNone/>
+            </a:pPr>
+            <a:r>
+              <a:rPr lang="en-US" sz="1200" dirty="0">
+                <a:solidFill>
+                  <a:schemeClr val="tx2"/>
+                </a:solidFill>
+              </a:rPr>
+              <a:t>1차</a:t>
+            </a:r>
+            <a:endParaRPr lang="en-US" sz="1200" dirty="0"/>
+          </a:p>
+        </p:txBody>
+      </p:sp>
+      <p:sp>
+        <p:nvSpPr>
+          <p:cNvPr id="6" name="ho-c2"/>
+          <p:cNvSpPr txBox="1"/>
+          <p:nvPr/>
+        </p:nvSpPr>
+        <p:spPr>
+          <a:xfrm>
+            <a:off x="4754880" y="2057400"/>
+            <a:ext cx="1463040" cy="274320"/>
+          </a:xfrm>
+          <a:prstGeom prst="rect">
+            <a:avLst/>
+          </a:prstGeom>
+          <a:noFill/>
+          <a:ln/>
+        </p:spPr>
+        <p:txBody>
+          <a:bodyPr wrap="square" lIns="0" tIns="0" rIns="0" bIns="0" rtlCol="0" anchor="t"/>
+          <a:lstStyle/>
+          <a:p>
+            <a:pPr algn="r" indent="0" marL="0">
+              <a:buNone/>
+            </a:pPr>
+            <a:r>
+              <a:rPr lang="en-US" sz="1200" dirty="0">
+                <a:solidFill>
+                  <a:schemeClr val="tx2"/>
+                </a:solidFill>
+              </a:rPr>
+              <a:t>2차</a:t>
+            </a:r>
+            <a:endParaRPr lang="en-US" sz="1200" dirty="0"/>
+          </a:p>
+        </p:txBody>
+      </p:sp>
+      <p:sp>
+        <p:nvSpPr>
+          <p:cNvPr id="7" name="ho-dot-0"/>
+          <p:cNvSpPr/>
+          <p:nvPr/>
+        </p:nvSpPr>
+        <p:spPr>
+          <a:xfrm>
+            <a:off x="822960" y="2551176"/>
+            <a:ext cx="146304" cy="146304"/>
+          </a:xfrm>
+          <a:prstGeom prst="ellipse">
+            <a:avLst/>
+          </a:prstGeom>
+          <a:solidFill>
+            <a:schemeClr val="accent4"/>
+          </a:solidFill>
+          <a:ln/>
+        </p:spPr>
+      </p:sp>
+      <p:sp>
+        <p:nvSpPr>
+          <p:cNvPr id="8" name="ho-n-0"/>
+          <p:cNvSpPr txBox="1"/>
+          <p:nvPr/>
+        </p:nvSpPr>
+        <p:spPr>
+          <a:xfrm>
+            <a:off x="1060704" y="2377440"/>
+            <a:ext cx="1828800" cy="502920"/>
+          </a:xfrm>
+          <a:prstGeom prst="rect">
+            <a:avLst/>
+          </a:prstGeom>
+          <a:noFill/>
+          <a:ln/>
+        </p:spPr>
+        <p:txBody>
+          <a:bodyPr wrap="square" lIns="0" tIns="0" rIns="0" bIns="0" rtlCol="0" anchor="ctr"/>
+          <a:lstStyle/>
+          <a:p>
+            <a:pPr indent="0" marL="0">
+              <a:buNone/>
+            </a:pPr>
+            <a:r>
+              <a:rPr lang="en-US" sz="1600" b="1" dirty="0">
+                <a:solidFill>
+                  <a:schemeClr val="tx1"/>
+                </a:solidFill>
+              </a:rPr>
+              <a:t>ATSS</a:t>
+            </a:r>
+            <a:endParaRPr lang="en-US" sz="1600" dirty="0"/>
+          </a:p>
+        </p:txBody>
+      </p:sp>
+      <p:sp>
+        <p:nvSpPr>
+          <p:cNvPr id="9" name="ho-a-0"/>
+          <p:cNvSpPr txBox="1"/>
+          <p:nvPr/>
+        </p:nvSpPr>
+        <p:spPr>
+          <a:xfrm>
+            <a:off x="2926080" y="2377440"/>
+            <a:ext cx="1463040" cy="502920"/>
+          </a:xfrm>
+          <a:prstGeom prst="rect">
+            <a:avLst/>
+          </a:prstGeom>
+          <a:noFill/>
+          <a:ln/>
+        </p:spPr>
+        <p:txBody>
+          <a:bodyPr wrap="square" lIns="0" tIns="0" rIns="0" bIns="0" rtlCol="0" anchor="ctr"/>
+          <a:lstStyle/>
+          <a:p>
+            <a:pPr algn="r" indent="0" marL="0">
+              <a:buNone/>
+            </a:pPr>
+            <a:r>
+              <a:rPr lang="en-US" sz="2600" b="1" dirty="0">
+                <a:solidFill>
+                  <a:schemeClr val="tx2"/>
+                </a:solidFill>
+              </a:rPr>
+              <a:t>100%</a:t>
+            </a:r>
+            <a:endParaRPr lang="en-US" sz="2600" dirty="0"/>
+          </a:p>
+        </p:txBody>
+      </p:sp>
+      <p:sp>
+        <p:nvSpPr>
+          <p:cNvPr id="10" name="ho-b-0"/>
+          <p:cNvSpPr txBox="1"/>
+          <p:nvPr/>
+        </p:nvSpPr>
+        <p:spPr>
+          <a:xfrm>
+            <a:off x="4754880" y="2377440"/>
+            <a:ext cx="1463040" cy="502920"/>
+          </a:xfrm>
+          <a:prstGeom prst="rect">
+            <a:avLst/>
+          </a:prstGeom>
+          <a:noFill/>
+          <a:ln/>
+        </p:spPr>
+        <p:txBody>
+          <a:bodyPr wrap="square" lIns="0" tIns="0" rIns="0" bIns="0" rtlCol="0" anchor="ctr"/>
+          <a:lstStyle/>
+          <a:p>
+            <a:pPr algn="r" indent="0" marL="0">
+              <a:buNone/>
+            </a:pPr>
+            <a:r>
+              <a:rPr lang="en-US" sz="2600" b="1" dirty="0">
+                <a:solidFill>
+                  <a:schemeClr val="accent2"/>
+                </a:solidFill>
+              </a:rPr>
+              <a:t>47%</a:t>
+            </a:r>
+            <a:endParaRPr lang="en-US" sz="2600" dirty="0"/>
+          </a:p>
+        </p:txBody>
+      </p:sp>
+      <p:sp>
+        <p:nvSpPr>
+          <p:cNvPr id="11" name="ho-dot-1"/>
+          <p:cNvSpPr/>
+          <p:nvPr/>
+        </p:nvSpPr>
+        <p:spPr>
+          <a:xfrm>
+            <a:off x="822960" y="3099816"/>
+            <a:ext cx="146304" cy="146304"/>
+          </a:xfrm>
+          <a:prstGeom prst="ellipse">
+            <a:avLst/>
+          </a:prstGeom>
+          <a:solidFill>
+            <a:schemeClr val="accent5"/>
+          </a:solidFill>
+          <a:ln/>
+        </p:spPr>
+      </p:sp>
+      <p:sp>
+        <p:nvSpPr>
+          <p:cNvPr id="12" name="ho-n-1"/>
+          <p:cNvSpPr txBox="1"/>
+          <p:nvPr/>
+        </p:nvSpPr>
+        <p:spPr>
+          <a:xfrm>
+            <a:off x="1060704" y="2926080"/>
+            <a:ext cx="1828800" cy="502920"/>
+          </a:xfrm>
+          <a:prstGeom prst="rect">
+            <a:avLst/>
+          </a:prstGeom>
+          <a:noFill/>
+          <a:ln/>
+        </p:spPr>
+        <p:txBody>
+          <a:bodyPr wrap="square" lIns="0" tIns="0" rIns="0" bIns="0" rtlCol="0" anchor="ctr"/>
+          <a:lstStyle/>
+          <a:p>
+            <a:pPr indent="0" marL="0">
+              <a:buNone/>
+            </a:pPr>
+            <a:r>
+              <a:rPr lang="en-US" sz="1600" b="1" dirty="0">
+                <a:solidFill>
+                  <a:schemeClr val="tx1"/>
+                </a:solidFill>
+              </a:rPr>
+              <a:t>YOLOX-S</a:t>
+            </a:r>
+            <a:endParaRPr lang="en-US" sz="1600" dirty="0"/>
+          </a:p>
+        </p:txBody>
+      </p:sp>
+      <p:sp>
+        <p:nvSpPr>
+          <p:cNvPr id="13" name="ho-a-1"/>
+          <p:cNvSpPr txBox="1"/>
+          <p:nvPr/>
+        </p:nvSpPr>
+        <p:spPr>
+          <a:xfrm>
+            <a:off x="2926080" y="2926080"/>
+            <a:ext cx="1463040" cy="502920"/>
+          </a:xfrm>
+          <a:prstGeom prst="rect">
+            <a:avLst/>
+          </a:prstGeom>
+          <a:noFill/>
+          <a:ln/>
+        </p:spPr>
+        <p:txBody>
+          <a:bodyPr wrap="square" lIns="0" tIns="0" rIns="0" bIns="0" rtlCol="0" anchor="ctr"/>
+          <a:lstStyle/>
+          <a:p>
+            <a:pPr algn="r" indent="0" marL="0">
+              <a:buNone/>
+            </a:pPr>
+            <a:r>
+              <a:rPr lang="en-US" sz="2600" b="1" dirty="0">
+                <a:solidFill>
+                  <a:schemeClr val="tx2"/>
+                </a:solidFill>
+              </a:rPr>
+              <a:t>94%</a:t>
+            </a:r>
+            <a:endParaRPr lang="en-US" sz="2600" dirty="0"/>
+          </a:p>
+        </p:txBody>
+      </p:sp>
+      <p:sp>
+        <p:nvSpPr>
+          <p:cNvPr id="14" name="ho-b-1"/>
+          <p:cNvSpPr txBox="1"/>
+          <p:nvPr/>
+        </p:nvSpPr>
+        <p:spPr>
+          <a:xfrm>
+            <a:off x="4754880" y="2926080"/>
+            <a:ext cx="1463040" cy="502920"/>
+          </a:xfrm>
+          <a:prstGeom prst="rect">
+            <a:avLst/>
+          </a:prstGeom>
+          <a:noFill/>
+          <a:ln/>
+        </p:spPr>
+        <p:txBody>
+          <a:bodyPr wrap="square" lIns="0" tIns="0" rIns="0" bIns="0" rtlCol="0" anchor="ctr"/>
+          <a:lstStyle/>
+          <a:p>
+            <a:pPr algn="r" indent="0" marL="0">
+              <a:buNone/>
+            </a:pPr>
+            <a:r>
+              <a:rPr lang="en-US" sz="2600" b="1" dirty="0">
+                <a:solidFill>
+                  <a:schemeClr val="accent2"/>
+                </a:solidFill>
+              </a:rPr>
+              <a:t>3%</a:t>
+            </a:r>
+            <a:endParaRPr lang="en-US" sz="2600" dirty="0"/>
+          </a:p>
+        </p:txBody>
+      </p:sp>
+      <p:sp>
+        <p:nvSpPr>
+          <p:cNvPr id="15" name="ho-dot-2"/>
+          <p:cNvSpPr/>
+          <p:nvPr/>
+        </p:nvSpPr>
+        <p:spPr>
+          <a:xfrm>
+            <a:off x="822960" y="3648456"/>
+            <a:ext cx="146304" cy="146304"/>
+          </a:xfrm>
+          <a:prstGeom prst="ellipse">
+            <a:avLst/>
+          </a:prstGeom>
+          <a:solidFill>
+            <a:schemeClr val="accent6"/>
+          </a:solidFill>
+          <a:ln/>
+        </p:spPr>
+      </p:sp>
+      <p:sp>
+        <p:nvSpPr>
+          <p:cNvPr id="16" name="ho-n-2"/>
+          <p:cNvSpPr txBox="1"/>
+          <p:nvPr/>
+        </p:nvSpPr>
+        <p:spPr>
+          <a:xfrm>
+            <a:off x="1060704" y="3474720"/>
+            <a:ext cx="1828800" cy="502920"/>
+          </a:xfrm>
+          <a:prstGeom prst="rect">
+            <a:avLst/>
+          </a:prstGeom>
+          <a:noFill/>
+          <a:ln/>
+        </p:spPr>
+        <p:txBody>
+          <a:bodyPr wrap="square" lIns="0" tIns="0" rIns="0" bIns="0" rtlCol="0" anchor="ctr"/>
+          <a:lstStyle/>
+          <a:p>
+            <a:pPr indent="0" marL="0">
+              <a:buNone/>
+            </a:pPr>
+            <a:r>
+              <a:rPr lang="en-US" sz="1600" b="1" dirty="0">
+                <a:solidFill>
+                  <a:schemeClr val="tx1"/>
+                </a:solidFill>
+              </a:rPr>
+              <a:t>YOLOX-Tiny</a:t>
+            </a:r>
+            <a:endParaRPr lang="en-US" sz="1600" dirty="0"/>
+          </a:p>
+        </p:txBody>
+      </p:sp>
+      <p:sp>
+        <p:nvSpPr>
+          <p:cNvPr id="17" name="ho-a-2"/>
+          <p:cNvSpPr txBox="1"/>
+          <p:nvPr/>
+        </p:nvSpPr>
+        <p:spPr>
+          <a:xfrm>
+            <a:off x="2926080" y="3474720"/>
+            <a:ext cx="1463040" cy="502920"/>
+          </a:xfrm>
+          <a:prstGeom prst="rect">
+            <a:avLst/>
+          </a:prstGeom>
+          <a:noFill/>
+          <a:ln/>
+        </p:spPr>
+        <p:txBody>
+          <a:bodyPr wrap="square" lIns="0" tIns="0" rIns="0" bIns="0" rtlCol="0" anchor="ctr"/>
+          <a:lstStyle/>
+          <a:p>
+            <a:pPr algn="r" indent="0" marL="0">
+              <a:buNone/>
+            </a:pPr>
+            <a:r>
+              <a:rPr lang="en-US" sz="2600" b="1" dirty="0">
+                <a:solidFill>
+                  <a:schemeClr val="tx2"/>
+                </a:solidFill>
+              </a:rPr>
+              <a:t>99%</a:t>
+            </a:r>
+            <a:endParaRPr lang="en-US" sz="2600" dirty="0"/>
+          </a:p>
+        </p:txBody>
+      </p:sp>
+      <p:sp>
+        <p:nvSpPr>
+          <p:cNvPr id="18" name="ho-b-2"/>
+          <p:cNvSpPr txBox="1"/>
+          <p:nvPr/>
+        </p:nvSpPr>
+        <p:spPr>
+          <a:xfrm>
+            <a:off x="4754880" y="3474720"/>
+            <a:ext cx="1463040" cy="502920"/>
+          </a:xfrm>
+          <a:prstGeom prst="rect">
+            <a:avLst/>
+          </a:prstGeom>
+          <a:noFill/>
+          <a:ln/>
+        </p:spPr>
+        <p:txBody>
+          <a:bodyPr wrap="square" lIns="0" tIns="0" rIns="0" bIns="0" rtlCol="0" anchor="ctr"/>
+          <a:lstStyle/>
+          <a:p>
+            <a:pPr algn="r" indent="0" marL="0">
+              <a:buNone/>
+            </a:pPr>
+            <a:r>
+              <a:rPr lang="en-US" sz="2600" b="1" dirty="0">
+                <a:solidFill>
+                  <a:schemeClr val="accent2"/>
+                </a:solidFill>
+              </a:rPr>
+              <a:t>47%</a:t>
+            </a:r>
+            <a:endParaRPr lang="en-US" sz="2600" dirty="0"/>
+          </a:p>
+        </p:txBody>
+      </p:sp>
+      <p:pic>
+        <p:nvPicPr>
+          <p:cNvPr id="19" name="miss-img" descr="C:\Users\user\_se4nchoi\batteryvision\docs\submission\build\img\holdout_miss.jpg">    </p:cNvPr>
+          <p:cNvPicPr>
+            <a:picLocks noChangeAspect="1"/>
+          </p:cNvPicPr>
+          <p:nvPr/>
+        </p:nvPicPr>
+        <p:blipFill>
+          <a:blip r:embed="rId1"/>
+          <a:stretch>
+            <a:fillRect/>
+          </a:stretch>
+        </p:blipFill>
+        <p:spPr>
+          <a:xfrm>
+            <a:off x="548640" y="4297680"/>
+            <a:ext cx="1920240" cy="1920240"/>
+          </a:xfrm>
+          <a:prstGeom prst="rect">
+            <a:avLst/>
+          </a:prstGeom>
+        </p:spPr>
+      </p:pic>
+      <p:sp>
+        <p:nvSpPr>
+          <p:cNvPr id="20" name="miss-cap"/>
+          <p:cNvSpPr txBox="1"/>
+          <p:nvPr/>
+        </p:nvSpPr>
+        <p:spPr>
+          <a:xfrm>
+            <a:off x="2697480" y="4297680"/>
+            <a:ext cx="3886200" cy="1920240"/>
+          </a:xfrm>
+          <a:prstGeom prst="rect">
+            <a:avLst/>
+          </a:prstGeom>
+          <a:noFill/>
+          <a:ln/>
+        </p:spPr>
+        <p:txBody>
+          <a:bodyPr wrap="square" lIns="0" tIns="0" rIns="0" bIns="0" rtlCol="0" anchor="ctr"/>
+          <a:lstStyle/>
+          <a:p>
+            <a:pPr marL="342900" indent="-342900">
+              <a:spcAft>
+                <a:spcPts val="600"/>
+              </a:spcAft>
+              <a:buSzPct val="100000"/>
+              <a:buChar char="•"/>
+            </a:pPr>
+            <a:r>
+              <a:rPr lang="en-US" sz="1500" dirty="0">
+                <a:solidFill>
+                  <a:schemeClr val="tx1"/>
+                </a:solidFill>
+              </a:rPr>
+              <a:t>놓친 scratch (0.21)</a:t>
+            </a:r>
+            <a:endParaRPr lang="en-US" sz="1500" dirty="0"/>
+          </a:p>
+          <a:p>
+            <a:pPr marL="342900" indent="-342900">
+              <a:spcAft>
+                <a:spcPts val="600"/>
+              </a:spcAft>
+              <a:buSzPct val="100000"/>
+              <a:buChar char="•"/>
+            </a:pPr>
+            <a:r>
+              <a:rPr lang="en-US" sz="1500" b="1" dirty="0">
+                <a:solidFill>
+                  <a:schemeClr val="accent2"/>
+                </a:solidFill>
+              </a:rPr>
+              <a:t>crack 30×26px → 1/15</a:t>
+            </a:r>
+            <a:endParaRPr lang="en-US" sz="1500" dirty="0"/>
+          </a:p>
+          <a:p>
+            <a:pPr marL="342900" indent="-342900">
+              <a:spcAft>
+                <a:spcPts val="600"/>
+              </a:spcAft>
+              <a:buSzPct val="100000"/>
+              <a:buChar char="•"/>
+            </a:pPr>
+            <a:r>
+              <a:rPr lang="en-US" sz="1500" dirty="0">
+                <a:solidFill>
+                  <a:schemeClr val="tx1"/>
+                </a:solidFill>
+              </a:rPr>
+              <a:t>클래스 착각 0</a:t>
+            </a:r>
+            <a:endParaRPr lang="en-US" sz="1500" dirty="0"/>
+          </a:p>
+          <a:p>
+            <a:pPr marL="342900" indent="-342900">
+              <a:spcAft>
+                <a:spcPts val="600"/>
+              </a:spcAft>
+              <a:buSzPct val="100000"/>
+              <a:buChar char="•"/>
+            </a:pPr>
+            <a:r>
+              <a:rPr lang="en-US" sz="1500" dirty="0">
+                <a:solidFill>
+                  <a:schemeClr val="tx1"/>
+                </a:solidFill>
+              </a:rPr>
+              <a:t>정상 불합격 0</a:t>
+            </a:r>
+            <a:endParaRPr lang="en-US" sz="1500" dirty="0"/>
+          </a:p>
+        </p:txBody>
+      </p:sp>
+      <p:sp>
+        <p:nvSpPr>
+          <p:cNvPr id="21" name="th-h"/>
+          <p:cNvSpPr txBox="1"/>
+          <p:nvPr/>
+        </p:nvSpPr>
+        <p:spPr>
+          <a:xfrm>
+            <a:off x="6812280" y="1600200"/>
+            <a:ext cx="4846320" cy="320040"/>
+          </a:xfrm>
+          <a:prstGeom prst="rect">
+            <a:avLst/>
+          </a:prstGeom>
+          <a:noFill/>
+          <a:ln/>
+        </p:spPr>
+        <p:txBody>
+          <a:bodyPr wrap="square" lIns="0" tIns="0" rIns="0" bIns="0" rtlCol="0" anchor="t"/>
+          <a:lstStyle/>
+          <a:p>
+            <a:pPr indent="0" marL="0">
+              <a:buNone/>
+            </a:pPr>
+            <a:r>
+              <a:rPr lang="en-US" sz="1600" b="1" dirty="0">
+                <a:solidFill>
+                  <a:schemeClr val="tx1"/>
+                </a:solidFill>
+              </a:rPr>
+              <a:t>기준값을 바꾸면?</a:t>
+            </a:r>
+            <a:endParaRPr lang="en-US" sz="1600" dirty="0"/>
+          </a:p>
+        </p:txBody>
+      </p:sp>
+      <p:graphicFrame>
+        <p:nvGraphicFramePr>
+          <p:cNvPr id="11" name="th-table"/>
+          <p:cNvGraphicFramePr>
+            <a:graphicFrameLocks noGrp="1"/>
+          </p:cNvGraphicFramePr>
+          <p:nvPr>
+            <p:extLst>
+              <p:ext uri="{D42A27DB-BD31-4B8C-83A1-F6EECF244321}">
+                <p14:modId xmlns:p14="http://schemas.microsoft.com/office/powerpoint/2010/main" val="1579011935"/>
+              </p:ext>
+            </p:extLst>
+          </p:nvPr>
+        </p:nvGraphicFramePr>
+        <p:xfrm>
+          <a:off x="6812280" y="2011680"/>
+          <a:ext cx="4828032" cy="914400"/>
+        </p:xfrm>
+        <a:graphic>
+          <a:graphicData uri="http://schemas.openxmlformats.org/drawingml/2006/table">
+            <a:tbl>
+              <a:tblPr/>
+              <a:tblGrid>
+                <a:gridCol w="1280160"/>
+                <a:gridCol w="1188720"/>
+                <a:gridCol w="1133856"/>
+                <a:gridCol w="1225296"/>
+              </a:tblGrid>
+              <a:tr h="384048">
+                <a:tc>
+                  <a:txBody>
+                    <a:bodyPr/>
+                    <a:lstStyle/>
+                    <a:p>
+                      <a:pPr algn="l" indent="0" marL="0">
+                        <a:buNone/>
+                      </a:pPr>
+                      <a:r>
+                        <a:rPr lang="en-US" sz="1400" b="1" dirty="0">
+                          <a:solidFill>
+                            <a:schemeClr val="tx2"/>
+                          </a:solidFill>
+                          <a:latin typeface="Malgun Gothic" pitchFamily="34" charset="0"/>
+                          <a:ea typeface="Malgun Gothic" pitchFamily="34" charset="-122"/>
+                          <a:cs typeface="Malgun Gothic" pitchFamily="34" charset="-120"/>
+                        </a:rPr>
+                        <a:t>모델</a:t>
+                      </a:r>
+                      <a:endParaRPr lang="en-US" sz="1400" dirty="0">
+                        <a:latin typeface="Malgun Gothic" charset="0"/>
+                        <a:ea typeface="Malgun Gothic" charset="0"/>
+                        <a:cs typeface="Malgun Gothic" charset="0"/>
+                      </a:endParaRPr>
+                    </a:p>
+                  </a:txBody>
+                  <a:tcPr marL="91440" marR="91440" marT="45720" marB="45720" anchor="ctr">
+                    <a:lnL w="9525" cap="flat" cmpd="sng" algn="ctr">
+                      <a:solidFill>
+                        <a:srgbClr val="3A3F48"/>
+                      </a:solidFill>
+                      <a:prstDash val="solid"/>
+                      <a:round/>
+                      <a:headEnd type="none" w="med" len="med"/>
+                      <a:tailEnd type="none" w="med" len="med"/>
+                    </a:lnL>
+                    <a:lnR w="9525" cap="flat" cmpd="sng" algn="ctr">
+                      <a:solidFill>
+                        <a:srgbClr val="3A3F48"/>
+                      </a:solidFill>
+                      <a:prstDash val="solid"/>
+                      <a:round/>
+                      <a:headEnd type="none" w="med" len="med"/>
+                      <a:tailEnd type="none" w="med" len="med"/>
+                    </a:lnR>
+                    <a:lnT w="9525" cap="flat" cmpd="sng" algn="ctr">
+                      <a:solidFill>
+                        <a:srgbClr val="3A3F48"/>
+                      </a:solidFill>
+                      <a:prstDash val="solid"/>
+                      <a:round/>
+                      <a:headEnd type="none" w="med" len="med"/>
+                      <a:tailEnd type="none" w="med" len="med"/>
+                    </a:lnT>
+                    <a:lnB w="9525" cap="flat" cmpd="sng" algn="ctr">
+                      <a:solidFill>
+                        <a:srgbClr val="3A3F48"/>
+                      </a:solidFill>
+                      <a:prstDash val="solid"/>
+                      <a:round/>
+                      <a:headEnd type="none" w="med" len="med"/>
+                      <a:tailEnd type="none" w="med" len="med"/>
+                    </a:lnB>
+                    <a:solidFill>
+                      <a:srgbClr val="16191E"/>
+                    </a:solidFill>
+                  </a:tcPr>
+                </a:tc>
+                <a:tc>
+                  <a:txBody>
+                    <a:bodyPr/>
+                    <a:lstStyle/>
+                    <a:p>
+                      <a:pPr algn="ctr" indent="0" marL="0">
+                        <a:buNone/>
+                      </a:pPr>
+                      <a:r>
+                        <a:rPr lang="en-US" sz="1400" b="1" dirty="0">
+                          <a:solidFill>
+                            <a:schemeClr val="tx2"/>
+                          </a:solidFill>
+                          <a:latin typeface="Malgun Gothic" pitchFamily="34" charset="0"/>
+                          <a:ea typeface="Malgun Gothic" pitchFamily="34" charset="-122"/>
+                          <a:cs typeface="Malgun Gothic" pitchFamily="34" charset="-120"/>
+                        </a:rPr>
+                        <a:t>기준값</a:t>
+                      </a:r>
+                      <a:endParaRPr lang="en-US" sz="1400" dirty="0">
+                        <a:latin typeface="Malgun Gothic" charset="0"/>
+                        <a:ea typeface="Malgun Gothic" charset="0"/>
+                        <a:cs typeface="Malgun Gothic" charset="0"/>
+                      </a:endParaRPr>
+                    </a:p>
+                  </a:txBody>
+                  <a:tcPr marL="91440" marR="91440" marT="45720" marB="45720" anchor="ctr">
+                    <a:lnL w="9525" cap="flat" cmpd="sng" algn="ctr">
+                      <a:solidFill>
+                        <a:srgbClr val="3A3F48"/>
+                      </a:solidFill>
+                      <a:prstDash val="solid"/>
+                      <a:round/>
+                      <a:headEnd type="none" w="med" len="med"/>
+                      <a:tailEnd type="none" w="med" len="med"/>
+                    </a:lnL>
+                    <a:lnR w="9525" cap="flat" cmpd="sng" algn="ctr">
+                      <a:solidFill>
+                        <a:srgbClr val="3A3F48"/>
+                      </a:solidFill>
+                      <a:prstDash val="solid"/>
+                      <a:round/>
+                      <a:headEnd type="none" w="med" len="med"/>
+                      <a:tailEnd type="none" w="med" len="med"/>
+                    </a:lnR>
+                    <a:lnT w="9525" cap="flat" cmpd="sng" algn="ctr">
+                      <a:solidFill>
+                        <a:srgbClr val="3A3F48"/>
+                      </a:solidFill>
+                      <a:prstDash val="solid"/>
+                      <a:round/>
+                      <a:headEnd type="none" w="med" len="med"/>
+                      <a:tailEnd type="none" w="med" len="med"/>
+                    </a:lnT>
+                    <a:lnB w="9525" cap="flat" cmpd="sng" algn="ctr">
+                      <a:solidFill>
+                        <a:srgbClr val="3A3F48"/>
+                      </a:solidFill>
+                      <a:prstDash val="solid"/>
+                      <a:round/>
+                      <a:headEnd type="none" w="med" len="med"/>
+                      <a:tailEnd type="none" w="med" len="med"/>
+                    </a:lnB>
+                    <a:solidFill>
+                      <a:srgbClr val="16191E"/>
+                    </a:solidFill>
+                  </a:tcPr>
+                </a:tc>
+                <a:tc>
+                  <a:txBody>
+                    <a:bodyPr/>
+                    <a:lstStyle/>
+                    <a:p>
+                      <a:pPr algn="ctr" indent="0" marL="0">
+                        <a:buNone/>
+                      </a:pPr>
+                      <a:r>
+                        <a:rPr lang="en-US" sz="1400" b="1" dirty="0">
+                          <a:solidFill>
+                            <a:schemeClr val="tx2"/>
+                          </a:solidFill>
+                          <a:latin typeface="Malgun Gothic" pitchFamily="34" charset="0"/>
+                          <a:ea typeface="Malgun Gothic" pitchFamily="34" charset="-122"/>
+                          <a:cs typeface="Malgun Gothic" pitchFamily="34" charset="-120"/>
+                        </a:rPr>
+                        <a:t>결함 검출</a:t>
+                      </a:r>
+                      <a:endParaRPr lang="en-US" sz="1400" dirty="0">
+                        <a:latin typeface="Malgun Gothic" charset="0"/>
+                        <a:ea typeface="Malgun Gothic" charset="0"/>
+                        <a:cs typeface="Malgun Gothic" charset="0"/>
+                      </a:endParaRPr>
+                    </a:p>
+                  </a:txBody>
+                  <a:tcPr marL="91440" marR="91440" marT="45720" marB="45720" anchor="ctr">
+                    <a:lnL w="9525" cap="flat" cmpd="sng" algn="ctr">
+                      <a:solidFill>
+                        <a:srgbClr val="3A3F48"/>
+                      </a:solidFill>
+                      <a:prstDash val="solid"/>
+                      <a:round/>
+                      <a:headEnd type="none" w="med" len="med"/>
+                      <a:tailEnd type="none" w="med" len="med"/>
+                    </a:lnL>
+                    <a:lnR w="9525" cap="flat" cmpd="sng" algn="ctr">
+                      <a:solidFill>
+                        <a:srgbClr val="3A3F48"/>
+                      </a:solidFill>
+                      <a:prstDash val="solid"/>
+                      <a:round/>
+                      <a:headEnd type="none" w="med" len="med"/>
+                      <a:tailEnd type="none" w="med" len="med"/>
+                    </a:lnR>
+                    <a:lnT w="9525" cap="flat" cmpd="sng" algn="ctr">
+                      <a:solidFill>
+                        <a:srgbClr val="3A3F48"/>
+                      </a:solidFill>
+                      <a:prstDash val="solid"/>
+                      <a:round/>
+                      <a:headEnd type="none" w="med" len="med"/>
+                      <a:tailEnd type="none" w="med" len="med"/>
+                    </a:lnT>
+                    <a:lnB w="9525" cap="flat" cmpd="sng" algn="ctr">
+                      <a:solidFill>
+                        <a:srgbClr val="3A3F48"/>
+                      </a:solidFill>
+                      <a:prstDash val="solid"/>
+                      <a:round/>
+                      <a:headEnd type="none" w="med" len="med"/>
+                      <a:tailEnd type="none" w="med" len="med"/>
+                    </a:lnB>
+                    <a:solidFill>
+                      <a:srgbClr val="16191E"/>
+                    </a:solidFill>
+                  </a:tcPr>
+                </a:tc>
+                <a:tc>
+                  <a:txBody>
+                    <a:bodyPr/>
+                    <a:lstStyle/>
+                    <a:p>
+                      <a:pPr algn="ctr" indent="0" marL="0">
+                        <a:buNone/>
+                      </a:pPr>
+                      <a:r>
+                        <a:rPr lang="en-US" sz="1400" b="1" dirty="0">
+                          <a:solidFill>
+                            <a:schemeClr val="tx2"/>
+                          </a:solidFill>
+                          <a:latin typeface="Malgun Gothic" pitchFamily="34" charset="0"/>
+                          <a:ea typeface="Malgun Gothic" pitchFamily="34" charset="-122"/>
+                          <a:cs typeface="Malgun Gothic" pitchFamily="34" charset="-120"/>
+                        </a:rPr>
+                        <a:t>정상 오검출</a:t>
+                      </a:r>
+                      <a:endParaRPr lang="en-US" sz="1400" dirty="0">
+                        <a:latin typeface="Malgun Gothic" charset="0"/>
+                        <a:ea typeface="Malgun Gothic" charset="0"/>
+                        <a:cs typeface="Malgun Gothic" charset="0"/>
+                      </a:endParaRPr>
+                    </a:p>
+                  </a:txBody>
+                  <a:tcPr marL="91440" marR="91440" marT="45720" marB="45720" anchor="ctr">
+                    <a:lnL w="9525" cap="flat" cmpd="sng" algn="ctr">
+                      <a:solidFill>
+                        <a:srgbClr val="3A3F48"/>
+                      </a:solidFill>
+                      <a:prstDash val="solid"/>
+                      <a:round/>
+                      <a:headEnd type="none" w="med" len="med"/>
+                      <a:tailEnd type="none" w="med" len="med"/>
+                    </a:lnL>
+                    <a:lnR w="9525" cap="flat" cmpd="sng" algn="ctr">
+                      <a:solidFill>
+                        <a:srgbClr val="3A3F48"/>
+                      </a:solidFill>
+                      <a:prstDash val="solid"/>
+                      <a:round/>
+                      <a:headEnd type="none" w="med" len="med"/>
+                      <a:tailEnd type="none" w="med" len="med"/>
+                    </a:lnR>
+                    <a:lnT w="9525" cap="flat" cmpd="sng" algn="ctr">
+                      <a:solidFill>
+                        <a:srgbClr val="3A3F48"/>
+                      </a:solidFill>
+                      <a:prstDash val="solid"/>
+                      <a:round/>
+                      <a:headEnd type="none" w="med" len="med"/>
+                      <a:tailEnd type="none" w="med" len="med"/>
+                    </a:lnT>
+                    <a:lnB w="9525" cap="flat" cmpd="sng" algn="ctr">
+                      <a:solidFill>
+                        <a:srgbClr val="3A3F48"/>
+                      </a:solidFill>
+                      <a:prstDash val="solid"/>
+                      <a:round/>
+                      <a:headEnd type="none" w="med" len="med"/>
+                      <a:tailEnd type="none" w="med" len="med"/>
+                    </a:lnB>
+                    <a:solidFill>
+                      <a:srgbClr val="16191E"/>
+                    </a:solidFill>
+                  </a:tcPr>
+                </a:tc>
+              </a:tr>
+              <a:tr h="384048">
+                <a:tc>
+                  <a:txBody>
+                    <a:bodyPr/>
+                    <a:lstStyle/>
+                    <a:p>
+                      <a:pPr algn="l" indent="0" marL="0">
+                        <a:buNone/>
+                      </a:pPr>
+                      <a:r>
+                        <a:rPr lang="en-US" sz="1400" b="1" dirty="0">
+                          <a:solidFill>
+                            <a:schemeClr val="accent4"/>
+                          </a:solidFill>
+                          <a:latin typeface="Malgun Gothic" pitchFamily="34" charset="0"/>
+                          <a:ea typeface="Malgun Gothic" pitchFamily="34" charset="-122"/>
+                          <a:cs typeface="Malgun Gothic" pitchFamily="34" charset="-120"/>
+                        </a:rPr>
+                        <a:t>ATSS</a:t>
+                      </a:r>
+                      <a:endParaRPr lang="en-US" sz="1400" dirty="0">
+                        <a:latin typeface="Malgun Gothic" charset="0"/>
+                        <a:ea typeface="Malgun Gothic" charset="0"/>
+                        <a:cs typeface="Malgun Gothic" charset="0"/>
+                      </a:endParaRPr>
+                    </a:p>
+                  </a:txBody>
+                  <a:tcPr marL="91440" marR="91440" marT="45720" marB="45720" anchor="ctr">
+                    <a:lnL w="9525" cap="flat" cmpd="sng" algn="ctr">
+                      <a:solidFill>
+                        <a:srgbClr val="3A3F48"/>
+                      </a:solidFill>
+                      <a:prstDash val="solid"/>
+                      <a:round/>
+                      <a:headEnd type="none" w="med" len="med"/>
+                      <a:tailEnd type="none" w="med" len="med"/>
+                    </a:lnL>
+                    <a:lnR w="9525" cap="flat" cmpd="sng" algn="ctr">
+                      <a:solidFill>
+                        <a:srgbClr val="3A3F48"/>
+                      </a:solidFill>
+                      <a:prstDash val="solid"/>
+                      <a:round/>
+                      <a:headEnd type="none" w="med" len="med"/>
+                      <a:tailEnd type="none" w="med" len="med"/>
+                    </a:lnR>
+                    <a:lnT w="9525" cap="flat" cmpd="sng" algn="ctr">
+                      <a:solidFill>
+                        <a:srgbClr val="3A3F48"/>
+                      </a:solidFill>
+                      <a:prstDash val="solid"/>
+                      <a:round/>
+                      <a:headEnd type="none" w="med" len="med"/>
+                      <a:tailEnd type="none" w="med" len="med"/>
+                    </a:lnT>
+                    <a:lnB w="9525" cap="flat" cmpd="sng" algn="ctr">
+                      <a:solidFill>
+                        <a:srgbClr val="3A3F48"/>
+                      </a:solidFill>
+                      <a:prstDash val="solid"/>
+                      <a:round/>
+                      <a:headEnd type="none" w="med" len="med"/>
+                      <a:tailEnd type="none" w="med" len="med"/>
+                    </a:lnB>
+                    <a:solidFill>
+                      <a:srgbClr val="23272F"/>
+                    </a:solidFill>
+                  </a:tcPr>
+                </a:tc>
+                <a:tc>
+                  <a:txBody>
+                    <a:bodyPr/>
+                    <a:lstStyle/>
+                    <a:p>
+                      <a:pPr algn="ctr" indent="0" marL="0">
+                        <a:buNone/>
+                      </a:pPr>
+                      <a:r>
+                        <a:rPr lang="en-US" sz="1400" dirty="0">
+                          <a:solidFill>
+                            <a:schemeClr val="tx1"/>
+                          </a:solidFill>
+                          <a:latin typeface="Malgun Gothic" pitchFamily="34" charset="0"/>
+                          <a:ea typeface="Malgun Gothic" pitchFamily="34" charset="-122"/>
+                          <a:cs typeface="Malgun Gothic" pitchFamily="34" charset="-120"/>
+                        </a:rPr>
+                        <a:t>0.30 (현재)</a:t>
+                      </a:r>
+                      <a:endParaRPr lang="en-US" sz="1400" dirty="0">
+                        <a:latin typeface="Malgun Gothic" charset="0"/>
+                        <a:ea typeface="Malgun Gothic" charset="0"/>
+                        <a:cs typeface="Malgun Gothic" charset="0"/>
+                      </a:endParaRPr>
+                    </a:p>
+                  </a:txBody>
+                  <a:tcPr marL="91440" marR="91440" marT="45720" marB="45720" anchor="ctr">
+                    <a:lnL w="9525" cap="flat" cmpd="sng" algn="ctr">
+                      <a:solidFill>
+                        <a:srgbClr val="3A3F48"/>
+                      </a:solidFill>
+                      <a:prstDash val="solid"/>
+                      <a:round/>
+                      <a:headEnd type="none" w="med" len="med"/>
+                      <a:tailEnd type="none" w="med" len="med"/>
+                    </a:lnL>
+                    <a:lnR w="9525" cap="flat" cmpd="sng" algn="ctr">
+                      <a:solidFill>
+                        <a:srgbClr val="3A3F48"/>
+                      </a:solidFill>
+                      <a:prstDash val="solid"/>
+                      <a:round/>
+                      <a:headEnd type="none" w="med" len="med"/>
+                      <a:tailEnd type="none" w="med" len="med"/>
+                    </a:lnR>
+                    <a:lnT w="9525" cap="flat" cmpd="sng" algn="ctr">
+                      <a:solidFill>
+                        <a:srgbClr val="3A3F48"/>
+                      </a:solidFill>
+                      <a:prstDash val="solid"/>
+                      <a:round/>
+                      <a:headEnd type="none" w="med" len="med"/>
+                      <a:tailEnd type="none" w="med" len="med"/>
+                    </a:lnT>
+                    <a:lnB w="9525" cap="flat" cmpd="sng" algn="ctr">
+                      <a:solidFill>
+                        <a:srgbClr val="3A3F48"/>
+                      </a:solidFill>
+                      <a:prstDash val="solid"/>
+                      <a:round/>
+                      <a:headEnd type="none" w="med" len="med"/>
+                      <a:tailEnd type="none" w="med" len="med"/>
+                    </a:lnB>
+                    <a:solidFill>
+                      <a:srgbClr val="23272F"/>
+                    </a:solidFill>
+                  </a:tcPr>
+                </a:tc>
+                <a:tc>
+                  <a:txBody>
+                    <a:bodyPr/>
+                    <a:lstStyle/>
+                    <a:p>
+                      <a:pPr algn="ctr" indent="0" marL="0">
+                        <a:buNone/>
+                      </a:pPr>
+                      <a:r>
+                        <a:rPr lang="en-US" sz="1400" b="1" dirty="0">
+                          <a:solidFill>
+                            <a:schemeClr val="accent2"/>
+                          </a:solidFill>
+                          <a:latin typeface="Malgun Gothic" pitchFamily="34" charset="0"/>
+                          <a:ea typeface="Malgun Gothic" pitchFamily="34" charset="-122"/>
+                          <a:cs typeface="Malgun Gothic" pitchFamily="34" charset="-120"/>
+                        </a:rPr>
+                        <a:t>47%</a:t>
+                      </a:r>
+                      <a:endParaRPr lang="en-US" sz="1400" dirty="0">
+                        <a:latin typeface="Malgun Gothic" charset="0"/>
+                        <a:ea typeface="Malgun Gothic" charset="0"/>
+                        <a:cs typeface="Malgun Gothic" charset="0"/>
+                      </a:endParaRPr>
+                    </a:p>
+                  </a:txBody>
+                  <a:tcPr marL="91440" marR="91440" marT="45720" marB="45720" anchor="ctr">
+                    <a:lnL w="9525" cap="flat" cmpd="sng" algn="ctr">
+                      <a:solidFill>
+                        <a:srgbClr val="3A3F48"/>
+                      </a:solidFill>
+                      <a:prstDash val="solid"/>
+                      <a:round/>
+                      <a:headEnd type="none" w="med" len="med"/>
+                      <a:tailEnd type="none" w="med" len="med"/>
+                    </a:lnL>
+                    <a:lnR w="9525" cap="flat" cmpd="sng" algn="ctr">
+                      <a:solidFill>
+                        <a:srgbClr val="3A3F48"/>
+                      </a:solidFill>
+                      <a:prstDash val="solid"/>
+                      <a:round/>
+                      <a:headEnd type="none" w="med" len="med"/>
+                      <a:tailEnd type="none" w="med" len="med"/>
+                    </a:lnR>
+                    <a:lnT w="9525" cap="flat" cmpd="sng" algn="ctr">
+                      <a:solidFill>
+                        <a:srgbClr val="3A3F48"/>
+                      </a:solidFill>
+                      <a:prstDash val="solid"/>
+                      <a:round/>
+                      <a:headEnd type="none" w="med" len="med"/>
+                      <a:tailEnd type="none" w="med" len="med"/>
+                    </a:lnT>
+                    <a:lnB w="9525" cap="flat" cmpd="sng" algn="ctr">
+                      <a:solidFill>
+                        <a:srgbClr val="3A3F48"/>
+                      </a:solidFill>
+                      <a:prstDash val="solid"/>
+                      <a:round/>
+                      <a:headEnd type="none" w="med" len="med"/>
+                      <a:tailEnd type="none" w="med" len="med"/>
+                    </a:lnB>
+                    <a:solidFill>
+                      <a:srgbClr val="23272F"/>
+                    </a:solidFill>
+                  </a:tcPr>
+                </a:tc>
+                <a:tc>
+                  <a:txBody>
+                    <a:bodyPr/>
+                    <a:lstStyle/>
+                    <a:p>
+                      <a:pPr algn="ctr" indent="0" marL="0">
+                        <a:buNone/>
+                      </a:pPr>
+                      <a:r>
+                        <a:rPr lang="en-US" sz="1400" dirty="0">
+                          <a:solidFill>
+                            <a:schemeClr val="tx1"/>
+                          </a:solidFill>
+                          <a:latin typeface="Malgun Gothic" pitchFamily="34" charset="0"/>
+                          <a:ea typeface="Malgun Gothic" pitchFamily="34" charset="-122"/>
+                          <a:cs typeface="Malgun Gothic" pitchFamily="34" charset="-120"/>
+                        </a:rPr>
+                        <a:t>13%</a:t>
+                      </a:r>
+                      <a:endParaRPr lang="en-US" sz="1400" dirty="0">
+                        <a:latin typeface="Malgun Gothic" charset="0"/>
+                        <a:ea typeface="Malgun Gothic" charset="0"/>
+                        <a:cs typeface="Malgun Gothic" charset="0"/>
+                      </a:endParaRPr>
+                    </a:p>
+                  </a:txBody>
+                  <a:tcPr marL="91440" marR="91440" marT="45720" marB="45720" anchor="ctr">
+                    <a:lnL w="9525" cap="flat" cmpd="sng" algn="ctr">
+                      <a:solidFill>
+                        <a:srgbClr val="3A3F48"/>
+                      </a:solidFill>
+                      <a:prstDash val="solid"/>
+                      <a:round/>
+                      <a:headEnd type="none" w="med" len="med"/>
+                      <a:tailEnd type="none" w="med" len="med"/>
+                    </a:lnL>
+                    <a:lnR w="9525" cap="flat" cmpd="sng" algn="ctr">
+                      <a:solidFill>
+                        <a:srgbClr val="3A3F48"/>
+                      </a:solidFill>
+                      <a:prstDash val="solid"/>
+                      <a:round/>
+                      <a:headEnd type="none" w="med" len="med"/>
+                      <a:tailEnd type="none" w="med" len="med"/>
+                    </a:lnR>
+                    <a:lnT w="9525" cap="flat" cmpd="sng" algn="ctr">
+                      <a:solidFill>
+                        <a:srgbClr val="3A3F48"/>
+                      </a:solidFill>
+                      <a:prstDash val="solid"/>
+                      <a:round/>
+                      <a:headEnd type="none" w="med" len="med"/>
+                      <a:tailEnd type="none" w="med" len="med"/>
+                    </a:lnT>
+                    <a:lnB w="9525" cap="flat" cmpd="sng" algn="ctr">
+                      <a:solidFill>
+                        <a:srgbClr val="3A3F48"/>
+                      </a:solidFill>
+                      <a:prstDash val="solid"/>
+                      <a:round/>
+                      <a:headEnd type="none" w="med" len="med"/>
+                      <a:tailEnd type="none" w="med" len="med"/>
+                    </a:lnB>
+                    <a:solidFill>
+                      <a:srgbClr val="23272F"/>
+                    </a:solidFill>
+                  </a:tcPr>
+                </a:tc>
+              </a:tr>
+              <a:tr h="384048">
+                <a:tc>
+                  <a:txBody>
+                    <a:bodyPr/>
+                    <a:lstStyle/>
+                    <a:p>
+                      <a:pPr algn="l" indent="0" marL="0">
+                        <a:buNone/>
+                      </a:pPr>
+                      <a:r>
+                        <a:rPr lang="en-US" sz="1400" b="1" dirty="0">
+                          <a:solidFill>
+                            <a:schemeClr val="accent4"/>
+                          </a:solidFill>
+                          <a:latin typeface="Malgun Gothic" pitchFamily="34" charset="0"/>
+                          <a:ea typeface="Malgun Gothic" pitchFamily="34" charset="-122"/>
+                          <a:cs typeface="Malgun Gothic" pitchFamily="34" charset="-120"/>
+                        </a:rPr>
+                        <a:t>ATSS</a:t>
+                      </a:r>
+                      <a:endParaRPr lang="en-US" sz="1400" dirty="0">
+                        <a:latin typeface="Malgun Gothic" charset="0"/>
+                        <a:ea typeface="Malgun Gothic" charset="0"/>
+                        <a:cs typeface="Malgun Gothic" charset="0"/>
+                      </a:endParaRPr>
+                    </a:p>
+                  </a:txBody>
+                  <a:tcPr marL="91440" marR="91440" marT="45720" marB="45720" anchor="ctr">
+                    <a:lnL w="9525" cap="flat" cmpd="sng" algn="ctr">
+                      <a:solidFill>
+                        <a:srgbClr val="3A3F48"/>
+                      </a:solidFill>
+                      <a:prstDash val="solid"/>
+                      <a:round/>
+                      <a:headEnd type="none" w="med" len="med"/>
+                      <a:tailEnd type="none" w="med" len="med"/>
+                    </a:lnL>
+                    <a:lnR w="9525" cap="flat" cmpd="sng" algn="ctr">
+                      <a:solidFill>
+                        <a:srgbClr val="3A3F48"/>
+                      </a:solidFill>
+                      <a:prstDash val="solid"/>
+                      <a:round/>
+                      <a:headEnd type="none" w="med" len="med"/>
+                      <a:tailEnd type="none" w="med" len="med"/>
+                    </a:lnR>
+                    <a:lnT w="9525" cap="flat" cmpd="sng" algn="ctr">
+                      <a:solidFill>
+                        <a:srgbClr val="3A3F48"/>
+                      </a:solidFill>
+                      <a:prstDash val="solid"/>
+                      <a:round/>
+                      <a:headEnd type="none" w="med" len="med"/>
+                      <a:tailEnd type="none" w="med" len="med"/>
+                    </a:lnT>
+                    <a:lnB w="9525" cap="flat" cmpd="sng" algn="ctr">
+                      <a:solidFill>
+                        <a:srgbClr val="3A3F48"/>
+                      </a:solidFill>
+                      <a:prstDash val="solid"/>
+                      <a:round/>
+                      <a:headEnd type="none" w="med" len="med"/>
+                      <a:tailEnd type="none" w="med" len="med"/>
+                    </a:lnB>
+                    <a:solidFill>
+                      <a:srgbClr val="23272F"/>
+                    </a:solidFill>
+                  </a:tcPr>
+                </a:tc>
+                <a:tc>
+                  <a:txBody>
+                    <a:bodyPr/>
+                    <a:lstStyle/>
+                    <a:p>
+                      <a:pPr algn="ctr" indent="0" marL="0">
+                        <a:buNone/>
+                      </a:pPr>
+                      <a:r>
+                        <a:rPr lang="en-US" sz="1400" dirty="0">
+                          <a:solidFill>
+                            <a:schemeClr val="tx1"/>
+                          </a:solidFill>
+                          <a:latin typeface="Malgun Gothic" pitchFamily="34" charset="0"/>
+                          <a:ea typeface="Malgun Gothic" pitchFamily="34" charset="-122"/>
+                          <a:cs typeface="Malgun Gothic" pitchFamily="34" charset="-120"/>
+                        </a:rPr>
+                        <a:t>0.20</a:t>
+                      </a:r>
+                      <a:endParaRPr lang="en-US" sz="1400" dirty="0">
+                        <a:latin typeface="Malgun Gothic" charset="0"/>
+                        <a:ea typeface="Malgun Gothic" charset="0"/>
+                        <a:cs typeface="Malgun Gothic" charset="0"/>
+                      </a:endParaRPr>
+                    </a:p>
+                  </a:txBody>
+                  <a:tcPr marL="91440" marR="91440" marT="45720" marB="45720" anchor="ctr">
+                    <a:lnL w="9525" cap="flat" cmpd="sng" algn="ctr">
+                      <a:solidFill>
+                        <a:srgbClr val="3A3F48"/>
+                      </a:solidFill>
+                      <a:prstDash val="solid"/>
+                      <a:round/>
+                      <a:headEnd type="none" w="med" len="med"/>
+                      <a:tailEnd type="none" w="med" len="med"/>
+                    </a:lnL>
+                    <a:lnR w="9525" cap="flat" cmpd="sng" algn="ctr">
+                      <a:solidFill>
+                        <a:srgbClr val="3A3F48"/>
+                      </a:solidFill>
+                      <a:prstDash val="solid"/>
+                      <a:round/>
+                      <a:headEnd type="none" w="med" len="med"/>
+                      <a:tailEnd type="none" w="med" len="med"/>
+                    </a:lnR>
+                    <a:lnT w="9525" cap="flat" cmpd="sng" algn="ctr">
+                      <a:solidFill>
+                        <a:srgbClr val="3A3F48"/>
+                      </a:solidFill>
+                      <a:prstDash val="solid"/>
+                      <a:round/>
+                      <a:headEnd type="none" w="med" len="med"/>
+                      <a:tailEnd type="none" w="med" len="med"/>
+                    </a:lnT>
+                    <a:lnB w="9525" cap="flat" cmpd="sng" algn="ctr">
+                      <a:solidFill>
+                        <a:srgbClr val="3A3F48"/>
+                      </a:solidFill>
+                      <a:prstDash val="solid"/>
+                      <a:round/>
+                      <a:headEnd type="none" w="med" len="med"/>
+                      <a:tailEnd type="none" w="med" len="med"/>
+                    </a:lnB>
+                    <a:solidFill>
+                      <a:srgbClr val="23272F"/>
+                    </a:solidFill>
+                  </a:tcPr>
+                </a:tc>
+                <a:tc>
+                  <a:txBody>
+                    <a:bodyPr/>
+                    <a:lstStyle/>
+                    <a:p>
+                      <a:pPr algn="ctr" indent="0" marL="0">
+                        <a:buNone/>
+                      </a:pPr>
+                      <a:r>
+                        <a:rPr lang="en-US" sz="1400" dirty="0">
+                          <a:solidFill>
+                            <a:schemeClr val="tx1"/>
+                          </a:solidFill>
+                          <a:latin typeface="Malgun Gothic" pitchFamily="34" charset="0"/>
+                          <a:ea typeface="Malgun Gothic" pitchFamily="34" charset="-122"/>
+                          <a:cs typeface="Malgun Gothic" pitchFamily="34" charset="-120"/>
+                        </a:rPr>
+                        <a:t>87%</a:t>
+                      </a:r>
+                      <a:endParaRPr lang="en-US" sz="1400" dirty="0">
+                        <a:latin typeface="Malgun Gothic" charset="0"/>
+                        <a:ea typeface="Malgun Gothic" charset="0"/>
+                        <a:cs typeface="Malgun Gothic" charset="0"/>
+                      </a:endParaRPr>
+                    </a:p>
+                  </a:txBody>
+                  <a:tcPr marL="91440" marR="91440" marT="45720" marB="45720" anchor="ctr">
+                    <a:lnL w="9525" cap="flat" cmpd="sng" algn="ctr">
+                      <a:solidFill>
+                        <a:srgbClr val="3A3F48"/>
+                      </a:solidFill>
+                      <a:prstDash val="solid"/>
+                      <a:round/>
+                      <a:headEnd type="none" w="med" len="med"/>
+                      <a:tailEnd type="none" w="med" len="med"/>
+                    </a:lnL>
+                    <a:lnR w="9525" cap="flat" cmpd="sng" algn="ctr">
+                      <a:solidFill>
+                        <a:srgbClr val="3A3F48"/>
+                      </a:solidFill>
+                      <a:prstDash val="solid"/>
+                      <a:round/>
+                      <a:headEnd type="none" w="med" len="med"/>
+                      <a:tailEnd type="none" w="med" len="med"/>
+                    </a:lnR>
+                    <a:lnT w="9525" cap="flat" cmpd="sng" algn="ctr">
+                      <a:solidFill>
+                        <a:srgbClr val="3A3F48"/>
+                      </a:solidFill>
+                      <a:prstDash val="solid"/>
+                      <a:round/>
+                      <a:headEnd type="none" w="med" len="med"/>
+                      <a:tailEnd type="none" w="med" len="med"/>
+                    </a:lnT>
+                    <a:lnB w="9525" cap="flat" cmpd="sng" algn="ctr">
+                      <a:solidFill>
+                        <a:srgbClr val="3A3F48"/>
+                      </a:solidFill>
+                      <a:prstDash val="solid"/>
+                      <a:round/>
+                      <a:headEnd type="none" w="med" len="med"/>
+                      <a:tailEnd type="none" w="med" len="med"/>
+                    </a:lnB>
+                    <a:solidFill>
+                      <a:srgbClr val="23272F"/>
+                    </a:solidFill>
+                  </a:tcPr>
+                </a:tc>
+                <a:tc>
+                  <a:txBody>
+                    <a:bodyPr/>
+                    <a:lstStyle/>
+                    <a:p>
+                      <a:pPr algn="ctr" indent="0" marL="0">
+                        <a:buNone/>
+                      </a:pPr>
+                      <a:r>
+                        <a:rPr lang="en-US" sz="1400" b="1" dirty="0">
+                          <a:solidFill>
+                            <a:schemeClr val="accent3"/>
+                          </a:solidFill>
+                          <a:latin typeface="Malgun Gothic" pitchFamily="34" charset="0"/>
+                          <a:ea typeface="Malgun Gothic" pitchFamily="34" charset="-122"/>
+                          <a:cs typeface="Malgun Gothic" pitchFamily="34" charset="-120"/>
+                        </a:rPr>
+                        <a:t>73%</a:t>
+                      </a:r>
+                      <a:endParaRPr lang="en-US" sz="1400" dirty="0">
+                        <a:latin typeface="Malgun Gothic" charset="0"/>
+                        <a:ea typeface="Malgun Gothic" charset="0"/>
+                        <a:cs typeface="Malgun Gothic" charset="0"/>
+                      </a:endParaRPr>
+                    </a:p>
+                  </a:txBody>
+                  <a:tcPr marL="91440" marR="91440" marT="45720" marB="45720" anchor="ctr">
+                    <a:lnL w="9525" cap="flat" cmpd="sng" algn="ctr">
+                      <a:solidFill>
+                        <a:srgbClr val="3A3F48"/>
+                      </a:solidFill>
+                      <a:prstDash val="solid"/>
+                      <a:round/>
+                      <a:headEnd type="none" w="med" len="med"/>
+                      <a:tailEnd type="none" w="med" len="med"/>
+                    </a:lnL>
+                    <a:lnR w="9525" cap="flat" cmpd="sng" algn="ctr">
+                      <a:solidFill>
+                        <a:srgbClr val="3A3F48"/>
+                      </a:solidFill>
+                      <a:prstDash val="solid"/>
+                      <a:round/>
+                      <a:headEnd type="none" w="med" len="med"/>
+                      <a:tailEnd type="none" w="med" len="med"/>
+                    </a:lnR>
+                    <a:lnT w="9525" cap="flat" cmpd="sng" algn="ctr">
+                      <a:solidFill>
+                        <a:srgbClr val="3A3F48"/>
+                      </a:solidFill>
+                      <a:prstDash val="solid"/>
+                      <a:round/>
+                      <a:headEnd type="none" w="med" len="med"/>
+                      <a:tailEnd type="none" w="med" len="med"/>
+                    </a:lnT>
+                    <a:lnB w="9525" cap="flat" cmpd="sng" algn="ctr">
+                      <a:solidFill>
+                        <a:srgbClr val="3A3F48"/>
+                      </a:solidFill>
+                      <a:prstDash val="solid"/>
+                      <a:round/>
+                      <a:headEnd type="none" w="med" len="med"/>
+                      <a:tailEnd type="none" w="med" len="med"/>
+                    </a:lnB>
+                    <a:solidFill>
+                      <a:srgbClr val="23272F"/>
+                    </a:solidFill>
+                  </a:tcPr>
+                </a:tc>
+              </a:tr>
+              <a:tr h="384048">
+                <a:tc>
+                  <a:txBody>
+                    <a:bodyPr/>
+                    <a:lstStyle/>
+                    <a:p>
+                      <a:pPr algn="l" indent="0" marL="0">
+                        <a:buNone/>
+                      </a:pPr>
+                      <a:r>
+                        <a:rPr lang="en-US" sz="1400" b="1" dirty="0">
+                          <a:solidFill>
+                            <a:schemeClr val="accent4"/>
+                          </a:solidFill>
+                          <a:latin typeface="Malgun Gothic" pitchFamily="34" charset="0"/>
+                          <a:ea typeface="Malgun Gothic" pitchFamily="34" charset="-122"/>
+                          <a:cs typeface="Malgun Gothic" pitchFamily="34" charset="-120"/>
+                        </a:rPr>
+                        <a:t>ATSS</a:t>
+                      </a:r>
+                      <a:endParaRPr lang="en-US" sz="1400" dirty="0">
+                        <a:latin typeface="Malgun Gothic" charset="0"/>
+                        <a:ea typeface="Malgun Gothic" charset="0"/>
+                        <a:cs typeface="Malgun Gothic" charset="0"/>
+                      </a:endParaRPr>
+                    </a:p>
+                  </a:txBody>
+                  <a:tcPr marL="91440" marR="91440" marT="45720" marB="45720" anchor="ctr">
+                    <a:lnL w="9525" cap="flat" cmpd="sng" algn="ctr">
+                      <a:solidFill>
+                        <a:srgbClr val="3A3F48"/>
+                      </a:solidFill>
+                      <a:prstDash val="solid"/>
+                      <a:round/>
+                      <a:headEnd type="none" w="med" len="med"/>
+                      <a:tailEnd type="none" w="med" len="med"/>
+                    </a:lnL>
+                    <a:lnR w="9525" cap="flat" cmpd="sng" algn="ctr">
+                      <a:solidFill>
+                        <a:srgbClr val="3A3F48"/>
+                      </a:solidFill>
+                      <a:prstDash val="solid"/>
+                      <a:round/>
+                      <a:headEnd type="none" w="med" len="med"/>
+                      <a:tailEnd type="none" w="med" len="med"/>
+                    </a:lnR>
+                    <a:lnT w="9525" cap="flat" cmpd="sng" algn="ctr">
+                      <a:solidFill>
+                        <a:srgbClr val="3A3F48"/>
+                      </a:solidFill>
+                      <a:prstDash val="solid"/>
+                      <a:round/>
+                      <a:headEnd type="none" w="med" len="med"/>
+                      <a:tailEnd type="none" w="med" len="med"/>
+                    </a:lnT>
+                    <a:lnB w="9525" cap="flat" cmpd="sng" algn="ctr">
+                      <a:solidFill>
+                        <a:srgbClr val="3A3F48"/>
+                      </a:solidFill>
+                      <a:prstDash val="solid"/>
+                      <a:round/>
+                      <a:headEnd type="none" w="med" len="med"/>
+                      <a:tailEnd type="none" w="med" len="med"/>
+                    </a:lnB>
+                    <a:solidFill>
+                      <a:srgbClr val="23272F"/>
+                    </a:solidFill>
+                  </a:tcPr>
+                </a:tc>
+                <a:tc>
+                  <a:txBody>
+                    <a:bodyPr/>
+                    <a:lstStyle/>
+                    <a:p>
+                      <a:pPr algn="ctr" indent="0" marL="0">
+                        <a:buNone/>
+                      </a:pPr>
+                      <a:r>
+                        <a:rPr lang="en-US" sz="1400" dirty="0">
+                          <a:solidFill>
+                            <a:schemeClr val="tx1"/>
+                          </a:solidFill>
+                          <a:latin typeface="Malgun Gothic" pitchFamily="34" charset="0"/>
+                          <a:ea typeface="Malgun Gothic" pitchFamily="34" charset="-122"/>
+                          <a:cs typeface="Malgun Gothic" pitchFamily="34" charset="-120"/>
+                        </a:rPr>
+                        <a:t>0.15</a:t>
+                      </a:r>
+                      <a:endParaRPr lang="en-US" sz="1400" dirty="0">
+                        <a:latin typeface="Malgun Gothic" charset="0"/>
+                        <a:ea typeface="Malgun Gothic" charset="0"/>
+                        <a:cs typeface="Malgun Gothic" charset="0"/>
+                      </a:endParaRPr>
+                    </a:p>
+                  </a:txBody>
+                  <a:tcPr marL="91440" marR="91440" marT="45720" marB="45720" anchor="ctr">
+                    <a:lnL w="9525" cap="flat" cmpd="sng" algn="ctr">
+                      <a:solidFill>
+                        <a:srgbClr val="3A3F48"/>
+                      </a:solidFill>
+                      <a:prstDash val="solid"/>
+                      <a:round/>
+                      <a:headEnd type="none" w="med" len="med"/>
+                      <a:tailEnd type="none" w="med" len="med"/>
+                    </a:lnL>
+                    <a:lnR w="9525" cap="flat" cmpd="sng" algn="ctr">
+                      <a:solidFill>
+                        <a:srgbClr val="3A3F48"/>
+                      </a:solidFill>
+                      <a:prstDash val="solid"/>
+                      <a:round/>
+                      <a:headEnd type="none" w="med" len="med"/>
+                      <a:tailEnd type="none" w="med" len="med"/>
+                    </a:lnR>
+                    <a:lnT w="9525" cap="flat" cmpd="sng" algn="ctr">
+                      <a:solidFill>
+                        <a:srgbClr val="3A3F48"/>
+                      </a:solidFill>
+                      <a:prstDash val="solid"/>
+                      <a:round/>
+                      <a:headEnd type="none" w="med" len="med"/>
+                      <a:tailEnd type="none" w="med" len="med"/>
+                    </a:lnT>
+                    <a:lnB w="9525" cap="flat" cmpd="sng" algn="ctr">
+                      <a:solidFill>
+                        <a:srgbClr val="3A3F48"/>
+                      </a:solidFill>
+                      <a:prstDash val="solid"/>
+                      <a:round/>
+                      <a:headEnd type="none" w="med" len="med"/>
+                      <a:tailEnd type="none" w="med" len="med"/>
+                    </a:lnB>
+                    <a:solidFill>
+                      <a:srgbClr val="23272F"/>
+                    </a:solidFill>
+                  </a:tcPr>
+                </a:tc>
+                <a:tc>
+                  <a:txBody>
+                    <a:bodyPr/>
+                    <a:lstStyle/>
+                    <a:p>
+                      <a:pPr algn="ctr" indent="0" marL="0">
+                        <a:buNone/>
+                      </a:pPr>
+                      <a:r>
+                        <a:rPr lang="en-US" sz="1400" dirty="0">
+                          <a:solidFill>
+                            <a:schemeClr val="tx1"/>
+                          </a:solidFill>
+                          <a:latin typeface="Malgun Gothic" pitchFamily="34" charset="0"/>
+                          <a:ea typeface="Malgun Gothic" pitchFamily="34" charset="-122"/>
+                          <a:cs typeface="Malgun Gothic" pitchFamily="34" charset="-120"/>
+                        </a:rPr>
+                        <a:t>97%</a:t>
+                      </a:r>
+                      <a:endParaRPr lang="en-US" sz="1400" dirty="0">
+                        <a:latin typeface="Malgun Gothic" charset="0"/>
+                        <a:ea typeface="Malgun Gothic" charset="0"/>
+                        <a:cs typeface="Malgun Gothic" charset="0"/>
+                      </a:endParaRPr>
+                    </a:p>
+                  </a:txBody>
+                  <a:tcPr marL="91440" marR="91440" marT="45720" marB="45720" anchor="ctr">
+                    <a:lnL w="9525" cap="flat" cmpd="sng" algn="ctr">
+                      <a:solidFill>
+                        <a:srgbClr val="3A3F48"/>
+                      </a:solidFill>
+                      <a:prstDash val="solid"/>
+                      <a:round/>
+                      <a:headEnd type="none" w="med" len="med"/>
+                      <a:tailEnd type="none" w="med" len="med"/>
+                    </a:lnL>
+                    <a:lnR w="9525" cap="flat" cmpd="sng" algn="ctr">
+                      <a:solidFill>
+                        <a:srgbClr val="3A3F48"/>
+                      </a:solidFill>
+                      <a:prstDash val="solid"/>
+                      <a:round/>
+                      <a:headEnd type="none" w="med" len="med"/>
+                      <a:tailEnd type="none" w="med" len="med"/>
+                    </a:lnR>
+                    <a:lnT w="9525" cap="flat" cmpd="sng" algn="ctr">
+                      <a:solidFill>
+                        <a:srgbClr val="3A3F48"/>
+                      </a:solidFill>
+                      <a:prstDash val="solid"/>
+                      <a:round/>
+                      <a:headEnd type="none" w="med" len="med"/>
+                      <a:tailEnd type="none" w="med" len="med"/>
+                    </a:lnT>
+                    <a:lnB w="9525" cap="flat" cmpd="sng" algn="ctr">
+                      <a:solidFill>
+                        <a:srgbClr val="3A3F48"/>
+                      </a:solidFill>
+                      <a:prstDash val="solid"/>
+                      <a:round/>
+                      <a:headEnd type="none" w="med" len="med"/>
+                      <a:tailEnd type="none" w="med" len="med"/>
+                    </a:lnB>
+                    <a:solidFill>
+                      <a:srgbClr val="23272F"/>
+                    </a:solidFill>
+                  </a:tcPr>
+                </a:tc>
+                <a:tc>
+                  <a:txBody>
+                    <a:bodyPr/>
+                    <a:lstStyle/>
+                    <a:p>
+                      <a:pPr algn="ctr" indent="0" marL="0">
+                        <a:buNone/>
+                      </a:pPr>
+                      <a:r>
+                        <a:rPr lang="en-US" sz="1400" b="1" dirty="0">
+                          <a:solidFill>
+                            <a:schemeClr val="accent2"/>
+                          </a:solidFill>
+                          <a:latin typeface="Malgun Gothic" pitchFamily="34" charset="0"/>
+                          <a:ea typeface="Malgun Gothic" pitchFamily="34" charset="-122"/>
+                          <a:cs typeface="Malgun Gothic" pitchFamily="34" charset="-120"/>
+                        </a:rPr>
+                        <a:t>87%</a:t>
+                      </a:r>
+                      <a:endParaRPr lang="en-US" sz="1400" dirty="0">
+                        <a:latin typeface="Malgun Gothic" charset="0"/>
+                        <a:ea typeface="Malgun Gothic" charset="0"/>
+                        <a:cs typeface="Malgun Gothic" charset="0"/>
+                      </a:endParaRPr>
+                    </a:p>
+                  </a:txBody>
+                  <a:tcPr marL="91440" marR="91440" marT="45720" marB="45720" anchor="ctr">
+                    <a:lnL w="9525" cap="flat" cmpd="sng" algn="ctr">
+                      <a:solidFill>
+                        <a:srgbClr val="3A3F48"/>
+                      </a:solidFill>
+                      <a:prstDash val="solid"/>
+                      <a:round/>
+                      <a:headEnd type="none" w="med" len="med"/>
+                      <a:tailEnd type="none" w="med" len="med"/>
+                    </a:lnL>
+                    <a:lnR w="9525" cap="flat" cmpd="sng" algn="ctr">
+                      <a:solidFill>
+                        <a:srgbClr val="3A3F48"/>
+                      </a:solidFill>
+                      <a:prstDash val="solid"/>
+                      <a:round/>
+                      <a:headEnd type="none" w="med" len="med"/>
+                      <a:tailEnd type="none" w="med" len="med"/>
+                    </a:lnR>
+                    <a:lnT w="9525" cap="flat" cmpd="sng" algn="ctr">
+                      <a:solidFill>
+                        <a:srgbClr val="3A3F48"/>
+                      </a:solidFill>
+                      <a:prstDash val="solid"/>
+                      <a:round/>
+                      <a:headEnd type="none" w="med" len="med"/>
+                      <a:tailEnd type="none" w="med" len="med"/>
+                    </a:lnT>
+                    <a:lnB w="9525" cap="flat" cmpd="sng" algn="ctr">
+                      <a:solidFill>
+                        <a:srgbClr val="3A3F48"/>
+                      </a:solidFill>
+                      <a:prstDash val="solid"/>
+                      <a:round/>
+                      <a:headEnd type="none" w="med" len="med"/>
+                      <a:tailEnd type="none" w="med" len="med"/>
+                    </a:lnB>
+                    <a:solidFill>
+                      <a:srgbClr val="23272F"/>
+                    </a:solidFill>
+                  </a:tcPr>
+                </a:tc>
+              </a:tr>
+              <a:tr h="384048">
+                <a:tc>
+                  <a:txBody>
+                    <a:bodyPr/>
+                    <a:lstStyle/>
+                    <a:p>
+                      <a:pPr algn="l" indent="0" marL="0">
+                        <a:buNone/>
+                      </a:pPr>
+                      <a:r>
+                        <a:rPr lang="en-US" sz="1400" b="1" dirty="0">
+                          <a:solidFill>
+                            <a:schemeClr val="accent5"/>
+                          </a:solidFill>
+                          <a:latin typeface="Malgun Gothic" pitchFamily="34" charset="0"/>
+                          <a:ea typeface="Malgun Gothic" pitchFamily="34" charset="-122"/>
+                          <a:cs typeface="Malgun Gothic" pitchFamily="34" charset="-120"/>
+                        </a:rPr>
+                        <a:t>YOLOX-S</a:t>
+                      </a:r>
+                      <a:endParaRPr lang="en-US" sz="1400" dirty="0">
+                        <a:latin typeface="Malgun Gothic" charset="0"/>
+                        <a:ea typeface="Malgun Gothic" charset="0"/>
+                        <a:cs typeface="Malgun Gothic" charset="0"/>
+                      </a:endParaRPr>
+                    </a:p>
+                  </a:txBody>
+                  <a:tcPr marL="91440" marR="91440" marT="45720" marB="45720" anchor="ctr">
+                    <a:lnL w="9525" cap="flat" cmpd="sng" algn="ctr">
+                      <a:solidFill>
+                        <a:srgbClr val="3A3F48"/>
+                      </a:solidFill>
+                      <a:prstDash val="solid"/>
+                      <a:round/>
+                      <a:headEnd type="none" w="med" len="med"/>
+                      <a:tailEnd type="none" w="med" len="med"/>
+                    </a:lnL>
+                    <a:lnR w="9525" cap="flat" cmpd="sng" algn="ctr">
+                      <a:solidFill>
+                        <a:srgbClr val="3A3F48"/>
+                      </a:solidFill>
+                      <a:prstDash val="solid"/>
+                      <a:round/>
+                      <a:headEnd type="none" w="med" len="med"/>
+                      <a:tailEnd type="none" w="med" len="med"/>
+                    </a:lnR>
+                    <a:lnT w="9525" cap="flat" cmpd="sng" algn="ctr">
+                      <a:solidFill>
+                        <a:srgbClr val="3A3F48"/>
+                      </a:solidFill>
+                      <a:prstDash val="solid"/>
+                      <a:round/>
+                      <a:headEnd type="none" w="med" len="med"/>
+                      <a:tailEnd type="none" w="med" len="med"/>
+                    </a:lnT>
+                    <a:lnB w="9525" cap="flat" cmpd="sng" algn="ctr">
+                      <a:solidFill>
+                        <a:srgbClr val="3A3F48"/>
+                      </a:solidFill>
+                      <a:prstDash val="solid"/>
+                      <a:round/>
+                      <a:headEnd type="none" w="med" len="med"/>
+                      <a:tailEnd type="none" w="med" len="med"/>
+                    </a:lnB>
+                    <a:solidFill>
+                      <a:srgbClr val="23272F"/>
+                    </a:solidFill>
+                  </a:tcPr>
+                </a:tc>
+                <a:tc>
+                  <a:txBody>
+                    <a:bodyPr/>
+                    <a:lstStyle/>
+                    <a:p>
+                      <a:pPr algn="ctr" indent="0" marL="0">
+                        <a:buNone/>
+                      </a:pPr>
+                      <a:r>
+                        <a:rPr lang="en-US" sz="1400" dirty="0">
+                          <a:solidFill>
+                            <a:schemeClr val="tx1"/>
+                          </a:solidFill>
+                          <a:latin typeface="Malgun Gothic" pitchFamily="34" charset="0"/>
+                          <a:ea typeface="Malgun Gothic" pitchFamily="34" charset="-122"/>
+                          <a:cs typeface="Malgun Gothic" pitchFamily="34" charset="-120"/>
+                        </a:rPr>
+                        <a:t>0.30 (현재)</a:t>
+                      </a:r>
+                      <a:endParaRPr lang="en-US" sz="1400" dirty="0">
+                        <a:latin typeface="Malgun Gothic" charset="0"/>
+                        <a:ea typeface="Malgun Gothic" charset="0"/>
+                        <a:cs typeface="Malgun Gothic" charset="0"/>
+                      </a:endParaRPr>
+                    </a:p>
+                  </a:txBody>
+                  <a:tcPr marL="91440" marR="91440" marT="45720" marB="45720" anchor="ctr">
+                    <a:lnL w="9525" cap="flat" cmpd="sng" algn="ctr">
+                      <a:solidFill>
+                        <a:srgbClr val="3A3F48"/>
+                      </a:solidFill>
+                      <a:prstDash val="solid"/>
+                      <a:round/>
+                      <a:headEnd type="none" w="med" len="med"/>
+                      <a:tailEnd type="none" w="med" len="med"/>
+                    </a:lnL>
+                    <a:lnR w="9525" cap="flat" cmpd="sng" algn="ctr">
+                      <a:solidFill>
+                        <a:srgbClr val="3A3F48"/>
+                      </a:solidFill>
+                      <a:prstDash val="solid"/>
+                      <a:round/>
+                      <a:headEnd type="none" w="med" len="med"/>
+                      <a:tailEnd type="none" w="med" len="med"/>
+                    </a:lnR>
+                    <a:lnT w="9525" cap="flat" cmpd="sng" algn="ctr">
+                      <a:solidFill>
+                        <a:srgbClr val="3A3F48"/>
+                      </a:solidFill>
+                      <a:prstDash val="solid"/>
+                      <a:round/>
+                      <a:headEnd type="none" w="med" len="med"/>
+                      <a:tailEnd type="none" w="med" len="med"/>
+                    </a:lnT>
+                    <a:lnB w="9525" cap="flat" cmpd="sng" algn="ctr">
+                      <a:solidFill>
+                        <a:srgbClr val="3A3F48"/>
+                      </a:solidFill>
+                      <a:prstDash val="solid"/>
+                      <a:round/>
+                      <a:headEnd type="none" w="med" len="med"/>
+                      <a:tailEnd type="none" w="med" len="med"/>
+                    </a:lnB>
+                    <a:solidFill>
+                      <a:srgbClr val="23272F"/>
+                    </a:solidFill>
+                  </a:tcPr>
+                </a:tc>
+                <a:tc>
+                  <a:txBody>
+                    <a:bodyPr/>
+                    <a:lstStyle/>
+                    <a:p>
+                      <a:pPr algn="ctr" indent="0" marL="0">
+                        <a:buNone/>
+                      </a:pPr>
+                      <a:r>
+                        <a:rPr lang="en-US" sz="1400" b="1" dirty="0">
+                          <a:solidFill>
+                            <a:schemeClr val="accent2"/>
+                          </a:solidFill>
+                          <a:latin typeface="Malgun Gothic" pitchFamily="34" charset="0"/>
+                          <a:ea typeface="Malgun Gothic" pitchFamily="34" charset="-122"/>
+                          <a:cs typeface="Malgun Gothic" pitchFamily="34" charset="-120"/>
+                        </a:rPr>
+                        <a:t>3%</a:t>
+                      </a:r>
+                      <a:endParaRPr lang="en-US" sz="1400" dirty="0">
+                        <a:latin typeface="Malgun Gothic" charset="0"/>
+                        <a:ea typeface="Malgun Gothic" charset="0"/>
+                        <a:cs typeface="Malgun Gothic" charset="0"/>
+                      </a:endParaRPr>
+                    </a:p>
+                  </a:txBody>
+                  <a:tcPr marL="91440" marR="91440" marT="45720" marB="45720" anchor="ctr">
+                    <a:lnL w="9525" cap="flat" cmpd="sng" algn="ctr">
+                      <a:solidFill>
+                        <a:srgbClr val="3A3F48"/>
+                      </a:solidFill>
+                      <a:prstDash val="solid"/>
+                      <a:round/>
+                      <a:headEnd type="none" w="med" len="med"/>
+                      <a:tailEnd type="none" w="med" len="med"/>
+                    </a:lnL>
+                    <a:lnR w="9525" cap="flat" cmpd="sng" algn="ctr">
+                      <a:solidFill>
+                        <a:srgbClr val="3A3F48"/>
+                      </a:solidFill>
+                      <a:prstDash val="solid"/>
+                      <a:round/>
+                      <a:headEnd type="none" w="med" len="med"/>
+                      <a:tailEnd type="none" w="med" len="med"/>
+                    </a:lnR>
+                    <a:lnT w="9525" cap="flat" cmpd="sng" algn="ctr">
+                      <a:solidFill>
+                        <a:srgbClr val="3A3F48"/>
+                      </a:solidFill>
+                      <a:prstDash val="solid"/>
+                      <a:round/>
+                      <a:headEnd type="none" w="med" len="med"/>
+                      <a:tailEnd type="none" w="med" len="med"/>
+                    </a:lnT>
+                    <a:lnB w="9525" cap="flat" cmpd="sng" algn="ctr">
+                      <a:solidFill>
+                        <a:srgbClr val="3A3F48"/>
+                      </a:solidFill>
+                      <a:prstDash val="solid"/>
+                      <a:round/>
+                      <a:headEnd type="none" w="med" len="med"/>
+                      <a:tailEnd type="none" w="med" len="med"/>
+                    </a:lnB>
+                    <a:solidFill>
+                      <a:srgbClr val="23272F"/>
+                    </a:solidFill>
+                  </a:tcPr>
+                </a:tc>
+                <a:tc>
+                  <a:txBody>
+                    <a:bodyPr/>
+                    <a:lstStyle/>
+                    <a:p>
+                      <a:pPr algn="ctr" indent="0" marL="0">
+                        <a:buNone/>
+                      </a:pPr>
+                      <a:r>
+                        <a:rPr lang="en-US" sz="1400" dirty="0">
+                          <a:solidFill>
+                            <a:schemeClr val="tx1"/>
+                          </a:solidFill>
+                          <a:latin typeface="Malgun Gothic" pitchFamily="34" charset="0"/>
+                          <a:ea typeface="Malgun Gothic" pitchFamily="34" charset="-122"/>
+                          <a:cs typeface="Malgun Gothic" pitchFamily="34" charset="-120"/>
+                        </a:rPr>
+                        <a:t>0%</a:t>
+                      </a:r>
+                      <a:endParaRPr lang="en-US" sz="1400" dirty="0">
+                        <a:latin typeface="Malgun Gothic" charset="0"/>
+                        <a:ea typeface="Malgun Gothic" charset="0"/>
+                        <a:cs typeface="Malgun Gothic" charset="0"/>
+                      </a:endParaRPr>
+                    </a:p>
+                  </a:txBody>
+                  <a:tcPr marL="91440" marR="91440" marT="45720" marB="45720" anchor="ctr">
+                    <a:lnL w="9525" cap="flat" cmpd="sng" algn="ctr">
+                      <a:solidFill>
+                        <a:srgbClr val="3A3F48"/>
+                      </a:solidFill>
+                      <a:prstDash val="solid"/>
+                      <a:round/>
+                      <a:headEnd type="none" w="med" len="med"/>
+                      <a:tailEnd type="none" w="med" len="med"/>
+                    </a:lnL>
+                    <a:lnR w="9525" cap="flat" cmpd="sng" algn="ctr">
+                      <a:solidFill>
+                        <a:srgbClr val="3A3F48"/>
+                      </a:solidFill>
+                      <a:prstDash val="solid"/>
+                      <a:round/>
+                      <a:headEnd type="none" w="med" len="med"/>
+                      <a:tailEnd type="none" w="med" len="med"/>
+                    </a:lnR>
+                    <a:lnT w="9525" cap="flat" cmpd="sng" algn="ctr">
+                      <a:solidFill>
+                        <a:srgbClr val="3A3F48"/>
+                      </a:solidFill>
+                      <a:prstDash val="solid"/>
+                      <a:round/>
+                      <a:headEnd type="none" w="med" len="med"/>
+                      <a:tailEnd type="none" w="med" len="med"/>
+                    </a:lnT>
+                    <a:lnB w="9525" cap="flat" cmpd="sng" algn="ctr">
+                      <a:solidFill>
+                        <a:srgbClr val="3A3F48"/>
+                      </a:solidFill>
+                      <a:prstDash val="solid"/>
+                      <a:round/>
+                      <a:headEnd type="none" w="med" len="med"/>
+                      <a:tailEnd type="none" w="med" len="med"/>
+                    </a:lnB>
+                    <a:solidFill>
+                      <a:srgbClr val="23272F"/>
+                    </a:solidFill>
+                  </a:tcPr>
+                </a:tc>
+              </a:tr>
+              <a:tr h="384048">
+                <a:tc>
+                  <a:txBody>
+                    <a:bodyPr/>
+                    <a:lstStyle/>
+                    <a:p>
+                      <a:pPr algn="l" indent="0" marL="0">
+                        <a:buNone/>
+                      </a:pPr>
+                      <a:r>
+                        <a:rPr lang="en-US" sz="1400" b="1" dirty="0">
+                          <a:solidFill>
+                            <a:schemeClr val="accent5"/>
+                          </a:solidFill>
+                          <a:latin typeface="Malgun Gothic" pitchFamily="34" charset="0"/>
+                          <a:ea typeface="Malgun Gothic" pitchFamily="34" charset="-122"/>
+                          <a:cs typeface="Malgun Gothic" pitchFamily="34" charset="-120"/>
+                        </a:rPr>
+                        <a:t>YOLOX-S</a:t>
+                      </a:r>
+                      <a:endParaRPr lang="en-US" sz="1400" dirty="0">
+                        <a:latin typeface="Malgun Gothic" charset="0"/>
+                        <a:ea typeface="Malgun Gothic" charset="0"/>
+                        <a:cs typeface="Malgun Gothic" charset="0"/>
+                      </a:endParaRPr>
+                    </a:p>
+                  </a:txBody>
+                  <a:tcPr marL="91440" marR="91440" marT="45720" marB="45720" anchor="ctr">
+                    <a:lnL w="9525" cap="flat" cmpd="sng" algn="ctr">
+                      <a:solidFill>
+                        <a:srgbClr val="3A3F48"/>
+                      </a:solidFill>
+                      <a:prstDash val="solid"/>
+                      <a:round/>
+                      <a:headEnd type="none" w="med" len="med"/>
+                      <a:tailEnd type="none" w="med" len="med"/>
+                    </a:lnL>
+                    <a:lnR w="9525" cap="flat" cmpd="sng" algn="ctr">
+                      <a:solidFill>
+                        <a:srgbClr val="3A3F48"/>
+                      </a:solidFill>
+                      <a:prstDash val="solid"/>
+                      <a:round/>
+                      <a:headEnd type="none" w="med" len="med"/>
+                      <a:tailEnd type="none" w="med" len="med"/>
+                    </a:lnR>
+                    <a:lnT w="9525" cap="flat" cmpd="sng" algn="ctr">
+                      <a:solidFill>
+                        <a:srgbClr val="3A3F48"/>
+                      </a:solidFill>
+                      <a:prstDash val="solid"/>
+                      <a:round/>
+                      <a:headEnd type="none" w="med" len="med"/>
+                      <a:tailEnd type="none" w="med" len="med"/>
+                    </a:lnT>
+                    <a:lnB w="9525" cap="flat" cmpd="sng" algn="ctr">
+                      <a:solidFill>
+                        <a:srgbClr val="3A3F48"/>
+                      </a:solidFill>
+                      <a:prstDash val="solid"/>
+                      <a:round/>
+                      <a:headEnd type="none" w="med" len="med"/>
+                      <a:tailEnd type="none" w="med" len="med"/>
+                    </a:lnB>
+                    <a:solidFill>
+                      <a:srgbClr val="23272F"/>
+                    </a:solidFill>
+                  </a:tcPr>
+                </a:tc>
+                <a:tc>
+                  <a:txBody>
+                    <a:bodyPr/>
+                    <a:lstStyle/>
+                    <a:p>
+                      <a:pPr algn="ctr" indent="0" marL="0">
+                        <a:buNone/>
+                      </a:pPr>
+                      <a:r>
+                        <a:rPr lang="en-US" sz="1400" dirty="0">
+                          <a:solidFill>
+                            <a:schemeClr val="tx1"/>
+                          </a:solidFill>
+                          <a:latin typeface="Malgun Gothic" pitchFamily="34" charset="0"/>
+                          <a:ea typeface="Malgun Gothic" pitchFamily="34" charset="-122"/>
+                          <a:cs typeface="Malgun Gothic" pitchFamily="34" charset="-120"/>
+                        </a:rPr>
+                        <a:t>0.05</a:t>
+                      </a:r>
+                      <a:endParaRPr lang="en-US" sz="1400" dirty="0">
+                        <a:latin typeface="Malgun Gothic" charset="0"/>
+                        <a:ea typeface="Malgun Gothic" charset="0"/>
+                        <a:cs typeface="Malgun Gothic" charset="0"/>
+                      </a:endParaRPr>
+                    </a:p>
+                  </a:txBody>
+                  <a:tcPr marL="91440" marR="91440" marT="45720" marB="45720" anchor="ctr">
+                    <a:lnL w="9525" cap="flat" cmpd="sng" algn="ctr">
+                      <a:solidFill>
+                        <a:srgbClr val="3A3F48"/>
+                      </a:solidFill>
+                      <a:prstDash val="solid"/>
+                      <a:round/>
+                      <a:headEnd type="none" w="med" len="med"/>
+                      <a:tailEnd type="none" w="med" len="med"/>
+                    </a:lnL>
+                    <a:lnR w="9525" cap="flat" cmpd="sng" algn="ctr">
+                      <a:solidFill>
+                        <a:srgbClr val="3A3F48"/>
+                      </a:solidFill>
+                      <a:prstDash val="solid"/>
+                      <a:round/>
+                      <a:headEnd type="none" w="med" len="med"/>
+                      <a:tailEnd type="none" w="med" len="med"/>
+                    </a:lnR>
+                    <a:lnT w="9525" cap="flat" cmpd="sng" algn="ctr">
+                      <a:solidFill>
+                        <a:srgbClr val="3A3F48"/>
+                      </a:solidFill>
+                      <a:prstDash val="solid"/>
+                      <a:round/>
+                      <a:headEnd type="none" w="med" len="med"/>
+                      <a:tailEnd type="none" w="med" len="med"/>
+                    </a:lnT>
+                    <a:lnB w="9525" cap="flat" cmpd="sng" algn="ctr">
+                      <a:solidFill>
+                        <a:srgbClr val="3A3F48"/>
+                      </a:solidFill>
+                      <a:prstDash val="solid"/>
+                      <a:round/>
+                      <a:headEnd type="none" w="med" len="med"/>
+                      <a:tailEnd type="none" w="med" len="med"/>
+                    </a:lnB>
+                    <a:solidFill>
+                      <a:srgbClr val="23272F"/>
+                    </a:solidFill>
+                  </a:tcPr>
+                </a:tc>
+                <a:tc>
+                  <a:txBody>
+                    <a:bodyPr/>
+                    <a:lstStyle/>
+                    <a:p>
+                      <a:pPr algn="ctr" indent="0" marL="0">
+                        <a:buNone/>
+                      </a:pPr>
+                      <a:r>
+                        <a:rPr lang="en-US" sz="1400" b="1" dirty="0">
+                          <a:solidFill>
+                            <a:schemeClr val="tx1"/>
+                          </a:solidFill>
+                          <a:latin typeface="Malgun Gothic" pitchFamily="34" charset="0"/>
+                          <a:ea typeface="Malgun Gothic" pitchFamily="34" charset="-122"/>
+                          <a:cs typeface="Malgun Gothic" pitchFamily="34" charset="-120"/>
+                        </a:rPr>
+                        <a:t>57%</a:t>
+                      </a:r>
+                      <a:endParaRPr lang="en-US" sz="1400" dirty="0">
+                        <a:latin typeface="Malgun Gothic" charset="0"/>
+                        <a:ea typeface="Malgun Gothic" charset="0"/>
+                        <a:cs typeface="Malgun Gothic" charset="0"/>
+                      </a:endParaRPr>
+                    </a:p>
+                  </a:txBody>
+                  <a:tcPr marL="91440" marR="91440" marT="45720" marB="45720" anchor="ctr">
+                    <a:lnL w="9525" cap="flat" cmpd="sng" algn="ctr">
+                      <a:solidFill>
+                        <a:srgbClr val="3A3F48"/>
+                      </a:solidFill>
+                      <a:prstDash val="solid"/>
+                      <a:round/>
+                      <a:headEnd type="none" w="med" len="med"/>
+                      <a:tailEnd type="none" w="med" len="med"/>
+                    </a:lnL>
+                    <a:lnR w="9525" cap="flat" cmpd="sng" algn="ctr">
+                      <a:solidFill>
+                        <a:srgbClr val="3A3F48"/>
+                      </a:solidFill>
+                      <a:prstDash val="solid"/>
+                      <a:round/>
+                      <a:headEnd type="none" w="med" len="med"/>
+                      <a:tailEnd type="none" w="med" len="med"/>
+                    </a:lnR>
+                    <a:lnT w="9525" cap="flat" cmpd="sng" algn="ctr">
+                      <a:solidFill>
+                        <a:srgbClr val="3A3F48"/>
+                      </a:solidFill>
+                      <a:prstDash val="solid"/>
+                      <a:round/>
+                      <a:headEnd type="none" w="med" len="med"/>
+                      <a:tailEnd type="none" w="med" len="med"/>
+                    </a:lnT>
+                    <a:lnB w="9525" cap="flat" cmpd="sng" algn="ctr">
+                      <a:solidFill>
+                        <a:srgbClr val="3A3F48"/>
+                      </a:solidFill>
+                      <a:prstDash val="solid"/>
+                      <a:round/>
+                      <a:headEnd type="none" w="med" len="med"/>
+                      <a:tailEnd type="none" w="med" len="med"/>
+                    </a:lnB>
+                    <a:solidFill>
+                      <a:srgbClr val="23272F"/>
+                    </a:solidFill>
+                  </a:tcPr>
+                </a:tc>
+                <a:tc>
+                  <a:txBody>
+                    <a:bodyPr/>
+                    <a:lstStyle/>
+                    <a:p>
+                      <a:pPr algn="ctr" indent="0" marL="0">
+                        <a:buNone/>
+                      </a:pPr>
+                      <a:r>
+                        <a:rPr lang="en-US" sz="1400" b="1" dirty="0">
+                          <a:solidFill>
+                            <a:schemeClr val="accent1"/>
+                          </a:solidFill>
+                          <a:latin typeface="Malgun Gothic" pitchFamily="34" charset="0"/>
+                          <a:ea typeface="Malgun Gothic" pitchFamily="34" charset="-122"/>
+                          <a:cs typeface="Malgun Gothic" pitchFamily="34" charset="-120"/>
+                        </a:rPr>
+                        <a:t>0%</a:t>
+                      </a:r>
+                      <a:endParaRPr lang="en-US" sz="1400" dirty="0">
+                        <a:latin typeface="Malgun Gothic" charset="0"/>
+                        <a:ea typeface="Malgun Gothic" charset="0"/>
+                        <a:cs typeface="Malgun Gothic" charset="0"/>
+                      </a:endParaRPr>
+                    </a:p>
+                  </a:txBody>
+                  <a:tcPr marL="91440" marR="91440" marT="45720" marB="45720" anchor="ctr">
+                    <a:lnL w="9525" cap="flat" cmpd="sng" algn="ctr">
+                      <a:solidFill>
+                        <a:srgbClr val="3A3F48"/>
+                      </a:solidFill>
+                      <a:prstDash val="solid"/>
+                      <a:round/>
+                      <a:headEnd type="none" w="med" len="med"/>
+                      <a:tailEnd type="none" w="med" len="med"/>
+                    </a:lnL>
+                    <a:lnR w="9525" cap="flat" cmpd="sng" algn="ctr">
+                      <a:solidFill>
+                        <a:srgbClr val="3A3F48"/>
+                      </a:solidFill>
+                      <a:prstDash val="solid"/>
+                      <a:round/>
+                      <a:headEnd type="none" w="med" len="med"/>
+                      <a:tailEnd type="none" w="med" len="med"/>
+                    </a:lnR>
+                    <a:lnT w="9525" cap="flat" cmpd="sng" algn="ctr">
+                      <a:solidFill>
+                        <a:srgbClr val="3A3F48"/>
+                      </a:solidFill>
+                      <a:prstDash val="solid"/>
+                      <a:round/>
+                      <a:headEnd type="none" w="med" len="med"/>
+                      <a:tailEnd type="none" w="med" len="med"/>
+                    </a:lnT>
+                    <a:lnB w="9525" cap="flat" cmpd="sng" algn="ctr">
+                      <a:solidFill>
+                        <a:srgbClr val="3A3F48"/>
+                      </a:solidFill>
+                      <a:prstDash val="solid"/>
+                      <a:round/>
+                      <a:headEnd type="none" w="med" len="med"/>
+                      <a:tailEnd type="none" w="med" len="med"/>
+                    </a:lnB>
+                    <a:solidFill>
+                      <a:srgbClr val="23272F"/>
+                    </a:solidFill>
+                  </a:tcPr>
+                </a:tc>
+              </a:tr>
+            </a:tbl>
+          </a:graphicData>
+        </a:graphic>
+      </p:graphicFrame>
+      <p:sp>
+        <p:nvSpPr>
+          <p:cNvPr id="23" name="th-cap"/>
+          <p:cNvSpPr txBox="1"/>
+          <p:nvPr/>
+        </p:nvSpPr>
+        <p:spPr>
+          <a:xfrm>
+            <a:off x="6812280" y="4526280"/>
+            <a:ext cx="4828032" cy="1463040"/>
+          </a:xfrm>
+          <a:prstGeom prst="rect">
+            <a:avLst/>
+          </a:prstGeom>
+          <a:noFill/>
+          <a:ln/>
+        </p:spPr>
+        <p:txBody>
+          <a:bodyPr wrap="square" lIns="0" tIns="0" rIns="0" bIns="0" rtlCol="0" anchor="t"/>
+          <a:lstStyle/>
+          <a:p>
+            <a:pPr indent="0" marL="0">
+              <a:spcAft>
+                <a:spcPts val="600"/>
+              </a:spcAft>
+              <a:buNone/>
+            </a:pPr>
+            <a:r>
+              <a:rPr lang="en-US" sz="1600" b="1" dirty="0">
+                <a:solidFill>
+                  <a:schemeClr val="accent1"/>
+                </a:solidFill>
+              </a:rPr>
+              <a:t>→ 모델별로 다른 기준값 적용</a:t>
+            </a:r>
+            <a:endParaRPr lang="en-US" sz="1600" dirty="0"/>
+          </a:p>
+          <a:p>
+            <a:pPr indent="0" marL="0">
+              <a:spcAft>
+                <a:spcPts val="600"/>
+              </a:spcAft>
+              <a:buNone/>
+            </a:pPr>
+            <a:r>
+              <a:rPr lang="en-US" sz="1600" b="1" dirty="0">
+                <a:solidFill>
+                  <a:schemeClr val="accent1"/>
+                </a:solidFill>
+              </a:rPr>
+              <a:t>→ 결과치 불충분</a:t>
+            </a:r>
+            <a:endParaRPr lang="en-US" sz="1600" dirty="0"/>
+          </a:p>
+          <a:p>
+            <a:pPr indent="0" marL="0">
+              <a:spcAft>
+                <a:spcPts val="600"/>
+              </a:spcAft>
+              <a:buNone/>
+            </a:pPr>
+            <a:r>
+              <a:rPr lang="en-US" sz="1600" b="1" dirty="0">
+                <a:solidFill>
+                  <a:schemeClr val="accent1"/>
+                </a:solidFill>
+              </a:rPr>
+              <a:t>→ 재학습</a:t>
+            </a:r>
+            <a:endParaRPr lang="en-US" sz="1600" dirty="0"/>
+          </a:p>
+        </p:txBody>
+      </p:sp>
+      <p:sp>
+        <p:nvSpPr>
+          <p:cNvPr id="25" name="Slide Number Placeholder 0"/>
+          <p:cNvSpPr>
+            <a:spLocks noGrp="1"/>
+          </p:cNvSpPr>
+          <p:nvPr>
+            <p:ph type="sldNum" sz="quarter" idx="4294967295"/>
+          </p:nvPr>
+        </p:nvSpPr>
+        <p:spPr>
+          <a:xfrm>
+            <a:off x="11094415" y="6419088"/>
+            <a:ext cx="548640" cy="274320"/>
+          </a:xfrm>
+          <a:prstGeom prst="rect">
+            <a:avLst/>
+          </a:prstGeom>
+          <a:extLst>
+            <a:ext uri="{C572A759-6A51-4108-AA02-DFA0A04FC94B}">
+              <ma14:wrappingTextBoxFlag xmlns:ma14="http://schemas.microsoft.com/office/mac/drawingml/2011/main" val="0"/>
+            </a:ext>
+          </a:extLst>
+        </p:spPr>
+        <p:txBody>
+          <a:bodyPr/>
+          <a:lstStyle>
+            <a:lvl1pPr>
+              <a:defRPr sz="1000">
+                <a:solidFill>
+                  <a:schemeClr val="tx2"/>
+                </a:solidFill>
+              </a:defRPr>
+            </a:lvl1pPr>
+          </a:lstStyle>
+          <a:p>
+            <a:pPr algn="r"/>
+            <a:fld id="{F7021451-1387-4CA6-816F-3879F97B5CBC}" type="slidenum">
+              <a:rPr b="0" lang="en-US"/>
+              <a:t>10</a:t>
+            </a:fld>
+            <a:endParaRPr lang="en-US"/>
+          </a:p>
+        </p:txBody>
+      </p:sp>
+    </p:spTree>
+  </p:cSld>
+  <p:clrMapOvr>
+    <a:masterClrMapping/>
+  </p:clrMapOvr>
+</p:sld>
+</file>
+
+<file path=ppt/slides/slide11.xml><?xml version="1.0" encoding="utf-8"?>
+<p:sld xmlns:a="http://schemas.openxmlformats.org/drawingml/2006/main" xmlns:r="http://schemas.openxmlformats.org/officeDocument/2006/relationships" xmlns:p="http://schemas.openxmlformats.org/presentationml/2006/main">
+  <p:cSld name="Slide 11">
+    <p:spTree>
+      <p:nvGrpSpPr>
+        <p:cNvPr id="1" name=""/>
+        <p:cNvGrpSpPr/>
+        <p:nvPr/>
+      </p:nvGrpSpPr>
+      <p:grpSpPr>
+        <a:xfrm>
+          <a:off x="0" y="0"/>
+          <a:ext cx="0" cy="0"/>
+          <a:chOff x="0" y="0"/>
+          <a:chExt cx="0" cy="0"/>
+        </a:xfrm>
+      </p:grpSpPr>
+      <p:sp>
+        <p:nvSpPr>
+          <p:cNvPr id="2" name="Text 0"/>
+          <p:cNvSpPr/>
+          <p:nvPr>
+            <p:ph idx="100" type="title" hasCustomPrompt="1"/>
+          </p:nvPr>
+        </p:nvSpPr>
+        <p:spPr>
+          <a:xfrm>
+            <a:off x="548640" y="347472"/>
+            <a:ext cx="11094415" cy="685800"/>
+          </a:xfrm>
+          <a:prstGeom prst="rect">
+            <a:avLst/>
+          </a:prstGeom>
+          <a:noFill/>
+          <a:ln/>
+        </p:spPr>
+        <p:txBody>
+          <a:bodyPr wrap="square" lIns="0" tIns="0" rIns="0" bIns="0" rtlCol="0" anchor="ctr"/>
+          <a:lstStyle/>
+          <a:p>
+            <a:pPr algn="l" indent="0" marL="0">
+              <a:buNone/>
+            </a:pPr>
+            <a:r>
+              <a:rPr lang="en-US" sz="3200" b="1" dirty="0">
+                <a:solidFill>
+                  <a:schemeClr val="tx1"/>
+                </a:solidFill>
+              </a:rPr>
               <a:t>결과 분석</a:t>
             </a:r>
             <a:endParaRPr lang="en-US" sz="3200" dirty="0"/>
@@ -3757,7 +6372,7 @@
       </p:sp>
       <p:graphicFrame>
         <p:nvGraphicFramePr>
-          <p:cNvPr id="11" name="causes-table"/>
+          <p:cNvPr id="12" name="causes-table"/>
           <p:cNvGraphicFramePr>
             <a:graphicFrameLocks noGrp="1"/>
           </p:cNvGraphicFramePr>
@@ -5445,7 +8060,7 @@
                           <a:ea typeface="Malgun Gothic" pitchFamily="34" charset="-122"/>
                           <a:cs typeface="Malgun Gothic" pitchFamily="34" charset="-120"/>
                         </a:rPr>
-                        <a:t>7</a:t>
+                        <a:t>8</a:t>
                       </a:r>
                       <a:endParaRPr lang="en-US" sz="1500" dirty="0">
                         <a:latin typeface="Malgun Gothic" charset="0"/>
@@ -5719,7 +8334,7 @@
                           <a:ea typeface="Malgun Gothic" pitchFamily="34" charset="-122"/>
                           <a:cs typeface="Malgun Gothic" pitchFamily="34" charset="-120"/>
                         </a:rPr>
-                        <a:t>9</a:t>
+                        <a:t>10</a:t>
                       </a:r>
                       <a:endParaRPr lang="en-US" sz="1500" dirty="0">
                         <a:latin typeface="Malgun Gothic" charset="0"/>
@@ -5993,7 +8608,7 @@
                           <a:ea typeface="Malgun Gothic" pitchFamily="34" charset="-122"/>
                           <a:cs typeface="Malgun Gothic" pitchFamily="34" charset="-120"/>
                         </a:rPr>
-                        <a:t>9</a:t>
+                        <a:t>10</a:t>
                       </a:r>
                       <a:endParaRPr lang="en-US" sz="1500" dirty="0">
                         <a:latin typeface="Malgun Gothic" charset="0"/>
@@ -6267,7 +8882,7 @@
                           <a:ea typeface="Malgun Gothic" pitchFamily="34" charset="-122"/>
                           <a:cs typeface="Malgun Gothic" pitchFamily="34" charset="-120"/>
                         </a:rPr>
-                        <a:t>9</a:t>
+                        <a:t>10</a:t>
                       </a:r>
                       <a:endParaRPr lang="en-US" sz="1500" dirty="0">
                         <a:latin typeface="Malgun Gothic" charset="0"/>
@@ -6696,490 +9311,6 @@
             <a:pPr algn="r"/>
             <a:fld id="{F7021451-1387-4CA6-816F-3879F97B5CBC}" type="slidenum">
               <a:rPr b="0" lang="en-US"/>
-              <a:t>10</a:t>
-            </a:fld>
-            <a:endParaRPr lang="en-US"/>
-          </a:p>
-        </p:txBody>
-      </p:sp>
-    </p:spTree>
-  </p:cSld>
-  <p:clrMapOvr>
-    <a:masterClrMapping/>
-  </p:clrMapOvr>
-</p:sld>
-</file>
-
-<file path=ppt/slides/slide11.xml><?xml version="1.0" encoding="utf-8"?>
-<p:sld xmlns:a="http://schemas.openxmlformats.org/drawingml/2006/main" xmlns:r="http://schemas.openxmlformats.org/officeDocument/2006/relationships" xmlns:p="http://schemas.openxmlformats.org/presentationml/2006/main">
-  <p:cSld name="Slide 11">
-    <p:spTree>
-      <p:nvGrpSpPr>
-        <p:cNvPr id="1" name=""/>
-        <p:cNvGrpSpPr/>
-        <p:nvPr/>
-      </p:nvGrpSpPr>
-      <p:grpSpPr>
-        <a:xfrm>
-          <a:off x="0" y="0"/>
-          <a:ext cx="0" cy="0"/>
-          <a:chOff x="0" y="0"/>
-          <a:chExt cx="0" cy="0"/>
-        </a:xfrm>
-      </p:grpSpPr>
-      <p:sp>
-        <p:nvSpPr>
-          <p:cNvPr id="2" name="Text 0"/>
-          <p:cNvSpPr/>
-          <p:nvPr>
-            <p:ph idx="100" type="title" hasCustomPrompt="1"/>
-          </p:nvPr>
-        </p:nvSpPr>
-        <p:spPr>
-          <a:xfrm>
-            <a:off x="548640" y="347472"/>
-            <a:ext cx="11094415" cy="685800"/>
-          </a:xfrm>
-          <a:prstGeom prst="rect">
-            <a:avLst/>
-          </a:prstGeom>
-          <a:noFill/>
-          <a:ln/>
-        </p:spPr>
-        <p:txBody>
-          <a:bodyPr wrap="square" lIns="0" tIns="0" rIns="0" bIns="0" rtlCol="0" anchor="ctr"/>
-          <a:lstStyle/>
-          <a:p>
-            <a:pPr algn="l" indent="0" marL="0">
-              <a:buNone/>
-            </a:pPr>
-            <a:r>
-              <a:rPr lang="en-US" sz="3200" b="1" dirty="0">
-                <a:solidFill>
-                  <a:schemeClr val="tx1"/>
-                </a:solidFill>
-              </a:rPr>
-              <a:t>Lesson Learned</a:t>
-            </a:r>
-            <a:endParaRPr lang="en-US" sz="3200" dirty="0"/>
-          </a:p>
-        </p:txBody>
-      </p:sp>
-      <p:sp>
-        <p:nvSpPr>
-          <p:cNvPr id="3" name="lesson-0"/>
-          <p:cNvSpPr/>
-          <p:nvPr/>
-        </p:nvSpPr>
-        <p:spPr>
-          <a:xfrm>
-            <a:off x="548640" y="1600200"/>
-            <a:ext cx="5440680" cy="2194560"/>
-          </a:xfrm>
-          <a:prstGeom prst="roundRect">
-            <a:avLst>
-              <a:gd name="adj" fmla="val 3333"/>
-            </a:avLst>
-          </a:prstGeom>
-          <a:solidFill>
-            <a:schemeClr val="bg2"/>
-          </a:solidFill>
-          <a:ln/>
-        </p:spPr>
-      </p:sp>
-      <p:sp>
-        <p:nvSpPr>
-          <p:cNvPr id="4" name="lesson-n-0"/>
-          <p:cNvSpPr txBox="1"/>
-          <p:nvPr/>
-        </p:nvSpPr>
-        <p:spPr>
-          <a:xfrm>
-            <a:off x="914400" y="1600200"/>
-            <a:ext cx="1188720" cy="2194560"/>
-          </a:xfrm>
-          <a:prstGeom prst="rect">
-            <a:avLst/>
-          </a:prstGeom>
-          <a:noFill/>
-          <a:ln/>
-        </p:spPr>
-        <p:txBody>
-          <a:bodyPr wrap="square" lIns="0" tIns="0" rIns="0" bIns="0" rtlCol="0" anchor="ctr"/>
-          <a:lstStyle/>
-          <a:p>
-            <a:pPr indent="0" marL="0">
-              <a:buNone/>
-            </a:pPr>
-            <a:r>
-              <a:rPr lang="en-US" sz="4400" b="1" dirty="0">
-                <a:solidFill>
-                  <a:schemeClr val="accent1"/>
-                </a:solidFill>
-              </a:rPr>
-              <a:t>01</a:t>
-            </a:r>
-            <a:endParaRPr lang="en-US" sz="4400" dirty="0"/>
-          </a:p>
-        </p:txBody>
-      </p:sp>
-      <p:sp>
-        <p:nvSpPr>
-          <p:cNvPr id="5" name="lesson-h-0"/>
-          <p:cNvSpPr txBox="1"/>
-          <p:nvPr/>
-        </p:nvSpPr>
-        <p:spPr>
-          <a:xfrm>
-            <a:off x="2194560" y="1600200"/>
-            <a:ext cx="3657600" cy="2194560"/>
-          </a:xfrm>
-          <a:prstGeom prst="rect">
-            <a:avLst/>
-          </a:prstGeom>
-          <a:noFill/>
-          <a:ln/>
-        </p:spPr>
-        <p:txBody>
-          <a:bodyPr wrap="square" lIns="0" tIns="0" rIns="0" bIns="0" rtlCol="0" anchor="ctr"/>
-          <a:lstStyle/>
-          <a:p>
-            <a:pPr indent="0" marL="0">
-              <a:buNone/>
-            </a:pPr>
-            <a:r>
-              <a:rPr lang="en-US" sz="2600" b="1" dirty="0">
-                <a:solidFill>
-                  <a:schemeClr val="tx1"/>
-                </a:solidFill>
-              </a:rPr>
-              <a:t>테스트셋 먼저 분리</a:t>
-            </a:r>
-            <a:endParaRPr lang="en-US" sz="2600" dirty="0"/>
-          </a:p>
-        </p:txBody>
-      </p:sp>
-      <p:sp>
-        <p:nvSpPr>
-          <p:cNvPr id="6" name="lesson-1"/>
-          <p:cNvSpPr/>
-          <p:nvPr/>
-        </p:nvSpPr>
-        <p:spPr>
-          <a:xfrm>
-            <a:off x="6190488" y="1600200"/>
-            <a:ext cx="5440680" cy="2194560"/>
-          </a:xfrm>
-          <a:prstGeom prst="roundRect">
-            <a:avLst>
-              <a:gd name="adj" fmla="val 3333"/>
-            </a:avLst>
-          </a:prstGeom>
-          <a:solidFill>
-            <a:schemeClr val="bg2"/>
-          </a:solidFill>
-          <a:ln/>
-        </p:spPr>
-      </p:sp>
-      <p:sp>
-        <p:nvSpPr>
-          <p:cNvPr id="7" name="lesson-n-1"/>
-          <p:cNvSpPr txBox="1"/>
-          <p:nvPr/>
-        </p:nvSpPr>
-        <p:spPr>
-          <a:xfrm>
-            <a:off x="6556248" y="1600200"/>
-            <a:ext cx="1188720" cy="2194560"/>
-          </a:xfrm>
-          <a:prstGeom prst="rect">
-            <a:avLst/>
-          </a:prstGeom>
-          <a:noFill/>
-          <a:ln/>
-        </p:spPr>
-        <p:txBody>
-          <a:bodyPr wrap="square" lIns="0" tIns="0" rIns="0" bIns="0" rtlCol="0" anchor="ctr"/>
-          <a:lstStyle/>
-          <a:p>
-            <a:pPr indent="0" marL="0">
-              <a:buNone/>
-            </a:pPr>
-            <a:r>
-              <a:rPr lang="en-US" sz="4400" b="1" dirty="0">
-                <a:solidFill>
-                  <a:schemeClr val="accent2"/>
-                </a:solidFill>
-              </a:rPr>
-              <a:t>02</a:t>
-            </a:r>
-            <a:endParaRPr lang="en-US" sz="4400" dirty="0"/>
-          </a:p>
-        </p:txBody>
-      </p:sp>
-      <p:sp>
-        <p:nvSpPr>
-          <p:cNvPr id="8" name="lesson-h-1"/>
-          <p:cNvSpPr txBox="1"/>
-          <p:nvPr/>
-        </p:nvSpPr>
-        <p:spPr>
-          <a:xfrm>
-            <a:off x="7836408" y="1600200"/>
-            <a:ext cx="3657600" cy="2194560"/>
-          </a:xfrm>
-          <a:prstGeom prst="rect">
-            <a:avLst/>
-          </a:prstGeom>
-          <a:noFill/>
-          <a:ln/>
-        </p:spPr>
-        <p:txBody>
-          <a:bodyPr wrap="square" lIns="0" tIns="0" rIns="0" bIns="0" rtlCol="0" anchor="ctr"/>
-          <a:lstStyle/>
-          <a:p>
-            <a:pPr indent="0" marL="0">
-              <a:buNone/>
-            </a:pPr>
-            <a:r>
-              <a:rPr lang="en-US" sz="2600" b="1" dirty="0">
-                <a:solidFill>
-                  <a:schemeClr val="tx1"/>
-                </a:solidFill>
-              </a:rPr>
-              <a:t>새 환경은 새로 검증</a:t>
-            </a:r>
-            <a:endParaRPr lang="en-US" sz="2600" dirty="0"/>
-          </a:p>
-        </p:txBody>
-      </p:sp>
-      <p:sp>
-        <p:nvSpPr>
-          <p:cNvPr id="9" name="lesson-2"/>
-          <p:cNvSpPr/>
-          <p:nvPr/>
-        </p:nvSpPr>
-        <p:spPr>
-          <a:xfrm>
-            <a:off x="548640" y="3977640"/>
-            <a:ext cx="5440680" cy="2194560"/>
-          </a:xfrm>
-          <a:prstGeom prst="roundRect">
-            <a:avLst>
-              <a:gd name="adj" fmla="val 3333"/>
-            </a:avLst>
-          </a:prstGeom>
-          <a:solidFill>
-            <a:schemeClr val="bg2"/>
-          </a:solidFill>
-          <a:ln/>
-        </p:spPr>
-      </p:sp>
-      <p:sp>
-        <p:nvSpPr>
-          <p:cNvPr id="10" name="lesson-n-2"/>
-          <p:cNvSpPr txBox="1"/>
-          <p:nvPr/>
-        </p:nvSpPr>
-        <p:spPr>
-          <a:xfrm>
-            <a:off x="914400" y="3977640"/>
-            <a:ext cx="1188720" cy="2194560"/>
-          </a:xfrm>
-          <a:prstGeom prst="rect">
-            <a:avLst/>
-          </a:prstGeom>
-          <a:noFill/>
-          <a:ln/>
-        </p:spPr>
-        <p:txBody>
-          <a:bodyPr wrap="square" lIns="0" tIns="0" rIns="0" bIns="0" rtlCol="0" anchor="ctr"/>
-          <a:lstStyle/>
-          <a:p>
-            <a:pPr indent="0" marL="0">
-              <a:buNone/>
-            </a:pPr>
-            <a:r>
-              <a:rPr lang="en-US" sz="4400" b="1" dirty="0">
-                <a:solidFill>
-                  <a:schemeClr val="accent3"/>
-                </a:solidFill>
-              </a:rPr>
-              <a:t>03</a:t>
-            </a:r>
-            <a:endParaRPr lang="en-US" sz="4400" dirty="0"/>
-          </a:p>
-        </p:txBody>
-      </p:sp>
-      <p:sp>
-        <p:nvSpPr>
-          <p:cNvPr id="11" name="lesson-h-2"/>
-          <p:cNvSpPr txBox="1"/>
-          <p:nvPr/>
-        </p:nvSpPr>
-        <p:spPr>
-          <a:xfrm>
-            <a:off x="2194560" y="3977640"/>
-            <a:ext cx="3657600" cy="2194560"/>
-          </a:xfrm>
-          <a:prstGeom prst="rect">
-            <a:avLst/>
-          </a:prstGeom>
-          <a:noFill/>
-          <a:ln/>
-        </p:spPr>
-        <p:txBody>
-          <a:bodyPr wrap="square" lIns="0" tIns="0" rIns="0" bIns="0" rtlCol="0" anchor="ctr"/>
-          <a:lstStyle/>
-          <a:p>
-            <a:pPr indent="0" marL="0">
-              <a:buNone/>
-            </a:pPr>
-            <a:r>
-              <a:rPr lang="en-US" sz="2600" b="1" dirty="0">
-                <a:solidFill>
-                  <a:schemeClr val="tx1"/>
-                </a:solidFill>
-              </a:rPr>
-              <a:t>기준값은 모델별로</a:t>
-            </a:r>
-            <a:endParaRPr lang="en-US" sz="2600" dirty="0"/>
-          </a:p>
-        </p:txBody>
-      </p:sp>
-      <p:sp>
-        <p:nvSpPr>
-          <p:cNvPr id="12" name="lesson-3"/>
-          <p:cNvSpPr/>
-          <p:nvPr/>
-        </p:nvSpPr>
-        <p:spPr>
-          <a:xfrm>
-            <a:off x="6190488" y="3977640"/>
-            <a:ext cx="5440680" cy="2194560"/>
-          </a:xfrm>
-          <a:prstGeom prst="roundRect">
-            <a:avLst>
-              <a:gd name="adj" fmla="val 3333"/>
-            </a:avLst>
-          </a:prstGeom>
-          <a:solidFill>
-            <a:schemeClr val="bg2"/>
-          </a:solidFill>
-          <a:ln/>
-        </p:spPr>
-      </p:sp>
-      <p:sp>
-        <p:nvSpPr>
-          <p:cNvPr id="13" name="lesson-n-3"/>
-          <p:cNvSpPr txBox="1"/>
-          <p:nvPr/>
-        </p:nvSpPr>
-        <p:spPr>
-          <a:xfrm>
-            <a:off x="6556248" y="3977640"/>
-            <a:ext cx="1188720" cy="2194560"/>
-          </a:xfrm>
-          <a:prstGeom prst="rect">
-            <a:avLst/>
-          </a:prstGeom>
-          <a:noFill/>
-          <a:ln/>
-        </p:spPr>
-        <p:txBody>
-          <a:bodyPr wrap="square" lIns="0" tIns="0" rIns="0" bIns="0" rtlCol="0" anchor="ctr"/>
-          <a:lstStyle/>
-          <a:p>
-            <a:pPr indent="0" marL="0">
-              <a:buNone/>
-            </a:pPr>
-            <a:r>
-              <a:rPr lang="en-US" sz="4400" b="1" dirty="0">
-                <a:solidFill>
-                  <a:schemeClr val="accent4"/>
-                </a:solidFill>
-              </a:rPr>
-              <a:t>04</a:t>
-            </a:r>
-            <a:endParaRPr lang="en-US" sz="4400" dirty="0"/>
-          </a:p>
-        </p:txBody>
-      </p:sp>
-      <p:sp>
-        <p:nvSpPr>
-          <p:cNvPr id="14" name="lesson-h-3"/>
-          <p:cNvSpPr txBox="1"/>
-          <p:nvPr/>
-        </p:nvSpPr>
-        <p:spPr>
-          <a:xfrm>
-            <a:off x="7836408" y="3977640"/>
-            <a:ext cx="3657600" cy="2194560"/>
-          </a:xfrm>
-          <a:prstGeom prst="rect">
-            <a:avLst/>
-          </a:prstGeom>
-          <a:noFill/>
-          <a:ln/>
-        </p:spPr>
-        <p:txBody>
-          <a:bodyPr wrap="square" lIns="0" tIns="0" rIns="0" bIns="0" rtlCol="0" anchor="ctr"/>
-          <a:lstStyle/>
-          <a:p>
-            <a:pPr indent="0" marL="0">
-              <a:buNone/>
-            </a:pPr>
-            <a:r>
-              <a:rPr lang="en-US" sz="2600" b="1" dirty="0">
-                <a:solidFill>
-                  <a:schemeClr val="tx1"/>
-                </a:solidFill>
-              </a:rPr>
-              <a:t>크기보다 맞는 모델</a:t>
-            </a:r>
-            <a:endParaRPr lang="en-US" sz="2600" dirty="0"/>
-          </a:p>
-        </p:txBody>
-      </p:sp>
-      <p:sp>
-        <p:nvSpPr>
-          <p:cNvPr id="25" name="Slide Number Placeholder 0"/>
-          <p:cNvSpPr>
-            <a:spLocks noGrp="1"/>
-          </p:cNvSpPr>
-          <p:nvPr>
-            <p:ph type="sldNum" sz="quarter" idx="4294967295"/>
-          </p:nvPr>
-        </p:nvSpPr>
-        <p:spPr>
-          <a:xfrm>
-            <a:off x="11094415" y="6419088"/>
-            <a:ext cx="548640" cy="274320"/>
-          </a:xfrm>
-          <a:prstGeom prst="rect">
-            <a:avLst/>
-          </a:prstGeom>
-          <a:extLst>
-            <a:ext uri="{C572A759-6A51-4108-AA02-DFA0A04FC94B}">
-              <ma14:wrappingTextBoxFlag xmlns:ma14="http://schemas.microsoft.com/office/mac/drawingml/2011/main" val="0"/>
-            </a:ext>
-          </a:extLst>
-        </p:spPr>
-        <p:txBody>
-          <a:bodyPr/>
-          <a:lstStyle>
-            <a:lvl1pPr>
-              <a:defRPr sz="1000">
-                <a:solidFill>
-                  <a:schemeClr val="tx2"/>
-                </a:solidFill>
-              </a:defRPr>
-            </a:lvl1pPr>
-          </a:lstStyle>
-          <a:p>
-            <a:pPr algn="r"/>
-            <a:fld id="{F7021451-1387-4CA6-816F-3879F97B5CBC}" type="slidenum">
-              <a:rPr b="0" lang="en-US"/>
               <a:t>11</a:t>
             </a:fld>
             <a:endParaRPr lang="en-US"/>
@@ -7243,6 +9374,490 @@
                   <a:schemeClr val="tx1"/>
                 </a:solidFill>
               </a:rPr>
+              <a:t>Lesson Learned</a:t>
+            </a:r>
+            <a:endParaRPr lang="en-US" sz="3200" dirty="0"/>
+          </a:p>
+        </p:txBody>
+      </p:sp>
+      <p:sp>
+        <p:nvSpPr>
+          <p:cNvPr id="3" name="lesson-0"/>
+          <p:cNvSpPr/>
+          <p:nvPr/>
+        </p:nvSpPr>
+        <p:spPr>
+          <a:xfrm>
+            <a:off x="548640" y="1600200"/>
+            <a:ext cx="5440680" cy="2194560"/>
+          </a:xfrm>
+          <a:prstGeom prst="roundRect">
+            <a:avLst>
+              <a:gd name="adj" fmla="val 3333"/>
+            </a:avLst>
+          </a:prstGeom>
+          <a:solidFill>
+            <a:schemeClr val="bg2"/>
+          </a:solidFill>
+          <a:ln/>
+        </p:spPr>
+      </p:sp>
+      <p:sp>
+        <p:nvSpPr>
+          <p:cNvPr id="4" name="lesson-n-0"/>
+          <p:cNvSpPr txBox="1"/>
+          <p:nvPr/>
+        </p:nvSpPr>
+        <p:spPr>
+          <a:xfrm>
+            <a:off x="914400" y="1600200"/>
+            <a:ext cx="1188720" cy="2194560"/>
+          </a:xfrm>
+          <a:prstGeom prst="rect">
+            <a:avLst/>
+          </a:prstGeom>
+          <a:noFill/>
+          <a:ln/>
+        </p:spPr>
+        <p:txBody>
+          <a:bodyPr wrap="square" lIns="0" tIns="0" rIns="0" bIns="0" rtlCol="0" anchor="ctr"/>
+          <a:lstStyle/>
+          <a:p>
+            <a:pPr indent="0" marL="0">
+              <a:buNone/>
+            </a:pPr>
+            <a:r>
+              <a:rPr lang="en-US" sz="4400" b="1" dirty="0">
+                <a:solidFill>
+                  <a:schemeClr val="accent1"/>
+                </a:solidFill>
+              </a:rPr>
+              <a:t>01</a:t>
+            </a:r>
+            <a:endParaRPr lang="en-US" sz="4400" dirty="0"/>
+          </a:p>
+        </p:txBody>
+      </p:sp>
+      <p:sp>
+        <p:nvSpPr>
+          <p:cNvPr id="5" name="lesson-h-0"/>
+          <p:cNvSpPr txBox="1"/>
+          <p:nvPr/>
+        </p:nvSpPr>
+        <p:spPr>
+          <a:xfrm>
+            <a:off x="2194560" y="1600200"/>
+            <a:ext cx="3657600" cy="2194560"/>
+          </a:xfrm>
+          <a:prstGeom prst="rect">
+            <a:avLst/>
+          </a:prstGeom>
+          <a:noFill/>
+          <a:ln/>
+        </p:spPr>
+        <p:txBody>
+          <a:bodyPr wrap="square" lIns="0" tIns="0" rIns="0" bIns="0" rtlCol="0" anchor="ctr"/>
+          <a:lstStyle/>
+          <a:p>
+            <a:pPr indent="0" marL="0">
+              <a:buNone/>
+            </a:pPr>
+            <a:r>
+              <a:rPr lang="en-US" sz="2600" b="1" dirty="0">
+                <a:solidFill>
+                  <a:schemeClr val="tx1"/>
+                </a:solidFill>
+              </a:rPr>
+              <a:t>테스트셋 먼저 분리</a:t>
+            </a:r>
+            <a:endParaRPr lang="en-US" sz="2600" dirty="0"/>
+          </a:p>
+        </p:txBody>
+      </p:sp>
+      <p:sp>
+        <p:nvSpPr>
+          <p:cNvPr id="6" name="lesson-1"/>
+          <p:cNvSpPr/>
+          <p:nvPr/>
+        </p:nvSpPr>
+        <p:spPr>
+          <a:xfrm>
+            <a:off x="6190488" y="1600200"/>
+            <a:ext cx="5440680" cy="2194560"/>
+          </a:xfrm>
+          <a:prstGeom prst="roundRect">
+            <a:avLst>
+              <a:gd name="adj" fmla="val 3333"/>
+            </a:avLst>
+          </a:prstGeom>
+          <a:solidFill>
+            <a:schemeClr val="bg2"/>
+          </a:solidFill>
+          <a:ln/>
+        </p:spPr>
+      </p:sp>
+      <p:sp>
+        <p:nvSpPr>
+          <p:cNvPr id="7" name="lesson-n-1"/>
+          <p:cNvSpPr txBox="1"/>
+          <p:nvPr/>
+        </p:nvSpPr>
+        <p:spPr>
+          <a:xfrm>
+            <a:off x="6556248" y="1600200"/>
+            <a:ext cx="1188720" cy="2194560"/>
+          </a:xfrm>
+          <a:prstGeom prst="rect">
+            <a:avLst/>
+          </a:prstGeom>
+          <a:noFill/>
+          <a:ln/>
+        </p:spPr>
+        <p:txBody>
+          <a:bodyPr wrap="square" lIns="0" tIns="0" rIns="0" bIns="0" rtlCol="0" anchor="ctr"/>
+          <a:lstStyle/>
+          <a:p>
+            <a:pPr indent="0" marL="0">
+              <a:buNone/>
+            </a:pPr>
+            <a:r>
+              <a:rPr lang="en-US" sz="4400" b="1" dirty="0">
+                <a:solidFill>
+                  <a:schemeClr val="accent2"/>
+                </a:solidFill>
+              </a:rPr>
+              <a:t>02</a:t>
+            </a:r>
+            <a:endParaRPr lang="en-US" sz="4400" dirty="0"/>
+          </a:p>
+        </p:txBody>
+      </p:sp>
+      <p:sp>
+        <p:nvSpPr>
+          <p:cNvPr id="8" name="lesson-h-1"/>
+          <p:cNvSpPr txBox="1"/>
+          <p:nvPr/>
+        </p:nvSpPr>
+        <p:spPr>
+          <a:xfrm>
+            <a:off x="7836408" y="1600200"/>
+            <a:ext cx="3657600" cy="2194560"/>
+          </a:xfrm>
+          <a:prstGeom prst="rect">
+            <a:avLst/>
+          </a:prstGeom>
+          <a:noFill/>
+          <a:ln/>
+        </p:spPr>
+        <p:txBody>
+          <a:bodyPr wrap="square" lIns="0" tIns="0" rIns="0" bIns="0" rtlCol="0" anchor="ctr"/>
+          <a:lstStyle/>
+          <a:p>
+            <a:pPr indent="0" marL="0">
+              <a:buNone/>
+            </a:pPr>
+            <a:r>
+              <a:rPr lang="en-US" sz="2600" b="1" dirty="0">
+                <a:solidFill>
+                  <a:schemeClr val="tx1"/>
+                </a:solidFill>
+              </a:rPr>
+              <a:t>새 환경은 새로 검증</a:t>
+            </a:r>
+            <a:endParaRPr lang="en-US" sz="2600" dirty="0"/>
+          </a:p>
+        </p:txBody>
+      </p:sp>
+      <p:sp>
+        <p:nvSpPr>
+          <p:cNvPr id="9" name="lesson-2"/>
+          <p:cNvSpPr/>
+          <p:nvPr/>
+        </p:nvSpPr>
+        <p:spPr>
+          <a:xfrm>
+            <a:off x="548640" y="3977640"/>
+            <a:ext cx="5440680" cy="2194560"/>
+          </a:xfrm>
+          <a:prstGeom prst="roundRect">
+            <a:avLst>
+              <a:gd name="adj" fmla="val 3333"/>
+            </a:avLst>
+          </a:prstGeom>
+          <a:solidFill>
+            <a:schemeClr val="bg2"/>
+          </a:solidFill>
+          <a:ln/>
+        </p:spPr>
+      </p:sp>
+      <p:sp>
+        <p:nvSpPr>
+          <p:cNvPr id="10" name="lesson-n-2"/>
+          <p:cNvSpPr txBox="1"/>
+          <p:nvPr/>
+        </p:nvSpPr>
+        <p:spPr>
+          <a:xfrm>
+            <a:off x="914400" y="3977640"/>
+            <a:ext cx="1188720" cy="2194560"/>
+          </a:xfrm>
+          <a:prstGeom prst="rect">
+            <a:avLst/>
+          </a:prstGeom>
+          <a:noFill/>
+          <a:ln/>
+        </p:spPr>
+        <p:txBody>
+          <a:bodyPr wrap="square" lIns="0" tIns="0" rIns="0" bIns="0" rtlCol="0" anchor="ctr"/>
+          <a:lstStyle/>
+          <a:p>
+            <a:pPr indent="0" marL="0">
+              <a:buNone/>
+            </a:pPr>
+            <a:r>
+              <a:rPr lang="en-US" sz="4400" b="1" dirty="0">
+                <a:solidFill>
+                  <a:schemeClr val="accent3"/>
+                </a:solidFill>
+              </a:rPr>
+              <a:t>03</a:t>
+            </a:r>
+            <a:endParaRPr lang="en-US" sz="4400" dirty="0"/>
+          </a:p>
+        </p:txBody>
+      </p:sp>
+      <p:sp>
+        <p:nvSpPr>
+          <p:cNvPr id="11" name="lesson-h-2"/>
+          <p:cNvSpPr txBox="1"/>
+          <p:nvPr/>
+        </p:nvSpPr>
+        <p:spPr>
+          <a:xfrm>
+            <a:off x="2194560" y="3977640"/>
+            <a:ext cx="3657600" cy="2194560"/>
+          </a:xfrm>
+          <a:prstGeom prst="rect">
+            <a:avLst/>
+          </a:prstGeom>
+          <a:noFill/>
+          <a:ln/>
+        </p:spPr>
+        <p:txBody>
+          <a:bodyPr wrap="square" lIns="0" tIns="0" rIns="0" bIns="0" rtlCol="0" anchor="ctr"/>
+          <a:lstStyle/>
+          <a:p>
+            <a:pPr indent="0" marL="0">
+              <a:buNone/>
+            </a:pPr>
+            <a:r>
+              <a:rPr lang="en-US" sz="2600" b="1" dirty="0">
+                <a:solidFill>
+                  <a:schemeClr val="tx1"/>
+                </a:solidFill>
+              </a:rPr>
+              <a:t>기준값은 모델별로</a:t>
+            </a:r>
+            <a:endParaRPr lang="en-US" sz="2600" dirty="0"/>
+          </a:p>
+        </p:txBody>
+      </p:sp>
+      <p:sp>
+        <p:nvSpPr>
+          <p:cNvPr id="12" name="lesson-3"/>
+          <p:cNvSpPr/>
+          <p:nvPr/>
+        </p:nvSpPr>
+        <p:spPr>
+          <a:xfrm>
+            <a:off x="6190488" y="3977640"/>
+            <a:ext cx="5440680" cy="2194560"/>
+          </a:xfrm>
+          <a:prstGeom prst="roundRect">
+            <a:avLst>
+              <a:gd name="adj" fmla="val 3333"/>
+            </a:avLst>
+          </a:prstGeom>
+          <a:solidFill>
+            <a:schemeClr val="bg2"/>
+          </a:solidFill>
+          <a:ln/>
+        </p:spPr>
+      </p:sp>
+      <p:sp>
+        <p:nvSpPr>
+          <p:cNvPr id="13" name="lesson-n-3"/>
+          <p:cNvSpPr txBox="1"/>
+          <p:nvPr/>
+        </p:nvSpPr>
+        <p:spPr>
+          <a:xfrm>
+            <a:off x="6556248" y="3977640"/>
+            <a:ext cx="1188720" cy="2194560"/>
+          </a:xfrm>
+          <a:prstGeom prst="rect">
+            <a:avLst/>
+          </a:prstGeom>
+          <a:noFill/>
+          <a:ln/>
+        </p:spPr>
+        <p:txBody>
+          <a:bodyPr wrap="square" lIns="0" tIns="0" rIns="0" bIns="0" rtlCol="0" anchor="ctr"/>
+          <a:lstStyle/>
+          <a:p>
+            <a:pPr indent="0" marL="0">
+              <a:buNone/>
+            </a:pPr>
+            <a:r>
+              <a:rPr lang="en-US" sz="4400" b="1" dirty="0">
+                <a:solidFill>
+                  <a:schemeClr val="accent4"/>
+                </a:solidFill>
+              </a:rPr>
+              <a:t>04</a:t>
+            </a:r>
+            <a:endParaRPr lang="en-US" sz="4400" dirty="0"/>
+          </a:p>
+        </p:txBody>
+      </p:sp>
+      <p:sp>
+        <p:nvSpPr>
+          <p:cNvPr id="14" name="lesson-h-3"/>
+          <p:cNvSpPr txBox="1"/>
+          <p:nvPr/>
+        </p:nvSpPr>
+        <p:spPr>
+          <a:xfrm>
+            <a:off x="7836408" y="3977640"/>
+            <a:ext cx="3657600" cy="2194560"/>
+          </a:xfrm>
+          <a:prstGeom prst="rect">
+            <a:avLst/>
+          </a:prstGeom>
+          <a:noFill/>
+          <a:ln/>
+        </p:spPr>
+        <p:txBody>
+          <a:bodyPr wrap="square" lIns="0" tIns="0" rIns="0" bIns="0" rtlCol="0" anchor="ctr"/>
+          <a:lstStyle/>
+          <a:p>
+            <a:pPr indent="0" marL="0">
+              <a:buNone/>
+            </a:pPr>
+            <a:r>
+              <a:rPr lang="en-US" sz="2600" b="1" dirty="0">
+                <a:solidFill>
+                  <a:schemeClr val="tx1"/>
+                </a:solidFill>
+              </a:rPr>
+              <a:t>크기보다 맞는 모델</a:t>
+            </a:r>
+            <a:endParaRPr lang="en-US" sz="2600" dirty="0"/>
+          </a:p>
+        </p:txBody>
+      </p:sp>
+      <p:sp>
+        <p:nvSpPr>
+          <p:cNvPr id="25" name="Slide Number Placeholder 0"/>
+          <p:cNvSpPr>
+            <a:spLocks noGrp="1"/>
+          </p:cNvSpPr>
+          <p:nvPr>
+            <p:ph type="sldNum" sz="quarter" idx="4294967295"/>
+          </p:nvPr>
+        </p:nvSpPr>
+        <p:spPr>
+          <a:xfrm>
+            <a:off x="11094415" y="6419088"/>
+            <a:ext cx="548640" cy="274320"/>
+          </a:xfrm>
+          <a:prstGeom prst="rect">
+            <a:avLst/>
+          </a:prstGeom>
+          <a:extLst>
+            <a:ext uri="{C572A759-6A51-4108-AA02-DFA0A04FC94B}">
+              <ma14:wrappingTextBoxFlag xmlns:ma14="http://schemas.microsoft.com/office/mac/drawingml/2011/main" val="0"/>
+            </a:ext>
+          </a:extLst>
+        </p:spPr>
+        <p:txBody>
+          <a:bodyPr/>
+          <a:lstStyle>
+            <a:lvl1pPr>
+              <a:defRPr sz="1000">
+                <a:solidFill>
+                  <a:schemeClr val="tx2"/>
+                </a:solidFill>
+              </a:defRPr>
+            </a:lvl1pPr>
+          </a:lstStyle>
+          <a:p>
+            <a:pPr algn="r"/>
+            <a:fld id="{F7021451-1387-4CA6-816F-3879F97B5CBC}" type="slidenum">
+              <a:rPr b="0" lang="en-US"/>
+              <a:t>12</a:t>
+            </a:fld>
+            <a:endParaRPr lang="en-US"/>
+          </a:p>
+        </p:txBody>
+      </p:sp>
+    </p:spTree>
+  </p:cSld>
+  <p:clrMapOvr>
+    <a:masterClrMapping/>
+  </p:clrMapOvr>
+</p:sld>
+</file>
+
+<file path=ppt/slides/slide13.xml><?xml version="1.0" encoding="utf-8"?>
+<p:sld xmlns:a="http://schemas.openxmlformats.org/drawingml/2006/main" xmlns:r="http://schemas.openxmlformats.org/officeDocument/2006/relationships" xmlns:p="http://schemas.openxmlformats.org/presentationml/2006/main">
+  <p:cSld name="Slide 13">
+    <p:spTree>
+      <p:nvGrpSpPr>
+        <p:cNvPr id="1" name=""/>
+        <p:cNvGrpSpPr/>
+        <p:nvPr/>
+      </p:nvGrpSpPr>
+      <p:grpSpPr>
+        <a:xfrm>
+          <a:off x="0" y="0"/>
+          <a:ext cx="0" cy="0"/>
+          <a:chOff x="0" y="0"/>
+          <a:chExt cx="0" cy="0"/>
+        </a:xfrm>
+      </p:grpSpPr>
+      <p:sp>
+        <p:nvSpPr>
+          <p:cNvPr id="2" name="Text 0"/>
+          <p:cNvSpPr/>
+          <p:nvPr>
+            <p:ph idx="100" type="title" hasCustomPrompt="1"/>
+          </p:nvPr>
+        </p:nvSpPr>
+        <p:spPr>
+          <a:xfrm>
+            <a:off x="548640" y="347472"/>
+            <a:ext cx="11094415" cy="685800"/>
+          </a:xfrm>
+          <a:prstGeom prst="rect">
+            <a:avLst/>
+          </a:prstGeom>
+          <a:noFill/>
+          <a:ln/>
+        </p:spPr>
+        <p:txBody>
+          <a:bodyPr wrap="square" lIns="0" tIns="0" rIns="0" bIns="0" rtlCol="0" anchor="ctr"/>
+          <a:lstStyle/>
+          <a:p>
+            <a:pPr algn="l" indent="0" marL="0">
+              <a:buNone/>
+            </a:pPr>
+            <a:r>
+              <a:rPr lang="en-US" sz="3200" b="1" dirty="0">
+                <a:solidFill>
+                  <a:schemeClr val="tx1"/>
+                </a:solidFill>
+              </a:rPr>
               <a:t>데모</a:t>
             </a:r>
             <a:endParaRPr lang="en-US" sz="3200" dirty="0"/>
@@ -7427,7 +10042,7 @@
             <a:pPr algn="r"/>
             <a:fld id="{F7021451-1387-4CA6-816F-3879F97B5CBC}" type="slidenum">
               <a:rPr b="0" lang="en-US"/>
-              <a:t>12</a:t>
+              <a:t>13</a:t>
             </a:fld>
             <a:endParaRPr lang="en-US"/>
           </a:p>
@@ -7441,9 +10056,9 @@
 </p:sld>
 </file>
 
-<file path=ppt/slides/slide13.xml><?xml version="1.0" encoding="utf-8"?>
+<file path=ppt/slides/slide14.xml><?xml version="1.0" encoding="utf-8"?>
 <p:sld xmlns:a="http://schemas.openxmlformats.org/drawingml/2006/main" xmlns:r="http://schemas.openxmlformats.org/officeDocument/2006/relationships" xmlns:p="http://schemas.openxmlformats.org/presentationml/2006/main">
-  <p:cSld name="Slide 13">
+  <p:cSld name="Slide 14">
     <p:spTree>
       <p:nvGrpSpPr>
         <p:cNvPr id="1" name=""/>
@@ -10257,7 +12872,7 @@
                   <a:schemeClr val="tx2"/>
                 </a:solidFill>
               </a:rPr>
-              <a:t>1차 테스트 93%, but 학습 데이터</a:t>
+              <a:t>1차 테스트 93%, but 과적합 학습 데이터</a:t>
             </a:r>
             <a:endParaRPr lang="en-US" sz="1500" dirty="0"/>
           </a:p>
@@ -13842,7 +16457,7 @@
                   <a:schemeClr val="tx2"/>
                 </a:solidFill>
               </a:rPr>
-              <a:t>적중 </a:t>
+              <a:t>위치 </a:t>
             </a:r>
             <a:pPr indent="0" marL="0">
               <a:buNone/>
@@ -13944,7 +16559,7 @@
                   <a:schemeClr val="tx2"/>
                 </a:solidFill>
               </a:rPr>
-              <a:t>적중 </a:t>
+              <a:t>위치 </a:t>
             </a:r>
             <a:pPr indent="0" marL="0">
               <a:buNone/>
@@ -13958,6 +16573,71 @@
               <a:t>98%</a:t>
             </a:r>
             <a:endParaRPr lang="en-US" sz="1400" dirty="0"/>
+          </a:p>
+        </p:txBody>
+      </p:sp>
+      <p:sp>
+        <p:nvSpPr>
+          <p:cNvPr id="31" name="heat-vs-acc-bg"/>
+          <p:cNvSpPr/>
+          <p:nvPr/>
+        </p:nvSpPr>
+        <p:spPr>
+          <a:xfrm>
+            <a:off x="6263640" y="5532120"/>
+            <a:ext cx="5376672" cy="457200"/>
+          </a:xfrm>
+          <a:prstGeom prst="roundRect">
+            <a:avLst>
+              <a:gd name="adj" fmla="val 10000"/>
+            </a:avLst>
+          </a:prstGeom>
+          <a:solidFill>
+            <a:schemeClr val="accent3">
+              <a:alpha val="20000"/>
+            </a:schemeClr>
+          </a:solidFill>
+          <a:ln w="12700">
+            <a:solidFill>
+              <a:schemeClr val="accent3"/>
+            </a:solidFill>
+            <a:prstDash val="solid"/>
+          </a:ln>
+        </p:spPr>
+      </p:sp>
+      <p:sp>
+        <p:nvSpPr>
+          <p:cNvPr id="32" name="heat-vs-acc"/>
+          <p:cNvSpPr txBox="1"/>
+          <p:nvPr/>
+        </p:nvSpPr>
+        <p:spPr>
+          <a:xfrm>
+            <a:off x="6263640" y="5532120"/>
+            <a:ext cx="5376672" cy="457200"/>
+          </a:xfrm>
+          <a:prstGeom prst="rect">
+            <a:avLst/>
+          </a:prstGeom>
+          <a:noFill/>
+          <a:ln/>
+        </p:spPr>
+        <p:txBody>
+          <a:bodyPr wrap="square" lIns="0" tIns="0" rIns="0" bIns="0" rtlCol="0" anchor="ctr"/>
+          <a:lstStyle/>
+          <a:p>
+            <a:pPr algn="ctr" indent="0" marL="0">
+              <a:buNone/>
+            </a:pPr>
+            <a:r>
+              <a:rPr lang="en-US" sz="1300" b="1" dirty="0">
+                <a:solidFill>
+                  <a:schemeClr val="accent3"/>
+                </a:solidFill>
+              </a:rPr>
+              <a:t>heatmap 위치 ≠ 탐지 정확도 · 놓친 scratch: ATSS 19 · YOLOX-S 28</a:t>
+            </a:r>
+            <a:endParaRPr lang="en-US" sz="1300" dirty="0"/>
           </a:p>
         </p:txBody>
       </p:sp>
@@ -14063,6 +16743,1046 @@
                   <a:schemeClr val="tx1"/>
                 </a:solidFill>
               </a:rPr>
+              <a:t>벤치마크</a:t>
+            </a:r>
+            <a:endParaRPr lang="en-US" sz="3200" dirty="0"/>
+          </a:p>
+        </p:txBody>
+      </p:sp>
+      <p:sp>
+        <p:nvSpPr>
+          <p:cNvPr id="3" name="flow-0-bg"/>
+          <p:cNvSpPr/>
+          <p:nvPr/>
+        </p:nvSpPr>
+        <p:spPr>
+          <a:xfrm>
+            <a:off x="548640" y="1600200"/>
+            <a:ext cx="2423160" cy="502920"/>
+          </a:xfrm>
+          <a:prstGeom prst="roundRect">
+            <a:avLst>
+              <a:gd name="adj" fmla="val 9091"/>
+            </a:avLst>
+          </a:prstGeom>
+          <a:solidFill>
+            <a:schemeClr val="accent1">
+              <a:alpha val="20000"/>
+            </a:schemeClr>
+          </a:solidFill>
+          <a:ln w="12700">
+            <a:solidFill>
+              <a:schemeClr val="accent1"/>
+            </a:solidFill>
+            <a:prstDash val="solid"/>
+          </a:ln>
+        </p:spPr>
+      </p:sp>
+      <p:sp>
+        <p:nvSpPr>
+          <p:cNvPr id="4" name="flow-0"/>
+          <p:cNvSpPr txBox="1"/>
+          <p:nvPr/>
+        </p:nvSpPr>
+        <p:spPr>
+          <a:xfrm>
+            <a:off x="548640" y="1600200"/>
+            <a:ext cx="2423160" cy="502920"/>
+          </a:xfrm>
+          <a:prstGeom prst="rect">
+            <a:avLst/>
+          </a:prstGeom>
+          <a:noFill/>
+          <a:ln/>
+        </p:spPr>
+        <p:txBody>
+          <a:bodyPr wrap="square" lIns="0" tIns="0" rIns="0" bIns="0" rtlCol="0" anchor="ctr"/>
+          <a:lstStyle/>
+          <a:p>
+            <a:pPr algn="ctr" indent="0" marL="0">
+              <a:buNone/>
+            </a:pPr>
+            <a:r>
+              <a:rPr lang="en-US" sz="1300" b="1" dirty="0">
+                <a:solidFill>
+                  <a:schemeClr val="accent1"/>
+                </a:solidFill>
+              </a:rPr>
+              <a:t>모델 9개</a:t>
+            </a:r>
+            <a:endParaRPr lang="en-US" sz="1300" dirty="0"/>
+          </a:p>
+        </p:txBody>
+      </p:sp>
+      <p:sp>
+        <p:nvSpPr>
+          <p:cNvPr id="5" name="flow-arrow-0"/>
+          <p:cNvSpPr txBox="1"/>
+          <p:nvPr/>
+        </p:nvSpPr>
+        <p:spPr>
+          <a:xfrm>
+            <a:off x="2971800" y="1600200"/>
+            <a:ext cx="429768" cy="502920"/>
+          </a:xfrm>
+          <a:prstGeom prst="rect">
+            <a:avLst/>
+          </a:prstGeom>
+          <a:noFill/>
+          <a:ln/>
+        </p:spPr>
+        <p:txBody>
+          <a:bodyPr wrap="square" lIns="0" tIns="0" rIns="0" bIns="0" rtlCol="0" anchor="ctr"/>
+          <a:lstStyle/>
+          <a:p>
+            <a:pPr algn="ctr" indent="0" marL="0">
+              <a:buNone/>
+            </a:pPr>
+            <a:r>
+              <a:rPr lang="en-US" sz="2000" b="1" dirty="0">
+                <a:solidFill>
+                  <a:schemeClr val="tx2"/>
+                </a:solidFill>
+              </a:rPr>
+              <a:t>→</a:t>
+            </a:r>
+            <a:endParaRPr lang="en-US" sz="2000" dirty="0"/>
+          </a:p>
+        </p:txBody>
+      </p:sp>
+      <p:sp>
+        <p:nvSpPr>
+          <p:cNvPr id="6" name="flow-1-bg"/>
+          <p:cNvSpPr/>
+          <p:nvPr/>
+        </p:nvSpPr>
+        <p:spPr>
+          <a:xfrm>
+            <a:off x="3401568" y="1600200"/>
+            <a:ext cx="2423160" cy="502920"/>
+          </a:xfrm>
+          <a:prstGeom prst="roundRect">
+            <a:avLst>
+              <a:gd name="adj" fmla="val 9091"/>
+            </a:avLst>
+          </a:prstGeom>
+          <a:solidFill>
+            <a:schemeClr val="accent1">
+              <a:alpha val="20000"/>
+            </a:schemeClr>
+          </a:solidFill>
+          <a:ln w="12700">
+            <a:solidFill>
+              <a:schemeClr val="accent1"/>
+            </a:solidFill>
+            <a:prstDash val="solid"/>
+          </a:ln>
+        </p:spPr>
+      </p:sp>
+      <p:sp>
+        <p:nvSpPr>
+          <p:cNvPr id="7" name="flow-1"/>
+          <p:cNvSpPr txBox="1"/>
+          <p:nvPr/>
+        </p:nvSpPr>
+        <p:spPr>
+          <a:xfrm>
+            <a:off x="3401568" y="1600200"/>
+            <a:ext cx="2423160" cy="502920"/>
+          </a:xfrm>
+          <a:prstGeom prst="rect">
+            <a:avLst/>
+          </a:prstGeom>
+          <a:noFill/>
+          <a:ln/>
+        </p:spPr>
+        <p:txBody>
+          <a:bodyPr wrap="square" lIns="0" tIns="0" rIns="0" bIns="0" rtlCol="0" anchor="ctr"/>
+          <a:lstStyle/>
+          <a:p>
+            <a:pPr algn="ctr" indent="0" marL="0">
+              <a:buNone/>
+            </a:pPr>
+            <a:r>
+              <a:rPr lang="en-US" sz="1300" b="1" dirty="0">
+                <a:solidFill>
+                  <a:schemeClr val="accent1"/>
+                </a:solidFill>
+              </a:rPr>
+              <a:t>131장 + 45장 · 같은 기준</a:t>
+            </a:r>
+            <a:endParaRPr lang="en-US" sz="1300" dirty="0"/>
+          </a:p>
+        </p:txBody>
+      </p:sp>
+      <p:sp>
+        <p:nvSpPr>
+          <p:cNvPr id="8" name="flow-arrow-1"/>
+          <p:cNvSpPr txBox="1"/>
+          <p:nvPr/>
+        </p:nvSpPr>
+        <p:spPr>
+          <a:xfrm>
+            <a:off x="5824728" y="1600200"/>
+            <a:ext cx="429768" cy="502920"/>
+          </a:xfrm>
+          <a:prstGeom prst="rect">
+            <a:avLst/>
+          </a:prstGeom>
+          <a:noFill/>
+          <a:ln/>
+        </p:spPr>
+        <p:txBody>
+          <a:bodyPr wrap="square" lIns="0" tIns="0" rIns="0" bIns="0" rtlCol="0" anchor="ctr"/>
+          <a:lstStyle/>
+          <a:p>
+            <a:pPr algn="ctr" indent="0" marL="0">
+              <a:buNone/>
+            </a:pPr>
+            <a:r>
+              <a:rPr lang="en-US" sz="2000" b="1" dirty="0">
+                <a:solidFill>
+                  <a:schemeClr val="tx2"/>
+                </a:solidFill>
+              </a:rPr>
+              <a:t>→</a:t>
+            </a:r>
+            <a:endParaRPr lang="en-US" sz="2000" dirty="0"/>
+          </a:p>
+        </p:txBody>
+      </p:sp>
+      <p:sp>
+        <p:nvSpPr>
+          <p:cNvPr id="9" name="flow-2-bg"/>
+          <p:cNvSpPr/>
+          <p:nvPr/>
+        </p:nvSpPr>
+        <p:spPr>
+          <a:xfrm>
+            <a:off x="6254496" y="1600200"/>
+            <a:ext cx="2423160" cy="502920"/>
+          </a:xfrm>
+          <a:prstGeom prst="roundRect">
+            <a:avLst>
+              <a:gd name="adj" fmla="val 9091"/>
+            </a:avLst>
+          </a:prstGeom>
+          <a:solidFill>
+            <a:schemeClr val="accent3">
+              <a:alpha val="20000"/>
+            </a:schemeClr>
+          </a:solidFill>
+          <a:ln w="12700">
+            <a:solidFill>
+              <a:schemeClr val="accent3"/>
+            </a:solidFill>
+            <a:prstDash val="solid"/>
+          </a:ln>
+        </p:spPr>
+      </p:sp>
+      <p:sp>
+        <p:nvSpPr>
+          <p:cNvPr id="10" name="flow-2"/>
+          <p:cNvSpPr txBox="1"/>
+          <p:nvPr/>
+        </p:nvSpPr>
+        <p:spPr>
+          <a:xfrm>
+            <a:off x="6254496" y="1600200"/>
+            <a:ext cx="2423160" cy="502920"/>
+          </a:xfrm>
+          <a:prstGeom prst="rect">
+            <a:avLst/>
+          </a:prstGeom>
+          <a:noFill/>
+          <a:ln/>
+        </p:spPr>
+        <p:txBody>
+          <a:bodyPr wrap="square" lIns="0" tIns="0" rIns="0" bIns="0" rtlCol="0" anchor="ctr"/>
+          <a:lstStyle/>
+          <a:p>
+            <a:pPr algn="ctr" indent="0" marL="0">
+              <a:buNone/>
+            </a:pPr>
+            <a:r>
+              <a:rPr lang="en-US" sz="1300" b="1" dirty="0">
+                <a:solidFill>
+                  <a:schemeClr val="accent3"/>
+                </a:solidFill>
+              </a:rPr>
+              <a:t>benchmark.py</a:t>
+            </a:r>
+            <a:endParaRPr lang="en-US" sz="1300" dirty="0"/>
+          </a:p>
+        </p:txBody>
+      </p:sp>
+      <p:sp>
+        <p:nvSpPr>
+          <p:cNvPr id="11" name="flow-arrow-2"/>
+          <p:cNvSpPr txBox="1"/>
+          <p:nvPr/>
+        </p:nvSpPr>
+        <p:spPr>
+          <a:xfrm>
+            <a:off x="8677656" y="1600200"/>
+            <a:ext cx="429768" cy="502920"/>
+          </a:xfrm>
+          <a:prstGeom prst="rect">
+            <a:avLst/>
+          </a:prstGeom>
+          <a:noFill/>
+          <a:ln/>
+        </p:spPr>
+        <p:txBody>
+          <a:bodyPr wrap="square" lIns="0" tIns="0" rIns="0" bIns="0" rtlCol="0" anchor="ctr"/>
+          <a:lstStyle/>
+          <a:p>
+            <a:pPr algn="ctr" indent="0" marL="0">
+              <a:buNone/>
+            </a:pPr>
+            <a:r>
+              <a:rPr lang="en-US" sz="2000" b="1" dirty="0">
+                <a:solidFill>
+                  <a:schemeClr val="tx2"/>
+                </a:solidFill>
+              </a:rPr>
+              <a:t>→</a:t>
+            </a:r>
+            <a:endParaRPr lang="en-US" sz="2000" dirty="0"/>
+          </a:p>
+        </p:txBody>
+      </p:sp>
+      <p:sp>
+        <p:nvSpPr>
+          <p:cNvPr id="12" name="flow-3-bg"/>
+          <p:cNvSpPr/>
+          <p:nvPr/>
+        </p:nvSpPr>
+        <p:spPr>
+          <a:xfrm>
+            <a:off x="9107424" y="1600200"/>
+            <a:ext cx="2423160" cy="502920"/>
+          </a:xfrm>
+          <a:prstGeom prst="roundRect">
+            <a:avLst>
+              <a:gd name="adj" fmla="val 9091"/>
+            </a:avLst>
+          </a:prstGeom>
+          <a:solidFill>
+            <a:schemeClr val="accent6">
+              <a:alpha val="20000"/>
+            </a:schemeClr>
+          </a:solidFill>
+          <a:ln w="12700">
+            <a:solidFill>
+              <a:schemeClr val="accent6"/>
+            </a:solidFill>
+            <a:prstDash val="solid"/>
+          </a:ln>
+        </p:spPr>
+      </p:sp>
+      <p:sp>
+        <p:nvSpPr>
+          <p:cNvPr id="13" name="flow-3"/>
+          <p:cNvSpPr txBox="1"/>
+          <p:nvPr/>
+        </p:nvSpPr>
+        <p:spPr>
+          <a:xfrm>
+            <a:off x="9107424" y="1600200"/>
+            <a:ext cx="2423160" cy="502920"/>
+          </a:xfrm>
+          <a:prstGeom prst="rect">
+            <a:avLst/>
+          </a:prstGeom>
+          <a:noFill/>
+          <a:ln/>
+        </p:spPr>
+        <p:txBody>
+          <a:bodyPr wrap="square" lIns="0" tIns="0" rIns="0" bIns="0" rtlCol="0" anchor="ctr"/>
+          <a:lstStyle/>
+          <a:p>
+            <a:pPr algn="ctr" indent="0" marL="0">
+              <a:buNone/>
+            </a:pPr>
+            <a:r>
+              <a:rPr lang="en-US" sz="1300" b="1" dirty="0">
+                <a:solidFill>
+                  <a:schemeClr val="accent6"/>
+                </a:solidFill>
+              </a:rPr>
+              <a:t>결과 JSON → 대시보드</a:t>
+            </a:r>
+            <a:endParaRPr lang="en-US" sz="1300" dirty="0"/>
+          </a:p>
+        </p:txBody>
+      </p:sp>
+      <p:sp>
+        <p:nvSpPr>
+          <p:cNvPr id="14" name="bm-0"/>
+          <p:cNvSpPr/>
+          <p:nvPr/>
+        </p:nvSpPr>
+        <p:spPr>
+          <a:xfrm>
+            <a:off x="548640" y="2423160"/>
+            <a:ext cx="3566160" cy="1783080"/>
+          </a:xfrm>
+          <a:prstGeom prst="roundRect">
+            <a:avLst>
+              <a:gd name="adj" fmla="val 4103"/>
+            </a:avLst>
+          </a:prstGeom>
+          <a:solidFill>
+            <a:schemeClr val="bg2"/>
+          </a:solidFill>
+          <a:ln/>
+        </p:spPr>
+      </p:sp>
+      <p:sp>
+        <p:nvSpPr>
+          <p:cNvPr id="15" name="bm-h-0"/>
+          <p:cNvSpPr txBox="1"/>
+          <p:nvPr/>
+        </p:nvSpPr>
+        <p:spPr>
+          <a:xfrm>
+            <a:off x="822960" y="2697480"/>
+            <a:ext cx="3017520" cy="457200"/>
+          </a:xfrm>
+          <a:prstGeom prst="rect">
+            <a:avLst/>
+          </a:prstGeom>
+          <a:noFill/>
+          <a:ln/>
+        </p:spPr>
+        <p:txBody>
+          <a:bodyPr wrap="square" lIns="0" tIns="0" rIns="0" bIns="0" rtlCol="0" anchor="t"/>
+          <a:lstStyle/>
+          <a:p>
+            <a:pPr indent="0" marL="0">
+              <a:buNone/>
+            </a:pPr>
+            <a:r>
+              <a:rPr lang="en-US" sz="2200" b="1" dirty="0">
+                <a:solidFill>
+                  <a:schemeClr val="accent4"/>
+                </a:solidFill>
+              </a:rPr>
+              <a:t>정확도</a:t>
+            </a:r>
+            <a:endParaRPr lang="en-US" sz="2200" dirty="0"/>
+          </a:p>
+        </p:txBody>
+      </p:sp>
+      <p:sp>
+        <p:nvSpPr>
+          <p:cNvPr id="16" name="bm-d-0"/>
+          <p:cNvSpPr txBox="1"/>
+          <p:nvPr/>
+        </p:nvSpPr>
+        <p:spPr>
+          <a:xfrm>
+            <a:off x="822960" y="3337560"/>
+            <a:ext cx="3017520" cy="548640"/>
+          </a:xfrm>
+          <a:prstGeom prst="rect">
+            <a:avLst/>
+          </a:prstGeom>
+          <a:noFill/>
+          <a:ln/>
+        </p:spPr>
+        <p:txBody>
+          <a:bodyPr wrap="square" lIns="0" tIns="0" rIns="0" bIns="0" rtlCol="0" anchor="t"/>
+          <a:lstStyle/>
+          <a:p>
+            <a:pPr indent="0" marL="0">
+              <a:buNone/>
+            </a:pPr>
+            <a:r>
+              <a:rPr lang="en-US" sz="1500" dirty="0">
+                <a:solidFill>
+                  <a:schemeClr val="tx2"/>
+                </a:solidFill>
+              </a:rPr>
+              <a:t>mAP@50 · 클래스별 AP</a:t>
+            </a:r>
+            <a:endParaRPr lang="en-US" sz="1500" dirty="0"/>
+          </a:p>
+        </p:txBody>
+      </p:sp>
+      <p:sp>
+        <p:nvSpPr>
+          <p:cNvPr id="17" name="bm-1"/>
+          <p:cNvSpPr/>
+          <p:nvPr/>
+        </p:nvSpPr>
+        <p:spPr>
+          <a:xfrm>
+            <a:off x="4297680" y="2423160"/>
+            <a:ext cx="3566160" cy="1783080"/>
+          </a:xfrm>
+          <a:prstGeom prst="roundRect">
+            <a:avLst>
+              <a:gd name="adj" fmla="val 4103"/>
+            </a:avLst>
+          </a:prstGeom>
+          <a:solidFill>
+            <a:schemeClr val="bg2"/>
+          </a:solidFill>
+          <a:ln/>
+        </p:spPr>
+      </p:sp>
+      <p:sp>
+        <p:nvSpPr>
+          <p:cNvPr id="18" name="bm-h-1"/>
+          <p:cNvSpPr txBox="1"/>
+          <p:nvPr/>
+        </p:nvSpPr>
+        <p:spPr>
+          <a:xfrm>
+            <a:off x="4572000" y="2697480"/>
+            <a:ext cx="3017520" cy="457200"/>
+          </a:xfrm>
+          <a:prstGeom prst="rect">
+            <a:avLst/>
+          </a:prstGeom>
+          <a:noFill/>
+          <a:ln/>
+        </p:spPr>
+        <p:txBody>
+          <a:bodyPr wrap="square" lIns="0" tIns="0" rIns="0" bIns="0" rtlCol="0" anchor="t"/>
+          <a:lstStyle/>
+          <a:p>
+            <a:pPr indent="0" marL="0">
+              <a:buNone/>
+            </a:pPr>
+            <a:r>
+              <a:rPr lang="en-US" sz="2200" b="1" dirty="0">
+                <a:solidFill>
+                  <a:schemeClr val="accent2"/>
+                </a:solidFill>
+              </a:rPr>
+              <a:t>판정</a:t>
+            </a:r>
+            <a:endParaRPr lang="en-US" sz="2200" dirty="0"/>
+          </a:p>
+        </p:txBody>
+      </p:sp>
+      <p:sp>
+        <p:nvSpPr>
+          <p:cNvPr id="19" name="bm-d-1"/>
+          <p:cNvSpPr txBox="1"/>
+          <p:nvPr/>
+        </p:nvSpPr>
+        <p:spPr>
+          <a:xfrm>
+            <a:off x="4572000" y="3337560"/>
+            <a:ext cx="3017520" cy="548640"/>
+          </a:xfrm>
+          <a:prstGeom prst="rect">
+            <a:avLst/>
+          </a:prstGeom>
+          <a:noFill/>
+          <a:ln/>
+        </p:spPr>
+        <p:txBody>
+          <a:bodyPr wrap="square" lIns="0" tIns="0" rIns="0" bIns="0" rtlCol="0" anchor="t"/>
+          <a:lstStyle/>
+          <a:p>
+            <a:pPr indent="0" marL="0">
+              <a:buNone/>
+            </a:pPr>
+            <a:r>
+              <a:rPr lang="en-US" sz="1500" dirty="0">
+                <a:solidFill>
+                  <a:schemeClr val="tx2"/>
+                </a:solidFill>
+              </a:rPr>
+              <a:t>PASS · REVIEW · REJECT · 놓친 셀</a:t>
+            </a:r>
+            <a:endParaRPr lang="en-US" sz="1500" dirty="0"/>
+          </a:p>
+        </p:txBody>
+      </p:sp>
+      <p:sp>
+        <p:nvSpPr>
+          <p:cNvPr id="20" name="bm-2"/>
+          <p:cNvSpPr/>
+          <p:nvPr/>
+        </p:nvSpPr>
+        <p:spPr>
+          <a:xfrm>
+            <a:off x="8046720" y="2423160"/>
+            <a:ext cx="3566160" cy="1783080"/>
+          </a:xfrm>
+          <a:prstGeom prst="roundRect">
+            <a:avLst>
+              <a:gd name="adj" fmla="val 4103"/>
+            </a:avLst>
+          </a:prstGeom>
+          <a:solidFill>
+            <a:schemeClr val="bg2"/>
+          </a:solidFill>
+          <a:ln/>
+        </p:spPr>
+      </p:sp>
+      <p:sp>
+        <p:nvSpPr>
+          <p:cNvPr id="21" name="bm-h-2"/>
+          <p:cNvSpPr txBox="1"/>
+          <p:nvPr/>
+        </p:nvSpPr>
+        <p:spPr>
+          <a:xfrm>
+            <a:off x="8321040" y="2697480"/>
+            <a:ext cx="3017520" cy="457200"/>
+          </a:xfrm>
+          <a:prstGeom prst="rect">
+            <a:avLst/>
+          </a:prstGeom>
+          <a:noFill/>
+          <a:ln/>
+        </p:spPr>
+        <p:txBody>
+          <a:bodyPr wrap="square" lIns="0" tIns="0" rIns="0" bIns="0" rtlCol="0" anchor="t"/>
+          <a:lstStyle/>
+          <a:p>
+            <a:pPr indent="0" marL="0">
+              <a:buNone/>
+            </a:pPr>
+            <a:r>
+              <a:rPr lang="en-US" sz="2200" b="1" dirty="0">
+                <a:solidFill>
+                  <a:schemeClr val="accent3"/>
+                </a:solidFill>
+              </a:rPr>
+              <a:t>기준값 sweep</a:t>
+            </a:r>
+            <a:endParaRPr lang="en-US" sz="2200" dirty="0"/>
+          </a:p>
+        </p:txBody>
+      </p:sp>
+      <p:sp>
+        <p:nvSpPr>
+          <p:cNvPr id="22" name="bm-d-2"/>
+          <p:cNvSpPr txBox="1"/>
+          <p:nvPr/>
+        </p:nvSpPr>
+        <p:spPr>
+          <a:xfrm>
+            <a:off x="8321040" y="3337560"/>
+            <a:ext cx="3017520" cy="548640"/>
+          </a:xfrm>
+          <a:prstGeom prst="rect">
+            <a:avLst/>
+          </a:prstGeom>
+          <a:noFill/>
+          <a:ln/>
+        </p:spPr>
+        <p:txBody>
+          <a:bodyPr wrap="square" lIns="0" tIns="0" rIns="0" bIns="0" rtlCol="0" anchor="t"/>
+          <a:lstStyle/>
+          <a:p>
+            <a:pPr indent="0" marL="0">
+              <a:buNone/>
+            </a:pPr>
+            <a:r>
+              <a:rPr lang="en-US" sz="1500" dirty="0">
+                <a:solidFill>
+                  <a:schemeClr val="tx2"/>
+                </a:solidFill>
+              </a:rPr>
+              <a:t>0.05 ~ 0.95</a:t>
+            </a:r>
+            <a:endParaRPr lang="en-US" sz="1500" dirty="0"/>
+          </a:p>
+        </p:txBody>
+      </p:sp>
+      <p:sp>
+        <p:nvSpPr>
+          <p:cNvPr id="23" name="bm-3"/>
+          <p:cNvSpPr/>
+          <p:nvPr/>
+        </p:nvSpPr>
+        <p:spPr>
+          <a:xfrm>
+            <a:off x="548640" y="4389120"/>
+            <a:ext cx="3566160" cy="1783080"/>
+          </a:xfrm>
+          <a:prstGeom prst="roundRect">
+            <a:avLst>
+              <a:gd name="adj" fmla="val 4103"/>
+            </a:avLst>
+          </a:prstGeom>
+          <a:solidFill>
+            <a:schemeClr val="bg2"/>
+          </a:solidFill>
+          <a:ln/>
+        </p:spPr>
+      </p:sp>
+      <p:sp>
+        <p:nvSpPr>
+          <p:cNvPr id="24" name="bm-h-3"/>
+          <p:cNvSpPr txBox="1"/>
+          <p:nvPr/>
+        </p:nvSpPr>
+        <p:spPr>
+          <a:xfrm>
+            <a:off x="822960" y="4663440"/>
+            <a:ext cx="3017520" cy="457200"/>
+          </a:xfrm>
+          <a:prstGeom prst="rect">
+            <a:avLst/>
+          </a:prstGeom>
+          <a:noFill/>
+          <a:ln/>
+        </p:spPr>
+        <p:txBody>
+          <a:bodyPr wrap="square" lIns="0" tIns="0" rIns="0" bIns="0" rtlCol="0" anchor="t"/>
+          <a:lstStyle/>
+          <a:p>
+            <a:pPr indent="0" marL="0">
+              <a:buNone/>
+            </a:pPr>
+            <a:r>
+              <a:rPr lang="en-US" sz="2200" b="1" dirty="0">
+                <a:solidFill>
+                  <a:schemeClr val="accent5"/>
+                </a:solidFill>
+              </a:rPr>
+              <a:t>견고성</a:t>
+            </a:r>
+            <a:endParaRPr lang="en-US" sz="2200" dirty="0"/>
+          </a:p>
+        </p:txBody>
+      </p:sp>
+      <p:sp>
+        <p:nvSpPr>
+          <p:cNvPr id="25" name="bm-d-3"/>
+          <p:cNvSpPr txBox="1"/>
+          <p:nvPr/>
+        </p:nvSpPr>
+        <p:spPr>
+          <a:xfrm>
+            <a:off x="822960" y="5303520"/>
+            <a:ext cx="3017520" cy="548640"/>
+          </a:xfrm>
+          <a:prstGeom prst="rect">
+            <a:avLst/>
+          </a:prstGeom>
+          <a:noFill/>
+          <a:ln/>
+        </p:spPr>
+        <p:txBody>
+          <a:bodyPr wrap="square" lIns="0" tIns="0" rIns="0" bIns="0" rtlCol="0" anchor="t"/>
+          <a:lstStyle/>
+          <a:p>
+            <a:pPr indent="0" marL="0">
+              <a:buNone/>
+            </a:pPr>
+            <a:r>
+              <a:rPr lang="en-US" sz="1500" dirty="0">
+                <a:solidFill>
+                  <a:schemeClr val="tx2"/>
+                </a:solidFill>
+              </a:rPr>
+              <a:t>blur · 어둡게 · 노이즈 · JPEG</a:t>
+            </a:r>
+            <a:endParaRPr lang="en-US" sz="1500" dirty="0"/>
+          </a:p>
+        </p:txBody>
+      </p:sp>
+      <p:sp>
+        <p:nvSpPr>
+          <p:cNvPr id="26" name="bm-4"/>
+          <p:cNvSpPr/>
+          <p:nvPr/>
+        </p:nvSpPr>
+        <p:spPr>
+          <a:xfrm>
+            <a:off x="4297680" y="4389120"/>
+            <a:ext cx="3566160" cy="1783080"/>
+          </a:xfrm>
+          <a:prstGeom prst="roundRect">
+            <a:avLst>
+              <a:gd name="adj" fmla="val 4103"/>
+            </a:avLst>
+          </a:prstGeom>
+          <a:solidFill>
+            <a:schemeClr val="bg2"/>
+          </a:solidFill>
+          <a:ln/>
+        </p:spPr>
+      </p:sp>
+      <p:sp>
+        <p:nvSpPr>
+          <p:cNvPr id="27" name="bm-h-4"/>
+          <p:cNvSpPr txBox="1"/>
+          <p:nvPr/>
+        </p:nvSpPr>
+        <p:spPr>
+          <a:xfrm>
+            <a:off x="4572000" y="4663440"/>
+            <a:ext cx="3017520" cy="457200"/>
+          </a:xfrm>
+          <a:prstGeom prst="rect">
+            <a:avLst/>
+          </a:prstGeom>
+          <a:noFill/>
+          <a:ln/>
+        </p:spPr>
+        <p:txBody>
+          <a:bodyPr wrap="square" lIns="0" tIns="0" rIns="0" bIns="0" rtlCol="0" anchor="t"/>
+          <a:lstStyle/>
+          <a:p>
+            <a:pPr indent="0" marL="0">
+              <a:buNone/>
+            </a:pPr>
+            <a:r>
+              <a:rPr lang="en-US" sz="2200" b="1" dirty="0">
+                <a:solidFill>
+                  <a:schemeClr val="accent3"/>
+                </a:solidFill>
+              </a:rPr>
+              <a:t>중복 검사</a:t>
+            </a:r>
+            <a:endParaRPr lang="en-US" sz="2200" dirty="0"/>
+          </a:p>
+        </p:txBody>
+      </p:sp>
+      <p:sp>
+        <p:nvSpPr>
+          <p:cNvPr id="28" name="bm-d-4"/>
+          <p:cNvSpPr txBox="1"/>
+          <p:nvPr/>
+        </p:nvSpPr>
+        <p:spPr>
+          <a:xfrm>
+            <a:off x="4572000" y="5303520"/>
+            <a:ext cx="3017520" cy="548640"/>
+          </a:xfrm>
+          <a:prstGeom prst="rect">
+            <a:avLst/>
+          </a:prstGeom>
+          <a:noFill/>
+          <a:ln/>
+        </p:spPr>
+        <p:txBody>
+          <a:bodyPr wrap="square" lIns="0" tIns="0" rIns="0" bIns="0" rtlCol="0" anchor="t"/>
+          <a:lstStyle/>
+          <a:p>
+            <a:pPr indent="0" marL="0">
+              <a:buNone/>
+            </a:pPr>
+            <a:r>
+              <a:rPr lang="en-US" sz="1500" dirty="0">
+                <a:solidFill>
+                  <a:schemeClr val="tx2"/>
+                </a:solidFill>
+              </a:rPr>
+              <a:t>dHash → 복사본 22장 발견</a:t>
+            </a:r>
+            <a:endParaRPr lang="en-US" sz="1500" dirty="0"/>
+          </a:p>
+        </p:txBody>
+      </p:sp>
+      <p:sp>
+        <p:nvSpPr>
+          <p:cNvPr id="29" name="bm-5"/>
+          <p:cNvSpPr/>
+          <p:nvPr/>
+        </p:nvSpPr>
+        <p:spPr>
+          <a:xfrm>
+            <a:off x="8046720" y="4389120"/>
+            <a:ext cx="3566160" cy="1783080"/>
+          </a:xfrm>
+          <a:prstGeom prst="roundRect">
+            <a:avLst>
+              <a:gd name="adj" fmla="val 4103"/>
+            </a:avLst>
+          </a:prstGeom>
+          <a:solidFill>
+            <a:schemeClr val="bg2"/>
+          </a:solidFill>
+          <a:ln/>
+        </p:spPr>
+      </p:sp>
+      <p:sp>
+        <p:nvSpPr>
+          <p:cNvPr id="30" name="bm-h-5"/>
+          <p:cNvSpPr txBox="1"/>
+          <p:nvPr/>
+        </p:nvSpPr>
+        <p:spPr>
+          <a:xfrm>
+            <a:off x="8321040" y="4663440"/>
+            <a:ext cx="3017520" cy="457200"/>
+          </a:xfrm>
+          <a:prstGeom prst="rect">
+            <a:avLst/>
+          </a:prstGeom>
+          <a:noFill/>
+          <a:ln/>
+        </p:spPr>
+        <p:txBody>
+          <a:bodyPr wrap="square" lIns="0" tIns="0" rIns="0" bIns="0" rtlCol="0" anchor="t"/>
+          <a:lstStyle/>
+          <a:p>
+            <a:pPr indent="0" marL="0">
+              <a:buNone/>
+            </a:pPr>
+            <a:r>
+              <a:rPr lang="en-US" sz="2200" b="1" dirty="0">
+                <a:solidFill>
+                  <a:schemeClr val="accent6"/>
+                </a:solidFill>
+              </a:rPr>
+              <a:t>속도</a:t>
+            </a:r>
+            <a:endParaRPr lang="en-US" sz="2200" dirty="0"/>
+          </a:p>
+        </p:txBody>
+      </p:sp>
+      <p:sp>
+        <p:nvSpPr>
+          <p:cNvPr id="31" name="bm-d-5"/>
+          <p:cNvSpPr txBox="1"/>
+          <p:nvPr/>
+        </p:nvSpPr>
+        <p:spPr>
+          <a:xfrm>
+            <a:off x="8321040" y="5303520"/>
+            <a:ext cx="3017520" cy="548640"/>
+          </a:xfrm>
+          <a:prstGeom prst="rect">
+            <a:avLst/>
+          </a:prstGeom>
+          <a:noFill/>
+          <a:ln/>
+        </p:spPr>
+        <p:txBody>
+          <a:bodyPr wrap="square" lIns="0" tIns="0" rIns="0" bIns="0" rtlCol="0" anchor="t"/>
+          <a:lstStyle/>
+          <a:p>
+            <a:pPr indent="0" marL="0">
+              <a:buNone/>
+            </a:pPr>
+            <a:r>
+              <a:rPr lang="en-US" sz="1500" dirty="0">
+                <a:solidFill>
+                  <a:schemeClr val="tx2"/>
+                </a:solidFill>
+              </a:rPr>
+              <a:t>CPU · iGPU · 사진 1장씩</a:t>
+            </a:r>
+            <a:endParaRPr lang="en-US" sz="1500" dirty="0"/>
+          </a:p>
+        </p:txBody>
+      </p:sp>
+      <p:sp>
+        <p:nvSpPr>
+          <p:cNvPr id="25" name="Slide Number Placeholder 0"/>
+          <p:cNvSpPr>
+            <a:spLocks noGrp="1"/>
+          </p:cNvSpPr>
+          <p:nvPr>
+            <p:ph type="sldNum" sz="quarter" idx="4294967295"/>
+          </p:nvPr>
+        </p:nvSpPr>
+        <p:spPr>
+          <a:xfrm>
+            <a:off x="11094415" y="6419088"/>
+            <a:ext cx="548640" cy="274320"/>
+          </a:xfrm>
+          <a:prstGeom prst="rect">
+            <a:avLst/>
+          </a:prstGeom>
+          <a:extLst>
+            <a:ext uri="{C572A759-6A51-4108-AA02-DFA0A04FC94B}">
+              <ma14:wrappingTextBoxFlag xmlns:ma14="http://schemas.microsoft.com/office/mac/drawingml/2011/main" val="0"/>
+            </a:ext>
+          </a:extLst>
+        </p:spPr>
+        <p:txBody>
+          <a:bodyPr/>
+          <a:lstStyle>
+            <a:lvl1pPr>
+              <a:defRPr sz="1000">
+                <a:solidFill>
+                  <a:schemeClr val="tx2"/>
+                </a:solidFill>
+              </a:defRPr>
+            </a:lvl1pPr>
+          </a:lstStyle>
+          <a:p>
+            <a:pPr algn="r"/>
+            <a:fld id="{F7021451-1387-4CA6-816F-3879F97B5CBC}" type="slidenum">
+              <a:rPr b="0" lang="en-US"/>
+              <a:t>7</a:t>
+            </a:fld>
+            <a:endParaRPr lang="en-US"/>
+          </a:p>
+        </p:txBody>
+      </p:sp>
+    </p:spTree>
+  </p:cSld>
+  <p:clrMapOvr>
+    <a:masterClrMapping/>
+  </p:clrMapOvr>
+</p:sld>
+</file>
+
+<file path=ppt/slides/slide8.xml><?xml version="1.0" encoding="utf-8"?>
+<p:sld xmlns:a="http://schemas.openxmlformats.org/drawingml/2006/main" xmlns:r="http://schemas.openxmlformats.org/officeDocument/2006/relationships" xmlns:p="http://schemas.openxmlformats.org/presentationml/2006/main">
+  <p:cSld name="Slide 8">
+    <p:spTree>
+      <p:nvGrpSpPr>
+        <p:cNvPr id="1" name=""/>
+        <p:cNvGrpSpPr/>
+        <p:nvPr/>
+      </p:nvGrpSpPr>
+      <p:grpSpPr>
+        <a:xfrm>
+          <a:off x="0" y="0"/>
+          <a:ext cx="0" cy="0"/>
+          <a:chOff x="0" y="0"/>
+          <a:chExt cx="0" cy="0"/>
+        </a:xfrm>
+      </p:grpSpPr>
+      <p:sp>
+        <p:nvSpPr>
+          <p:cNvPr id="2" name="Text 0"/>
+          <p:cNvSpPr/>
+          <p:nvPr>
+            <p:ph idx="100" type="title" hasCustomPrompt="1"/>
+          </p:nvPr>
+        </p:nvSpPr>
+        <p:spPr>
+          <a:xfrm>
+            <a:off x="548640" y="347472"/>
+            <a:ext cx="11094415" cy="685800"/>
+          </a:xfrm>
+          <a:prstGeom prst="rect">
+            <a:avLst/>
+          </a:prstGeom>
+          <a:noFill/>
+          <a:ln/>
+        </p:spPr>
+        <p:txBody>
+          <a:bodyPr wrap="square" lIns="0" tIns="0" rIns="0" bIns="0" rtlCol="0" anchor="ctr"/>
+          <a:lstStyle/>
+          <a:p>
+            <a:pPr algn="l" indent="0" marL="0">
+              <a:buNone/>
+            </a:pPr>
+            <a:r>
+              <a:rPr lang="en-US" sz="3200" b="1" dirty="0">
+                <a:solidFill>
+                  <a:schemeClr val="tx1"/>
+                </a:solidFill>
+              </a:rPr>
               <a:t>INT8 장단점</a:t>
             </a:r>
             <a:endParaRPr lang="en-US" sz="3200" dirty="0"/>
@@ -14125,7 +17845,7 @@
       </p:graphicFrame>
       <p:graphicFrame>
         <p:nvGraphicFramePr>
-          <p:cNvPr id="8" name="int8-table"/>
+          <p:cNvPr id="9" name="int8-table"/>
           <p:cNvGraphicFramePr>
             <a:graphicFrameLocks noGrp="1"/>
           </p:cNvGraphicFramePr>
@@ -15526,278 +19246,18 @@
       </p:graphicFrame>
       <p:sp>
         <p:nvSpPr>
-          <p:cNvPr id="6" name="method-0-bg"/>
+          <p:cNvPr id="6" name="pro-card"/>
           <p:cNvSpPr/>
           <p:nvPr/>
         </p:nvSpPr>
         <p:spPr>
           <a:xfrm>
-            <a:off x="548640" y="4846320"/>
-            <a:ext cx="2651760" cy="384048"/>
+            <a:off x="548640" y="5074920"/>
+            <a:ext cx="5440680" cy="914400"/>
           </a:xfrm>
           <a:prstGeom prst="roundRect">
             <a:avLst>
-              <a:gd name="adj" fmla="val 11905"/>
-            </a:avLst>
-          </a:prstGeom>
-          <a:solidFill>
-            <a:schemeClr val="tx2">
-              <a:alpha val="20000"/>
-            </a:schemeClr>
-          </a:solidFill>
-          <a:ln w="12700">
-            <a:solidFill>
-              <a:schemeClr val="tx2"/>
-            </a:solidFill>
-            <a:prstDash val="solid"/>
-          </a:ln>
-        </p:spPr>
-      </p:sp>
-      <p:sp>
-        <p:nvSpPr>
-          <p:cNvPr id="7" name="method-0"/>
-          <p:cNvSpPr txBox="1"/>
-          <p:nvPr/>
-        </p:nvSpPr>
-        <p:spPr>
-          <a:xfrm>
-            <a:off x="548640" y="4846320"/>
-            <a:ext cx="2651760" cy="384048"/>
-          </a:xfrm>
-          <a:prstGeom prst="rect">
-            <a:avLst/>
-          </a:prstGeom>
-          <a:noFill/>
-          <a:ln/>
-        </p:spPr>
-        <p:txBody>
-          <a:bodyPr wrap="square" lIns="0" tIns="0" rIns="0" bIns="0" rtlCol="0" anchor="ctr"/>
-          <a:lstStyle/>
-          <a:p>
-            <a:pPr algn="ctr" indent="0" marL="0">
-              <a:buNone/>
-            </a:pPr>
-            <a:r>
-              <a:rPr lang="en-US" sz="1300" b="1" dirty="0">
-                <a:solidFill>
-                  <a:schemeClr val="tx2"/>
-                </a:solidFill>
-              </a:rPr>
-              <a:t>1차 테스트 131장</a:t>
-            </a:r>
-            <a:endParaRPr lang="en-US" sz="1300" dirty="0"/>
-          </a:p>
-        </p:txBody>
-      </p:sp>
-      <p:sp>
-        <p:nvSpPr>
-          <p:cNvPr id="8" name="method-1-bg"/>
-          <p:cNvSpPr/>
-          <p:nvPr/>
-        </p:nvSpPr>
-        <p:spPr>
-          <a:xfrm>
-            <a:off x="3355848" y="4846320"/>
-            <a:ext cx="2651760" cy="384048"/>
-          </a:xfrm>
-          <a:prstGeom prst="roundRect">
-            <a:avLst>
-              <a:gd name="adj" fmla="val 11905"/>
-            </a:avLst>
-          </a:prstGeom>
-          <a:solidFill>
-            <a:schemeClr val="tx2">
-              <a:alpha val="20000"/>
-            </a:schemeClr>
-          </a:solidFill>
-          <a:ln w="12700">
-            <a:solidFill>
-              <a:schemeClr val="tx2"/>
-            </a:solidFill>
-            <a:prstDash val="solid"/>
-          </a:ln>
-        </p:spPr>
-      </p:sp>
-      <p:sp>
-        <p:nvSpPr>
-          <p:cNvPr id="9" name="method-1"/>
-          <p:cNvSpPr txBox="1"/>
-          <p:nvPr/>
-        </p:nvSpPr>
-        <p:spPr>
-          <a:xfrm>
-            <a:off x="3355848" y="4846320"/>
-            <a:ext cx="2651760" cy="384048"/>
-          </a:xfrm>
-          <a:prstGeom prst="rect">
-            <a:avLst/>
-          </a:prstGeom>
-          <a:noFill/>
-          <a:ln/>
-        </p:spPr>
-        <p:txBody>
-          <a:bodyPr wrap="square" lIns="0" tIns="0" rIns="0" bIns="0" rtlCol="0" anchor="ctr"/>
-          <a:lstStyle/>
-          <a:p>
-            <a:pPr algn="ctr" indent="0" marL="0">
-              <a:buNone/>
-            </a:pPr>
-            <a:r>
-              <a:rPr lang="en-US" sz="1300" b="1" dirty="0">
-                <a:solidFill>
-                  <a:schemeClr val="tx2"/>
-                </a:solidFill>
-              </a:rPr>
-              <a:t>사진 1장씩</a:t>
-            </a:r>
-            <a:endParaRPr lang="en-US" sz="1300" dirty="0"/>
-          </a:p>
-        </p:txBody>
-      </p:sp>
-      <p:sp>
-        <p:nvSpPr>
-          <p:cNvPr id="10" name="method-2-bg"/>
-          <p:cNvSpPr/>
-          <p:nvPr/>
-        </p:nvSpPr>
-        <p:spPr>
-          <a:xfrm>
-            <a:off x="6163056" y="4846320"/>
-            <a:ext cx="2651760" cy="384048"/>
-          </a:xfrm>
-          <a:prstGeom prst="roundRect">
-            <a:avLst>
-              <a:gd name="adj" fmla="val 11905"/>
-            </a:avLst>
-          </a:prstGeom>
-          <a:solidFill>
-            <a:schemeClr val="tx2">
-              <a:alpha val="20000"/>
-            </a:schemeClr>
-          </a:solidFill>
-          <a:ln w="12700">
-            <a:solidFill>
-              <a:schemeClr val="tx2"/>
-            </a:solidFill>
-            <a:prstDash val="solid"/>
-          </a:ln>
-        </p:spPr>
-      </p:sp>
-      <p:sp>
-        <p:nvSpPr>
-          <p:cNvPr id="11" name="method-2"/>
-          <p:cNvSpPr txBox="1"/>
-          <p:nvPr/>
-        </p:nvSpPr>
-        <p:spPr>
-          <a:xfrm>
-            <a:off x="6163056" y="4846320"/>
-            <a:ext cx="2651760" cy="384048"/>
-          </a:xfrm>
-          <a:prstGeom prst="rect">
-            <a:avLst/>
-          </a:prstGeom>
-          <a:noFill/>
-          <a:ln/>
-        </p:spPr>
-        <p:txBody>
-          <a:bodyPr wrap="square" lIns="0" tIns="0" rIns="0" bIns="0" rtlCol="0" anchor="ctr"/>
-          <a:lstStyle/>
-          <a:p>
-            <a:pPr algn="ctr" indent="0" marL="0">
-              <a:buNone/>
-            </a:pPr>
-            <a:r>
-              <a:rPr lang="en-US" sz="1300" b="1" dirty="0">
-                <a:solidFill>
-                  <a:schemeClr val="tx2"/>
-                </a:solidFill>
-              </a:rPr>
-              <a:t>Core Ultra 7 CPU</a:t>
-            </a:r>
-            <a:endParaRPr lang="en-US" sz="1300" dirty="0"/>
-          </a:p>
-        </p:txBody>
-      </p:sp>
-      <p:sp>
-        <p:nvSpPr>
-          <p:cNvPr id="12" name="method-3-bg"/>
-          <p:cNvSpPr/>
-          <p:nvPr/>
-        </p:nvSpPr>
-        <p:spPr>
-          <a:xfrm>
-            <a:off x="8970264" y="4846320"/>
-            <a:ext cx="2651760" cy="384048"/>
-          </a:xfrm>
-          <a:prstGeom prst="roundRect">
-            <a:avLst>
-              <a:gd name="adj" fmla="val 11905"/>
-            </a:avLst>
-          </a:prstGeom>
-          <a:solidFill>
-            <a:schemeClr val="tx2">
-              <a:alpha val="20000"/>
-            </a:schemeClr>
-          </a:solidFill>
-          <a:ln w="12700">
-            <a:solidFill>
-              <a:schemeClr val="tx2"/>
-            </a:solidFill>
-            <a:prstDash val="solid"/>
-          </a:ln>
-        </p:spPr>
-      </p:sp>
-      <p:sp>
-        <p:nvSpPr>
-          <p:cNvPr id="13" name="method-3"/>
-          <p:cNvSpPr txBox="1"/>
-          <p:nvPr/>
-        </p:nvSpPr>
-        <p:spPr>
-          <a:xfrm>
-            <a:off x="8970264" y="4846320"/>
-            <a:ext cx="2651760" cy="384048"/>
-          </a:xfrm>
-          <a:prstGeom prst="rect">
-            <a:avLst/>
-          </a:prstGeom>
-          <a:noFill/>
-          <a:ln/>
-        </p:spPr>
-        <p:txBody>
-          <a:bodyPr wrap="square" lIns="0" tIns="0" rIns="0" bIns="0" rtlCol="0" anchor="ctr"/>
-          <a:lstStyle/>
-          <a:p>
-            <a:pPr algn="ctr" indent="0" marL="0">
-              <a:buNone/>
-            </a:pPr>
-            <a:r>
-              <a:rPr lang="en-US" sz="1300" b="1" dirty="0">
-                <a:solidFill>
-                  <a:schemeClr val="tx2"/>
-                </a:solidFill>
-              </a:rPr>
-              <a:t>전·후처리 포함</a:t>
-            </a:r>
-            <a:endParaRPr lang="en-US" sz="1300" dirty="0"/>
-          </a:p>
-        </p:txBody>
-      </p:sp>
-      <p:sp>
-        <p:nvSpPr>
-          <p:cNvPr id="14" name="pro-card"/>
-          <p:cNvSpPr/>
-          <p:nvPr/>
-        </p:nvSpPr>
-        <p:spPr>
-          <a:xfrm>
-            <a:off x="548640" y="5440680"/>
-            <a:ext cx="5440680" cy="777240"/>
-          </a:xfrm>
-          <a:prstGeom prst="roundRect">
-            <a:avLst>
-              <a:gd name="adj" fmla="val 9412"/>
+              <a:gd name="adj" fmla="val 8000"/>
             </a:avLst>
           </a:prstGeom>
           <a:solidFill>
@@ -15808,14 +19268,14 @@
       </p:sp>
       <p:sp>
         <p:nvSpPr>
-          <p:cNvPr id="15" name="pro"/>
+          <p:cNvPr id="7" name="pro"/>
           <p:cNvSpPr txBox="1"/>
           <p:nvPr/>
         </p:nvSpPr>
         <p:spPr>
           <a:xfrm>
-            <a:off x="822960" y="5440680"/>
-            <a:ext cx="5029200" cy="777240"/>
+            <a:off x="822960" y="5074920"/>
+            <a:ext cx="5029200" cy="914400"/>
           </a:xfrm>
           <a:prstGeom prst="rect">
             <a:avLst/>
@@ -15831,7 +19291,7 @@
               <a:buNone/>
             </a:pPr>
             <a:r>
-              <a:rPr lang="en-US" sz="1500" b="1" dirty="0">
+              <a:rPr lang="en-US" sz="1600" b="1" dirty="0">
                 <a:solidFill>
                   <a:schemeClr val="accent6"/>
                 </a:solidFill>
@@ -15842,31 +19302,31 @@
               <a:buNone/>
             </a:pPr>
             <a:r>
-              <a:rPr lang="en-US" sz="1500" dirty="0">
+              <a:rPr lang="en-US" sz="1600" dirty="0">
                 <a:solidFill>
                   <a:schemeClr val="tx1"/>
                 </a:solidFill>
               </a:rPr>
               <a:t>2–4배 빠름 · 크기 ½ · mAP 유지</a:t>
             </a:r>
-            <a:endParaRPr lang="en-US" sz="1500" dirty="0"/>
+            <a:endParaRPr lang="en-US" sz="1600" dirty="0"/>
           </a:p>
         </p:txBody>
       </p:sp>
       <p:sp>
         <p:nvSpPr>
-          <p:cNvPr id="16" name="con-card"/>
+          <p:cNvPr id="8" name="con-card"/>
           <p:cNvSpPr/>
           <p:nvPr/>
         </p:nvSpPr>
         <p:spPr>
           <a:xfrm>
-            <a:off x="6199632" y="5440680"/>
-            <a:ext cx="5440680" cy="777240"/>
+            <a:off x="6199632" y="5074920"/>
+            <a:ext cx="5440680" cy="914400"/>
           </a:xfrm>
           <a:prstGeom prst="roundRect">
             <a:avLst>
-              <a:gd name="adj" fmla="val 9412"/>
+              <a:gd name="adj" fmla="val 8000"/>
             </a:avLst>
           </a:prstGeom>
           <a:solidFill>
@@ -15877,14 +19337,14 @@
       </p:sp>
       <p:sp>
         <p:nvSpPr>
-          <p:cNvPr id="17" name="con"/>
+          <p:cNvPr id="9" name="con"/>
           <p:cNvSpPr txBox="1"/>
           <p:nvPr/>
         </p:nvSpPr>
         <p:spPr>
           <a:xfrm>
-            <a:off x="6473952" y="5440680"/>
-            <a:ext cx="5029200" cy="777240"/>
+            <a:off x="6473952" y="5074920"/>
+            <a:ext cx="5029200" cy="914400"/>
           </a:xfrm>
           <a:prstGeom prst="rect">
             <a:avLst/>
@@ -15900,7 +19360,7 @@
               <a:buNone/>
             </a:pPr>
             <a:r>
-              <a:rPr lang="en-US" sz="1500" b="1" dirty="0">
+              <a:rPr lang="en-US" sz="1600" b="1" dirty="0">
                 <a:solidFill>
                   <a:schemeClr val="accent2"/>
                 </a:solidFill>
@@ -15911,538 +19371,14 @@
               <a:buNone/>
             </a:pPr>
             <a:r>
-              <a:rPr lang="en-US" sz="1500" dirty="0">
+              <a:rPr lang="en-US" sz="1600" dirty="0">
                 <a:solidFill>
                   <a:schemeClr val="tx1"/>
                 </a:solidFill>
               </a:rPr>
               <a:t>놓침 증가 · 기준값 재설정</a:t>
             </a:r>
-            <a:endParaRPr lang="en-US" sz="1500" dirty="0"/>
-          </a:p>
-        </p:txBody>
-      </p:sp>
-      <p:sp>
-        <p:nvSpPr>
-          <p:cNvPr id="25" name="Slide Number Placeholder 0"/>
-          <p:cNvSpPr>
-            <a:spLocks noGrp="1"/>
-          </p:cNvSpPr>
-          <p:nvPr>
-            <p:ph type="sldNum" sz="quarter" idx="4294967295"/>
-          </p:nvPr>
-        </p:nvSpPr>
-        <p:spPr>
-          <a:xfrm>
-            <a:off x="11094415" y="6419088"/>
-            <a:ext cx="548640" cy="274320"/>
-          </a:xfrm>
-          <a:prstGeom prst="rect">
-            <a:avLst/>
-          </a:prstGeom>
-          <a:extLst>
-            <a:ext uri="{C572A759-6A51-4108-AA02-DFA0A04FC94B}">
-              <ma14:wrappingTextBoxFlag xmlns:ma14="http://schemas.microsoft.com/office/mac/drawingml/2011/main" val="0"/>
-            </a:ext>
-          </a:extLst>
-        </p:spPr>
-        <p:txBody>
-          <a:bodyPr/>
-          <a:lstStyle>
-            <a:lvl1pPr>
-              <a:defRPr sz="1000">
-                <a:solidFill>
-                  <a:schemeClr val="tx2"/>
-                </a:solidFill>
-              </a:defRPr>
-            </a:lvl1pPr>
-          </a:lstStyle>
-          <a:p>
-            <a:pPr algn="r"/>
-            <a:fld id="{F7021451-1387-4CA6-816F-3879F97B5CBC}" type="slidenum">
-              <a:rPr b="0" lang="en-US"/>
-              <a:t>7</a:t>
-            </a:fld>
-            <a:endParaRPr lang="en-US"/>
-          </a:p>
-        </p:txBody>
-      </p:sp>
-    </p:spTree>
-  </p:cSld>
-  <p:clrMapOvr>
-    <a:masterClrMapping/>
-  </p:clrMapOvr>
-</p:sld>
-</file>
-
-<file path=ppt/slides/slide8.xml><?xml version="1.0" encoding="utf-8"?>
-<p:sld xmlns:a="http://schemas.openxmlformats.org/drawingml/2006/main" xmlns:r="http://schemas.openxmlformats.org/officeDocument/2006/relationships" xmlns:p="http://schemas.openxmlformats.org/presentationml/2006/main">
-  <p:cSld name="Slide 8">
-    <p:spTree>
-      <p:nvGrpSpPr>
-        <p:cNvPr id="1" name=""/>
-        <p:cNvGrpSpPr/>
-        <p:nvPr/>
-      </p:nvGrpSpPr>
-      <p:grpSpPr>
-        <a:xfrm>
-          <a:off x="0" y="0"/>
-          <a:ext cx="0" cy="0"/>
-          <a:chOff x="0" y="0"/>
-          <a:chExt cx="0" cy="0"/>
-        </a:xfrm>
-      </p:grpSpPr>
-      <p:sp>
-        <p:nvSpPr>
-          <p:cNvPr id="2" name="Text 0"/>
-          <p:cNvSpPr/>
-          <p:nvPr>
-            <p:ph idx="100" type="title" hasCustomPrompt="1"/>
-          </p:nvPr>
-        </p:nvSpPr>
-        <p:spPr>
-          <a:xfrm>
-            <a:off x="548640" y="347472"/>
-            <a:ext cx="11094415" cy="685800"/>
-          </a:xfrm>
-          <a:prstGeom prst="rect">
-            <a:avLst/>
-          </a:prstGeom>
-          <a:noFill/>
-          <a:ln/>
-        </p:spPr>
-        <p:txBody>
-          <a:bodyPr wrap="square" lIns="0" tIns="0" rIns="0" bIns="0" rtlCol="0" anchor="ctr"/>
-          <a:lstStyle/>
-          <a:p>
-            <a:pPr algn="l" indent="0" marL="0">
-              <a:buNone/>
-            </a:pPr>
-            <a:r>
-              <a:rPr lang="en-US" sz="3200" b="1" dirty="0">
-                <a:solidFill>
-                  <a:schemeClr val="tx1"/>
-                </a:solidFill>
-              </a:rPr>
-              <a:t>2차 데이터셋</a:t>
-            </a:r>
-            <a:endParaRPr lang="en-US" sz="3200" dirty="0"/>
-          </a:p>
-        </p:txBody>
-      </p:sp>
-      <p:pic>
-        <p:nvPicPr>
-          <p:cNvPr id="3" name="rf-0" descr="C:\Users\user\_se4nchoi\batteryvision\docs\submission\build\img\roboflow_v8.png">    </p:cNvPr>
-          <p:cNvPicPr>
-            <a:picLocks noChangeAspect="1"/>
-          </p:cNvPicPr>
-          <p:nvPr/>
-        </p:nvPicPr>
-        <p:blipFill>
-          <a:blip r:embed="rId1"/>
-          <a:stretch>
-            <a:fillRect/>
-          </a:stretch>
-        </p:blipFill>
-        <p:spPr>
-          <a:xfrm>
-            <a:off x="548640" y="1600200"/>
-            <a:ext cx="5440680" cy="3459761"/>
-          </a:xfrm>
-          <a:prstGeom prst="rect">
-            <a:avLst/>
-          </a:prstGeom>
-        </p:spPr>
-      </p:pic>
-      <p:sp>
-        <p:nvSpPr>
-          <p:cNvPr id="4" name="rf-tag-0-bg"/>
-          <p:cNvSpPr/>
-          <p:nvPr/>
-        </p:nvSpPr>
-        <p:spPr>
-          <a:xfrm>
-            <a:off x="548640" y="5197121"/>
-            <a:ext cx="731520" cy="347472"/>
-          </a:xfrm>
-          <a:prstGeom prst="roundRect">
-            <a:avLst>
-              <a:gd name="adj" fmla="val 13158"/>
-            </a:avLst>
-          </a:prstGeom>
-          <a:solidFill>
-            <a:schemeClr val="accent1">
-              <a:alpha val="20000"/>
-            </a:schemeClr>
-          </a:solidFill>
-          <a:ln w="12700">
-            <a:solidFill>
-              <a:schemeClr val="accent1"/>
-            </a:solidFill>
-            <a:prstDash val="solid"/>
-          </a:ln>
-        </p:spPr>
-      </p:sp>
-      <p:sp>
-        <p:nvSpPr>
-          <p:cNvPr id="5" name="rf-tag-0"/>
-          <p:cNvSpPr txBox="1"/>
-          <p:nvPr/>
-        </p:nvSpPr>
-        <p:spPr>
-          <a:xfrm>
-            <a:off x="548640" y="5197121"/>
-            <a:ext cx="731520" cy="347472"/>
-          </a:xfrm>
-          <a:prstGeom prst="rect">
-            <a:avLst/>
-          </a:prstGeom>
-          <a:noFill/>
-          <a:ln/>
-        </p:spPr>
-        <p:txBody>
-          <a:bodyPr wrap="square" lIns="0" tIns="0" rIns="0" bIns="0" rtlCol="0" anchor="ctr"/>
-          <a:lstStyle/>
-          <a:p>
-            <a:pPr algn="ctr" indent="0" marL="0">
-              <a:buNone/>
-            </a:pPr>
-            <a:r>
-              <a:rPr lang="en-US" sz="1300" b="1" dirty="0">
-                <a:solidFill>
-                  <a:schemeClr val="accent1"/>
-                </a:solidFill>
-              </a:rPr>
-              <a:t>1차</a:t>
-            </a:r>
-            <a:endParaRPr lang="en-US" sz="1300" dirty="0"/>
-          </a:p>
-        </p:txBody>
-      </p:sp>
-      <p:sp>
-        <p:nvSpPr>
-          <p:cNvPr id="6" name="rf-cap-0"/>
-          <p:cNvSpPr txBox="1"/>
-          <p:nvPr/>
-        </p:nvSpPr>
-        <p:spPr>
-          <a:xfrm>
-            <a:off x="1417320" y="5197121"/>
-            <a:ext cx="4526280" cy="347472"/>
-          </a:xfrm>
-          <a:prstGeom prst="rect">
-            <a:avLst/>
-          </a:prstGeom>
-          <a:noFill/>
-          <a:ln/>
-        </p:spPr>
-        <p:txBody>
-          <a:bodyPr wrap="square" lIns="0" tIns="0" rIns="0" bIns="0" rtlCol="0" anchor="ctr"/>
-          <a:lstStyle/>
-          <a:p>
-            <a:pPr indent="0" marL="0">
-              <a:buNone/>
-            </a:pPr>
-            <a:r>
-              <a:rPr lang="en-US" sz="1500" dirty="0">
-                <a:solidFill>
-                  <a:schemeClr val="tx1"/>
-                </a:solidFill>
-              </a:rPr>
-              <a:t>v8 · 3,673장 · 학습</a:t>
-            </a:r>
-            <a:endParaRPr lang="en-US" sz="1500" dirty="0"/>
-          </a:p>
-        </p:txBody>
-      </p:sp>
-      <p:pic>
-        <p:nvPicPr>
-          <p:cNvPr id="7" name="rf-1" descr="C:\Users\user\_se4nchoi\batteryvision\docs\submission\build\img\roboflow_v2.png">    </p:cNvPr>
-          <p:cNvPicPr>
-            <a:picLocks noChangeAspect="1"/>
-          </p:cNvPicPr>
-          <p:nvPr/>
-        </p:nvPicPr>
-        <p:blipFill>
-          <a:blip r:embed="rId2"/>
-          <a:stretch>
-            <a:fillRect/>
-          </a:stretch>
-        </p:blipFill>
-        <p:spPr>
-          <a:xfrm>
-            <a:off x="6190488" y="1600200"/>
-            <a:ext cx="5440680" cy="3320210"/>
-          </a:xfrm>
-          <a:prstGeom prst="rect">
-            <a:avLst/>
-          </a:prstGeom>
-        </p:spPr>
-      </p:pic>
-      <p:sp>
-        <p:nvSpPr>
-          <p:cNvPr id="8" name="rf-tag-1-bg"/>
-          <p:cNvSpPr/>
-          <p:nvPr/>
-        </p:nvSpPr>
-        <p:spPr>
-          <a:xfrm>
-            <a:off x="6190488" y="5057570"/>
-            <a:ext cx="731520" cy="347472"/>
-          </a:xfrm>
-          <a:prstGeom prst="roundRect">
-            <a:avLst>
-              <a:gd name="adj" fmla="val 13158"/>
-            </a:avLst>
-          </a:prstGeom>
-          <a:solidFill>
-            <a:schemeClr val="accent3">
-              <a:alpha val="20000"/>
-            </a:schemeClr>
-          </a:solidFill>
-          <a:ln w="12700">
-            <a:solidFill>
-              <a:schemeClr val="accent3"/>
-            </a:solidFill>
-            <a:prstDash val="solid"/>
-          </a:ln>
-        </p:spPr>
-      </p:sp>
-      <p:sp>
-        <p:nvSpPr>
-          <p:cNvPr id="9" name="rf-tag-1"/>
-          <p:cNvSpPr txBox="1"/>
-          <p:nvPr/>
-        </p:nvSpPr>
-        <p:spPr>
-          <a:xfrm>
-            <a:off x="6190488" y="5057570"/>
-            <a:ext cx="731520" cy="347472"/>
-          </a:xfrm>
-          <a:prstGeom prst="rect">
-            <a:avLst/>
-          </a:prstGeom>
-          <a:noFill/>
-          <a:ln/>
-        </p:spPr>
-        <p:txBody>
-          <a:bodyPr wrap="square" lIns="0" tIns="0" rIns="0" bIns="0" rtlCol="0" anchor="ctr"/>
-          <a:lstStyle/>
-          <a:p>
-            <a:pPr algn="ctr" indent="0" marL="0">
-              <a:buNone/>
-            </a:pPr>
-            <a:r>
-              <a:rPr lang="en-US" sz="1300" b="1" dirty="0">
-                <a:solidFill>
-                  <a:schemeClr val="accent3"/>
-                </a:solidFill>
-              </a:rPr>
-              <a:t>2차</a:t>
-            </a:r>
-            <a:endParaRPr lang="en-US" sz="1300" dirty="0"/>
-          </a:p>
-        </p:txBody>
-      </p:sp>
-      <p:sp>
-        <p:nvSpPr>
-          <p:cNvPr id="10" name="rf-cap-1"/>
-          <p:cNvSpPr txBox="1"/>
-          <p:nvPr/>
-        </p:nvSpPr>
-        <p:spPr>
-          <a:xfrm>
-            <a:off x="7059168" y="5057570"/>
-            <a:ext cx="4526280" cy="347472"/>
-          </a:xfrm>
-          <a:prstGeom prst="rect">
-            <a:avLst/>
-          </a:prstGeom>
-          <a:noFill/>
-          <a:ln/>
-        </p:spPr>
-        <p:txBody>
-          <a:bodyPr wrap="square" lIns="0" tIns="0" rIns="0" bIns="0" rtlCol="0" anchor="ctr"/>
-          <a:lstStyle/>
-          <a:p>
-            <a:pPr indent="0" marL="0">
-              <a:buNone/>
-            </a:pPr>
-            <a:r>
-              <a:rPr lang="en-US" sz="1500" dirty="0">
-                <a:solidFill>
-                  <a:schemeClr val="tx1"/>
-                </a:solidFill>
-              </a:rPr>
-              <a:t>v2 · 720장 · 테스트만</a:t>
-            </a:r>
-            <a:endParaRPr lang="en-US" sz="1500" dirty="0"/>
-          </a:p>
-        </p:txBody>
-      </p:sp>
-      <p:sp>
-        <p:nvSpPr>
-          <p:cNvPr id="11" name="dedup-bg"/>
-          <p:cNvSpPr/>
-          <p:nvPr/>
-        </p:nvSpPr>
-        <p:spPr>
-          <a:xfrm>
-            <a:off x="548640" y="5715000"/>
-            <a:ext cx="2743200" cy="457200"/>
-          </a:xfrm>
-          <a:prstGeom prst="roundRect">
-            <a:avLst>
-              <a:gd name="adj" fmla="val 10000"/>
-            </a:avLst>
-          </a:prstGeom>
-          <a:solidFill>
-            <a:schemeClr val="accent3">
-              <a:alpha val="20000"/>
-            </a:schemeClr>
-          </a:solidFill>
-          <a:ln w="12700">
-            <a:solidFill>
-              <a:schemeClr val="accent3"/>
-            </a:solidFill>
-            <a:prstDash val="solid"/>
-          </a:ln>
-        </p:spPr>
-      </p:sp>
-      <p:sp>
-        <p:nvSpPr>
-          <p:cNvPr id="12" name="dedup"/>
-          <p:cNvSpPr txBox="1"/>
-          <p:nvPr/>
-        </p:nvSpPr>
-        <p:spPr>
-          <a:xfrm>
-            <a:off x="548640" y="5715000"/>
-            <a:ext cx="2743200" cy="457200"/>
-          </a:xfrm>
-          <a:prstGeom prst="rect">
-            <a:avLst/>
-          </a:prstGeom>
-          <a:noFill/>
-          <a:ln/>
-        </p:spPr>
-        <p:txBody>
-          <a:bodyPr wrap="square" lIns="0" tIns="0" rIns="0" bIns="0" rtlCol="0" anchor="ctr"/>
-          <a:lstStyle/>
-          <a:p>
-            <a:pPr algn="ctr" indent="0" marL="0">
-              <a:buNone/>
-            </a:pPr>
-            <a:r>
-              <a:rPr lang="en-US" sz="1300" b="1" dirty="0">
-                <a:solidFill>
-                  <a:schemeClr val="accent3"/>
-                </a:solidFill>
-              </a:rPr>
-              <a:t>중복 140장 제거</a:t>
-            </a:r>
-            <a:endParaRPr lang="en-US" sz="1300" dirty="0"/>
-          </a:p>
-        </p:txBody>
-      </p:sp>
-      <p:sp>
-        <p:nvSpPr>
-          <p:cNvPr id="13" name="dedup-arrow"/>
-          <p:cNvSpPr txBox="1"/>
-          <p:nvPr/>
-        </p:nvSpPr>
-        <p:spPr>
-          <a:xfrm>
-            <a:off x="3337560" y="5715000"/>
-            <a:ext cx="457200" cy="457200"/>
-          </a:xfrm>
-          <a:prstGeom prst="rect">
-            <a:avLst/>
-          </a:prstGeom>
-          <a:noFill/>
-          <a:ln/>
-        </p:spPr>
-        <p:txBody>
-          <a:bodyPr wrap="square" lIns="0" tIns="0" rIns="0" bIns="0" rtlCol="0" anchor="ctr"/>
-          <a:lstStyle/>
-          <a:p>
-            <a:pPr algn="ctr" indent="0" marL="0">
-              <a:buNone/>
-            </a:pPr>
-            <a:r>
-              <a:rPr lang="en-US" sz="2000" b="1" dirty="0">
-                <a:solidFill>
-                  <a:schemeClr val="tx2"/>
-                </a:solidFill>
-              </a:rPr>
-              <a:t>→</a:t>
-            </a:r>
-            <a:endParaRPr lang="en-US" sz="2000" dirty="0"/>
-          </a:p>
-        </p:txBody>
-      </p:sp>
-      <p:sp>
-        <p:nvSpPr>
-          <p:cNvPr id="14" name="clean45-bg"/>
-          <p:cNvSpPr/>
-          <p:nvPr/>
-        </p:nvSpPr>
-        <p:spPr>
-          <a:xfrm>
-            <a:off x="3840480" y="5715000"/>
-            <a:ext cx="3840480" cy="457200"/>
-          </a:xfrm>
-          <a:prstGeom prst="roundRect">
-            <a:avLst>
-              <a:gd name="adj" fmla="val 10000"/>
-            </a:avLst>
-          </a:prstGeom>
-          <a:solidFill>
-            <a:schemeClr val="accent1">
-              <a:alpha val="20000"/>
-            </a:schemeClr>
-          </a:solidFill>
-          <a:ln w="12700">
-            <a:solidFill>
-              <a:schemeClr val="accent1"/>
-            </a:solidFill>
-            <a:prstDash val="solid"/>
-          </a:ln>
-        </p:spPr>
-      </p:sp>
-      <p:sp>
-        <p:nvSpPr>
-          <p:cNvPr id="15" name="clean45"/>
-          <p:cNvSpPr txBox="1"/>
-          <p:nvPr/>
-        </p:nvSpPr>
-        <p:spPr>
-          <a:xfrm>
-            <a:off x="3840480" y="5715000"/>
-            <a:ext cx="3840480" cy="457200"/>
-          </a:xfrm>
-          <a:prstGeom prst="rect">
-            <a:avLst/>
-          </a:prstGeom>
-          <a:noFill/>
-          <a:ln/>
-        </p:spPr>
-        <p:txBody>
-          <a:bodyPr wrap="square" lIns="0" tIns="0" rIns="0" bIns="0" rtlCol="0" anchor="ctr"/>
-          <a:lstStyle/>
-          <a:p>
-            <a:pPr algn="ctr" indent="0" marL="0">
-              <a:buNone/>
-            </a:pPr>
-            <a:r>
-              <a:rPr lang="en-US" sz="1300" b="1" dirty="0">
-                <a:solidFill>
-                  <a:schemeClr val="accent1"/>
-                </a:solidFill>
-              </a:rPr>
-              <a:t>45장 (결함 30 · 정상 15)</a:t>
-            </a:r>
-            <a:endParaRPr lang="en-US" sz="1300" dirty="0"/>
+            <a:endParaRPr lang="en-US" sz="1600" dirty="0"/>
           </a:p>
         </p:txBody>
       </p:sp>
@@ -16548,529 +19484,15 @@
                   <a:schemeClr val="tx1"/>
                 </a:solidFill>
               </a:rPr>
-              <a:t>2차 세트 결과</a:t>
+              <a:t>2차 데이터셋</a:t>
             </a:r>
             <a:endParaRPr lang="en-US" sz="3200" dirty="0"/>
           </a:p>
         </p:txBody>
       </p:sp>
-      <p:sp>
-        <p:nvSpPr>
-          <p:cNvPr id="3" name="holdout-card"/>
-          <p:cNvSpPr/>
-          <p:nvPr/>
-        </p:nvSpPr>
-        <p:spPr>
-          <a:xfrm>
-            <a:off x="548640" y="1600200"/>
-            <a:ext cx="6035040" cy="2514600"/>
-          </a:xfrm>
-          <a:prstGeom prst="roundRect">
-            <a:avLst>
-              <a:gd name="adj" fmla="val 2909"/>
-            </a:avLst>
-          </a:prstGeom>
-          <a:solidFill>
-            <a:schemeClr val="bg2"/>
-          </a:solidFill>
-          <a:ln/>
-        </p:spPr>
-      </p:sp>
-      <p:sp>
-        <p:nvSpPr>
-          <p:cNvPr id="4" name="ho-h"/>
-          <p:cNvSpPr txBox="1"/>
-          <p:nvPr/>
-        </p:nvSpPr>
-        <p:spPr>
-          <a:xfrm>
-            <a:off x="822960" y="1709928"/>
-            <a:ext cx="5486400" cy="320040"/>
-          </a:xfrm>
-          <a:prstGeom prst="rect">
-            <a:avLst/>
-          </a:prstGeom>
-          <a:noFill/>
-          <a:ln/>
-        </p:spPr>
-        <p:txBody>
-          <a:bodyPr wrap="square" lIns="0" tIns="0" rIns="0" bIns="0" rtlCol="0" anchor="t"/>
-          <a:lstStyle/>
-          <a:p>
-            <a:pPr indent="0" marL="0">
-              <a:buNone/>
-            </a:pPr>
-            <a:r>
-              <a:rPr lang="en-US" sz="1600" b="1" dirty="0">
-                <a:solidFill>
-                  <a:schemeClr val="tx1"/>
-                </a:solidFill>
-              </a:rPr>
-              <a:t>결함 셀 검출률</a:t>
-            </a:r>
-            <a:endParaRPr lang="en-US" sz="1600" dirty="0"/>
-          </a:p>
-        </p:txBody>
-      </p:sp>
-      <p:sp>
-        <p:nvSpPr>
-          <p:cNvPr id="5" name="ho-c1"/>
-          <p:cNvSpPr txBox="1"/>
-          <p:nvPr/>
-        </p:nvSpPr>
-        <p:spPr>
-          <a:xfrm>
-            <a:off x="2926080" y="2057400"/>
-            <a:ext cx="1463040" cy="274320"/>
-          </a:xfrm>
-          <a:prstGeom prst="rect">
-            <a:avLst/>
-          </a:prstGeom>
-          <a:noFill/>
-          <a:ln/>
-        </p:spPr>
-        <p:txBody>
-          <a:bodyPr wrap="square" lIns="0" tIns="0" rIns="0" bIns="0" rtlCol="0" anchor="t"/>
-          <a:lstStyle/>
-          <a:p>
-            <a:pPr algn="r" indent="0" marL="0">
-              <a:buNone/>
-            </a:pPr>
-            <a:r>
-              <a:rPr lang="en-US" sz="1200" dirty="0">
-                <a:solidFill>
-                  <a:schemeClr val="tx2"/>
-                </a:solidFill>
-              </a:rPr>
-              <a:t>1차</a:t>
-            </a:r>
-            <a:endParaRPr lang="en-US" sz="1200" dirty="0"/>
-          </a:p>
-        </p:txBody>
-      </p:sp>
-      <p:sp>
-        <p:nvSpPr>
-          <p:cNvPr id="6" name="ho-c2"/>
-          <p:cNvSpPr txBox="1"/>
-          <p:nvPr/>
-        </p:nvSpPr>
-        <p:spPr>
-          <a:xfrm>
-            <a:off x="4754880" y="2057400"/>
-            <a:ext cx="1463040" cy="274320"/>
-          </a:xfrm>
-          <a:prstGeom prst="rect">
-            <a:avLst/>
-          </a:prstGeom>
-          <a:noFill/>
-          <a:ln/>
-        </p:spPr>
-        <p:txBody>
-          <a:bodyPr wrap="square" lIns="0" tIns="0" rIns="0" bIns="0" rtlCol="0" anchor="t"/>
-          <a:lstStyle/>
-          <a:p>
-            <a:pPr algn="r" indent="0" marL="0">
-              <a:buNone/>
-            </a:pPr>
-            <a:r>
-              <a:rPr lang="en-US" sz="1200" dirty="0">
-                <a:solidFill>
-                  <a:schemeClr val="tx2"/>
-                </a:solidFill>
-              </a:rPr>
-              <a:t>2차</a:t>
-            </a:r>
-            <a:endParaRPr lang="en-US" sz="1200" dirty="0"/>
-          </a:p>
-        </p:txBody>
-      </p:sp>
-      <p:sp>
-        <p:nvSpPr>
-          <p:cNvPr id="7" name="ho-dot-0"/>
-          <p:cNvSpPr/>
-          <p:nvPr/>
-        </p:nvSpPr>
-        <p:spPr>
-          <a:xfrm>
-            <a:off x="822960" y="2551176"/>
-            <a:ext cx="146304" cy="146304"/>
-          </a:xfrm>
-          <a:prstGeom prst="ellipse">
-            <a:avLst/>
-          </a:prstGeom>
-          <a:solidFill>
-            <a:schemeClr val="accent4"/>
-          </a:solidFill>
-          <a:ln/>
-        </p:spPr>
-      </p:sp>
-      <p:sp>
-        <p:nvSpPr>
-          <p:cNvPr id="8" name="ho-n-0"/>
-          <p:cNvSpPr txBox="1"/>
-          <p:nvPr/>
-        </p:nvSpPr>
-        <p:spPr>
-          <a:xfrm>
-            <a:off x="1060704" y="2377440"/>
-            <a:ext cx="1828800" cy="502920"/>
-          </a:xfrm>
-          <a:prstGeom prst="rect">
-            <a:avLst/>
-          </a:prstGeom>
-          <a:noFill/>
-          <a:ln/>
-        </p:spPr>
-        <p:txBody>
-          <a:bodyPr wrap="square" lIns="0" tIns="0" rIns="0" bIns="0" rtlCol="0" anchor="ctr"/>
-          <a:lstStyle/>
-          <a:p>
-            <a:pPr indent="0" marL="0">
-              <a:buNone/>
-            </a:pPr>
-            <a:r>
-              <a:rPr lang="en-US" sz="1600" b="1" dirty="0">
-                <a:solidFill>
-                  <a:schemeClr val="tx1"/>
-                </a:solidFill>
-              </a:rPr>
-              <a:t>ATSS</a:t>
-            </a:r>
-            <a:endParaRPr lang="en-US" sz="1600" dirty="0"/>
-          </a:p>
-        </p:txBody>
-      </p:sp>
-      <p:sp>
-        <p:nvSpPr>
-          <p:cNvPr id="9" name="ho-a-0"/>
-          <p:cNvSpPr txBox="1"/>
-          <p:nvPr/>
-        </p:nvSpPr>
-        <p:spPr>
-          <a:xfrm>
-            <a:off x="2926080" y="2377440"/>
-            <a:ext cx="1463040" cy="502920"/>
-          </a:xfrm>
-          <a:prstGeom prst="rect">
-            <a:avLst/>
-          </a:prstGeom>
-          <a:noFill/>
-          <a:ln/>
-        </p:spPr>
-        <p:txBody>
-          <a:bodyPr wrap="square" lIns="0" tIns="0" rIns="0" bIns="0" rtlCol="0" anchor="ctr"/>
-          <a:lstStyle/>
-          <a:p>
-            <a:pPr algn="r" indent="0" marL="0">
-              <a:buNone/>
-            </a:pPr>
-            <a:r>
-              <a:rPr lang="en-US" sz="2600" b="1" dirty="0">
-                <a:solidFill>
-                  <a:schemeClr val="tx2"/>
-                </a:solidFill>
-              </a:rPr>
-              <a:t>100%</a:t>
-            </a:r>
-            <a:endParaRPr lang="en-US" sz="2600" dirty="0"/>
-          </a:p>
-        </p:txBody>
-      </p:sp>
-      <p:sp>
-        <p:nvSpPr>
-          <p:cNvPr id="10" name="ho-b-0"/>
-          <p:cNvSpPr txBox="1"/>
-          <p:nvPr/>
-        </p:nvSpPr>
-        <p:spPr>
-          <a:xfrm>
-            <a:off x="4754880" y="2377440"/>
-            <a:ext cx="1463040" cy="502920"/>
-          </a:xfrm>
-          <a:prstGeom prst="rect">
-            <a:avLst/>
-          </a:prstGeom>
-          <a:noFill/>
-          <a:ln/>
-        </p:spPr>
-        <p:txBody>
-          <a:bodyPr wrap="square" lIns="0" tIns="0" rIns="0" bIns="0" rtlCol="0" anchor="ctr"/>
-          <a:lstStyle/>
-          <a:p>
-            <a:pPr algn="r" indent="0" marL="0">
-              <a:buNone/>
-            </a:pPr>
-            <a:r>
-              <a:rPr lang="en-US" sz="2600" b="1" dirty="0">
-                <a:solidFill>
-                  <a:schemeClr val="accent2"/>
-                </a:solidFill>
-              </a:rPr>
-              <a:t>47%</a:t>
-            </a:r>
-            <a:endParaRPr lang="en-US" sz="2600" dirty="0"/>
-          </a:p>
-        </p:txBody>
-      </p:sp>
-      <p:sp>
-        <p:nvSpPr>
-          <p:cNvPr id="11" name="ho-dot-1"/>
-          <p:cNvSpPr/>
-          <p:nvPr/>
-        </p:nvSpPr>
-        <p:spPr>
-          <a:xfrm>
-            <a:off x="822960" y="3099816"/>
-            <a:ext cx="146304" cy="146304"/>
-          </a:xfrm>
-          <a:prstGeom prst="ellipse">
-            <a:avLst/>
-          </a:prstGeom>
-          <a:solidFill>
-            <a:schemeClr val="accent5"/>
-          </a:solidFill>
-          <a:ln/>
-        </p:spPr>
-      </p:sp>
-      <p:sp>
-        <p:nvSpPr>
-          <p:cNvPr id="12" name="ho-n-1"/>
-          <p:cNvSpPr txBox="1"/>
-          <p:nvPr/>
-        </p:nvSpPr>
-        <p:spPr>
-          <a:xfrm>
-            <a:off x="1060704" y="2926080"/>
-            <a:ext cx="1828800" cy="502920"/>
-          </a:xfrm>
-          <a:prstGeom prst="rect">
-            <a:avLst/>
-          </a:prstGeom>
-          <a:noFill/>
-          <a:ln/>
-        </p:spPr>
-        <p:txBody>
-          <a:bodyPr wrap="square" lIns="0" tIns="0" rIns="0" bIns="0" rtlCol="0" anchor="ctr"/>
-          <a:lstStyle/>
-          <a:p>
-            <a:pPr indent="0" marL="0">
-              <a:buNone/>
-            </a:pPr>
-            <a:r>
-              <a:rPr lang="en-US" sz="1600" b="1" dirty="0">
-                <a:solidFill>
-                  <a:schemeClr val="tx1"/>
-                </a:solidFill>
-              </a:rPr>
-              <a:t>YOLOX-S</a:t>
-            </a:r>
-            <a:endParaRPr lang="en-US" sz="1600" dirty="0"/>
-          </a:p>
-        </p:txBody>
-      </p:sp>
-      <p:sp>
-        <p:nvSpPr>
-          <p:cNvPr id="13" name="ho-a-1"/>
-          <p:cNvSpPr txBox="1"/>
-          <p:nvPr/>
-        </p:nvSpPr>
-        <p:spPr>
-          <a:xfrm>
-            <a:off x="2926080" y="2926080"/>
-            <a:ext cx="1463040" cy="502920"/>
-          </a:xfrm>
-          <a:prstGeom prst="rect">
-            <a:avLst/>
-          </a:prstGeom>
-          <a:noFill/>
-          <a:ln/>
-        </p:spPr>
-        <p:txBody>
-          <a:bodyPr wrap="square" lIns="0" tIns="0" rIns="0" bIns="0" rtlCol="0" anchor="ctr"/>
-          <a:lstStyle/>
-          <a:p>
-            <a:pPr algn="r" indent="0" marL="0">
-              <a:buNone/>
-            </a:pPr>
-            <a:r>
-              <a:rPr lang="en-US" sz="2600" b="1" dirty="0">
-                <a:solidFill>
-                  <a:schemeClr val="tx2"/>
-                </a:solidFill>
-              </a:rPr>
-              <a:t>94%</a:t>
-            </a:r>
-            <a:endParaRPr lang="en-US" sz="2600" dirty="0"/>
-          </a:p>
-        </p:txBody>
-      </p:sp>
-      <p:sp>
-        <p:nvSpPr>
-          <p:cNvPr id="14" name="ho-b-1"/>
-          <p:cNvSpPr txBox="1"/>
-          <p:nvPr/>
-        </p:nvSpPr>
-        <p:spPr>
-          <a:xfrm>
-            <a:off x="4754880" y="2926080"/>
-            <a:ext cx="1463040" cy="502920"/>
-          </a:xfrm>
-          <a:prstGeom prst="rect">
-            <a:avLst/>
-          </a:prstGeom>
-          <a:noFill/>
-          <a:ln/>
-        </p:spPr>
-        <p:txBody>
-          <a:bodyPr wrap="square" lIns="0" tIns="0" rIns="0" bIns="0" rtlCol="0" anchor="ctr"/>
-          <a:lstStyle/>
-          <a:p>
-            <a:pPr algn="r" indent="0" marL="0">
-              <a:buNone/>
-            </a:pPr>
-            <a:r>
-              <a:rPr lang="en-US" sz="2600" b="1" dirty="0">
-                <a:solidFill>
-                  <a:schemeClr val="accent2"/>
-                </a:solidFill>
-              </a:rPr>
-              <a:t>3%</a:t>
-            </a:r>
-            <a:endParaRPr lang="en-US" sz="2600" dirty="0"/>
-          </a:p>
-        </p:txBody>
-      </p:sp>
-      <p:sp>
-        <p:nvSpPr>
-          <p:cNvPr id="15" name="ho-dot-2"/>
-          <p:cNvSpPr/>
-          <p:nvPr/>
-        </p:nvSpPr>
-        <p:spPr>
-          <a:xfrm>
-            <a:off x="822960" y="3648456"/>
-            <a:ext cx="146304" cy="146304"/>
-          </a:xfrm>
-          <a:prstGeom prst="ellipse">
-            <a:avLst/>
-          </a:prstGeom>
-          <a:solidFill>
-            <a:schemeClr val="accent6"/>
-          </a:solidFill>
-          <a:ln/>
-        </p:spPr>
-      </p:sp>
-      <p:sp>
-        <p:nvSpPr>
-          <p:cNvPr id="16" name="ho-n-2"/>
-          <p:cNvSpPr txBox="1"/>
-          <p:nvPr/>
-        </p:nvSpPr>
-        <p:spPr>
-          <a:xfrm>
-            <a:off x="1060704" y="3474720"/>
-            <a:ext cx="1828800" cy="502920"/>
-          </a:xfrm>
-          <a:prstGeom prst="rect">
-            <a:avLst/>
-          </a:prstGeom>
-          <a:noFill/>
-          <a:ln/>
-        </p:spPr>
-        <p:txBody>
-          <a:bodyPr wrap="square" lIns="0" tIns="0" rIns="0" bIns="0" rtlCol="0" anchor="ctr"/>
-          <a:lstStyle/>
-          <a:p>
-            <a:pPr indent="0" marL="0">
-              <a:buNone/>
-            </a:pPr>
-            <a:r>
-              <a:rPr lang="en-US" sz="1600" b="1" dirty="0">
-                <a:solidFill>
-                  <a:schemeClr val="tx1"/>
-                </a:solidFill>
-              </a:rPr>
-              <a:t>YOLOX-Tiny</a:t>
-            </a:r>
-            <a:endParaRPr lang="en-US" sz="1600" dirty="0"/>
-          </a:p>
-        </p:txBody>
-      </p:sp>
-      <p:sp>
-        <p:nvSpPr>
-          <p:cNvPr id="17" name="ho-a-2"/>
-          <p:cNvSpPr txBox="1"/>
-          <p:nvPr/>
-        </p:nvSpPr>
-        <p:spPr>
-          <a:xfrm>
-            <a:off x="2926080" y="3474720"/>
-            <a:ext cx="1463040" cy="502920"/>
-          </a:xfrm>
-          <a:prstGeom prst="rect">
-            <a:avLst/>
-          </a:prstGeom>
-          <a:noFill/>
-          <a:ln/>
-        </p:spPr>
-        <p:txBody>
-          <a:bodyPr wrap="square" lIns="0" tIns="0" rIns="0" bIns="0" rtlCol="0" anchor="ctr"/>
-          <a:lstStyle/>
-          <a:p>
-            <a:pPr algn="r" indent="0" marL="0">
-              <a:buNone/>
-            </a:pPr>
-            <a:r>
-              <a:rPr lang="en-US" sz="2600" b="1" dirty="0">
-                <a:solidFill>
-                  <a:schemeClr val="tx2"/>
-                </a:solidFill>
-              </a:rPr>
-              <a:t>99%</a:t>
-            </a:r>
-            <a:endParaRPr lang="en-US" sz="2600" dirty="0"/>
-          </a:p>
-        </p:txBody>
-      </p:sp>
-      <p:sp>
-        <p:nvSpPr>
-          <p:cNvPr id="18" name="ho-b-2"/>
-          <p:cNvSpPr txBox="1"/>
-          <p:nvPr/>
-        </p:nvSpPr>
-        <p:spPr>
-          <a:xfrm>
-            <a:off x="4754880" y="3474720"/>
-            <a:ext cx="1463040" cy="502920"/>
-          </a:xfrm>
-          <a:prstGeom prst="rect">
-            <a:avLst/>
-          </a:prstGeom>
-          <a:noFill/>
-          <a:ln/>
-        </p:spPr>
-        <p:txBody>
-          <a:bodyPr wrap="square" lIns="0" tIns="0" rIns="0" bIns="0" rtlCol="0" anchor="ctr"/>
-          <a:lstStyle/>
-          <a:p>
-            <a:pPr algn="r" indent="0" marL="0">
-              <a:buNone/>
-            </a:pPr>
-            <a:r>
-              <a:rPr lang="en-US" sz="2600" b="1" dirty="0">
-                <a:solidFill>
-                  <a:schemeClr val="accent2"/>
-                </a:solidFill>
-              </a:rPr>
-              <a:t>47%</a:t>
-            </a:r>
-            <a:endParaRPr lang="en-US" sz="2600" dirty="0"/>
-          </a:p>
-        </p:txBody>
-      </p:sp>
       <p:pic>
         <p:nvPicPr>
-          <p:cNvPr id="19" name="miss-img" descr="C:\Users\user\_se4nchoi\batteryvision\docs\submission\build\img\holdout_miss.jpg">    </p:cNvPr>
+          <p:cNvPr id="3" name="rf-0" descr="C:\Users\user\_se4nchoi\batteryvision\docs\submission\build\img\roboflow_v8.png">    </p:cNvPr>
           <p:cNvPicPr>
             <a:picLocks noChangeAspect="1"/>
           </p:cNvPicPr>
@@ -17084,8 +19506,8 @@
         </p:blipFill>
         <p:spPr>
           <a:xfrm>
-            <a:off x="548640" y="4297680"/>
-            <a:ext cx="1920240" cy="1920240"/>
+            <a:off x="548640" y="1600200"/>
+            <a:ext cx="5440680" cy="3459761"/>
           </a:xfrm>
           <a:prstGeom prst="rect">
             <a:avLst/>
@@ -17094,14 +19516,43 @@
       </p:pic>
       <p:sp>
         <p:nvSpPr>
-          <p:cNvPr id="20" name="miss-cap"/>
+          <p:cNvPr id="4" name="rf-tag-0-bg"/>
+          <p:cNvSpPr/>
+          <p:nvPr/>
+        </p:nvSpPr>
+        <p:spPr>
+          <a:xfrm>
+            <a:off x="548640" y="5197121"/>
+            <a:ext cx="731520" cy="347472"/>
+          </a:xfrm>
+          <a:prstGeom prst="roundRect">
+            <a:avLst>
+              <a:gd name="adj" fmla="val 13158"/>
+            </a:avLst>
+          </a:prstGeom>
+          <a:solidFill>
+            <a:schemeClr val="accent1">
+              <a:alpha val="20000"/>
+            </a:schemeClr>
+          </a:solidFill>
+          <a:ln w="12700">
+            <a:solidFill>
+              <a:schemeClr val="accent1"/>
+            </a:solidFill>
+            <a:prstDash val="solid"/>
+          </a:ln>
+        </p:spPr>
+      </p:sp>
+      <p:sp>
+        <p:nvSpPr>
+          <p:cNvPr id="5" name="rf-tag-0"/>
           <p:cNvSpPr txBox="1"/>
           <p:nvPr/>
         </p:nvSpPr>
         <p:spPr>
           <a:xfrm>
-            <a:off x="2697480" y="4297680"/>
-            <a:ext cx="3886200" cy="1920240"/>
+            <a:off x="548640" y="5197121"/>
+            <a:ext cx="731520" cy="347472"/>
           </a:xfrm>
           <a:prstGeom prst="rect">
             <a:avLst/>
@@ -17113,12 +19564,44 @@
           <a:bodyPr wrap="square" lIns="0" tIns="0" rIns="0" bIns="0" rtlCol="0" anchor="ctr"/>
           <a:lstStyle/>
           <a:p>
-            <a:pPr marL="342900" indent="-342900">
-              <a:spcAft>
-                <a:spcPts val="600"/>
-              </a:spcAft>
-              <a:buSzPct val="100000"/>
-              <a:buChar char="•"/>
+            <a:pPr algn="ctr" indent="0" marL="0">
+              <a:buNone/>
+            </a:pPr>
+            <a:r>
+              <a:rPr lang="en-US" sz="1300" b="1" dirty="0">
+                <a:solidFill>
+                  <a:schemeClr val="accent1"/>
+                </a:solidFill>
+              </a:rPr>
+              <a:t>1차</a:t>
+            </a:r>
+            <a:endParaRPr lang="en-US" sz="1300" dirty="0"/>
+          </a:p>
+        </p:txBody>
+      </p:sp>
+      <p:sp>
+        <p:nvSpPr>
+          <p:cNvPr id="6" name="rf-cap-0"/>
+          <p:cNvSpPr txBox="1"/>
+          <p:nvPr/>
+        </p:nvSpPr>
+        <p:spPr>
+          <a:xfrm>
+            <a:off x="1417320" y="5197121"/>
+            <a:ext cx="4526280" cy="347472"/>
+          </a:xfrm>
+          <a:prstGeom prst="rect">
+            <a:avLst/>
+          </a:prstGeom>
+          <a:noFill/>
+          <a:ln/>
+        </p:spPr>
+        <p:txBody>
+          <a:bodyPr wrap="square" lIns="0" tIns="0" rIns="0" bIns="0" rtlCol="0" anchor="ctr"/>
+          <a:lstStyle/>
+          <a:p>
+            <a:pPr indent="0" marL="0">
+              <a:buNone/>
             </a:pPr>
             <a:r>
               <a:rPr lang="en-US" sz="1500" dirty="0">
@@ -17126,35 +19609,124 @@
                   <a:schemeClr val="tx1"/>
                 </a:solidFill>
               </a:rPr>
-              <a:t>놓친 scratch (0.21)</a:t>
+              <a:t>v8 · 3,673장 · 학습</a:t>
             </a:r>
             <a:endParaRPr lang="en-US" sz="1500" dirty="0"/>
           </a:p>
-          <a:p>
-            <a:pPr marL="342900" indent="-342900">
-              <a:spcAft>
-                <a:spcPts val="600"/>
-              </a:spcAft>
-              <a:buSzPct val="100000"/>
-              <a:buChar char="•"/>
+        </p:txBody>
+      </p:sp>
+      <p:pic>
+        <p:nvPicPr>
+          <p:cNvPr id="7" name="rf-1" descr="C:\Users\user\_se4nchoi\batteryvision\docs\submission\build\img\roboflow_v2.png">    </p:cNvPr>
+          <p:cNvPicPr>
+            <a:picLocks noChangeAspect="1"/>
+          </p:cNvPicPr>
+          <p:nvPr/>
+        </p:nvPicPr>
+        <p:blipFill>
+          <a:blip r:embed="rId2"/>
+          <a:stretch>
+            <a:fillRect/>
+          </a:stretch>
+        </p:blipFill>
+        <p:spPr>
+          <a:xfrm>
+            <a:off x="6190488" y="1600200"/>
+            <a:ext cx="5440680" cy="3320210"/>
+          </a:xfrm>
+          <a:prstGeom prst="rect">
+            <a:avLst/>
+          </a:prstGeom>
+        </p:spPr>
+      </p:pic>
+      <p:sp>
+        <p:nvSpPr>
+          <p:cNvPr id="8" name="rf-tag-1-bg"/>
+          <p:cNvSpPr/>
+          <p:nvPr/>
+        </p:nvSpPr>
+        <p:spPr>
+          <a:xfrm>
+            <a:off x="6190488" y="5057570"/>
+            <a:ext cx="731520" cy="347472"/>
+          </a:xfrm>
+          <a:prstGeom prst="roundRect">
+            <a:avLst>
+              <a:gd name="adj" fmla="val 13158"/>
+            </a:avLst>
+          </a:prstGeom>
+          <a:solidFill>
+            <a:schemeClr val="accent3">
+              <a:alpha val="20000"/>
+            </a:schemeClr>
+          </a:solidFill>
+          <a:ln w="12700">
+            <a:solidFill>
+              <a:schemeClr val="accent3"/>
+            </a:solidFill>
+            <a:prstDash val="solid"/>
+          </a:ln>
+        </p:spPr>
+      </p:sp>
+      <p:sp>
+        <p:nvSpPr>
+          <p:cNvPr id="9" name="rf-tag-1"/>
+          <p:cNvSpPr txBox="1"/>
+          <p:nvPr/>
+        </p:nvSpPr>
+        <p:spPr>
+          <a:xfrm>
+            <a:off x="6190488" y="5057570"/>
+            <a:ext cx="731520" cy="347472"/>
+          </a:xfrm>
+          <a:prstGeom prst="rect">
+            <a:avLst/>
+          </a:prstGeom>
+          <a:noFill/>
+          <a:ln/>
+        </p:spPr>
+        <p:txBody>
+          <a:bodyPr wrap="square" lIns="0" tIns="0" rIns="0" bIns="0" rtlCol="0" anchor="ctr"/>
+          <a:lstStyle/>
+          <a:p>
+            <a:pPr algn="ctr" indent="0" marL="0">
+              <a:buNone/>
             </a:pPr>
             <a:r>
-              <a:rPr lang="en-US" sz="1500" b="1" dirty="0">
+              <a:rPr lang="en-US" sz="1300" b="1" dirty="0">
                 <a:solidFill>
-                  <a:schemeClr val="accent2"/>
+                  <a:schemeClr val="accent3"/>
                 </a:solidFill>
               </a:rPr>
-              <a:t>crack 30×26px → 1/15</a:t>
+              <a:t>2차</a:t>
             </a:r>
-            <a:endParaRPr lang="en-US" sz="1500" dirty="0"/>
-          </a:p>
-          <a:p>
-            <a:pPr marL="342900" indent="-342900">
-              <a:spcAft>
-                <a:spcPts val="600"/>
-              </a:spcAft>
-              <a:buSzPct val="100000"/>
-              <a:buChar char="•"/>
+            <a:endParaRPr lang="en-US" sz="1300" dirty="0"/>
+          </a:p>
+        </p:txBody>
+      </p:sp>
+      <p:sp>
+        <p:nvSpPr>
+          <p:cNvPr id="10" name="rf-cap-1"/>
+          <p:cNvSpPr txBox="1"/>
+          <p:nvPr/>
+        </p:nvSpPr>
+        <p:spPr>
+          <a:xfrm>
+            <a:off x="7059168" y="5057570"/>
+            <a:ext cx="4526280" cy="347472"/>
+          </a:xfrm>
+          <a:prstGeom prst="rect">
+            <a:avLst/>
+          </a:prstGeom>
+          <a:noFill/>
+          <a:ln/>
+        </p:spPr>
+        <p:txBody>
+          <a:bodyPr wrap="square" lIns="0" tIns="0" rIns="0" bIns="0" rtlCol="0" anchor="ctr"/>
+          <a:lstStyle/>
+          <a:p>
+            <a:pPr indent="0" marL="0">
+              <a:buNone/>
             </a:pPr>
             <a:r>
               <a:rPr lang="en-US" sz="1500" dirty="0">
@@ -17162,40 +19734,51 @@
                   <a:schemeClr val="tx1"/>
                 </a:solidFill>
               </a:rPr>
-              <a:t>클래스 착각 0</a:t>
+              <a:t>v2 · 720장 · 테스트만</a:t>
             </a:r>
             <a:endParaRPr lang="en-US" sz="1500" dirty="0"/>
           </a:p>
-          <a:p>
-            <a:pPr marL="342900" indent="-342900">
-              <a:spcAft>
-                <a:spcPts val="600"/>
-              </a:spcAft>
-              <a:buSzPct val="100000"/>
-              <a:buChar char="•"/>
-            </a:pPr>
-            <a:r>
-              <a:rPr lang="en-US" sz="1500" dirty="0">
-                <a:solidFill>
-                  <a:schemeClr val="tx1"/>
-                </a:solidFill>
-              </a:rPr>
-              <a:t>정상 불합격 0</a:t>
-            </a:r>
-            <a:endParaRPr lang="en-US" sz="1500" dirty="0"/>
-          </a:p>
         </p:txBody>
       </p:sp>
       <p:sp>
         <p:nvSpPr>
-          <p:cNvPr id="21" name="th-h"/>
+          <p:cNvPr id="11" name="dedup-bg"/>
+          <p:cNvSpPr/>
+          <p:nvPr/>
+        </p:nvSpPr>
+        <p:spPr>
+          <a:xfrm>
+            <a:off x="548640" y="5715000"/>
+            <a:ext cx="2743200" cy="457200"/>
+          </a:xfrm>
+          <a:prstGeom prst="roundRect">
+            <a:avLst>
+              <a:gd name="adj" fmla="val 10000"/>
+            </a:avLst>
+          </a:prstGeom>
+          <a:solidFill>
+            <a:schemeClr val="accent3">
+              <a:alpha val="20000"/>
+            </a:schemeClr>
+          </a:solidFill>
+          <a:ln w="12700">
+            <a:solidFill>
+              <a:schemeClr val="accent3"/>
+            </a:solidFill>
+            <a:prstDash val="solid"/>
+          </a:ln>
+        </p:spPr>
+      </p:sp>
+      <p:sp>
+        <p:nvSpPr>
+          <p:cNvPr id="12" name="dedup"/>
           <p:cNvSpPr txBox="1"/>
           <p:nvPr/>
         </p:nvSpPr>
         <p:spPr>
           <a:xfrm>
-            <a:off x="6812280" y="1600200"/>
-            <a:ext cx="4846320" cy="320040"/>
+            <a:off x="548640" y="5715000"/>
+            <a:ext cx="2743200" cy="457200"/>
           </a:xfrm>
           <a:prstGeom prst="rect">
             <a:avLst/>
@@ -17204,1710 +19787,34 @@
           <a:ln/>
         </p:spPr>
         <p:txBody>
-          <a:bodyPr wrap="square" lIns="0" tIns="0" rIns="0" bIns="0" rtlCol="0" anchor="t"/>
+          <a:bodyPr wrap="square" lIns="0" tIns="0" rIns="0" bIns="0" rtlCol="0" anchor="ctr"/>
           <a:lstStyle/>
           <a:p>
-            <a:pPr indent="0" marL="0">
+            <a:pPr algn="ctr" indent="0" marL="0">
               <a:buNone/>
             </a:pPr>
             <a:r>
-              <a:rPr lang="en-US" sz="1600" b="1" dirty="0">
+              <a:rPr lang="en-US" sz="1300" b="1" dirty="0">
                 <a:solidFill>
-                  <a:schemeClr val="tx1"/>
+                  <a:schemeClr val="accent3"/>
                 </a:solidFill>
               </a:rPr>
-              <a:t>기준값을 바꾸면?</a:t>
+              <a:t>중복 140장 제거</a:t>
             </a:r>
-            <a:endParaRPr lang="en-US" sz="1600" dirty="0"/>
+            <a:endParaRPr lang="en-US" sz="1300" dirty="0"/>
           </a:p>
         </p:txBody>
       </p:sp>
-      <p:graphicFrame>
-        <p:nvGraphicFramePr>
-          <p:cNvPr id="10" name="th-table"/>
-          <p:cNvGraphicFramePr>
-            <a:graphicFrameLocks noGrp="1"/>
-          </p:cNvGraphicFramePr>
-          <p:nvPr>
-            <p:extLst>
-              <p:ext uri="{D42A27DB-BD31-4B8C-83A1-F6EECF244321}">
-                <p14:modId xmlns:p14="http://schemas.microsoft.com/office/powerpoint/2010/main" val="1579011935"/>
-              </p:ext>
-            </p:extLst>
-          </p:nvPr>
-        </p:nvGraphicFramePr>
-        <p:xfrm>
-          <a:off x="6812280" y="2011680"/>
-          <a:ext cx="4828032" cy="914400"/>
-        </p:xfrm>
-        <a:graphic>
-          <a:graphicData uri="http://schemas.openxmlformats.org/drawingml/2006/table">
-            <a:tbl>
-              <a:tblPr/>
-              <a:tblGrid>
-                <a:gridCol w="1280160"/>
-                <a:gridCol w="1188720"/>
-                <a:gridCol w="1133856"/>
-                <a:gridCol w="1225296"/>
-              </a:tblGrid>
-              <a:tr h="384048">
-                <a:tc>
-                  <a:txBody>
-                    <a:bodyPr/>
-                    <a:lstStyle/>
-                    <a:p>
-                      <a:pPr algn="l" indent="0" marL="0">
-                        <a:buNone/>
-                      </a:pPr>
-                      <a:r>
-                        <a:rPr lang="en-US" sz="1400" b="1" dirty="0">
-                          <a:solidFill>
-                            <a:schemeClr val="tx2"/>
-                          </a:solidFill>
-                          <a:latin typeface="Malgun Gothic" pitchFamily="34" charset="0"/>
-                          <a:ea typeface="Malgun Gothic" pitchFamily="34" charset="-122"/>
-                          <a:cs typeface="Malgun Gothic" pitchFamily="34" charset="-120"/>
-                        </a:rPr>
-                        <a:t>모델</a:t>
-                      </a:r>
-                      <a:endParaRPr lang="en-US" sz="1400" dirty="0">
-                        <a:latin typeface="Malgun Gothic" charset="0"/>
-                        <a:ea typeface="Malgun Gothic" charset="0"/>
-                        <a:cs typeface="Malgun Gothic" charset="0"/>
-                      </a:endParaRPr>
-                    </a:p>
-                  </a:txBody>
-                  <a:tcPr marL="91440" marR="91440" marT="45720" marB="45720" anchor="ctr">
-                    <a:lnL w="9525" cap="flat" cmpd="sng" algn="ctr">
-                      <a:solidFill>
-                        <a:srgbClr val="3A3F48"/>
-                      </a:solidFill>
-                      <a:prstDash val="solid"/>
-                      <a:round/>
-                      <a:headEnd type="none" w="med" len="med"/>
-                      <a:tailEnd type="none" w="med" len="med"/>
-                    </a:lnL>
-                    <a:lnR w="9525" cap="flat" cmpd="sng" algn="ctr">
-                      <a:solidFill>
-                        <a:srgbClr val="3A3F48"/>
-                      </a:solidFill>
-                      <a:prstDash val="solid"/>
-                      <a:round/>
-                      <a:headEnd type="none" w="med" len="med"/>
-                      <a:tailEnd type="none" w="med" len="med"/>
-                    </a:lnR>
-                    <a:lnT w="9525" cap="flat" cmpd="sng" algn="ctr">
-                      <a:solidFill>
-                        <a:srgbClr val="3A3F48"/>
-                      </a:solidFill>
-                      <a:prstDash val="solid"/>
-                      <a:round/>
-                      <a:headEnd type="none" w="med" len="med"/>
-                      <a:tailEnd type="none" w="med" len="med"/>
-                    </a:lnT>
-                    <a:lnB w="9525" cap="flat" cmpd="sng" algn="ctr">
-                      <a:solidFill>
-                        <a:srgbClr val="3A3F48"/>
-                      </a:solidFill>
-                      <a:prstDash val="solid"/>
-                      <a:round/>
-                      <a:headEnd type="none" w="med" len="med"/>
-                      <a:tailEnd type="none" w="med" len="med"/>
-                    </a:lnB>
-                    <a:solidFill>
-                      <a:srgbClr val="16191E"/>
-                    </a:solidFill>
-                  </a:tcPr>
-                </a:tc>
-                <a:tc>
-                  <a:txBody>
-                    <a:bodyPr/>
-                    <a:lstStyle/>
-                    <a:p>
-                      <a:pPr algn="ctr" indent="0" marL="0">
-                        <a:buNone/>
-                      </a:pPr>
-                      <a:r>
-                        <a:rPr lang="en-US" sz="1400" b="1" dirty="0">
-                          <a:solidFill>
-                            <a:schemeClr val="tx2"/>
-                          </a:solidFill>
-                          <a:latin typeface="Malgun Gothic" pitchFamily="34" charset="0"/>
-                          <a:ea typeface="Malgun Gothic" pitchFamily="34" charset="-122"/>
-                          <a:cs typeface="Malgun Gothic" pitchFamily="34" charset="-120"/>
-                        </a:rPr>
-                        <a:t>기준값</a:t>
-                      </a:r>
-                      <a:endParaRPr lang="en-US" sz="1400" dirty="0">
-                        <a:latin typeface="Malgun Gothic" charset="0"/>
-                        <a:ea typeface="Malgun Gothic" charset="0"/>
-                        <a:cs typeface="Malgun Gothic" charset="0"/>
-                      </a:endParaRPr>
-                    </a:p>
-                  </a:txBody>
-                  <a:tcPr marL="91440" marR="91440" marT="45720" marB="45720" anchor="ctr">
-                    <a:lnL w="9525" cap="flat" cmpd="sng" algn="ctr">
-                      <a:solidFill>
-                        <a:srgbClr val="3A3F48"/>
-                      </a:solidFill>
-                      <a:prstDash val="solid"/>
-                      <a:round/>
-                      <a:headEnd type="none" w="med" len="med"/>
-                      <a:tailEnd type="none" w="med" len="med"/>
-                    </a:lnL>
-                    <a:lnR w="9525" cap="flat" cmpd="sng" algn="ctr">
-                      <a:solidFill>
-                        <a:srgbClr val="3A3F48"/>
-                      </a:solidFill>
-                      <a:prstDash val="solid"/>
-                      <a:round/>
-                      <a:headEnd type="none" w="med" len="med"/>
-                      <a:tailEnd type="none" w="med" len="med"/>
-                    </a:lnR>
-                    <a:lnT w="9525" cap="flat" cmpd="sng" algn="ctr">
-                      <a:solidFill>
-                        <a:srgbClr val="3A3F48"/>
-                      </a:solidFill>
-                      <a:prstDash val="solid"/>
-                      <a:round/>
-                      <a:headEnd type="none" w="med" len="med"/>
-                      <a:tailEnd type="none" w="med" len="med"/>
-                    </a:lnT>
-                    <a:lnB w="9525" cap="flat" cmpd="sng" algn="ctr">
-                      <a:solidFill>
-                        <a:srgbClr val="3A3F48"/>
-                      </a:solidFill>
-                      <a:prstDash val="solid"/>
-                      <a:round/>
-                      <a:headEnd type="none" w="med" len="med"/>
-                      <a:tailEnd type="none" w="med" len="med"/>
-                    </a:lnB>
-                    <a:solidFill>
-                      <a:srgbClr val="16191E"/>
-                    </a:solidFill>
-                  </a:tcPr>
-                </a:tc>
-                <a:tc>
-                  <a:txBody>
-                    <a:bodyPr/>
-                    <a:lstStyle/>
-                    <a:p>
-                      <a:pPr algn="ctr" indent="0" marL="0">
-                        <a:buNone/>
-                      </a:pPr>
-                      <a:r>
-                        <a:rPr lang="en-US" sz="1400" b="1" dirty="0">
-                          <a:solidFill>
-                            <a:schemeClr val="tx2"/>
-                          </a:solidFill>
-                          <a:latin typeface="Malgun Gothic" pitchFamily="34" charset="0"/>
-                          <a:ea typeface="Malgun Gothic" pitchFamily="34" charset="-122"/>
-                          <a:cs typeface="Malgun Gothic" pitchFamily="34" charset="-120"/>
-                        </a:rPr>
-                        <a:t>결함 검출</a:t>
-                      </a:r>
-                      <a:endParaRPr lang="en-US" sz="1400" dirty="0">
-                        <a:latin typeface="Malgun Gothic" charset="0"/>
-                        <a:ea typeface="Malgun Gothic" charset="0"/>
-                        <a:cs typeface="Malgun Gothic" charset="0"/>
-                      </a:endParaRPr>
-                    </a:p>
-                  </a:txBody>
-                  <a:tcPr marL="91440" marR="91440" marT="45720" marB="45720" anchor="ctr">
-                    <a:lnL w="9525" cap="flat" cmpd="sng" algn="ctr">
-                      <a:solidFill>
-                        <a:srgbClr val="3A3F48"/>
-                      </a:solidFill>
-                      <a:prstDash val="solid"/>
-                      <a:round/>
-                      <a:headEnd type="none" w="med" len="med"/>
-                      <a:tailEnd type="none" w="med" len="med"/>
-                    </a:lnL>
-                    <a:lnR w="9525" cap="flat" cmpd="sng" algn="ctr">
-                      <a:solidFill>
-                        <a:srgbClr val="3A3F48"/>
-                      </a:solidFill>
-                      <a:prstDash val="solid"/>
-                      <a:round/>
-                      <a:headEnd type="none" w="med" len="med"/>
-                      <a:tailEnd type="none" w="med" len="med"/>
-                    </a:lnR>
-                    <a:lnT w="9525" cap="flat" cmpd="sng" algn="ctr">
-                      <a:solidFill>
-                        <a:srgbClr val="3A3F48"/>
-                      </a:solidFill>
-                      <a:prstDash val="solid"/>
-                      <a:round/>
-                      <a:headEnd type="none" w="med" len="med"/>
-                      <a:tailEnd type="none" w="med" len="med"/>
-                    </a:lnT>
-                    <a:lnB w="9525" cap="flat" cmpd="sng" algn="ctr">
-                      <a:solidFill>
-                        <a:srgbClr val="3A3F48"/>
-                      </a:solidFill>
-                      <a:prstDash val="solid"/>
-                      <a:round/>
-                      <a:headEnd type="none" w="med" len="med"/>
-                      <a:tailEnd type="none" w="med" len="med"/>
-                    </a:lnB>
-                    <a:solidFill>
-                      <a:srgbClr val="16191E"/>
-                    </a:solidFill>
-                  </a:tcPr>
-                </a:tc>
-                <a:tc>
-                  <a:txBody>
-                    <a:bodyPr/>
-                    <a:lstStyle/>
-                    <a:p>
-                      <a:pPr algn="ctr" indent="0" marL="0">
-                        <a:buNone/>
-                      </a:pPr>
-                      <a:r>
-                        <a:rPr lang="en-US" sz="1400" b="1" dirty="0">
-                          <a:solidFill>
-                            <a:schemeClr val="tx2"/>
-                          </a:solidFill>
-                          <a:latin typeface="Malgun Gothic" pitchFamily="34" charset="0"/>
-                          <a:ea typeface="Malgun Gothic" pitchFamily="34" charset="-122"/>
-                          <a:cs typeface="Malgun Gothic" pitchFamily="34" charset="-120"/>
-                        </a:rPr>
-                        <a:t>정상 오검출</a:t>
-                      </a:r>
-                      <a:endParaRPr lang="en-US" sz="1400" dirty="0">
-                        <a:latin typeface="Malgun Gothic" charset="0"/>
-                        <a:ea typeface="Malgun Gothic" charset="0"/>
-                        <a:cs typeface="Malgun Gothic" charset="0"/>
-                      </a:endParaRPr>
-                    </a:p>
-                  </a:txBody>
-                  <a:tcPr marL="91440" marR="91440" marT="45720" marB="45720" anchor="ctr">
-                    <a:lnL w="9525" cap="flat" cmpd="sng" algn="ctr">
-                      <a:solidFill>
-                        <a:srgbClr val="3A3F48"/>
-                      </a:solidFill>
-                      <a:prstDash val="solid"/>
-                      <a:round/>
-                      <a:headEnd type="none" w="med" len="med"/>
-                      <a:tailEnd type="none" w="med" len="med"/>
-                    </a:lnL>
-                    <a:lnR w="9525" cap="flat" cmpd="sng" algn="ctr">
-                      <a:solidFill>
-                        <a:srgbClr val="3A3F48"/>
-                      </a:solidFill>
-                      <a:prstDash val="solid"/>
-                      <a:round/>
-                      <a:headEnd type="none" w="med" len="med"/>
-                      <a:tailEnd type="none" w="med" len="med"/>
-                    </a:lnR>
-                    <a:lnT w="9525" cap="flat" cmpd="sng" algn="ctr">
-                      <a:solidFill>
-                        <a:srgbClr val="3A3F48"/>
-                      </a:solidFill>
-                      <a:prstDash val="solid"/>
-                      <a:round/>
-                      <a:headEnd type="none" w="med" len="med"/>
-                      <a:tailEnd type="none" w="med" len="med"/>
-                    </a:lnT>
-                    <a:lnB w="9525" cap="flat" cmpd="sng" algn="ctr">
-                      <a:solidFill>
-                        <a:srgbClr val="3A3F48"/>
-                      </a:solidFill>
-                      <a:prstDash val="solid"/>
-                      <a:round/>
-                      <a:headEnd type="none" w="med" len="med"/>
-                      <a:tailEnd type="none" w="med" len="med"/>
-                    </a:lnB>
-                    <a:solidFill>
-                      <a:srgbClr val="16191E"/>
-                    </a:solidFill>
-                  </a:tcPr>
-                </a:tc>
-              </a:tr>
-              <a:tr h="384048">
-                <a:tc>
-                  <a:txBody>
-                    <a:bodyPr/>
-                    <a:lstStyle/>
-                    <a:p>
-                      <a:pPr algn="l" indent="0" marL="0">
-                        <a:buNone/>
-                      </a:pPr>
-                      <a:r>
-                        <a:rPr lang="en-US" sz="1400" b="1" dirty="0">
-                          <a:solidFill>
-                            <a:schemeClr val="accent4"/>
-                          </a:solidFill>
-                          <a:latin typeface="Malgun Gothic" pitchFamily="34" charset="0"/>
-                          <a:ea typeface="Malgun Gothic" pitchFamily="34" charset="-122"/>
-                          <a:cs typeface="Malgun Gothic" pitchFamily="34" charset="-120"/>
-                        </a:rPr>
-                        <a:t>ATSS</a:t>
-                      </a:r>
-                      <a:endParaRPr lang="en-US" sz="1400" dirty="0">
-                        <a:latin typeface="Malgun Gothic" charset="0"/>
-                        <a:ea typeface="Malgun Gothic" charset="0"/>
-                        <a:cs typeface="Malgun Gothic" charset="0"/>
-                      </a:endParaRPr>
-                    </a:p>
-                  </a:txBody>
-                  <a:tcPr marL="91440" marR="91440" marT="45720" marB="45720" anchor="ctr">
-                    <a:lnL w="9525" cap="flat" cmpd="sng" algn="ctr">
-                      <a:solidFill>
-                        <a:srgbClr val="3A3F48"/>
-                      </a:solidFill>
-                      <a:prstDash val="solid"/>
-                      <a:round/>
-                      <a:headEnd type="none" w="med" len="med"/>
-                      <a:tailEnd type="none" w="med" len="med"/>
-                    </a:lnL>
-                    <a:lnR w="9525" cap="flat" cmpd="sng" algn="ctr">
-                      <a:solidFill>
-                        <a:srgbClr val="3A3F48"/>
-                      </a:solidFill>
-                      <a:prstDash val="solid"/>
-                      <a:round/>
-                      <a:headEnd type="none" w="med" len="med"/>
-                      <a:tailEnd type="none" w="med" len="med"/>
-                    </a:lnR>
-                    <a:lnT w="9525" cap="flat" cmpd="sng" algn="ctr">
-                      <a:solidFill>
-                        <a:srgbClr val="3A3F48"/>
-                      </a:solidFill>
-                      <a:prstDash val="solid"/>
-                      <a:round/>
-                      <a:headEnd type="none" w="med" len="med"/>
-                      <a:tailEnd type="none" w="med" len="med"/>
-                    </a:lnT>
-                    <a:lnB w="9525" cap="flat" cmpd="sng" algn="ctr">
-                      <a:solidFill>
-                        <a:srgbClr val="3A3F48"/>
-                      </a:solidFill>
-                      <a:prstDash val="solid"/>
-                      <a:round/>
-                      <a:headEnd type="none" w="med" len="med"/>
-                      <a:tailEnd type="none" w="med" len="med"/>
-                    </a:lnB>
-                    <a:solidFill>
-                      <a:srgbClr val="23272F"/>
-                    </a:solidFill>
-                  </a:tcPr>
-                </a:tc>
-                <a:tc>
-                  <a:txBody>
-                    <a:bodyPr/>
-                    <a:lstStyle/>
-                    <a:p>
-                      <a:pPr algn="ctr" indent="0" marL="0">
-                        <a:buNone/>
-                      </a:pPr>
-                      <a:r>
-                        <a:rPr lang="en-US" sz="1400" dirty="0">
-                          <a:solidFill>
-                            <a:schemeClr val="tx1"/>
-                          </a:solidFill>
-                          <a:latin typeface="Malgun Gothic" pitchFamily="34" charset="0"/>
-                          <a:ea typeface="Malgun Gothic" pitchFamily="34" charset="-122"/>
-                          <a:cs typeface="Malgun Gothic" pitchFamily="34" charset="-120"/>
-                        </a:rPr>
-                        <a:t>0.30 (현재)</a:t>
-                      </a:r>
-                      <a:endParaRPr lang="en-US" sz="1400" dirty="0">
-                        <a:latin typeface="Malgun Gothic" charset="0"/>
-                        <a:ea typeface="Malgun Gothic" charset="0"/>
-                        <a:cs typeface="Malgun Gothic" charset="0"/>
-                      </a:endParaRPr>
-                    </a:p>
-                  </a:txBody>
-                  <a:tcPr marL="91440" marR="91440" marT="45720" marB="45720" anchor="ctr">
-                    <a:lnL w="9525" cap="flat" cmpd="sng" algn="ctr">
-                      <a:solidFill>
-                        <a:srgbClr val="3A3F48"/>
-                      </a:solidFill>
-                      <a:prstDash val="solid"/>
-                      <a:round/>
-                      <a:headEnd type="none" w="med" len="med"/>
-                      <a:tailEnd type="none" w="med" len="med"/>
-                    </a:lnL>
-                    <a:lnR w="9525" cap="flat" cmpd="sng" algn="ctr">
-                      <a:solidFill>
-                        <a:srgbClr val="3A3F48"/>
-                      </a:solidFill>
-                      <a:prstDash val="solid"/>
-                      <a:round/>
-                      <a:headEnd type="none" w="med" len="med"/>
-                      <a:tailEnd type="none" w="med" len="med"/>
-                    </a:lnR>
-                    <a:lnT w="9525" cap="flat" cmpd="sng" algn="ctr">
-                      <a:solidFill>
-                        <a:srgbClr val="3A3F48"/>
-                      </a:solidFill>
-                      <a:prstDash val="solid"/>
-                      <a:round/>
-                      <a:headEnd type="none" w="med" len="med"/>
-                      <a:tailEnd type="none" w="med" len="med"/>
-                    </a:lnT>
-                    <a:lnB w="9525" cap="flat" cmpd="sng" algn="ctr">
-                      <a:solidFill>
-                        <a:srgbClr val="3A3F48"/>
-                      </a:solidFill>
-                      <a:prstDash val="solid"/>
-                      <a:round/>
-                      <a:headEnd type="none" w="med" len="med"/>
-                      <a:tailEnd type="none" w="med" len="med"/>
-                    </a:lnB>
-                    <a:solidFill>
-                      <a:srgbClr val="23272F"/>
-                    </a:solidFill>
-                  </a:tcPr>
-                </a:tc>
-                <a:tc>
-                  <a:txBody>
-                    <a:bodyPr/>
-                    <a:lstStyle/>
-                    <a:p>
-                      <a:pPr algn="ctr" indent="0" marL="0">
-                        <a:buNone/>
-                      </a:pPr>
-                      <a:r>
-                        <a:rPr lang="en-US" sz="1400" b="1" dirty="0">
-                          <a:solidFill>
-                            <a:schemeClr val="accent2"/>
-                          </a:solidFill>
-                          <a:latin typeface="Malgun Gothic" pitchFamily="34" charset="0"/>
-                          <a:ea typeface="Malgun Gothic" pitchFamily="34" charset="-122"/>
-                          <a:cs typeface="Malgun Gothic" pitchFamily="34" charset="-120"/>
-                        </a:rPr>
-                        <a:t>47%</a:t>
-                      </a:r>
-                      <a:endParaRPr lang="en-US" sz="1400" dirty="0">
-                        <a:latin typeface="Malgun Gothic" charset="0"/>
-                        <a:ea typeface="Malgun Gothic" charset="0"/>
-                        <a:cs typeface="Malgun Gothic" charset="0"/>
-                      </a:endParaRPr>
-                    </a:p>
-                  </a:txBody>
-                  <a:tcPr marL="91440" marR="91440" marT="45720" marB="45720" anchor="ctr">
-                    <a:lnL w="9525" cap="flat" cmpd="sng" algn="ctr">
-                      <a:solidFill>
-                        <a:srgbClr val="3A3F48"/>
-                      </a:solidFill>
-                      <a:prstDash val="solid"/>
-                      <a:round/>
-                      <a:headEnd type="none" w="med" len="med"/>
-                      <a:tailEnd type="none" w="med" len="med"/>
-                    </a:lnL>
-                    <a:lnR w="9525" cap="flat" cmpd="sng" algn="ctr">
-                      <a:solidFill>
-                        <a:srgbClr val="3A3F48"/>
-                      </a:solidFill>
-                      <a:prstDash val="solid"/>
-                      <a:round/>
-                      <a:headEnd type="none" w="med" len="med"/>
-                      <a:tailEnd type="none" w="med" len="med"/>
-                    </a:lnR>
-                    <a:lnT w="9525" cap="flat" cmpd="sng" algn="ctr">
-                      <a:solidFill>
-                        <a:srgbClr val="3A3F48"/>
-                      </a:solidFill>
-                      <a:prstDash val="solid"/>
-                      <a:round/>
-                      <a:headEnd type="none" w="med" len="med"/>
-                      <a:tailEnd type="none" w="med" len="med"/>
-                    </a:lnT>
-                    <a:lnB w="9525" cap="flat" cmpd="sng" algn="ctr">
-                      <a:solidFill>
-                        <a:srgbClr val="3A3F48"/>
-                      </a:solidFill>
-                      <a:prstDash val="solid"/>
-                      <a:round/>
-                      <a:headEnd type="none" w="med" len="med"/>
-                      <a:tailEnd type="none" w="med" len="med"/>
-                    </a:lnB>
-                    <a:solidFill>
-                      <a:srgbClr val="23272F"/>
-                    </a:solidFill>
-                  </a:tcPr>
-                </a:tc>
-                <a:tc>
-                  <a:txBody>
-                    <a:bodyPr/>
-                    <a:lstStyle/>
-                    <a:p>
-                      <a:pPr algn="ctr" indent="0" marL="0">
-                        <a:buNone/>
-                      </a:pPr>
-                      <a:r>
-                        <a:rPr lang="en-US" sz="1400" dirty="0">
-                          <a:solidFill>
-                            <a:schemeClr val="tx1"/>
-                          </a:solidFill>
-                          <a:latin typeface="Malgun Gothic" pitchFamily="34" charset="0"/>
-                          <a:ea typeface="Malgun Gothic" pitchFamily="34" charset="-122"/>
-                          <a:cs typeface="Malgun Gothic" pitchFamily="34" charset="-120"/>
-                        </a:rPr>
-                        <a:t>13%</a:t>
-                      </a:r>
-                      <a:endParaRPr lang="en-US" sz="1400" dirty="0">
-                        <a:latin typeface="Malgun Gothic" charset="0"/>
-                        <a:ea typeface="Malgun Gothic" charset="0"/>
-                        <a:cs typeface="Malgun Gothic" charset="0"/>
-                      </a:endParaRPr>
-                    </a:p>
-                  </a:txBody>
-                  <a:tcPr marL="91440" marR="91440" marT="45720" marB="45720" anchor="ctr">
-                    <a:lnL w="9525" cap="flat" cmpd="sng" algn="ctr">
-                      <a:solidFill>
-                        <a:srgbClr val="3A3F48"/>
-                      </a:solidFill>
-                      <a:prstDash val="solid"/>
-                      <a:round/>
-                      <a:headEnd type="none" w="med" len="med"/>
-                      <a:tailEnd type="none" w="med" len="med"/>
-                    </a:lnL>
-                    <a:lnR w="9525" cap="flat" cmpd="sng" algn="ctr">
-                      <a:solidFill>
-                        <a:srgbClr val="3A3F48"/>
-                      </a:solidFill>
-                      <a:prstDash val="solid"/>
-                      <a:round/>
-                      <a:headEnd type="none" w="med" len="med"/>
-                      <a:tailEnd type="none" w="med" len="med"/>
-                    </a:lnR>
-                    <a:lnT w="9525" cap="flat" cmpd="sng" algn="ctr">
-                      <a:solidFill>
-                        <a:srgbClr val="3A3F48"/>
-                      </a:solidFill>
-                      <a:prstDash val="solid"/>
-                      <a:round/>
-                      <a:headEnd type="none" w="med" len="med"/>
-                      <a:tailEnd type="none" w="med" len="med"/>
-                    </a:lnT>
-                    <a:lnB w="9525" cap="flat" cmpd="sng" algn="ctr">
-                      <a:solidFill>
-                        <a:srgbClr val="3A3F48"/>
-                      </a:solidFill>
-                      <a:prstDash val="solid"/>
-                      <a:round/>
-                      <a:headEnd type="none" w="med" len="med"/>
-                      <a:tailEnd type="none" w="med" len="med"/>
-                    </a:lnB>
-                    <a:solidFill>
-                      <a:srgbClr val="23272F"/>
-                    </a:solidFill>
-                  </a:tcPr>
-                </a:tc>
-              </a:tr>
-              <a:tr h="384048">
-                <a:tc>
-                  <a:txBody>
-                    <a:bodyPr/>
-                    <a:lstStyle/>
-                    <a:p>
-                      <a:pPr algn="l" indent="0" marL="0">
-                        <a:buNone/>
-                      </a:pPr>
-                      <a:r>
-                        <a:rPr lang="en-US" sz="1400" b="1" dirty="0">
-                          <a:solidFill>
-                            <a:schemeClr val="accent4"/>
-                          </a:solidFill>
-                          <a:latin typeface="Malgun Gothic" pitchFamily="34" charset="0"/>
-                          <a:ea typeface="Malgun Gothic" pitchFamily="34" charset="-122"/>
-                          <a:cs typeface="Malgun Gothic" pitchFamily="34" charset="-120"/>
-                        </a:rPr>
-                        <a:t>ATSS</a:t>
-                      </a:r>
-                      <a:endParaRPr lang="en-US" sz="1400" dirty="0">
-                        <a:latin typeface="Malgun Gothic" charset="0"/>
-                        <a:ea typeface="Malgun Gothic" charset="0"/>
-                        <a:cs typeface="Malgun Gothic" charset="0"/>
-                      </a:endParaRPr>
-                    </a:p>
-                  </a:txBody>
-                  <a:tcPr marL="91440" marR="91440" marT="45720" marB="45720" anchor="ctr">
-                    <a:lnL w="9525" cap="flat" cmpd="sng" algn="ctr">
-                      <a:solidFill>
-                        <a:srgbClr val="3A3F48"/>
-                      </a:solidFill>
-                      <a:prstDash val="solid"/>
-                      <a:round/>
-                      <a:headEnd type="none" w="med" len="med"/>
-                      <a:tailEnd type="none" w="med" len="med"/>
-                    </a:lnL>
-                    <a:lnR w="9525" cap="flat" cmpd="sng" algn="ctr">
-                      <a:solidFill>
-                        <a:srgbClr val="3A3F48"/>
-                      </a:solidFill>
-                      <a:prstDash val="solid"/>
-                      <a:round/>
-                      <a:headEnd type="none" w="med" len="med"/>
-                      <a:tailEnd type="none" w="med" len="med"/>
-                    </a:lnR>
-                    <a:lnT w="9525" cap="flat" cmpd="sng" algn="ctr">
-                      <a:solidFill>
-                        <a:srgbClr val="3A3F48"/>
-                      </a:solidFill>
-                      <a:prstDash val="solid"/>
-                      <a:round/>
-                      <a:headEnd type="none" w="med" len="med"/>
-                      <a:tailEnd type="none" w="med" len="med"/>
-                    </a:lnT>
-                    <a:lnB w="9525" cap="flat" cmpd="sng" algn="ctr">
-                      <a:solidFill>
-                        <a:srgbClr val="3A3F48"/>
-                      </a:solidFill>
-                      <a:prstDash val="solid"/>
-                      <a:round/>
-                      <a:headEnd type="none" w="med" len="med"/>
-                      <a:tailEnd type="none" w="med" len="med"/>
-                    </a:lnB>
-                    <a:solidFill>
-                      <a:srgbClr val="23272F"/>
-                    </a:solidFill>
-                  </a:tcPr>
-                </a:tc>
-                <a:tc>
-                  <a:txBody>
-                    <a:bodyPr/>
-                    <a:lstStyle/>
-                    <a:p>
-                      <a:pPr algn="ctr" indent="0" marL="0">
-                        <a:buNone/>
-                      </a:pPr>
-                      <a:r>
-                        <a:rPr lang="en-US" sz="1400" dirty="0">
-                          <a:solidFill>
-                            <a:schemeClr val="tx1"/>
-                          </a:solidFill>
-                          <a:latin typeface="Malgun Gothic" pitchFamily="34" charset="0"/>
-                          <a:ea typeface="Malgun Gothic" pitchFamily="34" charset="-122"/>
-                          <a:cs typeface="Malgun Gothic" pitchFamily="34" charset="-120"/>
-                        </a:rPr>
-                        <a:t>0.20</a:t>
-                      </a:r>
-                      <a:endParaRPr lang="en-US" sz="1400" dirty="0">
-                        <a:latin typeface="Malgun Gothic" charset="0"/>
-                        <a:ea typeface="Malgun Gothic" charset="0"/>
-                        <a:cs typeface="Malgun Gothic" charset="0"/>
-                      </a:endParaRPr>
-                    </a:p>
-                  </a:txBody>
-                  <a:tcPr marL="91440" marR="91440" marT="45720" marB="45720" anchor="ctr">
-                    <a:lnL w="9525" cap="flat" cmpd="sng" algn="ctr">
-                      <a:solidFill>
-                        <a:srgbClr val="3A3F48"/>
-                      </a:solidFill>
-                      <a:prstDash val="solid"/>
-                      <a:round/>
-                      <a:headEnd type="none" w="med" len="med"/>
-                      <a:tailEnd type="none" w="med" len="med"/>
-                    </a:lnL>
-                    <a:lnR w="9525" cap="flat" cmpd="sng" algn="ctr">
-                      <a:solidFill>
-                        <a:srgbClr val="3A3F48"/>
-                      </a:solidFill>
-                      <a:prstDash val="solid"/>
-                      <a:round/>
-                      <a:headEnd type="none" w="med" len="med"/>
-                      <a:tailEnd type="none" w="med" len="med"/>
-                    </a:lnR>
-                    <a:lnT w="9525" cap="flat" cmpd="sng" algn="ctr">
-                      <a:solidFill>
-                        <a:srgbClr val="3A3F48"/>
-                      </a:solidFill>
-                      <a:prstDash val="solid"/>
-                      <a:round/>
-                      <a:headEnd type="none" w="med" len="med"/>
-                      <a:tailEnd type="none" w="med" len="med"/>
-                    </a:lnT>
-                    <a:lnB w="9525" cap="flat" cmpd="sng" algn="ctr">
-                      <a:solidFill>
-                        <a:srgbClr val="3A3F48"/>
-                      </a:solidFill>
-                      <a:prstDash val="solid"/>
-                      <a:round/>
-                      <a:headEnd type="none" w="med" len="med"/>
-                      <a:tailEnd type="none" w="med" len="med"/>
-                    </a:lnB>
-                    <a:solidFill>
-                      <a:srgbClr val="23272F"/>
-                    </a:solidFill>
-                  </a:tcPr>
-                </a:tc>
-                <a:tc>
-                  <a:txBody>
-                    <a:bodyPr/>
-                    <a:lstStyle/>
-                    <a:p>
-                      <a:pPr algn="ctr" indent="0" marL="0">
-                        <a:buNone/>
-                      </a:pPr>
-                      <a:r>
-                        <a:rPr lang="en-US" sz="1400" dirty="0">
-                          <a:solidFill>
-                            <a:schemeClr val="tx1"/>
-                          </a:solidFill>
-                          <a:latin typeface="Malgun Gothic" pitchFamily="34" charset="0"/>
-                          <a:ea typeface="Malgun Gothic" pitchFamily="34" charset="-122"/>
-                          <a:cs typeface="Malgun Gothic" pitchFamily="34" charset="-120"/>
-                        </a:rPr>
-                        <a:t>87%</a:t>
-                      </a:r>
-                      <a:endParaRPr lang="en-US" sz="1400" dirty="0">
-                        <a:latin typeface="Malgun Gothic" charset="0"/>
-                        <a:ea typeface="Malgun Gothic" charset="0"/>
-                        <a:cs typeface="Malgun Gothic" charset="0"/>
-                      </a:endParaRPr>
-                    </a:p>
-                  </a:txBody>
-                  <a:tcPr marL="91440" marR="91440" marT="45720" marB="45720" anchor="ctr">
-                    <a:lnL w="9525" cap="flat" cmpd="sng" algn="ctr">
-                      <a:solidFill>
-                        <a:srgbClr val="3A3F48"/>
-                      </a:solidFill>
-                      <a:prstDash val="solid"/>
-                      <a:round/>
-                      <a:headEnd type="none" w="med" len="med"/>
-                      <a:tailEnd type="none" w="med" len="med"/>
-                    </a:lnL>
-                    <a:lnR w="9525" cap="flat" cmpd="sng" algn="ctr">
-                      <a:solidFill>
-                        <a:srgbClr val="3A3F48"/>
-                      </a:solidFill>
-                      <a:prstDash val="solid"/>
-                      <a:round/>
-                      <a:headEnd type="none" w="med" len="med"/>
-                      <a:tailEnd type="none" w="med" len="med"/>
-                    </a:lnR>
-                    <a:lnT w="9525" cap="flat" cmpd="sng" algn="ctr">
-                      <a:solidFill>
-                        <a:srgbClr val="3A3F48"/>
-                      </a:solidFill>
-                      <a:prstDash val="solid"/>
-                      <a:round/>
-                      <a:headEnd type="none" w="med" len="med"/>
-                      <a:tailEnd type="none" w="med" len="med"/>
-                    </a:lnT>
-                    <a:lnB w="9525" cap="flat" cmpd="sng" algn="ctr">
-                      <a:solidFill>
-                        <a:srgbClr val="3A3F48"/>
-                      </a:solidFill>
-                      <a:prstDash val="solid"/>
-                      <a:round/>
-                      <a:headEnd type="none" w="med" len="med"/>
-                      <a:tailEnd type="none" w="med" len="med"/>
-                    </a:lnB>
-                    <a:solidFill>
-                      <a:srgbClr val="23272F"/>
-                    </a:solidFill>
-                  </a:tcPr>
-                </a:tc>
-                <a:tc>
-                  <a:txBody>
-                    <a:bodyPr/>
-                    <a:lstStyle/>
-                    <a:p>
-                      <a:pPr algn="ctr" indent="0" marL="0">
-                        <a:buNone/>
-                      </a:pPr>
-                      <a:r>
-                        <a:rPr lang="en-US" sz="1400" b="1" dirty="0">
-                          <a:solidFill>
-                            <a:schemeClr val="accent3"/>
-                          </a:solidFill>
-                          <a:latin typeface="Malgun Gothic" pitchFamily="34" charset="0"/>
-                          <a:ea typeface="Malgun Gothic" pitchFamily="34" charset="-122"/>
-                          <a:cs typeface="Malgun Gothic" pitchFamily="34" charset="-120"/>
-                        </a:rPr>
-                        <a:t>73%</a:t>
-                      </a:r>
-                      <a:endParaRPr lang="en-US" sz="1400" dirty="0">
-                        <a:latin typeface="Malgun Gothic" charset="0"/>
-                        <a:ea typeface="Malgun Gothic" charset="0"/>
-                        <a:cs typeface="Malgun Gothic" charset="0"/>
-                      </a:endParaRPr>
-                    </a:p>
-                  </a:txBody>
-                  <a:tcPr marL="91440" marR="91440" marT="45720" marB="45720" anchor="ctr">
-                    <a:lnL w="9525" cap="flat" cmpd="sng" algn="ctr">
-                      <a:solidFill>
-                        <a:srgbClr val="3A3F48"/>
-                      </a:solidFill>
-                      <a:prstDash val="solid"/>
-                      <a:round/>
-                      <a:headEnd type="none" w="med" len="med"/>
-                      <a:tailEnd type="none" w="med" len="med"/>
-                    </a:lnL>
-                    <a:lnR w="9525" cap="flat" cmpd="sng" algn="ctr">
-                      <a:solidFill>
-                        <a:srgbClr val="3A3F48"/>
-                      </a:solidFill>
-                      <a:prstDash val="solid"/>
-                      <a:round/>
-                      <a:headEnd type="none" w="med" len="med"/>
-                      <a:tailEnd type="none" w="med" len="med"/>
-                    </a:lnR>
-                    <a:lnT w="9525" cap="flat" cmpd="sng" algn="ctr">
-                      <a:solidFill>
-                        <a:srgbClr val="3A3F48"/>
-                      </a:solidFill>
-                      <a:prstDash val="solid"/>
-                      <a:round/>
-                      <a:headEnd type="none" w="med" len="med"/>
-                      <a:tailEnd type="none" w="med" len="med"/>
-                    </a:lnT>
-                    <a:lnB w="9525" cap="flat" cmpd="sng" algn="ctr">
-                      <a:solidFill>
-                        <a:srgbClr val="3A3F48"/>
-                      </a:solidFill>
-                      <a:prstDash val="solid"/>
-                      <a:round/>
-                      <a:headEnd type="none" w="med" len="med"/>
-                      <a:tailEnd type="none" w="med" len="med"/>
-                    </a:lnB>
-                    <a:solidFill>
-                      <a:srgbClr val="23272F"/>
-                    </a:solidFill>
-                  </a:tcPr>
-                </a:tc>
-              </a:tr>
-              <a:tr h="384048">
-                <a:tc>
-                  <a:txBody>
-                    <a:bodyPr/>
-                    <a:lstStyle/>
-                    <a:p>
-                      <a:pPr algn="l" indent="0" marL="0">
-                        <a:buNone/>
-                      </a:pPr>
-                      <a:r>
-                        <a:rPr lang="en-US" sz="1400" b="1" dirty="0">
-                          <a:solidFill>
-                            <a:schemeClr val="accent4"/>
-                          </a:solidFill>
-                          <a:latin typeface="Malgun Gothic" pitchFamily="34" charset="0"/>
-                          <a:ea typeface="Malgun Gothic" pitchFamily="34" charset="-122"/>
-                          <a:cs typeface="Malgun Gothic" pitchFamily="34" charset="-120"/>
-                        </a:rPr>
-                        <a:t>ATSS</a:t>
-                      </a:r>
-                      <a:endParaRPr lang="en-US" sz="1400" dirty="0">
-                        <a:latin typeface="Malgun Gothic" charset="0"/>
-                        <a:ea typeface="Malgun Gothic" charset="0"/>
-                        <a:cs typeface="Malgun Gothic" charset="0"/>
-                      </a:endParaRPr>
-                    </a:p>
-                  </a:txBody>
-                  <a:tcPr marL="91440" marR="91440" marT="45720" marB="45720" anchor="ctr">
-                    <a:lnL w="9525" cap="flat" cmpd="sng" algn="ctr">
-                      <a:solidFill>
-                        <a:srgbClr val="3A3F48"/>
-                      </a:solidFill>
-                      <a:prstDash val="solid"/>
-                      <a:round/>
-                      <a:headEnd type="none" w="med" len="med"/>
-                      <a:tailEnd type="none" w="med" len="med"/>
-                    </a:lnL>
-                    <a:lnR w="9525" cap="flat" cmpd="sng" algn="ctr">
-                      <a:solidFill>
-                        <a:srgbClr val="3A3F48"/>
-                      </a:solidFill>
-                      <a:prstDash val="solid"/>
-                      <a:round/>
-                      <a:headEnd type="none" w="med" len="med"/>
-                      <a:tailEnd type="none" w="med" len="med"/>
-                    </a:lnR>
-                    <a:lnT w="9525" cap="flat" cmpd="sng" algn="ctr">
-                      <a:solidFill>
-                        <a:srgbClr val="3A3F48"/>
-                      </a:solidFill>
-                      <a:prstDash val="solid"/>
-                      <a:round/>
-                      <a:headEnd type="none" w="med" len="med"/>
-                      <a:tailEnd type="none" w="med" len="med"/>
-                    </a:lnT>
-                    <a:lnB w="9525" cap="flat" cmpd="sng" algn="ctr">
-                      <a:solidFill>
-                        <a:srgbClr val="3A3F48"/>
-                      </a:solidFill>
-                      <a:prstDash val="solid"/>
-                      <a:round/>
-                      <a:headEnd type="none" w="med" len="med"/>
-                      <a:tailEnd type="none" w="med" len="med"/>
-                    </a:lnB>
-                    <a:solidFill>
-                      <a:srgbClr val="23272F"/>
-                    </a:solidFill>
-                  </a:tcPr>
-                </a:tc>
-                <a:tc>
-                  <a:txBody>
-                    <a:bodyPr/>
-                    <a:lstStyle/>
-                    <a:p>
-                      <a:pPr algn="ctr" indent="0" marL="0">
-                        <a:buNone/>
-                      </a:pPr>
-                      <a:r>
-                        <a:rPr lang="en-US" sz="1400" dirty="0">
-                          <a:solidFill>
-                            <a:schemeClr val="tx1"/>
-                          </a:solidFill>
-                          <a:latin typeface="Malgun Gothic" pitchFamily="34" charset="0"/>
-                          <a:ea typeface="Malgun Gothic" pitchFamily="34" charset="-122"/>
-                          <a:cs typeface="Malgun Gothic" pitchFamily="34" charset="-120"/>
-                        </a:rPr>
-                        <a:t>0.15</a:t>
-                      </a:r>
-                      <a:endParaRPr lang="en-US" sz="1400" dirty="0">
-                        <a:latin typeface="Malgun Gothic" charset="0"/>
-                        <a:ea typeface="Malgun Gothic" charset="0"/>
-                        <a:cs typeface="Malgun Gothic" charset="0"/>
-                      </a:endParaRPr>
-                    </a:p>
-                  </a:txBody>
-                  <a:tcPr marL="91440" marR="91440" marT="45720" marB="45720" anchor="ctr">
-                    <a:lnL w="9525" cap="flat" cmpd="sng" algn="ctr">
-                      <a:solidFill>
-                        <a:srgbClr val="3A3F48"/>
-                      </a:solidFill>
-                      <a:prstDash val="solid"/>
-                      <a:round/>
-                      <a:headEnd type="none" w="med" len="med"/>
-                      <a:tailEnd type="none" w="med" len="med"/>
-                    </a:lnL>
-                    <a:lnR w="9525" cap="flat" cmpd="sng" algn="ctr">
-                      <a:solidFill>
-                        <a:srgbClr val="3A3F48"/>
-                      </a:solidFill>
-                      <a:prstDash val="solid"/>
-                      <a:round/>
-                      <a:headEnd type="none" w="med" len="med"/>
-                      <a:tailEnd type="none" w="med" len="med"/>
-                    </a:lnR>
-                    <a:lnT w="9525" cap="flat" cmpd="sng" algn="ctr">
-                      <a:solidFill>
-                        <a:srgbClr val="3A3F48"/>
-                      </a:solidFill>
-                      <a:prstDash val="solid"/>
-                      <a:round/>
-                      <a:headEnd type="none" w="med" len="med"/>
-                      <a:tailEnd type="none" w="med" len="med"/>
-                    </a:lnT>
-                    <a:lnB w="9525" cap="flat" cmpd="sng" algn="ctr">
-                      <a:solidFill>
-                        <a:srgbClr val="3A3F48"/>
-                      </a:solidFill>
-                      <a:prstDash val="solid"/>
-                      <a:round/>
-                      <a:headEnd type="none" w="med" len="med"/>
-                      <a:tailEnd type="none" w="med" len="med"/>
-                    </a:lnB>
-                    <a:solidFill>
-                      <a:srgbClr val="23272F"/>
-                    </a:solidFill>
-                  </a:tcPr>
-                </a:tc>
-                <a:tc>
-                  <a:txBody>
-                    <a:bodyPr/>
-                    <a:lstStyle/>
-                    <a:p>
-                      <a:pPr algn="ctr" indent="0" marL="0">
-                        <a:buNone/>
-                      </a:pPr>
-                      <a:r>
-                        <a:rPr lang="en-US" sz="1400" dirty="0">
-                          <a:solidFill>
-                            <a:schemeClr val="tx1"/>
-                          </a:solidFill>
-                          <a:latin typeface="Malgun Gothic" pitchFamily="34" charset="0"/>
-                          <a:ea typeface="Malgun Gothic" pitchFamily="34" charset="-122"/>
-                          <a:cs typeface="Malgun Gothic" pitchFamily="34" charset="-120"/>
-                        </a:rPr>
-                        <a:t>97%</a:t>
-                      </a:r>
-                      <a:endParaRPr lang="en-US" sz="1400" dirty="0">
-                        <a:latin typeface="Malgun Gothic" charset="0"/>
-                        <a:ea typeface="Malgun Gothic" charset="0"/>
-                        <a:cs typeface="Malgun Gothic" charset="0"/>
-                      </a:endParaRPr>
-                    </a:p>
-                  </a:txBody>
-                  <a:tcPr marL="91440" marR="91440" marT="45720" marB="45720" anchor="ctr">
-                    <a:lnL w="9525" cap="flat" cmpd="sng" algn="ctr">
-                      <a:solidFill>
-                        <a:srgbClr val="3A3F48"/>
-                      </a:solidFill>
-                      <a:prstDash val="solid"/>
-                      <a:round/>
-                      <a:headEnd type="none" w="med" len="med"/>
-                      <a:tailEnd type="none" w="med" len="med"/>
-                    </a:lnL>
-                    <a:lnR w="9525" cap="flat" cmpd="sng" algn="ctr">
-                      <a:solidFill>
-                        <a:srgbClr val="3A3F48"/>
-                      </a:solidFill>
-                      <a:prstDash val="solid"/>
-                      <a:round/>
-                      <a:headEnd type="none" w="med" len="med"/>
-                      <a:tailEnd type="none" w="med" len="med"/>
-                    </a:lnR>
-                    <a:lnT w="9525" cap="flat" cmpd="sng" algn="ctr">
-                      <a:solidFill>
-                        <a:srgbClr val="3A3F48"/>
-                      </a:solidFill>
-                      <a:prstDash val="solid"/>
-                      <a:round/>
-                      <a:headEnd type="none" w="med" len="med"/>
-                      <a:tailEnd type="none" w="med" len="med"/>
-                    </a:lnT>
-                    <a:lnB w="9525" cap="flat" cmpd="sng" algn="ctr">
-                      <a:solidFill>
-                        <a:srgbClr val="3A3F48"/>
-                      </a:solidFill>
-                      <a:prstDash val="solid"/>
-                      <a:round/>
-                      <a:headEnd type="none" w="med" len="med"/>
-                      <a:tailEnd type="none" w="med" len="med"/>
-                    </a:lnB>
-                    <a:solidFill>
-                      <a:srgbClr val="23272F"/>
-                    </a:solidFill>
-                  </a:tcPr>
-                </a:tc>
-                <a:tc>
-                  <a:txBody>
-                    <a:bodyPr/>
-                    <a:lstStyle/>
-                    <a:p>
-                      <a:pPr algn="ctr" indent="0" marL="0">
-                        <a:buNone/>
-                      </a:pPr>
-                      <a:r>
-                        <a:rPr lang="en-US" sz="1400" b="1" dirty="0">
-                          <a:solidFill>
-                            <a:schemeClr val="accent2"/>
-                          </a:solidFill>
-                          <a:latin typeface="Malgun Gothic" pitchFamily="34" charset="0"/>
-                          <a:ea typeface="Malgun Gothic" pitchFamily="34" charset="-122"/>
-                          <a:cs typeface="Malgun Gothic" pitchFamily="34" charset="-120"/>
-                        </a:rPr>
-                        <a:t>87%</a:t>
-                      </a:r>
-                      <a:endParaRPr lang="en-US" sz="1400" dirty="0">
-                        <a:latin typeface="Malgun Gothic" charset="0"/>
-                        <a:ea typeface="Malgun Gothic" charset="0"/>
-                        <a:cs typeface="Malgun Gothic" charset="0"/>
-                      </a:endParaRPr>
-                    </a:p>
-                  </a:txBody>
-                  <a:tcPr marL="91440" marR="91440" marT="45720" marB="45720" anchor="ctr">
-                    <a:lnL w="9525" cap="flat" cmpd="sng" algn="ctr">
-                      <a:solidFill>
-                        <a:srgbClr val="3A3F48"/>
-                      </a:solidFill>
-                      <a:prstDash val="solid"/>
-                      <a:round/>
-                      <a:headEnd type="none" w="med" len="med"/>
-                      <a:tailEnd type="none" w="med" len="med"/>
-                    </a:lnL>
-                    <a:lnR w="9525" cap="flat" cmpd="sng" algn="ctr">
-                      <a:solidFill>
-                        <a:srgbClr val="3A3F48"/>
-                      </a:solidFill>
-                      <a:prstDash val="solid"/>
-                      <a:round/>
-                      <a:headEnd type="none" w="med" len="med"/>
-                      <a:tailEnd type="none" w="med" len="med"/>
-                    </a:lnR>
-                    <a:lnT w="9525" cap="flat" cmpd="sng" algn="ctr">
-                      <a:solidFill>
-                        <a:srgbClr val="3A3F48"/>
-                      </a:solidFill>
-                      <a:prstDash val="solid"/>
-                      <a:round/>
-                      <a:headEnd type="none" w="med" len="med"/>
-                      <a:tailEnd type="none" w="med" len="med"/>
-                    </a:lnT>
-                    <a:lnB w="9525" cap="flat" cmpd="sng" algn="ctr">
-                      <a:solidFill>
-                        <a:srgbClr val="3A3F48"/>
-                      </a:solidFill>
-                      <a:prstDash val="solid"/>
-                      <a:round/>
-                      <a:headEnd type="none" w="med" len="med"/>
-                      <a:tailEnd type="none" w="med" len="med"/>
-                    </a:lnB>
-                    <a:solidFill>
-                      <a:srgbClr val="23272F"/>
-                    </a:solidFill>
-                  </a:tcPr>
-                </a:tc>
-              </a:tr>
-              <a:tr h="384048">
-                <a:tc>
-                  <a:txBody>
-                    <a:bodyPr/>
-                    <a:lstStyle/>
-                    <a:p>
-                      <a:pPr algn="l" indent="0" marL="0">
-                        <a:buNone/>
-                      </a:pPr>
-                      <a:r>
-                        <a:rPr lang="en-US" sz="1400" b="1" dirty="0">
-                          <a:solidFill>
-                            <a:schemeClr val="accent5"/>
-                          </a:solidFill>
-                          <a:latin typeface="Malgun Gothic" pitchFamily="34" charset="0"/>
-                          <a:ea typeface="Malgun Gothic" pitchFamily="34" charset="-122"/>
-                          <a:cs typeface="Malgun Gothic" pitchFamily="34" charset="-120"/>
-                        </a:rPr>
-                        <a:t>YOLOX-S</a:t>
-                      </a:r>
-                      <a:endParaRPr lang="en-US" sz="1400" dirty="0">
-                        <a:latin typeface="Malgun Gothic" charset="0"/>
-                        <a:ea typeface="Malgun Gothic" charset="0"/>
-                        <a:cs typeface="Malgun Gothic" charset="0"/>
-                      </a:endParaRPr>
-                    </a:p>
-                  </a:txBody>
-                  <a:tcPr marL="91440" marR="91440" marT="45720" marB="45720" anchor="ctr">
-                    <a:lnL w="9525" cap="flat" cmpd="sng" algn="ctr">
-                      <a:solidFill>
-                        <a:srgbClr val="3A3F48"/>
-                      </a:solidFill>
-                      <a:prstDash val="solid"/>
-                      <a:round/>
-                      <a:headEnd type="none" w="med" len="med"/>
-                      <a:tailEnd type="none" w="med" len="med"/>
-                    </a:lnL>
-                    <a:lnR w="9525" cap="flat" cmpd="sng" algn="ctr">
-                      <a:solidFill>
-                        <a:srgbClr val="3A3F48"/>
-                      </a:solidFill>
-                      <a:prstDash val="solid"/>
-                      <a:round/>
-                      <a:headEnd type="none" w="med" len="med"/>
-                      <a:tailEnd type="none" w="med" len="med"/>
-                    </a:lnR>
-                    <a:lnT w="9525" cap="flat" cmpd="sng" algn="ctr">
-                      <a:solidFill>
-                        <a:srgbClr val="3A3F48"/>
-                      </a:solidFill>
-                      <a:prstDash val="solid"/>
-                      <a:round/>
-                      <a:headEnd type="none" w="med" len="med"/>
-                      <a:tailEnd type="none" w="med" len="med"/>
-                    </a:lnT>
-                    <a:lnB w="9525" cap="flat" cmpd="sng" algn="ctr">
-                      <a:solidFill>
-                        <a:srgbClr val="3A3F48"/>
-                      </a:solidFill>
-                      <a:prstDash val="solid"/>
-                      <a:round/>
-                      <a:headEnd type="none" w="med" len="med"/>
-                      <a:tailEnd type="none" w="med" len="med"/>
-                    </a:lnB>
-                    <a:solidFill>
-                      <a:srgbClr val="23272F"/>
-                    </a:solidFill>
-                  </a:tcPr>
-                </a:tc>
-                <a:tc>
-                  <a:txBody>
-                    <a:bodyPr/>
-                    <a:lstStyle/>
-                    <a:p>
-                      <a:pPr algn="ctr" indent="0" marL="0">
-                        <a:buNone/>
-                      </a:pPr>
-                      <a:r>
-                        <a:rPr lang="en-US" sz="1400" dirty="0">
-                          <a:solidFill>
-                            <a:schemeClr val="tx1"/>
-                          </a:solidFill>
-                          <a:latin typeface="Malgun Gothic" pitchFamily="34" charset="0"/>
-                          <a:ea typeface="Malgun Gothic" pitchFamily="34" charset="-122"/>
-                          <a:cs typeface="Malgun Gothic" pitchFamily="34" charset="-120"/>
-                        </a:rPr>
-                        <a:t>0.30 (현재)</a:t>
-                      </a:r>
-                      <a:endParaRPr lang="en-US" sz="1400" dirty="0">
-                        <a:latin typeface="Malgun Gothic" charset="0"/>
-                        <a:ea typeface="Malgun Gothic" charset="0"/>
-                        <a:cs typeface="Malgun Gothic" charset="0"/>
-                      </a:endParaRPr>
-                    </a:p>
-                  </a:txBody>
-                  <a:tcPr marL="91440" marR="91440" marT="45720" marB="45720" anchor="ctr">
-                    <a:lnL w="9525" cap="flat" cmpd="sng" algn="ctr">
-                      <a:solidFill>
-                        <a:srgbClr val="3A3F48"/>
-                      </a:solidFill>
-                      <a:prstDash val="solid"/>
-                      <a:round/>
-                      <a:headEnd type="none" w="med" len="med"/>
-                      <a:tailEnd type="none" w="med" len="med"/>
-                    </a:lnL>
-                    <a:lnR w="9525" cap="flat" cmpd="sng" algn="ctr">
-                      <a:solidFill>
-                        <a:srgbClr val="3A3F48"/>
-                      </a:solidFill>
-                      <a:prstDash val="solid"/>
-                      <a:round/>
-                      <a:headEnd type="none" w="med" len="med"/>
-                      <a:tailEnd type="none" w="med" len="med"/>
-                    </a:lnR>
-                    <a:lnT w="9525" cap="flat" cmpd="sng" algn="ctr">
-                      <a:solidFill>
-                        <a:srgbClr val="3A3F48"/>
-                      </a:solidFill>
-                      <a:prstDash val="solid"/>
-                      <a:round/>
-                      <a:headEnd type="none" w="med" len="med"/>
-                      <a:tailEnd type="none" w="med" len="med"/>
-                    </a:lnT>
-                    <a:lnB w="9525" cap="flat" cmpd="sng" algn="ctr">
-                      <a:solidFill>
-                        <a:srgbClr val="3A3F48"/>
-                      </a:solidFill>
-                      <a:prstDash val="solid"/>
-                      <a:round/>
-                      <a:headEnd type="none" w="med" len="med"/>
-                      <a:tailEnd type="none" w="med" len="med"/>
-                    </a:lnB>
-                    <a:solidFill>
-                      <a:srgbClr val="23272F"/>
-                    </a:solidFill>
-                  </a:tcPr>
-                </a:tc>
-                <a:tc>
-                  <a:txBody>
-                    <a:bodyPr/>
-                    <a:lstStyle/>
-                    <a:p>
-                      <a:pPr algn="ctr" indent="0" marL="0">
-                        <a:buNone/>
-                      </a:pPr>
-                      <a:r>
-                        <a:rPr lang="en-US" sz="1400" b="1" dirty="0">
-                          <a:solidFill>
-                            <a:schemeClr val="accent2"/>
-                          </a:solidFill>
-                          <a:latin typeface="Malgun Gothic" pitchFamily="34" charset="0"/>
-                          <a:ea typeface="Malgun Gothic" pitchFamily="34" charset="-122"/>
-                          <a:cs typeface="Malgun Gothic" pitchFamily="34" charset="-120"/>
-                        </a:rPr>
-                        <a:t>3%</a:t>
-                      </a:r>
-                      <a:endParaRPr lang="en-US" sz="1400" dirty="0">
-                        <a:latin typeface="Malgun Gothic" charset="0"/>
-                        <a:ea typeface="Malgun Gothic" charset="0"/>
-                        <a:cs typeface="Malgun Gothic" charset="0"/>
-                      </a:endParaRPr>
-                    </a:p>
-                  </a:txBody>
-                  <a:tcPr marL="91440" marR="91440" marT="45720" marB="45720" anchor="ctr">
-                    <a:lnL w="9525" cap="flat" cmpd="sng" algn="ctr">
-                      <a:solidFill>
-                        <a:srgbClr val="3A3F48"/>
-                      </a:solidFill>
-                      <a:prstDash val="solid"/>
-                      <a:round/>
-                      <a:headEnd type="none" w="med" len="med"/>
-                      <a:tailEnd type="none" w="med" len="med"/>
-                    </a:lnL>
-                    <a:lnR w="9525" cap="flat" cmpd="sng" algn="ctr">
-                      <a:solidFill>
-                        <a:srgbClr val="3A3F48"/>
-                      </a:solidFill>
-                      <a:prstDash val="solid"/>
-                      <a:round/>
-                      <a:headEnd type="none" w="med" len="med"/>
-                      <a:tailEnd type="none" w="med" len="med"/>
-                    </a:lnR>
-                    <a:lnT w="9525" cap="flat" cmpd="sng" algn="ctr">
-                      <a:solidFill>
-                        <a:srgbClr val="3A3F48"/>
-                      </a:solidFill>
-                      <a:prstDash val="solid"/>
-                      <a:round/>
-                      <a:headEnd type="none" w="med" len="med"/>
-                      <a:tailEnd type="none" w="med" len="med"/>
-                    </a:lnT>
-                    <a:lnB w="9525" cap="flat" cmpd="sng" algn="ctr">
-                      <a:solidFill>
-                        <a:srgbClr val="3A3F48"/>
-                      </a:solidFill>
-                      <a:prstDash val="solid"/>
-                      <a:round/>
-                      <a:headEnd type="none" w="med" len="med"/>
-                      <a:tailEnd type="none" w="med" len="med"/>
-                    </a:lnB>
-                    <a:solidFill>
-                      <a:srgbClr val="23272F"/>
-                    </a:solidFill>
-                  </a:tcPr>
-                </a:tc>
-                <a:tc>
-                  <a:txBody>
-                    <a:bodyPr/>
-                    <a:lstStyle/>
-                    <a:p>
-                      <a:pPr algn="ctr" indent="0" marL="0">
-                        <a:buNone/>
-                      </a:pPr>
-                      <a:r>
-                        <a:rPr lang="en-US" sz="1400" dirty="0">
-                          <a:solidFill>
-                            <a:schemeClr val="tx1"/>
-                          </a:solidFill>
-                          <a:latin typeface="Malgun Gothic" pitchFamily="34" charset="0"/>
-                          <a:ea typeface="Malgun Gothic" pitchFamily="34" charset="-122"/>
-                          <a:cs typeface="Malgun Gothic" pitchFamily="34" charset="-120"/>
-                        </a:rPr>
-                        <a:t>0%</a:t>
-                      </a:r>
-                      <a:endParaRPr lang="en-US" sz="1400" dirty="0">
-                        <a:latin typeface="Malgun Gothic" charset="0"/>
-                        <a:ea typeface="Malgun Gothic" charset="0"/>
-                        <a:cs typeface="Malgun Gothic" charset="0"/>
-                      </a:endParaRPr>
-                    </a:p>
-                  </a:txBody>
-                  <a:tcPr marL="91440" marR="91440" marT="45720" marB="45720" anchor="ctr">
-                    <a:lnL w="9525" cap="flat" cmpd="sng" algn="ctr">
-                      <a:solidFill>
-                        <a:srgbClr val="3A3F48"/>
-                      </a:solidFill>
-                      <a:prstDash val="solid"/>
-                      <a:round/>
-                      <a:headEnd type="none" w="med" len="med"/>
-                      <a:tailEnd type="none" w="med" len="med"/>
-                    </a:lnL>
-                    <a:lnR w="9525" cap="flat" cmpd="sng" algn="ctr">
-                      <a:solidFill>
-                        <a:srgbClr val="3A3F48"/>
-                      </a:solidFill>
-                      <a:prstDash val="solid"/>
-                      <a:round/>
-                      <a:headEnd type="none" w="med" len="med"/>
-                      <a:tailEnd type="none" w="med" len="med"/>
-                    </a:lnR>
-                    <a:lnT w="9525" cap="flat" cmpd="sng" algn="ctr">
-                      <a:solidFill>
-                        <a:srgbClr val="3A3F48"/>
-                      </a:solidFill>
-                      <a:prstDash val="solid"/>
-                      <a:round/>
-                      <a:headEnd type="none" w="med" len="med"/>
-                      <a:tailEnd type="none" w="med" len="med"/>
-                    </a:lnT>
-                    <a:lnB w="9525" cap="flat" cmpd="sng" algn="ctr">
-                      <a:solidFill>
-                        <a:srgbClr val="3A3F48"/>
-                      </a:solidFill>
-                      <a:prstDash val="solid"/>
-                      <a:round/>
-                      <a:headEnd type="none" w="med" len="med"/>
-                      <a:tailEnd type="none" w="med" len="med"/>
-                    </a:lnB>
-                    <a:solidFill>
-                      <a:srgbClr val="23272F"/>
-                    </a:solidFill>
-                  </a:tcPr>
-                </a:tc>
-              </a:tr>
-              <a:tr h="384048">
-                <a:tc>
-                  <a:txBody>
-                    <a:bodyPr/>
-                    <a:lstStyle/>
-                    <a:p>
-                      <a:pPr algn="l" indent="0" marL="0">
-                        <a:buNone/>
-                      </a:pPr>
-                      <a:r>
-                        <a:rPr lang="en-US" sz="1400" b="1" dirty="0">
-                          <a:solidFill>
-                            <a:schemeClr val="accent5"/>
-                          </a:solidFill>
-                          <a:latin typeface="Malgun Gothic" pitchFamily="34" charset="0"/>
-                          <a:ea typeface="Malgun Gothic" pitchFamily="34" charset="-122"/>
-                          <a:cs typeface="Malgun Gothic" pitchFamily="34" charset="-120"/>
-                        </a:rPr>
-                        <a:t>YOLOX-S</a:t>
-                      </a:r>
-                      <a:endParaRPr lang="en-US" sz="1400" dirty="0">
-                        <a:latin typeface="Malgun Gothic" charset="0"/>
-                        <a:ea typeface="Malgun Gothic" charset="0"/>
-                        <a:cs typeface="Malgun Gothic" charset="0"/>
-                      </a:endParaRPr>
-                    </a:p>
-                  </a:txBody>
-                  <a:tcPr marL="91440" marR="91440" marT="45720" marB="45720" anchor="ctr">
-                    <a:lnL w="9525" cap="flat" cmpd="sng" algn="ctr">
-                      <a:solidFill>
-                        <a:srgbClr val="3A3F48"/>
-                      </a:solidFill>
-                      <a:prstDash val="solid"/>
-                      <a:round/>
-                      <a:headEnd type="none" w="med" len="med"/>
-                      <a:tailEnd type="none" w="med" len="med"/>
-                    </a:lnL>
-                    <a:lnR w="9525" cap="flat" cmpd="sng" algn="ctr">
-                      <a:solidFill>
-                        <a:srgbClr val="3A3F48"/>
-                      </a:solidFill>
-                      <a:prstDash val="solid"/>
-                      <a:round/>
-                      <a:headEnd type="none" w="med" len="med"/>
-                      <a:tailEnd type="none" w="med" len="med"/>
-                    </a:lnR>
-                    <a:lnT w="9525" cap="flat" cmpd="sng" algn="ctr">
-                      <a:solidFill>
-                        <a:srgbClr val="3A3F48"/>
-                      </a:solidFill>
-                      <a:prstDash val="solid"/>
-                      <a:round/>
-                      <a:headEnd type="none" w="med" len="med"/>
-                      <a:tailEnd type="none" w="med" len="med"/>
-                    </a:lnT>
-                    <a:lnB w="9525" cap="flat" cmpd="sng" algn="ctr">
-                      <a:solidFill>
-                        <a:srgbClr val="3A3F48"/>
-                      </a:solidFill>
-                      <a:prstDash val="solid"/>
-                      <a:round/>
-                      <a:headEnd type="none" w="med" len="med"/>
-                      <a:tailEnd type="none" w="med" len="med"/>
-                    </a:lnB>
-                    <a:solidFill>
-                      <a:srgbClr val="23272F"/>
-                    </a:solidFill>
-                  </a:tcPr>
-                </a:tc>
-                <a:tc>
-                  <a:txBody>
-                    <a:bodyPr/>
-                    <a:lstStyle/>
-                    <a:p>
-                      <a:pPr algn="ctr" indent="0" marL="0">
-                        <a:buNone/>
-                      </a:pPr>
-                      <a:r>
-                        <a:rPr lang="en-US" sz="1400" dirty="0">
-                          <a:solidFill>
-                            <a:schemeClr val="tx1"/>
-                          </a:solidFill>
-                          <a:latin typeface="Malgun Gothic" pitchFamily="34" charset="0"/>
-                          <a:ea typeface="Malgun Gothic" pitchFamily="34" charset="-122"/>
-                          <a:cs typeface="Malgun Gothic" pitchFamily="34" charset="-120"/>
-                        </a:rPr>
-                        <a:t>0.05</a:t>
-                      </a:r>
-                      <a:endParaRPr lang="en-US" sz="1400" dirty="0">
-                        <a:latin typeface="Malgun Gothic" charset="0"/>
-                        <a:ea typeface="Malgun Gothic" charset="0"/>
-                        <a:cs typeface="Malgun Gothic" charset="0"/>
-                      </a:endParaRPr>
-                    </a:p>
-                  </a:txBody>
-                  <a:tcPr marL="91440" marR="91440" marT="45720" marB="45720" anchor="ctr">
-                    <a:lnL w="9525" cap="flat" cmpd="sng" algn="ctr">
-                      <a:solidFill>
-                        <a:srgbClr val="3A3F48"/>
-                      </a:solidFill>
-                      <a:prstDash val="solid"/>
-                      <a:round/>
-                      <a:headEnd type="none" w="med" len="med"/>
-                      <a:tailEnd type="none" w="med" len="med"/>
-                    </a:lnL>
-                    <a:lnR w="9525" cap="flat" cmpd="sng" algn="ctr">
-                      <a:solidFill>
-                        <a:srgbClr val="3A3F48"/>
-                      </a:solidFill>
-                      <a:prstDash val="solid"/>
-                      <a:round/>
-                      <a:headEnd type="none" w="med" len="med"/>
-                      <a:tailEnd type="none" w="med" len="med"/>
-                    </a:lnR>
-                    <a:lnT w="9525" cap="flat" cmpd="sng" algn="ctr">
-                      <a:solidFill>
-                        <a:srgbClr val="3A3F48"/>
-                      </a:solidFill>
-                      <a:prstDash val="solid"/>
-                      <a:round/>
-                      <a:headEnd type="none" w="med" len="med"/>
-                      <a:tailEnd type="none" w="med" len="med"/>
-                    </a:lnT>
-                    <a:lnB w="9525" cap="flat" cmpd="sng" algn="ctr">
-                      <a:solidFill>
-                        <a:srgbClr val="3A3F48"/>
-                      </a:solidFill>
-                      <a:prstDash val="solid"/>
-                      <a:round/>
-                      <a:headEnd type="none" w="med" len="med"/>
-                      <a:tailEnd type="none" w="med" len="med"/>
-                    </a:lnB>
-                    <a:solidFill>
-                      <a:srgbClr val="23272F"/>
-                    </a:solidFill>
-                  </a:tcPr>
-                </a:tc>
-                <a:tc>
-                  <a:txBody>
-                    <a:bodyPr/>
-                    <a:lstStyle/>
-                    <a:p>
-                      <a:pPr algn="ctr" indent="0" marL="0">
-                        <a:buNone/>
-                      </a:pPr>
-                      <a:r>
-                        <a:rPr lang="en-US" sz="1400" b="1" dirty="0">
-                          <a:solidFill>
-                            <a:schemeClr val="tx1"/>
-                          </a:solidFill>
-                          <a:latin typeface="Malgun Gothic" pitchFamily="34" charset="0"/>
-                          <a:ea typeface="Malgun Gothic" pitchFamily="34" charset="-122"/>
-                          <a:cs typeface="Malgun Gothic" pitchFamily="34" charset="-120"/>
-                        </a:rPr>
-                        <a:t>57%</a:t>
-                      </a:r>
-                      <a:endParaRPr lang="en-US" sz="1400" dirty="0">
-                        <a:latin typeface="Malgun Gothic" charset="0"/>
-                        <a:ea typeface="Malgun Gothic" charset="0"/>
-                        <a:cs typeface="Malgun Gothic" charset="0"/>
-                      </a:endParaRPr>
-                    </a:p>
-                  </a:txBody>
-                  <a:tcPr marL="91440" marR="91440" marT="45720" marB="45720" anchor="ctr">
-                    <a:lnL w="9525" cap="flat" cmpd="sng" algn="ctr">
-                      <a:solidFill>
-                        <a:srgbClr val="3A3F48"/>
-                      </a:solidFill>
-                      <a:prstDash val="solid"/>
-                      <a:round/>
-                      <a:headEnd type="none" w="med" len="med"/>
-                      <a:tailEnd type="none" w="med" len="med"/>
-                    </a:lnL>
-                    <a:lnR w="9525" cap="flat" cmpd="sng" algn="ctr">
-                      <a:solidFill>
-                        <a:srgbClr val="3A3F48"/>
-                      </a:solidFill>
-                      <a:prstDash val="solid"/>
-                      <a:round/>
-                      <a:headEnd type="none" w="med" len="med"/>
-                      <a:tailEnd type="none" w="med" len="med"/>
-                    </a:lnR>
-                    <a:lnT w="9525" cap="flat" cmpd="sng" algn="ctr">
-                      <a:solidFill>
-                        <a:srgbClr val="3A3F48"/>
-                      </a:solidFill>
-                      <a:prstDash val="solid"/>
-                      <a:round/>
-                      <a:headEnd type="none" w="med" len="med"/>
-                      <a:tailEnd type="none" w="med" len="med"/>
-                    </a:lnT>
-                    <a:lnB w="9525" cap="flat" cmpd="sng" algn="ctr">
-                      <a:solidFill>
-                        <a:srgbClr val="3A3F48"/>
-                      </a:solidFill>
-                      <a:prstDash val="solid"/>
-                      <a:round/>
-                      <a:headEnd type="none" w="med" len="med"/>
-                      <a:tailEnd type="none" w="med" len="med"/>
-                    </a:lnB>
-                    <a:solidFill>
-                      <a:srgbClr val="23272F"/>
-                    </a:solidFill>
-                  </a:tcPr>
-                </a:tc>
-                <a:tc>
-                  <a:txBody>
-                    <a:bodyPr/>
-                    <a:lstStyle/>
-                    <a:p>
-                      <a:pPr algn="ctr" indent="0" marL="0">
-                        <a:buNone/>
-                      </a:pPr>
-                      <a:r>
-                        <a:rPr lang="en-US" sz="1400" b="1" dirty="0">
-                          <a:solidFill>
-                            <a:schemeClr val="accent1"/>
-                          </a:solidFill>
-                          <a:latin typeface="Malgun Gothic" pitchFamily="34" charset="0"/>
-                          <a:ea typeface="Malgun Gothic" pitchFamily="34" charset="-122"/>
-                          <a:cs typeface="Malgun Gothic" pitchFamily="34" charset="-120"/>
-                        </a:rPr>
-                        <a:t>0%</a:t>
-                      </a:r>
-                      <a:endParaRPr lang="en-US" sz="1400" dirty="0">
-                        <a:latin typeface="Malgun Gothic" charset="0"/>
-                        <a:ea typeface="Malgun Gothic" charset="0"/>
-                        <a:cs typeface="Malgun Gothic" charset="0"/>
-                      </a:endParaRPr>
-                    </a:p>
-                  </a:txBody>
-                  <a:tcPr marL="91440" marR="91440" marT="45720" marB="45720" anchor="ctr">
-                    <a:lnL w="9525" cap="flat" cmpd="sng" algn="ctr">
-                      <a:solidFill>
-                        <a:srgbClr val="3A3F48"/>
-                      </a:solidFill>
-                      <a:prstDash val="solid"/>
-                      <a:round/>
-                      <a:headEnd type="none" w="med" len="med"/>
-                      <a:tailEnd type="none" w="med" len="med"/>
-                    </a:lnL>
-                    <a:lnR w="9525" cap="flat" cmpd="sng" algn="ctr">
-                      <a:solidFill>
-                        <a:srgbClr val="3A3F48"/>
-                      </a:solidFill>
-                      <a:prstDash val="solid"/>
-                      <a:round/>
-                      <a:headEnd type="none" w="med" len="med"/>
-                      <a:tailEnd type="none" w="med" len="med"/>
-                    </a:lnR>
-                    <a:lnT w="9525" cap="flat" cmpd="sng" algn="ctr">
-                      <a:solidFill>
-                        <a:srgbClr val="3A3F48"/>
-                      </a:solidFill>
-                      <a:prstDash val="solid"/>
-                      <a:round/>
-                      <a:headEnd type="none" w="med" len="med"/>
-                      <a:tailEnd type="none" w="med" len="med"/>
-                    </a:lnT>
-                    <a:lnB w="9525" cap="flat" cmpd="sng" algn="ctr">
-                      <a:solidFill>
-                        <a:srgbClr val="3A3F48"/>
-                      </a:solidFill>
-                      <a:prstDash val="solid"/>
-                      <a:round/>
-                      <a:headEnd type="none" w="med" len="med"/>
-                      <a:tailEnd type="none" w="med" len="med"/>
-                    </a:lnB>
-                    <a:solidFill>
-                      <a:srgbClr val="23272F"/>
-                    </a:solidFill>
-                  </a:tcPr>
-                </a:tc>
-              </a:tr>
-            </a:tbl>
-          </a:graphicData>
-        </a:graphic>
-      </p:graphicFrame>
-      <p:sp>
-        <p:nvSpPr>
-          <p:cNvPr id="23" name="th-cap"/>
+      <p:sp>
+        <p:nvSpPr>
+          <p:cNvPr id="13" name="dedup-arrow"/>
           <p:cNvSpPr txBox="1"/>
           <p:nvPr/>
         </p:nvSpPr>
         <p:spPr>
           <a:xfrm>
-            <a:off x="6812280" y="4526280"/>
-            <a:ext cx="4828032" cy="1463040"/>
+            <a:off x="3337560" y="5715000"/>
+            <a:ext cx="457200" cy="457200"/>
           </a:xfrm>
           <a:prstGeom prst="rect">
             <a:avLst/>
@@ -18916,58 +19823,86 @@
           <a:ln/>
         </p:spPr>
         <p:txBody>
-          <a:bodyPr wrap="square" lIns="0" tIns="0" rIns="0" bIns="0" rtlCol="0" anchor="t"/>
+          <a:bodyPr wrap="square" lIns="0" tIns="0" rIns="0" bIns="0" rtlCol="0" anchor="ctr"/>
           <a:lstStyle/>
           <a:p>
-            <a:pPr indent="0" marL="0">
-              <a:spcAft>
-                <a:spcPts val="600"/>
-              </a:spcAft>
+            <a:pPr algn="ctr" indent="0" marL="0">
               <a:buNone/>
             </a:pPr>
             <a:r>
-              <a:rPr lang="en-US" sz="1600" b="1" dirty="0">
+              <a:rPr lang="en-US" sz="2000" b="1" dirty="0">
+                <a:solidFill>
+                  <a:schemeClr val="tx2"/>
+                </a:solidFill>
+              </a:rPr>
+              <a:t>→</a:t>
+            </a:r>
+            <a:endParaRPr lang="en-US" sz="2000" dirty="0"/>
+          </a:p>
+        </p:txBody>
+      </p:sp>
+      <p:sp>
+        <p:nvSpPr>
+          <p:cNvPr id="14" name="clean45-bg"/>
+          <p:cNvSpPr/>
+          <p:nvPr/>
+        </p:nvSpPr>
+        <p:spPr>
+          <a:xfrm>
+            <a:off x="3840480" y="5715000"/>
+            <a:ext cx="3840480" cy="457200"/>
+          </a:xfrm>
+          <a:prstGeom prst="roundRect">
+            <a:avLst>
+              <a:gd name="adj" fmla="val 10000"/>
+            </a:avLst>
+          </a:prstGeom>
+          <a:solidFill>
+            <a:schemeClr val="accent1">
+              <a:alpha val="20000"/>
+            </a:schemeClr>
+          </a:solidFill>
+          <a:ln w="12700">
+            <a:solidFill>
+              <a:schemeClr val="accent1"/>
+            </a:solidFill>
+            <a:prstDash val="solid"/>
+          </a:ln>
+        </p:spPr>
+      </p:sp>
+      <p:sp>
+        <p:nvSpPr>
+          <p:cNvPr id="15" name="clean45"/>
+          <p:cNvSpPr txBox="1"/>
+          <p:nvPr/>
+        </p:nvSpPr>
+        <p:spPr>
+          <a:xfrm>
+            <a:off x="3840480" y="5715000"/>
+            <a:ext cx="3840480" cy="457200"/>
+          </a:xfrm>
+          <a:prstGeom prst="rect">
+            <a:avLst/>
+          </a:prstGeom>
+          <a:noFill/>
+          <a:ln/>
+        </p:spPr>
+        <p:txBody>
+          <a:bodyPr wrap="square" lIns="0" tIns="0" rIns="0" bIns="0" rtlCol="0" anchor="ctr"/>
+          <a:lstStyle/>
+          <a:p>
+            <a:pPr algn="ctr" indent="0" marL="0">
+              <a:buNone/>
+            </a:pPr>
+            <a:r>
+              <a:rPr lang="en-US" sz="1300" b="1" dirty="0">
                 <a:solidFill>
                   <a:schemeClr val="accent1"/>
                 </a:solidFill>
               </a:rPr>
-              <a:t>→ 모델별로 다른 기준값 적용</a:t>
+              <a:t>45장 (결함 30 · 정상 15)</a:t>
             </a:r>
-            <a:endParaRPr lang="en-US" sz="1600" dirty="0"/>
-          </a:p>
-          <a:p>
-            <a:pPr indent="0" marL="0">
-              <a:spcAft>
-                <a:spcPts val="600"/>
-              </a:spcAft>
-              <a:buNone/>
-            </a:pPr>
-            <a:r>
-              <a:rPr lang="en-US" sz="1600" b="1" dirty="0">
-                <a:solidFill>
-                  <a:schemeClr val="accent1"/>
-                </a:solidFill>
-              </a:rPr>
-              <a:t>→ 결과치 불충분</a:t>
-            </a:r>
-            <a:endParaRPr lang="en-US" sz="1600" dirty="0"/>
-          </a:p>
-          <a:p>
-            <a:pPr indent="0" marL="0">
-              <a:spcAft>
-                <a:spcPts val="600"/>
-              </a:spcAft>
-              <a:buNone/>
-            </a:pPr>
-            <a:r>
-              <a:rPr lang="en-US" sz="1600" b="1" dirty="0">
-                <a:solidFill>
-                  <a:schemeClr val="accent1"/>
-                </a:solidFill>
-              </a:rPr>
-              <a:t>→ 재학습</a:t>
-            </a:r>
-            <a:endParaRPr lang="en-US" sz="1600" dirty="0"/>
+            <a:endParaRPr lang="en-US" sz="1300" dirty="0"/>
           </a:p>
         </p:txBody>
       </p:sp>

--- a/docs/submission/BatteryVision_발표.pptx
+++ b/docs/submission/BatteryVision_발표.pptx
@@ -19,9 +19,10 @@
     <p:sldId id="267" r:id="rId13"/>
     <p:sldId id="268" r:id="rId14"/>
     <p:sldId id="269" r:id="rId15"/>
+    <p:sldId id="270" r:id="rId16"/>
   </p:sldIdLst>
   <p:notesMasterIdLst>
-    <p:notesMasterId r:id="rId16"/>
+    <p:notesMasterId r:id="rId17"/>
   </p:notesMasterIdLst>
   <p:sldSz cx="12192000" cy="6858000"/>
   <p:notesSz cx="6858000" cy="12192000"/>
@@ -120,38 +121,39 @@
   <p:extLst>
     <p:ext uri="{521415D9-36F7-43E2-AB2F-B90AF26B5E84}">
       <p14:sectionLst xmlns:p14="http://schemas.microsoft.com/office/powerpoint/2010/main">
-        <p14:section name="도입" id="{d8ecb952-8220-10e2-81eb-6ca0ff3302ea}">
+        <p14:section name="도입" id="{23a3f643-68fc-c894-a2b4-ca8ffc357475}">
           <p14:sldIdLst>
             <p14:sldId id="256"/>
             <p14:sldId id="257"/>
           </p14:sldIdLst>
         </p14:section>
-        <p14:section name="실험" id="{96646225-e54a-169f-7a6e-9d3c33045200}">
+        <p14:section name="실험" id="{baceac97-86f8-dd8c-29e7-01551e168b6f}">
           <p14:sldIdLst>
             <p14:sldId id="258"/>
             <p14:sldId id="259"/>
             <p14:sldId id="260"/>
             <p14:sldId id="261"/>
             <p14:sldId id="262"/>
-          </p14:sldIdLst>
-        </p14:section>
-        <p14:section name="최적화" id="{d01d88a4-34b5-a800-7546-4f220ae25a27}">
-          <p14:sldIdLst>
             <p14:sldId id="263"/>
           </p14:sldIdLst>
         </p14:section>
-        <p14:section name="검증" id="{3b817888-2a80-ba55-8f07-7c1e88477df0}">
+        <p14:section name="최적화" id="{de26dd4a-00d4-ca1e-8a58-1d2d2c89d2d9}">
           <p14:sldIdLst>
             <p14:sldId id="264"/>
-            <p14:sldId id="265"/>
           </p14:sldIdLst>
         </p14:section>
-        <p14:section name="정리" id="{3d4edc32-4a98-6a16-1a89-c5f554980eba}">
+        <p14:section name="검증" id="{1c50a450-3aec-e836-af0c-3de5e8fa1ad1}">
           <p14:sldIdLst>
+            <p14:sldId id="265"/>
             <p14:sldId id="266"/>
+          </p14:sldIdLst>
+        </p14:section>
+        <p14:section name="정리" id="{19763157-0b2f-ef15-3331-995879a9cba5}">
+          <p14:sldIdLst>
             <p14:sldId id="267"/>
             <p14:sldId id="268"/>
             <p14:sldId id="269"/>
+            <p14:sldId id="270"/>
           </p14:sldIdLst>
         </p14:section>
       </p14:sectionLst>
@@ -1385,7 +1387,7 @@
           <a:p>
             <a:r>
               <a:rPr lang="en-US" dirty="0"/>
-              <a:t>같은 업로더가 올린 다른 세트에서, 학습에 한 번도 쓰지 않은 45장으로 제 앱에서 다시 테스트했습니다. 1차 테스트에서 결함 셀을 거의 다 잡던 모델이 ATSS 47%, YOLOX-S 3%까지 떨어집니다. 결함을 착각한 게 아니라 점수가 낮아서 통과시킨 것이고, 정상 셀을 불합격시킨 경우는 없었습니다. 가장 큰 원인은 crack입니다. 2차 세트의 crack은 약 30×26픽셀로 1차의 절반 면적이고, ATSS는 15개 중 1개만 잡았습니다. 학습 때 본 크기의 crack만 쉬웠던 겁니다. 기준값을 바꿔 보면, ATSS는 0.15까지 낮추면 결함 97%를 잡지만 정상 셀도 87%가 걸립니다. YOLOX-S는 다릅니다. 2차 세트 mAP@50이 0.93으로 결함을 정상보다 높게 순위 매기는 건 정확한데, 점수 자체가 낮습니다. YOLOX 점수는 물체일 확률과 클래스 확률을 곱한 값이라 원래 낮게 나오고, 처음 보는 사진에서는 더 낮아집니다. 0.05로 낮추면 정상 오검출 없이 57%를 잡습니다. 즉 기준값은 모델마다 따로 정해야 하고, 그래도 부족하기 때문에 새 환경 사진으로 재학습이 필요합니다.</a:t>
+              <a:t>2차 세트는 같은 업로더가 나중에 따로 올린 데이터셋입니다. 결함 종류와 촬영 방식은 비슷하지만 다른 촬영 세션입니다. 1차 데이터셋과 파일명이 같거나 픽셀이 사실상 같은 사진 140장을 먼저 뺐고, 증강되지 않은 45장만 테스트에 썼습니다. 그래서 모델 입장에서는 한 번도 본 적 없는 사진입니다.</a:t>
             </a:r>
             <a:endParaRPr lang="en-US" dirty="0"/>
           </a:p>
@@ -1473,7 +1475,7 @@
           <a:p>
             <a:r>
               <a:rPr lang="en-US" dirty="0"/>
-              <a:t>앞에서 본 결과들의 원인을 한 장에 모았습니다. 오른쪽 근거 칸은 얼마나 확실한지입니다. 확인은 데이터로 직접 확인한 것, 추정은 데이터와 맞지만 따로 검증하지 않은 것, 가설은 아직 검증하지 못한 것입니다. 가장 확실한 원인은 세 가지입니다. scratch는 반사나 나무결과 비슷한 가는 선이라 어렵고, 93%는 테스트 사진까지 학습에 들어가 부풀려진 수치이고, 2차 세트에서 떨어진 건 crack이 절반 크기로 작아졌기 때문입니다. ATSS가 왜 가장 좋은지는 추정 단계입니다. 32픽셀 미만의 작은 결함에서 격차가 가장 커서 입력 해상도 차이와 맞지만, 다시 학습해서 확인하지는 않았습니다.</a:t>
+              <a:t>같은 업로더가 올린 다른 세트에서, 학습에 한 번도 쓰지 않은 45장으로 제 앱에서 다시 테스트했습니다. 1차 테스트에서 결함 셀을 거의 다 잡던 모델이 ATSS 47%, YOLOX-S 3%까지 떨어집니다. 결함을 착각한 게 아니라 점수가 낮아서 통과시킨 것이고, 정상 셀을 불합격시킨 경우는 없었습니다. 가장 큰 원인은 crack입니다. 2차 세트의 crack은 약 30×26픽셀로 1차의 절반 면적이고, ATSS는 15개 중 1개만 잡았습니다. 학습 때 본 크기의 crack만 쉬웠던 겁니다. 기준값을 바꿔 보면, ATSS는 0.15까지 낮추면 결함 97%를 잡지만 정상 셀도 87%가 걸립니다. YOLOX-S는 다릅니다. 2차 세트 mAP@50이 0.93으로 결함을 정상보다 높게 순위 매기는 건 정확한데, 점수 자체가 낮습니다. YOLOX 점수는 물체일 확률과 클래스 확률을 곱한 값이라 원래 낮게 나오고, 처음 보는 사진에서는 더 낮아집니다. 0.05로 낮추면 정상 오검출 없이 57%를 잡습니다. 즉 기준값은 모델마다 따로 정해야 하고, 그래도 부족하기 때문에 새 환경 사진으로 재학습이 필요합니다.</a:t>
             </a:r>
             <a:endParaRPr lang="en-US" dirty="0"/>
           </a:p>
@@ -1561,7 +1563,7 @@
           <a:p>
             <a:r>
               <a:rPr lang="en-US" dirty="0"/>
-              <a:t>다음에 다르게 할 것 네 가지입니다. 테스트셋은 업로드 전에 따로 빼고, 새 환경에서는 그 환경 사진으로 다시 검증하고, 판정 기준값은 모델과 정밀도마다 검증셋에서 정하고, 모델은 크기보다 데이터와 결함에 맞는 걸 고르겠습니다.</a:t>
+              <a:t>앞에서 본 결과들의 원인을 한 장에 모았습니다. 오른쪽 근거 칸은 얼마나 확실한지입니다. 확인은 데이터로 직접 확인한 것, 추정은 데이터와 맞지만 따로 검증하지 않은 것, 가설은 아직 검증하지 못한 것입니다. 가장 확실한 원인은 세 가지입니다. scratch는 반사나 나무결과 비슷한 가는 선이라 어렵고, 93%는 테스트 사진까지 학습에 들어가 부풀려진 수치이고, 2차 세트에서 떨어진 건 crack이 절반 크기로 작아졌기 때문입니다. ATSS가 왜 가장 좋은지는 추정 단계입니다. 32픽셀 미만의 작은 결함에서 격차가 가장 커서 입력 해상도 차이와 맞지만, 다시 학습해서 확인하지는 않았습니다.</a:t>
             </a:r>
             <a:endParaRPr lang="en-US" dirty="0"/>
           </a:p>
@@ -1649,7 +1651,7 @@
           <a:p>
             <a:r>
               <a:rPr lang="en-US" dirty="0"/>
-              <a:t>마지막으로 대시보드에서 실제 모델이 가상 검사 라인을 돌리는 모습을 보여드리겠습니다. (라이브 데모로 전환)</a:t>
+              <a:t>다음에 다르게 할 것 네 가지입니다. 테스트셋은 업로드 전에 따로 빼고, 새 환경에서는 그 환경 사진으로 다시 검증하고, 판정 기준값은 모델과 정밀도마다 검증셋에서 정하고, 모델은 크기보다 데이터와 결함에 맞는 걸 고르겠습니다.</a:t>
             </a:r>
             <a:endParaRPr lang="en-US" dirty="0"/>
           </a:p>
@@ -1737,7 +1739,7 @@
           <a:p>
             <a:r>
               <a:rPr lang="en-US" dirty="0"/>
-              <a:t>들어주셔서 감사합니다. 질문 받겠습니다.</a:t>
+              <a:t>마지막으로 대시보드에서 실제 모델이 가상 검사 라인을 돌리는 모습을 보여드리겠습니다. (라이브 데모로 전환)</a:t>
             </a:r>
             <a:endParaRPr lang="en-US" dirty="0"/>
           </a:p>
@@ -1761,6 +1763,94 @@
             <a:fld id="{F7021451-1387-4CA6-816F-3879F97B5CBC}" type="slidenum">
               <a:rPr lang="en-US"/>
               <a:t>14</a:t>
+            </a:fld>
+            <a:endParaRPr lang="en-US"/>
+          </a:p>
+        </p:txBody>
+      </p:sp>
+    </p:spTree>
+    <p:extLst>
+      <p:ext uri="{BB962C8B-B14F-4D97-AF65-F5344CB8AC3E}">
+        <p14:creationId xmlns:p14="http://schemas.microsoft.com/office/powerpoint/2010/main" val="1024086991"/>
+      </p:ext>
+    </p:extLst>
+  </p:cSld>
+  <p:clrMapOvr>
+    <a:masterClrMapping/>
+  </p:clrMapOvr>
+</p:notes>
+</file>
+
+<file path=ppt/notesSlides/notesSlide15.xml><?xml version="1.0" encoding="utf-8"?>
+<p:notes xmlns:a="http://schemas.openxmlformats.org/drawingml/2006/main" xmlns:r="http://schemas.openxmlformats.org/officeDocument/2006/relationships" xmlns:p="http://schemas.openxmlformats.org/presentationml/2006/main">
+  <p:cSld>
+    <p:spTree>
+      <p:nvGrpSpPr>
+        <p:cNvPr id="1" name=""/>
+        <p:cNvGrpSpPr/>
+        <p:nvPr/>
+      </p:nvGrpSpPr>
+      <p:grpSpPr>
+        <a:xfrm>
+          <a:off x="0" y="0"/>
+          <a:ext cx="0" cy="0"/>
+          <a:chOff x="0" y="0"/>
+          <a:chExt cx="0" cy="0"/>
+        </a:xfrm>
+      </p:grpSpPr>
+      <p:sp>
+        <p:nvSpPr>
+          <p:cNvPr id="2" name="Slide Image Placeholder 1"/>
+          <p:cNvSpPr>
+            <a:spLocks noGrp="1" noRot="1" noChangeAspect="1"/>
+          </p:cNvSpPr>
+          <p:nvPr>
+            <p:ph type="sldImg"/>
+          </p:nvPr>
+        </p:nvSpPr>
+        <p:spPr/>
+      </p:sp>
+      <p:sp>
+        <p:nvSpPr>
+          <p:cNvPr id="3" name="Notes Placeholder 2"/>
+          <p:cNvSpPr>
+            <a:spLocks noGrp="1"/>
+          </p:cNvSpPr>
+          <p:nvPr>
+            <p:ph type="body" idx="1"/>
+          </p:nvPr>
+        </p:nvSpPr>
+        <p:spPr/>
+        <p:txBody>
+          <a:bodyPr/>
+          <a:lstStyle/>
+          <a:p>
+            <a:r>
+              <a:rPr lang="en-US" dirty="0"/>
+              <a:t>들어주셔서 감사합니다. 질문 받겠습니다.</a:t>
+            </a:r>
+            <a:endParaRPr lang="en-US" dirty="0"/>
+          </a:p>
+        </p:txBody>
+      </p:sp>
+      <p:sp>
+        <p:nvSpPr>
+          <p:cNvPr id="4" name="Slide Number Placeholder 3"/>
+          <p:cNvSpPr>
+            <a:spLocks noGrp="1"/>
+          </p:cNvSpPr>
+          <p:nvPr>
+            <p:ph type="sldNum" sz="quarter" idx="10"/>
+          </p:nvPr>
+        </p:nvSpPr>
+        <p:spPr/>
+        <p:txBody>
+          <a:bodyPr/>
+          <a:lstStyle/>
+          <a:p>
+            <a:fld id="{F7021451-1387-4CA6-816F-3879F97B5CBC}" type="slidenum">
+              <a:rPr lang="en-US"/>
+              <a:t>15</a:t>
             </a:fld>
             <a:endParaRPr lang="en-US"/>
           </a:p>
@@ -2177,7 +2267,7 @@
           <a:p>
             <a:r>
               <a:rPr lang="en-US" dirty="0"/>
-              <a:t>결론부터 말하면, crack과 scratch를 서로 헷갈린 경우는 한 번도 없고, 오류는 전부 놓친 scratch나 배경 오검출입니다. 특히 나무 탁상 배경에서 재현율이 33%로 가장 약합니다. 나무결이 scratch처럼 가는 선 모양이라 놓치기도 하고 잘못 보기도 합니다. heatmap은 YOLOX-S가 98%의 사진에서 결함을 짚지만 ATSS는 48%로, 정확도와 설명력은 별개였습니다.</a:t>
+              <a:t>결론부터 말하면, crack과 scratch를 서로 헷갈린 경우는 한 번도 없고, 오류는 전부 놓친 scratch나 배경 오검출입니다. 특히 나무 탁상 배경에서 재현율이 33%로 가장 약합니다. 나무결이 scratch처럼 가는 선 모양이라 놓치기도 하고 잘못 보기도 합니다. 세 모델 모두 같은 패턴입니다. YOLOX-S는 scratch를 28개, Tiny는 30개 놓쳐서 ATSS보다 더 많이 놓칩니다.</a:t>
             </a:r>
             <a:endParaRPr lang="en-US" dirty="0"/>
           </a:p>
@@ -2265,7 +2355,7 @@
           <a:p>
             <a:r>
               <a:rPr lang="en-US" dirty="0"/>
-              <a:t>Geti 점수는 Geti가 직접 나눈 사진으로 매긴 점수라, 모델끼리 같은 조건으로 비교하거나 새 사진으로 다시 재볼 수 없었습니다. 그래서 benchmark.py를 직접 만들었습니다. Geti에서 내보낸 9개 모델을 똑같은 사진, 똑같은 판정 기준으로 돌리고, 정확도, 판정 결과, 기준값별 변화, 사진을 흐리게 하거나 어둡게 했을 때의 견고성, 학습 사진과의 중복, 그리고 CPU와 iGPU에서의 속도까지 한 번에 잽니다. 22장 복사본도 이 중복 검사에서 찾았습니다. 결과는 JSON으로 저장되고 대시보드의 Models 페이지에서 바로 볼 수 있습니다.</a:t>
+              <a:t>XAI 버전으로 내보낸 모델은 결함 위치를 heatmap으로 함께 출력합니다. 왼쪽은 맞힌 경우로, 결함이 있는 셀 주변에 반응합니다. 가운데는 정상 셀을 scratch로 잘못 본 경우인데, heatmap도 셀 표면에 반응해 왜 그렇게 판단했는지 짐작할 수 있습니다. 오른쪽은 놓친 경우로, 모델이 scratch가 아니라 벨트 쪽을 보고 있습니다. 다만 heatmap은 꽤 흐릿해서, 결함 안에 들어간 비중이 면적 대비 1.5배 정도입니다. 그래서 판단의 근거라기보다는 검사원이 어디를 볼지 알려주는 위치 힌트로 쓰는 게 맞습니다. 모델끼리 heatmap 점수를 비교하는 건 heatmap 격자 크기 차이를 재는 셈이라 비교 지표로는 쓰지 않았습니다.</a:t>
             </a:r>
             <a:endParaRPr lang="en-US" dirty="0"/>
           </a:p>
@@ -2353,7 +2443,7 @@
           <a:p>
             <a:r>
               <a:rPr lang="en-US" dirty="0"/>
-              <a:t>수업에서 다룬 모델 최적화를 직접 써보고 싶어서, Geti에서 INT8 모델을 받아 직접 만든 벤치마크로 측정했습니다. 같은 131장을 한 장씩, 같은 CPU에서, 전처리와 후처리를 포함해 잰 값입니다. INT8은 2배에서 4배 빠르고 크기는 절반 정도이며, mAP는 그대로입니다. 대신 신뢰도 점수가 조금 낮아져 같은 기준에서는 놓치는 결함이 늘어납니다. INT8을 쓰려면 기준값을 다시 정해야 합니다. 빨라지는 이유는 CPU의 8비트 연산 명령을 쓰고 옮길 데이터가 절반이기 때문이고, 놓침이 느는 이유는 양자화로 점수가 조금 내려가 0.30 근처 결함이 기준 아래로 떨어지기 때문입니다.</a:t>
+              <a:t>Geti 점수는 Geti가 직접 나눈 사진으로 매긴 점수라, 모델끼리 같은 조건으로 비교하거나 새 사진으로 다시 재볼 수 없었습니다. 그래서 benchmark.py를 직접 만들었습니다. Geti에서 내보낸 9개 모델을 똑같은 사진, 똑같은 판정 기준으로 돌리고, 정확도, 판정 결과, 기준값별 변화, 사진을 흐리게 하거나 어둡게 했을 때의 견고성, 학습 사진과의 중복, 그리고 CPU와 iGPU에서의 속도까지 한 번에 잽니다. 22장 복사본도 이 중복 검사에서 찾았습니다. 결과는 JSON으로 저장되고 대시보드의 Models 페이지에서 바로 볼 수 있습니다.</a:t>
             </a:r>
             <a:endParaRPr lang="en-US" dirty="0"/>
           </a:p>
@@ -2441,7 +2531,7 @@
           <a:p>
             <a:r>
               <a:rPr lang="en-US" dirty="0"/>
-              <a:t>2차 세트는 같은 업로더가 나중에 따로 올린 데이터셋입니다. 결함 종류와 촬영 방식은 비슷하지만 다른 촬영 세션입니다. 1차 데이터셋과 파일명이 같거나 픽셀이 사실상 같은 사진 140장을 먼저 뺐고, 증강되지 않은 45장만 테스트에 썼습니다. 그래서 모델 입장에서는 한 번도 본 적 없는 사진입니다.</a:t>
+              <a:t>수업에서 다룬 모델 최적화를 직접 써보고 싶어서, Geti에서 INT8 모델을 받아 직접 만든 벤치마크로 측정했습니다. 같은 131장을 한 장씩, 같은 CPU에서, 전처리와 후처리를 포함해 잰 값입니다. INT8은 2배에서 4배 빠르고 크기는 절반 정도이며, mAP는 그대로입니다. 대신 신뢰도 점수가 조금 낮아져 같은 기준에서는 놓치는 결함이 늘어납니다. INT8을 쓰려면 기준값을 다시 정해야 합니다. 빨라지는 이유는 CPU의 8비트 연산 명령을 쓰고 옮길 데이터가 절반이기 때문이고, 놓침이 느는 이유는 양자화로 점수가 조금 내려가 0.30 근처 결함이 기준 아래로 떨어지기 때문입니다.</a:t>
             </a:r>
             <a:endParaRPr lang="en-US" dirty="0"/>
           </a:p>
@@ -3839,6 +3929,530 @@
                   <a:schemeClr val="tx1"/>
                 </a:solidFill>
               </a:rPr>
+              <a:t>2차 데이터셋</a:t>
+            </a:r>
+            <a:endParaRPr lang="en-US" sz="3200" dirty="0"/>
+          </a:p>
+        </p:txBody>
+      </p:sp>
+      <p:pic>
+        <p:nvPicPr>
+          <p:cNvPr id="3" name="rf-0" descr="C:\Users\user\_se4nchoi\batteryvision\docs\submission\build\img\roboflow_v8.png">    </p:cNvPr>
+          <p:cNvPicPr>
+            <a:picLocks noChangeAspect="1"/>
+          </p:cNvPicPr>
+          <p:nvPr/>
+        </p:nvPicPr>
+        <p:blipFill>
+          <a:blip r:embed="rId1"/>
+          <a:stretch>
+            <a:fillRect/>
+          </a:stretch>
+        </p:blipFill>
+        <p:spPr>
+          <a:xfrm>
+            <a:off x="548640" y="1600200"/>
+            <a:ext cx="5440680" cy="3459761"/>
+          </a:xfrm>
+          <a:prstGeom prst="rect">
+            <a:avLst/>
+          </a:prstGeom>
+        </p:spPr>
+      </p:pic>
+      <p:sp>
+        <p:nvSpPr>
+          <p:cNvPr id="4" name="rf-tag-0-bg"/>
+          <p:cNvSpPr/>
+          <p:nvPr/>
+        </p:nvSpPr>
+        <p:spPr>
+          <a:xfrm>
+            <a:off x="548640" y="5197121"/>
+            <a:ext cx="731520" cy="347472"/>
+          </a:xfrm>
+          <a:prstGeom prst="roundRect">
+            <a:avLst>
+              <a:gd name="adj" fmla="val 13158"/>
+            </a:avLst>
+          </a:prstGeom>
+          <a:solidFill>
+            <a:schemeClr val="accent1">
+              <a:alpha val="20000"/>
+            </a:schemeClr>
+          </a:solidFill>
+          <a:ln w="12700">
+            <a:solidFill>
+              <a:schemeClr val="accent1"/>
+            </a:solidFill>
+            <a:prstDash val="solid"/>
+          </a:ln>
+        </p:spPr>
+      </p:sp>
+      <p:sp>
+        <p:nvSpPr>
+          <p:cNvPr id="5" name="rf-tag-0"/>
+          <p:cNvSpPr txBox="1"/>
+          <p:nvPr/>
+        </p:nvSpPr>
+        <p:spPr>
+          <a:xfrm>
+            <a:off x="548640" y="5197121"/>
+            <a:ext cx="731520" cy="347472"/>
+          </a:xfrm>
+          <a:prstGeom prst="rect">
+            <a:avLst/>
+          </a:prstGeom>
+          <a:noFill/>
+          <a:ln/>
+        </p:spPr>
+        <p:txBody>
+          <a:bodyPr wrap="square" lIns="0" tIns="0" rIns="0" bIns="0" rtlCol="0" anchor="ctr"/>
+          <a:lstStyle/>
+          <a:p>
+            <a:pPr algn="ctr" indent="0" marL="0">
+              <a:buNone/>
+            </a:pPr>
+            <a:r>
+              <a:rPr lang="en-US" sz="1300" b="1" dirty="0">
+                <a:solidFill>
+                  <a:schemeClr val="accent1"/>
+                </a:solidFill>
+              </a:rPr>
+              <a:t>1차</a:t>
+            </a:r>
+            <a:endParaRPr lang="en-US" sz="1300" dirty="0"/>
+          </a:p>
+        </p:txBody>
+      </p:sp>
+      <p:sp>
+        <p:nvSpPr>
+          <p:cNvPr id="6" name="rf-cap-0"/>
+          <p:cNvSpPr txBox="1"/>
+          <p:nvPr/>
+        </p:nvSpPr>
+        <p:spPr>
+          <a:xfrm>
+            <a:off x="1417320" y="5197121"/>
+            <a:ext cx="4526280" cy="347472"/>
+          </a:xfrm>
+          <a:prstGeom prst="rect">
+            <a:avLst/>
+          </a:prstGeom>
+          <a:noFill/>
+          <a:ln/>
+        </p:spPr>
+        <p:txBody>
+          <a:bodyPr wrap="square" lIns="0" tIns="0" rIns="0" bIns="0" rtlCol="0" anchor="ctr"/>
+          <a:lstStyle/>
+          <a:p>
+            <a:pPr indent="0" marL="0">
+              <a:buNone/>
+            </a:pPr>
+            <a:r>
+              <a:rPr lang="en-US" sz="1500" dirty="0">
+                <a:solidFill>
+                  <a:schemeClr val="tx1"/>
+                </a:solidFill>
+              </a:rPr>
+              <a:t>v8 · 3,673장 · 학습</a:t>
+            </a:r>
+            <a:endParaRPr lang="en-US" sz="1500" dirty="0"/>
+          </a:p>
+        </p:txBody>
+      </p:sp>
+      <p:pic>
+        <p:nvPicPr>
+          <p:cNvPr id="7" name="rf-1" descr="C:\Users\user\_se4nchoi\batteryvision\docs\submission\build\img\roboflow_v2.png">    </p:cNvPr>
+          <p:cNvPicPr>
+            <a:picLocks noChangeAspect="1"/>
+          </p:cNvPicPr>
+          <p:nvPr/>
+        </p:nvPicPr>
+        <p:blipFill>
+          <a:blip r:embed="rId2"/>
+          <a:stretch>
+            <a:fillRect/>
+          </a:stretch>
+        </p:blipFill>
+        <p:spPr>
+          <a:xfrm>
+            <a:off x="6190488" y="1600200"/>
+            <a:ext cx="5440680" cy="3320210"/>
+          </a:xfrm>
+          <a:prstGeom prst="rect">
+            <a:avLst/>
+          </a:prstGeom>
+        </p:spPr>
+      </p:pic>
+      <p:sp>
+        <p:nvSpPr>
+          <p:cNvPr id="8" name="rf-tag-1-bg"/>
+          <p:cNvSpPr/>
+          <p:nvPr/>
+        </p:nvSpPr>
+        <p:spPr>
+          <a:xfrm>
+            <a:off x="6190488" y="5057570"/>
+            <a:ext cx="731520" cy="347472"/>
+          </a:xfrm>
+          <a:prstGeom prst="roundRect">
+            <a:avLst>
+              <a:gd name="adj" fmla="val 13158"/>
+            </a:avLst>
+          </a:prstGeom>
+          <a:solidFill>
+            <a:schemeClr val="accent3">
+              <a:alpha val="20000"/>
+            </a:schemeClr>
+          </a:solidFill>
+          <a:ln w="12700">
+            <a:solidFill>
+              <a:schemeClr val="accent3"/>
+            </a:solidFill>
+            <a:prstDash val="solid"/>
+          </a:ln>
+        </p:spPr>
+      </p:sp>
+      <p:sp>
+        <p:nvSpPr>
+          <p:cNvPr id="9" name="rf-tag-1"/>
+          <p:cNvSpPr txBox="1"/>
+          <p:nvPr/>
+        </p:nvSpPr>
+        <p:spPr>
+          <a:xfrm>
+            <a:off x="6190488" y="5057570"/>
+            <a:ext cx="731520" cy="347472"/>
+          </a:xfrm>
+          <a:prstGeom prst="rect">
+            <a:avLst/>
+          </a:prstGeom>
+          <a:noFill/>
+          <a:ln/>
+        </p:spPr>
+        <p:txBody>
+          <a:bodyPr wrap="square" lIns="0" tIns="0" rIns="0" bIns="0" rtlCol="0" anchor="ctr"/>
+          <a:lstStyle/>
+          <a:p>
+            <a:pPr algn="ctr" indent="0" marL="0">
+              <a:buNone/>
+            </a:pPr>
+            <a:r>
+              <a:rPr lang="en-US" sz="1300" b="1" dirty="0">
+                <a:solidFill>
+                  <a:schemeClr val="accent3"/>
+                </a:solidFill>
+              </a:rPr>
+              <a:t>2차</a:t>
+            </a:r>
+            <a:endParaRPr lang="en-US" sz="1300" dirty="0"/>
+          </a:p>
+        </p:txBody>
+      </p:sp>
+      <p:sp>
+        <p:nvSpPr>
+          <p:cNvPr id="10" name="rf-cap-1"/>
+          <p:cNvSpPr txBox="1"/>
+          <p:nvPr/>
+        </p:nvSpPr>
+        <p:spPr>
+          <a:xfrm>
+            <a:off x="7059168" y="5057570"/>
+            <a:ext cx="4526280" cy="347472"/>
+          </a:xfrm>
+          <a:prstGeom prst="rect">
+            <a:avLst/>
+          </a:prstGeom>
+          <a:noFill/>
+          <a:ln/>
+        </p:spPr>
+        <p:txBody>
+          <a:bodyPr wrap="square" lIns="0" tIns="0" rIns="0" bIns="0" rtlCol="0" anchor="ctr"/>
+          <a:lstStyle/>
+          <a:p>
+            <a:pPr indent="0" marL="0">
+              <a:buNone/>
+            </a:pPr>
+            <a:r>
+              <a:rPr lang="en-US" sz="1500" dirty="0">
+                <a:solidFill>
+                  <a:schemeClr val="tx1"/>
+                </a:solidFill>
+              </a:rPr>
+              <a:t>v2 · 720장 · 테스트만</a:t>
+            </a:r>
+            <a:endParaRPr lang="en-US" sz="1500" dirty="0"/>
+          </a:p>
+        </p:txBody>
+      </p:sp>
+      <p:sp>
+        <p:nvSpPr>
+          <p:cNvPr id="11" name="dedup-bg"/>
+          <p:cNvSpPr/>
+          <p:nvPr/>
+        </p:nvSpPr>
+        <p:spPr>
+          <a:xfrm>
+            <a:off x="548640" y="5715000"/>
+            <a:ext cx="2743200" cy="457200"/>
+          </a:xfrm>
+          <a:prstGeom prst="roundRect">
+            <a:avLst>
+              <a:gd name="adj" fmla="val 10000"/>
+            </a:avLst>
+          </a:prstGeom>
+          <a:solidFill>
+            <a:schemeClr val="accent3">
+              <a:alpha val="20000"/>
+            </a:schemeClr>
+          </a:solidFill>
+          <a:ln w="12700">
+            <a:solidFill>
+              <a:schemeClr val="accent3"/>
+            </a:solidFill>
+            <a:prstDash val="solid"/>
+          </a:ln>
+        </p:spPr>
+      </p:sp>
+      <p:sp>
+        <p:nvSpPr>
+          <p:cNvPr id="12" name="dedup"/>
+          <p:cNvSpPr txBox="1"/>
+          <p:nvPr/>
+        </p:nvSpPr>
+        <p:spPr>
+          <a:xfrm>
+            <a:off x="548640" y="5715000"/>
+            <a:ext cx="2743200" cy="457200"/>
+          </a:xfrm>
+          <a:prstGeom prst="rect">
+            <a:avLst/>
+          </a:prstGeom>
+          <a:noFill/>
+          <a:ln/>
+        </p:spPr>
+        <p:txBody>
+          <a:bodyPr wrap="square" lIns="0" tIns="0" rIns="0" bIns="0" rtlCol="0" anchor="ctr"/>
+          <a:lstStyle/>
+          <a:p>
+            <a:pPr algn="ctr" indent="0" marL="0">
+              <a:buNone/>
+            </a:pPr>
+            <a:r>
+              <a:rPr lang="en-US" sz="1300" b="1" dirty="0">
+                <a:solidFill>
+                  <a:schemeClr val="accent3"/>
+                </a:solidFill>
+              </a:rPr>
+              <a:t>중복 140장 제거</a:t>
+            </a:r>
+            <a:endParaRPr lang="en-US" sz="1300" dirty="0"/>
+          </a:p>
+        </p:txBody>
+      </p:sp>
+      <p:sp>
+        <p:nvSpPr>
+          <p:cNvPr id="13" name="dedup-arrow"/>
+          <p:cNvSpPr txBox="1"/>
+          <p:nvPr/>
+        </p:nvSpPr>
+        <p:spPr>
+          <a:xfrm>
+            <a:off x="3337560" y="5715000"/>
+            <a:ext cx="457200" cy="457200"/>
+          </a:xfrm>
+          <a:prstGeom prst="rect">
+            <a:avLst/>
+          </a:prstGeom>
+          <a:noFill/>
+          <a:ln/>
+        </p:spPr>
+        <p:txBody>
+          <a:bodyPr wrap="square" lIns="0" tIns="0" rIns="0" bIns="0" rtlCol="0" anchor="ctr"/>
+          <a:lstStyle/>
+          <a:p>
+            <a:pPr algn="ctr" indent="0" marL="0">
+              <a:buNone/>
+            </a:pPr>
+            <a:r>
+              <a:rPr lang="en-US" sz="2000" b="1" dirty="0">
+                <a:solidFill>
+                  <a:schemeClr val="tx2"/>
+                </a:solidFill>
+              </a:rPr>
+              <a:t>→</a:t>
+            </a:r>
+            <a:endParaRPr lang="en-US" sz="2000" dirty="0"/>
+          </a:p>
+        </p:txBody>
+      </p:sp>
+      <p:sp>
+        <p:nvSpPr>
+          <p:cNvPr id="14" name="clean45-bg"/>
+          <p:cNvSpPr/>
+          <p:nvPr/>
+        </p:nvSpPr>
+        <p:spPr>
+          <a:xfrm>
+            <a:off x="3840480" y="5715000"/>
+            <a:ext cx="3840480" cy="457200"/>
+          </a:xfrm>
+          <a:prstGeom prst="roundRect">
+            <a:avLst>
+              <a:gd name="adj" fmla="val 10000"/>
+            </a:avLst>
+          </a:prstGeom>
+          <a:solidFill>
+            <a:schemeClr val="accent1">
+              <a:alpha val="20000"/>
+            </a:schemeClr>
+          </a:solidFill>
+          <a:ln w="12700">
+            <a:solidFill>
+              <a:schemeClr val="accent1"/>
+            </a:solidFill>
+            <a:prstDash val="solid"/>
+          </a:ln>
+        </p:spPr>
+      </p:sp>
+      <p:sp>
+        <p:nvSpPr>
+          <p:cNvPr id="15" name="clean45"/>
+          <p:cNvSpPr txBox="1"/>
+          <p:nvPr/>
+        </p:nvSpPr>
+        <p:spPr>
+          <a:xfrm>
+            <a:off x="3840480" y="5715000"/>
+            <a:ext cx="3840480" cy="457200"/>
+          </a:xfrm>
+          <a:prstGeom prst="rect">
+            <a:avLst/>
+          </a:prstGeom>
+          <a:noFill/>
+          <a:ln/>
+        </p:spPr>
+        <p:txBody>
+          <a:bodyPr wrap="square" lIns="0" tIns="0" rIns="0" bIns="0" rtlCol="0" anchor="ctr"/>
+          <a:lstStyle/>
+          <a:p>
+            <a:pPr algn="ctr" indent="0" marL="0">
+              <a:buNone/>
+            </a:pPr>
+            <a:r>
+              <a:rPr lang="en-US" sz="1300" b="1" dirty="0">
+                <a:solidFill>
+                  <a:schemeClr val="accent1"/>
+                </a:solidFill>
+              </a:rPr>
+              <a:t>45장 (결함 30 · 정상 15)</a:t>
+            </a:r>
+            <a:endParaRPr lang="en-US" sz="1300" dirty="0"/>
+          </a:p>
+        </p:txBody>
+      </p:sp>
+      <p:sp>
+        <p:nvSpPr>
+          <p:cNvPr id="25" name="Slide Number Placeholder 0"/>
+          <p:cNvSpPr>
+            <a:spLocks noGrp="1"/>
+          </p:cNvSpPr>
+          <p:nvPr>
+            <p:ph type="sldNum" sz="quarter" idx="4294967295"/>
+          </p:nvPr>
+        </p:nvSpPr>
+        <p:spPr>
+          <a:xfrm>
+            <a:off x="11094415" y="6419088"/>
+            <a:ext cx="548640" cy="274320"/>
+          </a:xfrm>
+          <a:prstGeom prst="rect">
+            <a:avLst/>
+          </a:prstGeom>
+          <a:extLst>
+            <a:ext uri="{C572A759-6A51-4108-AA02-DFA0A04FC94B}">
+              <ma14:wrappingTextBoxFlag xmlns:ma14="http://schemas.microsoft.com/office/mac/drawingml/2011/main" val="0"/>
+            </a:ext>
+          </a:extLst>
+        </p:spPr>
+        <p:txBody>
+          <a:bodyPr/>
+          <a:lstStyle>
+            <a:lvl1pPr>
+              <a:defRPr sz="1000">
+                <a:solidFill>
+                  <a:schemeClr val="tx2"/>
+                </a:solidFill>
+              </a:defRPr>
+            </a:lvl1pPr>
+          </a:lstStyle>
+          <a:p>
+            <a:pPr algn="r"/>
+            <a:fld id="{F7021451-1387-4CA6-816F-3879F97B5CBC}" type="slidenum">
+              <a:rPr b="0" lang="en-US"/>
+              <a:t>10</a:t>
+            </a:fld>
+            <a:endParaRPr lang="en-US"/>
+          </a:p>
+        </p:txBody>
+      </p:sp>
+    </p:spTree>
+  </p:cSld>
+  <p:clrMapOvr>
+    <a:masterClrMapping/>
+  </p:clrMapOvr>
+</p:sld>
+</file>
+
+<file path=ppt/slides/slide11.xml><?xml version="1.0" encoding="utf-8"?>
+<p:sld xmlns:a="http://schemas.openxmlformats.org/drawingml/2006/main" xmlns:r="http://schemas.openxmlformats.org/officeDocument/2006/relationships" xmlns:p="http://schemas.openxmlformats.org/presentationml/2006/main">
+  <p:cSld name="Slide 11">
+    <p:spTree>
+      <p:nvGrpSpPr>
+        <p:cNvPr id="1" name=""/>
+        <p:cNvGrpSpPr/>
+        <p:nvPr/>
+      </p:nvGrpSpPr>
+      <p:grpSpPr>
+        <a:xfrm>
+          <a:off x="0" y="0"/>
+          <a:ext cx="0" cy="0"/>
+          <a:chOff x="0" y="0"/>
+          <a:chExt cx="0" cy="0"/>
+        </a:xfrm>
+      </p:grpSpPr>
+      <p:sp>
+        <p:nvSpPr>
+          <p:cNvPr id="2" name="Text 0"/>
+          <p:cNvSpPr/>
+          <p:nvPr>
+            <p:ph idx="100" type="title" hasCustomPrompt="1"/>
+          </p:nvPr>
+        </p:nvSpPr>
+        <p:spPr>
+          <a:xfrm>
+            <a:off x="548640" y="347472"/>
+            <a:ext cx="11094415" cy="685800"/>
+          </a:xfrm>
+          <a:prstGeom prst="rect">
+            <a:avLst/>
+          </a:prstGeom>
+          <a:noFill/>
+          <a:ln/>
+        </p:spPr>
+        <p:txBody>
+          <a:bodyPr wrap="square" lIns="0" tIns="0" rIns="0" bIns="0" rtlCol="0" anchor="ctr"/>
+          <a:lstStyle/>
+          <a:p>
+            <a:pPr algn="l" indent="0" marL="0">
+              <a:buNone/>
+            </a:pPr>
+            <a:r>
+              <a:rPr lang="en-US" sz="3200" b="1" dirty="0">
+                <a:solidFill>
+                  <a:schemeClr val="tx1"/>
+                </a:solidFill>
+              </a:rPr>
               <a:t>2차 세트 결과</a:t>
             </a:r>
             <a:endParaRPr lang="en-US" sz="3200" dirty="0"/>
@@ -4515,7 +5129,7 @@
       </p:sp>
       <p:graphicFrame>
         <p:nvGraphicFramePr>
-          <p:cNvPr id="11" name="th-table"/>
+          <p:cNvPr id="12" name="th-table"/>
           <p:cNvGraphicFramePr>
             <a:graphicFrameLocks noGrp="1"/>
           </p:cNvGraphicFramePr>
@@ -6301,7 +6915,7 @@
             <a:pPr algn="r"/>
             <a:fld id="{F7021451-1387-4CA6-816F-3879F97B5CBC}" type="slidenum">
               <a:rPr b="0" lang="en-US"/>
-              <a:t>10</a:t>
+              <a:t>11</a:t>
             </a:fld>
             <a:endParaRPr lang="en-US"/>
           </a:p>
@@ -6315,9 +6929,9 @@
 </p:sld>
 </file>
 
-<file path=ppt/slides/slide11.xml><?xml version="1.0" encoding="utf-8"?>
+<file path=ppt/slides/slide12.xml><?xml version="1.0" encoding="utf-8"?>
 <p:sld xmlns:a="http://schemas.openxmlformats.org/drawingml/2006/main" xmlns:r="http://schemas.openxmlformats.org/officeDocument/2006/relationships" xmlns:p="http://schemas.openxmlformats.org/presentationml/2006/main">
-  <p:cSld name="Slide 11">
+  <p:cSld name="Slide 12">
     <p:spTree>
       <p:nvGrpSpPr>
         <p:cNvPr id="1" name=""/>
@@ -6372,7 +6986,7 @@
       </p:sp>
       <p:graphicFrame>
         <p:nvGraphicFramePr>
-          <p:cNvPr id="12" name="causes-table"/>
+          <p:cNvPr id="13" name="causes-table"/>
           <p:cNvGraphicFramePr>
             <a:graphicFrameLocks noGrp="1"/>
           </p:cNvGraphicFramePr>
@@ -8060,7 +8674,7 @@
                           <a:ea typeface="Malgun Gothic" pitchFamily="34" charset="-122"/>
                           <a:cs typeface="Malgun Gothic" pitchFamily="34" charset="-120"/>
                         </a:rPr>
-                        <a:t>8</a:t>
+                        <a:t>9</a:t>
                       </a:r>
                       <a:endParaRPr lang="en-US" sz="1500" dirty="0">
                         <a:latin typeface="Malgun Gothic" charset="0"/>
@@ -8334,7 +8948,7 @@
                           <a:ea typeface="Malgun Gothic" pitchFamily="34" charset="-122"/>
                           <a:cs typeface="Malgun Gothic" pitchFamily="34" charset="-120"/>
                         </a:rPr>
-                        <a:t>10</a:t>
+                        <a:t>11</a:t>
                       </a:r>
                       <a:endParaRPr lang="en-US" sz="1500" dirty="0">
                         <a:latin typeface="Malgun Gothic" charset="0"/>
@@ -8608,7 +9222,7 @@
                           <a:ea typeface="Malgun Gothic" pitchFamily="34" charset="-122"/>
                           <a:cs typeface="Malgun Gothic" pitchFamily="34" charset="-120"/>
                         </a:rPr>
-                        <a:t>10</a:t>
+                        <a:t>11</a:t>
                       </a:r>
                       <a:endParaRPr lang="en-US" sz="1500" dirty="0">
                         <a:latin typeface="Malgun Gothic" charset="0"/>
@@ -8882,7 +9496,7 @@
                           <a:ea typeface="Malgun Gothic" pitchFamily="34" charset="-122"/>
                           <a:cs typeface="Malgun Gothic" pitchFamily="34" charset="-120"/>
                         </a:rPr>
-                        <a:t>10</a:t>
+                        <a:t>11</a:t>
                       </a:r>
                       <a:endParaRPr lang="en-US" sz="1500" dirty="0">
                         <a:latin typeface="Malgun Gothic" charset="0"/>
@@ -9311,490 +9925,6 @@
             <a:pPr algn="r"/>
             <a:fld id="{F7021451-1387-4CA6-816F-3879F97B5CBC}" type="slidenum">
               <a:rPr b="0" lang="en-US"/>
-              <a:t>11</a:t>
-            </a:fld>
-            <a:endParaRPr lang="en-US"/>
-          </a:p>
-        </p:txBody>
-      </p:sp>
-    </p:spTree>
-  </p:cSld>
-  <p:clrMapOvr>
-    <a:masterClrMapping/>
-  </p:clrMapOvr>
-</p:sld>
-</file>
-
-<file path=ppt/slides/slide12.xml><?xml version="1.0" encoding="utf-8"?>
-<p:sld xmlns:a="http://schemas.openxmlformats.org/drawingml/2006/main" xmlns:r="http://schemas.openxmlformats.org/officeDocument/2006/relationships" xmlns:p="http://schemas.openxmlformats.org/presentationml/2006/main">
-  <p:cSld name="Slide 12">
-    <p:spTree>
-      <p:nvGrpSpPr>
-        <p:cNvPr id="1" name=""/>
-        <p:cNvGrpSpPr/>
-        <p:nvPr/>
-      </p:nvGrpSpPr>
-      <p:grpSpPr>
-        <a:xfrm>
-          <a:off x="0" y="0"/>
-          <a:ext cx="0" cy="0"/>
-          <a:chOff x="0" y="0"/>
-          <a:chExt cx="0" cy="0"/>
-        </a:xfrm>
-      </p:grpSpPr>
-      <p:sp>
-        <p:nvSpPr>
-          <p:cNvPr id="2" name="Text 0"/>
-          <p:cNvSpPr/>
-          <p:nvPr>
-            <p:ph idx="100" type="title" hasCustomPrompt="1"/>
-          </p:nvPr>
-        </p:nvSpPr>
-        <p:spPr>
-          <a:xfrm>
-            <a:off x="548640" y="347472"/>
-            <a:ext cx="11094415" cy="685800"/>
-          </a:xfrm>
-          <a:prstGeom prst="rect">
-            <a:avLst/>
-          </a:prstGeom>
-          <a:noFill/>
-          <a:ln/>
-        </p:spPr>
-        <p:txBody>
-          <a:bodyPr wrap="square" lIns="0" tIns="0" rIns="0" bIns="0" rtlCol="0" anchor="ctr"/>
-          <a:lstStyle/>
-          <a:p>
-            <a:pPr algn="l" indent="0" marL="0">
-              <a:buNone/>
-            </a:pPr>
-            <a:r>
-              <a:rPr lang="en-US" sz="3200" b="1" dirty="0">
-                <a:solidFill>
-                  <a:schemeClr val="tx1"/>
-                </a:solidFill>
-              </a:rPr>
-              <a:t>Lesson Learned</a:t>
-            </a:r>
-            <a:endParaRPr lang="en-US" sz="3200" dirty="0"/>
-          </a:p>
-        </p:txBody>
-      </p:sp>
-      <p:sp>
-        <p:nvSpPr>
-          <p:cNvPr id="3" name="lesson-0"/>
-          <p:cNvSpPr/>
-          <p:nvPr/>
-        </p:nvSpPr>
-        <p:spPr>
-          <a:xfrm>
-            <a:off x="548640" y="1600200"/>
-            <a:ext cx="5440680" cy="2194560"/>
-          </a:xfrm>
-          <a:prstGeom prst="roundRect">
-            <a:avLst>
-              <a:gd name="adj" fmla="val 3333"/>
-            </a:avLst>
-          </a:prstGeom>
-          <a:solidFill>
-            <a:schemeClr val="bg2"/>
-          </a:solidFill>
-          <a:ln/>
-        </p:spPr>
-      </p:sp>
-      <p:sp>
-        <p:nvSpPr>
-          <p:cNvPr id="4" name="lesson-n-0"/>
-          <p:cNvSpPr txBox="1"/>
-          <p:nvPr/>
-        </p:nvSpPr>
-        <p:spPr>
-          <a:xfrm>
-            <a:off x="914400" y="1600200"/>
-            <a:ext cx="1188720" cy="2194560"/>
-          </a:xfrm>
-          <a:prstGeom prst="rect">
-            <a:avLst/>
-          </a:prstGeom>
-          <a:noFill/>
-          <a:ln/>
-        </p:spPr>
-        <p:txBody>
-          <a:bodyPr wrap="square" lIns="0" tIns="0" rIns="0" bIns="0" rtlCol="0" anchor="ctr"/>
-          <a:lstStyle/>
-          <a:p>
-            <a:pPr indent="0" marL="0">
-              <a:buNone/>
-            </a:pPr>
-            <a:r>
-              <a:rPr lang="en-US" sz="4400" b="1" dirty="0">
-                <a:solidFill>
-                  <a:schemeClr val="accent1"/>
-                </a:solidFill>
-              </a:rPr>
-              <a:t>01</a:t>
-            </a:r>
-            <a:endParaRPr lang="en-US" sz="4400" dirty="0"/>
-          </a:p>
-        </p:txBody>
-      </p:sp>
-      <p:sp>
-        <p:nvSpPr>
-          <p:cNvPr id="5" name="lesson-h-0"/>
-          <p:cNvSpPr txBox="1"/>
-          <p:nvPr/>
-        </p:nvSpPr>
-        <p:spPr>
-          <a:xfrm>
-            <a:off x="2194560" y="1600200"/>
-            <a:ext cx="3657600" cy="2194560"/>
-          </a:xfrm>
-          <a:prstGeom prst="rect">
-            <a:avLst/>
-          </a:prstGeom>
-          <a:noFill/>
-          <a:ln/>
-        </p:spPr>
-        <p:txBody>
-          <a:bodyPr wrap="square" lIns="0" tIns="0" rIns="0" bIns="0" rtlCol="0" anchor="ctr"/>
-          <a:lstStyle/>
-          <a:p>
-            <a:pPr indent="0" marL="0">
-              <a:buNone/>
-            </a:pPr>
-            <a:r>
-              <a:rPr lang="en-US" sz="2600" b="1" dirty="0">
-                <a:solidFill>
-                  <a:schemeClr val="tx1"/>
-                </a:solidFill>
-              </a:rPr>
-              <a:t>테스트셋 먼저 분리</a:t>
-            </a:r>
-            <a:endParaRPr lang="en-US" sz="2600" dirty="0"/>
-          </a:p>
-        </p:txBody>
-      </p:sp>
-      <p:sp>
-        <p:nvSpPr>
-          <p:cNvPr id="6" name="lesson-1"/>
-          <p:cNvSpPr/>
-          <p:nvPr/>
-        </p:nvSpPr>
-        <p:spPr>
-          <a:xfrm>
-            <a:off x="6190488" y="1600200"/>
-            <a:ext cx="5440680" cy="2194560"/>
-          </a:xfrm>
-          <a:prstGeom prst="roundRect">
-            <a:avLst>
-              <a:gd name="adj" fmla="val 3333"/>
-            </a:avLst>
-          </a:prstGeom>
-          <a:solidFill>
-            <a:schemeClr val="bg2"/>
-          </a:solidFill>
-          <a:ln/>
-        </p:spPr>
-      </p:sp>
-      <p:sp>
-        <p:nvSpPr>
-          <p:cNvPr id="7" name="lesson-n-1"/>
-          <p:cNvSpPr txBox="1"/>
-          <p:nvPr/>
-        </p:nvSpPr>
-        <p:spPr>
-          <a:xfrm>
-            <a:off x="6556248" y="1600200"/>
-            <a:ext cx="1188720" cy="2194560"/>
-          </a:xfrm>
-          <a:prstGeom prst="rect">
-            <a:avLst/>
-          </a:prstGeom>
-          <a:noFill/>
-          <a:ln/>
-        </p:spPr>
-        <p:txBody>
-          <a:bodyPr wrap="square" lIns="0" tIns="0" rIns="0" bIns="0" rtlCol="0" anchor="ctr"/>
-          <a:lstStyle/>
-          <a:p>
-            <a:pPr indent="0" marL="0">
-              <a:buNone/>
-            </a:pPr>
-            <a:r>
-              <a:rPr lang="en-US" sz="4400" b="1" dirty="0">
-                <a:solidFill>
-                  <a:schemeClr val="accent2"/>
-                </a:solidFill>
-              </a:rPr>
-              <a:t>02</a:t>
-            </a:r>
-            <a:endParaRPr lang="en-US" sz="4400" dirty="0"/>
-          </a:p>
-        </p:txBody>
-      </p:sp>
-      <p:sp>
-        <p:nvSpPr>
-          <p:cNvPr id="8" name="lesson-h-1"/>
-          <p:cNvSpPr txBox="1"/>
-          <p:nvPr/>
-        </p:nvSpPr>
-        <p:spPr>
-          <a:xfrm>
-            <a:off x="7836408" y="1600200"/>
-            <a:ext cx="3657600" cy="2194560"/>
-          </a:xfrm>
-          <a:prstGeom prst="rect">
-            <a:avLst/>
-          </a:prstGeom>
-          <a:noFill/>
-          <a:ln/>
-        </p:spPr>
-        <p:txBody>
-          <a:bodyPr wrap="square" lIns="0" tIns="0" rIns="0" bIns="0" rtlCol="0" anchor="ctr"/>
-          <a:lstStyle/>
-          <a:p>
-            <a:pPr indent="0" marL="0">
-              <a:buNone/>
-            </a:pPr>
-            <a:r>
-              <a:rPr lang="en-US" sz="2600" b="1" dirty="0">
-                <a:solidFill>
-                  <a:schemeClr val="tx1"/>
-                </a:solidFill>
-              </a:rPr>
-              <a:t>새 환경은 새로 검증</a:t>
-            </a:r>
-            <a:endParaRPr lang="en-US" sz="2600" dirty="0"/>
-          </a:p>
-        </p:txBody>
-      </p:sp>
-      <p:sp>
-        <p:nvSpPr>
-          <p:cNvPr id="9" name="lesson-2"/>
-          <p:cNvSpPr/>
-          <p:nvPr/>
-        </p:nvSpPr>
-        <p:spPr>
-          <a:xfrm>
-            <a:off x="548640" y="3977640"/>
-            <a:ext cx="5440680" cy="2194560"/>
-          </a:xfrm>
-          <a:prstGeom prst="roundRect">
-            <a:avLst>
-              <a:gd name="adj" fmla="val 3333"/>
-            </a:avLst>
-          </a:prstGeom>
-          <a:solidFill>
-            <a:schemeClr val="bg2"/>
-          </a:solidFill>
-          <a:ln/>
-        </p:spPr>
-      </p:sp>
-      <p:sp>
-        <p:nvSpPr>
-          <p:cNvPr id="10" name="lesson-n-2"/>
-          <p:cNvSpPr txBox="1"/>
-          <p:nvPr/>
-        </p:nvSpPr>
-        <p:spPr>
-          <a:xfrm>
-            <a:off x="914400" y="3977640"/>
-            <a:ext cx="1188720" cy="2194560"/>
-          </a:xfrm>
-          <a:prstGeom prst="rect">
-            <a:avLst/>
-          </a:prstGeom>
-          <a:noFill/>
-          <a:ln/>
-        </p:spPr>
-        <p:txBody>
-          <a:bodyPr wrap="square" lIns="0" tIns="0" rIns="0" bIns="0" rtlCol="0" anchor="ctr"/>
-          <a:lstStyle/>
-          <a:p>
-            <a:pPr indent="0" marL="0">
-              <a:buNone/>
-            </a:pPr>
-            <a:r>
-              <a:rPr lang="en-US" sz="4400" b="1" dirty="0">
-                <a:solidFill>
-                  <a:schemeClr val="accent3"/>
-                </a:solidFill>
-              </a:rPr>
-              <a:t>03</a:t>
-            </a:r>
-            <a:endParaRPr lang="en-US" sz="4400" dirty="0"/>
-          </a:p>
-        </p:txBody>
-      </p:sp>
-      <p:sp>
-        <p:nvSpPr>
-          <p:cNvPr id="11" name="lesson-h-2"/>
-          <p:cNvSpPr txBox="1"/>
-          <p:nvPr/>
-        </p:nvSpPr>
-        <p:spPr>
-          <a:xfrm>
-            <a:off x="2194560" y="3977640"/>
-            <a:ext cx="3657600" cy="2194560"/>
-          </a:xfrm>
-          <a:prstGeom prst="rect">
-            <a:avLst/>
-          </a:prstGeom>
-          <a:noFill/>
-          <a:ln/>
-        </p:spPr>
-        <p:txBody>
-          <a:bodyPr wrap="square" lIns="0" tIns="0" rIns="0" bIns="0" rtlCol="0" anchor="ctr"/>
-          <a:lstStyle/>
-          <a:p>
-            <a:pPr indent="0" marL="0">
-              <a:buNone/>
-            </a:pPr>
-            <a:r>
-              <a:rPr lang="en-US" sz="2600" b="1" dirty="0">
-                <a:solidFill>
-                  <a:schemeClr val="tx1"/>
-                </a:solidFill>
-              </a:rPr>
-              <a:t>기준값은 모델별로</a:t>
-            </a:r>
-            <a:endParaRPr lang="en-US" sz="2600" dirty="0"/>
-          </a:p>
-        </p:txBody>
-      </p:sp>
-      <p:sp>
-        <p:nvSpPr>
-          <p:cNvPr id="12" name="lesson-3"/>
-          <p:cNvSpPr/>
-          <p:nvPr/>
-        </p:nvSpPr>
-        <p:spPr>
-          <a:xfrm>
-            <a:off x="6190488" y="3977640"/>
-            <a:ext cx="5440680" cy="2194560"/>
-          </a:xfrm>
-          <a:prstGeom prst="roundRect">
-            <a:avLst>
-              <a:gd name="adj" fmla="val 3333"/>
-            </a:avLst>
-          </a:prstGeom>
-          <a:solidFill>
-            <a:schemeClr val="bg2"/>
-          </a:solidFill>
-          <a:ln/>
-        </p:spPr>
-      </p:sp>
-      <p:sp>
-        <p:nvSpPr>
-          <p:cNvPr id="13" name="lesson-n-3"/>
-          <p:cNvSpPr txBox="1"/>
-          <p:nvPr/>
-        </p:nvSpPr>
-        <p:spPr>
-          <a:xfrm>
-            <a:off x="6556248" y="3977640"/>
-            <a:ext cx="1188720" cy="2194560"/>
-          </a:xfrm>
-          <a:prstGeom prst="rect">
-            <a:avLst/>
-          </a:prstGeom>
-          <a:noFill/>
-          <a:ln/>
-        </p:spPr>
-        <p:txBody>
-          <a:bodyPr wrap="square" lIns="0" tIns="0" rIns="0" bIns="0" rtlCol="0" anchor="ctr"/>
-          <a:lstStyle/>
-          <a:p>
-            <a:pPr indent="0" marL="0">
-              <a:buNone/>
-            </a:pPr>
-            <a:r>
-              <a:rPr lang="en-US" sz="4400" b="1" dirty="0">
-                <a:solidFill>
-                  <a:schemeClr val="accent4"/>
-                </a:solidFill>
-              </a:rPr>
-              <a:t>04</a:t>
-            </a:r>
-            <a:endParaRPr lang="en-US" sz="4400" dirty="0"/>
-          </a:p>
-        </p:txBody>
-      </p:sp>
-      <p:sp>
-        <p:nvSpPr>
-          <p:cNvPr id="14" name="lesson-h-3"/>
-          <p:cNvSpPr txBox="1"/>
-          <p:nvPr/>
-        </p:nvSpPr>
-        <p:spPr>
-          <a:xfrm>
-            <a:off x="7836408" y="3977640"/>
-            <a:ext cx="3657600" cy="2194560"/>
-          </a:xfrm>
-          <a:prstGeom prst="rect">
-            <a:avLst/>
-          </a:prstGeom>
-          <a:noFill/>
-          <a:ln/>
-        </p:spPr>
-        <p:txBody>
-          <a:bodyPr wrap="square" lIns="0" tIns="0" rIns="0" bIns="0" rtlCol="0" anchor="ctr"/>
-          <a:lstStyle/>
-          <a:p>
-            <a:pPr indent="0" marL="0">
-              <a:buNone/>
-            </a:pPr>
-            <a:r>
-              <a:rPr lang="en-US" sz="2600" b="1" dirty="0">
-                <a:solidFill>
-                  <a:schemeClr val="tx1"/>
-                </a:solidFill>
-              </a:rPr>
-              <a:t>크기보다 맞는 모델</a:t>
-            </a:r>
-            <a:endParaRPr lang="en-US" sz="2600" dirty="0"/>
-          </a:p>
-        </p:txBody>
-      </p:sp>
-      <p:sp>
-        <p:nvSpPr>
-          <p:cNvPr id="25" name="Slide Number Placeholder 0"/>
-          <p:cNvSpPr>
-            <a:spLocks noGrp="1"/>
-          </p:cNvSpPr>
-          <p:nvPr>
-            <p:ph type="sldNum" sz="quarter" idx="4294967295"/>
-          </p:nvPr>
-        </p:nvSpPr>
-        <p:spPr>
-          <a:xfrm>
-            <a:off x="11094415" y="6419088"/>
-            <a:ext cx="548640" cy="274320"/>
-          </a:xfrm>
-          <a:prstGeom prst="rect">
-            <a:avLst/>
-          </a:prstGeom>
-          <a:extLst>
-            <a:ext uri="{C572A759-6A51-4108-AA02-DFA0A04FC94B}">
-              <ma14:wrappingTextBoxFlag xmlns:ma14="http://schemas.microsoft.com/office/mac/drawingml/2011/main" val="0"/>
-            </a:ext>
-          </a:extLst>
-        </p:spPr>
-        <p:txBody>
-          <a:bodyPr/>
-          <a:lstStyle>
-            <a:lvl1pPr>
-              <a:defRPr sz="1000">
-                <a:solidFill>
-                  <a:schemeClr val="tx2"/>
-                </a:solidFill>
-              </a:defRPr>
-            </a:lvl1pPr>
-          </a:lstStyle>
-          <a:p>
-            <a:pPr algn="r"/>
-            <a:fld id="{F7021451-1387-4CA6-816F-3879F97B5CBC}" type="slidenum">
-              <a:rPr b="0" lang="en-US"/>
               <a:t>12</a:t>
             </a:fld>
             <a:endParaRPr lang="en-US"/>
@@ -9858,6 +9988,490 @@
                   <a:schemeClr val="tx1"/>
                 </a:solidFill>
               </a:rPr>
+              <a:t>Lesson Learned</a:t>
+            </a:r>
+            <a:endParaRPr lang="en-US" sz="3200" dirty="0"/>
+          </a:p>
+        </p:txBody>
+      </p:sp>
+      <p:sp>
+        <p:nvSpPr>
+          <p:cNvPr id="3" name="lesson-0"/>
+          <p:cNvSpPr/>
+          <p:nvPr/>
+        </p:nvSpPr>
+        <p:spPr>
+          <a:xfrm>
+            <a:off x="548640" y="1600200"/>
+            <a:ext cx="5440680" cy="2194560"/>
+          </a:xfrm>
+          <a:prstGeom prst="roundRect">
+            <a:avLst>
+              <a:gd name="adj" fmla="val 3333"/>
+            </a:avLst>
+          </a:prstGeom>
+          <a:solidFill>
+            <a:schemeClr val="bg2"/>
+          </a:solidFill>
+          <a:ln/>
+        </p:spPr>
+      </p:sp>
+      <p:sp>
+        <p:nvSpPr>
+          <p:cNvPr id="4" name="lesson-n-0"/>
+          <p:cNvSpPr txBox="1"/>
+          <p:nvPr/>
+        </p:nvSpPr>
+        <p:spPr>
+          <a:xfrm>
+            <a:off x="914400" y="1600200"/>
+            <a:ext cx="1188720" cy="2194560"/>
+          </a:xfrm>
+          <a:prstGeom prst="rect">
+            <a:avLst/>
+          </a:prstGeom>
+          <a:noFill/>
+          <a:ln/>
+        </p:spPr>
+        <p:txBody>
+          <a:bodyPr wrap="square" lIns="0" tIns="0" rIns="0" bIns="0" rtlCol="0" anchor="ctr"/>
+          <a:lstStyle/>
+          <a:p>
+            <a:pPr indent="0" marL="0">
+              <a:buNone/>
+            </a:pPr>
+            <a:r>
+              <a:rPr lang="en-US" sz="4400" b="1" dirty="0">
+                <a:solidFill>
+                  <a:schemeClr val="accent1"/>
+                </a:solidFill>
+              </a:rPr>
+              <a:t>01</a:t>
+            </a:r>
+            <a:endParaRPr lang="en-US" sz="4400" dirty="0"/>
+          </a:p>
+        </p:txBody>
+      </p:sp>
+      <p:sp>
+        <p:nvSpPr>
+          <p:cNvPr id="5" name="lesson-h-0"/>
+          <p:cNvSpPr txBox="1"/>
+          <p:nvPr/>
+        </p:nvSpPr>
+        <p:spPr>
+          <a:xfrm>
+            <a:off x="2194560" y="1600200"/>
+            <a:ext cx="3657600" cy="2194560"/>
+          </a:xfrm>
+          <a:prstGeom prst="rect">
+            <a:avLst/>
+          </a:prstGeom>
+          <a:noFill/>
+          <a:ln/>
+        </p:spPr>
+        <p:txBody>
+          <a:bodyPr wrap="square" lIns="0" tIns="0" rIns="0" bIns="0" rtlCol="0" anchor="ctr"/>
+          <a:lstStyle/>
+          <a:p>
+            <a:pPr indent="0" marL="0">
+              <a:buNone/>
+            </a:pPr>
+            <a:r>
+              <a:rPr lang="en-US" sz="2600" b="1" dirty="0">
+                <a:solidFill>
+                  <a:schemeClr val="tx1"/>
+                </a:solidFill>
+              </a:rPr>
+              <a:t>테스트셋 먼저 분리</a:t>
+            </a:r>
+            <a:endParaRPr lang="en-US" sz="2600" dirty="0"/>
+          </a:p>
+        </p:txBody>
+      </p:sp>
+      <p:sp>
+        <p:nvSpPr>
+          <p:cNvPr id="6" name="lesson-1"/>
+          <p:cNvSpPr/>
+          <p:nvPr/>
+        </p:nvSpPr>
+        <p:spPr>
+          <a:xfrm>
+            <a:off x="6190488" y="1600200"/>
+            <a:ext cx="5440680" cy="2194560"/>
+          </a:xfrm>
+          <a:prstGeom prst="roundRect">
+            <a:avLst>
+              <a:gd name="adj" fmla="val 3333"/>
+            </a:avLst>
+          </a:prstGeom>
+          <a:solidFill>
+            <a:schemeClr val="bg2"/>
+          </a:solidFill>
+          <a:ln/>
+        </p:spPr>
+      </p:sp>
+      <p:sp>
+        <p:nvSpPr>
+          <p:cNvPr id="7" name="lesson-n-1"/>
+          <p:cNvSpPr txBox="1"/>
+          <p:nvPr/>
+        </p:nvSpPr>
+        <p:spPr>
+          <a:xfrm>
+            <a:off x="6556248" y="1600200"/>
+            <a:ext cx="1188720" cy="2194560"/>
+          </a:xfrm>
+          <a:prstGeom prst="rect">
+            <a:avLst/>
+          </a:prstGeom>
+          <a:noFill/>
+          <a:ln/>
+        </p:spPr>
+        <p:txBody>
+          <a:bodyPr wrap="square" lIns="0" tIns="0" rIns="0" bIns="0" rtlCol="0" anchor="ctr"/>
+          <a:lstStyle/>
+          <a:p>
+            <a:pPr indent="0" marL="0">
+              <a:buNone/>
+            </a:pPr>
+            <a:r>
+              <a:rPr lang="en-US" sz="4400" b="1" dirty="0">
+                <a:solidFill>
+                  <a:schemeClr val="accent2"/>
+                </a:solidFill>
+              </a:rPr>
+              <a:t>02</a:t>
+            </a:r>
+            <a:endParaRPr lang="en-US" sz="4400" dirty="0"/>
+          </a:p>
+        </p:txBody>
+      </p:sp>
+      <p:sp>
+        <p:nvSpPr>
+          <p:cNvPr id="8" name="lesson-h-1"/>
+          <p:cNvSpPr txBox="1"/>
+          <p:nvPr/>
+        </p:nvSpPr>
+        <p:spPr>
+          <a:xfrm>
+            <a:off x="7836408" y="1600200"/>
+            <a:ext cx="3657600" cy="2194560"/>
+          </a:xfrm>
+          <a:prstGeom prst="rect">
+            <a:avLst/>
+          </a:prstGeom>
+          <a:noFill/>
+          <a:ln/>
+        </p:spPr>
+        <p:txBody>
+          <a:bodyPr wrap="square" lIns="0" tIns="0" rIns="0" bIns="0" rtlCol="0" anchor="ctr"/>
+          <a:lstStyle/>
+          <a:p>
+            <a:pPr indent="0" marL="0">
+              <a:buNone/>
+            </a:pPr>
+            <a:r>
+              <a:rPr lang="en-US" sz="2600" b="1" dirty="0">
+                <a:solidFill>
+                  <a:schemeClr val="tx1"/>
+                </a:solidFill>
+              </a:rPr>
+              <a:t>새 환경은 새로 검증</a:t>
+            </a:r>
+            <a:endParaRPr lang="en-US" sz="2600" dirty="0"/>
+          </a:p>
+        </p:txBody>
+      </p:sp>
+      <p:sp>
+        <p:nvSpPr>
+          <p:cNvPr id="9" name="lesson-2"/>
+          <p:cNvSpPr/>
+          <p:nvPr/>
+        </p:nvSpPr>
+        <p:spPr>
+          <a:xfrm>
+            <a:off x="548640" y="3977640"/>
+            <a:ext cx="5440680" cy="2194560"/>
+          </a:xfrm>
+          <a:prstGeom prst="roundRect">
+            <a:avLst>
+              <a:gd name="adj" fmla="val 3333"/>
+            </a:avLst>
+          </a:prstGeom>
+          <a:solidFill>
+            <a:schemeClr val="bg2"/>
+          </a:solidFill>
+          <a:ln/>
+        </p:spPr>
+      </p:sp>
+      <p:sp>
+        <p:nvSpPr>
+          <p:cNvPr id="10" name="lesson-n-2"/>
+          <p:cNvSpPr txBox="1"/>
+          <p:nvPr/>
+        </p:nvSpPr>
+        <p:spPr>
+          <a:xfrm>
+            <a:off x="914400" y="3977640"/>
+            <a:ext cx="1188720" cy="2194560"/>
+          </a:xfrm>
+          <a:prstGeom prst="rect">
+            <a:avLst/>
+          </a:prstGeom>
+          <a:noFill/>
+          <a:ln/>
+        </p:spPr>
+        <p:txBody>
+          <a:bodyPr wrap="square" lIns="0" tIns="0" rIns="0" bIns="0" rtlCol="0" anchor="ctr"/>
+          <a:lstStyle/>
+          <a:p>
+            <a:pPr indent="0" marL="0">
+              <a:buNone/>
+            </a:pPr>
+            <a:r>
+              <a:rPr lang="en-US" sz="4400" b="1" dirty="0">
+                <a:solidFill>
+                  <a:schemeClr val="accent3"/>
+                </a:solidFill>
+              </a:rPr>
+              <a:t>03</a:t>
+            </a:r>
+            <a:endParaRPr lang="en-US" sz="4400" dirty="0"/>
+          </a:p>
+        </p:txBody>
+      </p:sp>
+      <p:sp>
+        <p:nvSpPr>
+          <p:cNvPr id="11" name="lesson-h-2"/>
+          <p:cNvSpPr txBox="1"/>
+          <p:nvPr/>
+        </p:nvSpPr>
+        <p:spPr>
+          <a:xfrm>
+            <a:off x="2194560" y="3977640"/>
+            <a:ext cx="3657600" cy="2194560"/>
+          </a:xfrm>
+          <a:prstGeom prst="rect">
+            <a:avLst/>
+          </a:prstGeom>
+          <a:noFill/>
+          <a:ln/>
+        </p:spPr>
+        <p:txBody>
+          <a:bodyPr wrap="square" lIns="0" tIns="0" rIns="0" bIns="0" rtlCol="0" anchor="ctr"/>
+          <a:lstStyle/>
+          <a:p>
+            <a:pPr indent="0" marL="0">
+              <a:buNone/>
+            </a:pPr>
+            <a:r>
+              <a:rPr lang="en-US" sz="2600" b="1" dirty="0">
+                <a:solidFill>
+                  <a:schemeClr val="tx1"/>
+                </a:solidFill>
+              </a:rPr>
+              <a:t>기준값은 모델별로</a:t>
+            </a:r>
+            <a:endParaRPr lang="en-US" sz="2600" dirty="0"/>
+          </a:p>
+        </p:txBody>
+      </p:sp>
+      <p:sp>
+        <p:nvSpPr>
+          <p:cNvPr id="12" name="lesson-3"/>
+          <p:cNvSpPr/>
+          <p:nvPr/>
+        </p:nvSpPr>
+        <p:spPr>
+          <a:xfrm>
+            <a:off x="6190488" y="3977640"/>
+            <a:ext cx="5440680" cy="2194560"/>
+          </a:xfrm>
+          <a:prstGeom prst="roundRect">
+            <a:avLst>
+              <a:gd name="adj" fmla="val 3333"/>
+            </a:avLst>
+          </a:prstGeom>
+          <a:solidFill>
+            <a:schemeClr val="bg2"/>
+          </a:solidFill>
+          <a:ln/>
+        </p:spPr>
+      </p:sp>
+      <p:sp>
+        <p:nvSpPr>
+          <p:cNvPr id="13" name="lesson-n-3"/>
+          <p:cNvSpPr txBox="1"/>
+          <p:nvPr/>
+        </p:nvSpPr>
+        <p:spPr>
+          <a:xfrm>
+            <a:off x="6556248" y="3977640"/>
+            <a:ext cx="1188720" cy="2194560"/>
+          </a:xfrm>
+          <a:prstGeom prst="rect">
+            <a:avLst/>
+          </a:prstGeom>
+          <a:noFill/>
+          <a:ln/>
+        </p:spPr>
+        <p:txBody>
+          <a:bodyPr wrap="square" lIns="0" tIns="0" rIns="0" bIns="0" rtlCol="0" anchor="ctr"/>
+          <a:lstStyle/>
+          <a:p>
+            <a:pPr indent="0" marL="0">
+              <a:buNone/>
+            </a:pPr>
+            <a:r>
+              <a:rPr lang="en-US" sz="4400" b="1" dirty="0">
+                <a:solidFill>
+                  <a:schemeClr val="accent4"/>
+                </a:solidFill>
+              </a:rPr>
+              <a:t>04</a:t>
+            </a:r>
+            <a:endParaRPr lang="en-US" sz="4400" dirty="0"/>
+          </a:p>
+        </p:txBody>
+      </p:sp>
+      <p:sp>
+        <p:nvSpPr>
+          <p:cNvPr id="14" name="lesson-h-3"/>
+          <p:cNvSpPr txBox="1"/>
+          <p:nvPr/>
+        </p:nvSpPr>
+        <p:spPr>
+          <a:xfrm>
+            <a:off x="7836408" y="3977640"/>
+            <a:ext cx="3657600" cy="2194560"/>
+          </a:xfrm>
+          <a:prstGeom prst="rect">
+            <a:avLst/>
+          </a:prstGeom>
+          <a:noFill/>
+          <a:ln/>
+        </p:spPr>
+        <p:txBody>
+          <a:bodyPr wrap="square" lIns="0" tIns="0" rIns="0" bIns="0" rtlCol="0" anchor="ctr"/>
+          <a:lstStyle/>
+          <a:p>
+            <a:pPr indent="0" marL="0">
+              <a:buNone/>
+            </a:pPr>
+            <a:r>
+              <a:rPr lang="en-US" sz="2600" b="1" dirty="0">
+                <a:solidFill>
+                  <a:schemeClr val="tx1"/>
+                </a:solidFill>
+              </a:rPr>
+              <a:t>크기보다 맞는 모델</a:t>
+            </a:r>
+            <a:endParaRPr lang="en-US" sz="2600" dirty="0"/>
+          </a:p>
+        </p:txBody>
+      </p:sp>
+      <p:sp>
+        <p:nvSpPr>
+          <p:cNvPr id="25" name="Slide Number Placeholder 0"/>
+          <p:cNvSpPr>
+            <a:spLocks noGrp="1"/>
+          </p:cNvSpPr>
+          <p:nvPr>
+            <p:ph type="sldNum" sz="quarter" idx="4294967295"/>
+          </p:nvPr>
+        </p:nvSpPr>
+        <p:spPr>
+          <a:xfrm>
+            <a:off x="11094415" y="6419088"/>
+            <a:ext cx="548640" cy="274320"/>
+          </a:xfrm>
+          <a:prstGeom prst="rect">
+            <a:avLst/>
+          </a:prstGeom>
+          <a:extLst>
+            <a:ext uri="{C572A759-6A51-4108-AA02-DFA0A04FC94B}">
+              <ma14:wrappingTextBoxFlag xmlns:ma14="http://schemas.microsoft.com/office/mac/drawingml/2011/main" val="0"/>
+            </a:ext>
+          </a:extLst>
+        </p:spPr>
+        <p:txBody>
+          <a:bodyPr/>
+          <a:lstStyle>
+            <a:lvl1pPr>
+              <a:defRPr sz="1000">
+                <a:solidFill>
+                  <a:schemeClr val="tx2"/>
+                </a:solidFill>
+              </a:defRPr>
+            </a:lvl1pPr>
+          </a:lstStyle>
+          <a:p>
+            <a:pPr algn="r"/>
+            <a:fld id="{F7021451-1387-4CA6-816F-3879F97B5CBC}" type="slidenum">
+              <a:rPr b="0" lang="en-US"/>
+              <a:t>13</a:t>
+            </a:fld>
+            <a:endParaRPr lang="en-US"/>
+          </a:p>
+        </p:txBody>
+      </p:sp>
+    </p:spTree>
+  </p:cSld>
+  <p:clrMapOvr>
+    <a:masterClrMapping/>
+  </p:clrMapOvr>
+</p:sld>
+</file>
+
+<file path=ppt/slides/slide14.xml><?xml version="1.0" encoding="utf-8"?>
+<p:sld xmlns:a="http://schemas.openxmlformats.org/drawingml/2006/main" xmlns:r="http://schemas.openxmlformats.org/officeDocument/2006/relationships" xmlns:p="http://schemas.openxmlformats.org/presentationml/2006/main">
+  <p:cSld name="Slide 14">
+    <p:spTree>
+      <p:nvGrpSpPr>
+        <p:cNvPr id="1" name=""/>
+        <p:cNvGrpSpPr/>
+        <p:nvPr/>
+      </p:nvGrpSpPr>
+      <p:grpSpPr>
+        <a:xfrm>
+          <a:off x="0" y="0"/>
+          <a:ext cx="0" cy="0"/>
+          <a:chOff x="0" y="0"/>
+          <a:chExt cx="0" cy="0"/>
+        </a:xfrm>
+      </p:grpSpPr>
+      <p:sp>
+        <p:nvSpPr>
+          <p:cNvPr id="2" name="Text 0"/>
+          <p:cNvSpPr/>
+          <p:nvPr>
+            <p:ph idx="100" type="title" hasCustomPrompt="1"/>
+          </p:nvPr>
+        </p:nvSpPr>
+        <p:spPr>
+          <a:xfrm>
+            <a:off x="548640" y="347472"/>
+            <a:ext cx="11094415" cy="685800"/>
+          </a:xfrm>
+          <a:prstGeom prst="rect">
+            <a:avLst/>
+          </a:prstGeom>
+          <a:noFill/>
+          <a:ln/>
+        </p:spPr>
+        <p:txBody>
+          <a:bodyPr wrap="square" lIns="0" tIns="0" rIns="0" bIns="0" rtlCol="0" anchor="ctr"/>
+          <a:lstStyle/>
+          <a:p>
+            <a:pPr algn="l" indent="0" marL="0">
+              <a:buNone/>
+            </a:pPr>
+            <a:r>
+              <a:rPr lang="en-US" sz="3200" b="1" dirty="0">
+                <a:solidFill>
+                  <a:schemeClr val="tx1"/>
+                </a:solidFill>
+              </a:rPr>
               <a:t>데모</a:t>
             </a:r>
             <a:endParaRPr lang="en-US" sz="3200" dirty="0"/>
@@ -10042,7 +10656,7 @@
             <a:pPr algn="r"/>
             <a:fld id="{F7021451-1387-4CA6-816F-3879F97B5CBC}" type="slidenum">
               <a:rPr b="0" lang="en-US"/>
-              <a:t>13</a:t>
+              <a:t>14</a:t>
             </a:fld>
             <a:endParaRPr lang="en-US"/>
           </a:p>
@@ -10056,9 +10670,9 @@
 </p:sld>
 </file>
 
-<file path=ppt/slides/slide14.xml><?xml version="1.0" encoding="utf-8"?>
+<file path=ppt/slides/slide15.xml><?xml version="1.0" encoding="utf-8"?>
 <p:sld xmlns:a="http://schemas.openxmlformats.org/drawingml/2006/main" xmlns:r="http://schemas.openxmlformats.org/officeDocument/2006/relationships" xmlns:p="http://schemas.openxmlformats.org/presentationml/2006/main">
-  <p:cSld name="Slide 14">
+  <p:cSld name="Slide 15">
     <p:spTree>
       <p:nvGrpSpPr>
         <p:cNvPr id="1" name=""/>
@@ -14866,19 +15480,19 @@
         </p:nvGraphicFramePr>
         <p:xfrm>
           <a:off x="548640" y="2377440"/>
-          <a:ext cx="5486400" cy="914400"/>
+          <a:ext cx="6035040" cy="914400"/>
         </p:xfrm>
         <a:graphic>
           <a:graphicData uri="http://schemas.openxmlformats.org/drawingml/2006/table">
             <a:tbl>
               <a:tblPr/>
               <a:tblGrid>
-                <a:gridCol w="1783080"/>
-                <a:gridCol w="1234440"/>
-                <a:gridCol w="1234440"/>
-                <a:gridCol w="1234440"/>
+                <a:gridCol w="1920240"/>
+                <a:gridCol w="1371600"/>
+                <a:gridCol w="1371600"/>
+                <a:gridCol w="1371600"/>
               </a:tblGrid>
-              <a:tr h="457200">
+              <a:tr h="566928">
                 <a:tc>
                   <a:txBody>
                     <a:bodyPr/>
@@ -14888,7 +15502,7 @@
                         <a:buNone/>
                       </a:pPr>
                       <a:r>
-                        <a:rPr lang="en-US" sz="1400" b="1" dirty="0">
+                        <a:rPr lang="en-US" sz="1600" b="1" dirty="0">
                           <a:solidFill>
                             <a:schemeClr val="tx2"/>
                           </a:solidFill>
@@ -14898,7 +15512,7 @@
                         </a:rPr>
                         <a:t>정답 ↓  예측 →</a:t>
                       </a:r>
-                      <a:endParaRPr lang="en-US" sz="1400" dirty="0">
+                      <a:endParaRPr lang="en-US" sz="1600" dirty="0">
                         <a:latin typeface="Malgun Gothic" charset="0"/>
                         <a:ea typeface="Malgun Gothic" charset="0"/>
                         <a:cs typeface="Malgun Gothic" charset="0"/>
@@ -14956,7 +15570,7 @@
                         <a:buNone/>
                       </a:pPr>
                       <a:r>
-                        <a:rPr lang="en-US" sz="1400" b="1" dirty="0">
+                        <a:rPr lang="en-US" sz="1600" b="1" dirty="0">
                           <a:solidFill>
                             <a:schemeClr val="tx2"/>
                           </a:solidFill>
@@ -14966,7 +15580,7 @@
                         </a:rPr>
                         <a:t>crack</a:t>
                       </a:r>
-                      <a:endParaRPr lang="en-US" sz="1400" dirty="0">
+                      <a:endParaRPr lang="en-US" sz="1600" dirty="0">
                         <a:latin typeface="Malgun Gothic" charset="0"/>
                         <a:ea typeface="Malgun Gothic" charset="0"/>
                         <a:cs typeface="Malgun Gothic" charset="0"/>
@@ -15024,7 +15638,7 @@
                         <a:buNone/>
                       </a:pPr>
                       <a:r>
-                        <a:rPr lang="en-US" sz="1400" b="1" dirty="0">
+                        <a:rPr lang="en-US" sz="1600" b="1" dirty="0">
                           <a:solidFill>
                             <a:schemeClr val="tx2"/>
                           </a:solidFill>
@@ -15034,7 +15648,7 @@
                         </a:rPr>
                         <a:t>scratch</a:t>
                       </a:r>
-                      <a:endParaRPr lang="en-US" sz="1400" dirty="0">
+                      <a:endParaRPr lang="en-US" sz="1600" dirty="0">
                         <a:latin typeface="Malgun Gothic" charset="0"/>
                         <a:ea typeface="Malgun Gothic" charset="0"/>
                         <a:cs typeface="Malgun Gothic" charset="0"/>
@@ -15092,7 +15706,7 @@
                         <a:buNone/>
                       </a:pPr>
                       <a:r>
-                        <a:rPr lang="en-US" sz="1400" b="1" dirty="0">
+                        <a:rPr lang="en-US" sz="1600" b="1" dirty="0">
                           <a:solidFill>
                             <a:schemeClr val="tx2"/>
                           </a:solidFill>
@@ -15102,7 +15716,7 @@
                         </a:rPr>
                         <a:t>놓침</a:t>
                       </a:r>
-                      <a:endParaRPr lang="en-US" sz="1400" dirty="0">
+                      <a:endParaRPr lang="en-US" sz="1600" dirty="0">
                         <a:latin typeface="Malgun Gothic" charset="0"/>
                         <a:ea typeface="Malgun Gothic" charset="0"/>
                         <a:cs typeface="Malgun Gothic" charset="0"/>
@@ -15152,7 +15766,7 @@
                   </a:tcPr>
                 </a:tc>
               </a:tr>
-              <a:tr h="457200">
+              <a:tr h="566928">
                 <a:tc>
                   <a:txBody>
                     <a:bodyPr/>
@@ -15162,7 +15776,7 @@
                         <a:buNone/>
                       </a:pPr>
                       <a:r>
-                        <a:rPr lang="en-US" sz="1400" b="1" dirty="0">
+                        <a:rPr lang="en-US" sz="1600" b="1" dirty="0">
                           <a:solidFill>
                             <a:schemeClr val="tx1"/>
                           </a:solidFill>
@@ -15172,7 +15786,7 @@
                         </a:rPr>
                         <a:t>crack</a:t>
                       </a:r>
-                      <a:endParaRPr lang="en-US" sz="1400" dirty="0">
+                      <a:endParaRPr lang="en-US" sz="1600" dirty="0">
                         <a:latin typeface="Malgun Gothic" charset="0"/>
                         <a:ea typeface="Malgun Gothic" charset="0"/>
                         <a:cs typeface="Malgun Gothic" charset="0"/>
@@ -15230,7 +15844,7 @@
                         <a:buNone/>
                       </a:pPr>
                       <a:r>
-                        <a:rPr lang="en-US" sz="1400" b="1" dirty="0">
+                        <a:rPr lang="en-US" sz="1600" b="1" dirty="0">
                           <a:solidFill>
                             <a:schemeClr val="accent1"/>
                           </a:solidFill>
@@ -15240,7 +15854,7 @@
                         </a:rPr>
                         <a:t>45</a:t>
                       </a:r>
-                      <a:endParaRPr lang="en-US" sz="1400" dirty="0">
+                      <a:endParaRPr lang="en-US" sz="1600" dirty="0">
                         <a:latin typeface="Malgun Gothic" charset="0"/>
                         <a:ea typeface="Malgun Gothic" charset="0"/>
                         <a:cs typeface="Malgun Gothic" charset="0"/>
@@ -15298,7 +15912,7 @@
                         <a:buNone/>
                       </a:pPr>
                       <a:r>
-                        <a:rPr lang="en-US" sz="1400" dirty="0">
+                        <a:rPr lang="en-US" sz="1600" dirty="0">
                           <a:solidFill>
                             <a:schemeClr val="tx1"/>
                           </a:solidFill>
@@ -15308,7 +15922,7 @@
                         </a:rPr>
                         <a:t>0</a:t>
                       </a:r>
-                      <a:endParaRPr lang="en-US" sz="1400" dirty="0">
+                      <a:endParaRPr lang="en-US" sz="1600" dirty="0">
                         <a:latin typeface="Malgun Gothic" charset="0"/>
                         <a:ea typeface="Malgun Gothic" charset="0"/>
                         <a:cs typeface="Malgun Gothic" charset="0"/>
@@ -15366,7 +15980,7 @@
                         <a:buNone/>
                       </a:pPr>
                       <a:r>
-                        <a:rPr lang="en-US" sz="1400" dirty="0">
+                        <a:rPr lang="en-US" sz="1600" dirty="0">
                           <a:solidFill>
                             <a:schemeClr val="tx1"/>
                           </a:solidFill>
@@ -15376,7 +15990,7 @@
                         </a:rPr>
                         <a:t>0</a:t>
                       </a:r>
-                      <a:endParaRPr lang="en-US" sz="1400" dirty="0">
+                      <a:endParaRPr lang="en-US" sz="1600" dirty="0">
                         <a:latin typeface="Malgun Gothic" charset="0"/>
                         <a:ea typeface="Malgun Gothic" charset="0"/>
                         <a:cs typeface="Malgun Gothic" charset="0"/>
@@ -15426,7 +16040,7 @@
                   </a:tcPr>
                 </a:tc>
               </a:tr>
-              <a:tr h="457200">
+              <a:tr h="566928">
                 <a:tc>
                   <a:txBody>
                     <a:bodyPr/>
@@ -15436,7 +16050,7 @@
                         <a:buNone/>
                       </a:pPr>
                       <a:r>
-                        <a:rPr lang="en-US" sz="1400" b="1" dirty="0">
+                        <a:rPr lang="en-US" sz="1600" b="1" dirty="0">
                           <a:solidFill>
                             <a:schemeClr val="tx1"/>
                           </a:solidFill>
@@ -15446,7 +16060,7 @@
                         </a:rPr>
                         <a:t>scratch</a:t>
                       </a:r>
-                      <a:endParaRPr lang="en-US" sz="1400" dirty="0">
+                      <a:endParaRPr lang="en-US" sz="1600" dirty="0">
                         <a:latin typeface="Malgun Gothic" charset="0"/>
                         <a:ea typeface="Malgun Gothic" charset="0"/>
                         <a:cs typeface="Malgun Gothic" charset="0"/>
@@ -15504,7 +16118,7 @@
                         <a:buNone/>
                       </a:pPr>
                       <a:r>
-                        <a:rPr lang="en-US" sz="1400" dirty="0">
+                        <a:rPr lang="en-US" sz="1600" dirty="0">
                           <a:solidFill>
                             <a:schemeClr val="tx1"/>
                           </a:solidFill>
@@ -15514,7 +16128,7 @@
                         </a:rPr>
                         <a:t>0</a:t>
                       </a:r>
-                      <a:endParaRPr lang="en-US" sz="1400" dirty="0">
+                      <a:endParaRPr lang="en-US" sz="1600" dirty="0">
                         <a:latin typeface="Malgun Gothic" charset="0"/>
                         <a:ea typeface="Malgun Gothic" charset="0"/>
                         <a:cs typeface="Malgun Gothic" charset="0"/>
@@ -15572,7 +16186,7 @@
                         <a:buNone/>
                       </a:pPr>
                       <a:r>
-                        <a:rPr lang="en-US" sz="1400" b="1" dirty="0">
+                        <a:rPr lang="en-US" sz="1600" b="1" dirty="0">
                           <a:solidFill>
                             <a:schemeClr val="accent1"/>
                           </a:solidFill>
@@ -15582,7 +16196,7 @@
                         </a:rPr>
                         <a:t>59</a:t>
                       </a:r>
-                      <a:endParaRPr lang="en-US" sz="1400" dirty="0">
+                      <a:endParaRPr lang="en-US" sz="1600" dirty="0">
                         <a:latin typeface="Malgun Gothic" charset="0"/>
                         <a:ea typeface="Malgun Gothic" charset="0"/>
                         <a:cs typeface="Malgun Gothic" charset="0"/>
@@ -15640,7 +16254,7 @@
                         <a:buNone/>
                       </a:pPr>
                       <a:r>
-                        <a:rPr lang="en-US" sz="1400" b="1" dirty="0">
+                        <a:rPr lang="en-US" sz="1600" b="1" dirty="0">
                           <a:solidFill>
                             <a:schemeClr val="accent2"/>
                           </a:solidFill>
@@ -15650,7 +16264,7 @@
                         </a:rPr>
                         <a:t>19</a:t>
                       </a:r>
-                      <a:endParaRPr lang="en-US" sz="1400" dirty="0">
+                      <a:endParaRPr lang="en-US" sz="1600" dirty="0">
                         <a:latin typeface="Malgun Gothic" charset="0"/>
                         <a:ea typeface="Malgun Gothic" charset="0"/>
                         <a:cs typeface="Malgun Gothic" charset="0"/>
@@ -15700,7 +16314,7 @@
                   </a:tcPr>
                 </a:tc>
               </a:tr>
-              <a:tr h="457200">
+              <a:tr h="566928">
                 <a:tc>
                   <a:txBody>
                     <a:bodyPr/>
@@ -15710,7 +16324,7 @@
                         <a:buNone/>
                       </a:pPr>
                       <a:r>
-                        <a:rPr lang="en-US" sz="1400" b="1" dirty="0">
+                        <a:rPr lang="en-US" sz="1600" b="1" dirty="0">
                           <a:solidFill>
                             <a:schemeClr val="tx1"/>
                           </a:solidFill>
@@ -15720,7 +16334,7 @@
                         </a:rPr>
                         <a:t>배경 (오검출)</a:t>
                       </a:r>
-                      <a:endParaRPr lang="en-US" sz="1400" dirty="0">
+                      <a:endParaRPr lang="en-US" sz="1600" dirty="0">
                         <a:latin typeface="Malgun Gothic" charset="0"/>
                         <a:ea typeface="Malgun Gothic" charset="0"/>
                         <a:cs typeface="Malgun Gothic" charset="0"/>
@@ -15778,7 +16392,7 @@
                         <a:buNone/>
                       </a:pPr>
                       <a:r>
-                        <a:rPr lang="en-US" sz="1400" dirty="0">
+                        <a:rPr lang="en-US" sz="1600" dirty="0">
                           <a:solidFill>
                             <a:schemeClr val="accent3"/>
                           </a:solidFill>
@@ -15788,7 +16402,7 @@
                         </a:rPr>
                         <a:t>3</a:t>
                       </a:r>
-                      <a:endParaRPr lang="en-US" sz="1400" dirty="0">
+                      <a:endParaRPr lang="en-US" sz="1600" dirty="0">
                         <a:latin typeface="Malgun Gothic" charset="0"/>
                         <a:ea typeface="Malgun Gothic" charset="0"/>
                         <a:cs typeface="Malgun Gothic" charset="0"/>
@@ -15846,7 +16460,7 @@
                         <a:buNone/>
                       </a:pPr>
                       <a:r>
-                        <a:rPr lang="en-US" sz="1400" b="1" dirty="0">
+                        <a:rPr lang="en-US" sz="1600" b="1" dirty="0">
                           <a:solidFill>
                             <a:schemeClr val="accent3"/>
                           </a:solidFill>
@@ -15856,7 +16470,7 @@
                         </a:rPr>
                         <a:t>13</a:t>
                       </a:r>
-                      <a:endParaRPr lang="en-US" sz="1400" dirty="0">
+                      <a:endParaRPr lang="en-US" sz="1600" dirty="0">
                         <a:latin typeface="Malgun Gothic" charset="0"/>
                         <a:ea typeface="Malgun Gothic" charset="0"/>
                         <a:cs typeface="Malgun Gothic" charset="0"/>
@@ -15914,7 +16528,7 @@
                         <a:buNone/>
                       </a:pPr>
                       <a:r>
-                        <a:rPr lang="en-US" sz="1400" dirty="0">
+                        <a:rPr lang="en-US" sz="1600" dirty="0">
                           <a:solidFill>
                             <a:schemeClr val="tx2"/>
                           </a:solidFill>
@@ -15924,7 +16538,7 @@
                         </a:rPr>
                         <a:t>–</a:t>
                       </a:r>
-                      <a:endParaRPr lang="en-US" sz="1400" dirty="0">
+                      <a:endParaRPr lang="en-US" sz="1600" dirty="0">
                         <a:latin typeface="Malgun Gothic" charset="0"/>
                         <a:ea typeface="Malgun Gothic" charset="0"/>
                         <a:cs typeface="Malgun Gothic" charset="0"/>
@@ -15980,18 +16594,83 @@
       </p:graphicFrame>
       <p:sp>
         <p:nvSpPr>
-          <p:cNvPr id="11" name="bg-recall-card"/>
+          <p:cNvPr id="11" name="all-models-bg"/>
           <p:cNvSpPr/>
           <p:nvPr/>
         </p:nvSpPr>
         <p:spPr>
           <a:xfrm>
-            <a:off x="548640" y="4434840"/>
-            <a:ext cx="5486400" cy="1783080"/>
+            <a:off x="548640" y="4983480"/>
+            <a:ext cx="11094415" cy="457200"/>
           </a:xfrm>
           <a:prstGeom prst="roundRect">
             <a:avLst>
-              <a:gd name="adj" fmla="val 4103"/>
+              <a:gd name="adj" fmla="val 10000"/>
+            </a:avLst>
+          </a:prstGeom>
+          <a:solidFill>
+            <a:schemeClr val="tx2">
+              <a:alpha val="20000"/>
+            </a:schemeClr>
+          </a:solidFill>
+          <a:ln w="12700">
+            <a:solidFill>
+              <a:schemeClr val="tx2"/>
+            </a:solidFill>
+            <a:prstDash val="solid"/>
+          </a:ln>
+        </p:spPr>
+      </p:sp>
+      <p:sp>
+        <p:nvSpPr>
+          <p:cNvPr id="12" name="all-models"/>
+          <p:cNvSpPr txBox="1"/>
+          <p:nvPr/>
+        </p:nvSpPr>
+        <p:spPr>
+          <a:xfrm>
+            <a:off x="548640" y="4983480"/>
+            <a:ext cx="11094415" cy="457200"/>
+          </a:xfrm>
+          <a:prstGeom prst="rect">
+            <a:avLst/>
+          </a:prstGeom>
+          <a:noFill/>
+          <a:ln/>
+        </p:spPr>
+        <p:txBody>
+          <a:bodyPr wrap="square" lIns="0" tIns="0" rIns="0" bIns="0" rtlCol="0" anchor="ctr"/>
+          <a:lstStyle/>
+          <a:p>
+            <a:pPr algn="ctr" indent="0" marL="0">
+              <a:buNone/>
+            </a:pPr>
+            <a:r>
+              <a:rPr lang="en-US" sz="1300" b="1" dirty="0">
+                <a:solidFill>
+                  <a:schemeClr val="tx2"/>
+                </a:solidFill>
+              </a:rPr>
+              <a:t>세 모델 모두 같은 패턴 · 놓친 scratch: ATSS 19 · YOLOX-S 28 · Tiny 30</a:t>
+            </a:r>
+            <a:endParaRPr lang="en-US" sz="1300" dirty="0"/>
+          </a:p>
+        </p:txBody>
+      </p:sp>
+      <p:sp>
+        <p:nvSpPr>
+          <p:cNvPr id="13" name="bg-recall-card"/>
+          <p:cNvSpPr/>
+          <p:nvPr/>
+        </p:nvSpPr>
+        <p:spPr>
+          <a:xfrm>
+            <a:off x="6812280" y="2377440"/>
+            <a:ext cx="4828032" cy="2267712"/>
+          </a:xfrm>
+          <a:prstGeom prst="roundRect">
+            <a:avLst>
+              <a:gd name="adj" fmla="val 3226"/>
             </a:avLst>
           </a:prstGeom>
           <a:solidFill>
@@ -16002,14 +16681,14 @@
       </p:sp>
       <p:sp>
         <p:nvSpPr>
-          <p:cNvPr id="12" name="bgr-h"/>
+          <p:cNvPr id="14" name="bgr-h"/>
           <p:cNvSpPr txBox="1"/>
           <p:nvPr/>
         </p:nvSpPr>
         <p:spPr>
           <a:xfrm>
-            <a:off x="822960" y="4544568"/>
-            <a:ext cx="4937760" cy="292608"/>
+            <a:off x="7086600" y="2514600"/>
+            <a:ext cx="4297680" cy="320040"/>
           </a:xfrm>
           <a:prstGeom prst="rect">
             <a:avLst/>
@@ -16025,27 +16704,27 @@
               <a:buNone/>
             </a:pPr>
             <a:r>
-              <a:rPr lang="en-US" sz="1400" b="1" dirty="0">
+              <a:rPr lang="en-US" sz="1600" b="1" dirty="0">
                 <a:solidFill>
                   <a:schemeClr val="tx1"/>
                 </a:solidFill>
               </a:rPr>
               <a:t>배경별 재현율</a:t>
             </a:r>
-            <a:endParaRPr lang="en-US" sz="1400" dirty="0"/>
-          </a:p>
-        </p:txBody>
-      </p:sp>
-      <p:sp>
-        <p:nvSpPr>
-          <p:cNvPr id="13" name="bgr-l-0"/>
+            <a:endParaRPr lang="en-US" sz="1600" dirty="0"/>
+          </a:p>
+        </p:txBody>
+      </p:sp>
+      <p:sp>
+        <p:nvSpPr>
+          <p:cNvPr id="15" name="bgr-l-0"/>
           <p:cNvSpPr txBox="1"/>
           <p:nvPr/>
         </p:nvSpPr>
         <p:spPr>
           <a:xfrm>
-            <a:off x="822960" y="4937760"/>
-            <a:ext cx="1188720" cy="292608"/>
+            <a:off x="7086600" y="3017520"/>
+            <a:ext cx="1188720" cy="329184"/>
           </a:xfrm>
           <a:prstGeom prst="rect">
             <a:avLst/>
@@ -16061,27 +16740,27 @@
               <a:buNone/>
             </a:pPr>
             <a:r>
-              <a:rPr lang="en-US" sz="1300" dirty="0">
+              <a:rPr lang="en-US" sz="1400" dirty="0">
                 <a:solidFill>
                   <a:schemeClr val="tx2"/>
                 </a:solidFill>
               </a:rPr>
               <a:t>초록 매트</a:t>
             </a:r>
-            <a:endParaRPr lang="en-US" sz="1300" dirty="0"/>
-          </a:p>
-        </p:txBody>
-      </p:sp>
-      <p:sp>
-        <p:nvSpPr>
-          <p:cNvPr id="14" name="bgr-track-0"/>
+            <a:endParaRPr lang="en-US" sz="1400" dirty="0"/>
+          </a:p>
+        </p:txBody>
+      </p:sp>
+      <p:sp>
+        <p:nvSpPr>
+          <p:cNvPr id="16" name="bgr-track-0"/>
           <p:cNvSpPr/>
           <p:nvPr/>
         </p:nvSpPr>
         <p:spPr>
           <a:xfrm>
-            <a:off x="2103120" y="5010912"/>
-            <a:ext cx="3017520" cy="164592"/>
+            <a:off x="8321040" y="3090672"/>
+            <a:ext cx="2468880" cy="182880"/>
           </a:xfrm>
           <a:prstGeom prst="rect">
             <a:avLst/>
@@ -16094,14 +16773,14 @@
       </p:sp>
       <p:sp>
         <p:nvSpPr>
-          <p:cNvPr id="15" name="bgr-fill-0"/>
+          <p:cNvPr id="17" name="bgr-fill-0"/>
           <p:cNvSpPr/>
           <p:nvPr/>
         </p:nvSpPr>
         <p:spPr>
           <a:xfrm>
-            <a:off x="2103120" y="5010912"/>
-            <a:ext cx="2172614" cy="164592"/>
+            <a:off x="8321040" y="3090672"/>
+            <a:ext cx="1777594" cy="182880"/>
           </a:xfrm>
           <a:prstGeom prst="rect">
             <a:avLst/>
@@ -16114,14 +16793,14 @@
       </p:sp>
       <p:sp>
         <p:nvSpPr>
-          <p:cNvPr id="16" name="bgr-v-0"/>
+          <p:cNvPr id="18" name="bgr-v-0"/>
           <p:cNvSpPr txBox="1"/>
           <p:nvPr/>
         </p:nvSpPr>
         <p:spPr>
           <a:xfrm>
-            <a:off x="5212080" y="4937760"/>
-            <a:ext cx="548640" cy="292608"/>
+            <a:off x="10835640" y="3017520"/>
+            <a:ext cx="594360" cy="329184"/>
           </a:xfrm>
           <a:prstGeom prst="rect">
             <a:avLst/>
@@ -16150,14 +16829,14 @@
       </p:sp>
       <p:sp>
         <p:nvSpPr>
-          <p:cNvPr id="17" name="bgr-l-1"/>
+          <p:cNvPr id="19" name="bgr-l-1"/>
           <p:cNvSpPr txBox="1"/>
           <p:nvPr/>
         </p:nvSpPr>
         <p:spPr>
           <a:xfrm>
-            <a:off x="822960" y="5321808"/>
-            <a:ext cx="1188720" cy="292608"/>
+            <a:off x="7086600" y="3493008"/>
+            <a:ext cx="1188720" cy="329184"/>
           </a:xfrm>
           <a:prstGeom prst="rect">
             <a:avLst/>
@@ -16173,27 +16852,27 @@
               <a:buNone/>
             </a:pPr>
             <a:r>
-              <a:rPr lang="en-US" sz="1300" dirty="0">
+              <a:rPr lang="en-US" sz="1400" dirty="0">
                 <a:solidFill>
                   <a:schemeClr val="tx2"/>
                 </a:solidFill>
               </a:rPr>
               <a:t>회색</a:t>
             </a:r>
-            <a:endParaRPr lang="en-US" sz="1300" dirty="0"/>
-          </a:p>
-        </p:txBody>
-      </p:sp>
-      <p:sp>
-        <p:nvSpPr>
-          <p:cNvPr id="18" name="bgr-track-1"/>
+            <a:endParaRPr lang="en-US" sz="1400" dirty="0"/>
+          </a:p>
+        </p:txBody>
+      </p:sp>
+      <p:sp>
+        <p:nvSpPr>
+          <p:cNvPr id="20" name="bgr-track-1"/>
           <p:cNvSpPr/>
           <p:nvPr/>
         </p:nvSpPr>
         <p:spPr>
           <a:xfrm>
-            <a:off x="2103120" y="5394960"/>
-            <a:ext cx="3017520" cy="164592"/>
+            <a:off x="8321040" y="3566160"/>
+            <a:ext cx="2468880" cy="182880"/>
           </a:xfrm>
           <a:prstGeom prst="rect">
             <a:avLst/>
@@ -16206,14 +16885,14 @@
       </p:sp>
       <p:sp>
         <p:nvSpPr>
-          <p:cNvPr id="19" name="bgr-fill-1"/>
+          <p:cNvPr id="21" name="bgr-fill-1"/>
           <p:cNvSpPr/>
           <p:nvPr/>
         </p:nvSpPr>
         <p:spPr>
           <a:xfrm>
-            <a:off x="2103120" y="5394960"/>
-            <a:ext cx="2263140" cy="164592"/>
+            <a:off x="8321040" y="3566160"/>
+            <a:ext cx="1851660" cy="182880"/>
           </a:xfrm>
           <a:prstGeom prst="rect">
             <a:avLst/>
@@ -16226,14 +16905,14 @@
       </p:sp>
       <p:sp>
         <p:nvSpPr>
-          <p:cNvPr id="20" name="bgr-v-1"/>
+          <p:cNvPr id="22" name="bgr-v-1"/>
           <p:cNvSpPr txBox="1"/>
           <p:nvPr/>
         </p:nvSpPr>
         <p:spPr>
           <a:xfrm>
-            <a:off x="5212080" y="5321808"/>
-            <a:ext cx="548640" cy="292608"/>
+            <a:off x="10835640" y="3493008"/>
+            <a:ext cx="594360" cy="329184"/>
           </a:xfrm>
           <a:prstGeom prst="rect">
             <a:avLst/>
@@ -16262,14 +16941,14 @@
       </p:sp>
       <p:sp>
         <p:nvSpPr>
-          <p:cNvPr id="21" name="bgr-l-2"/>
+          <p:cNvPr id="23" name="bgr-l-2"/>
           <p:cNvSpPr txBox="1"/>
           <p:nvPr/>
         </p:nvSpPr>
         <p:spPr>
           <a:xfrm>
-            <a:off x="822960" y="5705856"/>
-            <a:ext cx="1188720" cy="292608"/>
+            <a:off x="7086600" y="3968496"/>
+            <a:ext cx="1188720" cy="329184"/>
           </a:xfrm>
           <a:prstGeom prst="rect">
             <a:avLst/>
@@ -16285,27 +16964,27 @@
               <a:buNone/>
             </a:pPr>
             <a:r>
-              <a:rPr lang="en-US" sz="1300" dirty="0">
+              <a:rPr lang="en-US" sz="1400" dirty="0">
                 <a:solidFill>
                   <a:schemeClr val="tx2"/>
                 </a:solidFill>
               </a:rPr>
               <a:t>나무 탁상</a:t>
             </a:r>
-            <a:endParaRPr lang="en-US" sz="1300" dirty="0"/>
-          </a:p>
-        </p:txBody>
-      </p:sp>
-      <p:sp>
-        <p:nvSpPr>
-          <p:cNvPr id="22" name="bgr-track-2"/>
+            <a:endParaRPr lang="en-US" sz="1400" dirty="0"/>
+          </a:p>
+        </p:txBody>
+      </p:sp>
+      <p:sp>
+        <p:nvSpPr>
+          <p:cNvPr id="24" name="bgr-track-2"/>
           <p:cNvSpPr/>
           <p:nvPr/>
         </p:nvSpPr>
         <p:spPr>
           <a:xfrm>
-            <a:off x="2103120" y="5779008"/>
-            <a:ext cx="3017520" cy="164592"/>
+            <a:off x="8321040" y="4041648"/>
+            <a:ext cx="2468880" cy="182880"/>
           </a:xfrm>
           <a:prstGeom prst="rect">
             <a:avLst/>
@@ -16318,14 +16997,14 @@
       </p:sp>
       <p:sp>
         <p:nvSpPr>
-          <p:cNvPr id="23" name="bgr-fill-2"/>
+          <p:cNvPr id="25" name="bgr-fill-2"/>
           <p:cNvSpPr/>
           <p:nvPr/>
         </p:nvSpPr>
         <p:spPr>
           <a:xfrm>
-            <a:off x="2103120" y="5779008"/>
-            <a:ext cx="995782" cy="164592"/>
+            <a:off x="8321040" y="4041648"/>
+            <a:ext cx="814730" cy="182880"/>
           </a:xfrm>
           <a:prstGeom prst="rect">
             <a:avLst/>
@@ -16338,14 +17017,14 @@
       </p:sp>
       <p:sp>
         <p:nvSpPr>
-          <p:cNvPr id="24" name="bgr-v-2"/>
+          <p:cNvPr id="26" name="bgr-v-2"/>
           <p:cNvSpPr txBox="1"/>
           <p:nvPr/>
         </p:nvSpPr>
         <p:spPr>
           <a:xfrm>
-            <a:off x="5212080" y="5705856"/>
-            <a:ext cx="548640" cy="292608"/>
+            <a:off x="10835640" y="3968496"/>
+            <a:ext cx="594360" cy="329184"/>
           </a:xfrm>
           <a:prstGeom prst="rect">
             <a:avLst/>
@@ -16367,275 +17046,6 @@
                 </a:solidFill>
               </a:rPr>
               <a:t>33%</a:t>
-            </a:r>
-            <a:endParaRPr lang="en-US" sz="1300" dirty="0"/>
-          </a:p>
-        </p:txBody>
-      </p:sp>
-      <p:pic>
-        <p:nvPicPr>
-          <p:cNvPr id="25" name="heat-0" descr="C:\Users\user\_se4nchoi\batteryvision\docs\submission\build\img\heat_atss.jpg">    </p:cNvPr>
-          <p:cNvPicPr>
-            <a:picLocks noChangeAspect="1"/>
-          </p:cNvPicPr>
-          <p:nvPr/>
-        </p:nvPicPr>
-        <p:blipFill>
-          <a:blip r:embed="rId1"/>
-          <a:stretch>
-            <a:fillRect/>
-          </a:stretch>
-        </p:blipFill>
-        <p:spPr>
-          <a:xfrm>
-            <a:off x="6263640" y="2377440"/>
-            <a:ext cx="2633472" cy="2633472"/>
-          </a:xfrm>
-          <a:prstGeom prst="rect">
-            <a:avLst/>
-          </a:prstGeom>
-        </p:spPr>
-      </p:pic>
-      <p:sp>
-        <p:nvSpPr>
-          <p:cNvPr id="26" name="heat-dot-0"/>
-          <p:cNvSpPr/>
-          <p:nvPr/>
-        </p:nvSpPr>
-        <p:spPr>
-          <a:xfrm>
-            <a:off x="6263640" y="5184648"/>
-            <a:ext cx="146304" cy="146304"/>
-          </a:xfrm>
-          <a:prstGeom prst="ellipse">
-            <a:avLst/>
-          </a:prstGeom>
-          <a:solidFill>
-            <a:schemeClr val="accent4"/>
-          </a:solidFill>
-          <a:ln/>
-        </p:spPr>
-      </p:sp>
-      <p:sp>
-        <p:nvSpPr>
-          <p:cNvPr id="27" name="heat-l-0"/>
-          <p:cNvSpPr txBox="1"/>
-          <p:nvPr/>
-        </p:nvSpPr>
-        <p:spPr>
-          <a:xfrm>
-            <a:off x="6501384" y="5111496"/>
-            <a:ext cx="2377440" cy="292608"/>
-          </a:xfrm>
-          <a:prstGeom prst="rect">
-            <a:avLst/>
-          </a:prstGeom>
-          <a:noFill/>
-          <a:ln/>
-        </p:spPr>
-        <p:txBody>
-          <a:bodyPr wrap="square" lIns="0" tIns="0" rIns="0" bIns="0" rtlCol="0" anchor="t"/>
-          <a:lstStyle/>
-          <a:p>
-            <a:pPr indent="0" marL="0">
-              <a:buNone/>
-            </a:pPr>
-            <a:r>
-              <a:rPr lang="en-US" sz="1400" b="1" dirty="0">
-                <a:solidFill>
-                  <a:schemeClr val="tx1"/>
-                </a:solidFill>
-              </a:rPr>
-              <a:t>ATSS  </a:t>
-            </a:r>
-            <a:pPr indent="0" marL="0">
-              <a:buNone/>
-            </a:pPr>
-            <a:r>
-              <a:rPr lang="en-US" sz="1400" dirty="0">
-                <a:solidFill>
-                  <a:schemeClr val="tx2"/>
-                </a:solidFill>
-              </a:rPr>
-              <a:t>위치 </a:t>
-            </a:r>
-            <a:pPr indent="0" marL="0">
-              <a:buNone/>
-            </a:pPr>
-            <a:r>
-              <a:rPr lang="en-US" sz="1400" b="1" dirty="0">
-                <a:solidFill>
-                  <a:schemeClr val="accent4"/>
-                </a:solidFill>
-              </a:rPr>
-              <a:t>48%</a:t>
-            </a:r>
-            <a:endParaRPr lang="en-US" sz="1400" dirty="0"/>
-          </a:p>
-        </p:txBody>
-      </p:sp>
-      <p:pic>
-        <p:nvPicPr>
-          <p:cNvPr id="28" name="heat-1" descr="C:\Users\user\_se4nchoi\batteryvision\docs\submission\build\img\heat_yolox.jpg">    </p:cNvPr>
-          <p:cNvPicPr>
-            <a:picLocks noChangeAspect="1"/>
-          </p:cNvPicPr>
-          <p:nvPr/>
-        </p:nvPicPr>
-        <p:blipFill>
-          <a:blip r:embed="rId2"/>
-          <a:stretch>
-            <a:fillRect/>
-          </a:stretch>
-        </p:blipFill>
-        <p:spPr>
-          <a:xfrm>
-            <a:off x="9006840" y="2377440"/>
-            <a:ext cx="2633472" cy="2633472"/>
-          </a:xfrm>
-          <a:prstGeom prst="rect">
-            <a:avLst/>
-          </a:prstGeom>
-        </p:spPr>
-      </p:pic>
-      <p:sp>
-        <p:nvSpPr>
-          <p:cNvPr id="29" name="heat-dot-1"/>
-          <p:cNvSpPr/>
-          <p:nvPr/>
-        </p:nvSpPr>
-        <p:spPr>
-          <a:xfrm>
-            <a:off x="9006840" y="5184648"/>
-            <a:ext cx="146304" cy="146304"/>
-          </a:xfrm>
-          <a:prstGeom prst="ellipse">
-            <a:avLst/>
-          </a:prstGeom>
-          <a:solidFill>
-            <a:schemeClr val="accent5"/>
-          </a:solidFill>
-          <a:ln/>
-        </p:spPr>
-      </p:sp>
-      <p:sp>
-        <p:nvSpPr>
-          <p:cNvPr id="30" name="heat-l-1"/>
-          <p:cNvSpPr txBox="1"/>
-          <p:nvPr/>
-        </p:nvSpPr>
-        <p:spPr>
-          <a:xfrm>
-            <a:off x="9244584" y="5111496"/>
-            <a:ext cx="2377440" cy="292608"/>
-          </a:xfrm>
-          <a:prstGeom prst="rect">
-            <a:avLst/>
-          </a:prstGeom>
-          <a:noFill/>
-          <a:ln/>
-        </p:spPr>
-        <p:txBody>
-          <a:bodyPr wrap="square" lIns="0" tIns="0" rIns="0" bIns="0" rtlCol="0" anchor="t"/>
-          <a:lstStyle/>
-          <a:p>
-            <a:pPr indent="0" marL="0">
-              <a:buNone/>
-            </a:pPr>
-            <a:r>
-              <a:rPr lang="en-US" sz="1400" b="1" dirty="0">
-                <a:solidFill>
-                  <a:schemeClr val="tx1"/>
-                </a:solidFill>
-              </a:rPr>
-              <a:t>YOLOX-S  </a:t>
-            </a:r>
-            <a:pPr indent="0" marL="0">
-              <a:buNone/>
-            </a:pPr>
-            <a:r>
-              <a:rPr lang="en-US" sz="1400" dirty="0">
-                <a:solidFill>
-                  <a:schemeClr val="tx2"/>
-                </a:solidFill>
-              </a:rPr>
-              <a:t>위치 </a:t>
-            </a:r>
-            <a:pPr indent="0" marL="0">
-              <a:buNone/>
-            </a:pPr>
-            <a:r>
-              <a:rPr lang="en-US" sz="1400" b="1" dirty="0">
-                <a:solidFill>
-                  <a:schemeClr val="accent5"/>
-                </a:solidFill>
-              </a:rPr>
-              <a:t>98%</a:t>
-            </a:r>
-            <a:endParaRPr lang="en-US" sz="1400" dirty="0"/>
-          </a:p>
-        </p:txBody>
-      </p:sp>
-      <p:sp>
-        <p:nvSpPr>
-          <p:cNvPr id="31" name="heat-vs-acc-bg"/>
-          <p:cNvSpPr/>
-          <p:nvPr/>
-        </p:nvSpPr>
-        <p:spPr>
-          <a:xfrm>
-            <a:off x="6263640" y="5532120"/>
-            <a:ext cx="5376672" cy="457200"/>
-          </a:xfrm>
-          <a:prstGeom prst="roundRect">
-            <a:avLst>
-              <a:gd name="adj" fmla="val 10000"/>
-            </a:avLst>
-          </a:prstGeom>
-          <a:solidFill>
-            <a:schemeClr val="accent3">
-              <a:alpha val="20000"/>
-            </a:schemeClr>
-          </a:solidFill>
-          <a:ln w="12700">
-            <a:solidFill>
-              <a:schemeClr val="accent3"/>
-            </a:solidFill>
-            <a:prstDash val="solid"/>
-          </a:ln>
-        </p:spPr>
-      </p:sp>
-      <p:sp>
-        <p:nvSpPr>
-          <p:cNvPr id="32" name="heat-vs-acc"/>
-          <p:cNvSpPr txBox="1"/>
-          <p:nvPr/>
-        </p:nvSpPr>
-        <p:spPr>
-          <a:xfrm>
-            <a:off x="6263640" y="5532120"/>
-            <a:ext cx="5376672" cy="457200"/>
-          </a:xfrm>
-          <a:prstGeom prst="rect">
-            <a:avLst/>
-          </a:prstGeom>
-          <a:noFill/>
-          <a:ln/>
-        </p:spPr>
-        <p:txBody>
-          <a:bodyPr wrap="square" lIns="0" tIns="0" rIns="0" bIns="0" rtlCol="0" anchor="ctr"/>
-          <a:lstStyle/>
-          <a:p>
-            <a:pPr algn="ctr" indent="0" marL="0">
-              <a:buNone/>
-            </a:pPr>
-            <a:r>
-              <a:rPr lang="en-US" sz="1300" b="1" dirty="0">
-                <a:solidFill>
-                  <a:schemeClr val="accent3"/>
-                </a:solidFill>
-              </a:rPr>
-              <a:t>heatmap 위치 ≠ 탐지 정확도 · 놓친 scratch: ATSS 19 · YOLOX-S 28</a:t>
             </a:r>
             <a:endParaRPr lang="en-US" sz="1300" dirty="0"/>
           </a:p>
@@ -16743,26 +17153,401 @@
                   <a:schemeClr val="tx1"/>
                 </a:solidFill>
               </a:rPr>
-              <a:t>벤치마크</a:t>
+              <a:t>XAI heatmap</a:t>
             </a:r>
             <a:endParaRPr lang="en-US" sz="3200" dirty="0"/>
           </a:p>
         </p:txBody>
       </p:sp>
-      <p:sp>
-        <p:nvSpPr>
-          <p:cNvPr id="3" name="flow-0-bg"/>
+      <p:pic>
+        <p:nvPicPr>
+          <p:cNvPr id="3" name="xai-0" descr="C:\Users\user\_se4nchoi\batteryvision\docs\submission\build\img\xai_tp.jpg">    </p:cNvPr>
+          <p:cNvPicPr>
+            <a:picLocks noChangeAspect="1"/>
+          </p:cNvPicPr>
+          <p:nvPr/>
+        </p:nvPicPr>
+        <p:blipFill>
+          <a:blip r:embed="rId1"/>
+          <a:stretch>
+            <a:fillRect/>
+          </a:stretch>
+        </p:blipFill>
+        <p:spPr>
+          <a:xfrm>
+            <a:off x="548640" y="1508760"/>
+            <a:ext cx="3429000" cy="3429000"/>
+          </a:xfrm>
+          <a:prstGeom prst="rect">
+            <a:avLst/>
+          </a:prstGeom>
+        </p:spPr>
+      </p:pic>
+      <p:sp>
+        <p:nvSpPr>
+          <p:cNvPr id="4" name="xai-tag-0-bg"/>
           <p:cNvSpPr/>
           <p:nvPr/>
         </p:nvSpPr>
         <p:spPr>
           <a:xfrm>
-            <a:off x="548640" y="1600200"/>
-            <a:ext cx="2423160" cy="502920"/>
+            <a:off x="548640" y="5074920"/>
+            <a:ext cx="1005840" cy="384048"/>
           </a:xfrm>
           <a:prstGeom prst="roundRect">
             <a:avLst>
-              <a:gd name="adj" fmla="val 9091"/>
+              <a:gd name="adj" fmla="val 11905"/>
+            </a:avLst>
+          </a:prstGeom>
+          <a:solidFill>
+            <a:schemeClr val="accent6">
+              <a:alpha val="20000"/>
+            </a:schemeClr>
+          </a:solidFill>
+          <a:ln w="12700">
+            <a:solidFill>
+              <a:schemeClr val="accent6"/>
+            </a:solidFill>
+            <a:prstDash val="solid"/>
+          </a:ln>
+        </p:spPr>
+      </p:sp>
+      <p:sp>
+        <p:nvSpPr>
+          <p:cNvPr id="5" name="xai-tag-0"/>
+          <p:cNvSpPr txBox="1"/>
+          <p:nvPr/>
+        </p:nvSpPr>
+        <p:spPr>
+          <a:xfrm>
+            <a:off x="548640" y="5074920"/>
+            <a:ext cx="1005840" cy="384048"/>
+          </a:xfrm>
+          <a:prstGeom prst="rect">
+            <a:avLst/>
+          </a:prstGeom>
+          <a:noFill/>
+          <a:ln/>
+        </p:spPr>
+        <p:txBody>
+          <a:bodyPr wrap="square" lIns="0" tIns="0" rIns="0" bIns="0" rtlCol="0" anchor="ctr"/>
+          <a:lstStyle/>
+          <a:p>
+            <a:pPr algn="ctr" indent="0" marL="0">
+              <a:buNone/>
+            </a:pPr>
+            <a:r>
+              <a:rPr lang="en-US" sz="1300" b="1" dirty="0">
+                <a:solidFill>
+                  <a:schemeClr val="accent6"/>
+                </a:solidFill>
+              </a:rPr>
+              <a:t>맞힘</a:t>
+            </a:r>
+            <a:endParaRPr lang="en-US" sz="1300" dirty="0"/>
+          </a:p>
+        </p:txBody>
+      </p:sp>
+      <p:sp>
+        <p:nvSpPr>
+          <p:cNvPr id="6" name="xai-d-0"/>
+          <p:cNvSpPr txBox="1"/>
+          <p:nvPr/>
+        </p:nvSpPr>
+        <p:spPr>
+          <a:xfrm>
+            <a:off x="1691640" y="5074920"/>
+            <a:ext cx="2423160" cy="384048"/>
+          </a:xfrm>
+          <a:prstGeom prst="rect">
+            <a:avLst/>
+          </a:prstGeom>
+          <a:noFill/>
+          <a:ln/>
+        </p:spPr>
+        <p:txBody>
+          <a:bodyPr wrap="square" lIns="0" tIns="0" rIns="0" bIns="0" rtlCol="0" anchor="ctr"/>
+          <a:lstStyle/>
+          <a:p>
+            <a:pPr indent="0" marL="0">
+              <a:buNone/>
+            </a:pPr>
+            <a:r>
+              <a:rPr lang="en-US" sz="1500" dirty="0">
+                <a:solidFill>
+                  <a:schemeClr val="tx1"/>
+                </a:solidFill>
+              </a:rPr>
+              <a:t>결함 주변에 반응</a:t>
+            </a:r>
+            <a:endParaRPr lang="en-US" sz="1500" dirty="0"/>
+          </a:p>
+        </p:txBody>
+      </p:sp>
+      <p:pic>
+        <p:nvPicPr>
+          <p:cNvPr id="7" name="xai-1" descr="C:\Users\user\_se4nchoi\batteryvision\docs\submission\build\img\xai_fp.jpg">    </p:cNvPr>
+          <p:cNvPicPr>
+            <a:picLocks noChangeAspect="1"/>
+          </p:cNvPicPr>
+          <p:nvPr/>
+        </p:nvPicPr>
+        <p:blipFill>
+          <a:blip r:embed="rId2"/>
+          <a:stretch>
+            <a:fillRect/>
+          </a:stretch>
+        </p:blipFill>
+        <p:spPr>
+          <a:xfrm>
+            <a:off x="4297680" y="1508760"/>
+            <a:ext cx="3429000" cy="3429000"/>
+          </a:xfrm>
+          <a:prstGeom prst="rect">
+            <a:avLst/>
+          </a:prstGeom>
+        </p:spPr>
+      </p:pic>
+      <p:sp>
+        <p:nvSpPr>
+          <p:cNvPr id="8" name="xai-tag-1-bg"/>
+          <p:cNvSpPr/>
+          <p:nvPr/>
+        </p:nvSpPr>
+        <p:spPr>
+          <a:xfrm>
+            <a:off x="4297680" y="5074920"/>
+            <a:ext cx="1005840" cy="384048"/>
+          </a:xfrm>
+          <a:prstGeom prst="roundRect">
+            <a:avLst>
+              <a:gd name="adj" fmla="val 11905"/>
+            </a:avLst>
+          </a:prstGeom>
+          <a:solidFill>
+            <a:schemeClr val="accent3">
+              <a:alpha val="20000"/>
+            </a:schemeClr>
+          </a:solidFill>
+          <a:ln w="12700">
+            <a:solidFill>
+              <a:schemeClr val="accent3"/>
+            </a:solidFill>
+            <a:prstDash val="solid"/>
+          </a:ln>
+        </p:spPr>
+      </p:sp>
+      <p:sp>
+        <p:nvSpPr>
+          <p:cNvPr id="9" name="xai-tag-1"/>
+          <p:cNvSpPr txBox="1"/>
+          <p:nvPr/>
+        </p:nvSpPr>
+        <p:spPr>
+          <a:xfrm>
+            <a:off x="4297680" y="5074920"/>
+            <a:ext cx="1005840" cy="384048"/>
+          </a:xfrm>
+          <a:prstGeom prst="rect">
+            <a:avLst/>
+          </a:prstGeom>
+          <a:noFill/>
+          <a:ln/>
+        </p:spPr>
+        <p:txBody>
+          <a:bodyPr wrap="square" lIns="0" tIns="0" rIns="0" bIns="0" rtlCol="0" anchor="ctr"/>
+          <a:lstStyle/>
+          <a:p>
+            <a:pPr algn="ctr" indent="0" marL="0">
+              <a:buNone/>
+            </a:pPr>
+            <a:r>
+              <a:rPr lang="en-US" sz="1300" b="1" dirty="0">
+                <a:solidFill>
+                  <a:schemeClr val="accent3"/>
+                </a:solidFill>
+              </a:rPr>
+              <a:t>오검출</a:t>
+            </a:r>
+            <a:endParaRPr lang="en-US" sz="1300" dirty="0"/>
+          </a:p>
+        </p:txBody>
+      </p:sp>
+      <p:sp>
+        <p:nvSpPr>
+          <p:cNvPr id="10" name="xai-d-1"/>
+          <p:cNvSpPr txBox="1"/>
+          <p:nvPr/>
+        </p:nvSpPr>
+        <p:spPr>
+          <a:xfrm>
+            <a:off x="5440680" y="5074920"/>
+            <a:ext cx="2423160" cy="384048"/>
+          </a:xfrm>
+          <a:prstGeom prst="rect">
+            <a:avLst/>
+          </a:prstGeom>
+          <a:noFill/>
+          <a:ln/>
+        </p:spPr>
+        <p:txBody>
+          <a:bodyPr wrap="square" lIns="0" tIns="0" rIns="0" bIns="0" rtlCol="0" anchor="ctr"/>
+          <a:lstStyle/>
+          <a:p>
+            <a:pPr indent="0" marL="0">
+              <a:buNone/>
+            </a:pPr>
+            <a:r>
+              <a:rPr lang="en-US" sz="1500" dirty="0">
+                <a:solidFill>
+                  <a:schemeClr val="tx1"/>
+                </a:solidFill>
+              </a:rPr>
+              <a:t>정상 셀에 반응</a:t>
+            </a:r>
+            <a:endParaRPr lang="en-US" sz="1500" dirty="0"/>
+          </a:p>
+        </p:txBody>
+      </p:sp>
+      <p:pic>
+        <p:nvPicPr>
+          <p:cNvPr id="11" name="xai-2" descr="C:\Users\user\_se4nchoi\batteryvision\docs\submission\build\img\xai_fn.jpg">    </p:cNvPr>
+          <p:cNvPicPr>
+            <a:picLocks noChangeAspect="1"/>
+          </p:cNvPicPr>
+          <p:nvPr/>
+        </p:nvPicPr>
+        <p:blipFill>
+          <a:blip r:embed="rId3"/>
+          <a:stretch>
+            <a:fillRect/>
+          </a:stretch>
+        </p:blipFill>
+        <p:spPr>
+          <a:xfrm>
+            <a:off x="8046720" y="1508760"/>
+            <a:ext cx="3429000" cy="3429000"/>
+          </a:xfrm>
+          <a:prstGeom prst="rect">
+            <a:avLst/>
+          </a:prstGeom>
+        </p:spPr>
+      </p:pic>
+      <p:sp>
+        <p:nvSpPr>
+          <p:cNvPr id="12" name="xai-tag-2-bg"/>
+          <p:cNvSpPr/>
+          <p:nvPr/>
+        </p:nvSpPr>
+        <p:spPr>
+          <a:xfrm>
+            <a:off x="8046720" y="5074920"/>
+            <a:ext cx="1005840" cy="384048"/>
+          </a:xfrm>
+          <a:prstGeom prst="roundRect">
+            <a:avLst>
+              <a:gd name="adj" fmla="val 11905"/>
+            </a:avLst>
+          </a:prstGeom>
+          <a:solidFill>
+            <a:schemeClr val="accent2">
+              <a:alpha val="20000"/>
+            </a:schemeClr>
+          </a:solidFill>
+          <a:ln w="12700">
+            <a:solidFill>
+              <a:schemeClr val="accent2"/>
+            </a:solidFill>
+            <a:prstDash val="solid"/>
+          </a:ln>
+        </p:spPr>
+      </p:sp>
+      <p:sp>
+        <p:nvSpPr>
+          <p:cNvPr id="13" name="xai-tag-2"/>
+          <p:cNvSpPr txBox="1"/>
+          <p:nvPr/>
+        </p:nvSpPr>
+        <p:spPr>
+          <a:xfrm>
+            <a:off x="8046720" y="5074920"/>
+            <a:ext cx="1005840" cy="384048"/>
+          </a:xfrm>
+          <a:prstGeom prst="rect">
+            <a:avLst/>
+          </a:prstGeom>
+          <a:noFill/>
+          <a:ln/>
+        </p:spPr>
+        <p:txBody>
+          <a:bodyPr wrap="square" lIns="0" tIns="0" rIns="0" bIns="0" rtlCol="0" anchor="ctr"/>
+          <a:lstStyle/>
+          <a:p>
+            <a:pPr algn="ctr" indent="0" marL="0">
+              <a:buNone/>
+            </a:pPr>
+            <a:r>
+              <a:rPr lang="en-US" sz="1300" b="1" dirty="0">
+                <a:solidFill>
+                  <a:schemeClr val="accent2"/>
+                </a:solidFill>
+              </a:rPr>
+              <a:t>놓침</a:t>
+            </a:r>
+            <a:endParaRPr lang="en-US" sz="1300" dirty="0"/>
+          </a:p>
+        </p:txBody>
+      </p:sp>
+      <p:sp>
+        <p:nvSpPr>
+          <p:cNvPr id="14" name="xai-d-2"/>
+          <p:cNvSpPr txBox="1"/>
+          <p:nvPr/>
+        </p:nvSpPr>
+        <p:spPr>
+          <a:xfrm>
+            <a:off x="9189720" y="5074920"/>
+            <a:ext cx="2423160" cy="384048"/>
+          </a:xfrm>
+          <a:prstGeom prst="rect">
+            <a:avLst/>
+          </a:prstGeom>
+          <a:noFill/>
+          <a:ln/>
+        </p:spPr>
+        <p:txBody>
+          <a:bodyPr wrap="square" lIns="0" tIns="0" rIns="0" bIns="0" rtlCol="0" anchor="ctr"/>
+          <a:lstStyle/>
+          <a:p>
+            <a:pPr indent="0" marL="0">
+              <a:buNone/>
+            </a:pPr>
+            <a:r>
+              <a:rPr lang="en-US" sz="1500" dirty="0">
+                <a:solidFill>
+                  <a:schemeClr val="tx1"/>
+                </a:solidFill>
+              </a:rPr>
+              <a:t>결함 대신 벨트를 봄</a:t>
+            </a:r>
+            <a:endParaRPr lang="en-US" sz="1500" dirty="0"/>
+          </a:p>
+        </p:txBody>
+      </p:sp>
+      <p:sp>
+        <p:nvSpPr>
+          <p:cNvPr id="15" name="xai-what-bg"/>
+          <p:cNvSpPr/>
+          <p:nvPr/>
+        </p:nvSpPr>
+        <p:spPr>
+          <a:xfrm>
+            <a:off x="548640" y="5760720"/>
+            <a:ext cx="5120640" cy="420624"/>
+          </a:xfrm>
+          <a:prstGeom prst="roundRect">
+            <a:avLst>
+              <a:gd name="adj" fmla="val 10870"/>
             </a:avLst>
           </a:prstGeom>
           <a:solidFill>
@@ -16780,14 +17565,14 @@
       </p:sp>
       <p:sp>
         <p:nvSpPr>
-          <p:cNvPr id="4" name="flow-0"/>
+          <p:cNvPr id="16" name="xai-what"/>
           <p:cNvSpPr txBox="1"/>
           <p:nvPr/>
         </p:nvSpPr>
         <p:spPr>
           <a:xfrm>
-            <a:off x="548640" y="1600200"/>
-            <a:ext cx="2423160" cy="502920"/>
+            <a:off x="548640" y="5760720"/>
+            <a:ext cx="5120640" cy="420624"/>
           </a:xfrm>
           <a:prstGeom prst="rect">
             <a:avLst/>
@@ -16808,7 +17593,7 @@
                   <a:schemeClr val="accent1"/>
                 </a:solidFill>
               </a:rPr>
-              <a:t>모델 9개</a:t>
+              <a:t>heatmap = 판단 근거가 아닌 위치 힌트</a:t>
             </a:r>
             <a:endParaRPr lang="en-US" sz="1300" dirty="0"/>
           </a:p>
@@ -16816,14 +17601,14 @@
       </p:sp>
       <p:sp>
         <p:nvSpPr>
-          <p:cNvPr id="5" name="flow-arrow-0"/>
+          <p:cNvPr id="17" name="xai-legend"/>
           <p:cNvSpPr txBox="1"/>
           <p:nvPr/>
         </p:nvSpPr>
         <p:spPr>
           <a:xfrm>
-            <a:off x="2971800" y="1600200"/>
-            <a:ext cx="429768" cy="502920"/>
+            <a:off x="5897880" y="5760720"/>
+            <a:ext cx="5742432" cy="420624"/>
           </a:xfrm>
           <a:prstGeom prst="rect">
             <a:avLst/>
@@ -16835,849 +17620,18 @@
           <a:bodyPr wrap="square" lIns="0" tIns="0" rIns="0" bIns="0" rtlCol="0" anchor="ctr"/>
           <a:lstStyle/>
           <a:p>
-            <a:pPr algn="ctr" indent="0" marL="0">
+            <a:pPr algn="r" indent="0" marL="0">
               <a:buNone/>
             </a:pPr>
             <a:r>
-              <a:rPr lang="en-US" sz="2000" b="1" dirty="0">
+              <a:rPr lang="en-US" sz="1100" dirty="0">
                 <a:solidFill>
                   <a:schemeClr val="tx2"/>
                 </a:solidFill>
               </a:rPr>
-              <a:t>→</a:t>
+              <a:t>YOLOX-S FP16+XAI · scratch 채널 · 흰 박스 = 정답, 주황 박스 = 모델</a:t>
             </a:r>
-            <a:endParaRPr lang="en-US" sz="2000" dirty="0"/>
-          </a:p>
-        </p:txBody>
-      </p:sp>
-      <p:sp>
-        <p:nvSpPr>
-          <p:cNvPr id="6" name="flow-1-bg"/>
-          <p:cNvSpPr/>
-          <p:nvPr/>
-        </p:nvSpPr>
-        <p:spPr>
-          <a:xfrm>
-            <a:off x="3401568" y="1600200"/>
-            <a:ext cx="2423160" cy="502920"/>
-          </a:xfrm>
-          <a:prstGeom prst="roundRect">
-            <a:avLst>
-              <a:gd name="adj" fmla="val 9091"/>
-            </a:avLst>
-          </a:prstGeom>
-          <a:solidFill>
-            <a:schemeClr val="accent1">
-              <a:alpha val="20000"/>
-            </a:schemeClr>
-          </a:solidFill>
-          <a:ln w="12700">
-            <a:solidFill>
-              <a:schemeClr val="accent1"/>
-            </a:solidFill>
-            <a:prstDash val="solid"/>
-          </a:ln>
-        </p:spPr>
-      </p:sp>
-      <p:sp>
-        <p:nvSpPr>
-          <p:cNvPr id="7" name="flow-1"/>
-          <p:cNvSpPr txBox="1"/>
-          <p:nvPr/>
-        </p:nvSpPr>
-        <p:spPr>
-          <a:xfrm>
-            <a:off x="3401568" y="1600200"/>
-            <a:ext cx="2423160" cy="502920"/>
-          </a:xfrm>
-          <a:prstGeom prst="rect">
-            <a:avLst/>
-          </a:prstGeom>
-          <a:noFill/>
-          <a:ln/>
-        </p:spPr>
-        <p:txBody>
-          <a:bodyPr wrap="square" lIns="0" tIns="0" rIns="0" bIns="0" rtlCol="0" anchor="ctr"/>
-          <a:lstStyle/>
-          <a:p>
-            <a:pPr algn="ctr" indent="0" marL="0">
-              <a:buNone/>
-            </a:pPr>
-            <a:r>
-              <a:rPr lang="en-US" sz="1300" b="1" dirty="0">
-                <a:solidFill>
-                  <a:schemeClr val="accent1"/>
-                </a:solidFill>
-              </a:rPr>
-              <a:t>131장 + 45장 · 같은 기준</a:t>
-            </a:r>
-            <a:endParaRPr lang="en-US" sz="1300" dirty="0"/>
-          </a:p>
-        </p:txBody>
-      </p:sp>
-      <p:sp>
-        <p:nvSpPr>
-          <p:cNvPr id="8" name="flow-arrow-1"/>
-          <p:cNvSpPr txBox="1"/>
-          <p:nvPr/>
-        </p:nvSpPr>
-        <p:spPr>
-          <a:xfrm>
-            <a:off x="5824728" y="1600200"/>
-            <a:ext cx="429768" cy="502920"/>
-          </a:xfrm>
-          <a:prstGeom prst="rect">
-            <a:avLst/>
-          </a:prstGeom>
-          <a:noFill/>
-          <a:ln/>
-        </p:spPr>
-        <p:txBody>
-          <a:bodyPr wrap="square" lIns="0" tIns="0" rIns="0" bIns="0" rtlCol="0" anchor="ctr"/>
-          <a:lstStyle/>
-          <a:p>
-            <a:pPr algn="ctr" indent="0" marL="0">
-              <a:buNone/>
-            </a:pPr>
-            <a:r>
-              <a:rPr lang="en-US" sz="2000" b="1" dirty="0">
-                <a:solidFill>
-                  <a:schemeClr val="tx2"/>
-                </a:solidFill>
-              </a:rPr>
-              <a:t>→</a:t>
-            </a:r>
-            <a:endParaRPr lang="en-US" sz="2000" dirty="0"/>
-          </a:p>
-        </p:txBody>
-      </p:sp>
-      <p:sp>
-        <p:nvSpPr>
-          <p:cNvPr id="9" name="flow-2-bg"/>
-          <p:cNvSpPr/>
-          <p:nvPr/>
-        </p:nvSpPr>
-        <p:spPr>
-          <a:xfrm>
-            <a:off x="6254496" y="1600200"/>
-            <a:ext cx="2423160" cy="502920"/>
-          </a:xfrm>
-          <a:prstGeom prst="roundRect">
-            <a:avLst>
-              <a:gd name="adj" fmla="val 9091"/>
-            </a:avLst>
-          </a:prstGeom>
-          <a:solidFill>
-            <a:schemeClr val="accent3">
-              <a:alpha val="20000"/>
-            </a:schemeClr>
-          </a:solidFill>
-          <a:ln w="12700">
-            <a:solidFill>
-              <a:schemeClr val="accent3"/>
-            </a:solidFill>
-            <a:prstDash val="solid"/>
-          </a:ln>
-        </p:spPr>
-      </p:sp>
-      <p:sp>
-        <p:nvSpPr>
-          <p:cNvPr id="10" name="flow-2"/>
-          <p:cNvSpPr txBox="1"/>
-          <p:nvPr/>
-        </p:nvSpPr>
-        <p:spPr>
-          <a:xfrm>
-            <a:off x="6254496" y="1600200"/>
-            <a:ext cx="2423160" cy="502920"/>
-          </a:xfrm>
-          <a:prstGeom prst="rect">
-            <a:avLst/>
-          </a:prstGeom>
-          <a:noFill/>
-          <a:ln/>
-        </p:spPr>
-        <p:txBody>
-          <a:bodyPr wrap="square" lIns="0" tIns="0" rIns="0" bIns="0" rtlCol="0" anchor="ctr"/>
-          <a:lstStyle/>
-          <a:p>
-            <a:pPr algn="ctr" indent="0" marL="0">
-              <a:buNone/>
-            </a:pPr>
-            <a:r>
-              <a:rPr lang="en-US" sz="1300" b="1" dirty="0">
-                <a:solidFill>
-                  <a:schemeClr val="accent3"/>
-                </a:solidFill>
-              </a:rPr>
-              <a:t>benchmark.py</a:t>
-            </a:r>
-            <a:endParaRPr lang="en-US" sz="1300" dirty="0"/>
-          </a:p>
-        </p:txBody>
-      </p:sp>
-      <p:sp>
-        <p:nvSpPr>
-          <p:cNvPr id="11" name="flow-arrow-2"/>
-          <p:cNvSpPr txBox="1"/>
-          <p:nvPr/>
-        </p:nvSpPr>
-        <p:spPr>
-          <a:xfrm>
-            <a:off x="8677656" y="1600200"/>
-            <a:ext cx="429768" cy="502920"/>
-          </a:xfrm>
-          <a:prstGeom prst="rect">
-            <a:avLst/>
-          </a:prstGeom>
-          <a:noFill/>
-          <a:ln/>
-        </p:spPr>
-        <p:txBody>
-          <a:bodyPr wrap="square" lIns="0" tIns="0" rIns="0" bIns="0" rtlCol="0" anchor="ctr"/>
-          <a:lstStyle/>
-          <a:p>
-            <a:pPr algn="ctr" indent="0" marL="0">
-              <a:buNone/>
-            </a:pPr>
-            <a:r>
-              <a:rPr lang="en-US" sz="2000" b="1" dirty="0">
-                <a:solidFill>
-                  <a:schemeClr val="tx2"/>
-                </a:solidFill>
-              </a:rPr>
-              <a:t>→</a:t>
-            </a:r>
-            <a:endParaRPr lang="en-US" sz="2000" dirty="0"/>
-          </a:p>
-        </p:txBody>
-      </p:sp>
-      <p:sp>
-        <p:nvSpPr>
-          <p:cNvPr id="12" name="flow-3-bg"/>
-          <p:cNvSpPr/>
-          <p:nvPr/>
-        </p:nvSpPr>
-        <p:spPr>
-          <a:xfrm>
-            <a:off x="9107424" y="1600200"/>
-            <a:ext cx="2423160" cy="502920"/>
-          </a:xfrm>
-          <a:prstGeom prst="roundRect">
-            <a:avLst>
-              <a:gd name="adj" fmla="val 9091"/>
-            </a:avLst>
-          </a:prstGeom>
-          <a:solidFill>
-            <a:schemeClr val="accent6">
-              <a:alpha val="20000"/>
-            </a:schemeClr>
-          </a:solidFill>
-          <a:ln w="12700">
-            <a:solidFill>
-              <a:schemeClr val="accent6"/>
-            </a:solidFill>
-            <a:prstDash val="solid"/>
-          </a:ln>
-        </p:spPr>
-      </p:sp>
-      <p:sp>
-        <p:nvSpPr>
-          <p:cNvPr id="13" name="flow-3"/>
-          <p:cNvSpPr txBox="1"/>
-          <p:nvPr/>
-        </p:nvSpPr>
-        <p:spPr>
-          <a:xfrm>
-            <a:off x="9107424" y="1600200"/>
-            <a:ext cx="2423160" cy="502920"/>
-          </a:xfrm>
-          <a:prstGeom prst="rect">
-            <a:avLst/>
-          </a:prstGeom>
-          <a:noFill/>
-          <a:ln/>
-        </p:spPr>
-        <p:txBody>
-          <a:bodyPr wrap="square" lIns="0" tIns="0" rIns="0" bIns="0" rtlCol="0" anchor="ctr"/>
-          <a:lstStyle/>
-          <a:p>
-            <a:pPr algn="ctr" indent="0" marL="0">
-              <a:buNone/>
-            </a:pPr>
-            <a:r>
-              <a:rPr lang="en-US" sz="1300" b="1" dirty="0">
-                <a:solidFill>
-                  <a:schemeClr val="accent6"/>
-                </a:solidFill>
-              </a:rPr>
-              <a:t>결과 JSON → 대시보드</a:t>
-            </a:r>
-            <a:endParaRPr lang="en-US" sz="1300" dirty="0"/>
-          </a:p>
-        </p:txBody>
-      </p:sp>
-      <p:sp>
-        <p:nvSpPr>
-          <p:cNvPr id="14" name="bm-0"/>
-          <p:cNvSpPr/>
-          <p:nvPr/>
-        </p:nvSpPr>
-        <p:spPr>
-          <a:xfrm>
-            <a:off x="548640" y="2423160"/>
-            <a:ext cx="3566160" cy="1783080"/>
-          </a:xfrm>
-          <a:prstGeom prst="roundRect">
-            <a:avLst>
-              <a:gd name="adj" fmla="val 4103"/>
-            </a:avLst>
-          </a:prstGeom>
-          <a:solidFill>
-            <a:schemeClr val="bg2"/>
-          </a:solidFill>
-          <a:ln/>
-        </p:spPr>
-      </p:sp>
-      <p:sp>
-        <p:nvSpPr>
-          <p:cNvPr id="15" name="bm-h-0"/>
-          <p:cNvSpPr txBox="1"/>
-          <p:nvPr/>
-        </p:nvSpPr>
-        <p:spPr>
-          <a:xfrm>
-            <a:off x="822960" y="2697480"/>
-            <a:ext cx="3017520" cy="457200"/>
-          </a:xfrm>
-          <a:prstGeom prst="rect">
-            <a:avLst/>
-          </a:prstGeom>
-          <a:noFill/>
-          <a:ln/>
-        </p:spPr>
-        <p:txBody>
-          <a:bodyPr wrap="square" lIns="0" tIns="0" rIns="0" bIns="0" rtlCol="0" anchor="t"/>
-          <a:lstStyle/>
-          <a:p>
-            <a:pPr indent="0" marL="0">
-              <a:buNone/>
-            </a:pPr>
-            <a:r>
-              <a:rPr lang="en-US" sz="2200" b="1" dirty="0">
-                <a:solidFill>
-                  <a:schemeClr val="accent4"/>
-                </a:solidFill>
-              </a:rPr>
-              <a:t>정확도</a:t>
-            </a:r>
-            <a:endParaRPr lang="en-US" sz="2200" dirty="0"/>
-          </a:p>
-        </p:txBody>
-      </p:sp>
-      <p:sp>
-        <p:nvSpPr>
-          <p:cNvPr id="16" name="bm-d-0"/>
-          <p:cNvSpPr txBox="1"/>
-          <p:nvPr/>
-        </p:nvSpPr>
-        <p:spPr>
-          <a:xfrm>
-            <a:off x="822960" y="3337560"/>
-            <a:ext cx="3017520" cy="548640"/>
-          </a:xfrm>
-          <a:prstGeom prst="rect">
-            <a:avLst/>
-          </a:prstGeom>
-          <a:noFill/>
-          <a:ln/>
-        </p:spPr>
-        <p:txBody>
-          <a:bodyPr wrap="square" lIns="0" tIns="0" rIns="0" bIns="0" rtlCol="0" anchor="t"/>
-          <a:lstStyle/>
-          <a:p>
-            <a:pPr indent="0" marL="0">
-              <a:buNone/>
-            </a:pPr>
-            <a:r>
-              <a:rPr lang="en-US" sz="1500" dirty="0">
-                <a:solidFill>
-                  <a:schemeClr val="tx2"/>
-                </a:solidFill>
-              </a:rPr>
-              <a:t>mAP@50 · 클래스별 AP</a:t>
-            </a:r>
-            <a:endParaRPr lang="en-US" sz="1500" dirty="0"/>
-          </a:p>
-        </p:txBody>
-      </p:sp>
-      <p:sp>
-        <p:nvSpPr>
-          <p:cNvPr id="17" name="bm-1"/>
-          <p:cNvSpPr/>
-          <p:nvPr/>
-        </p:nvSpPr>
-        <p:spPr>
-          <a:xfrm>
-            <a:off x="4297680" y="2423160"/>
-            <a:ext cx="3566160" cy="1783080"/>
-          </a:xfrm>
-          <a:prstGeom prst="roundRect">
-            <a:avLst>
-              <a:gd name="adj" fmla="val 4103"/>
-            </a:avLst>
-          </a:prstGeom>
-          <a:solidFill>
-            <a:schemeClr val="bg2"/>
-          </a:solidFill>
-          <a:ln/>
-        </p:spPr>
-      </p:sp>
-      <p:sp>
-        <p:nvSpPr>
-          <p:cNvPr id="18" name="bm-h-1"/>
-          <p:cNvSpPr txBox="1"/>
-          <p:nvPr/>
-        </p:nvSpPr>
-        <p:spPr>
-          <a:xfrm>
-            <a:off x="4572000" y="2697480"/>
-            <a:ext cx="3017520" cy="457200"/>
-          </a:xfrm>
-          <a:prstGeom prst="rect">
-            <a:avLst/>
-          </a:prstGeom>
-          <a:noFill/>
-          <a:ln/>
-        </p:spPr>
-        <p:txBody>
-          <a:bodyPr wrap="square" lIns="0" tIns="0" rIns="0" bIns="0" rtlCol="0" anchor="t"/>
-          <a:lstStyle/>
-          <a:p>
-            <a:pPr indent="0" marL="0">
-              <a:buNone/>
-            </a:pPr>
-            <a:r>
-              <a:rPr lang="en-US" sz="2200" b="1" dirty="0">
-                <a:solidFill>
-                  <a:schemeClr val="accent2"/>
-                </a:solidFill>
-              </a:rPr>
-              <a:t>판정</a:t>
-            </a:r>
-            <a:endParaRPr lang="en-US" sz="2200" dirty="0"/>
-          </a:p>
-        </p:txBody>
-      </p:sp>
-      <p:sp>
-        <p:nvSpPr>
-          <p:cNvPr id="19" name="bm-d-1"/>
-          <p:cNvSpPr txBox="1"/>
-          <p:nvPr/>
-        </p:nvSpPr>
-        <p:spPr>
-          <a:xfrm>
-            <a:off x="4572000" y="3337560"/>
-            <a:ext cx="3017520" cy="548640"/>
-          </a:xfrm>
-          <a:prstGeom prst="rect">
-            <a:avLst/>
-          </a:prstGeom>
-          <a:noFill/>
-          <a:ln/>
-        </p:spPr>
-        <p:txBody>
-          <a:bodyPr wrap="square" lIns="0" tIns="0" rIns="0" bIns="0" rtlCol="0" anchor="t"/>
-          <a:lstStyle/>
-          <a:p>
-            <a:pPr indent="0" marL="0">
-              <a:buNone/>
-            </a:pPr>
-            <a:r>
-              <a:rPr lang="en-US" sz="1500" dirty="0">
-                <a:solidFill>
-                  <a:schemeClr val="tx2"/>
-                </a:solidFill>
-              </a:rPr>
-              <a:t>PASS · REVIEW · REJECT · 놓친 셀</a:t>
-            </a:r>
-            <a:endParaRPr lang="en-US" sz="1500" dirty="0"/>
-          </a:p>
-        </p:txBody>
-      </p:sp>
-      <p:sp>
-        <p:nvSpPr>
-          <p:cNvPr id="20" name="bm-2"/>
-          <p:cNvSpPr/>
-          <p:nvPr/>
-        </p:nvSpPr>
-        <p:spPr>
-          <a:xfrm>
-            <a:off x="8046720" y="2423160"/>
-            <a:ext cx="3566160" cy="1783080"/>
-          </a:xfrm>
-          <a:prstGeom prst="roundRect">
-            <a:avLst>
-              <a:gd name="adj" fmla="val 4103"/>
-            </a:avLst>
-          </a:prstGeom>
-          <a:solidFill>
-            <a:schemeClr val="bg2"/>
-          </a:solidFill>
-          <a:ln/>
-        </p:spPr>
-      </p:sp>
-      <p:sp>
-        <p:nvSpPr>
-          <p:cNvPr id="21" name="bm-h-2"/>
-          <p:cNvSpPr txBox="1"/>
-          <p:nvPr/>
-        </p:nvSpPr>
-        <p:spPr>
-          <a:xfrm>
-            <a:off x="8321040" y="2697480"/>
-            <a:ext cx="3017520" cy="457200"/>
-          </a:xfrm>
-          <a:prstGeom prst="rect">
-            <a:avLst/>
-          </a:prstGeom>
-          <a:noFill/>
-          <a:ln/>
-        </p:spPr>
-        <p:txBody>
-          <a:bodyPr wrap="square" lIns="0" tIns="0" rIns="0" bIns="0" rtlCol="0" anchor="t"/>
-          <a:lstStyle/>
-          <a:p>
-            <a:pPr indent="0" marL="0">
-              <a:buNone/>
-            </a:pPr>
-            <a:r>
-              <a:rPr lang="en-US" sz="2200" b="1" dirty="0">
-                <a:solidFill>
-                  <a:schemeClr val="accent3"/>
-                </a:solidFill>
-              </a:rPr>
-              <a:t>기준값 sweep</a:t>
-            </a:r>
-            <a:endParaRPr lang="en-US" sz="2200" dirty="0"/>
-          </a:p>
-        </p:txBody>
-      </p:sp>
-      <p:sp>
-        <p:nvSpPr>
-          <p:cNvPr id="22" name="bm-d-2"/>
-          <p:cNvSpPr txBox="1"/>
-          <p:nvPr/>
-        </p:nvSpPr>
-        <p:spPr>
-          <a:xfrm>
-            <a:off x="8321040" y="3337560"/>
-            <a:ext cx="3017520" cy="548640"/>
-          </a:xfrm>
-          <a:prstGeom prst="rect">
-            <a:avLst/>
-          </a:prstGeom>
-          <a:noFill/>
-          <a:ln/>
-        </p:spPr>
-        <p:txBody>
-          <a:bodyPr wrap="square" lIns="0" tIns="0" rIns="0" bIns="0" rtlCol="0" anchor="t"/>
-          <a:lstStyle/>
-          <a:p>
-            <a:pPr indent="0" marL="0">
-              <a:buNone/>
-            </a:pPr>
-            <a:r>
-              <a:rPr lang="en-US" sz="1500" dirty="0">
-                <a:solidFill>
-                  <a:schemeClr val="tx2"/>
-                </a:solidFill>
-              </a:rPr>
-              <a:t>0.05 ~ 0.95</a:t>
-            </a:r>
-            <a:endParaRPr lang="en-US" sz="1500" dirty="0"/>
-          </a:p>
-        </p:txBody>
-      </p:sp>
-      <p:sp>
-        <p:nvSpPr>
-          <p:cNvPr id="23" name="bm-3"/>
-          <p:cNvSpPr/>
-          <p:nvPr/>
-        </p:nvSpPr>
-        <p:spPr>
-          <a:xfrm>
-            <a:off x="548640" y="4389120"/>
-            <a:ext cx="3566160" cy="1783080"/>
-          </a:xfrm>
-          <a:prstGeom prst="roundRect">
-            <a:avLst>
-              <a:gd name="adj" fmla="val 4103"/>
-            </a:avLst>
-          </a:prstGeom>
-          <a:solidFill>
-            <a:schemeClr val="bg2"/>
-          </a:solidFill>
-          <a:ln/>
-        </p:spPr>
-      </p:sp>
-      <p:sp>
-        <p:nvSpPr>
-          <p:cNvPr id="24" name="bm-h-3"/>
-          <p:cNvSpPr txBox="1"/>
-          <p:nvPr/>
-        </p:nvSpPr>
-        <p:spPr>
-          <a:xfrm>
-            <a:off x="822960" y="4663440"/>
-            <a:ext cx="3017520" cy="457200"/>
-          </a:xfrm>
-          <a:prstGeom prst="rect">
-            <a:avLst/>
-          </a:prstGeom>
-          <a:noFill/>
-          <a:ln/>
-        </p:spPr>
-        <p:txBody>
-          <a:bodyPr wrap="square" lIns="0" tIns="0" rIns="0" bIns="0" rtlCol="0" anchor="t"/>
-          <a:lstStyle/>
-          <a:p>
-            <a:pPr indent="0" marL="0">
-              <a:buNone/>
-            </a:pPr>
-            <a:r>
-              <a:rPr lang="en-US" sz="2200" b="1" dirty="0">
-                <a:solidFill>
-                  <a:schemeClr val="accent5"/>
-                </a:solidFill>
-              </a:rPr>
-              <a:t>견고성</a:t>
-            </a:r>
-            <a:endParaRPr lang="en-US" sz="2200" dirty="0"/>
-          </a:p>
-        </p:txBody>
-      </p:sp>
-      <p:sp>
-        <p:nvSpPr>
-          <p:cNvPr id="25" name="bm-d-3"/>
-          <p:cNvSpPr txBox="1"/>
-          <p:nvPr/>
-        </p:nvSpPr>
-        <p:spPr>
-          <a:xfrm>
-            <a:off x="822960" y="5303520"/>
-            <a:ext cx="3017520" cy="548640"/>
-          </a:xfrm>
-          <a:prstGeom prst="rect">
-            <a:avLst/>
-          </a:prstGeom>
-          <a:noFill/>
-          <a:ln/>
-        </p:spPr>
-        <p:txBody>
-          <a:bodyPr wrap="square" lIns="0" tIns="0" rIns="0" bIns="0" rtlCol="0" anchor="t"/>
-          <a:lstStyle/>
-          <a:p>
-            <a:pPr indent="0" marL="0">
-              <a:buNone/>
-            </a:pPr>
-            <a:r>
-              <a:rPr lang="en-US" sz="1500" dirty="0">
-                <a:solidFill>
-                  <a:schemeClr val="tx2"/>
-                </a:solidFill>
-              </a:rPr>
-              <a:t>blur · 어둡게 · 노이즈 · JPEG</a:t>
-            </a:r>
-            <a:endParaRPr lang="en-US" sz="1500" dirty="0"/>
-          </a:p>
-        </p:txBody>
-      </p:sp>
-      <p:sp>
-        <p:nvSpPr>
-          <p:cNvPr id="26" name="bm-4"/>
-          <p:cNvSpPr/>
-          <p:nvPr/>
-        </p:nvSpPr>
-        <p:spPr>
-          <a:xfrm>
-            <a:off x="4297680" y="4389120"/>
-            <a:ext cx="3566160" cy="1783080"/>
-          </a:xfrm>
-          <a:prstGeom prst="roundRect">
-            <a:avLst>
-              <a:gd name="adj" fmla="val 4103"/>
-            </a:avLst>
-          </a:prstGeom>
-          <a:solidFill>
-            <a:schemeClr val="bg2"/>
-          </a:solidFill>
-          <a:ln/>
-        </p:spPr>
-      </p:sp>
-      <p:sp>
-        <p:nvSpPr>
-          <p:cNvPr id="27" name="bm-h-4"/>
-          <p:cNvSpPr txBox="1"/>
-          <p:nvPr/>
-        </p:nvSpPr>
-        <p:spPr>
-          <a:xfrm>
-            <a:off x="4572000" y="4663440"/>
-            <a:ext cx="3017520" cy="457200"/>
-          </a:xfrm>
-          <a:prstGeom prst="rect">
-            <a:avLst/>
-          </a:prstGeom>
-          <a:noFill/>
-          <a:ln/>
-        </p:spPr>
-        <p:txBody>
-          <a:bodyPr wrap="square" lIns="0" tIns="0" rIns="0" bIns="0" rtlCol="0" anchor="t"/>
-          <a:lstStyle/>
-          <a:p>
-            <a:pPr indent="0" marL="0">
-              <a:buNone/>
-            </a:pPr>
-            <a:r>
-              <a:rPr lang="en-US" sz="2200" b="1" dirty="0">
-                <a:solidFill>
-                  <a:schemeClr val="accent3"/>
-                </a:solidFill>
-              </a:rPr>
-              <a:t>중복 검사</a:t>
-            </a:r>
-            <a:endParaRPr lang="en-US" sz="2200" dirty="0"/>
-          </a:p>
-        </p:txBody>
-      </p:sp>
-      <p:sp>
-        <p:nvSpPr>
-          <p:cNvPr id="28" name="bm-d-4"/>
-          <p:cNvSpPr txBox="1"/>
-          <p:nvPr/>
-        </p:nvSpPr>
-        <p:spPr>
-          <a:xfrm>
-            <a:off x="4572000" y="5303520"/>
-            <a:ext cx="3017520" cy="548640"/>
-          </a:xfrm>
-          <a:prstGeom prst="rect">
-            <a:avLst/>
-          </a:prstGeom>
-          <a:noFill/>
-          <a:ln/>
-        </p:spPr>
-        <p:txBody>
-          <a:bodyPr wrap="square" lIns="0" tIns="0" rIns="0" bIns="0" rtlCol="0" anchor="t"/>
-          <a:lstStyle/>
-          <a:p>
-            <a:pPr indent="0" marL="0">
-              <a:buNone/>
-            </a:pPr>
-            <a:r>
-              <a:rPr lang="en-US" sz="1500" dirty="0">
-                <a:solidFill>
-                  <a:schemeClr val="tx2"/>
-                </a:solidFill>
-              </a:rPr>
-              <a:t>dHash → 복사본 22장 발견</a:t>
-            </a:r>
-            <a:endParaRPr lang="en-US" sz="1500" dirty="0"/>
-          </a:p>
-        </p:txBody>
-      </p:sp>
-      <p:sp>
-        <p:nvSpPr>
-          <p:cNvPr id="29" name="bm-5"/>
-          <p:cNvSpPr/>
-          <p:nvPr/>
-        </p:nvSpPr>
-        <p:spPr>
-          <a:xfrm>
-            <a:off x="8046720" y="4389120"/>
-            <a:ext cx="3566160" cy="1783080"/>
-          </a:xfrm>
-          <a:prstGeom prst="roundRect">
-            <a:avLst>
-              <a:gd name="adj" fmla="val 4103"/>
-            </a:avLst>
-          </a:prstGeom>
-          <a:solidFill>
-            <a:schemeClr val="bg2"/>
-          </a:solidFill>
-          <a:ln/>
-        </p:spPr>
-      </p:sp>
-      <p:sp>
-        <p:nvSpPr>
-          <p:cNvPr id="30" name="bm-h-5"/>
-          <p:cNvSpPr txBox="1"/>
-          <p:nvPr/>
-        </p:nvSpPr>
-        <p:spPr>
-          <a:xfrm>
-            <a:off x="8321040" y="4663440"/>
-            <a:ext cx="3017520" cy="457200"/>
-          </a:xfrm>
-          <a:prstGeom prst="rect">
-            <a:avLst/>
-          </a:prstGeom>
-          <a:noFill/>
-          <a:ln/>
-        </p:spPr>
-        <p:txBody>
-          <a:bodyPr wrap="square" lIns="0" tIns="0" rIns="0" bIns="0" rtlCol="0" anchor="t"/>
-          <a:lstStyle/>
-          <a:p>
-            <a:pPr indent="0" marL="0">
-              <a:buNone/>
-            </a:pPr>
-            <a:r>
-              <a:rPr lang="en-US" sz="2200" b="1" dirty="0">
-                <a:solidFill>
-                  <a:schemeClr val="accent6"/>
-                </a:solidFill>
-              </a:rPr>
-              <a:t>속도</a:t>
-            </a:r>
-            <a:endParaRPr lang="en-US" sz="2200" dirty="0"/>
-          </a:p>
-        </p:txBody>
-      </p:sp>
-      <p:sp>
-        <p:nvSpPr>
-          <p:cNvPr id="31" name="bm-d-5"/>
-          <p:cNvSpPr txBox="1"/>
-          <p:nvPr/>
-        </p:nvSpPr>
-        <p:spPr>
-          <a:xfrm>
-            <a:off x="8321040" y="5303520"/>
-            <a:ext cx="3017520" cy="548640"/>
-          </a:xfrm>
-          <a:prstGeom prst="rect">
-            <a:avLst/>
-          </a:prstGeom>
-          <a:noFill/>
-          <a:ln/>
-        </p:spPr>
-        <p:txBody>
-          <a:bodyPr wrap="square" lIns="0" tIns="0" rIns="0" bIns="0" rtlCol="0" anchor="t"/>
-          <a:lstStyle/>
-          <a:p>
-            <a:pPr indent="0" marL="0">
-              <a:buNone/>
-            </a:pPr>
-            <a:r>
-              <a:rPr lang="en-US" sz="1500" dirty="0">
-                <a:solidFill>
-                  <a:schemeClr val="tx2"/>
-                </a:solidFill>
-              </a:rPr>
-              <a:t>CPU · iGPU · 사진 1장씩</a:t>
-            </a:r>
-            <a:endParaRPr lang="en-US" sz="1500" dirty="0"/>
+            <a:endParaRPr lang="en-US" sz="1100" dirty="0"/>
           </a:p>
         </p:txBody>
       </p:sp>
@@ -17783,6 +17737,1046 @@
                   <a:schemeClr val="tx1"/>
                 </a:solidFill>
               </a:rPr>
+              <a:t>벤치마크</a:t>
+            </a:r>
+            <a:endParaRPr lang="en-US" sz="3200" dirty="0"/>
+          </a:p>
+        </p:txBody>
+      </p:sp>
+      <p:sp>
+        <p:nvSpPr>
+          <p:cNvPr id="3" name="flow-0-bg"/>
+          <p:cNvSpPr/>
+          <p:nvPr/>
+        </p:nvSpPr>
+        <p:spPr>
+          <a:xfrm>
+            <a:off x="548640" y="1600200"/>
+            <a:ext cx="2423160" cy="502920"/>
+          </a:xfrm>
+          <a:prstGeom prst="roundRect">
+            <a:avLst>
+              <a:gd name="adj" fmla="val 9091"/>
+            </a:avLst>
+          </a:prstGeom>
+          <a:solidFill>
+            <a:schemeClr val="accent1">
+              <a:alpha val="20000"/>
+            </a:schemeClr>
+          </a:solidFill>
+          <a:ln w="12700">
+            <a:solidFill>
+              <a:schemeClr val="accent1"/>
+            </a:solidFill>
+            <a:prstDash val="solid"/>
+          </a:ln>
+        </p:spPr>
+      </p:sp>
+      <p:sp>
+        <p:nvSpPr>
+          <p:cNvPr id="4" name="flow-0"/>
+          <p:cNvSpPr txBox="1"/>
+          <p:nvPr/>
+        </p:nvSpPr>
+        <p:spPr>
+          <a:xfrm>
+            <a:off x="548640" y="1600200"/>
+            <a:ext cx="2423160" cy="502920"/>
+          </a:xfrm>
+          <a:prstGeom prst="rect">
+            <a:avLst/>
+          </a:prstGeom>
+          <a:noFill/>
+          <a:ln/>
+        </p:spPr>
+        <p:txBody>
+          <a:bodyPr wrap="square" lIns="0" tIns="0" rIns="0" bIns="0" rtlCol="0" anchor="ctr"/>
+          <a:lstStyle/>
+          <a:p>
+            <a:pPr algn="ctr" indent="0" marL="0">
+              <a:buNone/>
+            </a:pPr>
+            <a:r>
+              <a:rPr lang="en-US" sz="1300" b="1" dirty="0">
+                <a:solidFill>
+                  <a:schemeClr val="accent1"/>
+                </a:solidFill>
+              </a:rPr>
+              <a:t>모델 9개</a:t>
+            </a:r>
+            <a:endParaRPr lang="en-US" sz="1300" dirty="0"/>
+          </a:p>
+        </p:txBody>
+      </p:sp>
+      <p:sp>
+        <p:nvSpPr>
+          <p:cNvPr id="5" name="flow-arrow-0"/>
+          <p:cNvSpPr txBox="1"/>
+          <p:nvPr/>
+        </p:nvSpPr>
+        <p:spPr>
+          <a:xfrm>
+            <a:off x="2971800" y="1600200"/>
+            <a:ext cx="429768" cy="502920"/>
+          </a:xfrm>
+          <a:prstGeom prst="rect">
+            <a:avLst/>
+          </a:prstGeom>
+          <a:noFill/>
+          <a:ln/>
+        </p:spPr>
+        <p:txBody>
+          <a:bodyPr wrap="square" lIns="0" tIns="0" rIns="0" bIns="0" rtlCol="0" anchor="ctr"/>
+          <a:lstStyle/>
+          <a:p>
+            <a:pPr algn="ctr" indent="0" marL="0">
+              <a:buNone/>
+            </a:pPr>
+            <a:r>
+              <a:rPr lang="en-US" sz="2000" b="1" dirty="0">
+                <a:solidFill>
+                  <a:schemeClr val="tx2"/>
+                </a:solidFill>
+              </a:rPr>
+              <a:t>→</a:t>
+            </a:r>
+            <a:endParaRPr lang="en-US" sz="2000" dirty="0"/>
+          </a:p>
+        </p:txBody>
+      </p:sp>
+      <p:sp>
+        <p:nvSpPr>
+          <p:cNvPr id="6" name="flow-1-bg"/>
+          <p:cNvSpPr/>
+          <p:nvPr/>
+        </p:nvSpPr>
+        <p:spPr>
+          <a:xfrm>
+            <a:off x="3401568" y="1600200"/>
+            <a:ext cx="2423160" cy="502920"/>
+          </a:xfrm>
+          <a:prstGeom prst="roundRect">
+            <a:avLst>
+              <a:gd name="adj" fmla="val 9091"/>
+            </a:avLst>
+          </a:prstGeom>
+          <a:solidFill>
+            <a:schemeClr val="accent1">
+              <a:alpha val="20000"/>
+            </a:schemeClr>
+          </a:solidFill>
+          <a:ln w="12700">
+            <a:solidFill>
+              <a:schemeClr val="accent1"/>
+            </a:solidFill>
+            <a:prstDash val="solid"/>
+          </a:ln>
+        </p:spPr>
+      </p:sp>
+      <p:sp>
+        <p:nvSpPr>
+          <p:cNvPr id="7" name="flow-1"/>
+          <p:cNvSpPr txBox="1"/>
+          <p:nvPr/>
+        </p:nvSpPr>
+        <p:spPr>
+          <a:xfrm>
+            <a:off x="3401568" y="1600200"/>
+            <a:ext cx="2423160" cy="502920"/>
+          </a:xfrm>
+          <a:prstGeom prst="rect">
+            <a:avLst/>
+          </a:prstGeom>
+          <a:noFill/>
+          <a:ln/>
+        </p:spPr>
+        <p:txBody>
+          <a:bodyPr wrap="square" lIns="0" tIns="0" rIns="0" bIns="0" rtlCol="0" anchor="ctr"/>
+          <a:lstStyle/>
+          <a:p>
+            <a:pPr algn="ctr" indent="0" marL="0">
+              <a:buNone/>
+            </a:pPr>
+            <a:r>
+              <a:rPr lang="en-US" sz="1300" b="1" dirty="0">
+                <a:solidFill>
+                  <a:schemeClr val="accent1"/>
+                </a:solidFill>
+              </a:rPr>
+              <a:t>131장 + 45장 · 같은 기준</a:t>
+            </a:r>
+            <a:endParaRPr lang="en-US" sz="1300" dirty="0"/>
+          </a:p>
+        </p:txBody>
+      </p:sp>
+      <p:sp>
+        <p:nvSpPr>
+          <p:cNvPr id="8" name="flow-arrow-1"/>
+          <p:cNvSpPr txBox="1"/>
+          <p:nvPr/>
+        </p:nvSpPr>
+        <p:spPr>
+          <a:xfrm>
+            <a:off x="5824728" y="1600200"/>
+            <a:ext cx="429768" cy="502920"/>
+          </a:xfrm>
+          <a:prstGeom prst="rect">
+            <a:avLst/>
+          </a:prstGeom>
+          <a:noFill/>
+          <a:ln/>
+        </p:spPr>
+        <p:txBody>
+          <a:bodyPr wrap="square" lIns="0" tIns="0" rIns="0" bIns="0" rtlCol="0" anchor="ctr"/>
+          <a:lstStyle/>
+          <a:p>
+            <a:pPr algn="ctr" indent="0" marL="0">
+              <a:buNone/>
+            </a:pPr>
+            <a:r>
+              <a:rPr lang="en-US" sz="2000" b="1" dirty="0">
+                <a:solidFill>
+                  <a:schemeClr val="tx2"/>
+                </a:solidFill>
+              </a:rPr>
+              <a:t>→</a:t>
+            </a:r>
+            <a:endParaRPr lang="en-US" sz="2000" dirty="0"/>
+          </a:p>
+        </p:txBody>
+      </p:sp>
+      <p:sp>
+        <p:nvSpPr>
+          <p:cNvPr id="9" name="flow-2-bg"/>
+          <p:cNvSpPr/>
+          <p:nvPr/>
+        </p:nvSpPr>
+        <p:spPr>
+          <a:xfrm>
+            <a:off x="6254496" y="1600200"/>
+            <a:ext cx="2423160" cy="502920"/>
+          </a:xfrm>
+          <a:prstGeom prst="roundRect">
+            <a:avLst>
+              <a:gd name="adj" fmla="val 9091"/>
+            </a:avLst>
+          </a:prstGeom>
+          <a:solidFill>
+            <a:schemeClr val="accent3">
+              <a:alpha val="20000"/>
+            </a:schemeClr>
+          </a:solidFill>
+          <a:ln w="12700">
+            <a:solidFill>
+              <a:schemeClr val="accent3"/>
+            </a:solidFill>
+            <a:prstDash val="solid"/>
+          </a:ln>
+        </p:spPr>
+      </p:sp>
+      <p:sp>
+        <p:nvSpPr>
+          <p:cNvPr id="10" name="flow-2"/>
+          <p:cNvSpPr txBox="1"/>
+          <p:nvPr/>
+        </p:nvSpPr>
+        <p:spPr>
+          <a:xfrm>
+            <a:off x="6254496" y="1600200"/>
+            <a:ext cx="2423160" cy="502920"/>
+          </a:xfrm>
+          <a:prstGeom prst="rect">
+            <a:avLst/>
+          </a:prstGeom>
+          <a:noFill/>
+          <a:ln/>
+        </p:spPr>
+        <p:txBody>
+          <a:bodyPr wrap="square" lIns="0" tIns="0" rIns="0" bIns="0" rtlCol="0" anchor="ctr"/>
+          <a:lstStyle/>
+          <a:p>
+            <a:pPr algn="ctr" indent="0" marL="0">
+              <a:buNone/>
+            </a:pPr>
+            <a:r>
+              <a:rPr lang="en-US" sz="1300" b="1" dirty="0">
+                <a:solidFill>
+                  <a:schemeClr val="accent3"/>
+                </a:solidFill>
+              </a:rPr>
+              <a:t>benchmark.py</a:t>
+            </a:r>
+            <a:endParaRPr lang="en-US" sz="1300" dirty="0"/>
+          </a:p>
+        </p:txBody>
+      </p:sp>
+      <p:sp>
+        <p:nvSpPr>
+          <p:cNvPr id="11" name="flow-arrow-2"/>
+          <p:cNvSpPr txBox="1"/>
+          <p:nvPr/>
+        </p:nvSpPr>
+        <p:spPr>
+          <a:xfrm>
+            <a:off x="8677656" y="1600200"/>
+            <a:ext cx="429768" cy="502920"/>
+          </a:xfrm>
+          <a:prstGeom prst="rect">
+            <a:avLst/>
+          </a:prstGeom>
+          <a:noFill/>
+          <a:ln/>
+        </p:spPr>
+        <p:txBody>
+          <a:bodyPr wrap="square" lIns="0" tIns="0" rIns="0" bIns="0" rtlCol="0" anchor="ctr"/>
+          <a:lstStyle/>
+          <a:p>
+            <a:pPr algn="ctr" indent="0" marL="0">
+              <a:buNone/>
+            </a:pPr>
+            <a:r>
+              <a:rPr lang="en-US" sz="2000" b="1" dirty="0">
+                <a:solidFill>
+                  <a:schemeClr val="tx2"/>
+                </a:solidFill>
+              </a:rPr>
+              <a:t>→</a:t>
+            </a:r>
+            <a:endParaRPr lang="en-US" sz="2000" dirty="0"/>
+          </a:p>
+        </p:txBody>
+      </p:sp>
+      <p:sp>
+        <p:nvSpPr>
+          <p:cNvPr id="12" name="flow-3-bg"/>
+          <p:cNvSpPr/>
+          <p:nvPr/>
+        </p:nvSpPr>
+        <p:spPr>
+          <a:xfrm>
+            <a:off x="9107424" y="1600200"/>
+            <a:ext cx="2423160" cy="502920"/>
+          </a:xfrm>
+          <a:prstGeom prst="roundRect">
+            <a:avLst>
+              <a:gd name="adj" fmla="val 9091"/>
+            </a:avLst>
+          </a:prstGeom>
+          <a:solidFill>
+            <a:schemeClr val="accent6">
+              <a:alpha val="20000"/>
+            </a:schemeClr>
+          </a:solidFill>
+          <a:ln w="12700">
+            <a:solidFill>
+              <a:schemeClr val="accent6"/>
+            </a:solidFill>
+            <a:prstDash val="solid"/>
+          </a:ln>
+        </p:spPr>
+      </p:sp>
+      <p:sp>
+        <p:nvSpPr>
+          <p:cNvPr id="13" name="flow-3"/>
+          <p:cNvSpPr txBox="1"/>
+          <p:nvPr/>
+        </p:nvSpPr>
+        <p:spPr>
+          <a:xfrm>
+            <a:off x="9107424" y="1600200"/>
+            <a:ext cx="2423160" cy="502920"/>
+          </a:xfrm>
+          <a:prstGeom prst="rect">
+            <a:avLst/>
+          </a:prstGeom>
+          <a:noFill/>
+          <a:ln/>
+        </p:spPr>
+        <p:txBody>
+          <a:bodyPr wrap="square" lIns="0" tIns="0" rIns="0" bIns="0" rtlCol="0" anchor="ctr"/>
+          <a:lstStyle/>
+          <a:p>
+            <a:pPr algn="ctr" indent="0" marL="0">
+              <a:buNone/>
+            </a:pPr>
+            <a:r>
+              <a:rPr lang="en-US" sz="1300" b="1" dirty="0">
+                <a:solidFill>
+                  <a:schemeClr val="accent6"/>
+                </a:solidFill>
+              </a:rPr>
+              <a:t>결과 JSON → 대시보드</a:t>
+            </a:r>
+            <a:endParaRPr lang="en-US" sz="1300" dirty="0"/>
+          </a:p>
+        </p:txBody>
+      </p:sp>
+      <p:sp>
+        <p:nvSpPr>
+          <p:cNvPr id="14" name="bm-0"/>
+          <p:cNvSpPr/>
+          <p:nvPr/>
+        </p:nvSpPr>
+        <p:spPr>
+          <a:xfrm>
+            <a:off x="548640" y="2423160"/>
+            <a:ext cx="3566160" cy="1783080"/>
+          </a:xfrm>
+          <a:prstGeom prst="roundRect">
+            <a:avLst>
+              <a:gd name="adj" fmla="val 4103"/>
+            </a:avLst>
+          </a:prstGeom>
+          <a:solidFill>
+            <a:schemeClr val="bg2"/>
+          </a:solidFill>
+          <a:ln/>
+        </p:spPr>
+      </p:sp>
+      <p:sp>
+        <p:nvSpPr>
+          <p:cNvPr id="15" name="bm-h-0"/>
+          <p:cNvSpPr txBox="1"/>
+          <p:nvPr/>
+        </p:nvSpPr>
+        <p:spPr>
+          <a:xfrm>
+            <a:off x="822960" y="2697480"/>
+            <a:ext cx="3017520" cy="457200"/>
+          </a:xfrm>
+          <a:prstGeom prst="rect">
+            <a:avLst/>
+          </a:prstGeom>
+          <a:noFill/>
+          <a:ln/>
+        </p:spPr>
+        <p:txBody>
+          <a:bodyPr wrap="square" lIns="0" tIns="0" rIns="0" bIns="0" rtlCol="0" anchor="t"/>
+          <a:lstStyle/>
+          <a:p>
+            <a:pPr indent="0" marL="0">
+              <a:buNone/>
+            </a:pPr>
+            <a:r>
+              <a:rPr lang="en-US" sz="2200" b="1" dirty="0">
+                <a:solidFill>
+                  <a:schemeClr val="accent4"/>
+                </a:solidFill>
+              </a:rPr>
+              <a:t>정확도</a:t>
+            </a:r>
+            <a:endParaRPr lang="en-US" sz="2200" dirty="0"/>
+          </a:p>
+        </p:txBody>
+      </p:sp>
+      <p:sp>
+        <p:nvSpPr>
+          <p:cNvPr id="16" name="bm-d-0"/>
+          <p:cNvSpPr txBox="1"/>
+          <p:nvPr/>
+        </p:nvSpPr>
+        <p:spPr>
+          <a:xfrm>
+            <a:off x="822960" y="3337560"/>
+            <a:ext cx="3017520" cy="548640"/>
+          </a:xfrm>
+          <a:prstGeom prst="rect">
+            <a:avLst/>
+          </a:prstGeom>
+          <a:noFill/>
+          <a:ln/>
+        </p:spPr>
+        <p:txBody>
+          <a:bodyPr wrap="square" lIns="0" tIns="0" rIns="0" bIns="0" rtlCol="0" anchor="t"/>
+          <a:lstStyle/>
+          <a:p>
+            <a:pPr indent="0" marL="0">
+              <a:buNone/>
+            </a:pPr>
+            <a:r>
+              <a:rPr lang="en-US" sz="1500" dirty="0">
+                <a:solidFill>
+                  <a:schemeClr val="tx2"/>
+                </a:solidFill>
+              </a:rPr>
+              <a:t>mAP@50 · 클래스별 AP</a:t>
+            </a:r>
+            <a:endParaRPr lang="en-US" sz="1500" dirty="0"/>
+          </a:p>
+        </p:txBody>
+      </p:sp>
+      <p:sp>
+        <p:nvSpPr>
+          <p:cNvPr id="17" name="bm-1"/>
+          <p:cNvSpPr/>
+          <p:nvPr/>
+        </p:nvSpPr>
+        <p:spPr>
+          <a:xfrm>
+            <a:off x="4297680" y="2423160"/>
+            <a:ext cx="3566160" cy="1783080"/>
+          </a:xfrm>
+          <a:prstGeom prst="roundRect">
+            <a:avLst>
+              <a:gd name="adj" fmla="val 4103"/>
+            </a:avLst>
+          </a:prstGeom>
+          <a:solidFill>
+            <a:schemeClr val="bg2"/>
+          </a:solidFill>
+          <a:ln/>
+        </p:spPr>
+      </p:sp>
+      <p:sp>
+        <p:nvSpPr>
+          <p:cNvPr id="18" name="bm-h-1"/>
+          <p:cNvSpPr txBox="1"/>
+          <p:nvPr/>
+        </p:nvSpPr>
+        <p:spPr>
+          <a:xfrm>
+            <a:off x="4572000" y="2697480"/>
+            <a:ext cx="3017520" cy="457200"/>
+          </a:xfrm>
+          <a:prstGeom prst="rect">
+            <a:avLst/>
+          </a:prstGeom>
+          <a:noFill/>
+          <a:ln/>
+        </p:spPr>
+        <p:txBody>
+          <a:bodyPr wrap="square" lIns="0" tIns="0" rIns="0" bIns="0" rtlCol="0" anchor="t"/>
+          <a:lstStyle/>
+          <a:p>
+            <a:pPr indent="0" marL="0">
+              <a:buNone/>
+            </a:pPr>
+            <a:r>
+              <a:rPr lang="en-US" sz="2200" b="1" dirty="0">
+                <a:solidFill>
+                  <a:schemeClr val="accent2"/>
+                </a:solidFill>
+              </a:rPr>
+              <a:t>판정</a:t>
+            </a:r>
+            <a:endParaRPr lang="en-US" sz="2200" dirty="0"/>
+          </a:p>
+        </p:txBody>
+      </p:sp>
+      <p:sp>
+        <p:nvSpPr>
+          <p:cNvPr id="19" name="bm-d-1"/>
+          <p:cNvSpPr txBox="1"/>
+          <p:nvPr/>
+        </p:nvSpPr>
+        <p:spPr>
+          <a:xfrm>
+            <a:off x="4572000" y="3337560"/>
+            <a:ext cx="3017520" cy="548640"/>
+          </a:xfrm>
+          <a:prstGeom prst="rect">
+            <a:avLst/>
+          </a:prstGeom>
+          <a:noFill/>
+          <a:ln/>
+        </p:spPr>
+        <p:txBody>
+          <a:bodyPr wrap="square" lIns="0" tIns="0" rIns="0" bIns="0" rtlCol="0" anchor="t"/>
+          <a:lstStyle/>
+          <a:p>
+            <a:pPr indent="0" marL="0">
+              <a:buNone/>
+            </a:pPr>
+            <a:r>
+              <a:rPr lang="en-US" sz="1500" dirty="0">
+                <a:solidFill>
+                  <a:schemeClr val="tx2"/>
+                </a:solidFill>
+              </a:rPr>
+              <a:t>PASS · REVIEW · REJECT · 놓친 셀</a:t>
+            </a:r>
+            <a:endParaRPr lang="en-US" sz="1500" dirty="0"/>
+          </a:p>
+        </p:txBody>
+      </p:sp>
+      <p:sp>
+        <p:nvSpPr>
+          <p:cNvPr id="20" name="bm-2"/>
+          <p:cNvSpPr/>
+          <p:nvPr/>
+        </p:nvSpPr>
+        <p:spPr>
+          <a:xfrm>
+            <a:off x="8046720" y="2423160"/>
+            <a:ext cx="3566160" cy="1783080"/>
+          </a:xfrm>
+          <a:prstGeom prst="roundRect">
+            <a:avLst>
+              <a:gd name="adj" fmla="val 4103"/>
+            </a:avLst>
+          </a:prstGeom>
+          <a:solidFill>
+            <a:schemeClr val="bg2"/>
+          </a:solidFill>
+          <a:ln/>
+        </p:spPr>
+      </p:sp>
+      <p:sp>
+        <p:nvSpPr>
+          <p:cNvPr id="21" name="bm-h-2"/>
+          <p:cNvSpPr txBox="1"/>
+          <p:nvPr/>
+        </p:nvSpPr>
+        <p:spPr>
+          <a:xfrm>
+            <a:off x="8321040" y="2697480"/>
+            <a:ext cx="3017520" cy="457200"/>
+          </a:xfrm>
+          <a:prstGeom prst="rect">
+            <a:avLst/>
+          </a:prstGeom>
+          <a:noFill/>
+          <a:ln/>
+        </p:spPr>
+        <p:txBody>
+          <a:bodyPr wrap="square" lIns="0" tIns="0" rIns="0" bIns="0" rtlCol="0" anchor="t"/>
+          <a:lstStyle/>
+          <a:p>
+            <a:pPr indent="0" marL="0">
+              <a:buNone/>
+            </a:pPr>
+            <a:r>
+              <a:rPr lang="en-US" sz="2200" b="1" dirty="0">
+                <a:solidFill>
+                  <a:schemeClr val="accent3"/>
+                </a:solidFill>
+              </a:rPr>
+              <a:t>기준값 sweep</a:t>
+            </a:r>
+            <a:endParaRPr lang="en-US" sz="2200" dirty="0"/>
+          </a:p>
+        </p:txBody>
+      </p:sp>
+      <p:sp>
+        <p:nvSpPr>
+          <p:cNvPr id="22" name="bm-d-2"/>
+          <p:cNvSpPr txBox="1"/>
+          <p:nvPr/>
+        </p:nvSpPr>
+        <p:spPr>
+          <a:xfrm>
+            <a:off x="8321040" y="3337560"/>
+            <a:ext cx="3017520" cy="548640"/>
+          </a:xfrm>
+          <a:prstGeom prst="rect">
+            <a:avLst/>
+          </a:prstGeom>
+          <a:noFill/>
+          <a:ln/>
+        </p:spPr>
+        <p:txBody>
+          <a:bodyPr wrap="square" lIns="0" tIns="0" rIns="0" bIns="0" rtlCol="0" anchor="t"/>
+          <a:lstStyle/>
+          <a:p>
+            <a:pPr indent="0" marL="0">
+              <a:buNone/>
+            </a:pPr>
+            <a:r>
+              <a:rPr lang="en-US" sz="1500" dirty="0">
+                <a:solidFill>
+                  <a:schemeClr val="tx2"/>
+                </a:solidFill>
+              </a:rPr>
+              <a:t>0.05 ~ 0.95</a:t>
+            </a:r>
+            <a:endParaRPr lang="en-US" sz="1500" dirty="0"/>
+          </a:p>
+        </p:txBody>
+      </p:sp>
+      <p:sp>
+        <p:nvSpPr>
+          <p:cNvPr id="23" name="bm-3"/>
+          <p:cNvSpPr/>
+          <p:nvPr/>
+        </p:nvSpPr>
+        <p:spPr>
+          <a:xfrm>
+            <a:off x="548640" y="4389120"/>
+            <a:ext cx="3566160" cy="1783080"/>
+          </a:xfrm>
+          <a:prstGeom prst="roundRect">
+            <a:avLst>
+              <a:gd name="adj" fmla="val 4103"/>
+            </a:avLst>
+          </a:prstGeom>
+          <a:solidFill>
+            <a:schemeClr val="bg2"/>
+          </a:solidFill>
+          <a:ln/>
+        </p:spPr>
+      </p:sp>
+      <p:sp>
+        <p:nvSpPr>
+          <p:cNvPr id="24" name="bm-h-3"/>
+          <p:cNvSpPr txBox="1"/>
+          <p:nvPr/>
+        </p:nvSpPr>
+        <p:spPr>
+          <a:xfrm>
+            <a:off x="822960" y="4663440"/>
+            <a:ext cx="3017520" cy="457200"/>
+          </a:xfrm>
+          <a:prstGeom prst="rect">
+            <a:avLst/>
+          </a:prstGeom>
+          <a:noFill/>
+          <a:ln/>
+        </p:spPr>
+        <p:txBody>
+          <a:bodyPr wrap="square" lIns="0" tIns="0" rIns="0" bIns="0" rtlCol="0" anchor="t"/>
+          <a:lstStyle/>
+          <a:p>
+            <a:pPr indent="0" marL="0">
+              <a:buNone/>
+            </a:pPr>
+            <a:r>
+              <a:rPr lang="en-US" sz="2200" b="1" dirty="0">
+                <a:solidFill>
+                  <a:schemeClr val="accent5"/>
+                </a:solidFill>
+              </a:rPr>
+              <a:t>견고성</a:t>
+            </a:r>
+            <a:endParaRPr lang="en-US" sz="2200" dirty="0"/>
+          </a:p>
+        </p:txBody>
+      </p:sp>
+      <p:sp>
+        <p:nvSpPr>
+          <p:cNvPr id="25" name="bm-d-3"/>
+          <p:cNvSpPr txBox="1"/>
+          <p:nvPr/>
+        </p:nvSpPr>
+        <p:spPr>
+          <a:xfrm>
+            <a:off x="822960" y="5303520"/>
+            <a:ext cx="3017520" cy="548640"/>
+          </a:xfrm>
+          <a:prstGeom prst="rect">
+            <a:avLst/>
+          </a:prstGeom>
+          <a:noFill/>
+          <a:ln/>
+        </p:spPr>
+        <p:txBody>
+          <a:bodyPr wrap="square" lIns="0" tIns="0" rIns="0" bIns="0" rtlCol="0" anchor="t"/>
+          <a:lstStyle/>
+          <a:p>
+            <a:pPr indent="0" marL="0">
+              <a:buNone/>
+            </a:pPr>
+            <a:r>
+              <a:rPr lang="en-US" sz="1500" dirty="0">
+                <a:solidFill>
+                  <a:schemeClr val="tx2"/>
+                </a:solidFill>
+              </a:rPr>
+              <a:t>blur · 어둡게 · 노이즈 · JPEG</a:t>
+            </a:r>
+            <a:endParaRPr lang="en-US" sz="1500" dirty="0"/>
+          </a:p>
+        </p:txBody>
+      </p:sp>
+      <p:sp>
+        <p:nvSpPr>
+          <p:cNvPr id="26" name="bm-4"/>
+          <p:cNvSpPr/>
+          <p:nvPr/>
+        </p:nvSpPr>
+        <p:spPr>
+          <a:xfrm>
+            <a:off x="4297680" y="4389120"/>
+            <a:ext cx="3566160" cy="1783080"/>
+          </a:xfrm>
+          <a:prstGeom prst="roundRect">
+            <a:avLst>
+              <a:gd name="adj" fmla="val 4103"/>
+            </a:avLst>
+          </a:prstGeom>
+          <a:solidFill>
+            <a:schemeClr val="bg2"/>
+          </a:solidFill>
+          <a:ln/>
+        </p:spPr>
+      </p:sp>
+      <p:sp>
+        <p:nvSpPr>
+          <p:cNvPr id="27" name="bm-h-4"/>
+          <p:cNvSpPr txBox="1"/>
+          <p:nvPr/>
+        </p:nvSpPr>
+        <p:spPr>
+          <a:xfrm>
+            <a:off x="4572000" y="4663440"/>
+            <a:ext cx="3017520" cy="457200"/>
+          </a:xfrm>
+          <a:prstGeom prst="rect">
+            <a:avLst/>
+          </a:prstGeom>
+          <a:noFill/>
+          <a:ln/>
+        </p:spPr>
+        <p:txBody>
+          <a:bodyPr wrap="square" lIns="0" tIns="0" rIns="0" bIns="0" rtlCol="0" anchor="t"/>
+          <a:lstStyle/>
+          <a:p>
+            <a:pPr indent="0" marL="0">
+              <a:buNone/>
+            </a:pPr>
+            <a:r>
+              <a:rPr lang="en-US" sz="2200" b="1" dirty="0">
+                <a:solidFill>
+                  <a:schemeClr val="accent3"/>
+                </a:solidFill>
+              </a:rPr>
+              <a:t>중복 검사</a:t>
+            </a:r>
+            <a:endParaRPr lang="en-US" sz="2200" dirty="0"/>
+          </a:p>
+        </p:txBody>
+      </p:sp>
+      <p:sp>
+        <p:nvSpPr>
+          <p:cNvPr id="28" name="bm-d-4"/>
+          <p:cNvSpPr txBox="1"/>
+          <p:nvPr/>
+        </p:nvSpPr>
+        <p:spPr>
+          <a:xfrm>
+            <a:off x="4572000" y="5303520"/>
+            <a:ext cx="3017520" cy="548640"/>
+          </a:xfrm>
+          <a:prstGeom prst="rect">
+            <a:avLst/>
+          </a:prstGeom>
+          <a:noFill/>
+          <a:ln/>
+        </p:spPr>
+        <p:txBody>
+          <a:bodyPr wrap="square" lIns="0" tIns="0" rIns="0" bIns="0" rtlCol="0" anchor="t"/>
+          <a:lstStyle/>
+          <a:p>
+            <a:pPr indent="0" marL="0">
+              <a:buNone/>
+            </a:pPr>
+            <a:r>
+              <a:rPr lang="en-US" sz="1500" dirty="0">
+                <a:solidFill>
+                  <a:schemeClr val="tx2"/>
+                </a:solidFill>
+              </a:rPr>
+              <a:t>dHash → 복사본 22장 발견</a:t>
+            </a:r>
+            <a:endParaRPr lang="en-US" sz="1500" dirty="0"/>
+          </a:p>
+        </p:txBody>
+      </p:sp>
+      <p:sp>
+        <p:nvSpPr>
+          <p:cNvPr id="29" name="bm-5"/>
+          <p:cNvSpPr/>
+          <p:nvPr/>
+        </p:nvSpPr>
+        <p:spPr>
+          <a:xfrm>
+            <a:off x="8046720" y="4389120"/>
+            <a:ext cx="3566160" cy="1783080"/>
+          </a:xfrm>
+          <a:prstGeom prst="roundRect">
+            <a:avLst>
+              <a:gd name="adj" fmla="val 4103"/>
+            </a:avLst>
+          </a:prstGeom>
+          <a:solidFill>
+            <a:schemeClr val="bg2"/>
+          </a:solidFill>
+          <a:ln/>
+        </p:spPr>
+      </p:sp>
+      <p:sp>
+        <p:nvSpPr>
+          <p:cNvPr id="30" name="bm-h-5"/>
+          <p:cNvSpPr txBox="1"/>
+          <p:nvPr/>
+        </p:nvSpPr>
+        <p:spPr>
+          <a:xfrm>
+            <a:off x="8321040" y="4663440"/>
+            <a:ext cx="3017520" cy="457200"/>
+          </a:xfrm>
+          <a:prstGeom prst="rect">
+            <a:avLst/>
+          </a:prstGeom>
+          <a:noFill/>
+          <a:ln/>
+        </p:spPr>
+        <p:txBody>
+          <a:bodyPr wrap="square" lIns="0" tIns="0" rIns="0" bIns="0" rtlCol="0" anchor="t"/>
+          <a:lstStyle/>
+          <a:p>
+            <a:pPr indent="0" marL="0">
+              <a:buNone/>
+            </a:pPr>
+            <a:r>
+              <a:rPr lang="en-US" sz="2200" b="1" dirty="0">
+                <a:solidFill>
+                  <a:schemeClr val="accent6"/>
+                </a:solidFill>
+              </a:rPr>
+              <a:t>속도</a:t>
+            </a:r>
+            <a:endParaRPr lang="en-US" sz="2200" dirty="0"/>
+          </a:p>
+        </p:txBody>
+      </p:sp>
+      <p:sp>
+        <p:nvSpPr>
+          <p:cNvPr id="31" name="bm-d-5"/>
+          <p:cNvSpPr txBox="1"/>
+          <p:nvPr/>
+        </p:nvSpPr>
+        <p:spPr>
+          <a:xfrm>
+            <a:off x="8321040" y="5303520"/>
+            <a:ext cx="3017520" cy="548640"/>
+          </a:xfrm>
+          <a:prstGeom prst="rect">
+            <a:avLst/>
+          </a:prstGeom>
+          <a:noFill/>
+          <a:ln/>
+        </p:spPr>
+        <p:txBody>
+          <a:bodyPr wrap="square" lIns="0" tIns="0" rIns="0" bIns="0" rtlCol="0" anchor="t"/>
+          <a:lstStyle/>
+          <a:p>
+            <a:pPr indent="0" marL="0">
+              <a:buNone/>
+            </a:pPr>
+            <a:r>
+              <a:rPr lang="en-US" sz="1500" dirty="0">
+                <a:solidFill>
+                  <a:schemeClr val="tx2"/>
+                </a:solidFill>
+              </a:rPr>
+              <a:t>CPU · iGPU · 사진 1장씩</a:t>
+            </a:r>
+            <a:endParaRPr lang="en-US" sz="1500" dirty="0"/>
+          </a:p>
+        </p:txBody>
+      </p:sp>
+      <p:sp>
+        <p:nvSpPr>
+          <p:cNvPr id="25" name="Slide Number Placeholder 0"/>
+          <p:cNvSpPr>
+            <a:spLocks noGrp="1"/>
+          </p:cNvSpPr>
+          <p:nvPr>
+            <p:ph type="sldNum" sz="quarter" idx="4294967295"/>
+          </p:nvPr>
+        </p:nvSpPr>
+        <p:spPr>
+          <a:xfrm>
+            <a:off x="11094415" y="6419088"/>
+            <a:ext cx="548640" cy="274320"/>
+          </a:xfrm>
+          <a:prstGeom prst="rect">
+            <a:avLst/>
+          </a:prstGeom>
+          <a:extLst>
+            <a:ext uri="{C572A759-6A51-4108-AA02-DFA0A04FC94B}">
+              <ma14:wrappingTextBoxFlag xmlns:ma14="http://schemas.microsoft.com/office/mac/drawingml/2011/main" val="0"/>
+            </a:ext>
+          </a:extLst>
+        </p:spPr>
+        <p:txBody>
+          <a:bodyPr/>
+          <a:lstStyle>
+            <a:lvl1pPr>
+              <a:defRPr sz="1000">
+                <a:solidFill>
+                  <a:schemeClr val="tx2"/>
+                </a:solidFill>
+              </a:defRPr>
+            </a:lvl1pPr>
+          </a:lstStyle>
+          <a:p>
+            <a:pPr algn="r"/>
+            <a:fld id="{F7021451-1387-4CA6-816F-3879F97B5CBC}" type="slidenum">
+              <a:rPr b="0" lang="en-US"/>
+              <a:t>8</a:t>
+            </a:fld>
+            <a:endParaRPr lang="en-US"/>
+          </a:p>
+        </p:txBody>
+      </p:sp>
+    </p:spTree>
+  </p:cSld>
+  <p:clrMapOvr>
+    <a:masterClrMapping/>
+  </p:clrMapOvr>
+</p:sld>
+</file>
+
+<file path=ppt/slides/slide9.xml><?xml version="1.0" encoding="utf-8"?>
+<p:sld xmlns:a="http://schemas.openxmlformats.org/drawingml/2006/main" xmlns:r="http://schemas.openxmlformats.org/officeDocument/2006/relationships" xmlns:p="http://schemas.openxmlformats.org/presentationml/2006/main">
+  <p:cSld name="Slide 9">
+    <p:spTree>
+      <p:nvGrpSpPr>
+        <p:cNvPr id="1" name=""/>
+        <p:cNvGrpSpPr/>
+        <p:nvPr/>
+      </p:nvGrpSpPr>
+      <p:grpSpPr>
+        <a:xfrm>
+          <a:off x="0" y="0"/>
+          <a:ext cx="0" cy="0"/>
+          <a:chOff x="0" y="0"/>
+          <a:chExt cx="0" cy="0"/>
+        </a:xfrm>
+      </p:grpSpPr>
+      <p:sp>
+        <p:nvSpPr>
+          <p:cNvPr id="2" name="Text 0"/>
+          <p:cNvSpPr/>
+          <p:nvPr>
+            <p:ph idx="100" type="title" hasCustomPrompt="1"/>
+          </p:nvPr>
+        </p:nvSpPr>
+        <p:spPr>
+          <a:xfrm>
+            <a:off x="548640" y="347472"/>
+            <a:ext cx="11094415" cy="685800"/>
+          </a:xfrm>
+          <a:prstGeom prst="rect">
+            <a:avLst/>
+          </a:prstGeom>
+          <a:noFill/>
+          <a:ln/>
+        </p:spPr>
+        <p:txBody>
+          <a:bodyPr wrap="square" lIns="0" tIns="0" rIns="0" bIns="0" rtlCol="0" anchor="ctr"/>
+          <a:lstStyle/>
+          <a:p>
+            <a:pPr algn="l" indent="0" marL="0">
+              <a:buNone/>
+            </a:pPr>
+            <a:r>
+              <a:rPr lang="en-US" sz="3200" b="1" dirty="0">
+                <a:solidFill>
+                  <a:schemeClr val="tx1"/>
+                </a:solidFill>
+              </a:rPr>
               <a:t>INT8 장단점</a:t>
             </a:r>
             <a:endParaRPr lang="en-US" sz="3200" dirty="0"/>
@@ -17845,7 +18839,7 @@
       </p:graphicFrame>
       <p:graphicFrame>
         <p:nvGraphicFramePr>
-          <p:cNvPr id="9" name="int8-table"/>
+          <p:cNvPr id="10" name="int8-table"/>
           <p:cNvGraphicFramePr>
             <a:graphicFrameLocks noGrp="1"/>
           </p:cNvGraphicFramePr>
@@ -19379,530 +20373,6 @@
               <a:t>놓침 증가 · 기준값 재설정</a:t>
             </a:r>
             <a:endParaRPr lang="en-US" sz="1600" dirty="0"/>
-          </a:p>
-        </p:txBody>
-      </p:sp>
-      <p:sp>
-        <p:nvSpPr>
-          <p:cNvPr id="25" name="Slide Number Placeholder 0"/>
-          <p:cNvSpPr>
-            <a:spLocks noGrp="1"/>
-          </p:cNvSpPr>
-          <p:nvPr>
-            <p:ph type="sldNum" sz="quarter" idx="4294967295"/>
-          </p:nvPr>
-        </p:nvSpPr>
-        <p:spPr>
-          <a:xfrm>
-            <a:off x="11094415" y="6419088"/>
-            <a:ext cx="548640" cy="274320"/>
-          </a:xfrm>
-          <a:prstGeom prst="rect">
-            <a:avLst/>
-          </a:prstGeom>
-          <a:extLst>
-            <a:ext uri="{C572A759-6A51-4108-AA02-DFA0A04FC94B}">
-              <ma14:wrappingTextBoxFlag xmlns:ma14="http://schemas.microsoft.com/office/mac/drawingml/2011/main" val="0"/>
-            </a:ext>
-          </a:extLst>
-        </p:spPr>
-        <p:txBody>
-          <a:bodyPr/>
-          <a:lstStyle>
-            <a:lvl1pPr>
-              <a:defRPr sz="1000">
-                <a:solidFill>
-                  <a:schemeClr val="tx2"/>
-                </a:solidFill>
-              </a:defRPr>
-            </a:lvl1pPr>
-          </a:lstStyle>
-          <a:p>
-            <a:pPr algn="r"/>
-            <a:fld id="{F7021451-1387-4CA6-816F-3879F97B5CBC}" type="slidenum">
-              <a:rPr b="0" lang="en-US"/>
-              <a:t>8</a:t>
-            </a:fld>
-            <a:endParaRPr lang="en-US"/>
-          </a:p>
-        </p:txBody>
-      </p:sp>
-    </p:spTree>
-  </p:cSld>
-  <p:clrMapOvr>
-    <a:masterClrMapping/>
-  </p:clrMapOvr>
-</p:sld>
-</file>
-
-<file path=ppt/slides/slide9.xml><?xml version="1.0" encoding="utf-8"?>
-<p:sld xmlns:a="http://schemas.openxmlformats.org/drawingml/2006/main" xmlns:r="http://schemas.openxmlformats.org/officeDocument/2006/relationships" xmlns:p="http://schemas.openxmlformats.org/presentationml/2006/main">
-  <p:cSld name="Slide 9">
-    <p:spTree>
-      <p:nvGrpSpPr>
-        <p:cNvPr id="1" name=""/>
-        <p:cNvGrpSpPr/>
-        <p:nvPr/>
-      </p:nvGrpSpPr>
-      <p:grpSpPr>
-        <a:xfrm>
-          <a:off x="0" y="0"/>
-          <a:ext cx="0" cy="0"/>
-          <a:chOff x="0" y="0"/>
-          <a:chExt cx="0" cy="0"/>
-        </a:xfrm>
-      </p:grpSpPr>
-      <p:sp>
-        <p:nvSpPr>
-          <p:cNvPr id="2" name="Text 0"/>
-          <p:cNvSpPr/>
-          <p:nvPr>
-            <p:ph idx="100" type="title" hasCustomPrompt="1"/>
-          </p:nvPr>
-        </p:nvSpPr>
-        <p:spPr>
-          <a:xfrm>
-            <a:off x="548640" y="347472"/>
-            <a:ext cx="11094415" cy="685800"/>
-          </a:xfrm>
-          <a:prstGeom prst="rect">
-            <a:avLst/>
-          </a:prstGeom>
-          <a:noFill/>
-          <a:ln/>
-        </p:spPr>
-        <p:txBody>
-          <a:bodyPr wrap="square" lIns="0" tIns="0" rIns="0" bIns="0" rtlCol="0" anchor="ctr"/>
-          <a:lstStyle/>
-          <a:p>
-            <a:pPr algn="l" indent="0" marL="0">
-              <a:buNone/>
-            </a:pPr>
-            <a:r>
-              <a:rPr lang="en-US" sz="3200" b="1" dirty="0">
-                <a:solidFill>
-                  <a:schemeClr val="tx1"/>
-                </a:solidFill>
-              </a:rPr>
-              <a:t>2차 데이터셋</a:t>
-            </a:r>
-            <a:endParaRPr lang="en-US" sz="3200" dirty="0"/>
-          </a:p>
-        </p:txBody>
-      </p:sp>
-      <p:pic>
-        <p:nvPicPr>
-          <p:cNvPr id="3" name="rf-0" descr="C:\Users\user\_se4nchoi\batteryvision\docs\submission\build\img\roboflow_v8.png">    </p:cNvPr>
-          <p:cNvPicPr>
-            <a:picLocks noChangeAspect="1"/>
-          </p:cNvPicPr>
-          <p:nvPr/>
-        </p:nvPicPr>
-        <p:blipFill>
-          <a:blip r:embed="rId1"/>
-          <a:stretch>
-            <a:fillRect/>
-          </a:stretch>
-        </p:blipFill>
-        <p:spPr>
-          <a:xfrm>
-            <a:off x="548640" y="1600200"/>
-            <a:ext cx="5440680" cy="3459761"/>
-          </a:xfrm>
-          <a:prstGeom prst="rect">
-            <a:avLst/>
-          </a:prstGeom>
-        </p:spPr>
-      </p:pic>
-      <p:sp>
-        <p:nvSpPr>
-          <p:cNvPr id="4" name="rf-tag-0-bg"/>
-          <p:cNvSpPr/>
-          <p:nvPr/>
-        </p:nvSpPr>
-        <p:spPr>
-          <a:xfrm>
-            <a:off x="548640" y="5197121"/>
-            <a:ext cx="731520" cy="347472"/>
-          </a:xfrm>
-          <a:prstGeom prst="roundRect">
-            <a:avLst>
-              <a:gd name="adj" fmla="val 13158"/>
-            </a:avLst>
-          </a:prstGeom>
-          <a:solidFill>
-            <a:schemeClr val="accent1">
-              <a:alpha val="20000"/>
-            </a:schemeClr>
-          </a:solidFill>
-          <a:ln w="12700">
-            <a:solidFill>
-              <a:schemeClr val="accent1"/>
-            </a:solidFill>
-            <a:prstDash val="solid"/>
-          </a:ln>
-        </p:spPr>
-      </p:sp>
-      <p:sp>
-        <p:nvSpPr>
-          <p:cNvPr id="5" name="rf-tag-0"/>
-          <p:cNvSpPr txBox="1"/>
-          <p:nvPr/>
-        </p:nvSpPr>
-        <p:spPr>
-          <a:xfrm>
-            <a:off x="548640" y="5197121"/>
-            <a:ext cx="731520" cy="347472"/>
-          </a:xfrm>
-          <a:prstGeom prst="rect">
-            <a:avLst/>
-          </a:prstGeom>
-          <a:noFill/>
-          <a:ln/>
-        </p:spPr>
-        <p:txBody>
-          <a:bodyPr wrap="square" lIns="0" tIns="0" rIns="0" bIns="0" rtlCol="0" anchor="ctr"/>
-          <a:lstStyle/>
-          <a:p>
-            <a:pPr algn="ctr" indent="0" marL="0">
-              <a:buNone/>
-            </a:pPr>
-            <a:r>
-              <a:rPr lang="en-US" sz="1300" b="1" dirty="0">
-                <a:solidFill>
-                  <a:schemeClr val="accent1"/>
-                </a:solidFill>
-              </a:rPr>
-              <a:t>1차</a:t>
-            </a:r>
-            <a:endParaRPr lang="en-US" sz="1300" dirty="0"/>
-          </a:p>
-        </p:txBody>
-      </p:sp>
-      <p:sp>
-        <p:nvSpPr>
-          <p:cNvPr id="6" name="rf-cap-0"/>
-          <p:cNvSpPr txBox="1"/>
-          <p:nvPr/>
-        </p:nvSpPr>
-        <p:spPr>
-          <a:xfrm>
-            <a:off x="1417320" y="5197121"/>
-            <a:ext cx="4526280" cy="347472"/>
-          </a:xfrm>
-          <a:prstGeom prst="rect">
-            <a:avLst/>
-          </a:prstGeom>
-          <a:noFill/>
-          <a:ln/>
-        </p:spPr>
-        <p:txBody>
-          <a:bodyPr wrap="square" lIns="0" tIns="0" rIns="0" bIns="0" rtlCol="0" anchor="ctr"/>
-          <a:lstStyle/>
-          <a:p>
-            <a:pPr indent="0" marL="0">
-              <a:buNone/>
-            </a:pPr>
-            <a:r>
-              <a:rPr lang="en-US" sz="1500" dirty="0">
-                <a:solidFill>
-                  <a:schemeClr val="tx1"/>
-                </a:solidFill>
-              </a:rPr>
-              <a:t>v8 · 3,673장 · 학습</a:t>
-            </a:r>
-            <a:endParaRPr lang="en-US" sz="1500" dirty="0"/>
-          </a:p>
-        </p:txBody>
-      </p:sp>
-      <p:pic>
-        <p:nvPicPr>
-          <p:cNvPr id="7" name="rf-1" descr="C:\Users\user\_se4nchoi\batteryvision\docs\submission\build\img\roboflow_v2.png">    </p:cNvPr>
-          <p:cNvPicPr>
-            <a:picLocks noChangeAspect="1"/>
-          </p:cNvPicPr>
-          <p:nvPr/>
-        </p:nvPicPr>
-        <p:blipFill>
-          <a:blip r:embed="rId2"/>
-          <a:stretch>
-            <a:fillRect/>
-          </a:stretch>
-        </p:blipFill>
-        <p:spPr>
-          <a:xfrm>
-            <a:off x="6190488" y="1600200"/>
-            <a:ext cx="5440680" cy="3320210"/>
-          </a:xfrm>
-          <a:prstGeom prst="rect">
-            <a:avLst/>
-          </a:prstGeom>
-        </p:spPr>
-      </p:pic>
-      <p:sp>
-        <p:nvSpPr>
-          <p:cNvPr id="8" name="rf-tag-1-bg"/>
-          <p:cNvSpPr/>
-          <p:nvPr/>
-        </p:nvSpPr>
-        <p:spPr>
-          <a:xfrm>
-            <a:off x="6190488" y="5057570"/>
-            <a:ext cx="731520" cy="347472"/>
-          </a:xfrm>
-          <a:prstGeom prst="roundRect">
-            <a:avLst>
-              <a:gd name="adj" fmla="val 13158"/>
-            </a:avLst>
-          </a:prstGeom>
-          <a:solidFill>
-            <a:schemeClr val="accent3">
-              <a:alpha val="20000"/>
-            </a:schemeClr>
-          </a:solidFill>
-          <a:ln w="12700">
-            <a:solidFill>
-              <a:schemeClr val="accent3"/>
-            </a:solidFill>
-            <a:prstDash val="solid"/>
-          </a:ln>
-        </p:spPr>
-      </p:sp>
-      <p:sp>
-        <p:nvSpPr>
-          <p:cNvPr id="9" name="rf-tag-1"/>
-          <p:cNvSpPr txBox="1"/>
-          <p:nvPr/>
-        </p:nvSpPr>
-        <p:spPr>
-          <a:xfrm>
-            <a:off x="6190488" y="5057570"/>
-            <a:ext cx="731520" cy="347472"/>
-          </a:xfrm>
-          <a:prstGeom prst="rect">
-            <a:avLst/>
-          </a:prstGeom>
-          <a:noFill/>
-          <a:ln/>
-        </p:spPr>
-        <p:txBody>
-          <a:bodyPr wrap="square" lIns="0" tIns="0" rIns="0" bIns="0" rtlCol="0" anchor="ctr"/>
-          <a:lstStyle/>
-          <a:p>
-            <a:pPr algn="ctr" indent="0" marL="0">
-              <a:buNone/>
-            </a:pPr>
-            <a:r>
-              <a:rPr lang="en-US" sz="1300" b="1" dirty="0">
-                <a:solidFill>
-                  <a:schemeClr val="accent3"/>
-                </a:solidFill>
-              </a:rPr>
-              <a:t>2차</a:t>
-            </a:r>
-            <a:endParaRPr lang="en-US" sz="1300" dirty="0"/>
-          </a:p>
-        </p:txBody>
-      </p:sp>
-      <p:sp>
-        <p:nvSpPr>
-          <p:cNvPr id="10" name="rf-cap-1"/>
-          <p:cNvSpPr txBox="1"/>
-          <p:nvPr/>
-        </p:nvSpPr>
-        <p:spPr>
-          <a:xfrm>
-            <a:off x="7059168" y="5057570"/>
-            <a:ext cx="4526280" cy="347472"/>
-          </a:xfrm>
-          <a:prstGeom prst="rect">
-            <a:avLst/>
-          </a:prstGeom>
-          <a:noFill/>
-          <a:ln/>
-        </p:spPr>
-        <p:txBody>
-          <a:bodyPr wrap="square" lIns="0" tIns="0" rIns="0" bIns="0" rtlCol="0" anchor="ctr"/>
-          <a:lstStyle/>
-          <a:p>
-            <a:pPr indent="0" marL="0">
-              <a:buNone/>
-            </a:pPr>
-            <a:r>
-              <a:rPr lang="en-US" sz="1500" dirty="0">
-                <a:solidFill>
-                  <a:schemeClr val="tx1"/>
-                </a:solidFill>
-              </a:rPr>
-              <a:t>v2 · 720장 · 테스트만</a:t>
-            </a:r>
-            <a:endParaRPr lang="en-US" sz="1500" dirty="0"/>
-          </a:p>
-        </p:txBody>
-      </p:sp>
-      <p:sp>
-        <p:nvSpPr>
-          <p:cNvPr id="11" name="dedup-bg"/>
-          <p:cNvSpPr/>
-          <p:nvPr/>
-        </p:nvSpPr>
-        <p:spPr>
-          <a:xfrm>
-            <a:off x="548640" y="5715000"/>
-            <a:ext cx="2743200" cy="457200"/>
-          </a:xfrm>
-          <a:prstGeom prst="roundRect">
-            <a:avLst>
-              <a:gd name="adj" fmla="val 10000"/>
-            </a:avLst>
-          </a:prstGeom>
-          <a:solidFill>
-            <a:schemeClr val="accent3">
-              <a:alpha val="20000"/>
-            </a:schemeClr>
-          </a:solidFill>
-          <a:ln w="12700">
-            <a:solidFill>
-              <a:schemeClr val="accent3"/>
-            </a:solidFill>
-            <a:prstDash val="solid"/>
-          </a:ln>
-        </p:spPr>
-      </p:sp>
-      <p:sp>
-        <p:nvSpPr>
-          <p:cNvPr id="12" name="dedup"/>
-          <p:cNvSpPr txBox="1"/>
-          <p:nvPr/>
-        </p:nvSpPr>
-        <p:spPr>
-          <a:xfrm>
-            <a:off x="548640" y="5715000"/>
-            <a:ext cx="2743200" cy="457200"/>
-          </a:xfrm>
-          <a:prstGeom prst="rect">
-            <a:avLst/>
-          </a:prstGeom>
-          <a:noFill/>
-          <a:ln/>
-        </p:spPr>
-        <p:txBody>
-          <a:bodyPr wrap="square" lIns="0" tIns="0" rIns="0" bIns="0" rtlCol="0" anchor="ctr"/>
-          <a:lstStyle/>
-          <a:p>
-            <a:pPr algn="ctr" indent="0" marL="0">
-              <a:buNone/>
-            </a:pPr>
-            <a:r>
-              <a:rPr lang="en-US" sz="1300" b="1" dirty="0">
-                <a:solidFill>
-                  <a:schemeClr val="accent3"/>
-                </a:solidFill>
-              </a:rPr>
-              <a:t>중복 140장 제거</a:t>
-            </a:r>
-            <a:endParaRPr lang="en-US" sz="1300" dirty="0"/>
-          </a:p>
-        </p:txBody>
-      </p:sp>
-      <p:sp>
-        <p:nvSpPr>
-          <p:cNvPr id="13" name="dedup-arrow"/>
-          <p:cNvSpPr txBox="1"/>
-          <p:nvPr/>
-        </p:nvSpPr>
-        <p:spPr>
-          <a:xfrm>
-            <a:off x="3337560" y="5715000"/>
-            <a:ext cx="457200" cy="457200"/>
-          </a:xfrm>
-          <a:prstGeom prst="rect">
-            <a:avLst/>
-          </a:prstGeom>
-          <a:noFill/>
-          <a:ln/>
-        </p:spPr>
-        <p:txBody>
-          <a:bodyPr wrap="square" lIns="0" tIns="0" rIns="0" bIns="0" rtlCol="0" anchor="ctr"/>
-          <a:lstStyle/>
-          <a:p>
-            <a:pPr algn="ctr" indent="0" marL="0">
-              <a:buNone/>
-            </a:pPr>
-            <a:r>
-              <a:rPr lang="en-US" sz="2000" b="1" dirty="0">
-                <a:solidFill>
-                  <a:schemeClr val="tx2"/>
-                </a:solidFill>
-              </a:rPr>
-              <a:t>→</a:t>
-            </a:r>
-            <a:endParaRPr lang="en-US" sz="2000" dirty="0"/>
-          </a:p>
-        </p:txBody>
-      </p:sp>
-      <p:sp>
-        <p:nvSpPr>
-          <p:cNvPr id="14" name="clean45-bg"/>
-          <p:cNvSpPr/>
-          <p:nvPr/>
-        </p:nvSpPr>
-        <p:spPr>
-          <a:xfrm>
-            <a:off x="3840480" y="5715000"/>
-            <a:ext cx="3840480" cy="457200"/>
-          </a:xfrm>
-          <a:prstGeom prst="roundRect">
-            <a:avLst>
-              <a:gd name="adj" fmla="val 10000"/>
-            </a:avLst>
-          </a:prstGeom>
-          <a:solidFill>
-            <a:schemeClr val="accent1">
-              <a:alpha val="20000"/>
-            </a:schemeClr>
-          </a:solidFill>
-          <a:ln w="12700">
-            <a:solidFill>
-              <a:schemeClr val="accent1"/>
-            </a:solidFill>
-            <a:prstDash val="solid"/>
-          </a:ln>
-        </p:spPr>
-      </p:sp>
-      <p:sp>
-        <p:nvSpPr>
-          <p:cNvPr id="15" name="clean45"/>
-          <p:cNvSpPr txBox="1"/>
-          <p:nvPr/>
-        </p:nvSpPr>
-        <p:spPr>
-          <a:xfrm>
-            <a:off x="3840480" y="5715000"/>
-            <a:ext cx="3840480" cy="457200"/>
-          </a:xfrm>
-          <a:prstGeom prst="rect">
-            <a:avLst/>
-          </a:prstGeom>
-          <a:noFill/>
-          <a:ln/>
-        </p:spPr>
-        <p:txBody>
-          <a:bodyPr wrap="square" lIns="0" tIns="0" rIns="0" bIns="0" rtlCol="0" anchor="ctr"/>
-          <a:lstStyle/>
-          <a:p>
-            <a:pPr algn="ctr" indent="0" marL="0">
-              <a:buNone/>
-            </a:pPr>
-            <a:r>
-              <a:rPr lang="en-US" sz="1300" b="1" dirty="0">
-                <a:solidFill>
-                  <a:schemeClr val="accent1"/>
-                </a:solidFill>
-              </a:rPr>
-              <a:t>45장 (결함 30 · 정상 15)</a:t>
-            </a:r>
-            <a:endParaRPr lang="en-US" sz="1300" dirty="0"/>
           </a:p>
         </p:txBody>
       </p:sp>

--- a/docs/submission/BatteryVision_발표.pptx
+++ b/docs/submission/BatteryVision_발표.pptx
@@ -121,13 +121,13 @@
   <p:extLst>
     <p:ext uri="{521415D9-36F7-43E2-AB2F-B90AF26B5E84}">
       <p14:sectionLst xmlns:p14="http://schemas.microsoft.com/office/powerpoint/2010/main">
-        <p14:section name="도입" id="{23a3f643-68fc-c894-a2b4-ca8ffc357475}">
+        <p14:section name="도입" id="{05a3184a-83d5-6ee7-5b5a-75d762406ad0}">
           <p14:sldIdLst>
             <p14:sldId id="256"/>
             <p14:sldId id="257"/>
           </p14:sldIdLst>
         </p14:section>
-        <p14:section name="실험" id="{baceac97-86f8-dd8c-29e7-01551e168b6f}">
+        <p14:section name="실험" id="{c75d7b2c-b3ca-e551-0f3d-20a1422e5b5a}">
           <p14:sldIdLst>
             <p14:sldId id="258"/>
             <p14:sldId id="259"/>
@@ -137,18 +137,18 @@
             <p14:sldId id="263"/>
           </p14:sldIdLst>
         </p14:section>
-        <p14:section name="최적화" id="{de26dd4a-00d4-ca1e-8a58-1d2d2c89d2d9}">
+        <p14:section name="최적화" id="{4418b4e2-95b9-bc88-21c9-31e48a91f65e}">
           <p14:sldIdLst>
             <p14:sldId id="264"/>
           </p14:sldIdLst>
         </p14:section>
-        <p14:section name="검증" id="{1c50a450-3aec-e836-af0c-3de5e8fa1ad1}">
+        <p14:section name="검증" id="{88b3e689-2d9b-2601-c4e9-a25e890eec97}">
           <p14:sldIdLst>
             <p14:sldId id="265"/>
             <p14:sldId id="266"/>
           </p14:sldIdLst>
         </p14:section>
-        <p14:section name="정리" id="{19763157-0b2f-ef15-3331-995879a9cba5}">
+        <p14:section name="정리" id="{6f429778-5dd0-498f-1482-c2bb7826bedf}">
           <p14:sldIdLst>
             <p14:sldId id="267"/>
             <p14:sldId id="268"/>
@@ -2091,7 +2091,7 @@
           <a:p>
             <a:r>
               <a:rPr lang="en-US" dirty="0"/>
-              <a:t>처음 결과는 mAP 93%로 좋아 보였습니다. 하지만 데이터를 다시 보니 문제가 있었습니다. Roboflow 데이터셋을 통째로 Geti에 올리면서 테스트 153장도 함께 들어갔고, Geti가 이를 다시 나눠 학습했습니다. 그래서 1차 테스트 사진 중 일부는 모델이 학습 때 본 사진일 수 있습니다. 게다가 22장은 학습 사진과 사실상 같은 사진이었습니다. 직접 만든 데이터셋이 아니라서 놓친 부분입니다. 그래서 1차 점수는 모델끼리 비교하는 데만 쓰고, 처음 보는 사진에서의 성능은 2차 세트로 확인했습니다.</a:t>
+              <a:t>왼쪽은 Geti 화면입니다. 세 모델 모두 같은 2,800장으로 학습했고, Geti 점수는 ATSS 86%, 나머지 81%입니다. 다만 Roboflow가 원본마다 증강 사본 3장을 만들어 두었고 Geti가 이를 무작위로 나눴기 때문에, 같은 원본의 사본이 Geti 학습과 테스트에 함께 들어갔을 가능성이 높아 Geti 점수도 낙관적입니다. 오른쪽은 직접 만든 벤치마크로 잰 값인데 순서가 같습니다. 파라미터가 가장 적은 ATSS가 가장 정확했고, 학습에 안 쓴 2차 세트에서도 ATSS가 YOLOX-S보다 훨씬 많이 잡았습니다. 다만 '작다'는 파라미터 기준이고, 연산량은 Tiny가 가장 적습니다. 왜 ATSS가 이겼는지는 가설 단계입니다. ATSS는 992×800으로 학습해 결함을 1.5배 크게 보고, 데이터가 2,800장으로 적어 작은 모델이 덜 과적합했을 수 있습니다. 모델마다 한 번씩만 학습해서 확정할 수는 없습니다.</a:t>
             </a:r>
             <a:endParaRPr lang="en-US" dirty="0"/>
           </a:p>
@@ -2179,7 +2179,7 @@
           <a:p>
             <a:r>
               <a:rPr lang="en-US" dirty="0"/>
-              <a:t>왼쪽은 Geti 화면입니다. 세 모델 모두 같은 2,800장으로 학습했고, Geti 점수는 ATSS 86%, 나머지 81%입니다. 다만 Roboflow가 원본마다 증강 사본 3장을 만들어 두었고 Geti가 이를 무작위로 나눴기 때문에, 같은 원본의 사본이 Geti 학습과 테스트에 함께 들어갔을 가능성이 높아 Geti 점수도 낙관적입니다. 오른쪽은 직접 만든 벤치마크로 잰 값인데 순서가 같습니다. 파라미터가 가장 적은 ATSS가 가장 정확했고, 학습에 안 쓴 2차 세트에서도 ATSS가 YOLOX-S보다 훨씬 많이 잡았습니다. 다만 '작다'는 파라미터 기준이고, 연산량은 Tiny가 가장 적습니다. 왜 ATSS가 이겼는지는 가설 단계입니다. ATSS는 992×800으로 학습해 결함을 1.5배 크게 보고, 데이터가 2,800장으로 적어 작은 모델이 덜 과적합했을 수 있습니다. 모델마다 한 번씩만 학습해서 확정할 수는 없습니다.</a:t>
+              <a:t>처음 결과는 mAP 93%로 좋아 보였습니다. 하지만 데이터를 다시 보니 문제가 있었습니다. Roboflow 데이터셋을 통째로 Geti에 올리면서 테스트 153장도 함께 들어갔고, Geti가 이를 다시 나눠 학습했습니다. 그래서 1차 테스트 사진 중 일부는 모델이 학습 때 본 사진일 수 있습니다. 게다가 22장은 학습 사진과 사실상 같은 사진이었습니다. 직접 만든 데이터셋이 아니라서 놓친 부분입니다. 그래서 1차 점수는 모델끼리 비교하는 데만 쓰고, 처음 보는 사진에서의 성능은 2차 세트로 확인했습니다.</a:t>
             </a:r>
             <a:endParaRPr lang="en-US" dirty="0"/>
           </a:p>
@@ -7646,7 +7646,7 @@
                           <a:ea typeface="Malgun Gothic" pitchFamily="34" charset="-122"/>
                           <a:cs typeface="Malgun Gothic" pitchFamily="34" charset="-120"/>
                         </a:rPr>
-                        <a:t>과대평가 수치 (93%)</a:t>
+                        <a:t>낙관적인 Geti score</a:t>
                       </a:r>
                       <a:endParaRPr lang="en-US" sz="1500" dirty="0">
                         <a:latin typeface="Malgun Gothic" charset="0"/>
@@ -7714,7 +7714,7 @@
                           <a:ea typeface="Malgun Gothic" pitchFamily="34" charset="-122"/>
                           <a:cs typeface="Malgun Gothic" pitchFamily="34" charset="-120"/>
                         </a:rPr>
-                        <a:t>테스트 사진 학습 포함 · 복사본 22장</a:t>
+                        <a:t>증강본이 학습·테스트에 섞임</a:t>
                       </a:r>
                       <a:endParaRPr lang="en-US" sz="1500" dirty="0">
                         <a:latin typeface="Malgun Gothic" charset="0"/>
@@ -7776,13 +7776,287 @@
                       <a:r>
                         <a:rPr lang="en-US" sz="1500" b="1" dirty="0">
                           <a:solidFill>
-                            <a:schemeClr val="accent6"/>
+                            <a:schemeClr val="accent3"/>
                           </a:solidFill>
                           <a:latin typeface="Malgun Gothic" pitchFamily="34" charset="0"/>
                           <a:ea typeface="Malgun Gothic" pitchFamily="34" charset="-122"/>
                           <a:cs typeface="Malgun Gothic" pitchFamily="34" charset="-120"/>
                         </a:rPr>
-                        <a:t>확인</a:t>
+                        <a:t>추정</a:t>
+                      </a:r>
+                      <a:endParaRPr lang="en-US" sz="1500" dirty="0">
+                        <a:latin typeface="Malgun Gothic" charset="0"/>
+                        <a:ea typeface="Malgun Gothic" charset="0"/>
+                        <a:cs typeface="Malgun Gothic" charset="0"/>
+                      </a:endParaRPr>
+                    </a:p>
+                  </a:txBody>
+                  <a:tcPr marL="91440" marR="91440" marT="45720" marB="45720" anchor="ctr">
+                    <a:lnL w="9525" cap="flat" cmpd="sng" algn="ctr">
+                      <a:solidFill>
+                        <a:srgbClr val="3A3F48"/>
+                      </a:solidFill>
+                      <a:prstDash val="solid"/>
+                      <a:round/>
+                      <a:headEnd type="none" w="med" len="med"/>
+                      <a:tailEnd type="none" w="med" len="med"/>
+                    </a:lnL>
+                    <a:lnR w="9525" cap="flat" cmpd="sng" algn="ctr">
+                      <a:solidFill>
+                        <a:srgbClr val="3A3F48"/>
+                      </a:solidFill>
+                      <a:prstDash val="solid"/>
+                      <a:round/>
+                      <a:headEnd type="none" w="med" len="med"/>
+                      <a:tailEnd type="none" w="med" len="med"/>
+                    </a:lnR>
+                    <a:lnT w="9525" cap="flat" cmpd="sng" algn="ctr">
+                      <a:solidFill>
+                        <a:srgbClr val="3A3F48"/>
+                      </a:solidFill>
+                      <a:prstDash val="solid"/>
+                      <a:round/>
+                      <a:headEnd type="none" w="med" len="med"/>
+                      <a:tailEnd type="none" w="med" len="med"/>
+                    </a:lnT>
+                    <a:lnB w="9525" cap="flat" cmpd="sng" algn="ctr">
+                      <a:solidFill>
+                        <a:srgbClr val="3A3F48"/>
+                      </a:solidFill>
+                      <a:prstDash val="solid"/>
+                      <a:round/>
+                      <a:headEnd type="none" w="med" len="med"/>
+                      <a:tailEnd type="none" w="med" len="med"/>
+                    </a:lnB>
+                    <a:solidFill>
+                      <a:srgbClr val="23272F"/>
+                    </a:solidFill>
+                  </a:tcPr>
+                </a:tc>
+              </a:tr>
+              <a:tr h="420624">
+                <a:tc>
+                  <a:txBody>
+                    <a:bodyPr/>
+                    <a:lstStyle/>
+                    <a:p>
+                      <a:pPr algn="ctr" indent="0" marL="0">
+                        <a:buNone/>
+                      </a:pPr>
+                      <a:r>
+                        <a:rPr lang="en-US" sz="1500" dirty="0">
+                          <a:solidFill>
+                            <a:schemeClr val="tx2"/>
+                          </a:solidFill>
+                          <a:latin typeface="Malgun Gothic" pitchFamily="34" charset="0"/>
+                          <a:ea typeface="Malgun Gothic" pitchFamily="34" charset="-122"/>
+                          <a:cs typeface="Malgun Gothic" pitchFamily="34" charset="-120"/>
+                        </a:rPr>
+                        <a:t>4</a:t>
+                      </a:r>
+                      <a:endParaRPr lang="en-US" sz="1500" dirty="0">
+                        <a:latin typeface="Malgun Gothic" charset="0"/>
+                        <a:ea typeface="Malgun Gothic" charset="0"/>
+                        <a:cs typeface="Malgun Gothic" charset="0"/>
+                      </a:endParaRPr>
+                    </a:p>
+                  </a:txBody>
+                  <a:tcPr marL="91440" marR="91440" marT="45720" marB="45720" anchor="ctr">
+                    <a:lnL w="9525" cap="flat" cmpd="sng" algn="ctr">
+                      <a:solidFill>
+                        <a:srgbClr val="3A3F48"/>
+                      </a:solidFill>
+                      <a:prstDash val="solid"/>
+                      <a:round/>
+                      <a:headEnd type="none" w="med" len="med"/>
+                      <a:tailEnd type="none" w="med" len="med"/>
+                    </a:lnL>
+                    <a:lnR w="9525" cap="flat" cmpd="sng" algn="ctr">
+                      <a:solidFill>
+                        <a:srgbClr val="3A3F48"/>
+                      </a:solidFill>
+                      <a:prstDash val="solid"/>
+                      <a:round/>
+                      <a:headEnd type="none" w="med" len="med"/>
+                      <a:tailEnd type="none" w="med" len="med"/>
+                    </a:lnR>
+                    <a:lnT w="9525" cap="flat" cmpd="sng" algn="ctr">
+                      <a:solidFill>
+                        <a:srgbClr val="3A3F48"/>
+                      </a:solidFill>
+                      <a:prstDash val="solid"/>
+                      <a:round/>
+                      <a:headEnd type="none" w="med" len="med"/>
+                      <a:tailEnd type="none" w="med" len="med"/>
+                    </a:lnT>
+                    <a:lnB w="9525" cap="flat" cmpd="sng" algn="ctr">
+                      <a:solidFill>
+                        <a:srgbClr val="3A3F48"/>
+                      </a:solidFill>
+                      <a:prstDash val="solid"/>
+                      <a:round/>
+                      <a:headEnd type="none" w="med" len="med"/>
+                      <a:tailEnd type="none" w="med" len="med"/>
+                    </a:lnB>
+                    <a:solidFill>
+                      <a:srgbClr val="23272F"/>
+                    </a:solidFill>
+                  </a:tcPr>
+                </a:tc>
+                <a:tc>
+                  <a:txBody>
+                    <a:bodyPr/>
+                    <a:lstStyle/>
+                    <a:p>
+                      <a:pPr indent="0" marL="0">
+                        <a:buNone/>
+                      </a:pPr>
+                      <a:r>
+                        <a:rPr lang="en-US" sz="1500" b="1" dirty="0">
+                          <a:solidFill>
+                            <a:schemeClr val="tx1"/>
+                          </a:solidFill>
+                          <a:latin typeface="Malgun Gothic" pitchFamily="34" charset="0"/>
+                          <a:ea typeface="Malgun Gothic" pitchFamily="34" charset="-122"/>
+                          <a:cs typeface="Malgun Gothic" pitchFamily="34" charset="-120"/>
+                        </a:rPr>
+                        <a:t>ATSS 최고평가</a:t>
+                      </a:r>
+                      <a:endParaRPr lang="en-US" sz="1500" dirty="0">
+                        <a:latin typeface="Malgun Gothic" charset="0"/>
+                        <a:ea typeface="Malgun Gothic" charset="0"/>
+                        <a:cs typeface="Malgun Gothic" charset="0"/>
+                      </a:endParaRPr>
+                    </a:p>
+                  </a:txBody>
+                  <a:tcPr marL="91440" marR="91440" marT="45720" marB="45720" anchor="ctr">
+                    <a:lnL w="9525" cap="flat" cmpd="sng" algn="ctr">
+                      <a:solidFill>
+                        <a:srgbClr val="3A3F48"/>
+                      </a:solidFill>
+                      <a:prstDash val="solid"/>
+                      <a:round/>
+                      <a:headEnd type="none" w="med" len="med"/>
+                      <a:tailEnd type="none" w="med" len="med"/>
+                    </a:lnL>
+                    <a:lnR w="9525" cap="flat" cmpd="sng" algn="ctr">
+                      <a:solidFill>
+                        <a:srgbClr val="3A3F48"/>
+                      </a:solidFill>
+                      <a:prstDash val="solid"/>
+                      <a:round/>
+                      <a:headEnd type="none" w="med" len="med"/>
+                      <a:tailEnd type="none" w="med" len="med"/>
+                    </a:lnR>
+                    <a:lnT w="9525" cap="flat" cmpd="sng" algn="ctr">
+                      <a:solidFill>
+                        <a:srgbClr val="3A3F48"/>
+                      </a:solidFill>
+                      <a:prstDash val="solid"/>
+                      <a:round/>
+                      <a:headEnd type="none" w="med" len="med"/>
+                      <a:tailEnd type="none" w="med" len="med"/>
+                    </a:lnT>
+                    <a:lnB w="9525" cap="flat" cmpd="sng" algn="ctr">
+                      <a:solidFill>
+                        <a:srgbClr val="3A3F48"/>
+                      </a:solidFill>
+                      <a:prstDash val="solid"/>
+                      <a:round/>
+                      <a:headEnd type="none" w="med" len="med"/>
+                      <a:tailEnd type="none" w="med" len="med"/>
+                    </a:lnB>
+                    <a:solidFill>
+                      <a:srgbClr val="23272F"/>
+                    </a:solidFill>
+                  </a:tcPr>
+                </a:tc>
+                <a:tc>
+                  <a:txBody>
+                    <a:bodyPr/>
+                    <a:lstStyle/>
+                    <a:p>
+                      <a:pPr indent="0" marL="0">
+                        <a:buNone/>
+                      </a:pPr>
+                      <a:r>
+                        <a:rPr lang="en-US" sz="1500" dirty="0">
+                          <a:solidFill>
+                            <a:schemeClr val="tx1"/>
+                          </a:solidFill>
+                          <a:latin typeface="Malgun Gothic" pitchFamily="34" charset="0"/>
+                          <a:ea typeface="Malgun Gothic" pitchFamily="34" charset="-122"/>
+                          <a:cs typeface="Malgun Gothic" pitchFamily="34" charset="-120"/>
+                        </a:rPr>
+                        <a:t>입력 해상도 992×800 vs 640×640</a:t>
+                      </a:r>
+                      <a:endParaRPr lang="en-US" sz="1500" dirty="0">
+                        <a:latin typeface="Malgun Gothic" charset="0"/>
+                        <a:ea typeface="Malgun Gothic" charset="0"/>
+                        <a:cs typeface="Malgun Gothic" charset="0"/>
+                      </a:endParaRPr>
+                    </a:p>
+                  </a:txBody>
+                  <a:tcPr marL="91440" marR="91440" marT="45720" marB="45720" anchor="ctr">
+                    <a:lnL w="9525" cap="flat" cmpd="sng" algn="ctr">
+                      <a:solidFill>
+                        <a:srgbClr val="3A3F48"/>
+                      </a:solidFill>
+                      <a:prstDash val="solid"/>
+                      <a:round/>
+                      <a:headEnd type="none" w="med" len="med"/>
+                      <a:tailEnd type="none" w="med" len="med"/>
+                    </a:lnL>
+                    <a:lnR w="9525" cap="flat" cmpd="sng" algn="ctr">
+                      <a:solidFill>
+                        <a:srgbClr val="3A3F48"/>
+                      </a:solidFill>
+                      <a:prstDash val="solid"/>
+                      <a:round/>
+                      <a:headEnd type="none" w="med" len="med"/>
+                      <a:tailEnd type="none" w="med" len="med"/>
+                    </a:lnR>
+                    <a:lnT w="9525" cap="flat" cmpd="sng" algn="ctr">
+                      <a:solidFill>
+                        <a:srgbClr val="3A3F48"/>
+                      </a:solidFill>
+                      <a:prstDash val="solid"/>
+                      <a:round/>
+                      <a:headEnd type="none" w="med" len="med"/>
+                      <a:tailEnd type="none" w="med" len="med"/>
+                    </a:lnT>
+                    <a:lnB w="9525" cap="flat" cmpd="sng" algn="ctr">
+                      <a:solidFill>
+                        <a:srgbClr val="3A3F48"/>
+                      </a:solidFill>
+                      <a:prstDash val="solid"/>
+                      <a:round/>
+                      <a:headEnd type="none" w="med" len="med"/>
+                      <a:tailEnd type="none" w="med" len="med"/>
+                    </a:lnB>
+                    <a:solidFill>
+                      <a:srgbClr val="23272F"/>
+                    </a:solidFill>
+                  </a:tcPr>
+                </a:tc>
+                <a:tc>
+                  <a:txBody>
+                    <a:bodyPr/>
+                    <a:lstStyle/>
+                    <a:p>
+                      <a:pPr algn="ctr" indent="0" marL="0">
+                        <a:buNone/>
+                      </a:pPr>
+                      <a:r>
+                        <a:rPr lang="en-US" sz="1500" b="1" dirty="0">
+                          <a:solidFill>
+                            <a:schemeClr val="accent3"/>
+                          </a:solidFill>
+                          <a:latin typeface="Malgun Gothic" pitchFamily="34" charset="0"/>
+                          <a:ea typeface="Malgun Gothic" pitchFamily="34" charset="-122"/>
+                          <a:cs typeface="Malgun Gothic" pitchFamily="34" charset="-120"/>
+                        </a:rPr>
+                        <a:t>추정</a:t>
                       </a:r>
                       <a:endParaRPr lang="en-US" sz="1500" dirty="0">
                         <a:latin typeface="Malgun Gothic" charset="0"/>
@@ -7920,7 +8194,7 @@
                           <a:ea typeface="Malgun Gothic" pitchFamily="34" charset="-122"/>
                           <a:cs typeface="Malgun Gothic" pitchFamily="34" charset="-120"/>
                         </a:rPr>
-                        <a:t>낙관적인 Geti score</a:t>
+                        <a:t>과대평가 수치 (93%)</a:t>
                       </a:r>
                       <a:endParaRPr lang="en-US" sz="1500" dirty="0">
                         <a:latin typeface="Malgun Gothic" charset="0"/>
@@ -7988,7 +8262,7 @@
                           <a:ea typeface="Malgun Gothic" pitchFamily="34" charset="-122"/>
                           <a:cs typeface="Malgun Gothic" pitchFamily="34" charset="-120"/>
                         </a:rPr>
-                        <a:t>증강본이 학습·테스트에 섞임</a:t>
+                        <a:t>테스트 사진 학습 포함 · 복사본 22장</a:t>
                       </a:r>
                       <a:endParaRPr lang="en-US" sz="1500" dirty="0">
                         <a:latin typeface="Malgun Gothic" charset="0"/>
@@ -8050,287 +8324,13 @@
                       <a:r>
                         <a:rPr lang="en-US" sz="1500" b="1" dirty="0">
                           <a:solidFill>
-                            <a:schemeClr val="accent3"/>
+                            <a:schemeClr val="accent6"/>
                           </a:solidFill>
                           <a:latin typeface="Malgun Gothic" pitchFamily="34" charset="0"/>
                           <a:ea typeface="Malgun Gothic" pitchFamily="34" charset="-122"/>
                           <a:cs typeface="Malgun Gothic" pitchFamily="34" charset="-120"/>
                         </a:rPr>
-                        <a:t>추정</a:t>
-                      </a:r>
-                      <a:endParaRPr lang="en-US" sz="1500" dirty="0">
-                        <a:latin typeface="Malgun Gothic" charset="0"/>
-                        <a:ea typeface="Malgun Gothic" charset="0"/>
-                        <a:cs typeface="Malgun Gothic" charset="0"/>
-                      </a:endParaRPr>
-                    </a:p>
-                  </a:txBody>
-                  <a:tcPr marL="91440" marR="91440" marT="45720" marB="45720" anchor="ctr">
-                    <a:lnL w="9525" cap="flat" cmpd="sng" algn="ctr">
-                      <a:solidFill>
-                        <a:srgbClr val="3A3F48"/>
-                      </a:solidFill>
-                      <a:prstDash val="solid"/>
-                      <a:round/>
-                      <a:headEnd type="none" w="med" len="med"/>
-                      <a:tailEnd type="none" w="med" len="med"/>
-                    </a:lnL>
-                    <a:lnR w="9525" cap="flat" cmpd="sng" algn="ctr">
-                      <a:solidFill>
-                        <a:srgbClr val="3A3F48"/>
-                      </a:solidFill>
-                      <a:prstDash val="solid"/>
-                      <a:round/>
-                      <a:headEnd type="none" w="med" len="med"/>
-                      <a:tailEnd type="none" w="med" len="med"/>
-                    </a:lnR>
-                    <a:lnT w="9525" cap="flat" cmpd="sng" algn="ctr">
-                      <a:solidFill>
-                        <a:srgbClr val="3A3F48"/>
-                      </a:solidFill>
-                      <a:prstDash val="solid"/>
-                      <a:round/>
-                      <a:headEnd type="none" w="med" len="med"/>
-                      <a:tailEnd type="none" w="med" len="med"/>
-                    </a:lnT>
-                    <a:lnB w="9525" cap="flat" cmpd="sng" algn="ctr">
-                      <a:solidFill>
-                        <a:srgbClr val="3A3F48"/>
-                      </a:solidFill>
-                      <a:prstDash val="solid"/>
-                      <a:round/>
-                      <a:headEnd type="none" w="med" len="med"/>
-                      <a:tailEnd type="none" w="med" len="med"/>
-                    </a:lnB>
-                    <a:solidFill>
-                      <a:srgbClr val="23272F"/>
-                    </a:solidFill>
-                  </a:tcPr>
-                </a:tc>
-              </a:tr>
-              <a:tr h="420624">
-                <a:tc>
-                  <a:txBody>
-                    <a:bodyPr/>
-                    <a:lstStyle/>
-                    <a:p>
-                      <a:pPr algn="ctr" indent="0" marL="0">
-                        <a:buNone/>
-                      </a:pPr>
-                      <a:r>
-                        <a:rPr lang="en-US" sz="1500" dirty="0">
-                          <a:solidFill>
-                            <a:schemeClr val="tx2"/>
-                          </a:solidFill>
-                          <a:latin typeface="Malgun Gothic" pitchFamily="34" charset="0"/>
-                          <a:ea typeface="Malgun Gothic" pitchFamily="34" charset="-122"/>
-                          <a:cs typeface="Malgun Gothic" pitchFamily="34" charset="-120"/>
-                        </a:rPr>
-                        <a:t>5</a:t>
-                      </a:r>
-                      <a:endParaRPr lang="en-US" sz="1500" dirty="0">
-                        <a:latin typeface="Malgun Gothic" charset="0"/>
-                        <a:ea typeface="Malgun Gothic" charset="0"/>
-                        <a:cs typeface="Malgun Gothic" charset="0"/>
-                      </a:endParaRPr>
-                    </a:p>
-                  </a:txBody>
-                  <a:tcPr marL="91440" marR="91440" marT="45720" marB="45720" anchor="ctr">
-                    <a:lnL w="9525" cap="flat" cmpd="sng" algn="ctr">
-                      <a:solidFill>
-                        <a:srgbClr val="3A3F48"/>
-                      </a:solidFill>
-                      <a:prstDash val="solid"/>
-                      <a:round/>
-                      <a:headEnd type="none" w="med" len="med"/>
-                      <a:tailEnd type="none" w="med" len="med"/>
-                    </a:lnL>
-                    <a:lnR w="9525" cap="flat" cmpd="sng" algn="ctr">
-                      <a:solidFill>
-                        <a:srgbClr val="3A3F48"/>
-                      </a:solidFill>
-                      <a:prstDash val="solid"/>
-                      <a:round/>
-                      <a:headEnd type="none" w="med" len="med"/>
-                      <a:tailEnd type="none" w="med" len="med"/>
-                    </a:lnR>
-                    <a:lnT w="9525" cap="flat" cmpd="sng" algn="ctr">
-                      <a:solidFill>
-                        <a:srgbClr val="3A3F48"/>
-                      </a:solidFill>
-                      <a:prstDash val="solid"/>
-                      <a:round/>
-                      <a:headEnd type="none" w="med" len="med"/>
-                      <a:tailEnd type="none" w="med" len="med"/>
-                    </a:lnT>
-                    <a:lnB w="9525" cap="flat" cmpd="sng" algn="ctr">
-                      <a:solidFill>
-                        <a:srgbClr val="3A3F48"/>
-                      </a:solidFill>
-                      <a:prstDash val="solid"/>
-                      <a:round/>
-                      <a:headEnd type="none" w="med" len="med"/>
-                      <a:tailEnd type="none" w="med" len="med"/>
-                    </a:lnB>
-                    <a:solidFill>
-                      <a:srgbClr val="23272F"/>
-                    </a:solidFill>
-                  </a:tcPr>
-                </a:tc>
-                <a:tc>
-                  <a:txBody>
-                    <a:bodyPr/>
-                    <a:lstStyle/>
-                    <a:p>
-                      <a:pPr indent="0" marL="0">
-                        <a:buNone/>
-                      </a:pPr>
-                      <a:r>
-                        <a:rPr lang="en-US" sz="1500" b="1" dirty="0">
-                          <a:solidFill>
-                            <a:schemeClr val="tx1"/>
-                          </a:solidFill>
-                          <a:latin typeface="Malgun Gothic" pitchFamily="34" charset="0"/>
-                          <a:ea typeface="Malgun Gothic" pitchFamily="34" charset="-122"/>
-                          <a:cs typeface="Malgun Gothic" pitchFamily="34" charset="-120"/>
-                        </a:rPr>
-                        <a:t>ATSS 최고평가</a:t>
-                      </a:r>
-                      <a:endParaRPr lang="en-US" sz="1500" dirty="0">
-                        <a:latin typeface="Malgun Gothic" charset="0"/>
-                        <a:ea typeface="Malgun Gothic" charset="0"/>
-                        <a:cs typeface="Malgun Gothic" charset="0"/>
-                      </a:endParaRPr>
-                    </a:p>
-                  </a:txBody>
-                  <a:tcPr marL="91440" marR="91440" marT="45720" marB="45720" anchor="ctr">
-                    <a:lnL w="9525" cap="flat" cmpd="sng" algn="ctr">
-                      <a:solidFill>
-                        <a:srgbClr val="3A3F48"/>
-                      </a:solidFill>
-                      <a:prstDash val="solid"/>
-                      <a:round/>
-                      <a:headEnd type="none" w="med" len="med"/>
-                      <a:tailEnd type="none" w="med" len="med"/>
-                    </a:lnL>
-                    <a:lnR w="9525" cap="flat" cmpd="sng" algn="ctr">
-                      <a:solidFill>
-                        <a:srgbClr val="3A3F48"/>
-                      </a:solidFill>
-                      <a:prstDash val="solid"/>
-                      <a:round/>
-                      <a:headEnd type="none" w="med" len="med"/>
-                      <a:tailEnd type="none" w="med" len="med"/>
-                    </a:lnR>
-                    <a:lnT w="9525" cap="flat" cmpd="sng" algn="ctr">
-                      <a:solidFill>
-                        <a:srgbClr val="3A3F48"/>
-                      </a:solidFill>
-                      <a:prstDash val="solid"/>
-                      <a:round/>
-                      <a:headEnd type="none" w="med" len="med"/>
-                      <a:tailEnd type="none" w="med" len="med"/>
-                    </a:lnT>
-                    <a:lnB w="9525" cap="flat" cmpd="sng" algn="ctr">
-                      <a:solidFill>
-                        <a:srgbClr val="3A3F48"/>
-                      </a:solidFill>
-                      <a:prstDash val="solid"/>
-                      <a:round/>
-                      <a:headEnd type="none" w="med" len="med"/>
-                      <a:tailEnd type="none" w="med" len="med"/>
-                    </a:lnB>
-                    <a:solidFill>
-                      <a:srgbClr val="23272F"/>
-                    </a:solidFill>
-                  </a:tcPr>
-                </a:tc>
-                <a:tc>
-                  <a:txBody>
-                    <a:bodyPr/>
-                    <a:lstStyle/>
-                    <a:p>
-                      <a:pPr indent="0" marL="0">
-                        <a:buNone/>
-                      </a:pPr>
-                      <a:r>
-                        <a:rPr lang="en-US" sz="1500" dirty="0">
-                          <a:solidFill>
-                            <a:schemeClr val="tx1"/>
-                          </a:solidFill>
-                          <a:latin typeface="Malgun Gothic" pitchFamily="34" charset="0"/>
-                          <a:ea typeface="Malgun Gothic" pitchFamily="34" charset="-122"/>
-                          <a:cs typeface="Malgun Gothic" pitchFamily="34" charset="-120"/>
-                        </a:rPr>
-                        <a:t>입력 해상도 992×800 vs 640×640</a:t>
-                      </a:r>
-                      <a:endParaRPr lang="en-US" sz="1500" dirty="0">
-                        <a:latin typeface="Malgun Gothic" charset="0"/>
-                        <a:ea typeface="Malgun Gothic" charset="0"/>
-                        <a:cs typeface="Malgun Gothic" charset="0"/>
-                      </a:endParaRPr>
-                    </a:p>
-                  </a:txBody>
-                  <a:tcPr marL="91440" marR="91440" marT="45720" marB="45720" anchor="ctr">
-                    <a:lnL w="9525" cap="flat" cmpd="sng" algn="ctr">
-                      <a:solidFill>
-                        <a:srgbClr val="3A3F48"/>
-                      </a:solidFill>
-                      <a:prstDash val="solid"/>
-                      <a:round/>
-                      <a:headEnd type="none" w="med" len="med"/>
-                      <a:tailEnd type="none" w="med" len="med"/>
-                    </a:lnL>
-                    <a:lnR w="9525" cap="flat" cmpd="sng" algn="ctr">
-                      <a:solidFill>
-                        <a:srgbClr val="3A3F48"/>
-                      </a:solidFill>
-                      <a:prstDash val="solid"/>
-                      <a:round/>
-                      <a:headEnd type="none" w="med" len="med"/>
-                      <a:tailEnd type="none" w="med" len="med"/>
-                    </a:lnR>
-                    <a:lnT w="9525" cap="flat" cmpd="sng" algn="ctr">
-                      <a:solidFill>
-                        <a:srgbClr val="3A3F48"/>
-                      </a:solidFill>
-                      <a:prstDash val="solid"/>
-                      <a:round/>
-                      <a:headEnd type="none" w="med" len="med"/>
-                      <a:tailEnd type="none" w="med" len="med"/>
-                    </a:lnT>
-                    <a:lnB w="9525" cap="flat" cmpd="sng" algn="ctr">
-                      <a:solidFill>
-                        <a:srgbClr val="3A3F48"/>
-                      </a:solidFill>
-                      <a:prstDash val="solid"/>
-                      <a:round/>
-                      <a:headEnd type="none" w="med" len="med"/>
-                      <a:tailEnd type="none" w="med" len="med"/>
-                    </a:lnB>
-                    <a:solidFill>
-                      <a:srgbClr val="23272F"/>
-                    </a:solidFill>
-                  </a:tcPr>
-                </a:tc>
-                <a:tc>
-                  <a:txBody>
-                    <a:bodyPr/>
-                    <a:lstStyle/>
-                    <a:p>
-                      <a:pPr algn="ctr" indent="0" marL="0">
-                        <a:buNone/>
-                      </a:pPr>
-                      <a:r>
-                        <a:rPr lang="en-US" sz="1500" b="1" dirty="0">
-                          <a:solidFill>
-                            <a:schemeClr val="accent3"/>
-                          </a:solidFill>
-                          <a:latin typeface="Malgun Gothic" pitchFamily="34" charset="0"/>
-                          <a:ea typeface="Malgun Gothic" pitchFamily="34" charset="-122"/>
-                          <a:cs typeface="Malgun Gothic" pitchFamily="34" charset="-120"/>
-                        </a:rPr>
-                        <a:t>추정</a:t>
+                        <a:t>확인</a:t>
                       </a:r>
                       <a:endParaRPr lang="en-US" sz="1500" dirty="0">
                         <a:latin typeface="Malgun Gothic" charset="0"/>
@@ -13448,335 +13448,15 @@
                   <a:schemeClr val="tx1"/>
                 </a:solidFill>
               </a:rPr>
-              <a:t>높은 수치, 숨은 함정</a:t>
+              <a:t>작은 모델이 더 맵다 ?</a:t>
             </a:r>
             <a:endParaRPr lang="en-US" sz="3200" dirty="0"/>
           </a:p>
         </p:txBody>
       </p:sp>
-      <p:sp>
-        <p:nvSpPr>
-          <p:cNvPr id="3" name="Text 0"/>
-          <p:cNvSpPr/>
-          <p:nvPr>
-            <p:ph idx="101" type="body" hasCustomPrompt="1"/>
-          </p:nvPr>
-        </p:nvSpPr>
-        <p:spPr>
-          <a:xfrm>
-            <a:off x="548640" y="1005840"/>
-            <a:ext cx="11094415" cy="411480"/>
-          </a:xfrm>
-          <a:prstGeom prst="rect">
-            <a:avLst/>
-          </a:prstGeom>
-          <a:noFill/>
-          <a:ln/>
-        </p:spPr>
-        <p:txBody>
-          <a:bodyPr wrap="square" lIns="0" tIns="0" rIns="0" bIns="0" rtlCol="0" anchor="ctr"/>
-          <a:lstStyle/>
-          <a:p>
-            <a:pPr algn="l" indent="0" marL="0">
-              <a:buNone/>
-            </a:pPr>
-            <a:r>
-              <a:rPr lang="en-US" sz="1500" dirty="0">
-                <a:solidFill>
-                  <a:schemeClr val="tx2"/>
-                </a:solidFill>
-              </a:rPr>
-              <a:t>1차 테스트 93%, but 과적합 학습 데이터</a:t>
-            </a:r>
-            <a:endParaRPr lang="en-US" sz="1500" dirty="0"/>
-          </a:p>
-        </p:txBody>
-      </p:sp>
-      <p:sp>
-        <p:nvSpPr>
-          <p:cNvPr id="4" name="stat-0"/>
-          <p:cNvSpPr/>
-          <p:nvPr/>
-        </p:nvSpPr>
-        <p:spPr>
-          <a:xfrm>
-            <a:off x="548640" y="1600200"/>
-            <a:ext cx="3840480" cy="1371600"/>
-          </a:xfrm>
-          <a:prstGeom prst="roundRect">
-            <a:avLst>
-              <a:gd name="adj" fmla="val 5333"/>
-            </a:avLst>
-          </a:prstGeom>
-          <a:solidFill>
-            <a:schemeClr val="bg2"/>
-          </a:solidFill>
-          <a:ln/>
-        </p:spPr>
-      </p:sp>
-      <p:sp>
-        <p:nvSpPr>
-          <p:cNvPr id="5" name="stat-n-0"/>
-          <p:cNvSpPr txBox="1"/>
-          <p:nvPr/>
-        </p:nvSpPr>
-        <p:spPr>
-          <a:xfrm>
-            <a:off x="822960" y="1737360"/>
-            <a:ext cx="3383280" cy="685800"/>
-          </a:xfrm>
-          <a:prstGeom prst="rect">
-            <a:avLst/>
-          </a:prstGeom>
-          <a:noFill/>
-          <a:ln/>
-        </p:spPr>
-        <p:txBody>
-          <a:bodyPr wrap="square" lIns="0" tIns="0" rIns="0" bIns="0" rtlCol="0" anchor="t"/>
-          <a:lstStyle/>
-          <a:p>
-            <a:pPr indent="0" marL="0">
-              <a:buNone/>
-            </a:pPr>
-            <a:r>
-              <a:rPr lang="en-US" sz="3200" b="1" dirty="0">
-                <a:solidFill>
-                  <a:schemeClr val="accent3"/>
-                </a:solidFill>
-              </a:rPr>
-              <a:t>3,673장</a:t>
-            </a:r>
-            <a:endParaRPr lang="en-US" sz="3200" dirty="0"/>
-          </a:p>
-        </p:txBody>
-      </p:sp>
-      <p:sp>
-        <p:nvSpPr>
-          <p:cNvPr id="6" name="stat-l-0"/>
-          <p:cNvSpPr txBox="1"/>
-          <p:nvPr/>
-        </p:nvSpPr>
-        <p:spPr>
-          <a:xfrm>
-            <a:off x="822960" y="2423160"/>
-            <a:ext cx="3383280" cy="365760"/>
-          </a:xfrm>
-          <a:prstGeom prst="rect">
-            <a:avLst/>
-          </a:prstGeom>
-          <a:noFill/>
-          <a:ln/>
-        </p:spPr>
-        <p:txBody>
-          <a:bodyPr wrap="square" lIns="0" tIns="0" rIns="0" bIns="0" rtlCol="0" anchor="t"/>
-          <a:lstStyle/>
-          <a:p>
-            <a:pPr indent="0" marL="0">
-              <a:buNone/>
-            </a:pPr>
-            <a:r>
-              <a:rPr lang="en-US" sz="1400" dirty="0">
-                <a:solidFill>
-                  <a:schemeClr val="tx2"/>
-                </a:solidFill>
-              </a:rPr>
-              <a:t>테스트 153장 포함 업로드</a:t>
-            </a:r>
-            <a:endParaRPr lang="en-US" sz="1400" dirty="0"/>
-          </a:p>
-        </p:txBody>
-      </p:sp>
-      <p:sp>
-        <p:nvSpPr>
-          <p:cNvPr id="7" name="stat-1"/>
-          <p:cNvSpPr/>
-          <p:nvPr/>
-        </p:nvSpPr>
-        <p:spPr>
-          <a:xfrm>
-            <a:off x="548640" y="3108960"/>
-            <a:ext cx="3840480" cy="1371600"/>
-          </a:xfrm>
-          <a:prstGeom prst="roundRect">
-            <a:avLst>
-              <a:gd name="adj" fmla="val 5333"/>
-            </a:avLst>
-          </a:prstGeom>
-          <a:solidFill>
-            <a:schemeClr val="bg2"/>
-          </a:solidFill>
-          <a:ln/>
-        </p:spPr>
-      </p:sp>
-      <p:sp>
-        <p:nvSpPr>
-          <p:cNvPr id="8" name="stat-n-1"/>
-          <p:cNvSpPr txBox="1"/>
-          <p:nvPr/>
-        </p:nvSpPr>
-        <p:spPr>
-          <a:xfrm>
-            <a:off x="822960" y="3246120"/>
-            <a:ext cx="3383280" cy="685800"/>
-          </a:xfrm>
-          <a:prstGeom prst="rect">
-            <a:avLst/>
-          </a:prstGeom>
-          <a:noFill/>
-          <a:ln/>
-        </p:spPr>
-        <p:txBody>
-          <a:bodyPr wrap="square" lIns="0" tIns="0" rIns="0" bIns="0" rtlCol="0" anchor="t"/>
-          <a:lstStyle/>
-          <a:p>
-            <a:pPr indent="0" marL="0">
-              <a:buNone/>
-            </a:pPr>
-            <a:r>
-              <a:rPr lang="en-US" sz="3200" b="1" dirty="0">
-                <a:solidFill>
-                  <a:schemeClr val="accent3"/>
-                </a:solidFill>
-              </a:rPr>
-              <a:t>22장</a:t>
-            </a:r>
-            <a:endParaRPr lang="en-US" sz="3200" dirty="0"/>
-          </a:p>
-        </p:txBody>
-      </p:sp>
-      <p:sp>
-        <p:nvSpPr>
-          <p:cNvPr id="9" name="stat-l-1"/>
-          <p:cNvSpPr txBox="1"/>
-          <p:nvPr/>
-        </p:nvSpPr>
-        <p:spPr>
-          <a:xfrm>
-            <a:off x="822960" y="3931920"/>
-            <a:ext cx="3383280" cy="365760"/>
-          </a:xfrm>
-          <a:prstGeom prst="rect">
-            <a:avLst/>
-          </a:prstGeom>
-          <a:noFill/>
-          <a:ln/>
-        </p:spPr>
-        <p:txBody>
-          <a:bodyPr wrap="square" lIns="0" tIns="0" rIns="0" bIns="0" rtlCol="0" anchor="t"/>
-          <a:lstStyle/>
-          <a:p>
-            <a:pPr indent="0" marL="0">
-              <a:buNone/>
-            </a:pPr>
-            <a:r>
-              <a:rPr lang="en-US" sz="1400" dirty="0">
-                <a:solidFill>
-                  <a:schemeClr val="tx2"/>
-                </a:solidFill>
-              </a:rPr>
-              <a:t>학습 사진의 복사본</a:t>
-            </a:r>
-            <a:endParaRPr lang="en-US" sz="1400" dirty="0"/>
-          </a:p>
-        </p:txBody>
-      </p:sp>
-      <p:sp>
-        <p:nvSpPr>
-          <p:cNvPr id="10" name="stat-2"/>
-          <p:cNvSpPr/>
-          <p:nvPr/>
-        </p:nvSpPr>
-        <p:spPr>
-          <a:xfrm>
-            <a:off x="548640" y="4617720"/>
-            <a:ext cx="3840480" cy="1371600"/>
-          </a:xfrm>
-          <a:prstGeom prst="roundRect">
-            <a:avLst>
-              <a:gd name="adj" fmla="val 5333"/>
-            </a:avLst>
-          </a:prstGeom>
-          <a:solidFill>
-            <a:schemeClr val="bg2"/>
-          </a:solidFill>
-          <a:ln/>
-        </p:spPr>
-      </p:sp>
-      <p:sp>
-        <p:nvSpPr>
-          <p:cNvPr id="11" name="stat-n-2"/>
-          <p:cNvSpPr txBox="1"/>
-          <p:nvPr/>
-        </p:nvSpPr>
-        <p:spPr>
-          <a:xfrm>
-            <a:off x="822960" y="4754880"/>
-            <a:ext cx="3383280" cy="685800"/>
-          </a:xfrm>
-          <a:prstGeom prst="rect">
-            <a:avLst/>
-          </a:prstGeom>
-          <a:noFill/>
-          <a:ln/>
-        </p:spPr>
-        <p:txBody>
-          <a:bodyPr wrap="square" lIns="0" tIns="0" rIns="0" bIns="0" rtlCol="0" anchor="t"/>
-          <a:lstStyle/>
-          <a:p>
-            <a:pPr indent="0" marL="0">
-              <a:buNone/>
-            </a:pPr>
-            <a:r>
-              <a:rPr lang="en-US" sz="3200" b="1" dirty="0">
-                <a:solidFill>
-                  <a:schemeClr val="accent1"/>
-                </a:solidFill>
-              </a:rPr>
-              <a:t>93.3 → 92.9%</a:t>
-            </a:r>
-            <a:endParaRPr lang="en-US" sz="3200" dirty="0"/>
-          </a:p>
-        </p:txBody>
-      </p:sp>
-      <p:sp>
-        <p:nvSpPr>
-          <p:cNvPr id="12" name="stat-l-2"/>
-          <p:cNvSpPr txBox="1"/>
-          <p:nvPr/>
-        </p:nvSpPr>
-        <p:spPr>
-          <a:xfrm>
-            <a:off x="822960" y="5440680"/>
-            <a:ext cx="3383280" cy="365760"/>
-          </a:xfrm>
-          <a:prstGeom prst="rect">
-            <a:avLst/>
-          </a:prstGeom>
-          <a:noFill/>
-          <a:ln/>
-        </p:spPr>
-        <p:txBody>
-          <a:bodyPr wrap="square" lIns="0" tIns="0" rIns="0" bIns="0" rtlCol="0" anchor="t"/>
-          <a:lstStyle/>
-          <a:p>
-            <a:pPr indent="0" marL="0">
-              <a:buNone/>
-            </a:pPr>
-            <a:r>
-              <a:rPr lang="en-US" sz="1400" dirty="0">
-                <a:solidFill>
-                  <a:schemeClr val="tx2"/>
-                </a:solidFill>
-              </a:rPr>
-              <a:t>복사본 제거 후 mAP@50</a:t>
-            </a:r>
-            <a:endParaRPr lang="en-US" sz="1400" dirty="0"/>
-          </a:p>
-        </p:txBody>
-      </p:sp>
       <p:pic>
         <p:nvPicPr>
-          <p:cNvPr id="13" name="dup-0" descr="C:\Users\user\_se4nchoi\batteryvision\docs\submission\build\img\dup_test.jpg">    </p:cNvPr>
+          <p:cNvPr id="3" name="geti-models" descr="C:\Users\user\_se4nchoi\batteryvision\docs\submission\build\img\geti_models.png">    </p:cNvPr>
           <p:cNvPicPr>
             <a:picLocks noChangeAspect="1"/>
           </p:cNvPicPr>
@@ -13790,8 +13470,8 @@
         </p:blipFill>
         <p:spPr>
           <a:xfrm>
-            <a:off x="4617720" y="1600200"/>
-            <a:ext cx="3429000" cy="3429000"/>
+            <a:off x="548640" y="1600200"/>
+            <a:ext cx="4027729" cy="4343400"/>
           </a:xfrm>
           <a:prstGeom prst="rect">
             <a:avLst/>
@@ -13800,18 +13480,18 @@
       </p:pic>
       <p:sp>
         <p:nvSpPr>
-          <p:cNvPr id="14" name="dup-l-0-bg"/>
+          <p:cNvPr id="4" name="geti-caveat-bg"/>
           <p:cNvSpPr/>
           <p:nvPr/>
         </p:nvSpPr>
         <p:spPr>
           <a:xfrm>
-            <a:off x="4617720" y="5166360"/>
-            <a:ext cx="914400" cy="347472"/>
+            <a:off x="548640" y="6080760"/>
+            <a:ext cx="4027729" cy="384048"/>
           </a:xfrm>
           <a:prstGeom prst="roundRect">
             <a:avLst>
-              <a:gd name="adj" fmla="val 13158"/>
+              <a:gd name="adj" fmla="val 11905"/>
             </a:avLst>
           </a:prstGeom>
           <a:solidFill>
@@ -13829,14 +13509,14 @@
       </p:sp>
       <p:sp>
         <p:nvSpPr>
-          <p:cNvPr id="15" name="dup-l-0"/>
+          <p:cNvPr id="5" name="geti-caveat"/>
           <p:cNvSpPr txBox="1"/>
           <p:nvPr/>
         </p:nvSpPr>
         <p:spPr>
           <a:xfrm>
-            <a:off x="4617720" y="5166360"/>
-            <a:ext cx="914400" cy="347472"/>
+            <a:off x="548640" y="6080760"/>
+            <a:ext cx="4027729" cy="384048"/>
           </a:xfrm>
           <a:prstGeom prst="rect">
             <a:avLst/>
@@ -13857,50 +13537,392 @@
                   <a:schemeClr val="accent3"/>
                 </a:solidFill>
               </a:rPr>
-              <a:t>테스트</a:t>
+              <a:t>낙관적인 Geti 점수 (증강본이 학습·테스트에 섞임)</a:t>
             </a:r>
             <a:endParaRPr lang="en-US" sz="1300" dirty="0"/>
           </a:p>
         </p:txBody>
       </p:sp>
-      <p:pic>
-        <p:nvPicPr>
-          <p:cNvPr id="16" name="dup-1" descr="C:\Users\user\_se4nchoi\batteryvision\docs\submission\build\img\dup_train.jpg">    </p:cNvPr>
-          <p:cNvPicPr>
-            <a:picLocks noChangeAspect="1"/>
-          </p:cNvPicPr>
-          <p:nvPr/>
-        </p:nvPicPr>
-        <p:blipFill>
-          <a:blip r:embed="rId2"/>
-          <a:stretch>
-            <a:fillRect/>
-          </a:stretch>
-        </p:blipFill>
-        <p:spPr>
-          <a:xfrm>
-            <a:off x="8183880" y="1600200"/>
-            <a:ext cx="3429000" cy="3429000"/>
-          </a:xfrm>
-          <a:prstGeom prst="rect">
-            <a:avLst/>
-          </a:prstGeom>
-        </p:spPr>
-      </p:pic>
-      <p:sp>
-        <p:nvSpPr>
-          <p:cNvPr id="17" name="dup-l-1-bg"/>
+      <p:sp>
+        <p:nvSpPr>
+          <p:cNvPr id="6" name="own-h"/>
+          <p:cNvSpPr txBox="1"/>
+          <p:nvPr/>
+        </p:nvSpPr>
+        <p:spPr>
+          <a:xfrm>
+            <a:off x="4896409" y="1600200"/>
+            <a:ext cx="6746646" cy="320040"/>
+          </a:xfrm>
+          <a:prstGeom prst="rect">
+            <a:avLst/>
+          </a:prstGeom>
+          <a:noFill/>
+          <a:ln/>
+        </p:spPr>
+        <p:txBody>
+          <a:bodyPr wrap="square" lIns="0" tIns="0" rIns="0" bIns="0" rtlCol="0" anchor="t"/>
+          <a:lstStyle/>
+          <a:p>
+            <a:pPr indent="0" marL="0">
+              <a:buNone/>
+            </a:pPr>
+            <a:r>
+              <a:rPr lang="en-US" sz="1600" b="1" dirty="0">
+                <a:solidFill>
+                  <a:schemeClr val="tx1"/>
+                </a:solidFill>
+              </a:rPr>
+              <a:t>직접 측정 · 1차 테스트</a:t>
+            </a:r>
+            <a:endParaRPr lang="en-US" sz="1600" dirty="0"/>
+          </a:p>
+        </p:txBody>
+      </p:sp>
+      <p:sp>
+        <p:nvSpPr>
+          <p:cNvPr id="7" name="own-col-0"/>
+          <p:cNvSpPr txBox="1"/>
+          <p:nvPr/>
+        </p:nvSpPr>
+        <p:spPr>
+          <a:xfrm>
+            <a:off x="7411009" y="2011680"/>
+            <a:ext cx="1600200" cy="274320"/>
+          </a:xfrm>
+          <a:prstGeom prst="rect">
+            <a:avLst/>
+          </a:prstGeom>
+          <a:noFill/>
+          <a:ln/>
+        </p:spPr>
+        <p:txBody>
+          <a:bodyPr wrap="square" lIns="0" tIns="0" rIns="0" bIns="0" rtlCol="0" anchor="t"/>
+          <a:lstStyle/>
+          <a:p>
+            <a:pPr algn="r" indent="0" marL="0">
+              <a:buNone/>
+            </a:pPr>
+            <a:r>
+              <a:rPr lang="en-US" sz="1200" dirty="0">
+                <a:solidFill>
+                  <a:schemeClr val="tx2"/>
+                </a:solidFill>
+              </a:rPr>
+              <a:t>mAP@50</a:t>
+            </a:r>
+            <a:endParaRPr lang="en-US" sz="1200" dirty="0"/>
+          </a:p>
+        </p:txBody>
+      </p:sp>
+      <p:sp>
+        <p:nvSpPr>
+          <p:cNvPr id="8" name="own-col-1"/>
+          <p:cNvSpPr txBox="1"/>
+          <p:nvPr/>
+        </p:nvSpPr>
+        <p:spPr>
+          <a:xfrm>
+            <a:off x="9056929" y="2011680"/>
+            <a:ext cx="1097280" cy="274320"/>
+          </a:xfrm>
+          <a:prstGeom prst="rect">
+            <a:avLst/>
+          </a:prstGeom>
+          <a:noFill/>
+          <a:ln/>
+        </p:spPr>
+        <p:txBody>
+          <a:bodyPr wrap="square" lIns="0" tIns="0" rIns="0" bIns="0" rtlCol="0" anchor="t"/>
+          <a:lstStyle/>
+          <a:p>
+            <a:pPr algn="r" indent="0" marL="0">
+              <a:buNone/>
+            </a:pPr>
+            <a:r>
+              <a:rPr lang="en-US" sz="1200" dirty="0">
+                <a:solidFill>
+                  <a:schemeClr val="tx2"/>
+                </a:solidFill>
+              </a:rPr>
+              <a:t>scratch AP</a:t>
+            </a:r>
+            <a:endParaRPr lang="en-US" sz="1200" dirty="0"/>
+          </a:p>
+        </p:txBody>
+      </p:sp>
+      <p:sp>
+        <p:nvSpPr>
+          <p:cNvPr id="9" name="own-col-2"/>
+          <p:cNvSpPr txBox="1"/>
+          <p:nvPr/>
+        </p:nvSpPr>
+        <p:spPr>
+          <a:xfrm>
+            <a:off x="10154209" y="2011680"/>
+            <a:ext cx="1051560" cy="274320"/>
+          </a:xfrm>
+          <a:prstGeom prst="rect">
+            <a:avLst/>
+          </a:prstGeom>
+          <a:noFill/>
+          <a:ln/>
+        </p:spPr>
+        <p:txBody>
+          <a:bodyPr wrap="square" lIns="0" tIns="0" rIns="0" bIns="0" rtlCol="0" anchor="t"/>
+          <a:lstStyle/>
+          <a:p>
+            <a:pPr algn="r" indent="0" marL="0">
+              <a:buNone/>
+            </a:pPr>
+            <a:r>
+              <a:rPr lang="en-US" sz="1200" dirty="0">
+                <a:solidFill>
+                  <a:schemeClr val="tx2"/>
+                </a:solidFill>
+              </a:rPr>
+              <a:t>2차 세트</a:t>
+            </a:r>
+            <a:endParaRPr lang="en-US" sz="1200" dirty="0"/>
+          </a:p>
+        </p:txBody>
+      </p:sp>
+      <p:sp>
+        <p:nvSpPr>
+          <p:cNvPr id="10" name="own-row-0"/>
           <p:cNvSpPr/>
           <p:nvPr/>
         </p:nvSpPr>
         <p:spPr>
           <a:xfrm>
-            <a:off x="8183880" y="5166360"/>
-            <a:ext cx="914400" cy="347472"/>
+            <a:off x="4896409" y="2377440"/>
+            <a:ext cx="6746646" cy="1051560"/>
           </a:xfrm>
           <a:prstGeom prst="roundRect">
             <a:avLst>
-              <a:gd name="adj" fmla="val 13158"/>
+              <a:gd name="adj" fmla="val 6957"/>
+            </a:avLst>
+          </a:prstGeom>
+          <a:solidFill>
+            <a:schemeClr val="bg2"/>
+          </a:solidFill>
+          <a:ln/>
+        </p:spPr>
+      </p:sp>
+      <p:sp>
+        <p:nvSpPr>
+          <p:cNvPr id="11" name="own-dot-0"/>
+          <p:cNvSpPr/>
+          <p:nvPr/>
+        </p:nvSpPr>
+        <p:spPr>
+          <a:xfrm>
+            <a:off x="5125009" y="2606040"/>
+            <a:ext cx="146304" cy="146304"/>
+          </a:xfrm>
+          <a:prstGeom prst="ellipse">
+            <a:avLst/>
+          </a:prstGeom>
+          <a:solidFill>
+            <a:schemeClr val="accent4"/>
+          </a:solidFill>
+          <a:ln/>
+        </p:spPr>
+      </p:sp>
+      <p:sp>
+        <p:nvSpPr>
+          <p:cNvPr id="12" name="own-n-0"/>
+          <p:cNvSpPr txBox="1"/>
+          <p:nvPr/>
+        </p:nvSpPr>
+        <p:spPr>
+          <a:xfrm>
+            <a:off x="5353609" y="2514600"/>
+            <a:ext cx="2103120" cy="320040"/>
+          </a:xfrm>
+          <a:prstGeom prst="rect">
+            <a:avLst/>
+          </a:prstGeom>
+          <a:noFill/>
+          <a:ln/>
+        </p:spPr>
+        <p:txBody>
+          <a:bodyPr wrap="square" lIns="0" tIns="0" rIns="0" bIns="0" rtlCol="0" anchor="t"/>
+          <a:lstStyle/>
+          <a:p>
+            <a:pPr indent="0" marL="0">
+              <a:buNone/>
+            </a:pPr>
+            <a:r>
+              <a:rPr lang="en-US" sz="1500" b="1" dirty="0">
+                <a:solidFill>
+                  <a:schemeClr val="tx1"/>
+                </a:solidFill>
+              </a:rPr>
+              <a:t>ATSS-MobileNetV2</a:t>
+            </a:r>
+            <a:endParaRPr lang="en-US" sz="1500" dirty="0"/>
+          </a:p>
+        </p:txBody>
+      </p:sp>
+      <p:sp>
+        <p:nvSpPr>
+          <p:cNvPr id="13" name="own-s-0"/>
+          <p:cNvSpPr txBox="1"/>
+          <p:nvPr/>
+        </p:nvSpPr>
+        <p:spPr>
+          <a:xfrm>
+            <a:off x="5353609" y="2926080"/>
+            <a:ext cx="2103120" cy="274320"/>
+          </a:xfrm>
+          <a:prstGeom prst="rect">
+            <a:avLst/>
+          </a:prstGeom>
+          <a:noFill/>
+          <a:ln/>
+        </p:spPr>
+        <p:txBody>
+          <a:bodyPr wrap="square" lIns="0" tIns="0" rIns="0" bIns="0" rtlCol="0" anchor="t"/>
+          <a:lstStyle/>
+          <a:p>
+            <a:pPr indent="0" marL="0">
+              <a:buNone/>
+            </a:pPr>
+            <a:r>
+              <a:rPr lang="en-US" sz="1200" dirty="0">
+                <a:solidFill>
+                  <a:schemeClr val="tx2"/>
+                </a:solidFill>
+              </a:rPr>
+              <a:t>3.9M · 20.6 GFLOPs</a:t>
+            </a:r>
+            <a:endParaRPr lang="en-US" sz="1200" dirty="0"/>
+          </a:p>
+        </p:txBody>
+      </p:sp>
+      <p:sp>
+        <p:nvSpPr>
+          <p:cNvPr id="14" name="own-m-0"/>
+          <p:cNvSpPr txBox="1"/>
+          <p:nvPr/>
+        </p:nvSpPr>
+        <p:spPr>
+          <a:xfrm>
+            <a:off x="7411009" y="2487168"/>
+            <a:ext cx="1600200" cy="822960"/>
+          </a:xfrm>
+          <a:prstGeom prst="rect">
+            <a:avLst/>
+          </a:prstGeom>
+          <a:noFill/>
+          <a:ln/>
+        </p:spPr>
+        <p:txBody>
+          <a:bodyPr wrap="square" lIns="0" tIns="0" rIns="0" bIns="0" rtlCol="0" anchor="ctr"/>
+          <a:lstStyle/>
+          <a:p>
+            <a:pPr algn="r" indent="0" marL="0">
+              <a:buNone/>
+            </a:pPr>
+            <a:r>
+              <a:rPr lang="en-US" sz="3400" b="1" dirty="0">
+                <a:solidFill>
+                  <a:schemeClr val="accent4"/>
+                </a:solidFill>
+              </a:rPr>
+              <a:t>92.9%</a:t>
+            </a:r>
+            <a:endParaRPr lang="en-US" sz="3400" dirty="0"/>
+          </a:p>
+        </p:txBody>
+      </p:sp>
+      <p:sp>
+        <p:nvSpPr>
+          <p:cNvPr id="15" name="own-a-0"/>
+          <p:cNvSpPr txBox="1"/>
+          <p:nvPr/>
+        </p:nvSpPr>
+        <p:spPr>
+          <a:xfrm>
+            <a:off x="9056929" y="2487168"/>
+            <a:ext cx="1097280" cy="822960"/>
+          </a:xfrm>
+          <a:prstGeom prst="rect">
+            <a:avLst/>
+          </a:prstGeom>
+          <a:noFill/>
+          <a:ln/>
+        </p:spPr>
+        <p:txBody>
+          <a:bodyPr wrap="square" lIns="0" tIns="0" rIns="0" bIns="0" rtlCol="0" anchor="ctr"/>
+          <a:lstStyle/>
+          <a:p>
+            <a:pPr algn="r" indent="0" marL="0">
+              <a:buNone/>
+            </a:pPr>
+            <a:r>
+              <a:rPr lang="en-US" sz="1800" dirty="0">
+                <a:solidFill>
+                  <a:schemeClr val="tx1"/>
+                </a:solidFill>
+              </a:rPr>
+              <a:t>0.86</a:t>
+            </a:r>
+            <a:endParaRPr lang="en-US" sz="1800" dirty="0"/>
+          </a:p>
+        </p:txBody>
+      </p:sp>
+      <p:sp>
+        <p:nvSpPr>
+          <p:cNvPr id="16" name="own-h2-0"/>
+          <p:cNvSpPr txBox="1"/>
+          <p:nvPr/>
+        </p:nvSpPr>
+        <p:spPr>
+          <a:xfrm>
+            <a:off x="10154209" y="2487168"/>
+            <a:ext cx="1051560" cy="822960"/>
+          </a:xfrm>
+          <a:prstGeom prst="rect">
+            <a:avLst/>
+          </a:prstGeom>
+          <a:noFill/>
+          <a:ln/>
+        </p:spPr>
+        <p:txBody>
+          <a:bodyPr wrap="square" lIns="0" tIns="0" rIns="0" bIns="0" rtlCol="0" anchor="ctr"/>
+          <a:lstStyle/>
+          <a:p>
+            <a:pPr algn="r" indent="0" marL="0">
+              <a:buNone/>
+            </a:pPr>
+            <a:r>
+              <a:rPr lang="en-US" sz="1800" b="1" dirty="0">
+                <a:solidFill>
+                  <a:schemeClr val="accent2"/>
+                </a:solidFill>
+              </a:rPr>
+              <a:t>47%</a:t>
+            </a:r>
+            <a:endParaRPr lang="en-US" sz="1800" dirty="0"/>
+          </a:p>
+        </p:txBody>
+      </p:sp>
+      <p:sp>
+        <p:nvSpPr>
+          <p:cNvPr id="17" name="best-badge-bg"/>
+          <p:cNvSpPr/>
+          <p:nvPr/>
+        </p:nvSpPr>
+        <p:spPr>
+          <a:xfrm>
+            <a:off x="6816649" y="2944368"/>
+            <a:ext cx="502920" cy="237744"/>
+          </a:xfrm>
+          <a:prstGeom prst="roundRect">
+            <a:avLst>
+              <a:gd name="adj" fmla="val 19231"/>
             </a:avLst>
           </a:prstGeom>
           <a:solidFill>
@@ -13918,14 +13940,14 @@
       </p:sp>
       <p:sp>
         <p:nvSpPr>
-          <p:cNvPr id="18" name="dup-l-1"/>
+          <p:cNvPr id="18" name="best-badge"/>
           <p:cNvSpPr txBox="1"/>
           <p:nvPr/>
         </p:nvSpPr>
         <p:spPr>
           <a:xfrm>
-            <a:off x="8183880" y="5166360"/>
-            <a:ext cx="914400" cy="347472"/>
+            <a:off x="6816649" y="2944368"/>
+            <a:ext cx="502920" cy="237744"/>
           </a:xfrm>
           <a:prstGeom prst="rect">
             <a:avLst/>
@@ -13946,7 +13968,7 @@
                   <a:schemeClr val="accent1"/>
                 </a:solidFill>
               </a:rPr>
-              <a:t>학습</a:t>
+              <a:t>best</a:t>
             </a:r>
             <a:endParaRPr lang="en-US" sz="1300" dirty="0"/>
           </a:p>
@@ -13954,14 +13976,56 @@
       </p:sp>
       <p:sp>
         <p:nvSpPr>
-          <p:cNvPr id="19" name="dup-cap"/>
+          <p:cNvPr id="19" name="own-row-1"/>
+          <p:cNvSpPr/>
+          <p:nvPr/>
+        </p:nvSpPr>
+        <p:spPr>
+          <a:xfrm>
+            <a:off x="4896409" y="3566160"/>
+            <a:ext cx="6746646" cy="1051560"/>
+          </a:xfrm>
+          <a:prstGeom prst="roundRect">
+            <a:avLst>
+              <a:gd name="adj" fmla="val 6957"/>
+            </a:avLst>
+          </a:prstGeom>
+          <a:solidFill>
+            <a:schemeClr val="bg2"/>
+          </a:solidFill>
+          <a:ln/>
+        </p:spPr>
+      </p:sp>
+      <p:sp>
+        <p:nvSpPr>
+          <p:cNvPr id="20" name="own-dot-1"/>
+          <p:cNvSpPr/>
+          <p:nvPr/>
+        </p:nvSpPr>
+        <p:spPr>
+          <a:xfrm>
+            <a:off x="5125009" y="3794760"/>
+            <a:ext cx="146304" cy="146304"/>
+          </a:xfrm>
+          <a:prstGeom prst="ellipse">
+            <a:avLst/>
+          </a:prstGeom>
+          <a:solidFill>
+            <a:schemeClr val="accent5"/>
+          </a:solidFill>
+          <a:ln/>
+        </p:spPr>
+      </p:sp>
+      <p:sp>
+        <p:nvSpPr>
+          <p:cNvPr id="21" name="own-n-1"/>
           <p:cNvSpPr txBox="1"/>
           <p:nvPr/>
         </p:nvSpPr>
         <p:spPr>
           <a:xfrm>
-            <a:off x="9144000" y="5166360"/>
-            <a:ext cx="2468880" cy="347472"/>
+            <a:off x="5353609" y="3703320"/>
+            <a:ext cx="2103120" cy="320040"/>
           </a:xfrm>
           <a:prstGeom prst="rect">
             <a:avLst/>
@@ -13970,10 +14034,46 @@
           <a:ln/>
         </p:spPr>
         <p:txBody>
-          <a:bodyPr wrap="square" lIns="0" tIns="0" rIns="0" bIns="0" rtlCol="0" anchor="ctr"/>
+          <a:bodyPr wrap="square" lIns="0" tIns="0" rIns="0" bIns="0" rtlCol="0" anchor="t"/>
           <a:lstStyle/>
           <a:p>
-            <a:pPr algn="r" indent="0" marL="0">
+            <a:pPr indent="0" marL="0">
+              <a:buNone/>
+            </a:pPr>
+            <a:r>
+              <a:rPr lang="en-US" sz="1500" b="1" dirty="0">
+                <a:solidFill>
+                  <a:schemeClr val="tx1"/>
+                </a:solidFill>
+              </a:rPr>
+              <a:t>YOLOX-S</a:t>
+            </a:r>
+            <a:endParaRPr lang="en-US" sz="1500" dirty="0"/>
+          </a:p>
+        </p:txBody>
+      </p:sp>
+      <p:sp>
+        <p:nvSpPr>
+          <p:cNvPr id="22" name="own-s-1"/>
+          <p:cNvSpPr txBox="1"/>
+          <p:nvPr/>
+        </p:nvSpPr>
+        <p:spPr>
+          <a:xfrm>
+            <a:off x="5353609" y="4114800"/>
+            <a:ext cx="2103120" cy="274320"/>
+          </a:xfrm>
+          <a:prstGeom prst="rect">
+            <a:avLst/>
+          </a:prstGeom>
+          <a:noFill/>
+          <a:ln/>
+        </p:spPr>
+        <p:txBody>
+          <a:bodyPr wrap="square" lIns="0" tIns="0" rIns="0" bIns="0" rtlCol="0" anchor="t"/>
+          <a:lstStyle/>
+          <a:p>
+            <a:pPr indent="0" marL="0">
               <a:buNone/>
             </a:pPr>
             <a:r>
@@ -13982,9 +14082,404 @@
                   <a:schemeClr val="tx2"/>
                 </a:solidFill>
               </a:rPr>
-              <a:t>dHash 거리 4 / 256</a:t>
+              <a:t>9M · 26.8 GFLOPs</a:t>
             </a:r>
             <a:endParaRPr lang="en-US" sz="1200" dirty="0"/>
+          </a:p>
+        </p:txBody>
+      </p:sp>
+      <p:sp>
+        <p:nvSpPr>
+          <p:cNvPr id="23" name="own-m-1"/>
+          <p:cNvSpPr txBox="1"/>
+          <p:nvPr/>
+        </p:nvSpPr>
+        <p:spPr>
+          <a:xfrm>
+            <a:off x="7411009" y="3675888"/>
+            <a:ext cx="1600200" cy="822960"/>
+          </a:xfrm>
+          <a:prstGeom prst="rect">
+            <a:avLst/>
+          </a:prstGeom>
+          <a:noFill/>
+          <a:ln/>
+        </p:spPr>
+        <p:txBody>
+          <a:bodyPr wrap="square" lIns="0" tIns="0" rIns="0" bIns="0" rtlCol="0" anchor="ctr"/>
+          <a:lstStyle/>
+          <a:p>
+            <a:pPr algn="r" indent="0" marL="0">
+              <a:buNone/>
+            </a:pPr>
+            <a:r>
+              <a:rPr lang="en-US" sz="3400" b="1" dirty="0">
+                <a:solidFill>
+                  <a:schemeClr val="accent5"/>
+                </a:solidFill>
+              </a:rPr>
+              <a:t>89.2%</a:t>
+            </a:r>
+            <a:endParaRPr lang="en-US" sz="3400" dirty="0"/>
+          </a:p>
+        </p:txBody>
+      </p:sp>
+      <p:sp>
+        <p:nvSpPr>
+          <p:cNvPr id="24" name="own-a-1"/>
+          <p:cNvSpPr txBox="1"/>
+          <p:nvPr/>
+        </p:nvSpPr>
+        <p:spPr>
+          <a:xfrm>
+            <a:off x="9056929" y="3675888"/>
+            <a:ext cx="1097280" cy="822960"/>
+          </a:xfrm>
+          <a:prstGeom prst="rect">
+            <a:avLst/>
+          </a:prstGeom>
+          <a:noFill/>
+          <a:ln/>
+        </p:spPr>
+        <p:txBody>
+          <a:bodyPr wrap="square" lIns="0" tIns="0" rIns="0" bIns="0" rtlCol="0" anchor="ctr"/>
+          <a:lstStyle/>
+          <a:p>
+            <a:pPr algn="r" indent="0" marL="0">
+              <a:buNone/>
+            </a:pPr>
+            <a:r>
+              <a:rPr lang="en-US" sz="1800" dirty="0">
+                <a:solidFill>
+                  <a:schemeClr val="tx1"/>
+                </a:solidFill>
+              </a:rPr>
+              <a:t>0.78</a:t>
+            </a:r>
+            <a:endParaRPr lang="en-US" sz="1800" dirty="0"/>
+          </a:p>
+        </p:txBody>
+      </p:sp>
+      <p:sp>
+        <p:nvSpPr>
+          <p:cNvPr id="25" name="own-h2-1"/>
+          <p:cNvSpPr txBox="1"/>
+          <p:nvPr/>
+        </p:nvSpPr>
+        <p:spPr>
+          <a:xfrm>
+            <a:off x="10154209" y="3675888"/>
+            <a:ext cx="1051560" cy="822960"/>
+          </a:xfrm>
+          <a:prstGeom prst="rect">
+            <a:avLst/>
+          </a:prstGeom>
+          <a:noFill/>
+          <a:ln/>
+        </p:spPr>
+        <p:txBody>
+          <a:bodyPr wrap="square" lIns="0" tIns="0" rIns="0" bIns="0" rtlCol="0" anchor="ctr"/>
+          <a:lstStyle/>
+          <a:p>
+            <a:pPr algn="r" indent="0" marL="0">
+              <a:buNone/>
+            </a:pPr>
+            <a:r>
+              <a:rPr lang="en-US" sz="1800" b="1" dirty="0">
+                <a:solidFill>
+                  <a:schemeClr val="accent2"/>
+                </a:solidFill>
+              </a:rPr>
+              <a:t>3%</a:t>
+            </a:r>
+            <a:endParaRPr lang="en-US" sz="1800" dirty="0"/>
+          </a:p>
+        </p:txBody>
+      </p:sp>
+      <p:sp>
+        <p:nvSpPr>
+          <p:cNvPr id="26" name="own-row-2"/>
+          <p:cNvSpPr/>
+          <p:nvPr/>
+        </p:nvSpPr>
+        <p:spPr>
+          <a:xfrm>
+            <a:off x="4896409" y="4754880"/>
+            <a:ext cx="6746646" cy="1051560"/>
+          </a:xfrm>
+          <a:prstGeom prst="roundRect">
+            <a:avLst>
+              <a:gd name="adj" fmla="val 6957"/>
+            </a:avLst>
+          </a:prstGeom>
+          <a:solidFill>
+            <a:schemeClr val="bg2"/>
+          </a:solidFill>
+          <a:ln/>
+        </p:spPr>
+      </p:sp>
+      <p:sp>
+        <p:nvSpPr>
+          <p:cNvPr id="27" name="own-dot-2"/>
+          <p:cNvSpPr/>
+          <p:nvPr/>
+        </p:nvSpPr>
+        <p:spPr>
+          <a:xfrm>
+            <a:off x="5125009" y="4983480"/>
+            <a:ext cx="146304" cy="146304"/>
+          </a:xfrm>
+          <a:prstGeom prst="ellipse">
+            <a:avLst/>
+          </a:prstGeom>
+          <a:solidFill>
+            <a:schemeClr val="accent6"/>
+          </a:solidFill>
+          <a:ln/>
+        </p:spPr>
+      </p:sp>
+      <p:sp>
+        <p:nvSpPr>
+          <p:cNvPr id="28" name="own-n-2"/>
+          <p:cNvSpPr txBox="1"/>
+          <p:nvPr/>
+        </p:nvSpPr>
+        <p:spPr>
+          <a:xfrm>
+            <a:off x="5353609" y="4892040"/>
+            <a:ext cx="2103120" cy="320040"/>
+          </a:xfrm>
+          <a:prstGeom prst="rect">
+            <a:avLst/>
+          </a:prstGeom>
+          <a:noFill/>
+          <a:ln/>
+        </p:spPr>
+        <p:txBody>
+          <a:bodyPr wrap="square" lIns="0" tIns="0" rIns="0" bIns="0" rtlCol="0" anchor="t"/>
+          <a:lstStyle/>
+          <a:p>
+            <a:pPr indent="0" marL="0">
+              <a:buNone/>
+            </a:pPr>
+            <a:r>
+              <a:rPr lang="en-US" sz="1500" b="1" dirty="0">
+                <a:solidFill>
+                  <a:schemeClr val="tx1"/>
+                </a:solidFill>
+              </a:rPr>
+              <a:t>YOLOX-Tiny</a:t>
+            </a:r>
+            <a:endParaRPr lang="en-US" sz="1500" dirty="0"/>
+          </a:p>
+        </p:txBody>
+      </p:sp>
+      <p:sp>
+        <p:nvSpPr>
+          <p:cNvPr id="29" name="own-s-2"/>
+          <p:cNvSpPr txBox="1"/>
+          <p:nvPr/>
+        </p:nvSpPr>
+        <p:spPr>
+          <a:xfrm>
+            <a:off x="5353609" y="5303520"/>
+            <a:ext cx="2103120" cy="274320"/>
+          </a:xfrm>
+          <a:prstGeom prst="rect">
+            <a:avLst/>
+          </a:prstGeom>
+          <a:noFill/>
+          <a:ln/>
+        </p:spPr>
+        <p:txBody>
+          <a:bodyPr wrap="square" lIns="0" tIns="0" rIns="0" bIns="0" rtlCol="0" anchor="t"/>
+          <a:lstStyle/>
+          <a:p>
+            <a:pPr indent="0" marL="0">
+              <a:buNone/>
+            </a:pPr>
+            <a:r>
+              <a:rPr lang="en-US" sz="1200" dirty="0">
+                <a:solidFill>
+                  <a:schemeClr val="tx2"/>
+                </a:solidFill>
+              </a:rPr>
+              <a:t>5.06M · 6.45 GFLOPs</a:t>
+            </a:r>
+            <a:endParaRPr lang="en-US" sz="1200" dirty="0"/>
+          </a:p>
+        </p:txBody>
+      </p:sp>
+      <p:sp>
+        <p:nvSpPr>
+          <p:cNvPr id="30" name="own-m-2"/>
+          <p:cNvSpPr txBox="1"/>
+          <p:nvPr/>
+        </p:nvSpPr>
+        <p:spPr>
+          <a:xfrm>
+            <a:off x="7411009" y="4864608"/>
+            <a:ext cx="1600200" cy="822960"/>
+          </a:xfrm>
+          <a:prstGeom prst="rect">
+            <a:avLst/>
+          </a:prstGeom>
+          <a:noFill/>
+          <a:ln/>
+        </p:spPr>
+        <p:txBody>
+          <a:bodyPr wrap="square" lIns="0" tIns="0" rIns="0" bIns="0" rtlCol="0" anchor="ctr"/>
+          <a:lstStyle/>
+          <a:p>
+            <a:pPr algn="r" indent="0" marL="0">
+              <a:buNone/>
+            </a:pPr>
+            <a:r>
+              <a:rPr lang="en-US" sz="3400" b="1" dirty="0">
+                <a:solidFill>
+                  <a:schemeClr val="accent6"/>
+                </a:solidFill>
+              </a:rPr>
+              <a:t>83.2%</a:t>
+            </a:r>
+            <a:endParaRPr lang="en-US" sz="3400" dirty="0"/>
+          </a:p>
+        </p:txBody>
+      </p:sp>
+      <p:sp>
+        <p:nvSpPr>
+          <p:cNvPr id="31" name="own-a-2"/>
+          <p:cNvSpPr txBox="1"/>
+          <p:nvPr/>
+        </p:nvSpPr>
+        <p:spPr>
+          <a:xfrm>
+            <a:off x="9056929" y="4864608"/>
+            <a:ext cx="1097280" cy="822960"/>
+          </a:xfrm>
+          <a:prstGeom prst="rect">
+            <a:avLst/>
+          </a:prstGeom>
+          <a:noFill/>
+          <a:ln/>
+        </p:spPr>
+        <p:txBody>
+          <a:bodyPr wrap="square" lIns="0" tIns="0" rIns="0" bIns="0" rtlCol="0" anchor="ctr"/>
+          <a:lstStyle/>
+          <a:p>
+            <a:pPr algn="r" indent="0" marL="0">
+              <a:buNone/>
+            </a:pPr>
+            <a:r>
+              <a:rPr lang="en-US" sz="1800" dirty="0">
+                <a:solidFill>
+                  <a:schemeClr val="tx1"/>
+                </a:solidFill>
+              </a:rPr>
+              <a:t>0.66</a:t>
+            </a:r>
+            <a:endParaRPr lang="en-US" sz="1800" dirty="0"/>
+          </a:p>
+        </p:txBody>
+      </p:sp>
+      <p:sp>
+        <p:nvSpPr>
+          <p:cNvPr id="32" name="own-h2-2"/>
+          <p:cNvSpPr txBox="1"/>
+          <p:nvPr/>
+        </p:nvSpPr>
+        <p:spPr>
+          <a:xfrm>
+            <a:off x="10154209" y="4864608"/>
+            <a:ext cx="1051560" cy="822960"/>
+          </a:xfrm>
+          <a:prstGeom prst="rect">
+            <a:avLst/>
+          </a:prstGeom>
+          <a:noFill/>
+          <a:ln/>
+        </p:spPr>
+        <p:txBody>
+          <a:bodyPr wrap="square" lIns="0" tIns="0" rIns="0" bIns="0" rtlCol="0" anchor="ctr"/>
+          <a:lstStyle/>
+          <a:p>
+            <a:pPr algn="r" indent="0" marL="0">
+              <a:buNone/>
+            </a:pPr>
+            <a:r>
+              <a:rPr lang="en-US" sz="1800" b="1" dirty="0">
+                <a:solidFill>
+                  <a:schemeClr val="accent2"/>
+                </a:solidFill>
+              </a:rPr>
+              <a:t>47%</a:t>
+            </a:r>
+            <a:endParaRPr lang="en-US" sz="1800" dirty="0"/>
+          </a:p>
+        </p:txBody>
+      </p:sp>
+      <p:sp>
+        <p:nvSpPr>
+          <p:cNvPr id="33" name="own-note-bg"/>
+          <p:cNvSpPr/>
+          <p:nvPr/>
+        </p:nvSpPr>
+        <p:spPr>
+          <a:xfrm>
+            <a:off x="4896409" y="5943600"/>
+            <a:ext cx="6746646" cy="384048"/>
+          </a:xfrm>
+          <a:prstGeom prst="roundRect">
+            <a:avLst>
+              <a:gd name="adj" fmla="val 11905"/>
+            </a:avLst>
+          </a:prstGeom>
+          <a:solidFill>
+            <a:schemeClr val="accent1">
+              <a:alpha val="20000"/>
+            </a:schemeClr>
+          </a:solidFill>
+          <a:ln w="12700">
+            <a:solidFill>
+              <a:schemeClr val="accent1"/>
+            </a:solidFill>
+            <a:prstDash val="solid"/>
+          </a:ln>
+        </p:spPr>
+      </p:sp>
+      <p:sp>
+        <p:nvSpPr>
+          <p:cNvPr id="34" name="own-note"/>
+          <p:cNvSpPr txBox="1"/>
+          <p:nvPr/>
+        </p:nvSpPr>
+        <p:spPr>
+          <a:xfrm>
+            <a:off x="4896409" y="5943600"/>
+            <a:ext cx="6746646" cy="384048"/>
+          </a:xfrm>
+          <a:prstGeom prst="rect">
+            <a:avLst/>
+          </a:prstGeom>
+          <a:noFill/>
+          <a:ln/>
+        </p:spPr>
+        <p:txBody>
+          <a:bodyPr wrap="square" lIns="0" tIns="0" rIns="0" bIns="0" rtlCol="0" anchor="ctr"/>
+          <a:lstStyle/>
+          <a:p>
+            <a:pPr algn="ctr" indent="0" marL="0">
+              <a:buNone/>
+            </a:pPr>
+            <a:r>
+              <a:rPr lang="en-US" sz="1300" b="1" dirty="0">
+                <a:solidFill>
+                  <a:schemeClr val="accent1"/>
+                </a:solidFill>
+              </a:rPr>
+              <a:t>32px 미만 박스 AP: ATSS 0.86 · YOLOX-S 0.80</a:t>
+            </a:r>
+            <a:endParaRPr lang="en-US" sz="1300" dirty="0"/>
           </a:p>
         </p:txBody>
       </p:sp>
@@ -14090,15 +14585,335 @@
                   <a:schemeClr val="tx1"/>
                 </a:solidFill>
               </a:rPr>
-              <a:t>작은 모델이 더 맵다 ?</a:t>
+              <a:t>높은 수치, 숨은 함정</a:t>
             </a:r>
             <a:endParaRPr lang="en-US" sz="3200" dirty="0"/>
           </a:p>
         </p:txBody>
       </p:sp>
+      <p:sp>
+        <p:nvSpPr>
+          <p:cNvPr id="3" name="Text 0"/>
+          <p:cNvSpPr/>
+          <p:nvPr>
+            <p:ph idx="101" type="body" hasCustomPrompt="1"/>
+          </p:nvPr>
+        </p:nvSpPr>
+        <p:spPr>
+          <a:xfrm>
+            <a:off x="548640" y="1005840"/>
+            <a:ext cx="11094415" cy="411480"/>
+          </a:xfrm>
+          <a:prstGeom prst="rect">
+            <a:avLst/>
+          </a:prstGeom>
+          <a:noFill/>
+          <a:ln/>
+        </p:spPr>
+        <p:txBody>
+          <a:bodyPr wrap="square" lIns="0" tIns="0" rIns="0" bIns="0" rtlCol="0" anchor="ctr"/>
+          <a:lstStyle/>
+          <a:p>
+            <a:pPr algn="l" indent="0" marL="0">
+              <a:buNone/>
+            </a:pPr>
+            <a:r>
+              <a:rPr lang="en-US" sz="1500" dirty="0">
+                <a:solidFill>
+                  <a:schemeClr val="tx2"/>
+                </a:solidFill>
+              </a:rPr>
+              <a:t>1차 테스트 93%, but 과적합 학습 데이터</a:t>
+            </a:r>
+            <a:endParaRPr lang="en-US" sz="1500" dirty="0"/>
+          </a:p>
+        </p:txBody>
+      </p:sp>
+      <p:sp>
+        <p:nvSpPr>
+          <p:cNvPr id="4" name="stat-0"/>
+          <p:cNvSpPr/>
+          <p:nvPr/>
+        </p:nvSpPr>
+        <p:spPr>
+          <a:xfrm>
+            <a:off x="548640" y="1600200"/>
+            <a:ext cx="3840480" cy="1371600"/>
+          </a:xfrm>
+          <a:prstGeom prst="roundRect">
+            <a:avLst>
+              <a:gd name="adj" fmla="val 5333"/>
+            </a:avLst>
+          </a:prstGeom>
+          <a:solidFill>
+            <a:schemeClr val="bg2"/>
+          </a:solidFill>
+          <a:ln/>
+        </p:spPr>
+      </p:sp>
+      <p:sp>
+        <p:nvSpPr>
+          <p:cNvPr id="5" name="stat-n-0"/>
+          <p:cNvSpPr txBox="1"/>
+          <p:nvPr/>
+        </p:nvSpPr>
+        <p:spPr>
+          <a:xfrm>
+            <a:off x="822960" y="1737360"/>
+            <a:ext cx="3383280" cy="685800"/>
+          </a:xfrm>
+          <a:prstGeom prst="rect">
+            <a:avLst/>
+          </a:prstGeom>
+          <a:noFill/>
+          <a:ln/>
+        </p:spPr>
+        <p:txBody>
+          <a:bodyPr wrap="square" lIns="0" tIns="0" rIns="0" bIns="0" rtlCol="0" anchor="t"/>
+          <a:lstStyle/>
+          <a:p>
+            <a:pPr indent="0" marL="0">
+              <a:buNone/>
+            </a:pPr>
+            <a:r>
+              <a:rPr lang="en-US" sz="3200" b="1" dirty="0">
+                <a:solidFill>
+                  <a:schemeClr val="accent3"/>
+                </a:solidFill>
+              </a:rPr>
+              <a:t>3,673장</a:t>
+            </a:r>
+            <a:endParaRPr lang="en-US" sz="3200" dirty="0"/>
+          </a:p>
+        </p:txBody>
+      </p:sp>
+      <p:sp>
+        <p:nvSpPr>
+          <p:cNvPr id="6" name="stat-l-0"/>
+          <p:cNvSpPr txBox="1"/>
+          <p:nvPr/>
+        </p:nvSpPr>
+        <p:spPr>
+          <a:xfrm>
+            <a:off x="822960" y="2423160"/>
+            <a:ext cx="3383280" cy="365760"/>
+          </a:xfrm>
+          <a:prstGeom prst="rect">
+            <a:avLst/>
+          </a:prstGeom>
+          <a:noFill/>
+          <a:ln/>
+        </p:spPr>
+        <p:txBody>
+          <a:bodyPr wrap="square" lIns="0" tIns="0" rIns="0" bIns="0" rtlCol="0" anchor="t"/>
+          <a:lstStyle/>
+          <a:p>
+            <a:pPr indent="0" marL="0">
+              <a:buNone/>
+            </a:pPr>
+            <a:r>
+              <a:rPr lang="en-US" sz="1400" dirty="0">
+                <a:solidFill>
+                  <a:schemeClr val="tx2"/>
+                </a:solidFill>
+              </a:rPr>
+              <a:t>테스트 153장 포함 업로드</a:t>
+            </a:r>
+            <a:endParaRPr lang="en-US" sz="1400" dirty="0"/>
+          </a:p>
+        </p:txBody>
+      </p:sp>
+      <p:sp>
+        <p:nvSpPr>
+          <p:cNvPr id="7" name="stat-1"/>
+          <p:cNvSpPr/>
+          <p:nvPr/>
+        </p:nvSpPr>
+        <p:spPr>
+          <a:xfrm>
+            <a:off x="548640" y="3108960"/>
+            <a:ext cx="3840480" cy="1371600"/>
+          </a:xfrm>
+          <a:prstGeom prst="roundRect">
+            <a:avLst>
+              <a:gd name="adj" fmla="val 5333"/>
+            </a:avLst>
+          </a:prstGeom>
+          <a:solidFill>
+            <a:schemeClr val="bg2"/>
+          </a:solidFill>
+          <a:ln/>
+        </p:spPr>
+      </p:sp>
+      <p:sp>
+        <p:nvSpPr>
+          <p:cNvPr id="8" name="stat-n-1"/>
+          <p:cNvSpPr txBox="1"/>
+          <p:nvPr/>
+        </p:nvSpPr>
+        <p:spPr>
+          <a:xfrm>
+            <a:off x="822960" y="3246120"/>
+            <a:ext cx="3383280" cy="685800"/>
+          </a:xfrm>
+          <a:prstGeom prst="rect">
+            <a:avLst/>
+          </a:prstGeom>
+          <a:noFill/>
+          <a:ln/>
+        </p:spPr>
+        <p:txBody>
+          <a:bodyPr wrap="square" lIns="0" tIns="0" rIns="0" bIns="0" rtlCol="0" anchor="t"/>
+          <a:lstStyle/>
+          <a:p>
+            <a:pPr indent="0" marL="0">
+              <a:buNone/>
+            </a:pPr>
+            <a:r>
+              <a:rPr lang="en-US" sz="3200" b="1" dirty="0">
+                <a:solidFill>
+                  <a:schemeClr val="accent3"/>
+                </a:solidFill>
+              </a:rPr>
+              <a:t>22장</a:t>
+            </a:r>
+            <a:endParaRPr lang="en-US" sz="3200" dirty="0"/>
+          </a:p>
+        </p:txBody>
+      </p:sp>
+      <p:sp>
+        <p:nvSpPr>
+          <p:cNvPr id="9" name="stat-l-1"/>
+          <p:cNvSpPr txBox="1"/>
+          <p:nvPr/>
+        </p:nvSpPr>
+        <p:spPr>
+          <a:xfrm>
+            <a:off x="822960" y="3931920"/>
+            <a:ext cx="3383280" cy="365760"/>
+          </a:xfrm>
+          <a:prstGeom prst="rect">
+            <a:avLst/>
+          </a:prstGeom>
+          <a:noFill/>
+          <a:ln/>
+        </p:spPr>
+        <p:txBody>
+          <a:bodyPr wrap="square" lIns="0" tIns="0" rIns="0" bIns="0" rtlCol="0" anchor="t"/>
+          <a:lstStyle/>
+          <a:p>
+            <a:pPr indent="0" marL="0">
+              <a:buNone/>
+            </a:pPr>
+            <a:r>
+              <a:rPr lang="en-US" sz="1400" dirty="0">
+                <a:solidFill>
+                  <a:schemeClr val="tx2"/>
+                </a:solidFill>
+              </a:rPr>
+              <a:t>학습 사진의 복사본</a:t>
+            </a:r>
+            <a:endParaRPr lang="en-US" sz="1400" dirty="0"/>
+          </a:p>
+        </p:txBody>
+      </p:sp>
+      <p:sp>
+        <p:nvSpPr>
+          <p:cNvPr id="10" name="stat-2"/>
+          <p:cNvSpPr/>
+          <p:nvPr/>
+        </p:nvSpPr>
+        <p:spPr>
+          <a:xfrm>
+            <a:off x="548640" y="4617720"/>
+            <a:ext cx="3840480" cy="1371600"/>
+          </a:xfrm>
+          <a:prstGeom prst="roundRect">
+            <a:avLst>
+              <a:gd name="adj" fmla="val 5333"/>
+            </a:avLst>
+          </a:prstGeom>
+          <a:solidFill>
+            <a:schemeClr val="bg2"/>
+          </a:solidFill>
+          <a:ln/>
+        </p:spPr>
+      </p:sp>
+      <p:sp>
+        <p:nvSpPr>
+          <p:cNvPr id="11" name="stat-n-2"/>
+          <p:cNvSpPr txBox="1"/>
+          <p:nvPr/>
+        </p:nvSpPr>
+        <p:spPr>
+          <a:xfrm>
+            <a:off x="822960" y="4754880"/>
+            <a:ext cx="3383280" cy="685800"/>
+          </a:xfrm>
+          <a:prstGeom prst="rect">
+            <a:avLst/>
+          </a:prstGeom>
+          <a:noFill/>
+          <a:ln/>
+        </p:spPr>
+        <p:txBody>
+          <a:bodyPr wrap="square" lIns="0" tIns="0" rIns="0" bIns="0" rtlCol="0" anchor="t"/>
+          <a:lstStyle/>
+          <a:p>
+            <a:pPr indent="0" marL="0">
+              <a:buNone/>
+            </a:pPr>
+            <a:r>
+              <a:rPr lang="en-US" sz="3200" b="1" dirty="0">
+                <a:solidFill>
+                  <a:schemeClr val="accent1"/>
+                </a:solidFill>
+              </a:rPr>
+              <a:t>93.3 → 92.9%</a:t>
+            </a:r>
+            <a:endParaRPr lang="en-US" sz="3200" dirty="0"/>
+          </a:p>
+        </p:txBody>
+      </p:sp>
+      <p:sp>
+        <p:nvSpPr>
+          <p:cNvPr id="12" name="stat-l-2"/>
+          <p:cNvSpPr txBox="1"/>
+          <p:nvPr/>
+        </p:nvSpPr>
+        <p:spPr>
+          <a:xfrm>
+            <a:off x="822960" y="5440680"/>
+            <a:ext cx="3383280" cy="365760"/>
+          </a:xfrm>
+          <a:prstGeom prst="rect">
+            <a:avLst/>
+          </a:prstGeom>
+          <a:noFill/>
+          <a:ln/>
+        </p:spPr>
+        <p:txBody>
+          <a:bodyPr wrap="square" lIns="0" tIns="0" rIns="0" bIns="0" rtlCol="0" anchor="t"/>
+          <a:lstStyle/>
+          <a:p>
+            <a:pPr indent="0" marL="0">
+              <a:buNone/>
+            </a:pPr>
+            <a:r>
+              <a:rPr lang="en-US" sz="1400" dirty="0">
+                <a:solidFill>
+                  <a:schemeClr val="tx2"/>
+                </a:solidFill>
+              </a:rPr>
+              <a:t>복사본 제거 후 mAP@50</a:t>
+            </a:r>
+            <a:endParaRPr lang="en-US" sz="1400" dirty="0"/>
+          </a:p>
+        </p:txBody>
+      </p:sp>
       <p:pic>
         <p:nvPicPr>
-          <p:cNvPr id="3" name="geti-models" descr="C:\Users\user\_se4nchoi\batteryvision\docs\submission\build\img\geti_models.png">    </p:cNvPr>
+          <p:cNvPr id="13" name="dup-0" descr="C:\Users\user\_se4nchoi\batteryvision\docs\submission\build\img\dup_test.jpg">    </p:cNvPr>
           <p:cNvPicPr>
             <a:picLocks noChangeAspect="1"/>
           </p:cNvPicPr>
@@ -14112,8 +14927,8 @@
         </p:blipFill>
         <p:spPr>
           <a:xfrm>
-            <a:off x="548640" y="1600200"/>
-            <a:ext cx="4027729" cy="4343400"/>
+            <a:off x="4617720" y="1600200"/>
+            <a:ext cx="3429000" cy="3429000"/>
           </a:xfrm>
           <a:prstGeom prst="rect">
             <a:avLst/>
@@ -14122,18 +14937,18 @@
       </p:pic>
       <p:sp>
         <p:nvSpPr>
-          <p:cNvPr id="4" name="geti-caveat-bg"/>
+          <p:cNvPr id="14" name="dup-l-0-bg"/>
           <p:cNvSpPr/>
           <p:nvPr/>
         </p:nvSpPr>
         <p:spPr>
           <a:xfrm>
-            <a:off x="548640" y="6080760"/>
-            <a:ext cx="4027729" cy="384048"/>
+            <a:off x="4617720" y="5166360"/>
+            <a:ext cx="914400" cy="347472"/>
           </a:xfrm>
           <a:prstGeom prst="roundRect">
             <a:avLst>
-              <a:gd name="adj" fmla="val 11905"/>
+              <a:gd name="adj" fmla="val 13158"/>
             </a:avLst>
           </a:prstGeom>
           <a:solidFill>
@@ -14151,14 +14966,14 @@
       </p:sp>
       <p:sp>
         <p:nvSpPr>
-          <p:cNvPr id="5" name="geti-caveat"/>
+          <p:cNvPr id="15" name="dup-l-0"/>
           <p:cNvSpPr txBox="1"/>
           <p:nvPr/>
         </p:nvSpPr>
         <p:spPr>
           <a:xfrm>
-            <a:off x="548640" y="6080760"/>
-            <a:ext cx="4027729" cy="384048"/>
+            <a:off x="4617720" y="5166360"/>
+            <a:ext cx="914400" cy="347472"/>
           </a:xfrm>
           <a:prstGeom prst="rect">
             <a:avLst/>
@@ -14179,392 +14994,50 @@
                   <a:schemeClr val="accent3"/>
                 </a:solidFill>
               </a:rPr>
-              <a:t>낙관적인 Geti 점수 (증강본이 학습·테스트에 섞임)</a:t>
+              <a:t>테스트</a:t>
             </a:r>
             <a:endParaRPr lang="en-US" sz="1300" dirty="0"/>
           </a:p>
         </p:txBody>
       </p:sp>
-      <p:sp>
-        <p:nvSpPr>
-          <p:cNvPr id="6" name="own-h"/>
-          <p:cNvSpPr txBox="1"/>
-          <p:nvPr/>
-        </p:nvSpPr>
-        <p:spPr>
-          <a:xfrm>
-            <a:off x="4896409" y="1600200"/>
-            <a:ext cx="6746646" cy="320040"/>
-          </a:xfrm>
-          <a:prstGeom prst="rect">
-            <a:avLst/>
-          </a:prstGeom>
-          <a:noFill/>
-          <a:ln/>
-        </p:spPr>
-        <p:txBody>
-          <a:bodyPr wrap="square" lIns="0" tIns="0" rIns="0" bIns="0" rtlCol="0" anchor="t"/>
-          <a:lstStyle/>
-          <a:p>
-            <a:pPr indent="0" marL="0">
-              <a:buNone/>
-            </a:pPr>
-            <a:r>
-              <a:rPr lang="en-US" sz="1600" b="1" dirty="0">
-                <a:solidFill>
-                  <a:schemeClr val="tx1"/>
-                </a:solidFill>
-              </a:rPr>
-              <a:t>직접 측정 · 1차 테스트</a:t>
-            </a:r>
-            <a:endParaRPr lang="en-US" sz="1600" dirty="0"/>
-          </a:p>
-        </p:txBody>
-      </p:sp>
-      <p:sp>
-        <p:nvSpPr>
-          <p:cNvPr id="7" name="own-col-0"/>
-          <p:cNvSpPr txBox="1"/>
-          <p:nvPr/>
-        </p:nvSpPr>
-        <p:spPr>
-          <a:xfrm>
-            <a:off x="7411009" y="2011680"/>
-            <a:ext cx="1600200" cy="274320"/>
-          </a:xfrm>
-          <a:prstGeom prst="rect">
-            <a:avLst/>
-          </a:prstGeom>
-          <a:noFill/>
-          <a:ln/>
-        </p:spPr>
-        <p:txBody>
-          <a:bodyPr wrap="square" lIns="0" tIns="0" rIns="0" bIns="0" rtlCol="0" anchor="t"/>
-          <a:lstStyle/>
-          <a:p>
-            <a:pPr algn="r" indent="0" marL="0">
-              <a:buNone/>
-            </a:pPr>
-            <a:r>
-              <a:rPr lang="en-US" sz="1200" dirty="0">
-                <a:solidFill>
-                  <a:schemeClr val="tx2"/>
-                </a:solidFill>
-              </a:rPr>
-              <a:t>mAP@50</a:t>
-            </a:r>
-            <a:endParaRPr lang="en-US" sz="1200" dirty="0"/>
-          </a:p>
-        </p:txBody>
-      </p:sp>
-      <p:sp>
-        <p:nvSpPr>
-          <p:cNvPr id="8" name="own-col-1"/>
-          <p:cNvSpPr txBox="1"/>
-          <p:nvPr/>
-        </p:nvSpPr>
-        <p:spPr>
-          <a:xfrm>
-            <a:off x="9056929" y="2011680"/>
-            <a:ext cx="1097280" cy="274320"/>
-          </a:xfrm>
-          <a:prstGeom prst="rect">
-            <a:avLst/>
-          </a:prstGeom>
-          <a:noFill/>
-          <a:ln/>
-        </p:spPr>
-        <p:txBody>
-          <a:bodyPr wrap="square" lIns="0" tIns="0" rIns="0" bIns="0" rtlCol="0" anchor="t"/>
-          <a:lstStyle/>
-          <a:p>
-            <a:pPr algn="r" indent="0" marL="0">
-              <a:buNone/>
-            </a:pPr>
-            <a:r>
-              <a:rPr lang="en-US" sz="1200" dirty="0">
-                <a:solidFill>
-                  <a:schemeClr val="tx2"/>
-                </a:solidFill>
-              </a:rPr>
-              <a:t>scratch AP</a:t>
-            </a:r>
-            <a:endParaRPr lang="en-US" sz="1200" dirty="0"/>
-          </a:p>
-        </p:txBody>
-      </p:sp>
-      <p:sp>
-        <p:nvSpPr>
-          <p:cNvPr id="9" name="own-col-2"/>
-          <p:cNvSpPr txBox="1"/>
-          <p:nvPr/>
-        </p:nvSpPr>
-        <p:spPr>
-          <a:xfrm>
-            <a:off x="10154209" y="2011680"/>
-            <a:ext cx="1051560" cy="274320"/>
-          </a:xfrm>
-          <a:prstGeom prst="rect">
-            <a:avLst/>
-          </a:prstGeom>
-          <a:noFill/>
-          <a:ln/>
-        </p:spPr>
-        <p:txBody>
-          <a:bodyPr wrap="square" lIns="0" tIns="0" rIns="0" bIns="0" rtlCol="0" anchor="t"/>
-          <a:lstStyle/>
-          <a:p>
-            <a:pPr algn="r" indent="0" marL="0">
-              <a:buNone/>
-            </a:pPr>
-            <a:r>
-              <a:rPr lang="en-US" sz="1200" dirty="0">
-                <a:solidFill>
-                  <a:schemeClr val="tx2"/>
-                </a:solidFill>
-              </a:rPr>
-              <a:t>2차 세트</a:t>
-            </a:r>
-            <a:endParaRPr lang="en-US" sz="1200" dirty="0"/>
-          </a:p>
-        </p:txBody>
-      </p:sp>
-      <p:sp>
-        <p:nvSpPr>
-          <p:cNvPr id="10" name="own-row-0"/>
+      <p:pic>
+        <p:nvPicPr>
+          <p:cNvPr id="16" name="dup-1" descr="C:\Users\user\_se4nchoi\batteryvision\docs\submission\build\img\dup_train.jpg">    </p:cNvPr>
+          <p:cNvPicPr>
+            <a:picLocks noChangeAspect="1"/>
+          </p:cNvPicPr>
+          <p:nvPr/>
+        </p:nvPicPr>
+        <p:blipFill>
+          <a:blip r:embed="rId2"/>
+          <a:stretch>
+            <a:fillRect/>
+          </a:stretch>
+        </p:blipFill>
+        <p:spPr>
+          <a:xfrm>
+            <a:off x="8183880" y="1600200"/>
+            <a:ext cx="3429000" cy="3429000"/>
+          </a:xfrm>
+          <a:prstGeom prst="rect">
+            <a:avLst/>
+          </a:prstGeom>
+        </p:spPr>
+      </p:pic>
+      <p:sp>
+        <p:nvSpPr>
+          <p:cNvPr id="17" name="dup-l-1-bg"/>
           <p:cNvSpPr/>
           <p:nvPr/>
         </p:nvSpPr>
         <p:spPr>
           <a:xfrm>
-            <a:off x="4896409" y="2377440"/>
-            <a:ext cx="6746646" cy="1051560"/>
+            <a:off x="8183880" y="5166360"/>
+            <a:ext cx="914400" cy="347472"/>
           </a:xfrm>
           <a:prstGeom prst="roundRect">
             <a:avLst>
-              <a:gd name="adj" fmla="val 6957"/>
-            </a:avLst>
-          </a:prstGeom>
-          <a:solidFill>
-            <a:schemeClr val="bg2"/>
-          </a:solidFill>
-          <a:ln/>
-        </p:spPr>
-      </p:sp>
-      <p:sp>
-        <p:nvSpPr>
-          <p:cNvPr id="11" name="own-dot-0"/>
-          <p:cNvSpPr/>
-          <p:nvPr/>
-        </p:nvSpPr>
-        <p:spPr>
-          <a:xfrm>
-            <a:off x="5125009" y="2606040"/>
-            <a:ext cx="146304" cy="146304"/>
-          </a:xfrm>
-          <a:prstGeom prst="ellipse">
-            <a:avLst/>
-          </a:prstGeom>
-          <a:solidFill>
-            <a:schemeClr val="accent4"/>
-          </a:solidFill>
-          <a:ln/>
-        </p:spPr>
-      </p:sp>
-      <p:sp>
-        <p:nvSpPr>
-          <p:cNvPr id="12" name="own-n-0"/>
-          <p:cNvSpPr txBox="1"/>
-          <p:nvPr/>
-        </p:nvSpPr>
-        <p:spPr>
-          <a:xfrm>
-            <a:off x="5353609" y="2514600"/>
-            <a:ext cx="2103120" cy="320040"/>
-          </a:xfrm>
-          <a:prstGeom prst="rect">
-            <a:avLst/>
-          </a:prstGeom>
-          <a:noFill/>
-          <a:ln/>
-        </p:spPr>
-        <p:txBody>
-          <a:bodyPr wrap="square" lIns="0" tIns="0" rIns="0" bIns="0" rtlCol="0" anchor="t"/>
-          <a:lstStyle/>
-          <a:p>
-            <a:pPr indent="0" marL="0">
-              <a:buNone/>
-            </a:pPr>
-            <a:r>
-              <a:rPr lang="en-US" sz="1500" b="1" dirty="0">
-                <a:solidFill>
-                  <a:schemeClr val="tx1"/>
-                </a:solidFill>
-              </a:rPr>
-              <a:t>ATSS-MobileNetV2</a:t>
-            </a:r>
-            <a:endParaRPr lang="en-US" sz="1500" dirty="0"/>
-          </a:p>
-        </p:txBody>
-      </p:sp>
-      <p:sp>
-        <p:nvSpPr>
-          <p:cNvPr id="13" name="own-s-0"/>
-          <p:cNvSpPr txBox="1"/>
-          <p:nvPr/>
-        </p:nvSpPr>
-        <p:spPr>
-          <a:xfrm>
-            <a:off x="5353609" y="2926080"/>
-            <a:ext cx="2103120" cy="274320"/>
-          </a:xfrm>
-          <a:prstGeom prst="rect">
-            <a:avLst/>
-          </a:prstGeom>
-          <a:noFill/>
-          <a:ln/>
-        </p:spPr>
-        <p:txBody>
-          <a:bodyPr wrap="square" lIns="0" tIns="0" rIns="0" bIns="0" rtlCol="0" anchor="t"/>
-          <a:lstStyle/>
-          <a:p>
-            <a:pPr indent="0" marL="0">
-              <a:buNone/>
-            </a:pPr>
-            <a:r>
-              <a:rPr lang="en-US" sz="1200" dirty="0">
-                <a:solidFill>
-                  <a:schemeClr val="tx2"/>
-                </a:solidFill>
-              </a:rPr>
-              <a:t>3.9M · 20.6 GFLOPs</a:t>
-            </a:r>
-            <a:endParaRPr lang="en-US" sz="1200" dirty="0"/>
-          </a:p>
-        </p:txBody>
-      </p:sp>
-      <p:sp>
-        <p:nvSpPr>
-          <p:cNvPr id="14" name="own-m-0"/>
-          <p:cNvSpPr txBox="1"/>
-          <p:nvPr/>
-        </p:nvSpPr>
-        <p:spPr>
-          <a:xfrm>
-            <a:off x="7411009" y="2487168"/>
-            <a:ext cx="1600200" cy="822960"/>
-          </a:xfrm>
-          <a:prstGeom prst="rect">
-            <a:avLst/>
-          </a:prstGeom>
-          <a:noFill/>
-          <a:ln/>
-        </p:spPr>
-        <p:txBody>
-          <a:bodyPr wrap="square" lIns="0" tIns="0" rIns="0" bIns="0" rtlCol="0" anchor="ctr"/>
-          <a:lstStyle/>
-          <a:p>
-            <a:pPr algn="r" indent="0" marL="0">
-              <a:buNone/>
-            </a:pPr>
-            <a:r>
-              <a:rPr lang="en-US" sz="3400" b="1" dirty="0">
-                <a:solidFill>
-                  <a:schemeClr val="accent4"/>
-                </a:solidFill>
-              </a:rPr>
-              <a:t>92.9%</a:t>
-            </a:r>
-            <a:endParaRPr lang="en-US" sz="3400" dirty="0"/>
-          </a:p>
-        </p:txBody>
-      </p:sp>
-      <p:sp>
-        <p:nvSpPr>
-          <p:cNvPr id="15" name="own-a-0"/>
-          <p:cNvSpPr txBox="1"/>
-          <p:nvPr/>
-        </p:nvSpPr>
-        <p:spPr>
-          <a:xfrm>
-            <a:off x="9056929" y="2487168"/>
-            <a:ext cx="1097280" cy="822960"/>
-          </a:xfrm>
-          <a:prstGeom prst="rect">
-            <a:avLst/>
-          </a:prstGeom>
-          <a:noFill/>
-          <a:ln/>
-        </p:spPr>
-        <p:txBody>
-          <a:bodyPr wrap="square" lIns="0" tIns="0" rIns="0" bIns="0" rtlCol="0" anchor="ctr"/>
-          <a:lstStyle/>
-          <a:p>
-            <a:pPr algn="r" indent="0" marL="0">
-              <a:buNone/>
-            </a:pPr>
-            <a:r>
-              <a:rPr lang="en-US" sz="1800" dirty="0">
-                <a:solidFill>
-                  <a:schemeClr val="tx1"/>
-                </a:solidFill>
-              </a:rPr>
-              <a:t>0.86</a:t>
-            </a:r>
-            <a:endParaRPr lang="en-US" sz="1800" dirty="0"/>
-          </a:p>
-        </p:txBody>
-      </p:sp>
-      <p:sp>
-        <p:nvSpPr>
-          <p:cNvPr id="16" name="own-h2-0"/>
-          <p:cNvSpPr txBox="1"/>
-          <p:nvPr/>
-        </p:nvSpPr>
-        <p:spPr>
-          <a:xfrm>
-            <a:off x="10154209" y="2487168"/>
-            <a:ext cx="1051560" cy="822960"/>
-          </a:xfrm>
-          <a:prstGeom prst="rect">
-            <a:avLst/>
-          </a:prstGeom>
-          <a:noFill/>
-          <a:ln/>
-        </p:spPr>
-        <p:txBody>
-          <a:bodyPr wrap="square" lIns="0" tIns="0" rIns="0" bIns="0" rtlCol="0" anchor="ctr"/>
-          <a:lstStyle/>
-          <a:p>
-            <a:pPr algn="r" indent="0" marL="0">
-              <a:buNone/>
-            </a:pPr>
-            <a:r>
-              <a:rPr lang="en-US" sz="1800" b="1" dirty="0">
-                <a:solidFill>
-                  <a:schemeClr val="accent2"/>
-                </a:solidFill>
-              </a:rPr>
-              <a:t>47%</a:t>
-            </a:r>
-            <a:endParaRPr lang="en-US" sz="1800" dirty="0"/>
-          </a:p>
-        </p:txBody>
-      </p:sp>
-      <p:sp>
-        <p:nvSpPr>
-          <p:cNvPr id="17" name="best-badge-bg"/>
-          <p:cNvSpPr/>
-          <p:nvPr/>
-        </p:nvSpPr>
-        <p:spPr>
-          <a:xfrm>
-            <a:off x="6816649" y="2944368"/>
-            <a:ext cx="502920" cy="237744"/>
-          </a:xfrm>
-          <a:prstGeom prst="roundRect">
-            <a:avLst>
-              <a:gd name="adj" fmla="val 19231"/>
+              <a:gd name="adj" fmla="val 13158"/>
             </a:avLst>
           </a:prstGeom>
           <a:solidFill>
@@ -14582,14 +15055,14 @@
       </p:sp>
       <p:sp>
         <p:nvSpPr>
-          <p:cNvPr id="18" name="best-badge"/>
+          <p:cNvPr id="18" name="dup-l-1"/>
           <p:cNvSpPr txBox="1"/>
           <p:nvPr/>
         </p:nvSpPr>
         <p:spPr>
           <a:xfrm>
-            <a:off x="6816649" y="2944368"/>
-            <a:ext cx="502920" cy="237744"/>
+            <a:off x="8183880" y="5166360"/>
+            <a:ext cx="914400" cy="347472"/>
           </a:xfrm>
           <a:prstGeom prst="rect">
             <a:avLst/>
@@ -14610,7 +15083,7 @@
                   <a:schemeClr val="accent1"/>
                 </a:solidFill>
               </a:rPr>
-              <a:t>best</a:t>
+              <a:t>학습</a:t>
             </a:r>
             <a:endParaRPr lang="en-US" sz="1300" dirty="0"/>
           </a:p>
@@ -14618,56 +15091,14 @@
       </p:sp>
       <p:sp>
         <p:nvSpPr>
-          <p:cNvPr id="19" name="own-row-1"/>
-          <p:cNvSpPr/>
-          <p:nvPr/>
-        </p:nvSpPr>
-        <p:spPr>
-          <a:xfrm>
-            <a:off x="4896409" y="3566160"/>
-            <a:ext cx="6746646" cy="1051560"/>
-          </a:xfrm>
-          <a:prstGeom prst="roundRect">
-            <a:avLst>
-              <a:gd name="adj" fmla="val 6957"/>
-            </a:avLst>
-          </a:prstGeom>
-          <a:solidFill>
-            <a:schemeClr val="bg2"/>
-          </a:solidFill>
-          <a:ln/>
-        </p:spPr>
-      </p:sp>
-      <p:sp>
-        <p:nvSpPr>
-          <p:cNvPr id="20" name="own-dot-1"/>
-          <p:cNvSpPr/>
-          <p:nvPr/>
-        </p:nvSpPr>
-        <p:spPr>
-          <a:xfrm>
-            <a:off x="5125009" y="3794760"/>
-            <a:ext cx="146304" cy="146304"/>
-          </a:xfrm>
-          <a:prstGeom prst="ellipse">
-            <a:avLst/>
-          </a:prstGeom>
-          <a:solidFill>
-            <a:schemeClr val="accent5"/>
-          </a:solidFill>
-          <a:ln/>
-        </p:spPr>
-      </p:sp>
-      <p:sp>
-        <p:nvSpPr>
-          <p:cNvPr id="21" name="own-n-1"/>
+          <p:cNvPr id="19" name="dup-cap"/>
           <p:cNvSpPr txBox="1"/>
           <p:nvPr/>
         </p:nvSpPr>
         <p:spPr>
           <a:xfrm>
-            <a:off x="5353609" y="3703320"/>
-            <a:ext cx="2103120" cy="320040"/>
+            <a:off x="9144000" y="5166360"/>
+            <a:ext cx="2468880" cy="347472"/>
           </a:xfrm>
           <a:prstGeom prst="rect">
             <a:avLst/>
@@ -14676,46 +15107,10 @@
           <a:ln/>
         </p:spPr>
         <p:txBody>
-          <a:bodyPr wrap="square" lIns="0" tIns="0" rIns="0" bIns="0" rtlCol="0" anchor="t"/>
+          <a:bodyPr wrap="square" lIns="0" tIns="0" rIns="0" bIns="0" rtlCol="0" anchor="ctr"/>
           <a:lstStyle/>
           <a:p>
-            <a:pPr indent="0" marL="0">
-              <a:buNone/>
-            </a:pPr>
-            <a:r>
-              <a:rPr lang="en-US" sz="1500" b="1" dirty="0">
-                <a:solidFill>
-                  <a:schemeClr val="tx1"/>
-                </a:solidFill>
-              </a:rPr>
-              <a:t>YOLOX-S</a:t>
-            </a:r>
-            <a:endParaRPr lang="en-US" sz="1500" dirty="0"/>
-          </a:p>
-        </p:txBody>
-      </p:sp>
-      <p:sp>
-        <p:nvSpPr>
-          <p:cNvPr id="22" name="own-s-1"/>
-          <p:cNvSpPr txBox="1"/>
-          <p:nvPr/>
-        </p:nvSpPr>
-        <p:spPr>
-          <a:xfrm>
-            <a:off x="5353609" y="4114800"/>
-            <a:ext cx="2103120" cy="274320"/>
-          </a:xfrm>
-          <a:prstGeom prst="rect">
-            <a:avLst/>
-          </a:prstGeom>
-          <a:noFill/>
-          <a:ln/>
-        </p:spPr>
-        <p:txBody>
-          <a:bodyPr wrap="square" lIns="0" tIns="0" rIns="0" bIns="0" rtlCol="0" anchor="t"/>
-          <a:lstStyle/>
-          <a:p>
-            <a:pPr indent="0" marL="0">
+            <a:pPr algn="r" indent="0" marL="0">
               <a:buNone/>
             </a:pPr>
             <a:r>
@@ -14724,404 +15119,9 @@
                   <a:schemeClr val="tx2"/>
                 </a:solidFill>
               </a:rPr>
-              <a:t>9M · 26.8 GFLOPs</a:t>
+              <a:t>dHash 거리 4 / 256</a:t>
             </a:r>
             <a:endParaRPr lang="en-US" sz="1200" dirty="0"/>
-          </a:p>
-        </p:txBody>
-      </p:sp>
-      <p:sp>
-        <p:nvSpPr>
-          <p:cNvPr id="23" name="own-m-1"/>
-          <p:cNvSpPr txBox="1"/>
-          <p:nvPr/>
-        </p:nvSpPr>
-        <p:spPr>
-          <a:xfrm>
-            <a:off x="7411009" y="3675888"/>
-            <a:ext cx="1600200" cy="822960"/>
-          </a:xfrm>
-          <a:prstGeom prst="rect">
-            <a:avLst/>
-          </a:prstGeom>
-          <a:noFill/>
-          <a:ln/>
-        </p:spPr>
-        <p:txBody>
-          <a:bodyPr wrap="square" lIns="0" tIns="0" rIns="0" bIns="0" rtlCol="0" anchor="ctr"/>
-          <a:lstStyle/>
-          <a:p>
-            <a:pPr algn="r" indent="0" marL="0">
-              <a:buNone/>
-            </a:pPr>
-            <a:r>
-              <a:rPr lang="en-US" sz="3400" b="1" dirty="0">
-                <a:solidFill>
-                  <a:schemeClr val="accent5"/>
-                </a:solidFill>
-              </a:rPr>
-              <a:t>89.2%</a:t>
-            </a:r>
-            <a:endParaRPr lang="en-US" sz="3400" dirty="0"/>
-          </a:p>
-        </p:txBody>
-      </p:sp>
-      <p:sp>
-        <p:nvSpPr>
-          <p:cNvPr id="24" name="own-a-1"/>
-          <p:cNvSpPr txBox="1"/>
-          <p:nvPr/>
-        </p:nvSpPr>
-        <p:spPr>
-          <a:xfrm>
-            <a:off x="9056929" y="3675888"/>
-            <a:ext cx="1097280" cy="822960"/>
-          </a:xfrm>
-          <a:prstGeom prst="rect">
-            <a:avLst/>
-          </a:prstGeom>
-          <a:noFill/>
-          <a:ln/>
-        </p:spPr>
-        <p:txBody>
-          <a:bodyPr wrap="square" lIns="0" tIns="0" rIns="0" bIns="0" rtlCol="0" anchor="ctr"/>
-          <a:lstStyle/>
-          <a:p>
-            <a:pPr algn="r" indent="0" marL="0">
-              <a:buNone/>
-            </a:pPr>
-            <a:r>
-              <a:rPr lang="en-US" sz="1800" dirty="0">
-                <a:solidFill>
-                  <a:schemeClr val="tx1"/>
-                </a:solidFill>
-              </a:rPr>
-              <a:t>0.78</a:t>
-            </a:r>
-            <a:endParaRPr lang="en-US" sz="1800" dirty="0"/>
-          </a:p>
-        </p:txBody>
-      </p:sp>
-      <p:sp>
-        <p:nvSpPr>
-          <p:cNvPr id="25" name="own-h2-1"/>
-          <p:cNvSpPr txBox="1"/>
-          <p:nvPr/>
-        </p:nvSpPr>
-        <p:spPr>
-          <a:xfrm>
-            <a:off x="10154209" y="3675888"/>
-            <a:ext cx="1051560" cy="822960"/>
-          </a:xfrm>
-          <a:prstGeom prst="rect">
-            <a:avLst/>
-          </a:prstGeom>
-          <a:noFill/>
-          <a:ln/>
-        </p:spPr>
-        <p:txBody>
-          <a:bodyPr wrap="square" lIns="0" tIns="0" rIns="0" bIns="0" rtlCol="0" anchor="ctr"/>
-          <a:lstStyle/>
-          <a:p>
-            <a:pPr algn="r" indent="0" marL="0">
-              <a:buNone/>
-            </a:pPr>
-            <a:r>
-              <a:rPr lang="en-US" sz="1800" b="1" dirty="0">
-                <a:solidFill>
-                  <a:schemeClr val="accent2"/>
-                </a:solidFill>
-              </a:rPr>
-              <a:t>3%</a:t>
-            </a:r>
-            <a:endParaRPr lang="en-US" sz="1800" dirty="0"/>
-          </a:p>
-        </p:txBody>
-      </p:sp>
-      <p:sp>
-        <p:nvSpPr>
-          <p:cNvPr id="26" name="own-row-2"/>
-          <p:cNvSpPr/>
-          <p:nvPr/>
-        </p:nvSpPr>
-        <p:spPr>
-          <a:xfrm>
-            <a:off x="4896409" y="4754880"/>
-            <a:ext cx="6746646" cy="1051560"/>
-          </a:xfrm>
-          <a:prstGeom prst="roundRect">
-            <a:avLst>
-              <a:gd name="adj" fmla="val 6957"/>
-            </a:avLst>
-          </a:prstGeom>
-          <a:solidFill>
-            <a:schemeClr val="bg2"/>
-          </a:solidFill>
-          <a:ln/>
-        </p:spPr>
-      </p:sp>
-      <p:sp>
-        <p:nvSpPr>
-          <p:cNvPr id="27" name="own-dot-2"/>
-          <p:cNvSpPr/>
-          <p:nvPr/>
-        </p:nvSpPr>
-        <p:spPr>
-          <a:xfrm>
-            <a:off x="5125009" y="4983480"/>
-            <a:ext cx="146304" cy="146304"/>
-          </a:xfrm>
-          <a:prstGeom prst="ellipse">
-            <a:avLst/>
-          </a:prstGeom>
-          <a:solidFill>
-            <a:schemeClr val="accent6"/>
-          </a:solidFill>
-          <a:ln/>
-        </p:spPr>
-      </p:sp>
-      <p:sp>
-        <p:nvSpPr>
-          <p:cNvPr id="28" name="own-n-2"/>
-          <p:cNvSpPr txBox="1"/>
-          <p:nvPr/>
-        </p:nvSpPr>
-        <p:spPr>
-          <a:xfrm>
-            <a:off x="5353609" y="4892040"/>
-            <a:ext cx="2103120" cy="320040"/>
-          </a:xfrm>
-          <a:prstGeom prst="rect">
-            <a:avLst/>
-          </a:prstGeom>
-          <a:noFill/>
-          <a:ln/>
-        </p:spPr>
-        <p:txBody>
-          <a:bodyPr wrap="square" lIns="0" tIns="0" rIns="0" bIns="0" rtlCol="0" anchor="t"/>
-          <a:lstStyle/>
-          <a:p>
-            <a:pPr indent="0" marL="0">
-              <a:buNone/>
-            </a:pPr>
-            <a:r>
-              <a:rPr lang="en-US" sz="1500" b="1" dirty="0">
-                <a:solidFill>
-                  <a:schemeClr val="tx1"/>
-                </a:solidFill>
-              </a:rPr>
-              <a:t>YOLOX-Tiny</a:t>
-            </a:r>
-            <a:endParaRPr lang="en-US" sz="1500" dirty="0"/>
-          </a:p>
-        </p:txBody>
-      </p:sp>
-      <p:sp>
-        <p:nvSpPr>
-          <p:cNvPr id="29" name="own-s-2"/>
-          <p:cNvSpPr txBox="1"/>
-          <p:nvPr/>
-        </p:nvSpPr>
-        <p:spPr>
-          <a:xfrm>
-            <a:off x="5353609" y="5303520"/>
-            <a:ext cx="2103120" cy="274320"/>
-          </a:xfrm>
-          <a:prstGeom prst="rect">
-            <a:avLst/>
-          </a:prstGeom>
-          <a:noFill/>
-          <a:ln/>
-        </p:spPr>
-        <p:txBody>
-          <a:bodyPr wrap="square" lIns="0" tIns="0" rIns="0" bIns="0" rtlCol="0" anchor="t"/>
-          <a:lstStyle/>
-          <a:p>
-            <a:pPr indent="0" marL="0">
-              <a:buNone/>
-            </a:pPr>
-            <a:r>
-              <a:rPr lang="en-US" sz="1200" dirty="0">
-                <a:solidFill>
-                  <a:schemeClr val="tx2"/>
-                </a:solidFill>
-              </a:rPr>
-              <a:t>5.06M · 6.45 GFLOPs</a:t>
-            </a:r>
-            <a:endParaRPr lang="en-US" sz="1200" dirty="0"/>
-          </a:p>
-        </p:txBody>
-      </p:sp>
-      <p:sp>
-        <p:nvSpPr>
-          <p:cNvPr id="30" name="own-m-2"/>
-          <p:cNvSpPr txBox="1"/>
-          <p:nvPr/>
-        </p:nvSpPr>
-        <p:spPr>
-          <a:xfrm>
-            <a:off x="7411009" y="4864608"/>
-            <a:ext cx="1600200" cy="822960"/>
-          </a:xfrm>
-          <a:prstGeom prst="rect">
-            <a:avLst/>
-          </a:prstGeom>
-          <a:noFill/>
-          <a:ln/>
-        </p:spPr>
-        <p:txBody>
-          <a:bodyPr wrap="square" lIns="0" tIns="0" rIns="0" bIns="0" rtlCol="0" anchor="ctr"/>
-          <a:lstStyle/>
-          <a:p>
-            <a:pPr algn="r" indent="0" marL="0">
-              <a:buNone/>
-            </a:pPr>
-            <a:r>
-              <a:rPr lang="en-US" sz="3400" b="1" dirty="0">
-                <a:solidFill>
-                  <a:schemeClr val="accent6"/>
-                </a:solidFill>
-              </a:rPr>
-              <a:t>83.2%</a:t>
-            </a:r>
-            <a:endParaRPr lang="en-US" sz="3400" dirty="0"/>
-          </a:p>
-        </p:txBody>
-      </p:sp>
-      <p:sp>
-        <p:nvSpPr>
-          <p:cNvPr id="31" name="own-a-2"/>
-          <p:cNvSpPr txBox="1"/>
-          <p:nvPr/>
-        </p:nvSpPr>
-        <p:spPr>
-          <a:xfrm>
-            <a:off x="9056929" y="4864608"/>
-            <a:ext cx="1097280" cy="822960"/>
-          </a:xfrm>
-          <a:prstGeom prst="rect">
-            <a:avLst/>
-          </a:prstGeom>
-          <a:noFill/>
-          <a:ln/>
-        </p:spPr>
-        <p:txBody>
-          <a:bodyPr wrap="square" lIns="0" tIns="0" rIns="0" bIns="0" rtlCol="0" anchor="ctr"/>
-          <a:lstStyle/>
-          <a:p>
-            <a:pPr algn="r" indent="0" marL="0">
-              <a:buNone/>
-            </a:pPr>
-            <a:r>
-              <a:rPr lang="en-US" sz="1800" dirty="0">
-                <a:solidFill>
-                  <a:schemeClr val="tx1"/>
-                </a:solidFill>
-              </a:rPr>
-              <a:t>0.66</a:t>
-            </a:r>
-            <a:endParaRPr lang="en-US" sz="1800" dirty="0"/>
-          </a:p>
-        </p:txBody>
-      </p:sp>
-      <p:sp>
-        <p:nvSpPr>
-          <p:cNvPr id="32" name="own-h2-2"/>
-          <p:cNvSpPr txBox="1"/>
-          <p:nvPr/>
-        </p:nvSpPr>
-        <p:spPr>
-          <a:xfrm>
-            <a:off x="10154209" y="4864608"/>
-            <a:ext cx="1051560" cy="822960"/>
-          </a:xfrm>
-          <a:prstGeom prst="rect">
-            <a:avLst/>
-          </a:prstGeom>
-          <a:noFill/>
-          <a:ln/>
-        </p:spPr>
-        <p:txBody>
-          <a:bodyPr wrap="square" lIns="0" tIns="0" rIns="0" bIns="0" rtlCol="0" anchor="ctr"/>
-          <a:lstStyle/>
-          <a:p>
-            <a:pPr algn="r" indent="0" marL="0">
-              <a:buNone/>
-            </a:pPr>
-            <a:r>
-              <a:rPr lang="en-US" sz="1800" b="1" dirty="0">
-                <a:solidFill>
-                  <a:schemeClr val="accent2"/>
-                </a:solidFill>
-              </a:rPr>
-              <a:t>47%</a:t>
-            </a:r>
-            <a:endParaRPr lang="en-US" sz="1800" dirty="0"/>
-          </a:p>
-        </p:txBody>
-      </p:sp>
-      <p:sp>
-        <p:nvSpPr>
-          <p:cNvPr id="33" name="own-note-bg"/>
-          <p:cNvSpPr/>
-          <p:nvPr/>
-        </p:nvSpPr>
-        <p:spPr>
-          <a:xfrm>
-            <a:off x="4896409" y="5943600"/>
-            <a:ext cx="6746646" cy="384048"/>
-          </a:xfrm>
-          <a:prstGeom prst="roundRect">
-            <a:avLst>
-              <a:gd name="adj" fmla="val 11905"/>
-            </a:avLst>
-          </a:prstGeom>
-          <a:solidFill>
-            <a:schemeClr val="accent1">
-              <a:alpha val="20000"/>
-            </a:schemeClr>
-          </a:solidFill>
-          <a:ln w="12700">
-            <a:solidFill>
-              <a:schemeClr val="accent1"/>
-            </a:solidFill>
-            <a:prstDash val="solid"/>
-          </a:ln>
-        </p:spPr>
-      </p:sp>
-      <p:sp>
-        <p:nvSpPr>
-          <p:cNvPr id="34" name="own-note"/>
-          <p:cNvSpPr txBox="1"/>
-          <p:nvPr/>
-        </p:nvSpPr>
-        <p:spPr>
-          <a:xfrm>
-            <a:off x="4896409" y="5943600"/>
-            <a:ext cx="6746646" cy="384048"/>
-          </a:xfrm>
-          <a:prstGeom prst="rect">
-            <a:avLst/>
-          </a:prstGeom>
-          <a:noFill/>
-          <a:ln/>
-        </p:spPr>
-        <p:txBody>
-          <a:bodyPr wrap="square" lIns="0" tIns="0" rIns="0" bIns="0" rtlCol="0" anchor="ctr"/>
-          <a:lstStyle/>
-          <a:p>
-            <a:pPr algn="ctr" indent="0" marL="0">
-              <a:buNone/>
-            </a:pPr>
-            <a:r>
-              <a:rPr lang="en-US" sz="1300" b="1" dirty="0">
-                <a:solidFill>
-                  <a:schemeClr val="accent1"/>
-                </a:solidFill>
-              </a:rPr>
-              <a:t>32px 미만 박스 AP: ATSS 0.86 · YOLOX-S 0.80</a:t>
-            </a:r>
-            <a:endParaRPr lang="en-US" sz="1300" dirty="0"/>
           </a:p>
         </p:txBody>
       </p:sp>
@@ -17743,20 +17743,104 @@
           </a:p>
         </p:txBody>
       </p:sp>
-      <p:sp>
-        <p:nvSpPr>
-          <p:cNvPr id="3" name="flow-0-bg"/>
+      <p:pic>
+        <p:nvPicPr>
+          <p:cNvPr id="3" name="bench-detail" descr="C:\Users\user\_se4nchoi\batteryvision\docs\submission\build\img\bench_detail.png">    </p:cNvPr>
+          <p:cNvPicPr>
+            <a:picLocks noChangeAspect="1"/>
+          </p:cNvPicPr>
+          <p:nvPr/>
+        </p:nvPicPr>
+        <p:blipFill>
+          <a:blip r:embed="rId1"/>
+          <a:stretch>
+            <a:fillRect/>
+          </a:stretch>
+        </p:blipFill>
+        <p:spPr>
+          <a:xfrm>
+            <a:off x="548640" y="1508760"/>
+            <a:ext cx="6080760" cy="2921731"/>
+          </a:xfrm>
+          <a:prstGeom prst="rect">
+            <a:avLst/>
+          </a:prstGeom>
+        </p:spPr>
+      </p:pic>
+      <p:pic>
+        <p:nvPicPr>
+          <p:cNvPr id="4" name="bench-all" descr="C:\Users\user\_se4nchoi\batteryvision\docs\submission\build\img\bench_all.png">    </p:cNvPr>
+          <p:cNvPicPr>
+            <a:picLocks noChangeAspect="1"/>
+          </p:cNvPicPr>
+          <p:nvPr/>
+        </p:nvPicPr>
+        <p:blipFill>
+          <a:blip r:embed="rId2"/>
+          <a:stretch>
+            <a:fillRect/>
+          </a:stretch>
+        </p:blipFill>
+        <p:spPr>
+          <a:xfrm>
+            <a:off x="548640" y="4521931"/>
+            <a:ext cx="6080760" cy="1786923"/>
+          </a:xfrm>
+          <a:prstGeom prst="rect">
+            <a:avLst/>
+          </a:prstGeom>
+        </p:spPr>
+      </p:pic>
+      <p:sp>
+        <p:nvSpPr>
+          <p:cNvPr id="5" name="bm-h"/>
+          <p:cNvSpPr txBox="1"/>
+          <p:nvPr/>
+        </p:nvSpPr>
+        <p:spPr>
+          <a:xfrm>
+            <a:off x="6949440" y="1508760"/>
+            <a:ext cx="4693615" cy="365760"/>
+          </a:xfrm>
+          <a:prstGeom prst="rect">
+            <a:avLst/>
+          </a:prstGeom>
+          <a:noFill/>
+          <a:ln/>
+        </p:spPr>
+        <p:txBody>
+          <a:bodyPr wrap="square" lIns="0" tIns="0" rIns="0" bIns="0" rtlCol="0" anchor="t"/>
+          <a:lstStyle/>
+          <a:p>
+            <a:pPr indent="0" marL="0">
+              <a:buNone/>
+            </a:pPr>
+            <a:r>
+              <a:rPr lang="en-US" sz="1800" b="1" dirty="0">
+                <a:solidFill>
+                  <a:schemeClr val="accent3"/>
+                </a:solidFill>
+              </a:rPr>
+              <a:t>benchmark.py</a:t>
+            </a:r>
+            <a:endParaRPr lang="en-US" sz="1800" dirty="0"/>
+          </a:p>
+        </p:txBody>
+      </p:sp>
+      <p:sp>
+        <p:nvSpPr>
+          <p:cNvPr id="6" name="flow-0-bg"/>
           <p:cNvSpPr/>
           <p:nvPr/>
         </p:nvSpPr>
         <p:spPr>
           <a:xfrm>
-            <a:off x="548640" y="1600200"/>
-            <a:ext cx="2423160" cy="502920"/>
+            <a:off x="6949440" y="2011680"/>
+            <a:ext cx="4693615" cy="365760"/>
           </a:xfrm>
           <a:prstGeom prst="roundRect">
             <a:avLst>
-              <a:gd name="adj" fmla="val 9091"/>
+              <a:gd name="adj" fmla="val 12500"/>
             </a:avLst>
           </a:prstGeom>
           <a:solidFill>
@@ -17774,14 +17858,14 @@
       </p:sp>
       <p:sp>
         <p:nvSpPr>
-          <p:cNvPr id="4" name="flow-0"/>
+          <p:cNvPr id="7" name="flow-0"/>
           <p:cNvSpPr txBox="1"/>
           <p:nvPr/>
         </p:nvSpPr>
         <p:spPr>
           <a:xfrm>
-            <a:off x="548640" y="1600200"/>
-            <a:ext cx="2423160" cy="502920"/>
+            <a:off x="6949440" y="2011680"/>
+            <a:ext cx="4693615" cy="365760"/>
           </a:xfrm>
           <a:prstGeom prst="rect">
             <a:avLst/>
@@ -17810,54 +17894,18 @@
       </p:sp>
       <p:sp>
         <p:nvSpPr>
-          <p:cNvPr id="5" name="flow-arrow-0"/>
-          <p:cNvSpPr txBox="1"/>
-          <p:nvPr/>
-        </p:nvSpPr>
-        <p:spPr>
-          <a:xfrm>
-            <a:off x="2971800" y="1600200"/>
-            <a:ext cx="429768" cy="502920"/>
-          </a:xfrm>
-          <a:prstGeom prst="rect">
-            <a:avLst/>
-          </a:prstGeom>
-          <a:noFill/>
-          <a:ln/>
-        </p:spPr>
-        <p:txBody>
-          <a:bodyPr wrap="square" lIns="0" tIns="0" rIns="0" bIns="0" rtlCol="0" anchor="ctr"/>
-          <a:lstStyle/>
-          <a:p>
-            <a:pPr algn="ctr" indent="0" marL="0">
-              <a:buNone/>
-            </a:pPr>
-            <a:r>
-              <a:rPr lang="en-US" sz="2000" b="1" dirty="0">
-                <a:solidFill>
-                  <a:schemeClr val="tx2"/>
-                </a:solidFill>
-              </a:rPr>
-              <a:t>→</a:t>
-            </a:r>
-            <a:endParaRPr lang="en-US" sz="2000" dirty="0"/>
-          </a:p>
-        </p:txBody>
-      </p:sp>
-      <p:sp>
-        <p:nvSpPr>
-          <p:cNvPr id="6" name="flow-1-bg"/>
+          <p:cNvPr id="8" name="flow-1-bg"/>
           <p:cNvSpPr/>
           <p:nvPr/>
         </p:nvSpPr>
         <p:spPr>
           <a:xfrm>
-            <a:off x="3401568" y="1600200"/>
-            <a:ext cx="2423160" cy="502920"/>
+            <a:off x="6949440" y="2468880"/>
+            <a:ext cx="4693615" cy="365760"/>
           </a:xfrm>
           <a:prstGeom prst="roundRect">
             <a:avLst>
-              <a:gd name="adj" fmla="val 9091"/>
+              <a:gd name="adj" fmla="val 12500"/>
             </a:avLst>
           </a:prstGeom>
           <a:solidFill>
@@ -17875,14 +17923,14 @@
       </p:sp>
       <p:sp>
         <p:nvSpPr>
-          <p:cNvPr id="7" name="flow-1"/>
+          <p:cNvPr id="9" name="flow-1"/>
           <p:cNvSpPr txBox="1"/>
           <p:nvPr/>
         </p:nvSpPr>
         <p:spPr>
           <a:xfrm>
-            <a:off x="3401568" y="1600200"/>
-            <a:ext cx="2423160" cy="502920"/>
+            <a:off x="6949440" y="2468880"/>
+            <a:ext cx="4693615" cy="365760"/>
           </a:xfrm>
           <a:prstGeom prst="rect">
             <a:avLst/>
@@ -17911,155 +17959,18 @@
       </p:sp>
       <p:sp>
         <p:nvSpPr>
-          <p:cNvPr id="8" name="flow-arrow-1"/>
-          <p:cNvSpPr txBox="1"/>
-          <p:nvPr/>
-        </p:nvSpPr>
-        <p:spPr>
-          <a:xfrm>
-            <a:off x="5824728" y="1600200"/>
-            <a:ext cx="429768" cy="502920"/>
-          </a:xfrm>
-          <a:prstGeom prst="rect">
-            <a:avLst/>
-          </a:prstGeom>
-          <a:noFill/>
-          <a:ln/>
-        </p:spPr>
-        <p:txBody>
-          <a:bodyPr wrap="square" lIns="0" tIns="0" rIns="0" bIns="0" rtlCol="0" anchor="ctr"/>
-          <a:lstStyle/>
-          <a:p>
-            <a:pPr algn="ctr" indent="0" marL="0">
-              <a:buNone/>
-            </a:pPr>
-            <a:r>
-              <a:rPr lang="en-US" sz="2000" b="1" dirty="0">
-                <a:solidFill>
-                  <a:schemeClr val="tx2"/>
-                </a:solidFill>
-              </a:rPr>
-              <a:t>→</a:t>
-            </a:r>
-            <a:endParaRPr lang="en-US" sz="2000" dirty="0"/>
-          </a:p>
-        </p:txBody>
-      </p:sp>
-      <p:sp>
-        <p:nvSpPr>
-          <p:cNvPr id="9" name="flow-2-bg"/>
+          <p:cNvPr id="10" name="flow-2-bg"/>
           <p:cNvSpPr/>
           <p:nvPr/>
         </p:nvSpPr>
         <p:spPr>
           <a:xfrm>
-            <a:off x="6254496" y="1600200"/>
-            <a:ext cx="2423160" cy="502920"/>
+            <a:off x="6949440" y="2926080"/>
+            <a:ext cx="4693615" cy="365760"/>
           </a:xfrm>
           <a:prstGeom prst="roundRect">
             <a:avLst>
-              <a:gd name="adj" fmla="val 9091"/>
-            </a:avLst>
-          </a:prstGeom>
-          <a:solidFill>
-            <a:schemeClr val="accent3">
-              <a:alpha val="20000"/>
-            </a:schemeClr>
-          </a:solidFill>
-          <a:ln w="12700">
-            <a:solidFill>
-              <a:schemeClr val="accent3"/>
-            </a:solidFill>
-            <a:prstDash val="solid"/>
-          </a:ln>
-        </p:spPr>
-      </p:sp>
-      <p:sp>
-        <p:nvSpPr>
-          <p:cNvPr id="10" name="flow-2"/>
-          <p:cNvSpPr txBox="1"/>
-          <p:nvPr/>
-        </p:nvSpPr>
-        <p:spPr>
-          <a:xfrm>
-            <a:off x="6254496" y="1600200"/>
-            <a:ext cx="2423160" cy="502920"/>
-          </a:xfrm>
-          <a:prstGeom prst="rect">
-            <a:avLst/>
-          </a:prstGeom>
-          <a:noFill/>
-          <a:ln/>
-        </p:spPr>
-        <p:txBody>
-          <a:bodyPr wrap="square" lIns="0" tIns="0" rIns="0" bIns="0" rtlCol="0" anchor="ctr"/>
-          <a:lstStyle/>
-          <a:p>
-            <a:pPr algn="ctr" indent="0" marL="0">
-              <a:buNone/>
-            </a:pPr>
-            <a:r>
-              <a:rPr lang="en-US" sz="1300" b="1" dirty="0">
-                <a:solidFill>
-                  <a:schemeClr val="accent3"/>
-                </a:solidFill>
-              </a:rPr>
-              <a:t>benchmark.py</a:t>
-            </a:r>
-            <a:endParaRPr lang="en-US" sz="1300" dirty="0"/>
-          </a:p>
-        </p:txBody>
-      </p:sp>
-      <p:sp>
-        <p:nvSpPr>
-          <p:cNvPr id="11" name="flow-arrow-2"/>
-          <p:cNvSpPr txBox="1"/>
-          <p:nvPr/>
-        </p:nvSpPr>
-        <p:spPr>
-          <a:xfrm>
-            <a:off x="8677656" y="1600200"/>
-            <a:ext cx="429768" cy="502920"/>
-          </a:xfrm>
-          <a:prstGeom prst="rect">
-            <a:avLst/>
-          </a:prstGeom>
-          <a:noFill/>
-          <a:ln/>
-        </p:spPr>
-        <p:txBody>
-          <a:bodyPr wrap="square" lIns="0" tIns="0" rIns="0" bIns="0" rtlCol="0" anchor="ctr"/>
-          <a:lstStyle/>
-          <a:p>
-            <a:pPr algn="ctr" indent="0" marL="0">
-              <a:buNone/>
-            </a:pPr>
-            <a:r>
-              <a:rPr lang="en-US" sz="2000" b="1" dirty="0">
-                <a:solidFill>
-                  <a:schemeClr val="tx2"/>
-                </a:solidFill>
-              </a:rPr>
-              <a:t>→</a:t>
-            </a:r>
-            <a:endParaRPr lang="en-US" sz="2000" dirty="0"/>
-          </a:p>
-        </p:txBody>
-      </p:sp>
-      <p:sp>
-        <p:nvSpPr>
-          <p:cNvPr id="12" name="flow-3-bg"/>
-          <p:cNvSpPr/>
-          <p:nvPr/>
-        </p:nvSpPr>
-        <p:spPr>
-          <a:xfrm>
-            <a:off x="9107424" y="1600200"/>
-            <a:ext cx="2423160" cy="502920"/>
-          </a:xfrm>
-          <a:prstGeom prst="roundRect">
-            <a:avLst>
-              <a:gd name="adj" fmla="val 9091"/>
+              <a:gd name="adj" fmla="val 12500"/>
             </a:avLst>
           </a:prstGeom>
           <a:solidFill>
@@ -18077,14 +17988,14 @@
       </p:sp>
       <p:sp>
         <p:nvSpPr>
-          <p:cNvPr id="13" name="flow-3"/>
+          <p:cNvPr id="11" name="flow-2"/>
           <p:cNvSpPr txBox="1"/>
           <p:nvPr/>
         </p:nvSpPr>
         <p:spPr>
           <a:xfrm>
-            <a:off x="9107424" y="1600200"/>
-            <a:ext cx="2423160" cy="502920"/>
+            <a:off x="6949440" y="2926080"/>
+            <a:ext cx="4693615" cy="365760"/>
           </a:xfrm>
           <a:prstGeom prst="rect">
             <a:avLst/>
@@ -18105,7 +18016,7 @@
                   <a:schemeClr val="accent6"/>
                 </a:solidFill>
               </a:rPr>
-              <a:t>결과 JSON → 대시보드</a:t>
+              <a:t>결과 → 대시보드</a:t>
             </a:r>
             <a:endParaRPr lang="en-US" sz="1300" dirty="0"/>
           </a:p>
@@ -18113,36 +18024,14 @@
       </p:sp>
       <p:sp>
         <p:nvSpPr>
-          <p:cNvPr id="14" name="bm-0"/>
-          <p:cNvSpPr/>
-          <p:nvPr/>
-        </p:nvSpPr>
-        <p:spPr>
-          <a:xfrm>
-            <a:off x="548640" y="2423160"/>
-            <a:ext cx="3566160" cy="1783080"/>
-          </a:xfrm>
-          <a:prstGeom prst="roundRect">
-            <a:avLst>
-              <a:gd name="adj" fmla="val 4103"/>
-            </a:avLst>
-          </a:prstGeom>
-          <a:solidFill>
-            <a:schemeClr val="bg2"/>
-          </a:solidFill>
-          <a:ln/>
-        </p:spPr>
-      </p:sp>
-      <p:sp>
-        <p:nvSpPr>
-          <p:cNvPr id="15" name="bm-h-0"/>
+          <p:cNvPr id="12" name="bm-m-h"/>
           <p:cNvSpPr txBox="1"/>
           <p:nvPr/>
         </p:nvSpPr>
         <p:spPr>
           <a:xfrm>
-            <a:off x="822960" y="2697480"/>
-            <a:ext cx="3017520" cy="457200"/>
+            <a:off x="6949440" y="3474720"/>
+            <a:ext cx="4693615" cy="320040"/>
           </a:xfrm>
           <a:prstGeom prst="rect">
             <a:avLst/>
@@ -18158,27 +18047,63 @@
               <a:buNone/>
             </a:pPr>
             <a:r>
-              <a:rPr lang="en-US" sz="2200" b="1" dirty="0">
+              <a:rPr lang="en-US" sz="1600" b="1" dirty="0">
+                <a:solidFill>
+                  <a:schemeClr val="tx1"/>
+                </a:solidFill>
+              </a:rPr>
+              <a:t>측정</a:t>
+            </a:r>
+            <a:endParaRPr lang="en-US" sz="1600" dirty="0"/>
+          </a:p>
+        </p:txBody>
+      </p:sp>
+      <p:sp>
+        <p:nvSpPr>
+          <p:cNvPr id="13" name="bm-k-0"/>
+          <p:cNvSpPr txBox="1"/>
+          <p:nvPr/>
+        </p:nvSpPr>
+        <p:spPr>
+          <a:xfrm>
+            <a:off x="6949440" y="3886200"/>
+            <a:ext cx="1508760" cy="347472"/>
+          </a:xfrm>
+          <a:prstGeom prst="rect">
+            <a:avLst/>
+          </a:prstGeom>
+          <a:noFill/>
+          <a:ln/>
+        </p:spPr>
+        <p:txBody>
+          <a:bodyPr wrap="square" lIns="0" tIns="0" rIns="0" bIns="0" rtlCol="0" anchor="ctr"/>
+          <a:lstStyle/>
+          <a:p>
+            <a:pPr indent="0" marL="0">
+              <a:buNone/>
+            </a:pPr>
+            <a:r>
+              <a:rPr lang="en-US" sz="1400" b="1" dirty="0">
                 <a:solidFill>
                   <a:schemeClr val="accent4"/>
                 </a:solidFill>
               </a:rPr>
               <a:t>정확도</a:t>
             </a:r>
-            <a:endParaRPr lang="en-US" sz="2200" dirty="0"/>
-          </a:p>
-        </p:txBody>
-      </p:sp>
-      <p:sp>
-        <p:nvSpPr>
-          <p:cNvPr id="16" name="bm-d-0"/>
+            <a:endParaRPr lang="en-US" sz="1400" dirty="0"/>
+          </a:p>
+        </p:txBody>
+      </p:sp>
+      <p:sp>
+        <p:nvSpPr>
+          <p:cNvPr id="14" name="bm-v-0"/>
           <p:cNvSpPr txBox="1"/>
           <p:nvPr/>
         </p:nvSpPr>
         <p:spPr>
           <a:xfrm>
-            <a:off x="822960" y="3337560"/>
-            <a:ext cx="3017520" cy="548640"/>
+            <a:off x="8503920" y="3886200"/>
+            <a:ext cx="3139135" cy="347472"/>
           </a:xfrm>
           <a:prstGeom prst="rect">
             <a:avLst/>
@@ -18187,56 +18112,34 @@
           <a:ln/>
         </p:spPr>
         <p:txBody>
-          <a:bodyPr wrap="square" lIns="0" tIns="0" rIns="0" bIns="0" rtlCol="0" anchor="t"/>
+          <a:bodyPr wrap="square" lIns="0" tIns="0" rIns="0" bIns="0" rtlCol="0" anchor="ctr"/>
           <a:lstStyle/>
           <a:p>
             <a:pPr indent="0" marL="0">
               <a:buNone/>
             </a:pPr>
             <a:r>
-              <a:rPr lang="en-US" sz="1500" dirty="0">
+              <a:rPr lang="en-US" sz="1400" dirty="0">
                 <a:solidFill>
                   <a:schemeClr val="tx2"/>
                 </a:solidFill>
               </a:rPr>
-              <a:t>mAP@50 · 클래스별 AP</a:t>
+              <a:t>mAP · 클래스별 AP</a:t>
             </a:r>
-            <a:endParaRPr lang="en-US" sz="1500" dirty="0"/>
-          </a:p>
-        </p:txBody>
-      </p:sp>
-      <p:sp>
-        <p:nvSpPr>
-          <p:cNvPr id="17" name="bm-1"/>
-          <p:cNvSpPr/>
-          <p:nvPr/>
-        </p:nvSpPr>
-        <p:spPr>
-          <a:xfrm>
-            <a:off x="4297680" y="2423160"/>
-            <a:ext cx="3566160" cy="1783080"/>
-          </a:xfrm>
-          <a:prstGeom prst="roundRect">
-            <a:avLst>
-              <a:gd name="adj" fmla="val 4103"/>
-            </a:avLst>
-          </a:prstGeom>
-          <a:solidFill>
-            <a:schemeClr val="bg2"/>
-          </a:solidFill>
-          <a:ln/>
-        </p:spPr>
-      </p:sp>
-      <p:sp>
-        <p:nvSpPr>
-          <p:cNvPr id="18" name="bm-h-1"/>
+            <a:endParaRPr lang="en-US" sz="1400" dirty="0"/>
+          </a:p>
+        </p:txBody>
+      </p:sp>
+      <p:sp>
+        <p:nvSpPr>
+          <p:cNvPr id="15" name="bm-k-1"/>
           <p:cNvSpPr txBox="1"/>
           <p:nvPr/>
         </p:nvSpPr>
         <p:spPr>
           <a:xfrm>
-            <a:off x="4572000" y="2697480"/>
-            <a:ext cx="3017520" cy="457200"/>
+            <a:off x="6949440" y="4288536"/>
+            <a:ext cx="1508760" cy="347472"/>
           </a:xfrm>
           <a:prstGeom prst="rect">
             <a:avLst/>
@@ -18245,34 +18148,34 @@
           <a:ln/>
         </p:spPr>
         <p:txBody>
-          <a:bodyPr wrap="square" lIns="0" tIns="0" rIns="0" bIns="0" rtlCol="0" anchor="t"/>
+          <a:bodyPr wrap="square" lIns="0" tIns="0" rIns="0" bIns="0" rtlCol="0" anchor="ctr"/>
           <a:lstStyle/>
           <a:p>
             <a:pPr indent="0" marL="0">
               <a:buNone/>
             </a:pPr>
             <a:r>
-              <a:rPr lang="en-US" sz="2200" b="1" dirty="0">
+              <a:rPr lang="en-US" sz="1400" b="1" dirty="0">
                 <a:solidFill>
                   <a:schemeClr val="accent2"/>
                 </a:solidFill>
               </a:rPr>
               <a:t>판정</a:t>
             </a:r>
-            <a:endParaRPr lang="en-US" sz="2200" dirty="0"/>
-          </a:p>
-        </p:txBody>
-      </p:sp>
-      <p:sp>
-        <p:nvSpPr>
-          <p:cNvPr id="19" name="bm-d-1"/>
+            <a:endParaRPr lang="en-US" sz="1400" dirty="0"/>
+          </a:p>
+        </p:txBody>
+      </p:sp>
+      <p:sp>
+        <p:nvSpPr>
+          <p:cNvPr id="16" name="bm-v-1"/>
           <p:cNvSpPr txBox="1"/>
           <p:nvPr/>
         </p:nvSpPr>
         <p:spPr>
           <a:xfrm>
-            <a:off x="4572000" y="3337560"/>
-            <a:ext cx="3017520" cy="548640"/>
+            <a:off x="8503920" y="4288536"/>
+            <a:ext cx="3139135" cy="347472"/>
           </a:xfrm>
           <a:prstGeom prst="rect">
             <a:avLst/>
@@ -18281,56 +18184,34 @@
           <a:ln/>
         </p:spPr>
         <p:txBody>
-          <a:bodyPr wrap="square" lIns="0" tIns="0" rIns="0" bIns="0" rtlCol="0" anchor="t"/>
+          <a:bodyPr wrap="square" lIns="0" tIns="0" rIns="0" bIns="0" rtlCol="0" anchor="ctr"/>
           <a:lstStyle/>
           <a:p>
             <a:pPr indent="0" marL="0">
               <a:buNone/>
             </a:pPr>
             <a:r>
-              <a:rPr lang="en-US" sz="1500" dirty="0">
+              <a:rPr lang="en-US" sz="1400" dirty="0">
                 <a:solidFill>
                   <a:schemeClr val="tx2"/>
                 </a:solidFill>
               </a:rPr>
-              <a:t>PASS · REVIEW · REJECT · 놓친 셀</a:t>
+              <a:t>PASS · REVIEW · REJECT</a:t>
             </a:r>
-            <a:endParaRPr lang="en-US" sz="1500" dirty="0"/>
-          </a:p>
-        </p:txBody>
-      </p:sp>
-      <p:sp>
-        <p:nvSpPr>
-          <p:cNvPr id="20" name="bm-2"/>
-          <p:cNvSpPr/>
-          <p:nvPr/>
-        </p:nvSpPr>
-        <p:spPr>
-          <a:xfrm>
-            <a:off x="8046720" y="2423160"/>
-            <a:ext cx="3566160" cy="1783080"/>
-          </a:xfrm>
-          <a:prstGeom prst="roundRect">
-            <a:avLst>
-              <a:gd name="adj" fmla="val 4103"/>
-            </a:avLst>
-          </a:prstGeom>
-          <a:solidFill>
-            <a:schemeClr val="bg2"/>
-          </a:solidFill>
-          <a:ln/>
-        </p:spPr>
-      </p:sp>
-      <p:sp>
-        <p:nvSpPr>
-          <p:cNvPr id="21" name="bm-h-2"/>
+            <a:endParaRPr lang="en-US" sz="1400" dirty="0"/>
+          </a:p>
+        </p:txBody>
+      </p:sp>
+      <p:sp>
+        <p:nvSpPr>
+          <p:cNvPr id="17" name="bm-k-2"/>
           <p:cNvSpPr txBox="1"/>
           <p:nvPr/>
         </p:nvSpPr>
         <p:spPr>
           <a:xfrm>
-            <a:off x="8321040" y="2697480"/>
-            <a:ext cx="3017520" cy="457200"/>
+            <a:off x="6949440" y="4690872"/>
+            <a:ext cx="1508760" cy="347472"/>
           </a:xfrm>
           <a:prstGeom prst="rect">
             <a:avLst/>
@@ -18339,34 +18220,34 @@
           <a:ln/>
         </p:spPr>
         <p:txBody>
-          <a:bodyPr wrap="square" lIns="0" tIns="0" rIns="0" bIns="0" rtlCol="0" anchor="t"/>
+          <a:bodyPr wrap="square" lIns="0" tIns="0" rIns="0" bIns="0" rtlCol="0" anchor="ctr"/>
           <a:lstStyle/>
           <a:p>
             <a:pPr indent="0" marL="0">
               <a:buNone/>
             </a:pPr>
             <a:r>
-              <a:rPr lang="en-US" sz="2200" b="1" dirty="0">
+              <a:rPr lang="en-US" sz="1400" b="1" dirty="0">
                 <a:solidFill>
                   <a:schemeClr val="accent3"/>
                 </a:solidFill>
               </a:rPr>
               <a:t>기준값 sweep</a:t>
             </a:r>
-            <a:endParaRPr lang="en-US" sz="2200" dirty="0"/>
-          </a:p>
-        </p:txBody>
-      </p:sp>
-      <p:sp>
-        <p:nvSpPr>
-          <p:cNvPr id="22" name="bm-d-2"/>
+            <a:endParaRPr lang="en-US" sz="1400" dirty="0"/>
+          </a:p>
+        </p:txBody>
+      </p:sp>
+      <p:sp>
+        <p:nvSpPr>
+          <p:cNvPr id="18" name="bm-v-2"/>
           <p:cNvSpPr txBox="1"/>
           <p:nvPr/>
         </p:nvSpPr>
         <p:spPr>
           <a:xfrm>
-            <a:off x="8321040" y="3337560"/>
-            <a:ext cx="3017520" cy="548640"/>
+            <a:off x="8503920" y="4690872"/>
+            <a:ext cx="3139135" cy="347472"/>
           </a:xfrm>
           <a:prstGeom prst="rect">
             <a:avLst/>
@@ -18375,56 +18256,34 @@
           <a:ln/>
         </p:spPr>
         <p:txBody>
-          <a:bodyPr wrap="square" lIns="0" tIns="0" rIns="0" bIns="0" rtlCol="0" anchor="t"/>
+          <a:bodyPr wrap="square" lIns="0" tIns="0" rIns="0" bIns="0" rtlCol="0" anchor="ctr"/>
           <a:lstStyle/>
           <a:p>
             <a:pPr indent="0" marL="0">
               <a:buNone/>
             </a:pPr>
             <a:r>
-              <a:rPr lang="en-US" sz="1500" dirty="0">
+              <a:rPr lang="en-US" sz="1400" dirty="0">
                 <a:solidFill>
                   <a:schemeClr val="tx2"/>
                 </a:solidFill>
               </a:rPr>
               <a:t>0.05 ~ 0.95</a:t>
             </a:r>
-            <a:endParaRPr lang="en-US" sz="1500" dirty="0"/>
-          </a:p>
-        </p:txBody>
-      </p:sp>
-      <p:sp>
-        <p:nvSpPr>
-          <p:cNvPr id="23" name="bm-3"/>
-          <p:cNvSpPr/>
-          <p:nvPr/>
-        </p:nvSpPr>
-        <p:spPr>
-          <a:xfrm>
-            <a:off x="548640" y="4389120"/>
-            <a:ext cx="3566160" cy="1783080"/>
-          </a:xfrm>
-          <a:prstGeom prst="roundRect">
-            <a:avLst>
-              <a:gd name="adj" fmla="val 4103"/>
-            </a:avLst>
-          </a:prstGeom>
-          <a:solidFill>
-            <a:schemeClr val="bg2"/>
-          </a:solidFill>
-          <a:ln/>
-        </p:spPr>
-      </p:sp>
-      <p:sp>
-        <p:nvSpPr>
-          <p:cNvPr id="24" name="bm-h-3"/>
+            <a:endParaRPr lang="en-US" sz="1400" dirty="0"/>
+          </a:p>
+        </p:txBody>
+      </p:sp>
+      <p:sp>
+        <p:nvSpPr>
+          <p:cNvPr id="19" name="bm-k-3"/>
           <p:cNvSpPr txBox="1"/>
           <p:nvPr/>
         </p:nvSpPr>
         <p:spPr>
           <a:xfrm>
-            <a:off x="822960" y="4663440"/>
-            <a:ext cx="3017520" cy="457200"/>
+            <a:off x="6949440" y="5093208"/>
+            <a:ext cx="1508760" cy="347472"/>
           </a:xfrm>
           <a:prstGeom prst="rect">
             <a:avLst/>
@@ -18433,34 +18292,34 @@
           <a:ln/>
         </p:spPr>
         <p:txBody>
-          <a:bodyPr wrap="square" lIns="0" tIns="0" rIns="0" bIns="0" rtlCol="0" anchor="t"/>
+          <a:bodyPr wrap="square" lIns="0" tIns="0" rIns="0" bIns="0" rtlCol="0" anchor="ctr"/>
           <a:lstStyle/>
           <a:p>
             <a:pPr indent="0" marL="0">
               <a:buNone/>
             </a:pPr>
             <a:r>
-              <a:rPr lang="en-US" sz="2200" b="1" dirty="0">
+              <a:rPr lang="en-US" sz="1400" b="1" dirty="0">
                 <a:solidFill>
                   <a:schemeClr val="accent5"/>
                 </a:solidFill>
               </a:rPr>
               <a:t>견고성</a:t>
             </a:r>
-            <a:endParaRPr lang="en-US" sz="2200" dirty="0"/>
-          </a:p>
-        </p:txBody>
-      </p:sp>
-      <p:sp>
-        <p:nvSpPr>
-          <p:cNvPr id="25" name="bm-d-3"/>
+            <a:endParaRPr lang="en-US" sz="1400" dirty="0"/>
+          </a:p>
+        </p:txBody>
+      </p:sp>
+      <p:sp>
+        <p:nvSpPr>
+          <p:cNvPr id="20" name="bm-v-3"/>
           <p:cNvSpPr txBox="1"/>
           <p:nvPr/>
         </p:nvSpPr>
         <p:spPr>
           <a:xfrm>
-            <a:off x="822960" y="5303520"/>
-            <a:ext cx="3017520" cy="548640"/>
+            <a:off x="8503920" y="5093208"/>
+            <a:ext cx="3139135" cy="347472"/>
           </a:xfrm>
           <a:prstGeom prst="rect">
             <a:avLst/>
@@ -18469,56 +18328,34 @@
           <a:ln/>
         </p:spPr>
         <p:txBody>
-          <a:bodyPr wrap="square" lIns="0" tIns="0" rIns="0" bIns="0" rtlCol="0" anchor="t"/>
+          <a:bodyPr wrap="square" lIns="0" tIns="0" rIns="0" bIns="0" rtlCol="0" anchor="ctr"/>
           <a:lstStyle/>
           <a:p>
             <a:pPr indent="0" marL="0">
               <a:buNone/>
             </a:pPr>
             <a:r>
-              <a:rPr lang="en-US" sz="1500" dirty="0">
+              <a:rPr lang="en-US" sz="1400" dirty="0">
                 <a:solidFill>
                   <a:schemeClr val="tx2"/>
                 </a:solidFill>
               </a:rPr>
-              <a:t>blur · 어둡게 · 노이즈 · JPEG</a:t>
+              <a:t>blur · 노이즈 · JPEG</a:t>
             </a:r>
-            <a:endParaRPr lang="en-US" sz="1500" dirty="0"/>
-          </a:p>
-        </p:txBody>
-      </p:sp>
-      <p:sp>
-        <p:nvSpPr>
-          <p:cNvPr id="26" name="bm-4"/>
-          <p:cNvSpPr/>
-          <p:nvPr/>
-        </p:nvSpPr>
-        <p:spPr>
-          <a:xfrm>
-            <a:off x="4297680" y="4389120"/>
-            <a:ext cx="3566160" cy="1783080"/>
-          </a:xfrm>
-          <a:prstGeom prst="roundRect">
-            <a:avLst>
-              <a:gd name="adj" fmla="val 4103"/>
-            </a:avLst>
-          </a:prstGeom>
-          <a:solidFill>
-            <a:schemeClr val="bg2"/>
-          </a:solidFill>
-          <a:ln/>
-        </p:spPr>
-      </p:sp>
-      <p:sp>
-        <p:nvSpPr>
-          <p:cNvPr id="27" name="bm-h-4"/>
+            <a:endParaRPr lang="en-US" sz="1400" dirty="0"/>
+          </a:p>
+        </p:txBody>
+      </p:sp>
+      <p:sp>
+        <p:nvSpPr>
+          <p:cNvPr id="21" name="bm-k-4"/>
           <p:cNvSpPr txBox="1"/>
           <p:nvPr/>
         </p:nvSpPr>
         <p:spPr>
           <a:xfrm>
-            <a:off x="4572000" y="4663440"/>
-            <a:ext cx="3017520" cy="457200"/>
+            <a:off x="6949440" y="5495544"/>
+            <a:ext cx="1508760" cy="347472"/>
           </a:xfrm>
           <a:prstGeom prst="rect">
             <a:avLst/>
@@ -18527,34 +18364,34 @@
           <a:ln/>
         </p:spPr>
         <p:txBody>
-          <a:bodyPr wrap="square" lIns="0" tIns="0" rIns="0" bIns="0" rtlCol="0" anchor="t"/>
+          <a:bodyPr wrap="square" lIns="0" tIns="0" rIns="0" bIns="0" rtlCol="0" anchor="ctr"/>
           <a:lstStyle/>
           <a:p>
             <a:pPr indent="0" marL="0">
               <a:buNone/>
             </a:pPr>
             <a:r>
-              <a:rPr lang="en-US" sz="2200" b="1" dirty="0">
+              <a:rPr lang="en-US" sz="1400" b="1" dirty="0">
                 <a:solidFill>
                   <a:schemeClr val="accent3"/>
                 </a:solidFill>
               </a:rPr>
               <a:t>중복 검사</a:t>
             </a:r>
-            <a:endParaRPr lang="en-US" sz="2200" dirty="0"/>
-          </a:p>
-        </p:txBody>
-      </p:sp>
-      <p:sp>
-        <p:nvSpPr>
-          <p:cNvPr id="28" name="bm-d-4"/>
+            <a:endParaRPr lang="en-US" sz="1400" dirty="0"/>
+          </a:p>
+        </p:txBody>
+      </p:sp>
+      <p:sp>
+        <p:nvSpPr>
+          <p:cNvPr id="22" name="bm-v-4"/>
           <p:cNvSpPr txBox="1"/>
           <p:nvPr/>
         </p:nvSpPr>
         <p:spPr>
           <a:xfrm>
-            <a:off x="4572000" y="5303520"/>
-            <a:ext cx="3017520" cy="548640"/>
+            <a:off x="8503920" y="5495544"/>
+            <a:ext cx="3139135" cy="347472"/>
           </a:xfrm>
           <a:prstGeom prst="rect">
             <a:avLst/>
@@ -18563,56 +18400,34 @@
           <a:ln/>
         </p:spPr>
         <p:txBody>
-          <a:bodyPr wrap="square" lIns="0" tIns="0" rIns="0" bIns="0" rtlCol="0" anchor="t"/>
+          <a:bodyPr wrap="square" lIns="0" tIns="0" rIns="0" bIns="0" rtlCol="0" anchor="ctr"/>
           <a:lstStyle/>
           <a:p>
             <a:pPr indent="0" marL="0">
               <a:buNone/>
             </a:pPr>
             <a:r>
-              <a:rPr lang="en-US" sz="1500" dirty="0">
+              <a:rPr lang="en-US" sz="1400" dirty="0">
                 <a:solidFill>
                   <a:schemeClr val="tx2"/>
                 </a:solidFill>
               </a:rPr>
-              <a:t>dHash → 복사본 22장 발견</a:t>
+              <a:t>복사본 22장 발견</a:t>
             </a:r>
-            <a:endParaRPr lang="en-US" sz="1500" dirty="0"/>
-          </a:p>
-        </p:txBody>
-      </p:sp>
-      <p:sp>
-        <p:nvSpPr>
-          <p:cNvPr id="29" name="bm-5"/>
-          <p:cNvSpPr/>
-          <p:nvPr/>
-        </p:nvSpPr>
-        <p:spPr>
-          <a:xfrm>
-            <a:off x="8046720" y="4389120"/>
-            <a:ext cx="3566160" cy="1783080"/>
-          </a:xfrm>
-          <a:prstGeom prst="roundRect">
-            <a:avLst>
-              <a:gd name="adj" fmla="val 4103"/>
-            </a:avLst>
-          </a:prstGeom>
-          <a:solidFill>
-            <a:schemeClr val="bg2"/>
-          </a:solidFill>
-          <a:ln/>
-        </p:spPr>
-      </p:sp>
-      <p:sp>
-        <p:nvSpPr>
-          <p:cNvPr id="30" name="bm-h-5"/>
+            <a:endParaRPr lang="en-US" sz="1400" dirty="0"/>
+          </a:p>
+        </p:txBody>
+      </p:sp>
+      <p:sp>
+        <p:nvSpPr>
+          <p:cNvPr id="23" name="bm-k-5"/>
           <p:cNvSpPr txBox="1"/>
           <p:nvPr/>
         </p:nvSpPr>
         <p:spPr>
           <a:xfrm>
-            <a:off x="8321040" y="4663440"/>
-            <a:ext cx="3017520" cy="457200"/>
+            <a:off x="6949440" y="5897880"/>
+            <a:ext cx="1508760" cy="347472"/>
           </a:xfrm>
           <a:prstGeom prst="rect">
             <a:avLst/>
@@ -18621,34 +18436,34 @@
           <a:ln/>
         </p:spPr>
         <p:txBody>
-          <a:bodyPr wrap="square" lIns="0" tIns="0" rIns="0" bIns="0" rtlCol="0" anchor="t"/>
+          <a:bodyPr wrap="square" lIns="0" tIns="0" rIns="0" bIns="0" rtlCol="0" anchor="ctr"/>
           <a:lstStyle/>
           <a:p>
             <a:pPr indent="0" marL="0">
               <a:buNone/>
             </a:pPr>
             <a:r>
-              <a:rPr lang="en-US" sz="2200" b="1" dirty="0">
+              <a:rPr lang="en-US" sz="1400" b="1" dirty="0">
                 <a:solidFill>
                   <a:schemeClr val="accent6"/>
                 </a:solidFill>
               </a:rPr>
               <a:t>속도</a:t>
             </a:r>
-            <a:endParaRPr lang="en-US" sz="2200" dirty="0"/>
-          </a:p>
-        </p:txBody>
-      </p:sp>
-      <p:sp>
-        <p:nvSpPr>
-          <p:cNvPr id="31" name="bm-d-5"/>
+            <a:endParaRPr lang="en-US" sz="1400" dirty="0"/>
+          </a:p>
+        </p:txBody>
+      </p:sp>
+      <p:sp>
+        <p:nvSpPr>
+          <p:cNvPr id="24" name="bm-v-5"/>
           <p:cNvSpPr txBox="1"/>
           <p:nvPr/>
         </p:nvSpPr>
         <p:spPr>
           <a:xfrm>
-            <a:off x="8321040" y="5303520"/>
-            <a:ext cx="3017520" cy="548640"/>
+            <a:off x="8503920" y="5897880"/>
+            <a:ext cx="3139135" cy="347472"/>
           </a:xfrm>
           <a:prstGeom prst="rect">
             <a:avLst/>
@@ -18657,21 +18472,21 @@
           <a:ln/>
         </p:spPr>
         <p:txBody>
-          <a:bodyPr wrap="square" lIns="0" tIns="0" rIns="0" bIns="0" rtlCol="0" anchor="t"/>
+          <a:bodyPr wrap="square" lIns="0" tIns="0" rIns="0" bIns="0" rtlCol="0" anchor="ctr"/>
           <a:lstStyle/>
           <a:p>
             <a:pPr indent="0" marL="0">
               <a:buNone/>
             </a:pPr>
             <a:r>
-              <a:rPr lang="en-US" sz="1500" dirty="0">
+              <a:rPr lang="en-US" sz="1400" dirty="0">
                 <a:solidFill>
                   <a:schemeClr val="tx2"/>
                 </a:solidFill>
               </a:rPr>
-              <a:t>CPU · iGPU · 사진 1장씩</a:t>
+              <a:t>CPU · iGPU</a:t>
             </a:r>
-            <a:endParaRPr lang="en-US" sz="1500" dirty="0"/>
+            <a:endParaRPr lang="en-US" sz="1400" dirty="0"/>
           </a:p>
         </p:txBody>
       </p:sp>

--- a/docs/submission/BatteryVision_발표.pptx
+++ b/docs/submission/BatteryVision_발표.pptx
@@ -4,6 +4,9 @@
   <p:sldMasterIdLst>
     <p:sldMasterId id="2147483648" r:id="rId1"/>
   </p:sldMasterIdLst>
+  <p:notesMasterIdLst>
+    <p:notesMasterId r:id="rId17"/>
+  </p:notesMasterIdLst>
   <p:sldIdLst>
     <p:sldId id="256" r:id="rId2"/>
     <p:sldId id="257" r:id="rId3"/>
@@ -21,9 +24,6 @@
     <p:sldId id="269" r:id="rId15"/>
     <p:sldId id="270" r:id="rId16"/>
   </p:sldIdLst>
-  <p:notesMasterIdLst>
-    <p:notesMasterId r:id="rId17"/>
-  </p:notesMasterIdLst>
   <p:sldSz cx="12192000" cy="6858000"/>
   <p:notesSz cx="6858000" cy="12192000"/>
   <p:defaultTextStyle>
@@ -121,13 +121,13 @@
   <p:extLst>
     <p:ext uri="{521415D9-36F7-43E2-AB2F-B90AF26B5E84}">
       <p14:sectionLst xmlns:p14="http://schemas.microsoft.com/office/powerpoint/2010/main">
-        <p14:section name="도입" id="{05a3184a-83d5-6ee7-5b5a-75d762406ad0}">
+        <p14:section name="도입" id="{05A3184A-83D5-6EE7-5B5A-75D762406AD0}">
           <p14:sldIdLst>
             <p14:sldId id="256"/>
             <p14:sldId id="257"/>
           </p14:sldIdLst>
         </p14:section>
-        <p14:section name="실험" id="{c75d7b2c-b3ca-e551-0f3d-20a1422e5b5a}">
+        <p14:section name="실험" id="{C75D7B2C-B3CA-E551-0F3D-20A1422E5B5A}">
           <p14:sldIdLst>
             <p14:sldId id="258"/>
             <p14:sldId id="259"/>
@@ -137,18 +137,18 @@
             <p14:sldId id="263"/>
           </p14:sldIdLst>
         </p14:section>
-        <p14:section name="최적화" id="{4418b4e2-95b9-bc88-21c9-31e48a91f65e}">
+        <p14:section name="최적화" id="{4418B4E2-95B9-BC88-21C9-31E48A91F65E}">
           <p14:sldIdLst>
             <p14:sldId id="264"/>
           </p14:sldIdLst>
         </p14:section>
-        <p14:section name="검증" id="{88b3e689-2d9b-2601-c4e9-a25e890eec97}">
+        <p14:section name="검증" id="{88B3E689-2D9B-2601-C4E9-A25E890EEC97}">
           <p14:sldIdLst>
             <p14:sldId id="265"/>
             <p14:sldId id="266"/>
           </p14:sldIdLst>
         </p14:section>
-        <p14:section name="정리" id="{6f429778-5dd0-498f-1482-c2bb7826bedf}">
+        <p14:section name="정리" id="{6F429778-5DD0-498F-1482-C2BB7826BEDF}">
           <p14:sldIdLst>
             <p14:sldId id="267"/>
             <p14:sldId id="268"/>
@@ -166,9 +166,11 @@
 </file>
 
 <file path=ppt/charts/chart1.xml><?xml version="1.0" encoding="utf-8"?>
-<c:chartSpace xmlns:c="http://schemas.openxmlformats.org/drawingml/2006/chart" xmlns:a="http://schemas.openxmlformats.org/drawingml/2006/main" xmlns:r="http://schemas.openxmlformats.org/officeDocument/2006/relationships">
+<c:chartSpace xmlns:c="http://schemas.openxmlformats.org/drawingml/2006/chart" xmlns:a="http://schemas.openxmlformats.org/drawingml/2006/main" xmlns:r="http://schemas.openxmlformats.org/officeDocument/2006/relationships" xmlns:c16r2="http://schemas.microsoft.com/office/drawing/2015/06/chart">
   <c:date1904 val="0"/>
+  <c:lang val="ko-KR"/>
   <c:roundedCorners val="1"/>
+  <c:style val="2"/>
   <c:chart>
     <c:title>
       <c:tx>
@@ -185,13 +187,31 @@
               </a:defRPr>
             </a:pPr>
             <a:r>
-              <a:rPr sz="1400" b="0" i="0" u="none" strike="noStrike">
+              <a:rPr lang="en-US" sz="1400" b="0" i="0" u="none" strike="noStrike">
                 <a:solidFill>
                   <a:srgbClr val="EEF1F5"/>
                 </a:solidFill>
                 <a:latin typeface="+mn-lt"/>
               </a:rPr>
-              <a:t>AP@50 (1차 테스트)</a:t>
+              <a:t>AP@50 (1</a:t>
+            </a:r>
+            <a:r>
+              <a:rPr lang="ko-KR" altLang="en-US" sz="1400" b="0" i="0" u="none" strike="noStrike">
+                <a:solidFill>
+                  <a:srgbClr val="EEF1F5"/>
+                </a:solidFill>
+                <a:latin typeface="+mn-lt"/>
+              </a:rPr>
+              <a:t>차 테스트</a:t>
+            </a:r>
+            <a:r>
+              <a:rPr lang="en-US" altLang="ko-KR" sz="1400" b="0" i="0" u="none" strike="noStrike">
+                <a:solidFill>
+                  <a:srgbClr val="EEF1F5"/>
+                </a:solidFill>
+                <a:latin typeface="+mn-lt"/>
+              </a:rPr>
+              <a:t>)</a:t>
             </a:r>
           </a:p>
         </c:rich>
@@ -229,18 +249,26 @@
           <c:invertIfNegative val="0"/>
           <c:dLbls>
             <c:numFmt formatCode="0.00" sourceLinked="0"/>
+            <c:spPr>
+              <a:noFill/>
+              <a:ln>
+                <a:noFill/>
+              </a:ln>
+              <a:effectLst/>
+            </c:spPr>
             <c:txPr>
               <a:bodyPr/>
               <a:lstStyle/>
               <a:p>
                 <a:pPr>
-                  <a:defRPr b="0" i="0" strike="noStrike" sz="1100" u="none">
+                  <a:defRPr sz="1100" b="0" i="0" u="none" strike="noStrike">
                     <a:solidFill>
                       <a:srgbClr val="EEF1F5"/>
                     </a:solidFill>
                     <a:latin typeface="+mn-lt"/>
                   </a:defRPr>
                 </a:pPr>
+                <a:endParaRPr lang="ko-KR"/>
               </a:p>
             </c:txPr>
             <c:showLegendKey val="0"/>
@@ -250,25 +278,29 @@
             <c:showPercent val="0"/>
             <c:showBubbleSize val="0"/>
             <c:showLeaderLines val="0"/>
+            <c:extLst>
+              <c:ext xmlns:c15="http://schemas.microsoft.com/office/drawing/2012/chart" uri="{CE6537A1-D6FC-4f65-9D91-7224C49458BB}">
+                <c15:layout/>
+                <c15:showLeaderLines val="0"/>
+              </c:ext>
+            </c:extLst>
           </c:dLbls>
           <c:cat>
-            <c:multiLvlStrRef>
+            <c:strRef>
               <c:f>Sheet1!$A$2:$A$4</c:f>
-              <c:multiLvlStrCache>
+              <c:strCache>
                 <c:ptCount val="3"/>
-                <c:lvl>
-                  <c:pt idx="0">
-                    <c:v>ATSS</c:v>
-                  </c:pt>
-                  <c:pt idx="1">
-                    <c:v>YOLOX-S</c:v>
-                  </c:pt>
-                  <c:pt idx="2">
-                    <c:v>YOLOX-Tiny</c:v>
-                  </c:pt>
-                </c:lvl>
-              </c:multiLvlStrCache>
-            </c:multiLvlStrRef>
+                <c:pt idx="0">
+                  <c:v>ATSS</c:v>
+                </c:pt>
+                <c:pt idx="1">
+                  <c:v>YOLOX-S</c:v>
+                </c:pt>
+                <c:pt idx="2">
+                  <c:v>YOLOX-Tiny</c:v>
+                </c:pt>
+              </c:strCache>
+            </c:strRef>
           </c:cat>
           <c:val>
             <c:numRef>
@@ -288,6 +320,11 @@
               </c:numCache>
             </c:numRef>
           </c:val>
+          <c:extLst>
+            <c:ext xmlns:c16="http://schemas.microsoft.com/office/drawing/2014/chart" uri="{C3380CC4-5D6E-409C-BE32-E72D297353CC}">
+              <c16:uniqueId val="{00000000-CFA0-4C50-A021-9DA8DBF4BF0B}"/>
+            </c:ext>
+          </c:extLst>
         </c:ser>
         <c:ser>
           <c:idx val="1"/>
@@ -312,18 +349,26 @@
           <c:invertIfNegative val="0"/>
           <c:dLbls>
             <c:numFmt formatCode="0.00" sourceLinked="0"/>
+            <c:spPr>
+              <a:noFill/>
+              <a:ln>
+                <a:noFill/>
+              </a:ln>
+              <a:effectLst/>
+            </c:spPr>
             <c:txPr>
               <a:bodyPr/>
               <a:lstStyle/>
               <a:p>
                 <a:pPr>
-                  <a:defRPr b="0" i="0" strike="noStrike" sz="1100" u="none">
+                  <a:defRPr sz="1100" b="0" i="0" u="none" strike="noStrike">
                     <a:solidFill>
                       <a:srgbClr val="EEF1F5"/>
                     </a:solidFill>
                     <a:latin typeface="+mn-lt"/>
                   </a:defRPr>
                 </a:pPr>
+                <a:endParaRPr lang="ko-KR"/>
               </a:p>
             </c:txPr>
             <c:showLegendKey val="0"/>
@@ -333,25 +378,29 @@
             <c:showPercent val="0"/>
             <c:showBubbleSize val="0"/>
             <c:showLeaderLines val="0"/>
+            <c:extLst>
+              <c:ext xmlns:c15="http://schemas.microsoft.com/office/drawing/2012/chart" uri="{CE6537A1-D6FC-4f65-9D91-7224C49458BB}">
+                <c15:layout/>
+                <c15:showLeaderLines val="0"/>
+              </c:ext>
+            </c:extLst>
           </c:dLbls>
           <c:cat>
-            <c:multiLvlStrRef>
+            <c:strRef>
               <c:f>Sheet1!$A$2:$A$4</c:f>
-              <c:multiLvlStrCache>
+              <c:strCache>
                 <c:ptCount val="3"/>
-                <c:lvl>
-                  <c:pt idx="0">
-                    <c:v>ATSS</c:v>
-                  </c:pt>
-                  <c:pt idx="1">
-                    <c:v>YOLOX-S</c:v>
-                  </c:pt>
-                  <c:pt idx="2">
-                    <c:v>YOLOX-Tiny</c:v>
-                  </c:pt>
-                </c:lvl>
-              </c:multiLvlStrCache>
-            </c:multiLvlStrRef>
+                <c:pt idx="0">
+                  <c:v>ATSS</c:v>
+                </c:pt>
+                <c:pt idx="1">
+                  <c:v>YOLOX-S</c:v>
+                </c:pt>
+                <c:pt idx="2">
+                  <c:v>YOLOX-Tiny</c:v>
+                </c:pt>
+              </c:strCache>
+            </c:strRef>
           </c:cat>
           <c:val>
             <c:numRef>
@@ -360,47 +409,34 @@
                 <c:formatCode>General</c:formatCode>
                 <c:ptCount val="3"/>
                 <c:pt idx="0">
-                  <c:v>0.858</c:v>
+                  <c:v>0.85799999999999998</c:v>
                 </c:pt>
                 <c:pt idx="1">
-                  <c:v>0.784</c:v>
+                  <c:v>0.78400000000000003</c:v>
                 </c:pt>
                 <c:pt idx="2">
-                  <c:v>0.664</c:v>
+                  <c:v>0.66400000000000003</c:v>
                 </c:pt>
               </c:numCache>
             </c:numRef>
           </c:val>
+          <c:extLst>
+            <c:ext xmlns:c16="http://schemas.microsoft.com/office/drawing/2014/chart" uri="{C3380CC4-5D6E-409C-BE32-E72D297353CC}">
+              <c16:uniqueId val="{00000001-CFA0-4C50-A021-9DA8DBF4BF0B}"/>
+            </c:ext>
+          </c:extLst>
         </c:ser>
         <c:dLbls>
-          <c:numFmt formatCode="0.00" sourceLinked="0"/>
-          <c:txPr>
-            <a:bodyPr/>
-            <a:lstStyle/>
-            <a:p>
-              <a:pPr>
-                <a:defRPr b="0" i="0" strike="noStrike" sz="1100" u="none">
-                  <a:solidFill>
-                    <a:srgbClr val="EEF1F5"/>
-                  </a:solidFill>
-                  <a:latin typeface="+mn-lt"/>
-                </a:defRPr>
-              </a:pPr>
-            </a:p>
-          </c:txPr>
           <c:showLegendKey val="0"/>
           <c:showVal val="1"/>
           <c:showCatName val="0"/>
           <c:showSerName val="0"/>
           <c:showPercent val="0"/>
           <c:showBubbleSize val="0"/>
-          <c:showLeaderLines val="0"/>
         </c:dLbls>
         <c:gapWidth val="50"/>
-        <c:overlap val="0"/>
         <c:axId val="2094734554"/>
         <c:axId val="2094734552"/>
-        <c:axId val="2094734556"/>
       </c:barChart>
       <c:catAx>
         <c:axId val="2094734554"/>
@@ -432,13 +468,14 @@
                 <a:latin typeface="+mn-lt"/>
               </a:defRPr>
             </a:pPr>
-            <a:endParaRPr lang="en-US"/>
+            <a:endParaRPr lang="ko-KR"/>
           </a:p>
         </c:txPr>
         <c:crossAx val="2094734552"/>
         <c:crosses val="autoZero"/>
         <c:auto val="1"/>
         <c:lblAlgn val="ctr"/>
+        <c:lblOffset val="100"/>
         <c:noMultiLvlLbl val="1"/>
       </c:catAx>
       <c:valAx>
@@ -484,7 +521,7 @@
                 <a:latin typeface="+mn-lt"/>
               </a:defRPr>
             </a:pPr>
-            <a:endParaRPr lang="en-US"/>
+            <a:endParaRPr lang="ko-KR"/>
           </a:p>
         </c:txPr>
         <c:crossAx val="2094734554"/>
@@ -501,6 +538,16 @@
     </c:plotArea>
     <c:legend>
       <c:legendPos val="t"/>
+      <c:layout>
+        <c:manualLayout>
+          <c:xMode val="edge"/>
+          <c:yMode val="edge"/>
+          <c:x val="0.33658904050037225"/>
+          <c:y val="8.6866235167206041E-2"/>
+          <c:w val="0.3268219189992555"/>
+          <c:h val="5.879265091863517E-2"/>
+        </c:manualLayout>
+      </c:layout>
       <c:overlay val="0"/>
       <c:txPr>
         <a:bodyPr/>
@@ -515,12 +562,13 @@
               <a:cs typeface="+mn-lt"/>
             </a:defRPr>
           </a:pPr>
-          <a:endParaRPr lang="en-US"/>
+          <a:endParaRPr lang="ko-KR"/>
         </a:p>
       </c:txPr>
     </c:legend>
     <c:plotVisOnly val="1"/>
     <c:dispBlanksAs val="span"/>
+    <c:showDLblsOverMax val="1"/>
   </c:chart>
   <c:spPr>
     <a:noFill/>
@@ -536,9 +584,11 @@
 </file>
 
 <file path=ppt/charts/chart2.xml><?xml version="1.0" encoding="utf-8"?>
-<c:chartSpace xmlns:c="http://schemas.openxmlformats.org/drawingml/2006/chart" xmlns:a="http://schemas.openxmlformats.org/drawingml/2006/main" xmlns:r="http://schemas.openxmlformats.org/officeDocument/2006/relationships">
+<c:chartSpace xmlns:c="http://schemas.openxmlformats.org/drawingml/2006/chart" xmlns:a="http://schemas.openxmlformats.org/drawingml/2006/main" xmlns:r="http://schemas.openxmlformats.org/officeDocument/2006/relationships" xmlns:c16r2="http://schemas.microsoft.com/office/drawing/2015/06/chart">
   <c:date1904 val="0"/>
+  <c:lang val="ko-KR"/>
   <c:roundedCorners val="1"/>
+  <c:style val="2"/>
   <c:chart>
     <c:title>
       <c:tx>
@@ -555,13 +605,22 @@
               </a:defRPr>
             </a:pPr>
             <a:r>
-              <a:rPr sz="1400" b="0" i="0" u="none" strike="noStrike">
+              <a:rPr lang="en-US" sz="1400" b="0" i="0" u="none" strike="noStrike">
                 <a:solidFill>
                   <a:srgbClr val="EEF1F5"/>
                 </a:solidFill>
                 <a:latin typeface="+mn-lt"/>
               </a:rPr>
-              <a:t>CPU ms / 사진</a:t>
+              <a:t>CPU ms / </a:t>
+            </a:r>
+            <a:r>
+              <a:rPr lang="ko-KR" altLang="en-US" sz="1400" b="0" i="0" u="none" strike="noStrike">
+                <a:solidFill>
+                  <a:srgbClr val="EEF1F5"/>
+                </a:solidFill>
+                <a:latin typeface="+mn-lt"/>
+              </a:rPr>
+              <a:t>사진</a:t>
             </a:r>
           </a:p>
         </c:rich>
@@ -599,18 +658,26 @@
           <c:invertIfNegative val="0"/>
           <c:dLbls>
             <c:numFmt formatCode="0.0" sourceLinked="0"/>
+            <c:spPr>
+              <a:noFill/>
+              <a:ln>
+                <a:noFill/>
+              </a:ln>
+              <a:effectLst/>
+            </c:spPr>
             <c:txPr>
               <a:bodyPr/>
               <a:lstStyle/>
               <a:p>
                 <a:pPr>
-                  <a:defRPr b="0" i="0" strike="noStrike" sz="1100" u="none">
+                  <a:defRPr sz="1100" b="0" i="0" u="none" strike="noStrike">
                     <a:solidFill>
                       <a:srgbClr val="EEF1F5"/>
                     </a:solidFill>
                     <a:latin typeface="+mn-lt"/>
                   </a:defRPr>
                 </a:pPr>
+                <a:endParaRPr lang="ko-KR"/>
               </a:p>
             </c:txPr>
             <c:showLegendKey val="0"/>
@@ -620,25 +687,29 @@
             <c:showPercent val="0"/>
             <c:showBubbleSize val="0"/>
             <c:showLeaderLines val="0"/>
+            <c:extLst>
+              <c:ext xmlns:c15="http://schemas.microsoft.com/office/drawing/2012/chart" uri="{CE6537A1-D6FC-4f65-9D91-7224C49458BB}">
+                <c15:layout/>
+                <c15:showLeaderLines val="0"/>
+              </c:ext>
+            </c:extLst>
           </c:dLbls>
           <c:cat>
-            <c:multiLvlStrRef>
+            <c:strRef>
               <c:f>Sheet1!$A$2:$A$4</c:f>
-              <c:multiLvlStrCache>
+              <c:strCache>
                 <c:ptCount val="3"/>
-                <c:lvl>
-                  <c:pt idx="0">
-                    <c:v>ATSS</c:v>
-                  </c:pt>
-                  <c:pt idx="1">
-                    <c:v>YOLOX-S</c:v>
-                  </c:pt>
-                  <c:pt idx="2">
-                    <c:v>YOLOX-Tiny</c:v>
-                  </c:pt>
-                </c:lvl>
-              </c:multiLvlStrCache>
-            </c:multiLvlStrRef>
+                <c:pt idx="0">
+                  <c:v>ATSS</c:v>
+                </c:pt>
+                <c:pt idx="1">
+                  <c:v>YOLOX-S</c:v>
+                </c:pt>
+                <c:pt idx="2">
+                  <c:v>YOLOX-Tiny</c:v>
+                </c:pt>
+              </c:strCache>
+            </c:strRef>
           </c:cat>
           <c:val>
             <c:numRef>
@@ -658,6 +729,11 @@
               </c:numCache>
             </c:numRef>
           </c:val>
+          <c:extLst>
+            <c:ext xmlns:c16="http://schemas.microsoft.com/office/drawing/2014/chart" uri="{C3380CC4-5D6E-409C-BE32-E72D297353CC}">
+              <c16:uniqueId val="{00000000-E173-43F4-9B24-80C1F5219990}"/>
+            </c:ext>
+          </c:extLst>
         </c:ser>
         <c:ser>
           <c:idx val="1"/>
@@ -682,18 +758,26 @@
           <c:invertIfNegative val="0"/>
           <c:dLbls>
             <c:numFmt formatCode="0.0" sourceLinked="0"/>
+            <c:spPr>
+              <a:noFill/>
+              <a:ln>
+                <a:noFill/>
+              </a:ln>
+              <a:effectLst/>
+            </c:spPr>
             <c:txPr>
               <a:bodyPr/>
               <a:lstStyle/>
               <a:p>
                 <a:pPr>
-                  <a:defRPr b="0" i="0" strike="noStrike" sz="1100" u="none">
+                  <a:defRPr sz="1100" b="0" i="0" u="none" strike="noStrike">
                     <a:solidFill>
                       <a:srgbClr val="EEF1F5"/>
                     </a:solidFill>
                     <a:latin typeface="+mn-lt"/>
                   </a:defRPr>
                 </a:pPr>
+                <a:endParaRPr lang="ko-KR"/>
               </a:p>
             </c:txPr>
             <c:showLegendKey val="0"/>
@@ -703,25 +787,29 @@
             <c:showPercent val="0"/>
             <c:showBubbleSize val="0"/>
             <c:showLeaderLines val="0"/>
+            <c:extLst>
+              <c:ext xmlns:c15="http://schemas.microsoft.com/office/drawing/2012/chart" uri="{CE6537A1-D6FC-4f65-9D91-7224C49458BB}">
+                <c15:layout/>
+                <c15:showLeaderLines val="0"/>
+              </c:ext>
+            </c:extLst>
           </c:dLbls>
           <c:cat>
-            <c:multiLvlStrRef>
+            <c:strRef>
               <c:f>Sheet1!$A$2:$A$4</c:f>
-              <c:multiLvlStrCache>
+              <c:strCache>
                 <c:ptCount val="3"/>
-                <c:lvl>
-                  <c:pt idx="0">
-                    <c:v>ATSS</c:v>
-                  </c:pt>
-                  <c:pt idx="1">
-                    <c:v>YOLOX-S</c:v>
-                  </c:pt>
-                  <c:pt idx="2">
-                    <c:v>YOLOX-Tiny</c:v>
-                  </c:pt>
-                </c:lvl>
-              </c:multiLvlStrCache>
-            </c:multiLvlStrRef>
+                <c:pt idx="0">
+                  <c:v>ATSS</c:v>
+                </c:pt>
+                <c:pt idx="1">
+                  <c:v>YOLOX-S</c:v>
+                </c:pt>
+                <c:pt idx="2">
+                  <c:v>YOLOX-Tiny</c:v>
+                </c:pt>
+              </c:strCache>
+            </c:strRef>
           </c:cat>
           <c:val>
             <c:numRef>
@@ -736,41 +824,28 @@
                   <c:v>24.9</c:v>
                 </c:pt>
                 <c:pt idx="2">
-                  <c:v>8.3</c:v>
+                  <c:v>8.3000000000000007</c:v>
                 </c:pt>
               </c:numCache>
             </c:numRef>
           </c:val>
+          <c:extLst>
+            <c:ext xmlns:c16="http://schemas.microsoft.com/office/drawing/2014/chart" uri="{C3380CC4-5D6E-409C-BE32-E72D297353CC}">
+              <c16:uniqueId val="{00000001-E173-43F4-9B24-80C1F5219990}"/>
+            </c:ext>
+          </c:extLst>
         </c:ser>
         <c:dLbls>
-          <c:numFmt formatCode="0.0" sourceLinked="0"/>
-          <c:txPr>
-            <a:bodyPr/>
-            <a:lstStyle/>
-            <a:p>
-              <a:pPr>
-                <a:defRPr b="0" i="0" strike="noStrike" sz="1100" u="none">
-                  <a:solidFill>
-                    <a:srgbClr val="EEF1F5"/>
-                  </a:solidFill>
-                  <a:latin typeface="+mn-lt"/>
-                </a:defRPr>
-              </a:pPr>
-            </a:p>
-          </c:txPr>
           <c:showLegendKey val="0"/>
           <c:showVal val="1"/>
           <c:showCatName val="0"/>
           <c:showSerName val="0"/>
           <c:showPercent val="0"/>
           <c:showBubbleSize val="0"/>
-          <c:showLeaderLines val="0"/>
         </c:dLbls>
         <c:gapWidth val="55"/>
-        <c:overlap val="0"/>
         <c:axId val="2094734554"/>
         <c:axId val="2094734552"/>
-        <c:axId val="2094734556"/>
       </c:barChart>
       <c:catAx>
         <c:axId val="2094734554"/>
@@ -802,13 +877,14 @@
                 <a:latin typeface="+mn-lt"/>
               </a:defRPr>
             </a:pPr>
-            <a:endParaRPr lang="en-US"/>
+            <a:endParaRPr lang="ko-KR"/>
           </a:p>
         </c:txPr>
         <c:crossAx val="2094734552"/>
         <c:crosses val="autoZero"/>
         <c:auto val="1"/>
         <c:lblAlgn val="ctr"/>
+        <c:lblOffset val="100"/>
         <c:noMultiLvlLbl val="1"/>
       </c:catAx>
       <c:valAx>
@@ -853,7 +929,7 @@
                 <a:latin typeface="+mn-lt"/>
               </a:defRPr>
             </a:pPr>
-            <a:endParaRPr lang="en-US"/>
+            <a:endParaRPr lang="ko-KR"/>
           </a:p>
         </c:txPr>
         <c:crossAx val="2094734554"/>
@@ -870,6 +946,7 @@
     </c:plotArea>
     <c:legend>
       <c:legendPos val="t"/>
+      <c:layout/>
       <c:overlay val="0"/>
       <c:txPr>
         <a:bodyPr/>
@@ -884,12 +961,13 @@
               <a:cs typeface="+mn-lt"/>
             </a:defRPr>
           </a:pPr>
-          <a:endParaRPr lang="en-US"/>
+          <a:endParaRPr lang="ko-KR"/>
         </a:p>
       </c:txPr>
     </c:legend>
     <c:plotVisOnly val="1"/>
     <c:dispBlanksAs val="span"/>
+    <c:showDLblsOverMax val="1"/>
   </c:chart>
   <c:spPr>
     <a:noFill/>
@@ -926,240 +1004,16 @@
           <a:chExt cx="0" cy="0"/>
         </a:xfrm>
       </p:grpSpPr>
-      <p:sp>
-        <p:nvSpPr>
-          <p:cNvPr id="2" name="Header Placeholder 1"/>
-          <p:cNvSpPr>
-            <a:spLocks noGrp="1"/>
-          </p:cNvSpPr>
-          <p:nvPr>
-            <p:ph type="hdr" sz="quarter"/>
-          </p:nvPr>
-        </p:nvSpPr>
-        <p:spPr>
-          <a:xfrm>
-            <a:off x="0" y="0"/>
-            <a:ext cx="2971800" cy="458788"/>
-          </a:xfrm>
-          <a:prstGeom prst="rect">
-            <a:avLst/>
-          </a:prstGeom>
-        </p:spPr>
-        <p:txBody>
-          <a:bodyPr vert="horz" lIns="91440" tIns="45720" rIns="91440" bIns="45720" rtlCol="0"/>
-          <a:lstStyle>
-            <a:lvl1pPr algn="l">
-              <a:defRPr sz="1200"/>
-            </a:lvl1pPr>
-          </a:lstStyle>
-          <a:p>
-            <a:endParaRPr lang="en-US"/>
-          </a:p>
-        </p:txBody>
-      </p:sp>
-      <p:sp>
-        <p:nvSpPr>
-          <p:cNvPr id="3" name="Date Placeholder 2"/>
-          <p:cNvSpPr>
-            <a:spLocks noGrp="1"/>
-          </p:cNvSpPr>
-          <p:nvPr>
-            <p:ph type="dt" idx="1"/>
-          </p:nvPr>
-        </p:nvSpPr>
-        <p:spPr>
-          <a:xfrm>
-            <a:off x="3884613" y="0"/>
-            <a:ext cx="2971800" cy="458788"/>
-          </a:xfrm>
-          <a:prstGeom prst="rect">
-            <a:avLst/>
-          </a:prstGeom>
-        </p:spPr>
-        <p:txBody>
-          <a:bodyPr vert="horz" lIns="91440" tIns="45720" rIns="91440" bIns="45720" rtlCol="0"/>
-          <a:lstStyle>
-            <a:lvl1pPr algn="r">
-              <a:defRPr sz="1200"/>
-            </a:lvl1pPr>
-          </a:lstStyle>
-          <a:p>
-            <a:fld id="{5282F153-3F37-0F45-9E97-73ACFA13230C}" type="datetimeFigureOut">
-              <a:rPr lang="en-US"/>
-              <a:t>7/23/19</a:t>
-            </a:fld>
-            <a:endParaRPr lang="en-US"/>
-          </a:p>
-        </p:txBody>
-      </p:sp>
-      <p:sp>
-        <p:nvSpPr>
-          <p:cNvPr id="4" name="Slide Image Placeholder 3"/>
-          <p:cNvSpPr>
-            <a:spLocks noGrp="1" noRot="1" noChangeAspect="1"/>
-          </p:cNvSpPr>
-          <p:nvPr>
-            <p:ph type="sldImg" idx="2"/>
-          </p:nvPr>
-        </p:nvSpPr>
-        <p:spPr>
-          <a:xfrm>
-            <a:off x="685800" y="1143000"/>
-            <a:ext cx="5486400" cy="3086100"/>
-          </a:xfrm>
-          <a:prstGeom prst="rect">
-            <a:avLst/>
-          </a:prstGeom>
-          <a:noFill/>
-          <a:ln w="12700">
-            <a:solidFill>
-              <a:prstClr val="black"/>
-            </a:solidFill>
-          </a:ln>
-        </p:spPr>
-        <p:txBody>
-          <a:bodyPr vert="horz" lIns="91440" tIns="45720" rIns="91440" bIns="45720" rtlCol="0" anchor="ctr"/>
-          <a:lstStyle/>
-          <a:p>
-            <a:endParaRPr lang="en-US"/>
-          </a:p>
-        </p:txBody>
-      </p:sp>
-      <p:sp>
-        <p:nvSpPr>
-          <p:cNvPr id="5" name="Notes Placeholder 4"/>
-          <p:cNvSpPr>
-            <a:spLocks noGrp="1"/>
-          </p:cNvSpPr>
-          <p:nvPr>
-            <p:ph type="body" sz="quarter" idx="3"/>
-          </p:nvPr>
-        </p:nvSpPr>
-        <p:spPr>
-          <a:xfrm>
-            <a:off x="685800" y="4400550"/>
-            <a:ext cx="5486400" cy="3600450"/>
-          </a:xfrm>
-          <a:prstGeom prst="rect">
-            <a:avLst/>
-          </a:prstGeom>
-        </p:spPr>
-        <p:txBody>
-          <a:bodyPr vert="horz" lIns="91440" tIns="45720" rIns="91440" bIns="45720" rtlCol="0"/>
-          <a:lstStyle/>
-          <a:p>
-            <a:pPr lvl="0"/>
-            <a:r>
-              <a:rPr lang="en-US"/>
-              <a:t>Click to edit Master text styles</a:t>
-            </a:r>
-          </a:p>
-          <a:p>
-            <a:pPr lvl="1"/>
-            <a:r>
-              <a:rPr lang="en-US"/>
-              <a:t>Second level</a:t>
-            </a:r>
-          </a:p>
-          <a:p>
-            <a:pPr lvl="2"/>
-            <a:r>
-              <a:rPr lang="en-US"/>
-              <a:t>Third level</a:t>
-            </a:r>
-          </a:p>
-          <a:p>
-            <a:pPr lvl="3"/>
-            <a:r>
-              <a:rPr lang="en-US"/>
-              <a:t>Fourth level</a:t>
-            </a:r>
-          </a:p>
-          <a:p>
-            <a:pPr lvl="4"/>
-            <a:r>
-              <a:rPr lang="en-US"/>
-              <a:t>Fifth level</a:t>
-            </a:r>
-          </a:p>
-        </p:txBody>
-      </p:sp>
-      <p:sp>
-        <p:nvSpPr>
-          <p:cNvPr id="6" name="Footer Placeholder 5"/>
-          <p:cNvSpPr>
-            <a:spLocks noGrp="1"/>
-          </p:cNvSpPr>
-          <p:nvPr>
-            <p:ph type="ftr" sz="quarter" idx="4"/>
-          </p:nvPr>
-        </p:nvSpPr>
-        <p:spPr>
-          <a:xfrm>
-            <a:off x="0" y="8685213"/>
-            <a:ext cx="2971800" cy="458787"/>
-          </a:xfrm>
-          <a:prstGeom prst="rect">
-            <a:avLst/>
-          </a:prstGeom>
-        </p:spPr>
-        <p:txBody>
-          <a:bodyPr vert="horz" lIns="91440" tIns="45720" rIns="91440" bIns="45720" rtlCol="0" anchor="b"/>
-          <a:lstStyle>
-            <a:lvl1pPr algn="l">
-              <a:defRPr sz="1200"/>
-            </a:lvl1pPr>
-          </a:lstStyle>
-          <a:p>
-            <a:endParaRPr lang="en-US"/>
-          </a:p>
-        </p:txBody>
-      </p:sp>
-      <p:sp>
-        <p:nvSpPr>
-          <p:cNvPr id="7" name="Slide Number Placeholder 6"/>
-          <p:cNvSpPr>
-            <a:spLocks noGrp="1"/>
-          </p:cNvSpPr>
-          <p:nvPr>
-            <p:ph type="sldNum" sz="quarter" idx="5"/>
-          </p:nvPr>
-        </p:nvSpPr>
-        <p:spPr>
-          <a:xfrm>
-            <a:off x="3884613" y="8685213"/>
-            <a:ext cx="2971800" cy="458787"/>
-          </a:xfrm>
-          <a:prstGeom prst="rect">
-            <a:avLst/>
-          </a:prstGeom>
-        </p:spPr>
-        <p:txBody>
-          <a:bodyPr vert="horz" lIns="91440" tIns="45720" rIns="91440" bIns="45720" rtlCol="0" anchor="b"/>
-          <a:lstStyle>
-            <a:lvl1pPr algn="r">
-              <a:defRPr sz="1200"/>
-            </a:lvl1pPr>
-          </a:lstStyle>
-          <a:p>
-            <a:fld id="{CE5E9CC1-C706-0F49-92D6-E571CC5EEA8F}" type="slidenum">
-              <a:rPr lang="en-US"/>
-              <a:t>‹#›</a:t>
-            </a:fld>
-            <a:endParaRPr lang="en-US"/>
-          </a:p>
-        </p:txBody>
-      </p:sp>
     </p:spTree>
     <p:extLst>
       <p:ext uri="{BB962C8B-B14F-4D97-AF65-F5344CB8AC3E}">
-        <p14:creationId xmlns:p14="http://schemas.microsoft.com/office/powerpoint/2010/main" val="1024086991"/>
+        <p14:creationId xmlns:p14="http://schemas.microsoft.com/office/powerpoint/2010/main" val="2825659625"/>
       </p:ext>
     </p:extLst>
   </p:cSld>
   <p:clrMap bg1="lt1" tx1="dk1" bg2="lt2" tx2="dk2" accent1="accent1" accent2="accent2" accent3="accent3" accent4="accent4" accent5="accent5" accent6="accent6" hlink="hlink" folHlink="folHlink"/>
   <p:notesStyle>
-    <a:lvl1pPr marL="0" algn="l" defTabSz="914400" rtl="0" eaLnBrk="1" latinLnBrk="0" hangingPunct="1">
+    <a:lvl1pPr marL="0" algn="l" defTabSz="914400" rtl="0" eaLnBrk="1" latinLnBrk="1" hangingPunct="1">
       <a:defRPr sz="1200" kern="1200">
         <a:solidFill>
           <a:schemeClr val="tx1"/>
@@ -1169,7 +1023,7 @@
         <a:cs typeface="+mn-cs"/>
       </a:defRPr>
     </a:lvl1pPr>
-    <a:lvl2pPr marL="457200" algn="l" defTabSz="914400" rtl="0" eaLnBrk="1" latinLnBrk="0" hangingPunct="1">
+    <a:lvl2pPr marL="457200" algn="l" defTabSz="914400" rtl="0" eaLnBrk="1" latinLnBrk="1" hangingPunct="1">
       <a:defRPr sz="1200" kern="1200">
         <a:solidFill>
           <a:schemeClr val="tx1"/>
@@ -1179,7 +1033,7 @@
         <a:cs typeface="+mn-cs"/>
       </a:defRPr>
     </a:lvl2pPr>
-    <a:lvl3pPr marL="914400" algn="l" defTabSz="914400" rtl="0" eaLnBrk="1" latinLnBrk="0" hangingPunct="1">
+    <a:lvl3pPr marL="914400" algn="l" defTabSz="914400" rtl="0" eaLnBrk="1" latinLnBrk="1" hangingPunct="1">
       <a:defRPr sz="1200" kern="1200">
         <a:solidFill>
           <a:schemeClr val="tx1"/>
@@ -1189,7 +1043,7 @@
         <a:cs typeface="+mn-cs"/>
       </a:defRPr>
     </a:lvl3pPr>
-    <a:lvl4pPr marL="1371600" algn="l" defTabSz="914400" rtl="0" eaLnBrk="1" latinLnBrk="0" hangingPunct="1">
+    <a:lvl4pPr marL="1371600" algn="l" defTabSz="914400" rtl="0" eaLnBrk="1" latinLnBrk="1" hangingPunct="1">
       <a:defRPr sz="1200" kern="1200">
         <a:solidFill>
           <a:schemeClr val="tx1"/>
@@ -1199,7 +1053,7 @@
         <a:cs typeface="+mn-cs"/>
       </a:defRPr>
     </a:lvl4pPr>
-    <a:lvl5pPr marL="1828800" algn="l" defTabSz="914400" rtl="0" eaLnBrk="1" latinLnBrk="0" hangingPunct="1">
+    <a:lvl5pPr marL="1828800" algn="l" defTabSz="914400" rtl="0" eaLnBrk="1" latinLnBrk="1" hangingPunct="1">
       <a:defRPr sz="1200" kern="1200">
         <a:solidFill>
           <a:schemeClr val="tx1"/>
@@ -1209,7 +1063,7 @@
         <a:cs typeface="+mn-cs"/>
       </a:defRPr>
     </a:lvl5pPr>
-    <a:lvl6pPr marL="2286000" algn="l" defTabSz="914400" rtl="0" eaLnBrk="1" latinLnBrk="0" hangingPunct="1">
+    <a:lvl6pPr marL="2286000" algn="l" defTabSz="914400" rtl="0" eaLnBrk="1" latinLnBrk="1" hangingPunct="1">
       <a:defRPr sz="1200" kern="1200">
         <a:solidFill>
           <a:schemeClr val="tx1"/>
@@ -1219,7 +1073,7 @@
         <a:cs typeface="+mn-cs"/>
       </a:defRPr>
     </a:lvl6pPr>
-    <a:lvl7pPr marL="2743200" algn="l" defTabSz="914400" rtl="0" eaLnBrk="1" latinLnBrk="0" hangingPunct="1">
+    <a:lvl7pPr marL="2743200" algn="l" defTabSz="914400" rtl="0" eaLnBrk="1" latinLnBrk="1" hangingPunct="1">
       <a:defRPr sz="1200" kern="1200">
         <a:solidFill>
           <a:schemeClr val="tx1"/>
@@ -1229,7 +1083,7 @@
         <a:cs typeface="+mn-cs"/>
       </a:defRPr>
     </a:lvl7pPr>
-    <a:lvl8pPr marL="3200400" algn="l" defTabSz="914400" rtl="0" eaLnBrk="1" latinLnBrk="0" hangingPunct="1">
+    <a:lvl8pPr marL="3200400" algn="l" defTabSz="914400" rtl="0" eaLnBrk="1" latinLnBrk="1" hangingPunct="1">
       <a:defRPr sz="1200" kern="1200">
         <a:solidFill>
           <a:schemeClr val="tx1"/>
@@ -1239,7 +1093,7 @@
         <a:cs typeface="+mn-cs"/>
       </a:defRPr>
     </a:lvl8pPr>
-    <a:lvl9pPr marL="3657600" algn="l" defTabSz="914400" rtl="0" eaLnBrk="1" latinLnBrk="0" hangingPunct="1">
+    <a:lvl9pPr marL="3657600" algn="l" defTabSz="914400" rtl="0" eaLnBrk="1" latinLnBrk="1" hangingPunct="1">
       <a:defRPr sz="1200" kern="1200">
         <a:solidFill>
           <a:schemeClr val="tx1"/>
@@ -1301,7 +1155,6 @@
               <a:rPr lang="en-US" dirty="0"/>
               <a:t>배터리 셀 표면의 crack과 scratch를 찾는 Vision AI입니다. Intel Geti로 ATSS, YOLOX-S, YOLOX-Tiny 세 모델을 학습해 비교하고, INT8로 경량화했을 때 무엇이 달라지는지 분석했습니다.</a:t>
             </a:r>
-            <a:endParaRPr lang="en-US" dirty="0"/>
           </a:p>
         </p:txBody>
       </p:sp>
@@ -1389,7 +1242,6 @@
               <a:rPr lang="en-US" dirty="0"/>
               <a:t>2차 세트는 같은 업로더가 나중에 따로 올린 데이터셋입니다. 결함 종류와 촬영 방식은 비슷하지만 다른 촬영 세션입니다. 1차 데이터셋과 파일명이 같거나 픽셀이 사실상 같은 사진 140장을 먼저 뺐고, 증강되지 않은 45장만 테스트에 썼습니다. 그래서 모델 입장에서는 한 번도 본 적 없는 사진입니다.</a:t>
             </a:r>
-            <a:endParaRPr lang="en-US" dirty="0"/>
           </a:p>
         </p:txBody>
       </p:sp>
@@ -1477,7 +1329,6 @@
               <a:rPr lang="en-US" dirty="0"/>
               <a:t>같은 업로더가 올린 다른 세트에서, 학습에 한 번도 쓰지 않은 45장으로 제 앱에서 다시 테스트했습니다. 1차 테스트에서 결함 셀을 거의 다 잡던 모델이 ATSS 47%, YOLOX-S 3%까지 떨어집니다. 결함을 착각한 게 아니라 점수가 낮아서 통과시킨 것이고, 정상 셀을 불합격시킨 경우는 없었습니다. 가장 큰 원인은 crack입니다. 2차 세트의 crack은 약 30×26픽셀로 1차의 절반 면적이고, ATSS는 15개 중 1개만 잡았습니다. 학습 때 본 크기의 crack만 쉬웠던 겁니다. 기준값을 바꿔 보면, ATSS는 0.15까지 낮추면 결함 97%를 잡지만 정상 셀도 87%가 걸립니다. YOLOX-S는 다릅니다. 2차 세트 mAP@50이 0.93으로 결함을 정상보다 높게 순위 매기는 건 정확한데, 점수 자체가 낮습니다. YOLOX 점수는 물체일 확률과 클래스 확률을 곱한 값이라 원래 낮게 나오고, 처음 보는 사진에서는 더 낮아집니다. 0.05로 낮추면 정상 오검출 없이 57%를 잡습니다. 즉 기준값은 모델마다 따로 정해야 하고, 그래도 부족하기 때문에 새 환경 사진으로 재학습이 필요합니다.</a:t>
             </a:r>
-            <a:endParaRPr lang="en-US" dirty="0"/>
           </a:p>
         </p:txBody>
       </p:sp>
@@ -1565,7 +1416,6 @@
               <a:rPr lang="en-US" dirty="0"/>
               <a:t>앞에서 본 결과들의 원인을 한 장에 모았습니다. 오른쪽 근거 칸은 얼마나 확실한지입니다. 확인은 데이터로 직접 확인한 것, 추정은 데이터와 맞지만 따로 검증하지 않은 것, 가설은 아직 검증하지 못한 것입니다. 가장 확실한 원인은 세 가지입니다. scratch는 반사나 나무결과 비슷한 가는 선이라 어렵고, 93%는 테스트 사진까지 학습에 들어가 부풀려진 수치이고, 2차 세트에서 떨어진 건 crack이 절반 크기로 작아졌기 때문입니다. ATSS가 왜 가장 좋은지는 추정 단계입니다. 32픽셀 미만의 작은 결함에서 격차가 가장 커서 입력 해상도 차이와 맞지만, 다시 학습해서 확인하지는 않았습니다.</a:t>
             </a:r>
-            <a:endParaRPr lang="en-US" dirty="0"/>
           </a:p>
         </p:txBody>
       </p:sp>
@@ -1653,7 +1503,6 @@
               <a:rPr lang="en-US" dirty="0"/>
               <a:t>다음에 다르게 할 것 네 가지입니다. 테스트셋은 업로드 전에 따로 빼고, 새 환경에서는 그 환경 사진으로 다시 검증하고, 판정 기준값은 모델과 정밀도마다 검증셋에서 정하고, 모델은 크기보다 데이터와 결함에 맞는 걸 고르겠습니다.</a:t>
             </a:r>
-            <a:endParaRPr lang="en-US" dirty="0"/>
           </a:p>
         </p:txBody>
       </p:sp>
@@ -1741,7 +1590,6 @@
               <a:rPr lang="en-US" dirty="0"/>
               <a:t>마지막으로 대시보드에서 실제 모델이 가상 검사 라인을 돌리는 모습을 보여드리겠습니다. (라이브 데모로 전환)</a:t>
             </a:r>
-            <a:endParaRPr lang="en-US" dirty="0"/>
           </a:p>
         </p:txBody>
       </p:sp>
@@ -1829,7 +1677,6 @@
               <a:rPr lang="en-US" dirty="0"/>
               <a:t>들어주셔서 감사합니다. 질문 받겠습니다.</a:t>
             </a:r>
-            <a:endParaRPr lang="en-US" dirty="0"/>
           </a:p>
         </p:txBody>
       </p:sp>
@@ -1917,7 +1764,6 @@
               <a:rPr lang="en-US" dirty="0"/>
               <a:t>crack은 세 모델 모두 AP 1.0이지만, scratch는 0.66에서 0.86입니다. 박스 크기는 640픽셀 사진에서 둘 다 약 44×38픽셀로 같습니다. 차이는 대비입니다. crack은 어둡고 뚜렷하고, scratch는 반사나 나무결과 비슷한 흐릿한 선입니다. 이후 나오는 오류도 대부분 scratch입니다. 실제로 배경을 결함으로 잘못 본 16건 중 13건이 scratch였습니다. 모델이 배경의 결이나 반사를 scratch로 착각한다는 뜻입니다.</a:t>
             </a:r>
-            <a:endParaRPr lang="en-US" dirty="0"/>
           </a:p>
         </p:txBody>
       </p:sp>
@@ -2005,7 +1851,6 @@
               <a:rPr lang="en-US" dirty="0"/>
               <a:t>라벨이 이미 달린 Roboflow 공개 데이터셋을 그대로 Geti에 가져왔습니다. 목적은 모델별 성능 차이와 INT8 경량화의 효과를 보는 것입니다. 모델은 ATSS, YOLOX-S, YOLOX-Tiny 세 가지를 각각 기본 FP16, heatmap을 출력하는 FP16 XAI, 그리고 INT8로 내보내 총 9개를 비교했습니다. 한계는 분명합니다. 사진이 전부 초록 매트, 회색, 나무 탁상 위에서 찍은 탁상 사진이고, 셀당 사진은 한 장, 촬영 세션도 반복됩니다.</a:t>
             </a:r>
-            <a:endParaRPr lang="en-US" dirty="0"/>
           </a:p>
         </p:txBody>
       </p:sp>
@@ -2093,7 +1938,6 @@
               <a:rPr lang="en-US" dirty="0"/>
               <a:t>왼쪽은 Geti 화면입니다. 세 모델 모두 같은 2,800장으로 학습했고, Geti 점수는 ATSS 86%, 나머지 81%입니다. 다만 Roboflow가 원본마다 증강 사본 3장을 만들어 두었고 Geti가 이를 무작위로 나눴기 때문에, 같은 원본의 사본이 Geti 학습과 테스트에 함께 들어갔을 가능성이 높아 Geti 점수도 낙관적입니다. 오른쪽은 직접 만든 벤치마크로 잰 값인데 순서가 같습니다. 파라미터가 가장 적은 ATSS가 가장 정확했고, 학습에 안 쓴 2차 세트에서도 ATSS가 YOLOX-S보다 훨씬 많이 잡았습니다. 다만 '작다'는 파라미터 기준이고, 연산량은 Tiny가 가장 적습니다. 왜 ATSS가 이겼는지는 가설 단계입니다. ATSS는 992×800으로 학습해 결함을 1.5배 크게 보고, 데이터가 2,800장으로 적어 작은 모델이 덜 과적합했을 수 있습니다. 모델마다 한 번씩만 학습해서 확정할 수는 없습니다.</a:t>
             </a:r>
-            <a:endParaRPr lang="en-US" dirty="0"/>
           </a:p>
         </p:txBody>
       </p:sp>
@@ -2181,7 +2025,6 @@
               <a:rPr lang="en-US" dirty="0"/>
               <a:t>처음 결과는 mAP 93%로 좋아 보였습니다. 하지만 데이터를 다시 보니 문제가 있었습니다. Roboflow 데이터셋을 통째로 Geti에 올리면서 테스트 153장도 함께 들어갔고, Geti가 이를 다시 나눠 학습했습니다. 그래서 1차 테스트 사진 중 일부는 모델이 학습 때 본 사진일 수 있습니다. 게다가 22장은 학습 사진과 사실상 같은 사진이었습니다. 직접 만든 데이터셋이 아니라서 놓친 부분입니다. 그래서 1차 점수는 모델끼리 비교하는 데만 쓰고, 처음 보는 사진에서의 성능은 2차 세트로 확인했습니다.</a:t>
             </a:r>
-            <a:endParaRPr lang="en-US" dirty="0"/>
           </a:p>
         </p:txBody>
       </p:sp>
@@ -2269,7 +2112,6 @@
               <a:rPr lang="en-US" dirty="0"/>
               <a:t>결론부터 말하면, crack과 scratch를 서로 헷갈린 경우는 한 번도 없고, 오류는 전부 놓친 scratch나 배경 오검출입니다. 특히 나무 탁상 배경에서 재현율이 33%로 가장 약합니다. 나무결이 scratch처럼 가는 선 모양이라 놓치기도 하고 잘못 보기도 합니다. 세 모델 모두 같은 패턴입니다. YOLOX-S는 scratch를 28개, Tiny는 30개 놓쳐서 ATSS보다 더 많이 놓칩니다.</a:t>
             </a:r>
-            <a:endParaRPr lang="en-US" dirty="0"/>
           </a:p>
         </p:txBody>
       </p:sp>
@@ -2357,7 +2199,6 @@
               <a:rPr lang="en-US" dirty="0"/>
               <a:t>XAI 버전으로 내보낸 모델은 결함 위치를 heatmap으로 함께 출력합니다. 왼쪽은 맞힌 경우로, 결함이 있는 셀 주변에 반응합니다. 가운데는 정상 셀을 scratch로 잘못 본 경우인데, heatmap도 셀 표면에 반응해 왜 그렇게 판단했는지 짐작할 수 있습니다. 오른쪽은 놓친 경우로, 모델이 scratch가 아니라 벨트 쪽을 보고 있습니다. 다만 heatmap은 꽤 흐릿해서, 결함 안에 들어간 비중이 면적 대비 1.5배 정도입니다. 그래서 판단의 근거라기보다는 검사원이 어디를 볼지 알려주는 위치 힌트로 쓰는 게 맞습니다. 모델끼리 heatmap 점수를 비교하는 건 heatmap 격자 크기 차이를 재는 셈이라 비교 지표로는 쓰지 않았습니다.</a:t>
             </a:r>
-            <a:endParaRPr lang="en-US" dirty="0"/>
           </a:p>
         </p:txBody>
       </p:sp>
@@ -2445,7 +2286,6 @@
               <a:rPr lang="en-US" dirty="0"/>
               <a:t>Geti 점수는 Geti가 직접 나눈 사진으로 매긴 점수라, 모델끼리 같은 조건으로 비교하거나 새 사진으로 다시 재볼 수 없었습니다. 그래서 benchmark.py를 직접 만들었습니다. Geti에서 내보낸 9개 모델을 똑같은 사진, 똑같은 판정 기준으로 돌리고, 정확도, 판정 결과, 기준값별 변화, 사진을 흐리게 하거나 어둡게 했을 때의 견고성, 학습 사진과의 중복, 그리고 CPU와 iGPU에서의 속도까지 한 번에 잽니다. 22장 복사본도 이 중복 검사에서 찾았습니다. 결과는 JSON으로 저장되고 대시보드의 Models 페이지에서 바로 볼 수 있습니다.</a:t>
             </a:r>
-            <a:endParaRPr lang="en-US" dirty="0"/>
           </a:p>
         </p:txBody>
       </p:sp>
@@ -2533,7 +2373,6 @@
               <a:rPr lang="en-US" dirty="0"/>
               <a:t>수업에서 다룬 모델 최적화를 직접 써보고 싶어서, Geti에서 INT8 모델을 받아 직접 만든 벤치마크로 측정했습니다. 같은 131장을 한 장씩, 같은 CPU에서, 전처리와 후처리를 포함해 잰 값입니다. INT8은 2배에서 4배 빠르고 크기는 절반 정도이며, mAP는 그대로입니다. 대신 신뢰도 점수가 조금 낮아져 같은 기준에서는 놓치는 결함이 늘어납니다. INT8을 쓰려면 기준값을 다시 정해야 합니다. 빨라지는 이유는 CPU의 8비트 연산 명령을 쓰고 옮길 데이터가 절반이기 때문이고, 놓침이 느는 이유는 양자화로 점수가 조금 내려가 0.30 근처 결함이 기준 아래로 떨어지기 때문입니다.</a:t>
             </a:r>
-            <a:endParaRPr lang="en-US" dirty="0"/>
           </a:p>
         </p:txBody>
       </p:sp>
@@ -2611,6 +2450,7 @@
         <a:solidFill>
           <a:schemeClr val="bg1"/>
         </a:solidFill>
+        <a:effectLst/>
       </p:bgPr>
     </p:bg>
     <p:spTree>
@@ -2630,9 +2470,11 @@
       <p:sp>
         <p:nvSpPr>
           <p:cNvPr id="2" name="Text 0"/>
-          <p:cNvSpPr/>
+          <p:cNvSpPr>
+            <a:spLocks noGrp="1"/>
+          </p:cNvSpPr>
           <p:nvPr>
-            <p:ph idx="100" type="title" hasCustomPrompt="1"/>
+            <p:ph type="title" idx="100" hasCustomPrompt="1"/>
           </p:nvPr>
         </p:nvSpPr>
         <p:spPr>
@@ -2649,7 +2491,7 @@
         <p:txBody>
           <a:bodyPr wrap="square" rtlCol="0"/>
           <a:lstStyle>
-            <a:lvl1pPr algn="l" indent="0" marL="0">
+            <a:lvl1pPr marL="0" indent="0" algn="l">
               <a:buNone/>
               <a:defRPr lang="en-US" sz="4000" b="1" dirty="0">
                 <a:solidFill>
@@ -2659,7 +2501,7 @@
             </a:lvl1pPr>
           </a:lstStyle>
           <a:p>
-            <a:pPr algn="l" indent="0" marL="0">
+            <a:pPr marL="0" indent="0" algn="l">
               <a:buNone/>
             </a:pPr>
             <a:endParaRPr lang="en-US" sz="4000" dirty="0"/>
@@ -2669,9 +2511,11 @@
       <p:sp>
         <p:nvSpPr>
           <p:cNvPr id="3" name="Text 0"/>
-          <p:cNvSpPr/>
+          <p:cNvSpPr>
+            <a:spLocks noGrp="1"/>
+          </p:cNvSpPr>
           <p:nvPr>
-            <p:ph idx="101" type="body" hasCustomPrompt="1"/>
+            <p:ph type="body" idx="101" hasCustomPrompt="1"/>
           </p:nvPr>
         </p:nvSpPr>
         <p:spPr>
@@ -2688,7 +2532,7 @@
         <p:txBody>
           <a:bodyPr wrap="square" rtlCol="0"/>
           <a:lstStyle>
-            <a:lvl1pPr algn="l" indent="0" marL="0">
+            <a:lvl1pPr marL="0" indent="0" algn="l">
               <a:buNone/>
               <a:defRPr lang="en-US" sz="1600" dirty="0">
                 <a:solidFill>
@@ -2698,7 +2542,7 @@
             </a:lvl1pPr>
           </a:lstStyle>
           <a:p>
-            <a:pPr algn="l" indent="0" marL="0">
+            <a:pPr marL="0" indent="0" algn="l">
               <a:buNone/>
             </a:pPr>
             <a:endParaRPr lang="en-US" sz="1600" dirty="0"/>
@@ -2721,6 +2565,7 @@
         <a:solidFill>
           <a:schemeClr val="bg1"/>
         </a:solidFill>
+        <a:effectLst/>
       </p:bgPr>
     </p:bg>
     <p:spTree>
@@ -2740,9 +2585,11 @@
       <p:sp>
         <p:nvSpPr>
           <p:cNvPr id="2" name="Text 0"/>
-          <p:cNvSpPr/>
+          <p:cNvSpPr>
+            <a:spLocks noGrp="1"/>
+          </p:cNvSpPr>
           <p:nvPr>
-            <p:ph idx="100" type="title" hasCustomPrompt="1"/>
+            <p:ph type="title" idx="100" hasCustomPrompt="1"/>
           </p:nvPr>
         </p:nvSpPr>
         <p:spPr>
@@ -2759,7 +2606,7 @@
         <p:txBody>
           <a:bodyPr wrap="square" rtlCol="0"/>
           <a:lstStyle>
-            <a:lvl1pPr algn="l" indent="0" marL="0">
+            <a:lvl1pPr marL="0" indent="0" algn="l">
               <a:buNone/>
               <a:defRPr lang="en-US" sz="4000" b="1" dirty="0">
                 <a:solidFill>
@@ -2769,7 +2616,7 @@
             </a:lvl1pPr>
           </a:lstStyle>
           <a:p>
-            <a:pPr algn="l" indent="0" marL="0">
+            <a:pPr marL="0" indent="0" algn="l">
               <a:buNone/>
             </a:pPr>
             <a:endParaRPr lang="en-US" sz="4000" dirty="0"/>
@@ -2792,6 +2639,7 @@
         <a:solidFill>
           <a:schemeClr val="bg1"/>
         </a:solidFill>
+        <a:effectLst/>
       </p:bgPr>
     </p:bg>
     <p:spTree>
@@ -2811,9 +2659,11 @@
       <p:sp>
         <p:nvSpPr>
           <p:cNvPr id="2" name="Text 0"/>
-          <p:cNvSpPr/>
+          <p:cNvSpPr>
+            <a:spLocks noGrp="1"/>
+          </p:cNvSpPr>
           <p:nvPr>
-            <p:ph idx="100" type="title" hasCustomPrompt="1"/>
+            <p:ph type="title" idx="100" hasCustomPrompt="1"/>
           </p:nvPr>
         </p:nvSpPr>
         <p:spPr>
@@ -2830,7 +2680,7 @@
         <p:txBody>
           <a:bodyPr wrap="square" rtlCol="0"/>
           <a:lstStyle>
-            <a:lvl1pPr algn="l" indent="0" marL="0">
+            <a:lvl1pPr marL="0" indent="0" algn="l">
               <a:buNone/>
               <a:defRPr lang="en-US" sz="3200" b="1" dirty="0">
                 <a:solidFill>
@@ -2840,7 +2690,7 @@
             </a:lvl1pPr>
           </a:lstStyle>
           <a:p>
-            <a:pPr algn="l" indent="0" marL="0">
+            <a:pPr marL="0" indent="0" algn="l">
               <a:buNone/>
             </a:pPr>
             <a:endParaRPr lang="en-US" sz="3200" dirty="0"/>
@@ -2868,7 +2718,7 @@
           <a:bodyPr wrap="square" lIns="0" tIns="0" rIns="0" bIns="0" rtlCol="0" anchor="ctr"/>
           <a:lstStyle/>
           <a:p>
-            <a:pPr indent="0" marL="0">
+            <a:pPr marL="0" indent="0">
               <a:buNone/>
             </a:pPr>
             <a:r>
@@ -2903,7 +2753,7 @@
           </a:prstGeom>
           <a:extLst>
             <a:ext uri="{C572A759-6A51-4108-AA02-DFA0A04FC94B}">
-              <ma14:wrappingTextBoxFlag xmlns:ma14="http://schemas.microsoft.com/office/mac/drawingml/2011/main" val="0"/>
+              <ma14:wrappingTextBoxFlag xmlns="" xmlns:ma14="http://schemas.microsoft.com/office/mac/drawingml/2011/main" val="0"/>
             </a:ext>
           </a:extLst>
         </p:spPr>
@@ -2921,8 +2771,8 @@
           <a:p>
             <a:pPr algn="r"/>
             <a:fld id="{F7021451-1387-4CA6-816F-3879F97B5CBC}" type="slidenum">
-              <a:rPr b="0" lang="en-US"/>
-              <a:t>1004</a:t>
+              <a:rPr lang="en-US" b="0"/>
+              <a:t>‹#›</a:t>
             </a:fld>
             <a:endParaRPr lang="en-US"/>
           </a:p>
@@ -2944,6 +2794,7 @@
         <a:solidFill>
           <a:schemeClr val="bg1"/>
         </a:solidFill>
+        <a:effectLst/>
       </p:bgPr>
     </p:bg>
     <p:spTree>
@@ -2963,9 +2814,11 @@
       <p:sp>
         <p:nvSpPr>
           <p:cNvPr id="2" name="Text 0"/>
-          <p:cNvSpPr/>
+          <p:cNvSpPr>
+            <a:spLocks noGrp="1"/>
+          </p:cNvSpPr>
           <p:nvPr>
-            <p:ph idx="100" type="title" hasCustomPrompt="1"/>
+            <p:ph type="title" idx="100" hasCustomPrompt="1"/>
           </p:nvPr>
         </p:nvSpPr>
         <p:spPr>
@@ -2982,7 +2835,7 @@
         <p:txBody>
           <a:bodyPr wrap="square" rtlCol="0"/>
           <a:lstStyle>
-            <a:lvl1pPr algn="l" indent="0" marL="0">
+            <a:lvl1pPr marL="0" indent="0" algn="l">
               <a:buNone/>
               <a:defRPr lang="en-US" sz="3200" b="1" dirty="0">
                 <a:solidFill>
@@ -2992,7 +2845,7 @@
             </a:lvl1pPr>
           </a:lstStyle>
           <a:p>
-            <a:pPr algn="l" indent="0" marL="0">
+            <a:pPr marL="0" indent="0" algn="l">
               <a:buNone/>
             </a:pPr>
             <a:endParaRPr lang="en-US" sz="3200" dirty="0"/>
@@ -3002,9 +2855,11 @@
       <p:sp>
         <p:nvSpPr>
           <p:cNvPr id="3" name="Text 0"/>
-          <p:cNvSpPr/>
+          <p:cNvSpPr>
+            <a:spLocks noGrp="1"/>
+          </p:cNvSpPr>
           <p:nvPr>
-            <p:ph idx="101" type="body" hasCustomPrompt="1"/>
+            <p:ph type="body" idx="101" hasCustomPrompt="1"/>
           </p:nvPr>
         </p:nvSpPr>
         <p:spPr>
@@ -3021,7 +2876,7 @@
         <p:txBody>
           <a:bodyPr wrap="square" rtlCol="0"/>
           <a:lstStyle>
-            <a:lvl1pPr algn="l" indent="0" marL="0">
+            <a:lvl1pPr marL="0" indent="0" algn="l">
               <a:buNone/>
               <a:defRPr lang="en-US" sz="1500" dirty="0">
                 <a:solidFill>
@@ -3031,7 +2886,7 @@
             </a:lvl1pPr>
           </a:lstStyle>
           <a:p>
-            <a:pPr algn="l" indent="0" marL="0">
+            <a:pPr marL="0" indent="0" algn="l">
               <a:buNone/>
             </a:pPr>
             <a:endParaRPr lang="en-US" sz="1500" dirty="0"/>
@@ -3059,7 +2914,7 @@
           <a:bodyPr wrap="square" lIns="0" tIns="0" rIns="0" bIns="0" rtlCol="0" anchor="ctr"/>
           <a:lstStyle/>
           <a:p>
-            <a:pPr indent="0" marL="0">
+            <a:pPr marL="0" indent="0">
               <a:buNone/>
             </a:pPr>
             <a:r>
@@ -3094,7 +2949,7 @@
           </a:prstGeom>
           <a:extLst>
             <a:ext uri="{C572A759-6A51-4108-AA02-DFA0A04FC94B}">
-              <ma14:wrappingTextBoxFlag xmlns:ma14="http://schemas.microsoft.com/office/mac/drawingml/2011/main" val="0"/>
+              <ma14:wrappingTextBoxFlag xmlns="" xmlns:ma14="http://schemas.microsoft.com/office/mac/drawingml/2011/main" val="0"/>
             </a:ext>
           </a:extLst>
         </p:spPr>
@@ -3112,8 +2967,8 @@
           <a:p>
             <a:pPr algn="r"/>
             <a:fld id="{F7021451-1387-4CA6-816F-3879F97B5CBC}" type="slidenum">
-              <a:rPr b="0" lang="en-US"/>
-              <a:t>1005</a:t>
+              <a:rPr lang="en-US" b="0"/>
+              <a:t>‹#›</a:t>
             </a:fld>
             <a:endParaRPr lang="en-US"/>
           </a:p>
@@ -3130,6 +2985,11 @@
 <file path=ppt/slideMasters/slideMaster1.xml><?xml version="1.0" encoding="utf-8"?>
 <p:sldMaster xmlns:a="http://schemas.openxmlformats.org/drawingml/2006/main" xmlns:r="http://schemas.openxmlformats.org/officeDocument/2006/relationships" xmlns:p="http://schemas.openxmlformats.org/presentationml/2006/main">
   <p:cSld>
+    <p:bg>
+      <p:bgRef idx="1001">
+        <a:schemeClr val="bg1"/>
+      </p:bgRef>
+    </p:bg>
     <p:spTree>
       <p:nvGrpSpPr>
         <p:cNvPr id="1" name=""/>
@@ -3164,7 +3024,7 @@
           </a:prstGeom>
           <a:extLst>
             <a:ext uri="{C572A759-6A51-4108-AA02-DFA0A04FC94B}">
-              <ma14:wrappingTextBoxFlag xmlns:ma14="http://schemas.microsoft.com/office/mac/drawingml/2011/main" val="0"/>
+              <ma14:wrappingTextBoxFlag xmlns="" xmlns:ma14="http://schemas.microsoft.com/office/mac/drawingml/2011/main" val="0"/>
             </a:ext>
           </a:extLst>
         </p:spPr>
@@ -3182,8 +3042,8 @@
           <a:p>
             <a:pPr algn="r"/>
             <a:fld id="{F7021451-1387-4CA6-816F-3879F97B5CBC}" type="slidenum">
-              <a:rPr b="0" lang="en-US"/>
-              <a:t>null</a:t>
+              <a:rPr lang="en-US" b="0"/>
+              <a:t>‹#›</a:t>
             </a:fld>
             <a:endParaRPr lang="en-US"/>
           </a:p>
@@ -3491,7 +3351,7 @@
           <a:bodyPr wrap="square" lIns="0" tIns="0" rIns="0" bIns="0" rtlCol="0" anchor="t"/>
           <a:lstStyle/>
           <a:p>
-            <a:pPr indent="0" marL="0">
+            <a:pPr marL="0" indent="0">
               <a:buNone/>
             </a:pPr>
             <a:r>
@@ -3509,9 +3369,11 @@
       <p:sp>
         <p:nvSpPr>
           <p:cNvPr id="3" name="Text 0"/>
-          <p:cNvSpPr/>
+          <p:cNvSpPr>
+            <a:spLocks noGrp="1"/>
+          </p:cNvSpPr>
           <p:nvPr>
-            <p:ph idx="100" type="title" hasCustomPrompt="1"/>
+            <p:ph type="title" idx="100" hasCustomPrompt="1"/>
           </p:nvPr>
         </p:nvSpPr>
         <p:spPr>
@@ -3529,7 +3391,7 @@
           <a:bodyPr wrap="square" lIns="0" tIns="0" rIns="0" bIns="0" rtlCol="0" anchor="t"/>
           <a:lstStyle/>
           <a:p>
-            <a:pPr algn="l" indent="0" marL="0">
+            <a:pPr marL="0" indent="0" algn="l">
               <a:buNone/>
             </a:pPr>
             <a:r>
@@ -3543,7 +3405,7 @@
             <a:endParaRPr lang="en-US" sz="4000" dirty="0"/>
           </a:p>
           <a:p>
-            <a:pPr algn="l" indent="0" marL="0">
+            <a:pPr marL="0" indent="0" algn="l">
               <a:buNone/>
             </a:pPr>
             <a:r>
@@ -3561,9 +3423,11 @@
       <p:sp>
         <p:nvSpPr>
           <p:cNvPr id="4" name="Text 0"/>
-          <p:cNvSpPr/>
+          <p:cNvSpPr>
+            <a:spLocks noGrp="1"/>
+          </p:cNvSpPr>
           <p:nvPr>
-            <p:ph idx="101" type="body" hasCustomPrompt="1"/>
+            <p:ph type="body" idx="101" hasCustomPrompt="1"/>
           </p:nvPr>
         </p:nvSpPr>
         <p:spPr>
@@ -3581,7 +3445,7 @@
           <a:bodyPr wrap="square" lIns="0" tIns="0" rIns="0" bIns="0" rtlCol="0" anchor="t"/>
           <a:lstStyle/>
           <a:p>
-            <a:pPr algn="l" indent="0" marL="0">
+            <a:pPr marL="0" indent="0" algn="l">
               <a:buNone/>
             </a:pPr>
             <a:r>
@@ -3617,7 +3481,7 @@
           <a:bodyPr wrap="square" lIns="0" tIns="0" rIns="0" bIns="0" rtlCol="0" anchor="t"/>
           <a:lstStyle/>
           <a:p>
-            <a:pPr indent="0" marL="0">
+            <a:pPr marL="0" indent="0">
               <a:buNone/>
             </a:pPr>
             <a:r>
@@ -3634,14 +3498,14 @@
       </p:sp>
       <p:pic>
         <p:nvPicPr>
-          <p:cNvPr id="6" name="cover-crack" descr="C:\Users\user\_se4nchoi\batteryvision\docs\submission\build\img\cover_crack.jpg">    </p:cNvPr>
+          <p:cNvPr id="6" name="cover-crack" descr="C:\Users\user\_se4nchoi\batteryvision\docs\submission\build\img\cover_crack.jpg"/>
           <p:cNvPicPr>
             <a:picLocks noChangeAspect="1"/>
           </p:cNvPicPr>
           <p:nvPr/>
         </p:nvPicPr>
         <p:blipFill>
-          <a:blip r:embed="rId1"/>
+          <a:blip r:embed="rId3"/>
           <a:stretch>
             <a:fillRect/>
           </a:stretch>
@@ -3697,7 +3561,7 @@
           <a:bodyPr wrap="square" lIns="0" tIns="0" rIns="0" bIns="0" rtlCol="0" anchor="t"/>
           <a:lstStyle/>
           <a:p>
-            <a:pPr indent="0" marL="0">
+            <a:pPr marL="0" indent="0">
               <a:buNone/>
             </a:pPr>
             <a:r>
@@ -3714,14 +3578,14 @@
       </p:sp>
       <p:pic>
         <p:nvPicPr>
-          <p:cNvPr id="9" name="cover-scratch" descr="C:\Users\user\_se4nchoi\batteryvision\docs\submission\build\img\cover_scratch.jpg">    </p:cNvPr>
+          <p:cNvPr id="9" name="cover-scratch" descr="C:\Users\user\_se4nchoi\batteryvision\docs\submission\build\img\cover_scratch.jpg"/>
           <p:cNvPicPr>
             <a:picLocks noChangeAspect="1"/>
           </p:cNvPicPr>
           <p:nvPr/>
         </p:nvPicPr>
         <p:blipFill>
-          <a:blip r:embed="rId2"/>
+          <a:blip r:embed="rId4"/>
           <a:stretch>
             <a:fillRect/>
           </a:stretch>
@@ -3777,7 +3641,7 @@
           <a:bodyPr wrap="square" lIns="0" tIns="0" rIns="0" bIns="0" rtlCol="0" anchor="t"/>
           <a:lstStyle/>
           <a:p>
-            <a:pPr indent="0" marL="0">
+            <a:pPr marL="0" indent="0">
               <a:buNone/>
             </a:pPr>
             <a:r>
@@ -3794,14 +3658,14 @@
       </p:sp>
       <p:pic>
         <p:nvPicPr>
-          <p:cNvPr id="12" name="cover-정상" descr="C:\Users\user\_se4nchoi\batteryvision\docs\submission\build\img\cover_good.jpg">    </p:cNvPr>
+          <p:cNvPr id="12" name="cover-정상" descr="C:\Users\user\_se4nchoi\batteryvision\docs\submission\build\img\cover_good.jpg"/>
           <p:cNvPicPr>
             <a:picLocks noChangeAspect="1"/>
           </p:cNvPicPr>
           <p:nvPr/>
         </p:nvPicPr>
         <p:blipFill>
-          <a:blip r:embed="rId3"/>
+          <a:blip r:embed="rId5"/>
           <a:stretch>
             <a:fillRect/>
           </a:stretch>
@@ -3857,7 +3721,7 @@
           <a:bodyPr wrap="square" lIns="0" tIns="0" rIns="0" bIns="0" rtlCol="0" anchor="t"/>
           <a:lstStyle/>
           <a:p>
-            <a:pPr indent="0" marL="0">
+            <a:pPr marL="0" indent="0">
               <a:buNone/>
             </a:pPr>
             <a:r>
@@ -3900,9 +3764,11 @@
       <p:sp>
         <p:nvSpPr>
           <p:cNvPr id="2" name="Text 0"/>
-          <p:cNvSpPr/>
+          <p:cNvSpPr>
+            <a:spLocks noGrp="1"/>
+          </p:cNvSpPr>
           <p:nvPr>
-            <p:ph idx="100" type="title" hasCustomPrompt="1"/>
+            <p:ph type="title" idx="100" hasCustomPrompt="1"/>
           </p:nvPr>
         </p:nvSpPr>
         <p:spPr>
@@ -3920,7 +3786,7 @@
           <a:bodyPr wrap="square" lIns="0" tIns="0" rIns="0" bIns="0" rtlCol="0" anchor="ctr"/>
           <a:lstStyle/>
           <a:p>
-            <a:pPr algn="l" indent="0" marL="0">
+            <a:pPr marL="0" indent="0" algn="l">
               <a:buNone/>
             </a:pPr>
             <a:r>
@@ -3937,14 +3803,14 @@
       </p:sp>
       <p:pic>
         <p:nvPicPr>
-          <p:cNvPr id="3" name="rf-0" descr="C:\Users\user\_se4nchoi\batteryvision\docs\submission\build\img\roboflow_v8.png">    </p:cNvPr>
+          <p:cNvPr id="3" name="rf-0" descr="C:\Users\user\_se4nchoi\batteryvision\docs\submission\build\img\roboflow_v8.png"/>
           <p:cNvPicPr>
             <a:picLocks noChangeAspect="1"/>
           </p:cNvPicPr>
           <p:nvPr/>
         </p:nvPicPr>
         <p:blipFill>
-          <a:blip r:embed="rId1"/>
+          <a:blip r:embed="rId3"/>
           <a:stretch>
             <a:fillRect/>
           </a:stretch>
@@ -4009,7 +3875,7 @@
           <a:bodyPr wrap="square" lIns="0" tIns="0" rIns="0" bIns="0" rtlCol="0" anchor="ctr"/>
           <a:lstStyle/>
           <a:p>
-            <a:pPr algn="ctr" indent="0" marL="0">
+            <a:pPr marL="0" indent="0" algn="ctr">
               <a:buNone/>
             </a:pPr>
             <a:r>
@@ -4045,7 +3911,7 @@
           <a:bodyPr wrap="square" lIns="0" tIns="0" rIns="0" bIns="0" rtlCol="0" anchor="ctr"/>
           <a:lstStyle/>
           <a:p>
-            <a:pPr indent="0" marL="0">
+            <a:pPr marL="0" indent="0">
               <a:buNone/>
             </a:pPr>
             <a:r>
@@ -4062,14 +3928,14 @@
       </p:sp>
       <p:pic>
         <p:nvPicPr>
-          <p:cNvPr id="7" name="rf-1" descr="C:\Users\user\_se4nchoi\batteryvision\docs\submission\build\img\roboflow_v2.png">    </p:cNvPr>
+          <p:cNvPr id="7" name="rf-1" descr="C:\Users\user\_se4nchoi\batteryvision\docs\submission\build\img\roboflow_v2.png"/>
           <p:cNvPicPr>
             <a:picLocks noChangeAspect="1"/>
           </p:cNvPicPr>
           <p:nvPr/>
         </p:nvPicPr>
         <p:blipFill>
-          <a:blip r:embed="rId2"/>
+          <a:blip r:embed="rId4"/>
           <a:stretch>
             <a:fillRect/>
           </a:stretch>
@@ -4134,7 +4000,7 @@
           <a:bodyPr wrap="square" lIns="0" tIns="0" rIns="0" bIns="0" rtlCol="0" anchor="ctr"/>
           <a:lstStyle/>
           <a:p>
-            <a:pPr algn="ctr" indent="0" marL="0">
+            <a:pPr marL="0" indent="0" algn="ctr">
               <a:buNone/>
             </a:pPr>
             <a:r>
@@ -4170,7 +4036,7 @@
           <a:bodyPr wrap="square" lIns="0" tIns="0" rIns="0" bIns="0" rtlCol="0" anchor="ctr"/>
           <a:lstStyle/>
           <a:p>
-            <a:pPr indent="0" marL="0">
+            <a:pPr marL="0" indent="0">
               <a:buNone/>
             </a:pPr>
             <a:r>
@@ -4235,7 +4101,7 @@
           <a:bodyPr wrap="square" lIns="0" tIns="0" rIns="0" bIns="0" rtlCol="0" anchor="ctr"/>
           <a:lstStyle/>
           <a:p>
-            <a:pPr algn="ctr" indent="0" marL="0">
+            <a:pPr marL="0" indent="0" algn="ctr">
               <a:buNone/>
             </a:pPr>
             <a:r>
@@ -4271,7 +4137,7 @@
           <a:bodyPr wrap="square" lIns="0" tIns="0" rIns="0" bIns="0" rtlCol="0" anchor="ctr"/>
           <a:lstStyle/>
           <a:p>
-            <a:pPr algn="ctr" indent="0" marL="0">
+            <a:pPr marL="0" indent="0" algn="ctr">
               <a:buNone/>
             </a:pPr>
             <a:r>
@@ -4336,7 +4202,7 @@
           <a:bodyPr wrap="square" lIns="0" tIns="0" rIns="0" bIns="0" rtlCol="0" anchor="ctr"/>
           <a:lstStyle/>
           <a:p>
-            <a:pPr algn="ctr" indent="0" marL="0">
+            <a:pPr marL="0" indent="0" algn="ctr">
               <a:buNone/>
             </a:pPr>
             <a:r>
@@ -4371,7 +4237,7 @@
           </a:prstGeom>
           <a:extLst>
             <a:ext uri="{C572A759-6A51-4108-AA02-DFA0A04FC94B}">
-              <ma14:wrappingTextBoxFlag xmlns:ma14="http://schemas.microsoft.com/office/mac/drawingml/2011/main" val="0"/>
+              <ma14:wrappingTextBoxFlag xmlns="" xmlns:ma14="http://schemas.microsoft.com/office/mac/drawingml/2011/main" val="0"/>
             </a:ext>
           </a:extLst>
         </p:spPr>
@@ -4389,7 +4255,7 @@
           <a:p>
             <a:pPr algn="r"/>
             <a:fld id="{F7021451-1387-4CA6-816F-3879F97B5CBC}" type="slidenum">
-              <a:rPr b="0" lang="en-US"/>
+              <a:rPr lang="en-US" b="0"/>
               <a:t>10</a:t>
             </a:fld>
             <a:endParaRPr lang="en-US"/>
@@ -4424,9 +4290,11 @@
       <p:sp>
         <p:nvSpPr>
           <p:cNvPr id="2" name="Text 0"/>
-          <p:cNvSpPr/>
+          <p:cNvSpPr>
+            <a:spLocks noGrp="1"/>
+          </p:cNvSpPr>
           <p:nvPr>
-            <p:ph idx="100" type="title" hasCustomPrompt="1"/>
+            <p:ph type="title" idx="100" hasCustomPrompt="1"/>
           </p:nvPr>
         </p:nvSpPr>
         <p:spPr>
@@ -4444,7 +4312,7 @@
           <a:bodyPr wrap="square" lIns="0" tIns="0" rIns="0" bIns="0" rtlCol="0" anchor="ctr"/>
           <a:lstStyle/>
           <a:p>
-            <a:pPr algn="l" indent="0" marL="0">
+            <a:pPr marL="0" indent="0" algn="l">
               <a:buNone/>
             </a:pPr>
             <a:r>
@@ -4502,7 +4370,7 @@
           <a:bodyPr wrap="square" lIns="0" tIns="0" rIns="0" bIns="0" rtlCol="0" anchor="t"/>
           <a:lstStyle/>
           <a:p>
-            <a:pPr indent="0" marL="0">
+            <a:pPr marL="0" indent="0">
               <a:buNone/>
             </a:pPr>
             <a:r>
@@ -4538,7 +4406,7 @@
           <a:bodyPr wrap="square" lIns="0" tIns="0" rIns="0" bIns="0" rtlCol="0" anchor="t"/>
           <a:lstStyle/>
           <a:p>
-            <a:pPr algn="r" indent="0" marL="0">
+            <a:pPr marL="0" indent="0" algn="r">
               <a:buNone/>
             </a:pPr>
             <a:r>
@@ -4574,7 +4442,7 @@
           <a:bodyPr wrap="square" lIns="0" tIns="0" rIns="0" bIns="0" rtlCol="0" anchor="t"/>
           <a:lstStyle/>
           <a:p>
-            <a:pPr algn="r" indent="0" marL="0">
+            <a:pPr marL="0" indent="0" algn="r">
               <a:buNone/>
             </a:pPr>
             <a:r>
@@ -4630,7 +4498,7 @@
           <a:bodyPr wrap="square" lIns="0" tIns="0" rIns="0" bIns="0" rtlCol="0" anchor="ctr"/>
           <a:lstStyle/>
           <a:p>
-            <a:pPr indent="0" marL="0">
+            <a:pPr marL="0" indent="0">
               <a:buNone/>
             </a:pPr>
             <a:r>
@@ -4666,7 +4534,7 @@
           <a:bodyPr wrap="square" lIns="0" tIns="0" rIns="0" bIns="0" rtlCol="0" anchor="ctr"/>
           <a:lstStyle/>
           <a:p>
-            <a:pPr algn="r" indent="0" marL="0">
+            <a:pPr marL="0" indent="0" algn="r">
               <a:buNone/>
             </a:pPr>
             <a:r>
@@ -4702,7 +4570,7 @@
           <a:bodyPr wrap="square" lIns="0" tIns="0" rIns="0" bIns="0" rtlCol="0" anchor="ctr"/>
           <a:lstStyle/>
           <a:p>
-            <a:pPr algn="r" indent="0" marL="0">
+            <a:pPr marL="0" indent="0" algn="r">
               <a:buNone/>
             </a:pPr>
             <a:r>
@@ -4758,7 +4626,7 @@
           <a:bodyPr wrap="square" lIns="0" tIns="0" rIns="0" bIns="0" rtlCol="0" anchor="ctr"/>
           <a:lstStyle/>
           <a:p>
-            <a:pPr indent="0" marL="0">
+            <a:pPr marL="0" indent="0">
               <a:buNone/>
             </a:pPr>
             <a:r>
@@ -4794,7 +4662,7 @@
           <a:bodyPr wrap="square" lIns="0" tIns="0" rIns="0" bIns="0" rtlCol="0" anchor="ctr"/>
           <a:lstStyle/>
           <a:p>
-            <a:pPr algn="r" indent="0" marL="0">
+            <a:pPr marL="0" indent="0" algn="r">
               <a:buNone/>
             </a:pPr>
             <a:r>
@@ -4830,7 +4698,7 @@
           <a:bodyPr wrap="square" lIns="0" tIns="0" rIns="0" bIns="0" rtlCol="0" anchor="ctr"/>
           <a:lstStyle/>
           <a:p>
-            <a:pPr algn="r" indent="0" marL="0">
+            <a:pPr marL="0" indent="0" algn="r">
               <a:buNone/>
             </a:pPr>
             <a:r>
@@ -4886,7 +4754,7 @@
           <a:bodyPr wrap="square" lIns="0" tIns="0" rIns="0" bIns="0" rtlCol="0" anchor="ctr"/>
           <a:lstStyle/>
           <a:p>
-            <a:pPr indent="0" marL="0">
+            <a:pPr marL="0" indent="0">
               <a:buNone/>
             </a:pPr>
             <a:r>
@@ -4922,7 +4790,7 @@
           <a:bodyPr wrap="square" lIns="0" tIns="0" rIns="0" bIns="0" rtlCol="0" anchor="ctr"/>
           <a:lstStyle/>
           <a:p>
-            <a:pPr algn="r" indent="0" marL="0">
+            <a:pPr marL="0" indent="0" algn="r">
               <a:buNone/>
             </a:pPr>
             <a:r>
@@ -4958,7 +4826,7 @@
           <a:bodyPr wrap="square" lIns="0" tIns="0" rIns="0" bIns="0" rtlCol="0" anchor="ctr"/>
           <a:lstStyle/>
           <a:p>
-            <a:pPr algn="r" indent="0" marL="0">
+            <a:pPr marL="0" indent="0" algn="r">
               <a:buNone/>
             </a:pPr>
             <a:r>
@@ -4975,14 +4843,14 @@
       </p:sp>
       <p:pic>
         <p:nvPicPr>
-          <p:cNvPr id="19" name="miss-img" descr="C:\Users\user\_se4nchoi\batteryvision\docs\submission\build\img\holdout_miss.jpg">    </p:cNvPr>
+          <p:cNvPr id="19" name="miss-img" descr="C:\Users\user\_se4nchoi\batteryvision\docs\submission\build\img\holdout_miss.jpg"/>
           <p:cNvPicPr>
             <a:picLocks noChangeAspect="1"/>
           </p:cNvPicPr>
           <p:nvPr/>
         </p:nvPicPr>
         <p:blipFill>
-          <a:blip r:embed="rId1"/>
+          <a:blip r:embed="rId3"/>
           <a:stretch>
             <a:fillRect/>
           </a:stretch>
@@ -5112,7 +4980,7 @@
           <a:bodyPr wrap="square" lIns="0" tIns="0" rIns="0" bIns="0" rtlCol="0" anchor="t"/>
           <a:lstStyle/>
           <a:p>
-            <a:pPr indent="0" marL="0">
+            <a:pPr marL="0" indent="0">
               <a:buNone/>
             </a:pPr>
             <a:r>
@@ -5129,7 +4997,7 @@
       </p:sp>
       <p:graphicFrame>
         <p:nvGraphicFramePr>
-          <p:cNvPr id="12" name="th-table"/>
+          <p:cNvPr id="22" name="th-table"/>
           <p:cNvGraphicFramePr>
             <a:graphicFrameLocks noGrp="1"/>
           </p:cNvGraphicFramePr>
@@ -5143,17 +5011,41 @@
         </p:nvGraphicFramePr>
         <p:xfrm>
           <a:off x="6812280" y="2011680"/>
-          <a:ext cx="4828032" cy="914400"/>
+          <a:ext cx="4828032" cy="2304288"/>
         </p:xfrm>
         <a:graphic>
           <a:graphicData uri="http://schemas.openxmlformats.org/drawingml/2006/table">
             <a:tbl>
               <a:tblPr/>
               <a:tblGrid>
-                <a:gridCol w="1280160"/>
-                <a:gridCol w="1188720"/>
-                <a:gridCol w="1133856"/>
-                <a:gridCol w="1225296"/>
+                <a:gridCol w="1280160">
+                  <a:extLst>
+                    <a:ext uri="{9D8B030D-6E8A-4147-A177-3AD203B41FA5}">
+                      <a16:colId xmlns:a16="http://schemas.microsoft.com/office/drawing/2014/main" val="20000"/>
+                    </a:ext>
+                  </a:extLst>
+                </a:gridCol>
+                <a:gridCol w="1188720">
+                  <a:extLst>
+                    <a:ext uri="{9D8B030D-6E8A-4147-A177-3AD203B41FA5}">
+                      <a16:colId xmlns:a16="http://schemas.microsoft.com/office/drawing/2014/main" val="20001"/>
+                    </a:ext>
+                  </a:extLst>
+                </a:gridCol>
+                <a:gridCol w="1133856">
+                  <a:extLst>
+                    <a:ext uri="{9D8B030D-6E8A-4147-A177-3AD203B41FA5}">
+                      <a16:colId xmlns:a16="http://schemas.microsoft.com/office/drawing/2014/main" val="20002"/>
+                    </a:ext>
+                  </a:extLst>
+                </a:gridCol>
+                <a:gridCol w="1225296">
+                  <a:extLst>
+                    <a:ext uri="{9D8B030D-6E8A-4147-A177-3AD203B41FA5}">
+                      <a16:colId xmlns:a16="http://schemas.microsoft.com/office/drawing/2014/main" val="20003"/>
+                    </a:ext>
+                  </a:extLst>
+                </a:gridCol>
               </a:tblGrid>
               <a:tr h="384048">
                 <a:tc>
@@ -5161,7 +5053,7 @@
                     <a:bodyPr/>
                     <a:lstStyle/>
                     <a:p>
-                      <a:pPr algn="l" indent="0" marL="0">
+                      <a:pPr marL="0" indent="0" algn="l">
                         <a:buNone/>
                       </a:pPr>
                       <a:r>
@@ -5182,7 +5074,7 @@
                       </a:endParaRPr>
                     </a:p>
                   </a:txBody>
-                  <a:tcPr marL="91440" marR="91440" marT="45720" marB="45720" anchor="ctr">
+                  <a:tcPr anchor="ctr">
                     <a:lnL w="9525" cap="flat" cmpd="sng" algn="ctr">
                       <a:solidFill>
                         <a:srgbClr val="3A3F48"/>
@@ -5229,7 +5121,7 @@
                     <a:bodyPr/>
                     <a:lstStyle/>
                     <a:p>
-                      <a:pPr algn="ctr" indent="0" marL="0">
+                      <a:pPr marL="0" indent="0" algn="ctr">
                         <a:buNone/>
                       </a:pPr>
                       <a:r>
@@ -5250,7 +5142,7 @@
                       </a:endParaRPr>
                     </a:p>
                   </a:txBody>
-                  <a:tcPr marL="91440" marR="91440" marT="45720" marB="45720" anchor="ctr">
+                  <a:tcPr anchor="ctr">
                     <a:lnL w="9525" cap="flat" cmpd="sng" algn="ctr">
                       <a:solidFill>
                         <a:srgbClr val="3A3F48"/>
@@ -5297,7 +5189,7 @@
                     <a:bodyPr/>
                     <a:lstStyle/>
                     <a:p>
-                      <a:pPr algn="ctr" indent="0" marL="0">
+                      <a:pPr marL="0" indent="0" algn="ctr">
                         <a:buNone/>
                       </a:pPr>
                       <a:r>
@@ -5318,7 +5210,7 @@
                       </a:endParaRPr>
                     </a:p>
                   </a:txBody>
-                  <a:tcPr marL="91440" marR="91440" marT="45720" marB="45720" anchor="ctr">
+                  <a:tcPr anchor="ctr">
                     <a:lnL w="9525" cap="flat" cmpd="sng" algn="ctr">
                       <a:solidFill>
                         <a:srgbClr val="3A3F48"/>
@@ -5365,7 +5257,7 @@
                     <a:bodyPr/>
                     <a:lstStyle/>
                     <a:p>
-                      <a:pPr algn="ctr" indent="0" marL="0">
+                      <a:pPr marL="0" indent="0" algn="ctr">
                         <a:buNone/>
                       </a:pPr>
                       <a:r>
@@ -5386,7 +5278,7 @@
                       </a:endParaRPr>
                     </a:p>
                   </a:txBody>
-                  <a:tcPr marL="91440" marR="91440" marT="45720" marB="45720" anchor="ctr">
+                  <a:tcPr anchor="ctr">
                     <a:lnL w="9525" cap="flat" cmpd="sng" algn="ctr">
                       <a:solidFill>
                         <a:srgbClr val="3A3F48"/>
@@ -5428,6 +5320,11 @@
                     </a:solidFill>
                   </a:tcPr>
                 </a:tc>
+                <a:extLst>
+                  <a:ext uri="{0D108BD9-81ED-4DB2-BD59-A6C34878D82A}">
+                    <a16:rowId xmlns:a16="http://schemas.microsoft.com/office/drawing/2014/main" val="10000"/>
+                  </a:ext>
+                </a:extLst>
               </a:tr>
               <a:tr h="384048">
                 <a:tc>
@@ -5435,7 +5332,7 @@
                     <a:bodyPr/>
                     <a:lstStyle/>
                     <a:p>
-                      <a:pPr algn="l" indent="0" marL="0">
+                      <a:pPr marL="0" indent="0" algn="l">
                         <a:buNone/>
                       </a:pPr>
                       <a:r>
@@ -5456,7 +5353,7 @@
                       </a:endParaRPr>
                     </a:p>
                   </a:txBody>
-                  <a:tcPr marL="91440" marR="91440" marT="45720" marB="45720" anchor="ctr">
+                  <a:tcPr anchor="ctr">
                     <a:lnL w="9525" cap="flat" cmpd="sng" algn="ctr">
                       <a:solidFill>
                         <a:srgbClr val="3A3F48"/>
@@ -5503,7 +5400,7 @@
                     <a:bodyPr/>
                     <a:lstStyle/>
                     <a:p>
-                      <a:pPr algn="ctr" indent="0" marL="0">
+                      <a:pPr marL="0" indent="0" algn="ctr">
                         <a:buNone/>
                       </a:pPr>
                       <a:r>
@@ -5524,7 +5421,7 @@
                       </a:endParaRPr>
                     </a:p>
                   </a:txBody>
-                  <a:tcPr marL="91440" marR="91440" marT="45720" marB="45720" anchor="ctr">
+                  <a:tcPr anchor="ctr">
                     <a:lnL w="9525" cap="flat" cmpd="sng" algn="ctr">
                       <a:solidFill>
                         <a:srgbClr val="3A3F48"/>
@@ -5571,7 +5468,7 @@
                     <a:bodyPr/>
                     <a:lstStyle/>
                     <a:p>
-                      <a:pPr algn="ctr" indent="0" marL="0">
+                      <a:pPr marL="0" indent="0" algn="ctr">
                         <a:buNone/>
                       </a:pPr>
                       <a:r>
@@ -5592,7 +5489,7 @@
                       </a:endParaRPr>
                     </a:p>
                   </a:txBody>
-                  <a:tcPr marL="91440" marR="91440" marT="45720" marB="45720" anchor="ctr">
+                  <a:tcPr anchor="ctr">
                     <a:lnL w="9525" cap="flat" cmpd="sng" algn="ctr">
                       <a:solidFill>
                         <a:srgbClr val="3A3F48"/>
@@ -5639,7 +5536,7 @@
                     <a:bodyPr/>
                     <a:lstStyle/>
                     <a:p>
-                      <a:pPr algn="ctr" indent="0" marL="0">
+                      <a:pPr marL="0" indent="0" algn="ctr">
                         <a:buNone/>
                       </a:pPr>
                       <a:r>
@@ -5660,7 +5557,7 @@
                       </a:endParaRPr>
                     </a:p>
                   </a:txBody>
-                  <a:tcPr marL="91440" marR="91440" marT="45720" marB="45720" anchor="ctr">
+                  <a:tcPr anchor="ctr">
                     <a:lnL w="9525" cap="flat" cmpd="sng" algn="ctr">
                       <a:solidFill>
                         <a:srgbClr val="3A3F48"/>
@@ -5702,6 +5599,11 @@
                     </a:solidFill>
                   </a:tcPr>
                 </a:tc>
+                <a:extLst>
+                  <a:ext uri="{0D108BD9-81ED-4DB2-BD59-A6C34878D82A}">
+                    <a16:rowId xmlns:a16="http://schemas.microsoft.com/office/drawing/2014/main" val="10001"/>
+                  </a:ext>
+                </a:extLst>
               </a:tr>
               <a:tr h="384048">
                 <a:tc>
@@ -5709,7 +5611,7 @@
                     <a:bodyPr/>
                     <a:lstStyle/>
                     <a:p>
-                      <a:pPr algn="l" indent="0" marL="0">
+                      <a:pPr marL="0" indent="0" algn="l">
                         <a:buNone/>
                       </a:pPr>
                       <a:r>
@@ -5730,7 +5632,7 @@
                       </a:endParaRPr>
                     </a:p>
                   </a:txBody>
-                  <a:tcPr marL="91440" marR="91440" marT="45720" marB="45720" anchor="ctr">
+                  <a:tcPr anchor="ctr">
                     <a:lnL w="9525" cap="flat" cmpd="sng" algn="ctr">
                       <a:solidFill>
                         <a:srgbClr val="3A3F48"/>
@@ -5777,7 +5679,7 @@
                     <a:bodyPr/>
                     <a:lstStyle/>
                     <a:p>
-                      <a:pPr algn="ctr" indent="0" marL="0">
+                      <a:pPr marL="0" indent="0" algn="ctr">
                         <a:buNone/>
                       </a:pPr>
                       <a:r>
@@ -5798,7 +5700,7 @@
                       </a:endParaRPr>
                     </a:p>
                   </a:txBody>
-                  <a:tcPr marL="91440" marR="91440" marT="45720" marB="45720" anchor="ctr">
+                  <a:tcPr anchor="ctr">
                     <a:lnL w="9525" cap="flat" cmpd="sng" algn="ctr">
                       <a:solidFill>
                         <a:srgbClr val="3A3F48"/>
@@ -5845,7 +5747,7 @@
                     <a:bodyPr/>
                     <a:lstStyle/>
                     <a:p>
-                      <a:pPr algn="ctr" indent="0" marL="0">
+                      <a:pPr marL="0" indent="0" algn="ctr">
                         <a:buNone/>
                       </a:pPr>
                       <a:r>
@@ -5866,7 +5768,7 @@
                       </a:endParaRPr>
                     </a:p>
                   </a:txBody>
-                  <a:tcPr marL="91440" marR="91440" marT="45720" marB="45720" anchor="ctr">
+                  <a:tcPr anchor="ctr">
                     <a:lnL w="9525" cap="flat" cmpd="sng" algn="ctr">
                       <a:solidFill>
                         <a:srgbClr val="3A3F48"/>
@@ -5913,7 +5815,7 @@
                     <a:bodyPr/>
                     <a:lstStyle/>
                     <a:p>
-                      <a:pPr algn="ctr" indent="0" marL="0">
+                      <a:pPr marL="0" indent="0" algn="ctr">
                         <a:buNone/>
                       </a:pPr>
                       <a:r>
@@ -5934,7 +5836,7 @@
                       </a:endParaRPr>
                     </a:p>
                   </a:txBody>
-                  <a:tcPr marL="91440" marR="91440" marT="45720" marB="45720" anchor="ctr">
+                  <a:tcPr anchor="ctr">
                     <a:lnL w="9525" cap="flat" cmpd="sng" algn="ctr">
                       <a:solidFill>
                         <a:srgbClr val="3A3F48"/>
@@ -5976,6 +5878,11 @@
                     </a:solidFill>
                   </a:tcPr>
                 </a:tc>
+                <a:extLst>
+                  <a:ext uri="{0D108BD9-81ED-4DB2-BD59-A6C34878D82A}">
+                    <a16:rowId xmlns:a16="http://schemas.microsoft.com/office/drawing/2014/main" val="10002"/>
+                  </a:ext>
+                </a:extLst>
               </a:tr>
               <a:tr h="384048">
                 <a:tc>
@@ -5983,7 +5890,7 @@
                     <a:bodyPr/>
                     <a:lstStyle/>
                     <a:p>
-                      <a:pPr algn="l" indent="0" marL="0">
+                      <a:pPr marL="0" indent="0" algn="l">
                         <a:buNone/>
                       </a:pPr>
                       <a:r>
@@ -6004,7 +5911,7 @@
                       </a:endParaRPr>
                     </a:p>
                   </a:txBody>
-                  <a:tcPr marL="91440" marR="91440" marT="45720" marB="45720" anchor="ctr">
+                  <a:tcPr anchor="ctr">
                     <a:lnL w="9525" cap="flat" cmpd="sng" algn="ctr">
                       <a:solidFill>
                         <a:srgbClr val="3A3F48"/>
@@ -6051,7 +5958,7 @@
                     <a:bodyPr/>
                     <a:lstStyle/>
                     <a:p>
-                      <a:pPr algn="ctr" indent="0" marL="0">
+                      <a:pPr marL="0" indent="0" algn="ctr">
                         <a:buNone/>
                       </a:pPr>
                       <a:r>
@@ -6072,7 +5979,7 @@
                       </a:endParaRPr>
                     </a:p>
                   </a:txBody>
-                  <a:tcPr marL="91440" marR="91440" marT="45720" marB="45720" anchor="ctr">
+                  <a:tcPr anchor="ctr">
                     <a:lnL w="9525" cap="flat" cmpd="sng" algn="ctr">
                       <a:solidFill>
                         <a:srgbClr val="3A3F48"/>
@@ -6119,7 +6026,7 @@
                     <a:bodyPr/>
                     <a:lstStyle/>
                     <a:p>
-                      <a:pPr algn="ctr" indent="0" marL="0">
+                      <a:pPr marL="0" indent="0" algn="ctr">
                         <a:buNone/>
                       </a:pPr>
                       <a:r>
@@ -6140,7 +6047,7 @@
                       </a:endParaRPr>
                     </a:p>
                   </a:txBody>
-                  <a:tcPr marL="91440" marR="91440" marT="45720" marB="45720" anchor="ctr">
+                  <a:tcPr anchor="ctr">
                     <a:lnL w="9525" cap="flat" cmpd="sng" algn="ctr">
                       <a:solidFill>
                         <a:srgbClr val="3A3F48"/>
@@ -6187,7 +6094,7 @@
                     <a:bodyPr/>
                     <a:lstStyle/>
                     <a:p>
-                      <a:pPr algn="ctr" indent="0" marL="0">
+                      <a:pPr marL="0" indent="0" algn="ctr">
                         <a:buNone/>
                       </a:pPr>
                       <a:r>
@@ -6208,7 +6115,7 @@
                       </a:endParaRPr>
                     </a:p>
                   </a:txBody>
-                  <a:tcPr marL="91440" marR="91440" marT="45720" marB="45720" anchor="ctr">
+                  <a:tcPr anchor="ctr">
                     <a:lnL w="9525" cap="flat" cmpd="sng" algn="ctr">
                       <a:solidFill>
                         <a:srgbClr val="3A3F48"/>
@@ -6250,6 +6157,11 @@
                     </a:solidFill>
                   </a:tcPr>
                 </a:tc>
+                <a:extLst>
+                  <a:ext uri="{0D108BD9-81ED-4DB2-BD59-A6C34878D82A}">
+                    <a16:rowId xmlns:a16="http://schemas.microsoft.com/office/drawing/2014/main" val="10003"/>
+                  </a:ext>
+                </a:extLst>
               </a:tr>
               <a:tr h="384048">
                 <a:tc>
@@ -6257,7 +6169,7 @@
                     <a:bodyPr/>
                     <a:lstStyle/>
                     <a:p>
-                      <a:pPr algn="l" indent="0" marL="0">
+                      <a:pPr marL="0" indent="0" algn="l">
                         <a:buNone/>
                       </a:pPr>
                       <a:r>
@@ -6278,7 +6190,7 @@
                       </a:endParaRPr>
                     </a:p>
                   </a:txBody>
-                  <a:tcPr marL="91440" marR="91440" marT="45720" marB="45720" anchor="ctr">
+                  <a:tcPr anchor="ctr">
                     <a:lnL w="9525" cap="flat" cmpd="sng" algn="ctr">
                       <a:solidFill>
                         <a:srgbClr val="3A3F48"/>
@@ -6325,7 +6237,7 @@
                     <a:bodyPr/>
                     <a:lstStyle/>
                     <a:p>
-                      <a:pPr algn="ctr" indent="0" marL="0">
+                      <a:pPr marL="0" indent="0" algn="ctr">
                         <a:buNone/>
                       </a:pPr>
                       <a:r>
@@ -6346,7 +6258,7 @@
                       </a:endParaRPr>
                     </a:p>
                   </a:txBody>
-                  <a:tcPr marL="91440" marR="91440" marT="45720" marB="45720" anchor="ctr">
+                  <a:tcPr anchor="ctr">
                     <a:lnL w="9525" cap="flat" cmpd="sng" algn="ctr">
                       <a:solidFill>
                         <a:srgbClr val="3A3F48"/>
@@ -6393,7 +6305,7 @@
                     <a:bodyPr/>
                     <a:lstStyle/>
                     <a:p>
-                      <a:pPr algn="ctr" indent="0" marL="0">
+                      <a:pPr marL="0" indent="0" algn="ctr">
                         <a:buNone/>
                       </a:pPr>
                       <a:r>
@@ -6414,7 +6326,7 @@
                       </a:endParaRPr>
                     </a:p>
                   </a:txBody>
-                  <a:tcPr marL="91440" marR="91440" marT="45720" marB="45720" anchor="ctr">
+                  <a:tcPr anchor="ctr">
                     <a:lnL w="9525" cap="flat" cmpd="sng" algn="ctr">
                       <a:solidFill>
                         <a:srgbClr val="3A3F48"/>
@@ -6461,7 +6373,7 @@
                     <a:bodyPr/>
                     <a:lstStyle/>
                     <a:p>
-                      <a:pPr algn="ctr" indent="0" marL="0">
+                      <a:pPr marL="0" indent="0" algn="ctr">
                         <a:buNone/>
                       </a:pPr>
                       <a:r>
@@ -6482,7 +6394,7 @@
                       </a:endParaRPr>
                     </a:p>
                   </a:txBody>
-                  <a:tcPr marL="91440" marR="91440" marT="45720" marB="45720" anchor="ctr">
+                  <a:tcPr anchor="ctr">
                     <a:lnL w="9525" cap="flat" cmpd="sng" algn="ctr">
                       <a:solidFill>
                         <a:srgbClr val="3A3F48"/>
@@ -6524,6 +6436,11 @@
                     </a:solidFill>
                   </a:tcPr>
                 </a:tc>
+                <a:extLst>
+                  <a:ext uri="{0D108BD9-81ED-4DB2-BD59-A6C34878D82A}">
+                    <a16:rowId xmlns:a16="http://schemas.microsoft.com/office/drawing/2014/main" val="10004"/>
+                  </a:ext>
+                </a:extLst>
               </a:tr>
               <a:tr h="384048">
                 <a:tc>
@@ -6531,7 +6448,7 @@
                     <a:bodyPr/>
                     <a:lstStyle/>
                     <a:p>
-                      <a:pPr algn="l" indent="0" marL="0">
+                      <a:pPr marL="0" indent="0" algn="l">
                         <a:buNone/>
                       </a:pPr>
                       <a:r>
@@ -6552,7 +6469,7 @@
                       </a:endParaRPr>
                     </a:p>
                   </a:txBody>
-                  <a:tcPr marL="91440" marR="91440" marT="45720" marB="45720" anchor="ctr">
+                  <a:tcPr anchor="ctr">
                     <a:lnL w="9525" cap="flat" cmpd="sng" algn="ctr">
                       <a:solidFill>
                         <a:srgbClr val="3A3F48"/>
@@ -6599,7 +6516,7 @@
                     <a:bodyPr/>
                     <a:lstStyle/>
                     <a:p>
-                      <a:pPr algn="ctr" indent="0" marL="0">
+                      <a:pPr marL="0" indent="0" algn="ctr">
                         <a:buNone/>
                       </a:pPr>
                       <a:r>
@@ -6620,7 +6537,7 @@
                       </a:endParaRPr>
                     </a:p>
                   </a:txBody>
-                  <a:tcPr marL="91440" marR="91440" marT="45720" marB="45720" anchor="ctr">
+                  <a:tcPr anchor="ctr">
                     <a:lnL w="9525" cap="flat" cmpd="sng" algn="ctr">
                       <a:solidFill>
                         <a:srgbClr val="3A3F48"/>
@@ -6667,7 +6584,7 @@
                     <a:bodyPr/>
                     <a:lstStyle/>
                     <a:p>
-                      <a:pPr algn="ctr" indent="0" marL="0">
+                      <a:pPr marL="0" indent="0" algn="ctr">
                         <a:buNone/>
                       </a:pPr>
                       <a:r>
@@ -6688,7 +6605,7 @@
                       </a:endParaRPr>
                     </a:p>
                   </a:txBody>
-                  <a:tcPr marL="91440" marR="91440" marT="45720" marB="45720" anchor="ctr">
+                  <a:tcPr anchor="ctr">
                     <a:lnL w="9525" cap="flat" cmpd="sng" algn="ctr">
                       <a:solidFill>
                         <a:srgbClr val="3A3F48"/>
@@ -6735,7 +6652,7 @@
                     <a:bodyPr/>
                     <a:lstStyle/>
                     <a:p>
-                      <a:pPr algn="ctr" indent="0" marL="0">
+                      <a:pPr marL="0" indent="0" algn="ctr">
                         <a:buNone/>
                       </a:pPr>
                       <a:r>
@@ -6756,7 +6673,7 @@
                       </a:endParaRPr>
                     </a:p>
                   </a:txBody>
-                  <a:tcPr marL="91440" marR="91440" marT="45720" marB="45720" anchor="ctr">
+                  <a:tcPr anchor="ctr">
                     <a:lnL w="9525" cap="flat" cmpd="sng" algn="ctr">
                       <a:solidFill>
                         <a:srgbClr val="3A3F48"/>
@@ -6798,6 +6715,11 @@
                     </a:solidFill>
                   </a:tcPr>
                 </a:tc>
+                <a:extLst>
+                  <a:ext uri="{0D108BD9-81ED-4DB2-BD59-A6C34878D82A}">
+                    <a16:rowId xmlns:a16="http://schemas.microsoft.com/office/drawing/2014/main" val="10005"/>
+                  </a:ext>
+                </a:extLst>
               </a:tr>
             </a:tbl>
           </a:graphicData>
@@ -6824,7 +6746,7 @@
           <a:bodyPr wrap="square" lIns="0" tIns="0" rIns="0" bIns="0" rtlCol="0" anchor="t"/>
           <a:lstStyle/>
           <a:p>
-            <a:pPr indent="0" marL="0">
+            <a:pPr marL="0" indent="0">
               <a:spcAft>
                 <a:spcPts val="600"/>
               </a:spcAft>
@@ -6841,7 +6763,7 @@
             <a:endParaRPr lang="en-US" sz="1600" dirty="0"/>
           </a:p>
           <a:p>
-            <a:pPr indent="0" marL="0">
+            <a:pPr marL="0" indent="0">
               <a:spcAft>
                 <a:spcPts val="600"/>
               </a:spcAft>
@@ -6858,7 +6780,7 @@
             <a:endParaRPr lang="en-US" sz="1600" dirty="0"/>
           </a:p>
           <a:p>
-            <a:pPr indent="0" marL="0">
+            <a:pPr marL="0" indent="0">
               <a:spcAft>
                 <a:spcPts val="600"/>
               </a:spcAft>
@@ -6896,7 +6818,7 @@
           </a:prstGeom>
           <a:extLst>
             <a:ext uri="{C572A759-6A51-4108-AA02-DFA0A04FC94B}">
-              <ma14:wrappingTextBoxFlag xmlns:ma14="http://schemas.microsoft.com/office/mac/drawingml/2011/main" val="0"/>
+              <ma14:wrappingTextBoxFlag xmlns="" xmlns:ma14="http://schemas.microsoft.com/office/mac/drawingml/2011/main" val="0"/>
             </a:ext>
           </a:extLst>
         </p:spPr>
@@ -6914,7 +6836,7 @@
           <a:p>
             <a:pPr algn="r"/>
             <a:fld id="{F7021451-1387-4CA6-816F-3879F97B5CBC}" type="slidenum">
-              <a:rPr b="0" lang="en-US"/>
+              <a:rPr lang="en-US" b="0"/>
               <a:t>11</a:t>
             </a:fld>
             <a:endParaRPr lang="en-US"/>
@@ -6949,9 +6871,11 @@
       <p:sp>
         <p:nvSpPr>
           <p:cNvPr id="2" name="Text 0"/>
-          <p:cNvSpPr/>
+          <p:cNvSpPr>
+            <a:spLocks noGrp="1"/>
+          </p:cNvSpPr>
           <p:nvPr>
-            <p:ph idx="100" type="title" hasCustomPrompt="1"/>
+            <p:ph type="title" idx="100" hasCustomPrompt="1"/>
           </p:nvPr>
         </p:nvSpPr>
         <p:spPr>
@@ -6969,16 +6893,36 @@
           <a:bodyPr wrap="square" lIns="0" tIns="0" rIns="0" bIns="0" rtlCol="0" anchor="ctr"/>
           <a:lstStyle/>
           <a:p>
-            <a:pPr algn="l" indent="0" marL="0">
+            <a:pPr marL="0" indent="0" algn="l">
               <a:buNone/>
             </a:pPr>
+            <a:r>
+              <a:rPr lang="en-US" sz="3200" b="1" dirty="0" err="1">
+                <a:solidFill>
+                  <a:schemeClr val="tx1"/>
+                </a:solidFill>
+              </a:rPr>
+              <a:t>결과</a:t>
+            </a:r>
             <a:r>
               <a:rPr lang="en-US" sz="3200" b="1" dirty="0">
                 <a:solidFill>
                   <a:schemeClr val="tx1"/>
                 </a:solidFill>
               </a:rPr>
-              <a:t>결과 분석</a:t>
+              <a:t> </a:t>
+            </a:r>
+            <a:r>
+              <a:rPr lang="ko-KR" altLang="en-US" dirty="0" smtClean="0"/>
+              <a:t>원인 </a:t>
+            </a:r>
+            <a:r>
+              <a:rPr lang="en-US" sz="3200" b="1" dirty="0" err="1" smtClean="0">
+                <a:solidFill>
+                  <a:schemeClr val="tx1"/>
+                </a:solidFill>
+              </a:rPr>
+              <a:t>분석</a:t>
             </a:r>
             <a:endParaRPr lang="en-US" sz="3200" dirty="0"/>
           </a:p>
@@ -6993,24 +6937,48 @@
           <p:nvPr>
             <p:extLst>
               <p:ext uri="{D42A27DB-BD31-4B8C-83A1-F6EECF244321}">
-                <p14:modId xmlns:p14="http://schemas.microsoft.com/office/powerpoint/2010/main" val="1579011935"/>
+                <p14:modId xmlns:p14="http://schemas.microsoft.com/office/powerpoint/2010/main" val="566543994"/>
               </p:ext>
             </p:extLst>
           </p:nvPr>
         </p:nvGraphicFramePr>
         <p:xfrm>
           <a:off x="548640" y="1554480"/>
-          <a:ext cx="11094415" cy="914400"/>
+          <a:ext cx="11274870" cy="4206240"/>
         </p:xfrm>
         <a:graphic>
           <a:graphicData uri="http://schemas.openxmlformats.org/drawingml/2006/table">
             <a:tbl>
               <a:tblPr/>
               <a:tblGrid>
-                <a:gridCol w="502920"/>
-                <a:gridCol w="3108960"/>
-                <a:gridCol w="6611112"/>
-                <a:gridCol w="868680"/>
+                <a:gridCol w="686118">
+                  <a:extLst>
+                    <a:ext uri="{9D8B030D-6E8A-4147-A177-3AD203B41FA5}">
+                      <a16:colId xmlns:a16="http://schemas.microsoft.com/office/drawing/2014/main" val="20000"/>
+                    </a:ext>
+                  </a:extLst>
+                </a:gridCol>
+                <a:gridCol w="3108960">
+                  <a:extLst>
+                    <a:ext uri="{9D8B030D-6E8A-4147-A177-3AD203B41FA5}">
+                      <a16:colId xmlns:a16="http://schemas.microsoft.com/office/drawing/2014/main" val="20001"/>
+                    </a:ext>
+                  </a:extLst>
+                </a:gridCol>
+                <a:gridCol w="6611112">
+                  <a:extLst>
+                    <a:ext uri="{9D8B030D-6E8A-4147-A177-3AD203B41FA5}">
+                      <a16:colId xmlns:a16="http://schemas.microsoft.com/office/drawing/2014/main" val="20002"/>
+                    </a:ext>
+                  </a:extLst>
+                </a:gridCol>
+                <a:gridCol w="868680">
+                  <a:extLst>
+                    <a:ext uri="{9D8B030D-6E8A-4147-A177-3AD203B41FA5}">
+                      <a16:colId xmlns:a16="http://schemas.microsoft.com/office/drawing/2014/main" val="20003"/>
+                    </a:ext>
+                  </a:extLst>
+                </a:gridCol>
               </a:tblGrid>
               <a:tr h="420624">
                 <a:tc>
@@ -7018,11 +6986,11 @@
                     <a:bodyPr/>
                     <a:lstStyle/>
                     <a:p>
-                      <a:pPr algn="ctr" indent="0" marL="0">
+                      <a:pPr marL="0" indent="0" algn="ctr">
                         <a:buNone/>
                       </a:pPr>
                       <a:r>
-                        <a:rPr lang="en-US" sz="1500" b="1" dirty="0">
+                        <a:rPr lang="en-US" sz="1500" b="1" dirty="0" smtClean="0">
                           <a:solidFill>
                             <a:schemeClr val="tx2"/>
                           </a:solidFill>
@@ -7030,7 +6998,7 @@
                           <a:ea typeface="Malgun Gothic" pitchFamily="34" charset="-122"/>
                           <a:cs typeface="Malgun Gothic" pitchFamily="34" charset="-120"/>
                         </a:rPr>
-                        <a:t>장</a:t>
+                        <a:t>Slide</a:t>
                       </a:r>
                       <a:endParaRPr lang="en-US" sz="1500" dirty="0">
                         <a:latin typeface="Malgun Gothic" charset="0"/>
@@ -7039,7 +7007,7 @@
                       </a:endParaRPr>
                     </a:p>
                   </a:txBody>
-                  <a:tcPr marL="91440" marR="91440" marT="45720" marB="45720" anchor="ctr">
+                  <a:tcPr anchor="ctr">
                     <a:lnL w="9525" cap="flat" cmpd="sng" algn="ctr">
                       <a:solidFill>
                         <a:srgbClr val="3A3F48"/>
@@ -7086,7 +7054,7 @@
                     <a:bodyPr/>
                     <a:lstStyle/>
                     <a:p>
-                      <a:pPr indent="0" marL="0">
+                      <a:pPr marL="0" indent="0">
                         <a:buNone/>
                       </a:pPr>
                       <a:r>
@@ -7107,7 +7075,7 @@
                       </a:endParaRPr>
                     </a:p>
                   </a:txBody>
-                  <a:tcPr marL="91440" marR="91440" marT="45720" marB="45720" anchor="ctr">
+                  <a:tcPr anchor="ctr">
                     <a:lnL w="9525" cap="flat" cmpd="sng" algn="ctr">
                       <a:solidFill>
                         <a:srgbClr val="3A3F48"/>
@@ -7154,7 +7122,7 @@
                     <a:bodyPr/>
                     <a:lstStyle/>
                     <a:p>
-                      <a:pPr indent="0" marL="0">
+                      <a:pPr marL="0" indent="0">
                         <a:buNone/>
                       </a:pPr>
                       <a:r>
@@ -7175,7 +7143,7 @@
                       </a:endParaRPr>
                     </a:p>
                   </a:txBody>
-                  <a:tcPr marL="91440" marR="91440" marT="45720" marB="45720" anchor="ctr">
+                  <a:tcPr anchor="ctr">
                     <a:lnL w="9525" cap="flat" cmpd="sng" algn="ctr">
                       <a:solidFill>
                         <a:srgbClr val="3A3F48"/>
@@ -7222,7 +7190,7 @@
                     <a:bodyPr/>
                     <a:lstStyle/>
                     <a:p>
-                      <a:pPr algn="ctr" indent="0" marL="0">
+                      <a:pPr marL="0" indent="0" algn="ctr">
                         <a:buNone/>
                       </a:pPr>
                       <a:r>
@@ -7243,7 +7211,7 @@
                       </a:endParaRPr>
                     </a:p>
                   </a:txBody>
-                  <a:tcPr marL="91440" marR="91440" marT="45720" marB="45720" anchor="ctr">
+                  <a:tcPr anchor="ctr">
                     <a:lnL w="9525" cap="flat" cmpd="sng" algn="ctr">
                       <a:solidFill>
                         <a:srgbClr val="3A3F48"/>
@@ -7285,6 +7253,11 @@
                     </a:solidFill>
                   </a:tcPr>
                 </a:tc>
+                <a:extLst>
+                  <a:ext uri="{0D108BD9-81ED-4DB2-BD59-A6C34878D82A}">
+                    <a16:rowId xmlns:a16="http://schemas.microsoft.com/office/drawing/2014/main" val="10000"/>
+                  </a:ext>
+                </a:extLst>
               </a:tr>
               <a:tr h="420624">
                 <a:tc>
@@ -7292,7 +7265,7 @@
                     <a:bodyPr/>
                     <a:lstStyle/>
                     <a:p>
-                      <a:pPr algn="ctr" indent="0" marL="0">
+                      <a:pPr marL="0" indent="0" algn="ctr">
                         <a:buNone/>
                       </a:pPr>
                       <a:r>
@@ -7313,7 +7286,7 @@
                       </a:endParaRPr>
                     </a:p>
                   </a:txBody>
-                  <a:tcPr marL="91440" marR="91440" marT="45720" marB="45720" anchor="ctr">
+                  <a:tcPr anchor="ctr">
                     <a:lnL w="9525" cap="flat" cmpd="sng" algn="ctr">
                       <a:solidFill>
                         <a:srgbClr val="3A3F48"/>
@@ -7360,7 +7333,7 @@
                     <a:bodyPr/>
                     <a:lstStyle/>
                     <a:p>
-                      <a:pPr indent="0" marL="0">
+                      <a:pPr marL="0" indent="0">
                         <a:buNone/>
                       </a:pPr>
                       <a:r>
@@ -7381,7 +7354,7 @@
                       </a:endParaRPr>
                     </a:p>
                   </a:txBody>
-                  <a:tcPr marL="91440" marR="91440" marT="45720" marB="45720" anchor="ctr">
+                  <a:tcPr anchor="ctr">
                     <a:lnL w="9525" cap="flat" cmpd="sng" algn="ctr">
                       <a:solidFill>
                         <a:srgbClr val="3A3F48"/>
@@ -7428,7 +7401,7 @@
                     <a:bodyPr/>
                     <a:lstStyle/>
                     <a:p>
-                      <a:pPr indent="0" marL="0">
+                      <a:pPr marL="0" indent="0">
                         <a:buNone/>
                       </a:pPr>
                       <a:r>
@@ -7449,7 +7422,7 @@
                       </a:endParaRPr>
                     </a:p>
                   </a:txBody>
-                  <a:tcPr marL="91440" marR="91440" marT="45720" marB="45720" anchor="ctr">
+                  <a:tcPr anchor="ctr">
                     <a:lnL w="9525" cap="flat" cmpd="sng" algn="ctr">
                       <a:solidFill>
                         <a:srgbClr val="3A3F48"/>
@@ -7496,7 +7469,7 @@
                     <a:bodyPr/>
                     <a:lstStyle/>
                     <a:p>
-                      <a:pPr algn="ctr" indent="0" marL="0">
+                      <a:pPr marL="0" indent="0" algn="ctr">
                         <a:buNone/>
                       </a:pPr>
                       <a:r>
@@ -7517,7 +7490,7 @@
                       </a:endParaRPr>
                     </a:p>
                   </a:txBody>
-                  <a:tcPr marL="91440" marR="91440" marT="45720" marB="45720" anchor="ctr">
+                  <a:tcPr anchor="ctr">
                     <a:lnL w="9525" cap="flat" cmpd="sng" algn="ctr">
                       <a:solidFill>
                         <a:srgbClr val="3A3F48"/>
@@ -7559,6 +7532,11 @@
                     </a:solidFill>
                   </a:tcPr>
                 </a:tc>
+                <a:extLst>
+                  <a:ext uri="{0D108BD9-81ED-4DB2-BD59-A6C34878D82A}">
+                    <a16:rowId xmlns:a16="http://schemas.microsoft.com/office/drawing/2014/main" val="10001"/>
+                  </a:ext>
+                </a:extLst>
               </a:tr>
               <a:tr h="420624">
                 <a:tc>
@@ -7566,7 +7544,7 @@
                     <a:bodyPr/>
                     <a:lstStyle/>
                     <a:p>
-                      <a:pPr algn="ctr" indent="0" marL="0">
+                      <a:pPr marL="0" indent="0" algn="ctr">
                         <a:buNone/>
                       </a:pPr>
                       <a:r>
@@ -7587,7 +7565,7 @@
                       </a:endParaRPr>
                     </a:p>
                   </a:txBody>
-                  <a:tcPr marL="91440" marR="91440" marT="45720" marB="45720" anchor="ctr">
+                  <a:tcPr anchor="ctr">
                     <a:lnL w="9525" cap="flat" cmpd="sng" algn="ctr">
                       <a:solidFill>
                         <a:srgbClr val="3A3F48"/>
@@ -7634,7 +7612,7 @@
                     <a:bodyPr/>
                     <a:lstStyle/>
                     <a:p>
-                      <a:pPr indent="0" marL="0">
+                      <a:pPr marL="0" indent="0">
                         <a:buNone/>
                       </a:pPr>
                       <a:r>
@@ -7655,7 +7633,7 @@
                       </a:endParaRPr>
                     </a:p>
                   </a:txBody>
-                  <a:tcPr marL="91440" marR="91440" marT="45720" marB="45720" anchor="ctr">
+                  <a:tcPr anchor="ctr">
                     <a:lnL w="9525" cap="flat" cmpd="sng" algn="ctr">
                       <a:solidFill>
                         <a:srgbClr val="3A3F48"/>
@@ -7702,7 +7680,7 @@
                     <a:bodyPr/>
                     <a:lstStyle/>
                     <a:p>
-                      <a:pPr indent="0" marL="0">
+                      <a:pPr marL="0" indent="0">
                         <a:buNone/>
                       </a:pPr>
                       <a:r>
@@ -7723,7 +7701,7 @@
                       </a:endParaRPr>
                     </a:p>
                   </a:txBody>
-                  <a:tcPr marL="91440" marR="91440" marT="45720" marB="45720" anchor="ctr">
+                  <a:tcPr anchor="ctr">
                     <a:lnL w="9525" cap="flat" cmpd="sng" algn="ctr">
                       <a:solidFill>
                         <a:srgbClr val="3A3F48"/>
@@ -7770,7 +7748,7 @@
                     <a:bodyPr/>
                     <a:lstStyle/>
                     <a:p>
-                      <a:pPr algn="ctr" indent="0" marL="0">
+                      <a:pPr marL="0" indent="0" algn="ctr">
                         <a:buNone/>
                       </a:pPr>
                       <a:r>
@@ -7791,7 +7769,7 @@
                       </a:endParaRPr>
                     </a:p>
                   </a:txBody>
-                  <a:tcPr marL="91440" marR="91440" marT="45720" marB="45720" anchor="ctr">
+                  <a:tcPr anchor="ctr">
                     <a:lnL w="9525" cap="flat" cmpd="sng" algn="ctr">
                       <a:solidFill>
                         <a:srgbClr val="3A3F48"/>
@@ -7833,6 +7811,11 @@
                     </a:solidFill>
                   </a:tcPr>
                 </a:tc>
+                <a:extLst>
+                  <a:ext uri="{0D108BD9-81ED-4DB2-BD59-A6C34878D82A}">
+                    <a16:rowId xmlns:a16="http://schemas.microsoft.com/office/drawing/2014/main" val="10002"/>
+                  </a:ext>
+                </a:extLst>
               </a:tr>
               <a:tr h="420624">
                 <a:tc>
@@ -7840,7 +7823,7 @@
                     <a:bodyPr/>
                     <a:lstStyle/>
                     <a:p>
-                      <a:pPr algn="ctr" indent="0" marL="0">
+                      <a:pPr marL="0" indent="0" algn="ctr">
                         <a:buNone/>
                       </a:pPr>
                       <a:r>
@@ -7861,7 +7844,7 @@
                       </a:endParaRPr>
                     </a:p>
                   </a:txBody>
-                  <a:tcPr marL="91440" marR="91440" marT="45720" marB="45720" anchor="ctr">
+                  <a:tcPr anchor="ctr">
                     <a:lnL w="9525" cap="flat" cmpd="sng" algn="ctr">
                       <a:solidFill>
                         <a:srgbClr val="3A3F48"/>
@@ -7908,7 +7891,7 @@
                     <a:bodyPr/>
                     <a:lstStyle/>
                     <a:p>
-                      <a:pPr indent="0" marL="0">
+                      <a:pPr marL="0" indent="0">
                         <a:buNone/>
                       </a:pPr>
                       <a:r>
@@ -7929,7 +7912,7 @@
                       </a:endParaRPr>
                     </a:p>
                   </a:txBody>
-                  <a:tcPr marL="91440" marR="91440" marT="45720" marB="45720" anchor="ctr">
+                  <a:tcPr anchor="ctr">
                     <a:lnL w="9525" cap="flat" cmpd="sng" algn="ctr">
                       <a:solidFill>
                         <a:srgbClr val="3A3F48"/>
@@ -7976,7 +7959,7 @@
                     <a:bodyPr/>
                     <a:lstStyle/>
                     <a:p>
-                      <a:pPr indent="0" marL="0">
+                      <a:pPr marL="0" indent="0">
                         <a:buNone/>
                       </a:pPr>
                       <a:r>
@@ -7997,7 +7980,7 @@
                       </a:endParaRPr>
                     </a:p>
                   </a:txBody>
-                  <a:tcPr marL="91440" marR="91440" marT="45720" marB="45720" anchor="ctr">
+                  <a:tcPr anchor="ctr">
                     <a:lnL w="9525" cap="flat" cmpd="sng" algn="ctr">
                       <a:solidFill>
                         <a:srgbClr val="3A3F48"/>
@@ -8044,7 +8027,7 @@
                     <a:bodyPr/>
                     <a:lstStyle/>
                     <a:p>
-                      <a:pPr algn="ctr" indent="0" marL="0">
+                      <a:pPr marL="0" indent="0" algn="ctr">
                         <a:buNone/>
                       </a:pPr>
                       <a:r>
@@ -8065,7 +8048,7 @@
                       </a:endParaRPr>
                     </a:p>
                   </a:txBody>
-                  <a:tcPr marL="91440" marR="91440" marT="45720" marB="45720" anchor="ctr">
+                  <a:tcPr anchor="ctr">
                     <a:lnL w="9525" cap="flat" cmpd="sng" algn="ctr">
                       <a:solidFill>
                         <a:srgbClr val="3A3F48"/>
@@ -8107,6 +8090,11 @@
                     </a:solidFill>
                   </a:tcPr>
                 </a:tc>
+                <a:extLst>
+                  <a:ext uri="{0D108BD9-81ED-4DB2-BD59-A6C34878D82A}">
+                    <a16:rowId xmlns:a16="http://schemas.microsoft.com/office/drawing/2014/main" val="10003"/>
+                  </a:ext>
+                </a:extLst>
               </a:tr>
               <a:tr h="420624">
                 <a:tc>
@@ -8114,7 +8102,7 @@
                     <a:bodyPr/>
                     <a:lstStyle/>
                     <a:p>
-                      <a:pPr algn="ctr" indent="0" marL="0">
+                      <a:pPr marL="0" indent="0" algn="ctr">
                         <a:buNone/>
                       </a:pPr>
                       <a:r>
@@ -8135,7 +8123,7 @@
                       </a:endParaRPr>
                     </a:p>
                   </a:txBody>
-                  <a:tcPr marL="91440" marR="91440" marT="45720" marB="45720" anchor="ctr">
+                  <a:tcPr anchor="ctr">
                     <a:lnL w="9525" cap="flat" cmpd="sng" algn="ctr">
                       <a:solidFill>
                         <a:srgbClr val="3A3F48"/>
@@ -8182,7 +8170,7 @@
                     <a:bodyPr/>
                     <a:lstStyle/>
                     <a:p>
-                      <a:pPr indent="0" marL="0">
+                      <a:pPr marL="0" indent="0">
                         <a:buNone/>
                       </a:pPr>
                       <a:r>
@@ -8203,7 +8191,7 @@
                       </a:endParaRPr>
                     </a:p>
                   </a:txBody>
-                  <a:tcPr marL="91440" marR="91440" marT="45720" marB="45720" anchor="ctr">
+                  <a:tcPr anchor="ctr">
                     <a:lnL w="9525" cap="flat" cmpd="sng" algn="ctr">
                       <a:solidFill>
                         <a:srgbClr val="3A3F48"/>
@@ -8250,7 +8238,7 @@
                     <a:bodyPr/>
                     <a:lstStyle/>
                     <a:p>
-                      <a:pPr indent="0" marL="0">
+                      <a:pPr marL="0" indent="0">
                         <a:buNone/>
                       </a:pPr>
                       <a:r>
@@ -8271,7 +8259,7 @@
                       </a:endParaRPr>
                     </a:p>
                   </a:txBody>
-                  <a:tcPr marL="91440" marR="91440" marT="45720" marB="45720" anchor="ctr">
+                  <a:tcPr anchor="ctr">
                     <a:lnL w="9525" cap="flat" cmpd="sng" algn="ctr">
                       <a:solidFill>
                         <a:srgbClr val="3A3F48"/>
@@ -8318,7 +8306,7 @@
                     <a:bodyPr/>
                     <a:lstStyle/>
                     <a:p>
-                      <a:pPr algn="ctr" indent="0" marL="0">
+                      <a:pPr marL="0" indent="0" algn="ctr">
                         <a:buNone/>
                       </a:pPr>
                       <a:r>
@@ -8339,7 +8327,7 @@
                       </a:endParaRPr>
                     </a:p>
                   </a:txBody>
-                  <a:tcPr marL="91440" marR="91440" marT="45720" marB="45720" anchor="ctr">
+                  <a:tcPr anchor="ctr">
                     <a:lnL w="9525" cap="flat" cmpd="sng" algn="ctr">
                       <a:solidFill>
                         <a:srgbClr val="3A3F48"/>
@@ -8381,6 +8369,11 @@
                     </a:solidFill>
                   </a:tcPr>
                 </a:tc>
+                <a:extLst>
+                  <a:ext uri="{0D108BD9-81ED-4DB2-BD59-A6C34878D82A}">
+                    <a16:rowId xmlns:a16="http://schemas.microsoft.com/office/drawing/2014/main" val="10004"/>
+                  </a:ext>
+                </a:extLst>
               </a:tr>
               <a:tr h="420624">
                 <a:tc>
@@ -8388,7 +8381,7 @@
                     <a:bodyPr/>
                     <a:lstStyle/>
                     <a:p>
-                      <a:pPr algn="ctr" indent="0" marL="0">
+                      <a:pPr marL="0" indent="0" algn="ctr">
                         <a:buNone/>
                       </a:pPr>
                       <a:r>
@@ -8409,7 +8402,7 @@
                       </a:endParaRPr>
                     </a:p>
                   </a:txBody>
-                  <a:tcPr marL="91440" marR="91440" marT="45720" marB="45720" anchor="ctr">
+                  <a:tcPr anchor="ctr">
                     <a:lnL w="9525" cap="flat" cmpd="sng" algn="ctr">
                       <a:solidFill>
                         <a:srgbClr val="3A3F48"/>
@@ -8456,7 +8449,7 @@
                     <a:bodyPr/>
                     <a:lstStyle/>
                     <a:p>
-                      <a:pPr indent="0" marL="0">
+                      <a:pPr marL="0" indent="0">
                         <a:buNone/>
                       </a:pPr>
                       <a:r>
@@ -8477,7 +8470,7 @@
                       </a:endParaRPr>
                     </a:p>
                   </a:txBody>
-                  <a:tcPr marL="91440" marR="91440" marT="45720" marB="45720" anchor="ctr">
+                  <a:tcPr anchor="ctr">
                     <a:lnL w="9525" cap="flat" cmpd="sng" algn="ctr">
                       <a:solidFill>
                         <a:srgbClr val="3A3F48"/>
@@ -8524,7 +8517,7 @@
                     <a:bodyPr/>
                     <a:lstStyle/>
                     <a:p>
-                      <a:pPr indent="0" marL="0">
+                      <a:pPr marL="0" indent="0">
                         <a:buNone/>
                       </a:pPr>
                       <a:r>
@@ -8545,7 +8538,7 @@
                       </a:endParaRPr>
                     </a:p>
                   </a:txBody>
-                  <a:tcPr marL="91440" marR="91440" marT="45720" marB="45720" anchor="ctr">
+                  <a:tcPr anchor="ctr">
                     <a:lnL w="9525" cap="flat" cmpd="sng" algn="ctr">
                       <a:solidFill>
                         <a:srgbClr val="3A3F48"/>
@@ -8592,7 +8585,7 @@
                     <a:bodyPr/>
                     <a:lstStyle/>
                     <a:p>
-                      <a:pPr algn="ctr" indent="0" marL="0">
+                      <a:pPr marL="0" indent="0" algn="ctr">
                         <a:buNone/>
                       </a:pPr>
                       <a:r>
@@ -8613,7 +8606,7 @@
                       </a:endParaRPr>
                     </a:p>
                   </a:txBody>
-                  <a:tcPr marL="91440" marR="91440" marT="45720" marB="45720" anchor="ctr">
+                  <a:tcPr anchor="ctr">
                     <a:lnL w="9525" cap="flat" cmpd="sng" algn="ctr">
                       <a:solidFill>
                         <a:srgbClr val="3A3F48"/>
@@ -8655,6 +8648,11 @@
                     </a:solidFill>
                   </a:tcPr>
                 </a:tc>
+                <a:extLst>
+                  <a:ext uri="{0D108BD9-81ED-4DB2-BD59-A6C34878D82A}">
+                    <a16:rowId xmlns:a16="http://schemas.microsoft.com/office/drawing/2014/main" val="10005"/>
+                  </a:ext>
+                </a:extLst>
               </a:tr>
               <a:tr h="420624">
                 <a:tc>
@@ -8662,7 +8660,7 @@
                     <a:bodyPr/>
                     <a:lstStyle/>
                     <a:p>
-                      <a:pPr algn="ctr" indent="0" marL="0">
+                      <a:pPr marL="0" indent="0" algn="ctr">
                         <a:buNone/>
                       </a:pPr>
                       <a:r>
@@ -8683,7 +8681,7 @@
                       </a:endParaRPr>
                     </a:p>
                   </a:txBody>
-                  <a:tcPr marL="91440" marR="91440" marT="45720" marB="45720" anchor="ctr">
+                  <a:tcPr anchor="ctr">
                     <a:lnL w="9525" cap="flat" cmpd="sng" algn="ctr">
                       <a:solidFill>
                         <a:srgbClr val="3A3F48"/>
@@ -8730,7 +8728,7 @@
                     <a:bodyPr/>
                     <a:lstStyle/>
                     <a:p>
-                      <a:pPr indent="0" marL="0">
+                      <a:pPr marL="0" indent="0">
                         <a:buNone/>
                       </a:pPr>
                       <a:r>
@@ -8751,7 +8749,7 @@
                       </a:endParaRPr>
                     </a:p>
                   </a:txBody>
-                  <a:tcPr marL="91440" marR="91440" marT="45720" marB="45720" anchor="ctr">
+                  <a:tcPr anchor="ctr">
                     <a:lnL w="9525" cap="flat" cmpd="sng" algn="ctr">
                       <a:solidFill>
                         <a:srgbClr val="3A3F48"/>
@@ -8798,7 +8796,7 @@
                     <a:bodyPr/>
                     <a:lstStyle/>
                     <a:p>
-                      <a:pPr indent="0" marL="0">
+                      <a:pPr marL="0" indent="0">
                         <a:buNone/>
                       </a:pPr>
                       <a:r>
@@ -8819,7 +8817,7 @@
                       </a:endParaRPr>
                     </a:p>
                   </a:txBody>
-                  <a:tcPr marL="91440" marR="91440" marT="45720" marB="45720" anchor="ctr">
+                  <a:tcPr anchor="ctr">
                     <a:lnL w="9525" cap="flat" cmpd="sng" algn="ctr">
                       <a:solidFill>
                         <a:srgbClr val="3A3F48"/>
@@ -8866,7 +8864,7 @@
                     <a:bodyPr/>
                     <a:lstStyle/>
                     <a:p>
-                      <a:pPr algn="ctr" indent="0" marL="0">
+                      <a:pPr marL="0" indent="0" algn="ctr">
                         <a:buNone/>
                       </a:pPr>
                       <a:r>
@@ -8887,7 +8885,7 @@
                       </a:endParaRPr>
                     </a:p>
                   </a:txBody>
-                  <a:tcPr marL="91440" marR="91440" marT="45720" marB="45720" anchor="ctr">
+                  <a:tcPr anchor="ctr">
                     <a:lnL w="9525" cap="flat" cmpd="sng" algn="ctr">
                       <a:solidFill>
                         <a:srgbClr val="3A3F48"/>
@@ -8929,6 +8927,11 @@
                     </a:solidFill>
                   </a:tcPr>
                 </a:tc>
+                <a:extLst>
+                  <a:ext uri="{0D108BD9-81ED-4DB2-BD59-A6C34878D82A}">
+                    <a16:rowId xmlns:a16="http://schemas.microsoft.com/office/drawing/2014/main" val="10006"/>
+                  </a:ext>
+                </a:extLst>
               </a:tr>
               <a:tr h="420624">
                 <a:tc>
@@ -8936,7 +8939,7 @@
                     <a:bodyPr/>
                     <a:lstStyle/>
                     <a:p>
-                      <a:pPr algn="ctr" indent="0" marL="0">
+                      <a:pPr marL="0" indent="0" algn="ctr">
                         <a:buNone/>
                       </a:pPr>
                       <a:r>
@@ -8957,7 +8960,7 @@
                       </a:endParaRPr>
                     </a:p>
                   </a:txBody>
-                  <a:tcPr marL="91440" marR="91440" marT="45720" marB="45720" anchor="ctr">
+                  <a:tcPr anchor="ctr">
                     <a:lnL w="9525" cap="flat" cmpd="sng" algn="ctr">
                       <a:solidFill>
                         <a:srgbClr val="3A3F48"/>
@@ -9004,7 +9007,7 @@
                     <a:bodyPr/>
                     <a:lstStyle/>
                     <a:p>
-                      <a:pPr indent="0" marL="0">
+                      <a:pPr marL="0" indent="0">
                         <a:buNone/>
                       </a:pPr>
                       <a:r>
@@ -9025,7 +9028,7 @@
                       </a:endParaRPr>
                     </a:p>
                   </a:txBody>
-                  <a:tcPr marL="91440" marR="91440" marT="45720" marB="45720" anchor="ctr">
+                  <a:tcPr anchor="ctr">
                     <a:lnL w="9525" cap="flat" cmpd="sng" algn="ctr">
                       <a:solidFill>
                         <a:srgbClr val="3A3F48"/>
@@ -9072,7 +9075,7 @@
                     <a:bodyPr/>
                     <a:lstStyle/>
                     <a:p>
-                      <a:pPr indent="0" marL="0">
+                      <a:pPr marL="0" indent="0">
                         <a:buNone/>
                       </a:pPr>
                       <a:r>
@@ -9093,7 +9096,7 @@
                       </a:endParaRPr>
                     </a:p>
                   </a:txBody>
-                  <a:tcPr marL="91440" marR="91440" marT="45720" marB="45720" anchor="ctr">
+                  <a:tcPr anchor="ctr">
                     <a:lnL w="9525" cap="flat" cmpd="sng" algn="ctr">
                       <a:solidFill>
                         <a:srgbClr val="3A3F48"/>
@@ -9140,7 +9143,7 @@
                     <a:bodyPr/>
                     <a:lstStyle/>
                     <a:p>
-                      <a:pPr algn="ctr" indent="0" marL="0">
+                      <a:pPr marL="0" indent="0" algn="ctr">
                         <a:buNone/>
                       </a:pPr>
                       <a:r>
@@ -9161,7 +9164,7 @@
                       </a:endParaRPr>
                     </a:p>
                   </a:txBody>
-                  <a:tcPr marL="91440" marR="91440" marT="45720" marB="45720" anchor="ctr">
+                  <a:tcPr anchor="ctr">
                     <a:lnL w="9525" cap="flat" cmpd="sng" algn="ctr">
                       <a:solidFill>
                         <a:srgbClr val="3A3F48"/>
@@ -9203,6 +9206,11 @@
                     </a:solidFill>
                   </a:tcPr>
                 </a:tc>
+                <a:extLst>
+                  <a:ext uri="{0D108BD9-81ED-4DB2-BD59-A6C34878D82A}">
+                    <a16:rowId xmlns:a16="http://schemas.microsoft.com/office/drawing/2014/main" val="10007"/>
+                  </a:ext>
+                </a:extLst>
               </a:tr>
               <a:tr h="420624">
                 <a:tc>
@@ -9210,7 +9218,7 @@
                     <a:bodyPr/>
                     <a:lstStyle/>
                     <a:p>
-                      <a:pPr algn="ctr" indent="0" marL="0">
+                      <a:pPr marL="0" indent="0" algn="ctr">
                         <a:buNone/>
                       </a:pPr>
                       <a:r>
@@ -9231,7 +9239,7 @@
                       </a:endParaRPr>
                     </a:p>
                   </a:txBody>
-                  <a:tcPr marL="91440" marR="91440" marT="45720" marB="45720" anchor="ctr">
+                  <a:tcPr anchor="ctr">
                     <a:lnL w="9525" cap="flat" cmpd="sng" algn="ctr">
                       <a:solidFill>
                         <a:srgbClr val="3A3F48"/>
@@ -9278,7 +9286,7 @@
                     <a:bodyPr/>
                     <a:lstStyle/>
                     <a:p>
-                      <a:pPr indent="0" marL="0">
+                      <a:pPr marL="0" indent="0">
                         <a:buNone/>
                       </a:pPr>
                       <a:r>
@@ -9299,7 +9307,7 @@
                       </a:endParaRPr>
                     </a:p>
                   </a:txBody>
-                  <a:tcPr marL="91440" marR="91440" marT="45720" marB="45720" anchor="ctr">
+                  <a:tcPr anchor="ctr">
                     <a:lnL w="9525" cap="flat" cmpd="sng" algn="ctr">
                       <a:solidFill>
                         <a:srgbClr val="3A3F48"/>
@@ -9346,7 +9354,7 @@
                     <a:bodyPr/>
                     <a:lstStyle/>
                     <a:p>
-                      <a:pPr indent="0" marL="0">
+                      <a:pPr marL="0" indent="0">
                         <a:buNone/>
                       </a:pPr>
                       <a:r>
@@ -9367,7 +9375,7 @@
                       </a:endParaRPr>
                     </a:p>
                   </a:txBody>
-                  <a:tcPr marL="91440" marR="91440" marT="45720" marB="45720" anchor="ctr">
+                  <a:tcPr anchor="ctr">
                     <a:lnL w="9525" cap="flat" cmpd="sng" algn="ctr">
                       <a:solidFill>
                         <a:srgbClr val="3A3F48"/>
@@ -9414,7 +9422,7 @@
                     <a:bodyPr/>
                     <a:lstStyle/>
                     <a:p>
-                      <a:pPr algn="ctr" indent="0" marL="0">
+                      <a:pPr marL="0" indent="0" algn="ctr">
                         <a:buNone/>
                       </a:pPr>
                       <a:r>
@@ -9435,7 +9443,7 @@
                       </a:endParaRPr>
                     </a:p>
                   </a:txBody>
-                  <a:tcPr marL="91440" marR="91440" marT="45720" marB="45720" anchor="ctr">
+                  <a:tcPr anchor="ctr">
                     <a:lnL w="9525" cap="flat" cmpd="sng" algn="ctr">
                       <a:solidFill>
                         <a:srgbClr val="3A3F48"/>
@@ -9477,6 +9485,11 @@
                     </a:solidFill>
                   </a:tcPr>
                 </a:tc>
+                <a:extLst>
+                  <a:ext uri="{0D108BD9-81ED-4DB2-BD59-A6C34878D82A}">
+                    <a16:rowId xmlns:a16="http://schemas.microsoft.com/office/drawing/2014/main" val="10008"/>
+                  </a:ext>
+                </a:extLst>
               </a:tr>
               <a:tr h="420624">
                 <a:tc>
@@ -9484,7 +9497,7 @@
                     <a:bodyPr/>
                     <a:lstStyle/>
                     <a:p>
-                      <a:pPr algn="ctr" indent="0" marL="0">
+                      <a:pPr marL="0" indent="0" algn="ctr">
                         <a:buNone/>
                       </a:pPr>
                       <a:r>
@@ -9505,7 +9518,7 @@
                       </a:endParaRPr>
                     </a:p>
                   </a:txBody>
-                  <a:tcPr marL="91440" marR="91440" marT="45720" marB="45720" anchor="ctr">
+                  <a:tcPr anchor="ctr">
                     <a:lnL w="9525" cap="flat" cmpd="sng" algn="ctr">
                       <a:solidFill>
                         <a:srgbClr val="3A3F48"/>
@@ -9552,7 +9565,7 @@
                     <a:bodyPr/>
                     <a:lstStyle/>
                     <a:p>
-                      <a:pPr indent="0" marL="0">
+                      <a:pPr marL="0" indent="0">
                         <a:buNone/>
                       </a:pPr>
                       <a:r>
@@ -9573,7 +9586,7 @@
                       </a:endParaRPr>
                     </a:p>
                   </a:txBody>
-                  <a:tcPr marL="91440" marR="91440" marT="45720" marB="45720" anchor="ctr">
+                  <a:tcPr anchor="ctr">
                     <a:lnL w="9525" cap="flat" cmpd="sng" algn="ctr">
                       <a:solidFill>
                         <a:srgbClr val="3A3F48"/>
@@ -9620,7 +9633,7 @@
                     <a:bodyPr/>
                     <a:lstStyle/>
                     <a:p>
-                      <a:pPr indent="0" marL="0">
+                      <a:pPr marL="0" indent="0">
                         <a:buNone/>
                       </a:pPr>
                       <a:r>
@@ -9641,7 +9654,7 @@
                       </a:endParaRPr>
                     </a:p>
                   </a:txBody>
-                  <a:tcPr marL="91440" marR="91440" marT="45720" marB="45720" anchor="ctr">
+                  <a:tcPr anchor="ctr">
                     <a:lnL w="9525" cap="flat" cmpd="sng" algn="ctr">
                       <a:solidFill>
                         <a:srgbClr val="3A3F48"/>
@@ -9688,7 +9701,7 @@
                     <a:bodyPr/>
                     <a:lstStyle/>
                     <a:p>
-                      <a:pPr algn="ctr" indent="0" marL="0">
+                      <a:pPr marL="0" indent="0" algn="ctr">
                         <a:buNone/>
                       </a:pPr>
                       <a:r>
@@ -9709,7 +9722,7 @@
                       </a:endParaRPr>
                     </a:p>
                   </a:txBody>
-                  <a:tcPr marL="91440" marR="91440" marT="45720" marB="45720" anchor="ctr">
+                  <a:tcPr anchor="ctr">
                     <a:lnL w="9525" cap="flat" cmpd="sng" algn="ctr">
                       <a:solidFill>
                         <a:srgbClr val="3A3F48"/>
@@ -9751,141 +9764,16 @@
                     </a:solidFill>
                   </a:tcPr>
                 </a:tc>
+                <a:extLst>
+                  <a:ext uri="{0D108BD9-81ED-4DB2-BD59-A6C34878D82A}">
+                    <a16:rowId xmlns:a16="http://schemas.microsoft.com/office/drawing/2014/main" val="10009"/>
+                  </a:ext>
+                </a:extLst>
               </a:tr>
             </a:tbl>
           </a:graphicData>
         </a:graphic>
       </p:graphicFrame>
-      <p:sp>
-        <p:nvSpPr>
-          <p:cNvPr id="4" name="lg-1-bg"/>
-          <p:cNvSpPr/>
-          <p:nvPr/>
-        </p:nvSpPr>
-        <p:spPr>
-          <a:xfrm>
-            <a:off x="548640" y="5943600"/>
-            <a:ext cx="1463040" cy="310896"/>
-          </a:xfrm>
-          <a:prstGeom prst="roundRect">
-            <a:avLst>
-              <a:gd name="adj" fmla="val 14706"/>
-            </a:avLst>
-          </a:prstGeom>
-          <a:solidFill>
-            <a:schemeClr val="accent6">
-              <a:alpha val="20000"/>
-            </a:schemeClr>
-          </a:solidFill>
-          <a:ln w="12700">
-            <a:solidFill>
-              <a:schemeClr val="accent6"/>
-            </a:solidFill>
-            <a:prstDash val="solid"/>
-          </a:ln>
-        </p:spPr>
-      </p:sp>
-      <p:sp>
-        <p:nvSpPr>
-          <p:cNvPr id="5" name="lg-1"/>
-          <p:cNvSpPr txBox="1"/>
-          <p:nvPr/>
-        </p:nvSpPr>
-        <p:spPr>
-          <a:xfrm>
-            <a:off x="548640" y="5943600"/>
-            <a:ext cx="1463040" cy="310896"/>
-          </a:xfrm>
-          <a:prstGeom prst="rect">
-            <a:avLst/>
-          </a:prstGeom>
-          <a:noFill/>
-          <a:ln/>
-        </p:spPr>
-        <p:txBody>
-          <a:bodyPr wrap="square" lIns="0" tIns="0" rIns="0" bIns="0" rtlCol="0" anchor="ctr"/>
-          <a:lstStyle/>
-          <a:p>
-            <a:pPr algn="ctr" indent="0" marL="0">
-              <a:buNone/>
-            </a:pPr>
-            <a:r>
-              <a:rPr lang="en-US" sz="1300" b="1" dirty="0">
-                <a:solidFill>
-                  <a:schemeClr val="accent6"/>
-                </a:solidFill>
-              </a:rPr>
-              <a:t>확인 = 데이터</a:t>
-            </a:r>
-            <a:endParaRPr lang="en-US" sz="1300" dirty="0"/>
-          </a:p>
-        </p:txBody>
-      </p:sp>
-      <p:sp>
-        <p:nvSpPr>
-          <p:cNvPr id="6" name="lg-2-bg"/>
-          <p:cNvSpPr/>
-          <p:nvPr/>
-        </p:nvSpPr>
-        <p:spPr>
-          <a:xfrm>
-            <a:off x="2148840" y="5943600"/>
-            <a:ext cx="1463040" cy="310896"/>
-          </a:xfrm>
-          <a:prstGeom prst="roundRect">
-            <a:avLst>
-              <a:gd name="adj" fmla="val 14706"/>
-            </a:avLst>
-          </a:prstGeom>
-          <a:solidFill>
-            <a:schemeClr val="accent3">
-              <a:alpha val="20000"/>
-            </a:schemeClr>
-          </a:solidFill>
-          <a:ln w="12700">
-            <a:solidFill>
-              <a:schemeClr val="accent3"/>
-            </a:solidFill>
-            <a:prstDash val="solid"/>
-          </a:ln>
-        </p:spPr>
-      </p:sp>
-      <p:sp>
-        <p:nvSpPr>
-          <p:cNvPr id="7" name="lg-2"/>
-          <p:cNvSpPr txBox="1"/>
-          <p:nvPr/>
-        </p:nvSpPr>
-        <p:spPr>
-          <a:xfrm>
-            <a:off x="2148840" y="5943600"/>
-            <a:ext cx="1463040" cy="310896"/>
-          </a:xfrm>
-          <a:prstGeom prst="rect">
-            <a:avLst/>
-          </a:prstGeom>
-          <a:noFill/>
-          <a:ln/>
-        </p:spPr>
-        <p:txBody>
-          <a:bodyPr wrap="square" lIns="0" tIns="0" rIns="0" bIns="0" rtlCol="0" anchor="ctr"/>
-          <a:lstStyle/>
-          <a:p>
-            <a:pPr algn="ctr" indent="0" marL="0">
-              <a:buNone/>
-            </a:pPr>
-            <a:r>
-              <a:rPr lang="en-US" sz="1300" b="1" dirty="0">
-                <a:solidFill>
-                  <a:schemeClr val="accent3"/>
-                </a:solidFill>
-              </a:rPr>
-              <a:t>추정 = 정황</a:t>
-            </a:r>
-            <a:endParaRPr lang="en-US" sz="1300" dirty="0"/>
-          </a:p>
-        </p:txBody>
-      </p:sp>
       <p:sp>
         <p:nvSpPr>
           <p:cNvPr id="25" name="Slide Number Placeholder 0"/>
@@ -9906,7 +9794,7 @@
           </a:prstGeom>
           <a:extLst>
             <a:ext uri="{C572A759-6A51-4108-AA02-DFA0A04FC94B}">
-              <ma14:wrappingTextBoxFlag xmlns:ma14="http://schemas.microsoft.com/office/mac/drawingml/2011/main" val="0"/>
+              <ma14:wrappingTextBoxFlag xmlns="" xmlns:ma14="http://schemas.microsoft.com/office/mac/drawingml/2011/main" val="0"/>
             </a:ext>
           </a:extLst>
         </p:spPr>
@@ -9924,7 +9812,7 @@
           <a:p>
             <a:pPr algn="r"/>
             <a:fld id="{F7021451-1387-4CA6-816F-3879F97B5CBC}" type="slidenum">
-              <a:rPr b="0" lang="en-US"/>
+              <a:rPr lang="en-US" b="0"/>
               <a:t>12</a:t>
             </a:fld>
             <a:endParaRPr lang="en-US"/>
@@ -9959,9 +9847,11 @@
       <p:sp>
         <p:nvSpPr>
           <p:cNvPr id="2" name="Text 0"/>
-          <p:cNvSpPr/>
+          <p:cNvSpPr>
+            <a:spLocks noGrp="1"/>
+          </p:cNvSpPr>
           <p:nvPr>
-            <p:ph idx="100" type="title" hasCustomPrompt="1"/>
+            <p:ph type="title" idx="100" hasCustomPrompt="1"/>
           </p:nvPr>
         </p:nvSpPr>
         <p:spPr>
@@ -9979,7 +9869,7 @@
           <a:bodyPr wrap="square" lIns="0" tIns="0" rIns="0" bIns="0" rtlCol="0" anchor="ctr"/>
           <a:lstStyle/>
           <a:p>
-            <a:pPr algn="l" indent="0" marL="0">
+            <a:pPr marL="0" indent="0" algn="l">
               <a:buNone/>
             </a:pPr>
             <a:r>
@@ -10037,7 +9927,7 @@
           <a:bodyPr wrap="square" lIns="0" tIns="0" rIns="0" bIns="0" rtlCol="0" anchor="ctr"/>
           <a:lstStyle/>
           <a:p>
-            <a:pPr indent="0" marL="0">
+            <a:pPr marL="0" indent="0">
               <a:buNone/>
             </a:pPr>
             <a:r>
@@ -10073,7 +9963,7 @@
           <a:bodyPr wrap="square" lIns="0" tIns="0" rIns="0" bIns="0" rtlCol="0" anchor="ctr"/>
           <a:lstStyle/>
           <a:p>
-            <a:pPr indent="0" marL="0">
+            <a:pPr marL="0" indent="0">
               <a:buNone/>
             </a:pPr>
             <a:r>
@@ -10131,7 +10021,7 @@
           <a:bodyPr wrap="square" lIns="0" tIns="0" rIns="0" bIns="0" rtlCol="0" anchor="ctr"/>
           <a:lstStyle/>
           <a:p>
-            <a:pPr indent="0" marL="0">
+            <a:pPr marL="0" indent="0">
               <a:buNone/>
             </a:pPr>
             <a:r>
@@ -10167,7 +10057,7 @@
           <a:bodyPr wrap="square" lIns="0" tIns="0" rIns="0" bIns="0" rtlCol="0" anchor="ctr"/>
           <a:lstStyle/>
           <a:p>
-            <a:pPr indent="0" marL="0">
+            <a:pPr marL="0" indent="0">
               <a:buNone/>
             </a:pPr>
             <a:r>
@@ -10225,7 +10115,7 @@
           <a:bodyPr wrap="square" lIns="0" tIns="0" rIns="0" bIns="0" rtlCol="0" anchor="ctr"/>
           <a:lstStyle/>
           <a:p>
-            <a:pPr indent="0" marL="0">
+            <a:pPr marL="0" indent="0">
               <a:buNone/>
             </a:pPr>
             <a:r>
@@ -10261,7 +10151,7 @@
           <a:bodyPr wrap="square" lIns="0" tIns="0" rIns="0" bIns="0" rtlCol="0" anchor="ctr"/>
           <a:lstStyle/>
           <a:p>
-            <a:pPr indent="0" marL="0">
+            <a:pPr marL="0" indent="0">
               <a:buNone/>
             </a:pPr>
             <a:r>
@@ -10319,7 +10209,7 @@
           <a:bodyPr wrap="square" lIns="0" tIns="0" rIns="0" bIns="0" rtlCol="0" anchor="ctr"/>
           <a:lstStyle/>
           <a:p>
-            <a:pPr indent="0" marL="0">
+            <a:pPr marL="0" indent="0">
               <a:buNone/>
             </a:pPr>
             <a:r>
@@ -10355,7 +10245,7 @@
           <a:bodyPr wrap="square" lIns="0" tIns="0" rIns="0" bIns="0" rtlCol="0" anchor="ctr"/>
           <a:lstStyle/>
           <a:p>
-            <a:pPr indent="0" marL="0">
+            <a:pPr marL="0" indent="0">
               <a:buNone/>
             </a:pPr>
             <a:r>
@@ -10390,7 +10280,7 @@
           </a:prstGeom>
           <a:extLst>
             <a:ext uri="{C572A759-6A51-4108-AA02-DFA0A04FC94B}">
-              <ma14:wrappingTextBoxFlag xmlns:ma14="http://schemas.microsoft.com/office/mac/drawingml/2011/main" val="0"/>
+              <ma14:wrappingTextBoxFlag xmlns="" xmlns:ma14="http://schemas.microsoft.com/office/mac/drawingml/2011/main" val="0"/>
             </a:ext>
           </a:extLst>
         </p:spPr>
@@ -10408,7 +10298,7 @@
           <a:p>
             <a:pPr algn="r"/>
             <a:fld id="{F7021451-1387-4CA6-816F-3879F97B5CBC}" type="slidenum">
-              <a:rPr b="0" lang="en-US"/>
+              <a:rPr lang="en-US" b="0"/>
               <a:t>13</a:t>
             </a:fld>
             <a:endParaRPr lang="en-US"/>
@@ -10443,9 +10333,11 @@
       <p:sp>
         <p:nvSpPr>
           <p:cNvPr id="2" name="Text 0"/>
-          <p:cNvSpPr/>
+          <p:cNvSpPr>
+            <a:spLocks noGrp="1"/>
+          </p:cNvSpPr>
           <p:nvPr>
-            <p:ph idx="100" type="title" hasCustomPrompt="1"/>
+            <p:ph type="title" idx="100" hasCustomPrompt="1"/>
           </p:nvPr>
         </p:nvSpPr>
         <p:spPr>
@@ -10463,7 +10355,7 @@
           <a:bodyPr wrap="square" lIns="0" tIns="0" rIns="0" bIns="0" rtlCol="0" anchor="ctr"/>
           <a:lstStyle/>
           <a:p>
-            <a:pPr algn="l" indent="0" marL="0">
+            <a:pPr marL="0" indent="0" algn="l">
               <a:buNone/>
             </a:pPr>
             <a:r>
@@ -10480,14 +10372,14 @@
       </p:sp>
       <p:pic>
         <p:nvPicPr>
-          <p:cNvPr id="3" name="dashboard" descr="C:\Users\user\_se4nchoi\batteryvision\docs\submission\build\img\dashboard.jpg">    </p:cNvPr>
+          <p:cNvPr id="3" name="dashboard" descr="C:\Users\user\_se4nchoi\batteryvision\docs\submission\build\img\dashboard.jpg"/>
           <p:cNvPicPr>
             <a:picLocks noChangeAspect="1"/>
           </p:cNvPicPr>
           <p:nvPr/>
         </p:nvPicPr>
         <p:blipFill>
-          <a:blip r:embed="rId1"/>
+          <a:blip r:embed="rId3"/>
           <a:stretch>
             <a:fillRect/>
           </a:stretch>
@@ -10545,7 +10437,7 @@
           <a:bodyPr wrap="square" lIns="0" tIns="0" rIns="0" bIns="0" rtlCol="0" anchor="t"/>
           <a:lstStyle/>
           <a:p>
-            <a:pPr indent="0" marL="0">
+            <a:pPr marL="0" indent="0">
               <a:spcAft>
                 <a:spcPts val="1000"/>
               </a:spcAft>
@@ -10637,7 +10529,7 @@
           </a:prstGeom>
           <a:extLst>
             <a:ext uri="{C572A759-6A51-4108-AA02-DFA0A04FC94B}">
-              <ma14:wrappingTextBoxFlag xmlns:ma14="http://schemas.microsoft.com/office/mac/drawingml/2011/main" val="0"/>
+              <ma14:wrappingTextBoxFlag xmlns="" xmlns:ma14="http://schemas.microsoft.com/office/mac/drawingml/2011/main" val="0"/>
             </a:ext>
           </a:extLst>
         </p:spPr>
@@ -10655,7 +10547,7 @@
           <a:p>
             <a:pPr algn="r"/>
             <a:fld id="{F7021451-1387-4CA6-816F-3879F97B5CBC}" type="slidenum">
-              <a:rPr b="0" lang="en-US"/>
+              <a:rPr lang="en-US" b="0"/>
               <a:t>14</a:t>
             </a:fld>
             <a:endParaRPr lang="en-US"/>
@@ -10690,9 +10582,11 @@
       <p:sp>
         <p:nvSpPr>
           <p:cNvPr id="2" name="Text 0"/>
-          <p:cNvSpPr/>
+          <p:cNvSpPr>
+            <a:spLocks noGrp="1"/>
+          </p:cNvSpPr>
           <p:nvPr>
-            <p:ph idx="100" type="title" hasCustomPrompt="1"/>
+            